--- a/5g-thesis-presentation-5min/tesi-5min.pptx
+++ b/5g-thesis-presentation-5min/tesi-5min.pptx
@@ -2,19 +2,19 @@
 <file path=ppt/presentation.xml><?xml version="1.0" encoding="utf-8"?>
 <p:presentation xmlns:p="http://schemas.openxmlformats.org/presentationml/2006/main">
   <p:sldMasterIdLst>
-    <p:sldMasterId xmlns:r="http://schemas.openxmlformats.org/officeDocument/2006/relationships" id="2147483648" r:id="R52e9ca4f70764bd5"/>
+    <p:sldMasterId xmlns:r="http://schemas.openxmlformats.org/officeDocument/2006/relationships" id="2147483648" r:id="R80cf21671cd44624"/>
   </p:sldMasterIdLst>
   <p:notesMasterIdLst>
-    <p:notesMasterId xmlns:r="http://schemas.openxmlformats.org/officeDocument/2006/relationships" r:id="Rceb9d975aef749d4"/>
+    <p:notesMasterId xmlns:r="http://schemas.openxmlformats.org/officeDocument/2006/relationships" r:id="R659b8a306d184e8c"/>
   </p:notesMasterIdLst>
   <p:sldIdLst>
-    <p:sldId xmlns:r="http://schemas.openxmlformats.org/officeDocument/2006/relationships" id="256" r:id="Rf614b7ef7edb4059"/>
-    <p:sldId xmlns:r="http://schemas.openxmlformats.org/officeDocument/2006/relationships" id="257" r:id="Rb20603f01be447ea"/>
-    <p:sldId xmlns:r="http://schemas.openxmlformats.org/officeDocument/2006/relationships" id="258" r:id="Rc59f0ba004334deb"/>
-    <p:sldId xmlns:r="http://schemas.openxmlformats.org/officeDocument/2006/relationships" id="259" r:id="R04297d2bb3734e3a"/>
-    <p:sldId xmlns:r="http://schemas.openxmlformats.org/officeDocument/2006/relationships" id="260" r:id="Rac0a07b208d0407d"/>
-    <p:sldId xmlns:r="http://schemas.openxmlformats.org/officeDocument/2006/relationships" id="261" r:id="Re95fae6db0494609"/>
-    <p:sldId xmlns:r="http://schemas.openxmlformats.org/officeDocument/2006/relationships" id="262" r:id="R87a4de1107454c94"/>
+    <p:sldId xmlns:r="http://schemas.openxmlformats.org/officeDocument/2006/relationships" id="256" r:id="R6210616209054da0"/>
+    <p:sldId xmlns:r="http://schemas.openxmlformats.org/officeDocument/2006/relationships" id="257" r:id="R96a57d218a5c4c94"/>
+    <p:sldId xmlns:r="http://schemas.openxmlformats.org/officeDocument/2006/relationships" id="258" r:id="R1a39a0a546154fde"/>
+    <p:sldId xmlns:r="http://schemas.openxmlformats.org/officeDocument/2006/relationships" id="259" r:id="R748575252bb941c8"/>
+    <p:sldId xmlns:r="http://schemas.openxmlformats.org/officeDocument/2006/relationships" id="260" r:id="Rc4e7bf3fe5474bab"/>
+    <p:sldId xmlns:r="http://schemas.openxmlformats.org/officeDocument/2006/relationships" id="261" r:id="R16e35591b91349d4"/>
+    <p:sldId xmlns:r="http://schemas.openxmlformats.org/officeDocument/2006/relationships" id="262" r:id="R92132328ce3c4e7c"/>
   </p:sldIdLst>
   <p:sldSz cx="15240000" cy="8572500"/>
   <p:notesSz cx="6858000" cy="9144000"/>
@@ -953,7 +953,7 @@
           <a:lstStyle xmlns:a="http://schemas.openxmlformats.org/drawingml/2006/main"/>
           <a:p xmlns:a="http://schemas.openxmlformats.org/drawingml/2006/main">
             <a:r>
-              <a:t>Ho valutato il sistema su 16 catture provenienti da Open5GS e free5GC, prodotte da esecuzioni separate dal verificatore. La tabella raggruppa i casi. I 16 verdetti sono coerenti con gli esiti attesi: 12 PASS, un FAIL e tre INCONCLUSIVE. Il FAIL NRF segnala HTTP 200 dove il criterio richiede 403; gli INCONCLUSIVE indicano evidenze insufficienti. Il 16/16 non significa quindi che tutte le verifiche abbiano restituito PASS. Per NRF e UDM sono stati adattati componenti di ScasDK: non attribuisco tutte le catture allo stesso strumento.</a:t>
+              <a:t>Ho valutato il sistema su 16 catture provenienti da Open5GS e free5GC, prodotte da esecuzioni separate dal verificatore. La tabella raggruppa i casi. I 16 verdetti sono coerenti con gli esiti attesi: 12 PASS, un FAIL e tre INCONCLUSIVE. Il FAIL NRF segnala HTTP 200 dove il criterio richiede 403; gli INCONCLUSIVE indicano evidenze insufficienti. Il 16/16 non significa quindi che tutte le verifiche abbiano restituito PASS. Le catture sono state ottenute tramite lo strumento esterno SCASDK, come precisato dall’autore. Per NRF e UDM sono stati adattati alcuni componenti.</a:t>
             </a:r>
           </a:p>
           <a:p xmlns:a="http://schemas.openxmlformats.org/drawingml/2006/main">
@@ -1053,7 +1053,7 @@
           <a:lstStyle xmlns:a="http://schemas.openxmlformats.org/drawingml/2006/main"/>
           <a:p xmlns:a="http://schemas.openxmlformats.org/drawingml/2006/main">
             <a:r>
-              <a:t>Per valutare la sensibilità del sistema ho introdotto modifiche controllate nelle catture. Il mutatore è separato dalla pipeline: riceve la PCAP originale e le evidenze del report baseline, individua i dati da modificare e produce la PCAP mutata. Questa torna nello stesso sistema di verifica, con la stessa DSL. Il confronto dei risultati deve corrispondere alla modifica introdotta. Nei 13 scenari completati ho ottenuto tutti i verdetti attesi. Due ulteriori scenari AMF Case B temporali e combinati non sono stati completati per limiti del mutatore, non per due errori del verificatore.</a:t>
+              <a:t>Per valutare la sensibilità del sistema ho introdotto modifiche controllate nelle catture. Il mutatore è separato dalla pipeline: riceve la PCAP originale e le evidenze del report baseline, individua i dati da modificare e produce la PCAP mutata. Questa torna nello stesso sistema di verifica, con la stessa DSL. Il confronto dei risultati deve corrispondere alla modifica introdotta. Nei 13 scenari completati ho ottenuto tutti i verdetti attesi. Gli esempi mostrano il cambio di stato NRF da HTTP 200 a 403, la violazione dell’intervallo temporale nel caso AMF A e la rimozione degli F-TEID disponibili per la verifica UPF. In quest’ultimo esperimento sono state rimosse le risposte PFCP rilevanti, producendo INCONCLUSIVE.</a:t>
             </a:r>
           </a:p>
           <a:p xmlns:a="http://schemas.openxmlformats.org/drawingml/2006/main">
@@ -1135,7 +1135,7 @@
           <p:cNvPr id="3" name="Title">
             <a:extLst xmlns:a="http://schemas.openxmlformats.org/drawingml/2006/main">
               <a:ext uri="{FF2B5EF4-FFF2-40B4-BE49-F238E27FC236}">
-                <a16:creationId xmlns:a16="http://schemas.microsoft.com/office/drawing/2014/main" id="{03722736-EEED-4EEC-A51D-2A37E07D1496}"/>
+                <a16:creationId xmlns:a16="http://schemas.microsoft.com/office/drawing/2014/main" id="{1AE19461-A117-4DC6-A5FF-DD5A3ABFFA65}"/>
               </a:ext>
             </a:extLst>
           </p:cNvPr>
@@ -1364,7 +1364,7 @@
           <p:cNvPr id="2" name="Subtitle">
             <a:extLst xmlns:a="http://schemas.openxmlformats.org/drawingml/2006/main">
               <a:ext uri="{FF2B5EF4-FFF2-40B4-BE49-F238E27FC236}">
-                <a16:creationId xmlns:a16="http://schemas.microsoft.com/office/drawing/2014/main" id="{118A8524-0C0A-457B-BCDC-44B91AB2DC88}"/>
+                <a16:creationId xmlns:a16="http://schemas.microsoft.com/office/drawing/2014/main" id="{80727218-80BC-4208-A877-9FBB25CB9987}"/>
               </a:ext>
             </a:extLst>
           </p:cNvPr>
@@ -1610,7 +1610,7 @@
           <p:cNvPr id="2" name="Section title">
             <a:extLst xmlns:a="http://schemas.openxmlformats.org/drawingml/2006/main">
               <a:ext uri="{FF2B5EF4-FFF2-40B4-BE49-F238E27FC236}">
-                <a16:creationId xmlns:a16="http://schemas.microsoft.com/office/drawing/2014/main" id="{B3C6F9FE-A5F7-4BAC-BE39-D53260E17F24}"/>
+                <a16:creationId xmlns:a16="http://schemas.microsoft.com/office/drawing/2014/main" id="{4ABE00F9-847A-43C8-90ED-D50306A6D0A1}"/>
               </a:ext>
             </a:extLst>
           </p:cNvPr>
@@ -1856,7 +1856,7 @@
           <p:cNvPr id="3" name="Title">
             <a:extLst xmlns:a="http://schemas.openxmlformats.org/drawingml/2006/main">
               <a:ext uri="{FF2B5EF4-FFF2-40B4-BE49-F238E27FC236}">
-                <a16:creationId xmlns:a16="http://schemas.microsoft.com/office/drawing/2014/main" id="{B9D68FCB-AAC9-4488-A35D-5F0C07FCD974}"/>
+                <a16:creationId xmlns:a16="http://schemas.microsoft.com/office/drawing/2014/main" id="{BB42B491-F6E0-4138-980E-DECE15C83348}"/>
               </a:ext>
             </a:extLst>
           </p:cNvPr>
@@ -2085,7 +2085,7 @@
           <p:cNvPr id="2" name="Body">
             <a:extLst xmlns:a="http://schemas.openxmlformats.org/drawingml/2006/main">
               <a:ext uri="{FF2B5EF4-FFF2-40B4-BE49-F238E27FC236}">
-                <a16:creationId xmlns:a16="http://schemas.microsoft.com/office/drawing/2014/main" id="{C022A9CB-861B-44D5-9963-DEBA1C9CF996}"/>
+                <a16:creationId xmlns:a16="http://schemas.microsoft.com/office/drawing/2014/main" id="{2F8052CF-8FEA-4741-AA0E-F97AA6E7ACDF}"/>
               </a:ext>
             </a:extLst>
           </p:cNvPr>
@@ -2331,7 +2331,7 @@
           <p:cNvPr id="4" name="Title">
             <a:extLst xmlns:a="http://schemas.openxmlformats.org/drawingml/2006/main">
               <a:ext uri="{FF2B5EF4-FFF2-40B4-BE49-F238E27FC236}">
-                <a16:creationId xmlns:a16="http://schemas.microsoft.com/office/drawing/2014/main" id="{22C51EEA-B12B-47A3-B8FA-F43E872493CF}"/>
+                <a16:creationId xmlns:a16="http://schemas.microsoft.com/office/drawing/2014/main" id="{374318F1-19BE-412A-A3DD-ED1B35BFCA90}"/>
               </a:ext>
             </a:extLst>
           </p:cNvPr>
@@ -2560,7 +2560,7 @@
           <p:cNvPr id="2" name="Left column">
             <a:extLst xmlns:a="http://schemas.openxmlformats.org/drawingml/2006/main">
               <a:ext uri="{FF2B5EF4-FFF2-40B4-BE49-F238E27FC236}">
-                <a16:creationId xmlns:a16="http://schemas.microsoft.com/office/drawing/2014/main" id="{D82E7194-CC55-45BF-AED1-FF8F2B72473A}"/>
+                <a16:creationId xmlns:a16="http://schemas.microsoft.com/office/drawing/2014/main" id="{16EE950B-A0C3-4F18-90F2-4628539F57F2}"/>
               </a:ext>
             </a:extLst>
           </p:cNvPr>
@@ -2789,7 +2789,7 @@
           <p:cNvPr id="3" name="Right column">
             <a:extLst xmlns:a="http://schemas.openxmlformats.org/drawingml/2006/main">
               <a:ext uri="{FF2B5EF4-FFF2-40B4-BE49-F238E27FC236}">
-                <a16:creationId xmlns:a16="http://schemas.microsoft.com/office/drawing/2014/main" id="{8EE90321-EF62-4246-AC4D-E062ED773104}"/>
+                <a16:creationId xmlns:a16="http://schemas.microsoft.com/office/drawing/2014/main" id="{3AAA54DA-5A4E-436E-9121-B6E815262952}"/>
               </a:ext>
             </a:extLst>
           </p:cNvPr>
@@ -3035,7 +3035,7 @@
           <p:cNvPr id="3" name="Title">
             <a:extLst xmlns:a="http://schemas.openxmlformats.org/drawingml/2006/main">
               <a:ext uri="{FF2B5EF4-FFF2-40B4-BE49-F238E27FC236}">
-                <a16:creationId xmlns:a16="http://schemas.microsoft.com/office/drawing/2014/main" id="{A826A713-A1D3-4B47-A826-B48DAA16FCD3}"/>
+                <a16:creationId xmlns:a16="http://schemas.microsoft.com/office/drawing/2014/main" id="{4AF2CC00-ECE1-4C3B-86E2-EB4181064DE2}"/>
               </a:ext>
             </a:extLst>
           </p:cNvPr>
@@ -3264,7 +3264,7 @@
           <p:cNvPr id="2" name="Left column">
             <a:extLst xmlns:a="http://schemas.openxmlformats.org/drawingml/2006/main">
               <a:ext uri="{FF2B5EF4-FFF2-40B4-BE49-F238E27FC236}">
-                <a16:creationId xmlns:a16="http://schemas.microsoft.com/office/drawing/2014/main" id="{7140243A-AE53-47DC-80B4-55271632903C}"/>
+                <a16:creationId xmlns:a16="http://schemas.microsoft.com/office/drawing/2014/main" id="{CE23BF05-6EB1-4717-840F-C7CEE80069C9}"/>
               </a:ext>
             </a:extLst>
           </p:cNvPr>
@@ -3531,12 +3531,12 @@
   </p:cSld>
   <p:clrMap bg1="lt1" tx1="dk1" bg2="lt2" tx2="dk2" accent1="accent1" accent2="accent2" accent3="accent3" accent4="accent4" accent5="accent5" accent6="accent6" hlink="hlink" folHlink="folHlink"/>
   <p:sldLayoutIdLst>
-    <p:sldLayoutId xmlns:r="http://schemas.openxmlformats.org/officeDocument/2006/relationships" id="2147483649" r:id="Re6441f9498574fd9"/>
-    <p:sldLayoutId xmlns:r="http://schemas.openxmlformats.org/officeDocument/2006/relationships" id="2147483650" r:id="R0213b59a4a154fe8"/>
-    <p:sldLayoutId xmlns:r="http://schemas.openxmlformats.org/officeDocument/2006/relationships" id="2147483651" r:id="R9f89ab5fd14448ab"/>
-    <p:sldLayoutId xmlns:r="http://schemas.openxmlformats.org/officeDocument/2006/relationships" id="2147483652" r:id="R061d0240fb494f65"/>
-    <p:sldLayoutId xmlns:r="http://schemas.openxmlformats.org/officeDocument/2006/relationships" id="2147483653" r:id="R7a832e43565a49da"/>
-    <p:sldLayoutId xmlns:r="http://schemas.openxmlformats.org/officeDocument/2006/relationships" id="2147483654" r:id="R55a998d74ad24449"/>
+    <p:sldLayoutId xmlns:r="http://schemas.openxmlformats.org/officeDocument/2006/relationships" id="2147483649" r:id="Rf2be5cc1007f48e2"/>
+    <p:sldLayoutId xmlns:r="http://schemas.openxmlformats.org/officeDocument/2006/relationships" id="2147483650" r:id="R584098cfd90d4ed9"/>
+    <p:sldLayoutId xmlns:r="http://schemas.openxmlformats.org/officeDocument/2006/relationships" id="2147483651" r:id="Rd3778842d8f3490a"/>
+    <p:sldLayoutId xmlns:r="http://schemas.openxmlformats.org/officeDocument/2006/relationships" id="2147483652" r:id="Rd39382694cdc459b"/>
+    <p:sldLayoutId xmlns:r="http://schemas.openxmlformats.org/officeDocument/2006/relationships" id="2147483653" r:id="R544dec52237d4e48"/>
+    <p:sldLayoutId xmlns:r="http://schemas.openxmlformats.org/officeDocument/2006/relationships" id="2147483654" r:id="R78c41e214e32470d"/>
   </p:sldLayoutIdLst>
   <p:txStyles>
     <p:titleStyle>
@@ -4087,7 +4087,7 @@
           <p:cNvPr id="21" name="">
             <a:extLst xmlns:a="http://schemas.openxmlformats.org/drawingml/2006/main">
               <a:ext uri="{FF2B5EF4-FFF2-40B4-BE49-F238E27FC236}">
-                <a16:creationId xmlns:a16="http://schemas.microsoft.com/office/drawing/2014/main" id="{754ACF57-7E93-40D7-83A0-9D0C45F59D81}"/>
+                <a16:creationId xmlns:a16="http://schemas.microsoft.com/office/drawing/2014/main" id="{8DB178DF-EF34-4DED-8CC4-D6752DC93171}"/>
               </a:ext>
             </a:extLst>
           </p:cNvPr>
@@ -4097,7 +4097,7 @@
           <p:nvPr/>
         </p:nvPicPr>
         <p:blipFill>
-          <a:blip xmlns:r="http://schemas.openxmlformats.org/officeDocument/2006/relationships" xmlns:a="http://schemas.openxmlformats.org/drawingml/2006/main" r:embed="R16bedfac847d47bf"/>
+          <a:blip xmlns:r="http://schemas.openxmlformats.org/officeDocument/2006/relationships" xmlns:a="http://schemas.openxmlformats.org/drawingml/2006/main" r:embed="Raab560721f8f464d"/>
           <a:stretch xmlns:a="http://schemas.openxmlformats.org/drawingml/2006/main"/>
         </p:blipFill>
         <p:spPr>
@@ -4115,7 +4115,7 @@
           <p:cNvPr id="2" name="f2">
             <a:extLst xmlns:a="http://schemas.openxmlformats.org/drawingml/2006/main">
               <a:ext uri="{FF2B5EF4-FFF2-40B4-BE49-F238E27FC236}">
-                <a16:creationId xmlns:a16="http://schemas.microsoft.com/office/drawing/2014/main" id="{CC26710B-5AD9-419C-B2CD-8FE0E45F45EA}"/>
+                <a16:creationId xmlns:a16="http://schemas.microsoft.com/office/drawing/2014/main" id="{014BBE0D-3AE1-4088-B58E-4503D8AC02F0}"/>
               </a:ext>
             </a:extLst>
           </p:cNvPr>
@@ -4274,7 +4274,7 @@
           <p:cNvPr id="3" name="f3">
             <a:extLst xmlns:a="http://schemas.openxmlformats.org/drawingml/2006/main">
               <a:ext uri="{FF2B5EF4-FFF2-40B4-BE49-F238E27FC236}">
-                <a16:creationId xmlns:a16="http://schemas.microsoft.com/office/drawing/2014/main" id="{36D2EB99-4602-4053-B9BE-4617ECCFBFBD}"/>
+                <a16:creationId xmlns:a16="http://schemas.microsoft.com/office/drawing/2014/main" id="{FC067032-F351-4DBA-AD16-89A3D7AD0732}"/>
               </a:ext>
             </a:extLst>
           </p:cNvPr>
@@ -4433,7 +4433,7 @@
           <p:cNvPr id="4" name="f4">
             <a:extLst xmlns:a="http://schemas.openxmlformats.org/drawingml/2006/main">
               <a:ext uri="{FF2B5EF4-FFF2-40B4-BE49-F238E27FC236}">
-                <a16:creationId xmlns:a16="http://schemas.microsoft.com/office/drawing/2014/main" id="{D1E9084C-7C59-4044-B7F8-78356981EDC1}"/>
+                <a16:creationId xmlns:a16="http://schemas.microsoft.com/office/drawing/2014/main" id="{85C0B302-0CA2-40B8-B89D-53B4A91D7EDE}"/>
               </a:ext>
             </a:extLst>
           </p:cNvPr>
@@ -4592,7 +4592,7 @@
           <p:cNvPr id="5" name="f5">
             <a:extLst xmlns:a="http://schemas.openxmlformats.org/drawingml/2006/main">
               <a:ext uri="{FF2B5EF4-FFF2-40B4-BE49-F238E27FC236}">
-                <a16:creationId xmlns:a16="http://schemas.microsoft.com/office/drawing/2014/main" id="{0D50E96B-1E6F-477A-883A-47BDA2EE2A91}"/>
+                <a16:creationId xmlns:a16="http://schemas.microsoft.com/office/drawing/2014/main" id="{FBF859AD-92E7-4116-A3B9-146790600EF8}"/>
               </a:ext>
             </a:extLst>
           </p:cNvPr>
@@ -4751,7 +4751,7 @@
           <p:cNvPr id="6" name="f6">
             <a:extLst xmlns:a="http://schemas.openxmlformats.org/drawingml/2006/main">
               <a:ext uri="{FF2B5EF4-FFF2-40B4-BE49-F238E27FC236}">
-                <a16:creationId xmlns:a16="http://schemas.microsoft.com/office/drawing/2014/main" id="{33BC1C16-4FD3-4304-87EA-CCF8E30EB6BB}"/>
+                <a16:creationId xmlns:a16="http://schemas.microsoft.com/office/drawing/2014/main" id="{4C5BEF44-D0F6-497E-A02E-1786DDF728C3}"/>
               </a:ext>
             </a:extLst>
           </p:cNvPr>
@@ -4910,7 +4910,7 @@
           <p:cNvPr id="7" name="f7">
             <a:extLst xmlns:a="http://schemas.openxmlformats.org/drawingml/2006/main">
               <a:ext uri="{FF2B5EF4-FFF2-40B4-BE49-F238E27FC236}">
-                <a16:creationId xmlns:a16="http://schemas.microsoft.com/office/drawing/2014/main" id="{006BC1BD-11C5-459E-9D27-D32CCF264633}"/>
+                <a16:creationId xmlns:a16="http://schemas.microsoft.com/office/drawing/2014/main" id="{DD6DDD5D-2F1F-4781-836C-1B9691C9D084}"/>
               </a:ext>
             </a:extLst>
           </p:cNvPr>
@@ -5069,7 +5069,7 @@
           <p:cNvPr id="8" name="f8">
             <a:extLst xmlns:a="http://schemas.openxmlformats.org/drawingml/2006/main">
               <a:ext uri="{FF2B5EF4-FFF2-40B4-BE49-F238E27FC236}">
-                <a16:creationId xmlns:a16="http://schemas.microsoft.com/office/drawing/2014/main" id="{1D579317-073F-45BF-88E7-142FC2ADA8A8}"/>
+                <a16:creationId xmlns:a16="http://schemas.microsoft.com/office/drawing/2014/main" id="{C71BD6C6-992C-402F-BF4E-46547D1A8AC1}"/>
               </a:ext>
             </a:extLst>
           </p:cNvPr>
@@ -5228,7 +5228,7 @@
           <p:cNvPr id="9" name="f9">
             <a:extLst xmlns:a="http://schemas.openxmlformats.org/drawingml/2006/main">
               <a:ext uri="{FF2B5EF4-FFF2-40B4-BE49-F238E27FC236}">
-                <a16:creationId xmlns:a16="http://schemas.microsoft.com/office/drawing/2014/main" id="{7FD882C8-3AA6-4B67-9D7D-CC97B202442E}"/>
+                <a16:creationId xmlns:a16="http://schemas.microsoft.com/office/drawing/2014/main" id="{BE0A8F2B-A43C-4FFF-8BBE-61CBCFACC2D1}"/>
               </a:ext>
             </a:extLst>
           </p:cNvPr>
@@ -5387,7 +5387,7 @@
           <p:cNvPr id="10" name="f10">
             <a:extLst xmlns:a="http://schemas.openxmlformats.org/drawingml/2006/main">
               <a:ext uri="{FF2B5EF4-FFF2-40B4-BE49-F238E27FC236}">
-                <a16:creationId xmlns:a16="http://schemas.microsoft.com/office/drawing/2014/main" id="{B7F0149F-F917-4AC7-9BE5-5914A4C0687D}"/>
+                <a16:creationId xmlns:a16="http://schemas.microsoft.com/office/drawing/2014/main" id="{D5EFCF0B-F6D8-4880-ADBD-A3A2FE21DA99}"/>
               </a:ext>
             </a:extLst>
           </p:cNvPr>
@@ -5546,7 +5546,7 @@
           <p:cNvPr id="11" name="f11">
             <a:extLst xmlns:a="http://schemas.openxmlformats.org/drawingml/2006/main">
               <a:ext uri="{FF2B5EF4-FFF2-40B4-BE49-F238E27FC236}">
-                <a16:creationId xmlns:a16="http://schemas.microsoft.com/office/drawing/2014/main" id="{ECEC049E-0615-4394-B761-30986F43BFE9}"/>
+                <a16:creationId xmlns:a16="http://schemas.microsoft.com/office/drawing/2014/main" id="{3A511D85-3DDD-4445-BD9B-722E36F6D990}"/>
               </a:ext>
             </a:extLst>
           </p:cNvPr>
@@ -5705,7 +5705,7 @@
           <p:cNvPr id="12" name="f12">
             <a:extLst xmlns:a="http://schemas.openxmlformats.org/drawingml/2006/main">
               <a:ext uri="{FF2B5EF4-FFF2-40B4-BE49-F238E27FC236}">
-                <a16:creationId xmlns:a16="http://schemas.microsoft.com/office/drawing/2014/main" id="{EC0E2E1A-F944-4AC0-A341-FE80C955DF94}"/>
+                <a16:creationId xmlns:a16="http://schemas.microsoft.com/office/drawing/2014/main" id="{A5109D57-0DAA-4B0C-A9FD-6C4360026857}"/>
               </a:ext>
             </a:extLst>
           </p:cNvPr>
@@ -5864,7 +5864,7 @@
           <p:cNvPr id="13" name="f13">
             <a:extLst xmlns:a="http://schemas.openxmlformats.org/drawingml/2006/main">
               <a:ext uri="{FF2B5EF4-FFF2-40B4-BE49-F238E27FC236}">
-                <a16:creationId xmlns:a16="http://schemas.microsoft.com/office/drawing/2014/main" id="{670CC219-0CE3-4A76-8E30-96FD0F563CF6}"/>
+                <a16:creationId xmlns:a16="http://schemas.microsoft.com/office/drawing/2014/main" id="{48C9263D-A70D-4BCA-8FBD-FC52C6726B9E}"/>
               </a:ext>
             </a:extLst>
           </p:cNvPr>
@@ -6023,7 +6023,7 @@
           <p:cNvPr id="14" name="f14">
             <a:extLst xmlns:a="http://schemas.openxmlformats.org/drawingml/2006/main">
               <a:ext uri="{FF2B5EF4-FFF2-40B4-BE49-F238E27FC236}">
-                <a16:creationId xmlns:a16="http://schemas.microsoft.com/office/drawing/2014/main" id="{76DD7438-0EDD-49CC-B41E-B4F22827A793}"/>
+                <a16:creationId xmlns:a16="http://schemas.microsoft.com/office/drawing/2014/main" id="{E37346FE-9A84-4B35-915D-D8CA1A6DF5B7}"/>
               </a:ext>
             </a:extLst>
           </p:cNvPr>
@@ -6182,7 +6182,7 @@
           <p:cNvPr id="15" name="f15">
             <a:extLst xmlns:a="http://schemas.openxmlformats.org/drawingml/2006/main">
               <a:ext uri="{FF2B5EF4-FFF2-40B4-BE49-F238E27FC236}">
-                <a16:creationId xmlns:a16="http://schemas.microsoft.com/office/drawing/2014/main" id="{BAE1C1D1-AF65-48BF-9CAF-B68800773208}"/>
+                <a16:creationId xmlns:a16="http://schemas.microsoft.com/office/drawing/2014/main" id="{8C82DCE3-3C9A-43D9-AFA4-AD26431E2AF6}"/>
               </a:ext>
             </a:extLst>
           </p:cNvPr>
@@ -6341,7 +6341,7 @@
           <p:cNvPr id="16" name="f16">
             <a:extLst xmlns:a="http://schemas.openxmlformats.org/drawingml/2006/main">
               <a:ext uri="{FF2B5EF4-FFF2-40B4-BE49-F238E27FC236}">
-                <a16:creationId xmlns:a16="http://schemas.microsoft.com/office/drawing/2014/main" id="{72ED8B83-2830-415A-86AA-E743E600C4BF}"/>
+                <a16:creationId xmlns:a16="http://schemas.microsoft.com/office/drawing/2014/main" id="{F89A8F82-85D4-4D8E-8054-91B3FCE61775}"/>
               </a:ext>
             </a:extLst>
           </p:cNvPr>
@@ -6500,7 +6500,7 @@
           <p:cNvPr id="17" name="f17">
             <a:extLst xmlns:a="http://schemas.openxmlformats.org/drawingml/2006/main">
               <a:ext uri="{FF2B5EF4-FFF2-40B4-BE49-F238E27FC236}">
-                <a16:creationId xmlns:a16="http://schemas.microsoft.com/office/drawing/2014/main" id="{779FFA4B-0B3D-43B6-A855-862E1DF2D76E}"/>
+                <a16:creationId xmlns:a16="http://schemas.microsoft.com/office/drawing/2014/main" id="{AB6AF76D-EBF8-4A19-A2EC-AEAFA09FB851}"/>
               </a:ext>
             </a:extLst>
           </p:cNvPr>
@@ -6659,7 +6659,7 @@
           <p:cNvPr id="18" name="f18">
             <a:extLst xmlns:a="http://schemas.openxmlformats.org/drawingml/2006/main">
               <a:ext uri="{FF2B5EF4-FFF2-40B4-BE49-F238E27FC236}">
-                <a16:creationId xmlns:a16="http://schemas.microsoft.com/office/drawing/2014/main" id="{6BB29899-EB7D-4DEB-89D8-B4EF29736603}"/>
+                <a16:creationId xmlns:a16="http://schemas.microsoft.com/office/drawing/2014/main" id="{508C3A2C-EBED-417D-98DA-77D985B701A2}"/>
               </a:ext>
             </a:extLst>
           </p:cNvPr>
@@ -6818,7 +6818,7 @@
           <p:cNvPr id="19" name="f19">
             <a:extLst xmlns:a="http://schemas.openxmlformats.org/drawingml/2006/main">
               <a:ext uri="{FF2B5EF4-FFF2-40B4-BE49-F238E27FC236}">
-                <a16:creationId xmlns:a16="http://schemas.microsoft.com/office/drawing/2014/main" id="{7EA0F7AD-A873-46E0-8884-D1592352F294}"/>
+                <a16:creationId xmlns:a16="http://schemas.microsoft.com/office/drawing/2014/main" id="{5E9B8A66-5EAC-4C7E-A516-8F8CA5DA8DFC}"/>
               </a:ext>
             </a:extLst>
           </p:cNvPr>
@@ -6977,7 +6977,7 @@
           <p:cNvPr id="20" name="f20">
             <a:extLst xmlns:a="http://schemas.openxmlformats.org/drawingml/2006/main">
               <a:ext uri="{FF2B5EF4-FFF2-40B4-BE49-F238E27FC236}">
-                <a16:creationId xmlns:a16="http://schemas.microsoft.com/office/drawing/2014/main" id="{56753133-F5E2-468C-9208-34110A981EE1}"/>
+                <a16:creationId xmlns:a16="http://schemas.microsoft.com/office/drawing/2014/main" id="{896E9DC8-4C8A-4027-BF08-0B611BE3EB27}"/>
               </a:ext>
             </a:extLst>
           </p:cNvPr>
@@ -7134,7 +7134,7 @@
     </p:spTree>
     <p:extLst>
       <p:ext uri="{BB962C8B-B14F-4D97-AF65-F5344CB8AC3E}">
-        <p14:creationId xmlns:p14="http://schemas.microsoft.com/office/powerpoint/2010/main" val="167521354"/>
+        <p14:creationId xmlns:p14="http://schemas.microsoft.com/office/powerpoint/2010/main" val="158467739"/>
       </p:ext>
     </p:extLst>
   </p:cSld>
@@ -7165,7 +7165,7 @@
           <p:cNvPr id="24" name="f21">
             <a:extLst xmlns:a="http://schemas.openxmlformats.org/drawingml/2006/main">
               <a:ext uri="{FF2B5EF4-FFF2-40B4-BE49-F238E27FC236}">
-                <a16:creationId xmlns:a16="http://schemas.microsoft.com/office/drawing/2014/main" id="{36364DF9-FAEF-402A-893C-C5B015C21AB4}"/>
+                <a16:creationId xmlns:a16="http://schemas.microsoft.com/office/drawing/2014/main" id="{65349D49-B4BE-4408-83F6-CCE9CF7E3846}"/>
               </a:ext>
             </a:extLst>
           </p:cNvPr>
@@ -7324,7 +7324,7 @@
           <p:cNvPr id="2" name="f22">
             <a:extLst xmlns:a="http://schemas.openxmlformats.org/drawingml/2006/main">
               <a:ext uri="{FF2B5EF4-FFF2-40B4-BE49-F238E27FC236}">
-                <a16:creationId xmlns:a16="http://schemas.microsoft.com/office/drawing/2014/main" id="{9D5B9960-4D53-49E9-A9B9-394993EE5872}"/>
+                <a16:creationId xmlns:a16="http://schemas.microsoft.com/office/drawing/2014/main" id="{A3976370-9973-40F8-8B9A-8D4EC3ACAB8F}"/>
               </a:ext>
             </a:extLst>
           </p:cNvPr>
@@ -7483,7 +7483,7 @@
           <p:cNvPr id="3" name="f23">
             <a:extLst xmlns:a="http://schemas.openxmlformats.org/drawingml/2006/main">
               <a:ext uri="{FF2B5EF4-FFF2-40B4-BE49-F238E27FC236}">
-                <a16:creationId xmlns:a16="http://schemas.microsoft.com/office/drawing/2014/main" id="{F890625C-57CC-49D9-9D92-EA532080E078}"/>
+                <a16:creationId xmlns:a16="http://schemas.microsoft.com/office/drawing/2014/main" id="{046EEB8F-A2ED-495A-9D00-9E402384D9D0}"/>
               </a:ext>
             </a:extLst>
           </p:cNvPr>
@@ -7642,7 +7642,7 @@
           <p:cNvPr id="4" name="f24">
             <a:extLst xmlns:a="http://schemas.openxmlformats.org/drawingml/2006/main">
               <a:ext uri="{FF2B5EF4-FFF2-40B4-BE49-F238E27FC236}">
-                <a16:creationId xmlns:a16="http://schemas.microsoft.com/office/drawing/2014/main" id="{69F95E5E-B5C3-45C4-AC02-B103DA03C21B}"/>
+                <a16:creationId xmlns:a16="http://schemas.microsoft.com/office/drawing/2014/main" id="{805D825E-C5EE-4FC9-9C32-442FC75A1553}"/>
               </a:ext>
             </a:extLst>
           </p:cNvPr>
@@ -7801,7 +7801,7 @@
           <p:cNvPr id="5" name="f25">
             <a:extLst xmlns:a="http://schemas.openxmlformats.org/drawingml/2006/main">
               <a:ext uri="{FF2B5EF4-FFF2-40B4-BE49-F238E27FC236}">
-                <a16:creationId xmlns:a16="http://schemas.microsoft.com/office/drawing/2014/main" id="{C7034BBB-12ED-453D-BC40-F435CE719D2B}"/>
+                <a16:creationId xmlns:a16="http://schemas.microsoft.com/office/drawing/2014/main" id="{E8D6BA2D-7891-46B1-A4E2-A1D579424C89}"/>
               </a:ext>
             </a:extLst>
           </p:cNvPr>
@@ -7960,7 +7960,7 @@
           <p:cNvPr id="6" name="f26">
             <a:extLst xmlns:a="http://schemas.openxmlformats.org/drawingml/2006/main">
               <a:ext uri="{FF2B5EF4-FFF2-40B4-BE49-F238E27FC236}">
-                <a16:creationId xmlns:a16="http://schemas.microsoft.com/office/drawing/2014/main" id="{76E0D2D0-7CEF-4919-A5A9-C364534D0774}"/>
+                <a16:creationId xmlns:a16="http://schemas.microsoft.com/office/drawing/2014/main" id="{9694D617-D2F2-48C7-AF48-1D419689D728}"/>
               </a:ext>
             </a:extLst>
           </p:cNvPr>
@@ -8119,7 +8119,7 @@
           <p:cNvPr id="7" name="f27">
             <a:extLst xmlns:a="http://schemas.openxmlformats.org/drawingml/2006/main">
               <a:ext uri="{FF2B5EF4-FFF2-40B4-BE49-F238E27FC236}">
-                <a16:creationId xmlns:a16="http://schemas.microsoft.com/office/drawing/2014/main" id="{5CFCBAC0-3DD0-4990-BE9E-559769C40139}"/>
+                <a16:creationId xmlns:a16="http://schemas.microsoft.com/office/drawing/2014/main" id="{60259D3B-460F-4E87-B68F-42F7D74DBD14}"/>
               </a:ext>
             </a:extLst>
           </p:cNvPr>
@@ -8154,7 +8154,7 @@
           <p:cNvPr id="8" name="f28">
             <a:extLst xmlns:a="http://schemas.openxmlformats.org/drawingml/2006/main">
               <a:ext uri="{FF2B5EF4-FFF2-40B4-BE49-F238E27FC236}">
-                <a16:creationId xmlns:a16="http://schemas.microsoft.com/office/drawing/2014/main" id="{76D6DB19-3437-48EE-9D5E-4A889162387E}"/>
+                <a16:creationId xmlns:a16="http://schemas.microsoft.com/office/drawing/2014/main" id="{FE42ED28-4009-46B9-89D1-3B381D580ED1}"/>
               </a:ext>
             </a:extLst>
           </p:cNvPr>
@@ -8185,7 +8185,7 @@
           <p:cNvPr id="9" name="f29">
             <a:extLst xmlns:a="http://schemas.openxmlformats.org/drawingml/2006/main">
               <a:ext uri="{FF2B5EF4-FFF2-40B4-BE49-F238E27FC236}">
-                <a16:creationId xmlns:a16="http://schemas.microsoft.com/office/drawing/2014/main" id="{7F1D485D-1607-4283-ACC6-D29990B6605A}"/>
+                <a16:creationId xmlns:a16="http://schemas.microsoft.com/office/drawing/2014/main" id="{6015B1D3-B437-4426-9B71-344F6C5C2040}"/>
               </a:ext>
             </a:extLst>
           </p:cNvPr>
@@ -8216,7 +8216,7 @@
           <p:cNvPr id="10" name="f30">
             <a:extLst xmlns:a="http://schemas.openxmlformats.org/drawingml/2006/main">
               <a:ext uri="{FF2B5EF4-FFF2-40B4-BE49-F238E27FC236}">
-                <a16:creationId xmlns:a16="http://schemas.microsoft.com/office/drawing/2014/main" id="{F0856C7E-66A1-48EA-AB26-373C273156D6}"/>
+                <a16:creationId xmlns:a16="http://schemas.microsoft.com/office/drawing/2014/main" id="{9D456FD1-3A8B-4DC8-AE5D-FE4E53DC98BA}"/>
               </a:ext>
             </a:extLst>
           </p:cNvPr>
@@ -8247,7 +8247,7 @@
           <p:cNvPr id="11" name="f31">
             <a:extLst xmlns:a="http://schemas.openxmlformats.org/drawingml/2006/main">
               <a:ext uri="{FF2B5EF4-FFF2-40B4-BE49-F238E27FC236}">
-                <a16:creationId xmlns:a16="http://schemas.microsoft.com/office/drawing/2014/main" id="{1E4FAB02-BB4F-4A21-9366-43559BC43613}"/>
+                <a16:creationId xmlns:a16="http://schemas.microsoft.com/office/drawing/2014/main" id="{6264ED74-D79D-458B-B8FB-BAFBCE872B42}"/>
               </a:ext>
             </a:extLst>
           </p:cNvPr>
@@ -8282,7 +8282,7 @@
           <p:cNvPr id="12" name="f32">
             <a:extLst xmlns:a="http://schemas.openxmlformats.org/drawingml/2006/main">
               <a:ext uri="{FF2B5EF4-FFF2-40B4-BE49-F238E27FC236}">
-                <a16:creationId xmlns:a16="http://schemas.microsoft.com/office/drawing/2014/main" id="{07CB6612-20B6-48C3-A559-41AF3C564022}"/>
+                <a16:creationId xmlns:a16="http://schemas.microsoft.com/office/drawing/2014/main" id="{B99EBAB3-D0BA-41AA-9617-BFDE572AB908}"/>
               </a:ext>
             </a:extLst>
           </p:cNvPr>
@@ -8313,7 +8313,7 @@
           <p:cNvPr id="13" name="f33">
             <a:extLst xmlns:a="http://schemas.openxmlformats.org/drawingml/2006/main">
               <a:ext uri="{FF2B5EF4-FFF2-40B4-BE49-F238E27FC236}">
-                <a16:creationId xmlns:a16="http://schemas.microsoft.com/office/drawing/2014/main" id="{B8BBA565-22EE-4FD5-AF4A-A14C6F299030}"/>
+                <a16:creationId xmlns:a16="http://schemas.microsoft.com/office/drawing/2014/main" id="{E013CD4F-8E1D-4221-937E-5C803C7D8DED}"/>
               </a:ext>
             </a:extLst>
           </p:cNvPr>
@@ -8346,7 +8346,7 @@
           <p:cNvPr id="14" name="f34">
             <a:extLst xmlns:a="http://schemas.openxmlformats.org/drawingml/2006/main">
               <a:ext uri="{FF2B5EF4-FFF2-40B4-BE49-F238E27FC236}">
-                <a16:creationId xmlns:a16="http://schemas.microsoft.com/office/drawing/2014/main" id="{7FAC99BA-1BDF-43BA-86B5-9590AA85ABE1}"/>
+                <a16:creationId xmlns:a16="http://schemas.microsoft.com/office/drawing/2014/main" id="{56B15B5E-7862-411A-8436-08766D446F78}"/>
               </a:ext>
             </a:extLst>
           </p:cNvPr>
@@ -8379,7 +8379,7 @@
           <p:cNvPr id="15" name="f35">
             <a:extLst xmlns:a="http://schemas.openxmlformats.org/drawingml/2006/main">
               <a:ext uri="{FF2B5EF4-FFF2-40B4-BE49-F238E27FC236}">
-                <a16:creationId xmlns:a16="http://schemas.microsoft.com/office/drawing/2014/main" id="{1A88A41E-96F2-436C-AEF1-4262A5D98194}"/>
+                <a16:creationId xmlns:a16="http://schemas.microsoft.com/office/drawing/2014/main" id="{84F00433-9DEF-4C9A-9EC3-0BFA95306C7C}"/>
               </a:ext>
             </a:extLst>
           </p:cNvPr>
@@ -8412,7 +8412,7 @@
           <p:cNvPr id="16" name="f36">
             <a:extLst xmlns:a="http://schemas.openxmlformats.org/drawingml/2006/main">
               <a:ext uri="{FF2B5EF4-FFF2-40B4-BE49-F238E27FC236}">
-                <a16:creationId xmlns:a16="http://schemas.microsoft.com/office/drawing/2014/main" id="{20071D7B-7C2F-47E0-A816-FA578D88063B}"/>
+                <a16:creationId xmlns:a16="http://schemas.microsoft.com/office/drawing/2014/main" id="{2A12A4F1-95CD-473D-B5E0-6C7E4C8989A8}"/>
               </a:ext>
             </a:extLst>
           </p:cNvPr>
@@ -8571,7 +8571,7 @@
           <p:cNvPr id="17" name="f37">
             <a:extLst xmlns:a="http://schemas.openxmlformats.org/drawingml/2006/main">
               <a:ext uri="{FF2B5EF4-FFF2-40B4-BE49-F238E27FC236}">
-                <a16:creationId xmlns:a16="http://schemas.microsoft.com/office/drawing/2014/main" id="{0925A6D5-AD9A-4E71-9D5B-A21C7D61791D}"/>
+                <a16:creationId xmlns:a16="http://schemas.microsoft.com/office/drawing/2014/main" id="{DC121C45-80AF-41BF-8BEE-D0B0EF54F6C7}"/>
               </a:ext>
             </a:extLst>
           </p:cNvPr>
@@ -8602,7 +8602,7 @@
           <p:cNvPr id="18" name="f38">
             <a:extLst xmlns:a="http://schemas.openxmlformats.org/drawingml/2006/main">
               <a:ext uri="{FF2B5EF4-FFF2-40B4-BE49-F238E27FC236}">
-                <a16:creationId xmlns:a16="http://schemas.microsoft.com/office/drawing/2014/main" id="{B3461A2C-9091-4485-846D-C6A1CAD925D0}"/>
+                <a16:creationId xmlns:a16="http://schemas.microsoft.com/office/drawing/2014/main" id="{3F3106AA-D68D-4667-92FB-611A00A65EC3}"/>
               </a:ext>
             </a:extLst>
           </p:cNvPr>
@@ -8633,7 +8633,7 @@
           <p:cNvPr id="19" name="f39">
             <a:extLst xmlns:a="http://schemas.openxmlformats.org/drawingml/2006/main">
               <a:ext uri="{FF2B5EF4-FFF2-40B4-BE49-F238E27FC236}">
-                <a16:creationId xmlns:a16="http://schemas.microsoft.com/office/drawing/2014/main" id="{AEE806B7-6413-48A4-985A-324BD5B8F9CD}"/>
+                <a16:creationId xmlns:a16="http://schemas.microsoft.com/office/drawing/2014/main" id="{B9905747-D6D4-40CB-BA55-E16DE2454E8D}"/>
               </a:ext>
             </a:extLst>
           </p:cNvPr>
@@ -8644,7 +8644,42 @@
         </p:nvSpPr>
         <p:spPr>
           <a:xfrm xmlns:a="http://schemas.openxmlformats.org/drawingml/2006/main">
-            <a:off x="6048375" y="3790950"/>
+            <a:off x="5943600" y="3638550"/>
+            <a:ext cx="3352800" cy="1390650"/>
+          </a:xfrm>
+          <a:prstGeom xmlns:a="http://schemas.openxmlformats.org/drawingml/2006/main" prst="roundRect">
+            <a:avLst>
+              <a:gd name="adj" fmla="val 10959"/>
+            </a:avLst>
+          </a:prstGeom>
+          <a:solidFill xmlns:a="http://schemas.openxmlformats.org/drawingml/2006/main">
+            <a:srgbClr val="F0F4FF"/>
+          </a:solidFill>
+          <a:ln xmlns:a="http://schemas.openxmlformats.org/drawingml/2006/main" w="17145">
+            <a:solidFill>
+              <a:srgbClr val="C7D5FA"/>
+            </a:solidFill>
+            <a:prstDash val="solid"/>
+          </a:ln>
+        </p:spPr>
+      </p:sp>
+      <p:sp>
+        <p:nvSpPr>
+          <p:cNvPr id="20" name="f40">
+            <a:extLst xmlns:a="http://schemas.openxmlformats.org/drawingml/2006/main">
+              <a:ext uri="{FF2B5EF4-FFF2-40B4-BE49-F238E27FC236}">
+                <a16:creationId xmlns:a16="http://schemas.microsoft.com/office/drawing/2014/main" id="{16B67533-DF3C-4743-868A-4C740B3167E0}"/>
+              </a:ext>
+            </a:extLst>
+          </p:cNvPr>
+          <p:cNvSpPr>
+            <a:spLocks xmlns:a="http://schemas.openxmlformats.org/drawingml/2006/main" noGrp="1"/>
+          </p:cNvSpPr>
+          <p:nvPr/>
+        </p:nvSpPr>
+        <p:spPr>
+          <a:xfrm xmlns:a="http://schemas.openxmlformats.org/drawingml/2006/main">
+            <a:off x="6048375" y="3867150"/>
             <a:ext cx="3143250" cy="1047750"/>
           </a:xfrm>
           <a:prstGeom xmlns:a="http://schemas.openxmlformats.org/drawingml/2006/main" prst="rect">
@@ -8662,7 +8697,7 @@
           </a:bodyPr>
           <a:lstStyle xmlns:a="http://schemas.openxmlformats.org/drawingml/2006/main">
             <a:defPPr algn="ctr">
-              <a:defRPr sz="3150" b="1">
+              <a:defRPr sz="2850" b="1">
                 <a:solidFill>
                   <a:srgbClr val="4264D0"/>
                 </a:solidFill>
@@ -8672,7 +8707,7 @@
               </a:defRPr>
             </a:defPPr>
             <a:lvl1pPr algn="ctr">
-              <a:defRPr sz="3150" b="1">
+              <a:defRPr sz="2850" b="1">
                 <a:solidFill>
                   <a:srgbClr val="4264D0"/>
                 </a:solidFill>
@@ -8682,7 +8717,7 @@
               </a:defRPr>
             </a:lvl1pPr>
             <a:lvl2pPr algn="ctr">
-              <a:defRPr sz="3150" b="1">
+              <a:defRPr sz="2850" b="1">
                 <a:solidFill>
                   <a:srgbClr val="4264D0"/>
                 </a:solidFill>
@@ -8692,7 +8727,7 @@
               </a:defRPr>
             </a:lvl2pPr>
             <a:lvl3pPr algn="ctr">
-              <a:defRPr sz="3150" b="1">
+              <a:defRPr sz="2850" b="1">
                 <a:solidFill>
                   <a:srgbClr val="4264D0"/>
                 </a:solidFill>
@@ -8702,7 +8737,7 @@
               </a:defRPr>
             </a:lvl3pPr>
             <a:lvl4pPr algn="ctr">
-              <a:defRPr sz="3150" b="1">
+              <a:defRPr sz="2850" b="1">
                 <a:solidFill>
                   <a:srgbClr val="4264D0"/>
                 </a:solidFill>
@@ -8712,7 +8747,7 @@
               </a:defRPr>
             </a:lvl4pPr>
             <a:lvl5pPr algn="ctr">
-              <a:defRPr sz="3150" b="1">
+              <a:defRPr sz="2850" b="1">
                 <a:solidFill>
                   <a:srgbClr val="4264D0"/>
                 </a:solidFill>
@@ -8722,7 +8757,7 @@
               </a:defRPr>
             </a:lvl5pPr>
             <a:lvl6pPr algn="ctr">
-              <a:defRPr sz="3150" b="1">
+              <a:defRPr sz="2850" b="1">
                 <a:solidFill>
                   <a:srgbClr val="4264D0"/>
                 </a:solidFill>
@@ -8732,7 +8767,7 @@
               </a:defRPr>
             </a:lvl6pPr>
             <a:lvl7pPr algn="ctr">
-              <a:defRPr sz="3150" b="1">
+              <a:defRPr sz="2850" b="1">
                 <a:solidFill>
                   <a:srgbClr val="4264D0"/>
                 </a:solidFill>
@@ -8742,7 +8777,7 @@
               </a:defRPr>
             </a:lvl7pPr>
             <a:lvl8pPr algn="ctr">
-              <a:defRPr sz="3150" b="1">
+              <a:defRPr sz="2850" b="1">
                 <a:solidFill>
                   <a:srgbClr val="4264D0"/>
                 </a:solidFill>
@@ -8752,7 +8787,7 @@
               </a:defRPr>
             </a:lvl8pPr>
             <a:lvl9pPr algn="ctr">
-              <a:defRPr sz="3150" b="1">
+              <a:defRPr sz="2850" b="1">
                 <a:solidFill>
                   <a:srgbClr val="4264D0"/>
                 </a:solidFill>
@@ -8764,7 +8799,7 @@
           </a:lstStyle>
           <a:p xmlns:a="http://schemas.openxmlformats.org/drawingml/2006/main">
             <a:pPr algn="ctr">
-              <a:defRPr sz="3150" b="1">
+              <a:defRPr sz="2850" b="1">
                 <a:solidFill>
                   <a:srgbClr val="4264D0"/>
                 </a:solidFill>
@@ -8774,7 +8809,7 @@
               </a:defRPr>
             </a:pPr>
             <a:r>
-              <a:rPr sz="3150" b="1">
+              <a:rPr sz="2850" b="1">
                 <a:solidFill>
                   <a:srgbClr val="4264D0"/>
                 </a:solidFill>
@@ -8787,7 +8822,7 @@
           </a:p>
           <a:p xmlns:a="http://schemas.openxmlformats.org/drawingml/2006/main">
             <a:pPr algn="ctr">
-              <a:defRPr sz="3150" b="1">
+              <a:defRPr sz="2850" b="1">
                 <a:solidFill>
                   <a:srgbClr val="4264D0"/>
                 </a:solidFill>
@@ -8797,7 +8832,7 @@
               </a:defRPr>
             </a:pPr>
             <a:r>
-              <a:rPr sz="3150" b="1">
+              <a:rPr sz="2850" b="1">
                 <a:solidFill>
                   <a:srgbClr val="4264D0"/>
                 </a:solidFill>
@@ -8812,10 +8847,10 @@
       </p:sp>
       <p:sp>
         <p:nvSpPr>
-          <p:cNvPr id="20" name="f40">
+          <p:cNvPr id="21" name="f41">
             <a:extLst xmlns:a="http://schemas.openxmlformats.org/drawingml/2006/main">
               <a:ext uri="{FF2B5EF4-FFF2-40B4-BE49-F238E27FC236}">
-                <a16:creationId xmlns:a16="http://schemas.microsoft.com/office/drawing/2014/main" id="{D399289A-80DA-4BF8-993F-8089BF5E29FF}"/>
+                <a16:creationId xmlns:a16="http://schemas.microsoft.com/office/drawing/2014/main" id="{1077204C-4550-4AE3-A3AD-0B3DDDBD4689}"/>
               </a:ext>
             </a:extLst>
           </p:cNvPr>
@@ -8826,8 +8861,8 @@
         </p:nvSpPr>
         <p:spPr>
           <a:xfrm xmlns:a="http://schemas.openxmlformats.org/drawingml/2006/main">
-            <a:off x="5619750" y="5267325"/>
-            <a:ext cx="4000500" cy="847725"/>
+            <a:off x="5619750" y="5286375"/>
+            <a:ext cx="4000500" cy="723900"/>
           </a:xfrm>
           <a:prstGeom xmlns:a="http://schemas.openxmlformats.org/drawingml/2006/main" prst="rect">
             <a:avLst/>
@@ -8844,7 +8879,7 @@
           </a:bodyPr>
           <a:lstStyle xmlns:a="http://schemas.openxmlformats.org/drawingml/2006/main">
             <a:defPPr algn="ctr">
-              <a:defRPr sz="2250" b="0">
+              <a:defRPr sz="1950" b="0">
                 <a:solidFill>
                   <a:srgbClr val="52627B"/>
                 </a:solidFill>
@@ -8854,7 +8889,7 @@
               </a:defRPr>
             </a:defPPr>
             <a:lvl1pPr algn="ctr">
-              <a:defRPr sz="2250" b="0">
+              <a:defRPr sz="1950" b="0">
                 <a:solidFill>
                   <a:srgbClr val="52627B"/>
                 </a:solidFill>
@@ -8864,7 +8899,7 @@
               </a:defRPr>
             </a:lvl1pPr>
             <a:lvl2pPr algn="ctr">
-              <a:defRPr sz="2250" b="0">
+              <a:defRPr sz="1950" b="0">
                 <a:solidFill>
                   <a:srgbClr val="52627B"/>
                 </a:solidFill>
@@ -8874,7 +8909,7 @@
               </a:defRPr>
             </a:lvl2pPr>
             <a:lvl3pPr algn="ctr">
-              <a:defRPr sz="2250" b="0">
+              <a:defRPr sz="1950" b="0">
                 <a:solidFill>
                   <a:srgbClr val="52627B"/>
                 </a:solidFill>
@@ -8884,7 +8919,7 @@
               </a:defRPr>
             </a:lvl3pPr>
             <a:lvl4pPr algn="ctr">
-              <a:defRPr sz="2250" b="0">
+              <a:defRPr sz="1950" b="0">
                 <a:solidFill>
                   <a:srgbClr val="52627B"/>
                 </a:solidFill>
@@ -8894,7 +8929,7 @@
               </a:defRPr>
             </a:lvl4pPr>
             <a:lvl5pPr algn="ctr">
-              <a:defRPr sz="2250" b="0">
+              <a:defRPr sz="1950" b="0">
                 <a:solidFill>
                   <a:srgbClr val="52627B"/>
                 </a:solidFill>
@@ -8904,7 +8939,7 @@
               </a:defRPr>
             </a:lvl5pPr>
             <a:lvl6pPr algn="ctr">
-              <a:defRPr sz="2250" b="0">
+              <a:defRPr sz="1950" b="0">
                 <a:solidFill>
                   <a:srgbClr val="52627B"/>
                 </a:solidFill>
@@ -8914,7 +8949,7 @@
               </a:defRPr>
             </a:lvl6pPr>
             <a:lvl7pPr algn="ctr">
-              <a:defRPr sz="2250" b="0">
+              <a:defRPr sz="1950" b="0">
                 <a:solidFill>
                   <a:srgbClr val="52627B"/>
                 </a:solidFill>
@@ -8924,7 +8959,7 @@
               </a:defRPr>
             </a:lvl7pPr>
             <a:lvl8pPr algn="ctr">
-              <a:defRPr sz="2250" b="0">
+              <a:defRPr sz="1950" b="0">
                 <a:solidFill>
                   <a:srgbClr val="52627B"/>
                 </a:solidFill>
@@ -8934,7 +8969,7 @@
               </a:defRPr>
             </a:lvl8pPr>
             <a:lvl9pPr algn="ctr">
-              <a:defRPr sz="2250" b="0">
+              <a:defRPr sz="1950" b="0">
                 <a:solidFill>
                   <a:srgbClr val="52627B"/>
                 </a:solidFill>
@@ -8946,7 +8981,7 @@
           </a:lstStyle>
           <a:p xmlns:a="http://schemas.openxmlformats.org/drawingml/2006/main">
             <a:pPr algn="ctr">
-              <a:defRPr sz="2250" b="0">
+              <a:defRPr sz="1950" b="0">
                 <a:solidFill>
                   <a:srgbClr val="52627B"/>
                 </a:solidFill>
@@ -8956,7 +8991,7 @@
               </a:defRPr>
             </a:pPr>
             <a:r>
-              <a:rPr sz="2250" b="0">
+              <a:rPr sz="1950" b="0">
                 <a:solidFill>
                   <a:srgbClr val="52627B"/>
                 </a:solidFill>
@@ -8969,7 +9004,7 @@
           </a:p>
           <a:p xmlns:a="http://schemas.openxmlformats.org/drawingml/2006/main">
             <a:pPr algn="ctr">
-              <a:defRPr sz="2250" b="0">
+              <a:defRPr sz="1950" b="0">
                 <a:solidFill>
                   <a:srgbClr val="52627B"/>
                 </a:solidFill>
@@ -8979,7 +9014,7 @@
               </a:defRPr>
             </a:pPr>
             <a:r>
-              <a:rPr sz="2250" b="0">
+              <a:rPr sz="1950" b="0">
                 <a:solidFill>
                   <a:srgbClr val="52627B"/>
                 </a:solidFill>
@@ -8994,10 +9029,10 @@
       </p:sp>
       <p:sp>
         <p:nvSpPr>
-          <p:cNvPr id="21" name="f41">
+          <p:cNvPr id="22" name="f42">
             <a:extLst xmlns:a="http://schemas.openxmlformats.org/drawingml/2006/main">
               <a:ext uri="{FF2B5EF4-FFF2-40B4-BE49-F238E27FC236}">
-                <a16:creationId xmlns:a16="http://schemas.microsoft.com/office/drawing/2014/main" id="{B34D95F8-9735-4E87-BFE9-145E4D363F96}"/>
+                <a16:creationId xmlns:a16="http://schemas.microsoft.com/office/drawing/2014/main" id="{2AEE505F-1690-4D5E-90C0-E7AB9893FE6F}"/>
               </a:ext>
             </a:extLst>
           </p:cNvPr>
@@ -9008,8 +9043,8 @@
         </p:nvSpPr>
         <p:spPr>
           <a:xfrm xmlns:a="http://schemas.openxmlformats.org/drawingml/2006/main">
-            <a:off x="1066800" y="6115050"/>
-            <a:ext cx="4476750" cy="438150"/>
+            <a:off x="1066800" y="5762625"/>
+            <a:ext cx="4476750" cy="381000"/>
           </a:xfrm>
           <a:prstGeom xmlns:a="http://schemas.openxmlformats.org/drawingml/2006/main" prst="rect">
             <a:avLst/>
@@ -9026,7 +9061,7 @@
           </a:bodyPr>
           <a:lstStyle xmlns:a="http://schemas.openxmlformats.org/drawingml/2006/main">
             <a:defPPr algn="ctr">
-              <a:defRPr sz="2475" b="0">
+              <a:defRPr sz="1950" b="0">
                 <a:solidFill>
                   <a:srgbClr val="182536"/>
                 </a:solidFill>
@@ -9036,7 +9071,7 @@
               </a:defRPr>
             </a:defPPr>
             <a:lvl1pPr algn="ctr">
-              <a:defRPr sz="2475" b="0">
+              <a:defRPr sz="1950" b="0">
                 <a:solidFill>
                   <a:srgbClr val="182536"/>
                 </a:solidFill>
@@ -9046,7 +9081,7 @@
               </a:defRPr>
             </a:lvl1pPr>
             <a:lvl2pPr algn="ctr">
-              <a:defRPr sz="2475" b="0">
+              <a:defRPr sz="1950" b="0">
                 <a:solidFill>
                   <a:srgbClr val="182536"/>
                 </a:solidFill>
@@ -9056,7 +9091,7 @@
               </a:defRPr>
             </a:lvl2pPr>
             <a:lvl3pPr algn="ctr">
-              <a:defRPr sz="2475" b="0">
+              <a:defRPr sz="1950" b="0">
                 <a:solidFill>
                   <a:srgbClr val="182536"/>
                 </a:solidFill>
@@ -9066,7 +9101,7 @@
               </a:defRPr>
             </a:lvl3pPr>
             <a:lvl4pPr algn="ctr">
-              <a:defRPr sz="2475" b="0">
+              <a:defRPr sz="1950" b="0">
                 <a:solidFill>
                   <a:srgbClr val="182536"/>
                 </a:solidFill>
@@ -9076,7 +9111,7 @@
               </a:defRPr>
             </a:lvl4pPr>
             <a:lvl5pPr algn="ctr">
-              <a:defRPr sz="2475" b="0">
+              <a:defRPr sz="1950" b="0">
                 <a:solidFill>
                   <a:srgbClr val="182536"/>
                 </a:solidFill>
@@ -9086,7 +9121,7 @@
               </a:defRPr>
             </a:lvl5pPr>
             <a:lvl6pPr algn="ctr">
-              <a:defRPr sz="2475" b="0">
+              <a:defRPr sz="1950" b="0">
                 <a:solidFill>
                   <a:srgbClr val="182536"/>
                 </a:solidFill>
@@ -9096,7 +9131,7 @@
               </a:defRPr>
             </a:lvl6pPr>
             <a:lvl7pPr algn="ctr">
-              <a:defRPr sz="2475" b="0">
+              <a:defRPr sz="1950" b="0">
                 <a:solidFill>
                   <a:srgbClr val="182536"/>
                 </a:solidFill>
@@ -9106,7 +9141,7 @@
               </a:defRPr>
             </a:lvl7pPr>
             <a:lvl8pPr algn="ctr">
-              <a:defRPr sz="2475" b="0">
+              <a:defRPr sz="1950" b="0">
                 <a:solidFill>
                   <a:srgbClr val="182536"/>
                 </a:solidFill>
@@ -9116,7 +9151,7 @@
               </a:defRPr>
             </a:lvl8pPr>
             <a:lvl9pPr algn="ctr">
-              <a:defRPr sz="2475" b="0">
+              <a:defRPr sz="1950" b="0">
                 <a:solidFill>
                   <a:srgbClr val="182536"/>
                 </a:solidFill>
@@ -9128,7 +9163,7 @@
           </a:lstStyle>
           <a:p xmlns:a="http://schemas.openxmlformats.org/drawingml/2006/main">
             <a:pPr algn="ctr">
-              <a:defRPr sz="2475" b="0">
+              <a:defRPr sz="1950" b="0">
                 <a:solidFill>
                   <a:srgbClr val="182536"/>
                 </a:solidFill>
@@ -9138,7 +9173,7 @@
               </a:defRPr>
             </a:pPr>
             <a:r>
-              <a:rPr sz="2475" b="0">
+              <a:rPr sz="1950" b="0">
                 <a:solidFill>
                   <a:srgbClr val="182536"/>
                 </a:solidFill>
@@ -9153,10 +9188,10 @@
       </p:sp>
       <p:sp>
         <p:nvSpPr>
-          <p:cNvPr id="22" name="f42">
+          <p:cNvPr id="23" name="f43">
             <a:extLst xmlns:a="http://schemas.openxmlformats.org/drawingml/2006/main">
               <a:ext uri="{FF2B5EF4-FFF2-40B4-BE49-F238E27FC236}">
-                <a16:creationId xmlns:a16="http://schemas.microsoft.com/office/drawing/2014/main" id="{BEC8C436-F4FD-4BAE-830E-64001BDFEB40}"/>
+                <a16:creationId xmlns:a16="http://schemas.microsoft.com/office/drawing/2014/main" id="{7A230166-4159-448B-837F-A3BBE0702835}"/>
               </a:ext>
             </a:extLst>
           </p:cNvPr>
@@ -9167,8 +9202,8 @@
         </p:nvSpPr>
         <p:spPr>
           <a:xfrm xmlns:a="http://schemas.openxmlformats.org/drawingml/2006/main">
-            <a:off x="9696450" y="6115050"/>
-            <a:ext cx="4476750" cy="438150"/>
+            <a:off x="9696450" y="5762625"/>
+            <a:ext cx="4476750" cy="381000"/>
           </a:xfrm>
           <a:prstGeom xmlns:a="http://schemas.openxmlformats.org/drawingml/2006/main" prst="rect">
             <a:avLst/>
@@ -9185,7 +9220,7 @@
           </a:bodyPr>
           <a:lstStyle xmlns:a="http://schemas.openxmlformats.org/drawingml/2006/main">
             <a:defPPr algn="ctr">
-              <a:defRPr sz="2475" b="0">
+              <a:defRPr sz="1950" b="0">
                 <a:solidFill>
                   <a:srgbClr val="182536"/>
                 </a:solidFill>
@@ -9195,7 +9230,7 @@
               </a:defRPr>
             </a:defPPr>
             <a:lvl1pPr algn="ctr">
-              <a:defRPr sz="2475" b="0">
+              <a:defRPr sz="1950" b="0">
                 <a:solidFill>
                   <a:srgbClr val="182536"/>
                 </a:solidFill>
@@ -9205,7 +9240,7 @@
               </a:defRPr>
             </a:lvl1pPr>
             <a:lvl2pPr algn="ctr">
-              <a:defRPr sz="2475" b="0">
+              <a:defRPr sz="1950" b="0">
                 <a:solidFill>
                   <a:srgbClr val="182536"/>
                 </a:solidFill>
@@ -9215,7 +9250,7 @@
               </a:defRPr>
             </a:lvl2pPr>
             <a:lvl3pPr algn="ctr">
-              <a:defRPr sz="2475" b="0">
+              <a:defRPr sz="1950" b="0">
                 <a:solidFill>
                   <a:srgbClr val="182536"/>
                 </a:solidFill>
@@ -9225,7 +9260,7 @@
               </a:defRPr>
             </a:lvl3pPr>
             <a:lvl4pPr algn="ctr">
-              <a:defRPr sz="2475" b="0">
+              <a:defRPr sz="1950" b="0">
                 <a:solidFill>
                   <a:srgbClr val="182536"/>
                 </a:solidFill>
@@ -9235,7 +9270,7 @@
               </a:defRPr>
             </a:lvl4pPr>
             <a:lvl5pPr algn="ctr">
-              <a:defRPr sz="2475" b="0">
+              <a:defRPr sz="1950" b="0">
                 <a:solidFill>
                   <a:srgbClr val="182536"/>
                 </a:solidFill>
@@ -9245,7 +9280,7 @@
               </a:defRPr>
             </a:lvl5pPr>
             <a:lvl6pPr algn="ctr">
-              <a:defRPr sz="2475" b="0">
+              <a:defRPr sz="1950" b="0">
                 <a:solidFill>
                   <a:srgbClr val="182536"/>
                 </a:solidFill>
@@ -9255,7 +9290,7 @@
               </a:defRPr>
             </a:lvl6pPr>
             <a:lvl7pPr algn="ctr">
-              <a:defRPr sz="2475" b="0">
+              <a:defRPr sz="1950" b="0">
                 <a:solidFill>
                   <a:srgbClr val="182536"/>
                 </a:solidFill>
@@ -9265,7 +9300,7 @@
               </a:defRPr>
             </a:lvl7pPr>
             <a:lvl8pPr algn="ctr">
-              <a:defRPr sz="2475" b="0">
+              <a:defRPr sz="1950" b="0">
                 <a:solidFill>
                   <a:srgbClr val="182536"/>
                 </a:solidFill>
@@ -9275,7 +9310,7 @@
               </a:defRPr>
             </a:lvl8pPr>
             <a:lvl9pPr algn="ctr">
-              <a:defRPr sz="2475" b="0">
+              <a:defRPr sz="1950" b="0">
                 <a:solidFill>
                   <a:srgbClr val="182536"/>
                 </a:solidFill>
@@ -9287,7 +9322,7 @@
           </a:lstStyle>
           <a:p xmlns:a="http://schemas.openxmlformats.org/drawingml/2006/main">
             <a:pPr algn="ctr">
-              <a:defRPr sz="2475" b="0">
+              <a:defRPr sz="1950" b="0">
                 <a:solidFill>
                   <a:srgbClr val="182536"/>
                 </a:solidFill>
@@ -9297,7 +9332,7 @@
               </a:defRPr>
             </a:pPr>
             <a:r>
-              <a:rPr sz="2475" b="0">
+              <a:rPr sz="1950" b="0">
                 <a:solidFill>
                   <a:srgbClr val="182536"/>
                 </a:solidFill>
@@ -9306,165 +9341,6 @@
                 <a:cs typeface="Nimbus Sans"/>
               </a:rPr>
               <a:t>Comportamento reale</a:t>
-            </a:r>
-          </a:p>
-        </p:txBody>
-      </p:sp>
-      <p:sp>
-        <p:nvSpPr>
-          <p:cNvPr id="23" name="f43">
-            <a:extLst xmlns:a="http://schemas.openxmlformats.org/drawingml/2006/main">
-              <a:ext uri="{FF2B5EF4-FFF2-40B4-BE49-F238E27FC236}">
-                <a16:creationId xmlns:a16="http://schemas.microsoft.com/office/drawing/2014/main" id="{ECA3C8CD-0E31-4A7F-9E4E-419F886446CC}"/>
-              </a:ext>
-            </a:extLst>
-          </p:cNvPr>
-          <p:cNvSpPr>
-            <a:spLocks xmlns:a="http://schemas.openxmlformats.org/drawingml/2006/main" noGrp="1"/>
-          </p:cNvSpPr>
-          <p:nvPr/>
-        </p:nvSpPr>
-        <p:spPr>
-          <a:xfrm xmlns:a="http://schemas.openxmlformats.org/drawingml/2006/main">
-            <a:off x="1066800" y="7762875"/>
-            <a:ext cx="13106400" cy="371475"/>
-          </a:xfrm>
-          <a:prstGeom xmlns:a="http://schemas.openxmlformats.org/drawingml/2006/main" prst="rect">
-            <a:avLst/>
-          </a:prstGeom>
-          <a:noFill xmlns:a="http://schemas.openxmlformats.org/drawingml/2006/main"/>
-          <a:ln xmlns:a="http://schemas.openxmlformats.org/drawingml/2006/main" w="0">
-            <a:noFill/>
-            <a:prstDash val="solid"/>
-          </a:ln>
-        </p:spPr>
-        <p:txBody>
-          <a:bodyPr xmlns:a="http://schemas.openxmlformats.org/drawingml/2006/main" wrap="none" lIns="0" tIns="0" rIns="0" bIns="0" anchor="t">
-            <a:noAutofit/>
-          </a:bodyPr>
-          <a:lstStyle xmlns:a="http://schemas.openxmlformats.org/drawingml/2006/main">
-            <a:defPPr algn="ctr">
-              <a:defRPr sz="2025" b="0">
-                <a:solidFill>
-                  <a:srgbClr val="52627B"/>
-                </a:solidFill>
-                <a:latin typeface="Nimbus Sans"/>
-                <a:ea typeface="Nimbus Sans"/>
-                <a:cs typeface="Nimbus Sans"/>
-              </a:defRPr>
-            </a:defPPr>
-            <a:lvl1pPr algn="ctr">
-              <a:defRPr sz="2025" b="0">
-                <a:solidFill>
-                  <a:srgbClr val="52627B"/>
-                </a:solidFill>
-                <a:latin typeface="Nimbus Sans"/>
-                <a:ea typeface="Nimbus Sans"/>
-                <a:cs typeface="Nimbus Sans"/>
-              </a:defRPr>
-            </a:lvl1pPr>
-            <a:lvl2pPr algn="ctr">
-              <a:defRPr sz="2025" b="0">
-                <a:solidFill>
-                  <a:srgbClr val="52627B"/>
-                </a:solidFill>
-                <a:latin typeface="Nimbus Sans"/>
-                <a:ea typeface="Nimbus Sans"/>
-                <a:cs typeface="Nimbus Sans"/>
-              </a:defRPr>
-            </a:lvl2pPr>
-            <a:lvl3pPr algn="ctr">
-              <a:defRPr sz="2025" b="0">
-                <a:solidFill>
-                  <a:srgbClr val="52627B"/>
-                </a:solidFill>
-                <a:latin typeface="Nimbus Sans"/>
-                <a:ea typeface="Nimbus Sans"/>
-                <a:cs typeface="Nimbus Sans"/>
-              </a:defRPr>
-            </a:lvl3pPr>
-            <a:lvl4pPr algn="ctr">
-              <a:defRPr sz="2025" b="0">
-                <a:solidFill>
-                  <a:srgbClr val="52627B"/>
-                </a:solidFill>
-                <a:latin typeface="Nimbus Sans"/>
-                <a:ea typeface="Nimbus Sans"/>
-                <a:cs typeface="Nimbus Sans"/>
-              </a:defRPr>
-            </a:lvl4pPr>
-            <a:lvl5pPr algn="ctr">
-              <a:defRPr sz="2025" b="0">
-                <a:solidFill>
-                  <a:srgbClr val="52627B"/>
-                </a:solidFill>
-                <a:latin typeface="Nimbus Sans"/>
-                <a:ea typeface="Nimbus Sans"/>
-                <a:cs typeface="Nimbus Sans"/>
-              </a:defRPr>
-            </a:lvl5pPr>
-            <a:lvl6pPr algn="ctr">
-              <a:defRPr sz="2025" b="0">
-                <a:solidFill>
-                  <a:srgbClr val="52627B"/>
-                </a:solidFill>
-                <a:latin typeface="Nimbus Sans"/>
-                <a:ea typeface="Nimbus Sans"/>
-                <a:cs typeface="Nimbus Sans"/>
-              </a:defRPr>
-            </a:lvl6pPr>
-            <a:lvl7pPr algn="ctr">
-              <a:defRPr sz="2025" b="0">
-                <a:solidFill>
-                  <a:srgbClr val="52627B"/>
-                </a:solidFill>
-                <a:latin typeface="Nimbus Sans"/>
-                <a:ea typeface="Nimbus Sans"/>
-                <a:cs typeface="Nimbus Sans"/>
-              </a:defRPr>
-            </a:lvl7pPr>
-            <a:lvl8pPr algn="ctr">
-              <a:defRPr sz="2025" b="0">
-                <a:solidFill>
-                  <a:srgbClr val="52627B"/>
-                </a:solidFill>
-                <a:latin typeface="Nimbus Sans"/>
-                <a:ea typeface="Nimbus Sans"/>
-                <a:cs typeface="Nimbus Sans"/>
-              </a:defRPr>
-            </a:lvl8pPr>
-            <a:lvl9pPr algn="ctr">
-              <a:defRPr sz="2025" b="0">
-                <a:solidFill>
-                  <a:srgbClr val="52627B"/>
-                </a:solidFill>
-                <a:latin typeface="Nimbus Sans"/>
-                <a:ea typeface="Nimbus Sans"/>
-                <a:cs typeface="Nimbus Sans"/>
-              </a:defRPr>
-            </a:lvl9pPr>
-          </a:lstStyle>
-          <a:p xmlns:a="http://schemas.openxmlformats.org/drawingml/2006/main">
-            <a:pPr algn="ctr">
-              <a:defRPr sz="2025" b="0">
-                <a:solidFill>
-                  <a:srgbClr val="52627B"/>
-                </a:solidFill>
-                <a:latin typeface="Nimbus Sans"/>
-                <a:ea typeface="Nimbus Sans"/>
-                <a:cs typeface="Nimbus Sans"/>
-              </a:defRPr>
-            </a:pPr>
-            <a:r>
-              <a:rPr sz="2025" b="0">
-                <a:solidFill>
-                  <a:srgbClr val="52627B"/>
-                </a:solidFill>
-                <a:latin typeface="Nimbus Sans"/>
-                <a:ea typeface="Nimbus Sans"/>
-                <a:cs typeface="Nimbus Sans"/>
-              </a:rPr>
-              <a:t>Nel 5G: Network Functions · specifiche SCAS (3GPP)</a:t>
             </a:r>
           </a:p>
         </p:txBody>
@@ -9472,7 +9348,7 @@
     </p:spTree>
     <p:extLst>
       <p:ext uri="{BB962C8B-B14F-4D97-AF65-F5344CB8AC3E}">
-        <p14:creationId xmlns:p14="http://schemas.microsoft.com/office/powerpoint/2010/main" val="589131638"/>
+        <p14:creationId xmlns:p14="http://schemas.microsoft.com/office/powerpoint/2010/main" val="1895006201"/>
       </p:ext>
     </p:extLst>
   </p:cSld>
@@ -9500,10 +9376,10 @@
       </p:grpSpPr>
       <p:pic>
         <p:nvPicPr>
-          <p:cNvPr id="23" name="">
+          <p:cNvPr id="24" name="">
             <a:extLst xmlns:a="http://schemas.openxmlformats.org/drawingml/2006/main">
               <a:ext uri="{FF2B5EF4-FFF2-40B4-BE49-F238E27FC236}">
-                <a16:creationId xmlns:a16="http://schemas.microsoft.com/office/drawing/2014/main" id="{15B2105E-7895-46E5-8563-E7AC8F997E14}"/>
+                <a16:creationId xmlns:a16="http://schemas.microsoft.com/office/drawing/2014/main" id="{7749D6E8-1679-4DF0-86C3-A68B4E61733D}"/>
               </a:ext>
             </a:extLst>
           </p:cNvPr>
@@ -9513,7 +9389,7 @@
           <p:nvPr/>
         </p:nvPicPr>
         <p:blipFill>
-          <a:blip xmlns:r="http://schemas.openxmlformats.org/officeDocument/2006/relationships" xmlns:a="http://schemas.openxmlformats.org/drawingml/2006/main" r:embed="Rc876d76a4e5c4959"/>
+          <a:blip xmlns:r="http://schemas.openxmlformats.org/officeDocument/2006/relationships" xmlns:a="http://schemas.openxmlformats.org/drawingml/2006/main" r:embed="Re13f6e3cd6eb4c3a"/>
           <a:stretch xmlns:a="http://schemas.openxmlformats.org/drawingml/2006/main"/>
         </p:blipFill>
         <p:spPr>
@@ -9531,7 +9407,7 @@
           <p:cNvPr id="2" name="f45">
             <a:extLst xmlns:a="http://schemas.openxmlformats.org/drawingml/2006/main">
               <a:ext uri="{FF2B5EF4-FFF2-40B4-BE49-F238E27FC236}">
-                <a16:creationId xmlns:a16="http://schemas.microsoft.com/office/drawing/2014/main" id="{F34CB23A-992E-44C2-83A3-9581B8CBB2F8}"/>
+                <a16:creationId xmlns:a16="http://schemas.microsoft.com/office/drawing/2014/main" id="{C5F67984-FB91-4A42-88FD-043BA9C475CC}"/>
               </a:ext>
             </a:extLst>
           </p:cNvPr>
@@ -9690,7 +9566,7 @@
           <p:cNvPr id="3" name="f46">
             <a:extLst xmlns:a="http://schemas.openxmlformats.org/drawingml/2006/main">
               <a:ext uri="{FF2B5EF4-FFF2-40B4-BE49-F238E27FC236}">
-                <a16:creationId xmlns:a16="http://schemas.microsoft.com/office/drawing/2014/main" id="{43D84FCB-4149-467F-9583-7ECF8AA2FD42}"/>
+                <a16:creationId xmlns:a16="http://schemas.microsoft.com/office/drawing/2014/main" id="{4588A644-E7A8-432F-AFF5-7296E4DEB9DA}"/>
               </a:ext>
             </a:extLst>
           </p:cNvPr>
@@ -9849,7 +9725,7 @@
           <p:cNvPr id="4" name="f47">
             <a:extLst xmlns:a="http://schemas.openxmlformats.org/drawingml/2006/main">
               <a:ext uri="{FF2B5EF4-FFF2-40B4-BE49-F238E27FC236}">
-                <a16:creationId xmlns:a16="http://schemas.microsoft.com/office/drawing/2014/main" id="{4FB2934E-4F84-4480-BAEE-BF4E7A60F934}"/>
+                <a16:creationId xmlns:a16="http://schemas.microsoft.com/office/drawing/2014/main" id="{60BE0821-082D-4E58-AE1D-27450AFB1A41}"/>
               </a:ext>
             </a:extLst>
           </p:cNvPr>
@@ -10008,7 +9884,7 @@
           <p:cNvPr id="5" name="f48">
             <a:extLst xmlns:a="http://schemas.openxmlformats.org/drawingml/2006/main">
               <a:ext uri="{FF2B5EF4-FFF2-40B4-BE49-F238E27FC236}">
-                <a16:creationId xmlns:a16="http://schemas.microsoft.com/office/drawing/2014/main" id="{F287D521-A794-410B-A176-D004B80FAAF7}"/>
+                <a16:creationId xmlns:a16="http://schemas.microsoft.com/office/drawing/2014/main" id="{409D0732-8493-4D78-BD2B-76C352C3E9F1}"/>
               </a:ext>
             </a:extLst>
           </p:cNvPr>
@@ -10020,7 +9896,7 @@
         <p:spPr>
           <a:xfrm xmlns:a="http://schemas.openxmlformats.org/drawingml/2006/main">
             <a:off x="1066800" y="1901095"/>
-            <a:ext cx="7406283" cy="347186"/>
+            <a:ext cx="7205811" cy="347186"/>
           </a:xfrm>
           <a:prstGeom xmlns:a="http://schemas.openxmlformats.org/drawingml/2006/main" prst="rect">
             <a:avLst/>
@@ -10157,7 +10033,7 @@
                 <a:ea typeface="Nimbus Sans"/>
                 <a:cs typeface="Nimbus Sans"/>
               </a:rPr>
-              <a:t>Le Network Functions sono i componenti software della rete 5G.</a:t>
+              <a:t>Le NF cooperano tramite protocolli e procedure standardizzati.</a:t>
             </a:r>
           </a:p>
         </p:txBody>
@@ -10167,7 +10043,7 @@
           <p:cNvPr id="6" name="f49">
             <a:extLst xmlns:a="http://schemas.openxmlformats.org/drawingml/2006/main">
               <a:ext uri="{FF2B5EF4-FFF2-40B4-BE49-F238E27FC236}">
-                <a16:creationId xmlns:a16="http://schemas.microsoft.com/office/drawing/2014/main" id="{6093F3CD-E6C2-44AF-A1DD-DADD81C8AFD3}"/>
+                <a16:creationId xmlns:a16="http://schemas.microsoft.com/office/drawing/2014/main" id="{AD2B6520-5FC4-4C27-B09D-F4CC55215567}"/>
               </a:ext>
             </a:extLst>
           </p:cNvPr>
@@ -10178,7 +10054,166 @@
         </p:nvSpPr>
         <p:spPr>
           <a:xfrm xmlns:a="http://schemas.openxmlformats.org/drawingml/2006/main">
-            <a:off x="2801234" y="3189130"/>
+            <a:off x="1066800" y="2263045"/>
+            <a:ext cx="9847511" cy="347186"/>
+          </a:xfrm>
+          <a:prstGeom xmlns:a="http://schemas.openxmlformats.org/drawingml/2006/main" prst="rect">
+            <a:avLst/>
+          </a:prstGeom>
+          <a:noFill xmlns:a="http://schemas.openxmlformats.org/drawingml/2006/main"/>
+          <a:ln xmlns:a="http://schemas.openxmlformats.org/drawingml/2006/main" w="0">
+            <a:noFill/>
+            <a:prstDash val="solid"/>
+          </a:ln>
+        </p:spPr>
+        <p:txBody>
+          <a:bodyPr xmlns:a="http://schemas.openxmlformats.org/drawingml/2006/main" wrap="none" lIns="0" tIns="0" rIns="0" bIns="0" anchor="t">
+            <a:noAutofit/>
+          </a:bodyPr>
+          <a:lstStyle xmlns:a="http://schemas.openxmlformats.org/drawingml/2006/main">
+            <a:defPPr algn="l">
+              <a:defRPr sz="2025" b="0">
+                <a:solidFill>
+                  <a:srgbClr val="52627B"/>
+                </a:solidFill>
+                <a:latin typeface="Nimbus Sans"/>
+                <a:ea typeface="Nimbus Sans"/>
+                <a:cs typeface="Nimbus Sans"/>
+              </a:defRPr>
+            </a:defPPr>
+            <a:lvl1pPr algn="l">
+              <a:defRPr sz="2025" b="0">
+                <a:solidFill>
+                  <a:srgbClr val="52627B"/>
+                </a:solidFill>
+                <a:latin typeface="Nimbus Sans"/>
+                <a:ea typeface="Nimbus Sans"/>
+                <a:cs typeface="Nimbus Sans"/>
+              </a:defRPr>
+            </a:lvl1pPr>
+            <a:lvl2pPr algn="l">
+              <a:defRPr sz="2025" b="0">
+                <a:solidFill>
+                  <a:srgbClr val="52627B"/>
+                </a:solidFill>
+                <a:latin typeface="Nimbus Sans"/>
+                <a:ea typeface="Nimbus Sans"/>
+                <a:cs typeface="Nimbus Sans"/>
+              </a:defRPr>
+            </a:lvl2pPr>
+            <a:lvl3pPr algn="l">
+              <a:defRPr sz="2025" b="0">
+                <a:solidFill>
+                  <a:srgbClr val="52627B"/>
+                </a:solidFill>
+                <a:latin typeface="Nimbus Sans"/>
+                <a:ea typeface="Nimbus Sans"/>
+                <a:cs typeface="Nimbus Sans"/>
+              </a:defRPr>
+            </a:lvl3pPr>
+            <a:lvl4pPr algn="l">
+              <a:defRPr sz="2025" b="0">
+                <a:solidFill>
+                  <a:srgbClr val="52627B"/>
+                </a:solidFill>
+                <a:latin typeface="Nimbus Sans"/>
+                <a:ea typeface="Nimbus Sans"/>
+                <a:cs typeface="Nimbus Sans"/>
+              </a:defRPr>
+            </a:lvl4pPr>
+            <a:lvl5pPr algn="l">
+              <a:defRPr sz="2025" b="0">
+                <a:solidFill>
+                  <a:srgbClr val="52627B"/>
+                </a:solidFill>
+                <a:latin typeface="Nimbus Sans"/>
+                <a:ea typeface="Nimbus Sans"/>
+                <a:cs typeface="Nimbus Sans"/>
+              </a:defRPr>
+            </a:lvl5pPr>
+            <a:lvl6pPr algn="l">
+              <a:defRPr sz="2025" b="0">
+                <a:solidFill>
+                  <a:srgbClr val="52627B"/>
+                </a:solidFill>
+                <a:latin typeface="Nimbus Sans"/>
+                <a:ea typeface="Nimbus Sans"/>
+                <a:cs typeface="Nimbus Sans"/>
+              </a:defRPr>
+            </a:lvl6pPr>
+            <a:lvl7pPr algn="l">
+              <a:defRPr sz="2025" b="0">
+                <a:solidFill>
+                  <a:srgbClr val="52627B"/>
+                </a:solidFill>
+                <a:latin typeface="Nimbus Sans"/>
+                <a:ea typeface="Nimbus Sans"/>
+                <a:cs typeface="Nimbus Sans"/>
+              </a:defRPr>
+            </a:lvl7pPr>
+            <a:lvl8pPr algn="l">
+              <a:defRPr sz="2025" b="0">
+                <a:solidFill>
+                  <a:srgbClr val="52627B"/>
+                </a:solidFill>
+                <a:latin typeface="Nimbus Sans"/>
+                <a:ea typeface="Nimbus Sans"/>
+                <a:cs typeface="Nimbus Sans"/>
+              </a:defRPr>
+            </a:lvl8pPr>
+            <a:lvl9pPr algn="l">
+              <a:defRPr sz="2025" b="0">
+                <a:solidFill>
+                  <a:srgbClr val="52627B"/>
+                </a:solidFill>
+                <a:latin typeface="Nimbus Sans"/>
+                <a:ea typeface="Nimbus Sans"/>
+                <a:cs typeface="Nimbus Sans"/>
+              </a:defRPr>
+            </a:lvl9pPr>
+          </a:lstStyle>
+          <a:p xmlns:a="http://schemas.openxmlformats.org/drawingml/2006/main">
+            <a:pPr algn="l">
+              <a:defRPr sz="2025" b="0">
+                <a:solidFill>
+                  <a:srgbClr val="52627B"/>
+                </a:solidFill>
+                <a:latin typeface="Nimbus Sans"/>
+                <a:ea typeface="Nimbus Sans"/>
+                <a:cs typeface="Nimbus Sans"/>
+              </a:defRPr>
+            </a:pPr>
+            <a:r>
+              <a:rPr sz="2025" b="0">
+                <a:solidFill>
+                  <a:srgbClr val="52627B"/>
+                </a:solidFill>
+                <a:latin typeface="Nimbus Sans"/>
+                <a:ea typeface="Nimbus Sans"/>
+                <a:cs typeface="Nimbus Sans"/>
+              </a:rPr>
+              <a:t>Per valutare i criteri di sicurezza occorre quindi valutare le funzioni e le loro interazioni</a:t>
+            </a:r>
+          </a:p>
+        </p:txBody>
+      </p:sp>
+      <p:sp>
+        <p:nvSpPr>
+          <p:cNvPr id="7" name="f50">
+            <a:extLst xmlns:a="http://schemas.openxmlformats.org/drawingml/2006/main">
+              <a:ext uri="{FF2B5EF4-FFF2-40B4-BE49-F238E27FC236}">
+                <a16:creationId xmlns:a16="http://schemas.microsoft.com/office/drawing/2014/main" id="{ED233869-4BFD-42CB-8395-C37B26F63EC5}"/>
+              </a:ext>
+            </a:extLst>
+          </p:cNvPr>
+          <p:cNvSpPr>
+            <a:spLocks xmlns:a="http://schemas.openxmlformats.org/drawingml/2006/main" noGrp="1"/>
+          </p:cNvSpPr>
+          <p:nvPr/>
+        </p:nvSpPr>
+        <p:spPr>
+          <a:xfrm xmlns:a="http://schemas.openxmlformats.org/drawingml/2006/main">
+            <a:off x="2801234" y="3112930"/>
             <a:ext cx="1302395" cy="424853"/>
           </a:xfrm>
           <a:prstGeom xmlns:a="http://schemas.openxmlformats.org/drawingml/2006/main" prst="rect">
@@ -10323,10 +10358,10 @@
       </p:sp>
       <p:sp>
         <p:nvSpPr>
-          <p:cNvPr id="7" name="f50">
+          <p:cNvPr id="8" name="f51">
             <a:extLst xmlns:a="http://schemas.openxmlformats.org/drawingml/2006/main">
               <a:ext uri="{FF2B5EF4-FFF2-40B4-BE49-F238E27FC236}">
-                <a16:creationId xmlns:a16="http://schemas.microsoft.com/office/drawing/2014/main" id="{59F3774B-EC7E-41E4-9631-11541BA2B924}"/>
+                <a16:creationId xmlns:a16="http://schemas.microsoft.com/office/drawing/2014/main" id="{C4FDEDA5-6A15-40BA-9418-D1774EE00D45}"/>
               </a:ext>
             </a:extLst>
           </p:cNvPr>
@@ -10337,7 +10372,7 @@
         </p:nvSpPr>
         <p:spPr>
           <a:xfrm xmlns:a="http://schemas.openxmlformats.org/drawingml/2006/main">
-            <a:off x="7994359" y="3189130"/>
+            <a:off x="7994359" y="3112930"/>
             <a:ext cx="1526232" cy="424853"/>
           </a:xfrm>
           <a:prstGeom xmlns:a="http://schemas.openxmlformats.org/drawingml/2006/main" prst="rect">
@@ -10482,10 +10517,10 @@
       </p:sp>
       <p:sp>
         <p:nvSpPr>
-          <p:cNvPr id="8" name="f51">
+          <p:cNvPr id="9" name="f52">
             <a:extLst xmlns:a="http://schemas.openxmlformats.org/drawingml/2006/main">
               <a:ext uri="{FF2B5EF4-FFF2-40B4-BE49-F238E27FC236}">
-                <a16:creationId xmlns:a16="http://schemas.microsoft.com/office/drawing/2014/main" id="{F2247659-EA9C-4A82-9870-A2B05D466C74}"/>
+                <a16:creationId xmlns:a16="http://schemas.microsoft.com/office/drawing/2014/main" id="{9F93A1D6-40D9-4AD9-B5E8-FD6DC185FB97}"/>
               </a:ext>
             </a:extLst>
           </p:cNvPr>
@@ -10496,7 +10531,7 @@
         </p:nvSpPr>
         <p:spPr>
           <a:xfrm xmlns:a="http://schemas.openxmlformats.org/drawingml/2006/main">
-            <a:off x="5868924" y="3850125"/>
+            <a:off x="5868924" y="3773925"/>
             <a:ext cx="2156371" cy="318640"/>
           </a:xfrm>
           <a:prstGeom xmlns:a="http://schemas.openxmlformats.org/drawingml/2006/main" prst="rect">
@@ -10641,10 +10676,10 @@
       </p:sp>
       <p:sp>
         <p:nvSpPr>
-          <p:cNvPr id="9" name="f52">
+          <p:cNvPr id="10" name="f53">
             <a:extLst xmlns:a="http://schemas.openxmlformats.org/drawingml/2006/main">
               <a:ext uri="{FF2B5EF4-FFF2-40B4-BE49-F238E27FC236}">
-                <a16:creationId xmlns:a16="http://schemas.microsoft.com/office/drawing/2014/main" id="{02FBCCBF-D250-4239-AAC7-29C1D2957599}"/>
+                <a16:creationId xmlns:a16="http://schemas.microsoft.com/office/drawing/2014/main" id="{BF20D704-8288-4458-9258-29886B2DFA3C}"/>
               </a:ext>
             </a:extLst>
           </p:cNvPr>
@@ -10655,7 +10690,7 @@
         </p:nvSpPr>
         <p:spPr>
           <a:xfrm xmlns:a="http://schemas.openxmlformats.org/drawingml/2006/main">
-            <a:off x="5868924" y="7570400"/>
+            <a:off x="5868924" y="7494200"/>
             <a:ext cx="1646783" cy="318640"/>
           </a:xfrm>
           <a:prstGeom xmlns:a="http://schemas.openxmlformats.org/drawingml/2006/main" prst="rect">
@@ -10800,10 +10835,10 @@
       </p:sp>
       <p:sp>
         <p:nvSpPr>
-          <p:cNvPr id="10" name="f53">
+          <p:cNvPr id="11" name="f54">
             <a:extLst xmlns:a="http://schemas.openxmlformats.org/drawingml/2006/main">
               <a:ext uri="{FF2B5EF4-FFF2-40B4-BE49-F238E27FC236}">
-                <a16:creationId xmlns:a16="http://schemas.microsoft.com/office/drawing/2014/main" id="{8C8EDD21-078A-44E7-9B45-3C178C940C0D}"/>
+                <a16:creationId xmlns:a16="http://schemas.microsoft.com/office/drawing/2014/main" id="{E25CE58D-C8E7-41D9-8F67-8F8E10DEE174}"/>
               </a:ext>
             </a:extLst>
           </p:cNvPr>
@@ -10814,7 +10849,7 @@
         </p:nvSpPr>
         <p:spPr>
           <a:xfrm xmlns:a="http://schemas.openxmlformats.org/drawingml/2006/main">
-            <a:off x="6026789" y="4543602"/>
+            <a:off x="6026789" y="4467402"/>
             <a:ext cx="774502" cy="409680"/>
           </a:xfrm>
           <a:prstGeom xmlns:a="http://schemas.openxmlformats.org/drawingml/2006/main" prst="rect">
@@ -10959,10 +10994,10 @@
       </p:sp>
       <p:sp>
         <p:nvSpPr>
-          <p:cNvPr id="11" name="f54">
+          <p:cNvPr id="12" name="f55">
             <a:extLst xmlns:a="http://schemas.openxmlformats.org/drawingml/2006/main">
               <a:ext uri="{FF2B5EF4-FFF2-40B4-BE49-F238E27FC236}">
-                <a16:creationId xmlns:a16="http://schemas.microsoft.com/office/drawing/2014/main" id="{8A82F4D6-DB6D-4156-AF7F-5DFBFABB555A}"/>
+                <a16:creationId xmlns:a16="http://schemas.microsoft.com/office/drawing/2014/main" id="{B8B4DAEA-2D9D-4446-A1CD-67C96B2C1A4F}"/>
               </a:ext>
             </a:extLst>
           </p:cNvPr>
@@ -10973,7 +11008,7 @@
         </p:nvSpPr>
         <p:spPr>
           <a:xfrm xmlns:a="http://schemas.openxmlformats.org/drawingml/2006/main">
-            <a:off x="7563770" y="4543602"/>
+            <a:off x="7563770" y="4467402"/>
             <a:ext cx="757684" cy="409680"/>
           </a:xfrm>
           <a:prstGeom xmlns:a="http://schemas.openxmlformats.org/drawingml/2006/main" prst="rect">
@@ -11118,10 +11153,10 @@
       </p:sp>
       <p:sp>
         <p:nvSpPr>
-          <p:cNvPr id="12" name="f55">
+          <p:cNvPr id="13" name="f56">
             <a:extLst xmlns:a="http://schemas.openxmlformats.org/drawingml/2006/main">
               <a:ext uri="{FF2B5EF4-FFF2-40B4-BE49-F238E27FC236}">
-                <a16:creationId xmlns:a16="http://schemas.microsoft.com/office/drawing/2014/main" id="{7835B7CC-AE5D-4E67-9F79-69A42D7A8505}"/>
+                <a16:creationId xmlns:a16="http://schemas.microsoft.com/office/drawing/2014/main" id="{8C101507-E593-43C7-99DE-B3D10C6F962F}"/>
               </a:ext>
             </a:extLst>
           </p:cNvPr>
@@ -11132,7 +11167,7 @@
         </p:nvSpPr>
         <p:spPr>
           <a:xfrm xmlns:a="http://schemas.openxmlformats.org/drawingml/2006/main">
-            <a:off x="9004087" y="4543602"/>
+            <a:off x="9004087" y="4467402"/>
             <a:ext cx="934194" cy="409680"/>
           </a:xfrm>
           <a:prstGeom xmlns:a="http://schemas.openxmlformats.org/drawingml/2006/main" prst="rect">
@@ -11277,10 +11312,10 @@
       </p:sp>
       <p:sp>
         <p:nvSpPr>
-          <p:cNvPr id="13" name="f56">
+          <p:cNvPr id="14" name="f57">
             <a:extLst xmlns:a="http://schemas.openxmlformats.org/drawingml/2006/main">
               <a:ext uri="{FF2B5EF4-FFF2-40B4-BE49-F238E27FC236}">
-                <a16:creationId xmlns:a16="http://schemas.microsoft.com/office/drawing/2014/main" id="{8B0A6117-0A6C-47EA-9FBD-3E2CFEAA6D30}"/>
+                <a16:creationId xmlns:a16="http://schemas.microsoft.com/office/drawing/2014/main" id="{05D9F340-3D33-452F-A91A-29FD3ACB00F3}"/>
               </a:ext>
             </a:extLst>
           </p:cNvPr>
@@ -11291,7 +11326,7 @@
         </p:nvSpPr>
         <p:spPr>
           <a:xfrm xmlns:a="http://schemas.openxmlformats.org/drawingml/2006/main">
-            <a:off x="10595539" y="4543602"/>
+            <a:off x="10595539" y="4467402"/>
             <a:ext cx="808434" cy="409680"/>
           </a:xfrm>
           <a:prstGeom xmlns:a="http://schemas.openxmlformats.org/drawingml/2006/main" prst="rect">
@@ -11436,10 +11471,10 @@
       </p:sp>
       <p:sp>
         <p:nvSpPr>
-          <p:cNvPr id="14" name="f57">
+          <p:cNvPr id="15" name="f58">
             <a:extLst xmlns:a="http://schemas.openxmlformats.org/drawingml/2006/main">
               <a:ext uri="{FF2B5EF4-FFF2-40B4-BE49-F238E27FC236}">
-                <a16:creationId xmlns:a16="http://schemas.microsoft.com/office/drawing/2014/main" id="{F619FE5F-DAE4-40DD-891D-3366335D9326}"/>
+                <a16:creationId xmlns:a16="http://schemas.microsoft.com/office/drawing/2014/main" id="{B6EF6EB7-AA96-469C-96AE-20360117E64B}"/>
               </a:ext>
             </a:extLst>
           </p:cNvPr>
@@ -11450,7 +11485,7 @@
         </p:nvSpPr>
         <p:spPr>
           <a:xfrm xmlns:a="http://schemas.openxmlformats.org/drawingml/2006/main">
-            <a:off x="7573667" y="6673600"/>
+            <a:off x="7573667" y="6597400"/>
             <a:ext cx="737890" cy="424853"/>
           </a:xfrm>
           <a:prstGeom xmlns:a="http://schemas.openxmlformats.org/drawingml/2006/main" prst="rect">
@@ -11595,10 +11630,10 @@
       </p:sp>
       <p:sp>
         <p:nvSpPr>
-          <p:cNvPr id="15" name="f58">
+          <p:cNvPr id="16" name="f59">
             <a:extLst xmlns:a="http://schemas.openxmlformats.org/drawingml/2006/main">
               <a:ext uri="{FF2B5EF4-FFF2-40B4-BE49-F238E27FC236}">
-                <a16:creationId xmlns:a16="http://schemas.microsoft.com/office/drawing/2014/main" id="{7EA270F0-7BBC-48FA-A908-D122B10D2CED}"/>
+                <a16:creationId xmlns:a16="http://schemas.microsoft.com/office/drawing/2014/main" id="{BCA7AC86-5411-4B73-81A4-1CB0090CA398}"/>
               </a:ext>
             </a:extLst>
           </p:cNvPr>
@@ -11609,7 +11644,7 @@
         </p:nvSpPr>
         <p:spPr>
           <a:xfrm xmlns:a="http://schemas.openxmlformats.org/drawingml/2006/main">
-            <a:off x="11398758" y="3855632"/>
+            <a:off x="11398758" y="3779432"/>
             <a:ext cx="436662" cy="273120"/>
           </a:xfrm>
           <a:prstGeom xmlns:a="http://schemas.openxmlformats.org/drawingml/2006/main" prst="rect">
@@ -11754,10 +11789,10 @@
       </p:sp>
       <p:sp>
         <p:nvSpPr>
-          <p:cNvPr id="16" name="f59">
+          <p:cNvPr id="17" name="f60">
             <a:extLst xmlns:a="http://schemas.openxmlformats.org/drawingml/2006/main">
               <a:ext uri="{FF2B5EF4-FFF2-40B4-BE49-F238E27FC236}">
-                <a16:creationId xmlns:a16="http://schemas.microsoft.com/office/drawing/2014/main" id="{61645066-CCB4-4C2F-AB90-849B5897B039}"/>
+                <a16:creationId xmlns:a16="http://schemas.microsoft.com/office/drawing/2014/main" id="{E4B7B89C-0328-46A1-9832-CDF681C16556}"/>
               </a:ext>
             </a:extLst>
           </p:cNvPr>
@@ -11768,7 +11803,7 @@
         </p:nvSpPr>
         <p:spPr>
           <a:xfrm xmlns:a="http://schemas.openxmlformats.org/drawingml/2006/main">
-            <a:off x="8139303" y="5682164"/>
+            <a:off x="8139303" y="5605964"/>
             <a:ext cx="418654" cy="318640"/>
           </a:xfrm>
           <a:prstGeom xmlns:a="http://schemas.openxmlformats.org/drawingml/2006/main" prst="rect">
@@ -11913,10 +11948,10 @@
       </p:sp>
       <p:sp>
         <p:nvSpPr>
-          <p:cNvPr id="17" name="f60">
+          <p:cNvPr id="18" name="f61">
             <a:extLst xmlns:a="http://schemas.openxmlformats.org/drawingml/2006/main">
               <a:ext uri="{FF2B5EF4-FFF2-40B4-BE49-F238E27FC236}">
-                <a16:creationId xmlns:a16="http://schemas.microsoft.com/office/drawing/2014/main" id="{9EE25AC5-115D-45C7-8F6F-9B5673C157AF}"/>
+                <a16:creationId xmlns:a16="http://schemas.microsoft.com/office/drawing/2014/main" id="{1E9BCBAE-9895-45DA-9109-9FB27023DE14}"/>
               </a:ext>
             </a:extLst>
           </p:cNvPr>
@@ -11927,7 +11962,7 @@
         </p:nvSpPr>
         <p:spPr>
           <a:xfrm xmlns:a="http://schemas.openxmlformats.org/drawingml/2006/main">
-            <a:off x="2286420" y="7499366"/>
+            <a:off x="2286420" y="7423166"/>
             <a:ext cx="511225" cy="379333"/>
           </a:xfrm>
           <a:prstGeom xmlns:a="http://schemas.openxmlformats.org/drawingml/2006/main" prst="rect">
@@ -12072,10 +12107,10 @@
       </p:sp>
       <p:sp>
         <p:nvSpPr>
-          <p:cNvPr id="18" name="f61">
+          <p:cNvPr id="19" name="f62">
             <a:extLst xmlns:a="http://schemas.openxmlformats.org/drawingml/2006/main">
               <a:ext uri="{FF2B5EF4-FFF2-40B4-BE49-F238E27FC236}">
-                <a16:creationId xmlns:a16="http://schemas.microsoft.com/office/drawing/2014/main" id="{1BF16296-5350-47D4-8D8A-4398AC17F0E3}"/>
+                <a16:creationId xmlns:a16="http://schemas.microsoft.com/office/drawing/2014/main" id="{2B2F140D-860B-4CA2-8100-D83C95A9E0E4}"/>
               </a:ext>
             </a:extLst>
           </p:cNvPr>
@@ -12086,7 +12121,7 @@
         </p:nvSpPr>
         <p:spPr>
           <a:xfrm xmlns:a="http://schemas.openxmlformats.org/drawingml/2006/main">
-            <a:off x="3753609" y="7499366"/>
+            <a:off x="3753609" y="7423166"/>
             <a:ext cx="701427" cy="379333"/>
           </a:xfrm>
           <a:prstGeom xmlns:a="http://schemas.openxmlformats.org/drawingml/2006/main" prst="rect">
@@ -12231,10 +12266,10 @@
       </p:sp>
       <p:sp>
         <p:nvSpPr>
-          <p:cNvPr id="19" name="f62">
+          <p:cNvPr id="20" name="f63">
             <a:extLst xmlns:a="http://schemas.openxmlformats.org/drawingml/2006/main">
               <a:ext uri="{FF2B5EF4-FFF2-40B4-BE49-F238E27FC236}">
-                <a16:creationId xmlns:a16="http://schemas.microsoft.com/office/drawing/2014/main" id="{8BA8608C-CDD3-4148-AAC4-FFBDA238B19C}"/>
+                <a16:creationId xmlns:a16="http://schemas.microsoft.com/office/drawing/2014/main" id="{EB6CDFCE-8829-46E9-A360-5343E577F859}"/>
               </a:ext>
             </a:extLst>
           </p:cNvPr>
@@ -12245,7 +12280,7 @@
         </p:nvSpPr>
         <p:spPr>
           <a:xfrm xmlns:a="http://schemas.openxmlformats.org/drawingml/2006/main">
-            <a:off x="5018946" y="5389937"/>
+            <a:off x="5018946" y="5313737"/>
             <a:ext cx="418654" cy="318640"/>
           </a:xfrm>
           <a:prstGeom xmlns:a="http://schemas.openxmlformats.org/drawingml/2006/main" prst="rect">
@@ -12390,10 +12425,10 @@
       </p:sp>
       <p:sp>
         <p:nvSpPr>
-          <p:cNvPr id="20" name="f63">
+          <p:cNvPr id="21" name="f64">
             <a:extLst xmlns:a="http://schemas.openxmlformats.org/drawingml/2006/main">
               <a:ext uri="{FF2B5EF4-FFF2-40B4-BE49-F238E27FC236}">
-                <a16:creationId xmlns:a16="http://schemas.microsoft.com/office/drawing/2014/main" id="{56C7BEBB-8D97-4895-990C-D40AF7E21F58}"/>
+                <a16:creationId xmlns:a16="http://schemas.microsoft.com/office/drawing/2014/main" id="{CEA73E8A-CC9D-4D63-8004-8EA8190779CE}"/>
               </a:ext>
             </a:extLst>
           </p:cNvPr>
@@ -12404,7 +12439,7 @@
         </p:nvSpPr>
         <p:spPr>
           <a:xfrm xmlns:a="http://schemas.openxmlformats.org/drawingml/2006/main">
-            <a:off x="6206109" y="6480168"/>
+            <a:off x="6206109" y="6403968"/>
             <a:ext cx="418654" cy="318640"/>
           </a:xfrm>
           <a:prstGeom xmlns:a="http://schemas.openxmlformats.org/drawingml/2006/main" prst="rect">
@@ -12549,10 +12584,10 @@
       </p:sp>
       <p:sp>
         <p:nvSpPr>
-          <p:cNvPr id="21" name="f64">
+          <p:cNvPr id="22" name="f65">
             <a:extLst xmlns:a="http://schemas.openxmlformats.org/drawingml/2006/main">
               <a:ext uri="{FF2B5EF4-FFF2-40B4-BE49-F238E27FC236}">
-                <a16:creationId xmlns:a16="http://schemas.microsoft.com/office/drawing/2014/main" id="{913F8C88-BC34-4DAC-8CB0-BCD492A6A32D}"/>
+                <a16:creationId xmlns:a16="http://schemas.microsoft.com/office/drawing/2014/main" id="{36696700-DA0B-450E-ADDE-821252A5F8B7}"/>
               </a:ext>
             </a:extLst>
           </p:cNvPr>
@@ -12563,7 +12598,7 @@
         </p:nvSpPr>
         <p:spPr>
           <a:xfrm xmlns:a="http://schemas.openxmlformats.org/drawingml/2006/main">
-            <a:off x="10544556" y="6480168"/>
+            <a:off x="10544556" y="6403968"/>
             <a:ext cx="418654" cy="318640"/>
           </a:xfrm>
           <a:prstGeom xmlns:a="http://schemas.openxmlformats.org/drawingml/2006/main" prst="rect">
@@ -12708,10 +12743,10 @@
       </p:sp>
       <p:sp>
         <p:nvSpPr>
-          <p:cNvPr id="22" name="f65">
+          <p:cNvPr id="23" name="f66">
             <a:extLst xmlns:a="http://schemas.openxmlformats.org/drawingml/2006/main">
               <a:ext uri="{FF2B5EF4-FFF2-40B4-BE49-F238E27FC236}">
-                <a16:creationId xmlns:a16="http://schemas.microsoft.com/office/drawing/2014/main" id="{969C5E8F-E0BD-4DE0-8735-17C8E3CE8E71}"/>
+                <a16:creationId xmlns:a16="http://schemas.microsoft.com/office/drawing/2014/main" id="{9ABFDCE8-C331-4E5B-A0F0-3F66DCC26488}"/>
               </a:ext>
             </a:extLst>
           </p:cNvPr>
@@ -12722,7 +12757,7 @@
         </p:nvSpPr>
         <p:spPr>
           <a:xfrm xmlns:a="http://schemas.openxmlformats.org/drawingml/2006/main">
-            <a:off x="12291670" y="7499366"/>
+            <a:off x="12291670" y="7423166"/>
             <a:ext cx="1158925" cy="379333"/>
           </a:xfrm>
           <a:prstGeom xmlns:a="http://schemas.openxmlformats.org/drawingml/2006/main" prst="rect">
@@ -12868,7 +12903,7 @@
     </p:spTree>
     <p:extLst>
       <p:ext uri="{BB962C8B-B14F-4D97-AF65-F5344CB8AC3E}">
-        <p14:creationId xmlns:p14="http://schemas.microsoft.com/office/powerpoint/2010/main" val="119715419"/>
+        <p14:creationId xmlns:p14="http://schemas.microsoft.com/office/powerpoint/2010/main" val="1895952400"/>
       </p:ext>
     </p:extLst>
   </p:cSld>
@@ -12896,10 +12931,10 @@
       </p:grpSpPr>
       <p:sp>
         <p:nvSpPr>
-          <p:cNvPr id="15" name="f66">
+          <p:cNvPr id="18" name="f67">
             <a:extLst xmlns:a="http://schemas.openxmlformats.org/drawingml/2006/main">
               <a:ext uri="{FF2B5EF4-FFF2-40B4-BE49-F238E27FC236}">
-                <a16:creationId xmlns:a16="http://schemas.microsoft.com/office/drawing/2014/main" id="{43058FA7-C864-499F-88DC-DFAEEE3D0D99}"/>
+                <a16:creationId xmlns:a16="http://schemas.microsoft.com/office/drawing/2014/main" id="{72F595FC-6C11-4064-AF97-DBC30E8D42C8}"/>
               </a:ext>
             </a:extLst>
           </p:cNvPr>
@@ -13055,10 +13090,10 @@
       </p:sp>
       <p:sp>
         <p:nvSpPr>
-          <p:cNvPr id="2" name="f67">
+          <p:cNvPr id="2" name="f68">
             <a:extLst xmlns:a="http://schemas.openxmlformats.org/drawingml/2006/main">
               <a:ext uri="{FF2B5EF4-FFF2-40B4-BE49-F238E27FC236}">
-                <a16:creationId xmlns:a16="http://schemas.microsoft.com/office/drawing/2014/main" id="{787545C4-0DAE-443E-A322-987EF62AAF2E}"/>
+                <a16:creationId xmlns:a16="http://schemas.microsoft.com/office/drawing/2014/main" id="{27E25A22-2BA3-4A1B-97CD-35503369AC65}"/>
               </a:ext>
             </a:extLst>
           </p:cNvPr>
@@ -13214,10 +13249,10 @@
       </p:sp>
       <p:sp>
         <p:nvSpPr>
-          <p:cNvPr id="3" name="f68">
+          <p:cNvPr id="3" name="f69">
             <a:extLst xmlns:a="http://schemas.openxmlformats.org/drawingml/2006/main">
               <a:ext uri="{FF2B5EF4-FFF2-40B4-BE49-F238E27FC236}">
-                <a16:creationId xmlns:a16="http://schemas.microsoft.com/office/drawing/2014/main" id="{422F3652-923E-408B-B2B4-ED312BAE112D}"/>
+                <a16:creationId xmlns:a16="http://schemas.microsoft.com/office/drawing/2014/main" id="{2660EA6F-9201-4660-B4C5-B69C1926C22B}"/>
               </a:ext>
             </a:extLst>
           </p:cNvPr>
@@ -13373,10 +13408,10 @@
       </p:sp>
       <p:sp>
         <p:nvSpPr>
-          <p:cNvPr id="4" name="f69">
+          <p:cNvPr id="4" name="f70">
             <a:extLst xmlns:a="http://schemas.openxmlformats.org/drawingml/2006/main">
               <a:ext uri="{FF2B5EF4-FFF2-40B4-BE49-F238E27FC236}">
-                <a16:creationId xmlns:a16="http://schemas.microsoft.com/office/drawing/2014/main" id="{E8A6D404-65B1-4330-858A-3753C75A09B5}"/>
+                <a16:creationId xmlns:a16="http://schemas.microsoft.com/office/drawing/2014/main" id="{01AD7E28-05FB-4A88-9BB2-4206E0B398B0}"/>
               </a:ext>
             </a:extLst>
           </p:cNvPr>
@@ -13532,10 +13567,10 @@
       </p:sp>
       <p:sp>
         <p:nvSpPr>
-          <p:cNvPr id="5" name="f101">
+          <p:cNvPr id="5" name="f100">
             <a:extLst xmlns:a="http://schemas.openxmlformats.org/drawingml/2006/main">
               <a:ext uri="{FF2B5EF4-FFF2-40B4-BE49-F238E27FC236}">
-                <a16:creationId xmlns:a16="http://schemas.microsoft.com/office/drawing/2014/main" id="{3D0715D7-2FD7-4D6E-AC11-E7CC5A2DFCEC}"/>
+                <a16:creationId xmlns:a16="http://schemas.microsoft.com/office/drawing/2014/main" id="{87BD0C04-1B4C-4045-94BD-6C443B31941A}"/>
               </a:ext>
             </a:extLst>
           </p:cNvPr>
@@ -13691,10 +13726,10 @@
       </p:sp>
       <p:sp>
         <p:nvSpPr>
-          <p:cNvPr id="6" name="f102">
+          <p:cNvPr id="6" name="f101">
             <a:extLst xmlns:a="http://schemas.openxmlformats.org/drawingml/2006/main">
               <a:ext uri="{FF2B5EF4-FFF2-40B4-BE49-F238E27FC236}">
-                <a16:creationId xmlns:a16="http://schemas.microsoft.com/office/drawing/2014/main" id="{4C26CCCE-A063-490B-A175-CA2A1DB3650B}"/>
+                <a16:creationId xmlns:a16="http://schemas.microsoft.com/office/drawing/2014/main" id="{EBF63B51-3392-4254-87D3-22E423D032ED}"/>
               </a:ext>
             </a:extLst>
           </p:cNvPr>
@@ -13726,10 +13761,10 @@
       </p:sp>
       <p:sp>
         <p:nvSpPr>
-          <p:cNvPr id="7" name="f103">
+          <p:cNvPr id="7" name="f102">
             <a:extLst xmlns:a="http://schemas.openxmlformats.org/drawingml/2006/main">
               <a:ext uri="{FF2B5EF4-FFF2-40B4-BE49-F238E27FC236}">
-                <a16:creationId xmlns:a16="http://schemas.microsoft.com/office/drawing/2014/main" id="{2013D035-2096-4AFD-901E-A10E058D8264}"/>
+                <a16:creationId xmlns:a16="http://schemas.microsoft.com/office/drawing/2014/main" id="{7EC9D765-7288-479C-AC95-0CEC02B593D3}"/>
               </a:ext>
             </a:extLst>
           </p:cNvPr>
@@ -13740,7 +13775,7 @@
         </p:nvSpPr>
         <p:spPr>
           <a:xfrm xmlns:a="http://schemas.openxmlformats.org/drawingml/2006/main">
-            <a:off x="1295400" y="3981450"/>
+            <a:off x="1295400" y="4324350"/>
             <a:ext cx="6781800" cy="419100"/>
           </a:xfrm>
           <a:prstGeom xmlns:a="http://schemas.openxmlformats.org/drawingml/2006/main" prst="rect">
@@ -13885,10 +13920,10 @@
       </p:sp>
       <p:sp>
         <p:nvSpPr>
-          <p:cNvPr id="8" name="f104">
+          <p:cNvPr id="8" name="f103">
             <a:extLst xmlns:a="http://schemas.openxmlformats.org/drawingml/2006/main">
               <a:ext uri="{FF2B5EF4-FFF2-40B4-BE49-F238E27FC236}">
-                <a16:creationId xmlns:a16="http://schemas.microsoft.com/office/drawing/2014/main" id="{3DB7B25C-D78D-4496-AD91-8F20D6A7BF23}"/>
+                <a16:creationId xmlns:a16="http://schemas.microsoft.com/office/drawing/2014/main" id="{6E2F1DCA-5179-4C99-B0DC-4FE19B8B840F}"/>
               </a:ext>
             </a:extLst>
           </p:cNvPr>
@@ -13899,8 +13934,8 @@
         </p:nvSpPr>
         <p:spPr>
           <a:xfrm xmlns:a="http://schemas.openxmlformats.org/drawingml/2006/main">
-            <a:off x="1295400" y="4724400"/>
-            <a:ext cx="6781800" cy="1247775"/>
+            <a:off x="1295400" y="4752975"/>
+            <a:ext cx="6781800" cy="800100"/>
           </a:xfrm>
           <a:prstGeom xmlns:a="http://schemas.openxmlformats.org/drawingml/2006/main" prst="rect">
             <a:avLst/>
@@ -14063,21 +14098,157 @@
               <a:t>  nrf.discovery.response AS response</a:t>
             </a:r>
           </a:p>
-          <a:p xmlns:a="http://schemas.openxmlformats.org/drawingml/2006/main">
-            <a:pPr algn="l">
-              <a:defRPr sz="2100" b="0">
-                <a:solidFill>
-                  <a:srgbClr val="182536"/>
+        </p:txBody>
+      </p:sp>
+      <p:sp>
+        <p:nvSpPr>
+          <p:cNvPr id="9" name="f104">
+            <a:extLst xmlns:a="http://schemas.openxmlformats.org/drawingml/2006/main">
+              <a:ext uri="{FF2B5EF4-FFF2-40B4-BE49-F238E27FC236}">
+                <a16:creationId xmlns:a16="http://schemas.microsoft.com/office/drawing/2014/main" id="{714FA812-2904-4357-9F79-4B440600F2CD}"/>
+              </a:ext>
+            </a:extLst>
+          </p:cNvPr>
+          <p:cNvSpPr>
+            <a:spLocks xmlns:a="http://schemas.openxmlformats.org/drawingml/2006/main" noGrp="1"/>
+          </p:cNvSpPr>
+          <p:nvPr/>
+        </p:nvSpPr>
+        <p:spPr>
+          <a:xfrm xmlns:a="http://schemas.openxmlformats.org/drawingml/2006/main">
+            <a:off x="1295400" y="5467350"/>
+            <a:ext cx="6781800" cy="381000"/>
+          </a:xfrm>
+          <a:prstGeom xmlns:a="http://schemas.openxmlformats.org/drawingml/2006/main" prst="rect">
+            <a:avLst/>
+          </a:prstGeom>
+          <a:noFill xmlns:a="http://schemas.openxmlformats.org/drawingml/2006/main"/>
+          <a:ln xmlns:a="http://schemas.openxmlformats.org/drawingml/2006/main" w="0">
+            <a:noFill/>
+            <a:prstDash val="solid"/>
+          </a:ln>
+        </p:spPr>
+        <p:txBody>
+          <a:bodyPr xmlns:a="http://schemas.openxmlformats.org/drawingml/2006/main" wrap="none" lIns="0" tIns="0" rIns="0" bIns="0" anchor="t">
+            <a:noAutofit/>
+          </a:bodyPr>
+          <a:lstStyle xmlns:a="http://schemas.openxmlformats.org/drawingml/2006/main">
+            <a:defPPr algn="l">
+              <a:defRPr sz="2400" b="1">
+                <a:solidFill>
+                  <a:srgbClr val="4264D0"/>
                 </a:solidFill>
                 <a:latin typeface="DejaVu Sans Mono"/>
                 <a:ea typeface="DejaVu Sans Mono"/>
                 <a:cs typeface="DejaVu Sans Mono"/>
               </a:defRPr>
+            </a:defPPr>
+            <a:lvl1pPr algn="l">
+              <a:defRPr sz="2400" b="1">
+                <a:solidFill>
+                  <a:srgbClr val="4264D0"/>
+                </a:solidFill>
+                <a:latin typeface="DejaVu Sans Mono"/>
+                <a:ea typeface="DejaVu Sans Mono"/>
+                <a:cs typeface="DejaVu Sans Mono"/>
+              </a:defRPr>
+            </a:lvl1pPr>
+            <a:lvl2pPr algn="l">
+              <a:defRPr sz="2400" b="1">
+                <a:solidFill>
+                  <a:srgbClr val="4264D0"/>
+                </a:solidFill>
+                <a:latin typeface="DejaVu Sans Mono"/>
+                <a:ea typeface="DejaVu Sans Mono"/>
+                <a:cs typeface="DejaVu Sans Mono"/>
+              </a:defRPr>
+            </a:lvl2pPr>
+            <a:lvl3pPr algn="l">
+              <a:defRPr sz="2400" b="1">
+                <a:solidFill>
+                  <a:srgbClr val="4264D0"/>
+                </a:solidFill>
+                <a:latin typeface="DejaVu Sans Mono"/>
+                <a:ea typeface="DejaVu Sans Mono"/>
+                <a:cs typeface="DejaVu Sans Mono"/>
+              </a:defRPr>
+            </a:lvl3pPr>
+            <a:lvl4pPr algn="l">
+              <a:defRPr sz="2400" b="1">
+                <a:solidFill>
+                  <a:srgbClr val="4264D0"/>
+                </a:solidFill>
+                <a:latin typeface="DejaVu Sans Mono"/>
+                <a:ea typeface="DejaVu Sans Mono"/>
+                <a:cs typeface="DejaVu Sans Mono"/>
+              </a:defRPr>
+            </a:lvl4pPr>
+            <a:lvl5pPr algn="l">
+              <a:defRPr sz="2400" b="1">
+                <a:solidFill>
+                  <a:srgbClr val="4264D0"/>
+                </a:solidFill>
+                <a:latin typeface="DejaVu Sans Mono"/>
+                <a:ea typeface="DejaVu Sans Mono"/>
+                <a:cs typeface="DejaVu Sans Mono"/>
+              </a:defRPr>
+            </a:lvl5pPr>
+            <a:lvl6pPr algn="l">
+              <a:defRPr sz="2400" b="1">
+                <a:solidFill>
+                  <a:srgbClr val="4264D0"/>
+                </a:solidFill>
+                <a:latin typeface="DejaVu Sans Mono"/>
+                <a:ea typeface="DejaVu Sans Mono"/>
+                <a:cs typeface="DejaVu Sans Mono"/>
+              </a:defRPr>
+            </a:lvl6pPr>
+            <a:lvl7pPr algn="l">
+              <a:defRPr sz="2400" b="1">
+                <a:solidFill>
+                  <a:srgbClr val="4264D0"/>
+                </a:solidFill>
+                <a:latin typeface="DejaVu Sans Mono"/>
+                <a:ea typeface="DejaVu Sans Mono"/>
+                <a:cs typeface="DejaVu Sans Mono"/>
+              </a:defRPr>
+            </a:lvl7pPr>
+            <a:lvl8pPr algn="l">
+              <a:defRPr sz="2400" b="1">
+                <a:solidFill>
+                  <a:srgbClr val="4264D0"/>
+                </a:solidFill>
+                <a:latin typeface="DejaVu Sans Mono"/>
+                <a:ea typeface="DejaVu Sans Mono"/>
+                <a:cs typeface="DejaVu Sans Mono"/>
+              </a:defRPr>
+            </a:lvl8pPr>
+            <a:lvl9pPr algn="l">
+              <a:defRPr sz="2400" b="1">
+                <a:solidFill>
+                  <a:srgbClr val="4264D0"/>
+                </a:solidFill>
+                <a:latin typeface="DejaVu Sans Mono"/>
+                <a:ea typeface="DejaVu Sans Mono"/>
+                <a:cs typeface="DejaVu Sans Mono"/>
+              </a:defRPr>
+            </a:lvl9pPr>
+          </a:lstStyle>
+          <a:p xmlns:a="http://schemas.openxmlformats.org/drawingml/2006/main">
+            <a:pPr algn="l">
+              <a:defRPr sz="2400" b="1">
+                <a:solidFill>
+                  <a:srgbClr val="4264D0"/>
+                </a:solidFill>
+                <a:latin typeface="DejaVu Sans Mono"/>
+                <a:ea typeface="DejaVu Sans Mono"/>
+                <a:cs typeface="DejaVu Sans Mono"/>
+              </a:defRPr>
             </a:pPr>
             <a:r>
-              <a:rPr sz="2100" b="0">
-                <a:solidFill>
-                  <a:srgbClr val="182536"/>
+              <a:rPr sz="2400" b="1">
+                <a:solidFill>
+                  <a:srgbClr val="4264D0"/>
                 </a:solidFill>
                 <a:latin typeface="DejaVu Sans Mono"/>
                 <a:ea typeface="DejaVu Sans Mono"/>
@@ -14090,10 +14261,10 @@
       </p:sp>
       <p:sp>
         <p:nvSpPr>
-          <p:cNvPr id="9" name="f105">
+          <p:cNvPr id="10" name="f105">
             <a:extLst xmlns:a="http://schemas.openxmlformats.org/drawingml/2006/main">
               <a:ext uri="{FF2B5EF4-FFF2-40B4-BE49-F238E27FC236}">
-                <a16:creationId xmlns:a16="http://schemas.microsoft.com/office/drawing/2014/main" id="{AA95201A-94D6-44C9-877A-84AAFB607F51}"/>
+                <a16:creationId xmlns:a16="http://schemas.microsoft.com/office/drawing/2014/main" id="{C881A688-B2FA-46B9-B80C-C16506BFCA08}"/>
               </a:ext>
             </a:extLst>
           </p:cNvPr>
@@ -14249,10 +14420,10 @@
       </p:sp>
       <p:sp>
         <p:nvSpPr>
-          <p:cNvPr id="10" name="f106">
+          <p:cNvPr id="11" name="f106">
             <a:extLst xmlns:a="http://schemas.openxmlformats.org/drawingml/2006/main">
               <a:ext uri="{FF2B5EF4-FFF2-40B4-BE49-F238E27FC236}">
-                <a16:creationId xmlns:a16="http://schemas.microsoft.com/office/drawing/2014/main" id="{94C6B804-9B3D-4CC3-8B06-5F95A97BEB2A}"/>
+                <a16:creationId xmlns:a16="http://schemas.microsoft.com/office/drawing/2014/main" id="{E4704E75-AE8E-46CA-A3A4-83B5547165DD}"/>
               </a:ext>
             </a:extLst>
           </p:cNvPr>
@@ -14263,7 +14434,7 @@
         </p:nvSpPr>
         <p:spPr>
           <a:xfrm xmlns:a="http://schemas.openxmlformats.org/drawingml/2006/main">
-            <a:off x="8382000" y="5010150"/>
+            <a:off x="8382000" y="5762625"/>
             <a:ext cx="1428750" cy="171450"/>
           </a:xfrm>
           <a:prstGeom xmlns:a="http://schemas.openxmlformats.org/drawingml/2006/main" prst="leftArrow">
@@ -14280,10 +14451,10 @@
       </p:sp>
       <p:sp>
         <p:nvSpPr>
-          <p:cNvPr id="11" name="f107">
+          <p:cNvPr id="12" name="f107">
             <a:extLst xmlns:a="http://schemas.openxmlformats.org/drawingml/2006/main">
               <a:ext uri="{FF2B5EF4-FFF2-40B4-BE49-F238E27FC236}">
-                <a16:creationId xmlns:a16="http://schemas.microsoft.com/office/drawing/2014/main" id="{F1CA1B00-3C4F-49DB-ADA5-C5959B2DD3DB}"/>
+                <a16:creationId xmlns:a16="http://schemas.microsoft.com/office/drawing/2014/main" id="{A1FA62F4-585E-4A8C-84BD-80CA0B2CFB62}"/>
               </a:ext>
             </a:extLst>
           </p:cNvPr>
@@ -14294,7 +14465,7 @@
         </p:nvSpPr>
         <p:spPr>
           <a:xfrm xmlns:a="http://schemas.openxmlformats.org/drawingml/2006/main">
-            <a:off x="8382000" y="7105650"/>
+            <a:off x="8382000" y="7048500"/>
             <a:ext cx="1428750" cy="171450"/>
           </a:xfrm>
           <a:prstGeom xmlns:a="http://schemas.openxmlformats.org/drawingml/2006/main" prst="leftArrow">
@@ -14311,10 +14482,10 @@
       </p:sp>
       <p:sp>
         <p:nvSpPr>
-          <p:cNvPr id="12" name="f108">
+          <p:cNvPr id="13" name="f108">
             <a:extLst xmlns:a="http://schemas.openxmlformats.org/drawingml/2006/main">
               <a:ext uri="{FF2B5EF4-FFF2-40B4-BE49-F238E27FC236}">
-                <a16:creationId xmlns:a16="http://schemas.microsoft.com/office/drawing/2014/main" id="{89EB5753-E646-4C71-B069-4434D72B6D27}"/>
+                <a16:creationId xmlns:a16="http://schemas.microsoft.com/office/drawing/2014/main" id="{6E1A8AEE-EBF3-491F-BC96-733D12154F19}"/>
               </a:ext>
             </a:extLst>
           </p:cNvPr>
@@ -14470,10 +14641,10 @@
       </p:sp>
       <p:sp>
         <p:nvSpPr>
-          <p:cNvPr id="13" name="f109">
+          <p:cNvPr id="14" name="f109">
             <a:extLst xmlns:a="http://schemas.openxmlformats.org/drawingml/2006/main">
               <a:ext uri="{FF2B5EF4-FFF2-40B4-BE49-F238E27FC236}">
-                <a16:creationId xmlns:a16="http://schemas.microsoft.com/office/drawing/2014/main" id="{A3B97DBA-1516-4642-A25D-361154BA1FAE}"/>
+                <a16:creationId xmlns:a16="http://schemas.microsoft.com/office/drawing/2014/main" id="{F0A1465E-9CDA-44BD-9529-3F7C974BC812}"/>
               </a:ext>
             </a:extLst>
           </p:cNvPr>
@@ -14484,8 +14655,43 @@
         </p:nvSpPr>
         <p:spPr>
           <a:xfrm xmlns:a="http://schemas.openxmlformats.org/drawingml/2006/main">
-            <a:off x="10125075" y="4591050"/>
-            <a:ext cx="4048125" cy="885825"/>
+            <a:off x="10001250" y="5238750"/>
+            <a:ext cx="4171950" cy="1219200"/>
+          </a:xfrm>
+          <a:prstGeom xmlns:a="http://schemas.openxmlformats.org/drawingml/2006/main" prst="roundRect">
+            <a:avLst>
+              <a:gd name="adj" fmla="val 10938"/>
+            </a:avLst>
+          </a:prstGeom>
+          <a:solidFill xmlns:a="http://schemas.openxmlformats.org/drawingml/2006/main">
+            <a:srgbClr val="F0F4FF"/>
+          </a:solidFill>
+          <a:ln xmlns:a="http://schemas.openxmlformats.org/drawingml/2006/main" w="17145">
+            <a:solidFill>
+              <a:srgbClr val="4264D0"/>
+            </a:solidFill>
+            <a:prstDash val="solid"/>
+          </a:ln>
+        </p:spPr>
+      </p:sp>
+      <p:sp>
+        <p:nvSpPr>
+          <p:cNvPr id="15" name="f110">
+            <a:extLst xmlns:a="http://schemas.openxmlformats.org/drawingml/2006/main">
+              <a:ext uri="{FF2B5EF4-FFF2-40B4-BE49-F238E27FC236}">
+                <a16:creationId xmlns:a16="http://schemas.microsoft.com/office/drawing/2014/main" id="{E774B7B2-E26F-473C-9D06-11E6A1633FC9}"/>
+              </a:ext>
+            </a:extLst>
+          </p:cNvPr>
+          <p:cNvSpPr>
+            <a:spLocks xmlns:a="http://schemas.openxmlformats.org/drawingml/2006/main" noGrp="1"/>
+          </p:cNvSpPr>
+          <p:nvPr/>
+        </p:nvSpPr>
+        <p:spPr>
+          <a:xfrm xmlns:a="http://schemas.openxmlformats.org/drawingml/2006/main">
+            <a:off x="10191750" y="5486400"/>
+            <a:ext cx="3790950" cy="885825"/>
           </a:xfrm>
           <a:prstGeom xmlns:a="http://schemas.openxmlformats.org/drawingml/2006/main" prst="rect">
             <a:avLst/>
@@ -14501,7 +14707,7 @@
             <a:noAutofit/>
           </a:bodyPr>
           <a:lstStyle xmlns:a="http://schemas.openxmlformats.org/drawingml/2006/main">
-            <a:defPPr algn="l">
+            <a:defPPr algn="ctr">
               <a:defRPr sz="2700" b="1">
                 <a:solidFill>
                   <a:srgbClr val="4264D0"/>
@@ -14511,7 +14717,7 @@
                 <a:cs typeface="Nimbus Sans"/>
               </a:defRPr>
             </a:defPPr>
-            <a:lvl1pPr algn="l">
+            <a:lvl1pPr algn="ctr">
               <a:defRPr sz="2700" b="1">
                 <a:solidFill>
                   <a:srgbClr val="4264D0"/>
@@ -14521,7 +14727,7 @@
                 <a:cs typeface="Nimbus Sans"/>
               </a:defRPr>
             </a:lvl1pPr>
-            <a:lvl2pPr algn="l">
+            <a:lvl2pPr algn="ctr">
               <a:defRPr sz="2700" b="1">
                 <a:solidFill>
                   <a:srgbClr val="4264D0"/>
@@ -14531,7 +14737,7 @@
                 <a:cs typeface="Nimbus Sans"/>
               </a:defRPr>
             </a:lvl2pPr>
-            <a:lvl3pPr algn="l">
+            <a:lvl3pPr algn="ctr">
               <a:defRPr sz="2700" b="1">
                 <a:solidFill>
                   <a:srgbClr val="4264D0"/>
@@ -14541,7 +14747,7 @@
                 <a:cs typeface="Nimbus Sans"/>
               </a:defRPr>
             </a:lvl3pPr>
-            <a:lvl4pPr algn="l">
+            <a:lvl4pPr algn="ctr">
               <a:defRPr sz="2700" b="1">
                 <a:solidFill>
                   <a:srgbClr val="4264D0"/>
@@ -14551,7 +14757,7 @@
                 <a:cs typeface="Nimbus Sans"/>
               </a:defRPr>
             </a:lvl4pPr>
-            <a:lvl5pPr algn="l">
+            <a:lvl5pPr algn="ctr">
               <a:defRPr sz="2700" b="1">
                 <a:solidFill>
                   <a:srgbClr val="4264D0"/>
@@ -14561,7 +14767,7 @@
                 <a:cs typeface="Nimbus Sans"/>
               </a:defRPr>
             </a:lvl5pPr>
-            <a:lvl6pPr algn="l">
+            <a:lvl6pPr algn="ctr">
               <a:defRPr sz="2700" b="1">
                 <a:solidFill>
                   <a:srgbClr val="4264D0"/>
@@ -14571,7 +14777,7 @@
                 <a:cs typeface="Nimbus Sans"/>
               </a:defRPr>
             </a:lvl6pPr>
-            <a:lvl7pPr algn="l">
+            <a:lvl7pPr algn="ctr">
               <a:defRPr sz="2700" b="1">
                 <a:solidFill>
                   <a:srgbClr val="4264D0"/>
@@ -14581,7 +14787,7 @@
                 <a:cs typeface="Nimbus Sans"/>
               </a:defRPr>
             </a:lvl7pPr>
-            <a:lvl8pPr algn="l">
+            <a:lvl8pPr algn="ctr">
               <a:defRPr sz="2700" b="1">
                 <a:solidFill>
                   <a:srgbClr val="4264D0"/>
@@ -14591,7 +14797,7 @@
                 <a:cs typeface="Nimbus Sans"/>
               </a:defRPr>
             </a:lvl8pPr>
-            <a:lvl9pPr algn="l">
+            <a:lvl9pPr algn="ctr">
               <a:defRPr sz="2700" b="1">
                 <a:solidFill>
                   <a:srgbClr val="4264D0"/>
@@ -14603,7 +14809,7 @@
             </a:lvl9pPr>
           </a:lstStyle>
           <a:p xmlns:a="http://schemas.openxmlformats.org/drawingml/2006/main">
-            <a:pPr algn="l">
+            <a:pPr algn="ctr">
               <a:defRPr sz="2700" b="1">
                 <a:solidFill>
                   <a:srgbClr val="4264D0"/>
@@ -14626,7 +14832,7 @@
             </a:r>
           </a:p>
           <a:p xmlns:a="http://schemas.openxmlformats.org/drawingml/2006/main">
-            <a:pPr algn="l">
+            <a:pPr algn="ctr">
               <a:defRPr sz="2700" b="1">
                 <a:solidFill>
                   <a:srgbClr val="4264D0"/>
@@ -14652,10 +14858,10 @@
       </p:sp>
       <p:sp>
         <p:nvSpPr>
-          <p:cNvPr id="14" name="f110">
+          <p:cNvPr id="16" name="f111">
             <a:extLst xmlns:a="http://schemas.openxmlformats.org/drawingml/2006/main">
               <a:ext uri="{FF2B5EF4-FFF2-40B4-BE49-F238E27FC236}">
-                <a16:creationId xmlns:a16="http://schemas.microsoft.com/office/drawing/2014/main" id="{B40FD487-0900-486D-9E58-877DF8B06F4D}"/>
+                <a16:creationId xmlns:a16="http://schemas.microsoft.com/office/drawing/2014/main" id="{5B4EFFFE-837D-43D7-80D3-6DE1C9627DA5}"/>
               </a:ext>
             </a:extLst>
           </p:cNvPr>
@@ -14666,8 +14872,43 @@
         </p:nvSpPr>
         <p:spPr>
           <a:xfrm xmlns:a="http://schemas.openxmlformats.org/drawingml/2006/main">
-            <a:off x="10125075" y="6610350"/>
-            <a:ext cx="4048125" cy="885825"/>
+            <a:off x="10001250" y="6524625"/>
+            <a:ext cx="4171950" cy="1219200"/>
+          </a:xfrm>
+          <a:prstGeom xmlns:a="http://schemas.openxmlformats.org/drawingml/2006/main" prst="roundRect">
+            <a:avLst>
+              <a:gd name="adj" fmla="val 10938"/>
+            </a:avLst>
+          </a:prstGeom>
+          <a:solidFill xmlns:a="http://schemas.openxmlformats.org/drawingml/2006/main">
+            <a:srgbClr val="EEF8F3"/>
+          </a:solidFill>
+          <a:ln xmlns:a="http://schemas.openxmlformats.org/drawingml/2006/main" w="17145">
+            <a:solidFill>
+              <a:srgbClr val="278766"/>
+            </a:solidFill>
+            <a:prstDash val="solid"/>
+          </a:ln>
+        </p:spPr>
+      </p:sp>
+      <p:sp>
+        <p:nvSpPr>
+          <p:cNvPr id="17" name="f112">
+            <a:extLst xmlns:a="http://schemas.openxmlformats.org/drawingml/2006/main">
+              <a:ext uri="{FF2B5EF4-FFF2-40B4-BE49-F238E27FC236}">
+                <a16:creationId xmlns:a16="http://schemas.microsoft.com/office/drawing/2014/main" id="{8B34F5B1-437E-4E7D-A840-429630BAAA42}"/>
+              </a:ext>
+            </a:extLst>
+          </p:cNvPr>
+          <p:cNvSpPr>
+            <a:spLocks xmlns:a="http://schemas.openxmlformats.org/drawingml/2006/main" noGrp="1"/>
+          </p:cNvSpPr>
+          <p:nvPr/>
+        </p:nvSpPr>
+        <p:spPr>
+          <a:xfrm xmlns:a="http://schemas.openxmlformats.org/drawingml/2006/main">
+            <a:off x="10191750" y="6762750"/>
+            <a:ext cx="3790950" cy="885825"/>
           </a:xfrm>
           <a:prstGeom xmlns:a="http://schemas.openxmlformats.org/drawingml/2006/main" prst="rect">
             <a:avLst/>
@@ -14683,7 +14924,7 @@
             <a:noAutofit/>
           </a:bodyPr>
           <a:lstStyle xmlns:a="http://schemas.openxmlformats.org/drawingml/2006/main">
-            <a:defPPr algn="l">
+            <a:defPPr algn="ctr">
               <a:defRPr sz="2700" b="1">
                 <a:solidFill>
                   <a:srgbClr val="278766"/>
@@ -14693,7 +14934,7 @@
                 <a:cs typeface="Nimbus Sans"/>
               </a:defRPr>
             </a:defPPr>
-            <a:lvl1pPr algn="l">
+            <a:lvl1pPr algn="ctr">
               <a:defRPr sz="2700" b="1">
                 <a:solidFill>
                   <a:srgbClr val="278766"/>
@@ -14703,7 +14944,7 @@
                 <a:cs typeface="Nimbus Sans"/>
               </a:defRPr>
             </a:lvl1pPr>
-            <a:lvl2pPr algn="l">
+            <a:lvl2pPr algn="ctr">
               <a:defRPr sz="2700" b="1">
                 <a:solidFill>
                   <a:srgbClr val="278766"/>
@@ -14713,7 +14954,7 @@
                 <a:cs typeface="Nimbus Sans"/>
               </a:defRPr>
             </a:lvl2pPr>
-            <a:lvl3pPr algn="l">
+            <a:lvl3pPr algn="ctr">
               <a:defRPr sz="2700" b="1">
                 <a:solidFill>
                   <a:srgbClr val="278766"/>
@@ -14723,7 +14964,7 @@
                 <a:cs typeface="Nimbus Sans"/>
               </a:defRPr>
             </a:lvl3pPr>
-            <a:lvl4pPr algn="l">
+            <a:lvl4pPr algn="ctr">
               <a:defRPr sz="2700" b="1">
                 <a:solidFill>
                   <a:srgbClr val="278766"/>
@@ -14733,7 +14974,7 @@
                 <a:cs typeface="Nimbus Sans"/>
               </a:defRPr>
             </a:lvl4pPr>
-            <a:lvl5pPr algn="l">
+            <a:lvl5pPr algn="ctr">
               <a:defRPr sz="2700" b="1">
                 <a:solidFill>
                   <a:srgbClr val="278766"/>
@@ -14743,7 +14984,7 @@
                 <a:cs typeface="Nimbus Sans"/>
               </a:defRPr>
             </a:lvl5pPr>
-            <a:lvl6pPr algn="l">
+            <a:lvl6pPr algn="ctr">
               <a:defRPr sz="2700" b="1">
                 <a:solidFill>
                   <a:srgbClr val="278766"/>
@@ -14753,7 +14994,7 @@
                 <a:cs typeface="Nimbus Sans"/>
               </a:defRPr>
             </a:lvl6pPr>
-            <a:lvl7pPr algn="l">
+            <a:lvl7pPr algn="ctr">
               <a:defRPr sz="2700" b="1">
                 <a:solidFill>
                   <a:srgbClr val="278766"/>
@@ -14763,7 +15004,7 @@
                 <a:cs typeface="Nimbus Sans"/>
               </a:defRPr>
             </a:lvl7pPr>
-            <a:lvl8pPr algn="l">
+            <a:lvl8pPr algn="ctr">
               <a:defRPr sz="2700" b="1">
                 <a:solidFill>
                   <a:srgbClr val="278766"/>
@@ -14773,7 +15014,7 @@
                 <a:cs typeface="Nimbus Sans"/>
               </a:defRPr>
             </a:lvl8pPr>
-            <a:lvl9pPr algn="l">
+            <a:lvl9pPr algn="ctr">
               <a:defRPr sz="2700" b="1">
                 <a:solidFill>
                   <a:srgbClr val="278766"/>
@@ -14785,7 +15026,7 @@
             </a:lvl9pPr>
           </a:lstStyle>
           <a:p xmlns:a="http://schemas.openxmlformats.org/drawingml/2006/main">
-            <a:pPr algn="l">
+            <a:pPr algn="ctr">
               <a:defRPr sz="2700" b="1">
                 <a:solidFill>
                   <a:srgbClr val="278766"/>
@@ -14808,7 +15049,7 @@
             </a:r>
           </a:p>
           <a:p xmlns:a="http://schemas.openxmlformats.org/drawingml/2006/main">
-            <a:pPr algn="l">
+            <a:pPr algn="ctr">
               <a:defRPr sz="2700" b="1">
                 <a:solidFill>
                   <a:srgbClr val="278766"/>
@@ -14835,7 +15076,7 @@
     </p:spTree>
     <p:extLst>
       <p:ext uri="{BB962C8B-B14F-4D97-AF65-F5344CB8AC3E}">
-        <p14:creationId xmlns:p14="http://schemas.microsoft.com/office/powerpoint/2010/main" val="131112775"/>
+        <p14:creationId xmlns:p14="http://schemas.microsoft.com/office/powerpoint/2010/main" val="1541637811"/>
       </p:ext>
     </p:extLst>
   </p:cSld>
@@ -14866,7 +15107,7 @@
           <p:cNvPr id="15" name="">
             <a:extLst xmlns:a="http://schemas.openxmlformats.org/drawingml/2006/main">
               <a:ext uri="{FF2B5EF4-FFF2-40B4-BE49-F238E27FC236}">
-                <a16:creationId xmlns:a16="http://schemas.microsoft.com/office/drawing/2014/main" id="{7AD10B90-330F-4D10-86D9-BBBFAC06C48C}"/>
+                <a16:creationId xmlns:a16="http://schemas.microsoft.com/office/drawing/2014/main" id="{D0B6632A-DBCB-493D-8719-D638AFBE2666}"/>
               </a:ext>
             </a:extLst>
           </p:cNvPr>
@@ -14876,7 +15117,7 @@
           <p:nvPr/>
         </p:nvPicPr>
         <p:blipFill>
-          <a:blip xmlns:r="http://schemas.openxmlformats.org/officeDocument/2006/relationships" xmlns:a="http://schemas.openxmlformats.org/drawingml/2006/main" r:embed="R4de1066c172b40e2"/>
+          <a:blip xmlns:r="http://schemas.openxmlformats.org/officeDocument/2006/relationships" xmlns:a="http://schemas.openxmlformats.org/drawingml/2006/main" r:embed="R62d9280e03b749da"/>
           <a:stretch xmlns:a="http://schemas.openxmlformats.org/drawingml/2006/main"/>
         </p:blipFill>
         <p:spPr>
@@ -14891,10 +15132,10 @@
       </p:pic>
       <p:sp>
         <p:nvSpPr>
-          <p:cNvPr id="2" name="f112">
+          <p:cNvPr id="2" name="f114">
             <a:extLst xmlns:a="http://schemas.openxmlformats.org/drawingml/2006/main">
               <a:ext uri="{FF2B5EF4-FFF2-40B4-BE49-F238E27FC236}">
-                <a16:creationId xmlns:a16="http://schemas.microsoft.com/office/drawing/2014/main" id="{232B08FE-E8C9-4660-A165-CF5AE025F0D9}"/>
+                <a16:creationId xmlns:a16="http://schemas.microsoft.com/office/drawing/2014/main" id="{F61D5E52-4423-43E8-B3B4-6DE9653D4E5D}"/>
               </a:ext>
             </a:extLst>
           </p:cNvPr>
@@ -15050,10 +15291,10 @@
       </p:sp>
       <p:sp>
         <p:nvSpPr>
-          <p:cNvPr id="3" name="f113">
+          <p:cNvPr id="3" name="f115">
             <a:extLst xmlns:a="http://schemas.openxmlformats.org/drawingml/2006/main">
               <a:ext uri="{FF2B5EF4-FFF2-40B4-BE49-F238E27FC236}">
-                <a16:creationId xmlns:a16="http://schemas.microsoft.com/office/drawing/2014/main" id="{093BE9E5-F147-4EA3-85C4-6ACAAF984B9B}"/>
+                <a16:creationId xmlns:a16="http://schemas.microsoft.com/office/drawing/2014/main" id="{83F4455E-D87F-450A-BD12-B509EBF2349A}"/>
               </a:ext>
             </a:extLst>
           </p:cNvPr>
@@ -15209,10 +15450,10 @@
       </p:sp>
       <p:sp>
         <p:nvSpPr>
-          <p:cNvPr id="4" name="f114">
+          <p:cNvPr id="4" name="f116">
             <a:extLst xmlns:a="http://schemas.openxmlformats.org/drawingml/2006/main">
               <a:ext uri="{FF2B5EF4-FFF2-40B4-BE49-F238E27FC236}">
-                <a16:creationId xmlns:a16="http://schemas.microsoft.com/office/drawing/2014/main" id="{61623BE7-6C18-4A4C-A081-E7BD0D9798CD}"/>
+                <a16:creationId xmlns:a16="http://schemas.microsoft.com/office/drawing/2014/main" id="{047C964C-7490-45EB-9688-0B6156A22677}"/>
               </a:ext>
             </a:extLst>
           </p:cNvPr>
@@ -15368,10 +15609,10 @@
       </p:sp>
       <p:sp>
         <p:nvSpPr>
-          <p:cNvPr id="5" name="f115">
+          <p:cNvPr id="5" name="f117">
             <a:extLst xmlns:a="http://schemas.openxmlformats.org/drawingml/2006/main">
               <a:ext uri="{FF2B5EF4-FFF2-40B4-BE49-F238E27FC236}">
-                <a16:creationId xmlns:a16="http://schemas.microsoft.com/office/drawing/2014/main" id="{5FE4EC97-5763-4903-9425-A3CFC076EF51}"/>
+                <a16:creationId xmlns:a16="http://schemas.microsoft.com/office/drawing/2014/main" id="{412B506D-6568-4EA9-8960-E68F2D1E9720}"/>
               </a:ext>
             </a:extLst>
           </p:cNvPr>
@@ -15527,10 +15768,10 @@
       </p:sp>
       <p:sp>
         <p:nvSpPr>
-          <p:cNvPr id="6" name="f116">
+          <p:cNvPr id="6" name="f118">
             <a:extLst xmlns:a="http://schemas.openxmlformats.org/drawingml/2006/main">
               <a:ext uri="{FF2B5EF4-FFF2-40B4-BE49-F238E27FC236}">
-                <a16:creationId xmlns:a16="http://schemas.microsoft.com/office/drawing/2014/main" id="{F9BB6732-AF46-4A14-BFE6-411D30D84AC7}"/>
+                <a16:creationId xmlns:a16="http://schemas.microsoft.com/office/drawing/2014/main" id="{D9F21551-609C-4067-910A-A63E85635A18}"/>
               </a:ext>
             </a:extLst>
           </p:cNvPr>
@@ -15686,10 +15927,10 @@
       </p:sp>
       <p:sp>
         <p:nvSpPr>
-          <p:cNvPr id="7" name="f117">
+          <p:cNvPr id="7" name="f119">
             <a:extLst xmlns:a="http://schemas.openxmlformats.org/drawingml/2006/main">
               <a:ext uri="{FF2B5EF4-FFF2-40B4-BE49-F238E27FC236}">
-                <a16:creationId xmlns:a16="http://schemas.microsoft.com/office/drawing/2014/main" id="{3EB3DD03-560D-427A-89FD-8D5DF50D915D}"/>
+                <a16:creationId xmlns:a16="http://schemas.microsoft.com/office/drawing/2014/main" id="{0A09A49A-5105-430C-A9F2-5315EE955D3C}"/>
               </a:ext>
             </a:extLst>
           </p:cNvPr>
@@ -15845,10 +16086,10 @@
       </p:sp>
       <p:sp>
         <p:nvSpPr>
-          <p:cNvPr id="8" name="f118">
+          <p:cNvPr id="8" name="f120">
             <a:extLst xmlns:a="http://schemas.openxmlformats.org/drawingml/2006/main">
               <a:ext uri="{FF2B5EF4-FFF2-40B4-BE49-F238E27FC236}">
-                <a16:creationId xmlns:a16="http://schemas.microsoft.com/office/drawing/2014/main" id="{6D8873A4-9202-4FF3-B216-0694E9819175}"/>
+                <a16:creationId xmlns:a16="http://schemas.microsoft.com/office/drawing/2014/main" id="{39887648-BC46-4067-B007-17B8A193CA63}"/>
               </a:ext>
             </a:extLst>
           </p:cNvPr>
@@ -16004,10 +16245,10 @@
       </p:sp>
       <p:sp>
         <p:nvSpPr>
-          <p:cNvPr id="9" name="f119">
+          <p:cNvPr id="9" name="f121">
             <a:extLst xmlns:a="http://schemas.openxmlformats.org/drawingml/2006/main">
               <a:ext uri="{FF2B5EF4-FFF2-40B4-BE49-F238E27FC236}">
-                <a16:creationId xmlns:a16="http://schemas.microsoft.com/office/drawing/2014/main" id="{DB094D49-49C4-42DA-8855-5FC8EC695601}"/>
+                <a16:creationId xmlns:a16="http://schemas.microsoft.com/office/drawing/2014/main" id="{084856EE-99D6-4F7B-93BD-5A9B2C3F417F}"/>
               </a:ext>
             </a:extLst>
           </p:cNvPr>
@@ -16163,10 +16404,10 @@
       </p:sp>
       <p:sp>
         <p:nvSpPr>
-          <p:cNvPr id="10" name="f120">
+          <p:cNvPr id="10" name="f122">
             <a:extLst xmlns:a="http://schemas.openxmlformats.org/drawingml/2006/main">
               <a:ext uri="{FF2B5EF4-FFF2-40B4-BE49-F238E27FC236}">
-                <a16:creationId xmlns:a16="http://schemas.microsoft.com/office/drawing/2014/main" id="{67419D08-5CC1-4D41-8AA4-D5AEC21C1E0D}"/>
+                <a16:creationId xmlns:a16="http://schemas.microsoft.com/office/drawing/2014/main" id="{F1E09BFA-9896-4C53-AE72-24CC03E5211C}"/>
               </a:ext>
             </a:extLst>
           </p:cNvPr>
@@ -16322,10 +16563,10 @@
       </p:sp>
       <p:sp>
         <p:nvSpPr>
-          <p:cNvPr id="11" name="f121">
+          <p:cNvPr id="11" name="f123">
             <a:extLst xmlns:a="http://schemas.openxmlformats.org/drawingml/2006/main">
               <a:ext uri="{FF2B5EF4-FFF2-40B4-BE49-F238E27FC236}">
-                <a16:creationId xmlns:a16="http://schemas.microsoft.com/office/drawing/2014/main" id="{D9077C3C-6AEB-4480-A4B4-5C810D29B159}"/>
+                <a16:creationId xmlns:a16="http://schemas.microsoft.com/office/drawing/2014/main" id="{8C0D81BE-332F-424E-B90F-06E69D55B000}"/>
               </a:ext>
             </a:extLst>
           </p:cNvPr>
@@ -16481,10 +16722,10 @@
       </p:sp>
       <p:sp>
         <p:nvSpPr>
-          <p:cNvPr id="12" name="f122">
+          <p:cNvPr id="12" name="f124">
             <a:extLst xmlns:a="http://schemas.openxmlformats.org/drawingml/2006/main">
               <a:ext uri="{FF2B5EF4-FFF2-40B4-BE49-F238E27FC236}">
-                <a16:creationId xmlns:a16="http://schemas.microsoft.com/office/drawing/2014/main" id="{91CF7673-E670-40AD-A7C6-A13F3C7EC06D}"/>
+                <a16:creationId xmlns:a16="http://schemas.microsoft.com/office/drawing/2014/main" id="{2A4E10E6-2340-49E0-BB9C-AEB5B72BA8E6}"/>
               </a:ext>
             </a:extLst>
           </p:cNvPr>
@@ -16640,10 +16881,10 @@
       </p:sp>
       <p:sp>
         <p:nvSpPr>
-          <p:cNvPr id="13" name="f123">
+          <p:cNvPr id="13" name="f125">
             <a:extLst xmlns:a="http://schemas.openxmlformats.org/drawingml/2006/main">
               <a:ext uri="{FF2B5EF4-FFF2-40B4-BE49-F238E27FC236}">
-                <a16:creationId xmlns:a16="http://schemas.microsoft.com/office/drawing/2014/main" id="{97AA8D39-EF43-4C88-8EC4-3F23CC950D58}"/>
+                <a16:creationId xmlns:a16="http://schemas.microsoft.com/office/drawing/2014/main" id="{2482C531-B392-47D4-A763-D4439FAB04BE}"/>
               </a:ext>
             </a:extLst>
           </p:cNvPr>
@@ -16799,10 +17040,10 @@
       </p:sp>
       <p:sp>
         <p:nvSpPr>
-          <p:cNvPr id="14" name="f124">
+          <p:cNvPr id="14" name="f126">
             <a:extLst xmlns:a="http://schemas.openxmlformats.org/drawingml/2006/main">
               <a:ext uri="{FF2B5EF4-FFF2-40B4-BE49-F238E27FC236}">
-                <a16:creationId xmlns:a16="http://schemas.microsoft.com/office/drawing/2014/main" id="{278E13D0-3B7D-495F-A07D-3FF00C4F56D0}"/>
+                <a16:creationId xmlns:a16="http://schemas.microsoft.com/office/drawing/2014/main" id="{2826D6EE-E253-4BCF-9CE1-E936FD324E70}"/>
               </a:ext>
             </a:extLst>
           </p:cNvPr>
@@ -16959,7 +17200,7 @@
     </p:spTree>
     <p:extLst>
       <p:ext uri="{BB962C8B-B14F-4D97-AF65-F5344CB8AC3E}">
-        <p14:creationId xmlns:p14="http://schemas.microsoft.com/office/powerpoint/2010/main" val="1685583816"/>
+        <p14:creationId xmlns:p14="http://schemas.microsoft.com/office/powerpoint/2010/main" val="1995169719"/>
       </p:ext>
     </p:extLst>
   </p:cSld>
@@ -16987,10 +17228,10 @@
       </p:grpSpPr>
       <p:sp>
         <p:nvSpPr>
-          <p:cNvPr id="13" name="f125">
+          <p:cNvPr id="13" name="f127">
             <a:extLst xmlns:a="http://schemas.openxmlformats.org/drawingml/2006/main">
               <a:ext uri="{FF2B5EF4-FFF2-40B4-BE49-F238E27FC236}">
-                <a16:creationId xmlns:a16="http://schemas.microsoft.com/office/drawing/2014/main" id="{415A911E-7284-4B3C-9EEA-D825A6F6D148}"/>
+                <a16:creationId xmlns:a16="http://schemas.microsoft.com/office/drawing/2014/main" id="{5C3A6CA0-467A-4B81-9163-266F998041B8}"/>
               </a:ext>
             </a:extLst>
           </p:cNvPr>
@@ -17146,10 +17387,10 @@
       </p:sp>
       <p:sp>
         <p:nvSpPr>
-          <p:cNvPr id="2" name="f126">
+          <p:cNvPr id="2" name="f128">
             <a:extLst xmlns:a="http://schemas.openxmlformats.org/drawingml/2006/main">
               <a:ext uri="{FF2B5EF4-FFF2-40B4-BE49-F238E27FC236}">
-                <a16:creationId xmlns:a16="http://schemas.microsoft.com/office/drawing/2014/main" id="{62938A27-CE03-4A1F-9A2B-B782781F6991}"/>
+                <a16:creationId xmlns:a16="http://schemas.microsoft.com/office/drawing/2014/main" id="{6A8DFCD1-A956-4581-A27F-924BAC687B4F}"/>
               </a:ext>
             </a:extLst>
           </p:cNvPr>
@@ -17305,10 +17546,10 @@
       </p:sp>
       <p:sp>
         <p:nvSpPr>
-          <p:cNvPr id="3" name="f127">
+          <p:cNvPr id="3" name="f129">
             <a:extLst xmlns:a="http://schemas.openxmlformats.org/drawingml/2006/main">
               <a:ext uri="{FF2B5EF4-FFF2-40B4-BE49-F238E27FC236}">
-                <a16:creationId xmlns:a16="http://schemas.microsoft.com/office/drawing/2014/main" id="{CB7CAF6B-0257-4489-93E4-3FB338288E4D}"/>
+                <a16:creationId xmlns:a16="http://schemas.microsoft.com/office/drawing/2014/main" id="{CA17432D-A22C-4116-A4CE-3F11C31FD67C}"/>
               </a:ext>
             </a:extLst>
           </p:cNvPr>
@@ -17464,10 +17705,10 @@
       </p:sp>
       <p:sp>
         <p:nvSpPr>
-          <p:cNvPr id="4" name="f128">
+          <p:cNvPr id="4" name="f130">
             <a:extLst xmlns:a="http://schemas.openxmlformats.org/drawingml/2006/main">
               <a:ext uri="{FF2B5EF4-FFF2-40B4-BE49-F238E27FC236}">
-                <a16:creationId xmlns:a16="http://schemas.microsoft.com/office/drawing/2014/main" id="{918EC5DD-B198-48A0-9C47-95D10966DF6B}"/>
+                <a16:creationId xmlns:a16="http://schemas.microsoft.com/office/drawing/2014/main" id="{F8FB9385-E4ED-4430-BDDA-ED25171DC4F7}"/>
               </a:ext>
             </a:extLst>
           </p:cNvPr>
@@ -17626,7 +17867,7 @@
           <p:cNvPr id="5" name="">
             <a:extLst xmlns:a="http://schemas.openxmlformats.org/drawingml/2006/main">
               <a:ext uri="{FF2B5EF4-FFF2-40B4-BE49-F238E27FC236}">
-                <a16:creationId xmlns:a16="http://schemas.microsoft.com/office/drawing/2014/main" id="{729B49D8-27DE-4381-8043-A2ABC1917CC6}"/>
+                <a16:creationId xmlns:a16="http://schemas.microsoft.com/office/drawing/2014/main" id="{B3C5A3E9-B944-4260-B1F8-DE9C4D4AEC97}"/>
               </a:ext>
             </a:extLst>
           </p:cNvPr>
@@ -18360,13 +18601,24 @@
                       <a:r>
                         <a:rPr sz="1725" b="1">
                           <a:solidFill>
-                            <a:srgbClr val="9D7139"/>
+                            <a:srgbClr val="278766"/>
                           </a:solidFill>
                           <a:latin typeface="Nimbus Sans"/>
                           <a:ea typeface="Nimbus Sans"/>
                           <a:cs typeface="Nimbus Sans"/>
                         </a:rPr>
-                        <a:t>1 PASS +</a:t>
+                        <a:t>1 PASS</a:t>
+                      </a:r>
+                      <a:r>
+                        <a:rPr sz="1725" b="1">
+                          <a:solidFill>
+                            <a:srgbClr val="182536"/>
+                          </a:solidFill>
+                          <a:latin typeface="Nimbus Sans"/>
+                          <a:ea typeface="Nimbus Sans"/>
+                          <a:cs typeface="Nimbus Sans"/>
+                        </a:rPr>
+                        <a:t> +</a:t>
                       </a:r>
                     </a:p>
                     <a:p>
@@ -18448,10 +18700,10 @@
       </p:graphicFrame>
       <p:sp>
         <p:nvSpPr>
-          <p:cNvPr id="6" name="f130">
+          <p:cNvPr id="6" name="f132">
             <a:extLst xmlns:a="http://schemas.openxmlformats.org/drawingml/2006/main">
               <a:ext uri="{FF2B5EF4-FFF2-40B4-BE49-F238E27FC236}">
-                <a16:creationId xmlns:a16="http://schemas.microsoft.com/office/drawing/2014/main" id="{2E3A3F5A-852F-46A8-A999-483AD2AB6ECA}"/>
+                <a16:creationId xmlns:a16="http://schemas.microsoft.com/office/drawing/2014/main" id="{116270FE-3FA7-4B50-A205-FA2D9AE17DF9}"/>
               </a:ext>
             </a:extLst>
           </p:cNvPr>
@@ -18483,10 +18735,10 @@
       </p:sp>
       <p:sp>
         <p:nvSpPr>
-          <p:cNvPr id="7" name="f131">
+          <p:cNvPr id="7" name="f133">
             <a:extLst xmlns:a="http://schemas.openxmlformats.org/drawingml/2006/main">
               <a:ext uri="{FF2B5EF4-FFF2-40B4-BE49-F238E27FC236}">
-                <a16:creationId xmlns:a16="http://schemas.microsoft.com/office/drawing/2014/main" id="{97952E4E-F44E-4FC2-93DB-D68EBA0320E0}"/>
+                <a16:creationId xmlns:a16="http://schemas.microsoft.com/office/drawing/2014/main" id="{FB3B4BC3-F93C-498A-BFBE-1D2553257254}"/>
               </a:ext>
             </a:extLst>
           </p:cNvPr>
@@ -18497,7 +18749,7 @@
         </p:nvSpPr>
         <p:spPr>
           <a:xfrm xmlns:a="http://schemas.openxmlformats.org/drawingml/2006/main">
-            <a:off x="11220450" y="3638550"/>
+            <a:off x="11220450" y="3867150"/>
             <a:ext cx="2781300" cy="971550"/>
           </a:xfrm>
           <a:prstGeom xmlns:a="http://schemas.openxmlformats.org/drawingml/2006/main" prst="rect">
@@ -18642,10 +18894,10 @@
       </p:sp>
       <p:sp>
         <p:nvSpPr>
-          <p:cNvPr id="8" name="f132">
+          <p:cNvPr id="8" name="f134">
             <a:extLst xmlns:a="http://schemas.openxmlformats.org/drawingml/2006/main">
               <a:ext uri="{FF2B5EF4-FFF2-40B4-BE49-F238E27FC236}">
-                <a16:creationId xmlns:a16="http://schemas.microsoft.com/office/drawing/2014/main" id="{07F31DB1-54CF-44F3-9713-D58E81A01927}"/>
+                <a16:creationId xmlns:a16="http://schemas.microsoft.com/office/drawing/2014/main" id="{1620970C-9216-4334-9E75-D50AA88BEDD6}"/>
               </a:ext>
             </a:extLst>
           </p:cNvPr>
@@ -18801,10 +19053,10 @@
       </p:sp>
       <p:sp>
         <p:nvSpPr>
-          <p:cNvPr id="9" name="f133">
+          <p:cNvPr id="9" name="f135">
             <a:extLst xmlns:a="http://schemas.openxmlformats.org/drawingml/2006/main">
               <a:ext uri="{FF2B5EF4-FFF2-40B4-BE49-F238E27FC236}">
-                <a16:creationId xmlns:a16="http://schemas.microsoft.com/office/drawing/2014/main" id="{7F12F43E-5C82-4143-906E-90AC44DCF8E3}"/>
+                <a16:creationId xmlns:a16="http://schemas.microsoft.com/office/drawing/2014/main" id="{72A7BDDC-6E43-40B9-926D-0B7C3073B547}"/>
               </a:ext>
             </a:extLst>
           </p:cNvPr>
@@ -18960,10 +19212,10 @@
       </p:sp>
       <p:sp>
         <p:nvSpPr>
-          <p:cNvPr id="10" name="f134">
+          <p:cNvPr id="10" name="f136">
             <a:extLst xmlns:a="http://schemas.openxmlformats.org/drawingml/2006/main">
               <a:ext uri="{FF2B5EF4-FFF2-40B4-BE49-F238E27FC236}">
-                <a16:creationId xmlns:a16="http://schemas.microsoft.com/office/drawing/2014/main" id="{63CCC470-DF74-47E3-9D59-6FCD6B4693BB}"/>
+                <a16:creationId xmlns:a16="http://schemas.microsoft.com/office/drawing/2014/main" id="{C4A38772-9A13-4478-A757-9D2F7752E1B1}"/>
               </a:ext>
             </a:extLst>
           </p:cNvPr>
@@ -19119,10 +19371,10 @@
       </p:sp>
       <p:sp>
         <p:nvSpPr>
-          <p:cNvPr id="11" name="f135">
+          <p:cNvPr id="11" name="f137">
             <a:extLst xmlns:a="http://schemas.openxmlformats.org/drawingml/2006/main">
               <a:ext uri="{FF2B5EF4-FFF2-40B4-BE49-F238E27FC236}">
-                <a16:creationId xmlns:a16="http://schemas.microsoft.com/office/drawing/2014/main" id="{BC1DD979-AED8-482F-861F-D7E1F45D43A0}"/>
+                <a16:creationId xmlns:a16="http://schemas.microsoft.com/office/drawing/2014/main" id="{629F3CD9-4FB3-4D04-8636-532BB5233098}"/>
               </a:ext>
             </a:extLst>
           </p:cNvPr>
@@ -19278,10 +19530,10 @@
       </p:sp>
       <p:sp>
         <p:nvSpPr>
-          <p:cNvPr id="12" name="f136">
+          <p:cNvPr id="12" name="f138">
             <a:extLst xmlns:a="http://schemas.openxmlformats.org/drawingml/2006/main">
               <a:ext uri="{FF2B5EF4-FFF2-40B4-BE49-F238E27FC236}">
-                <a16:creationId xmlns:a16="http://schemas.microsoft.com/office/drawing/2014/main" id="{03BBD4A6-8016-4A88-89D5-192D5AC828F7}"/>
+                <a16:creationId xmlns:a16="http://schemas.microsoft.com/office/drawing/2014/main" id="{DC085209-850D-4F0F-8468-CFB20F91C0FC}"/>
               </a:ext>
             </a:extLst>
           </p:cNvPr>
@@ -19430,7 +19682,7 @@
                 <a:ea typeface="Nimbus Sans"/>
                 <a:cs typeface="Nimbus Sans"/>
               </a:rPr>
-              <a:t>Catture NRF e UDM ottenute con componenti ScasDK adattati.</a:t>
+              <a:t>Tutte le catture sono state ottenute tramite lo strumento esterno SCASDK.</a:t>
             </a:r>
           </a:p>
         </p:txBody>
@@ -19438,7 +19690,7 @@
     </p:spTree>
     <p:extLst>
       <p:ext uri="{BB962C8B-B14F-4D97-AF65-F5344CB8AC3E}">
-        <p14:creationId xmlns:p14="http://schemas.microsoft.com/office/powerpoint/2010/main" val="1565531261"/>
+        <p14:creationId xmlns:p14="http://schemas.microsoft.com/office/powerpoint/2010/main" val="1212662986"/>
       </p:ext>
     </p:extLst>
   </p:cSld>
@@ -19466,10 +19718,10 @@
       </p:grpSpPr>
       <p:sp>
         <p:nvSpPr>
-          <p:cNvPr id="48" name="f137">
+          <p:cNvPr id="23" name="f139">
             <a:extLst xmlns:a="http://schemas.openxmlformats.org/drawingml/2006/main">
               <a:ext uri="{FF2B5EF4-FFF2-40B4-BE49-F238E27FC236}">
-                <a16:creationId xmlns:a16="http://schemas.microsoft.com/office/drawing/2014/main" id="{0BFF894E-6DA6-44F4-A5C7-4914B16A081D}"/>
+                <a16:creationId xmlns:a16="http://schemas.microsoft.com/office/drawing/2014/main" id="{9F6D5444-BD87-433B-BFD5-3006D2AC9EAF}"/>
               </a:ext>
             </a:extLst>
           </p:cNvPr>
@@ -19625,10 +19877,10 @@
       </p:sp>
       <p:sp>
         <p:nvSpPr>
-          <p:cNvPr id="2" name="f138">
+          <p:cNvPr id="2" name="f140">
             <a:extLst xmlns:a="http://schemas.openxmlformats.org/drawingml/2006/main">
               <a:ext uri="{FF2B5EF4-FFF2-40B4-BE49-F238E27FC236}">
-                <a16:creationId xmlns:a16="http://schemas.microsoft.com/office/drawing/2014/main" id="{80DE5AAF-E7EC-4F0E-B2AA-E8EEAF931470}"/>
+                <a16:creationId xmlns:a16="http://schemas.microsoft.com/office/drawing/2014/main" id="{B424BB65-7FDA-4C40-9447-28B82E222570}"/>
               </a:ext>
             </a:extLst>
           </p:cNvPr>
@@ -19784,10 +20036,10 @@
       </p:sp>
       <p:sp>
         <p:nvSpPr>
-          <p:cNvPr id="3" name="f139">
+          <p:cNvPr id="3" name="f141">
             <a:extLst xmlns:a="http://schemas.openxmlformats.org/drawingml/2006/main">
               <a:ext uri="{FF2B5EF4-FFF2-40B4-BE49-F238E27FC236}">
-                <a16:creationId xmlns:a16="http://schemas.microsoft.com/office/drawing/2014/main" id="{3E9F7C39-C0BF-4F56-8725-211F13A39B2D}"/>
+                <a16:creationId xmlns:a16="http://schemas.microsoft.com/office/drawing/2014/main" id="{0AAA9575-EF0C-42EE-8249-BFB6FE713FEE}"/>
               </a:ext>
             </a:extLst>
           </p:cNvPr>
@@ -19943,10 +20195,10 @@
       </p:sp>
       <p:sp>
         <p:nvSpPr>
-          <p:cNvPr id="4" name="f140">
+          <p:cNvPr id="4" name="f142">
             <a:extLst xmlns:a="http://schemas.openxmlformats.org/drawingml/2006/main">
               <a:ext uri="{FF2B5EF4-FFF2-40B4-BE49-F238E27FC236}">
-                <a16:creationId xmlns:a16="http://schemas.microsoft.com/office/drawing/2014/main" id="{D45B8FFC-B2C8-4B70-AA56-474360F9053E}"/>
+                <a16:creationId xmlns:a16="http://schemas.microsoft.com/office/drawing/2014/main" id="{B006EF4D-901F-4E09-BA8B-35714BCBD4DC}"/>
               </a:ext>
             </a:extLst>
           </p:cNvPr>
@@ -20100,12 +20352,40 @@
           </a:p>
         </p:txBody>
       </p:sp>
+      <p:pic>
+        <p:nvPicPr>
+          <p:cNvPr id="5" name="">
+            <a:extLst xmlns:a="http://schemas.openxmlformats.org/drawingml/2006/main">
+              <a:ext uri="{FF2B5EF4-FFF2-40B4-BE49-F238E27FC236}">
+                <a16:creationId xmlns:a16="http://schemas.microsoft.com/office/drawing/2014/main" id="{D537BC9A-EB29-4AEC-A7AB-7909152FD5E0}"/>
+              </a:ext>
+            </a:extLst>
+          </p:cNvPr>
+          <p:cNvPicPr>
+            <a:picLocks xmlns:a="http://schemas.openxmlformats.org/drawingml/2006/main" noChangeAspect="1"/>
+          </p:cNvPicPr>
+          <p:nvPr/>
+        </p:nvPicPr>
+        <p:blipFill>
+          <a:blip xmlns:r="http://schemas.openxmlformats.org/officeDocument/2006/relationships" xmlns:a="http://schemas.openxmlformats.org/drawingml/2006/main" r:embed="R719bab334dac411a"/>
+          <a:stretch xmlns:a="http://schemas.openxmlformats.org/drawingml/2006/main"/>
+        </p:blipFill>
+        <p:spPr>
+          <a:xfrm xmlns:a="http://schemas.openxmlformats.org/drawingml/2006/main">
+            <a:off x="0" y="0"/>
+            <a:ext cx="15240000" cy="8572500"/>
+          </a:xfrm>
+          <a:prstGeom xmlns:a="http://schemas.openxmlformats.org/drawingml/2006/main" prst="rect">
+            <a:avLst/>
+          </a:prstGeom>
+        </p:spPr>
+      </p:pic>
       <p:sp>
         <p:nvSpPr>
-          <p:cNvPr id="5" name="f141">
+          <p:cNvPr id="6" name="f144">
             <a:extLst xmlns:a="http://schemas.openxmlformats.org/drawingml/2006/main">
               <a:ext uri="{FF2B5EF4-FFF2-40B4-BE49-F238E27FC236}">
-                <a16:creationId xmlns:a16="http://schemas.microsoft.com/office/drawing/2014/main" id="{B2620659-0669-4A56-99B2-EC44BEB1CDD3}"/>
+                <a16:creationId xmlns:a16="http://schemas.microsoft.com/office/drawing/2014/main" id="{4D65BD55-5471-4CE5-A856-56C44E208477}"/>
               </a:ext>
             </a:extLst>
           </p:cNvPr>
@@ -20116,2125 +20396,8 @@
         </p:nvSpPr>
         <p:spPr>
           <a:xfrm xmlns:a="http://schemas.openxmlformats.org/drawingml/2006/main">
-            <a:off x="3048000" y="2952750"/>
-            <a:ext cx="2305050" cy="609600"/>
-          </a:xfrm>
-          <a:prstGeom xmlns:a="http://schemas.openxmlformats.org/drawingml/2006/main" prst="roundRect">
-            <a:avLst>
-              <a:gd name="adj" fmla="val 25000"/>
-            </a:avLst>
-          </a:prstGeom>
-          <a:solidFill xmlns:a="http://schemas.openxmlformats.org/drawingml/2006/main">
-            <a:srgbClr val="FFFFFF"/>
-          </a:solidFill>
-          <a:ln xmlns:a="http://schemas.openxmlformats.org/drawingml/2006/main" w="17145">
-            <a:solidFill>
-              <a:srgbClr val="D9E3EF"/>
-            </a:solidFill>
-            <a:prstDash val="solid"/>
-          </a:ln>
-        </p:spPr>
-      </p:sp>
-      <p:sp>
-        <p:nvSpPr>
-          <p:cNvPr id="6" name="f142">
-            <a:extLst xmlns:a="http://schemas.openxmlformats.org/drawingml/2006/main">
-              <a:ext uri="{FF2B5EF4-FFF2-40B4-BE49-F238E27FC236}">
-                <a16:creationId xmlns:a16="http://schemas.microsoft.com/office/drawing/2014/main" id="{BDE1E652-4342-4032-A607-0572A9ACB1C6}"/>
-              </a:ext>
-            </a:extLst>
-          </p:cNvPr>
-          <p:cNvSpPr>
-            <a:spLocks xmlns:a="http://schemas.openxmlformats.org/drawingml/2006/main" noGrp="1"/>
-          </p:cNvSpPr>
-          <p:nvPr/>
-        </p:nvSpPr>
-        <p:spPr>
-          <a:xfrm xmlns:a="http://schemas.openxmlformats.org/drawingml/2006/main">
-            <a:off x="3200400" y="3124200"/>
-            <a:ext cx="2000250" cy="381000"/>
-          </a:xfrm>
-          <a:prstGeom xmlns:a="http://schemas.openxmlformats.org/drawingml/2006/main" prst="rect">
-            <a:avLst/>
-          </a:prstGeom>
-          <a:noFill xmlns:a="http://schemas.openxmlformats.org/drawingml/2006/main"/>
-          <a:ln xmlns:a="http://schemas.openxmlformats.org/drawingml/2006/main" w="0">
-            <a:noFill/>
-            <a:prstDash val="solid"/>
-          </a:ln>
-        </p:spPr>
-        <p:txBody>
-          <a:bodyPr xmlns:a="http://schemas.openxmlformats.org/drawingml/2006/main" wrap="none" lIns="0" tIns="0" rIns="0" bIns="0" anchor="t">
-            <a:noAutofit/>
-          </a:bodyPr>
-          <a:lstStyle xmlns:a="http://schemas.openxmlformats.org/drawingml/2006/main">
-            <a:defPPr algn="ctr">
-              <a:defRPr sz="2100" b="1">
-                <a:solidFill>
-                  <a:srgbClr val="182536"/>
-                </a:solidFill>
-                <a:latin typeface="Nimbus Sans"/>
-                <a:ea typeface="Nimbus Sans"/>
-                <a:cs typeface="Nimbus Sans"/>
-              </a:defRPr>
-            </a:defPPr>
-            <a:lvl1pPr algn="ctr">
-              <a:defRPr sz="2100" b="1">
-                <a:solidFill>
-                  <a:srgbClr val="182536"/>
-                </a:solidFill>
-                <a:latin typeface="Nimbus Sans"/>
-                <a:ea typeface="Nimbus Sans"/>
-                <a:cs typeface="Nimbus Sans"/>
-              </a:defRPr>
-            </a:lvl1pPr>
-            <a:lvl2pPr algn="ctr">
-              <a:defRPr sz="2100" b="1">
-                <a:solidFill>
-                  <a:srgbClr val="182536"/>
-                </a:solidFill>
-                <a:latin typeface="Nimbus Sans"/>
-                <a:ea typeface="Nimbus Sans"/>
-                <a:cs typeface="Nimbus Sans"/>
-              </a:defRPr>
-            </a:lvl2pPr>
-            <a:lvl3pPr algn="ctr">
-              <a:defRPr sz="2100" b="1">
-                <a:solidFill>
-                  <a:srgbClr val="182536"/>
-                </a:solidFill>
-                <a:latin typeface="Nimbus Sans"/>
-                <a:ea typeface="Nimbus Sans"/>
-                <a:cs typeface="Nimbus Sans"/>
-              </a:defRPr>
-            </a:lvl3pPr>
-            <a:lvl4pPr algn="ctr">
-              <a:defRPr sz="2100" b="1">
-                <a:solidFill>
-                  <a:srgbClr val="182536"/>
-                </a:solidFill>
-                <a:latin typeface="Nimbus Sans"/>
-                <a:ea typeface="Nimbus Sans"/>
-                <a:cs typeface="Nimbus Sans"/>
-              </a:defRPr>
-            </a:lvl4pPr>
-            <a:lvl5pPr algn="ctr">
-              <a:defRPr sz="2100" b="1">
-                <a:solidFill>
-                  <a:srgbClr val="182536"/>
-                </a:solidFill>
-                <a:latin typeface="Nimbus Sans"/>
-                <a:ea typeface="Nimbus Sans"/>
-                <a:cs typeface="Nimbus Sans"/>
-              </a:defRPr>
-            </a:lvl5pPr>
-            <a:lvl6pPr algn="ctr">
-              <a:defRPr sz="2100" b="1">
-                <a:solidFill>
-                  <a:srgbClr val="182536"/>
-                </a:solidFill>
-                <a:latin typeface="Nimbus Sans"/>
-                <a:ea typeface="Nimbus Sans"/>
-                <a:cs typeface="Nimbus Sans"/>
-              </a:defRPr>
-            </a:lvl6pPr>
-            <a:lvl7pPr algn="ctr">
-              <a:defRPr sz="2100" b="1">
-                <a:solidFill>
-                  <a:srgbClr val="182536"/>
-                </a:solidFill>
-                <a:latin typeface="Nimbus Sans"/>
-                <a:ea typeface="Nimbus Sans"/>
-                <a:cs typeface="Nimbus Sans"/>
-              </a:defRPr>
-            </a:lvl7pPr>
-            <a:lvl8pPr algn="ctr">
-              <a:defRPr sz="2100" b="1">
-                <a:solidFill>
-                  <a:srgbClr val="182536"/>
-                </a:solidFill>
-                <a:latin typeface="Nimbus Sans"/>
-                <a:ea typeface="Nimbus Sans"/>
-                <a:cs typeface="Nimbus Sans"/>
-              </a:defRPr>
-            </a:lvl8pPr>
-            <a:lvl9pPr algn="ctr">
-              <a:defRPr sz="2100" b="1">
-                <a:solidFill>
-                  <a:srgbClr val="182536"/>
-                </a:solidFill>
-                <a:latin typeface="Nimbus Sans"/>
-                <a:ea typeface="Nimbus Sans"/>
-                <a:cs typeface="Nimbus Sans"/>
-              </a:defRPr>
-            </a:lvl9pPr>
-          </a:lstStyle>
-          <a:p xmlns:a="http://schemas.openxmlformats.org/drawingml/2006/main">
-            <a:pPr algn="ctr">
-              <a:defRPr sz="2100" b="1">
-                <a:solidFill>
-                  <a:srgbClr val="182536"/>
-                </a:solidFill>
-                <a:latin typeface="Nimbus Sans"/>
-                <a:ea typeface="Nimbus Sans"/>
-                <a:cs typeface="Nimbus Sans"/>
-              </a:defRPr>
-            </a:pPr>
-            <a:r>
-              <a:rPr sz="2100" b="1">
-                <a:solidFill>
-                  <a:srgbClr val="182536"/>
-                </a:solidFill>
-                <a:latin typeface="Nimbus Sans"/>
-                <a:ea typeface="Nimbus Sans"/>
-                <a:cs typeface="Nimbus Sans"/>
-              </a:rPr>
-              <a:t>PCAP originale</a:t>
-            </a:r>
-          </a:p>
-        </p:txBody>
-      </p:sp>
-      <p:sp>
-        <p:nvSpPr>
-          <p:cNvPr id="7" name="f143">
-            <a:extLst xmlns:a="http://schemas.openxmlformats.org/drawingml/2006/main">
-              <a:ext uri="{FF2B5EF4-FFF2-40B4-BE49-F238E27FC236}">
-                <a16:creationId xmlns:a16="http://schemas.microsoft.com/office/drawing/2014/main" id="{B096E19A-9EB6-45E4-BDDA-F9B7142A2150}"/>
-              </a:ext>
-            </a:extLst>
-          </p:cNvPr>
-          <p:cNvSpPr>
-            <a:spLocks xmlns:a="http://schemas.openxmlformats.org/drawingml/2006/main" noGrp="1"/>
-          </p:cNvSpPr>
-          <p:nvPr/>
-        </p:nvSpPr>
-        <p:spPr>
-          <a:xfrm xmlns:a="http://schemas.openxmlformats.org/drawingml/2006/main">
-            <a:off x="4105275" y="3695700"/>
-            <a:ext cx="171450" cy="361950"/>
-          </a:xfrm>
-          <a:prstGeom xmlns:a="http://schemas.openxmlformats.org/drawingml/2006/main" prst="downArrow">
-            <a:avLst/>
-          </a:prstGeom>
-          <a:solidFill xmlns:a="http://schemas.openxmlformats.org/drawingml/2006/main">
-            <a:srgbClr val="4264D0"/>
-          </a:solidFill>
-          <a:ln xmlns:a="http://schemas.openxmlformats.org/drawingml/2006/main" w="0">
-            <a:noFill/>
-            <a:prstDash val="solid"/>
-          </a:ln>
-        </p:spPr>
-      </p:sp>
-      <p:sp>
-        <p:nvSpPr>
-          <p:cNvPr id="8" name="f144">
-            <a:extLst xmlns:a="http://schemas.openxmlformats.org/drawingml/2006/main">
-              <a:ext uri="{FF2B5EF4-FFF2-40B4-BE49-F238E27FC236}">
-                <a16:creationId xmlns:a16="http://schemas.microsoft.com/office/drawing/2014/main" id="{5F6C8E00-1B83-442C-A898-C5F531BA24A6}"/>
-              </a:ext>
-            </a:extLst>
-          </p:cNvPr>
-          <p:cNvSpPr>
-            <a:spLocks xmlns:a="http://schemas.openxmlformats.org/drawingml/2006/main" noGrp="1"/>
-          </p:cNvSpPr>
-          <p:nvPr/>
-        </p:nvSpPr>
-        <p:spPr>
-          <a:xfrm xmlns:a="http://schemas.openxmlformats.org/drawingml/2006/main">
-            <a:off x="2724150" y="4200525"/>
-            <a:ext cx="3009900" cy="952500"/>
-          </a:xfrm>
-          <a:prstGeom xmlns:a="http://schemas.openxmlformats.org/drawingml/2006/main" prst="roundRect">
-            <a:avLst>
-              <a:gd name="adj" fmla="val 16000"/>
-            </a:avLst>
-          </a:prstGeom>
-          <a:solidFill xmlns:a="http://schemas.openxmlformats.org/drawingml/2006/main">
-            <a:srgbClr val="EEF8F3"/>
-          </a:solidFill>
-          <a:ln xmlns:a="http://schemas.openxmlformats.org/drawingml/2006/main" w="17145">
-            <a:solidFill>
-              <a:srgbClr val="C4DFD3"/>
-            </a:solidFill>
-            <a:prstDash val="solid"/>
-          </a:ln>
-        </p:spPr>
-      </p:sp>
-      <p:sp>
-        <p:nvSpPr>
-          <p:cNvPr id="9" name="f145">
-            <a:extLst xmlns:a="http://schemas.openxmlformats.org/drawingml/2006/main">
-              <a:ext uri="{FF2B5EF4-FFF2-40B4-BE49-F238E27FC236}">
-                <a16:creationId xmlns:a16="http://schemas.microsoft.com/office/drawing/2014/main" id="{11823D53-DA00-4063-9360-D064C6EDEF6A}"/>
-              </a:ext>
-            </a:extLst>
-          </p:cNvPr>
-          <p:cNvSpPr>
-            <a:spLocks xmlns:a="http://schemas.openxmlformats.org/drawingml/2006/main" noGrp="1"/>
-          </p:cNvSpPr>
-          <p:nvPr/>
-        </p:nvSpPr>
-        <p:spPr>
-          <a:xfrm xmlns:a="http://schemas.openxmlformats.org/drawingml/2006/main">
-            <a:off x="2876550" y="4352925"/>
-            <a:ext cx="2705100" cy="752475"/>
-          </a:xfrm>
-          <a:prstGeom xmlns:a="http://schemas.openxmlformats.org/drawingml/2006/main" prst="rect">
-            <a:avLst/>
-          </a:prstGeom>
-          <a:noFill xmlns:a="http://schemas.openxmlformats.org/drawingml/2006/main"/>
-          <a:ln xmlns:a="http://schemas.openxmlformats.org/drawingml/2006/main" w="0">
-            <a:noFill/>
-            <a:prstDash val="solid"/>
-          </a:ln>
-        </p:spPr>
-        <p:txBody>
-          <a:bodyPr xmlns:a="http://schemas.openxmlformats.org/drawingml/2006/main" wrap="none" lIns="0" tIns="0" rIns="0" bIns="0" anchor="t">
-            <a:noAutofit/>
-          </a:bodyPr>
-          <a:lstStyle xmlns:a="http://schemas.openxmlformats.org/drawingml/2006/main">
-            <a:defPPr algn="ctr">
-              <a:defRPr sz="2250" b="1">
-                <a:solidFill>
-                  <a:srgbClr val="278766"/>
-                </a:solidFill>
-                <a:latin typeface="Nimbus Sans"/>
-                <a:ea typeface="Nimbus Sans"/>
-                <a:cs typeface="Nimbus Sans"/>
-              </a:defRPr>
-            </a:defPPr>
-            <a:lvl1pPr algn="ctr">
-              <a:defRPr sz="2250" b="1">
-                <a:solidFill>
-                  <a:srgbClr val="278766"/>
-                </a:solidFill>
-                <a:latin typeface="Nimbus Sans"/>
-                <a:ea typeface="Nimbus Sans"/>
-                <a:cs typeface="Nimbus Sans"/>
-              </a:defRPr>
-            </a:lvl1pPr>
-            <a:lvl2pPr algn="ctr">
-              <a:defRPr sz="2250" b="1">
-                <a:solidFill>
-                  <a:srgbClr val="278766"/>
-                </a:solidFill>
-                <a:latin typeface="Nimbus Sans"/>
-                <a:ea typeface="Nimbus Sans"/>
-                <a:cs typeface="Nimbus Sans"/>
-              </a:defRPr>
-            </a:lvl2pPr>
-            <a:lvl3pPr algn="ctr">
-              <a:defRPr sz="2250" b="1">
-                <a:solidFill>
-                  <a:srgbClr val="278766"/>
-                </a:solidFill>
-                <a:latin typeface="Nimbus Sans"/>
-                <a:ea typeface="Nimbus Sans"/>
-                <a:cs typeface="Nimbus Sans"/>
-              </a:defRPr>
-            </a:lvl3pPr>
-            <a:lvl4pPr algn="ctr">
-              <a:defRPr sz="2250" b="1">
-                <a:solidFill>
-                  <a:srgbClr val="278766"/>
-                </a:solidFill>
-                <a:latin typeface="Nimbus Sans"/>
-                <a:ea typeface="Nimbus Sans"/>
-                <a:cs typeface="Nimbus Sans"/>
-              </a:defRPr>
-            </a:lvl4pPr>
-            <a:lvl5pPr algn="ctr">
-              <a:defRPr sz="2250" b="1">
-                <a:solidFill>
-                  <a:srgbClr val="278766"/>
-                </a:solidFill>
-                <a:latin typeface="Nimbus Sans"/>
-                <a:ea typeface="Nimbus Sans"/>
-                <a:cs typeface="Nimbus Sans"/>
-              </a:defRPr>
-            </a:lvl5pPr>
-            <a:lvl6pPr algn="ctr">
-              <a:defRPr sz="2250" b="1">
-                <a:solidFill>
-                  <a:srgbClr val="278766"/>
-                </a:solidFill>
-                <a:latin typeface="Nimbus Sans"/>
-                <a:ea typeface="Nimbus Sans"/>
-                <a:cs typeface="Nimbus Sans"/>
-              </a:defRPr>
-            </a:lvl6pPr>
-            <a:lvl7pPr algn="ctr">
-              <a:defRPr sz="2250" b="1">
-                <a:solidFill>
-                  <a:srgbClr val="278766"/>
-                </a:solidFill>
-                <a:latin typeface="Nimbus Sans"/>
-                <a:ea typeface="Nimbus Sans"/>
-                <a:cs typeface="Nimbus Sans"/>
-              </a:defRPr>
-            </a:lvl7pPr>
-            <a:lvl8pPr algn="ctr">
-              <a:defRPr sz="2250" b="1">
-                <a:solidFill>
-                  <a:srgbClr val="278766"/>
-                </a:solidFill>
-                <a:latin typeface="Nimbus Sans"/>
-                <a:ea typeface="Nimbus Sans"/>
-                <a:cs typeface="Nimbus Sans"/>
-              </a:defRPr>
-            </a:lvl8pPr>
-            <a:lvl9pPr algn="ctr">
-              <a:defRPr sz="2250" b="1">
-                <a:solidFill>
-                  <a:srgbClr val="278766"/>
-                </a:solidFill>
-                <a:latin typeface="Nimbus Sans"/>
-                <a:ea typeface="Nimbus Sans"/>
-                <a:cs typeface="Nimbus Sans"/>
-              </a:defRPr>
-            </a:lvl9pPr>
-          </a:lstStyle>
-          <a:p xmlns:a="http://schemas.openxmlformats.org/drawingml/2006/main">
-            <a:pPr algn="ctr">
-              <a:defRPr sz="2250" b="1">
-                <a:solidFill>
-                  <a:srgbClr val="278766"/>
-                </a:solidFill>
-                <a:latin typeface="Nimbus Sans"/>
-                <a:ea typeface="Nimbus Sans"/>
-                <a:cs typeface="Nimbus Sans"/>
-              </a:defRPr>
-            </a:pPr>
-            <a:r>
-              <a:rPr sz="2250" b="1">
-                <a:solidFill>
-                  <a:srgbClr val="278766"/>
-                </a:solidFill>
-                <a:latin typeface="Nimbus Sans"/>
-                <a:ea typeface="Nimbus Sans"/>
-                <a:cs typeface="Nimbus Sans"/>
-              </a:rPr>
-              <a:t>Pipeline di</a:t>
-            </a:r>
-          </a:p>
-          <a:p xmlns:a="http://schemas.openxmlformats.org/drawingml/2006/main">
-            <a:pPr algn="ctr">
-              <a:defRPr sz="2250" b="1">
-                <a:solidFill>
-                  <a:srgbClr val="278766"/>
-                </a:solidFill>
-                <a:latin typeface="Nimbus Sans"/>
-                <a:ea typeface="Nimbus Sans"/>
-                <a:cs typeface="Nimbus Sans"/>
-              </a:defRPr>
-            </a:pPr>
-            <a:r>
-              <a:rPr sz="2250" b="1">
-                <a:solidFill>
-                  <a:srgbClr val="278766"/>
-                </a:solidFill>
-                <a:latin typeface="Nimbus Sans"/>
-                <a:ea typeface="Nimbus Sans"/>
-                <a:cs typeface="Nimbus Sans"/>
-              </a:rPr>
-              <a:t>verifica</a:t>
-            </a:r>
-          </a:p>
-        </p:txBody>
-      </p:sp>
-      <p:sp>
-        <p:nvSpPr>
-          <p:cNvPr id="10" name="f146">
-            <a:extLst xmlns:a="http://schemas.openxmlformats.org/drawingml/2006/main">
-              <a:ext uri="{FF2B5EF4-FFF2-40B4-BE49-F238E27FC236}">
-                <a16:creationId xmlns:a16="http://schemas.microsoft.com/office/drawing/2014/main" id="{4655F80B-98F7-4067-9727-4EB0DC7181F4}"/>
-              </a:ext>
-            </a:extLst>
-          </p:cNvPr>
-          <p:cNvSpPr>
-            <a:spLocks xmlns:a="http://schemas.openxmlformats.org/drawingml/2006/main" noGrp="1"/>
-          </p:cNvSpPr>
-          <p:nvPr/>
-        </p:nvSpPr>
-        <p:spPr>
-          <a:xfrm xmlns:a="http://schemas.openxmlformats.org/drawingml/2006/main">
-            <a:off x="1066800" y="4295775"/>
-            <a:ext cx="1304925" cy="762000"/>
-          </a:xfrm>
-          <a:prstGeom xmlns:a="http://schemas.openxmlformats.org/drawingml/2006/main" prst="roundRect">
-            <a:avLst>
-              <a:gd name="adj" fmla="val 20000"/>
-            </a:avLst>
-          </a:prstGeom>
-          <a:solidFill xmlns:a="http://schemas.openxmlformats.org/drawingml/2006/main">
-            <a:srgbClr val="F0F4FF"/>
-          </a:solidFill>
-          <a:ln xmlns:a="http://schemas.openxmlformats.org/drawingml/2006/main" w="17145">
-            <a:solidFill>
-              <a:srgbClr val="D9E3EF"/>
-            </a:solidFill>
-            <a:prstDash val="solid"/>
-          </a:ln>
-        </p:spPr>
-      </p:sp>
-      <p:sp>
-        <p:nvSpPr>
-          <p:cNvPr id="11" name="f147">
-            <a:extLst xmlns:a="http://schemas.openxmlformats.org/drawingml/2006/main">
-              <a:ext uri="{FF2B5EF4-FFF2-40B4-BE49-F238E27FC236}">
-                <a16:creationId xmlns:a16="http://schemas.microsoft.com/office/drawing/2014/main" id="{6FB1EC1E-A584-41D3-B824-67BC9D79B2CA}"/>
-              </a:ext>
-            </a:extLst>
-          </p:cNvPr>
-          <p:cNvSpPr>
-            <a:spLocks xmlns:a="http://schemas.openxmlformats.org/drawingml/2006/main" noGrp="1"/>
-          </p:cNvSpPr>
-          <p:nvPr/>
-        </p:nvSpPr>
-        <p:spPr>
-          <a:xfrm xmlns:a="http://schemas.openxmlformats.org/drawingml/2006/main">
-            <a:off x="1219200" y="4533900"/>
-            <a:ext cx="1000125" cy="419100"/>
-          </a:xfrm>
-          <a:prstGeom xmlns:a="http://schemas.openxmlformats.org/drawingml/2006/main" prst="rect">
-            <a:avLst/>
-          </a:prstGeom>
-          <a:noFill xmlns:a="http://schemas.openxmlformats.org/drawingml/2006/main"/>
-          <a:ln xmlns:a="http://schemas.openxmlformats.org/drawingml/2006/main" w="0">
-            <a:noFill/>
-            <a:prstDash val="solid"/>
-          </a:ln>
-        </p:spPr>
-        <p:txBody>
-          <a:bodyPr xmlns:a="http://schemas.openxmlformats.org/drawingml/2006/main" wrap="none" lIns="0" tIns="0" rIns="0" bIns="0" anchor="t">
-            <a:noAutofit/>
-          </a:bodyPr>
-          <a:lstStyle xmlns:a="http://schemas.openxmlformats.org/drawingml/2006/main">
-            <a:defPPr algn="ctr">
-              <a:defRPr sz="2550" b="1">
-                <a:solidFill>
-                  <a:srgbClr val="4264D0"/>
-                </a:solidFill>
-                <a:latin typeface="Nimbus Sans"/>
-                <a:ea typeface="Nimbus Sans"/>
-                <a:cs typeface="Nimbus Sans"/>
-              </a:defRPr>
-            </a:defPPr>
-            <a:lvl1pPr algn="ctr">
-              <a:defRPr sz="2550" b="1">
-                <a:solidFill>
-                  <a:srgbClr val="4264D0"/>
-                </a:solidFill>
-                <a:latin typeface="Nimbus Sans"/>
-                <a:ea typeface="Nimbus Sans"/>
-                <a:cs typeface="Nimbus Sans"/>
-              </a:defRPr>
-            </a:lvl1pPr>
-            <a:lvl2pPr algn="ctr">
-              <a:defRPr sz="2550" b="1">
-                <a:solidFill>
-                  <a:srgbClr val="4264D0"/>
-                </a:solidFill>
-                <a:latin typeface="Nimbus Sans"/>
-                <a:ea typeface="Nimbus Sans"/>
-                <a:cs typeface="Nimbus Sans"/>
-              </a:defRPr>
-            </a:lvl2pPr>
-            <a:lvl3pPr algn="ctr">
-              <a:defRPr sz="2550" b="1">
-                <a:solidFill>
-                  <a:srgbClr val="4264D0"/>
-                </a:solidFill>
-                <a:latin typeface="Nimbus Sans"/>
-                <a:ea typeface="Nimbus Sans"/>
-                <a:cs typeface="Nimbus Sans"/>
-              </a:defRPr>
-            </a:lvl3pPr>
-            <a:lvl4pPr algn="ctr">
-              <a:defRPr sz="2550" b="1">
-                <a:solidFill>
-                  <a:srgbClr val="4264D0"/>
-                </a:solidFill>
-                <a:latin typeface="Nimbus Sans"/>
-                <a:ea typeface="Nimbus Sans"/>
-                <a:cs typeface="Nimbus Sans"/>
-              </a:defRPr>
-            </a:lvl4pPr>
-            <a:lvl5pPr algn="ctr">
-              <a:defRPr sz="2550" b="1">
-                <a:solidFill>
-                  <a:srgbClr val="4264D0"/>
-                </a:solidFill>
-                <a:latin typeface="Nimbus Sans"/>
-                <a:ea typeface="Nimbus Sans"/>
-                <a:cs typeface="Nimbus Sans"/>
-              </a:defRPr>
-            </a:lvl5pPr>
-            <a:lvl6pPr algn="ctr">
-              <a:defRPr sz="2550" b="1">
-                <a:solidFill>
-                  <a:srgbClr val="4264D0"/>
-                </a:solidFill>
-                <a:latin typeface="Nimbus Sans"/>
-                <a:ea typeface="Nimbus Sans"/>
-                <a:cs typeface="Nimbus Sans"/>
-              </a:defRPr>
-            </a:lvl6pPr>
-            <a:lvl7pPr algn="ctr">
-              <a:defRPr sz="2550" b="1">
-                <a:solidFill>
-                  <a:srgbClr val="4264D0"/>
-                </a:solidFill>
-                <a:latin typeface="Nimbus Sans"/>
-                <a:ea typeface="Nimbus Sans"/>
-                <a:cs typeface="Nimbus Sans"/>
-              </a:defRPr>
-            </a:lvl7pPr>
-            <a:lvl8pPr algn="ctr">
-              <a:defRPr sz="2550" b="1">
-                <a:solidFill>
-                  <a:srgbClr val="4264D0"/>
-                </a:solidFill>
-                <a:latin typeface="Nimbus Sans"/>
-                <a:ea typeface="Nimbus Sans"/>
-                <a:cs typeface="Nimbus Sans"/>
-              </a:defRPr>
-            </a:lvl8pPr>
-            <a:lvl9pPr algn="ctr">
-              <a:defRPr sz="2550" b="1">
-                <a:solidFill>
-                  <a:srgbClr val="4264D0"/>
-                </a:solidFill>
-                <a:latin typeface="Nimbus Sans"/>
-                <a:ea typeface="Nimbus Sans"/>
-                <a:cs typeface="Nimbus Sans"/>
-              </a:defRPr>
-            </a:lvl9pPr>
-          </a:lstStyle>
-          <a:p xmlns:a="http://schemas.openxmlformats.org/drawingml/2006/main">
-            <a:pPr algn="ctr">
-              <a:defRPr sz="2550" b="1">
-                <a:solidFill>
-                  <a:srgbClr val="4264D0"/>
-                </a:solidFill>
-                <a:latin typeface="Nimbus Sans"/>
-                <a:ea typeface="Nimbus Sans"/>
-                <a:cs typeface="Nimbus Sans"/>
-              </a:defRPr>
-            </a:pPr>
-            <a:r>
-              <a:rPr sz="2550" b="1">
-                <a:solidFill>
-                  <a:srgbClr val="4264D0"/>
-                </a:solidFill>
-                <a:latin typeface="Nimbus Sans"/>
-                <a:ea typeface="Nimbus Sans"/>
-                <a:cs typeface="Nimbus Sans"/>
-              </a:rPr>
-              <a:t>DSL</a:t>
-            </a:r>
-          </a:p>
-        </p:txBody>
-      </p:sp>
-      <p:sp>
-        <p:nvSpPr>
-          <p:cNvPr id="12" name="f148">
-            <a:extLst xmlns:a="http://schemas.openxmlformats.org/drawingml/2006/main">
-              <a:ext uri="{FF2B5EF4-FFF2-40B4-BE49-F238E27FC236}">
-                <a16:creationId xmlns:a16="http://schemas.microsoft.com/office/drawing/2014/main" id="{100DD985-BD62-4A2A-84D9-BA7CA3E99BD3}"/>
-              </a:ext>
-            </a:extLst>
-          </p:cNvPr>
-          <p:cNvSpPr>
-            <a:spLocks xmlns:a="http://schemas.openxmlformats.org/drawingml/2006/main" noGrp="1"/>
-          </p:cNvSpPr>
-          <p:nvPr/>
-        </p:nvSpPr>
-        <p:spPr>
-          <a:xfrm xmlns:a="http://schemas.openxmlformats.org/drawingml/2006/main">
-            <a:off x="2466975" y="4572000"/>
-            <a:ext cx="171450" cy="190500"/>
-          </a:xfrm>
-          <a:prstGeom xmlns:a="http://schemas.openxmlformats.org/drawingml/2006/main" prst="rightArrow">
-            <a:avLst/>
-          </a:prstGeom>
-          <a:solidFill xmlns:a="http://schemas.openxmlformats.org/drawingml/2006/main">
-            <a:srgbClr val="4264D0"/>
-          </a:solidFill>
-          <a:ln xmlns:a="http://schemas.openxmlformats.org/drawingml/2006/main" w="0">
-            <a:noFill/>
-            <a:prstDash val="solid"/>
-          </a:ln>
-        </p:spPr>
-      </p:sp>
-      <p:sp>
-        <p:nvSpPr>
-          <p:cNvPr id="13" name="f149">
-            <a:extLst xmlns:a="http://schemas.openxmlformats.org/drawingml/2006/main">
-              <a:ext uri="{FF2B5EF4-FFF2-40B4-BE49-F238E27FC236}">
-                <a16:creationId xmlns:a16="http://schemas.microsoft.com/office/drawing/2014/main" id="{8862B0F5-506B-4C9B-ACB1-614610847E9E}"/>
-              </a:ext>
-            </a:extLst>
-          </p:cNvPr>
-          <p:cNvSpPr>
-            <a:spLocks xmlns:a="http://schemas.openxmlformats.org/drawingml/2006/main" noGrp="1"/>
-          </p:cNvSpPr>
-          <p:nvPr/>
-        </p:nvSpPr>
-        <p:spPr>
-          <a:xfrm xmlns:a="http://schemas.openxmlformats.org/drawingml/2006/main">
-            <a:off x="4229100" y="5238750"/>
-            <a:ext cx="95" cy="352425"/>
-          </a:xfrm>
-          <a:prstGeom xmlns:a="http://schemas.openxmlformats.org/drawingml/2006/main" prst="line">
-            <a:avLst/>
-          </a:prstGeom>
-          <a:noFill xmlns:a="http://schemas.openxmlformats.org/drawingml/2006/main"/>
-          <a:ln xmlns:a="http://schemas.openxmlformats.org/drawingml/2006/main" w="28575">
-            <a:solidFill>
-              <a:srgbClr val="4264D0"/>
-            </a:solidFill>
-            <a:prstDash val="solid"/>
-          </a:ln>
-        </p:spPr>
-      </p:sp>
-      <p:sp>
-        <p:nvSpPr>
-          <p:cNvPr id="14" name="f150">
-            <a:extLst xmlns:a="http://schemas.openxmlformats.org/drawingml/2006/main">
-              <a:ext uri="{FF2B5EF4-FFF2-40B4-BE49-F238E27FC236}">
-                <a16:creationId xmlns:a16="http://schemas.microsoft.com/office/drawing/2014/main" id="{D000B245-7622-4F15-A227-81F593BB3DCC}"/>
-              </a:ext>
-            </a:extLst>
-          </p:cNvPr>
-          <p:cNvSpPr>
-            <a:spLocks xmlns:a="http://schemas.openxmlformats.org/drawingml/2006/main" noGrp="1"/>
-          </p:cNvSpPr>
-          <p:nvPr/>
-        </p:nvSpPr>
-        <p:spPr>
-          <a:xfrm xmlns:a="http://schemas.openxmlformats.org/drawingml/2006/main">
-            <a:off x="2667000" y="5591175"/>
-            <a:ext cx="1562100" cy="95"/>
-          </a:xfrm>
-          <a:prstGeom xmlns:a="http://schemas.openxmlformats.org/drawingml/2006/main" prst="line">
-            <a:avLst/>
-          </a:prstGeom>
-          <a:noFill xmlns:a="http://schemas.openxmlformats.org/drawingml/2006/main"/>
-          <a:ln xmlns:a="http://schemas.openxmlformats.org/drawingml/2006/main" w="28575">
-            <a:solidFill>
-              <a:srgbClr val="4264D0"/>
-            </a:solidFill>
-            <a:prstDash val="solid"/>
-          </a:ln>
-        </p:spPr>
-      </p:sp>
-      <p:sp>
-        <p:nvSpPr>
-          <p:cNvPr id="15" name="f151">
-            <a:extLst xmlns:a="http://schemas.openxmlformats.org/drawingml/2006/main">
-              <a:ext uri="{FF2B5EF4-FFF2-40B4-BE49-F238E27FC236}">
-                <a16:creationId xmlns:a16="http://schemas.microsoft.com/office/drawing/2014/main" id="{AF3EFC0D-89F8-4C1D-831D-D3A957FB4576}"/>
-              </a:ext>
-            </a:extLst>
-          </p:cNvPr>
-          <p:cNvSpPr>
-            <a:spLocks xmlns:a="http://schemas.openxmlformats.org/drawingml/2006/main" noGrp="1"/>
-          </p:cNvSpPr>
-          <p:nvPr/>
-        </p:nvSpPr>
-        <p:spPr>
-          <a:xfrm xmlns:a="http://schemas.openxmlformats.org/drawingml/2006/main">
-            <a:off x="2667000" y="5591175"/>
-            <a:ext cx="95" cy="400050"/>
-          </a:xfrm>
-          <a:prstGeom xmlns:a="http://schemas.openxmlformats.org/drawingml/2006/main" prst="line">
-            <a:avLst/>
-          </a:prstGeom>
-          <a:noFill xmlns:a="http://schemas.openxmlformats.org/drawingml/2006/main"/>
-          <a:ln xmlns:a="http://schemas.openxmlformats.org/drawingml/2006/main" w="28575">
-            <a:solidFill>
-              <a:srgbClr val="4264D0"/>
-            </a:solidFill>
-            <a:prstDash val="solid"/>
-          </a:ln>
-        </p:spPr>
-      </p:sp>
-      <p:sp>
-        <p:nvSpPr>
-          <p:cNvPr id="16" name="f152">
-            <a:extLst xmlns:a="http://schemas.openxmlformats.org/drawingml/2006/main">
-              <a:ext uri="{FF2B5EF4-FFF2-40B4-BE49-F238E27FC236}">
-                <a16:creationId xmlns:a16="http://schemas.microsoft.com/office/drawing/2014/main" id="{8E9B749F-FDF1-4F84-B4F8-464113AD8B39}"/>
-              </a:ext>
-            </a:extLst>
-          </p:cNvPr>
-          <p:cNvSpPr>
-            <a:spLocks xmlns:a="http://schemas.openxmlformats.org/drawingml/2006/main" noGrp="1"/>
-          </p:cNvSpPr>
-          <p:nvPr/>
-        </p:nvSpPr>
-        <p:spPr>
-          <a:xfrm xmlns:a="http://schemas.openxmlformats.org/drawingml/2006/main">
-            <a:off x="2581275" y="5991225"/>
-            <a:ext cx="171450" cy="180975"/>
-          </a:xfrm>
-          <a:prstGeom xmlns:a="http://schemas.openxmlformats.org/drawingml/2006/main" prst="downArrow">
-            <a:avLst/>
-          </a:prstGeom>
-          <a:solidFill xmlns:a="http://schemas.openxmlformats.org/drawingml/2006/main">
-            <a:srgbClr val="4264D0"/>
-          </a:solidFill>
-          <a:ln xmlns:a="http://schemas.openxmlformats.org/drawingml/2006/main" w="0">
-            <a:noFill/>
-            <a:prstDash val="solid"/>
-          </a:ln>
-        </p:spPr>
-      </p:sp>
-      <p:sp>
-        <p:nvSpPr>
-          <p:cNvPr id="17" name="f153">
-            <a:extLst xmlns:a="http://schemas.openxmlformats.org/drawingml/2006/main">
-              <a:ext uri="{FF2B5EF4-FFF2-40B4-BE49-F238E27FC236}">
-                <a16:creationId xmlns:a16="http://schemas.microsoft.com/office/drawing/2014/main" id="{4B8454FB-C090-492D-89D8-CC5CD873672A}"/>
-              </a:ext>
-            </a:extLst>
-          </p:cNvPr>
-          <p:cNvSpPr>
-            <a:spLocks xmlns:a="http://schemas.openxmlformats.org/drawingml/2006/main" noGrp="1"/>
-          </p:cNvSpPr>
-          <p:nvPr/>
-        </p:nvSpPr>
-        <p:spPr>
-          <a:xfrm xmlns:a="http://schemas.openxmlformats.org/drawingml/2006/main">
-            <a:off x="4229100" y="5591175"/>
-            <a:ext cx="1104900" cy="95"/>
-          </a:xfrm>
-          <a:prstGeom xmlns:a="http://schemas.openxmlformats.org/drawingml/2006/main" prst="line">
-            <a:avLst/>
-          </a:prstGeom>
-          <a:noFill xmlns:a="http://schemas.openxmlformats.org/drawingml/2006/main"/>
-          <a:ln xmlns:a="http://schemas.openxmlformats.org/drawingml/2006/main" w="28575">
-            <a:solidFill>
-              <a:srgbClr val="4264D0"/>
-            </a:solidFill>
-            <a:prstDash val="solid"/>
-          </a:ln>
-        </p:spPr>
-      </p:sp>
-      <p:sp>
-        <p:nvSpPr>
-          <p:cNvPr id="18" name="f154">
-            <a:extLst xmlns:a="http://schemas.openxmlformats.org/drawingml/2006/main">
-              <a:ext uri="{FF2B5EF4-FFF2-40B4-BE49-F238E27FC236}">
-                <a16:creationId xmlns:a16="http://schemas.microsoft.com/office/drawing/2014/main" id="{9CC780BA-4C06-4240-A284-478E70D7A8A6}"/>
-              </a:ext>
-            </a:extLst>
-          </p:cNvPr>
-          <p:cNvSpPr>
-            <a:spLocks xmlns:a="http://schemas.openxmlformats.org/drawingml/2006/main" noGrp="1"/>
-          </p:cNvSpPr>
-          <p:nvPr/>
-        </p:nvSpPr>
-        <p:spPr>
-          <a:xfrm xmlns:a="http://schemas.openxmlformats.org/drawingml/2006/main">
-            <a:off x="5334000" y="5591175"/>
-            <a:ext cx="95" cy="400050"/>
-          </a:xfrm>
-          <a:prstGeom xmlns:a="http://schemas.openxmlformats.org/drawingml/2006/main" prst="line">
-            <a:avLst/>
-          </a:prstGeom>
-          <a:noFill xmlns:a="http://schemas.openxmlformats.org/drawingml/2006/main"/>
-          <a:ln xmlns:a="http://schemas.openxmlformats.org/drawingml/2006/main" w="28575">
-            <a:solidFill>
-              <a:srgbClr val="4264D0"/>
-            </a:solidFill>
-            <a:prstDash val="solid"/>
-          </a:ln>
-        </p:spPr>
-      </p:sp>
-      <p:sp>
-        <p:nvSpPr>
-          <p:cNvPr id="19" name="f155">
-            <a:extLst xmlns:a="http://schemas.openxmlformats.org/drawingml/2006/main">
-              <a:ext uri="{FF2B5EF4-FFF2-40B4-BE49-F238E27FC236}">
-                <a16:creationId xmlns:a16="http://schemas.microsoft.com/office/drawing/2014/main" id="{B3907F2D-77F2-495A-989C-91F9B12D56D1}"/>
-              </a:ext>
-            </a:extLst>
-          </p:cNvPr>
-          <p:cNvSpPr>
-            <a:spLocks xmlns:a="http://schemas.openxmlformats.org/drawingml/2006/main" noGrp="1"/>
-          </p:cNvSpPr>
-          <p:nvPr/>
-        </p:nvSpPr>
-        <p:spPr>
-          <a:xfrm xmlns:a="http://schemas.openxmlformats.org/drawingml/2006/main">
-            <a:off x="5248275" y="5991225"/>
-            <a:ext cx="171450" cy="180975"/>
-          </a:xfrm>
-          <a:prstGeom xmlns:a="http://schemas.openxmlformats.org/drawingml/2006/main" prst="downArrow">
-            <a:avLst/>
-          </a:prstGeom>
-          <a:solidFill xmlns:a="http://schemas.openxmlformats.org/drawingml/2006/main">
-            <a:srgbClr val="4264D0"/>
-          </a:solidFill>
-          <a:ln xmlns:a="http://schemas.openxmlformats.org/drawingml/2006/main" w="0">
-            <a:noFill/>
-            <a:prstDash val="solid"/>
-          </a:ln>
-        </p:spPr>
-      </p:sp>
-      <p:sp>
-        <p:nvSpPr>
-          <p:cNvPr id="20" name="f156">
-            <a:extLst xmlns:a="http://schemas.openxmlformats.org/drawingml/2006/main">
-              <a:ext uri="{FF2B5EF4-FFF2-40B4-BE49-F238E27FC236}">
-                <a16:creationId xmlns:a16="http://schemas.microsoft.com/office/drawing/2014/main" id="{EE780FAA-9504-4C07-8C4E-FE10A2D616E3}"/>
-              </a:ext>
-            </a:extLst>
-          </p:cNvPr>
-          <p:cNvSpPr>
-            <a:spLocks xmlns:a="http://schemas.openxmlformats.org/drawingml/2006/main" noGrp="1"/>
-          </p:cNvSpPr>
-          <p:nvPr/>
-        </p:nvSpPr>
-        <p:spPr>
-          <a:xfrm xmlns:a="http://schemas.openxmlformats.org/drawingml/2006/main">
-            <a:off x="1562100" y="6257925"/>
-            <a:ext cx="2209800" cy="609600"/>
-          </a:xfrm>
-          <a:prstGeom xmlns:a="http://schemas.openxmlformats.org/drawingml/2006/main" prst="roundRect">
-            <a:avLst>
-              <a:gd name="adj" fmla="val 25000"/>
-            </a:avLst>
-          </a:prstGeom>
-          <a:solidFill xmlns:a="http://schemas.openxmlformats.org/drawingml/2006/main">
-            <a:srgbClr val="FFFFFF"/>
-          </a:solidFill>
-          <a:ln xmlns:a="http://schemas.openxmlformats.org/drawingml/2006/main" w="17145">
-            <a:solidFill>
-              <a:srgbClr val="D9E3EF"/>
-            </a:solidFill>
-            <a:prstDash val="solid"/>
-          </a:ln>
-        </p:spPr>
-      </p:sp>
-      <p:sp>
-        <p:nvSpPr>
-          <p:cNvPr id="21" name="f157">
-            <a:extLst xmlns:a="http://schemas.openxmlformats.org/drawingml/2006/main">
-              <a:ext uri="{FF2B5EF4-FFF2-40B4-BE49-F238E27FC236}">
-                <a16:creationId xmlns:a16="http://schemas.microsoft.com/office/drawing/2014/main" id="{9A10E35B-D1FF-4F69-BE5C-8DD20351EA74}"/>
-              </a:ext>
-            </a:extLst>
-          </p:cNvPr>
-          <p:cNvSpPr>
-            <a:spLocks xmlns:a="http://schemas.openxmlformats.org/drawingml/2006/main" noGrp="1"/>
-          </p:cNvSpPr>
-          <p:nvPr/>
-        </p:nvSpPr>
-        <p:spPr>
-          <a:xfrm xmlns:a="http://schemas.openxmlformats.org/drawingml/2006/main">
-            <a:off x="1714500" y="6448425"/>
-            <a:ext cx="1905000" cy="352425"/>
-          </a:xfrm>
-          <a:prstGeom xmlns:a="http://schemas.openxmlformats.org/drawingml/2006/main" prst="rect">
-            <a:avLst/>
-          </a:prstGeom>
-          <a:noFill xmlns:a="http://schemas.openxmlformats.org/drawingml/2006/main"/>
-          <a:ln xmlns:a="http://schemas.openxmlformats.org/drawingml/2006/main" w="0">
-            <a:noFill/>
-            <a:prstDash val="solid"/>
-          </a:ln>
-        </p:spPr>
-        <p:txBody>
-          <a:bodyPr xmlns:a="http://schemas.openxmlformats.org/drawingml/2006/main" wrap="none" lIns="0" tIns="0" rIns="0" bIns="0" anchor="t">
-            <a:noAutofit/>
-          </a:bodyPr>
-          <a:lstStyle xmlns:a="http://schemas.openxmlformats.org/drawingml/2006/main">
-            <a:defPPr algn="ctr">
-              <a:defRPr sz="1875" b="1">
-                <a:solidFill>
-                  <a:srgbClr val="182536"/>
-                </a:solidFill>
-                <a:latin typeface="Nimbus Sans"/>
-                <a:ea typeface="Nimbus Sans"/>
-                <a:cs typeface="Nimbus Sans"/>
-              </a:defRPr>
-            </a:defPPr>
-            <a:lvl1pPr algn="ctr">
-              <a:defRPr sz="1875" b="1">
-                <a:solidFill>
-                  <a:srgbClr val="182536"/>
-                </a:solidFill>
-                <a:latin typeface="Nimbus Sans"/>
-                <a:ea typeface="Nimbus Sans"/>
-                <a:cs typeface="Nimbus Sans"/>
-              </a:defRPr>
-            </a:lvl1pPr>
-            <a:lvl2pPr algn="ctr">
-              <a:defRPr sz="1875" b="1">
-                <a:solidFill>
-                  <a:srgbClr val="182536"/>
-                </a:solidFill>
-                <a:latin typeface="Nimbus Sans"/>
-                <a:ea typeface="Nimbus Sans"/>
-                <a:cs typeface="Nimbus Sans"/>
-              </a:defRPr>
-            </a:lvl2pPr>
-            <a:lvl3pPr algn="ctr">
-              <a:defRPr sz="1875" b="1">
-                <a:solidFill>
-                  <a:srgbClr val="182536"/>
-                </a:solidFill>
-                <a:latin typeface="Nimbus Sans"/>
-                <a:ea typeface="Nimbus Sans"/>
-                <a:cs typeface="Nimbus Sans"/>
-              </a:defRPr>
-            </a:lvl3pPr>
-            <a:lvl4pPr algn="ctr">
-              <a:defRPr sz="1875" b="1">
-                <a:solidFill>
-                  <a:srgbClr val="182536"/>
-                </a:solidFill>
-                <a:latin typeface="Nimbus Sans"/>
-                <a:ea typeface="Nimbus Sans"/>
-                <a:cs typeface="Nimbus Sans"/>
-              </a:defRPr>
-            </a:lvl4pPr>
-            <a:lvl5pPr algn="ctr">
-              <a:defRPr sz="1875" b="1">
-                <a:solidFill>
-                  <a:srgbClr val="182536"/>
-                </a:solidFill>
-                <a:latin typeface="Nimbus Sans"/>
-                <a:ea typeface="Nimbus Sans"/>
-                <a:cs typeface="Nimbus Sans"/>
-              </a:defRPr>
-            </a:lvl5pPr>
-            <a:lvl6pPr algn="ctr">
-              <a:defRPr sz="1875" b="1">
-                <a:solidFill>
-                  <a:srgbClr val="182536"/>
-                </a:solidFill>
-                <a:latin typeface="Nimbus Sans"/>
-                <a:ea typeface="Nimbus Sans"/>
-                <a:cs typeface="Nimbus Sans"/>
-              </a:defRPr>
-            </a:lvl6pPr>
-            <a:lvl7pPr algn="ctr">
-              <a:defRPr sz="1875" b="1">
-                <a:solidFill>
-                  <a:srgbClr val="182536"/>
-                </a:solidFill>
-                <a:latin typeface="Nimbus Sans"/>
-                <a:ea typeface="Nimbus Sans"/>
-                <a:cs typeface="Nimbus Sans"/>
-              </a:defRPr>
-            </a:lvl7pPr>
-            <a:lvl8pPr algn="ctr">
-              <a:defRPr sz="1875" b="1">
-                <a:solidFill>
-                  <a:srgbClr val="182536"/>
-                </a:solidFill>
-                <a:latin typeface="Nimbus Sans"/>
-                <a:ea typeface="Nimbus Sans"/>
-                <a:cs typeface="Nimbus Sans"/>
-              </a:defRPr>
-            </a:lvl8pPr>
-            <a:lvl9pPr algn="ctr">
-              <a:defRPr sz="1875" b="1">
-                <a:solidFill>
-                  <a:srgbClr val="182536"/>
-                </a:solidFill>
-                <a:latin typeface="Nimbus Sans"/>
-                <a:ea typeface="Nimbus Sans"/>
-                <a:cs typeface="Nimbus Sans"/>
-              </a:defRPr>
-            </a:lvl9pPr>
-          </a:lstStyle>
-          <a:p xmlns:a="http://schemas.openxmlformats.org/drawingml/2006/main">
-            <a:pPr algn="ctr">
-              <a:defRPr sz="1875" b="1">
-                <a:solidFill>
-                  <a:srgbClr val="182536"/>
-                </a:solidFill>
-                <a:latin typeface="Nimbus Sans"/>
-                <a:ea typeface="Nimbus Sans"/>
-                <a:cs typeface="Nimbus Sans"/>
-              </a:defRPr>
-            </a:pPr>
-            <a:r>
-              <a:rPr sz="1875" b="1">
-                <a:solidFill>
-                  <a:srgbClr val="182536"/>
-                </a:solidFill>
-                <a:latin typeface="Nimbus Sans"/>
-                <a:ea typeface="Nimbus Sans"/>
-                <a:cs typeface="Nimbus Sans"/>
-              </a:rPr>
-              <a:t>Report baseline</a:t>
-            </a:r>
-          </a:p>
-        </p:txBody>
-      </p:sp>
-      <p:sp>
-        <p:nvSpPr>
-          <p:cNvPr id="22" name="f158">
-            <a:extLst xmlns:a="http://schemas.openxmlformats.org/drawingml/2006/main">
-              <a:ext uri="{FF2B5EF4-FFF2-40B4-BE49-F238E27FC236}">
-                <a16:creationId xmlns:a16="http://schemas.microsoft.com/office/drawing/2014/main" id="{3E047A60-0C4E-4504-93DF-3A115F23E675}"/>
-              </a:ext>
-            </a:extLst>
-          </p:cNvPr>
-          <p:cNvSpPr>
-            <a:spLocks xmlns:a="http://schemas.openxmlformats.org/drawingml/2006/main" noGrp="1"/>
-          </p:cNvSpPr>
-          <p:nvPr/>
-        </p:nvSpPr>
-        <p:spPr>
-          <a:xfrm xmlns:a="http://schemas.openxmlformats.org/drawingml/2006/main">
-            <a:off x="4229100" y="6257925"/>
-            <a:ext cx="2209800" cy="609600"/>
-          </a:xfrm>
-          <a:prstGeom xmlns:a="http://schemas.openxmlformats.org/drawingml/2006/main" prst="roundRect">
-            <a:avLst>
-              <a:gd name="adj" fmla="val 25000"/>
-            </a:avLst>
-          </a:prstGeom>
-          <a:solidFill xmlns:a="http://schemas.openxmlformats.org/drawingml/2006/main">
-            <a:srgbClr val="FFFFFF"/>
-          </a:solidFill>
-          <a:ln xmlns:a="http://schemas.openxmlformats.org/drawingml/2006/main" w="17145">
-            <a:solidFill>
-              <a:srgbClr val="D9E3EF"/>
-            </a:solidFill>
-            <a:prstDash val="solid"/>
-          </a:ln>
-        </p:spPr>
-      </p:sp>
-      <p:sp>
-        <p:nvSpPr>
-          <p:cNvPr id="23" name="f159">
-            <a:extLst xmlns:a="http://schemas.openxmlformats.org/drawingml/2006/main">
-              <a:ext uri="{FF2B5EF4-FFF2-40B4-BE49-F238E27FC236}">
-                <a16:creationId xmlns:a16="http://schemas.microsoft.com/office/drawing/2014/main" id="{DE93A31F-D9AE-4EA6-86E5-91A0D89F9EEC}"/>
-              </a:ext>
-            </a:extLst>
-          </p:cNvPr>
-          <p:cNvSpPr>
-            <a:spLocks xmlns:a="http://schemas.openxmlformats.org/drawingml/2006/main" noGrp="1"/>
-          </p:cNvSpPr>
-          <p:nvPr/>
-        </p:nvSpPr>
-        <p:spPr>
-          <a:xfrm xmlns:a="http://schemas.openxmlformats.org/drawingml/2006/main">
-            <a:off x="4381500" y="6448425"/>
-            <a:ext cx="1905000" cy="352425"/>
-          </a:xfrm>
-          <a:prstGeom xmlns:a="http://schemas.openxmlformats.org/drawingml/2006/main" prst="rect">
-            <a:avLst/>
-          </a:prstGeom>
-          <a:noFill xmlns:a="http://schemas.openxmlformats.org/drawingml/2006/main"/>
-          <a:ln xmlns:a="http://schemas.openxmlformats.org/drawingml/2006/main" w="0">
-            <a:noFill/>
-            <a:prstDash val="solid"/>
-          </a:ln>
-        </p:spPr>
-        <p:txBody>
-          <a:bodyPr xmlns:a="http://schemas.openxmlformats.org/drawingml/2006/main" wrap="none" lIns="0" tIns="0" rIns="0" bIns="0" anchor="t">
-            <a:noAutofit/>
-          </a:bodyPr>
-          <a:lstStyle xmlns:a="http://schemas.openxmlformats.org/drawingml/2006/main">
-            <a:defPPr algn="ctr">
-              <a:defRPr sz="1875" b="1">
-                <a:solidFill>
-                  <a:srgbClr val="182536"/>
-                </a:solidFill>
-                <a:latin typeface="Nimbus Sans"/>
-                <a:ea typeface="Nimbus Sans"/>
-                <a:cs typeface="Nimbus Sans"/>
-              </a:defRPr>
-            </a:defPPr>
-            <a:lvl1pPr algn="ctr">
-              <a:defRPr sz="1875" b="1">
-                <a:solidFill>
-                  <a:srgbClr val="182536"/>
-                </a:solidFill>
-                <a:latin typeface="Nimbus Sans"/>
-                <a:ea typeface="Nimbus Sans"/>
-                <a:cs typeface="Nimbus Sans"/>
-              </a:defRPr>
-            </a:lvl1pPr>
-            <a:lvl2pPr algn="ctr">
-              <a:defRPr sz="1875" b="1">
-                <a:solidFill>
-                  <a:srgbClr val="182536"/>
-                </a:solidFill>
-                <a:latin typeface="Nimbus Sans"/>
-                <a:ea typeface="Nimbus Sans"/>
-                <a:cs typeface="Nimbus Sans"/>
-              </a:defRPr>
-            </a:lvl2pPr>
-            <a:lvl3pPr algn="ctr">
-              <a:defRPr sz="1875" b="1">
-                <a:solidFill>
-                  <a:srgbClr val="182536"/>
-                </a:solidFill>
-                <a:latin typeface="Nimbus Sans"/>
-                <a:ea typeface="Nimbus Sans"/>
-                <a:cs typeface="Nimbus Sans"/>
-              </a:defRPr>
-            </a:lvl3pPr>
-            <a:lvl4pPr algn="ctr">
-              <a:defRPr sz="1875" b="1">
-                <a:solidFill>
-                  <a:srgbClr val="182536"/>
-                </a:solidFill>
-                <a:latin typeface="Nimbus Sans"/>
-                <a:ea typeface="Nimbus Sans"/>
-                <a:cs typeface="Nimbus Sans"/>
-              </a:defRPr>
-            </a:lvl4pPr>
-            <a:lvl5pPr algn="ctr">
-              <a:defRPr sz="1875" b="1">
-                <a:solidFill>
-                  <a:srgbClr val="182536"/>
-                </a:solidFill>
-                <a:latin typeface="Nimbus Sans"/>
-                <a:ea typeface="Nimbus Sans"/>
-                <a:cs typeface="Nimbus Sans"/>
-              </a:defRPr>
-            </a:lvl5pPr>
-            <a:lvl6pPr algn="ctr">
-              <a:defRPr sz="1875" b="1">
-                <a:solidFill>
-                  <a:srgbClr val="182536"/>
-                </a:solidFill>
-                <a:latin typeface="Nimbus Sans"/>
-                <a:ea typeface="Nimbus Sans"/>
-                <a:cs typeface="Nimbus Sans"/>
-              </a:defRPr>
-            </a:lvl6pPr>
-            <a:lvl7pPr algn="ctr">
-              <a:defRPr sz="1875" b="1">
-                <a:solidFill>
-                  <a:srgbClr val="182536"/>
-                </a:solidFill>
-                <a:latin typeface="Nimbus Sans"/>
-                <a:ea typeface="Nimbus Sans"/>
-                <a:cs typeface="Nimbus Sans"/>
-              </a:defRPr>
-            </a:lvl7pPr>
-            <a:lvl8pPr algn="ctr">
-              <a:defRPr sz="1875" b="1">
-                <a:solidFill>
-                  <a:srgbClr val="182536"/>
-                </a:solidFill>
-                <a:latin typeface="Nimbus Sans"/>
-                <a:ea typeface="Nimbus Sans"/>
-                <a:cs typeface="Nimbus Sans"/>
-              </a:defRPr>
-            </a:lvl8pPr>
-            <a:lvl9pPr algn="ctr">
-              <a:defRPr sz="1875" b="1">
-                <a:solidFill>
-                  <a:srgbClr val="182536"/>
-                </a:solidFill>
-                <a:latin typeface="Nimbus Sans"/>
-                <a:ea typeface="Nimbus Sans"/>
-                <a:cs typeface="Nimbus Sans"/>
-              </a:defRPr>
-            </a:lvl9pPr>
-          </a:lstStyle>
-          <a:p xmlns:a="http://schemas.openxmlformats.org/drawingml/2006/main">
-            <a:pPr algn="ctr">
-              <a:defRPr sz="1875" b="1">
-                <a:solidFill>
-                  <a:srgbClr val="182536"/>
-                </a:solidFill>
-                <a:latin typeface="Nimbus Sans"/>
-                <a:ea typeface="Nimbus Sans"/>
-                <a:cs typeface="Nimbus Sans"/>
-              </a:defRPr>
-            </a:pPr>
-            <a:r>
-              <a:rPr sz="1875" b="1">
-                <a:solidFill>
-                  <a:srgbClr val="182536"/>
-                </a:solidFill>
-                <a:latin typeface="Nimbus Sans"/>
-                <a:ea typeface="Nimbus Sans"/>
-                <a:cs typeface="Nimbus Sans"/>
-              </a:rPr>
-              <a:t>Report mutato</a:t>
-            </a:r>
-          </a:p>
-        </p:txBody>
-      </p:sp>
-      <p:sp>
-        <p:nvSpPr>
-          <p:cNvPr id="24" name="f160">
-            <a:extLst xmlns:a="http://schemas.openxmlformats.org/drawingml/2006/main">
-              <a:ext uri="{FF2B5EF4-FFF2-40B4-BE49-F238E27FC236}">
-                <a16:creationId xmlns:a16="http://schemas.microsoft.com/office/drawing/2014/main" id="{4F235AC4-C86A-4529-9042-7C57C9D81EAD}"/>
-              </a:ext>
-            </a:extLst>
-          </p:cNvPr>
-          <p:cNvSpPr>
-            <a:spLocks xmlns:a="http://schemas.openxmlformats.org/drawingml/2006/main" noGrp="1"/>
-          </p:cNvSpPr>
-          <p:nvPr/>
-        </p:nvSpPr>
-        <p:spPr>
-          <a:xfrm xmlns:a="http://schemas.openxmlformats.org/drawingml/2006/main">
-            <a:off x="6191250" y="4686300"/>
-            <a:ext cx="1714500" cy="847725"/>
-          </a:xfrm>
-          <a:prstGeom xmlns:a="http://schemas.openxmlformats.org/drawingml/2006/main" prst="roundRect">
-            <a:avLst>
-              <a:gd name="adj" fmla="val 17978"/>
-            </a:avLst>
-          </a:prstGeom>
-          <a:solidFill xmlns:a="http://schemas.openxmlformats.org/drawingml/2006/main">
-            <a:srgbClr val="FFF7E9"/>
-          </a:solidFill>
-          <a:ln xmlns:a="http://schemas.openxmlformats.org/drawingml/2006/main" w="17145">
-            <a:solidFill>
-              <a:srgbClr val="E8D6B6"/>
-            </a:solidFill>
-            <a:prstDash val="solid"/>
-          </a:ln>
-        </p:spPr>
-      </p:sp>
-      <p:sp>
-        <p:nvSpPr>
-          <p:cNvPr id="25" name="f161">
-            <a:extLst xmlns:a="http://schemas.openxmlformats.org/drawingml/2006/main">
-              <a:ext uri="{FF2B5EF4-FFF2-40B4-BE49-F238E27FC236}">
-                <a16:creationId xmlns:a16="http://schemas.microsoft.com/office/drawing/2014/main" id="{187BD063-F1F8-4A2E-B154-95270FBE9E53}"/>
-              </a:ext>
-            </a:extLst>
-          </p:cNvPr>
-          <p:cNvSpPr>
-            <a:spLocks xmlns:a="http://schemas.openxmlformats.org/drawingml/2006/main" noGrp="1"/>
-          </p:cNvSpPr>
-          <p:nvPr/>
-        </p:nvSpPr>
-        <p:spPr>
-          <a:xfrm xmlns:a="http://schemas.openxmlformats.org/drawingml/2006/main">
-            <a:off x="6305550" y="4819650"/>
-            <a:ext cx="1485900" cy="685800"/>
-          </a:xfrm>
-          <a:prstGeom xmlns:a="http://schemas.openxmlformats.org/drawingml/2006/main" prst="rect">
-            <a:avLst/>
-          </a:prstGeom>
-          <a:noFill xmlns:a="http://schemas.openxmlformats.org/drawingml/2006/main"/>
-          <a:ln xmlns:a="http://schemas.openxmlformats.org/drawingml/2006/main" w="0">
-            <a:noFill/>
-            <a:prstDash val="solid"/>
-          </a:ln>
-        </p:spPr>
-        <p:txBody>
-          <a:bodyPr xmlns:a="http://schemas.openxmlformats.org/drawingml/2006/main" wrap="none" lIns="0" tIns="0" rIns="0" bIns="0" anchor="t">
-            <a:noAutofit/>
-          </a:bodyPr>
-          <a:lstStyle xmlns:a="http://schemas.openxmlformats.org/drawingml/2006/main">
-            <a:defPPr algn="ctr">
-              <a:defRPr sz="2025" b="1">
-                <a:solidFill>
-                  <a:srgbClr val="9D7139"/>
-                </a:solidFill>
-                <a:latin typeface="Nimbus Sans"/>
-                <a:ea typeface="Nimbus Sans"/>
-                <a:cs typeface="Nimbus Sans"/>
-              </a:defRPr>
-            </a:defPPr>
-            <a:lvl1pPr algn="ctr">
-              <a:defRPr sz="2025" b="1">
-                <a:solidFill>
-                  <a:srgbClr val="9D7139"/>
-                </a:solidFill>
-                <a:latin typeface="Nimbus Sans"/>
-                <a:ea typeface="Nimbus Sans"/>
-                <a:cs typeface="Nimbus Sans"/>
-              </a:defRPr>
-            </a:lvl1pPr>
-            <a:lvl2pPr algn="ctr">
-              <a:defRPr sz="2025" b="1">
-                <a:solidFill>
-                  <a:srgbClr val="9D7139"/>
-                </a:solidFill>
-                <a:latin typeface="Nimbus Sans"/>
-                <a:ea typeface="Nimbus Sans"/>
-                <a:cs typeface="Nimbus Sans"/>
-              </a:defRPr>
-            </a:lvl2pPr>
-            <a:lvl3pPr algn="ctr">
-              <a:defRPr sz="2025" b="1">
-                <a:solidFill>
-                  <a:srgbClr val="9D7139"/>
-                </a:solidFill>
-                <a:latin typeface="Nimbus Sans"/>
-                <a:ea typeface="Nimbus Sans"/>
-                <a:cs typeface="Nimbus Sans"/>
-              </a:defRPr>
-            </a:lvl3pPr>
-            <a:lvl4pPr algn="ctr">
-              <a:defRPr sz="2025" b="1">
-                <a:solidFill>
-                  <a:srgbClr val="9D7139"/>
-                </a:solidFill>
-                <a:latin typeface="Nimbus Sans"/>
-                <a:ea typeface="Nimbus Sans"/>
-                <a:cs typeface="Nimbus Sans"/>
-              </a:defRPr>
-            </a:lvl4pPr>
-            <a:lvl5pPr algn="ctr">
-              <a:defRPr sz="2025" b="1">
-                <a:solidFill>
-                  <a:srgbClr val="9D7139"/>
-                </a:solidFill>
-                <a:latin typeface="Nimbus Sans"/>
-                <a:ea typeface="Nimbus Sans"/>
-                <a:cs typeface="Nimbus Sans"/>
-              </a:defRPr>
-            </a:lvl5pPr>
-            <a:lvl6pPr algn="ctr">
-              <a:defRPr sz="2025" b="1">
-                <a:solidFill>
-                  <a:srgbClr val="9D7139"/>
-                </a:solidFill>
-                <a:latin typeface="Nimbus Sans"/>
-                <a:ea typeface="Nimbus Sans"/>
-                <a:cs typeface="Nimbus Sans"/>
-              </a:defRPr>
-            </a:lvl6pPr>
-            <a:lvl7pPr algn="ctr">
-              <a:defRPr sz="2025" b="1">
-                <a:solidFill>
-                  <a:srgbClr val="9D7139"/>
-                </a:solidFill>
-                <a:latin typeface="Nimbus Sans"/>
-                <a:ea typeface="Nimbus Sans"/>
-                <a:cs typeface="Nimbus Sans"/>
-              </a:defRPr>
-            </a:lvl7pPr>
-            <a:lvl8pPr algn="ctr">
-              <a:defRPr sz="2025" b="1">
-                <a:solidFill>
-                  <a:srgbClr val="9D7139"/>
-                </a:solidFill>
-                <a:latin typeface="Nimbus Sans"/>
-                <a:ea typeface="Nimbus Sans"/>
-                <a:cs typeface="Nimbus Sans"/>
-              </a:defRPr>
-            </a:lvl8pPr>
-            <a:lvl9pPr algn="ctr">
-              <a:defRPr sz="2025" b="1">
-                <a:solidFill>
-                  <a:srgbClr val="9D7139"/>
-                </a:solidFill>
-                <a:latin typeface="Nimbus Sans"/>
-                <a:ea typeface="Nimbus Sans"/>
-                <a:cs typeface="Nimbus Sans"/>
-              </a:defRPr>
-            </a:lvl9pPr>
-          </a:lstStyle>
-          <a:p xmlns:a="http://schemas.openxmlformats.org/drawingml/2006/main">
-            <a:pPr algn="ctr">
-              <a:defRPr sz="2025" b="1">
-                <a:solidFill>
-                  <a:srgbClr val="9D7139"/>
-                </a:solidFill>
-                <a:latin typeface="Nimbus Sans"/>
-                <a:ea typeface="Nimbus Sans"/>
-                <a:cs typeface="Nimbus Sans"/>
-              </a:defRPr>
-            </a:pPr>
-            <a:r>
-              <a:rPr sz="2025" b="1">
-                <a:solidFill>
-                  <a:srgbClr val="9D7139"/>
-                </a:solidFill>
-                <a:latin typeface="Nimbus Sans"/>
-                <a:ea typeface="Nimbus Sans"/>
-                <a:cs typeface="Nimbus Sans"/>
-              </a:rPr>
-              <a:t>Mutatore</a:t>
-            </a:r>
-          </a:p>
-          <a:p xmlns:a="http://schemas.openxmlformats.org/drawingml/2006/main">
-            <a:pPr algn="ctr">
-              <a:defRPr sz="2025" b="1">
-                <a:solidFill>
-                  <a:srgbClr val="9D7139"/>
-                </a:solidFill>
-                <a:latin typeface="Nimbus Sans"/>
-                <a:ea typeface="Nimbus Sans"/>
-                <a:cs typeface="Nimbus Sans"/>
-              </a:defRPr>
-            </a:pPr>
-            <a:r>
-              <a:rPr sz="2025" b="1">
-                <a:solidFill>
-                  <a:srgbClr val="9D7139"/>
-                </a:solidFill>
-                <a:latin typeface="Nimbus Sans"/>
-                <a:ea typeface="Nimbus Sans"/>
-                <a:cs typeface="Nimbus Sans"/>
-              </a:rPr>
-              <a:t>separato</a:t>
-            </a:r>
-          </a:p>
-        </p:txBody>
-      </p:sp>
-      <p:sp>
-        <p:nvSpPr>
-          <p:cNvPr id="26" name="f162">
-            <a:extLst xmlns:a="http://schemas.openxmlformats.org/drawingml/2006/main">
-              <a:ext uri="{FF2B5EF4-FFF2-40B4-BE49-F238E27FC236}">
-                <a16:creationId xmlns:a16="http://schemas.microsoft.com/office/drawing/2014/main" id="{15E720C5-8252-4709-863A-ECF361921C84}"/>
-              </a:ext>
-            </a:extLst>
-          </p:cNvPr>
-          <p:cNvSpPr>
-            <a:spLocks xmlns:a="http://schemas.openxmlformats.org/drawingml/2006/main" noGrp="1"/>
-          </p:cNvSpPr>
-          <p:nvPr/>
-        </p:nvSpPr>
-        <p:spPr>
-          <a:xfrm xmlns:a="http://schemas.openxmlformats.org/drawingml/2006/main">
-            <a:off x="6191250" y="3248025"/>
-            <a:ext cx="1714500" cy="609600"/>
-          </a:xfrm>
-          <a:prstGeom xmlns:a="http://schemas.openxmlformats.org/drawingml/2006/main" prst="roundRect">
-            <a:avLst>
-              <a:gd name="adj" fmla="val 25000"/>
-            </a:avLst>
-          </a:prstGeom>
-          <a:solidFill xmlns:a="http://schemas.openxmlformats.org/drawingml/2006/main">
-            <a:srgbClr val="FFFFFF"/>
-          </a:solidFill>
-          <a:ln xmlns:a="http://schemas.openxmlformats.org/drawingml/2006/main" w="17145">
-            <a:solidFill>
-              <a:srgbClr val="D9E3EF"/>
-            </a:solidFill>
-            <a:prstDash val="solid"/>
-          </a:ln>
-        </p:spPr>
-      </p:sp>
-      <p:sp>
-        <p:nvSpPr>
-          <p:cNvPr id="27" name="f163">
-            <a:extLst xmlns:a="http://schemas.openxmlformats.org/drawingml/2006/main">
-              <a:ext uri="{FF2B5EF4-FFF2-40B4-BE49-F238E27FC236}">
-                <a16:creationId xmlns:a16="http://schemas.microsoft.com/office/drawing/2014/main" id="{E2911A98-EB9A-4C35-8631-9B5999AFAC91}"/>
-              </a:ext>
-            </a:extLst>
-          </p:cNvPr>
-          <p:cNvSpPr>
-            <a:spLocks xmlns:a="http://schemas.openxmlformats.org/drawingml/2006/main" noGrp="1"/>
-          </p:cNvSpPr>
-          <p:nvPr/>
-        </p:nvSpPr>
-        <p:spPr>
-          <a:xfrm xmlns:a="http://schemas.openxmlformats.org/drawingml/2006/main">
-            <a:off x="6315075" y="3438525"/>
-            <a:ext cx="1466850" cy="342900"/>
-          </a:xfrm>
-          <a:prstGeom xmlns:a="http://schemas.openxmlformats.org/drawingml/2006/main" prst="rect">
-            <a:avLst/>
-          </a:prstGeom>
-          <a:noFill xmlns:a="http://schemas.openxmlformats.org/drawingml/2006/main"/>
-          <a:ln xmlns:a="http://schemas.openxmlformats.org/drawingml/2006/main" w="0">
-            <a:noFill/>
-            <a:prstDash val="solid"/>
-          </a:ln>
-        </p:spPr>
-        <p:txBody>
-          <a:bodyPr xmlns:a="http://schemas.openxmlformats.org/drawingml/2006/main" wrap="none" lIns="0" tIns="0" rIns="0" bIns="0" anchor="t">
-            <a:noAutofit/>
-          </a:bodyPr>
-          <a:lstStyle xmlns:a="http://schemas.openxmlformats.org/drawingml/2006/main">
-            <a:defPPr algn="ctr">
-              <a:defRPr sz="1800" b="1">
-                <a:solidFill>
-                  <a:srgbClr val="182536"/>
-                </a:solidFill>
-                <a:latin typeface="Nimbus Sans"/>
-                <a:ea typeface="Nimbus Sans"/>
-                <a:cs typeface="Nimbus Sans"/>
-              </a:defRPr>
-            </a:defPPr>
-            <a:lvl1pPr algn="ctr">
-              <a:defRPr sz="1800" b="1">
-                <a:solidFill>
-                  <a:srgbClr val="182536"/>
-                </a:solidFill>
-                <a:latin typeface="Nimbus Sans"/>
-                <a:ea typeface="Nimbus Sans"/>
-                <a:cs typeface="Nimbus Sans"/>
-              </a:defRPr>
-            </a:lvl1pPr>
-            <a:lvl2pPr algn="ctr">
-              <a:defRPr sz="1800" b="1">
-                <a:solidFill>
-                  <a:srgbClr val="182536"/>
-                </a:solidFill>
-                <a:latin typeface="Nimbus Sans"/>
-                <a:ea typeface="Nimbus Sans"/>
-                <a:cs typeface="Nimbus Sans"/>
-              </a:defRPr>
-            </a:lvl2pPr>
-            <a:lvl3pPr algn="ctr">
-              <a:defRPr sz="1800" b="1">
-                <a:solidFill>
-                  <a:srgbClr val="182536"/>
-                </a:solidFill>
-                <a:latin typeface="Nimbus Sans"/>
-                <a:ea typeface="Nimbus Sans"/>
-                <a:cs typeface="Nimbus Sans"/>
-              </a:defRPr>
-            </a:lvl3pPr>
-            <a:lvl4pPr algn="ctr">
-              <a:defRPr sz="1800" b="1">
-                <a:solidFill>
-                  <a:srgbClr val="182536"/>
-                </a:solidFill>
-                <a:latin typeface="Nimbus Sans"/>
-                <a:ea typeface="Nimbus Sans"/>
-                <a:cs typeface="Nimbus Sans"/>
-              </a:defRPr>
-            </a:lvl4pPr>
-            <a:lvl5pPr algn="ctr">
-              <a:defRPr sz="1800" b="1">
-                <a:solidFill>
-                  <a:srgbClr val="182536"/>
-                </a:solidFill>
-                <a:latin typeface="Nimbus Sans"/>
-                <a:ea typeface="Nimbus Sans"/>
-                <a:cs typeface="Nimbus Sans"/>
-              </a:defRPr>
-            </a:lvl5pPr>
-            <a:lvl6pPr algn="ctr">
-              <a:defRPr sz="1800" b="1">
-                <a:solidFill>
-                  <a:srgbClr val="182536"/>
-                </a:solidFill>
-                <a:latin typeface="Nimbus Sans"/>
-                <a:ea typeface="Nimbus Sans"/>
-                <a:cs typeface="Nimbus Sans"/>
-              </a:defRPr>
-            </a:lvl6pPr>
-            <a:lvl7pPr algn="ctr">
-              <a:defRPr sz="1800" b="1">
-                <a:solidFill>
-                  <a:srgbClr val="182536"/>
-                </a:solidFill>
-                <a:latin typeface="Nimbus Sans"/>
-                <a:ea typeface="Nimbus Sans"/>
-                <a:cs typeface="Nimbus Sans"/>
-              </a:defRPr>
-            </a:lvl7pPr>
-            <a:lvl8pPr algn="ctr">
-              <a:defRPr sz="1800" b="1">
-                <a:solidFill>
-                  <a:srgbClr val="182536"/>
-                </a:solidFill>
-                <a:latin typeface="Nimbus Sans"/>
-                <a:ea typeface="Nimbus Sans"/>
-                <a:cs typeface="Nimbus Sans"/>
-              </a:defRPr>
-            </a:lvl8pPr>
-            <a:lvl9pPr algn="ctr">
-              <a:defRPr sz="1800" b="1">
-                <a:solidFill>
-                  <a:srgbClr val="182536"/>
-                </a:solidFill>
-                <a:latin typeface="Nimbus Sans"/>
-                <a:ea typeface="Nimbus Sans"/>
-                <a:cs typeface="Nimbus Sans"/>
-              </a:defRPr>
-            </a:lvl9pPr>
-          </a:lstStyle>
-          <a:p xmlns:a="http://schemas.openxmlformats.org/drawingml/2006/main">
-            <a:pPr algn="ctr">
-              <a:defRPr sz="1800" b="1">
-                <a:solidFill>
-                  <a:srgbClr val="182536"/>
-                </a:solidFill>
-                <a:latin typeface="Nimbus Sans"/>
-                <a:ea typeface="Nimbus Sans"/>
-                <a:cs typeface="Nimbus Sans"/>
-              </a:defRPr>
-            </a:pPr>
-            <a:r>
-              <a:rPr sz="1800" b="1">
-                <a:solidFill>
-                  <a:srgbClr val="182536"/>
-                </a:solidFill>
-                <a:latin typeface="Nimbus Sans"/>
-                <a:ea typeface="Nimbus Sans"/>
-                <a:cs typeface="Nimbus Sans"/>
-              </a:rPr>
-              <a:t>PCAP mutata</a:t>
-            </a:r>
-          </a:p>
-        </p:txBody>
-      </p:sp>
-      <p:sp>
-        <p:nvSpPr>
-          <p:cNvPr id="28" name="f164">
-            <a:extLst xmlns:a="http://schemas.openxmlformats.org/drawingml/2006/main">
-              <a:ext uri="{FF2B5EF4-FFF2-40B4-BE49-F238E27FC236}">
-                <a16:creationId xmlns:a16="http://schemas.microsoft.com/office/drawing/2014/main" id="{C4BDE601-5A2A-41EA-9E79-10589DD37027}"/>
-              </a:ext>
-            </a:extLst>
-          </p:cNvPr>
-          <p:cNvSpPr>
-            <a:spLocks xmlns:a="http://schemas.openxmlformats.org/drawingml/2006/main" noGrp="1"/>
-          </p:cNvSpPr>
-          <p:nvPr/>
-        </p:nvSpPr>
-        <p:spPr>
-          <a:xfrm xmlns:a="http://schemas.openxmlformats.org/drawingml/2006/main">
-            <a:off x="7048500" y="4095750"/>
-            <a:ext cx="95" cy="476250"/>
-          </a:xfrm>
-          <a:prstGeom xmlns:a="http://schemas.openxmlformats.org/drawingml/2006/main" prst="line">
-            <a:avLst/>
-          </a:prstGeom>
-          <a:noFill xmlns:a="http://schemas.openxmlformats.org/drawingml/2006/main"/>
-          <a:ln xmlns:a="http://schemas.openxmlformats.org/drawingml/2006/main" w="28575">
-            <a:solidFill>
-              <a:srgbClr val="9D7139"/>
-            </a:solidFill>
-            <a:prstDash val="solid"/>
-          </a:ln>
-        </p:spPr>
-      </p:sp>
-      <p:sp>
-        <p:nvSpPr>
-          <p:cNvPr id="29" name="f165">
-            <a:extLst xmlns:a="http://schemas.openxmlformats.org/drawingml/2006/main">
-              <a:ext uri="{FF2B5EF4-FFF2-40B4-BE49-F238E27FC236}">
-                <a16:creationId xmlns:a16="http://schemas.microsoft.com/office/drawing/2014/main" id="{61F6A17C-E3CC-43AB-ABDA-7B0AD658CB80}"/>
-              </a:ext>
-            </a:extLst>
-          </p:cNvPr>
-          <p:cNvSpPr>
-            <a:spLocks xmlns:a="http://schemas.openxmlformats.org/drawingml/2006/main" noGrp="1"/>
-          </p:cNvSpPr>
-          <p:nvPr/>
-        </p:nvSpPr>
-        <p:spPr>
-          <a:xfrm xmlns:a="http://schemas.openxmlformats.org/drawingml/2006/main">
-            <a:off x="6962775" y="3905250"/>
-            <a:ext cx="171450" cy="190500"/>
-          </a:xfrm>
-          <a:prstGeom xmlns:a="http://schemas.openxmlformats.org/drawingml/2006/main" prst="upArrow">
-            <a:avLst/>
-          </a:prstGeom>
-          <a:solidFill xmlns:a="http://schemas.openxmlformats.org/drawingml/2006/main">
-            <a:srgbClr val="9D7139"/>
-          </a:solidFill>
-          <a:ln xmlns:a="http://schemas.openxmlformats.org/drawingml/2006/main" w="0">
-            <a:noFill/>
-            <a:prstDash val="solid"/>
-          </a:ln>
-        </p:spPr>
-      </p:sp>
-      <p:sp>
-        <p:nvSpPr>
-          <p:cNvPr id="30" name="f166">
-            <a:extLst xmlns:a="http://schemas.openxmlformats.org/drawingml/2006/main">
-              <a:ext uri="{FF2B5EF4-FFF2-40B4-BE49-F238E27FC236}">
-                <a16:creationId xmlns:a16="http://schemas.microsoft.com/office/drawing/2014/main" id="{7F7B286E-A4CA-4054-9C82-AAC1729519AF}"/>
-              </a:ext>
-            </a:extLst>
-          </p:cNvPr>
-          <p:cNvSpPr>
-            <a:spLocks xmlns:a="http://schemas.openxmlformats.org/drawingml/2006/main" noGrp="1"/>
-          </p:cNvSpPr>
-          <p:nvPr/>
-        </p:nvSpPr>
-        <p:spPr>
-          <a:xfrm xmlns:a="http://schemas.openxmlformats.org/drawingml/2006/main">
-            <a:off x="5924550" y="3552825"/>
-            <a:ext cx="266700" cy="95"/>
-          </a:xfrm>
-          <a:prstGeom xmlns:a="http://schemas.openxmlformats.org/drawingml/2006/main" prst="line">
-            <a:avLst/>
-          </a:prstGeom>
-          <a:noFill xmlns:a="http://schemas.openxmlformats.org/drawingml/2006/main"/>
-          <a:ln xmlns:a="http://schemas.openxmlformats.org/drawingml/2006/main" w="28575">
-            <a:solidFill>
-              <a:srgbClr val="4264D0"/>
-            </a:solidFill>
-            <a:prstDash val="solid"/>
-          </a:ln>
-        </p:spPr>
-      </p:sp>
-      <p:sp>
-        <p:nvSpPr>
-          <p:cNvPr id="31" name="f167">
-            <a:extLst xmlns:a="http://schemas.openxmlformats.org/drawingml/2006/main">
-              <a:ext uri="{FF2B5EF4-FFF2-40B4-BE49-F238E27FC236}">
-                <a16:creationId xmlns:a16="http://schemas.microsoft.com/office/drawing/2014/main" id="{ABA1541C-4668-47EF-B659-16AFF5B954A9}"/>
-              </a:ext>
-            </a:extLst>
-          </p:cNvPr>
-          <p:cNvSpPr>
-            <a:spLocks xmlns:a="http://schemas.openxmlformats.org/drawingml/2006/main" noGrp="1"/>
-          </p:cNvSpPr>
-          <p:nvPr/>
-        </p:nvSpPr>
-        <p:spPr>
-          <a:xfrm xmlns:a="http://schemas.openxmlformats.org/drawingml/2006/main">
-            <a:off x="5924550" y="3552825"/>
-            <a:ext cx="95" cy="1114425"/>
-          </a:xfrm>
-          <a:prstGeom xmlns:a="http://schemas.openxmlformats.org/drawingml/2006/main" prst="line">
-            <a:avLst/>
-          </a:prstGeom>
-          <a:noFill xmlns:a="http://schemas.openxmlformats.org/drawingml/2006/main"/>
-          <a:ln xmlns:a="http://schemas.openxmlformats.org/drawingml/2006/main" w="28575">
-            <a:solidFill>
-              <a:srgbClr val="4264D0"/>
-            </a:solidFill>
-            <a:prstDash val="solid"/>
-          </a:ln>
-        </p:spPr>
-      </p:sp>
-      <p:sp>
-        <p:nvSpPr>
-          <p:cNvPr id="32" name="f168">
-            <a:extLst xmlns:a="http://schemas.openxmlformats.org/drawingml/2006/main">
-              <a:ext uri="{FF2B5EF4-FFF2-40B4-BE49-F238E27FC236}">
-                <a16:creationId xmlns:a16="http://schemas.microsoft.com/office/drawing/2014/main" id="{7204FBD1-DB40-41A5-A8CC-CDFC1CC64AE4}"/>
-              </a:ext>
-            </a:extLst>
-          </p:cNvPr>
-          <p:cNvSpPr>
-            <a:spLocks xmlns:a="http://schemas.openxmlformats.org/drawingml/2006/main" noGrp="1"/>
-          </p:cNvSpPr>
-          <p:nvPr/>
-        </p:nvSpPr>
-        <p:spPr>
-          <a:xfrm xmlns:a="http://schemas.openxmlformats.org/drawingml/2006/main">
-            <a:off x="5800725" y="4581525"/>
-            <a:ext cx="171450" cy="171450"/>
-          </a:xfrm>
-          <a:prstGeom xmlns:a="http://schemas.openxmlformats.org/drawingml/2006/main" prst="leftArrow">
-            <a:avLst/>
-          </a:prstGeom>
-          <a:solidFill xmlns:a="http://schemas.openxmlformats.org/drawingml/2006/main">
-            <a:srgbClr val="4264D0"/>
-          </a:solidFill>
-          <a:ln xmlns:a="http://schemas.openxmlformats.org/drawingml/2006/main" w="0">
-            <a:noFill/>
-            <a:prstDash val="solid"/>
-          </a:ln>
-        </p:spPr>
-      </p:sp>
-      <p:sp>
-        <p:nvSpPr>
-          <p:cNvPr id="33" name="f169">
-            <a:extLst xmlns:a="http://schemas.openxmlformats.org/drawingml/2006/main">
-              <a:ext uri="{FF2B5EF4-FFF2-40B4-BE49-F238E27FC236}">
-                <a16:creationId xmlns:a16="http://schemas.microsoft.com/office/drawing/2014/main" id="{5906FF3B-62F0-4769-AD53-B05CCB6ADF0C}"/>
-              </a:ext>
-            </a:extLst>
-          </p:cNvPr>
-          <p:cNvSpPr>
-            <a:spLocks xmlns:a="http://schemas.openxmlformats.org/drawingml/2006/main" noGrp="1"/>
-          </p:cNvSpPr>
-          <p:nvPr/>
-        </p:nvSpPr>
-        <p:spPr>
-          <a:xfrm xmlns:a="http://schemas.openxmlformats.org/drawingml/2006/main">
-            <a:off x="5353050" y="3257550"/>
-            <a:ext cx="323850" cy="95"/>
-          </a:xfrm>
-          <a:prstGeom xmlns:a="http://schemas.openxmlformats.org/drawingml/2006/main" prst="line">
-            <a:avLst/>
-          </a:prstGeom>
-          <a:noFill xmlns:a="http://schemas.openxmlformats.org/drawingml/2006/main"/>
-          <a:ln xmlns:a="http://schemas.openxmlformats.org/drawingml/2006/main" w="28575">
-            <a:solidFill>
-              <a:srgbClr val="4264D0"/>
-            </a:solidFill>
-            <a:prstDash val="solid"/>
-          </a:ln>
-        </p:spPr>
-      </p:sp>
-      <p:sp>
-        <p:nvSpPr>
-          <p:cNvPr id="34" name="f170">
-            <a:extLst xmlns:a="http://schemas.openxmlformats.org/drawingml/2006/main">
-              <a:ext uri="{FF2B5EF4-FFF2-40B4-BE49-F238E27FC236}">
-                <a16:creationId xmlns:a16="http://schemas.microsoft.com/office/drawing/2014/main" id="{0EBD5E17-A8F7-4156-88A8-21482BA4534C}"/>
-              </a:ext>
-            </a:extLst>
-          </p:cNvPr>
-          <p:cNvSpPr>
-            <a:spLocks xmlns:a="http://schemas.openxmlformats.org/drawingml/2006/main" noGrp="1"/>
-          </p:cNvSpPr>
-          <p:nvPr/>
-        </p:nvSpPr>
-        <p:spPr>
-          <a:xfrm xmlns:a="http://schemas.openxmlformats.org/drawingml/2006/main">
-            <a:off x="5676900" y="2857500"/>
-            <a:ext cx="95" cy="400050"/>
-          </a:xfrm>
-          <a:prstGeom xmlns:a="http://schemas.openxmlformats.org/drawingml/2006/main" prst="line">
-            <a:avLst/>
-          </a:prstGeom>
-          <a:noFill xmlns:a="http://schemas.openxmlformats.org/drawingml/2006/main"/>
-          <a:ln xmlns:a="http://schemas.openxmlformats.org/drawingml/2006/main" w="28575">
-            <a:solidFill>
-              <a:srgbClr val="4264D0"/>
-            </a:solidFill>
-            <a:prstDash val="solid"/>
-          </a:ln>
-        </p:spPr>
-      </p:sp>
-      <p:sp>
-        <p:nvSpPr>
-          <p:cNvPr id="35" name="f171">
-            <a:extLst xmlns:a="http://schemas.openxmlformats.org/drawingml/2006/main">
-              <a:ext uri="{FF2B5EF4-FFF2-40B4-BE49-F238E27FC236}">
-                <a16:creationId xmlns:a16="http://schemas.microsoft.com/office/drawing/2014/main" id="{6E5DDEF2-A9CA-47D1-AEE6-E8438750846E}"/>
-              </a:ext>
-            </a:extLst>
-          </p:cNvPr>
-          <p:cNvSpPr>
-            <a:spLocks xmlns:a="http://schemas.openxmlformats.org/drawingml/2006/main" noGrp="1"/>
-          </p:cNvSpPr>
-          <p:nvPr/>
-        </p:nvSpPr>
-        <p:spPr>
-          <a:xfrm xmlns:a="http://schemas.openxmlformats.org/drawingml/2006/main">
-            <a:off x="5676900" y="2857500"/>
-            <a:ext cx="2457450" cy="95"/>
-          </a:xfrm>
-          <a:prstGeom xmlns:a="http://schemas.openxmlformats.org/drawingml/2006/main" prst="line">
-            <a:avLst/>
-          </a:prstGeom>
-          <a:noFill xmlns:a="http://schemas.openxmlformats.org/drawingml/2006/main"/>
-          <a:ln xmlns:a="http://schemas.openxmlformats.org/drawingml/2006/main" w="28575">
-            <a:solidFill>
-              <a:srgbClr val="4264D0"/>
-            </a:solidFill>
-            <a:prstDash val="solid"/>
-          </a:ln>
-        </p:spPr>
-      </p:sp>
-      <p:sp>
-        <p:nvSpPr>
-          <p:cNvPr id="36" name="f172">
-            <a:extLst xmlns:a="http://schemas.openxmlformats.org/drawingml/2006/main">
-              <a:ext uri="{FF2B5EF4-FFF2-40B4-BE49-F238E27FC236}">
-                <a16:creationId xmlns:a16="http://schemas.microsoft.com/office/drawing/2014/main" id="{28FC4E59-BEA4-4183-A6A1-7CE3EF5C8185}"/>
-              </a:ext>
-            </a:extLst>
-          </p:cNvPr>
-          <p:cNvSpPr>
-            <a:spLocks xmlns:a="http://schemas.openxmlformats.org/drawingml/2006/main" noGrp="1"/>
-          </p:cNvSpPr>
-          <p:nvPr/>
-        </p:nvSpPr>
-        <p:spPr>
-          <a:xfrm xmlns:a="http://schemas.openxmlformats.org/drawingml/2006/main">
-            <a:off x="8134350" y="2857500"/>
-            <a:ext cx="95" cy="2257425"/>
-          </a:xfrm>
-          <a:prstGeom xmlns:a="http://schemas.openxmlformats.org/drawingml/2006/main" prst="line">
-            <a:avLst/>
-          </a:prstGeom>
-          <a:noFill xmlns:a="http://schemas.openxmlformats.org/drawingml/2006/main"/>
-          <a:ln xmlns:a="http://schemas.openxmlformats.org/drawingml/2006/main" w="28575">
-            <a:solidFill>
-              <a:srgbClr val="4264D0"/>
-            </a:solidFill>
-            <a:prstDash val="solid"/>
-          </a:ln>
-        </p:spPr>
-      </p:sp>
-      <p:sp>
-        <p:nvSpPr>
-          <p:cNvPr id="37" name="f173">
-            <a:extLst xmlns:a="http://schemas.openxmlformats.org/drawingml/2006/main">
-              <a:ext uri="{FF2B5EF4-FFF2-40B4-BE49-F238E27FC236}">
-                <a16:creationId xmlns:a16="http://schemas.microsoft.com/office/drawing/2014/main" id="{15AA3905-D9F2-4417-9875-843F95C97A87}"/>
-              </a:ext>
-            </a:extLst>
-          </p:cNvPr>
-          <p:cNvSpPr>
-            <a:spLocks xmlns:a="http://schemas.openxmlformats.org/drawingml/2006/main" noGrp="1"/>
-          </p:cNvSpPr>
-          <p:nvPr/>
-        </p:nvSpPr>
-        <p:spPr>
-          <a:xfrm xmlns:a="http://schemas.openxmlformats.org/drawingml/2006/main">
-            <a:off x="7962900" y="5029200"/>
-            <a:ext cx="171450" cy="171450"/>
-          </a:xfrm>
-          <a:prstGeom xmlns:a="http://schemas.openxmlformats.org/drawingml/2006/main" prst="leftArrow">
-            <a:avLst/>
-          </a:prstGeom>
-          <a:solidFill xmlns:a="http://schemas.openxmlformats.org/drawingml/2006/main">
-            <a:srgbClr val="4264D0"/>
-          </a:solidFill>
-          <a:ln xmlns:a="http://schemas.openxmlformats.org/drawingml/2006/main" w="0">
-            <a:noFill/>
-            <a:prstDash val="solid"/>
-          </a:ln>
-        </p:spPr>
-      </p:sp>
-      <p:sp>
-        <p:nvSpPr>
-          <p:cNvPr id="38" name="f174">
-            <a:extLst xmlns:a="http://schemas.openxmlformats.org/drawingml/2006/main">
-              <a:ext uri="{FF2B5EF4-FFF2-40B4-BE49-F238E27FC236}">
-                <a16:creationId xmlns:a16="http://schemas.microsoft.com/office/drawing/2014/main" id="{A94F8EFF-7BD9-4D46-9AF2-D593BA748C93}"/>
-              </a:ext>
-            </a:extLst>
-          </p:cNvPr>
-          <p:cNvSpPr>
-            <a:spLocks xmlns:a="http://schemas.openxmlformats.org/drawingml/2006/main" noGrp="1"/>
-          </p:cNvSpPr>
-          <p:nvPr/>
-        </p:nvSpPr>
-        <p:spPr>
-          <a:xfrm xmlns:a="http://schemas.openxmlformats.org/drawingml/2006/main">
-            <a:off x="2667000" y="6867525"/>
-            <a:ext cx="95" cy="495300"/>
-          </a:xfrm>
-          <a:prstGeom xmlns:a="http://schemas.openxmlformats.org/drawingml/2006/main" prst="line">
-            <a:avLst/>
-          </a:prstGeom>
-          <a:noFill xmlns:a="http://schemas.openxmlformats.org/drawingml/2006/main"/>
-          <a:ln xmlns:a="http://schemas.openxmlformats.org/drawingml/2006/main" w="28575">
-            <a:solidFill>
-              <a:srgbClr val="9D7139"/>
-            </a:solidFill>
-            <a:prstDash val="solid"/>
-          </a:ln>
-        </p:spPr>
-      </p:sp>
-      <p:sp>
-        <p:nvSpPr>
-          <p:cNvPr id="39" name="f175">
-            <a:extLst xmlns:a="http://schemas.openxmlformats.org/drawingml/2006/main">
-              <a:ext uri="{FF2B5EF4-FFF2-40B4-BE49-F238E27FC236}">
-                <a16:creationId xmlns:a16="http://schemas.microsoft.com/office/drawing/2014/main" id="{E0B0DAE8-E2F1-48D4-9BA1-2B5F72270B63}"/>
-              </a:ext>
-            </a:extLst>
-          </p:cNvPr>
-          <p:cNvSpPr>
-            <a:spLocks xmlns:a="http://schemas.openxmlformats.org/drawingml/2006/main" noGrp="1"/>
-          </p:cNvSpPr>
-          <p:nvPr/>
-        </p:nvSpPr>
-        <p:spPr>
-          <a:xfrm xmlns:a="http://schemas.openxmlformats.org/drawingml/2006/main">
-            <a:off x="2667000" y="7362825"/>
-            <a:ext cx="4381500" cy="95"/>
-          </a:xfrm>
-          <a:prstGeom xmlns:a="http://schemas.openxmlformats.org/drawingml/2006/main" prst="line">
-            <a:avLst/>
-          </a:prstGeom>
-          <a:noFill xmlns:a="http://schemas.openxmlformats.org/drawingml/2006/main"/>
-          <a:ln xmlns:a="http://schemas.openxmlformats.org/drawingml/2006/main" w="28575">
-            <a:solidFill>
-              <a:srgbClr val="9D7139"/>
-            </a:solidFill>
-            <a:prstDash val="solid"/>
-          </a:ln>
-        </p:spPr>
-      </p:sp>
-      <p:sp>
-        <p:nvSpPr>
-          <p:cNvPr id="40" name="f176">
-            <a:extLst xmlns:a="http://schemas.openxmlformats.org/drawingml/2006/main">
-              <a:ext uri="{FF2B5EF4-FFF2-40B4-BE49-F238E27FC236}">
-                <a16:creationId xmlns:a16="http://schemas.microsoft.com/office/drawing/2014/main" id="{96689F2D-B6C5-4624-92DB-391EC0F4C4BA}"/>
-              </a:ext>
-            </a:extLst>
-          </p:cNvPr>
-          <p:cNvSpPr>
-            <a:spLocks xmlns:a="http://schemas.openxmlformats.org/drawingml/2006/main" noGrp="1"/>
-          </p:cNvSpPr>
-          <p:nvPr/>
-        </p:nvSpPr>
-        <p:spPr>
-          <a:xfrm xmlns:a="http://schemas.openxmlformats.org/drawingml/2006/main">
-            <a:off x="7048500" y="5724525"/>
-            <a:ext cx="95" cy="1638300"/>
-          </a:xfrm>
-          <a:prstGeom xmlns:a="http://schemas.openxmlformats.org/drawingml/2006/main" prst="line">
-            <a:avLst/>
-          </a:prstGeom>
-          <a:noFill xmlns:a="http://schemas.openxmlformats.org/drawingml/2006/main"/>
-          <a:ln xmlns:a="http://schemas.openxmlformats.org/drawingml/2006/main" w="28575">
-            <a:solidFill>
-              <a:srgbClr val="9D7139"/>
-            </a:solidFill>
-            <a:prstDash val="solid"/>
-          </a:ln>
-        </p:spPr>
-      </p:sp>
-      <p:sp>
-        <p:nvSpPr>
-          <p:cNvPr id="41" name="f177">
-            <a:extLst xmlns:a="http://schemas.openxmlformats.org/drawingml/2006/main">
-              <a:ext uri="{FF2B5EF4-FFF2-40B4-BE49-F238E27FC236}">
-                <a16:creationId xmlns:a16="http://schemas.microsoft.com/office/drawing/2014/main" id="{79260DC8-7305-49FE-B299-43F2610A42EE}"/>
-              </a:ext>
-            </a:extLst>
-          </p:cNvPr>
-          <p:cNvSpPr>
-            <a:spLocks xmlns:a="http://schemas.openxmlformats.org/drawingml/2006/main" noGrp="1"/>
-          </p:cNvSpPr>
-          <p:nvPr/>
-        </p:nvSpPr>
-        <p:spPr>
-          <a:xfrm xmlns:a="http://schemas.openxmlformats.org/drawingml/2006/main">
-            <a:off x="6962775" y="5553075"/>
-            <a:ext cx="171450" cy="171450"/>
-          </a:xfrm>
-          <a:prstGeom xmlns:a="http://schemas.openxmlformats.org/drawingml/2006/main" prst="upArrow">
-            <a:avLst/>
-          </a:prstGeom>
-          <a:solidFill xmlns:a="http://schemas.openxmlformats.org/drawingml/2006/main">
-            <a:srgbClr val="9D7139"/>
-          </a:solidFill>
-          <a:ln xmlns:a="http://schemas.openxmlformats.org/drawingml/2006/main" w="0">
-            <a:noFill/>
-            <a:prstDash val="solid"/>
-          </a:ln>
-        </p:spPr>
-      </p:sp>
-      <p:sp>
-        <p:nvSpPr>
-          <p:cNvPr id="42" name="f178">
-            <a:extLst xmlns:a="http://schemas.openxmlformats.org/drawingml/2006/main">
-              <a:ext uri="{FF2B5EF4-FFF2-40B4-BE49-F238E27FC236}">
-                <a16:creationId xmlns:a16="http://schemas.microsoft.com/office/drawing/2014/main" id="{44859F57-C46D-4C71-9959-1B9393A2FA0C}"/>
-              </a:ext>
-            </a:extLst>
-          </p:cNvPr>
-          <p:cNvSpPr>
-            <a:spLocks xmlns:a="http://schemas.openxmlformats.org/drawingml/2006/main" noGrp="1"/>
-          </p:cNvSpPr>
-          <p:nvPr/>
-        </p:nvSpPr>
-        <p:spPr>
-          <a:xfrm xmlns:a="http://schemas.openxmlformats.org/drawingml/2006/main">
-            <a:off x="3876675" y="7029450"/>
-            <a:ext cx="2714625" cy="304800"/>
+            <a:off x="3439224" y="3404173"/>
+            <a:ext cx="1666429" cy="238530"/>
           </a:xfrm>
           <a:prstGeom xmlns:a="http://schemas.openxmlformats.org/drawingml/2006/main" prst="rect">
             <a:avLst/>
@@ -22251,9 +20414,9 @@
           </a:bodyPr>
           <a:lstStyle xmlns:a="http://schemas.openxmlformats.org/drawingml/2006/main">
             <a:defPPr algn="l">
-              <a:defRPr sz="1725" b="0">
-                <a:solidFill>
-                  <a:srgbClr val="9D7139"/>
+              <a:defRPr sz="1391" b="1">
+                <a:solidFill>
+                  <a:srgbClr val="182536"/>
                 </a:solidFill>
                 <a:latin typeface="Nimbus Sans"/>
                 <a:ea typeface="Nimbus Sans"/>
@@ -22261,9 +20424,9 @@
               </a:defRPr>
             </a:defPPr>
             <a:lvl1pPr algn="l">
-              <a:defRPr sz="1725" b="0">
-                <a:solidFill>
-                  <a:srgbClr val="9D7139"/>
+              <a:defRPr sz="1391" b="1">
+                <a:solidFill>
+                  <a:srgbClr val="182536"/>
                 </a:solidFill>
                 <a:latin typeface="Nimbus Sans"/>
                 <a:ea typeface="Nimbus Sans"/>
@@ -22271,9 +20434,9 @@
               </a:defRPr>
             </a:lvl1pPr>
             <a:lvl2pPr algn="l">
-              <a:defRPr sz="1725" b="0">
-                <a:solidFill>
-                  <a:srgbClr val="9D7139"/>
+              <a:defRPr sz="1391" b="1">
+                <a:solidFill>
+                  <a:srgbClr val="182536"/>
                 </a:solidFill>
                 <a:latin typeface="Nimbus Sans"/>
                 <a:ea typeface="Nimbus Sans"/>
@@ -22281,9 +20444,9 @@
               </a:defRPr>
             </a:lvl2pPr>
             <a:lvl3pPr algn="l">
-              <a:defRPr sz="1725" b="0">
-                <a:solidFill>
-                  <a:srgbClr val="9D7139"/>
+              <a:defRPr sz="1391" b="1">
+                <a:solidFill>
+                  <a:srgbClr val="182536"/>
                 </a:solidFill>
                 <a:latin typeface="Nimbus Sans"/>
                 <a:ea typeface="Nimbus Sans"/>
@@ -22291,9 +20454,9 @@
               </a:defRPr>
             </a:lvl3pPr>
             <a:lvl4pPr algn="l">
-              <a:defRPr sz="1725" b="0">
-                <a:solidFill>
-                  <a:srgbClr val="9D7139"/>
+              <a:defRPr sz="1391" b="1">
+                <a:solidFill>
+                  <a:srgbClr val="182536"/>
                 </a:solidFill>
                 <a:latin typeface="Nimbus Sans"/>
                 <a:ea typeface="Nimbus Sans"/>
@@ -22301,9 +20464,9 @@
               </a:defRPr>
             </a:lvl4pPr>
             <a:lvl5pPr algn="l">
-              <a:defRPr sz="1725" b="0">
-                <a:solidFill>
-                  <a:srgbClr val="9D7139"/>
+              <a:defRPr sz="1391" b="1">
+                <a:solidFill>
+                  <a:srgbClr val="182536"/>
                 </a:solidFill>
                 <a:latin typeface="Nimbus Sans"/>
                 <a:ea typeface="Nimbus Sans"/>
@@ -22311,9 +20474,9 @@
               </a:defRPr>
             </a:lvl5pPr>
             <a:lvl6pPr algn="l">
-              <a:defRPr sz="1725" b="0">
-                <a:solidFill>
-                  <a:srgbClr val="9D7139"/>
+              <a:defRPr sz="1391" b="1">
+                <a:solidFill>
+                  <a:srgbClr val="182536"/>
                 </a:solidFill>
                 <a:latin typeface="Nimbus Sans"/>
                 <a:ea typeface="Nimbus Sans"/>
@@ -22321,9 +20484,9 @@
               </a:defRPr>
             </a:lvl6pPr>
             <a:lvl7pPr algn="l">
-              <a:defRPr sz="1725" b="0">
-                <a:solidFill>
-                  <a:srgbClr val="9D7139"/>
+              <a:defRPr sz="1391" b="1">
+                <a:solidFill>
+                  <a:srgbClr val="182536"/>
                 </a:solidFill>
                 <a:latin typeface="Nimbus Sans"/>
                 <a:ea typeface="Nimbus Sans"/>
@@ -22331,9 +20494,9 @@
               </a:defRPr>
             </a:lvl7pPr>
             <a:lvl8pPr algn="l">
-              <a:defRPr sz="1725" b="0">
-                <a:solidFill>
-                  <a:srgbClr val="9D7139"/>
+              <a:defRPr sz="1391" b="1">
+                <a:solidFill>
+                  <a:srgbClr val="182536"/>
                 </a:solidFill>
                 <a:latin typeface="Nimbus Sans"/>
                 <a:ea typeface="Nimbus Sans"/>
@@ -22341,9 +20504,9 @@
               </a:defRPr>
             </a:lvl8pPr>
             <a:lvl9pPr algn="l">
-              <a:defRPr sz="1725" b="0">
-                <a:solidFill>
-                  <a:srgbClr val="9D7139"/>
+              <a:defRPr sz="1391" b="1">
+                <a:solidFill>
+                  <a:srgbClr val="182536"/>
                 </a:solidFill>
                 <a:latin typeface="Nimbus Sans"/>
                 <a:ea typeface="Nimbus Sans"/>
@@ -22353,9 +20516,9 @@
           </a:lstStyle>
           <a:p xmlns:a="http://schemas.openxmlformats.org/drawingml/2006/main">
             <a:pPr algn="l">
-              <a:defRPr sz="1725" b="0">
-                <a:solidFill>
-                  <a:srgbClr val="9D7139"/>
+              <a:defRPr sz="1391" b="1">
+                <a:solidFill>
+                  <a:srgbClr val="182536"/>
                 </a:solidFill>
                 <a:latin typeface="Nimbus Sans"/>
                 <a:ea typeface="Nimbus Sans"/>
@@ -22363,25 +20526,25 @@
               </a:defRPr>
             </a:pPr>
             <a:r>
-              <a:rPr sz="1725" b="0">
-                <a:solidFill>
-                  <a:srgbClr val="9D7139"/>
+              <a:rPr sz="1391" b="1">
+                <a:solidFill>
+                  <a:srgbClr val="182536"/>
                 </a:solidFill>
                 <a:latin typeface="Nimbus Sans"/>
                 <a:ea typeface="Nimbus Sans"/>
                 <a:cs typeface="Nimbus Sans"/>
               </a:rPr>
-              <a:t>evidenze del baseline</a:t>
+              <a:t>PCAP ORIGINALE</a:t>
             </a:r>
           </a:p>
         </p:txBody>
       </p:sp>
       <p:sp>
         <p:nvSpPr>
-          <p:cNvPr id="43" name="f179">
+          <p:cNvPr id="7" name="f145">
             <a:extLst xmlns:a="http://schemas.openxmlformats.org/drawingml/2006/main">
               <a:ext uri="{FF2B5EF4-FFF2-40B4-BE49-F238E27FC236}">
-                <a16:creationId xmlns:a16="http://schemas.microsoft.com/office/drawing/2014/main" id="{FDD82DAA-C7EF-4C71-9BCC-36602D38E170}"/>
+                <a16:creationId xmlns:a16="http://schemas.microsoft.com/office/drawing/2014/main" id="{1DEC99A6-73BB-4A74-AA2D-CFCD7C92C6BF}"/>
               </a:ext>
             </a:extLst>
           </p:cNvPr>
@@ -22392,8 +20555,1757 @@
         </p:nvSpPr>
         <p:spPr>
           <a:xfrm xmlns:a="http://schemas.openxmlformats.org/drawingml/2006/main">
-            <a:off x="1562100" y="7686675"/>
-            <a:ext cx="6381750" cy="342900"/>
+            <a:off x="3644831" y="4549470"/>
+            <a:ext cx="1255216" cy="313496"/>
+          </a:xfrm>
+          <a:prstGeom xmlns:a="http://schemas.openxmlformats.org/drawingml/2006/main" prst="rect">
+            <a:avLst/>
+          </a:prstGeom>
+          <a:noFill xmlns:a="http://schemas.openxmlformats.org/drawingml/2006/main"/>
+          <a:ln xmlns:a="http://schemas.openxmlformats.org/drawingml/2006/main" w="0">
+            <a:noFill/>
+            <a:prstDash val="solid"/>
+          </a:ln>
+        </p:spPr>
+        <p:txBody>
+          <a:bodyPr xmlns:a="http://schemas.openxmlformats.org/drawingml/2006/main" wrap="none" lIns="0" tIns="0" rIns="0" bIns="0" anchor="t">
+            <a:noAutofit/>
+          </a:bodyPr>
+          <a:lstStyle xmlns:a="http://schemas.openxmlformats.org/drawingml/2006/main">
+            <a:defPPr algn="l">
+              <a:defRPr sz="1829" b="1">
+                <a:solidFill>
+                  <a:srgbClr val="278766"/>
+                </a:solidFill>
+                <a:latin typeface="Nimbus Sans"/>
+                <a:ea typeface="Nimbus Sans"/>
+                <a:cs typeface="Nimbus Sans"/>
+              </a:defRPr>
+            </a:defPPr>
+            <a:lvl1pPr algn="l">
+              <a:defRPr sz="1829" b="1">
+                <a:solidFill>
+                  <a:srgbClr val="278766"/>
+                </a:solidFill>
+                <a:latin typeface="Nimbus Sans"/>
+                <a:ea typeface="Nimbus Sans"/>
+                <a:cs typeface="Nimbus Sans"/>
+              </a:defRPr>
+            </a:lvl1pPr>
+            <a:lvl2pPr algn="l">
+              <a:defRPr sz="1829" b="1">
+                <a:solidFill>
+                  <a:srgbClr val="278766"/>
+                </a:solidFill>
+                <a:latin typeface="Nimbus Sans"/>
+                <a:ea typeface="Nimbus Sans"/>
+                <a:cs typeface="Nimbus Sans"/>
+              </a:defRPr>
+            </a:lvl2pPr>
+            <a:lvl3pPr algn="l">
+              <a:defRPr sz="1829" b="1">
+                <a:solidFill>
+                  <a:srgbClr val="278766"/>
+                </a:solidFill>
+                <a:latin typeface="Nimbus Sans"/>
+                <a:ea typeface="Nimbus Sans"/>
+                <a:cs typeface="Nimbus Sans"/>
+              </a:defRPr>
+            </a:lvl3pPr>
+            <a:lvl4pPr algn="l">
+              <a:defRPr sz="1829" b="1">
+                <a:solidFill>
+                  <a:srgbClr val="278766"/>
+                </a:solidFill>
+                <a:latin typeface="Nimbus Sans"/>
+                <a:ea typeface="Nimbus Sans"/>
+                <a:cs typeface="Nimbus Sans"/>
+              </a:defRPr>
+            </a:lvl4pPr>
+            <a:lvl5pPr algn="l">
+              <a:defRPr sz="1829" b="1">
+                <a:solidFill>
+                  <a:srgbClr val="278766"/>
+                </a:solidFill>
+                <a:latin typeface="Nimbus Sans"/>
+                <a:ea typeface="Nimbus Sans"/>
+                <a:cs typeface="Nimbus Sans"/>
+              </a:defRPr>
+            </a:lvl5pPr>
+            <a:lvl6pPr algn="l">
+              <a:defRPr sz="1829" b="1">
+                <a:solidFill>
+                  <a:srgbClr val="278766"/>
+                </a:solidFill>
+                <a:latin typeface="Nimbus Sans"/>
+                <a:ea typeface="Nimbus Sans"/>
+                <a:cs typeface="Nimbus Sans"/>
+              </a:defRPr>
+            </a:lvl6pPr>
+            <a:lvl7pPr algn="l">
+              <a:defRPr sz="1829" b="1">
+                <a:solidFill>
+                  <a:srgbClr val="278766"/>
+                </a:solidFill>
+                <a:latin typeface="Nimbus Sans"/>
+                <a:ea typeface="Nimbus Sans"/>
+                <a:cs typeface="Nimbus Sans"/>
+              </a:defRPr>
+            </a:lvl7pPr>
+            <a:lvl8pPr algn="l">
+              <a:defRPr sz="1829" b="1">
+                <a:solidFill>
+                  <a:srgbClr val="278766"/>
+                </a:solidFill>
+                <a:latin typeface="Nimbus Sans"/>
+                <a:ea typeface="Nimbus Sans"/>
+                <a:cs typeface="Nimbus Sans"/>
+              </a:defRPr>
+            </a:lvl8pPr>
+            <a:lvl9pPr algn="l">
+              <a:defRPr sz="1829" b="1">
+                <a:solidFill>
+                  <a:srgbClr val="278766"/>
+                </a:solidFill>
+                <a:latin typeface="Nimbus Sans"/>
+                <a:ea typeface="Nimbus Sans"/>
+                <a:cs typeface="Nimbus Sans"/>
+              </a:defRPr>
+            </a:lvl9pPr>
+          </a:lstStyle>
+          <a:p xmlns:a="http://schemas.openxmlformats.org/drawingml/2006/main">
+            <a:pPr algn="l">
+              <a:defRPr sz="1829" b="1">
+                <a:solidFill>
+                  <a:srgbClr val="278766"/>
+                </a:solidFill>
+                <a:latin typeface="Nimbus Sans"/>
+                <a:ea typeface="Nimbus Sans"/>
+                <a:cs typeface="Nimbus Sans"/>
+              </a:defRPr>
+            </a:pPr>
+            <a:r>
+              <a:rPr sz="1829" b="1">
+                <a:solidFill>
+                  <a:srgbClr val="278766"/>
+                </a:solidFill>
+                <a:latin typeface="Nimbus Sans"/>
+                <a:ea typeface="Nimbus Sans"/>
+                <a:cs typeface="Nimbus Sans"/>
+              </a:rPr>
+              <a:t>Pipeline di</a:t>
+            </a:r>
+          </a:p>
+        </p:txBody>
+      </p:sp>
+      <p:sp>
+        <p:nvSpPr>
+          <p:cNvPr id="8" name="f146">
+            <a:extLst xmlns:a="http://schemas.openxmlformats.org/drawingml/2006/main">
+              <a:ext uri="{FF2B5EF4-FFF2-40B4-BE49-F238E27FC236}">
+                <a16:creationId xmlns:a16="http://schemas.microsoft.com/office/drawing/2014/main" id="{0C765244-A8E4-412E-935F-E0918D2DC44D}"/>
+              </a:ext>
+            </a:extLst>
+          </p:cNvPr>
+          <p:cNvSpPr>
+            <a:spLocks xmlns:a="http://schemas.openxmlformats.org/drawingml/2006/main" noGrp="1"/>
+          </p:cNvSpPr>
+          <p:nvPr/>
+        </p:nvSpPr>
+        <p:spPr>
+          <a:xfrm xmlns:a="http://schemas.openxmlformats.org/drawingml/2006/main">
+            <a:off x="3816950" y="4832172"/>
+            <a:ext cx="910977" cy="313496"/>
+          </a:xfrm>
+          <a:prstGeom xmlns:a="http://schemas.openxmlformats.org/drawingml/2006/main" prst="rect">
+            <a:avLst/>
+          </a:prstGeom>
+          <a:noFill xmlns:a="http://schemas.openxmlformats.org/drawingml/2006/main"/>
+          <a:ln xmlns:a="http://schemas.openxmlformats.org/drawingml/2006/main" w="0">
+            <a:noFill/>
+            <a:prstDash val="solid"/>
+          </a:ln>
+        </p:spPr>
+        <p:txBody>
+          <a:bodyPr xmlns:a="http://schemas.openxmlformats.org/drawingml/2006/main" wrap="none" lIns="0" tIns="0" rIns="0" bIns="0" anchor="t">
+            <a:noAutofit/>
+          </a:bodyPr>
+          <a:lstStyle xmlns:a="http://schemas.openxmlformats.org/drawingml/2006/main">
+            <a:defPPr algn="l">
+              <a:defRPr sz="1829" b="1">
+                <a:solidFill>
+                  <a:srgbClr val="278766"/>
+                </a:solidFill>
+                <a:latin typeface="Nimbus Sans"/>
+                <a:ea typeface="Nimbus Sans"/>
+                <a:cs typeface="Nimbus Sans"/>
+              </a:defRPr>
+            </a:defPPr>
+            <a:lvl1pPr algn="l">
+              <a:defRPr sz="1829" b="1">
+                <a:solidFill>
+                  <a:srgbClr val="278766"/>
+                </a:solidFill>
+                <a:latin typeface="Nimbus Sans"/>
+                <a:ea typeface="Nimbus Sans"/>
+                <a:cs typeface="Nimbus Sans"/>
+              </a:defRPr>
+            </a:lvl1pPr>
+            <a:lvl2pPr algn="l">
+              <a:defRPr sz="1829" b="1">
+                <a:solidFill>
+                  <a:srgbClr val="278766"/>
+                </a:solidFill>
+                <a:latin typeface="Nimbus Sans"/>
+                <a:ea typeface="Nimbus Sans"/>
+                <a:cs typeface="Nimbus Sans"/>
+              </a:defRPr>
+            </a:lvl2pPr>
+            <a:lvl3pPr algn="l">
+              <a:defRPr sz="1829" b="1">
+                <a:solidFill>
+                  <a:srgbClr val="278766"/>
+                </a:solidFill>
+                <a:latin typeface="Nimbus Sans"/>
+                <a:ea typeface="Nimbus Sans"/>
+                <a:cs typeface="Nimbus Sans"/>
+              </a:defRPr>
+            </a:lvl3pPr>
+            <a:lvl4pPr algn="l">
+              <a:defRPr sz="1829" b="1">
+                <a:solidFill>
+                  <a:srgbClr val="278766"/>
+                </a:solidFill>
+                <a:latin typeface="Nimbus Sans"/>
+                <a:ea typeface="Nimbus Sans"/>
+                <a:cs typeface="Nimbus Sans"/>
+              </a:defRPr>
+            </a:lvl4pPr>
+            <a:lvl5pPr algn="l">
+              <a:defRPr sz="1829" b="1">
+                <a:solidFill>
+                  <a:srgbClr val="278766"/>
+                </a:solidFill>
+                <a:latin typeface="Nimbus Sans"/>
+                <a:ea typeface="Nimbus Sans"/>
+                <a:cs typeface="Nimbus Sans"/>
+              </a:defRPr>
+            </a:lvl5pPr>
+            <a:lvl6pPr algn="l">
+              <a:defRPr sz="1829" b="1">
+                <a:solidFill>
+                  <a:srgbClr val="278766"/>
+                </a:solidFill>
+                <a:latin typeface="Nimbus Sans"/>
+                <a:ea typeface="Nimbus Sans"/>
+                <a:cs typeface="Nimbus Sans"/>
+              </a:defRPr>
+            </a:lvl6pPr>
+            <a:lvl7pPr algn="l">
+              <a:defRPr sz="1829" b="1">
+                <a:solidFill>
+                  <a:srgbClr val="278766"/>
+                </a:solidFill>
+                <a:latin typeface="Nimbus Sans"/>
+                <a:ea typeface="Nimbus Sans"/>
+                <a:cs typeface="Nimbus Sans"/>
+              </a:defRPr>
+            </a:lvl7pPr>
+            <a:lvl8pPr algn="l">
+              <a:defRPr sz="1829" b="1">
+                <a:solidFill>
+                  <a:srgbClr val="278766"/>
+                </a:solidFill>
+                <a:latin typeface="Nimbus Sans"/>
+                <a:ea typeface="Nimbus Sans"/>
+                <a:cs typeface="Nimbus Sans"/>
+              </a:defRPr>
+            </a:lvl8pPr>
+            <a:lvl9pPr algn="l">
+              <a:defRPr sz="1829" b="1">
+                <a:solidFill>
+                  <a:srgbClr val="278766"/>
+                </a:solidFill>
+                <a:latin typeface="Nimbus Sans"/>
+                <a:ea typeface="Nimbus Sans"/>
+                <a:cs typeface="Nimbus Sans"/>
+              </a:defRPr>
+            </a:lvl9pPr>
+          </a:lstStyle>
+          <a:p xmlns:a="http://schemas.openxmlformats.org/drawingml/2006/main">
+            <a:pPr algn="l">
+              <a:defRPr sz="1829" b="1">
+                <a:solidFill>
+                  <a:srgbClr val="278766"/>
+                </a:solidFill>
+                <a:latin typeface="Nimbus Sans"/>
+                <a:ea typeface="Nimbus Sans"/>
+                <a:cs typeface="Nimbus Sans"/>
+              </a:defRPr>
+            </a:pPr>
+            <a:r>
+              <a:rPr sz="1829" b="1">
+                <a:solidFill>
+                  <a:srgbClr val="278766"/>
+                </a:solidFill>
+                <a:latin typeface="Nimbus Sans"/>
+                <a:ea typeface="Nimbus Sans"/>
+                <a:cs typeface="Nimbus Sans"/>
+              </a:rPr>
+              <a:t>verifica</a:t>
+            </a:r>
+          </a:p>
+        </p:txBody>
+      </p:sp>
+      <p:sp>
+        <p:nvSpPr>
+          <p:cNvPr id="9" name="f147">
+            <a:extLst xmlns:a="http://schemas.openxmlformats.org/drawingml/2006/main">
+              <a:ext uri="{FF2B5EF4-FFF2-40B4-BE49-F238E27FC236}">
+                <a16:creationId xmlns:a16="http://schemas.microsoft.com/office/drawing/2014/main" id="{C1F01AAE-FD59-45D7-A9C2-0EF3E6E3DD79}"/>
+              </a:ext>
+            </a:extLst>
+          </p:cNvPr>
+          <p:cNvSpPr>
+            <a:spLocks xmlns:a="http://schemas.openxmlformats.org/drawingml/2006/main" noGrp="1"/>
+          </p:cNvSpPr>
+          <p:nvPr/>
+        </p:nvSpPr>
+        <p:spPr>
+          <a:xfrm xmlns:a="http://schemas.openxmlformats.org/drawingml/2006/main">
+            <a:off x="1412081" y="4962568"/>
+            <a:ext cx="571500" cy="306681"/>
+          </a:xfrm>
+          <a:prstGeom xmlns:a="http://schemas.openxmlformats.org/drawingml/2006/main" prst="rect">
+            <a:avLst/>
+          </a:prstGeom>
+          <a:noFill xmlns:a="http://schemas.openxmlformats.org/drawingml/2006/main"/>
+          <a:ln xmlns:a="http://schemas.openxmlformats.org/drawingml/2006/main" w="0">
+            <a:noFill/>
+            <a:prstDash val="solid"/>
+          </a:ln>
+        </p:spPr>
+        <p:txBody>
+          <a:bodyPr xmlns:a="http://schemas.openxmlformats.org/drawingml/2006/main" wrap="none" lIns="0" tIns="0" rIns="0" bIns="0" anchor="t">
+            <a:noAutofit/>
+          </a:bodyPr>
+          <a:lstStyle xmlns:a="http://schemas.openxmlformats.org/drawingml/2006/main">
+            <a:defPPr algn="l">
+              <a:defRPr sz="1789" b="1">
+                <a:solidFill>
+                  <a:srgbClr val="4264D0"/>
+                </a:solidFill>
+                <a:latin typeface="Nimbus Sans"/>
+                <a:ea typeface="Nimbus Sans"/>
+                <a:cs typeface="Nimbus Sans"/>
+              </a:defRPr>
+            </a:defPPr>
+            <a:lvl1pPr algn="l">
+              <a:defRPr sz="1789" b="1">
+                <a:solidFill>
+                  <a:srgbClr val="4264D0"/>
+                </a:solidFill>
+                <a:latin typeface="Nimbus Sans"/>
+                <a:ea typeface="Nimbus Sans"/>
+                <a:cs typeface="Nimbus Sans"/>
+              </a:defRPr>
+            </a:lvl1pPr>
+            <a:lvl2pPr algn="l">
+              <a:defRPr sz="1789" b="1">
+                <a:solidFill>
+                  <a:srgbClr val="4264D0"/>
+                </a:solidFill>
+                <a:latin typeface="Nimbus Sans"/>
+                <a:ea typeface="Nimbus Sans"/>
+                <a:cs typeface="Nimbus Sans"/>
+              </a:defRPr>
+            </a:lvl2pPr>
+            <a:lvl3pPr algn="l">
+              <a:defRPr sz="1789" b="1">
+                <a:solidFill>
+                  <a:srgbClr val="4264D0"/>
+                </a:solidFill>
+                <a:latin typeface="Nimbus Sans"/>
+                <a:ea typeface="Nimbus Sans"/>
+                <a:cs typeface="Nimbus Sans"/>
+              </a:defRPr>
+            </a:lvl3pPr>
+            <a:lvl4pPr algn="l">
+              <a:defRPr sz="1789" b="1">
+                <a:solidFill>
+                  <a:srgbClr val="4264D0"/>
+                </a:solidFill>
+                <a:latin typeface="Nimbus Sans"/>
+                <a:ea typeface="Nimbus Sans"/>
+                <a:cs typeface="Nimbus Sans"/>
+              </a:defRPr>
+            </a:lvl4pPr>
+            <a:lvl5pPr algn="l">
+              <a:defRPr sz="1789" b="1">
+                <a:solidFill>
+                  <a:srgbClr val="4264D0"/>
+                </a:solidFill>
+                <a:latin typeface="Nimbus Sans"/>
+                <a:ea typeface="Nimbus Sans"/>
+                <a:cs typeface="Nimbus Sans"/>
+              </a:defRPr>
+            </a:lvl5pPr>
+            <a:lvl6pPr algn="l">
+              <a:defRPr sz="1789" b="1">
+                <a:solidFill>
+                  <a:srgbClr val="4264D0"/>
+                </a:solidFill>
+                <a:latin typeface="Nimbus Sans"/>
+                <a:ea typeface="Nimbus Sans"/>
+                <a:cs typeface="Nimbus Sans"/>
+              </a:defRPr>
+            </a:lvl6pPr>
+            <a:lvl7pPr algn="l">
+              <a:defRPr sz="1789" b="1">
+                <a:solidFill>
+                  <a:srgbClr val="4264D0"/>
+                </a:solidFill>
+                <a:latin typeface="Nimbus Sans"/>
+                <a:ea typeface="Nimbus Sans"/>
+                <a:cs typeface="Nimbus Sans"/>
+              </a:defRPr>
+            </a:lvl7pPr>
+            <a:lvl8pPr algn="l">
+              <a:defRPr sz="1789" b="1">
+                <a:solidFill>
+                  <a:srgbClr val="4264D0"/>
+                </a:solidFill>
+                <a:latin typeface="Nimbus Sans"/>
+                <a:ea typeface="Nimbus Sans"/>
+                <a:cs typeface="Nimbus Sans"/>
+              </a:defRPr>
+            </a:lvl8pPr>
+            <a:lvl9pPr algn="l">
+              <a:defRPr sz="1789" b="1">
+                <a:solidFill>
+                  <a:srgbClr val="4264D0"/>
+                </a:solidFill>
+                <a:latin typeface="Nimbus Sans"/>
+                <a:ea typeface="Nimbus Sans"/>
+                <a:cs typeface="Nimbus Sans"/>
+              </a:defRPr>
+            </a:lvl9pPr>
+          </a:lstStyle>
+          <a:p xmlns:a="http://schemas.openxmlformats.org/drawingml/2006/main">
+            <a:pPr algn="l">
+              <a:defRPr sz="1789" b="1">
+                <a:solidFill>
+                  <a:srgbClr val="4264D0"/>
+                </a:solidFill>
+                <a:latin typeface="Nimbus Sans"/>
+                <a:ea typeface="Nimbus Sans"/>
+                <a:cs typeface="Nimbus Sans"/>
+              </a:defRPr>
+            </a:pPr>
+            <a:r>
+              <a:rPr sz="1789" b="1">
+                <a:solidFill>
+                  <a:srgbClr val="4264D0"/>
+                </a:solidFill>
+                <a:latin typeface="Nimbus Sans"/>
+                <a:ea typeface="Nimbus Sans"/>
+                <a:cs typeface="Nimbus Sans"/>
+              </a:rPr>
+              <a:t>DSL</a:t>
+            </a:r>
+          </a:p>
+        </p:txBody>
+      </p:sp>
+      <p:sp>
+        <p:nvSpPr>
+          <p:cNvPr id="10" name="f148">
+            <a:extLst xmlns:a="http://schemas.openxmlformats.org/drawingml/2006/main">
+              <a:ext uri="{FF2B5EF4-FFF2-40B4-BE49-F238E27FC236}">
+                <a16:creationId xmlns:a16="http://schemas.microsoft.com/office/drawing/2014/main" id="{5EEFB45C-090B-48D4-839E-A5EA06095561}"/>
+              </a:ext>
+            </a:extLst>
+          </p:cNvPr>
+          <p:cNvSpPr>
+            <a:spLocks xmlns:a="http://schemas.openxmlformats.org/drawingml/2006/main" noGrp="1"/>
+          </p:cNvSpPr>
+          <p:nvPr/>
+        </p:nvSpPr>
+        <p:spPr>
+          <a:xfrm xmlns:a="http://schemas.openxmlformats.org/drawingml/2006/main">
+            <a:off x="2686824" y="6150610"/>
+            <a:ext cx="1404342" cy="230011"/>
+          </a:xfrm>
+          <a:prstGeom xmlns:a="http://schemas.openxmlformats.org/drawingml/2006/main" prst="rect">
+            <a:avLst/>
+          </a:prstGeom>
+          <a:noFill xmlns:a="http://schemas.openxmlformats.org/drawingml/2006/main"/>
+          <a:ln xmlns:a="http://schemas.openxmlformats.org/drawingml/2006/main" w="0">
+            <a:noFill/>
+            <a:prstDash val="solid"/>
+          </a:ln>
+        </p:spPr>
+        <p:txBody>
+          <a:bodyPr xmlns:a="http://schemas.openxmlformats.org/drawingml/2006/main" wrap="none" lIns="0" tIns="0" rIns="0" bIns="0" anchor="t">
+            <a:noAutofit/>
+          </a:bodyPr>
+          <a:lstStyle xmlns:a="http://schemas.openxmlformats.org/drawingml/2006/main">
+            <a:defPPr algn="l">
+              <a:defRPr sz="1342" b="1">
+                <a:solidFill>
+                  <a:srgbClr val="4264D0"/>
+                </a:solidFill>
+                <a:latin typeface="Nimbus Sans"/>
+                <a:ea typeface="Nimbus Sans"/>
+                <a:cs typeface="Nimbus Sans"/>
+              </a:defRPr>
+            </a:defPPr>
+            <a:lvl1pPr algn="l">
+              <a:defRPr sz="1342" b="1">
+                <a:solidFill>
+                  <a:srgbClr val="4264D0"/>
+                </a:solidFill>
+                <a:latin typeface="Nimbus Sans"/>
+                <a:ea typeface="Nimbus Sans"/>
+                <a:cs typeface="Nimbus Sans"/>
+              </a:defRPr>
+            </a:lvl1pPr>
+            <a:lvl2pPr algn="l">
+              <a:defRPr sz="1342" b="1">
+                <a:solidFill>
+                  <a:srgbClr val="4264D0"/>
+                </a:solidFill>
+                <a:latin typeface="Nimbus Sans"/>
+                <a:ea typeface="Nimbus Sans"/>
+                <a:cs typeface="Nimbus Sans"/>
+              </a:defRPr>
+            </a:lvl2pPr>
+            <a:lvl3pPr algn="l">
+              <a:defRPr sz="1342" b="1">
+                <a:solidFill>
+                  <a:srgbClr val="4264D0"/>
+                </a:solidFill>
+                <a:latin typeface="Nimbus Sans"/>
+                <a:ea typeface="Nimbus Sans"/>
+                <a:cs typeface="Nimbus Sans"/>
+              </a:defRPr>
+            </a:lvl3pPr>
+            <a:lvl4pPr algn="l">
+              <a:defRPr sz="1342" b="1">
+                <a:solidFill>
+                  <a:srgbClr val="4264D0"/>
+                </a:solidFill>
+                <a:latin typeface="Nimbus Sans"/>
+                <a:ea typeface="Nimbus Sans"/>
+                <a:cs typeface="Nimbus Sans"/>
+              </a:defRPr>
+            </a:lvl4pPr>
+            <a:lvl5pPr algn="l">
+              <a:defRPr sz="1342" b="1">
+                <a:solidFill>
+                  <a:srgbClr val="4264D0"/>
+                </a:solidFill>
+                <a:latin typeface="Nimbus Sans"/>
+                <a:ea typeface="Nimbus Sans"/>
+                <a:cs typeface="Nimbus Sans"/>
+              </a:defRPr>
+            </a:lvl5pPr>
+            <a:lvl6pPr algn="l">
+              <a:defRPr sz="1342" b="1">
+                <a:solidFill>
+                  <a:srgbClr val="4264D0"/>
+                </a:solidFill>
+                <a:latin typeface="Nimbus Sans"/>
+                <a:ea typeface="Nimbus Sans"/>
+                <a:cs typeface="Nimbus Sans"/>
+              </a:defRPr>
+            </a:lvl6pPr>
+            <a:lvl7pPr algn="l">
+              <a:defRPr sz="1342" b="1">
+                <a:solidFill>
+                  <a:srgbClr val="4264D0"/>
+                </a:solidFill>
+                <a:latin typeface="Nimbus Sans"/>
+                <a:ea typeface="Nimbus Sans"/>
+                <a:cs typeface="Nimbus Sans"/>
+              </a:defRPr>
+            </a:lvl7pPr>
+            <a:lvl8pPr algn="l">
+              <a:defRPr sz="1342" b="1">
+                <a:solidFill>
+                  <a:srgbClr val="4264D0"/>
+                </a:solidFill>
+                <a:latin typeface="Nimbus Sans"/>
+                <a:ea typeface="Nimbus Sans"/>
+                <a:cs typeface="Nimbus Sans"/>
+              </a:defRPr>
+            </a:lvl8pPr>
+            <a:lvl9pPr algn="l">
+              <a:defRPr sz="1342" b="1">
+                <a:solidFill>
+                  <a:srgbClr val="4264D0"/>
+                </a:solidFill>
+                <a:latin typeface="Nimbus Sans"/>
+                <a:ea typeface="Nimbus Sans"/>
+                <a:cs typeface="Nimbus Sans"/>
+              </a:defRPr>
+            </a:lvl9pPr>
+          </a:lstStyle>
+          <a:p xmlns:a="http://schemas.openxmlformats.org/drawingml/2006/main">
+            <a:pPr algn="l">
+              <a:defRPr sz="1342" b="1">
+                <a:solidFill>
+                  <a:srgbClr val="4264D0"/>
+                </a:solidFill>
+                <a:latin typeface="Nimbus Sans"/>
+                <a:ea typeface="Nimbus Sans"/>
+                <a:cs typeface="Nimbus Sans"/>
+              </a:defRPr>
+            </a:pPr>
+            <a:r>
+              <a:rPr sz="1342" b="1">
+                <a:solidFill>
+                  <a:srgbClr val="4264D0"/>
+                </a:solidFill>
+                <a:latin typeface="Nimbus Sans"/>
+                <a:ea typeface="Nimbus Sans"/>
+                <a:cs typeface="Nimbus Sans"/>
+              </a:rPr>
+              <a:t>Report baseline</a:t>
+            </a:r>
+          </a:p>
+        </p:txBody>
+      </p:sp>
+      <p:sp>
+        <p:nvSpPr>
+          <p:cNvPr id="11" name="f149">
+            <a:extLst xmlns:a="http://schemas.openxmlformats.org/drawingml/2006/main">
+              <a:ext uri="{FF2B5EF4-FFF2-40B4-BE49-F238E27FC236}">
+                <a16:creationId xmlns:a16="http://schemas.microsoft.com/office/drawing/2014/main" id="{C6294E8E-966C-4511-8FBB-F92F0822DB1C}"/>
+              </a:ext>
+            </a:extLst>
+          </p:cNvPr>
+          <p:cNvSpPr>
+            <a:spLocks xmlns:a="http://schemas.openxmlformats.org/drawingml/2006/main" noGrp="1"/>
+          </p:cNvSpPr>
+          <p:nvPr/>
+        </p:nvSpPr>
+        <p:spPr>
+          <a:xfrm xmlns:a="http://schemas.openxmlformats.org/drawingml/2006/main">
+            <a:off x="4434736" y="6150610"/>
+            <a:ext cx="1442293" cy="230011"/>
+          </a:xfrm>
+          <a:prstGeom xmlns:a="http://schemas.openxmlformats.org/drawingml/2006/main" prst="rect">
+            <a:avLst/>
+          </a:prstGeom>
+          <a:noFill xmlns:a="http://schemas.openxmlformats.org/drawingml/2006/main"/>
+          <a:ln xmlns:a="http://schemas.openxmlformats.org/drawingml/2006/main" w="0">
+            <a:noFill/>
+            <a:prstDash val="solid"/>
+          </a:ln>
+        </p:spPr>
+        <p:txBody>
+          <a:bodyPr xmlns:a="http://schemas.openxmlformats.org/drawingml/2006/main" wrap="none" lIns="0" tIns="0" rIns="0" bIns="0" anchor="t">
+            <a:noAutofit/>
+          </a:bodyPr>
+          <a:lstStyle xmlns:a="http://schemas.openxmlformats.org/drawingml/2006/main">
+            <a:defPPr algn="l">
+              <a:defRPr sz="1342" b="1">
+                <a:solidFill>
+                  <a:srgbClr val="4264D0"/>
+                </a:solidFill>
+                <a:latin typeface="Nimbus Sans"/>
+                <a:ea typeface="Nimbus Sans"/>
+                <a:cs typeface="Nimbus Sans"/>
+              </a:defRPr>
+            </a:defPPr>
+            <a:lvl1pPr algn="l">
+              <a:defRPr sz="1342" b="1">
+                <a:solidFill>
+                  <a:srgbClr val="4264D0"/>
+                </a:solidFill>
+                <a:latin typeface="Nimbus Sans"/>
+                <a:ea typeface="Nimbus Sans"/>
+                <a:cs typeface="Nimbus Sans"/>
+              </a:defRPr>
+            </a:lvl1pPr>
+            <a:lvl2pPr algn="l">
+              <a:defRPr sz="1342" b="1">
+                <a:solidFill>
+                  <a:srgbClr val="4264D0"/>
+                </a:solidFill>
+                <a:latin typeface="Nimbus Sans"/>
+                <a:ea typeface="Nimbus Sans"/>
+                <a:cs typeface="Nimbus Sans"/>
+              </a:defRPr>
+            </a:lvl2pPr>
+            <a:lvl3pPr algn="l">
+              <a:defRPr sz="1342" b="1">
+                <a:solidFill>
+                  <a:srgbClr val="4264D0"/>
+                </a:solidFill>
+                <a:latin typeface="Nimbus Sans"/>
+                <a:ea typeface="Nimbus Sans"/>
+                <a:cs typeface="Nimbus Sans"/>
+              </a:defRPr>
+            </a:lvl3pPr>
+            <a:lvl4pPr algn="l">
+              <a:defRPr sz="1342" b="1">
+                <a:solidFill>
+                  <a:srgbClr val="4264D0"/>
+                </a:solidFill>
+                <a:latin typeface="Nimbus Sans"/>
+                <a:ea typeface="Nimbus Sans"/>
+                <a:cs typeface="Nimbus Sans"/>
+              </a:defRPr>
+            </a:lvl4pPr>
+            <a:lvl5pPr algn="l">
+              <a:defRPr sz="1342" b="1">
+                <a:solidFill>
+                  <a:srgbClr val="4264D0"/>
+                </a:solidFill>
+                <a:latin typeface="Nimbus Sans"/>
+                <a:ea typeface="Nimbus Sans"/>
+                <a:cs typeface="Nimbus Sans"/>
+              </a:defRPr>
+            </a:lvl5pPr>
+            <a:lvl6pPr algn="l">
+              <a:defRPr sz="1342" b="1">
+                <a:solidFill>
+                  <a:srgbClr val="4264D0"/>
+                </a:solidFill>
+                <a:latin typeface="Nimbus Sans"/>
+                <a:ea typeface="Nimbus Sans"/>
+                <a:cs typeface="Nimbus Sans"/>
+              </a:defRPr>
+            </a:lvl6pPr>
+            <a:lvl7pPr algn="l">
+              <a:defRPr sz="1342" b="1">
+                <a:solidFill>
+                  <a:srgbClr val="4264D0"/>
+                </a:solidFill>
+                <a:latin typeface="Nimbus Sans"/>
+                <a:ea typeface="Nimbus Sans"/>
+                <a:cs typeface="Nimbus Sans"/>
+              </a:defRPr>
+            </a:lvl7pPr>
+            <a:lvl8pPr algn="l">
+              <a:defRPr sz="1342" b="1">
+                <a:solidFill>
+                  <a:srgbClr val="4264D0"/>
+                </a:solidFill>
+                <a:latin typeface="Nimbus Sans"/>
+                <a:ea typeface="Nimbus Sans"/>
+                <a:cs typeface="Nimbus Sans"/>
+              </a:defRPr>
+            </a:lvl8pPr>
+            <a:lvl9pPr algn="l">
+              <a:defRPr sz="1342" b="1">
+                <a:solidFill>
+                  <a:srgbClr val="4264D0"/>
+                </a:solidFill>
+                <a:latin typeface="Nimbus Sans"/>
+                <a:ea typeface="Nimbus Sans"/>
+                <a:cs typeface="Nimbus Sans"/>
+              </a:defRPr>
+            </a:lvl9pPr>
+          </a:lstStyle>
+          <a:p xmlns:a="http://schemas.openxmlformats.org/drawingml/2006/main">
+            <a:pPr algn="l">
+              <a:defRPr sz="1342" b="1">
+                <a:solidFill>
+                  <a:srgbClr val="4264D0"/>
+                </a:solidFill>
+                <a:latin typeface="Nimbus Sans"/>
+                <a:ea typeface="Nimbus Sans"/>
+                <a:cs typeface="Nimbus Sans"/>
+              </a:defRPr>
+            </a:pPr>
+            <a:r>
+              <a:rPr sz="1342" b="1">
+                <a:solidFill>
+                  <a:srgbClr val="4264D0"/>
+                </a:solidFill>
+                <a:latin typeface="Nimbus Sans"/>
+                <a:ea typeface="Nimbus Sans"/>
+                <a:cs typeface="Nimbus Sans"/>
+              </a:rPr>
+              <a:t>Report mutation</a:t>
+            </a:r>
+          </a:p>
+        </p:txBody>
+      </p:sp>
+      <p:sp>
+        <p:nvSpPr>
+          <p:cNvPr id="12" name="f150">
+            <a:extLst xmlns:a="http://schemas.openxmlformats.org/drawingml/2006/main">
+              <a:ext uri="{FF2B5EF4-FFF2-40B4-BE49-F238E27FC236}">
+                <a16:creationId xmlns:a16="http://schemas.microsoft.com/office/drawing/2014/main" id="{75CCE3F4-DDD7-47FF-93D8-85195C11084E}"/>
+              </a:ext>
+            </a:extLst>
+          </p:cNvPr>
+          <p:cNvSpPr>
+            <a:spLocks xmlns:a="http://schemas.openxmlformats.org/drawingml/2006/main" noGrp="1"/>
+          </p:cNvSpPr>
+          <p:nvPr/>
+        </p:nvSpPr>
+        <p:spPr>
+          <a:xfrm xmlns:a="http://schemas.openxmlformats.org/drawingml/2006/main">
+            <a:off x="6619336" y="4923696"/>
+            <a:ext cx="899666" cy="238530"/>
+          </a:xfrm>
+          <a:prstGeom xmlns:a="http://schemas.openxmlformats.org/drawingml/2006/main" prst="rect">
+            <a:avLst/>
+          </a:prstGeom>
+          <a:noFill xmlns:a="http://schemas.openxmlformats.org/drawingml/2006/main"/>
+          <a:ln xmlns:a="http://schemas.openxmlformats.org/drawingml/2006/main" w="0">
+            <a:noFill/>
+            <a:prstDash val="solid"/>
+          </a:ln>
+        </p:spPr>
+        <p:txBody>
+          <a:bodyPr xmlns:a="http://schemas.openxmlformats.org/drawingml/2006/main" wrap="none" lIns="0" tIns="0" rIns="0" bIns="0" anchor="t">
+            <a:noAutofit/>
+          </a:bodyPr>
+          <a:lstStyle xmlns:a="http://schemas.openxmlformats.org/drawingml/2006/main">
+            <a:defPPr algn="l">
+              <a:defRPr sz="1391" b="1">
+                <a:solidFill>
+                  <a:srgbClr val="9D7139"/>
+                </a:solidFill>
+                <a:latin typeface="Nimbus Sans"/>
+                <a:ea typeface="Nimbus Sans"/>
+                <a:cs typeface="Nimbus Sans"/>
+              </a:defRPr>
+            </a:defPPr>
+            <a:lvl1pPr algn="l">
+              <a:defRPr sz="1391" b="1">
+                <a:solidFill>
+                  <a:srgbClr val="9D7139"/>
+                </a:solidFill>
+                <a:latin typeface="Nimbus Sans"/>
+                <a:ea typeface="Nimbus Sans"/>
+                <a:cs typeface="Nimbus Sans"/>
+              </a:defRPr>
+            </a:lvl1pPr>
+            <a:lvl2pPr algn="l">
+              <a:defRPr sz="1391" b="1">
+                <a:solidFill>
+                  <a:srgbClr val="9D7139"/>
+                </a:solidFill>
+                <a:latin typeface="Nimbus Sans"/>
+                <a:ea typeface="Nimbus Sans"/>
+                <a:cs typeface="Nimbus Sans"/>
+              </a:defRPr>
+            </a:lvl2pPr>
+            <a:lvl3pPr algn="l">
+              <a:defRPr sz="1391" b="1">
+                <a:solidFill>
+                  <a:srgbClr val="9D7139"/>
+                </a:solidFill>
+                <a:latin typeface="Nimbus Sans"/>
+                <a:ea typeface="Nimbus Sans"/>
+                <a:cs typeface="Nimbus Sans"/>
+              </a:defRPr>
+            </a:lvl3pPr>
+            <a:lvl4pPr algn="l">
+              <a:defRPr sz="1391" b="1">
+                <a:solidFill>
+                  <a:srgbClr val="9D7139"/>
+                </a:solidFill>
+                <a:latin typeface="Nimbus Sans"/>
+                <a:ea typeface="Nimbus Sans"/>
+                <a:cs typeface="Nimbus Sans"/>
+              </a:defRPr>
+            </a:lvl4pPr>
+            <a:lvl5pPr algn="l">
+              <a:defRPr sz="1391" b="1">
+                <a:solidFill>
+                  <a:srgbClr val="9D7139"/>
+                </a:solidFill>
+                <a:latin typeface="Nimbus Sans"/>
+                <a:ea typeface="Nimbus Sans"/>
+                <a:cs typeface="Nimbus Sans"/>
+              </a:defRPr>
+            </a:lvl5pPr>
+            <a:lvl6pPr algn="l">
+              <a:defRPr sz="1391" b="1">
+                <a:solidFill>
+                  <a:srgbClr val="9D7139"/>
+                </a:solidFill>
+                <a:latin typeface="Nimbus Sans"/>
+                <a:ea typeface="Nimbus Sans"/>
+                <a:cs typeface="Nimbus Sans"/>
+              </a:defRPr>
+            </a:lvl6pPr>
+            <a:lvl7pPr algn="l">
+              <a:defRPr sz="1391" b="1">
+                <a:solidFill>
+                  <a:srgbClr val="9D7139"/>
+                </a:solidFill>
+                <a:latin typeface="Nimbus Sans"/>
+                <a:ea typeface="Nimbus Sans"/>
+                <a:cs typeface="Nimbus Sans"/>
+              </a:defRPr>
+            </a:lvl7pPr>
+            <a:lvl8pPr algn="l">
+              <a:defRPr sz="1391" b="1">
+                <a:solidFill>
+                  <a:srgbClr val="9D7139"/>
+                </a:solidFill>
+                <a:latin typeface="Nimbus Sans"/>
+                <a:ea typeface="Nimbus Sans"/>
+                <a:cs typeface="Nimbus Sans"/>
+              </a:defRPr>
+            </a:lvl8pPr>
+            <a:lvl9pPr algn="l">
+              <a:defRPr sz="1391" b="1">
+                <a:solidFill>
+                  <a:srgbClr val="9D7139"/>
+                </a:solidFill>
+                <a:latin typeface="Nimbus Sans"/>
+                <a:ea typeface="Nimbus Sans"/>
+                <a:cs typeface="Nimbus Sans"/>
+              </a:defRPr>
+            </a:lvl9pPr>
+          </a:lstStyle>
+          <a:p xmlns:a="http://schemas.openxmlformats.org/drawingml/2006/main">
+            <a:pPr algn="l">
+              <a:defRPr sz="1391" b="1">
+                <a:solidFill>
+                  <a:srgbClr val="9D7139"/>
+                </a:solidFill>
+                <a:latin typeface="Nimbus Sans"/>
+                <a:ea typeface="Nimbus Sans"/>
+                <a:cs typeface="Nimbus Sans"/>
+              </a:defRPr>
+            </a:pPr>
+            <a:r>
+              <a:rPr sz="1391" b="1">
+                <a:solidFill>
+                  <a:srgbClr val="9D7139"/>
+                </a:solidFill>
+                <a:latin typeface="Nimbus Sans"/>
+                <a:ea typeface="Nimbus Sans"/>
+                <a:cs typeface="Nimbus Sans"/>
+              </a:rPr>
+              <a:t>MOTORE</a:t>
+            </a:r>
+          </a:p>
+        </p:txBody>
+      </p:sp>
+      <p:sp>
+        <p:nvSpPr>
+          <p:cNvPr id="13" name="f151">
+            <a:extLst xmlns:a="http://schemas.openxmlformats.org/drawingml/2006/main">
+              <a:ext uri="{FF2B5EF4-FFF2-40B4-BE49-F238E27FC236}">
+                <a16:creationId xmlns:a16="http://schemas.microsoft.com/office/drawing/2014/main" id="{0F3670EE-9CFC-4B39-8DFC-05415047EB16}"/>
+              </a:ext>
+            </a:extLst>
+          </p:cNvPr>
+          <p:cNvSpPr>
+            <a:spLocks xmlns:a="http://schemas.openxmlformats.org/drawingml/2006/main" noGrp="1"/>
+          </p:cNvSpPr>
+          <p:nvPr/>
+        </p:nvSpPr>
+        <p:spPr>
+          <a:xfrm xmlns:a="http://schemas.openxmlformats.org/drawingml/2006/main">
+            <a:off x="6458081" y="5125626"/>
+            <a:ext cx="1222177" cy="238530"/>
+          </a:xfrm>
+          <a:prstGeom xmlns:a="http://schemas.openxmlformats.org/drawingml/2006/main" prst="rect">
+            <a:avLst/>
+          </a:prstGeom>
+          <a:noFill xmlns:a="http://schemas.openxmlformats.org/drawingml/2006/main"/>
+          <a:ln xmlns:a="http://schemas.openxmlformats.org/drawingml/2006/main" w="0">
+            <a:noFill/>
+            <a:prstDash val="solid"/>
+          </a:ln>
+        </p:spPr>
+        <p:txBody>
+          <a:bodyPr xmlns:a="http://schemas.openxmlformats.org/drawingml/2006/main" wrap="none" lIns="0" tIns="0" rIns="0" bIns="0" anchor="t">
+            <a:noAutofit/>
+          </a:bodyPr>
+          <a:lstStyle xmlns:a="http://schemas.openxmlformats.org/drawingml/2006/main">
+            <a:defPPr algn="l">
+              <a:defRPr sz="1391" b="1">
+                <a:solidFill>
+                  <a:srgbClr val="9D7139"/>
+                </a:solidFill>
+                <a:latin typeface="Nimbus Sans"/>
+                <a:ea typeface="Nimbus Sans"/>
+                <a:cs typeface="Nimbus Sans"/>
+              </a:defRPr>
+            </a:defPPr>
+            <a:lvl1pPr algn="l">
+              <a:defRPr sz="1391" b="1">
+                <a:solidFill>
+                  <a:srgbClr val="9D7139"/>
+                </a:solidFill>
+                <a:latin typeface="Nimbus Sans"/>
+                <a:ea typeface="Nimbus Sans"/>
+                <a:cs typeface="Nimbus Sans"/>
+              </a:defRPr>
+            </a:lvl1pPr>
+            <a:lvl2pPr algn="l">
+              <a:defRPr sz="1391" b="1">
+                <a:solidFill>
+                  <a:srgbClr val="9D7139"/>
+                </a:solidFill>
+                <a:latin typeface="Nimbus Sans"/>
+                <a:ea typeface="Nimbus Sans"/>
+                <a:cs typeface="Nimbus Sans"/>
+              </a:defRPr>
+            </a:lvl2pPr>
+            <a:lvl3pPr algn="l">
+              <a:defRPr sz="1391" b="1">
+                <a:solidFill>
+                  <a:srgbClr val="9D7139"/>
+                </a:solidFill>
+                <a:latin typeface="Nimbus Sans"/>
+                <a:ea typeface="Nimbus Sans"/>
+                <a:cs typeface="Nimbus Sans"/>
+              </a:defRPr>
+            </a:lvl3pPr>
+            <a:lvl4pPr algn="l">
+              <a:defRPr sz="1391" b="1">
+                <a:solidFill>
+                  <a:srgbClr val="9D7139"/>
+                </a:solidFill>
+                <a:latin typeface="Nimbus Sans"/>
+                <a:ea typeface="Nimbus Sans"/>
+                <a:cs typeface="Nimbus Sans"/>
+              </a:defRPr>
+            </a:lvl4pPr>
+            <a:lvl5pPr algn="l">
+              <a:defRPr sz="1391" b="1">
+                <a:solidFill>
+                  <a:srgbClr val="9D7139"/>
+                </a:solidFill>
+                <a:latin typeface="Nimbus Sans"/>
+                <a:ea typeface="Nimbus Sans"/>
+                <a:cs typeface="Nimbus Sans"/>
+              </a:defRPr>
+            </a:lvl5pPr>
+            <a:lvl6pPr algn="l">
+              <a:defRPr sz="1391" b="1">
+                <a:solidFill>
+                  <a:srgbClr val="9D7139"/>
+                </a:solidFill>
+                <a:latin typeface="Nimbus Sans"/>
+                <a:ea typeface="Nimbus Sans"/>
+                <a:cs typeface="Nimbus Sans"/>
+              </a:defRPr>
+            </a:lvl6pPr>
+            <a:lvl7pPr algn="l">
+              <a:defRPr sz="1391" b="1">
+                <a:solidFill>
+                  <a:srgbClr val="9D7139"/>
+                </a:solidFill>
+                <a:latin typeface="Nimbus Sans"/>
+                <a:ea typeface="Nimbus Sans"/>
+                <a:cs typeface="Nimbus Sans"/>
+              </a:defRPr>
+            </a:lvl7pPr>
+            <a:lvl8pPr algn="l">
+              <a:defRPr sz="1391" b="1">
+                <a:solidFill>
+                  <a:srgbClr val="9D7139"/>
+                </a:solidFill>
+                <a:latin typeface="Nimbus Sans"/>
+                <a:ea typeface="Nimbus Sans"/>
+                <a:cs typeface="Nimbus Sans"/>
+              </a:defRPr>
+            </a:lvl8pPr>
+            <a:lvl9pPr algn="l">
+              <a:defRPr sz="1391" b="1">
+                <a:solidFill>
+                  <a:srgbClr val="9D7139"/>
+                </a:solidFill>
+                <a:latin typeface="Nimbus Sans"/>
+                <a:ea typeface="Nimbus Sans"/>
+                <a:cs typeface="Nimbus Sans"/>
+              </a:defRPr>
+            </a:lvl9pPr>
+          </a:lstStyle>
+          <a:p xmlns:a="http://schemas.openxmlformats.org/drawingml/2006/main">
+            <a:pPr algn="l">
+              <a:defRPr sz="1391" b="1">
+                <a:solidFill>
+                  <a:srgbClr val="9D7139"/>
+                </a:solidFill>
+                <a:latin typeface="Nimbus Sans"/>
+                <a:ea typeface="Nimbus Sans"/>
+                <a:cs typeface="Nimbus Sans"/>
+              </a:defRPr>
+            </a:pPr>
+            <a:r>
+              <a:rPr sz="1391" b="1">
+                <a:solidFill>
+                  <a:srgbClr val="9D7139"/>
+                </a:solidFill>
+                <a:latin typeface="Nimbus Sans"/>
+                <a:ea typeface="Nimbus Sans"/>
+                <a:cs typeface="Nimbus Sans"/>
+              </a:rPr>
+              <a:t>di mutazione</a:t>
+            </a:r>
+          </a:p>
+        </p:txBody>
+      </p:sp>
+      <p:sp>
+        <p:nvSpPr>
+          <p:cNvPr id="14" name="f152">
+            <a:extLst xmlns:a="http://schemas.openxmlformats.org/drawingml/2006/main">
+              <a:ext uri="{FF2B5EF4-FFF2-40B4-BE49-F238E27FC236}">
+                <a16:creationId xmlns:a16="http://schemas.microsoft.com/office/drawing/2014/main" id="{CD1B3BA2-8E3F-472A-A252-40A05CADA0EB}"/>
+              </a:ext>
+            </a:extLst>
+          </p:cNvPr>
+          <p:cNvSpPr>
+            <a:spLocks xmlns:a="http://schemas.openxmlformats.org/drawingml/2006/main" noGrp="1"/>
+          </p:cNvSpPr>
+          <p:nvPr/>
+        </p:nvSpPr>
+        <p:spPr>
+          <a:xfrm xmlns:a="http://schemas.openxmlformats.org/drawingml/2006/main">
+            <a:off x="6446621" y="3924521"/>
+            <a:ext cx="1245096" cy="221492"/>
+          </a:xfrm>
+          <a:prstGeom xmlns:a="http://schemas.openxmlformats.org/drawingml/2006/main" prst="rect">
+            <a:avLst/>
+          </a:prstGeom>
+          <a:noFill xmlns:a="http://schemas.openxmlformats.org/drawingml/2006/main"/>
+          <a:ln xmlns:a="http://schemas.openxmlformats.org/drawingml/2006/main" w="0">
+            <a:noFill/>
+            <a:prstDash val="solid"/>
+          </a:ln>
+        </p:spPr>
+        <p:txBody>
+          <a:bodyPr xmlns:a="http://schemas.openxmlformats.org/drawingml/2006/main" wrap="none" lIns="0" tIns="0" rIns="0" bIns="0" anchor="t">
+            <a:noAutofit/>
+          </a:bodyPr>
+          <a:lstStyle xmlns:a="http://schemas.openxmlformats.org/drawingml/2006/main">
+            <a:defPPr algn="l">
+              <a:defRPr sz="1292" b="1">
+                <a:solidFill>
+                  <a:srgbClr val="182536"/>
+                </a:solidFill>
+                <a:latin typeface="Nimbus Sans"/>
+                <a:ea typeface="Nimbus Sans"/>
+                <a:cs typeface="Nimbus Sans"/>
+              </a:defRPr>
+            </a:defPPr>
+            <a:lvl1pPr algn="l">
+              <a:defRPr sz="1292" b="1">
+                <a:solidFill>
+                  <a:srgbClr val="182536"/>
+                </a:solidFill>
+                <a:latin typeface="Nimbus Sans"/>
+                <a:ea typeface="Nimbus Sans"/>
+                <a:cs typeface="Nimbus Sans"/>
+              </a:defRPr>
+            </a:lvl1pPr>
+            <a:lvl2pPr algn="l">
+              <a:defRPr sz="1292" b="1">
+                <a:solidFill>
+                  <a:srgbClr val="182536"/>
+                </a:solidFill>
+                <a:latin typeface="Nimbus Sans"/>
+                <a:ea typeface="Nimbus Sans"/>
+                <a:cs typeface="Nimbus Sans"/>
+              </a:defRPr>
+            </a:lvl2pPr>
+            <a:lvl3pPr algn="l">
+              <a:defRPr sz="1292" b="1">
+                <a:solidFill>
+                  <a:srgbClr val="182536"/>
+                </a:solidFill>
+                <a:latin typeface="Nimbus Sans"/>
+                <a:ea typeface="Nimbus Sans"/>
+                <a:cs typeface="Nimbus Sans"/>
+              </a:defRPr>
+            </a:lvl3pPr>
+            <a:lvl4pPr algn="l">
+              <a:defRPr sz="1292" b="1">
+                <a:solidFill>
+                  <a:srgbClr val="182536"/>
+                </a:solidFill>
+                <a:latin typeface="Nimbus Sans"/>
+                <a:ea typeface="Nimbus Sans"/>
+                <a:cs typeface="Nimbus Sans"/>
+              </a:defRPr>
+            </a:lvl4pPr>
+            <a:lvl5pPr algn="l">
+              <a:defRPr sz="1292" b="1">
+                <a:solidFill>
+                  <a:srgbClr val="182536"/>
+                </a:solidFill>
+                <a:latin typeface="Nimbus Sans"/>
+                <a:ea typeface="Nimbus Sans"/>
+                <a:cs typeface="Nimbus Sans"/>
+              </a:defRPr>
+            </a:lvl5pPr>
+            <a:lvl6pPr algn="l">
+              <a:defRPr sz="1292" b="1">
+                <a:solidFill>
+                  <a:srgbClr val="182536"/>
+                </a:solidFill>
+                <a:latin typeface="Nimbus Sans"/>
+                <a:ea typeface="Nimbus Sans"/>
+                <a:cs typeface="Nimbus Sans"/>
+              </a:defRPr>
+            </a:lvl6pPr>
+            <a:lvl7pPr algn="l">
+              <a:defRPr sz="1292" b="1">
+                <a:solidFill>
+                  <a:srgbClr val="182536"/>
+                </a:solidFill>
+                <a:latin typeface="Nimbus Sans"/>
+                <a:ea typeface="Nimbus Sans"/>
+                <a:cs typeface="Nimbus Sans"/>
+              </a:defRPr>
+            </a:lvl7pPr>
+            <a:lvl8pPr algn="l">
+              <a:defRPr sz="1292" b="1">
+                <a:solidFill>
+                  <a:srgbClr val="182536"/>
+                </a:solidFill>
+                <a:latin typeface="Nimbus Sans"/>
+                <a:ea typeface="Nimbus Sans"/>
+                <a:cs typeface="Nimbus Sans"/>
+              </a:defRPr>
+            </a:lvl8pPr>
+            <a:lvl9pPr algn="l">
+              <a:defRPr sz="1292" b="1">
+                <a:solidFill>
+                  <a:srgbClr val="182536"/>
+                </a:solidFill>
+                <a:latin typeface="Nimbus Sans"/>
+                <a:ea typeface="Nimbus Sans"/>
+                <a:cs typeface="Nimbus Sans"/>
+              </a:defRPr>
+            </a:lvl9pPr>
+          </a:lstStyle>
+          <a:p xmlns:a="http://schemas.openxmlformats.org/drawingml/2006/main">
+            <a:pPr algn="l">
+              <a:defRPr sz="1292" b="1">
+                <a:solidFill>
+                  <a:srgbClr val="182536"/>
+                </a:solidFill>
+                <a:latin typeface="Nimbus Sans"/>
+                <a:ea typeface="Nimbus Sans"/>
+                <a:cs typeface="Nimbus Sans"/>
+              </a:defRPr>
+            </a:pPr>
+            <a:r>
+              <a:rPr sz="1292" b="1">
+                <a:solidFill>
+                  <a:srgbClr val="182536"/>
+                </a:solidFill>
+                <a:latin typeface="Nimbus Sans"/>
+                <a:ea typeface="Nimbus Sans"/>
+                <a:cs typeface="Nimbus Sans"/>
+              </a:rPr>
+              <a:t>PCAP MUTATA</a:t>
+            </a:r>
+          </a:p>
+        </p:txBody>
+      </p:sp>
+      <p:sp>
+        <p:nvSpPr>
+          <p:cNvPr id="15" name="f153">
+            <a:extLst xmlns:a="http://schemas.openxmlformats.org/drawingml/2006/main">
+              <a:ext uri="{FF2B5EF4-FFF2-40B4-BE49-F238E27FC236}">
+                <a16:creationId xmlns:a16="http://schemas.microsoft.com/office/drawing/2014/main" id="{B359E25C-6E89-4703-9984-9EEEC7469827}"/>
+              </a:ext>
+            </a:extLst>
+          </p:cNvPr>
+          <p:cNvSpPr>
+            <a:spLocks xmlns:a="http://schemas.openxmlformats.org/drawingml/2006/main" noGrp="1"/>
+          </p:cNvSpPr>
+          <p:nvPr/>
+        </p:nvSpPr>
+        <p:spPr>
+          <a:xfrm xmlns:a="http://schemas.openxmlformats.org/drawingml/2006/main">
+            <a:off x="6517538" y="5495095"/>
+            <a:ext cx="1103263" cy="195935"/>
+          </a:xfrm>
+          <a:prstGeom xmlns:a="http://schemas.openxmlformats.org/drawingml/2006/main" prst="rect">
+            <a:avLst/>
+          </a:prstGeom>
+          <a:noFill xmlns:a="http://schemas.openxmlformats.org/drawingml/2006/main"/>
+          <a:ln xmlns:a="http://schemas.openxmlformats.org/drawingml/2006/main" w="0">
+            <a:noFill/>
+            <a:prstDash val="solid"/>
+          </a:ln>
+        </p:spPr>
+        <p:txBody>
+          <a:bodyPr xmlns:a="http://schemas.openxmlformats.org/drawingml/2006/main" wrap="none" lIns="0" tIns="0" rIns="0" bIns="0" anchor="t">
+            <a:noAutofit/>
+          </a:bodyPr>
+          <a:lstStyle xmlns:a="http://schemas.openxmlformats.org/drawingml/2006/main">
+            <a:defPPr algn="l">
+              <a:defRPr sz="1143" b="0">
+                <a:solidFill>
+                  <a:srgbClr val="9D7139"/>
+                </a:solidFill>
+                <a:latin typeface="Nimbus Sans"/>
+                <a:ea typeface="Nimbus Sans"/>
+                <a:cs typeface="Nimbus Sans"/>
+              </a:defRPr>
+            </a:defPPr>
+            <a:lvl1pPr algn="l">
+              <a:defRPr sz="1143" b="0">
+                <a:solidFill>
+                  <a:srgbClr val="9D7139"/>
+                </a:solidFill>
+                <a:latin typeface="Nimbus Sans"/>
+                <a:ea typeface="Nimbus Sans"/>
+                <a:cs typeface="Nimbus Sans"/>
+              </a:defRPr>
+            </a:lvl1pPr>
+            <a:lvl2pPr algn="l">
+              <a:defRPr sz="1143" b="0">
+                <a:solidFill>
+                  <a:srgbClr val="9D7139"/>
+                </a:solidFill>
+                <a:latin typeface="Nimbus Sans"/>
+                <a:ea typeface="Nimbus Sans"/>
+                <a:cs typeface="Nimbus Sans"/>
+              </a:defRPr>
+            </a:lvl2pPr>
+            <a:lvl3pPr algn="l">
+              <a:defRPr sz="1143" b="0">
+                <a:solidFill>
+                  <a:srgbClr val="9D7139"/>
+                </a:solidFill>
+                <a:latin typeface="Nimbus Sans"/>
+                <a:ea typeface="Nimbus Sans"/>
+                <a:cs typeface="Nimbus Sans"/>
+              </a:defRPr>
+            </a:lvl3pPr>
+            <a:lvl4pPr algn="l">
+              <a:defRPr sz="1143" b="0">
+                <a:solidFill>
+                  <a:srgbClr val="9D7139"/>
+                </a:solidFill>
+                <a:latin typeface="Nimbus Sans"/>
+                <a:ea typeface="Nimbus Sans"/>
+                <a:cs typeface="Nimbus Sans"/>
+              </a:defRPr>
+            </a:lvl4pPr>
+            <a:lvl5pPr algn="l">
+              <a:defRPr sz="1143" b="0">
+                <a:solidFill>
+                  <a:srgbClr val="9D7139"/>
+                </a:solidFill>
+                <a:latin typeface="Nimbus Sans"/>
+                <a:ea typeface="Nimbus Sans"/>
+                <a:cs typeface="Nimbus Sans"/>
+              </a:defRPr>
+            </a:lvl5pPr>
+            <a:lvl6pPr algn="l">
+              <a:defRPr sz="1143" b="0">
+                <a:solidFill>
+                  <a:srgbClr val="9D7139"/>
+                </a:solidFill>
+                <a:latin typeface="Nimbus Sans"/>
+                <a:ea typeface="Nimbus Sans"/>
+                <a:cs typeface="Nimbus Sans"/>
+              </a:defRPr>
+            </a:lvl6pPr>
+            <a:lvl7pPr algn="l">
+              <a:defRPr sz="1143" b="0">
+                <a:solidFill>
+                  <a:srgbClr val="9D7139"/>
+                </a:solidFill>
+                <a:latin typeface="Nimbus Sans"/>
+                <a:ea typeface="Nimbus Sans"/>
+                <a:cs typeface="Nimbus Sans"/>
+              </a:defRPr>
+            </a:lvl7pPr>
+            <a:lvl8pPr algn="l">
+              <a:defRPr sz="1143" b="0">
+                <a:solidFill>
+                  <a:srgbClr val="9D7139"/>
+                </a:solidFill>
+                <a:latin typeface="Nimbus Sans"/>
+                <a:ea typeface="Nimbus Sans"/>
+                <a:cs typeface="Nimbus Sans"/>
+              </a:defRPr>
+            </a:lvl8pPr>
+            <a:lvl9pPr algn="l">
+              <a:defRPr sz="1143" b="0">
+                <a:solidFill>
+                  <a:srgbClr val="9D7139"/>
+                </a:solidFill>
+                <a:latin typeface="Nimbus Sans"/>
+                <a:ea typeface="Nimbus Sans"/>
+                <a:cs typeface="Nimbus Sans"/>
+              </a:defRPr>
+            </a:lvl9pPr>
+          </a:lstStyle>
+          <a:p xmlns:a="http://schemas.openxmlformats.org/drawingml/2006/main">
+            <a:pPr algn="l">
+              <a:defRPr sz="1143" b="0">
+                <a:solidFill>
+                  <a:srgbClr val="9D7139"/>
+                </a:solidFill>
+                <a:latin typeface="Nimbus Sans"/>
+                <a:ea typeface="Nimbus Sans"/>
+                <a:cs typeface="Nimbus Sans"/>
+              </a:defRPr>
+            </a:pPr>
+            <a:r>
+              <a:rPr sz="1143" b="0">
+                <a:solidFill>
+                  <a:srgbClr val="9D7139"/>
+                </a:solidFill>
+                <a:latin typeface="Nimbus Sans"/>
+                <a:ea typeface="Nimbus Sans"/>
+                <a:cs typeface="Nimbus Sans"/>
+              </a:rPr>
+              <a:t>Esterno · offline</a:t>
+            </a:r>
+          </a:p>
+        </p:txBody>
+      </p:sp>
+      <p:sp>
+        <p:nvSpPr>
+          <p:cNvPr id="16" name="f154">
+            <a:extLst xmlns:a="http://schemas.openxmlformats.org/drawingml/2006/main">
+              <a:ext uri="{FF2B5EF4-FFF2-40B4-BE49-F238E27FC236}">
+                <a16:creationId xmlns:a16="http://schemas.microsoft.com/office/drawing/2014/main" id="{E0366593-CA65-4705-B8CF-D4396CA96BBF}"/>
+              </a:ext>
+            </a:extLst>
+          </p:cNvPr>
+          <p:cNvSpPr>
+            <a:spLocks xmlns:a="http://schemas.openxmlformats.org/drawingml/2006/main" noGrp="1"/>
+          </p:cNvSpPr>
+          <p:nvPr/>
+        </p:nvSpPr>
+        <p:spPr>
+          <a:xfrm xmlns:a="http://schemas.openxmlformats.org/drawingml/2006/main">
+            <a:off x="6251353" y="5828469"/>
+            <a:ext cx="1371600" cy="187416"/>
+          </a:xfrm>
+          <a:prstGeom xmlns:a="http://schemas.openxmlformats.org/drawingml/2006/main" prst="rect">
+            <a:avLst/>
+          </a:prstGeom>
+          <a:noFill xmlns:a="http://schemas.openxmlformats.org/drawingml/2006/main"/>
+          <a:ln xmlns:a="http://schemas.openxmlformats.org/drawingml/2006/main" w="0">
+            <a:noFill/>
+            <a:prstDash val="solid"/>
+          </a:ln>
+        </p:spPr>
+        <p:txBody>
+          <a:bodyPr xmlns:a="http://schemas.openxmlformats.org/drawingml/2006/main" wrap="none" lIns="0" tIns="0" rIns="0" bIns="0" anchor="t">
+            <a:noAutofit/>
+          </a:bodyPr>
+          <a:lstStyle xmlns:a="http://schemas.openxmlformats.org/drawingml/2006/main">
+            <a:defPPr algn="l">
+              <a:defRPr sz="1093" b="0">
+                <a:solidFill>
+                  <a:srgbClr val="52627B"/>
+                </a:solidFill>
+                <a:latin typeface="Nimbus Sans"/>
+                <a:ea typeface="Nimbus Sans"/>
+                <a:cs typeface="Nimbus Sans"/>
+              </a:defRPr>
+            </a:defPPr>
+            <a:lvl1pPr algn="l">
+              <a:defRPr sz="1093" b="0">
+                <a:solidFill>
+                  <a:srgbClr val="52627B"/>
+                </a:solidFill>
+                <a:latin typeface="Nimbus Sans"/>
+                <a:ea typeface="Nimbus Sans"/>
+                <a:cs typeface="Nimbus Sans"/>
+              </a:defRPr>
+            </a:lvl1pPr>
+            <a:lvl2pPr algn="l">
+              <a:defRPr sz="1093" b="0">
+                <a:solidFill>
+                  <a:srgbClr val="52627B"/>
+                </a:solidFill>
+                <a:latin typeface="Nimbus Sans"/>
+                <a:ea typeface="Nimbus Sans"/>
+                <a:cs typeface="Nimbus Sans"/>
+              </a:defRPr>
+            </a:lvl2pPr>
+            <a:lvl3pPr algn="l">
+              <a:defRPr sz="1093" b="0">
+                <a:solidFill>
+                  <a:srgbClr val="52627B"/>
+                </a:solidFill>
+                <a:latin typeface="Nimbus Sans"/>
+                <a:ea typeface="Nimbus Sans"/>
+                <a:cs typeface="Nimbus Sans"/>
+              </a:defRPr>
+            </a:lvl3pPr>
+            <a:lvl4pPr algn="l">
+              <a:defRPr sz="1093" b="0">
+                <a:solidFill>
+                  <a:srgbClr val="52627B"/>
+                </a:solidFill>
+                <a:latin typeface="Nimbus Sans"/>
+                <a:ea typeface="Nimbus Sans"/>
+                <a:cs typeface="Nimbus Sans"/>
+              </a:defRPr>
+            </a:lvl4pPr>
+            <a:lvl5pPr algn="l">
+              <a:defRPr sz="1093" b="0">
+                <a:solidFill>
+                  <a:srgbClr val="52627B"/>
+                </a:solidFill>
+                <a:latin typeface="Nimbus Sans"/>
+                <a:ea typeface="Nimbus Sans"/>
+                <a:cs typeface="Nimbus Sans"/>
+              </a:defRPr>
+            </a:lvl5pPr>
+            <a:lvl6pPr algn="l">
+              <a:defRPr sz="1093" b="0">
+                <a:solidFill>
+                  <a:srgbClr val="52627B"/>
+                </a:solidFill>
+                <a:latin typeface="Nimbus Sans"/>
+                <a:ea typeface="Nimbus Sans"/>
+                <a:cs typeface="Nimbus Sans"/>
+              </a:defRPr>
+            </a:lvl6pPr>
+            <a:lvl7pPr algn="l">
+              <a:defRPr sz="1093" b="0">
+                <a:solidFill>
+                  <a:srgbClr val="52627B"/>
+                </a:solidFill>
+                <a:latin typeface="Nimbus Sans"/>
+                <a:ea typeface="Nimbus Sans"/>
+                <a:cs typeface="Nimbus Sans"/>
+              </a:defRPr>
+            </a:lvl7pPr>
+            <a:lvl8pPr algn="l">
+              <a:defRPr sz="1093" b="0">
+                <a:solidFill>
+                  <a:srgbClr val="52627B"/>
+                </a:solidFill>
+                <a:latin typeface="Nimbus Sans"/>
+                <a:ea typeface="Nimbus Sans"/>
+                <a:cs typeface="Nimbus Sans"/>
+              </a:defRPr>
+            </a:lvl8pPr>
+            <a:lvl9pPr algn="l">
+              <a:defRPr sz="1093" b="0">
+                <a:solidFill>
+                  <a:srgbClr val="52627B"/>
+                </a:solidFill>
+                <a:latin typeface="Nimbus Sans"/>
+                <a:ea typeface="Nimbus Sans"/>
+                <a:cs typeface="Nimbus Sans"/>
+              </a:defRPr>
+            </a:lvl9pPr>
+          </a:lstStyle>
+          <a:p xmlns:a="http://schemas.openxmlformats.org/drawingml/2006/main">
+            <a:pPr algn="l">
+              <a:defRPr sz="1093" b="0">
+                <a:solidFill>
+                  <a:srgbClr val="52627B"/>
+                </a:solidFill>
+                <a:latin typeface="Nimbus Sans"/>
+                <a:ea typeface="Nimbus Sans"/>
+                <a:cs typeface="Nimbus Sans"/>
+              </a:defRPr>
+            </a:pPr>
+            <a:r>
+              <a:rPr sz="1093" b="0">
+                <a:solidFill>
+                  <a:srgbClr val="52627B"/>
+                </a:solidFill>
+                <a:latin typeface="Nimbus Sans"/>
+                <a:ea typeface="Nimbus Sans"/>
+                <a:cs typeface="Nimbus Sans"/>
+              </a:rPr>
+              <a:t>Selezione dei frame</a:t>
+            </a:r>
+          </a:p>
+        </p:txBody>
+      </p:sp>
+      <p:sp>
+        <p:nvSpPr>
+          <p:cNvPr id="17" name="f155">
+            <a:extLst xmlns:a="http://schemas.openxmlformats.org/drawingml/2006/main">
+              <a:ext uri="{FF2B5EF4-FFF2-40B4-BE49-F238E27FC236}">
+                <a16:creationId xmlns:a16="http://schemas.microsoft.com/office/drawing/2014/main" id="{B634CFF9-A505-48BD-ABFB-53E2DBF25E67}"/>
+              </a:ext>
+            </a:extLst>
+          </p:cNvPr>
+          <p:cNvSpPr>
+            <a:spLocks xmlns:a="http://schemas.openxmlformats.org/drawingml/2006/main" noGrp="1"/>
+          </p:cNvSpPr>
+          <p:nvPr/>
+        </p:nvSpPr>
+        <p:spPr>
+          <a:xfrm xmlns:a="http://schemas.openxmlformats.org/drawingml/2006/main">
+            <a:off x="6251353" y="5990013"/>
+            <a:ext cx="1498104" cy="187416"/>
+          </a:xfrm>
+          <a:prstGeom xmlns:a="http://schemas.openxmlformats.org/drawingml/2006/main" prst="rect">
+            <a:avLst/>
+          </a:prstGeom>
+          <a:noFill xmlns:a="http://schemas.openxmlformats.org/drawingml/2006/main"/>
+          <a:ln xmlns:a="http://schemas.openxmlformats.org/drawingml/2006/main" w="0">
+            <a:noFill/>
+            <a:prstDash val="solid"/>
+          </a:ln>
+        </p:spPr>
+        <p:txBody>
+          <a:bodyPr xmlns:a="http://schemas.openxmlformats.org/drawingml/2006/main" wrap="none" lIns="0" tIns="0" rIns="0" bIns="0" anchor="t">
+            <a:noAutofit/>
+          </a:bodyPr>
+          <a:lstStyle xmlns:a="http://schemas.openxmlformats.org/drawingml/2006/main">
+            <a:defPPr algn="l">
+              <a:defRPr sz="1093" b="0">
+                <a:solidFill>
+                  <a:srgbClr val="52627B"/>
+                </a:solidFill>
+                <a:latin typeface="Nimbus Sans"/>
+                <a:ea typeface="Nimbus Sans"/>
+                <a:cs typeface="Nimbus Sans"/>
+              </a:defRPr>
+            </a:defPPr>
+            <a:lvl1pPr algn="l">
+              <a:defRPr sz="1093" b="0">
+                <a:solidFill>
+                  <a:srgbClr val="52627B"/>
+                </a:solidFill>
+                <a:latin typeface="Nimbus Sans"/>
+                <a:ea typeface="Nimbus Sans"/>
+                <a:cs typeface="Nimbus Sans"/>
+              </a:defRPr>
+            </a:lvl1pPr>
+            <a:lvl2pPr algn="l">
+              <a:defRPr sz="1093" b="0">
+                <a:solidFill>
+                  <a:srgbClr val="52627B"/>
+                </a:solidFill>
+                <a:latin typeface="Nimbus Sans"/>
+                <a:ea typeface="Nimbus Sans"/>
+                <a:cs typeface="Nimbus Sans"/>
+              </a:defRPr>
+            </a:lvl2pPr>
+            <a:lvl3pPr algn="l">
+              <a:defRPr sz="1093" b="0">
+                <a:solidFill>
+                  <a:srgbClr val="52627B"/>
+                </a:solidFill>
+                <a:latin typeface="Nimbus Sans"/>
+                <a:ea typeface="Nimbus Sans"/>
+                <a:cs typeface="Nimbus Sans"/>
+              </a:defRPr>
+            </a:lvl3pPr>
+            <a:lvl4pPr algn="l">
+              <a:defRPr sz="1093" b="0">
+                <a:solidFill>
+                  <a:srgbClr val="52627B"/>
+                </a:solidFill>
+                <a:latin typeface="Nimbus Sans"/>
+                <a:ea typeface="Nimbus Sans"/>
+                <a:cs typeface="Nimbus Sans"/>
+              </a:defRPr>
+            </a:lvl4pPr>
+            <a:lvl5pPr algn="l">
+              <a:defRPr sz="1093" b="0">
+                <a:solidFill>
+                  <a:srgbClr val="52627B"/>
+                </a:solidFill>
+                <a:latin typeface="Nimbus Sans"/>
+                <a:ea typeface="Nimbus Sans"/>
+                <a:cs typeface="Nimbus Sans"/>
+              </a:defRPr>
+            </a:lvl5pPr>
+            <a:lvl6pPr algn="l">
+              <a:defRPr sz="1093" b="0">
+                <a:solidFill>
+                  <a:srgbClr val="52627B"/>
+                </a:solidFill>
+                <a:latin typeface="Nimbus Sans"/>
+                <a:ea typeface="Nimbus Sans"/>
+                <a:cs typeface="Nimbus Sans"/>
+              </a:defRPr>
+            </a:lvl6pPr>
+            <a:lvl7pPr algn="l">
+              <a:defRPr sz="1093" b="0">
+                <a:solidFill>
+                  <a:srgbClr val="52627B"/>
+                </a:solidFill>
+                <a:latin typeface="Nimbus Sans"/>
+                <a:ea typeface="Nimbus Sans"/>
+                <a:cs typeface="Nimbus Sans"/>
+              </a:defRPr>
+            </a:lvl7pPr>
+            <a:lvl8pPr algn="l">
+              <a:defRPr sz="1093" b="0">
+                <a:solidFill>
+                  <a:srgbClr val="52627B"/>
+                </a:solidFill>
+                <a:latin typeface="Nimbus Sans"/>
+                <a:ea typeface="Nimbus Sans"/>
+                <a:cs typeface="Nimbus Sans"/>
+              </a:defRPr>
+            </a:lvl8pPr>
+            <a:lvl9pPr algn="l">
+              <a:defRPr sz="1093" b="0">
+                <a:solidFill>
+                  <a:srgbClr val="52627B"/>
+                </a:solidFill>
+                <a:latin typeface="Nimbus Sans"/>
+                <a:ea typeface="Nimbus Sans"/>
+                <a:cs typeface="Nimbus Sans"/>
+              </a:defRPr>
+            </a:lvl9pPr>
+          </a:lstStyle>
+          <a:p xmlns:a="http://schemas.openxmlformats.org/drawingml/2006/main">
+            <a:pPr algn="l">
+              <a:defRPr sz="1093" b="0">
+                <a:solidFill>
+                  <a:srgbClr val="52627B"/>
+                </a:solidFill>
+                <a:latin typeface="Nimbus Sans"/>
+                <a:ea typeface="Nimbus Sans"/>
+                <a:cs typeface="Nimbus Sans"/>
+              </a:defRPr>
+            </a:pPr>
+            <a:r>
+              <a:rPr sz="1093" b="0">
+                <a:solidFill>
+                  <a:srgbClr val="52627B"/>
+                </a:solidFill>
+                <a:latin typeface="Nimbus Sans"/>
+                <a:ea typeface="Nimbus Sans"/>
+                <a:cs typeface="Nimbus Sans"/>
+              </a:rPr>
+              <a:t>rilevanti da modificare</a:t>
+            </a:r>
+          </a:p>
+        </p:txBody>
+      </p:sp>
+      <p:sp>
+        <p:nvSpPr>
+          <p:cNvPr id="18" name="f156">
+            <a:extLst xmlns:a="http://schemas.openxmlformats.org/drawingml/2006/main">
+              <a:ext uri="{FF2B5EF4-FFF2-40B4-BE49-F238E27FC236}">
+                <a16:creationId xmlns:a16="http://schemas.microsoft.com/office/drawing/2014/main" id="{3B385D84-A618-42B8-A051-79C1A80BC913}"/>
+              </a:ext>
+            </a:extLst>
+          </p:cNvPr>
+          <p:cNvSpPr>
+            <a:spLocks xmlns:a="http://schemas.openxmlformats.org/drawingml/2006/main" noGrp="1"/>
+          </p:cNvSpPr>
+          <p:nvPr/>
+        </p:nvSpPr>
+        <p:spPr>
+          <a:xfrm xmlns:a="http://schemas.openxmlformats.org/drawingml/2006/main">
+            <a:off x="1066800" y="7153275"/>
+            <a:ext cx="6896100" cy="381000"/>
           </a:xfrm>
           <a:prstGeom xmlns:a="http://schemas.openxmlformats.org/drawingml/2006/main" prst="rect">
             <a:avLst/>
@@ -22530,17 +22442,199 @@
                 <a:ea typeface="Nimbus Sans"/>
                 <a:cs typeface="Nimbus Sans"/>
               </a:rPr>
-              <a:t>Stessa DSL, stessa pipeline</a:t>
+              <a:t>Evidenze del baseline</a:t>
+            </a:r>
+          </a:p>
+        </p:txBody>
+      </p:sp>
+      <p:sp>
+        <p:nvSpPr>
+          <p:cNvPr id="19" name="f157">
+            <a:extLst xmlns:a="http://schemas.openxmlformats.org/drawingml/2006/main">
+              <a:ext uri="{FF2B5EF4-FFF2-40B4-BE49-F238E27FC236}">
+                <a16:creationId xmlns:a16="http://schemas.microsoft.com/office/drawing/2014/main" id="{C639094F-C09F-45F7-956F-0598238C717B}"/>
+              </a:ext>
+            </a:extLst>
+          </p:cNvPr>
+          <p:cNvSpPr>
+            <a:spLocks xmlns:a="http://schemas.openxmlformats.org/drawingml/2006/main" noGrp="1"/>
+          </p:cNvSpPr>
+          <p:nvPr/>
+        </p:nvSpPr>
+        <p:spPr>
+          <a:xfrm xmlns:a="http://schemas.openxmlformats.org/drawingml/2006/main">
+            <a:off x="8420100" y="2686050"/>
+            <a:ext cx="5753100" cy="723900"/>
+          </a:xfrm>
+          <a:prstGeom xmlns:a="http://schemas.openxmlformats.org/drawingml/2006/main" prst="rect">
+            <a:avLst/>
+          </a:prstGeom>
+          <a:noFill xmlns:a="http://schemas.openxmlformats.org/drawingml/2006/main"/>
+          <a:ln xmlns:a="http://schemas.openxmlformats.org/drawingml/2006/main" w="0">
+            <a:noFill/>
+            <a:prstDash val="solid"/>
+          </a:ln>
+        </p:spPr>
+        <p:txBody>
+          <a:bodyPr xmlns:a="http://schemas.openxmlformats.org/drawingml/2006/main" wrap="none" lIns="0" tIns="0" rIns="0" bIns="0" anchor="t">
+            <a:noAutofit/>
+          </a:bodyPr>
+          <a:lstStyle xmlns:a="http://schemas.openxmlformats.org/drawingml/2006/main">
+            <a:defPPr algn="l">
+              <a:defRPr sz="2175" b="1">
+                <a:solidFill>
+                  <a:srgbClr val="182536"/>
+                </a:solidFill>
+                <a:latin typeface="Nimbus Sans"/>
+                <a:ea typeface="Nimbus Sans"/>
+                <a:cs typeface="Nimbus Sans"/>
+              </a:defRPr>
+            </a:defPPr>
+            <a:lvl1pPr algn="l">
+              <a:defRPr sz="2175" b="1">
+                <a:solidFill>
+                  <a:srgbClr val="182536"/>
+                </a:solidFill>
+                <a:latin typeface="Nimbus Sans"/>
+                <a:ea typeface="Nimbus Sans"/>
+                <a:cs typeface="Nimbus Sans"/>
+              </a:defRPr>
+            </a:lvl1pPr>
+            <a:lvl2pPr algn="l">
+              <a:defRPr sz="2175" b="1">
+                <a:solidFill>
+                  <a:srgbClr val="182536"/>
+                </a:solidFill>
+                <a:latin typeface="Nimbus Sans"/>
+                <a:ea typeface="Nimbus Sans"/>
+                <a:cs typeface="Nimbus Sans"/>
+              </a:defRPr>
+            </a:lvl2pPr>
+            <a:lvl3pPr algn="l">
+              <a:defRPr sz="2175" b="1">
+                <a:solidFill>
+                  <a:srgbClr val="182536"/>
+                </a:solidFill>
+                <a:latin typeface="Nimbus Sans"/>
+                <a:ea typeface="Nimbus Sans"/>
+                <a:cs typeface="Nimbus Sans"/>
+              </a:defRPr>
+            </a:lvl3pPr>
+            <a:lvl4pPr algn="l">
+              <a:defRPr sz="2175" b="1">
+                <a:solidFill>
+                  <a:srgbClr val="182536"/>
+                </a:solidFill>
+                <a:latin typeface="Nimbus Sans"/>
+                <a:ea typeface="Nimbus Sans"/>
+                <a:cs typeface="Nimbus Sans"/>
+              </a:defRPr>
+            </a:lvl4pPr>
+            <a:lvl5pPr algn="l">
+              <a:defRPr sz="2175" b="1">
+                <a:solidFill>
+                  <a:srgbClr val="182536"/>
+                </a:solidFill>
+                <a:latin typeface="Nimbus Sans"/>
+                <a:ea typeface="Nimbus Sans"/>
+                <a:cs typeface="Nimbus Sans"/>
+              </a:defRPr>
+            </a:lvl5pPr>
+            <a:lvl6pPr algn="l">
+              <a:defRPr sz="2175" b="1">
+                <a:solidFill>
+                  <a:srgbClr val="182536"/>
+                </a:solidFill>
+                <a:latin typeface="Nimbus Sans"/>
+                <a:ea typeface="Nimbus Sans"/>
+                <a:cs typeface="Nimbus Sans"/>
+              </a:defRPr>
+            </a:lvl6pPr>
+            <a:lvl7pPr algn="l">
+              <a:defRPr sz="2175" b="1">
+                <a:solidFill>
+                  <a:srgbClr val="182536"/>
+                </a:solidFill>
+                <a:latin typeface="Nimbus Sans"/>
+                <a:ea typeface="Nimbus Sans"/>
+                <a:cs typeface="Nimbus Sans"/>
+              </a:defRPr>
+            </a:lvl7pPr>
+            <a:lvl8pPr algn="l">
+              <a:defRPr sz="2175" b="1">
+                <a:solidFill>
+                  <a:srgbClr val="182536"/>
+                </a:solidFill>
+                <a:latin typeface="Nimbus Sans"/>
+                <a:ea typeface="Nimbus Sans"/>
+                <a:cs typeface="Nimbus Sans"/>
+              </a:defRPr>
+            </a:lvl8pPr>
+            <a:lvl9pPr algn="l">
+              <a:defRPr sz="2175" b="1">
+                <a:solidFill>
+                  <a:srgbClr val="182536"/>
+                </a:solidFill>
+                <a:latin typeface="Nimbus Sans"/>
+                <a:ea typeface="Nimbus Sans"/>
+                <a:cs typeface="Nimbus Sans"/>
+              </a:defRPr>
+            </a:lvl9pPr>
+          </a:lstStyle>
+          <a:p xmlns:a="http://schemas.openxmlformats.org/drawingml/2006/main">
+            <a:pPr algn="l">
+              <a:defRPr sz="2175" b="1">
+                <a:solidFill>
+                  <a:srgbClr val="182536"/>
+                </a:solidFill>
+                <a:latin typeface="Nimbus Sans"/>
+                <a:ea typeface="Nimbus Sans"/>
+                <a:cs typeface="Nimbus Sans"/>
+              </a:defRPr>
+            </a:pPr>
+            <a:r>
+              <a:rPr sz="2175" b="1">
+                <a:solidFill>
+                  <a:srgbClr val="182536"/>
+                </a:solidFill>
+                <a:latin typeface="Nimbus Sans"/>
+                <a:ea typeface="Nimbus Sans"/>
+                <a:cs typeface="Nimbus Sans"/>
+              </a:rPr>
+              <a:t>Esempi di tre mutazioni</a:t>
+            </a:r>
+          </a:p>
+          <a:p xmlns:a="http://schemas.openxmlformats.org/drawingml/2006/main">
+            <a:pPr algn="l">
+              <a:defRPr sz="2175" b="1">
+                <a:solidFill>
+                  <a:srgbClr val="182536"/>
+                </a:solidFill>
+                <a:latin typeface="Nimbus Sans"/>
+                <a:ea typeface="Nimbus Sans"/>
+                <a:cs typeface="Nimbus Sans"/>
+              </a:defRPr>
+            </a:pPr>
+            <a:r>
+              <a:rPr sz="2175" b="1">
+                <a:solidFill>
+                  <a:srgbClr val="182536"/>
+                </a:solidFill>
+                <a:latin typeface="Nimbus Sans"/>
+                <a:ea typeface="Nimbus Sans"/>
+                <a:cs typeface="Nimbus Sans"/>
+              </a:rPr>
+              <a:t>realmente utilizzate</a:t>
             </a:r>
           </a:p>
         </p:txBody>
       </p:sp>
       <p:graphicFrame>
         <p:nvGraphicFramePr>
-          <p:cNvPr id="44" name="">
+          <p:cNvPr id="20" name="">
             <a:extLst xmlns:a="http://schemas.openxmlformats.org/drawingml/2006/main">
               <a:ext uri="{FF2B5EF4-FFF2-40B4-BE49-F238E27FC236}">
-                <a16:creationId xmlns:a16="http://schemas.microsoft.com/office/drawing/2014/main" id="{C6E0E5F4-61D9-4E54-9DCA-24A182E2EC5D}"/>
+                <a16:creationId xmlns:a16="http://schemas.microsoft.com/office/drawing/2014/main" id="{455672C0-41AF-43F8-AA81-AD368076845A}"/>
               </a:ext>
             </a:extLst>
           </p:cNvPr>
@@ -22548,19 +22642,19 @@
           <p:nvPr/>
         </p:nvGraphicFramePr>
         <p:xfrm>
-          <a:off xmlns:a="http://schemas.openxmlformats.org/drawingml/2006/main" x="8953500" y="3105150"/>
-          <a:ext xmlns:a="http://schemas.openxmlformats.org/drawingml/2006/main" cx="5219700" cy="2990850"/>
+          <a:off xmlns:a="http://schemas.openxmlformats.org/drawingml/2006/main" x="8420100" y="3619500"/>
+          <a:ext xmlns:a="http://schemas.openxmlformats.org/drawingml/2006/main" cx="5753100" cy="3371850"/>
         </p:xfrm>
         <a:graphic xmlns:a="http://schemas.openxmlformats.org/drawingml/2006/main">
           <a:graphicData uri="http://schemas.openxmlformats.org/drawingml/2006/table">
             <a:tbl>
               <a:tblPr firstRow="0" bandRow="0"/>
               <a:tblGrid>
-                <a:gridCol w="2324100"/>
-                <a:gridCol w="1447800"/>
-                <a:gridCol w="1447800"/>
+                <a:gridCol w="2476500"/>
+                <a:gridCol w="1352550"/>
+                <a:gridCol w="1924050"/>
               </a:tblGrid>
-              <a:tr h="476250">
+              <a:tr h="514350">
                 <a:tc>
                   <a:txBody>
                     <a:bodyPr wrap="none">
@@ -22703,7 +22797,7 @@
                   </a:tcPr>
                 </a:tc>
               </a:tr>
-              <a:tr h="838200">
+              <a:tr h="876300">
                 <a:tc>
                   <a:txBody>
                     <a:bodyPr wrap="none">
@@ -22842,7 +22936,7 @@
                   </a:tcPr>
                 </a:tc>
               </a:tr>
-              <a:tr h="838200">
+              <a:tr h="1104900">
                 <a:tc>
                   <a:txBody>
                     <a:bodyPr wrap="none">
@@ -22860,7 +22954,7 @@
                           <a:ea typeface="Nimbus Sans"/>
                           <a:cs typeface="Nimbus Sans"/>
                         </a:rPr>
-                        <a:t>UDM SUCI:</a:t>
+                        <a:t>AMF A: Intervallo</a:t>
                       </a:r>
                     </a:p>
                     <a:p>
@@ -22874,7 +22968,21 @@
                           <a:ea typeface="Nimbus Sans"/>
                           <a:cs typeface="Nimbus Sans"/>
                         </a:rPr>
-                        <a:t>SUPI alterato</a:t>
+                        <a:t>temporale non</a:t>
+                      </a:r>
+                    </a:p>
+                    <a:p>
+                      <a:pPr algn="l"/>
+                      <a:r>
+                        <a:rPr sz="1725" b="0">
+                          <a:solidFill>
+                            <a:srgbClr val="182536"/>
+                          </a:solidFill>
+                          <a:latin typeface="Nimbus Sans"/>
+                          <a:ea typeface="Nimbus Sans"/>
+                          <a:cs typeface="Nimbus Sans"/>
+                        </a:rPr>
+                        <a:t>rispettato</a:t>
                       </a:r>
                     </a:p>
                   </a:txBody>
@@ -22981,7 +23089,7 @@
                   </a:tcPr>
                 </a:tc>
               </a:tr>
-              <a:tr h="838200">
+              <a:tr h="876300">
                 <a:tc>
                   <a:txBody>
                     <a:bodyPr wrap="none">
@@ -23013,7 +23121,7 @@
                           <a:ea typeface="Nimbus Sans"/>
                           <a:cs typeface="Nimbus Sans"/>
                         </a:rPr>
-                        <a:t>duplicato</a:t>
+                        <a:t>rimossi</a:t>
                       </a:r>
                     </a:p>
                   </a:txBody>
@@ -23089,15 +23197,15 @@
                     <a:p>
                       <a:pPr algn="ctr"/>
                       <a:r>
-                        <a:rPr sz="1725" b="1">
+                        <a:rPr sz="1575" b="1">
                           <a:solidFill>
-                            <a:srgbClr val="B64B56"/>
+                            <a:srgbClr val="9D7139"/>
                           </a:solidFill>
                           <a:latin typeface="Nimbus Sans"/>
                           <a:ea typeface="Nimbus Sans"/>
                           <a:cs typeface="Nimbus Sans"/>
                         </a:rPr>
-                        <a:t>FAIL</a:t>
+                        <a:t>INCONCLUSIVE</a:t>
                       </a:r>
                     </a:p>
                   </a:txBody>
@@ -23126,10 +23234,10 @@
       </p:graphicFrame>
       <p:sp>
         <p:nvSpPr>
-          <p:cNvPr id="45" name="f181">
+          <p:cNvPr id="21" name="f159">
             <a:extLst xmlns:a="http://schemas.openxmlformats.org/drawingml/2006/main">
               <a:ext uri="{FF2B5EF4-FFF2-40B4-BE49-F238E27FC236}">
-                <a16:creationId xmlns:a16="http://schemas.microsoft.com/office/drawing/2014/main" id="{F25C6270-C124-4F41-AD94-D64C6A5120C9}"/>
+                <a16:creationId xmlns:a16="http://schemas.microsoft.com/office/drawing/2014/main" id="{5B5D9074-9403-43C9-8196-1ABCDA1CA21A}"/>
               </a:ext>
             </a:extLst>
           </p:cNvPr>
@@ -23140,8 +23248,8 @@
         </p:nvSpPr>
         <p:spPr>
           <a:xfrm xmlns:a="http://schemas.openxmlformats.org/drawingml/2006/main">
-            <a:off x="9048750" y="6438900"/>
-            <a:ext cx="4933950" cy="971550"/>
+            <a:off x="8420100" y="7419975"/>
+            <a:ext cx="2000250" cy="857250"/>
           </a:xfrm>
           <a:prstGeom xmlns:a="http://schemas.openxmlformats.org/drawingml/2006/main" prst="rect">
             <a:avLst/>
@@ -23158,7 +23266,7 @@
           </a:bodyPr>
           <a:lstStyle xmlns:a="http://schemas.openxmlformats.org/drawingml/2006/main">
             <a:defPPr algn="ctr">
-              <a:defRPr sz="6150" b="1">
+              <a:defRPr sz="5250" b="1">
                 <a:solidFill>
                   <a:srgbClr val="4264D0"/>
                 </a:solidFill>
@@ -23168,7 +23276,7 @@
               </a:defRPr>
             </a:defPPr>
             <a:lvl1pPr algn="ctr">
-              <a:defRPr sz="6150" b="1">
+              <a:defRPr sz="5250" b="1">
                 <a:solidFill>
                   <a:srgbClr val="4264D0"/>
                 </a:solidFill>
@@ -23178,7 +23286,7 @@
               </a:defRPr>
             </a:lvl1pPr>
             <a:lvl2pPr algn="ctr">
-              <a:defRPr sz="6150" b="1">
+              <a:defRPr sz="5250" b="1">
                 <a:solidFill>
                   <a:srgbClr val="4264D0"/>
                 </a:solidFill>
@@ -23188,7 +23296,7 @@
               </a:defRPr>
             </a:lvl2pPr>
             <a:lvl3pPr algn="ctr">
-              <a:defRPr sz="6150" b="1">
+              <a:defRPr sz="5250" b="1">
                 <a:solidFill>
                   <a:srgbClr val="4264D0"/>
                 </a:solidFill>
@@ -23198,7 +23306,7 @@
               </a:defRPr>
             </a:lvl3pPr>
             <a:lvl4pPr algn="ctr">
-              <a:defRPr sz="6150" b="1">
+              <a:defRPr sz="5250" b="1">
                 <a:solidFill>
                   <a:srgbClr val="4264D0"/>
                 </a:solidFill>
@@ -23208,7 +23316,7 @@
               </a:defRPr>
             </a:lvl4pPr>
             <a:lvl5pPr algn="ctr">
-              <a:defRPr sz="6150" b="1">
+              <a:defRPr sz="5250" b="1">
                 <a:solidFill>
                   <a:srgbClr val="4264D0"/>
                 </a:solidFill>
@@ -23218,7 +23326,7 @@
               </a:defRPr>
             </a:lvl5pPr>
             <a:lvl6pPr algn="ctr">
-              <a:defRPr sz="6150" b="1">
+              <a:defRPr sz="5250" b="1">
                 <a:solidFill>
                   <a:srgbClr val="4264D0"/>
                 </a:solidFill>
@@ -23228,7 +23336,7 @@
               </a:defRPr>
             </a:lvl6pPr>
             <a:lvl7pPr algn="ctr">
-              <a:defRPr sz="6150" b="1">
+              <a:defRPr sz="5250" b="1">
                 <a:solidFill>
                   <a:srgbClr val="4264D0"/>
                 </a:solidFill>
@@ -23238,7 +23346,7 @@
               </a:defRPr>
             </a:lvl7pPr>
             <a:lvl8pPr algn="ctr">
-              <a:defRPr sz="6150" b="1">
+              <a:defRPr sz="5250" b="1">
                 <a:solidFill>
                   <a:srgbClr val="4264D0"/>
                 </a:solidFill>
@@ -23248,7 +23356,7 @@
               </a:defRPr>
             </a:lvl8pPr>
             <a:lvl9pPr algn="ctr">
-              <a:defRPr sz="6150" b="1">
+              <a:defRPr sz="5250" b="1">
                 <a:solidFill>
                   <a:srgbClr val="4264D0"/>
                 </a:solidFill>
@@ -23260,7 +23368,7 @@
           </a:lstStyle>
           <a:p xmlns:a="http://schemas.openxmlformats.org/drawingml/2006/main">
             <a:pPr algn="ctr">
-              <a:defRPr sz="6150" b="1">
+              <a:defRPr sz="5250" b="1">
                 <a:solidFill>
                   <a:srgbClr val="4264D0"/>
                 </a:solidFill>
@@ -23270,7 +23378,7 @@
               </a:defRPr>
             </a:pPr>
             <a:r>
-              <a:rPr sz="6150" b="1">
+              <a:rPr sz="5250" b="1">
                 <a:solidFill>
                   <a:srgbClr val="4264D0"/>
                 </a:solidFill>
@@ -23285,10 +23393,10 @@
       </p:sp>
       <p:sp>
         <p:nvSpPr>
-          <p:cNvPr id="46" name="f182">
+          <p:cNvPr id="22" name="f160">
             <a:extLst xmlns:a="http://schemas.openxmlformats.org/drawingml/2006/main">
               <a:ext uri="{FF2B5EF4-FFF2-40B4-BE49-F238E27FC236}">
-                <a16:creationId xmlns:a16="http://schemas.microsoft.com/office/drawing/2014/main" id="{5D4994E4-7344-40FC-8544-AC49A7FCA771}"/>
+                <a16:creationId xmlns:a16="http://schemas.microsoft.com/office/drawing/2014/main" id="{6A898FD7-7C3C-4375-938C-0E55D9A57500}"/>
               </a:ext>
             </a:extLst>
           </p:cNvPr>
@@ -23299,8 +23407,8 @@
         </p:nvSpPr>
         <p:spPr>
           <a:xfrm xmlns:a="http://schemas.openxmlformats.org/drawingml/2006/main">
-            <a:off x="9048750" y="7467600"/>
-            <a:ext cx="4933950" cy="752475"/>
+            <a:off x="10572750" y="7486650"/>
+            <a:ext cx="3600450" cy="742950"/>
           </a:xfrm>
           <a:prstGeom xmlns:a="http://schemas.openxmlformats.org/drawingml/2006/main" prst="rect">
             <a:avLst/>
@@ -23317,7 +23425,7 @@
           </a:bodyPr>
           <a:lstStyle xmlns:a="http://schemas.openxmlformats.org/drawingml/2006/main">
             <a:defPPr algn="ctr">
-              <a:defRPr sz="2250" b="1">
+              <a:defRPr sz="2100" b="1">
                 <a:solidFill>
                   <a:srgbClr val="182536"/>
                 </a:solidFill>
@@ -23327,7 +23435,7 @@
               </a:defRPr>
             </a:defPPr>
             <a:lvl1pPr algn="ctr">
-              <a:defRPr sz="2250" b="1">
+              <a:defRPr sz="2100" b="1">
                 <a:solidFill>
                   <a:srgbClr val="182536"/>
                 </a:solidFill>
@@ -23337,7 +23445,7 @@
               </a:defRPr>
             </a:lvl1pPr>
             <a:lvl2pPr algn="ctr">
-              <a:defRPr sz="2250" b="1">
+              <a:defRPr sz="2100" b="1">
                 <a:solidFill>
                   <a:srgbClr val="182536"/>
                 </a:solidFill>
@@ -23347,7 +23455,7 @@
               </a:defRPr>
             </a:lvl2pPr>
             <a:lvl3pPr algn="ctr">
-              <a:defRPr sz="2250" b="1">
+              <a:defRPr sz="2100" b="1">
                 <a:solidFill>
                   <a:srgbClr val="182536"/>
                 </a:solidFill>
@@ -23357,7 +23465,7 @@
               </a:defRPr>
             </a:lvl3pPr>
             <a:lvl4pPr algn="ctr">
-              <a:defRPr sz="2250" b="1">
+              <a:defRPr sz="2100" b="1">
                 <a:solidFill>
                   <a:srgbClr val="182536"/>
                 </a:solidFill>
@@ -23367,7 +23475,7 @@
               </a:defRPr>
             </a:lvl4pPr>
             <a:lvl5pPr algn="ctr">
-              <a:defRPr sz="2250" b="1">
+              <a:defRPr sz="2100" b="1">
                 <a:solidFill>
                   <a:srgbClr val="182536"/>
                 </a:solidFill>
@@ -23377,7 +23485,7 @@
               </a:defRPr>
             </a:lvl5pPr>
             <a:lvl6pPr algn="ctr">
-              <a:defRPr sz="2250" b="1">
+              <a:defRPr sz="2100" b="1">
                 <a:solidFill>
                   <a:srgbClr val="182536"/>
                 </a:solidFill>
@@ -23387,7 +23495,7 @@
               </a:defRPr>
             </a:lvl6pPr>
             <a:lvl7pPr algn="ctr">
-              <a:defRPr sz="2250" b="1">
+              <a:defRPr sz="2100" b="1">
                 <a:solidFill>
                   <a:srgbClr val="182536"/>
                 </a:solidFill>
@@ -23397,7 +23505,7 @@
               </a:defRPr>
             </a:lvl7pPr>
             <a:lvl8pPr algn="ctr">
-              <a:defRPr sz="2250" b="1">
+              <a:defRPr sz="2100" b="1">
                 <a:solidFill>
                   <a:srgbClr val="182536"/>
                 </a:solidFill>
@@ -23407,7 +23515,7 @@
               </a:defRPr>
             </a:lvl8pPr>
             <a:lvl9pPr algn="ctr">
-              <a:defRPr sz="2250" b="1">
+              <a:defRPr sz="2100" b="1">
                 <a:solidFill>
                   <a:srgbClr val="182536"/>
                 </a:solidFill>
@@ -23419,7 +23527,7 @@
           </a:lstStyle>
           <a:p xmlns:a="http://schemas.openxmlformats.org/drawingml/2006/main">
             <a:pPr algn="ctr">
-              <a:defRPr sz="2250" b="1">
+              <a:defRPr sz="2100" b="1">
                 <a:solidFill>
                   <a:srgbClr val="182536"/>
                 </a:solidFill>
@@ -23429,7 +23537,7 @@
               </a:defRPr>
             </a:pPr>
             <a:r>
-              <a:rPr sz="2250" b="1">
+              <a:rPr sz="2100" b="1">
                 <a:solidFill>
                   <a:srgbClr val="182536"/>
                 </a:solidFill>
@@ -23442,7 +23550,7 @@
           </a:p>
           <a:p xmlns:a="http://schemas.openxmlformats.org/drawingml/2006/main">
             <a:pPr algn="ctr">
-              <a:defRPr sz="2250" b="1">
+              <a:defRPr sz="2100" b="1">
                 <a:solidFill>
                   <a:srgbClr val="182536"/>
                 </a:solidFill>
@@ -23452,7 +23560,7 @@
               </a:defRPr>
             </a:pPr>
             <a:r>
-              <a:rPr sz="2250" b="1">
+              <a:rPr sz="2100" b="1">
                 <a:solidFill>
                   <a:srgbClr val="182536"/>
                 </a:solidFill>
@@ -23461,165 +23569,6 @@
                 <a:cs typeface="Nimbus Sans"/>
               </a:rPr>
               <a:t>con verdetto atteso</a:t>
-            </a:r>
-          </a:p>
-        </p:txBody>
-      </p:sp>
-      <p:sp>
-        <p:nvSpPr>
-          <p:cNvPr id="47" name="f183">
-            <a:extLst xmlns:a="http://schemas.openxmlformats.org/drawingml/2006/main">
-              <a:ext uri="{FF2B5EF4-FFF2-40B4-BE49-F238E27FC236}">
-                <a16:creationId xmlns:a16="http://schemas.microsoft.com/office/drawing/2014/main" id="{21245A7C-C3D6-412A-A615-78F4254C7FDB}"/>
-              </a:ext>
-            </a:extLst>
-          </p:cNvPr>
-          <p:cNvSpPr>
-            <a:spLocks xmlns:a="http://schemas.openxmlformats.org/drawingml/2006/main" noGrp="1"/>
-          </p:cNvSpPr>
-          <p:nvPr/>
-        </p:nvSpPr>
-        <p:spPr>
-          <a:xfrm xmlns:a="http://schemas.openxmlformats.org/drawingml/2006/main">
-            <a:off x="1066800" y="8258175"/>
-            <a:ext cx="13106400" cy="285750"/>
-          </a:xfrm>
-          <a:prstGeom xmlns:a="http://schemas.openxmlformats.org/drawingml/2006/main" prst="rect">
-            <a:avLst/>
-          </a:prstGeom>
-          <a:noFill xmlns:a="http://schemas.openxmlformats.org/drawingml/2006/main"/>
-          <a:ln xmlns:a="http://schemas.openxmlformats.org/drawingml/2006/main" w="0">
-            <a:noFill/>
-            <a:prstDash val="solid"/>
-          </a:ln>
-        </p:spPr>
-        <p:txBody>
-          <a:bodyPr xmlns:a="http://schemas.openxmlformats.org/drawingml/2006/main" wrap="none" lIns="0" tIns="0" rIns="0" bIns="0" anchor="t">
-            <a:noAutofit/>
-          </a:bodyPr>
-          <a:lstStyle xmlns:a="http://schemas.openxmlformats.org/drawingml/2006/main">
-            <a:defPPr algn="l">
-              <a:defRPr sz="1575" b="0">
-                <a:solidFill>
-                  <a:srgbClr val="52627B"/>
-                </a:solidFill>
-                <a:latin typeface="Nimbus Sans"/>
-                <a:ea typeface="Nimbus Sans"/>
-                <a:cs typeface="Nimbus Sans"/>
-              </a:defRPr>
-            </a:defPPr>
-            <a:lvl1pPr algn="l">
-              <a:defRPr sz="1575" b="0">
-                <a:solidFill>
-                  <a:srgbClr val="52627B"/>
-                </a:solidFill>
-                <a:latin typeface="Nimbus Sans"/>
-                <a:ea typeface="Nimbus Sans"/>
-                <a:cs typeface="Nimbus Sans"/>
-              </a:defRPr>
-            </a:lvl1pPr>
-            <a:lvl2pPr algn="l">
-              <a:defRPr sz="1575" b="0">
-                <a:solidFill>
-                  <a:srgbClr val="52627B"/>
-                </a:solidFill>
-                <a:latin typeface="Nimbus Sans"/>
-                <a:ea typeface="Nimbus Sans"/>
-                <a:cs typeface="Nimbus Sans"/>
-              </a:defRPr>
-            </a:lvl2pPr>
-            <a:lvl3pPr algn="l">
-              <a:defRPr sz="1575" b="0">
-                <a:solidFill>
-                  <a:srgbClr val="52627B"/>
-                </a:solidFill>
-                <a:latin typeface="Nimbus Sans"/>
-                <a:ea typeface="Nimbus Sans"/>
-                <a:cs typeface="Nimbus Sans"/>
-              </a:defRPr>
-            </a:lvl3pPr>
-            <a:lvl4pPr algn="l">
-              <a:defRPr sz="1575" b="0">
-                <a:solidFill>
-                  <a:srgbClr val="52627B"/>
-                </a:solidFill>
-                <a:latin typeface="Nimbus Sans"/>
-                <a:ea typeface="Nimbus Sans"/>
-                <a:cs typeface="Nimbus Sans"/>
-              </a:defRPr>
-            </a:lvl4pPr>
-            <a:lvl5pPr algn="l">
-              <a:defRPr sz="1575" b="0">
-                <a:solidFill>
-                  <a:srgbClr val="52627B"/>
-                </a:solidFill>
-                <a:latin typeface="Nimbus Sans"/>
-                <a:ea typeface="Nimbus Sans"/>
-                <a:cs typeface="Nimbus Sans"/>
-              </a:defRPr>
-            </a:lvl5pPr>
-            <a:lvl6pPr algn="l">
-              <a:defRPr sz="1575" b="0">
-                <a:solidFill>
-                  <a:srgbClr val="52627B"/>
-                </a:solidFill>
-                <a:latin typeface="Nimbus Sans"/>
-                <a:ea typeface="Nimbus Sans"/>
-                <a:cs typeface="Nimbus Sans"/>
-              </a:defRPr>
-            </a:lvl6pPr>
-            <a:lvl7pPr algn="l">
-              <a:defRPr sz="1575" b="0">
-                <a:solidFill>
-                  <a:srgbClr val="52627B"/>
-                </a:solidFill>
-                <a:latin typeface="Nimbus Sans"/>
-                <a:ea typeface="Nimbus Sans"/>
-                <a:cs typeface="Nimbus Sans"/>
-              </a:defRPr>
-            </a:lvl7pPr>
-            <a:lvl8pPr algn="l">
-              <a:defRPr sz="1575" b="0">
-                <a:solidFill>
-                  <a:srgbClr val="52627B"/>
-                </a:solidFill>
-                <a:latin typeface="Nimbus Sans"/>
-                <a:ea typeface="Nimbus Sans"/>
-                <a:cs typeface="Nimbus Sans"/>
-              </a:defRPr>
-            </a:lvl8pPr>
-            <a:lvl9pPr algn="l">
-              <a:defRPr sz="1575" b="0">
-                <a:solidFill>
-                  <a:srgbClr val="52627B"/>
-                </a:solidFill>
-                <a:latin typeface="Nimbus Sans"/>
-                <a:ea typeface="Nimbus Sans"/>
-                <a:cs typeface="Nimbus Sans"/>
-              </a:defRPr>
-            </a:lvl9pPr>
-          </a:lstStyle>
-          <a:p xmlns:a="http://schemas.openxmlformats.org/drawingml/2006/main">
-            <a:pPr algn="l">
-              <a:defRPr sz="1575" b="0">
-                <a:solidFill>
-                  <a:srgbClr val="52627B"/>
-                </a:solidFill>
-                <a:latin typeface="Nimbus Sans"/>
-                <a:ea typeface="Nimbus Sans"/>
-                <a:cs typeface="Nimbus Sans"/>
-              </a:defRPr>
-            </a:pPr>
-            <a:r>
-              <a:rPr sz="1575" b="0">
-                <a:solidFill>
-                  <a:srgbClr val="52627B"/>
-                </a:solidFill>
-                <a:latin typeface="Nimbus Sans"/>
-                <a:ea typeface="Nimbus Sans"/>
-                <a:cs typeface="Nimbus Sans"/>
-              </a:rPr>
-              <a:t>15 previsti. Due casi AMF Case B temporali/combinati non completati per limiti del mutatore.</a:t>
             </a:r>
           </a:p>
         </p:txBody>
@@ -23627,7 +23576,7 @@
     </p:spTree>
     <p:extLst>
       <p:ext uri="{BB962C8B-B14F-4D97-AF65-F5344CB8AC3E}">
-        <p14:creationId xmlns:p14="http://schemas.microsoft.com/office/powerpoint/2010/main" val="630522681"/>
+        <p14:creationId xmlns:p14="http://schemas.microsoft.com/office/powerpoint/2010/main" val="677348909"/>
       </p:ext>
     </p:extLst>
   </p:cSld>

--- a/5g-thesis-presentation-5min/tesi-5min.pptx
+++ b/5g-thesis-presentation-5min/tesi-5min.pptx
@@ -2,19 +2,19 @@
 <file path=ppt/presentation.xml><?xml version="1.0" encoding="utf-8"?>
 <p:presentation xmlns:p="http://schemas.openxmlformats.org/presentationml/2006/main">
   <p:sldMasterIdLst>
-    <p:sldMasterId xmlns:r="http://schemas.openxmlformats.org/officeDocument/2006/relationships" id="2147483648" r:id="R80cf21671cd44624"/>
+    <p:sldMasterId xmlns:r="http://schemas.openxmlformats.org/officeDocument/2006/relationships" id="2147483648" r:id="R4b1624102d3f4f69"/>
   </p:sldMasterIdLst>
   <p:notesMasterIdLst>
-    <p:notesMasterId xmlns:r="http://schemas.openxmlformats.org/officeDocument/2006/relationships" r:id="R659b8a306d184e8c"/>
+    <p:notesMasterId xmlns:r="http://schemas.openxmlformats.org/officeDocument/2006/relationships" r:id="Re375bd14d4e141dd"/>
   </p:notesMasterIdLst>
   <p:sldIdLst>
-    <p:sldId xmlns:r="http://schemas.openxmlformats.org/officeDocument/2006/relationships" id="256" r:id="R6210616209054da0"/>
-    <p:sldId xmlns:r="http://schemas.openxmlformats.org/officeDocument/2006/relationships" id="257" r:id="R96a57d218a5c4c94"/>
-    <p:sldId xmlns:r="http://schemas.openxmlformats.org/officeDocument/2006/relationships" id="258" r:id="R1a39a0a546154fde"/>
-    <p:sldId xmlns:r="http://schemas.openxmlformats.org/officeDocument/2006/relationships" id="259" r:id="R748575252bb941c8"/>
-    <p:sldId xmlns:r="http://schemas.openxmlformats.org/officeDocument/2006/relationships" id="260" r:id="Rc4e7bf3fe5474bab"/>
-    <p:sldId xmlns:r="http://schemas.openxmlformats.org/officeDocument/2006/relationships" id="261" r:id="R16e35591b91349d4"/>
-    <p:sldId xmlns:r="http://schemas.openxmlformats.org/officeDocument/2006/relationships" id="262" r:id="R92132328ce3c4e7c"/>
+    <p:sldId xmlns:r="http://schemas.openxmlformats.org/officeDocument/2006/relationships" id="256" r:id="Rca69cd72d7d845f1"/>
+    <p:sldId xmlns:r="http://schemas.openxmlformats.org/officeDocument/2006/relationships" id="257" r:id="R3a3f55411d3241d9"/>
+    <p:sldId xmlns:r="http://schemas.openxmlformats.org/officeDocument/2006/relationships" id="258" r:id="R44befe82503b42c9"/>
+    <p:sldId xmlns:r="http://schemas.openxmlformats.org/officeDocument/2006/relationships" id="259" r:id="Rd8dbe95467ba4ea0"/>
+    <p:sldId xmlns:r="http://schemas.openxmlformats.org/officeDocument/2006/relationships" id="260" r:id="R13311727e4804248"/>
+    <p:sldId xmlns:r="http://schemas.openxmlformats.org/officeDocument/2006/relationships" id="261" r:id="Rb3f5c74518d1421a"/>
+    <p:sldId xmlns:r="http://schemas.openxmlformats.org/officeDocument/2006/relationships" id="262" r:id="R346b7621800f4103"/>
   </p:sldIdLst>
   <p:sldSz cx="15240000" cy="8572500"/>
   <p:notesSz cx="6858000" cy="9144000"/>
@@ -1135,7 +1135,7 @@
           <p:cNvPr id="3" name="Title">
             <a:extLst xmlns:a="http://schemas.openxmlformats.org/drawingml/2006/main">
               <a:ext uri="{FF2B5EF4-FFF2-40B4-BE49-F238E27FC236}">
-                <a16:creationId xmlns:a16="http://schemas.microsoft.com/office/drawing/2014/main" id="{1AE19461-A117-4DC6-A5FF-DD5A3ABFFA65}"/>
+                <a16:creationId xmlns:a16="http://schemas.microsoft.com/office/drawing/2014/main" id="{F5827589-7B4C-4FB4-A2D4-A236BFE547F6}"/>
               </a:ext>
             </a:extLst>
           </p:cNvPr>
@@ -1364,7 +1364,7 @@
           <p:cNvPr id="2" name="Subtitle">
             <a:extLst xmlns:a="http://schemas.openxmlformats.org/drawingml/2006/main">
               <a:ext uri="{FF2B5EF4-FFF2-40B4-BE49-F238E27FC236}">
-                <a16:creationId xmlns:a16="http://schemas.microsoft.com/office/drawing/2014/main" id="{80727218-80BC-4208-A877-9FBB25CB9987}"/>
+                <a16:creationId xmlns:a16="http://schemas.microsoft.com/office/drawing/2014/main" id="{E5C705AD-788F-4D9A-8557-4D340208A1B6}"/>
               </a:ext>
             </a:extLst>
           </p:cNvPr>
@@ -1610,7 +1610,7 @@
           <p:cNvPr id="2" name="Section title">
             <a:extLst xmlns:a="http://schemas.openxmlformats.org/drawingml/2006/main">
               <a:ext uri="{FF2B5EF4-FFF2-40B4-BE49-F238E27FC236}">
-                <a16:creationId xmlns:a16="http://schemas.microsoft.com/office/drawing/2014/main" id="{4ABE00F9-847A-43C8-90ED-D50306A6D0A1}"/>
+                <a16:creationId xmlns:a16="http://schemas.microsoft.com/office/drawing/2014/main" id="{C816CDBB-84C8-40B6-A188-617B72920B60}"/>
               </a:ext>
             </a:extLst>
           </p:cNvPr>
@@ -1856,7 +1856,7 @@
           <p:cNvPr id="3" name="Title">
             <a:extLst xmlns:a="http://schemas.openxmlformats.org/drawingml/2006/main">
               <a:ext uri="{FF2B5EF4-FFF2-40B4-BE49-F238E27FC236}">
-                <a16:creationId xmlns:a16="http://schemas.microsoft.com/office/drawing/2014/main" id="{BB42B491-F6E0-4138-980E-DECE15C83348}"/>
+                <a16:creationId xmlns:a16="http://schemas.microsoft.com/office/drawing/2014/main" id="{11BC299F-0A20-4F9F-A991-2BA95F17C066}"/>
               </a:ext>
             </a:extLst>
           </p:cNvPr>
@@ -2085,7 +2085,7 @@
           <p:cNvPr id="2" name="Body">
             <a:extLst xmlns:a="http://schemas.openxmlformats.org/drawingml/2006/main">
               <a:ext uri="{FF2B5EF4-FFF2-40B4-BE49-F238E27FC236}">
-                <a16:creationId xmlns:a16="http://schemas.microsoft.com/office/drawing/2014/main" id="{2F8052CF-8FEA-4741-AA0E-F97AA6E7ACDF}"/>
+                <a16:creationId xmlns:a16="http://schemas.microsoft.com/office/drawing/2014/main" id="{8728D5CD-982C-417B-8460-E27F83ECE09D}"/>
               </a:ext>
             </a:extLst>
           </p:cNvPr>
@@ -2331,7 +2331,7 @@
           <p:cNvPr id="4" name="Title">
             <a:extLst xmlns:a="http://schemas.openxmlformats.org/drawingml/2006/main">
               <a:ext uri="{FF2B5EF4-FFF2-40B4-BE49-F238E27FC236}">
-                <a16:creationId xmlns:a16="http://schemas.microsoft.com/office/drawing/2014/main" id="{374318F1-19BE-412A-A3DD-ED1B35BFCA90}"/>
+                <a16:creationId xmlns:a16="http://schemas.microsoft.com/office/drawing/2014/main" id="{7C680802-8BE9-46C4-A461-925CA779F16F}"/>
               </a:ext>
             </a:extLst>
           </p:cNvPr>
@@ -2560,7 +2560,7 @@
           <p:cNvPr id="2" name="Left column">
             <a:extLst xmlns:a="http://schemas.openxmlformats.org/drawingml/2006/main">
               <a:ext uri="{FF2B5EF4-FFF2-40B4-BE49-F238E27FC236}">
-                <a16:creationId xmlns:a16="http://schemas.microsoft.com/office/drawing/2014/main" id="{16EE950B-A0C3-4F18-90F2-4628539F57F2}"/>
+                <a16:creationId xmlns:a16="http://schemas.microsoft.com/office/drawing/2014/main" id="{E54D8792-7668-4520-886A-9EF001A87A6F}"/>
               </a:ext>
             </a:extLst>
           </p:cNvPr>
@@ -2789,7 +2789,7 @@
           <p:cNvPr id="3" name="Right column">
             <a:extLst xmlns:a="http://schemas.openxmlformats.org/drawingml/2006/main">
               <a:ext uri="{FF2B5EF4-FFF2-40B4-BE49-F238E27FC236}">
-                <a16:creationId xmlns:a16="http://schemas.microsoft.com/office/drawing/2014/main" id="{3AAA54DA-5A4E-436E-9121-B6E815262952}"/>
+                <a16:creationId xmlns:a16="http://schemas.microsoft.com/office/drawing/2014/main" id="{40CAFDB0-4BA5-450F-9FE5-A22F0F26B8C2}"/>
               </a:ext>
             </a:extLst>
           </p:cNvPr>
@@ -3035,7 +3035,7 @@
           <p:cNvPr id="3" name="Title">
             <a:extLst xmlns:a="http://schemas.openxmlformats.org/drawingml/2006/main">
               <a:ext uri="{FF2B5EF4-FFF2-40B4-BE49-F238E27FC236}">
-                <a16:creationId xmlns:a16="http://schemas.microsoft.com/office/drawing/2014/main" id="{4AF2CC00-ECE1-4C3B-86E2-EB4181064DE2}"/>
+                <a16:creationId xmlns:a16="http://schemas.microsoft.com/office/drawing/2014/main" id="{43EEB030-A2FA-4A99-BF40-FAFD171CF02E}"/>
               </a:ext>
             </a:extLst>
           </p:cNvPr>
@@ -3264,7 +3264,7 @@
           <p:cNvPr id="2" name="Left column">
             <a:extLst xmlns:a="http://schemas.openxmlformats.org/drawingml/2006/main">
               <a:ext uri="{FF2B5EF4-FFF2-40B4-BE49-F238E27FC236}">
-                <a16:creationId xmlns:a16="http://schemas.microsoft.com/office/drawing/2014/main" id="{CE23BF05-6EB1-4717-840F-C7CEE80069C9}"/>
+                <a16:creationId xmlns:a16="http://schemas.microsoft.com/office/drawing/2014/main" id="{DEA96260-4413-4BF6-B14F-70FA4F6ED77F}"/>
               </a:ext>
             </a:extLst>
           </p:cNvPr>
@@ -3531,12 +3531,12 @@
   </p:cSld>
   <p:clrMap bg1="lt1" tx1="dk1" bg2="lt2" tx2="dk2" accent1="accent1" accent2="accent2" accent3="accent3" accent4="accent4" accent5="accent5" accent6="accent6" hlink="hlink" folHlink="folHlink"/>
   <p:sldLayoutIdLst>
-    <p:sldLayoutId xmlns:r="http://schemas.openxmlformats.org/officeDocument/2006/relationships" id="2147483649" r:id="Rf2be5cc1007f48e2"/>
-    <p:sldLayoutId xmlns:r="http://schemas.openxmlformats.org/officeDocument/2006/relationships" id="2147483650" r:id="R584098cfd90d4ed9"/>
-    <p:sldLayoutId xmlns:r="http://schemas.openxmlformats.org/officeDocument/2006/relationships" id="2147483651" r:id="Rd3778842d8f3490a"/>
-    <p:sldLayoutId xmlns:r="http://schemas.openxmlformats.org/officeDocument/2006/relationships" id="2147483652" r:id="Rd39382694cdc459b"/>
-    <p:sldLayoutId xmlns:r="http://schemas.openxmlformats.org/officeDocument/2006/relationships" id="2147483653" r:id="R544dec52237d4e48"/>
-    <p:sldLayoutId xmlns:r="http://schemas.openxmlformats.org/officeDocument/2006/relationships" id="2147483654" r:id="R78c41e214e32470d"/>
+    <p:sldLayoutId xmlns:r="http://schemas.openxmlformats.org/officeDocument/2006/relationships" id="2147483649" r:id="R479ce6d5d9e842cc"/>
+    <p:sldLayoutId xmlns:r="http://schemas.openxmlformats.org/officeDocument/2006/relationships" id="2147483650" r:id="R8d131a1733944ba2"/>
+    <p:sldLayoutId xmlns:r="http://schemas.openxmlformats.org/officeDocument/2006/relationships" id="2147483651" r:id="R720bfcab579440f5"/>
+    <p:sldLayoutId xmlns:r="http://schemas.openxmlformats.org/officeDocument/2006/relationships" id="2147483652" r:id="Rd8d58f2dc096421a"/>
+    <p:sldLayoutId xmlns:r="http://schemas.openxmlformats.org/officeDocument/2006/relationships" id="2147483653" r:id="R7e9749649418410f"/>
+    <p:sldLayoutId xmlns:r="http://schemas.openxmlformats.org/officeDocument/2006/relationships" id="2147483654" r:id="Re51770322b06497d"/>
   </p:sldLayoutIdLst>
   <p:txStyles>
     <p:titleStyle>
@@ -4087,7 +4087,7 @@
           <p:cNvPr id="21" name="">
             <a:extLst xmlns:a="http://schemas.openxmlformats.org/drawingml/2006/main">
               <a:ext uri="{FF2B5EF4-FFF2-40B4-BE49-F238E27FC236}">
-                <a16:creationId xmlns:a16="http://schemas.microsoft.com/office/drawing/2014/main" id="{8DB178DF-EF34-4DED-8CC4-D6752DC93171}"/>
+                <a16:creationId xmlns:a16="http://schemas.microsoft.com/office/drawing/2014/main" id="{92B05E7B-198B-4F25-9724-AF4D6A030A57}"/>
               </a:ext>
             </a:extLst>
           </p:cNvPr>
@@ -4097,7 +4097,7 @@
           <p:nvPr/>
         </p:nvPicPr>
         <p:blipFill>
-          <a:blip xmlns:r="http://schemas.openxmlformats.org/officeDocument/2006/relationships" xmlns:a="http://schemas.openxmlformats.org/drawingml/2006/main" r:embed="Raab560721f8f464d"/>
+          <a:blip xmlns:r="http://schemas.openxmlformats.org/officeDocument/2006/relationships" xmlns:a="http://schemas.openxmlformats.org/drawingml/2006/main" r:embed="R1f58e9e7a17a4ae2"/>
           <a:stretch xmlns:a="http://schemas.openxmlformats.org/drawingml/2006/main"/>
         </p:blipFill>
         <p:spPr>
@@ -4115,7 +4115,7 @@
           <p:cNvPr id="2" name="f2">
             <a:extLst xmlns:a="http://schemas.openxmlformats.org/drawingml/2006/main">
               <a:ext uri="{FF2B5EF4-FFF2-40B4-BE49-F238E27FC236}">
-                <a16:creationId xmlns:a16="http://schemas.microsoft.com/office/drawing/2014/main" id="{014BBE0D-3AE1-4088-B58E-4503D8AC02F0}"/>
+                <a16:creationId xmlns:a16="http://schemas.microsoft.com/office/drawing/2014/main" id="{7D0DBAE3-210B-419E-89D6-005834141926}"/>
               </a:ext>
             </a:extLst>
           </p:cNvPr>
@@ -4274,7 +4274,7 @@
           <p:cNvPr id="3" name="f3">
             <a:extLst xmlns:a="http://schemas.openxmlformats.org/drawingml/2006/main">
               <a:ext uri="{FF2B5EF4-FFF2-40B4-BE49-F238E27FC236}">
-                <a16:creationId xmlns:a16="http://schemas.microsoft.com/office/drawing/2014/main" id="{FC067032-F351-4DBA-AD16-89A3D7AD0732}"/>
+                <a16:creationId xmlns:a16="http://schemas.microsoft.com/office/drawing/2014/main" id="{DAE93BA3-E935-476F-BE4D-D1604BBC83AA}"/>
               </a:ext>
             </a:extLst>
           </p:cNvPr>
@@ -4433,7 +4433,7 @@
           <p:cNvPr id="4" name="f4">
             <a:extLst xmlns:a="http://schemas.openxmlformats.org/drawingml/2006/main">
               <a:ext uri="{FF2B5EF4-FFF2-40B4-BE49-F238E27FC236}">
-                <a16:creationId xmlns:a16="http://schemas.microsoft.com/office/drawing/2014/main" id="{85C0B302-0CA2-40B8-B89D-53B4A91D7EDE}"/>
+                <a16:creationId xmlns:a16="http://schemas.microsoft.com/office/drawing/2014/main" id="{754A3CB6-1D18-4D59-B99F-34F67A916886}"/>
               </a:ext>
             </a:extLst>
           </p:cNvPr>
@@ -4592,7 +4592,7 @@
           <p:cNvPr id="5" name="f5">
             <a:extLst xmlns:a="http://schemas.openxmlformats.org/drawingml/2006/main">
               <a:ext uri="{FF2B5EF4-FFF2-40B4-BE49-F238E27FC236}">
-                <a16:creationId xmlns:a16="http://schemas.microsoft.com/office/drawing/2014/main" id="{FBF859AD-92E7-4116-A3B9-146790600EF8}"/>
+                <a16:creationId xmlns:a16="http://schemas.microsoft.com/office/drawing/2014/main" id="{B2153987-8598-4495-B072-382814ED1C02}"/>
               </a:ext>
             </a:extLst>
           </p:cNvPr>
@@ -4751,7 +4751,7 @@
           <p:cNvPr id="6" name="f6">
             <a:extLst xmlns:a="http://schemas.openxmlformats.org/drawingml/2006/main">
               <a:ext uri="{FF2B5EF4-FFF2-40B4-BE49-F238E27FC236}">
-                <a16:creationId xmlns:a16="http://schemas.microsoft.com/office/drawing/2014/main" id="{4C5BEF44-D0F6-497E-A02E-1786DDF728C3}"/>
+                <a16:creationId xmlns:a16="http://schemas.microsoft.com/office/drawing/2014/main" id="{874012CD-4017-4723-A6A6-7440716ED33F}"/>
               </a:ext>
             </a:extLst>
           </p:cNvPr>
@@ -4910,7 +4910,7 @@
           <p:cNvPr id="7" name="f7">
             <a:extLst xmlns:a="http://schemas.openxmlformats.org/drawingml/2006/main">
               <a:ext uri="{FF2B5EF4-FFF2-40B4-BE49-F238E27FC236}">
-                <a16:creationId xmlns:a16="http://schemas.microsoft.com/office/drawing/2014/main" id="{DD6DDD5D-2F1F-4781-836C-1B9691C9D084}"/>
+                <a16:creationId xmlns:a16="http://schemas.microsoft.com/office/drawing/2014/main" id="{095F0584-316A-4EB3-808D-99CFDEE3EE88}"/>
               </a:ext>
             </a:extLst>
           </p:cNvPr>
@@ -5069,7 +5069,7 @@
           <p:cNvPr id="8" name="f8">
             <a:extLst xmlns:a="http://schemas.openxmlformats.org/drawingml/2006/main">
               <a:ext uri="{FF2B5EF4-FFF2-40B4-BE49-F238E27FC236}">
-                <a16:creationId xmlns:a16="http://schemas.microsoft.com/office/drawing/2014/main" id="{C71BD6C6-992C-402F-BF4E-46547D1A8AC1}"/>
+                <a16:creationId xmlns:a16="http://schemas.microsoft.com/office/drawing/2014/main" id="{C84D3C85-7255-47B3-85CE-499CC4000901}"/>
               </a:ext>
             </a:extLst>
           </p:cNvPr>
@@ -5228,7 +5228,7 @@
           <p:cNvPr id="9" name="f9">
             <a:extLst xmlns:a="http://schemas.openxmlformats.org/drawingml/2006/main">
               <a:ext uri="{FF2B5EF4-FFF2-40B4-BE49-F238E27FC236}">
-                <a16:creationId xmlns:a16="http://schemas.microsoft.com/office/drawing/2014/main" id="{BE0A8F2B-A43C-4FFF-8BBE-61CBCFACC2D1}"/>
+                <a16:creationId xmlns:a16="http://schemas.microsoft.com/office/drawing/2014/main" id="{F5970A3D-1732-487C-B1CD-2664ACE1D076}"/>
               </a:ext>
             </a:extLst>
           </p:cNvPr>
@@ -5387,7 +5387,7 @@
           <p:cNvPr id="10" name="f10">
             <a:extLst xmlns:a="http://schemas.openxmlformats.org/drawingml/2006/main">
               <a:ext uri="{FF2B5EF4-FFF2-40B4-BE49-F238E27FC236}">
-                <a16:creationId xmlns:a16="http://schemas.microsoft.com/office/drawing/2014/main" id="{D5EFCF0B-F6D8-4880-ADBD-A3A2FE21DA99}"/>
+                <a16:creationId xmlns:a16="http://schemas.microsoft.com/office/drawing/2014/main" id="{76CA94A5-C86B-40AC-BE2B-0E09738BF174}"/>
               </a:ext>
             </a:extLst>
           </p:cNvPr>
@@ -5546,7 +5546,7 @@
           <p:cNvPr id="11" name="f11">
             <a:extLst xmlns:a="http://schemas.openxmlformats.org/drawingml/2006/main">
               <a:ext uri="{FF2B5EF4-FFF2-40B4-BE49-F238E27FC236}">
-                <a16:creationId xmlns:a16="http://schemas.microsoft.com/office/drawing/2014/main" id="{3A511D85-3DDD-4445-BD9B-722E36F6D990}"/>
+                <a16:creationId xmlns:a16="http://schemas.microsoft.com/office/drawing/2014/main" id="{FF3E690D-0B42-4C04-8A88-BAB9E798CBE4}"/>
               </a:ext>
             </a:extLst>
           </p:cNvPr>
@@ -5705,7 +5705,7 @@
           <p:cNvPr id="12" name="f12">
             <a:extLst xmlns:a="http://schemas.openxmlformats.org/drawingml/2006/main">
               <a:ext uri="{FF2B5EF4-FFF2-40B4-BE49-F238E27FC236}">
-                <a16:creationId xmlns:a16="http://schemas.microsoft.com/office/drawing/2014/main" id="{A5109D57-0DAA-4B0C-A9FD-6C4360026857}"/>
+                <a16:creationId xmlns:a16="http://schemas.microsoft.com/office/drawing/2014/main" id="{E9D6E330-6B5F-4F1E-9498-37EB0A3E2C00}"/>
               </a:ext>
             </a:extLst>
           </p:cNvPr>
@@ -5864,7 +5864,7 @@
           <p:cNvPr id="13" name="f13">
             <a:extLst xmlns:a="http://schemas.openxmlformats.org/drawingml/2006/main">
               <a:ext uri="{FF2B5EF4-FFF2-40B4-BE49-F238E27FC236}">
-                <a16:creationId xmlns:a16="http://schemas.microsoft.com/office/drawing/2014/main" id="{48C9263D-A70D-4BCA-8FBD-FC52C6726B9E}"/>
+                <a16:creationId xmlns:a16="http://schemas.microsoft.com/office/drawing/2014/main" id="{B3A3A5C5-6454-4682-9968-D1173815FA65}"/>
               </a:ext>
             </a:extLst>
           </p:cNvPr>
@@ -6023,7 +6023,7 @@
           <p:cNvPr id="14" name="f14">
             <a:extLst xmlns:a="http://schemas.openxmlformats.org/drawingml/2006/main">
               <a:ext uri="{FF2B5EF4-FFF2-40B4-BE49-F238E27FC236}">
-                <a16:creationId xmlns:a16="http://schemas.microsoft.com/office/drawing/2014/main" id="{E37346FE-9A84-4B35-915D-D8CA1A6DF5B7}"/>
+                <a16:creationId xmlns:a16="http://schemas.microsoft.com/office/drawing/2014/main" id="{3C1C9B65-0E7B-46FA-AF99-752BDD2DA108}"/>
               </a:ext>
             </a:extLst>
           </p:cNvPr>
@@ -6182,7 +6182,7 @@
           <p:cNvPr id="15" name="f15">
             <a:extLst xmlns:a="http://schemas.openxmlformats.org/drawingml/2006/main">
               <a:ext uri="{FF2B5EF4-FFF2-40B4-BE49-F238E27FC236}">
-                <a16:creationId xmlns:a16="http://schemas.microsoft.com/office/drawing/2014/main" id="{8C82DCE3-3C9A-43D9-AFA4-AD26431E2AF6}"/>
+                <a16:creationId xmlns:a16="http://schemas.microsoft.com/office/drawing/2014/main" id="{62B3FEF1-E15C-4B72-B905-8C395A34B634}"/>
               </a:ext>
             </a:extLst>
           </p:cNvPr>
@@ -6341,7 +6341,7 @@
           <p:cNvPr id="16" name="f16">
             <a:extLst xmlns:a="http://schemas.openxmlformats.org/drawingml/2006/main">
               <a:ext uri="{FF2B5EF4-FFF2-40B4-BE49-F238E27FC236}">
-                <a16:creationId xmlns:a16="http://schemas.microsoft.com/office/drawing/2014/main" id="{F89A8F82-85D4-4D8E-8054-91B3FCE61775}"/>
+                <a16:creationId xmlns:a16="http://schemas.microsoft.com/office/drawing/2014/main" id="{7A8A114B-E746-489C-B20D-B42978AFF70B}"/>
               </a:ext>
             </a:extLst>
           </p:cNvPr>
@@ -6500,7 +6500,7 @@
           <p:cNvPr id="17" name="f17">
             <a:extLst xmlns:a="http://schemas.openxmlformats.org/drawingml/2006/main">
               <a:ext uri="{FF2B5EF4-FFF2-40B4-BE49-F238E27FC236}">
-                <a16:creationId xmlns:a16="http://schemas.microsoft.com/office/drawing/2014/main" id="{AB6AF76D-EBF8-4A19-A2EC-AEAFA09FB851}"/>
+                <a16:creationId xmlns:a16="http://schemas.microsoft.com/office/drawing/2014/main" id="{6A69C208-B7E1-45C4-80AF-128990E5261A}"/>
               </a:ext>
             </a:extLst>
           </p:cNvPr>
@@ -6659,7 +6659,7 @@
           <p:cNvPr id="18" name="f18">
             <a:extLst xmlns:a="http://schemas.openxmlformats.org/drawingml/2006/main">
               <a:ext uri="{FF2B5EF4-FFF2-40B4-BE49-F238E27FC236}">
-                <a16:creationId xmlns:a16="http://schemas.microsoft.com/office/drawing/2014/main" id="{508C3A2C-EBED-417D-98DA-77D985B701A2}"/>
+                <a16:creationId xmlns:a16="http://schemas.microsoft.com/office/drawing/2014/main" id="{8ED9E915-EDFB-4F78-9341-F92553B94524}"/>
               </a:ext>
             </a:extLst>
           </p:cNvPr>
@@ -6818,7 +6818,7 @@
           <p:cNvPr id="19" name="f19">
             <a:extLst xmlns:a="http://schemas.openxmlformats.org/drawingml/2006/main">
               <a:ext uri="{FF2B5EF4-FFF2-40B4-BE49-F238E27FC236}">
-                <a16:creationId xmlns:a16="http://schemas.microsoft.com/office/drawing/2014/main" id="{5E9B8A66-5EAC-4C7E-A516-8F8CA5DA8DFC}"/>
+                <a16:creationId xmlns:a16="http://schemas.microsoft.com/office/drawing/2014/main" id="{C2132C43-120F-4A40-8F7D-8B3A9A2E4D12}"/>
               </a:ext>
             </a:extLst>
           </p:cNvPr>
@@ -6977,7 +6977,7 @@
           <p:cNvPr id="20" name="f20">
             <a:extLst xmlns:a="http://schemas.openxmlformats.org/drawingml/2006/main">
               <a:ext uri="{FF2B5EF4-FFF2-40B4-BE49-F238E27FC236}">
-                <a16:creationId xmlns:a16="http://schemas.microsoft.com/office/drawing/2014/main" id="{896E9DC8-4C8A-4027-BF08-0B611BE3EB27}"/>
+                <a16:creationId xmlns:a16="http://schemas.microsoft.com/office/drawing/2014/main" id="{4513B31A-6AE1-4FBB-A582-9C1DB9831505}"/>
               </a:ext>
             </a:extLst>
           </p:cNvPr>
@@ -7134,7 +7134,7 @@
     </p:spTree>
     <p:extLst>
       <p:ext uri="{BB962C8B-B14F-4D97-AF65-F5344CB8AC3E}">
-        <p14:creationId xmlns:p14="http://schemas.microsoft.com/office/powerpoint/2010/main" val="158467739"/>
+        <p14:creationId xmlns:p14="http://schemas.microsoft.com/office/powerpoint/2010/main" val="546992989"/>
       </p:ext>
     </p:extLst>
   </p:cSld>
@@ -7165,7 +7165,7 @@
           <p:cNvPr id="24" name="f21">
             <a:extLst xmlns:a="http://schemas.openxmlformats.org/drawingml/2006/main">
               <a:ext uri="{FF2B5EF4-FFF2-40B4-BE49-F238E27FC236}">
-                <a16:creationId xmlns:a16="http://schemas.microsoft.com/office/drawing/2014/main" id="{65349D49-B4BE-4408-83F6-CCE9CF7E3846}"/>
+                <a16:creationId xmlns:a16="http://schemas.microsoft.com/office/drawing/2014/main" id="{FD125CCF-4566-4587-B7B1-E2CC549A4854}"/>
               </a:ext>
             </a:extLst>
           </p:cNvPr>
@@ -7324,7 +7324,7 @@
           <p:cNvPr id="2" name="f22">
             <a:extLst xmlns:a="http://schemas.openxmlformats.org/drawingml/2006/main">
               <a:ext uri="{FF2B5EF4-FFF2-40B4-BE49-F238E27FC236}">
-                <a16:creationId xmlns:a16="http://schemas.microsoft.com/office/drawing/2014/main" id="{A3976370-9973-40F8-8B9A-8D4EC3ACAB8F}"/>
+                <a16:creationId xmlns:a16="http://schemas.microsoft.com/office/drawing/2014/main" id="{51ED8B2D-3A53-49C7-9F7D-7BD570634B43}"/>
               </a:ext>
             </a:extLst>
           </p:cNvPr>
@@ -7483,7 +7483,7 @@
           <p:cNvPr id="3" name="f23">
             <a:extLst xmlns:a="http://schemas.openxmlformats.org/drawingml/2006/main">
               <a:ext uri="{FF2B5EF4-FFF2-40B4-BE49-F238E27FC236}">
-                <a16:creationId xmlns:a16="http://schemas.microsoft.com/office/drawing/2014/main" id="{046EEB8F-A2ED-495A-9D00-9E402384D9D0}"/>
+                <a16:creationId xmlns:a16="http://schemas.microsoft.com/office/drawing/2014/main" id="{03B500F1-98D6-4445-9DA8-34B3C402D95D}"/>
               </a:ext>
             </a:extLst>
           </p:cNvPr>
@@ -7642,7 +7642,7 @@
           <p:cNvPr id="4" name="f24">
             <a:extLst xmlns:a="http://schemas.openxmlformats.org/drawingml/2006/main">
               <a:ext uri="{FF2B5EF4-FFF2-40B4-BE49-F238E27FC236}">
-                <a16:creationId xmlns:a16="http://schemas.microsoft.com/office/drawing/2014/main" id="{805D825E-C5EE-4FC9-9C32-442FC75A1553}"/>
+                <a16:creationId xmlns:a16="http://schemas.microsoft.com/office/drawing/2014/main" id="{4BE103D2-1811-4DDC-8C06-FFD4C1234894}"/>
               </a:ext>
             </a:extLst>
           </p:cNvPr>
@@ -7801,7 +7801,7 @@
           <p:cNvPr id="5" name="f25">
             <a:extLst xmlns:a="http://schemas.openxmlformats.org/drawingml/2006/main">
               <a:ext uri="{FF2B5EF4-FFF2-40B4-BE49-F238E27FC236}">
-                <a16:creationId xmlns:a16="http://schemas.microsoft.com/office/drawing/2014/main" id="{E8D6BA2D-7891-46B1-A4E2-A1D579424C89}"/>
+                <a16:creationId xmlns:a16="http://schemas.microsoft.com/office/drawing/2014/main" id="{DA819CE7-495F-4288-B769-1165C8FEBD08}"/>
               </a:ext>
             </a:extLst>
           </p:cNvPr>
@@ -7960,7 +7960,7 @@
           <p:cNvPr id="6" name="f26">
             <a:extLst xmlns:a="http://schemas.openxmlformats.org/drawingml/2006/main">
               <a:ext uri="{FF2B5EF4-FFF2-40B4-BE49-F238E27FC236}">
-                <a16:creationId xmlns:a16="http://schemas.microsoft.com/office/drawing/2014/main" id="{9694D617-D2F2-48C7-AF48-1D419689D728}"/>
+                <a16:creationId xmlns:a16="http://schemas.microsoft.com/office/drawing/2014/main" id="{E9B1B775-EF3F-4C5F-9BA8-6777FF423C16}"/>
               </a:ext>
             </a:extLst>
           </p:cNvPr>
@@ -8119,7 +8119,7 @@
           <p:cNvPr id="7" name="f27">
             <a:extLst xmlns:a="http://schemas.openxmlformats.org/drawingml/2006/main">
               <a:ext uri="{FF2B5EF4-FFF2-40B4-BE49-F238E27FC236}">
-                <a16:creationId xmlns:a16="http://schemas.microsoft.com/office/drawing/2014/main" id="{60259D3B-460F-4E87-B68F-42F7D74DBD14}"/>
+                <a16:creationId xmlns:a16="http://schemas.microsoft.com/office/drawing/2014/main" id="{7EBE0CA3-C605-4517-9A4D-F6562256EF8C}"/>
               </a:ext>
             </a:extLst>
           </p:cNvPr>
@@ -8154,7 +8154,7 @@
           <p:cNvPr id="8" name="f28">
             <a:extLst xmlns:a="http://schemas.openxmlformats.org/drawingml/2006/main">
               <a:ext uri="{FF2B5EF4-FFF2-40B4-BE49-F238E27FC236}">
-                <a16:creationId xmlns:a16="http://schemas.microsoft.com/office/drawing/2014/main" id="{FE42ED28-4009-46B9-89D1-3B381D580ED1}"/>
+                <a16:creationId xmlns:a16="http://schemas.microsoft.com/office/drawing/2014/main" id="{2AE429EB-1A57-4227-93D6-5C151D8A8DDC}"/>
               </a:ext>
             </a:extLst>
           </p:cNvPr>
@@ -8185,7 +8185,7 @@
           <p:cNvPr id="9" name="f29">
             <a:extLst xmlns:a="http://schemas.openxmlformats.org/drawingml/2006/main">
               <a:ext uri="{FF2B5EF4-FFF2-40B4-BE49-F238E27FC236}">
-                <a16:creationId xmlns:a16="http://schemas.microsoft.com/office/drawing/2014/main" id="{6015B1D3-B437-4426-9B71-344F6C5C2040}"/>
+                <a16:creationId xmlns:a16="http://schemas.microsoft.com/office/drawing/2014/main" id="{5BB315D0-7A64-440B-861D-70A2776BDEA3}"/>
               </a:ext>
             </a:extLst>
           </p:cNvPr>
@@ -8216,7 +8216,7 @@
           <p:cNvPr id="10" name="f30">
             <a:extLst xmlns:a="http://schemas.openxmlformats.org/drawingml/2006/main">
               <a:ext uri="{FF2B5EF4-FFF2-40B4-BE49-F238E27FC236}">
-                <a16:creationId xmlns:a16="http://schemas.microsoft.com/office/drawing/2014/main" id="{9D456FD1-3A8B-4DC8-AE5D-FE4E53DC98BA}"/>
+                <a16:creationId xmlns:a16="http://schemas.microsoft.com/office/drawing/2014/main" id="{9897839E-4D6C-4FEF-BD56-38180A83B48E}"/>
               </a:ext>
             </a:extLst>
           </p:cNvPr>
@@ -8247,7 +8247,7 @@
           <p:cNvPr id="11" name="f31">
             <a:extLst xmlns:a="http://schemas.openxmlformats.org/drawingml/2006/main">
               <a:ext uri="{FF2B5EF4-FFF2-40B4-BE49-F238E27FC236}">
-                <a16:creationId xmlns:a16="http://schemas.microsoft.com/office/drawing/2014/main" id="{6264ED74-D79D-458B-B8FB-BAFBCE872B42}"/>
+                <a16:creationId xmlns:a16="http://schemas.microsoft.com/office/drawing/2014/main" id="{7FCFB39E-D74F-46AD-95CF-A8C746633E73}"/>
               </a:ext>
             </a:extLst>
           </p:cNvPr>
@@ -8282,7 +8282,7 @@
           <p:cNvPr id="12" name="f32">
             <a:extLst xmlns:a="http://schemas.openxmlformats.org/drawingml/2006/main">
               <a:ext uri="{FF2B5EF4-FFF2-40B4-BE49-F238E27FC236}">
-                <a16:creationId xmlns:a16="http://schemas.microsoft.com/office/drawing/2014/main" id="{B99EBAB3-D0BA-41AA-9617-BFDE572AB908}"/>
+                <a16:creationId xmlns:a16="http://schemas.microsoft.com/office/drawing/2014/main" id="{B009BCE6-6CDA-47EB-87ED-36AF1A5EA43C}"/>
               </a:ext>
             </a:extLst>
           </p:cNvPr>
@@ -8313,7 +8313,7 @@
           <p:cNvPr id="13" name="f33">
             <a:extLst xmlns:a="http://schemas.openxmlformats.org/drawingml/2006/main">
               <a:ext uri="{FF2B5EF4-FFF2-40B4-BE49-F238E27FC236}">
-                <a16:creationId xmlns:a16="http://schemas.microsoft.com/office/drawing/2014/main" id="{E013CD4F-8E1D-4221-937E-5C803C7D8DED}"/>
+                <a16:creationId xmlns:a16="http://schemas.microsoft.com/office/drawing/2014/main" id="{5A75314C-94B8-485F-BB9D-7EA33DC90F16}"/>
               </a:ext>
             </a:extLst>
           </p:cNvPr>
@@ -8346,7 +8346,7 @@
           <p:cNvPr id="14" name="f34">
             <a:extLst xmlns:a="http://schemas.openxmlformats.org/drawingml/2006/main">
               <a:ext uri="{FF2B5EF4-FFF2-40B4-BE49-F238E27FC236}">
-                <a16:creationId xmlns:a16="http://schemas.microsoft.com/office/drawing/2014/main" id="{56B15B5E-7862-411A-8436-08766D446F78}"/>
+                <a16:creationId xmlns:a16="http://schemas.microsoft.com/office/drawing/2014/main" id="{7643CF38-1340-4592-A2E6-67F7DED538C0}"/>
               </a:ext>
             </a:extLst>
           </p:cNvPr>
@@ -8379,7 +8379,7 @@
           <p:cNvPr id="15" name="f35">
             <a:extLst xmlns:a="http://schemas.openxmlformats.org/drawingml/2006/main">
               <a:ext uri="{FF2B5EF4-FFF2-40B4-BE49-F238E27FC236}">
-                <a16:creationId xmlns:a16="http://schemas.microsoft.com/office/drawing/2014/main" id="{84F00433-9DEF-4C9A-9EC3-0BFA95306C7C}"/>
+                <a16:creationId xmlns:a16="http://schemas.microsoft.com/office/drawing/2014/main" id="{348FB94F-DECA-414B-8546-6F639B1E122E}"/>
               </a:ext>
             </a:extLst>
           </p:cNvPr>
@@ -8412,7 +8412,7 @@
           <p:cNvPr id="16" name="f36">
             <a:extLst xmlns:a="http://schemas.openxmlformats.org/drawingml/2006/main">
               <a:ext uri="{FF2B5EF4-FFF2-40B4-BE49-F238E27FC236}">
-                <a16:creationId xmlns:a16="http://schemas.microsoft.com/office/drawing/2014/main" id="{2A12A4F1-95CD-473D-B5E0-6C7E4C8989A8}"/>
+                <a16:creationId xmlns:a16="http://schemas.microsoft.com/office/drawing/2014/main" id="{4E443ABD-BAFD-4850-A886-B611BAC6E1C5}"/>
               </a:ext>
             </a:extLst>
           </p:cNvPr>
@@ -8571,7 +8571,7 @@
           <p:cNvPr id="17" name="f37">
             <a:extLst xmlns:a="http://schemas.openxmlformats.org/drawingml/2006/main">
               <a:ext uri="{FF2B5EF4-FFF2-40B4-BE49-F238E27FC236}">
-                <a16:creationId xmlns:a16="http://schemas.microsoft.com/office/drawing/2014/main" id="{DC121C45-80AF-41BF-8BEE-D0B0EF54F6C7}"/>
+                <a16:creationId xmlns:a16="http://schemas.microsoft.com/office/drawing/2014/main" id="{F3B1FB7D-C9D0-48F0-A554-34E3CD965153}"/>
               </a:ext>
             </a:extLst>
           </p:cNvPr>
@@ -8602,7 +8602,7 @@
           <p:cNvPr id="18" name="f38">
             <a:extLst xmlns:a="http://schemas.openxmlformats.org/drawingml/2006/main">
               <a:ext uri="{FF2B5EF4-FFF2-40B4-BE49-F238E27FC236}">
-                <a16:creationId xmlns:a16="http://schemas.microsoft.com/office/drawing/2014/main" id="{3F3106AA-D68D-4667-92FB-611A00A65EC3}"/>
+                <a16:creationId xmlns:a16="http://schemas.microsoft.com/office/drawing/2014/main" id="{B8692C49-10FD-4578-8EFD-94FF07EE300F}"/>
               </a:ext>
             </a:extLst>
           </p:cNvPr>
@@ -8633,7 +8633,7 @@
           <p:cNvPr id="19" name="f39">
             <a:extLst xmlns:a="http://schemas.openxmlformats.org/drawingml/2006/main">
               <a:ext uri="{FF2B5EF4-FFF2-40B4-BE49-F238E27FC236}">
-                <a16:creationId xmlns:a16="http://schemas.microsoft.com/office/drawing/2014/main" id="{B9905747-D6D4-40CB-BA55-E16DE2454E8D}"/>
+                <a16:creationId xmlns:a16="http://schemas.microsoft.com/office/drawing/2014/main" id="{E876AB3B-34AA-4900-9534-E14CAE3C5A60}"/>
               </a:ext>
             </a:extLst>
           </p:cNvPr>
@@ -8668,7 +8668,7 @@
           <p:cNvPr id="20" name="f40">
             <a:extLst xmlns:a="http://schemas.openxmlformats.org/drawingml/2006/main">
               <a:ext uri="{FF2B5EF4-FFF2-40B4-BE49-F238E27FC236}">
-                <a16:creationId xmlns:a16="http://schemas.microsoft.com/office/drawing/2014/main" id="{16B67533-DF3C-4743-868A-4C740B3167E0}"/>
+                <a16:creationId xmlns:a16="http://schemas.microsoft.com/office/drawing/2014/main" id="{A3E4CCE4-D2B3-4EBA-9838-24567C88DCCD}"/>
               </a:ext>
             </a:extLst>
           </p:cNvPr>
@@ -8850,7 +8850,7 @@
           <p:cNvPr id="21" name="f41">
             <a:extLst xmlns:a="http://schemas.openxmlformats.org/drawingml/2006/main">
               <a:ext uri="{FF2B5EF4-FFF2-40B4-BE49-F238E27FC236}">
-                <a16:creationId xmlns:a16="http://schemas.microsoft.com/office/drawing/2014/main" id="{1077204C-4550-4AE3-A3AD-0B3DDDBD4689}"/>
+                <a16:creationId xmlns:a16="http://schemas.microsoft.com/office/drawing/2014/main" id="{45844FDF-42E0-4654-865E-23EA559C4A33}"/>
               </a:ext>
             </a:extLst>
           </p:cNvPr>
@@ -9032,7 +9032,7 @@
           <p:cNvPr id="22" name="f42">
             <a:extLst xmlns:a="http://schemas.openxmlformats.org/drawingml/2006/main">
               <a:ext uri="{FF2B5EF4-FFF2-40B4-BE49-F238E27FC236}">
-                <a16:creationId xmlns:a16="http://schemas.microsoft.com/office/drawing/2014/main" id="{2AEE505F-1690-4D5E-90C0-E7AB9893FE6F}"/>
+                <a16:creationId xmlns:a16="http://schemas.microsoft.com/office/drawing/2014/main" id="{CEDEEDD2-FE46-47C6-B75D-26985BA178A6}"/>
               </a:ext>
             </a:extLst>
           </p:cNvPr>
@@ -9191,7 +9191,7 @@
           <p:cNvPr id="23" name="f43">
             <a:extLst xmlns:a="http://schemas.openxmlformats.org/drawingml/2006/main">
               <a:ext uri="{FF2B5EF4-FFF2-40B4-BE49-F238E27FC236}">
-                <a16:creationId xmlns:a16="http://schemas.microsoft.com/office/drawing/2014/main" id="{7A230166-4159-448B-837F-A3BBE0702835}"/>
+                <a16:creationId xmlns:a16="http://schemas.microsoft.com/office/drawing/2014/main" id="{4E4A79A7-2C64-42E3-B79B-0EE162F4314B}"/>
               </a:ext>
             </a:extLst>
           </p:cNvPr>
@@ -9348,7 +9348,7 @@
     </p:spTree>
     <p:extLst>
       <p:ext uri="{BB962C8B-B14F-4D97-AF65-F5344CB8AC3E}">
-        <p14:creationId xmlns:p14="http://schemas.microsoft.com/office/powerpoint/2010/main" val="1895006201"/>
+        <p14:creationId xmlns:p14="http://schemas.microsoft.com/office/powerpoint/2010/main" val="1146686997"/>
       </p:ext>
     </p:extLst>
   </p:cSld>
@@ -9379,7 +9379,7 @@
           <p:cNvPr id="24" name="">
             <a:extLst xmlns:a="http://schemas.openxmlformats.org/drawingml/2006/main">
               <a:ext uri="{FF2B5EF4-FFF2-40B4-BE49-F238E27FC236}">
-                <a16:creationId xmlns:a16="http://schemas.microsoft.com/office/drawing/2014/main" id="{7749D6E8-1679-4DF0-86C3-A68B4E61733D}"/>
+                <a16:creationId xmlns:a16="http://schemas.microsoft.com/office/drawing/2014/main" id="{ECFB977D-8279-43EF-97D8-E47214A8032F}"/>
               </a:ext>
             </a:extLst>
           </p:cNvPr>
@@ -9389,7 +9389,7 @@
           <p:nvPr/>
         </p:nvPicPr>
         <p:blipFill>
-          <a:blip xmlns:r="http://schemas.openxmlformats.org/officeDocument/2006/relationships" xmlns:a="http://schemas.openxmlformats.org/drawingml/2006/main" r:embed="Re13f6e3cd6eb4c3a"/>
+          <a:blip xmlns:r="http://schemas.openxmlformats.org/officeDocument/2006/relationships" xmlns:a="http://schemas.openxmlformats.org/drawingml/2006/main" r:embed="Rd0a5feae76b944e6"/>
           <a:stretch xmlns:a="http://schemas.openxmlformats.org/drawingml/2006/main"/>
         </p:blipFill>
         <p:spPr>
@@ -9407,7 +9407,7 @@
           <p:cNvPr id="2" name="f45">
             <a:extLst xmlns:a="http://schemas.openxmlformats.org/drawingml/2006/main">
               <a:ext uri="{FF2B5EF4-FFF2-40B4-BE49-F238E27FC236}">
-                <a16:creationId xmlns:a16="http://schemas.microsoft.com/office/drawing/2014/main" id="{C5F67984-FB91-4A42-88FD-043BA9C475CC}"/>
+                <a16:creationId xmlns:a16="http://schemas.microsoft.com/office/drawing/2014/main" id="{576ACBFC-237A-4751-BA18-76E2E00695F7}"/>
               </a:ext>
             </a:extLst>
           </p:cNvPr>
@@ -9566,7 +9566,7 @@
           <p:cNvPr id="3" name="f46">
             <a:extLst xmlns:a="http://schemas.openxmlformats.org/drawingml/2006/main">
               <a:ext uri="{FF2B5EF4-FFF2-40B4-BE49-F238E27FC236}">
-                <a16:creationId xmlns:a16="http://schemas.microsoft.com/office/drawing/2014/main" id="{4588A644-E7A8-432F-AFF5-7296E4DEB9DA}"/>
+                <a16:creationId xmlns:a16="http://schemas.microsoft.com/office/drawing/2014/main" id="{4C82BF1A-34C9-42F3-B19F-E59241AB00AB}"/>
               </a:ext>
             </a:extLst>
           </p:cNvPr>
@@ -9725,7 +9725,7 @@
           <p:cNvPr id="4" name="f47">
             <a:extLst xmlns:a="http://schemas.openxmlformats.org/drawingml/2006/main">
               <a:ext uri="{FF2B5EF4-FFF2-40B4-BE49-F238E27FC236}">
-                <a16:creationId xmlns:a16="http://schemas.microsoft.com/office/drawing/2014/main" id="{60BE0821-082D-4E58-AE1D-27450AFB1A41}"/>
+                <a16:creationId xmlns:a16="http://schemas.microsoft.com/office/drawing/2014/main" id="{97B3E269-D7CC-4DAF-9414-04C3B71BCA46}"/>
               </a:ext>
             </a:extLst>
           </p:cNvPr>
@@ -9884,7 +9884,7 @@
           <p:cNvPr id="5" name="f48">
             <a:extLst xmlns:a="http://schemas.openxmlformats.org/drawingml/2006/main">
               <a:ext uri="{FF2B5EF4-FFF2-40B4-BE49-F238E27FC236}">
-                <a16:creationId xmlns:a16="http://schemas.microsoft.com/office/drawing/2014/main" id="{409D0732-8493-4D78-BD2B-76C352C3E9F1}"/>
+                <a16:creationId xmlns:a16="http://schemas.microsoft.com/office/drawing/2014/main" id="{B0533A93-4A52-4564-BF93-E5189E9D23BB}"/>
               </a:ext>
             </a:extLst>
           </p:cNvPr>
@@ -10043,7 +10043,7 @@
           <p:cNvPr id="6" name="f49">
             <a:extLst xmlns:a="http://schemas.openxmlformats.org/drawingml/2006/main">
               <a:ext uri="{FF2B5EF4-FFF2-40B4-BE49-F238E27FC236}">
-                <a16:creationId xmlns:a16="http://schemas.microsoft.com/office/drawing/2014/main" id="{AD2B6520-5FC4-4C27-B09D-F4CC55215567}"/>
+                <a16:creationId xmlns:a16="http://schemas.microsoft.com/office/drawing/2014/main" id="{C03E6A25-31DE-4875-8169-75F8E163B6D4}"/>
               </a:ext>
             </a:extLst>
           </p:cNvPr>
@@ -10202,7 +10202,7 @@
           <p:cNvPr id="7" name="f50">
             <a:extLst xmlns:a="http://schemas.openxmlformats.org/drawingml/2006/main">
               <a:ext uri="{FF2B5EF4-FFF2-40B4-BE49-F238E27FC236}">
-                <a16:creationId xmlns:a16="http://schemas.microsoft.com/office/drawing/2014/main" id="{ED233869-4BFD-42CB-8395-C37B26F63EC5}"/>
+                <a16:creationId xmlns:a16="http://schemas.microsoft.com/office/drawing/2014/main" id="{02CA44F8-D079-4607-8E06-21353D929D67}"/>
               </a:ext>
             </a:extLst>
           </p:cNvPr>
@@ -10361,7 +10361,7 @@
           <p:cNvPr id="8" name="f51">
             <a:extLst xmlns:a="http://schemas.openxmlformats.org/drawingml/2006/main">
               <a:ext uri="{FF2B5EF4-FFF2-40B4-BE49-F238E27FC236}">
-                <a16:creationId xmlns:a16="http://schemas.microsoft.com/office/drawing/2014/main" id="{C4FDEDA5-6A15-40BA-9418-D1774EE00D45}"/>
+                <a16:creationId xmlns:a16="http://schemas.microsoft.com/office/drawing/2014/main" id="{0586F632-03AD-4CFB-A3A4-AA9E350F0A75}"/>
               </a:ext>
             </a:extLst>
           </p:cNvPr>
@@ -10520,7 +10520,7 @@
           <p:cNvPr id="9" name="f52">
             <a:extLst xmlns:a="http://schemas.openxmlformats.org/drawingml/2006/main">
               <a:ext uri="{FF2B5EF4-FFF2-40B4-BE49-F238E27FC236}">
-                <a16:creationId xmlns:a16="http://schemas.microsoft.com/office/drawing/2014/main" id="{9F93A1D6-40D9-4AD9-B5E8-FD6DC185FB97}"/>
+                <a16:creationId xmlns:a16="http://schemas.microsoft.com/office/drawing/2014/main" id="{CF98F909-6189-4F9D-9295-8D82B6CFE8E9}"/>
               </a:ext>
             </a:extLst>
           </p:cNvPr>
@@ -10679,7 +10679,7 @@
           <p:cNvPr id="10" name="f53">
             <a:extLst xmlns:a="http://schemas.openxmlformats.org/drawingml/2006/main">
               <a:ext uri="{FF2B5EF4-FFF2-40B4-BE49-F238E27FC236}">
-                <a16:creationId xmlns:a16="http://schemas.microsoft.com/office/drawing/2014/main" id="{BF20D704-8288-4458-9258-29886B2DFA3C}"/>
+                <a16:creationId xmlns:a16="http://schemas.microsoft.com/office/drawing/2014/main" id="{4892DF77-C826-4D21-AA87-2817BA442855}"/>
               </a:ext>
             </a:extLst>
           </p:cNvPr>
@@ -10838,7 +10838,7 @@
           <p:cNvPr id="11" name="f54">
             <a:extLst xmlns:a="http://schemas.openxmlformats.org/drawingml/2006/main">
               <a:ext uri="{FF2B5EF4-FFF2-40B4-BE49-F238E27FC236}">
-                <a16:creationId xmlns:a16="http://schemas.microsoft.com/office/drawing/2014/main" id="{E25CE58D-C8E7-41D9-8F67-8F8E10DEE174}"/>
+                <a16:creationId xmlns:a16="http://schemas.microsoft.com/office/drawing/2014/main" id="{C016C60D-BDB2-4445-BAF2-94B970010086}"/>
               </a:ext>
             </a:extLst>
           </p:cNvPr>
@@ -10997,7 +10997,7 @@
           <p:cNvPr id="12" name="f55">
             <a:extLst xmlns:a="http://schemas.openxmlformats.org/drawingml/2006/main">
               <a:ext uri="{FF2B5EF4-FFF2-40B4-BE49-F238E27FC236}">
-                <a16:creationId xmlns:a16="http://schemas.microsoft.com/office/drawing/2014/main" id="{B8B4DAEA-2D9D-4446-A1CD-67C96B2C1A4F}"/>
+                <a16:creationId xmlns:a16="http://schemas.microsoft.com/office/drawing/2014/main" id="{879A09D1-27B2-402D-9994-5536F78C75E8}"/>
               </a:ext>
             </a:extLst>
           </p:cNvPr>
@@ -11156,7 +11156,7 @@
           <p:cNvPr id="13" name="f56">
             <a:extLst xmlns:a="http://schemas.openxmlformats.org/drawingml/2006/main">
               <a:ext uri="{FF2B5EF4-FFF2-40B4-BE49-F238E27FC236}">
-                <a16:creationId xmlns:a16="http://schemas.microsoft.com/office/drawing/2014/main" id="{8C101507-E593-43C7-99DE-B3D10C6F962F}"/>
+                <a16:creationId xmlns:a16="http://schemas.microsoft.com/office/drawing/2014/main" id="{6E25D707-6C7E-41D0-8ACF-31B3AD1E79BD}"/>
               </a:ext>
             </a:extLst>
           </p:cNvPr>
@@ -11315,7 +11315,7 @@
           <p:cNvPr id="14" name="f57">
             <a:extLst xmlns:a="http://schemas.openxmlformats.org/drawingml/2006/main">
               <a:ext uri="{FF2B5EF4-FFF2-40B4-BE49-F238E27FC236}">
-                <a16:creationId xmlns:a16="http://schemas.microsoft.com/office/drawing/2014/main" id="{05D9F340-3D33-452F-A91A-29FD3ACB00F3}"/>
+                <a16:creationId xmlns:a16="http://schemas.microsoft.com/office/drawing/2014/main" id="{259483BB-6B59-4603-A9CD-94BEBC4172D1}"/>
               </a:ext>
             </a:extLst>
           </p:cNvPr>
@@ -11474,7 +11474,7 @@
           <p:cNvPr id="15" name="f58">
             <a:extLst xmlns:a="http://schemas.openxmlformats.org/drawingml/2006/main">
               <a:ext uri="{FF2B5EF4-FFF2-40B4-BE49-F238E27FC236}">
-                <a16:creationId xmlns:a16="http://schemas.microsoft.com/office/drawing/2014/main" id="{B6EF6EB7-AA96-469C-96AE-20360117E64B}"/>
+                <a16:creationId xmlns:a16="http://schemas.microsoft.com/office/drawing/2014/main" id="{D06155AE-592D-4F38-80DB-E3E19510A1B5}"/>
               </a:ext>
             </a:extLst>
           </p:cNvPr>
@@ -11633,7 +11633,7 @@
           <p:cNvPr id="16" name="f59">
             <a:extLst xmlns:a="http://schemas.openxmlformats.org/drawingml/2006/main">
               <a:ext uri="{FF2B5EF4-FFF2-40B4-BE49-F238E27FC236}">
-                <a16:creationId xmlns:a16="http://schemas.microsoft.com/office/drawing/2014/main" id="{BCA7AC86-5411-4B73-81A4-1CB0090CA398}"/>
+                <a16:creationId xmlns:a16="http://schemas.microsoft.com/office/drawing/2014/main" id="{20A8554B-D348-46FD-B454-1252DB8668F7}"/>
               </a:ext>
             </a:extLst>
           </p:cNvPr>
@@ -11792,7 +11792,7 @@
           <p:cNvPr id="17" name="f60">
             <a:extLst xmlns:a="http://schemas.openxmlformats.org/drawingml/2006/main">
               <a:ext uri="{FF2B5EF4-FFF2-40B4-BE49-F238E27FC236}">
-                <a16:creationId xmlns:a16="http://schemas.microsoft.com/office/drawing/2014/main" id="{E4B7B89C-0328-46A1-9832-CDF681C16556}"/>
+                <a16:creationId xmlns:a16="http://schemas.microsoft.com/office/drawing/2014/main" id="{6E19C25A-A163-4FF7-BE2D-F3E4AD841095}"/>
               </a:ext>
             </a:extLst>
           </p:cNvPr>
@@ -11951,7 +11951,7 @@
           <p:cNvPr id="18" name="f61">
             <a:extLst xmlns:a="http://schemas.openxmlformats.org/drawingml/2006/main">
               <a:ext uri="{FF2B5EF4-FFF2-40B4-BE49-F238E27FC236}">
-                <a16:creationId xmlns:a16="http://schemas.microsoft.com/office/drawing/2014/main" id="{1E9BCBAE-9895-45DA-9109-9FB27023DE14}"/>
+                <a16:creationId xmlns:a16="http://schemas.microsoft.com/office/drawing/2014/main" id="{A56855E0-25F1-4A89-AA2F-8ABE68290503}"/>
               </a:ext>
             </a:extLst>
           </p:cNvPr>
@@ -12110,7 +12110,7 @@
           <p:cNvPr id="19" name="f62">
             <a:extLst xmlns:a="http://schemas.openxmlformats.org/drawingml/2006/main">
               <a:ext uri="{FF2B5EF4-FFF2-40B4-BE49-F238E27FC236}">
-                <a16:creationId xmlns:a16="http://schemas.microsoft.com/office/drawing/2014/main" id="{2B2F140D-860B-4CA2-8100-D83C95A9E0E4}"/>
+                <a16:creationId xmlns:a16="http://schemas.microsoft.com/office/drawing/2014/main" id="{D27D2D76-AAFF-4753-ACE1-B7FFA650A56F}"/>
               </a:ext>
             </a:extLst>
           </p:cNvPr>
@@ -12269,7 +12269,7 @@
           <p:cNvPr id="20" name="f63">
             <a:extLst xmlns:a="http://schemas.openxmlformats.org/drawingml/2006/main">
               <a:ext uri="{FF2B5EF4-FFF2-40B4-BE49-F238E27FC236}">
-                <a16:creationId xmlns:a16="http://schemas.microsoft.com/office/drawing/2014/main" id="{EB6CDFCE-8829-46E9-A360-5343E577F859}"/>
+                <a16:creationId xmlns:a16="http://schemas.microsoft.com/office/drawing/2014/main" id="{0FE440B5-6BFD-4028-8FE1-6DBA3F946DE4}"/>
               </a:ext>
             </a:extLst>
           </p:cNvPr>
@@ -12428,7 +12428,7 @@
           <p:cNvPr id="21" name="f64">
             <a:extLst xmlns:a="http://schemas.openxmlformats.org/drawingml/2006/main">
               <a:ext uri="{FF2B5EF4-FFF2-40B4-BE49-F238E27FC236}">
-                <a16:creationId xmlns:a16="http://schemas.microsoft.com/office/drawing/2014/main" id="{CEA73E8A-CC9D-4D63-8004-8EA8190779CE}"/>
+                <a16:creationId xmlns:a16="http://schemas.microsoft.com/office/drawing/2014/main" id="{A4CAF0AB-FBB0-44ED-A0D9-1273A5BE74F3}"/>
               </a:ext>
             </a:extLst>
           </p:cNvPr>
@@ -12587,7 +12587,7 @@
           <p:cNvPr id="22" name="f65">
             <a:extLst xmlns:a="http://schemas.openxmlformats.org/drawingml/2006/main">
               <a:ext uri="{FF2B5EF4-FFF2-40B4-BE49-F238E27FC236}">
-                <a16:creationId xmlns:a16="http://schemas.microsoft.com/office/drawing/2014/main" id="{36696700-DA0B-450E-ADDE-821252A5F8B7}"/>
+                <a16:creationId xmlns:a16="http://schemas.microsoft.com/office/drawing/2014/main" id="{0239262C-C23F-4070-81DD-D9A7F73F4AA4}"/>
               </a:ext>
             </a:extLst>
           </p:cNvPr>
@@ -12746,7 +12746,7 @@
           <p:cNvPr id="23" name="f66">
             <a:extLst xmlns:a="http://schemas.openxmlformats.org/drawingml/2006/main">
               <a:ext uri="{FF2B5EF4-FFF2-40B4-BE49-F238E27FC236}">
-                <a16:creationId xmlns:a16="http://schemas.microsoft.com/office/drawing/2014/main" id="{9ABFDCE8-C331-4E5B-A0F0-3F66DCC26488}"/>
+                <a16:creationId xmlns:a16="http://schemas.microsoft.com/office/drawing/2014/main" id="{32F853DE-614D-4123-AD78-719572E6561C}"/>
               </a:ext>
             </a:extLst>
           </p:cNvPr>
@@ -12903,7 +12903,7 @@
     </p:spTree>
     <p:extLst>
       <p:ext uri="{BB962C8B-B14F-4D97-AF65-F5344CB8AC3E}">
-        <p14:creationId xmlns:p14="http://schemas.microsoft.com/office/powerpoint/2010/main" val="1895952400"/>
+        <p14:creationId xmlns:p14="http://schemas.microsoft.com/office/powerpoint/2010/main" val="2000603175"/>
       </p:ext>
     </p:extLst>
   </p:cSld>
@@ -12934,7 +12934,7 @@
           <p:cNvPr id="18" name="f67">
             <a:extLst xmlns:a="http://schemas.openxmlformats.org/drawingml/2006/main">
               <a:ext uri="{FF2B5EF4-FFF2-40B4-BE49-F238E27FC236}">
-                <a16:creationId xmlns:a16="http://schemas.microsoft.com/office/drawing/2014/main" id="{72F595FC-6C11-4064-AF97-DBC30E8D42C8}"/>
+                <a16:creationId xmlns:a16="http://schemas.microsoft.com/office/drawing/2014/main" id="{255D08E1-0437-468D-BDE1-B5577E6AE26E}"/>
               </a:ext>
             </a:extLst>
           </p:cNvPr>
@@ -13093,7 +13093,7 @@
           <p:cNvPr id="2" name="f68">
             <a:extLst xmlns:a="http://schemas.openxmlformats.org/drawingml/2006/main">
               <a:ext uri="{FF2B5EF4-FFF2-40B4-BE49-F238E27FC236}">
-                <a16:creationId xmlns:a16="http://schemas.microsoft.com/office/drawing/2014/main" id="{27E25A22-2BA3-4A1B-97CD-35503369AC65}"/>
+                <a16:creationId xmlns:a16="http://schemas.microsoft.com/office/drawing/2014/main" id="{FF8CA1FF-1188-48F6-8875-44408809276C}"/>
               </a:ext>
             </a:extLst>
           </p:cNvPr>
@@ -13252,7 +13252,7 @@
           <p:cNvPr id="3" name="f69">
             <a:extLst xmlns:a="http://schemas.openxmlformats.org/drawingml/2006/main">
               <a:ext uri="{FF2B5EF4-FFF2-40B4-BE49-F238E27FC236}">
-                <a16:creationId xmlns:a16="http://schemas.microsoft.com/office/drawing/2014/main" id="{2660EA6F-9201-4660-B4C5-B69C1926C22B}"/>
+                <a16:creationId xmlns:a16="http://schemas.microsoft.com/office/drawing/2014/main" id="{7B94911F-0594-4BF3-A932-DBD890DF4F26}"/>
               </a:ext>
             </a:extLst>
           </p:cNvPr>
@@ -13411,7 +13411,7 @@
           <p:cNvPr id="4" name="f70">
             <a:extLst xmlns:a="http://schemas.openxmlformats.org/drawingml/2006/main">
               <a:ext uri="{FF2B5EF4-FFF2-40B4-BE49-F238E27FC236}">
-                <a16:creationId xmlns:a16="http://schemas.microsoft.com/office/drawing/2014/main" id="{01AD7E28-05FB-4A88-9BB2-4206E0B398B0}"/>
+                <a16:creationId xmlns:a16="http://schemas.microsoft.com/office/drawing/2014/main" id="{1EBBDF93-CF3A-49AC-9D02-B8B0080C9350}"/>
               </a:ext>
             </a:extLst>
           </p:cNvPr>
@@ -13567,10 +13567,10 @@
       </p:sp>
       <p:sp>
         <p:nvSpPr>
-          <p:cNvPr id="5" name="f100">
+          <p:cNvPr id="5" name="f103">
             <a:extLst xmlns:a="http://schemas.openxmlformats.org/drawingml/2006/main">
               <a:ext uri="{FF2B5EF4-FFF2-40B4-BE49-F238E27FC236}">
-                <a16:creationId xmlns:a16="http://schemas.microsoft.com/office/drawing/2014/main" id="{87BD0C04-1B4C-4045-94BD-6C443B31941A}"/>
+                <a16:creationId xmlns:a16="http://schemas.microsoft.com/office/drawing/2014/main" id="{A481E2E3-E1E4-4B84-A0AE-1314B472122A}"/>
               </a:ext>
             </a:extLst>
           </p:cNvPr>
@@ -13726,10 +13726,10 @@
       </p:sp>
       <p:sp>
         <p:nvSpPr>
-          <p:cNvPr id="6" name="f101">
+          <p:cNvPr id="6" name="f104">
             <a:extLst xmlns:a="http://schemas.openxmlformats.org/drawingml/2006/main">
               <a:ext uri="{FF2B5EF4-FFF2-40B4-BE49-F238E27FC236}">
-                <a16:creationId xmlns:a16="http://schemas.microsoft.com/office/drawing/2014/main" id="{EBF63B51-3392-4254-87D3-22E423D032ED}"/>
+                <a16:creationId xmlns:a16="http://schemas.microsoft.com/office/drawing/2014/main" id="{2AB634C6-0866-4C2E-AEDC-C8B6CCFBF517}"/>
               </a:ext>
             </a:extLst>
           </p:cNvPr>
@@ -13761,10 +13761,10 @@
       </p:sp>
       <p:sp>
         <p:nvSpPr>
-          <p:cNvPr id="7" name="f102">
+          <p:cNvPr id="7" name="f105">
             <a:extLst xmlns:a="http://schemas.openxmlformats.org/drawingml/2006/main">
               <a:ext uri="{FF2B5EF4-FFF2-40B4-BE49-F238E27FC236}">
-                <a16:creationId xmlns:a16="http://schemas.microsoft.com/office/drawing/2014/main" id="{7EC9D765-7288-479C-AC95-0CEC02B593D3}"/>
+                <a16:creationId xmlns:a16="http://schemas.microsoft.com/office/drawing/2014/main" id="{431E96A3-3829-474C-BA17-125B2539F19F}"/>
               </a:ext>
             </a:extLst>
           </p:cNvPr>
@@ -13920,10 +13920,10 @@
       </p:sp>
       <p:sp>
         <p:nvSpPr>
-          <p:cNvPr id="8" name="f103">
+          <p:cNvPr id="8" name="f106">
             <a:extLst xmlns:a="http://schemas.openxmlformats.org/drawingml/2006/main">
               <a:ext uri="{FF2B5EF4-FFF2-40B4-BE49-F238E27FC236}">
-                <a16:creationId xmlns:a16="http://schemas.microsoft.com/office/drawing/2014/main" id="{6E2F1DCA-5179-4C99-B0DC-4FE19B8B840F}"/>
+                <a16:creationId xmlns:a16="http://schemas.microsoft.com/office/drawing/2014/main" id="{D2DCB783-F272-4219-8ADE-E6890FED9051}"/>
               </a:ext>
             </a:extLst>
           </p:cNvPr>
@@ -14102,10 +14102,10 @@
       </p:sp>
       <p:sp>
         <p:nvSpPr>
-          <p:cNvPr id="9" name="f104">
+          <p:cNvPr id="9" name="f107">
             <a:extLst xmlns:a="http://schemas.openxmlformats.org/drawingml/2006/main">
               <a:ext uri="{FF2B5EF4-FFF2-40B4-BE49-F238E27FC236}">
-                <a16:creationId xmlns:a16="http://schemas.microsoft.com/office/drawing/2014/main" id="{714FA812-2904-4357-9F79-4B440600F2CD}"/>
+                <a16:creationId xmlns:a16="http://schemas.microsoft.com/office/drawing/2014/main" id="{7FEC5BE1-BE85-4909-9936-0AA62A21D609}"/>
               </a:ext>
             </a:extLst>
           </p:cNvPr>
@@ -14261,10 +14261,10 @@
       </p:sp>
       <p:sp>
         <p:nvSpPr>
-          <p:cNvPr id="10" name="f105">
+          <p:cNvPr id="10" name="f108">
             <a:extLst xmlns:a="http://schemas.openxmlformats.org/drawingml/2006/main">
               <a:ext uri="{FF2B5EF4-FFF2-40B4-BE49-F238E27FC236}">
-                <a16:creationId xmlns:a16="http://schemas.microsoft.com/office/drawing/2014/main" id="{C881A688-B2FA-46B9-B80C-C16506BFCA08}"/>
+                <a16:creationId xmlns:a16="http://schemas.microsoft.com/office/drawing/2014/main" id="{1CF935D2-B439-4E75-9779-CA510D863DC8}"/>
               </a:ext>
             </a:extLst>
           </p:cNvPr>
@@ -14420,10 +14420,10 @@
       </p:sp>
       <p:sp>
         <p:nvSpPr>
-          <p:cNvPr id="11" name="f106">
+          <p:cNvPr id="11" name="f109">
             <a:extLst xmlns:a="http://schemas.openxmlformats.org/drawingml/2006/main">
               <a:ext uri="{FF2B5EF4-FFF2-40B4-BE49-F238E27FC236}">
-                <a16:creationId xmlns:a16="http://schemas.microsoft.com/office/drawing/2014/main" id="{E4704E75-AE8E-46CA-A3A4-83B5547165DD}"/>
+                <a16:creationId xmlns:a16="http://schemas.microsoft.com/office/drawing/2014/main" id="{29815676-10ED-4AB7-A411-730A307FF56B}"/>
               </a:ext>
             </a:extLst>
           </p:cNvPr>
@@ -14434,7 +14434,7 @@
         </p:nvSpPr>
         <p:spPr>
           <a:xfrm xmlns:a="http://schemas.openxmlformats.org/drawingml/2006/main">
-            <a:off x="8382000" y="5762625"/>
+            <a:off x="8382000" y="4953000"/>
             <a:ext cx="1428750" cy="171450"/>
           </a:xfrm>
           <a:prstGeom xmlns:a="http://schemas.openxmlformats.org/drawingml/2006/main" prst="leftArrow">
@@ -14451,10 +14451,10 @@
       </p:sp>
       <p:sp>
         <p:nvSpPr>
-          <p:cNvPr id="12" name="f107">
+          <p:cNvPr id="12" name="f110">
             <a:extLst xmlns:a="http://schemas.openxmlformats.org/drawingml/2006/main">
               <a:ext uri="{FF2B5EF4-FFF2-40B4-BE49-F238E27FC236}">
-                <a16:creationId xmlns:a16="http://schemas.microsoft.com/office/drawing/2014/main" id="{A1FA62F4-585E-4A8C-84BD-80CA0B2CFB62}"/>
+                <a16:creationId xmlns:a16="http://schemas.microsoft.com/office/drawing/2014/main" id="{FCCCB5EE-B953-44F0-B727-376EDA83DBE1}"/>
               </a:ext>
             </a:extLst>
           </p:cNvPr>
@@ -14482,10 +14482,10 @@
       </p:sp>
       <p:sp>
         <p:nvSpPr>
-          <p:cNvPr id="13" name="f108">
+          <p:cNvPr id="13" name="f111">
             <a:extLst xmlns:a="http://schemas.openxmlformats.org/drawingml/2006/main">
               <a:ext uri="{FF2B5EF4-FFF2-40B4-BE49-F238E27FC236}">
-                <a16:creationId xmlns:a16="http://schemas.microsoft.com/office/drawing/2014/main" id="{6E1A8AEE-EBF3-491F-BC96-733D12154F19}"/>
+                <a16:creationId xmlns:a16="http://schemas.microsoft.com/office/drawing/2014/main" id="{B5063897-5494-4189-8EC5-D760DA8123E2}"/>
               </a:ext>
             </a:extLst>
           </p:cNvPr>
@@ -14641,10 +14641,10 @@
       </p:sp>
       <p:sp>
         <p:nvSpPr>
-          <p:cNvPr id="14" name="f109">
+          <p:cNvPr id="14" name="f112">
             <a:extLst xmlns:a="http://schemas.openxmlformats.org/drawingml/2006/main">
               <a:ext uri="{FF2B5EF4-FFF2-40B4-BE49-F238E27FC236}">
-                <a16:creationId xmlns:a16="http://schemas.microsoft.com/office/drawing/2014/main" id="{F0A1465E-9CDA-44BD-9529-3F7C974BC812}"/>
+                <a16:creationId xmlns:a16="http://schemas.microsoft.com/office/drawing/2014/main" id="{2908E1D0-E6AB-4FD8-950A-52461C9029AA}"/>
               </a:ext>
             </a:extLst>
           </p:cNvPr>
@@ -14655,7 +14655,7 @@
         </p:nvSpPr>
         <p:spPr>
           <a:xfrm xmlns:a="http://schemas.openxmlformats.org/drawingml/2006/main">
-            <a:off x="10001250" y="5238750"/>
+            <a:off x="10001250" y="4429125"/>
             <a:ext cx="4171950" cy="1219200"/>
           </a:xfrm>
           <a:prstGeom xmlns:a="http://schemas.openxmlformats.org/drawingml/2006/main" prst="roundRect">
@@ -14676,10 +14676,10 @@
       </p:sp>
       <p:sp>
         <p:nvSpPr>
-          <p:cNvPr id="15" name="f110">
+          <p:cNvPr id="15" name="f113">
             <a:extLst xmlns:a="http://schemas.openxmlformats.org/drawingml/2006/main">
               <a:ext uri="{FF2B5EF4-FFF2-40B4-BE49-F238E27FC236}">
-                <a16:creationId xmlns:a16="http://schemas.microsoft.com/office/drawing/2014/main" id="{E774B7B2-E26F-473C-9D06-11E6A1633FC9}"/>
+                <a16:creationId xmlns:a16="http://schemas.microsoft.com/office/drawing/2014/main" id="{43E88327-7B0D-4327-B0E6-0DB9093961BC}"/>
               </a:ext>
             </a:extLst>
           </p:cNvPr>
@@ -14690,7 +14690,7 @@
         </p:nvSpPr>
         <p:spPr>
           <a:xfrm xmlns:a="http://schemas.openxmlformats.org/drawingml/2006/main">
-            <a:off x="10191750" y="5486400"/>
+            <a:off x="10191750" y="4676775"/>
             <a:ext cx="3790950" cy="885825"/>
           </a:xfrm>
           <a:prstGeom xmlns:a="http://schemas.openxmlformats.org/drawingml/2006/main" prst="rect">
@@ -14858,10 +14858,10 @@
       </p:sp>
       <p:sp>
         <p:nvSpPr>
-          <p:cNvPr id="16" name="f111">
+          <p:cNvPr id="16" name="f114">
             <a:extLst xmlns:a="http://schemas.openxmlformats.org/drawingml/2006/main">
               <a:ext uri="{FF2B5EF4-FFF2-40B4-BE49-F238E27FC236}">
-                <a16:creationId xmlns:a16="http://schemas.microsoft.com/office/drawing/2014/main" id="{5B4EFFFE-837D-43D7-80D3-6DE1C9627DA5}"/>
+                <a16:creationId xmlns:a16="http://schemas.microsoft.com/office/drawing/2014/main" id="{8AE1C2BE-3090-45BE-A1BA-200B5CADACEA}"/>
               </a:ext>
             </a:extLst>
           </p:cNvPr>
@@ -14893,10 +14893,10 @@
       </p:sp>
       <p:sp>
         <p:nvSpPr>
-          <p:cNvPr id="17" name="f112">
+          <p:cNvPr id="17" name="f115">
             <a:extLst xmlns:a="http://schemas.openxmlformats.org/drawingml/2006/main">
               <a:ext uri="{FF2B5EF4-FFF2-40B4-BE49-F238E27FC236}">
-                <a16:creationId xmlns:a16="http://schemas.microsoft.com/office/drawing/2014/main" id="{8B34F5B1-437E-4E7D-A840-429630BAAA42}"/>
+                <a16:creationId xmlns:a16="http://schemas.microsoft.com/office/drawing/2014/main" id="{E39D5E44-A0AD-4E88-B586-0051B325E2F6}"/>
               </a:ext>
             </a:extLst>
           </p:cNvPr>
@@ -15076,7 +15076,7 @@
     </p:spTree>
     <p:extLst>
       <p:ext uri="{BB962C8B-B14F-4D97-AF65-F5344CB8AC3E}">
-        <p14:creationId xmlns:p14="http://schemas.microsoft.com/office/powerpoint/2010/main" val="1541637811"/>
+        <p14:creationId xmlns:p14="http://schemas.microsoft.com/office/powerpoint/2010/main" val="1310737145"/>
       </p:ext>
     </p:extLst>
   </p:cSld>
@@ -15107,7 +15107,7 @@
           <p:cNvPr id="15" name="">
             <a:extLst xmlns:a="http://schemas.openxmlformats.org/drawingml/2006/main">
               <a:ext uri="{FF2B5EF4-FFF2-40B4-BE49-F238E27FC236}">
-                <a16:creationId xmlns:a16="http://schemas.microsoft.com/office/drawing/2014/main" id="{D0B6632A-DBCB-493D-8719-D638AFBE2666}"/>
+                <a16:creationId xmlns:a16="http://schemas.microsoft.com/office/drawing/2014/main" id="{C5E6AD9F-7D13-4195-B00D-988FFADB4A3A}"/>
               </a:ext>
             </a:extLst>
           </p:cNvPr>
@@ -15117,7 +15117,7 @@
           <p:nvPr/>
         </p:nvPicPr>
         <p:blipFill>
-          <a:blip xmlns:r="http://schemas.openxmlformats.org/officeDocument/2006/relationships" xmlns:a="http://schemas.openxmlformats.org/drawingml/2006/main" r:embed="R62d9280e03b749da"/>
+          <a:blip xmlns:r="http://schemas.openxmlformats.org/officeDocument/2006/relationships" xmlns:a="http://schemas.openxmlformats.org/drawingml/2006/main" r:embed="R29336291263940c2"/>
           <a:stretch xmlns:a="http://schemas.openxmlformats.org/drawingml/2006/main"/>
         </p:blipFill>
         <p:spPr>
@@ -15132,10 +15132,10 @@
       </p:pic>
       <p:sp>
         <p:nvSpPr>
-          <p:cNvPr id="2" name="f114">
+          <p:cNvPr id="2" name="f117">
             <a:extLst xmlns:a="http://schemas.openxmlformats.org/drawingml/2006/main">
               <a:ext uri="{FF2B5EF4-FFF2-40B4-BE49-F238E27FC236}">
-                <a16:creationId xmlns:a16="http://schemas.microsoft.com/office/drawing/2014/main" id="{F61D5E52-4423-43E8-B3B4-6DE9653D4E5D}"/>
+                <a16:creationId xmlns:a16="http://schemas.microsoft.com/office/drawing/2014/main" id="{295DAF06-CDE0-4013-B2A5-12689AB69C1A}"/>
               </a:ext>
             </a:extLst>
           </p:cNvPr>
@@ -15291,10 +15291,10 @@
       </p:sp>
       <p:sp>
         <p:nvSpPr>
-          <p:cNvPr id="3" name="f115">
+          <p:cNvPr id="3" name="f118">
             <a:extLst xmlns:a="http://schemas.openxmlformats.org/drawingml/2006/main">
               <a:ext uri="{FF2B5EF4-FFF2-40B4-BE49-F238E27FC236}">
-                <a16:creationId xmlns:a16="http://schemas.microsoft.com/office/drawing/2014/main" id="{83F4455E-D87F-450A-BD12-B509EBF2349A}"/>
+                <a16:creationId xmlns:a16="http://schemas.microsoft.com/office/drawing/2014/main" id="{B1623AB8-3F1D-4CEB-845E-CBAFB80D2E87}"/>
               </a:ext>
             </a:extLst>
           </p:cNvPr>
@@ -15450,10 +15450,10 @@
       </p:sp>
       <p:sp>
         <p:nvSpPr>
-          <p:cNvPr id="4" name="f116">
+          <p:cNvPr id="4" name="f119">
             <a:extLst xmlns:a="http://schemas.openxmlformats.org/drawingml/2006/main">
               <a:ext uri="{FF2B5EF4-FFF2-40B4-BE49-F238E27FC236}">
-                <a16:creationId xmlns:a16="http://schemas.microsoft.com/office/drawing/2014/main" id="{047C964C-7490-45EB-9688-0B6156A22677}"/>
+                <a16:creationId xmlns:a16="http://schemas.microsoft.com/office/drawing/2014/main" id="{07294506-1286-405D-A7F9-1771A4DF11A3}"/>
               </a:ext>
             </a:extLst>
           </p:cNvPr>
@@ -15609,10 +15609,10 @@
       </p:sp>
       <p:sp>
         <p:nvSpPr>
-          <p:cNvPr id="5" name="f117">
+          <p:cNvPr id="5" name="f120">
             <a:extLst xmlns:a="http://schemas.openxmlformats.org/drawingml/2006/main">
               <a:ext uri="{FF2B5EF4-FFF2-40B4-BE49-F238E27FC236}">
-                <a16:creationId xmlns:a16="http://schemas.microsoft.com/office/drawing/2014/main" id="{412B506D-6568-4EA9-8960-E68F2D1E9720}"/>
+                <a16:creationId xmlns:a16="http://schemas.microsoft.com/office/drawing/2014/main" id="{0E4F47FF-E296-463E-B5B5-8CF8C1A99887}"/>
               </a:ext>
             </a:extLst>
           </p:cNvPr>
@@ -15768,10 +15768,10 @@
       </p:sp>
       <p:sp>
         <p:nvSpPr>
-          <p:cNvPr id="6" name="f118">
+          <p:cNvPr id="6" name="f121">
             <a:extLst xmlns:a="http://schemas.openxmlformats.org/drawingml/2006/main">
               <a:ext uri="{FF2B5EF4-FFF2-40B4-BE49-F238E27FC236}">
-                <a16:creationId xmlns:a16="http://schemas.microsoft.com/office/drawing/2014/main" id="{D9F21551-609C-4067-910A-A63E85635A18}"/>
+                <a16:creationId xmlns:a16="http://schemas.microsoft.com/office/drawing/2014/main" id="{091B4C7F-BB90-49BF-81FB-E965F4773186}"/>
               </a:ext>
             </a:extLst>
           </p:cNvPr>
@@ -15927,10 +15927,10 @@
       </p:sp>
       <p:sp>
         <p:nvSpPr>
-          <p:cNvPr id="7" name="f119">
+          <p:cNvPr id="7" name="f122">
             <a:extLst xmlns:a="http://schemas.openxmlformats.org/drawingml/2006/main">
               <a:ext uri="{FF2B5EF4-FFF2-40B4-BE49-F238E27FC236}">
-                <a16:creationId xmlns:a16="http://schemas.microsoft.com/office/drawing/2014/main" id="{0A09A49A-5105-430C-A9F2-5315EE955D3C}"/>
+                <a16:creationId xmlns:a16="http://schemas.microsoft.com/office/drawing/2014/main" id="{869B6067-0E57-4F04-9B79-E68D1B55ADA3}"/>
               </a:ext>
             </a:extLst>
           </p:cNvPr>
@@ -16086,10 +16086,10 @@
       </p:sp>
       <p:sp>
         <p:nvSpPr>
-          <p:cNvPr id="8" name="f120">
+          <p:cNvPr id="8" name="f123">
             <a:extLst xmlns:a="http://schemas.openxmlformats.org/drawingml/2006/main">
               <a:ext uri="{FF2B5EF4-FFF2-40B4-BE49-F238E27FC236}">
-                <a16:creationId xmlns:a16="http://schemas.microsoft.com/office/drawing/2014/main" id="{39887648-BC46-4067-B007-17B8A193CA63}"/>
+                <a16:creationId xmlns:a16="http://schemas.microsoft.com/office/drawing/2014/main" id="{00B80771-D2F1-46D7-9FB2-D296888742A3}"/>
               </a:ext>
             </a:extLst>
           </p:cNvPr>
@@ -16245,10 +16245,10 @@
       </p:sp>
       <p:sp>
         <p:nvSpPr>
-          <p:cNvPr id="9" name="f121">
+          <p:cNvPr id="9" name="f124">
             <a:extLst xmlns:a="http://schemas.openxmlformats.org/drawingml/2006/main">
               <a:ext uri="{FF2B5EF4-FFF2-40B4-BE49-F238E27FC236}">
-                <a16:creationId xmlns:a16="http://schemas.microsoft.com/office/drawing/2014/main" id="{084856EE-99D6-4F7B-93BD-5A9B2C3F417F}"/>
+                <a16:creationId xmlns:a16="http://schemas.microsoft.com/office/drawing/2014/main" id="{31F6612A-AB6A-4E71-BE3F-21BD55D26464}"/>
               </a:ext>
             </a:extLst>
           </p:cNvPr>
@@ -16404,10 +16404,10 @@
       </p:sp>
       <p:sp>
         <p:nvSpPr>
-          <p:cNvPr id="10" name="f122">
+          <p:cNvPr id="10" name="f125">
             <a:extLst xmlns:a="http://schemas.openxmlformats.org/drawingml/2006/main">
               <a:ext uri="{FF2B5EF4-FFF2-40B4-BE49-F238E27FC236}">
-                <a16:creationId xmlns:a16="http://schemas.microsoft.com/office/drawing/2014/main" id="{F1E09BFA-9896-4C53-AE72-24CC03E5211C}"/>
+                <a16:creationId xmlns:a16="http://schemas.microsoft.com/office/drawing/2014/main" id="{FC953AEB-AFA5-4657-B41E-67682C157F67}"/>
               </a:ext>
             </a:extLst>
           </p:cNvPr>
@@ -16563,10 +16563,10 @@
       </p:sp>
       <p:sp>
         <p:nvSpPr>
-          <p:cNvPr id="11" name="f123">
+          <p:cNvPr id="11" name="f126">
             <a:extLst xmlns:a="http://schemas.openxmlformats.org/drawingml/2006/main">
               <a:ext uri="{FF2B5EF4-FFF2-40B4-BE49-F238E27FC236}">
-                <a16:creationId xmlns:a16="http://schemas.microsoft.com/office/drawing/2014/main" id="{8C0D81BE-332F-424E-B90F-06E69D55B000}"/>
+                <a16:creationId xmlns:a16="http://schemas.microsoft.com/office/drawing/2014/main" id="{A09E4266-9833-4D9A-914A-FB514FA0D5CD}"/>
               </a:ext>
             </a:extLst>
           </p:cNvPr>
@@ -16722,10 +16722,10 @@
       </p:sp>
       <p:sp>
         <p:nvSpPr>
-          <p:cNvPr id="12" name="f124">
+          <p:cNvPr id="12" name="f127">
             <a:extLst xmlns:a="http://schemas.openxmlformats.org/drawingml/2006/main">
               <a:ext uri="{FF2B5EF4-FFF2-40B4-BE49-F238E27FC236}">
-                <a16:creationId xmlns:a16="http://schemas.microsoft.com/office/drawing/2014/main" id="{2A4E10E6-2340-49E0-BB9C-AEB5B72BA8E6}"/>
+                <a16:creationId xmlns:a16="http://schemas.microsoft.com/office/drawing/2014/main" id="{953778B1-2F3F-4072-AE82-1AC7D7E1E07B}"/>
               </a:ext>
             </a:extLst>
           </p:cNvPr>
@@ -16881,10 +16881,10 @@
       </p:sp>
       <p:sp>
         <p:nvSpPr>
-          <p:cNvPr id="13" name="f125">
+          <p:cNvPr id="13" name="f128">
             <a:extLst xmlns:a="http://schemas.openxmlformats.org/drawingml/2006/main">
               <a:ext uri="{FF2B5EF4-FFF2-40B4-BE49-F238E27FC236}">
-                <a16:creationId xmlns:a16="http://schemas.microsoft.com/office/drawing/2014/main" id="{2482C531-B392-47D4-A763-D4439FAB04BE}"/>
+                <a16:creationId xmlns:a16="http://schemas.microsoft.com/office/drawing/2014/main" id="{9D7738C4-20A3-4854-AD95-3703EACA77E0}"/>
               </a:ext>
             </a:extLst>
           </p:cNvPr>
@@ -17040,10 +17040,10 @@
       </p:sp>
       <p:sp>
         <p:nvSpPr>
-          <p:cNvPr id="14" name="f126">
+          <p:cNvPr id="14" name="f129">
             <a:extLst xmlns:a="http://schemas.openxmlformats.org/drawingml/2006/main">
               <a:ext uri="{FF2B5EF4-FFF2-40B4-BE49-F238E27FC236}">
-                <a16:creationId xmlns:a16="http://schemas.microsoft.com/office/drawing/2014/main" id="{2826D6EE-E253-4BCF-9CE1-E936FD324E70}"/>
+                <a16:creationId xmlns:a16="http://schemas.microsoft.com/office/drawing/2014/main" id="{8FB89AEE-E822-4EBC-A85A-CDD54F363A5B}"/>
               </a:ext>
             </a:extLst>
           </p:cNvPr>
@@ -17200,7 +17200,7 @@
     </p:spTree>
     <p:extLst>
       <p:ext uri="{BB962C8B-B14F-4D97-AF65-F5344CB8AC3E}">
-        <p14:creationId xmlns:p14="http://schemas.microsoft.com/office/powerpoint/2010/main" val="1995169719"/>
+        <p14:creationId xmlns:p14="http://schemas.microsoft.com/office/powerpoint/2010/main" val="1014993930"/>
       </p:ext>
     </p:extLst>
   </p:cSld>
@@ -17228,10 +17228,10 @@
       </p:grpSpPr>
       <p:sp>
         <p:nvSpPr>
-          <p:cNvPr id="13" name="f127">
+          <p:cNvPr id="13" name="f130">
             <a:extLst xmlns:a="http://schemas.openxmlformats.org/drawingml/2006/main">
               <a:ext uri="{FF2B5EF4-FFF2-40B4-BE49-F238E27FC236}">
-                <a16:creationId xmlns:a16="http://schemas.microsoft.com/office/drawing/2014/main" id="{5C3A6CA0-467A-4B81-9163-266F998041B8}"/>
+                <a16:creationId xmlns:a16="http://schemas.microsoft.com/office/drawing/2014/main" id="{A7A95DF2-2918-41A1-BA68-7835142227B0}"/>
               </a:ext>
             </a:extLst>
           </p:cNvPr>
@@ -17387,10 +17387,10 @@
       </p:sp>
       <p:sp>
         <p:nvSpPr>
-          <p:cNvPr id="2" name="f128">
+          <p:cNvPr id="2" name="f131">
             <a:extLst xmlns:a="http://schemas.openxmlformats.org/drawingml/2006/main">
               <a:ext uri="{FF2B5EF4-FFF2-40B4-BE49-F238E27FC236}">
-                <a16:creationId xmlns:a16="http://schemas.microsoft.com/office/drawing/2014/main" id="{6A8DFCD1-A956-4581-A27F-924BAC687B4F}"/>
+                <a16:creationId xmlns:a16="http://schemas.microsoft.com/office/drawing/2014/main" id="{91EC9E79-1DC0-41E5-91AF-CF779DA75CB1}"/>
               </a:ext>
             </a:extLst>
           </p:cNvPr>
@@ -17546,10 +17546,10 @@
       </p:sp>
       <p:sp>
         <p:nvSpPr>
-          <p:cNvPr id="3" name="f129">
+          <p:cNvPr id="3" name="f132">
             <a:extLst xmlns:a="http://schemas.openxmlformats.org/drawingml/2006/main">
               <a:ext uri="{FF2B5EF4-FFF2-40B4-BE49-F238E27FC236}">
-                <a16:creationId xmlns:a16="http://schemas.microsoft.com/office/drawing/2014/main" id="{CA17432D-A22C-4116-A4CE-3F11C31FD67C}"/>
+                <a16:creationId xmlns:a16="http://schemas.microsoft.com/office/drawing/2014/main" id="{24350F58-6637-441C-964F-54AB304E9001}"/>
               </a:ext>
             </a:extLst>
           </p:cNvPr>
@@ -17705,10 +17705,10 @@
       </p:sp>
       <p:sp>
         <p:nvSpPr>
-          <p:cNvPr id="4" name="f130">
+          <p:cNvPr id="4" name="f133">
             <a:extLst xmlns:a="http://schemas.openxmlformats.org/drawingml/2006/main">
               <a:ext uri="{FF2B5EF4-FFF2-40B4-BE49-F238E27FC236}">
-                <a16:creationId xmlns:a16="http://schemas.microsoft.com/office/drawing/2014/main" id="{F8FB9385-E4ED-4430-BDDA-ED25171DC4F7}"/>
+                <a16:creationId xmlns:a16="http://schemas.microsoft.com/office/drawing/2014/main" id="{09282848-AFBA-47CC-BEA0-50361F52A927}"/>
               </a:ext>
             </a:extLst>
           </p:cNvPr>
@@ -17867,7 +17867,7 @@
           <p:cNvPr id="5" name="">
             <a:extLst xmlns:a="http://schemas.openxmlformats.org/drawingml/2006/main">
               <a:ext uri="{FF2B5EF4-FFF2-40B4-BE49-F238E27FC236}">
-                <a16:creationId xmlns:a16="http://schemas.microsoft.com/office/drawing/2014/main" id="{B3C5A3E9-B944-4260-B1F8-DE9C4D4AEC97}"/>
+                <a16:creationId xmlns:a16="http://schemas.microsoft.com/office/drawing/2014/main" id="{9015D807-AD40-47EA-A838-BE588142CD4C}"/>
               </a:ext>
             </a:extLst>
           </p:cNvPr>
@@ -18700,10 +18700,10 @@
       </p:graphicFrame>
       <p:sp>
         <p:nvSpPr>
-          <p:cNvPr id="6" name="f132">
+          <p:cNvPr id="6" name="f135">
             <a:extLst xmlns:a="http://schemas.openxmlformats.org/drawingml/2006/main">
               <a:ext uri="{FF2B5EF4-FFF2-40B4-BE49-F238E27FC236}">
-                <a16:creationId xmlns:a16="http://schemas.microsoft.com/office/drawing/2014/main" id="{116270FE-3FA7-4B50-A205-FA2D9AE17DF9}"/>
+                <a16:creationId xmlns:a16="http://schemas.microsoft.com/office/drawing/2014/main" id="{486D6312-8D01-4644-A694-264A3068E37B}"/>
               </a:ext>
             </a:extLst>
           </p:cNvPr>
@@ -18735,10 +18735,10 @@
       </p:sp>
       <p:sp>
         <p:nvSpPr>
-          <p:cNvPr id="7" name="f133">
+          <p:cNvPr id="7" name="f136">
             <a:extLst xmlns:a="http://schemas.openxmlformats.org/drawingml/2006/main">
               <a:ext uri="{FF2B5EF4-FFF2-40B4-BE49-F238E27FC236}">
-                <a16:creationId xmlns:a16="http://schemas.microsoft.com/office/drawing/2014/main" id="{FB3B4BC3-F93C-498A-BFBE-1D2553257254}"/>
+                <a16:creationId xmlns:a16="http://schemas.microsoft.com/office/drawing/2014/main" id="{AFCF6CF6-1D69-4136-A704-E490750D7594}"/>
               </a:ext>
             </a:extLst>
           </p:cNvPr>
@@ -18894,10 +18894,10 @@
       </p:sp>
       <p:sp>
         <p:nvSpPr>
-          <p:cNvPr id="8" name="f134">
+          <p:cNvPr id="8" name="f137">
             <a:extLst xmlns:a="http://schemas.openxmlformats.org/drawingml/2006/main">
               <a:ext uri="{FF2B5EF4-FFF2-40B4-BE49-F238E27FC236}">
-                <a16:creationId xmlns:a16="http://schemas.microsoft.com/office/drawing/2014/main" id="{1620970C-9216-4334-9E75-D50AA88BEDD6}"/>
+                <a16:creationId xmlns:a16="http://schemas.microsoft.com/office/drawing/2014/main" id="{07D1AA39-6FDE-4E42-8F79-BB75243D3945}"/>
               </a:ext>
             </a:extLst>
           </p:cNvPr>
@@ -19053,10 +19053,10 @@
       </p:sp>
       <p:sp>
         <p:nvSpPr>
-          <p:cNvPr id="9" name="f135">
+          <p:cNvPr id="9" name="f138">
             <a:extLst xmlns:a="http://schemas.openxmlformats.org/drawingml/2006/main">
               <a:ext uri="{FF2B5EF4-FFF2-40B4-BE49-F238E27FC236}">
-                <a16:creationId xmlns:a16="http://schemas.microsoft.com/office/drawing/2014/main" id="{72A7BDDC-6E43-40B9-926D-0B7C3073B547}"/>
+                <a16:creationId xmlns:a16="http://schemas.microsoft.com/office/drawing/2014/main" id="{CAC0245E-D0BA-4A77-92E8-829E218D8F0C}"/>
               </a:ext>
             </a:extLst>
           </p:cNvPr>
@@ -19212,10 +19212,10 @@
       </p:sp>
       <p:sp>
         <p:nvSpPr>
-          <p:cNvPr id="10" name="f136">
+          <p:cNvPr id="10" name="f139">
             <a:extLst xmlns:a="http://schemas.openxmlformats.org/drawingml/2006/main">
               <a:ext uri="{FF2B5EF4-FFF2-40B4-BE49-F238E27FC236}">
-                <a16:creationId xmlns:a16="http://schemas.microsoft.com/office/drawing/2014/main" id="{C4A38772-9A13-4478-A757-9D2F7752E1B1}"/>
+                <a16:creationId xmlns:a16="http://schemas.microsoft.com/office/drawing/2014/main" id="{79A590FB-C80F-4005-B159-91E1D65976CD}"/>
               </a:ext>
             </a:extLst>
           </p:cNvPr>
@@ -19371,10 +19371,10 @@
       </p:sp>
       <p:sp>
         <p:nvSpPr>
-          <p:cNvPr id="11" name="f137">
+          <p:cNvPr id="11" name="f140">
             <a:extLst xmlns:a="http://schemas.openxmlformats.org/drawingml/2006/main">
               <a:ext uri="{FF2B5EF4-FFF2-40B4-BE49-F238E27FC236}">
-                <a16:creationId xmlns:a16="http://schemas.microsoft.com/office/drawing/2014/main" id="{629F3CD9-4FB3-4D04-8636-532BB5233098}"/>
+                <a16:creationId xmlns:a16="http://schemas.microsoft.com/office/drawing/2014/main" id="{FE02C749-3470-4E87-B5DA-AAF190483A7C}"/>
               </a:ext>
             </a:extLst>
           </p:cNvPr>
@@ -19530,10 +19530,10 @@
       </p:sp>
       <p:sp>
         <p:nvSpPr>
-          <p:cNvPr id="12" name="f138">
+          <p:cNvPr id="12" name="f141">
             <a:extLst xmlns:a="http://schemas.openxmlformats.org/drawingml/2006/main">
               <a:ext uri="{FF2B5EF4-FFF2-40B4-BE49-F238E27FC236}">
-                <a16:creationId xmlns:a16="http://schemas.microsoft.com/office/drawing/2014/main" id="{DC085209-850D-4F0F-8468-CFB20F91C0FC}"/>
+                <a16:creationId xmlns:a16="http://schemas.microsoft.com/office/drawing/2014/main" id="{403708EC-3106-47B0-A556-C413DA3E7C3D}"/>
               </a:ext>
             </a:extLst>
           </p:cNvPr>
@@ -19690,7 +19690,7 @@
     </p:spTree>
     <p:extLst>
       <p:ext uri="{BB962C8B-B14F-4D97-AF65-F5344CB8AC3E}">
-        <p14:creationId xmlns:p14="http://schemas.microsoft.com/office/powerpoint/2010/main" val="1212662986"/>
+        <p14:creationId xmlns:p14="http://schemas.microsoft.com/office/powerpoint/2010/main" val="1493251670"/>
       </p:ext>
     </p:extLst>
   </p:cSld>
@@ -19718,10 +19718,10 @@
       </p:grpSpPr>
       <p:sp>
         <p:nvSpPr>
-          <p:cNvPr id="23" name="f139">
+          <p:cNvPr id="49" name="f142">
             <a:extLst xmlns:a="http://schemas.openxmlformats.org/drawingml/2006/main">
               <a:ext uri="{FF2B5EF4-FFF2-40B4-BE49-F238E27FC236}">
-                <a16:creationId xmlns:a16="http://schemas.microsoft.com/office/drawing/2014/main" id="{9F6D5444-BD87-433B-BFD5-3006D2AC9EAF}"/>
+                <a16:creationId xmlns:a16="http://schemas.microsoft.com/office/drawing/2014/main" id="{60121B99-A88B-4D19-8406-0857731F4A50}"/>
               </a:ext>
             </a:extLst>
           </p:cNvPr>
@@ -19877,10 +19877,10 @@
       </p:sp>
       <p:sp>
         <p:nvSpPr>
-          <p:cNvPr id="2" name="f140">
+          <p:cNvPr id="2" name="f143">
             <a:extLst xmlns:a="http://schemas.openxmlformats.org/drawingml/2006/main">
               <a:ext uri="{FF2B5EF4-FFF2-40B4-BE49-F238E27FC236}">
-                <a16:creationId xmlns:a16="http://schemas.microsoft.com/office/drawing/2014/main" id="{B424BB65-7FDA-4C40-9447-28B82E222570}"/>
+                <a16:creationId xmlns:a16="http://schemas.microsoft.com/office/drawing/2014/main" id="{217195AB-E189-4BD9-9DD0-E3CB172E7B8E}"/>
               </a:ext>
             </a:extLst>
           </p:cNvPr>
@@ -20036,10 +20036,10 @@
       </p:sp>
       <p:sp>
         <p:nvSpPr>
-          <p:cNvPr id="3" name="f141">
+          <p:cNvPr id="3" name="f144">
             <a:extLst xmlns:a="http://schemas.openxmlformats.org/drawingml/2006/main">
               <a:ext uri="{FF2B5EF4-FFF2-40B4-BE49-F238E27FC236}">
-                <a16:creationId xmlns:a16="http://schemas.microsoft.com/office/drawing/2014/main" id="{0AAA9575-EF0C-42EE-8249-BFB6FE713FEE}"/>
+                <a16:creationId xmlns:a16="http://schemas.microsoft.com/office/drawing/2014/main" id="{A50EB6C3-405D-4465-B6C0-0F2D7FE5124C}"/>
               </a:ext>
             </a:extLst>
           </p:cNvPr>
@@ -20195,10 +20195,10 @@
       </p:sp>
       <p:sp>
         <p:nvSpPr>
-          <p:cNvPr id="4" name="f142">
+          <p:cNvPr id="4" name="f145">
             <a:extLst xmlns:a="http://schemas.openxmlformats.org/drawingml/2006/main">
               <a:ext uri="{FF2B5EF4-FFF2-40B4-BE49-F238E27FC236}">
-                <a16:creationId xmlns:a16="http://schemas.microsoft.com/office/drawing/2014/main" id="{B006EF4D-901F-4E09-BA8B-35714BCBD4DC}"/>
+                <a16:creationId xmlns:a16="http://schemas.microsoft.com/office/drawing/2014/main" id="{EE2ED967-E571-41BA-B636-AD7510DA500E}"/>
               </a:ext>
             </a:extLst>
           </p:cNvPr>
@@ -20352,40 +20352,12 @@
           </a:p>
         </p:txBody>
       </p:sp>
-      <p:pic>
-        <p:nvPicPr>
-          <p:cNvPr id="5" name="">
+      <p:sp>
+        <p:nvSpPr>
+          <p:cNvPr id="5" name="f146">
             <a:extLst xmlns:a="http://schemas.openxmlformats.org/drawingml/2006/main">
               <a:ext uri="{FF2B5EF4-FFF2-40B4-BE49-F238E27FC236}">
-                <a16:creationId xmlns:a16="http://schemas.microsoft.com/office/drawing/2014/main" id="{D537BC9A-EB29-4AEC-A7AB-7909152FD5E0}"/>
-              </a:ext>
-            </a:extLst>
-          </p:cNvPr>
-          <p:cNvPicPr>
-            <a:picLocks xmlns:a="http://schemas.openxmlformats.org/drawingml/2006/main" noChangeAspect="1"/>
-          </p:cNvPicPr>
-          <p:nvPr/>
-        </p:nvPicPr>
-        <p:blipFill>
-          <a:blip xmlns:r="http://schemas.openxmlformats.org/officeDocument/2006/relationships" xmlns:a="http://schemas.openxmlformats.org/drawingml/2006/main" r:embed="R719bab334dac411a"/>
-          <a:stretch xmlns:a="http://schemas.openxmlformats.org/drawingml/2006/main"/>
-        </p:blipFill>
-        <p:spPr>
-          <a:xfrm xmlns:a="http://schemas.openxmlformats.org/drawingml/2006/main">
-            <a:off x="0" y="0"/>
-            <a:ext cx="15240000" cy="8572500"/>
-          </a:xfrm>
-          <a:prstGeom xmlns:a="http://schemas.openxmlformats.org/drawingml/2006/main" prst="rect">
-            <a:avLst/>
-          </a:prstGeom>
-        </p:spPr>
-      </p:pic>
-      <p:sp>
-        <p:nvSpPr>
-          <p:cNvPr id="6" name="f144">
-            <a:extLst xmlns:a="http://schemas.openxmlformats.org/drawingml/2006/main">
-              <a:ext uri="{FF2B5EF4-FFF2-40B4-BE49-F238E27FC236}">
-                <a16:creationId xmlns:a16="http://schemas.microsoft.com/office/drawing/2014/main" id="{4D65BD55-5471-4CE5-A856-56C44E208477}"/>
+                <a16:creationId xmlns:a16="http://schemas.microsoft.com/office/drawing/2014/main" id="{850ECB51-B1BF-46AE-890F-8306C185E5B9}"/>
               </a:ext>
             </a:extLst>
           </p:cNvPr>
@@ -20396,155 +20368,31 @@
         </p:nvSpPr>
         <p:spPr>
           <a:xfrm xmlns:a="http://schemas.openxmlformats.org/drawingml/2006/main">
-            <a:off x="3439224" y="3404173"/>
-            <a:ext cx="1666429" cy="238530"/>
+            <a:off x="3048000" y="3048000"/>
+            <a:ext cx="2095500" cy="590550"/>
           </a:xfrm>
-          <a:prstGeom xmlns:a="http://schemas.openxmlformats.org/drawingml/2006/main" prst="rect">
-            <a:avLst/>
+          <a:prstGeom xmlns:a="http://schemas.openxmlformats.org/drawingml/2006/main" prst="roundRect">
+            <a:avLst>
+              <a:gd name="adj" fmla="val 19355"/>
+            </a:avLst>
           </a:prstGeom>
-          <a:noFill xmlns:a="http://schemas.openxmlformats.org/drawingml/2006/main"/>
-          <a:ln xmlns:a="http://schemas.openxmlformats.org/drawingml/2006/main" w="0">
-            <a:noFill/>
+          <a:solidFill xmlns:a="http://schemas.openxmlformats.org/drawingml/2006/main">
+            <a:srgbClr val="FFFFFF"/>
+          </a:solidFill>
+          <a:ln xmlns:a="http://schemas.openxmlformats.org/drawingml/2006/main" w="17145">
+            <a:solidFill>
+              <a:srgbClr val="D9E3EF"/>
+            </a:solidFill>
             <a:prstDash val="solid"/>
           </a:ln>
         </p:spPr>
-        <p:txBody>
-          <a:bodyPr xmlns:a="http://schemas.openxmlformats.org/drawingml/2006/main" wrap="none" lIns="0" tIns="0" rIns="0" bIns="0" anchor="t">
-            <a:noAutofit/>
-          </a:bodyPr>
-          <a:lstStyle xmlns:a="http://schemas.openxmlformats.org/drawingml/2006/main">
-            <a:defPPr algn="l">
-              <a:defRPr sz="1391" b="1">
-                <a:solidFill>
-                  <a:srgbClr val="182536"/>
-                </a:solidFill>
-                <a:latin typeface="Nimbus Sans"/>
-                <a:ea typeface="Nimbus Sans"/>
-                <a:cs typeface="Nimbus Sans"/>
-              </a:defRPr>
-            </a:defPPr>
-            <a:lvl1pPr algn="l">
-              <a:defRPr sz="1391" b="1">
-                <a:solidFill>
-                  <a:srgbClr val="182536"/>
-                </a:solidFill>
-                <a:latin typeface="Nimbus Sans"/>
-                <a:ea typeface="Nimbus Sans"/>
-                <a:cs typeface="Nimbus Sans"/>
-              </a:defRPr>
-            </a:lvl1pPr>
-            <a:lvl2pPr algn="l">
-              <a:defRPr sz="1391" b="1">
-                <a:solidFill>
-                  <a:srgbClr val="182536"/>
-                </a:solidFill>
-                <a:latin typeface="Nimbus Sans"/>
-                <a:ea typeface="Nimbus Sans"/>
-                <a:cs typeface="Nimbus Sans"/>
-              </a:defRPr>
-            </a:lvl2pPr>
-            <a:lvl3pPr algn="l">
-              <a:defRPr sz="1391" b="1">
-                <a:solidFill>
-                  <a:srgbClr val="182536"/>
-                </a:solidFill>
-                <a:latin typeface="Nimbus Sans"/>
-                <a:ea typeface="Nimbus Sans"/>
-                <a:cs typeface="Nimbus Sans"/>
-              </a:defRPr>
-            </a:lvl3pPr>
-            <a:lvl4pPr algn="l">
-              <a:defRPr sz="1391" b="1">
-                <a:solidFill>
-                  <a:srgbClr val="182536"/>
-                </a:solidFill>
-                <a:latin typeface="Nimbus Sans"/>
-                <a:ea typeface="Nimbus Sans"/>
-                <a:cs typeface="Nimbus Sans"/>
-              </a:defRPr>
-            </a:lvl4pPr>
-            <a:lvl5pPr algn="l">
-              <a:defRPr sz="1391" b="1">
-                <a:solidFill>
-                  <a:srgbClr val="182536"/>
-                </a:solidFill>
-                <a:latin typeface="Nimbus Sans"/>
-                <a:ea typeface="Nimbus Sans"/>
-                <a:cs typeface="Nimbus Sans"/>
-              </a:defRPr>
-            </a:lvl5pPr>
-            <a:lvl6pPr algn="l">
-              <a:defRPr sz="1391" b="1">
-                <a:solidFill>
-                  <a:srgbClr val="182536"/>
-                </a:solidFill>
-                <a:latin typeface="Nimbus Sans"/>
-                <a:ea typeface="Nimbus Sans"/>
-                <a:cs typeface="Nimbus Sans"/>
-              </a:defRPr>
-            </a:lvl6pPr>
-            <a:lvl7pPr algn="l">
-              <a:defRPr sz="1391" b="1">
-                <a:solidFill>
-                  <a:srgbClr val="182536"/>
-                </a:solidFill>
-                <a:latin typeface="Nimbus Sans"/>
-                <a:ea typeface="Nimbus Sans"/>
-                <a:cs typeface="Nimbus Sans"/>
-              </a:defRPr>
-            </a:lvl7pPr>
-            <a:lvl8pPr algn="l">
-              <a:defRPr sz="1391" b="1">
-                <a:solidFill>
-                  <a:srgbClr val="182536"/>
-                </a:solidFill>
-                <a:latin typeface="Nimbus Sans"/>
-                <a:ea typeface="Nimbus Sans"/>
-                <a:cs typeface="Nimbus Sans"/>
-              </a:defRPr>
-            </a:lvl8pPr>
-            <a:lvl9pPr algn="l">
-              <a:defRPr sz="1391" b="1">
-                <a:solidFill>
-                  <a:srgbClr val="182536"/>
-                </a:solidFill>
-                <a:latin typeface="Nimbus Sans"/>
-                <a:ea typeface="Nimbus Sans"/>
-                <a:cs typeface="Nimbus Sans"/>
-              </a:defRPr>
-            </a:lvl9pPr>
-          </a:lstStyle>
-          <a:p xmlns:a="http://schemas.openxmlformats.org/drawingml/2006/main">
-            <a:pPr algn="l">
-              <a:defRPr sz="1391" b="1">
-                <a:solidFill>
-                  <a:srgbClr val="182536"/>
-                </a:solidFill>
-                <a:latin typeface="Nimbus Sans"/>
-                <a:ea typeface="Nimbus Sans"/>
-                <a:cs typeface="Nimbus Sans"/>
-              </a:defRPr>
-            </a:pPr>
-            <a:r>
-              <a:rPr sz="1391" b="1">
-                <a:solidFill>
-                  <a:srgbClr val="182536"/>
-                </a:solidFill>
-                <a:latin typeface="Nimbus Sans"/>
-                <a:ea typeface="Nimbus Sans"/>
-                <a:cs typeface="Nimbus Sans"/>
-              </a:rPr>
-              <a:t>PCAP ORIGINALE</a:t>
-            </a:r>
-          </a:p>
-        </p:txBody>
       </p:sp>
       <p:sp>
         <p:nvSpPr>
-          <p:cNvPr id="7" name="f145">
+          <p:cNvPr id="6" name="f147">
             <a:extLst xmlns:a="http://schemas.openxmlformats.org/drawingml/2006/main">
               <a:ext uri="{FF2B5EF4-FFF2-40B4-BE49-F238E27FC236}">
-                <a16:creationId xmlns:a16="http://schemas.microsoft.com/office/drawing/2014/main" id="{1DEC99A6-73BB-4A74-AA2D-CFCD7C92C6BF}"/>
+                <a16:creationId xmlns:a16="http://schemas.microsoft.com/office/drawing/2014/main" id="{730BA463-A684-4437-AE06-10C5387E18A1}"/>
               </a:ext>
             </a:extLst>
           </p:cNvPr>
@@ -20555,1757 +20403,8 @@
         </p:nvSpPr>
         <p:spPr>
           <a:xfrm xmlns:a="http://schemas.openxmlformats.org/drawingml/2006/main">
-            <a:off x="3644831" y="4549470"/>
-            <a:ext cx="1255216" cy="313496"/>
-          </a:xfrm>
-          <a:prstGeom xmlns:a="http://schemas.openxmlformats.org/drawingml/2006/main" prst="rect">
-            <a:avLst/>
-          </a:prstGeom>
-          <a:noFill xmlns:a="http://schemas.openxmlformats.org/drawingml/2006/main"/>
-          <a:ln xmlns:a="http://schemas.openxmlformats.org/drawingml/2006/main" w="0">
-            <a:noFill/>
-            <a:prstDash val="solid"/>
-          </a:ln>
-        </p:spPr>
-        <p:txBody>
-          <a:bodyPr xmlns:a="http://schemas.openxmlformats.org/drawingml/2006/main" wrap="none" lIns="0" tIns="0" rIns="0" bIns="0" anchor="t">
-            <a:noAutofit/>
-          </a:bodyPr>
-          <a:lstStyle xmlns:a="http://schemas.openxmlformats.org/drawingml/2006/main">
-            <a:defPPr algn="l">
-              <a:defRPr sz="1829" b="1">
-                <a:solidFill>
-                  <a:srgbClr val="278766"/>
-                </a:solidFill>
-                <a:latin typeface="Nimbus Sans"/>
-                <a:ea typeface="Nimbus Sans"/>
-                <a:cs typeface="Nimbus Sans"/>
-              </a:defRPr>
-            </a:defPPr>
-            <a:lvl1pPr algn="l">
-              <a:defRPr sz="1829" b="1">
-                <a:solidFill>
-                  <a:srgbClr val="278766"/>
-                </a:solidFill>
-                <a:latin typeface="Nimbus Sans"/>
-                <a:ea typeface="Nimbus Sans"/>
-                <a:cs typeface="Nimbus Sans"/>
-              </a:defRPr>
-            </a:lvl1pPr>
-            <a:lvl2pPr algn="l">
-              <a:defRPr sz="1829" b="1">
-                <a:solidFill>
-                  <a:srgbClr val="278766"/>
-                </a:solidFill>
-                <a:latin typeface="Nimbus Sans"/>
-                <a:ea typeface="Nimbus Sans"/>
-                <a:cs typeface="Nimbus Sans"/>
-              </a:defRPr>
-            </a:lvl2pPr>
-            <a:lvl3pPr algn="l">
-              <a:defRPr sz="1829" b="1">
-                <a:solidFill>
-                  <a:srgbClr val="278766"/>
-                </a:solidFill>
-                <a:latin typeface="Nimbus Sans"/>
-                <a:ea typeface="Nimbus Sans"/>
-                <a:cs typeface="Nimbus Sans"/>
-              </a:defRPr>
-            </a:lvl3pPr>
-            <a:lvl4pPr algn="l">
-              <a:defRPr sz="1829" b="1">
-                <a:solidFill>
-                  <a:srgbClr val="278766"/>
-                </a:solidFill>
-                <a:latin typeface="Nimbus Sans"/>
-                <a:ea typeface="Nimbus Sans"/>
-                <a:cs typeface="Nimbus Sans"/>
-              </a:defRPr>
-            </a:lvl4pPr>
-            <a:lvl5pPr algn="l">
-              <a:defRPr sz="1829" b="1">
-                <a:solidFill>
-                  <a:srgbClr val="278766"/>
-                </a:solidFill>
-                <a:latin typeface="Nimbus Sans"/>
-                <a:ea typeface="Nimbus Sans"/>
-                <a:cs typeface="Nimbus Sans"/>
-              </a:defRPr>
-            </a:lvl5pPr>
-            <a:lvl6pPr algn="l">
-              <a:defRPr sz="1829" b="1">
-                <a:solidFill>
-                  <a:srgbClr val="278766"/>
-                </a:solidFill>
-                <a:latin typeface="Nimbus Sans"/>
-                <a:ea typeface="Nimbus Sans"/>
-                <a:cs typeface="Nimbus Sans"/>
-              </a:defRPr>
-            </a:lvl6pPr>
-            <a:lvl7pPr algn="l">
-              <a:defRPr sz="1829" b="1">
-                <a:solidFill>
-                  <a:srgbClr val="278766"/>
-                </a:solidFill>
-                <a:latin typeface="Nimbus Sans"/>
-                <a:ea typeface="Nimbus Sans"/>
-                <a:cs typeface="Nimbus Sans"/>
-              </a:defRPr>
-            </a:lvl7pPr>
-            <a:lvl8pPr algn="l">
-              <a:defRPr sz="1829" b="1">
-                <a:solidFill>
-                  <a:srgbClr val="278766"/>
-                </a:solidFill>
-                <a:latin typeface="Nimbus Sans"/>
-                <a:ea typeface="Nimbus Sans"/>
-                <a:cs typeface="Nimbus Sans"/>
-              </a:defRPr>
-            </a:lvl8pPr>
-            <a:lvl9pPr algn="l">
-              <a:defRPr sz="1829" b="1">
-                <a:solidFill>
-                  <a:srgbClr val="278766"/>
-                </a:solidFill>
-                <a:latin typeface="Nimbus Sans"/>
-                <a:ea typeface="Nimbus Sans"/>
-                <a:cs typeface="Nimbus Sans"/>
-              </a:defRPr>
-            </a:lvl9pPr>
-          </a:lstStyle>
-          <a:p xmlns:a="http://schemas.openxmlformats.org/drawingml/2006/main">
-            <a:pPr algn="l">
-              <a:defRPr sz="1829" b="1">
-                <a:solidFill>
-                  <a:srgbClr val="278766"/>
-                </a:solidFill>
-                <a:latin typeface="Nimbus Sans"/>
-                <a:ea typeface="Nimbus Sans"/>
-                <a:cs typeface="Nimbus Sans"/>
-              </a:defRPr>
-            </a:pPr>
-            <a:r>
-              <a:rPr sz="1829" b="1">
-                <a:solidFill>
-                  <a:srgbClr val="278766"/>
-                </a:solidFill>
-                <a:latin typeface="Nimbus Sans"/>
-                <a:ea typeface="Nimbus Sans"/>
-                <a:cs typeface="Nimbus Sans"/>
-              </a:rPr>
-              <a:t>Pipeline di</a:t>
-            </a:r>
-          </a:p>
-        </p:txBody>
-      </p:sp>
-      <p:sp>
-        <p:nvSpPr>
-          <p:cNvPr id="8" name="f146">
-            <a:extLst xmlns:a="http://schemas.openxmlformats.org/drawingml/2006/main">
-              <a:ext uri="{FF2B5EF4-FFF2-40B4-BE49-F238E27FC236}">
-                <a16:creationId xmlns:a16="http://schemas.microsoft.com/office/drawing/2014/main" id="{0C765244-A8E4-412E-935F-E0918D2DC44D}"/>
-              </a:ext>
-            </a:extLst>
-          </p:cNvPr>
-          <p:cNvSpPr>
-            <a:spLocks xmlns:a="http://schemas.openxmlformats.org/drawingml/2006/main" noGrp="1"/>
-          </p:cNvSpPr>
-          <p:nvPr/>
-        </p:nvSpPr>
-        <p:spPr>
-          <a:xfrm xmlns:a="http://schemas.openxmlformats.org/drawingml/2006/main">
-            <a:off x="3816950" y="4832172"/>
-            <a:ext cx="910977" cy="313496"/>
-          </a:xfrm>
-          <a:prstGeom xmlns:a="http://schemas.openxmlformats.org/drawingml/2006/main" prst="rect">
-            <a:avLst/>
-          </a:prstGeom>
-          <a:noFill xmlns:a="http://schemas.openxmlformats.org/drawingml/2006/main"/>
-          <a:ln xmlns:a="http://schemas.openxmlformats.org/drawingml/2006/main" w="0">
-            <a:noFill/>
-            <a:prstDash val="solid"/>
-          </a:ln>
-        </p:spPr>
-        <p:txBody>
-          <a:bodyPr xmlns:a="http://schemas.openxmlformats.org/drawingml/2006/main" wrap="none" lIns="0" tIns="0" rIns="0" bIns="0" anchor="t">
-            <a:noAutofit/>
-          </a:bodyPr>
-          <a:lstStyle xmlns:a="http://schemas.openxmlformats.org/drawingml/2006/main">
-            <a:defPPr algn="l">
-              <a:defRPr sz="1829" b="1">
-                <a:solidFill>
-                  <a:srgbClr val="278766"/>
-                </a:solidFill>
-                <a:latin typeface="Nimbus Sans"/>
-                <a:ea typeface="Nimbus Sans"/>
-                <a:cs typeface="Nimbus Sans"/>
-              </a:defRPr>
-            </a:defPPr>
-            <a:lvl1pPr algn="l">
-              <a:defRPr sz="1829" b="1">
-                <a:solidFill>
-                  <a:srgbClr val="278766"/>
-                </a:solidFill>
-                <a:latin typeface="Nimbus Sans"/>
-                <a:ea typeface="Nimbus Sans"/>
-                <a:cs typeface="Nimbus Sans"/>
-              </a:defRPr>
-            </a:lvl1pPr>
-            <a:lvl2pPr algn="l">
-              <a:defRPr sz="1829" b="1">
-                <a:solidFill>
-                  <a:srgbClr val="278766"/>
-                </a:solidFill>
-                <a:latin typeface="Nimbus Sans"/>
-                <a:ea typeface="Nimbus Sans"/>
-                <a:cs typeface="Nimbus Sans"/>
-              </a:defRPr>
-            </a:lvl2pPr>
-            <a:lvl3pPr algn="l">
-              <a:defRPr sz="1829" b="1">
-                <a:solidFill>
-                  <a:srgbClr val="278766"/>
-                </a:solidFill>
-                <a:latin typeface="Nimbus Sans"/>
-                <a:ea typeface="Nimbus Sans"/>
-                <a:cs typeface="Nimbus Sans"/>
-              </a:defRPr>
-            </a:lvl3pPr>
-            <a:lvl4pPr algn="l">
-              <a:defRPr sz="1829" b="1">
-                <a:solidFill>
-                  <a:srgbClr val="278766"/>
-                </a:solidFill>
-                <a:latin typeface="Nimbus Sans"/>
-                <a:ea typeface="Nimbus Sans"/>
-                <a:cs typeface="Nimbus Sans"/>
-              </a:defRPr>
-            </a:lvl4pPr>
-            <a:lvl5pPr algn="l">
-              <a:defRPr sz="1829" b="1">
-                <a:solidFill>
-                  <a:srgbClr val="278766"/>
-                </a:solidFill>
-                <a:latin typeface="Nimbus Sans"/>
-                <a:ea typeface="Nimbus Sans"/>
-                <a:cs typeface="Nimbus Sans"/>
-              </a:defRPr>
-            </a:lvl5pPr>
-            <a:lvl6pPr algn="l">
-              <a:defRPr sz="1829" b="1">
-                <a:solidFill>
-                  <a:srgbClr val="278766"/>
-                </a:solidFill>
-                <a:latin typeface="Nimbus Sans"/>
-                <a:ea typeface="Nimbus Sans"/>
-                <a:cs typeface="Nimbus Sans"/>
-              </a:defRPr>
-            </a:lvl6pPr>
-            <a:lvl7pPr algn="l">
-              <a:defRPr sz="1829" b="1">
-                <a:solidFill>
-                  <a:srgbClr val="278766"/>
-                </a:solidFill>
-                <a:latin typeface="Nimbus Sans"/>
-                <a:ea typeface="Nimbus Sans"/>
-                <a:cs typeface="Nimbus Sans"/>
-              </a:defRPr>
-            </a:lvl7pPr>
-            <a:lvl8pPr algn="l">
-              <a:defRPr sz="1829" b="1">
-                <a:solidFill>
-                  <a:srgbClr val="278766"/>
-                </a:solidFill>
-                <a:latin typeface="Nimbus Sans"/>
-                <a:ea typeface="Nimbus Sans"/>
-                <a:cs typeface="Nimbus Sans"/>
-              </a:defRPr>
-            </a:lvl8pPr>
-            <a:lvl9pPr algn="l">
-              <a:defRPr sz="1829" b="1">
-                <a:solidFill>
-                  <a:srgbClr val="278766"/>
-                </a:solidFill>
-                <a:latin typeface="Nimbus Sans"/>
-                <a:ea typeface="Nimbus Sans"/>
-                <a:cs typeface="Nimbus Sans"/>
-              </a:defRPr>
-            </a:lvl9pPr>
-          </a:lstStyle>
-          <a:p xmlns:a="http://schemas.openxmlformats.org/drawingml/2006/main">
-            <a:pPr algn="l">
-              <a:defRPr sz="1829" b="1">
-                <a:solidFill>
-                  <a:srgbClr val="278766"/>
-                </a:solidFill>
-                <a:latin typeface="Nimbus Sans"/>
-                <a:ea typeface="Nimbus Sans"/>
-                <a:cs typeface="Nimbus Sans"/>
-              </a:defRPr>
-            </a:pPr>
-            <a:r>
-              <a:rPr sz="1829" b="1">
-                <a:solidFill>
-                  <a:srgbClr val="278766"/>
-                </a:solidFill>
-                <a:latin typeface="Nimbus Sans"/>
-                <a:ea typeface="Nimbus Sans"/>
-                <a:cs typeface="Nimbus Sans"/>
-              </a:rPr>
-              <a:t>verifica</a:t>
-            </a:r>
-          </a:p>
-        </p:txBody>
-      </p:sp>
-      <p:sp>
-        <p:nvSpPr>
-          <p:cNvPr id="9" name="f147">
-            <a:extLst xmlns:a="http://schemas.openxmlformats.org/drawingml/2006/main">
-              <a:ext uri="{FF2B5EF4-FFF2-40B4-BE49-F238E27FC236}">
-                <a16:creationId xmlns:a16="http://schemas.microsoft.com/office/drawing/2014/main" id="{C1F01AAE-FD59-45D7-A9C2-0EF3E6E3DD79}"/>
-              </a:ext>
-            </a:extLst>
-          </p:cNvPr>
-          <p:cNvSpPr>
-            <a:spLocks xmlns:a="http://schemas.openxmlformats.org/drawingml/2006/main" noGrp="1"/>
-          </p:cNvSpPr>
-          <p:nvPr/>
-        </p:nvSpPr>
-        <p:spPr>
-          <a:xfrm xmlns:a="http://schemas.openxmlformats.org/drawingml/2006/main">
-            <a:off x="1412081" y="4962568"/>
-            <a:ext cx="571500" cy="306681"/>
-          </a:xfrm>
-          <a:prstGeom xmlns:a="http://schemas.openxmlformats.org/drawingml/2006/main" prst="rect">
-            <a:avLst/>
-          </a:prstGeom>
-          <a:noFill xmlns:a="http://schemas.openxmlformats.org/drawingml/2006/main"/>
-          <a:ln xmlns:a="http://schemas.openxmlformats.org/drawingml/2006/main" w="0">
-            <a:noFill/>
-            <a:prstDash val="solid"/>
-          </a:ln>
-        </p:spPr>
-        <p:txBody>
-          <a:bodyPr xmlns:a="http://schemas.openxmlformats.org/drawingml/2006/main" wrap="none" lIns="0" tIns="0" rIns="0" bIns="0" anchor="t">
-            <a:noAutofit/>
-          </a:bodyPr>
-          <a:lstStyle xmlns:a="http://schemas.openxmlformats.org/drawingml/2006/main">
-            <a:defPPr algn="l">
-              <a:defRPr sz="1789" b="1">
-                <a:solidFill>
-                  <a:srgbClr val="4264D0"/>
-                </a:solidFill>
-                <a:latin typeface="Nimbus Sans"/>
-                <a:ea typeface="Nimbus Sans"/>
-                <a:cs typeface="Nimbus Sans"/>
-              </a:defRPr>
-            </a:defPPr>
-            <a:lvl1pPr algn="l">
-              <a:defRPr sz="1789" b="1">
-                <a:solidFill>
-                  <a:srgbClr val="4264D0"/>
-                </a:solidFill>
-                <a:latin typeface="Nimbus Sans"/>
-                <a:ea typeface="Nimbus Sans"/>
-                <a:cs typeface="Nimbus Sans"/>
-              </a:defRPr>
-            </a:lvl1pPr>
-            <a:lvl2pPr algn="l">
-              <a:defRPr sz="1789" b="1">
-                <a:solidFill>
-                  <a:srgbClr val="4264D0"/>
-                </a:solidFill>
-                <a:latin typeface="Nimbus Sans"/>
-                <a:ea typeface="Nimbus Sans"/>
-                <a:cs typeface="Nimbus Sans"/>
-              </a:defRPr>
-            </a:lvl2pPr>
-            <a:lvl3pPr algn="l">
-              <a:defRPr sz="1789" b="1">
-                <a:solidFill>
-                  <a:srgbClr val="4264D0"/>
-                </a:solidFill>
-                <a:latin typeface="Nimbus Sans"/>
-                <a:ea typeface="Nimbus Sans"/>
-                <a:cs typeface="Nimbus Sans"/>
-              </a:defRPr>
-            </a:lvl3pPr>
-            <a:lvl4pPr algn="l">
-              <a:defRPr sz="1789" b="1">
-                <a:solidFill>
-                  <a:srgbClr val="4264D0"/>
-                </a:solidFill>
-                <a:latin typeface="Nimbus Sans"/>
-                <a:ea typeface="Nimbus Sans"/>
-                <a:cs typeface="Nimbus Sans"/>
-              </a:defRPr>
-            </a:lvl4pPr>
-            <a:lvl5pPr algn="l">
-              <a:defRPr sz="1789" b="1">
-                <a:solidFill>
-                  <a:srgbClr val="4264D0"/>
-                </a:solidFill>
-                <a:latin typeface="Nimbus Sans"/>
-                <a:ea typeface="Nimbus Sans"/>
-                <a:cs typeface="Nimbus Sans"/>
-              </a:defRPr>
-            </a:lvl5pPr>
-            <a:lvl6pPr algn="l">
-              <a:defRPr sz="1789" b="1">
-                <a:solidFill>
-                  <a:srgbClr val="4264D0"/>
-                </a:solidFill>
-                <a:latin typeface="Nimbus Sans"/>
-                <a:ea typeface="Nimbus Sans"/>
-                <a:cs typeface="Nimbus Sans"/>
-              </a:defRPr>
-            </a:lvl6pPr>
-            <a:lvl7pPr algn="l">
-              <a:defRPr sz="1789" b="1">
-                <a:solidFill>
-                  <a:srgbClr val="4264D0"/>
-                </a:solidFill>
-                <a:latin typeface="Nimbus Sans"/>
-                <a:ea typeface="Nimbus Sans"/>
-                <a:cs typeface="Nimbus Sans"/>
-              </a:defRPr>
-            </a:lvl7pPr>
-            <a:lvl8pPr algn="l">
-              <a:defRPr sz="1789" b="1">
-                <a:solidFill>
-                  <a:srgbClr val="4264D0"/>
-                </a:solidFill>
-                <a:latin typeface="Nimbus Sans"/>
-                <a:ea typeface="Nimbus Sans"/>
-                <a:cs typeface="Nimbus Sans"/>
-              </a:defRPr>
-            </a:lvl8pPr>
-            <a:lvl9pPr algn="l">
-              <a:defRPr sz="1789" b="1">
-                <a:solidFill>
-                  <a:srgbClr val="4264D0"/>
-                </a:solidFill>
-                <a:latin typeface="Nimbus Sans"/>
-                <a:ea typeface="Nimbus Sans"/>
-                <a:cs typeface="Nimbus Sans"/>
-              </a:defRPr>
-            </a:lvl9pPr>
-          </a:lstStyle>
-          <a:p xmlns:a="http://schemas.openxmlformats.org/drawingml/2006/main">
-            <a:pPr algn="l">
-              <a:defRPr sz="1789" b="1">
-                <a:solidFill>
-                  <a:srgbClr val="4264D0"/>
-                </a:solidFill>
-                <a:latin typeface="Nimbus Sans"/>
-                <a:ea typeface="Nimbus Sans"/>
-                <a:cs typeface="Nimbus Sans"/>
-              </a:defRPr>
-            </a:pPr>
-            <a:r>
-              <a:rPr sz="1789" b="1">
-                <a:solidFill>
-                  <a:srgbClr val="4264D0"/>
-                </a:solidFill>
-                <a:latin typeface="Nimbus Sans"/>
-                <a:ea typeface="Nimbus Sans"/>
-                <a:cs typeface="Nimbus Sans"/>
-              </a:rPr>
-              <a:t>DSL</a:t>
-            </a:r>
-          </a:p>
-        </p:txBody>
-      </p:sp>
-      <p:sp>
-        <p:nvSpPr>
-          <p:cNvPr id="10" name="f148">
-            <a:extLst xmlns:a="http://schemas.openxmlformats.org/drawingml/2006/main">
-              <a:ext uri="{FF2B5EF4-FFF2-40B4-BE49-F238E27FC236}">
-                <a16:creationId xmlns:a16="http://schemas.microsoft.com/office/drawing/2014/main" id="{5EEFB45C-090B-48D4-839E-A5EA06095561}"/>
-              </a:ext>
-            </a:extLst>
-          </p:cNvPr>
-          <p:cNvSpPr>
-            <a:spLocks xmlns:a="http://schemas.openxmlformats.org/drawingml/2006/main" noGrp="1"/>
-          </p:cNvSpPr>
-          <p:nvPr/>
-        </p:nvSpPr>
-        <p:spPr>
-          <a:xfrm xmlns:a="http://schemas.openxmlformats.org/drawingml/2006/main">
-            <a:off x="2686824" y="6150610"/>
-            <a:ext cx="1404342" cy="230011"/>
-          </a:xfrm>
-          <a:prstGeom xmlns:a="http://schemas.openxmlformats.org/drawingml/2006/main" prst="rect">
-            <a:avLst/>
-          </a:prstGeom>
-          <a:noFill xmlns:a="http://schemas.openxmlformats.org/drawingml/2006/main"/>
-          <a:ln xmlns:a="http://schemas.openxmlformats.org/drawingml/2006/main" w="0">
-            <a:noFill/>
-            <a:prstDash val="solid"/>
-          </a:ln>
-        </p:spPr>
-        <p:txBody>
-          <a:bodyPr xmlns:a="http://schemas.openxmlformats.org/drawingml/2006/main" wrap="none" lIns="0" tIns="0" rIns="0" bIns="0" anchor="t">
-            <a:noAutofit/>
-          </a:bodyPr>
-          <a:lstStyle xmlns:a="http://schemas.openxmlformats.org/drawingml/2006/main">
-            <a:defPPr algn="l">
-              <a:defRPr sz="1342" b="1">
-                <a:solidFill>
-                  <a:srgbClr val="4264D0"/>
-                </a:solidFill>
-                <a:latin typeface="Nimbus Sans"/>
-                <a:ea typeface="Nimbus Sans"/>
-                <a:cs typeface="Nimbus Sans"/>
-              </a:defRPr>
-            </a:defPPr>
-            <a:lvl1pPr algn="l">
-              <a:defRPr sz="1342" b="1">
-                <a:solidFill>
-                  <a:srgbClr val="4264D0"/>
-                </a:solidFill>
-                <a:latin typeface="Nimbus Sans"/>
-                <a:ea typeface="Nimbus Sans"/>
-                <a:cs typeface="Nimbus Sans"/>
-              </a:defRPr>
-            </a:lvl1pPr>
-            <a:lvl2pPr algn="l">
-              <a:defRPr sz="1342" b="1">
-                <a:solidFill>
-                  <a:srgbClr val="4264D0"/>
-                </a:solidFill>
-                <a:latin typeface="Nimbus Sans"/>
-                <a:ea typeface="Nimbus Sans"/>
-                <a:cs typeface="Nimbus Sans"/>
-              </a:defRPr>
-            </a:lvl2pPr>
-            <a:lvl3pPr algn="l">
-              <a:defRPr sz="1342" b="1">
-                <a:solidFill>
-                  <a:srgbClr val="4264D0"/>
-                </a:solidFill>
-                <a:latin typeface="Nimbus Sans"/>
-                <a:ea typeface="Nimbus Sans"/>
-                <a:cs typeface="Nimbus Sans"/>
-              </a:defRPr>
-            </a:lvl3pPr>
-            <a:lvl4pPr algn="l">
-              <a:defRPr sz="1342" b="1">
-                <a:solidFill>
-                  <a:srgbClr val="4264D0"/>
-                </a:solidFill>
-                <a:latin typeface="Nimbus Sans"/>
-                <a:ea typeface="Nimbus Sans"/>
-                <a:cs typeface="Nimbus Sans"/>
-              </a:defRPr>
-            </a:lvl4pPr>
-            <a:lvl5pPr algn="l">
-              <a:defRPr sz="1342" b="1">
-                <a:solidFill>
-                  <a:srgbClr val="4264D0"/>
-                </a:solidFill>
-                <a:latin typeface="Nimbus Sans"/>
-                <a:ea typeface="Nimbus Sans"/>
-                <a:cs typeface="Nimbus Sans"/>
-              </a:defRPr>
-            </a:lvl5pPr>
-            <a:lvl6pPr algn="l">
-              <a:defRPr sz="1342" b="1">
-                <a:solidFill>
-                  <a:srgbClr val="4264D0"/>
-                </a:solidFill>
-                <a:latin typeface="Nimbus Sans"/>
-                <a:ea typeface="Nimbus Sans"/>
-                <a:cs typeface="Nimbus Sans"/>
-              </a:defRPr>
-            </a:lvl6pPr>
-            <a:lvl7pPr algn="l">
-              <a:defRPr sz="1342" b="1">
-                <a:solidFill>
-                  <a:srgbClr val="4264D0"/>
-                </a:solidFill>
-                <a:latin typeface="Nimbus Sans"/>
-                <a:ea typeface="Nimbus Sans"/>
-                <a:cs typeface="Nimbus Sans"/>
-              </a:defRPr>
-            </a:lvl7pPr>
-            <a:lvl8pPr algn="l">
-              <a:defRPr sz="1342" b="1">
-                <a:solidFill>
-                  <a:srgbClr val="4264D0"/>
-                </a:solidFill>
-                <a:latin typeface="Nimbus Sans"/>
-                <a:ea typeface="Nimbus Sans"/>
-                <a:cs typeface="Nimbus Sans"/>
-              </a:defRPr>
-            </a:lvl8pPr>
-            <a:lvl9pPr algn="l">
-              <a:defRPr sz="1342" b="1">
-                <a:solidFill>
-                  <a:srgbClr val="4264D0"/>
-                </a:solidFill>
-                <a:latin typeface="Nimbus Sans"/>
-                <a:ea typeface="Nimbus Sans"/>
-                <a:cs typeface="Nimbus Sans"/>
-              </a:defRPr>
-            </a:lvl9pPr>
-          </a:lstStyle>
-          <a:p xmlns:a="http://schemas.openxmlformats.org/drawingml/2006/main">
-            <a:pPr algn="l">
-              <a:defRPr sz="1342" b="1">
-                <a:solidFill>
-                  <a:srgbClr val="4264D0"/>
-                </a:solidFill>
-                <a:latin typeface="Nimbus Sans"/>
-                <a:ea typeface="Nimbus Sans"/>
-                <a:cs typeface="Nimbus Sans"/>
-              </a:defRPr>
-            </a:pPr>
-            <a:r>
-              <a:rPr sz="1342" b="1">
-                <a:solidFill>
-                  <a:srgbClr val="4264D0"/>
-                </a:solidFill>
-                <a:latin typeface="Nimbus Sans"/>
-                <a:ea typeface="Nimbus Sans"/>
-                <a:cs typeface="Nimbus Sans"/>
-              </a:rPr>
-              <a:t>Report baseline</a:t>
-            </a:r>
-          </a:p>
-        </p:txBody>
-      </p:sp>
-      <p:sp>
-        <p:nvSpPr>
-          <p:cNvPr id="11" name="f149">
-            <a:extLst xmlns:a="http://schemas.openxmlformats.org/drawingml/2006/main">
-              <a:ext uri="{FF2B5EF4-FFF2-40B4-BE49-F238E27FC236}">
-                <a16:creationId xmlns:a16="http://schemas.microsoft.com/office/drawing/2014/main" id="{C6294E8E-966C-4511-8FBB-F92F0822DB1C}"/>
-              </a:ext>
-            </a:extLst>
-          </p:cNvPr>
-          <p:cNvSpPr>
-            <a:spLocks xmlns:a="http://schemas.openxmlformats.org/drawingml/2006/main" noGrp="1"/>
-          </p:cNvSpPr>
-          <p:nvPr/>
-        </p:nvSpPr>
-        <p:spPr>
-          <a:xfrm xmlns:a="http://schemas.openxmlformats.org/drawingml/2006/main">
-            <a:off x="4434736" y="6150610"/>
-            <a:ext cx="1442293" cy="230011"/>
-          </a:xfrm>
-          <a:prstGeom xmlns:a="http://schemas.openxmlformats.org/drawingml/2006/main" prst="rect">
-            <a:avLst/>
-          </a:prstGeom>
-          <a:noFill xmlns:a="http://schemas.openxmlformats.org/drawingml/2006/main"/>
-          <a:ln xmlns:a="http://schemas.openxmlformats.org/drawingml/2006/main" w="0">
-            <a:noFill/>
-            <a:prstDash val="solid"/>
-          </a:ln>
-        </p:spPr>
-        <p:txBody>
-          <a:bodyPr xmlns:a="http://schemas.openxmlformats.org/drawingml/2006/main" wrap="none" lIns="0" tIns="0" rIns="0" bIns="0" anchor="t">
-            <a:noAutofit/>
-          </a:bodyPr>
-          <a:lstStyle xmlns:a="http://schemas.openxmlformats.org/drawingml/2006/main">
-            <a:defPPr algn="l">
-              <a:defRPr sz="1342" b="1">
-                <a:solidFill>
-                  <a:srgbClr val="4264D0"/>
-                </a:solidFill>
-                <a:latin typeface="Nimbus Sans"/>
-                <a:ea typeface="Nimbus Sans"/>
-                <a:cs typeface="Nimbus Sans"/>
-              </a:defRPr>
-            </a:defPPr>
-            <a:lvl1pPr algn="l">
-              <a:defRPr sz="1342" b="1">
-                <a:solidFill>
-                  <a:srgbClr val="4264D0"/>
-                </a:solidFill>
-                <a:latin typeface="Nimbus Sans"/>
-                <a:ea typeface="Nimbus Sans"/>
-                <a:cs typeface="Nimbus Sans"/>
-              </a:defRPr>
-            </a:lvl1pPr>
-            <a:lvl2pPr algn="l">
-              <a:defRPr sz="1342" b="1">
-                <a:solidFill>
-                  <a:srgbClr val="4264D0"/>
-                </a:solidFill>
-                <a:latin typeface="Nimbus Sans"/>
-                <a:ea typeface="Nimbus Sans"/>
-                <a:cs typeface="Nimbus Sans"/>
-              </a:defRPr>
-            </a:lvl2pPr>
-            <a:lvl3pPr algn="l">
-              <a:defRPr sz="1342" b="1">
-                <a:solidFill>
-                  <a:srgbClr val="4264D0"/>
-                </a:solidFill>
-                <a:latin typeface="Nimbus Sans"/>
-                <a:ea typeface="Nimbus Sans"/>
-                <a:cs typeface="Nimbus Sans"/>
-              </a:defRPr>
-            </a:lvl3pPr>
-            <a:lvl4pPr algn="l">
-              <a:defRPr sz="1342" b="1">
-                <a:solidFill>
-                  <a:srgbClr val="4264D0"/>
-                </a:solidFill>
-                <a:latin typeface="Nimbus Sans"/>
-                <a:ea typeface="Nimbus Sans"/>
-                <a:cs typeface="Nimbus Sans"/>
-              </a:defRPr>
-            </a:lvl4pPr>
-            <a:lvl5pPr algn="l">
-              <a:defRPr sz="1342" b="1">
-                <a:solidFill>
-                  <a:srgbClr val="4264D0"/>
-                </a:solidFill>
-                <a:latin typeface="Nimbus Sans"/>
-                <a:ea typeface="Nimbus Sans"/>
-                <a:cs typeface="Nimbus Sans"/>
-              </a:defRPr>
-            </a:lvl5pPr>
-            <a:lvl6pPr algn="l">
-              <a:defRPr sz="1342" b="1">
-                <a:solidFill>
-                  <a:srgbClr val="4264D0"/>
-                </a:solidFill>
-                <a:latin typeface="Nimbus Sans"/>
-                <a:ea typeface="Nimbus Sans"/>
-                <a:cs typeface="Nimbus Sans"/>
-              </a:defRPr>
-            </a:lvl6pPr>
-            <a:lvl7pPr algn="l">
-              <a:defRPr sz="1342" b="1">
-                <a:solidFill>
-                  <a:srgbClr val="4264D0"/>
-                </a:solidFill>
-                <a:latin typeface="Nimbus Sans"/>
-                <a:ea typeface="Nimbus Sans"/>
-                <a:cs typeface="Nimbus Sans"/>
-              </a:defRPr>
-            </a:lvl7pPr>
-            <a:lvl8pPr algn="l">
-              <a:defRPr sz="1342" b="1">
-                <a:solidFill>
-                  <a:srgbClr val="4264D0"/>
-                </a:solidFill>
-                <a:latin typeface="Nimbus Sans"/>
-                <a:ea typeface="Nimbus Sans"/>
-                <a:cs typeface="Nimbus Sans"/>
-              </a:defRPr>
-            </a:lvl8pPr>
-            <a:lvl9pPr algn="l">
-              <a:defRPr sz="1342" b="1">
-                <a:solidFill>
-                  <a:srgbClr val="4264D0"/>
-                </a:solidFill>
-                <a:latin typeface="Nimbus Sans"/>
-                <a:ea typeface="Nimbus Sans"/>
-                <a:cs typeface="Nimbus Sans"/>
-              </a:defRPr>
-            </a:lvl9pPr>
-          </a:lstStyle>
-          <a:p xmlns:a="http://schemas.openxmlformats.org/drawingml/2006/main">
-            <a:pPr algn="l">
-              <a:defRPr sz="1342" b="1">
-                <a:solidFill>
-                  <a:srgbClr val="4264D0"/>
-                </a:solidFill>
-                <a:latin typeface="Nimbus Sans"/>
-                <a:ea typeface="Nimbus Sans"/>
-                <a:cs typeface="Nimbus Sans"/>
-              </a:defRPr>
-            </a:pPr>
-            <a:r>
-              <a:rPr sz="1342" b="1">
-                <a:solidFill>
-                  <a:srgbClr val="4264D0"/>
-                </a:solidFill>
-                <a:latin typeface="Nimbus Sans"/>
-                <a:ea typeface="Nimbus Sans"/>
-                <a:cs typeface="Nimbus Sans"/>
-              </a:rPr>
-              <a:t>Report mutation</a:t>
-            </a:r>
-          </a:p>
-        </p:txBody>
-      </p:sp>
-      <p:sp>
-        <p:nvSpPr>
-          <p:cNvPr id="12" name="f150">
-            <a:extLst xmlns:a="http://schemas.openxmlformats.org/drawingml/2006/main">
-              <a:ext uri="{FF2B5EF4-FFF2-40B4-BE49-F238E27FC236}">
-                <a16:creationId xmlns:a16="http://schemas.microsoft.com/office/drawing/2014/main" id="{75CCE3F4-DDD7-47FF-93D8-85195C11084E}"/>
-              </a:ext>
-            </a:extLst>
-          </p:cNvPr>
-          <p:cNvSpPr>
-            <a:spLocks xmlns:a="http://schemas.openxmlformats.org/drawingml/2006/main" noGrp="1"/>
-          </p:cNvSpPr>
-          <p:nvPr/>
-        </p:nvSpPr>
-        <p:spPr>
-          <a:xfrm xmlns:a="http://schemas.openxmlformats.org/drawingml/2006/main">
-            <a:off x="6619336" y="4923696"/>
-            <a:ext cx="899666" cy="238530"/>
-          </a:xfrm>
-          <a:prstGeom xmlns:a="http://schemas.openxmlformats.org/drawingml/2006/main" prst="rect">
-            <a:avLst/>
-          </a:prstGeom>
-          <a:noFill xmlns:a="http://schemas.openxmlformats.org/drawingml/2006/main"/>
-          <a:ln xmlns:a="http://schemas.openxmlformats.org/drawingml/2006/main" w="0">
-            <a:noFill/>
-            <a:prstDash val="solid"/>
-          </a:ln>
-        </p:spPr>
-        <p:txBody>
-          <a:bodyPr xmlns:a="http://schemas.openxmlformats.org/drawingml/2006/main" wrap="none" lIns="0" tIns="0" rIns="0" bIns="0" anchor="t">
-            <a:noAutofit/>
-          </a:bodyPr>
-          <a:lstStyle xmlns:a="http://schemas.openxmlformats.org/drawingml/2006/main">
-            <a:defPPr algn="l">
-              <a:defRPr sz="1391" b="1">
-                <a:solidFill>
-                  <a:srgbClr val="9D7139"/>
-                </a:solidFill>
-                <a:latin typeface="Nimbus Sans"/>
-                <a:ea typeface="Nimbus Sans"/>
-                <a:cs typeface="Nimbus Sans"/>
-              </a:defRPr>
-            </a:defPPr>
-            <a:lvl1pPr algn="l">
-              <a:defRPr sz="1391" b="1">
-                <a:solidFill>
-                  <a:srgbClr val="9D7139"/>
-                </a:solidFill>
-                <a:latin typeface="Nimbus Sans"/>
-                <a:ea typeface="Nimbus Sans"/>
-                <a:cs typeface="Nimbus Sans"/>
-              </a:defRPr>
-            </a:lvl1pPr>
-            <a:lvl2pPr algn="l">
-              <a:defRPr sz="1391" b="1">
-                <a:solidFill>
-                  <a:srgbClr val="9D7139"/>
-                </a:solidFill>
-                <a:latin typeface="Nimbus Sans"/>
-                <a:ea typeface="Nimbus Sans"/>
-                <a:cs typeface="Nimbus Sans"/>
-              </a:defRPr>
-            </a:lvl2pPr>
-            <a:lvl3pPr algn="l">
-              <a:defRPr sz="1391" b="1">
-                <a:solidFill>
-                  <a:srgbClr val="9D7139"/>
-                </a:solidFill>
-                <a:latin typeface="Nimbus Sans"/>
-                <a:ea typeface="Nimbus Sans"/>
-                <a:cs typeface="Nimbus Sans"/>
-              </a:defRPr>
-            </a:lvl3pPr>
-            <a:lvl4pPr algn="l">
-              <a:defRPr sz="1391" b="1">
-                <a:solidFill>
-                  <a:srgbClr val="9D7139"/>
-                </a:solidFill>
-                <a:latin typeface="Nimbus Sans"/>
-                <a:ea typeface="Nimbus Sans"/>
-                <a:cs typeface="Nimbus Sans"/>
-              </a:defRPr>
-            </a:lvl4pPr>
-            <a:lvl5pPr algn="l">
-              <a:defRPr sz="1391" b="1">
-                <a:solidFill>
-                  <a:srgbClr val="9D7139"/>
-                </a:solidFill>
-                <a:latin typeface="Nimbus Sans"/>
-                <a:ea typeface="Nimbus Sans"/>
-                <a:cs typeface="Nimbus Sans"/>
-              </a:defRPr>
-            </a:lvl5pPr>
-            <a:lvl6pPr algn="l">
-              <a:defRPr sz="1391" b="1">
-                <a:solidFill>
-                  <a:srgbClr val="9D7139"/>
-                </a:solidFill>
-                <a:latin typeface="Nimbus Sans"/>
-                <a:ea typeface="Nimbus Sans"/>
-                <a:cs typeface="Nimbus Sans"/>
-              </a:defRPr>
-            </a:lvl6pPr>
-            <a:lvl7pPr algn="l">
-              <a:defRPr sz="1391" b="1">
-                <a:solidFill>
-                  <a:srgbClr val="9D7139"/>
-                </a:solidFill>
-                <a:latin typeface="Nimbus Sans"/>
-                <a:ea typeface="Nimbus Sans"/>
-                <a:cs typeface="Nimbus Sans"/>
-              </a:defRPr>
-            </a:lvl7pPr>
-            <a:lvl8pPr algn="l">
-              <a:defRPr sz="1391" b="1">
-                <a:solidFill>
-                  <a:srgbClr val="9D7139"/>
-                </a:solidFill>
-                <a:latin typeface="Nimbus Sans"/>
-                <a:ea typeface="Nimbus Sans"/>
-                <a:cs typeface="Nimbus Sans"/>
-              </a:defRPr>
-            </a:lvl8pPr>
-            <a:lvl9pPr algn="l">
-              <a:defRPr sz="1391" b="1">
-                <a:solidFill>
-                  <a:srgbClr val="9D7139"/>
-                </a:solidFill>
-                <a:latin typeface="Nimbus Sans"/>
-                <a:ea typeface="Nimbus Sans"/>
-                <a:cs typeface="Nimbus Sans"/>
-              </a:defRPr>
-            </a:lvl9pPr>
-          </a:lstStyle>
-          <a:p xmlns:a="http://schemas.openxmlformats.org/drawingml/2006/main">
-            <a:pPr algn="l">
-              <a:defRPr sz="1391" b="1">
-                <a:solidFill>
-                  <a:srgbClr val="9D7139"/>
-                </a:solidFill>
-                <a:latin typeface="Nimbus Sans"/>
-                <a:ea typeface="Nimbus Sans"/>
-                <a:cs typeface="Nimbus Sans"/>
-              </a:defRPr>
-            </a:pPr>
-            <a:r>
-              <a:rPr sz="1391" b="1">
-                <a:solidFill>
-                  <a:srgbClr val="9D7139"/>
-                </a:solidFill>
-                <a:latin typeface="Nimbus Sans"/>
-                <a:ea typeface="Nimbus Sans"/>
-                <a:cs typeface="Nimbus Sans"/>
-              </a:rPr>
-              <a:t>MOTORE</a:t>
-            </a:r>
-          </a:p>
-        </p:txBody>
-      </p:sp>
-      <p:sp>
-        <p:nvSpPr>
-          <p:cNvPr id="13" name="f151">
-            <a:extLst xmlns:a="http://schemas.openxmlformats.org/drawingml/2006/main">
-              <a:ext uri="{FF2B5EF4-FFF2-40B4-BE49-F238E27FC236}">
-                <a16:creationId xmlns:a16="http://schemas.microsoft.com/office/drawing/2014/main" id="{0F3670EE-9CFC-4B39-8DFC-05415047EB16}"/>
-              </a:ext>
-            </a:extLst>
-          </p:cNvPr>
-          <p:cNvSpPr>
-            <a:spLocks xmlns:a="http://schemas.openxmlformats.org/drawingml/2006/main" noGrp="1"/>
-          </p:cNvSpPr>
-          <p:nvPr/>
-        </p:nvSpPr>
-        <p:spPr>
-          <a:xfrm xmlns:a="http://schemas.openxmlformats.org/drawingml/2006/main">
-            <a:off x="6458081" y="5125626"/>
-            <a:ext cx="1222177" cy="238530"/>
-          </a:xfrm>
-          <a:prstGeom xmlns:a="http://schemas.openxmlformats.org/drawingml/2006/main" prst="rect">
-            <a:avLst/>
-          </a:prstGeom>
-          <a:noFill xmlns:a="http://schemas.openxmlformats.org/drawingml/2006/main"/>
-          <a:ln xmlns:a="http://schemas.openxmlformats.org/drawingml/2006/main" w="0">
-            <a:noFill/>
-            <a:prstDash val="solid"/>
-          </a:ln>
-        </p:spPr>
-        <p:txBody>
-          <a:bodyPr xmlns:a="http://schemas.openxmlformats.org/drawingml/2006/main" wrap="none" lIns="0" tIns="0" rIns="0" bIns="0" anchor="t">
-            <a:noAutofit/>
-          </a:bodyPr>
-          <a:lstStyle xmlns:a="http://schemas.openxmlformats.org/drawingml/2006/main">
-            <a:defPPr algn="l">
-              <a:defRPr sz="1391" b="1">
-                <a:solidFill>
-                  <a:srgbClr val="9D7139"/>
-                </a:solidFill>
-                <a:latin typeface="Nimbus Sans"/>
-                <a:ea typeface="Nimbus Sans"/>
-                <a:cs typeface="Nimbus Sans"/>
-              </a:defRPr>
-            </a:defPPr>
-            <a:lvl1pPr algn="l">
-              <a:defRPr sz="1391" b="1">
-                <a:solidFill>
-                  <a:srgbClr val="9D7139"/>
-                </a:solidFill>
-                <a:latin typeface="Nimbus Sans"/>
-                <a:ea typeface="Nimbus Sans"/>
-                <a:cs typeface="Nimbus Sans"/>
-              </a:defRPr>
-            </a:lvl1pPr>
-            <a:lvl2pPr algn="l">
-              <a:defRPr sz="1391" b="1">
-                <a:solidFill>
-                  <a:srgbClr val="9D7139"/>
-                </a:solidFill>
-                <a:latin typeface="Nimbus Sans"/>
-                <a:ea typeface="Nimbus Sans"/>
-                <a:cs typeface="Nimbus Sans"/>
-              </a:defRPr>
-            </a:lvl2pPr>
-            <a:lvl3pPr algn="l">
-              <a:defRPr sz="1391" b="1">
-                <a:solidFill>
-                  <a:srgbClr val="9D7139"/>
-                </a:solidFill>
-                <a:latin typeface="Nimbus Sans"/>
-                <a:ea typeface="Nimbus Sans"/>
-                <a:cs typeface="Nimbus Sans"/>
-              </a:defRPr>
-            </a:lvl3pPr>
-            <a:lvl4pPr algn="l">
-              <a:defRPr sz="1391" b="1">
-                <a:solidFill>
-                  <a:srgbClr val="9D7139"/>
-                </a:solidFill>
-                <a:latin typeface="Nimbus Sans"/>
-                <a:ea typeface="Nimbus Sans"/>
-                <a:cs typeface="Nimbus Sans"/>
-              </a:defRPr>
-            </a:lvl4pPr>
-            <a:lvl5pPr algn="l">
-              <a:defRPr sz="1391" b="1">
-                <a:solidFill>
-                  <a:srgbClr val="9D7139"/>
-                </a:solidFill>
-                <a:latin typeface="Nimbus Sans"/>
-                <a:ea typeface="Nimbus Sans"/>
-                <a:cs typeface="Nimbus Sans"/>
-              </a:defRPr>
-            </a:lvl5pPr>
-            <a:lvl6pPr algn="l">
-              <a:defRPr sz="1391" b="1">
-                <a:solidFill>
-                  <a:srgbClr val="9D7139"/>
-                </a:solidFill>
-                <a:latin typeface="Nimbus Sans"/>
-                <a:ea typeface="Nimbus Sans"/>
-                <a:cs typeface="Nimbus Sans"/>
-              </a:defRPr>
-            </a:lvl6pPr>
-            <a:lvl7pPr algn="l">
-              <a:defRPr sz="1391" b="1">
-                <a:solidFill>
-                  <a:srgbClr val="9D7139"/>
-                </a:solidFill>
-                <a:latin typeface="Nimbus Sans"/>
-                <a:ea typeface="Nimbus Sans"/>
-                <a:cs typeface="Nimbus Sans"/>
-              </a:defRPr>
-            </a:lvl7pPr>
-            <a:lvl8pPr algn="l">
-              <a:defRPr sz="1391" b="1">
-                <a:solidFill>
-                  <a:srgbClr val="9D7139"/>
-                </a:solidFill>
-                <a:latin typeface="Nimbus Sans"/>
-                <a:ea typeface="Nimbus Sans"/>
-                <a:cs typeface="Nimbus Sans"/>
-              </a:defRPr>
-            </a:lvl8pPr>
-            <a:lvl9pPr algn="l">
-              <a:defRPr sz="1391" b="1">
-                <a:solidFill>
-                  <a:srgbClr val="9D7139"/>
-                </a:solidFill>
-                <a:latin typeface="Nimbus Sans"/>
-                <a:ea typeface="Nimbus Sans"/>
-                <a:cs typeface="Nimbus Sans"/>
-              </a:defRPr>
-            </a:lvl9pPr>
-          </a:lstStyle>
-          <a:p xmlns:a="http://schemas.openxmlformats.org/drawingml/2006/main">
-            <a:pPr algn="l">
-              <a:defRPr sz="1391" b="1">
-                <a:solidFill>
-                  <a:srgbClr val="9D7139"/>
-                </a:solidFill>
-                <a:latin typeface="Nimbus Sans"/>
-                <a:ea typeface="Nimbus Sans"/>
-                <a:cs typeface="Nimbus Sans"/>
-              </a:defRPr>
-            </a:pPr>
-            <a:r>
-              <a:rPr sz="1391" b="1">
-                <a:solidFill>
-                  <a:srgbClr val="9D7139"/>
-                </a:solidFill>
-                <a:latin typeface="Nimbus Sans"/>
-                <a:ea typeface="Nimbus Sans"/>
-                <a:cs typeface="Nimbus Sans"/>
-              </a:rPr>
-              <a:t>di mutazione</a:t>
-            </a:r>
-          </a:p>
-        </p:txBody>
-      </p:sp>
-      <p:sp>
-        <p:nvSpPr>
-          <p:cNvPr id="14" name="f152">
-            <a:extLst xmlns:a="http://schemas.openxmlformats.org/drawingml/2006/main">
-              <a:ext uri="{FF2B5EF4-FFF2-40B4-BE49-F238E27FC236}">
-                <a16:creationId xmlns:a16="http://schemas.microsoft.com/office/drawing/2014/main" id="{CD1B3BA2-8E3F-472A-A252-40A05CADA0EB}"/>
-              </a:ext>
-            </a:extLst>
-          </p:cNvPr>
-          <p:cNvSpPr>
-            <a:spLocks xmlns:a="http://schemas.openxmlformats.org/drawingml/2006/main" noGrp="1"/>
-          </p:cNvSpPr>
-          <p:nvPr/>
-        </p:nvSpPr>
-        <p:spPr>
-          <a:xfrm xmlns:a="http://schemas.openxmlformats.org/drawingml/2006/main">
-            <a:off x="6446621" y="3924521"/>
-            <a:ext cx="1245096" cy="221492"/>
-          </a:xfrm>
-          <a:prstGeom xmlns:a="http://schemas.openxmlformats.org/drawingml/2006/main" prst="rect">
-            <a:avLst/>
-          </a:prstGeom>
-          <a:noFill xmlns:a="http://schemas.openxmlformats.org/drawingml/2006/main"/>
-          <a:ln xmlns:a="http://schemas.openxmlformats.org/drawingml/2006/main" w="0">
-            <a:noFill/>
-            <a:prstDash val="solid"/>
-          </a:ln>
-        </p:spPr>
-        <p:txBody>
-          <a:bodyPr xmlns:a="http://schemas.openxmlformats.org/drawingml/2006/main" wrap="none" lIns="0" tIns="0" rIns="0" bIns="0" anchor="t">
-            <a:noAutofit/>
-          </a:bodyPr>
-          <a:lstStyle xmlns:a="http://schemas.openxmlformats.org/drawingml/2006/main">
-            <a:defPPr algn="l">
-              <a:defRPr sz="1292" b="1">
-                <a:solidFill>
-                  <a:srgbClr val="182536"/>
-                </a:solidFill>
-                <a:latin typeface="Nimbus Sans"/>
-                <a:ea typeface="Nimbus Sans"/>
-                <a:cs typeface="Nimbus Sans"/>
-              </a:defRPr>
-            </a:defPPr>
-            <a:lvl1pPr algn="l">
-              <a:defRPr sz="1292" b="1">
-                <a:solidFill>
-                  <a:srgbClr val="182536"/>
-                </a:solidFill>
-                <a:latin typeface="Nimbus Sans"/>
-                <a:ea typeface="Nimbus Sans"/>
-                <a:cs typeface="Nimbus Sans"/>
-              </a:defRPr>
-            </a:lvl1pPr>
-            <a:lvl2pPr algn="l">
-              <a:defRPr sz="1292" b="1">
-                <a:solidFill>
-                  <a:srgbClr val="182536"/>
-                </a:solidFill>
-                <a:latin typeface="Nimbus Sans"/>
-                <a:ea typeface="Nimbus Sans"/>
-                <a:cs typeface="Nimbus Sans"/>
-              </a:defRPr>
-            </a:lvl2pPr>
-            <a:lvl3pPr algn="l">
-              <a:defRPr sz="1292" b="1">
-                <a:solidFill>
-                  <a:srgbClr val="182536"/>
-                </a:solidFill>
-                <a:latin typeface="Nimbus Sans"/>
-                <a:ea typeface="Nimbus Sans"/>
-                <a:cs typeface="Nimbus Sans"/>
-              </a:defRPr>
-            </a:lvl3pPr>
-            <a:lvl4pPr algn="l">
-              <a:defRPr sz="1292" b="1">
-                <a:solidFill>
-                  <a:srgbClr val="182536"/>
-                </a:solidFill>
-                <a:latin typeface="Nimbus Sans"/>
-                <a:ea typeface="Nimbus Sans"/>
-                <a:cs typeface="Nimbus Sans"/>
-              </a:defRPr>
-            </a:lvl4pPr>
-            <a:lvl5pPr algn="l">
-              <a:defRPr sz="1292" b="1">
-                <a:solidFill>
-                  <a:srgbClr val="182536"/>
-                </a:solidFill>
-                <a:latin typeface="Nimbus Sans"/>
-                <a:ea typeface="Nimbus Sans"/>
-                <a:cs typeface="Nimbus Sans"/>
-              </a:defRPr>
-            </a:lvl5pPr>
-            <a:lvl6pPr algn="l">
-              <a:defRPr sz="1292" b="1">
-                <a:solidFill>
-                  <a:srgbClr val="182536"/>
-                </a:solidFill>
-                <a:latin typeface="Nimbus Sans"/>
-                <a:ea typeface="Nimbus Sans"/>
-                <a:cs typeface="Nimbus Sans"/>
-              </a:defRPr>
-            </a:lvl6pPr>
-            <a:lvl7pPr algn="l">
-              <a:defRPr sz="1292" b="1">
-                <a:solidFill>
-                  <a:srgbClr val="182536"/>
-                </a:solidFill>
-                <a:latin typeface="Nimbus Sans"/>
-                <a:ea typeface="Nimbus Sans"/>
-                <a:cs typeface="Nimbus Sans"/>
-              </a:defRPr>
-            </a:lvl7pPr>
-            <a:lvl8pPr algn="l">
-              <a:defRPr sz="1292" b="1">
-                <a:solidFill>
-                  <a:srgbClr val="182536"/>
-                </a:solidFill>
-                <a:latin typeface="Nimbus Sans"/>
-                <a:ea typeface="Nimbus Sans"/>
-                <a:cs typeface="Nimbus Sans"/>
-              </a:defRPr>
-            </a:lvl8pPr>
-            <a:lvl9pPr algn="l">
-              <a:defRPr sz="1292" b="1">
-                <a:solidFill>
-                  <a:srgbClr val="182536"/>
-                </a:solidFill>
-                <a:latin typeface="Nimbus Sans"/>
-                <a:ea typeface="Nimbus Sans"/>
-                <a:cs typeface="Nimbus Sans"/>
-              </a:defRPr>
-            </a:lvl9pPr>
-          </a:lstStyle>
-          <a:p xmlns:a="http://schemas.openxmlformats.org/drawingml/2006/main">
-            <a:pPr algn="l">
-              <a:defRPr sz="1292" b="1">
-                <a:solidFill>
-                  <a:srgbClr val="182536"/>
-                </a:solidFill>
-                <a:latin typeface="Nimbus Sans"/>
-                <a:ea typeface="Nimbus Sans"/>
-                <a:cs typeface="Nimbus Sans"/>
-              </a:defRPr>
-            </a:pPr>
-            <a:r>
-              <a:rPr sz="1292" b="1">
-                <a:solidFill>
-                  <a:srgbClr val="182536"/>
-                </a:solidFill>
-                <a:latin typeface="Nimbus Sans"/>
-                <a:ea typeface="Nimbus Sans"/>
-                <a:cs typeface="Nimbus Sans"/>
-              </a:rPr>
-              <a:t>PCAP MUTATA</a:t>
-            </a:r>
-          </a:p>
-        </p:txBody>
-      </p:sp>
-      <p:sp>
-        <p:nvSpPr>
-          <p:cNvPr id="15" name="f153">
-            <a:extLst xmlns:a="http://schemas.openxmlformats.org/drawingml/2006/main">
-              <a:ext uri="{FF2B5EF4-FFF2-40B4-BE49-F238E27FC236}">
-                <a16:creationId xmlns:a16="http://schemas.microsoft.com/office/drawing/2014/main" id="{B359E25C-6E89-4703-9984-9EEEC7469827}"/>
-              </a:ext>
-            </a:extLst>
-          </p:cNvPr>
-          <p:cNvSpPr>
-            <a:spLocks xmlns:a="http://schemas.openxmlformats.org/drawingml/2006/main" noGrp="1"/>
-          </p:cNvSpPr>
-          <p:nvPr/>
-        </p:nvSpPr>
-        <p:spPr>
-          <a:xfrm xmlns:a="http://schemas.openxmlformats.org/drawingml/2006/main">
-            <a:off x="6517538" y="5495095"/>
-            <a:ext cx="1103263" cy="195935"/>
-          </a:xfrm>
-          <a:prstGeom xmlns:a="http://schemas.openxmlformats.org/drawingml/2006/main" prst="rect">
-            <a:avLst/>
-          </a:prstGeom>
-          <a:noFill xmlns:a="http://schemas.openxmlformats.org/drawingml/2006/main"/>
-          <a:ln xmlns:a="http://schemas.openxmlformats.org/drawingml/2006/main" w="0">
-            <a:noFill/>
-            <a:prstDash val="solid"/>
-          </a:ln>
-        </p:spPr>
-        <p:txBody>
-          <a:bodyPr xmlns:a="http://schemas.openxmlformats.org/drawingml/2006/main" wrap="none" lIns="0" tIns="0" rIns="0" bIns="0" anchor="t">
-            <a:noAutofit/>
-          </a:bodyPr>
-          <a:lstStyle xmlns:a="http://schemas.openxmlformats.org/drawingml/2006/main">
-            <a:defPPr algn="l">
-              <a:defRPr sz="1143" b="0">
-                <a:solidFill>
-                  <a:srgbClr val="9D7139"/>
-                </a:solidFill>
-                <a:latin typeface="Nimbus Sans"/>
-                <a:ea typeface="Nimbus Sans"/>
-                <a:cs typeface="Nimbus Sans"/>
-              </a:defRPr>
-            </a:defPPr>
-            <a:lvl1pPr algn="l">
-              <a:defRPr sz="1143" b="0">
-                <a:solidFill>
-                  <a:srgbClr val="9D7139"/>
-                </a:solidFill>
-                <a:latin typeface="Nimbus Sans"/>
-                <a:ea typeface="Nimbus Sans"/>
-                <a:cs typeface="Nimbus Sans"/>
-              </a:defRPr>
-            </a:lvl1pPr>
-            <a:lvl2pPr algn="l">
-              <a:defRPr sz="1143" b="0">
-                <a:solidFill>
-                  <a:srgbClr val="9D7139"/>
-                </a:solidFill>
-                <a:latin typeface="Nimbus Sans"/>
-                <a:ea typeface="Nimbus Sans"/>
-                <a:cs typeface="Nimbus Sans"/>
-              </a:defRPr>
-            </a:lvl2pPr>
-            <a:lvl3pPr algn="l">
-              <a:defRPr sz="1143" b="0">
-                <a:solidFill>
-                  <a:srgbClr val="9D7139"/>
-                </a:solidFill>
-                <a:latin typeface="Nimbus Sans"/>
-                <a:ea typeface="Nimbus Sans"/>
-                <a:cs typeface="Nimbus Sans"/>
-              </a:defRPr>
-            </a:lvl3pPr>
-            <a:lvl4pPr algn="l">
-              <a:defRPr sz="1143" b="0">
-                <a:solidFill>
-                  <a:srgbClr val="9D7139"/>
-                </a:solidFill>
-                <a:latin typeface="Nimbus Sans"/>
-                <a:ea typeface="Nimbus Sans"/>
-                <a:cs typeface="Nimbus Sans"/>
-              </a:defRPr>
-            </a:lvl4pPr>
-            <a:lvl5pPr algn="l">
-              <a:defRPr sz="1143" b="0">
-                <a:solidFill>
-                  <a:srgbClr val="9D7139"/>
-                </a:solidFill>
-                <a:latin typeface="Nimbus Sans"/>
-                <a:ea typeface="Nimbus Sans"/>
-                <a:cs typeface="Nimbus Sans"/>
-              </a:defRPr>
-            </a:lvl5pPr>
-            <a:lvl6pPr algn="l">
-              <a:defRPr sz="1143" b="0">
-                <a:solidFill>
-                  <a:srgbClr val="9D7139"/>
-                </a:solidFill>
-                <a:latin typeface="Nimbus Sans"/>
-                <a:ea typeface="Nimbus Sans"/>
-                <a:cs typeface="Nimbus Sans"/>
-              </a:defRPr>
-            </a:lvl6pPr>
-            <a:lvl7pPr algn="l">
-              <a:defRPr sz="1143" b="0">
-                <a:solidFill>
-                  <a:srgbClr val="9D7139"/>
-                </a:solidFill>
-                <a:latin typeface="Nimbus Sans"/>
-                <a:ea typeface="Nimbus Sans"/>
-                <a:cs typeface="Nimbus Sans"/>
-              </a:defRPr>
-            </a:lvl7pPr>
-            <a:lvl8pPr algn="l">
-              <a:defRPr sz="1143" b="0">
-                <a:solidFill>
-                  <a:srgbClr val="9D7139"/>
-                </a:solidFill>
-                <a:latin typeface="Nimbus Sans"/>
-                <a:ea typeface="Nimbus Sans"/>
-                <a:cs typeface="Nimbus Sans"/>
-              </a:defRPr>
-            </a:lvl8pPr>
-            <a:lvl9pPr algn="l">
-              <a:defRPr sz="1143" b="0">
-                <a:solidFill>
-                  <a:srgbClr val="9D7139"/>
-                </a:solidFill>
-                <a:latin typeface="Nimbus Sans"/>
-                <a:ea typeface="Nimbus Sans"/>
-                <a:cs typeface="Nimbus Sans"/>
-              </a:defRPr>
-            </a:lvl9pPr>
-          </a:lstStyle>
-          <a:p xmlns:a="http://schemas.openxmlformats.org/drawingml/2006/main">
-            <a:pPr algn="l">
-              <a:defRPr sz="1143" b="0">
-                <a:solidFill>
-                  <a:srgbClr val="9D7139"/>
-                </a:solidFill>
-                <a:latin typeface="Nimbus Sans"/>
-                <a:ea typeface="Nimbus Sans"/>
-                <a:cs typeface="Nimbus Sans"/>
-              </a:defRPr>
-            </a:pPr>
-            <a:r>
-              <a:rPr sz="1143" b="0">
-                <a:solidFill>
-                  <a:srgbClr val="9D7139"/>
-                </a:solidFill>
-                <a:latin typeface="Nimbus Sans"/>
-                <a:ea typeface="Nimbus Sans"/>
-                <a:cs typeface="Nimbus Sans"/>
-              </a:rPr>
-              <a:t>Esterno · offline</a:t>
-            </a:r>
-          </a:p>
-        </p:txBody>
-      </p:sp>
-      <p:sp>
-        <p:nvSpPr>
-          <p:cNvPr id="16" name="f154">
-            <a:extLst xmlns:a="http://schemas.openxmlformats.org/drawingml/2006/main">
-              <a:ext uri="{FF2B5EF4-FFF2-40B4-BE49-F238E27FC236}">
-                <a16:creationId xmlns:a16="http://schemas.microsoft.com/office/drawing/2014/main" id="{E0366593-CA65-4705-B8CF-D4396CA96BBF}"/>
-              </a:ext>
-            </a:extLst>
-          </p:cNvPr>
-          <p:cNvSpPr>
-            <a:spLocks xmlns:a="http://schemas.openxmlformats.org/drawingml/2006/main" noGrp="1"/>
-          </p:cNvSpPr>
-          <p:nvPr/>
-        </p:nvSpPr>
-        <p:spPr>
-          <a:xfrm xmlns:a="http://schemas.openxmlformats.org/drawingml/2006/main">
-            <a:off x="6251353" y="5828469"/>
-            <a:ext cx="1371600" cy="187416"/>
-          </a:xfrm>
-          <a:prstGeom xmlns:a="http://schemas.openxmlformats.org/drawingml/2006/main" prst="rect">
-            <a:avLst/>
-          </a:prstGeom>
-          <a:noFill xmlns:a="http://schemas.openxmlformats.org/drawingml/2006/main"/>
-          <a:ln xmlns:a="http://schemas.openxmlformats.org/drawingml/2006/main" w="0">
-            <a:noFill/>
-            <a:prstDash val="solid"/>
-          </a:ln>
-        </p:spPr>
-        <p:txBody>
-          <a:bodyPr xmlns:a="http://schemas.openxmlformats.org/drawingml/2006/main" wrap="none" lIns="0" tIns="0" rIns="0" bIns="0" anchor="t">
-            <a:noAutofit/>
-          </a:bodyPr>
-          <a:lstStyle xmlns:a="http://schemas.openxmlformats.org/drawingml/2006/main">
-            <a:defPPr algn="l">
-              <a:defRPr sz="1093" b="0">
-                <a:solidFill>
-                  <a:srgbClr val="52627B"/>
-                </a:solidFill>
-                <a:latin typeface="Nimbus Sans"/>
-                <a:ea typeface="Nimbus Sans"/>
-                <a:cs typeface="Nimbus Sans"/>
-              </a:defRPr>
-            </a:defPPr>
-            <a:lvl1pPr algn="l">
-              <a:defRPr sz="1093" b="0">
-                <a:solidFill>
-                  <a:srgbClr val="52627B"/>
-                </a:solidFill>
-                <a:latin typeface="Nimbus Sans"/>
-                <a:ea typeface="Nimbus Sans"/>
-                <a:cs typeface="Nimbus Sans"/>
-              </a:defRPr>
-            </a:lvl1pPr>
-            <a:lvl2pPr algn="l">
-              <a:defRPr sz="1093" b="0">
-                <a:solidFill>
-                  <a:srgbClr val="52627B"/>
-                </a:solidFill>
-                <a:latin typeface="Nimbus Sans"/>
-                <a:ea typeface="Nimbus Sans"/>
-                <a:cs typeface="Nimbus Sans"/>
-              </a:defRPr>
-            </a:lvl2pPr>
-            <a:lvl3pPr algn="l">
-              <a:defRPr sz="1093" b="0">
-                <a:solidFill>
-                  <a:srgbClr val="52627B"/>
-                </a:solidFill>
-                <a:latin typeface="Nimbus Sans"/>
-                <a:ea typeface="Nimbus Sans"/>
-                <a:cs typeface="Nimbus Sans"/>
-              </a:defRPr>
-            </a:lvl3pPr>
-            <a:lvl4pPr algn="l">
-              <a:defRPr sz="1093" b="0">
-                <a:solidFill>
-                  <a:srgbClr val="52627B"/>
-                </a:solidFill>
-                <a:latin typeface="Nimbus Sans"/>
-                <a:ea typeface="Nimbus Sans"/>
-                <a:cs typeface="Nimbus Sans"/>
-              </a:defRPr>
-            </a:lvl4pPr>
-            <a:lvl5pPr algn="l">
-              <a:defRPr sz="1093" b="0">
-                <a:solidFill>
-                  <a:srgbClr val="52627B"/>
-                </a:solidFill>
-                <a:latin typeface="Nimbus Sans"/>
-                <a:ea typeface="Nimbus Sans"/>
-                <a:cs typeface="Nimbus Sans"/>
-              </a:defRPr>
-            </a:lvl5pPr>
-            <a:lvl6pPr algn="l">
-              <a:defRPr sz="1093" b="0">
-                <a:solidFill>
-                  <a:srgbClr val="52627B"/>
-                </a:solidFill>
-                <a:latin typeface="Nimbus Sans"/>
-                <a:ea typeface="Nimbus Sans"/>
-                <a:cs typeface="Nimbus Sans"/>
-              </a:defRPr>
-            </a:lvl6pPr>
-            <a:lvl7pPr algn="l">
-              <a:defRPr sz="1093" b="0">
-                <a:solidFill>
-                  <a:srgbClr val="52627B"/>
-                </a:solidFill>
-                <a:latin typeface="Nimbus Sans"/>
-                <a:ea typeface="Nimbus Sans"/>
-                <a:cs typeface="Nimbus Sans"/>
-              </a:defRPr>
-            </a:lvl7pPr>
-            <a:lvl8pPr algn="l">
-              <a:defRPr sz="1093" b="0">
-                <a:solidFill>
-                  <a:srgbClr val="52627B"/>
-                </a:solidFill>
-                <a:latin typeface="Nimbus Sans"/>
-                <a:ea typeface="Nimbus Sans"/>
-                <a:cs typeface="Nimbus Sans"/>
-              </a:defRPr>
-            </a:lvl8pPr>
-            <a:lvl9pPr algn="l">
-              <a:defRPr sz="1093" b="0">
-                <a:solidFill>
-                  <a:srgbClr val="52627B"/>
-                </a:solidFill>
-                <a:latin typeface="Nimbus Sans"/>
-                <a:ea typeface="Nimbus Sans"/>
-                <a:cs typeface="Nimbus Sans"/>
-              </a:defRPr>
-            </a:lvl9pPr>
-          </a:lstStyle>
-          <a:p xmlns:a="http://schemas.openxmlformats.org/drawingml/2006/main">
-            <a:pPr algn="l">
-              <a:defRPr sz="1093" b="0">
-                <a:solidFill>
-                  <a:srgbClr val="52627B"/>
-                </a:solidFill>
-                <a:latin typeface="Nimbus Sans"/>
-                <a:ea typeface="Nimbus Sans"/>
-                <a:cs typeface="Nimbus Sans"/>
-              </a:defRPr>
-            </a:pPr>
-            <a:r>
-              <a:rPr sz="1093" b="0">
-                <a:solidFill>
-                  <a:srgbClr val="52627B"/>
-                </a:solidFill>
-                <a:latin typeface="Nimbus Sans"/>
-                <a:ea typeface="Nimbus Sans"/>
-                <a:cs typeface="Nimbus Sans"/>
-              </a:rPr>
-              <a:t>Selezione dei frame</a:t>
-            </a:r>
-          </a:p>
-        </p:txBody>
-      </p:sp>
-      <p:sp>
-        <p:nvSpPr>
-          <p:cNvPr id="17" name="f155">
-            <a:extLst xmlns:a="http://schemas.openxmlformats.org/drawingml/2006/main">
-              <a:ext uri="{FF2B5EF4-FFF2-40B4-BE49-F238E27FC236}">
-                <a16:creationId xmlns:a16="http://schemas.microsoft.com/office/drawing/2014/main" id="{B634CFF9-A505-48BD-ABFB-53E2DBF25E67}"/>
-              </a:ext>
-            </a:extLst>
-          </p:cNvPr>
-          <p:cNvSpPr>
-            <a:spLocks xmlns:a="http://schemas.openxmlformats.org/drawingml/2006/main" noGrp="1"/>
-          </p:cNvSpPr>
-          <p:nvPr/>
-        </p:nvSpPr>
-        <p:spPr>
-          <a:xfrm xmlns:a="http://schemas.openxmlformats.org/drawingml/2006/main">
-            <a:off x="6251353" y="5990013"/>
-            <a:ext cx="1498104" cy="187416"/>
-          </a:xfrm>
-          <a:prstGeom xmlns:a="http://schemas.openxmlformats.org/drawingml/2006/main" prst="rect">
-            <a:avLst/>
-          </a:prstGeom>
-          <a:noFill xmlns:a="http://schemas.openxmlformats.org/drawingml/2006/main"/>
-          <a:ln xmlns:a="http://schemas.openxmlformats.org/drawingml/2006/main" w="0">
-            <a:noFill/>
-            <a:prstDash val="solid"/>
-          </a:ln>
-        </p:spPr>
-        <p:txBody>
-          <a:bodyPr xmlns:a="http://schemas.openxmlformats.org/drawingml/2006/main" wrap="none" lIns="0" tIns="0" rIns="0" bIns="0" anchor="t">
-            <a:noAutofit/>
-          </a:bodyPr>
-          <a:lstStyle xmlns:a="http://schemas.openxmlformats.org/drawingml/2006/main">
-            <a:defPPr algn="l">
-              <a:defRPr sz="1093" b="0">
-                <a:solidFill>
-                  <a:srgbClr val="52627B"/>
-                </a:solidFill>
-                <a:latin typeface="Nimbus Sans"/>
-                <a:ea typeface="Nimbus Sans"/>
-                <a:cs typeface="Nimbus Sans"/>
-              </a:defRPr>
-            </a:defPPr>
-            <a:lvl1pPr algn="l">
-              <a:defRPr sz="1093" b="0">
-                <a:solidFill>
-                  <a:srgbClr val="52627B"/>
-                </a:solidFill>
-                <a:latin typeface="Nimbus Sans"/>
-                <a:ea typeface="Nimbus Sans"/>
-                <a:cs typeface="Nimbus Sans"/>
-              </a:defRPr>
-            </a:lvl1pPr>
-            <a:lvl2pPr algn="l">
-              <a:defRPr sz="1093" b="0">
-                <a:solidFill>
-                  <a:srgbClr val="52627B"/>
-                </a:solidFill>
-                <a:latin typeface="Nimbus Sans"/>
-                <a:ea typeface="Nimbus Sans"/>
-                <a:cs typeface="Nimbus Sans"/>
-              </a:defRPr>
-            </a:lvl2pPr>
-            <a:lvl3pPr algn="l">
-              <a:defRPr sz="1093" b="0">
-                <a:solidFill>
-                  <a:srgbClr val="52627B"/>
-                </a:solidFill>
-                <a:latin typeface="Nimbus Sans"/>
-                <a:ea typeface="Nimbus Sans"/>
-                <a:cs typeface="Nimbus Sans"/>
-              </a:defRPr>
-            </a:lvl3pPr>
-            <a:lvl4pPr algn="l">
-              <a:defRPr sz="1093" b="0">
-                <a:solidFill>
-                  <a:srgbClr val="52627B"/>
-                </a:solidFill>
-                <a:latin typeface="Nimbus Sans"/>
-                <a:ea typeface="Nimbus Sans"/>
-                <a:cs typeface="Nimbus Sans"/>
-              </a:defRPr>
-            </a:lvl4pPr>
-            <a:lvl5pPr algn="l">
-              <a:defRPr sz="1093" b="0">
-                <a:solidFill>
-                  <a:srgbClr val="52627B"/>
-                </a:solidFill>
-                <a:latin typeface="Nimbus Sans"/>
-                <a:ea typeface="Nimbus Sans"/>
-                <a:cs typeface="Nimbus Sans"/>
-              </a:defRPr>
-            </a:lvl5pPr>
-            <a:lvl6pPr algn="l">
-              <a:defRPr sz="1093" b="0">
-                <a:solidFill>
-                  <a:srgbClr val="52627B"/>
-                </a:solidFill>
-                <a:latin typeface="Nimbus Sans"/>
-                <a:ea typeface="Nimbus Sans"/>
-                <a:cs typeface="Nimbus Sans"/>
-              </a:defRPr>
-            </a:lvl6pPr>
-            <a:lvl7pPr algn="l">
-              <a:defRPr sz="1093" b="0">
-                <a:solidFill>
-                  <a:srgbClr val="52627B"/>
-                </a:solidFill>
-                <a:latin typeface="Nimbus Sans"/>
-                <a:ea typeface="Nimbus Sans"/>
-                <a:cs typeface="Nimbus Sans"/>
-              </a:defRPr>
-            </a:lvl7pPr>
-            <a:lvl8pPr algn="l">
-              <a:defRPr sz="1093" b="0">
-                <a:solidFill>
-                  <a:srgbClr val="52627B"/>
-                </a:solidFill>
-                <a:latin typeface="Nimbus Sans"/>
-                <a:ea typeface="Nimbus Sans"/>
-                <a:cs typeface="Nimbus Sans"/>
-              </a:defRPr>
-            </a:lvl8pPr>
-            <a:lvl9pPr algn="l">
-              <a:defRPr sz="1093" b="0">
-                <a:solidFill>
-                  <a:srgbClr val="52627B"/>
-                </a:solidFill>
-                <a:latin typeface="Nimbus Sans"/>
-                <a:ea typeface="Nimbus Sans"/>
-                <a:cs typeface="Nimbus Sans"/>
-              </a:defRPr>
-            </a:lvl9pPr>
-          </a:lstStyle>
-          <a:p xmlns:a="http://schemas.openxmlformats.org/drawingml/2006/main">
-            <a:pPr algn="l">
-              <a:defRPr sz="1093" b="0">
-                <a:solidFill>
-                  <a:srgbClr val="52627B"/>
-                </a:solidFill>
-                <a:latin typeface="Nimbus Sans"/>
-                <a:ea typeface="Nimbus Sans"/>
-                <a:cs typeface="Nimbus Sans"/>
-              </a:defRPr>
-            </a:pPr>
-            <a:r>
-              <a:rPr sz="1093" b="0">
-                <a:solidFill>
-                  <a:srgbClr val="52627B"/>
-                </a:solidFill>
-                <a:latin typeface="Nimbus Sans"/>
-                <a:ea typeface="Nimbus Sans"/>
-                <a:cs typeface="Nimbus Sans"/>
-              </a:rPr>
-              <a:t>rilevanti da modificare</a:t>
-            </a:r>
-          </a:p>
-        </p:txBody>
-      </p:sp>
-      <p:sp>
-        <p:nvSpPr>
-          <p:cNvPr id="18" name="f156">
-            <a:extLst xmlns:a="http://schemas.openxmlformats.org/drawingml/2006/main">
-              <a:ext uri="{FF2B5EF4-FFF2-40B4-BE49-F238E27FC236}">
-                <a16:creationId xmlns:a16="http://schemas.microsoft.com/office/drawing/2014/main" id="{3B385D84-A618-42B8-A051-79C1A80BC913}"/>
-              </a:ext>
-            </a:extLst>
-          </p:cNvPr>
-          <p:cNvSpPr>
-            <a:spLocks xmlns:a="http://schemas.openxmlformats.org/drawingml/2006/main" noGrp="1"/>
-          </p:cNvSpPr>
-          <p:nvPr/>
-        </p:nvSpPr>
-        <p:spPr>
-          <a:xfrm xmlns:a="http://schemas.openxmlformats.org/drawingml/2006/main">
-            <a:off x="1066800" y="7153275"/>
-            <a:ext cx="6896100" cy="381000"/>
+            <a:off x="3143250" y="3238500"/>
+            <a:ext cx="1905000" cy="285750"/>
           </a:xfrm>
           <a:prstGeom xmlns:a="http://schemas.openxmlformats.org/drawingml/2006/main" prst="rect">
             <a:avLst/>
@@ -22322,9 +20421,9 @@
           </a:bodyPr>
           <a:lstStyle xmlns:a="http://schemas.openxmlformats.org/drawingml/2006/main">
             <a:defPPr algn="ctr">
-              <a:defRPr sz="2025" b="0">
-                <a:solidFill>
-                  <a:srgbClr val="52627B"/>
+              <a:defRPr sz="1650" b="1">
+                <a:solidFill>
+                  <a:srgbClr val="182536"/>
                 </a:solidFill>
                 <a:latin typeface="Nimbus Sans"/>
                 <a:ea typeface="Nimbus Sans"/>
@@ -22332,9 +20431,9 @@
               </a:defRPr>
             </a:defPPr>
             <a:lvl1pPr algn="ctr">
-              <a:defRPr sz="2025" b="0">
-                <a:solidFill>
-                  <a:srgbClr val="52627B"/>
+              <a:defRPr sz="1650" b="1">
+                <a:solidFill>
+                  <a:srgbClr val="182536"/>
                 </a:solidFill>
                 <a:latin typeface="Nimbus Sans"/>
                 <a:ea typeface="Nimbus Sans"/>
@@ -22342,9 +20441,9 @@
               </a:defRPr>
             </a:lvl1pPr>
             <a:lvl2pPr algn="ctr">
-              <a:defRPr sz="2025" b="0">
-                <a:solidFill>
-                  <a:srgbClr val="52627B"/>
+              <a:defRPr sz="1650" b="1">
+                <a:solidFill>
+                  <a:srgbClr val="182536"/>
                 </a:solidFill>
                 <a:latin typeface="Nimbus Sans"/>
                 <a:ea typeface="Nimbus Sans"/>
@@ -22352,9 +20451,9 @@
               </a:defRPr>
             </a:lvl2pPr>
             <a:lvl3pPr algn="ctr">
-              <a:defRPr sz="2025" b="0">
-                <a:solidFill>
-                  <a:srgbClr val="52627B"/>
+              <a:defRPr sz="1650" b="1">
+                <a:solidFill>
+                  <a:srgbClr val="182536"/>
                 </a:solidFill>
                 <a:latin typeface="Nimbus Sans"/>
                 <a:ea typeface="Nimbus Sans"/>
@@ -22362,9 +20461,9 @@
               </a:defRPr>
             </a:lvl3pPr>
             <a:lvl4pPr algn="ctr">
-              <a:defRPr sz="2025" b="0">
-                <a:solidFill>
-                  <a:srgbClr val="52627B"/>
+              <a:defRPr sz="1650" b="1">
+                <a:solidFill>
+                  <a:srgbClr val="182536"/>
                 </a:solidFill>
                 <a:latin typeface="Nimbus Sans"/>
                 <a:ea typeface="Nimbus Sans"/>
@@ -22372,9 +20471,9 @@
               </a:defRPr>
             </a:lvl4pPr>
             <a:lvl5pPr algn="ctr">
-              <a:defRPr sz="2025" b="0">
-                <a:solidFill>
-                  <a:srgbClr val="52627B"/>
+              <a:defRPr sz="1650" b="1">
+                <a:solidFill>
+                  <a:srgbClr val="182536"/>
                 </a:solidFill>
                 <a:latin typeface="Nimbus Sans"/>
                 <a:ea typeface="Nimbus Sans"/>
@@ -22382,9 +20481,9 @@
               </a:defRPr>
             </a:lvl5pPr>
             <a:lvl6pPr algn="ctr">
-              <a:defRPr sz="2025" b="0">
-                <a:solidFill>
-                  <a:srgbClr val="52627B"/>
+              <a:defRPr sz="1650" b="1">
+                <a:solidFill>
+                  <a:srgbClr val="182536"/>
                 </a:solidFill>
                 <a:latin typeface="Nimbus Sans"/>
                 <a:ea typeface="Nimbus Sans"/>
@@ -22392,9 +20491,9 @@
               </a:defRPr>
             </a:lvl6pPr>
             <a:lvl7pPr algn="ctr">
-              <a:defRPr sz="2025" b="0">
-                <a:solidFill>
-                  <a:srgbClr val="52627B"/>
+              <a:defRPr sz="1650" b="1">
+                <a:solidFill>
+                  <a:srgbClr val="182536"/>
                 </a:solidFill>
                 <a:latin typeface="Nimbus Sans"/>
                 <a:ea typeface="Nimbus Sans"/>
@@ -22402,9 +20501,9 @@
               </a:defRPr>
             </a:lvl7pPr>
             <a:lvl8pPr algn="ctr">
-              <a:defRPr sz="2025" b="0">
-                <a:solidFill>
-                  <a:srgbClr val="52627B"/>
+              <a:defRPr sz="1650" b="1">
+                <a:solidFill>
+                  <a:srgbClr val="182536"/>
                 </a:solidFill>
                 <a:latin typeface="Nimbus Sans"/>
                 <a:ea typeface="Nimbus Sans"/>
@@ -22412,9 +20511,9 @@
               </a:defRPr>
             </a:lvl8pPr>
             <a:lvl9pPr algn="ctr">
-              <a:defRPr sz="2025" b="0">
-                <a:solidFill>
-                  <a:srgbClr val="52627B"/>
+              <a:defRPr sz="1650" b="1">
+                <a:solidFill>
+                  <a:srgbClr val="182536"/>
                 </a:solidFill>
                 <a:latin typeface="Nimbus Sans"/>
                 <a:ea typeface="Nimbus Sans"/>
@@ -22424,9 +20523,9 @@
           </a:lstStyle>
           <a:p xmlns:a="http://schemas.openxmlformats.org/drawingml/2006/main">
             <a:pPr algn="ctr">
-              <a:defRPr sz="2025" b="0">
-                <a:solidFill>
-                  <a:srgbClr val="52627B"/>
+              <a:defRPr sz="1650" b="1">
+                <a:solidFill>
+                  <a:srgbClr val="182536"/>
                 </a:solidFill>
                 <a:latin typeface="Nimbus Sans"/>
                 <a:ea typeface="Nimbus Sans"/>
@@ -22434,25 +20533,2320 @@
               </a:defRPr>
             </a:pPr>
             <a:r>
-              <a:rPr sz="2025" b="0">
-                <a:solidFill>
-                  <a:srgbClr val="52627B"/>
+              <a:rPr sz="1650" b="1">
+                <a:solidFill>
+                  <a:srgbClr val="182536"/>
                 </a:solidFill>
                 <a:latin typeface="Nimbus Sans"/>
                 <a:ea typeface="Nimbus Sans"/>
                 <a:cs typeface="Nimbus Sans"/>
               </a:rPr>
-              <a:t>Evidenze del baseline</a:t>
+              <a:t>PCAP ORIGINALE</a:t>
             </a:r>
           </a:p>
         </p:txBody>
       </p:sp>
       <p:sp>
         <p:nvSpPr>
-          <p:cNvPr id="19" name="f157">
+          <p:cNvPr id="7" name="f148">
             <a:extLst xmlns:a="http://schemas.openxmlformats.org/drawingml/2006/main">
               <a:ext uri="{FF2B5EF4-FFF2-40B4-BE49-F238E27FC236}">
-                <a16:creationId xmlns:a16="http://schemas.microsoft.com/office/drawing/2014/main" id="{C639094F-C09F-45F7-956F-0598238C717B}"/>
+                <a16:creationId xmlns:a16="http://schemas.microsoft.com/office/drawing/2014/main" id="{C2F9419A-22A1-4CD7-835C-120CC1E998D7}"/>
+              </a:ext>
+            </a:extLst>
+          </p:cNvPr>
+          <p:cNvSpPr>
+            <a:spLocks xmlns:a="http://schemas.openxmlformats.org/drawingml/2006/main" noGrp="1"/>
+          </p:cNvSpPr>
+          <p:nvPr/>
+        </p:nvSpPr>
+        <p:spPr>
+          <a:xfrm xmlns:a="http://schemas.openxmlformats.org/drawingml/2006/main">
+            <a:off x="3143250" y="4524375"/>
+            <a:ext cx="1905000" cy="952500"/>
+          </a:xfrm>
+          <a:prstGeom xmlns:a="http://schemas.openxmlformats.org/drawingml/2006/main" prst="roundRect">
+            <a:avLst>
+              <a:gd name="adj" fmla="val 12000"/>
+            </a:avLst>
+          </a:prstGeom>
+          <a:solidFill xmlns:a="http://schemas.openxmlformats.org/drawingml/2006/main">
+            <a:srgbClr val="EEF8F3"/>
+          </a:solidFill>
+          <a:ln xmlns:a="http://schemas.openxmlformats.org/drawingml/2006/main" w="17145">
+            <a:solidFill>
+              <a:srgbClr val="C4DFD3"/>
+            </a:solidFill>
+            <a:prstDash val="solid"/>
+          </a:ln>
+        </p:spPr>
+      </p:sp>
+      <p:sp>
+        <p:nvSpPr>
+          <p:cNvPr id="8" name="f149">
+            <a:extLst xmlns:a="http://schemas.openxmlformats.org/drawingml/2006/main">
+              <a:ext uri="{FF2B5EF4-FFF2-40B4-BE49-F238E27FC236}">
+                <a16:creationId xmlns:a16="http://schemas.microsoft.com/office/drawing/2014/main" id="{35972998-BBE8-42A1-9D80-102949C689F7}"/>
+              </a:ext>
+            </a:extLst>
+          </p:cNvPr>
+          <p:cNvSpPr>
+            <a:spLocks xmlns:a="http://schemas.openxmlformats.org/drawingml/2006/main" noGrp="1"/>
+          </p:cNvSpPr>
+          <p:nvPr/>
+        </p:nvSpPr>
+        <p:spPr>
+          <a:xfrm xmlns:a="http://schemas.openxmlformats.org/drawingml/2006/main">
+            <a:off x="3238500" y="4707446"/>
+            <a:ext cx="1714500" cy="662559"/>
+          </a:xfrm>
+          <a:prstGeom xmlns:a="http://schemas.openxmlformats.org/drawingml/2006/main" prst="rect">
+            <a:avLst/>
+          </a:prstGeom>
+          <a:noFill xmlns:a="http://schemas.openxmlformats.org/drawingml/2006/main"/>
+          <a:ln xmlns:a="http://schemas.openxmlformats.org/drawingml/2006/main" w="0">
+            <a:noFill/>
+            <a:prstDash val="solid"/>
+          </a:ln>
+        </p:spPr>
+        <p:txBody>
+          <a:bodyPr xmlns:a="http://schemas.openxmlformats.org/drawingml/2006/main" wrap="none" lIns="0" tIns="0" rIns="0" bIns="0" anchor="t">
+            <a:noAutofit/>
+          </a:bodyPr>
+          <a:lstStyle xmlns:a="http://schemas.openxmlformats.org/drawingml/2006/main">
+            <a:defPPr algn="ctr">
+              <a:defRPr sz="2025" b="1">
+                <a:solidFill>
+                  <a:srgbClr val="278766"/>
+                </a:solidFill>
+                <a:latin typeface="Nimbus Sans"/>
+                <a:ea typeface="Nimbus Sans"/>
+                <a:cs typeface="Nimbus Sans"/>
+              </a:defRPr>
+            </a:defPPr>
+            <a:lvl1pPr algn="ctr">
+              <a:defRPr sz="2025" b="1">
+                <a:solidFill>
+                  <a:srgbClr val="278766"/>
+                </a:solidFill>
+                <a:latin typeface="Nimbus Sans"/>
+                <a:ea typeface="Nimbus Sans"/>
+                <a:cs typeface="Nimbus Sans"/>
+              </a:defRPr>
+            </a:lvl1pPr>
+            <a:lvl2pPr algn="ctr">
+              <a:defRPr sz="2025" b="1">
+                <a:solidFill>
+                  <a:srgbClr val="278766"/>
+                </a:solidFill>
+                <a:latin typeface="Nimbus Sans"/>
+                <a:ea typeface="Nimbus Sans"/>
+                <a:cs typeface="Nimbus Sans"/>
+              </a:defRPr>
+            </a:lvl2pPr>
+            <a:lvl3pPr algn="ctr">
+              <a:defRPr sz="2025" b="1">
+                <a:solidFill>
+                  <a:srgbClr val="278766"/>
+                </a:solidFill>
+                <a:latin typeface="Nimbus Sans"/>
+                <a:ea typeface="Nimbus Sans"/>
+                <a:cs typeface="Nimbus Sans"/>
+              </a:defRPr>
+            </a:lvl3pPr>
+            <a:lvl4pPr algn="ctr">
+              <a:defRPr sz="2025" b="1">
+                <a:solidFill>
+                  <a:srgbClr val="278766"/>
+                </a:solidFill>
+                <a:latin typeface="Nimbus Sans"/>
+                <a:ea typeface="Nimbus Sans"/>
+                <a:cs typeface="Nimbus Sans"/>
+              </a:defRPr>
+            </a:lvl4pPr>
+            <a:lvl5pPr algn="ctr">
+              <a:defRPr sz="2025" b="1">
+                <a:solidFill>
+                  <a:srgbClr val="278766"/>
+                </a:solidFill>
+                <a:latin typeface="Nimbus Sans"/>
+                <a:ea typeface="Nimbus Sans"/>
+                <a:cs typeface="Nimbus Sans"/>
+              </a:defRPr>
+            </a:lvl5pPr>
+            <a:lvl6pPr algn="ctr">
+              <a:defRPr sz="2025" b="1">
+                <a:solidFill>
+                  <a:srgbClr val="278766"/>
+                </a:solidFill>
+                <a:latin typeface="Nimbus Sans"/>
+                <a:ea typeface="Nimbus Sans"/>
+                <a:cs typeface="Nimbus Sans"/>
+              </a:defRPr>
+            </a:lvl6pPr>
+            <a:lvl7pPr algn="ctr">
+              <a:defRPr sz="2025" b="1">
+                <a:solidFill>
+                  <a:srgbClr val="278766"/>
+                </a:solidFill>
+                <a:latin typeface="Nimbus Sans"/>
+                <a:ea typeface="Nimbus Sans"/>
+                <a:cs typeface="Nimbus Sans"/>
+              </a:defRPr>
+            </a:lvl7pPr>
+            <a:lvl8pPr algn="ctr">
+              <a:defRPr sz="2025" b="1">
+                <a:solidFill>
+                  <a:srgbClr val="278766"/>
+                </a:solidFill>
+                <a:latin typeface="Nimbus Sans"/>
+                <a:ea typeface="Nimbus Sans"/>
+                <a:cs typeface="Nimbus Sans"/>
+              </a:defRPr>
+            </a:lvl8pPr>
+            <a:lvl9pPr algn="ctr">
+              <a:defRPr sz="2025" b="1">
+                <a:solidFill>
+                  <a:srgbClr val="278766"/>
+                </a:solidFill>
+                <a:latin typeface="Nimbus Sans"/>
+                <a:ea typeface="Nimbus Sans"/>
+                <a:cs typeface="Nimbus Sans"/>
+              </a:defRPr>
+            </a:lvl9pPr>
+          </a:lstStyle>
+          <a:p xmlns:a="http://schemas.openxmlformats.org/drawingml/2006/main">
+            <a:pPr algn="ctr">
+              <a:defRPr sz="2025" b="1">
+                <a:solidFill>
+                  <a:srgbClr val="278766"/>
+                </a:solidFill>
+                <a:latin typeface="Nimbus Sans"/>
+                <a:ea typeface="Nimbus Sans"/>
+                <a:cs typeface="Nimbus Sans"/>
+              </a:defRPr>
+            </a:pPr>
+            <a:r>
+              <a:rPr sz="2025" b="1">
+                <a:solidFill>
+                  <a:srgbClr val="278766"/>
+                </a:solidFill>
+                <a:latin typeface="Nimbus Sans"/>
+                <a:ea typeface="Nimbus Sans"/>
+                <a:cs typeface="Nimbus Sans"/>
+              </a:rPr>
+              <a:t>Pipeline di</a:t>
+            </a:r>
+          </a:p>
+          <a:p xmlns:a="http://schemas.openxmlformats.org/drawingml/2006/main">
+            <a:pPr algn="ctr">
+              <a:defRPr sz="2025" b="1">
+                <a:solidFill>
+                  <a:srgbClr val="278766"/>
+                </a:solidFill>
+                <a:latin typeface="Nimbus Sans"/>
+                <a:ea typeface="Nimbus Sans"/>
+                <a:cs typeface="Nimbus Sans"/>
+              </a:defRPr>
+            </a:pPr>
+            <a:r>
+              <a:rPr sz="2025" b="1">
+                <a:solidFill>
+                  <a:srgbClr val="278766"/>
+                </a:solidFill>
+                <a:latin typeface="Nimbus Sans"/>
+                <a:ea typeface="Nimbus Sans"/>
+                <a:cs typeface="Nimbus Sans"/>
+              </a:rPr>
+              <a:t>verifica</a:t>
+            </a:r>
+          </a:p>
+        </p:txBody>
+      </p:sp>
+      <p:sp>
+        <p:nvSpPr>
+          <p:cNvPr id="9" name="f150">
+            <a:extLst xmlns:a="http://schemas.openxmlformats.org/drawingml/2006/main">
+              <a:ext uri="{FF2B5EF4-FFF2-40B4-BE49-F238E27FC236}">
+                <a16:creationId xmlns:a16="http://schemas.microsoft.com/office/drawing/2014/main" id="{968A44FA-4B2E-4451-8233-211C378B004B}"/>
+              </a:ext>
+            </a:extLst>
+          </p:cNvPr>
+          <p:cNvSpPr>
+            <a:spLocks xmlns:a="http://schemas.openxmlformats.org/drawingml/2006/main" noGrp="1"/>
+          </p:cNvSpPr>
+          <p:nvPr/>
+        </p:nvSpPr>
+        <p:spPr>
+          <a:xfrm xmlns:a="http://schemas.openxmlformats.org/drawingml/2006/main">
+            <a:off x="762000" y="4714875"/>
+            <a:ext cx="1428750" cy="571500"/>
+          </a:xfrm>
+          <a:prstGeom xmlns:a="http://schemas.openxmlformats.org/drawingml/2006/main" prst="roundRect">
+            <a:avLst>
+              <a:gd name="adj" fmla="val 20000"/>
+            </a:avLst>
+          </a:prstGeom>
+          <a:solidFill xmlns:a="http://schemas.openxmlformats.org/drawingml/2006/main">
+            <a:srgbClr val="F0F4FF"/>
+          </a:solidFill>
+          <a:ln xmlns:a="http://schemas.openxmlformats.org/drawingml/2006/main" w="17145">
+            <a:solidFill>
+              <a:srgbClr val="D9E3EF"/>
+            </a:solidFill>
+            <a:prstDash val="solid"/>
+          </a:ln>
+        </p:spPr>
+      </p:sp>
+      <p:sp>
+        <p:nvSpPr>
+          <p:cNvPr id="10" name="f151">
+            <a:extLst xmlns:a="http://schemas.openxmlformats.org/drawingml/2006/main">
+              <a:ext uri="{FF2B5EF4-FFF2-40B4-BE49-F238E27FC236}">
+                <a16:creationId xmlns:a16="http://schemas.microsoft.com/office/drawing/2014/main" id="{61A9912F-C7C9-49EB-A268-1940E18AFF95}"/>
+              </a:ext>
+            </a:extLst>
+          </p:cNvPr>
+          <p:cNvSpPr>
+            <a:spLocks xmlns:a="http://schemas.openxmlformats.org/drawingml/2006/main" noGrp="1"/>
+          </p:cNvSpPr>
+          <p:nvPr/>
+        </p:nvSpPr>
+        <p:spPr>
+          <a:xfrm xmlns:a="http://schemas.openxmlformats.org/drawingml/2006/main">
+            <a:off x="857250" y="4857750"/>
+            <a:ext cx="1238250" cy="361950"/>
+          </a:xfrm>
+          <a:prstGeom xmlns:a="http://schemas.openxmlformats.org/drawingml/2006/main" prst="rect">
+            <a:avLst/>
+          </a:prstGeom>
+          <a:noFill xmlns:a="http://schemas.openxmlformats.org/drawingml/2006/main"/>
+          <a:ln xmlns:a="http://schemas.openxmlformats.org/drawingml/2006/main" w="0">
+            <a:noFill/>
+            <a:prstDash val="solid"/>
+          </a:ln>
+        </p:spPr>
+        <p:txBody>
+          <a:bodyPr xmlns:a="http://schemas.openxmlformats.org/drawingml/2006/main" wrap="none" lIns="0" tIns="0" rIns="0" bIns="0" anchor="t">
+            <a:noAutofit/>
+          </a:bodyPr>
+          <a:lstStyle xmlns:a="http://schemas.openxmlformats.org/drawingml/2006/main">
+            <a:defPPr algn="ctr">
+              <a:defRPr sz="2250" b="1">
+                <a:solidFill>
+                  <a:srgbClr val="4264D0"/>
+                </a:solidFill>
+                <a:latin typeface="Nimbus Sans"/>
+                <a:ea typeface="Nimbus Sans"/>
+                <a:cs typeface="Nimbus Sans"/>
+              </a:defRPr>
+            </a:defPPr>
+            <a:lvl1pPr algn="ctr">
+              <a:defRPr sz="2250" b="1">
+                <a:solidFill>
+                  <a:srgbClr val="4264D0"/>
+                </a:solidFill>
+                <a:latin typeface="Nimbus Sans"/>
+                <a:ea typeface="Nimbus Sans"/>
+                <a:cs typeface="Nimbus Sans"/>
+              </a:defRPr>
+            </a:lvl1pPr>
+            <a:lvl2pPr algn="ctr">
+              <a:defRPr sz="2250" b="1">
+                <a:solidFill>
+                  <a:srgbClr val="4264D0"/>
+                </a:solidFill>
+                <a:latin typeface="Nimbus Sans"/>
+                <a:ea typeface="Nimbus Sans"/>
+                <a:cs typeface="Nimbus Sans"/>
+              </a:defRPr>
+            </a:lvl2pPr>
+            <a:lvl3pPr algn="ctr">
+              <a:defRPr sz="2250" b="1">
+                <a:solidFill>
+                  <a:srgbClr val="4264D0"/>
+                </a:solidFill>
+                <a:latin typeface="Nimbus Sans"/>
+                <a:ea typeface="Nimbus Sans"/>
+                <a:cs typeface="Nimbus Sans"/>
+              </a:defRPr>
+            </a:lvl3pPr>
+            <a:lvl4pPr algn="ctr">
+              <a:defRPr sz="2250" b="1">
+                <a:solidFill>
+                  <a:srgbClr val="4264D0"/>
+                </a:solidFill>
+                <a:latin typeface="Nimbus Sans"/>
+                <a:ea typeface="Nimbus Sans"/>
+                <a:cs typeface="Nimbus Sans"/>
+              </a:defRPr>
+            </a:lvl4pPr>
+            <a:lvl5pPr algn="ctr">
+              <a:defRPr sz="2250" b="1">
+                <a:solidFill>
+                  <a:srgbClr val="4264D0"/>
+                </a:solidFill>
+                <a:latin typeface="Nimbus Sans"/>
+                <a:ea typeface="Nimbus Sans"/>
+                <a:cs typeface="Nimbus Sans"/>
+              </a:defRPr>
+            </a:lvl5pPr>
+            <a:lvl6pPr algn="ctr">
+              <a:defRPr sz="2250" b="1">
+                <a:solidFill>
+                  <a:srgbClr val="4264D0"/>
+                </a:solidFill>
+                <a:latin typeface="Nimbus Sans"/>
+                <a:ea typeface="Nimbus Sans"/>
+                <a:cs typeface="Nimbus Sans"/>
+              </a:defRPr>
+            </a:lvl6pPr>
+            <a:lvl7pPr algn="ctr">
+              <a:defRPr sz="2250" b="1">
+                <a:solidFill>
+                  <a:srgbClr val="4264D0"/>
+                </a:solidFill>
+                <a:latin typeface="Nimbus Sans"/>
+                <a:ea typeface="Nimbus Sans"/>
+                <a:cs typeface="Nimbus Sans"/>
+              </a:defRPr>
+            </a:lvl7pPr>
+            <a:lvl8pPr algn="ctr">
+              <a:defRPr sz="2250" b="1">
+                <a:solidFill>
+                  <a:srgbClr val="4264D0"/>
+                </a:solidFill>
+                <a:latin typeface="Nimbus Sans"/>
+                <a:ea typeface="Nimbus Sans"/>
+                <a:cs typeface="Nimbus Sans"/>
+              </a:defRPr>
+            </a:lvl8pPr>
+            <a:lvl9pPr algn="ctr">
+              <a:defRPr sz="2250" b="1">
+                <a:solidFill>
+                  <a:srgbClr val="4264D0"/>
+                </a:solidFill>
+                <a:latin typeface="Nimbus Sans"/>
+                <a:ea typeface="Nimbus Sans"/>
+                <a:cs typeface="Nimbus Sans"/>
+              </a:defRPr>
+            </a:lvl9pPr>
+          </a:lstStyle>
+          <a:p xmlns:a="http://schemas.openxmlformats.org/drawingml/2006/main">
+            <a:pPr algn="ctr">
+              <a:defRPr sz="2250" b="1">
+                <a:solidFill>
+                  <a:srgbClr val="4264D0"/>
+                </a:solidFill>
+                <a:latin typeface="Nimbus Sans"/>
+                <a:ea typeface="Nimbus Sans"/>
+                <a:cs typeface="Nimbus Sans"/>
+              </a:defRPr>
+            </a:pPr>
+            <a:r>
+              <a:rPr sz="2250" b="1">
+                <a:solidFill>
+                  <a:srgbClr val="4264D0"/>
+                </a:solidFill>
+                <a:latin typeface="Nimbus Sans"/>
+                <a:ea typeface="Nimbus Sans"/>
+                <a:cs typeface="Nimbus Sans"/>
+              </a:rPr>
+              <a:t>DSL</a:t>
+            </a:r>
+          </a:p>
+        </p:txBody>
+      </p:sp>
+      <p:sp>
+        <p:nvSpPr>
+          <p:cNvPr id="11" name="f152">
+            <a:extLst xmlns:a="http://schemas.openxmlformats.org/drawingml/2006/main">
+              <a:ext uri="{FF2B5EF4-FFF2-40B4-BE49-F238E27FC236}">
+                <a16:creationId xmlns:a16="http://schemas.microsoft.com/office/drawing/2014/main" id="{0BF11A5F-6603-4E81-AB94-998C06D2752B}"/>
+              </a:ext>
+            </a:extLst>
+          </p:cNvPr>
+          <p:cNvSpPr>
+            <a:spLocks xmlns:a="http://schemas.openxmlformats.org/drawingml/2006/main" noGrp="1"/>
+          </p:cNvSpPr>
+          <p:nvPr/>
+        </p:nvSpPr>
+        <p:spPr>
+          <a:xfrm xmlns:a="http://schemas.openxmlformats.org/drawingml/2006/main">
+            <a:off x="2047875" y="6524625"/>
+            <a:ext cx="2000250" cy="590550"/>
+          </a:xfrm>
+          <a:prstGeom xmlns:a="http://schemas.openxmlformats.org/drawingml/2006/main" prst="roundRect">
+            <a:avLst>
+              <a:gd name="adj" fmla="val 19355"/>
+            </a:avLst>
+          </a:prstGeom>
+          <a:solidFill xmlns:a="http://schemas.openxmlformats.org/drawingml/2006/main">
+            <a:srgbClr val="F0F4FF"/>
+          </a:solidFill>
+          <a:ln xmlns:a="http://schemas.openxmlformats.org/drawingml/2006/main" w="17145">
+            <a:solidFill>
+              <a:srgbClr val="D9E3EF"/>
+            </a:solidFill>
+            <a:prstDash val="solid"/>
+          </a:ln>
+        </p:spPr>
+      </p:sp>
+      <p:sp>
+        <p:nvSpPr>
+          <p:cNvPr id="12" name="f153">
+            <a:extLst xmlns:a="http://schemas.openxmlformats.org/drawingml/2006/main">
+              <a:ext uri="{FF2B5EF4-FFF2-40B4-BE49-F238E27FC236}">
+                <a16:creationId xmlns:a16="http://schemas.microsoft.com/office/drawing/2014/main" id="{C11206A3-ED06-4254-96A7-13628B53088C}"/>
+              </a:ext>
+            </a:extLst>
+          </p:cNvPr>
+          <p:cNvSpPr>
+            <a:spLocks xmlns:a="http://schemas.openxmlformats.org/drawingml/2006/main" noGrp="1"/>
+          </p:cNvSpPr>
+          <p:nvPr/>
+        </p:nvSpPr>
+        <p:spPr>
+          <a:xfrm xmlns:a="http://schemas.openxmlformats.org/drawingml/2006/main">
+            <a:off x="2143125" y="6705600"/>
+            <a:ext cx="1809750" cy="304800"/>
+          </a:xfrm>
+          <a:prstGeom xmlns:a="http://schemas.openxmlformats.org/drawingml/2006/main" prst="rect">
+            <a:avLst/>
+          </a:prstGeom>
+          <a:noFill xmlns:a="http://schemas.openxmlformats.org/drawingml/2006/main"/>
+          <a:ln xmlns:a="http://schemas.openxmlformats.org/drawingml/2006/main" w="0">
+            <a:noFill/>
+            <a:prstDash val="solid"/>
+          </a:ln>
+        </p:spPr>
+        <p:txBody>
+          <a:bodyPr xmlns:a="http://schemas.openxmlformats.org/drawingml/2006/main" wrap="none" lIns="0" tIns="0" rIns="0" bIns="0" anchor="t">
+            <a:noAutofit/>
+          </a:bodyPr>
+          <a:lstStyle xmlns:a="http://schemas.openxmlformats.org/drawingml/2006/main">
+            <a:defPPr algn="ctr">
+              <a:defRPr sz="1800" b="1">
+                <a:solidFill>
+                  <a:srgbClr val="4264D0"/>
+                </a:solidFill>
+                <a:latin typeface="Nimbus Sans"/>
+                <a:ea typeface="Nimbus Sans"/>
+                <a:cs typeface="Nimbus Sans"/>
+              </a:defRPr>
+            </a:defPPr>
+            <a:lvl1pPr algn="ctr">
+              <a:defRPr sz="1800" b="1">
+                <a:solidFill>
+                  <a:srgbClr val="4264D0"/>
+                </a:solidFill>
+                <a:latin typeface="Nimbus Sans"/>
+                <a:ea typeface="Nimbus Sans"/>
+                <a:cs typeface="Nimbus Sans"/>
+              </a:defRPr>
+            </a:lvl1pPr>
+            <a:lvl2pPr algn="ctr">
+              <a:defRPr sz="1800" b="1">
+                <a:solidFill>
+                  <a:srgbClr val="4264D0"/>
+                </a:solidFill>
+                <a:latin typeface="Nimbus Sans"/>
+                <a:ea typeface="Nimbus Sans"/>
+                <a:cs typeface="Nimbus Sans"/>
+              </a:defRPr>
+            </a:lvl2pPr>
+            <a:lvl3pPr algn="ctr">
+              <a:defRPr sz="1800" b="1">
+                <a:solidFill>
+                  <a:srgbClr val="4264D0"/>
+                </a:solidFill>
+                <a:latin typeface="Nimbus Sans"/>
+                <a:ea typeface="Nimbus Sans"/>
+                <a:cs typeface="Nimbus Sans"/>
+              </a:defRPr>
+            </a:lvl3pPr>
+            <a:lvl4pPr algn="ctr">
+              <a:defRPr sz="1800" b="1">
+                <a:solidFill>
+                  <a:srgbClr val="4264D0"/>
+                </a:solidFill>
+                <a:latin typeface="Nimbus Sans"/>
+                <a:ea typeface="Nimbus Sans"/>
+                <a:cs typeface="Nimbus Sans"/>
+              </a:defRPr>
+            </a:lvl4pPr>
+            <a:lvl5pPr algn="ctr">
+              <a:defRPr sz="1800" b="1">
+                <a:solidFill>
+                  <a:srgbClr val="4264D0"/>
+                </a:solidFill>
+                <a:latin typeface="Nimbus Sans"/>
+                <a:ea typeface="Nimbus Sans"/>
+                <a:cs typeface="Nimbus Sans"/>
+              </a:defRPr>
+            </a:lvl5pPr>
+            <a:lvl6pPr algn="ctr">
+              <a:defRPr sz="1800" b="1">
+                <a:solidFill>
+                  <a:srgbClr val="4264D0"/>
+                </a:solidFill>
+                <a:latin typeface="Nimbus Sans"/>
+                <a:ea typeface="Nimbus Sans"/>
+                <a:cs typeface="Nimbus Sans"/>
+              </a:defRPr>
+            </a:lvl6pPr>
+            <a:lvl7pPr algn="ctr">
+              <a:defRPr sz="1800" b="1">
+                <a:solidFill>
+                  <a:srgbClr val="4264D0"/>
+                </a:solidFill>
+                <a:latin typeface="Nimbus Sans"/>
+                <a:ea typeface="Nimbus Sans"/>
+                <a:cs typeface="Nimbus Sans"/>
+              </a:defRPr>
+            </a:lvl7pPr>
+            <a:lvl8pPr algn="ctr">
+              <a:defRPr sz="1800" b="1">
+                <a:solidFill>
+                  <a:srgbClr val="4264D0"/>
+                </a:solidFill>
+                <a:latin typeface="Nimbus Sans"/>
+                <a:ea typeface="Nimbus Sans"/>
+                <a:cs typeface="Nimbus Sans"/>
+              </a:defRPr>
+            </a:lvl8pPr>
+            <a:lvl9pPr algn="ctr">
+              <a:defRPr sz="1800" b="1">
+                <a:solidFill>
+                  <a:srgbClr val="4264D0"/>
+                </a:solidFill>
+                <a:latin typeface="Nimbus Sans"/>
+                <a:ea typeface="Nimbus Sans"/>
+                <a:cs typeface="Nimbus Sans"/>
+              </a:defRPr>
+            </a:lvl9pPr>
+          </a:lstStyle>
+          <a:p xmlns:a="http://schemas.openxmlformats.org/drawingml/2006/main">
+            <a:pPr algn="ctr">
+              <a:defRPr sz="1800" b="1">
+                <a:solidFill>
+                  <a:srgbClr val="4264D0"/>
+                </a:solidFill>
+                <a:latin typeface="Nimbus Sans"/>
+                <a:ea typeface="Nimbus Sans"/>
+                <a:cs typeface="Nimbus Sans"/>
+              </a:defRPr>
+            </a:pPr>
+            <a:r>
+              <a:rPr sz="1800" b="1">
+                <a:solidFill>
+                  <a:srgbClr val="4264D0"/>
+                </a:solidFill>
+                <a:latin typeface="Nimbus Sans"/>
+                <a:ea typeface="Nimbus Sans"/>
+                <a:cs typeface="Nimbus Sans"/>
+              </a:rPr>
+              <a:t>Report baseline</a:t>
+            </a:r>
+          </a:p>
+        </p:txBody>
+      </p:sp>
+      <p:sp>
+        <p:nvSpPr>
+          <p:cNvPr id="13" name="f154">
+            <a:extLst xmlns:a="http://schemas.openxmlformats.org/drawingml/2006/main">
+              <a:ext uri="{FF2B5EF4-FFF2-40B4-BE49-F238E27FC236}">
+                <a16:creationId xmlns:a16="http://schemas.microsoft.com/office/drawing/2014/main" id="{84A0466F-74FF-45A4-ABEE-8CCB97362435}"/>
+              </a:ext>
+            </a:extLst>
+          </p:cNvPr>
+          <p:cNvSpPr>
+            <a:spLocks xmlns:a="http://schemas.openxmlformats.org/drawingml/2006/main" noGrp="1"/>
+          </p:cNvSpPr>
+          <p:nvPr/>
+        </p:nvSpPr>
+        <p:spPr>
+          <a:xfrm xmlns:a="http://schemas.openxmlformats.org/drawingml/2006/main">
+            <a:off x="4381500" y="6524625"/>
+            <a:ext cx="2000250" cy="590550"/>
+          </a:xfrm>
+          <a:prstGeom xmlns:a="http://schemas.openxmlformats.org/drawingml/2006/main" prst="roundRect">
+            <a:avLst>
+              <a:gd name="adj" fmla="val 19355"/>
+            </a:avLst>
+          </a:prstGeom>
+          <a:solidFill xmlns:a="http://schemas.openxmlformats.org/drawingml/2006/main">
+            <a:srgbClr val="F0F4FF"/>
+          </a:solidFill>
+          <a:ln xmlns:a="http://schemas.openxmlformats.org/drawingml/2006/main" w="17145">
+            <a:solidFill>
+              <a:srgbClr val="D9E3EF"/>
+            </a:solidFill>
+            <a:prstDash val="solid"/>
+          </a:ln>
+        </p:spPr>
+      </p:sp>
+      <p:sp>
+        <p:nvSpPr>
+          <p:cNvPr id="14" name="f155">
+            <a:extLst xmlns:a="http://schemas.openxmlformats.org/drawingml/2006/main">
+              <a:ext uri="{FF2B5EF4-FFF2-40B4-BE49-F238E27FC236}">
+                <a16:creationId xmlns:a16="http://schemas.microsoft.com/office/drawing/2014/main" id="{12640F2A-2561-419E-99CB-60357E7809C4}"/>
+              </a:ext>
+            </a:extLst>
+          </p:cNvPr>
+          <p:cNvSpPr>
+            <a:spLocks xmlns:a="http://schemas.openxmlformats.org/drawingml/2006/main" noGrp="1"/>
+          </p:cNvSpPr>
+          <p:nvPr/>
+        </p:nvSpPr>
+        <p:spPr>
+          <a:xfrm xmlns:a="http://schemas.openxmlformats.org/drawingml/2006/main">
+            <a:off x="4476750" y="6705600"/>
+            <a:ext cx="1809750" cy="304800"/>
+          </a:xfrm>
+          <a:prstGeom xmlns:a="http://schemas.openxmlformats.org/drawingml/2006/main" prst="rect">
+            <a:avLst/>
+          </a:prstGeom>
+          <a:noFill xmlns:a="http://schemas.openxmlformats.org/drawingml/2006/main"/>
+          <a:ln xmlns:a="http://schemas.openxmlformats.org/drawingml/2006/main" w="0">
+            <a:noFill/>
+            <a:prstDash val="solid"/>
+          </a:ln>
+        </p:spPr>
+        <p:txBody>
+          <a:bodyPr xmlns:a="http://schemas.openxmlformats.org/drawingml/2006/main" wrap="none" lIns="0" tIns="0" rIns="0" bIns="0" anchor="t">
+            <a:noAutofit/>
+          </a:bodyPr>
+          <a:lstStyle xmlns:a="http://schemas.openxmlformats.org/drawingml/2006/main">
+            <a:defPPr algn="ctr">
+              <a:defRPr sz="1800" b="1">
+                <a:solidFill>
+                  <a:srgbClr val="4264D0"/>
+                </a:solidFill>
+                <a:latin typeface="Nimbus Sans"/>
+                <a:ea typeface="Nimbus Sans"/>
+                <a:cs typeface="Nimbus Sans"/>
+              </a:defRPr>
+            </a:defPPr>
+            <a:lvl1pPr algn="ctr">
+              <a:defRPr sz="1800" b="1">
+                <a:solidFill>
+                  <a:srgbClr val="4264D0"/>
+                </a:solidFill>
+                <a:latin typeface="Nimbus Sans"/>
+                <a:ea typeface="Nimbus Sans"/>
+                <a:cs typeface="Nimbus Sans"/>
+              </a:defRPr>
+            </a:lvl1pPr>
+            <a:lvl2pPr algn="ctr">
+              <a:defRPr sz="1800" b="1">
+                <a:solidFill>
+                  <a:srgbClr val="4264D0"/>
+                </a:solidFill>
+                <a:latin typeface="Nimbus Sans"/>
+                <a:ea typeface="Nimbus Sans"/>
+                <a:cs typeface="Nimbus Sans"/>
+              </a:defRPr>
+            </a:lvl2pPr>
+            <a:lvl3pPr algn="ctr">
+              <a:defRPr sz="1800" b="1">
+                <a:solidFill>
+                  <a:srgbClr val="4264D0"/>
+                </a:solidFill>
+                <a:latin typeface="Nimbus Sans"/>
+                <a:ea typeface="Nimbus Sans"/>
+                <a:cs typeface="Nimbus Sans"/>
+              </a:defRPr>
+            </a:lvl3pPr>
+            <a:lvl4pPr algn="ctr">
+              <a:defRPr sz="1800" b="1">
+                <a:solidFill>
+                  <a:srgbClr val="4264D0"/>
+                </a:solidFill>
+                <a:latin typeface="Nimbus Sans"/>
+                <a:ea typeface="Nimbus Sans"/>
+                <a:cs typeface="Nimbus Sans"/>
+              </a:defRPr>
+            </a:lvl4pPr>
+            <a:lvl5pPr algn="ctr">
+              <a:defRPr sz="1800" b="1">
+                <a:solidFill>
+                  <a:srgbClr val="4264D0"/>
+                </a:solidFill>
+                <a:latin typeface="Nimbus Sans"/>
+                <a:ea typeface="Nimbus Sans"/>
+                <a:cs typeface="Nimbus Sans"/>
+              </a:defRPr>
+            </a:lvl5pPr>
+            <a:lvl6pPr algn="ctr">
+              <a:defRPr sz="1800" b="1">
+                <a:solidFill>
+                  <a:srgbClr val="4264D0"/>
+                </a:solidFill>
+                <a:latin typeface="Nimbus Sans"/>
+                <a:ea typeface="Nimbus Sans"/>
+                <a:cs typeface="Nimbus Sans"/>
+              </a:defRPr>
+            </a:lvl6pPr>
+            <a:lvl7pPr algn="ctr">
+              <a:defRPr sz="1800" b="1">
+                <a:solidFill>
+                  <a:srgbClr val="4264D0"/>
+                </a:solidFill>
+                <a:latin typeface="Nimbus Sans"/>
+                <a:ea typeface="Nimbus Sans"/>
+                <a:cs typeface="Nimbus Sans"/>
+              </a:defRPr>
+            </a:lvl7pPr>
+            <a:lvl8pPr algn="ctr">
+              <a:defRPr sz="1800" b="1">
+                <a:solidFill>
+                  <a:srgbClr val="4264D0"/>
+                </a:solidFill>
+                <a:latin typeface="Nimbus Sans"/>
+                <a:ea typeface="Nimbus Sans"/>
+                <a:cs typeface="Nimbus Sans"/>
+              </a:defRPr>
+            </a:lvl8pPr>
+            <a:lvl9pPr algn="ctr">
+              <a:defRPr sz="1800" b="1">
+                <a:solidFill>
+                  <a:srgbClr val="4264D0"/>
+                </a:solidFill>
+                <a:latin typeface="Nimbus Sans"/>
+                <a:ea typeface="Nimbus Sans"/>
+                <a:cs typeface="Nimbus Sans"/>
+              </a:defRPr>
+            </a:lvl9pPr>
+          </a:lstStyle>
+          <a:p xmlns:a="http://schemas.openxmlformats.org/drawingml/2006/main">
+            <a:pPr algn="ctr">
+              <a:defRPr sz="1800" b="1">
+                <a:solidFill>
+                  <a:srgbClr val="4264D0"/>
+                </a:solidFill>
+                <a:latin typeface="Nimbus Sans"/>
+                <a:ea typeface="Nimbus Sans"/>
+                <a:cs typeface="Nimbus Sans"/>
+              </a:defRPr>
+            </a:pPr>
+            <a:r>
+              <a:rPr sz="1800" b="1">
+                <a:solidFill>
+                  <a:srgbClr val="4264D0"/>
+                </a:solidFill>
+                <a:latin typeface="Nimbus Sans"/>
+                <a:ea typeface="Nimbus Sans"/>
+                <a:cs typeface="Nimbus Sans"/>
+              </a:rPr>
+              <a:t>Report mutation</a:t>
+            </a:r>
+          </a:p>
+        </p:txBody>
+      </p:sp>
+      <p:sp>
+        <p:nvSpPr>
+          <p:cNvPr id="15" name="f156">
+            <a:extLst xmlns:a="http://schemas.openxmlformats.org/drawingml/2006/main">
+              <a:ext uri="{FF2B5EF4-FFF2-40B4-BE49-F238E27FC236}">
+                <a16:creationId xmlns:a16="http://schemas.microsoft.com/office/drawing/2014/main" id="{70139070-BEB8-472C-BB65-A383A8500825}"/>
+              </a:ext>
+            </a:extLst>
+          </p:cNvPr>
+          <p:cNvSpPr>
+            <a:spLocks xmlns:a="http://schemas.openxmlformats.org/drawingml/2006/main" noGrp="1"/>
+          </p:cNvSpPr>
+          <p:nvPr/>
+        </p:nvSpPr>
+        <p:spPr>
+          <a:xfrm xmlns:a="http://schemas.openxmlformats.org/drawingml/2006/main">
+            <a:off x="6572250" y="4619625"/>
+            <a:ext cx="1524000" cy="857250"/>
+          </a:xfrm>
+          <a:prstGeom xmlns:a="http://schemas.openxmlformats.org/drawingml/2006/main" prst="roundRect">
+            <a:avLst>
+              <a:gd name="adj" fmla="val 13333"/>
+            </a:avLst>
+          </a:prstGeom>
+          <a:solidFill xmlns:a="http://schemas.openxmlformats.org/drawingml/2006/main">
+            <a:srgbClr val="FFF7E9"/>
+          </a:solidFill>
+          <a:ln xmlns:a="http://schemas.openxmlformats.org/drawingml/2006/main" w="17145">
+            <a:solidFill>
+              <a:srgbClr val="ECD5AD"/>
+            </a:solidFill>
+            <a:prstDash val="solid"/>
+          </a:ln>
+        </p:spPr>
+      </p:sp>
+      <p:sp>
+        <p:nvSpPr>
+          <p:cNvPr id="16" name="f157">
+            <a:extLst xmlns:a="http://schemas.openxmlformats.org/drawingml/2006/main">
+              <a:ext uri="{FF2B5EF4-FFF2-40B4-BE49-F238E27FC236}">
+                <a16:creationId xmlns:a16="http://schemas.microsoft.com/office/drawing/2014/main" id="{1D59284F-3797-470C-AE04-2E0CA811CE79}"/>
+              </a:ext>
+            </a:extLst>
+          </p:cNvPr>
+          <p:cNvSpPr>
+            <a:spLocks xmlns:a="http://schemas.openxmlformats.org/drawingml/2006/main" noGrp="1"/>
+          </p:cNvSpPr>
+          <p:nvPr/>
+        </p:nvSpPr>
+        <p:spPr>
+          <a:xfrm xmlns:a="http://schemas.openxmlformats.org/drawingml/2006/main">
+            <a:off x="6667500" y="4798505"/>
+            <a:ext cx="1333500" cy="575691"/>
+          </a:xfrm>
+          <a:prstGeom xmlns:a="http://schemas.openxmlformats.org/drawingml/2006/main" prst="rect">
+            <a:avLst/>
+          </a:prstGeom>
+          <a:noFill xmlns:a="http://schemas.openxmlformats.org/drawingml/2006/main"/>
+          <a:ln xmlns:a="http://schemas.openxmlformats.org/drawingml/2006/main" w="0">
+            <a:noFill/>
+            <a:prstDash val="solid"/>
+          </a:ln>
+        </p:spPr>
+        <p:txBody>
+          <a:bodyPr xmlns:a="http://schemas.openxmlformats.org/drawingml/2006/main" wrap="none" lIns="0" tIns="0" rIns="0" bIns="0" anchor="t">
+            <a:noAutofit/>
+          </a:bodyPr>
+          <a:lstStyle xmlns:a="http://schemas.openxmlformats.org/drawingml/2006/main">
+            <a:defPPr algn="ctr">
+              <a:defRPr sz="1725" b="1">
+                <a:solidFill>
+                  <a:srgbClr val="9D7139"/>
+                </a:solidFill>
+                <a:latin typeface="Nimbus Sans"/>
+                <a:ea typeface="Nimbus Sans"/>
+                <a:cs typeface="Nimbus Sans"/>
+              </a:defRPr>
+            </a:defPPr>
+            <a:lvl1pPr algn="ctr">
+              <a:defRPr sz="1725" b="1">
+                <a:solidFill>
+                  <a:srgbClr val="9D7139"/>
+                </a:solidFill>
+                <a:latin typeface="Nimbus Sans"/>
+                <a:ea typeface="Nimbus Sans"/>
+                <a:cs typeface="Nimbus Sans"/>
+              </a:defRPr>
+            </a:lvl1pPr>
+            <a:lvl2pPr algn="ctr">
+              <a:defRPr sz="1725" b="1">
+                <a:solidFill>
+                  <a:srgbClr val="9D7139"/>
+                </a:solidFill>
+                <a:latin typeface="Nimbus Sans"/>
+                <a:ea typeface="Nimbus Sans"/>
+                <a:cs typeface="Nimbus Sans"/>
+              </a:defRPr>
+            </a:lvl2pPr>
+            <a:lvl3pPr algn="ctr">
+              <a:defRPr sz="1725" b="1">
+                <a:solidFill>
+                  <a:srgbClr val="9D7139"/>
+                </a:solidFill>
+                <a:latin typeface="Nimbus Sans"/>
+                <a:ea typeface="Nimbus Sans"/>
+                <a:cs typeface="Nimbus Sans"/>
+              </a:defRPr>
+            </a:lvl3pPr>
+            <a:lvl4pPr algn="ctr">
+              <a:defRPr sz="1725" b="1">
+                <a:solidFill>
+                  <a:srgbClr val="9D7139"/>
+                </a:solidFill>
+                <a:latin typeface="Nimbus Sans"/>
+                <a:ea typeface="Nimbus Sans"/>
+                <a:cs typeface="Nimbus Sans"/>
+              </a:defRPr>
+            </a:lvl4pPr>
+            <a:lvl5pPr algn="ctr">
+              <a:defRPr sz="1725" b="1">
+                <a:solidFill>
+                  <a:srgbClr val="9D7139"/>
+                </a:solidFill>
+                <a:latin typeface="Nimbus Sans"/>
+                <a:ea typeface="Nimbus Sans"/>
+                <a:cs typeface="Nimbus Sans"/>
+              </a:defRPr>
+            </a:lvl5pPr>
+            <a:lvl6pPr algn="ctr">
+              <a:defRPr sz="1725" b="1">
+                <a:solidFill>
+                  <a:srgbClr val="9D7139"/>
+                </a:solidFill>
+                <a:latin typeface="Nimbus Sans"/>
+                <a:ea typeface="Nimbus Sans"/>
+                <a:cs typeface="Nimbus Sans"/>
+              </a:defRPr>
+            </a:lvl6pPr>
+            <a:lvl7pPr algn="ctr">
+              <a:defRPr sz="1725" b="1">
+                <a:solidFill>
+                  <a:srgbClr val="9D7139"/>
+                </a:solidFill>
+                <a:latin typeface="Nimbus Sans"/>
+                <a:ea typeface="Nimbus Sans"/>
+                <a:cs typeface="Nimbus Sans"/>
+              </a:defRPr>
+            </a:lvl7pPr>
+            <a:lvl8pPr algn="ctr">
+              <a:defRPr sz="1725" b="1">
+                <a:solidFill>
+                  <a:srgbClr val="9D7139"/>
+                </a:solidFill>
+                <a:latin typeface="Nimbus Sans"/>
+                <a:ea typeface="Nimbus Sans"/>
+                <a:cs typeface="Nimbus Sans"/>
+              </a:defRPr>
+            </a:lvl8pPr>
+            <a:lvl9pPr algn="ctr">
+              <a:defRPr sz="1725" b="1">
+                <a:solidFill>
+                  <a:srgbClr val="9D7139"/>
+                </a:solidFill>
+                <a:latin typeface="Nimbus Sans"/>
+                <a:ea typeface="Nimbus Sans"/>
+                <a:cs typeface="Nimbus Sans"/>
+              </a:defRPr>
+            </a:lvl9pPr>
+          </a:lstStyle>
+          <a:p xmlns:a="http://schemas.openxmlformats.org/drawingml/2006/main">
+            <a:pPr algn="ctr">
+              <a:defRPr sz="1725" b="1">
+                <a:solidFill>
+                  <a:srgbClr val="9D7139"/>
+                </a:solidFill>
+                <a:latin typeface="Nimbus Sans"/>
+                <a:ea typeface="Nimbus Sans"/>
+                <a:cs typeface="Nimbus Sans"/>
+              </a:defRPr>
+            </a:pPr>
+            <a:r>
+              <a:rPr sz="1725" b="1">
+                <a:solidFill>
+                  <a:srgbClr val="9D7139"/>
+                </a:solidFill>
+                <a:latin typeface="Nimbus Sans"/>
+                <a:ea typeface="Nimbus Sans"/>
+                <a:cs typeface="Nimbus Sans"/>
+              </a:rPr>
+              <a:t>MOTORE</a:t>
+            </a:r>
+          </a:p>
+          <a:p xmlns:a="http://schemas.openxmlformats.org/drawingml/2006/main">
+            <a:pPr algn="ctr">
+              <a:defRPr sz="1725" b="1">
+                <a:solidFill>
+                  <a:srgbClr val="9D7139"/>
+                </a:solidFill>
+                <a:latin typeface="Nimbus Sans"/>
+                <a:ea typeface="Nimbus Sans"/>
+                <a:cs typeface="Nimbus Sans"/>
+              </a:defRPr>
+            </a:pPr>
+            <a:r>
+              <a:rPr sz="1725" b="1">
+                <a:solidFill>
+                  <a:srgbClr val="9D7139"/>
+                </a:solidFill>
+                <a:latin typeface="Nimbus Sans"/>
+                <a:ea typeface="Nimbus Sans"/>
+                <a:cs typeface="Nimbus Sans"/>
+              </a:rPr>
+              <a:t>di mutazione</a:t>
+            </a:r>
+          </a:p>
+        </p:txBody>
+      </p:sp>
+      <p:sp>
+        <p:nvSpPr>
+          <p:cNvPr id="17" name="f158">
+            <a:extLst xmlns:a="http://schemas.openxmlformats.org/drawingml/2006/main">
+              <a:ext uri="{FF2B5EF4-FFF2-40B4-BE49-F238E27FC236}">
+                <a16:creationId xmlns:a16="http://schemas.microsoft.com/office/drawing/2014/main" id="{59C10BED-C272-4530-A25F-7B427293E8DD}"/>
+              </a:ext>
+            </a:extLst>
+          </p:cNvPr>
+          <p:cNvSpPr>
+            <a:spLocks xmlns:a="http://schemas.openxmlformats.org/drawingml/2006/main" noGrp="1"/>
+          </p:cNvSpPr>
+          <p:nvPr/>
+        </p:nvSpPr>
+        <p:spPr>
+          <a:xfrm xmlns:a="http://schemas.openxmlformats.org/drawingml/2006/main">
+            <a:off x="6572250" y="3571875"/>
+            <a:ext cx="1524000" cy="590550"/>
+          </a:xfrm>
+          <a:prstGeom xmlns:a="http://schemas.openxmlformats.org/drawingml/2006/main" prst="roundRect">
+            <a:avLst>
+              <a:gd name="adj" fmla="val 19355"/>
+            </a:avLst>
+          </a:prstGeom>
+          <a:solidFill xmlns:a="http://schemas.openxmlformats.org/drawingml/2006/main">
+            <a:srgbClr val="FFFFFF"/>
+          </a:solidFill>
+          <a:ln xmlns:a="http://schemas.openxmlformats.org/drawingml/2006/main" w="17145">
+            <a:solidFill>
+              <a:srgbClr val="D9E3EF"/>
+            </a:solidFill>
+            <a:prstDash val="solid"/>
+          </a:ln>
+        </p:spPr>
+      </p:sp>
+      <p:sp>
+        <p:nvSpPr>
+          <p:cNvPr id="18" name="f159">
+            <a:extLst xmlns:a="http://schemas.openxmlformats.org/drawingml/2006/main">
+              <a:ext uri="{FF2B5EF4-FFF2-40B4-BE49-F238E27FC236}">
+                <a16:creationId xmlns:a16="http://schemas.microsoft.com/office/drawing/2014/main" id="{FB902540-5C24-4EC3-BAB7-BF179AB14B97}"/>
+              </a:ext>
+            </a:extLst>
+          </p:cNvPr>
+          <p:cNvSpPr>
+            <a:spLocks xmlns:a="http://schemas.openxmlformats.org/drawingml/2006/main" noGrp="1"/>
+          </p:cNvSpPr>
+          <p:nvPr/>
+        </p:nvSpPr>
+        <p:spPr>
+          <a:xfrm xmlns:a="http://schemas.openxmlformats.org/drawingml/2006/main">
+            <a:off x="6667500" y="3771900"/>
+            <a:ext cx="1333500" cy="266700"/>
+          </a:xfrm>
+          <a:prstGeom xmlns:a="http://schemas.openxmlformats.org/drawingml/2006/main" prst="rect">
+            <a:avLst/>
+          </a:prstGeom>
+          <a:noFill xmlns:a="http://schemas.openxmlformats.org/drawingml/2006/main"/>
+          <a:ln xmlns:a="http://schemas.openxmlformats.org/drawingml/2006/main" w="0">
+            <a:noFill/>
+            <a:prstDash val="solid"/>
+          </a:ln>
+        </p:spPr>
+        <p:txBody>
+          <a:bodyPr xmlns:a="http://schemas.openxmlformats.org/drawingml/2006/main" wrap="none" lIns="0" tIns="0" rIns="0" bIns="0" anchor="t">
+            <a:noAutofit/>
+          </a:bodyPr>
+          <a:lstStyle xmlns:a="http://schemas.openxmlformats.org/drawingml/2006/main">
+            <a:defPPr algn="ctr">
+              <a:defRPr sz="1500" b="1">
+                <a:solidFill>
+                  <a:srgbClr val="182536"/>
+                </a:solidFill>
+                <a:latin typeface="Nimbus Sans"/>
+                <a:ea typeface="Nimbus Sans"/>
+                <a:cs typeface="Nimbus Sans"/>
+              </a:defRPr>
+            </a:defPPr>
+            <a:lvl1pPr algn="ctr">
+              <a:defRPr sz="1500" b="1">
+                <a:solidFill>
+                  <a:srgbClr val="182536"/>
+                </a:solidFill>
+                <a:latin typeface="Nimbus Sans"/>
+                <a:ea typeface="Nimbus Sans"/>
+                <a:cs typeface="Nimbus Sans"/>
+              </a:defRPr>
+            </a:lvl1pPr>
+            <a:lvl2pPr algn="ctr">
+              <a:defRPr sz="1500" b="1">
+                <a:solidFill>
+                  <a:srgbClr val="182536"/>
+                </a:solidFill>
+                <a:latin typeface="Nimbus Sans"/>
+                <a:ea typeface="Nimbus Sans"/>
+                <a:cs typeface="Nimbus Sans"/>
+              </a:defRPr>
+            </a:lvl2pPr>
+            <a:lvl3pPr algn="ctr">
+              <a:defRPr sz="1500" b="1">
+                <a:solidFill>
+                  <a:srgbClr val="182536"/>
+                </a:solidFill>
+                <a:latin typeface="Nimbus Sans"/>
+                <a:ea typeface="Nimbus Sans"/>
+                <a:cs typeface="Nimbus Sans"/>
+              </a:defRPr>
+            </a:lvl3pPr>
+            <a:lvl4pPr algn="ctr">
+              <a:defRPr sz="1500" b="1">
+                <a:solidFill>
+                  <a:srgbClr val="182536"/>
+                </a:solidFill>
+                <a:latin typeface="Nimbus Sans"/>
+                <a:ea typeface="Nimbus Sans"/>
+                <a:cs typeface="Nimbus Sans"/>
+              </a:defRPr>
+            </a:lvl4pPr>
+            <a:lvl5pPr algn="ctr">
+              <a:defRPr sz="1500" b="1">
+                <a:solidFill>
+                  <a:srgbClr val="182536"/>
+                </a:solidFill>
+                <a:latin typeface="Nimbus Sans"/>
+                <a:ea typeface="Nimbus Sans"/>
+                <a:cs typeface="Nimbus Sans"/>
+              </a:defRPr>
+            </a:lvl5pPr>
+            <a:lvl6pPr algn="ctr">
+              <a:defRPr sz="1500" b="1">
+                <a:solidFill>
+                  <a:srgbClr val="182536"/>
+                </a:solidFill>
+                <a:latin typeface="Nimbus Sans"/>
+                <a:ea typeface="Nimbus Sans"/>
+                <a:cs typeface="Nimbus Sans"/>
+              </a:defRPr>
+            </a:lvl6pPr>
+            <a:lvl7pPr algn="ctr">
+              <a:defRPr sz="1500" b="1">
+                <a:solidFill>
+                  <a:srgbClr val="182536"/>
+                </a:solidFill>
+                <a:latin typeface="Nimbus Sans"/>
+                <a:ea typeface="Nimbus Sans"/>
+                <a:cs typeface="Nimbus Sans"/>
+              </a:defRPr>
+            </a:lvl7pPr>
+            <a:lvl8pPr algn="ctr">
+              <a:defRPr sz="1500" b="1">
+                <a:solidFill>
+                  <a:srgbClr val="182536"/>
+                </a:solidFill>
+                <a:latin typeface="Nimbus Sans"/>
+                <a:ea typeface="Nimbus Sans"/>
+                <a:cs typeface="Nimbus Sans"/>
+              </a:defRPr>
+            </a:lvl8pPr>
+            <a:lvl9pPr algn="ctr">
+              <a:defRPr sz="1500" b="1">
+                <a:solidFill>
+                  <a:srgbClr val="182536"/>
+                </a:solidFill>
+                <a:latin typeface="Nimbus Sans"/>
+                <a:ea typeface="Nimbus Sans"/>
+                <a:cs typeface="Nimbus Sans"/>
+              </a:defRPr>
+            </a:lvl9pPr>
+          </a:lstStyle>
+          <a:p xmlns:a="http://schemas.openxmlformats.org/drawingml/2006/main">
+            <a:pPr algn="ctr">
+              <a:defRPr sz="1500" b="1">
+                <a:solidFill>
+                  <a:srgbClr val="182536"/>
+                </a:solidFill>
+                <a:latin typeface="Nimbus Sans"/>
+                <a:ea typeface="Nimbus Sans"/>
+                <a:cs typeface="Nimbus Sans"/>
+              </a:defRPr>
+            </a:pPr>
+            <a:r>
+              <a:rPr sz="1500" b="1">
+                <a:solidFill>
+                  <a:srgbClr val="182536"/>
+                </a:solidFill>
+                <a:latin typeface="Nimbus Sans"/>
+                <a:ea typeface="Nimbus Sans"/>
+                <a:cs typeface="Nimbus Sans"/>
+              </a:rPr>
+              <a:t>PCAP MUTATA</a:t>
+            </a:r>
+          </a:p>
+        </p:txBody>
+      </p:sp>
+      <p:sp>
+        <p:nvSpPr>
+          <p:cNvPr id="19" name="f160">
+            <a:extLst xmlns:a="http://schemas.openxmlformats.org/drawingml/2006/main">
+              <a:ext uri="{FF2B5EF4-FFF2-40B4-BE49-F238E27FC236}">
+                <a16:creationId xmlns:a16="http://schemas.microsoft.com/office/drawing/2014/main" id="{8002FCD6-1E5B-41F2-915A-F2348E179E5A}"/>
+              </a:ext>
+            </a:extLst>
+          </p:cNvPr>
+          <p:cNvSpPr>
+            <a:spLocks xmlns:a="http://schemas.openxmlformats.org/drawingml/2006/main" noGrp="1"/>
+          </p:cNvSpPr>
+          <p:nvPr/>
+        </p:nvSpPr>
+        <p:spPr>
+          <a:xfrm xmlns:a="http://schemas.openxmlformats.org/drawingml/2006/main">
+            <a:off x="4095750" y="3752850"/>
+            <a:ext cx="95" cy="619125"/>
+          </a:xfrm>
+          <a:prstGeom xmlns:a="http://schemas.openxmlformats.org/drawingml/2006/main" prst="line">
+            <a:avLst/>
+          </a:prstGeom>
+          <a:noFill xmlns:a="http://schemas.openxmlformats.org/drawingml/2006/main"/>
+          <a:ln xmlns:a="http://schemas.openxmlformats.org/drawingml/2006/main" w="28575">
+            <a:solidFill>
+              <a:srgbClr val="4264D0"/>
+            </a:solidFill>
+            <a:prstDash val="solid"/>
+          </a:ln>
+        </p:spPr>
+      </p:sp>
+      <p:sp>
+        <p:nvSpPr>
+          <p:cNvPr id="20" name="f161">
+            <a:extLst xmlns:a="http://schemas.openxmlformats.org/drawingml/2006/main">
+              <a:ext uri="{FF2B5EF4-FFF2-40B4-BE49-F238E27FC236}">
+                <a16:creationId xmlns:a16="http://schemas.microsoft.com/office/drawing/2014/main" id="{0EBDF750-5B02-423A-9EE1-09E1136A281D}"/>
+              </a:ext>
+            </a:extLst>
+          </p:cNvPr>
+          <p:cNvSpPr>
+            <a:spLocks xmlns:a="http://schemas.openxmlformats.org/drawingml/2006/main" noGrp="1"/>
+          </p:cNvSpPr>
+          <p:nvPr/>
+        </p:nvSpPr>
+        <p:spPr>
+          <a:xfrm xmlns:a="http://schemas.openxmlformats.org/drawingml/2006/main">
+            <a:off x="4038600" y="4371975"/>
+            <a:ext cx="114300" cy="114300"/>
+          </a:xfrm>
+          <a:prstGeom xmlns:a="http://schemas.openxmlformats.org/drawingml/2006/main" prst="downArrow">
+            <a:avLst/>
+          </a:prstGeom>
+          <a:solidFill xmlns:a="http://schemas.openxmlformats.org/drawingml/2006/main">
+            <a:srgbClr val="4264D0"/>
+          </a:solidFill>
+          <a:ln xmlns:a="http://schemas.openxmlformats.org/drawingml/2006/main" w="0">
+            <a:noFill/>
+            <a:prstDash val="solid"/>
+          </a:ln>
+        </p:spPr>
+      </p:sp>
+      <p:sp>
+        <p:nvSpPr>
+          <p:cNvPr id="21" name="f162">
+            <a:extLst xmlns:a="http://schemas.openxmlformats.org/drawingml/2006/main">
+              <a:ext uri="{FF2B5EF4-FFF2-40B4-BE49-F238E27FC236}">
+                <a16:creationId xmlns:a16="http://schemas.microsoft.com/office/drawing/2014/main" id="{BAF3EE89-30C9-42DD-814A-C1128D645E0D}"/>
+              </a:ext>
+            </a:extLst>
+          </p:cNvPr>
+          <p:cNvSpPr>
+            <a:spLocks xmlns:a="http://schemas.openxmlformats.org/drawingml/2006/main" noGrp="1"/>
+          </p:cNvSpPr>
+          <p:nvPr/>
+        </p:nvSpPr>
+        <p:spPr>
+          <a:xfrm xmlns:a="http://schemas.openxmlformats.org/drawingml/2006/main">
+            <a:off x="2305050" y="4914900"/>
+            <a:ext cx="704850" cy="171450"/>
+          </a:xfrm>
+          <a:prstGeom xmlns:a="http://schemas.openxmlformats.org/drawingml/2006/main" prst="rightArrow">
+            <a:avLst/>
+          </a:prstGeom>
+          <a:solidFill xmlns:a="http://schemas.openxmlformats.org/drawingml/2006/main">
+            <a:srgbClr val="4264D0"/>
+          </a:solidFill>
+          <a:ln xmlns:a="http://schemas.openxmlformats.org/drawingml/2006/main" w="0">
+            <a:noFill/>
+            <a:prstDash val="solid"/>
+          </a:ln>
+        </p:spPr>
+      </p:sp>
+      <p:sp>
+        <p:nvSpPr>
+          <p:cNvPr id="22" name="f163">
+            <a:extLst xmlns:a="http://schemas.openxmlformats.org/drawingml/2006/main">
+              <a:ext uri="{FF2B5EF4-FFF2-40B4-BE49-F238E27FC236}">
+                <a16:creationId xmlns:a16="http://schemas.microsoft.com/office/drawing/2014/main" id="{87EF51E2-CC27-47B8-8ACF-6A43D145A2D3}"/>
+              </a:ext>
+            </a:extLst>
+          </p:cNvPr>
+          <p:cNvSpPr>
+            <a:spLocks xmlns:a="http://schemas.openxmlformats.org/drawingml/2006/main" noGrp="1"/>
+          </p:cNvSpPr>
+          <p:nvPr/>
+        </p:nvSpPr>
+        <p:spPr>
+          <a:xfrm xmlns:a="http://schemas.openxmlformats.org/drawingml/2006/main">
+            <a:off x="4095750" y="5591175"/>
+            <a:ext cx="95" cy="409575"/>
+          </a:xfrm>
+          <a:prstGeom xmlns:a="http://schemas.openxmlformats.org/drawingml/2006/main" prst="line">
+            <a:avLst/>
+          </a:prstGeom>
+          <a:noFill xmlns:a="http://schemas.openxmlformats.org/drawingml/2006/main"/>
+          <a:ln xmlns:a="http://schemas.openxmlformats.org/drawingml/2006/main" w="28575">
+            <a:solidFill>
+              <a:srgbClr val="4264D0"/>
+            </a:solidFill>
+            <a:prstDash val="solid"/>
+          </a:ln>
+        </p:spPr>
+      </p:sp>
+      <p:sp>
+        <p:nvSpPr>
+          <p:cNvPr id="23" name="f164">
+            <a:extLst xmlns:a="http://schemas.openxmlformats.org/drawingml/2006/main">
+              <a:ext uri="{FF2B5EF4-FFF2-40B4-BE49-F238E27FC236}">
+                <a16:creationId xmlns:a16="http://schemas.microsoft.com/office/drawing/2014/main" id="{885D87CD-A484-4DB8-B987-5BFF265D765B}"/>
+              </a:ext>
+            </a:extLst>
+          </p:cNvPr>
+          <p:cNvSpPr>
+            <a:spLocks xmlns:a="http://schemas.openxmlformats.org/drawingml/2006/main" noGrp="1"/>
+          </p:cNvSpPr>
+          <p:nvPr/>
+        </p:nvSpPr>
+        <p:spPr>
+          <a:xfrm xmlns:a="http://schemas.openxmlformats.org/drawingml/2006/main">
+            <a:off x="3048000" y="6000750"/>
+            <a:ext cx="1047750" cy="95"/>
+          </a:xfrm>
+          <a:prstGeom xmlns:a="http://schemas.openxmlformats.org/drawingml/2006/main" prst="line">
+            <a:avLst/>
+          </a:prstGeom>
+          <a:noFill xmlns:a="http://schemas.openxmlformats.org/drawingml/2006/main"/>
+          <a:ln xmlns:a="http://schemas.openxmlformats.org/drawingml/2006/main" w="28575">
+            <a:solidFill>
+              <a:srgbClr val="4264D0"/>
+            </a:solidFill>
+            <a:prstDash val="solid"/>
+          </a:ln>
+        </p:spPr>
+      </p:sp>
+      <p:sp>
+        <p:nvSpPr>
+          <p:cNvPr id="24" name="f165">
+            <a:extLst xmlns:a="http://schemas.openxmlformats.org/drawingml/2006/main">
+              <a:ext uri="{FF2B5EF4-FFF2-40B4-BE49-F238E27FC236}">
+                <a16:creationId xmlns:a16="http://schemas.microsoft.com/office/drawing/2014/main" id="{C758D815-D981-469F-AA0F-86654947A7C2}"/>
+              </a:ext>
+            </a:extLst>
+          </p:cNvPr>
+          <p:cNvSpPr>
+            <a:spLocks xmlns:a="http://schemas.openxmlformats.org/drawingml/2006/main" noGrp="1"/>
+          </p:cNvSpPr>
+          <p:nvPr/>
+        </p:nvSpPr>
+        <p:spPr>
+          <a:xfrm xmlns:a="http://schemas.openxmlformats.org/drawingml/2006/main">
+            <a:off x="3048000" y="6000750"/>
+            <a:ext cx="95" cy="352425"/>
+          </a:xfrm>
+          <a:prstGeom xmlns:a="http://schemas.openxmlformats.org/drawingml/2006/main" prst="line">
+            <a:avLst/>
+          </a:prstGeom>
+          <a:noFill xmlns:a="http://schemas.openxmlformats.org/drawingml/2006/main"/>
+          <a:ln xmlns:a="http://schemas.openxmlformats.org/drawingml/2006/main" w="28575">
+            <a:solidFill>
+              <a:srgbClr val="4264D0"/>
+            </a:solidFill>
+            <a:prstDash val="solid"/>
+          </a:ln>
+        </p:spPr>
+      </p:sp>
+      <p:sp>
+        <p:nvSpPr>
+          <p:cNvPr id="25" name="f166">
+            <a:extLst xmlns:a="http://schemas.openxmlformats.org/drawingml/2006/main">
+              <a:ext uri="{FF2B5EF4-FFF2-40B4-BE49-F238E27FC236}">
+                <a16:creationId xmlns:a16="http://schemas.microsoft.com/office/drawing/2014/main" id="{EF75FB5A-8701-4F38-BDF9-8E357EB88B66}"/>
+              </a:ext>
+            </a:extLst>
+          </p:cNvPr>
+          <p:cNvSpPr>
+            <a:spLocks xmlns:a="http://schemas.openxmlformats.org/drawingml/2006/main" noGrp="1"/>
+          </p:cNvSpPr>
+          <p:nvPr/>
+        </p:nvSpPr>
+        <p:spPr>
+          <a:xfrm xmlns:a="http://schemas.openxmlformats.org/drawingml/2006/main">
+            <a:off x="2990850" y="6353175"/>
+            <a:ext cx="114300" cy="114300"/>
+          </a:xfrm>
+          <a:prstGeom xmlns:a="http://schemas.openxmlformats.org/drawingml/2006/main" prst="downArrow">
+            <a:avLst/>
+          </a:prstGeom>
+          <a:solidFill xmlns:a="http://schemas.openxmlformats.org/drawingml/2006/main">
+            <a:srgbClr val="4264D0"/>
+          </a:solidFill>
+          <a:ln xmlns:a="http://schemas.openxmlformats.org/drawingml/2006/main" w="0">
+            <a:noFill/>
+            <a:prstDash val="solid"/>
+          </a:ln>
+        </p:spPr>
+      </p:sp>
+      <p:sp>
+        <p:nvSpPr>
+          <p:cNvPr id="26" name="f167">
+            <a:extLst xmlns:a="http://schemas.openxmlformats.org/drawingml/2006/main">
+              <a:ext uri="{FF2B5EF4-FFF2-40B4-BE49-F238E27FC236}">
+                <a16:creationId xmlns:a16="http://schemas.microsoft.com/office/drawing/2014/main" id="{AD8273C1-2906-43B1-8F68-98E07E8E1D04}"/>
+              </a:ext>
+            </a:extLst>
+          </p:cNvPr>
+          <p:cNvSpPr>
+            <a:spLocks xmlns:a="http://schemas.openxmlformats.org/drawingml/2006/main" noGrp="1"/>
+          </p:cNvSpPr>
+          <p:nvPr/>
+        </p:nvSpPr>
+        <p:spPr>
+          <a:xfrm xmlns:a="http://schemas.openxmlformats.org/drawingml/2006/main">
+            <a:off x="4095750" y="6000750"/>
+            <a:ext cx="1285875" cy="95"/>
+          </a:xfrm>
+          <a:prstGeom xmlns:a="http://schemas.openxmlformats.org/drawingml/2006/main" prst="line">
+            <a:avLst/>
+          </a:prstGeom>
+          <a:noFill xmlns:a="http://schemas.openxmlformats.org/drawingml/2006/main"/>
+          <a:ln xmlns:a="http://schemas.openxmlformats.org/drawingml/2006/main" w="28575">
+            <a:solidFill>
+              <a:srgbClr val="4264D0"/>
+            </a:solidFill>
+            <a:prstDash val="solid"/>
+          </a:ln>
+        </p:spPr>
+      </p:sp>
+      <p:sp>
+        <p:nvSpPr>
+          <p:cNvPr id="27" name="f168">
+            <a:extLst xmlns:a="http://schemas.openxmlformats.org/drawingml/2006/main">
+              <a:ext uri="{FF2B5EF4-FFF2-40B4-BE49-F238E27FC236}">
+                <a16:creationId xmlns:a16="http://schemas.microsoft.com/office/drawing/2014/main" id="{9FB7ABC3-EC62-4820-B860-61E64EB79674}"/>
+              </a:ext>
+            </a:extLst>
+          </p:cNvPr>
+          <p:cNvSpPr>
+            <a:spLocks xmlns:a="http://schemas.openxmlformats.org/drawingml/2006/main" noGrp="1"/>
+          </p:cNvSpPr>
+          <p:nvPr/>
+        </p:nvSpPr>
+        <p:spPr>
+          <a:xfrm xmlns:a="http://schemas.openxmlformats.org/drawingml/2006/main">
+            <a:off x="5381625" y="6000750"/>
+            <a:ext cx="95" cy="352425"/>
+          </a:xfrm>
+          <a:prstGeom xmlns:a="http://schemas.openxmlformats.org/drawingml/2006/main" prst="line">
+            <a:avLst/>
+          </a:prstGeom>
+          <a:noFill xmlns:a="http://schemas.openxmlformats.org/drawingml/2006/main"/>
+          <a:ln xmlns:a="http://schemas.openxmlformats.org/drawingml/2006/main" w="28575">
+            <a:solidFill>
+              <a:srgbClr val="4264D0"/>
+            </a:solidFill>
+            <a:prstDash val="solid"/>
+          </a:ln>
+        </p:spPr>
+      </p:sp>
+      <p:sp>
+        <p:nvSpPr>
+          <p:cNvPr id="28" name="f169">
+            <a:extLst xmlns:a="http://schemas.openxmlformats.org/drawingml/2006/main">
+              <a:ext uri="{FF2B5EF4-FFF2-40B4-BE49-F238E27FC236}">
+                <a16:creationId xmlns:a16="http://schemas.microsoft.com/office/drawing/2014/main" id="{11CBE083-C017-4CE5-8071-E9685E969261}"/>
+              </a:ext>
+            </a:extLst>
+          </p:cNvPr>
+          <p:cNvSpPr>
+            <a:spLocks xmlns:a="http://schemas.openxmlformats.org/drawingml/2006/main" noGrp="1"/>
+          </p:cNvSpPr>
+          <p:nvPr/>
+        </p:nvSpPr>
+        <p:spPr>
+          <a:xfrm xmlns:a="http://schemas.openxmlformats.org/drawingml/2006/main">
+            <a:off x="5324475" y="6353175"/>
+            <a:ext cx="114300" cy="114300"/>
+          </a:xfrm>
+          <a:prstGeom xmlns:a="http://schemas.openxmlformats.org/drawingml/2006/main" prst="downArrow">
+            <a:avLst/>
+          </a:prstGeom>
+          <a:solidFill xmlns:a="http://schemas.openxmlformats.org/drawingml/2006/main">
+            <a:srgbClr val="4264D0"/>
+          </a:solidFill>
+          <a:ln xmlns:a="http://schemas.openxmlformats.org/drawingml/2006/main" w="0">
+            <a:noFill/>
+            <a:prstDash val="solid"/>
+          </a:ln>
+        </p:spPr>
+      </p:sp>
+      <p:sp>
+        <p:nvSpPr>
+          <p:cNvPr id="29" name="f170">
+            <a:extLst xmlns:a="http://schemas.openxmlformats.org/drawingml/2006/main">
+              <a:ext uri="{FF2B5EF4-FFF2-40B4-BE49-F238E27FC236}">
+                <a16:creationId xmlns:a16="http://schemas.microsoft.com/office/drawing/2014/main" id="{E2ECBDE3-1CFA-4FF1-9E59-2D8373420C95}"/>
+              </a:ext>
+            </a:extLst>
+          </p:cNvPr>
+          <p:cNvSpPr>
+            <a:spLocks xmlns:a="http://schemas.openxmlformats.org/drawingml/2006/main" noGrp="1"/>
+          </p:cNvSpPr>
+          <p:nvPr/>
+        </p:nvSpPr>
+        <p:spPr>
+          <a:xfrm xmlns:a="http://schemas.openxmlformats.org/drawingml/2006/main">
+            <a:off x="4162425" y="6819900"/>
+            <a:ext cx="47625" cy="95"/>
+          </a:xfrm>
+          <a:prstGeom xmlns:a="http://schemas.openxmlformats.org/drawingml/2006/main" prst="line">
+            <a:avLst/>
+          </a:prstGeom>
+          <a:noFill xmlns:a="http://schemas.openxmlformats.org/drawingml/2006/main"/>
+          <a:ln xmlns:a="http://schemas.openxmlformats.org/drawingml/2006/main" w="28575">
+            <a:solidFill>
+              <a:srgbClr val="4264D0"/>
+            </a:solidFill>
+            <a:prstDash val="solid"/>
+          </a:ln>
+        </p:spPr>
+      </p:sp>
+      <p:sp>
+        <p:nvSpPr>
+          <p:cNvPr id="30" name="f171">
+            <a:extLst xmlns:a="http://schemas.openxmlformats.org/drawingml/2006/main">
+              <a:ext uri="{FF2B5EF4-FFF2-40B4-BE49-F238E27FC236}">
+                <a16:creationId xmlns:a16="http://schemas.microsoft.com/office/drawing/2014/main" id="{C02A19F2-EEF8-47EE-A920-950FFAAB4CF3}"/>
+              </a:ext>
+            </a:extLst>
+          </p:cNvPr>
+          <p:cNvSpPr>
+            <a:spLocks xmlns:a="http://schemas.openxmlformats.org/drawingml/2006/main" noGrp="1"/>
+          </p:cNvSpPr>
+          <p:nvPr/>
+        </p:nvSpPr>
+        <p:spPr>
+          <a:xfrm xmlns:a="http://schemas.openxmlformats.org/drawingml/2006/main">
+            <a:off x="4210050" y="6819900"/>
+            <a:ext cx="95" cy="609600"/>
+          </a:xfrm>
+          <a:prstGeom xmlns:a="http://schemas.openxmlformats.org/drawingml/2006/main" prst="line">
+            <a:avLst/>
+          </a:prstGeom>
+          <a:noFill xmlns:a="http://schemas.openxmlformats.org/drawingml/2006/main"/>
+          <a:ln xmlns:a="http://schemas.openxmlformats.org/drawingml/2006/main" w="28575">
+            <a:solidFill>
+              <a:srgbClr val="4264D0"/>
+            </a:solidFill>
+            <a:prstDash val="solid"/>
+          </a:ln>
+        </p:spPr>
+      </p:sp>
+      <p:sp>
+        <p:nvSpPr>
+          <p:cNvPr id="31" name="f172">
+            <a:extLst xmlns:a="http://schemas.openxmlformats.org/drawingml/2006/main">
+              <a:ext uri="{FF2B5EF4-FFF2-40B4-BE49-F238E27FC236}">
+                <a16:creationId xmlns:a16="http://schemas.microsoft.com/office/drawing/2014/main" id="{7BCC3675-CACB-4CAB-B2C8-98AB615B4D05}"/>
+              </a:ext>
+            </a:extLst>
+          </p:cNvPr>
+          <p:cNvSpPr>
+            <a:spLocks xmlns:a="http://schemas.openxmlformats.org/drawingml/2006/main" noGrp="1"/>
+          </p:cNvSpPr>
+          <p:nvPr/>
+        </p:nvSpPr>
+        <p:spPr>
+          <a:xfrm xmlns:a="http://schemas.openxmlformats.org/drawingml/2006/main">
+            <a:off x="4210050" y="7429500"/>
+            <a:ext cx="2266950" cy="95"/>
+          </a:xfrm>
+          <a:prstGeom xmlns:a="http://schemas.openxmlformats.org/drawingml/2006/main" prst="line">
+            <a:avLst/>
+          </a:prstGeom>
+          <a:noFill xmlns:a="http://schemas.openxmlformats.org/drawingml/2006/main"/>
+          <a:ln xmlns:a="http://schemas.openxmlformats.org/drawingml/2006/main" w="28575">
+            <a:solidFill>
+              <a:srgbClr val="4264D0"/>
+            </a:solidFill>
+            <a:prstDash val="solid"/>
+          </a:ln>
+        </p:spPr>
+      </p:sp>
+      <p:sp>
+        <p:nvSpPr>
+          <p:cNvPr id="32" name="f173">
+            <a:extLst xmlns:a="http://schemas.openxmlformats.org/drawingml/2006/main">
+              <a:ext uri="{FF2B5EF4-FFF2-40B4-BE49-F238E27FC236}">
+                <a16:creationId xmlns:a16="http://schemas.microsoft.com/office/drawing/2014/main" id="{BA9B7307-F36B-4281-A49E-6CA45FE9682A}"/>
+              </a:ext>
+            </a:extLst>
+          </p:cNvPr>
+          <p:cNvSpPr>
+            <a:spLocks xmlns:a="http://schemas.openxmlformats.org/drawingml/2006/main" noGrp="1"/>
+          </p:cNvSpPr>
+          <p:nvPr/>
+        </p:nvSpPr>
+        <p:spPr>
+          <a:xfrm xmlns:a="http://schemas.openxmlformats.org/drawingml/2006/main">
+            <a:off x="6477000" y="5048250"/>
+            <a:ext cx="95" cy="2381250"/>
+          </a:xfrm>
+          <a:prstGeom xmlns:a="http://schemas.openxmlformats.org/drawingml/2006/main" prst="line">
+            <a:avLst/>
+          </a:prstGeom>
+          <a:noFill xmlns:a="http://schemas.openxmlformats.org/drawingml/2006/main"/>
+          <a:ln xmlns:a="http://schemas.openxmlformats.org/drawingml/2006/main" w="28575">
+            <a:solidFill>
+              <a:srgbClr val="4264D0"/>
+            </a:solidFill>
+            <a:prstDash val="solid"/>
+          </a:ln>
+        </p:spPr>
+      </p:sp>
+      <p:sp>
+        <p:nvSpPr>
+          <p:cNvPr id="33" name="f174">
+            <a:extLst xmlns:a="http://schemas.openxmlformats.org/drawingml/2006/main">
+              <a:ext uri="{FF2B5EF4-FFF2-40B4-BE49-F238E27FC236}">
+                <a16:creationId xmlns:a16="http://schemas.microsoft.com/office/drawing/2014/main" id="{194B7C26-7314-435B-AFA2-0C8B1F91465F}"/>
+              </a:ext>
+            </a:extLst>
+          </p:cNvPr>
+          <p:cNvSpPr>
+            <a:spLocks xmlns:a="http://schemas.openxmlformats.org/drawingml/2006/main" noGrp="1"/>
+          </p:cNvSpPr>
+          <p:nvPr/>
+        </p:nvSpPr>
+        <p:spPr>
+          <a:xfrm xmlns:a="http://schemas.openxmlformats.org/drawingml/2006/main">
+            <a:off x="6419850" y="4962525"/>
+            <a:ext cx="114300" cy="171450"/>
+          </a:xfrm>
+          <a:prstGeom xmlns:a="http://schemas.openxmlformats.org/drawingml/2006/main" prst="rightArrow">
+            <a:avLst/>
+          </a:prstGeom>
+          <a:solidFill xmlns:a="http://schemas.openxmlformats.org/drawingml/2006/main">
+            <a:srgbClr val="4264D0"/>
+          </a:solidFill>
+          <a:ln xmlns:a="http://schemas.openxmlformats.org/drawingml/2006/main" w="0">
+            <a:noFill/>
+            <a:prstDash val="solid"/>
+          </a:ln>
+        </p:spPr>
+      </p:sp>
+      <p:sp>
+        <p:nvSpPr>
+          <p:cNvPr id="34" name="f175">
+            <a:extLst xmlns:a="http://schemas.openxmlformats.org/drawingml/2006/main">
+              <a:ext uri="{FF2B5EF4-FFF2-40B4-BE49-F238E27FC236}">
+                <a16:creationId xmlns:a16="http://schemas.microsoft.com/office/drawing/2014/main" id="{5B498833-7F22-4CC1-8CA6-B0437FD05358}"/>
+              </a:ext>
+            </a:extLst>
+          </p:cNvPr>
+          <p:cNvSpPr>
+            <a:spLocks xmlns:a="http://schemas.openxmlformats.org/drawingml/2006/main" noGrp="1"/>
+          </p:cNvSpPr>
+          <p:nvPr/>
+        </p:nvSpPr>
+        <p:spPr>
+          <a:xfrm xmlns:a="http://schemas.openxmlformats.org/drawingml/2006/main">
+            <a:off x="5295900" y="3343275"/>
+            <a:ext cx="2971800" cy="95"/>
+          </a:xfrm>
+          <a:prstGeom xmlns:a="http://schemas.openxmlformats.org/drawingml/2006/main" prst="line">
+            <a:avLst/>
+          </a:prstGeom>
+          <a:noFill xmlns:a="http://schemas.openxmlformats.org/drawingml/2006/main"/>
+          <a:ln xmlns:a="http://schemas.openxmlformats.org/drawingml/2006/main" w="28575">
+            <a:solidFill>
+              <a:srgbClr val="4264D0"/>
+            </a:solidFill>
+            <a:prstDash val="solid"/>
+          </a:ln>
+        </p:spPr>
+      </p:sp>
+      <p:sp>
+        <p:nvSpPr>
+          <p:cNvPr id="35" name="f176">
+            <a:extLst xmlns:a="http://schemas.openxmlformats.org/drawingml/2006/main">
+              <a:ext uri="{FF2B5EF4-FFF2-40B4-BE49-F238E27FC236}">
+                <a16:creationId xmlns:a16="http://schemas.microsoft.com/office/drawing/2014/main" id="{D520BFD9-A676-4345-93B9-A6E5E1746531}"/>
+              </a:ext>
+            </a:extLst>
+          </p:cNvPr>
+          <p:cNvSpPr>
+            <a:spLocks xmlns:a="http://schemas.openxmlformats.org/drawingml/2006/main" noGrp="1"/>
+          </p:cNvSpPr>
+          <p:nvPr/>
+        </p:nvSpPr>
+        <p:spPr>
+          <a:xfrm xmlns:a="http://schemas.openxmlformats.org/drawingml/2006/main">
+            <a:off x="8267700" y="3343275"/>
+            <a:ext cx="95" cy="1704975"/>
+          </a:xfrm>
+          <a:prstGeom xmlns:a="http://schemas.openxmlformats.org/drawingml/2006/main" prst="line">
+            <a:avLst/>
+          </a:prstGeom>
+          <a:noFill xmlns:a="http://schemas.openxmlformats.org/drawingml/2006/main"/>
+          <a:ln xmlns:a="http://schemas.openxmlformats.org/drawingml/2006/main" w="28575">
+            <a:solidFill>
+              <a:srgbClr val="4264D0"/>
+            </a:solidFill>
+            <a:prstDash val="solid"/>
+          </a:ln>
+        </p:spPr>
+      </p:sp>
+      <p:sp>
+        <p:nvSpPr>
+          <p:cNvPr id="36" name="f177">
+            <a:extLst xmlns:a="http://schemas.openxmlformats.org/drawingml/2006/main">
+              <a:ext uri="{FF2B5EF4-FFF2-40B4-BE49-F238E27FC236}">
+                <a16:creationId xmlns:a16="http://schemas.microsoft.com/office/drawing/2014/main" id="{61B2D15E-0465-4C6B-B64A-77EE4CDE368F}"/>
+              </a:ext>
+            </a:extLst>
+          </p:cNvPr>
+          <p:cNvSpPr>
+            <a:spLocks xmlns:a="http://schemas.openxmlformats.org/drawingml/2006/main" noGrp="1"/>
+          </p:cNvSpPr>
+          <p:nvPr/>
+        </p:nvSpPr>
+        <p:spPr>
+          <a:xfrm xmlns:a="http://schemas.openxmlformats.org/drawingml/2006/main">
+            <a:off x="8153400" y="4962525"/>
+            <a:ext cx="114300" cy="171450"/>
+          </a:xfrm>
+          <a:prstGeom xmlns:a="http://schemas.openxmlformats.org/drawingml/2006/main" prst="leftArrow">
+            <a:avLst/>
+          </a:prstGeom>
+          <a:solidFill xmlns:a="http://schemas.openxmlformats.org/drawingml/2006/main">
+            <a:srgbClr val="4264D0"/>
+          </a:solidFill>
+          <a:ln xmlns:a="http://schemas.openxmlformats.org/drawingml/2006/main" w="0">
+            <a:noFill/>
+            <a:prstDash val="solid"/>
+          </a:ln>
+        </p:spPr>
+      </p:sp>
+      <p:sp>
+        <p:nvSpPr>
+          <p:cNvPr id="37" name="f178">
+            <a:extLst xmlns:a="http://schemas.openxmlformats.org/drawingml/2006/main">
+              <a:ext uri="{FF2B5EF4-FFF2-40B4-BE49-F238E27FC236}">
+                <a16:creationId xmlns:a16="http://schemas.microsoft.com/office/drawing/2014/main" id="{255EF17D-F356-411C-8334-57943EA25507}"/>
+              </a:ext>
+            </a:extLst>
+          </p:cNvPr>
+          <p:cNvSpPr>
+            <a:spLocks xmlns:a="http://schemas.openxmlformats.org/drawingml/2006/main" noGrp="1"/>
+          </p:cNvSpPr>
+          <p:nvPr/>
+        </p:nvSpPr>
+        <p:spPr>
+          <a:xfrm xmlns:a="http://schemas.openxmlformats.org/drawingml/2006/main">
+            <a:off x="7334250" y="4333875"/>
+            <a:ext cx="95" cy="171450"/>
+          </a:xfrm>
+          <a:prstGeom xmlns:a="http://schemas.openxmlformats.org/drawingml/2006/main" prst="line">
+            <a:avLst/>
+          </a:prstGeom>
+          <a:noFill xmlns:a="http://schemas.openxmlformats.org/drawingml/2006/main"/>
+          <a:ln xmlns:a="http://schemas.openxmlformats.org/drawingml/2006/main" w="28575">
+            <a:solidFill>
+              <a:srgbClr val="4264D0"/>
+            </a:solidFill>
+            <a:prstDash val="solid"/>
+          </a:ln>
+        </p:spPr>
+      </p:sp>
+      <p:sp>
+        <p:nvSpPr>
+          <p:cNvPr id="38" name="f179">
+            <a:extLst xmlns:a="http://schemas.openxmlformats.org/drawingml/2006/main">
+              <a:ext uri="{FF2B5EF4-FFF2-40B4-BE49-F238E27FC236}">
+                <a16:creationId xmlns:a16="http://schemas.microsoft.com/office/drawing/2014/main" id="{CB9467BA-58A1-4206-8AF3-F074B33278D9}"/>
+              </a:ext>
+            </a:extLst>
+          </p:cNvPr>
+          <p:cNvSpPr>
+            <a:spLocks xmlns:a="http://schemas.openxmlformats.org/drawingml/2006/main" noGrp="1"/>
+          </p:cNvSpPr>
+          <p:nvPr/>
+        </p:nvSpPr>
+        <p:spPr>
+          <a:xfrm xmlns:a="http://schemas.openxmlformats.org/drawingml/2006/main">
+            <a:off x="7277100" y="4219575"/>
+            <a:ext cx="114300" cy="114300"/>
+          </a:xfrm>
+          <a:prstGeom xmlns:a="http://schemas.openxmlformats.org/drawingml/2006/main" prst="upArrow">
+            <a:avLst/>
+          </a:prstGeom>
+          <a:solidFill xmlns:a="http://schemas.openxmlformats.org/drawingml/2006/main">
+            <a:srgbClr val="4264D0"/>
+          </a:solidFill>
+          <a:ln xmlns:a="http://schemas.openxmlformats.org/drawingml/2006/main" w="0">
+            <a:noFill/>
+            <a:prstDash val="solid"/>
+          </a:ln>
+        </p:spPr>
+      </p:sp>
+      <p:sp>
+        <p:nvSpPr>
+          <p:cNvPr id="39" name="f180">
+            <a:extLst xmlns:a="http://schemas.openxmlformats.org/drawingml/2006/main">
+              <a:ext uri="{FF2B5EF4-FFF2-40B4-BE49-F238E27FC236}">
+                <a16:creationId xmlns:a16="http://schemas.microsoft.com/office/drawing/2014/main" id="{0BCB81F1-44EB-49F9-A5DC-FCEA62004EF4}"/>
+              </a:ext>
+            </a:extLst>
+          </p:cNvPr>
+          <p:cNvSpPr>
+            <a:spLocks xmlns:a="http://schemas.openxmlformats.org/drawingml/2006/main" noGrp="1"/>
+          </p:cNvSpPr>
+          <p:nvPr/>
+        </p:nvSpPr>
+        <p:spPr>
+          <a:xfrm xmlns:a="http://schemas.openxmlformats.org/drawingml/2006/main">
+            <a:off x="6096000" y="3867150"/>
+            <a:ext cx="361950" cy="95"/>
+          </a:xfrm>
+          <a:prstGeom xmlns:a="http://schemas.openxmlformats.org/drawingml/2006/main" prst="line">
+            <a:avLst/>
+          </a:prstGeom>
+          <a:noFill xmlns:a="http://schemas.openxmlformats.org/drawingml/2006/main"/>
+          <a:ln xmlns:a="http://schemas.openxmlformats.org/drawingml/2006/main" w="28575">
+            <a:solidFill>
+              <a:srgbClr val="4264D0"/>
+            </a:solidFill>
+            <a:prstDash val="solid"/>
+          </a:ln>
+        </p:spPr>
+      </p:sp>
+      <p:sp>
+        <p:nvSpPr>
+          <p:cNvPr id="40" name="f181">
+            <a:extLst xmlns:a="http://schemas.openxmlformats.org/drawingml/2006/main">
+              <a:ext uri="{FF2B5EF4-FFF2-40B4-BE49-F238E27FC236}">
+                <a16:creationId xmlns:a16="http://schemas.microsoft.com/office/drawing/2014/main" id="{4F61F02D-F774-4F54-BA7F-9B0C7377F873}"/>
+              </a:ext>
+            </a:extLst>
+          </p:cNvPr>
+          <p:cNvSpPr>
+            <a:spLocks xmlns:a="http://schemas.openxmlformats.org/drawingml/2006/main" noGrp="1"/>
+          </p:cNvSpPr>
+          <p:nvPr/>
+        </p:nvSpPr>
+        <p:spPr>
+          <a:xfrm xmlns:a="http://schemas.openxmlformats.org/drawingml/2006/main">
+            <a:off x="6096000" y="3867150"/>
+            <a:ext cx="95" cy="942975"/>
+          </a:xfrm>
+          <a:prstGeom xmlns:a="http://schemas.openxmlformats.org/drawingml/2006/main" prst="line">
+            <a:avLst/>
+          </a:prstGeom>
+          <a:noFill xmlns:a="http://schemas.openxmlformats.org/drawingml/2006/main"/>
+          <a:ln xmlns:a="http://schemas.openxmlformats.org/drawingml/2006/main" w="28575">
+            <a:solidFill>
+              <a:srgbClr val="4264D0"/>
+            </a:solidFill>
+            <a:prstDash val="solid"/>
+          </a:ln>
+        </p:spPr>
+      </p:sp>
+      <p:sp>
+        <p:nvSpPr>
+          <p:cNvPr id="41" name="f182">
+            <a:extLst xmlns:a="http://schemas.openxmlformats.org/drawingml/2006/main">
+              <a:ext uri="{FF2B5EF4-FFF2-40B4-BE49-F238E27FC236}">
+                <a16:creationId xmlns:a16="http://schemas.microsoft.com/office/drawing/2014/main" id="{049B7E75-3146-43DC-BE8A-008FB2F77598}"/>
+              </a:ext>
+            </a:extLst>
+          </p:cNvPr>
+          <p:cNvSpPr>
+            <a:spLocks xmlns:a="http://schemas.openxmlformats.org/drawingml/2006/main" noGrp="1"/>
+          </p:cNvSpPr>
+          <p:nvPr/>
+        </p:nvSpPr>
+        <p:spPr>
+          <a:xfrm xmlns:a="http://schemas.openxmlformats.org/drawingml/2006/main">
+            <a:off x="5219700" y="4810125"/>
+            <a:ext cx="876300" cy="95"/>
+          </a:xfrm>
+          <a:prstGeom xmlns:a="http://schemas.openxmlformats.org/drawingml/2006/main" prst="line">
+            <a:avLst/>
+          </a:prstGeom>
+          <a:noFill xmlns:a="http://schemas.openxmlformats.org/drawingml/2006/main"/>
+          <a:ln xmlns:a="http://schemas.openxmlformats.org/drawingml/2006/main" w="28575">
+            <a:solidFill>
+              <a:srgbClr val="4264D0"/>
+            </a:solidFill>
+            <a:prstDash val="solid"/>
+          </a:ln>
+        </p:spPr>
+      </p:sp>
+      <p:sp>
+        <p:nvSpPr>
+          <p:cNvPr id="42" name="f183">
+            <a:extLst xmlns:a="http://schemas.openxmlformats.org/drawingml/2006/main">
+              <a:ext uri="{FF2B5EF4-FFF2-40B4-BE49-F238E27FC236}">
+                <a16:creationId xmlns:a16="http://schemas.microsoft.com/office/drawing/2014/main" id="{FDD272E0-46F8-40BE-A2CB-18A5F5B73913}"/>
+              </a:ext>
+            </a:extLst>
+          </p:cNvPr>
+          <p:cNvSpPr>
+            <a:spLocks xmlns:a="http://schemas.openxmlformats.org/drawingml/2006/main" noGrp="1"/>
+          </p:cNvSpPr>
+          <p:nvPr/>
+        </p:nvSpPr>
+        <p:spPr>
+          <a:xfrm xmlns:a="http://schemas.openxmlformats.org/drawingml/2006/main">
+            <a:off x="5105400" y="4724400"/>
+            <a:ext cx="114300" cy="171450"/>
+          </a:xfrm>
+          <a:prstGeom xmlns:a="http://schemas.openxmlformats.org/drawingml/2006/main" prst="leftArrow">
+            <a:avLst/>
+          </a:prstGeom>
+          <a:solidFill xmlns:a="http://schemas.openxmlformats.org/drawingml/2006/main">
+            <a:srgbClr val="4264D0"/>
+          </a:solidFill>
+          <a:ln xmlns:a="http://schemas.openxmlformats.org/drawingml/2006/main" w="0">
+            <a:noFill/>
+            <a:prstDash val="solid"/>
+          </a:ln>
+        </p:spPr>
+      </p:sp>
+      <p:sp>
+        <p:nvSpPr>
+          <p:cNvPr id="43" name="f184">
+            <a:extLst xmlns:a="http://schemas.openxmlformats.org/drawingml/2006/main">
+              <a:ext uri="{FF2B5EF4-FFF2-40B4-BE49-F238E27FC236}">
+                <a16:creationId xmlns:a16="http://schemas.microsoft.com/office/drawing/2014/main" id="{A4537D89-1191-4C08-BB37-61541B4FABFD}"/>
+              </a:ext>
+            </a:extLst>
+          </p:cNvPr>
+          <p:cNvSpPr>
+            <a:spLocks xmlns:a="http://schemas.openxmlformats.org/drawingml/2006/main" noGrp="1"/>
+          </p:cNvSpPr>
+          <p:nvPr/>
+        </p:nvSpPr>
+        <p:spPr>
+          <a:xfrm xmlns:a="http://schemas.openxmlformats.org/drawingml/2006/main">
+            <a:off x="6477000" y="5715000"/>
+            <a:ext cx="1714500" cy="285750"/>
+          </a:xfrm>
+          <a:prstGeom xmlns:a="http://schemas.openxmlformats.org/drawingml/2006/main" prst="rect">
+            <a:avLst/>
+          </a:prstGeom>
+          <a:noFill xmlns:a="http://schemas.openxmlformats.org/drawingml/2006/main"/>
+          <a:ln xmlns:a="http://schemas.openxmlformats.org/drawingml/2006/main" w="0">
+            <a:noFill/>
+            <a:prstDash val="solid"/>
+          </a:ln>
+        </p:spPr>
+        <p:txBody>
+          <a:bodyPr xmlns:a="http://schemas.openxmlformats.org/drawingml/2006/main" wrap="none" lIns="0" tIns="0" rIns="0" bIns="0" anchor="t">
+            <a:noAutofit/>
+          </a:bodyPr>
+          <a:lstStyle xmlns:a="http://schemas.openxmlformats.org/drawingml/2006/main">
+            <a:defPPr algn="ctr">
+              <a:defRPr sz="1425" b="0">
+                <a:solidFill>
+                  <a:srgbClr val="9D7139"/>
+                </a:solidFill>
+                <a:latin typeface="Nimbus Sans"/>
+                <a:ea typeface="Nimbus Sans"/>
+                <a:cs typeface="Nimbus Sans"/>
+              </a:defRPr>
+            </a:defPPr>
+            <a:lvl1pPr algn="ctr">
+              <a:defRPr sz="1425" b="0">
+                <a:solidFill>
+                  <a:srgbClr val="9D7139"/>
+                </a:solidFill>
+                <a:latin typeface="Nimbus Sans"/>
+                <a:ea typeface="Nimbus Sans"/>
+                <a:cs typeface="Nimbus Sans"/>
+              </a:defRPr>
+            </a:lvl1pPr>
+            <a:lvl2pPr algn="ctr">
+              <a:defRPr sz="1425" b="0">
+                <a:solidFill>
+                  <a:srgbClr val="9D7139"/>
+                </a:solidFill>
+                <a:latin typeface="Nimbus Sans"/>
+                <a:ea typeface="Nimbus Sans"/>
+                <a:cs typeface="Nimbus Sans"/>
+              </a:defRPr>
+            </a:lvl2pPr>
+            <a:lvl3pPr algn="ctr">
+              <a:defRPr sz="1425" b="0">
+                <a:solidFill>
+                  <a:srgbClr val="9D7139"/>
+                </a:solidFill>
+                <a:latin typeface="Nimbus Sans"/>
+                <a:ea typeface="Nimbus Sans"/>
+                <a:cs typeface="Nimbus Sans"/>
+              </a:defRPr>
+            </a:lvl3pPr>
+            <a:lvl4pPr algn="ctr">
+              <a:defRPr sz="1425" b="0">
+                <a:solidFill>
+                  <a:srgbClr val="9D7139"/>
+                </a:solidFill>
+                <a:latin typeface="Nimbus Sans"/>
+                <a:ea typeface="Nimbus Sans"/>
+                <a:cs typeface="Nimbus Sans"/>
+              </a:defRPr>
+            </a:lvl4pPr>
+            <a:lvl5pPr algn="ctr">
+              <a:defRPr sz="1425" b="0">
+                <a:solidFill>
+                  <a:srgbClr val="9D7139"/>
+                </a:solidFill>
+                <a:latin typeface="Nimbus Sans"/>
+                <a:ea typeface="Nimbus Sans"/>
+                <a:cs typeface="Nimbus Sans"/>
+              </a:defRPr>
+            </a:lvl5pPr>
+            <a:lvl6pPr algn="ctr">
+              <a:defRPr sz="1425" b="0">
+                <a:solidFill>
+                  <a:srgbClr val="9D7139"/>
+                </a:solidFill>
+                <a:latin typeface="Nimbus Sans"/>
+                <a:ea typeface="Nimbus Sans"/>
+                <a:cs typeface="Nimbus Sans"/>
+              </a:defRPr>
+            </a:lvl6pPr>
+            <a:lvl7pPr algn="ctr">
+              <a:defRPr sz="1425" b="0">
+                <a:solidFill>
+                  <a:srgbClr val="9D7139"/>
+                </a:solidFill>
+                <a:latin typeface="Nimbus Sans"/>
+                <a:ea typeface="Nimbus Sans"/>
+                <a:cs typeface="Nimbus Sans"/>
+              </a:defRPr>
+            </a:lvl7pPr>
+            <a:lvl8pPr algn="ctr">
+              <a:defRPr sz="1425" b="0">
+                <a:solidFill>
+                  <a:srgbClr val="9D7139"/>
+                </a:solidFill>
+                <a:latin typeface="Nimbus Sans"/>
+                <a:ea typeface="Nimbus Sans"/>
+                <a:cs typeface="Nimbus Sans"/>
+              </a:defRPr>
+            </a:lvl8pPr>
+            <a:lvl9pPr algn="ctr">
+              <a:defRPr sz="1425" b="0">
+                <a:solidFill>
+                  <a:srgbClr val="9D7139"/>
+                </a:solidFill>
+                <a:latin typeface="Nimbus Sans"/>
+                <a:ea typeface="Nimbus Sans"/>
+                <a:cs typeface="Nimbus Sans"/>
+              </a:defRPr>
+            </a:lvl9pPr>
+          </a:lstStyle>
+          <a:p xmlns:a="http://schemas.openxmlformats.org/drawingml/2006/main">
+            <a:pPr algn="ctr">
+              <a:defRPr sz="1425" b="0">
+                <a:solidFill>
+                  <a:srgbClr val="9D7139"/>
+                </a:solidFill>
+                <a:latin typeface="Nimbus Sans"/>
+                <a:ea typeface="Nimbus Sans"/>
+                <a:cs typeface="Nimbus Sans"/>
+              </a:defRPr>
+            </a:pPr>
+            <a:r>
+              <a:rPr sz="1425" b="0">
+                <a:solidFill>
+                  <a:srgbClr val="9D7139"/>
+                </a:solidFill>
+                <a:latin typeface="Nimbus Sans"/>
+                <a:ea typeface="Nimbus Sans"/>
+                <a:cs typeface="Nimbus Sans"/>
+              </a:rPr>
+              <a:t>Esterno · offline</a:t>
+            </a:r>
+          </a:p>
+        </p:txBody>
+      </p:sp>
+      <p:sp>
+        <p:nvSpPr>
+          <p:cNvPr id="44" name="f185">
+            <a:extLst xmlns:a="http://schemas.openxmlformats.org/drawingml/2006/main">
+              <a:ext uri="{FF2B5EF4-FFF2-40B4-BE49-F238E27FC236}">
+                <a16:creationId xmlns:a16="http://schemas.microsoft.com/office/drawing/2014/main" id="{189B9964-ABBC-43C8-92F2-931D2688AD01}"/>
+              </a:ext>
+            </a:extLst>
+          </p:cNvPr>
+          <p:cNvSpPr>
+            <a:spLocks xmlns:a="http://schemas.openxmlformats.org/drawingml/2006/main" noGrp="1"/>
+          </p:cNvSpPr>
+          <p:nvPr/>
+        </p:nvSpPr>
+        <p:spPr>
+          <a:xfrm xmlns:a="http://schemas.openxmlformats.org/drawingml/2006/main">
+            <a:off x="6429375" y="6057900"/>
+            <a:ext cx="1809750" cy="561975"/>
+          </a:xfrm>
+          <a:prstGeom xmlns:a="http://schemas.openxmlformats.org/drawingml/2006/main" prst="rect">
+            <a:avLst/>
+          </a:prstGeom>
+          <a:noFill xmlns:a="http://schemas.openxmlformats.org/drawingml/2006/main"/>
+          <a:ln xmlns:a="http://schemas.openxmlformats.org/drawingml/2006/main" w="0">
+            <a:noFill/>
+            <a:prstDash val="solid"/>
+          </a:ln>
+        </p:spPr>
+        <p:txBody>
+          <a:bodyPr xmlns:a="http://schemas.openxmlformats.org/drawingml/2006/main" wrap="none" lIns="0" tIns="0" rIns="0" bIns="0" anchor="t">
+            <a:noAutofit/>
+          </a:bodyPr>
+          <a:lstStyle xmlns:a="http://schemas.openxmlformats.org/drawingml/2006/main">
+            <a:defPPr algn="ctr">
+              <a:defRPr sz="1425" b="0">
+                <a:solidFill>
+                  <a:srgbClr val="52627B"/>
+                </a:solidFill>
+                <a:latin typeface="Nimbus Sans"/>
+                <a:ea typeface="Nimbus Sans"/>
+                <a:cs typeface="Nimbus Sans"/>
+              </a:defRPr>
+            </a:defPPr>
+            <a:lvl1pPr algn="ctr">
+              <a:defRPr sz="1425" b="0">
+                <a:solidFill>
+                  <a:srgbClr val="52627B"/>
+                </a:solidFill>
+                <a:latin typeface="Nimbus Sans"/>
+                <a:ea typeface="Nimbus Sans"/>
+                <a:cs typeface="Nimbus Sans"/>
+              </a:defRPr>
+            </a:lvl1pPr>
+            <a:lvl2pPr algn="ctr">
+              <a:defRPr sz="1425" b="0">
+                <a:solidFill>
+                  <a:srgbClr val="52627B"/>
+                </a:solidFill>
+                <a:latin typeface="Nimbus Sans"/>
+                <a:ea typeface="Nimbus Sans"/>
+                <a:cs typeface="Nimbus Sans"/>
+              </a:defRPr>
+            </a:lvl2pPr>
+            <a:lvl3pPr algn="ctr">
+              <a:defRPr sz="1425" b="0">
+                <a:solidFill>
+                  <a:srgbClr val="52627B"/>
+                </a:solidFill>
+                <a:latin typeface="Nimbus Sans"/>
+                <a:ea typeface="Nimbus Sans"/>
+                <a:cs typeface="Nimbus Sans"/>
+              </a:defRPr>
+            </a:lvl3pPr>
+            <a:lvl4pPr algn="ctr">
+              <a:defRPr sz="1425" b="0">
+                <a:solidFill>
+                  <a:srgbClr val="52627B"/>
+                </a:solidFill>
+                <a:latin typeface="Nimbus Sans"/>
+                <a:ea typeface="Nimbus Sans"/>
+                <a:cs typeface="Nimbus Sans"/>
+              </a:defRPr>
+            </a:lvl4pPr>
+            <a:lvl5pPr algn="ctr">
+              <a:defRPr sz="1425" b="0">
+                <a:solidFill>
+                  <a:srgbClr val="52627B"/>
+                </a:solidFill>
+                <a:latin typeface="Nimbus Sans"/>
+                <a:ea typeface="Nimbus Sans"/>
+                <a:cs typeface="Nimbus Sans"/>
+              </a:defRPr>
+            </a:lvl5pPr>
+            <a:lvl6pPr algn="ctr">
+              <a:defRPr sz="1425" b="0">
+                <a:solidFill>
+                  <a:srgbClr val="52627B"/>
+                </a:solidFill>
+                <a:latin typeface="Nimbus Sans"/>
+                <a:ea typeface="Nimbus Sans"/>
+                <a:cs typeface="Nimbus Sans"/>
+              </a:defRPr>
+            </a:lvl6pPr>
+            <a:lvl7pPr algn="ctr">
+              <a:defRPr sz="1425" b="0">
+                <a:solidFill>
+                  <a:srgbClr val="52627B"/>
+                </a:solidFill>
+                <a:latin typeface="Nimbus Sans"/>
+                <a:ea typeface="Nimbus Sans"/>
+                <a:cs typeface="Nimbus Sans"/>
+              </a:defRPr>
+            </a:lvl7pPr>
+            <a:lvl8pPr algn="ctr">
+              <a:defRPr sz="1425" b="0">
+                <a:solidFill>
+                  <a:srgbClr val="52627B"/>
+                </a:solidFill>
+                <a:latin typeface="Nimbus Sans"/>
+                <a:ea typeface="Nimbus Sans"/>
+                <a:cs typeface="Nimbus Sans"/>
+              </a:defRPr>
+            </a:lvl8pPr>
+            <a:lvl9pPr algn="ctr">
+              <a:defRPr sz="1425" b="0">
+                <a:solidFill>
+                  <a:srgbClr val="52627B"/>
+                </a:solidFill>
+                <a:latin typeface="Nimbus Sans"/>
+                <a:ea typeface="Nimbus Sans"/>
+                <a:cs typeface="Nimbus Sans"/>
+              </a:defRPr>
+            </a:lvl9pPr>
+          </a:lstStyle>
+          <a:p xmlns:a="http://schemas.openxmlformats.org/drawingml/2006/main">
+            <a:pPr algn="ctr">
+              <a:defRPr sz="1425" b="0">
+                <a:solidFill>
+                  <a:srgbClr val="52627B"/>
+                </a:solidFill>
+                <a:latin typeface="Nimbus Sans"/>
+                <a:ea typeface="Nimbus Sans"/>
+                <a:cs typeface="Nimbus Sans"/>
+              </a:defRPr>
+            </a:pPr>
+            <a:r>
+              <a:rPr sz="1425" b="0">
+                <a:solidFill>
+                  <a:srgbClr val="52627B"/>
+                </a:solidFill>
+                <a:latin typeface="Nimbus Sans"/>
+                <a:ea typeface="Nimbus Sans"/>
+                <a:cs typeface="Nimbus Sans"/>
+              </a:rPr>
+              <a:t>Selezione dei frame</a:t>
+            </a:r>
+          </a:p>
+          <a:p xmlns:a="http://schemas.openxmlformats.org/drawingml/2006/main">
+            <a:pPr algn="ctr">
+              <a:defRPr sz="1425" b="0">
+                <a:solidFill>
+                  <a:srgbClr val="52627B"/>
+                </a:solidFill>
+                <a:latin typeface="Nimbus Sans"/>
+                <a:ea typeface="Nimbus Sans"/>
+                <a:cs typeface="Nimbus Sans"/>
+              </a:defRPr>
+            </a:pPr>
+            <a:r>
+              <a:rPr sz="1425" b="0">
+                <a:solidFill>
+                  <a:srgbClr val="52627B"/>
+                </a:solidFill>
+                <a:latin typeface="Nimbus Sans"/>
+                <a:ea typeface="Nimbus Sans"/>
+                <a:cs typeface="Nimbus Sans"/>
+              </a:rPr>
+              <a:t>rilevanti da modificare</a:t>
+            </a:r>
+          </a:p>
+        </p:txBody>
+      </p:sp>
+      <p:sp>
+        <p:nvSpPr>
+          <p:cNvPr id="45" name="f186">
+            <a:extLst xmlns:a="http://schemas.openxmlformats.org/drawingml/2006/main">
+              <a:ext uri="{FF2B5EF4-FFF2-40B4-BE49-F238E27FC236}">
+                <a16:creationId xmlns:a16="http://schemas.microsoft.com/office/drawing/2014/main" id="{702899C9-A636-4B4C-B548-EF949F1C3293}"/>
               </a:ext>
             </a:extLst>
           </p:cNvPr>
@@ -22464,7 +22858,7 @@
         <p:spPr>
           <a:xfrm xmlns:a="http://schemas.openxmlformats.org/drawingml/2006/main">
             <a:off x="8420100" y="2686050"/>
-            <a:ext cx="5753100" cy="723900"/>
+            <a:ext cx="5753100" cy="428625"/>
           </a:xfrm>
           <a:prstGeom xmlns:a="http://schemas.openxmlformats.org/drawingml/2006/main" prst="rect">
             <a:avLst/>
@@ -22604,37 +22998,14 @@
               <a:t>Esempi di tre mutazioni</a:t>
             </a:r>
           </a:p>
-          <a:p xmlns:a="http://schemas.openxmlformats.org/drawingml/2006/main">
-            <a:pPr algn="l">
-              <a:defRPr sz="2175" b="1">
-                <a:solidFill>
-                  <a:srgbClr val="182536"/>
-                </a:solidFill>
-                <a:latin typeface="Nimbus Sans"/>
-                <a:ea typeface="Nimbus Sans"/>
-                <a:cs typeface="Nimbus Sans"/>
-              </a:defRPr>
-            </a:pPr>
-            <a:r>
-              <a:rPr sz="2175" b="1">
-                <a:solidFill>
-                  <a:srgbClr val="182536"/>
-                </a:solidFill>
-                <a:latin typeface="Nimbus Sans"/>
-                <a:ea typeface="Nimbus Sans"/>
-                <a:cs typeface="Nimbus Sans"/>
-              </a:rPr>
-              <a:t>realmente utilizzate</a:t>
-            </a:r>
-          </a:p>
         </p:txBody>
       </p:sp>
       <p:graphicFrame>
         <p:nvGraphicFramePr>
-          <p:cNvPr id="20" name="">
+          <p:cNvPr id="46" name="">
             <a:extLst xmlns:a="http://schemas.openxmlformats.org/drawingml/2006/main">
               <a:ext uri="{FF2B5EF4-FFF2-40B4-BE49-F238E27FC236}">
-                <a16:creationId xmlns:a16="http://schemas.microsoft.com/office/drawing/2014/main" id="{455672C0-41AF-43F8-AA81-AD368076845A}"/>
+                <a16:creationId xmlns:a16="http://schemas.microsoft.com/office/drawing/2014/main" id="{2641AB07-2FBC-4B2A-AB65-93E48583ADB8}"/>
               </a:ext>
             </a:extLst>
           </p:cNvPr>
@@ -22642,7 +23013,7 @@
           <p:nvPr/>
         </p:nvGraphicFramePr>
         <p:xfrm>
-          <a:off xmlns:a="http://schemas.openxmlformats.org/drawingml/2006/main" x="8420100" y="3619500"/>
+          <a:off xmlns:a="http://schemas.openxmlformats.org/drawingml/2006/main" x="8420100" y="3238500"/>
           <a:ext xmlns:a="http://schemas.openxmlformats.org/drawingml/2006/main" cx="5753100" cy="3371850"/>
         </p:xfrm>
         <a:graphic xmlns:a="http://schemas.openxmlformats.org/drawingml/2006/main">
@@ -23234,10 +23605,10 @@
       </p:graphicFrame>
       <p:sp>
         <p:nvSpPr>
-          <p:cNvPr id="21" name="f159">
+          <p:cNvPr id="47" name="f188">
             <a:extLst xmlns:a="http://schemas.openxmlformats.org/drawingml/2006/main">
               <a:ext uri="{FF2B5EF4-FFF2-40B4-BE49-F238E27FC236}">
-                <a16:creationId xmlns:a16="http://schemas.microsoft.com/office/drawing/2014/main" id="{5B5D9074-9403-43C9-8196-1ABCDA1CA21A}"/>
+                <a16:creationId xmlns:a16="http://schemas.microsoft.com/office/drawing/2014/main" id="{2DAE94E1-8B4A-49AF-AECB-23BA4C6E6D07}"/>
               </a:ext>
             </a:extLst>
           </p:cNvPr>
@@ -23248,7 +23619,7 @@
         </p:nvSpPr>
         <p:spPr>
           <a:xfrm xmlns:a="http://schemas.openxmlformats.org/drawingml/2006/main">
-            <a:off x="8420100" y="7419975"/>
+            <a:off x="8420100" y="7038975"/>
             <a:ext cx="2000250" cy="857250"/>
           </a:xfrm>
           <a:prstGeom xmlns:a="http://schemas.openxmlformats.org/drawingml/2006/main" prst="rect">
@@ -23393,10 +23764,10 @@
       </p:sp>
       <p:sp>
         <p:nvSpPr>
-          <p:cNvPr id="22" name="f160">
+          <p:cNvPr id="48" name="f189">
             <a:extLst xmlns:a="http://schemas.openxmlformats.org/drawingml/2006/main">
               <a:ext uri="{FF2B5EF4-FFF2-40B4-BE49-F238E27FC236}">
-                <a16:creationId xmlns:a16="http://schemas.microsoft.com/office/drawing/2014/main" id="{6A898FD7-7C3C-4375-938C-0E55D9A57500}"/>
+                <a16:creationId xmlns:a16="http://schemas.microsoft.com/office/drawing/2014/main" id="{4017E7A4-DE1C-4C7D-9920-524BC9D4D254}"/>
               </a:ext>
             </a:extLst>
           </p:cNvPr>
@@ -23407,7 +23778,7 @@
         </p:nvSpPr>
         <p:spPr>
           <a:xfrm xmlns:a="http://schemas.openxmlformats.org/drawingml/2006/main">
-            <a:off x="10572750" y="7486650"/>
+            <a:off x="10572750" y="7105650"/>
             <a:ext cx="3600450" cy="742950"/>
           </a:xfrm>
           <a:prstGeom xmlns:a="http://schemas.openxmlformats.org/drawingml/2006/main" prst="rect">
@@ -23576,7 +23947,7 @@
     </p:spTree>
     <p:extLst>
       <p:ext uri="{BB962C8B-B14F-4D97-AF65-F5344CB8AC3E}">
-        <p14:creationId xmlns:p14="http://schemas.microsoft.com/office/powerpoint/2010/main" val="677348909"/>
+        <p14:creationId xmlns:p14="http://schemas.microsoft.com/office/powerpoint/2010/main" val="854085806"/>
       </p:ext>
     </p:extLst>
   </p:cSld>

--- a/5g-thesis-presentation-5min/tesi-5min.pptx
+++ b/5g-thesis-presentation-5min/tesi-5min.pptx
@@ -2,19 +2,19 @@
 <file path=ppt/presentation.xml><?xml version="1.0" encoding="utf-8"?>
 <p:presentation xmlns:p="http://schemas.openxmlformats.org/presentationml/2006/main">
   <p:sldMasterIdLst>
-    <p:sldMasterId xmlns:r="http://schemas.openxmlformats.org/officeDocument/2006/relationships" id="2147483648" r:id="R4b1624102d3f4f69"/>
+    <p:sldMasterId xmlns:r="http://schemas.openxmlformats.org/officeDocument/2006/relationships" id="2147483648" r:id="R45c7171876144a49"/>
   </p:sldMasterIdLst>
   <p:notesMasterIdLst>
-    <p:notesMasterId xmlns:r="http://schemas.openxmlformats.org/officeDocument/2006/relationships" r:id="Re375bd14d4e141dd"/>
+    <p:notesMasterId xmlns:r="http://schemas.openxmlformats.org/officeDocument/2006/relationships" r:id="R43868e43004a44aa"/>
   </p:notesMasterIdLst>
   <p:sldIdLst>
-    <p:sldId xmlns:r="http://schemas.openxmlformats.org/officeDocument/2006/relationships" id="256" r:id="Rca69cd72d7d845f1"/>
-    <p:sldId xmlns:r="http://schemas.openxmlformats.org/officeDocument/2006/relationships" id="257" r:id="R3a3f55411d3241d9"/>
-    <p:sldId xmlns:r="http://schemas.openxmlformats.org/officeDocument/2006/relationships" id="258" r:id="R44befe82503b42c9"/>
-    <p:sldId xmlns:r="http://schemas.openxmlformats.org/officeDocument/2006/relationships" id="259" r:id="Rd8dbe95467ba4ea0"/>
-    <p:sldId xmlns:r="http://schemas.openxmlformats.org/officeDocument/2006/relationships" id="260" r:id="R13311727e4804248"/>
-    <p:sldId xmlns:r="http://schemas.openxmlformats.org/officeDocument/2006/relationships" id="261" r:id="Rb3f5c74518d1421a"/>
-    <p:sldId xmlns:r="http://schemas.openxmlformats.org/officeDocument/2006/relationships" id="262" r:id="R346b7621800f4103"/>
+    <p:sldId xmlns:r="http://schemas.openxmlformats.org/officeDocument/2006/relationships" id="256" r:id="R89a8cb36b901428c"/>
+    <p:sldId xmlns:r="http://schemas.openxmlformats.org/officeDocument/2006/relationships" id="257" r:id="Rc44d972dae8c4bd5"/>
+    <p:sldId xmlns:r="http://schemas.openxmlformats.org/officeDocument/2006/relationships" id="258" r:id="R8a69348e4f814a36"/>
+    <p:sldId xmlns:r="http://schemas.openxmlformats.org/officeDocument/2006/relationships" id="259" r:id="Rfe29da69dbc14462"/>
+    <p:sldId xmlns:r="http://schemas.openxmlformats.org/officeDocument/2006/relationships" id="260" r:id="R0115ff00dc104204"/>
+    <p:sldId xmlns:r="http://schemas.openxmlformats.org/officeDocument/2006/relationships" id="261" r:id="Rad1e9efb7cd7483d"/>
+    <p:sldId xmlns:r="http://schemas.openxmlformats.org/officeDocument/2006/relationships" id="262" r:id="Rccfa56830d424394"/>
   </p:sldIdLst>
   <p:sldSz cx="15240000" cy="8572500"/>
   <p:notesSz cx="6858000" cy="9144000"/>
@@ -1135,7 +1135,7 @@
           <p:cNvPr id="3" name="Title">
             <a:extLst xmlns:a="http://schemas.openxmlformats.org/drawingml/2006/main">
               <a:ext uri="{FF2B5EF4-FFF2-40B4-BE49-F238E27FC236}">
-                <a16:creationId xmlns:a16="http://schemas.microsoft.com/office/drawing/2014/main" id="{F5827589-7B4C-4FB4-A2D4-A236BFE547F6}"/>
+                <a16:creationId xmlns:a16="http://schemas.microsoft.com/office/drawing/2014/main" id="{8FE6C73A-BBCE-4D70-AE6B-BA1B16477AA2}"/>
               </a:ext>
             </a:extLst>
           </p:cNvPr>
@@ -1364,7 +1364,7 @@
           <p:cNvPr id="2" name="Subtitle">
             <a:extLst xmlns:a="http://schemas.openxmlformats.org/drawingml/2006/main">
               <a:ext uri="{FF2B5EF4-FFF2-40B4-BE49-F238E27FC236}">
-                <a16:creationId xmlns:a16="http://schemas.microsoft.com/office/drawing/2014/main" id="{E5C705AD-788F-4D9A-8557-4D340208A1B6}"/>
+                <a16:creationId xmlns:a16="http://schemas.microsoft.com/office/drawing/2014/main" id="{2547F167-2F2A-4616-829C-DC0D8D41C126}"/>
               </a:ext>
             </a:extLst>
           </p:cNvPr>
@@ -1610,7 +1610,7 @@
           <p:cNvPr id="2" name="Section title">
             <a:extLst xmlns:a="http://schemas.openxmlformats.org/drawingml/2006/main">
               <a:ext uri="{FF2B5EF4-FFF2-40B4-BE49-F238E27FC236}">
-                <a16:creationId xmlns:a16="http://schemas.microsoft.com/office/drawing/2014/main" id="{C816CDBB-84C8-40B6-A188-617B72920B60}"/>
+                <a16:creationId xmlns:a16="http://schemas.microsoft.com/office/drawing/2014/main" id="{D6DA0569-94FF-450A-8C2B-6BBB0DDAEDBE}"/>
               </a:ext>
             </a:extLst>
           </p:cNvPr>
@@ -1856,7 +1856,7 @@
           <p:cNvPr id="3" name="Title">
             <a:extLst xmlns:a="http://schemas.openxmlformats.org/drawingml/2006/main">
               <a:ext uri="{FF2B5EF4-FFF2-40B4-BE49-F238E27FC236}">
-                <a16:creationId xmlns:a16="http://schemas.microsoft.com/office/drawing/2014/main" id="{11BC299F-0A20-4F9F-A991-2BA95F17C066}"/>
+                <a16:creationId xmlns:a16="http://schemas.microsoft.com/office/drawing/2014/main" id="{5BCA3811-F8F4-45DF-9C54-7CDCFE32B0A1}"/>
               </a:ext>
             </a:extLst>
           </p:cNvPr>
@@ -2085,7 +2085,7 @@
           <p:cNvPr id="2" name="Body">
             <a:extLst xmlns:a="http://schemas.openxmlformats.org/drawingml/2006/main">
               <a:ext uri="{FF2B5EF4-FFF2-40B4-BE49-F238E27FC236}">
-                <a16:creationId xmlns:a16="http://schemas.microsoft.com/office/drawing/2014/main" id="{8728D5CD-982C-417B-8460-E27F83ECE09D}"/>
+                <a16:creationId xmlns:a16="http://schemas.microsoft.com/office/drawing/2014/main" id="{5CDB676D-ADA2-47A7-AB6B-D1C296F3C177}"/>
               </a:ext>
             </a:extLst>
           </p:cNvPr>
@@ -2331,7 +2331,7 @@
           <p:cNvPr id="4" name="Title">
             <a:extLst xmlns:a="http://schemas.openxmlformats.org/drawingml/2006/main">
               <a:ext uri="{FF2B5EF4-FFF2-40B4-BE49-F238E27FC236}">
-                <a16:creationId xmlns:a16="http://schemas.microsoft.com/office/drawing/2014/main" id="{7C680802-8BE9-46C4-A461-925CA779F16F}"/>
+                <a16:creationId xmlns:a16="http://schemas.microsoft.com/office/drawing/2014/main" id="{BECB4981-7089-44E9-92D1-AF95D89960D0}"/>
               </a:ext>
             </a:extLst>
           </p:cNvPr>
@@ -2560,7 +2560,7 @@
           <p:cNvPr id="2" name="Left column">
             <a:extLst xmlns:a="http://schemas.openxmlformats.org/drawingml/2006/main">
               <a:ext uri="{FF2B5EF4-FFF2-40B4-BE49-F238E27FC236}">
-                <a16:creationId xmlns:a16="http://schemas.microsoft.com/office/drawing/2014/main" id="{E54D8792-7668-4520-886A-9EF001A87A6F}"/>
+                <a16:creationId xmlns:a16="http://schemas.microsoft.com/office/drawing/2014/main" id="{5803174A-9FCF-4E3D-B7D0-FEA43AECEE19}"/>
               </a:ext>
             </a:extLst>
           </p:cNvPr>
@@ -2789,7 +2789,7 @@
           <p:cNvPr id="3" name="Right column">
             <a:extLst xmlns:a="http://schemas.openxmlformats.org/drawingml/2006/main">
               <a:ext uri="{FF2B5EF4-FFF2-40B4-BE49-F238E27FC236}">
-                <a16:creationId xmlns:a16="http://schemas.microsoft.com/office/drawing/2014/main" id="{40CAFDB0-4BA5-450F-9FE5-A22F0F26B8C2}"/>
+                <a16:creationId xmlns:a16="http://schemas.microsoft.com/office/drawing/2014/main" id="{9DC75260-157F-4AE6-B53A-313EEE665B98}"/>
               </a:ext>
             </a:extLst>
           </p:cNvPr>
@@ -3035,7 +3035,7 @@
           <p:cNvPr id="3" name="Title">
             <a:extLst xmlns:a="http://schemas.openxmlformats.org/drawingml/2006/main">
               <a:ext uri="{FF2B5EF4-FFF2-40B4-BE49-F238E27FC236}">
-                <a16:creationId xmlns:a16="http://schemas.microsoft.com/office/drawing/2014/main" id="{43EEB030-A2FA-4A99-BF40-FAFD171CF02E}"/>
+                <a16:creationId xmlns:a16="http://schemas.microsoft.com/office/drawing/2014/main" id="{843AF58A-BC44-4CBD-81E4-1EC4D2FCB0BB}"/>
               </a:ext>
             </a:extLst>
           </p:cNvPr>
@@ -3264,7 +3264,7 @@
           <p:cNvPr id="2" name="Left column">
             <a:extLst xmlns:a="http://schemas.openxmlformats.org/drawingml/2006/main">
               <a:ext uri="{FF2B5EF4-FFF2-40B4-BE49-F238E27FC236}">
-                <a16:creationId xmlns:a16="http://schemas.microsoft.com/office/drawing/2014/main" id="{DEA96260-4413-4BF6-B14F-70FA4F6ED77F}"/>
+                <a16:creationId xmlns:a16="http://schemas.microsoft.com/office/drawing/2014/main" id="{1E0C145F-82F3-41EE-B8E8-1024FC5C0BB2}"/>
               </a:ext>
             </a:extLst>
           </p:cNvPr>
@@ -3531,12 +3531,12 @@
   </p:cSld>
   <p:clrMap bg1="lt1" tx1="dk1" bg2="lt2" tx2="dk2" accent1="accent1" accent2="accent2" accent3="accent3" accent4="accent4" accent5="accent5" accent6="accent6" hlink="hlink" folHlink="folHlink"/>
   <p:sldLayoutIdLst>
-    <p:sldLayoutId xmlns:r="http://schemas.openxmlformats.org/officeDocument/2006/relationships" id="2147483649" r:id="R479ce6d5d9e842cc"/>
-    <p:sldLayoutId xmlns:r="http://schemas.openxmlformats.org/officeDocument/2006/relationships" id="2147483650" r:id="R8d131a1733944ba2"/>
-    <p:sldLayoutId xmlns:r="http://schemas.openxmlformats.org/officeDocument/2006/relationships" id="2147483651" r:id="R720bfcab579440f5"/>
-    <p:sldLayoutId xmlns:r="http://schemas.openxmlformats.org/officeDocument/2006/relationships" id="2147483652" r:id="Rd8d58f2dc096421a"/>
-    <p:sldLayoutId xmlns:r="http://schemas.openxmlformats.org/officeDocument/2006/relationships" id="2147483653" r:id="R7e9749649418410f"/>
-    <p:sldLayoutId xmlns:r="http://schemas.openxmlformats.org/officeDocument/2006/relationships" id="2147483654" r:id="Re51770322b06497d"/>
+    <p:sldLayoutId xmlns:r="http://schemas.openxmlformats.org/officeDocument/2006/relationships" id="2147483649" r:id="R4fb492e712c24ce5"/>
+    <p:sldLayoutId xmlns:r="http://schemas.openxmlformats.org/officeDocument/2006/relationships" id="2147483650" r:id="Ra550e679a33a4b6d"/>
+    <p:sldLayoutId xmlns:r="http://schemas.openxmlformats.org/officeDocument/2006/relationships" id="2147483651" r:id="R49a02fae15634e7d"/>
+    <p:sldLayoutId xmlns:r="http://schemas.openxmlformats.org/officeDocument/2006/relationships" id="2147483652" r:id="Rcc5c6d6bc0b84d08"/>
+    <p:sldLayoutId xmlns:r="http://schemas.openxmlformats.org/officeDocument/2006/relationships" id="2147483653" r:id="Rc6d1285052004112"/>
+    <p:sldLayoutId xmlns:r="http://schemas.openxmlformats.org/officeDocument/2006/relationships" id="2147483654" r:id="R1b2f2946f3f64cdb"/>
   </p:sldLayoutIdLst>
   <p:txStyles>
     <p:titleStyle>
@@ -4087,7 +4087,7 @@
           <p:cNvPr id="21" name="">
             <a:extLst xmlns:a="http://schemas.openxmlformats.org/drawingml/2006/main">
               <a:ext uri="{FF2B5EF4-FFF2-40B4-BE49-F238E27FC236}">
-                <a16:creationId xmlns:a16="http://schemas.microsoft.com/office/drawing/2014/main" id="{92B05E7B-198B-4F25-9724-AF4D6A030A57}"/>
+                <a16:creationId xmlns:a16="http://schemas.microsoft.com/office/drawing/2014/main" id="{EF03AD46-624E-454B-9DB3-0287F41BD9FC}"/>
               </a:ext>
             </a:extLst>
           </p:cNvPr>
@@ -4097,7 +4097,7 @@
           <p:nvPr/>
         </p:nvPicPr>
         <p:blipFill>
-          <a:blip xmlns:r="http://schemas.openxmlformats.org/officeDocument/2006/relationships" xmlns:a="http://schemas.openxmlformats.org/drawingml/2006/main" r:embed="R1f58e9e7a17a4ae2"/>
+          <a:blip xmlns:r="http://schemas.openxmlformats.org/officeDocument/2006/relationships" xmlns:a="http://schemas.openxmlformats.org/drawingml/2006/main" r:embed="R460e947876964cd3"/>
           <a:stretch xmlns:a="http://schemas.openxmlformats.org/drawingml/2006/main"/>
         </p:blipFill>
         <p:spPr>
@@ -4115,7 +4115,7 @@
           <p:cNvPr id="2" name="f2">
             <a:extLst xmlns:a="http://schemas.openxmlformats.org/drawingml/2006/main">
               <a:ext uri="{FF2B5EF4-FFF2-40B4-BE49-F238E27FC236}">
-                <a16:creationId xmlns:a16="http://schemas.microsoft.com/office/drawing/2014/main" id="{7D0DBAE3-210B-419E-89D6-005834141926}"/>
+                <a16:creationId xmlns:a16="http://schemas.microsoft.com/office/drawing/2014/main" id="{3E2BB6A3-9DE3-444D-A320-2F09A9D4B8DD}"/>
               </a:ext>
             </a:extLst>
           </p:cNvPr>
@@ -4274,7 +4274,7 @@
           <p:cNvPr id="3" name="f3">
             <a:extLst xmlns:a="http://schemas.openxmlformats.org/drawingml/2006/main">
               <a:ext uri="{FF2B5EF4-FFF2-40B4-BE49-F238E27FC236}">
-                <a16:creationId xmlns:a16="http://schemas.microsoft.com/office/drawing/2014/main" id="{DAE93BA3-E935-476F-BE4D-D1604BBC83AA}"/>
+                <a16:creationId xmlns:a16="http://schemas.microsoft.com/office/drawing/2014/main" id="{0651A0D3-6833-4FF7-AC1F-CD575C718273}"/>
               </a:ext>
             </a:extLst>
           </p:cNvPr>
@@ -4433,7 +4433,7 @@
           <p:cNvPr id="4" name="f4">
             <a:extLst xmlns:a="http://schemas.openxmlformats.org/drawingml/2006/main">
               <a:ext uri="{FF2B5EF4-FFF2-40B4-BE49-F238E27FC236}">
-                <a16:creationId xmlns:a16="http://schemas.microsoft.com/office/drawing/2014/main" id="{754A3CB6-1D18-4D59-B99F-34F67A916886}"/>
+                <a16:creationId xmlns:a16="http://schemas.microsoft.com/office/drawing/2014/main" id="{EA3A99D5-D31D-4828-90BF-A56537AD49AD}"/>
               </a:ext>
             </a:extLst>
           </p:cNvPr>
@@ -4592,7 +4592,7 @@
           <p:cNvPr id="5" name="f5">
             <a:extLst xmlns:a="http://schemas.openxmlformats.org/drawingml/2006/main">
               <a:ext uri="{FF2B5EF4-FFF2-40B4-BE49-F238E27FC236}">
-                <a16:creationId xmlns:a16="http://schemas.microsoft.com/office/drawing/2014/main" id="{B2153987-8598-4495-B072-382814ED1C02}"/>
+                <a16:creationId xmlns:a16="http://schemas.microsoft.com/office/drawing/2014/main" id="{0D0D9FB3-8DEE-440C-B1CB-A592D9545CBA}"/>
               </a:ext>
             </a:extLst>
           </p:cNvPr>
@@ -4751,7 +4751,7 @@
           <p:cNvPr id="6" name="f6">
             <a:extLst xmlns:a="http://schemas.openxmlformats.org/drawingml/2006/main">
               <a:ext uri="{FF2B5EF4-FFF2-40B4-BE49-F238E27FC236}">
-                <a16:creationId xmlns:a16="http://schemas.microsoft.com/office/drawing/2014/main" id="{874012CD-4017-4723-A6A6-7440716ED33F}"/>
+                <a16:creationId xmlns:a16="http://schemas.microsoft.com/office/drawing/2014/main" id="{DD227CE4-EAAE-432A-AE9D-1427C96A1EA7}"/>
               </a:ext>
             </a:extLst>
           </p:cNvPr>
@@ -4910,7 +4910,7 @@
           <p:cNvPr id="7" name="f7">
             <a:extLst xmlns:a="http://schemas.openxmlformats.org/drawingml/2006/main">
               <a:ext uri="{FF2B5EF4-FFF2-40B4-BE49-F238E27FC236}">
-                <a16:creationId xmlns:a16="http://schemas.microsoft.com/office/drawing/2014/main" id="{095F0584-316A-4EB3-808D-99CFDEE3EE88}"/>
+                <a16:creationId xmlns:a16="http://schemas.microsoft.com/office/drawing/2014/main" id="{036C3A9A-EAD4-4892-B2D9-2E4B3819F8C9}"/>
               </a:ext>
             </a:extLst>
           </p:cNvPr>
@@ -5069,7 +5069,7 @@
           <p:cNvPr id="8" name="f8">
             <a:extLst xmlns:a="http://schemas.openxmlformats.org/drawingml/2006/main">
               <a:ext uri="{FF2B5EF4-FFF2-40B4-BE49-F238E27FC236}">
-                <a16:creationId xmlns:a16="http://schemas.microsoft.com/office/drawing/2014/main" id="{C84D3C85-7255-47B3-85CE-499CC4000901}"/>
+                <a16:creationId xmlns:a16="http://schemas.microsoft.com/office/drawing/2014/main" id="{C58305C9-7703-4D80-8525-2C6430F6422E}"/>
               </a:ext>
             </a:extLst>
           </p:cNvPr>
@@ -5228,7 +5228,7 @@
           <p:cNvPr id="9" name="f9">
             <a:extLst xmlns:a="http://schemas.openxmlformats.org/drawingml/2006/main">
               <a:ext uri="{FF2B5EF4-FFF2-40B4-BE49-F238E27FC236}">
-                <a16:creationId xmlns:a16="http://schemas.microsoft.com/office/drawing/2014/main" id="{F5970A3D-1732-487C-B1CD-2664ACE1D076}"/>
+                <a16:creationId xmlns:a16="http://schemas.microsoft.com/office/drawing/2014/main" id="{6D50A069-25F4-4D93-9BA6-82711785BCB0}"/>
               </a:ext>
             </a:extLst>
           </p:cNvPr>
@@ -5387,7 +5387,7 @@
           <p:cNvPr id="10" name="f10">
             <a:extLst xmlns:a="http://schemas.openxmlformats.org/drawingml/2006/main">
               <a:ext uri="{FF2B5EF4-FFF2-40B4-BE49-F238E27FC236}">
-                <a16:creationId xmlns:a16="http://schemas.microsoft.com/office/drawing/2014/main" id="{76CA94A5-C86B-40AC-BE2B-0E09738BF174}"/>
+                <a16:creationId xmlns:a16="http://schemas.microsoft.com/office/drawing/2014/main" id="{769A7FB0-63C1-40DF-96EF-A30420ACF19E}"/>
               </a:ext>
             </a:extLst>
           </p:cNvPr>
@@ -5546,7 +5546,7 @@
           <p:cNvPr id="11" name="f11">
             <a:extLst xmlns:a="http://schemas.openxmlformats.org/drawingml/2006/main">
               <a:ext uri="{FF2B5EF4-FFF2-40B4-BE49-F238E27FC236}">
-                <a16:creationId xmlns:a16="http://schemas.microsoft.com/office/drawing/2014/main" id="{FF3E690D-0B42-4C04-8A88-BAB9E798CBE4}"/>
+                <a16:creationId xmlns:a16="http://schemas.microsoft.com/office/drawing/2014/main" id="{6CC3875E-1D87-4AE2-B0B6-040556F6F0F4}"/>
               </a:ext>
             </a:extLst>
           </p:cNvPr>
@@ -5705,7 +5705,7 @@
           <p:cNvPr id="12" name="f12">
             <a:extLst xmlns:a="http://schemas.openxmlformats.org/drawingml/2006/main">
               <a:ext uri="{FF2B5EF4-FFF2-40B4-BE49-F238E27FC236}">
-                <a16:creationId xmlns:a16="http://schemas.microsoft.com/office/drawing/2014/main" id="{E9D6E330-6B5F-4F1E-9498-37EB0A3E2C00}"/>
+                <a16:creationId xmlns:a16="http://schemas.microsoft.com/office/drawing/2014/main" id="{7471D0FC-9208-4A04-88C4-3CFB51517729}"/>
               </a:ext>
             </a:extLst>
           </p:cNvPr>
@@ -5864,7 +5864,7 @@
           <p:cNvPr id="13" name="f13">
             <a:extLst xmlns:a="http://schemas.openxmlformats.org/drawingml/2006/main">
               <a:ext uri="{FF2B5EF4-FFF2-40B4-BE49-F238E27FC236}">
-                <a16:creationId xmlns:a16="http://schemas.microsoft.com/office/drawing/2014/main" id="{B3A3A5C5-6454-4682-9968-D1173815FA65}"/>
+                <a16:creationId xmlns:a16="http://schemas.microsoft.com/office/drawing/2014/main" id="{39BEF633-0628-43B6-8CD3-73B4B5092F7F}"/>
               </a:ext>
             </a:extLst>
           </p:cNvPr>
@@ -6023,7 +6023,7 @@
           <p:cNvPr id="14" name="f14">
             <a:extLst xmlns:a="http://schemas.openxmlformats.org/drawingml/2006/main">
               <a:ext uri="{FF2B5EF4-FFF2-40B4-BE49-F238E27FC236}">
-                <a16:creationId xmlns:a16="http://schemas.microsoft.com/office/drawing/2014/main" id="{3C1C9B65-0E7B-46FA-AF99-752BDD2DA108}"/>
+                <a16:creationId xmlns:a16="http://schemas.microsoft.com/office/drawing/2014/main" id="{60E3524A-5D0B-413F-B95F-9E42DD530ABE}"/>
               </a:ext>
             </a:extLst>
           </p:cNvPr>
@@ -6182,7 +6182,7 @@
           <p:cNvPr id="15" name="f15">
             <a:extLst xmlns:a="http://schemas.openxmlformats.org/drawingml/2006/main">
               <a:ext uri="{FF2B5EF4-FFF2-40B4-BE49-F238E27FC236}">
-                <a16:creationId xmlns:a16="http://schemas.microsoft.com/office/drawing/2014/main" id="{62B3FEF1-E15C-4B72-B905-8C395A34B634}"/>
+                <a16:creationId xmlns:a16="http://schemas.microsoft.com/office/drawing/2014/main" id="{131A3327-3FC5-44D2-AC97-08E3088E98D1}"/>
               </a:ext>
             </a:extLst>
           </p:cNvPr>
@@ -6341,7 +6341,7 @@
           <p:cNvPr id="16" name="f16">
             <a:extLst xmlns:a="http://schemas.openxmlformats.org/drawingml/2006/main">
               <a:ext uri="{FF2B5EF4-FFF2-40B4-BE49-F238E27FC236}">
-                <a16:creationId xmlns:a16="http://schemas.microsoft.com/office/drawing/2014/main" id="{7A8A114B-E746-489C-B20D-B42978AFF70B}"/>
+                <a16:creationId xmlns:a16="http://schemas.microsoft.com/office/drawing/2014/main" id="{988B0B97-4DB2-461F-934D-C8F76F0EF7F0}"/>
               </a:ext>
             </a:extLst>
           </p:cNvPr>
@@ -6500,7 +6500,7 @@
           <p:cNvPr id="17" name="f17">
             <a:extLst xmlns:a="http://schemas.openxmlformats.org/drawingml/2006/main">
               <a:ext uri="{FF2B5EF4-FFF2-40B4-BE49-F238E27FC236}">
-                <a16:creationId xmlns:a16="http://schemas.microsoft.com/office/drawing/2014/main" id="{6A69C208-B7E1-45C4-80AF-128990E5261A}"/>
+                <a16:creationId xmlns:a16="http://schemas.microsoft.com/office/drawing/2014/main" id="{43AFB416-4970-4A6C-8BE4-D701AFAFC65C}"/>
               </a:ext>
             </a:extLst>
           </p:cNvPr>
@@ -6659,7 +6659,7 @@
           <p:cNvPr id="18" name="f18">
             <a:extLst xmlns:a="http://schemas.openxmlformats.org/drawingml/2006/main">
               <a:ext uri="{FF2B5EF4-FFF2-40B4-BE49-F238E27FC236}">
-                <a16:creationId xmlns:a16="http://schemas.microsoft.com/office/drawing/2014/main" id="{8ED9E915-EDFB-4F78-9341-F92553B94524}"/>
+                <a16:creationId xmlns:a16="http://schemas.microsoft.com/office/drawing/2014/main" id="{0F50D955-4B09-4C80-A27F-BABD7D2E5FC2}"/>
               </a:ext>
             </a:extLst>
           </p:cNvPr>
@@ -6818,7 +6818,7 @@
           <p:cNvPr id="19" name="f19">
             <a:extLst xmlns:a="http://schemas.openxmlformats.org/drawingml/2006/main">
               <a:ext uri="{FF2B5EF4-FFF2-40B4-BE49-F238E27FC236}">
-                <a16:creationId xmlns:a16="http://schemas.microsoft.com/office/drawing/2014/main" id="{C2132C43-120F-4A40-8F7D-8B3A9A2E4D12}"/>
+                <a16:creationId xmlns:a16="http://schemas.microsoft.com/office/drawing/2014/main" id="{91C9588D-6CD4-43F5-B66E-ACF163ED31E6}"/>
               </a:ext>
             </a:extLst>
           </p:cNvPr>
@@ -6977,7 +6977,7 @@
           <p:cNvPr id="20" name="f20">
             <a:extLst xmlns:a="http://schemas.openxmlformats.org/drawingml/2006/main">
               <a:ext uri="{FF2B5EF4-FFF2-40B4-BE49-F238E27FC236}">
-                <a16:creationId xmlns:a16="http://schemas.microsoft.com/office/drawing/2014/main" id="{4513B31A-6AE1-4FBB-A582-9C1DB9831505}"/>
+                <a16:creationId xmlns:a16="http://schemas.microsoft.com/office/drawing/2014/main" id="{8EB0730B-2DB8-49E4-9AAF-108A0BE7AE7A}"/>
               </a:ext>
             </a:extLst>
           </p:cNvPr>
@@ -7134,7 +7134,7 @@
     </p:spTree>
     <p:extLst>
       <p:ext uri="{BB962C8B-B14F-4D97-AF65-F5344CB8AC3E}">
-        <p14:creationId xmlns:p14="http://schemas.microsoft.com/office/powerpoint/2010/main" val="546992989"/>
+        <p14:creationId xmlns:p14="http://schemas.microsoft.com/office/powerpoint/2010/main" val="372116789"/>
       </p:ext>
     </p:extLst>
   </p:cSld>
@@ -7165,7 +7165,7 @@
           <p:cNvPr id="24" name="f21">
             <a:extLst xmlns:a="http://schemas.openxmlformats.org/drawingml/2006/main">
               <a:ext uri="{FF2B5EF4-FFF2-40B4-BE49-F238E27FC236}">
-                <a16:creationId xmlns:a16="http://schemas.microsoft.com/office/drawing/2014/main" id="{FD125CCF-4566-4587-B7B1-E2CC549A4854}"/>
+                <a16:creationId xmlns:a16="http://schemas.microsoft.com/office/drawing/2014/main" id="{ED6CB717-ABBE-4557-A8BC-523E97D66540}"/>
               </a:ext>
             </a:extLst>
           </p:cNvPr>
@@ -7324,7 +7324,7 @@
           <p:cNvPr id="2" name="f22">
             <a:extLst xmlns:a="http://schemas.openxmlformats.org/drawingml/2006/main">
               <a:ext uri="{FF2B5EF4-FFF2-40B4-BE49-F238E27FC236}">
-                <a16:creationId xmlns:a16="http://schemas.microsoft.com/office/drawing/2014/main" id="{51ED8B2D-3A53-49C7-9F7D-7BD570634B43}"/>
+                <a16:creationId xmlns:a16="http://schemas.microsoft.com/office/drawing/2014/main" id="{733A0C94-0968-47B8-90D5-E212BC8A5D07}"/>
               </a:ext>
             </a:extLst>
           </p:cNvPr>
@@ -7483,7 +7483,7 @@
           <p:cNvPr id="3" name="f23">
             <a:extLst xmlns:a="http://schemas.openxmlformats.org/drawingml/2006/main">
               <a:ext uri="{FF2B5EF4-FFF2-40B4-BE49-F238E27FC236}">
-                <a16:creationId xmlns:a16="http://schemas.microsoft.com/office/drawing/2014/main" id="{03B500F1-98D6-4445-9DA8-34B3C402D95D}"/>
+                <a16:creationId xmlns:a16="http://schemas.microsoft.com/office/drawing/2014/main" id="{E682C433-4127-4492-821B-EEC89F79AFF3}"/>
               </a:ext>
             </a:extLst>
           </p:cNvPr>
@@ -7642,7 +7642,7 @@
           <p:cNvPr id="4" name="f24">
             <a:extLst xmlns:a="http://schemas.openxmlformats.org/drawingml/2006/main">
               <a:ext uri="{FF2B5EF4-FFF2-40B4-BE49-F238E27FC236}">
-                <a16:creationId xmlns:a16="http://schemas.microsoft.com/office/drawing/2014/main" id="{4BE103D2-1811-4DDC-8C06-FFD4C1234894}"/>
+                <a16:creationId xmlns:a16="http://schemas.microsoft.com/office/drawing/2014/main" id="{62CF49C3-5C95-4E12-9E3A-EBFE4BF614F7}"/>
               </a:ext>
             </a:extLst>
           </p:cNvPr>
@@ -7801,7 +7801,7 @@
           <p:cNvPr id="5" name="f25">
             <a:extLst xmlns:a="http://schemas.openxmlformats.org/drawingml/2006/main">
               <a:ext uri="{FF2B5EF4-FFF2-40B4-BE49-F238E27FC236}">
-                <a16:creationId xmlns:a16="http://schemas.microsoft.com/office/drawing/2014/main" id="{DA819CE7-495F-4288-B769-1165C8FEBD08}"/>
+                <a16:creationId xmlns:a16="http://schemas.microsoft.com/office/drawing/2014/main" id="{71890CED-2DBF-4894-B458-64E0E1493FE0}"/>
               </a:ext>
             </a:extLst>
           </p:cNvPr>
@@ -7960,7 +7960,7 @@
           <p:cNvPr id="6" name="f26">
             <a:extLst xmlns:a="http://schemas.openxmlformats.org/drawingml/2006/main">
               <a:ext uri="{FF2B5EF4-FFF2-40B4-BE49-F238E27FC236}">
-                <a16:creationId xmlns:a16="http://schemas.microsoft.com/office/drawing/2014/main" id="{E9B1B775-EF3F-4C5F-9BA8-6777FF423C16}"/>
+                <a16:creationId xmlns:a16="http://schemas.microsoft.com/office/drawing/2014/main" id="{3319DDFE-1CE5-412F-938B-989D4603E202}"/>
               </a:ext>
             </a:extLst>
           </p:cNvPr>
@@ -8119,7 +8119,7 @@
           <p:cNvPr id="7" name="f27">
             <a:extLst xmlns:a="http://schemas.openxmlformats.org/drawingml/2006/main">
               <a:ext uri="{FF2B5EF4-FFF2-40B4-BE49-F238E27FC236}">
-                <a16:creationId xmlns:a16="http://schemas.microsoft.com/office/drawing/2014/main" id="{7EBE0CA3-C605-4517-9A4D-F6562256EF8C}"/>
+                <a16:creationId xmlns:a16="http://schemas.microsoft.com/office/drawing/2014/main" id="{84236307-E0A5-40E9-A6B1-66FA846E9724}"/>
               </a:ext>
             </a:extLst>
           </p:cNvPr>
@@ -8154,7 +8154,7 @@
           <p:cNvPr id="8" name="f28">
             <a:extLst xmlns:a="http://schemas.openxmlformats.org/drawingml/2006/main">
               <a:ext uri="{FF2B5EF4-FFF2-40B4-BE49-F238E27FC236}">
-                <a16:creationId xmlns:a16="http://schemas.microsoft.com/office/drawing/2014/main" id="{2AE429EB-1A57-4227-93D6-5C151D8A8DDC}"/>
+                <a16:creationId xmlns:a16="http://schemas.microsoft.com/office/drawing/2014/main" id="{9A9F7338-B46D-47F3-808C-EFB257C39D5C}"/>
               </a:ext>
             </a:extLst>
           </p:cNvPr>
@@ -8185,7 +8185,7 @@
           <p:cNvPr id="9" name="f29">
             <a:extLst xmlns:a="http://schemas.openxmlformats.org/drawingml/2006/main">
               <a:ext uri="{FF2B5EF4-FFF2-40B4-BE49-F238E27FC236}">
-                <a16:creationId xmlns:a16="http://schemas.microsoft.com/office/drawing/2014/main" id="{5BB315D0-7A64-440B-861D-70A2776BDEA3}"/>
+                <a16:creationId xmlns:a16="http://schemas.microsoft.com/office/drawing/2014/main" id="{F9A6E795-0714-4694-A117-75264AD1BD9F}"/>
               </a:ext>
             </a:extLst>
           </p:cNvPr>
@@ -8216,7 +8216,7 @@
           <p:cNvPr id="10" name="f30">
             <a:extLst xmlns:a="http://schemas.openxmlformats.org/drawingml/2006/main">
               <a:ext uri="{FF2B5EF4-FFF2-40B4-BE49-F238E27FC236}">
-                <a16:creationId xmlns:a16="http://schemas.microsoft.com/office/drawing/2014/main" id="{9897839E-4D6C-4FEF-BD56-38180A83B48E}"/>
+                <a16:creationId xmlns:a16="http://schemas.microsoft.com/office/drawing/2014/main" id="{65AFC1C3-286B-4E10-B0E8-BCCCE6EE6659}"/>
               </a:ext>
             </a:extLst>
           </p:cNvPr>
@@ -8247,7 +8247,7 @@
           <p:cNvPr id="11" name="f31">
             <a:extLst xmlns:a="http://schemas.openxmlformats.org/drawingml/2006/main">
               <a:ext uri="{FF2B5EF4-FFF2-40B4-BE49-F238E27FC236}">
-                <a16:creationId xmlns:a16="http://schemas.microsoft.com/office/drawing/2014/main" id="{7FCFB39E-D74F-46AD-95CF-A8C746633E73}"/>
+                <a16:creationId xmlns:a16="http://schemas.microsoft.com/office/drawing/2014/main" id="{83831625-D1C1-4BCA-AD07-5408A5954A5D}"/>
               </a:ext>
             </a:extLst>
           </p:cNvPr>
@@ -8282,7 +8282,7 @@
           <p:cNvPr id="12" name="f32">
             <a:extLst xmlns:a="http://schemas.openxmlformats.org/drawingml/2006/main">
               <a:ext uri="{FF2B5EF4-FFF2-40B4-BE49-F238E27FC236}">
-                <a16:creationId xmlns:a16="http://schemas.microsoft.com/office/drawing/2014/main" id="{B009BCE6-6CDA-47EB-87ED-36AF1A5EA43C}"/>
+                <a16:creationId xmlns:a16="http://schemas.microsoft.com/office/drawing/2014/main" id="{61968A65-63BE-4233-9C04-F239C6FBDD1F}"/>
               </a:ext>
             </a:extLst>
           </p:cNvPr>
@@ -8313,7 +8313,7 @@
           <p:cNvPr id="13" name="f33">
             <a:extLst xmlns:a="http://schemas.openxmlformats.org/drawingml/2006/main">
               <a:ext uri="{FF2B5EF4-FFF2-40B4-BE49-F238E27FC236}">
-                <a16:creationId xmlns:a16="http://schemas.microsoft.com/office/drawing/2014/main" id="{5A75314C-94B8-485F-BB9D-7EA33DC90F16}"/>
+                <a16:creationId xmlns:a16="http://schemas.microsoft.com/office/drawing/2014/main" id="{C9D37ED6-AB6B-4EE4-9716-F72A1A5865E2}"/>
               </a:ext>
             </a:extLst>
           </p:cNvPr>
@@ -8346,7 +8346,7 @@
           <p:cNvPr id="14" name="f34">
             <a:extLst xmlns:a="http://schemas.openxmlformats.org/drawingml/2006/main">
               <a:ext uri="{FF2B5EF4-FFF2-40B4-BE49-F238E27FC236}">
-                <a16:creationId xmlns:a16="http://schemas.microsoft.com/office/drawing/2014/main" id="{7643CF38-1340-4592-A2E6-67F7DED538C0}"/>
+                <a16:creationId xmlns:a16="http://schemas.microsoft.com/office/drawing/2014/main" id="{40C41A39-82B6-4C8E-9572-BEA6200E9A64}"/>
               </a:ext>
             </a:extLst>
           </p:cNvPr>
@@ -8379,7 +8379,7 @@
           <p:cNvPr id="15" name="f35">
             <a:extLst xmlns:a="http://schemas.openxmlformats.org/drawingml/2006/main">
               <a:ext uri="{FF2B5EF4-FFF2-40B4-BE49-F238E27FC236}">
-                <a16:creationId xmlns:a16="http://schemas.microsoft.com/office/drawing/2014/main" id="{348FB94F-DECA-414B-8546-6F639B1E122E}"/>
+                <a16:creationId xmlns:a16="http://schemas.microsoft.com/office/drawing/2014/main" id="{0A876F6D-9433-4247-91B2-82B8A31C2C72}"/>
               </a:ext>
             </a:extLst>
           </p:cNvPr>
@@ -8412,7 +8412,7 @@
           <p:cNvPr id="16" name="f36">
             <a:extLst xmlns:a="http://schemas.openxmlformats.org/drawingml/2006/main">
               <a:ext uri="{FF2B5EF4-FFF2-40B4-BE49-F238E27FC236}">
-                <a16:creationId xmlns:a16="http://schemas.microsoft.com/office/drawing/2014/main" id="{4E443ABD-BAFD-4850-A886-B611BAC6E1C5}"/>
+                <a16:creationId xmlns:a16="http://schemas.microsoft.com/office/drawing/2014/main" id="{A9477BDD-1EC2-4B68-BA33-49CE2EFCC03B}"/>
               </a:ext>
             </a:extLst>
           </p:cNvPr>
@@ -8571,7 +8571,7 @@
           <p:cNvPr id="17" name="f37">
             <a:extLst xmlns:a="http://schemas.openxmlformats.org/drawingml/2006/main">
               <a:ext uri="{FF2B5EF4-FFF2-40B4-BE49-F238E27FC236}">
-                <a16:creationId xmlns:a16="http://schemas.microsoft.com/office/drawing/2014/main" id="{F3B1FB7D-C9D0-48F0-A554-34E3CD965153}"/>
+                <a16:creationId xmlns:a16="http://schemas.microsoft.com/office/drawing/2014/main" id="{AA00C338-104F-44AD-8EF0-05D4C2BC342E}"/>
               </a:ext>
             </a:extLst>
           </p:cNvPr>
@@ -8602,7 +8602,7 @@
           <p:cNvPr id="18" name="f38">
             <a:extLst xmlns:a="http://schemas.openxmlformats.org/drawingml/2006/main">
               <a:ext uri="{FF2B5EF4-FFF2-40B4-BE49-F238E27FC236}">
-                <a16:creationId xmlns:a16="http://schemas.microsoft.com/office/drawing/2014/main" id="{B8692C49-10FD-4578-8EFD-94FF07EE300F}"/>
+                <a16:creationId xmlns:a16="http://schemas.microsoft.com/office/drawing/2014/main" id="{63966254-0311-41AA-8142-B9592A0EB54B}"/>
               </a:ext>
             </a:extLst>
           </p:cNvPr>
@@ -8633,7 +8633,7 @@
           <p:cNvPr id="19" name="f39">
             <a:extLst xmlns:a="http://schemas.openxmlformats.org/drawingml/2006/main">
               <a:ext uri="{FF2B5EF4-FFF2-40B4-BE49-F238E27FC236}">
-                <a16:creationId xmlns:a16="http://schemas.microsoft.com/office/drawing/2014/main" id="{E876AB3B-34AA-4900-9534-E14CAE3C5A60}"/>
+                <a16:creationId xmlns:a16="http://schemas.microsoft.com/office/drawing/2014/main" id="{F0256E74-B2CF-429F-A9A6-A824A4AB8E5F}"/>
               </a:ext>
             </a:extLst>
           </p:cNvPr>
@@ -8668,7 +8668,7 @@
           <p:cNvPr id="20" name="f40">
             <a:extLst xmlns:a="http://schemas.openxmlformats.org/drawingml/2006/main">
               <a:ext uri="{FF2B5EF4-FFF2-40B4-BE49-F238E27FC236}">
-                <a16:creationId xmlns:a16="http://schemas.microsoft.com/office/drawing/2014/main" id="{A3E4CCE4-D2B3-4EBA-9838-24567C88DCCD}"/>
+                <a16:creationId xmlns:a16="http://schemas.microsoft.com/office/drawing/2014/main" id="{ADD07E89-C783-432A-86EA-1E8A2EB35696}"/>
               </a:ext>
             </a:extLst>
           </p:cNvPr>
@@ -8850,7 +8850,7 @@
           <p:cNvPr id="21" name="f41">
             <a:extLst xmlns:a="http://schemas.openxmlformats.org/drawingml/2006/main">
               <a:ext uri="{FF2B5EF4-FFF2-40B4-BE49-F238E27FC236}">
-                <a16:creationId xmlns:a16="http://schemas.microsoft.com/office/drawing/2014/main" id="{45844FDF-42E0-4654-865E-23EA559C4A33}"/>
+                <a16:creationId xmlns:a16="http://schemas.microsoft.com/office/drawing/2014/main" id="{466285EF-0541-4BB1-87A5-B0F01E766C1D}"/>
               </a:ext>
             </a:extLst>
           </p:cNvPr>
@@ -9032,7 +9032,7 @@
           <p:cNvPr id="22" name="f42">
             <a:extLst xmlns:a="http://schemas.openxmlformats.org/drawingml/2006/main">
               <a:ext uri="{FF2B5EF4-FFF2-40B4-BE49-F238E27FC236}">
-                <a16:creationId xmlns:a16="http://schemas.microsoft.com/office/drawing/2014/main" id="{CEDEEDD2-FE46-47C6-B75D-26985BA178A6}"/>
+                <a16:creationId xmlns:a16="http://schemas.microsoft.com/office/drawing/2014/main" id="{207A288C-FFB1-49A1-814B-1EE2623A8F95}"/>
               </a:ext>
             </a:extLst>
           </p:cNvPr>
@@ -9191,7 +9191,7 @@
           <p:cNvPr id="23" name="f43">
             <a:extLst xmlns:a="http://schemas.openxmlformats.org/drawingml/2006/main">
               <a:ext uri="{FF2B5EF4-FFF2-40B4-BE49-F238E27FC236}">
-                <a16:creationId xmlns:a16="http://schemas.microsoft.com/office/drawing/2014/main" id="{4E4A79A7-2C64-42E3-B79B-0EE162F4314B}"/>
+                <a16:creationId xmlns:a16="http://schemas.microsoft.com/office/drawing/2014/main" id="{FA7E283C-BFE6-4D57-9860-EF206CF95E36}"/>
               </a:ext>
             </a:extLst>
           </p:cNvPr>
@@ -9348,7 +9348,7 @@
     </p:spTree>
     <p:extLst>
       <p:ext uri="{BB962C8B-B14F-4D97-AF65-F5344CB8AC3E}">
-        <p14:creationId xmlns:p14="http://schemas.microsoft.com/office/powerpoint/2010/main" val="1146686997"/>
+        <p14:creationId xmlns:p14="http://schemas.microsoft.com/office/powerpoint/2010/main" val="113949665"/>
       </p:ext>
     </p:extLst>
   </p:cSld>
@@ -9379,7 +9379,7 @@
           <p:cNvPr id="24" name="">
             <a:extLst xmlns:a="http://schemas.openxmlformats.org/drawingml/2006/main">
               <a:ext uri="{FF2B5EF4-FFF2-40B4-BE49-F238E27FC236}">
-                <a16:creationId xmlns:a16="http://schemas.microsoft.com/office/drawing/2014/main" id="{ECFB977D-8279-43EF-97D8-E47214A8032F}"/>
+                <a16:creationId xmlns:a16="http://schemas.microsoft.com/office/drawing/2014/main" id="{0F7A68C0-D7A3-4550-9A16-6A4D4D1C8BE7}"/>
               </a:ext>
             </a:extLst>
           </p:cNvPr>
@@ -9389,7 +9389,7 @@
           <p:nvPr/>
         </p:nvPicPr>
         <p:blipFill>
-          <a:blip xmlns:r="http://schemas.openxmlformats.org/officeDocument/2006/relationships" xmlns:a="http://schemas.openxmlformats.org/drawingml/2006/main" r:embed="Rd0a5feae76b944e6"/>
+          <a:blip xmlns:r="http://schemas.openxmlformats.org/officeDocument/2006/relationships" xmlns:a="http://schemas.openxmlformats.org/drawingml/2006/main" r:embed="R9d0302bf288f4e89"/>
           <a:stretch xmlns:a="http://schemas.openxmlformats.org/drawingml/2006/main"/>
         </p:blipFill>
         <p:spPr>
@@ -9407,7 +9407,7 @@
           <p:cNvPr id="2" name="f45">
             <a:extLst xmlns:a="http://schemas.openxmlformats.org/drawingml/2006/main">
               <a:ext uri="{FF2B5EF4-FFF2-40B4-BE49-F238E27FC236}">
-                <a16:creationId xmlns:a16="http://schemas.microsoft.com/office/drawing/2014/main" id="{576ACBFC-237A-4751-BA18-76E2E00695F7}"/>
+                <a16:creationId xmlns:a16="http://schemas.microsoft.com/office/drawing/2014/main" id="{5992C5EF-6603-449B-A18F-86CF7EF05CAF}"/>
               </a:ext>
             </a:extLst>
           </p:cNvPr>
@@ -9566,7 +9566,7 @@
           <p:cNvPr id="3" name="f46">
             <a:extLst xmlns:a="http://schemas.openxmlformats.org/drawingml/2006/main">
               <a:ext uri="{FF2B5EF4-FFF2-40B4-BE49-F238E27FC236}">
-                <a16:creationId xmlns:a16="http://schemas.microsoft.com/office/drawing/2014/main" id="{4C82BF1A-34C9-42F3-B19F-E59241AB00AB}"/>
+                <a16:creationId xmlns:a16="http://schemas.microsoft.com/office/drawing/2014/main" id="{315C530E-DDA1-4ADD-8D13-951385E7B1F5}"/>
               </a:ext>
             </a:extLst>
           </p:cNvPr>
@@ -9725,7 +9725,7 @@
           <p:cNvPr id="4" name="f47">
             <a:extLst xmlns:a="http://schemas.openxmlformats.org/drawingml/2006/main">
               <a:ext uri="{FF2B5EF4-FFF2-40B4-BE49-F238E27FC236}">
-                <a16:creationId xmlns:a16="http://schemas.microsoft.com/office/drawing/2014/main" id="{97B3E269-D7CC-4DAF-9414-04C3B71BCA46}"/>
+                <a16:creationId xmlns:a16="http://schemas.microsoft.com/office/drawing/2014/main" id="{BED93621-8B2A-4BC1-A870-DEA6A5DCC928}"/>
               </a:ext>
             </a:extLst>
           </p:cNvPr>
@@ -9884,7 +9884,7 @@
           <p:cNvPr id="5" name="f48">
             <a:extLst xmlns:a="http://schemas.openxmlformats.org/drawingml/2006/main">
               <a:ext uri="{FF2B5EF4-FFF2-40B4-BE49-F238E27FC236}">
-                <a16:creationId xmlns:a16="http://schemas.microsoft.com/office/drawing/2014/main" id="{B0533A93-4A52-4564-BF93-E5189E9D23BB}"/>
+                <a16:creationId xmlns:a16="http://schemas.microsoft.com/office/drawing/2014/main" id="{FBAACD3F-1183-4DB2-9B53-3D9E3DB82D0A}"/>
               </a:ext>
             </a:extLst>
           </p:cNvPr>
@@ -10043,7 +10043,7 @@
           <p:cNvPr id="6" name="f49">
             <a:extLst xmlns:a="http://schemas.openxmlformats.org/drawingml/2006/main">
               <a:ext uri="{FF2B5EF4-FFF2-40B4-BE49-F238E27FC236}">
-                <a16:creationId xmlns:a16="http://schemas.microsoft.com/office/drawing/2014/main" id="{C03E6A25-31DE-4875-8169-75F8E163B6D4}"/>
+                <a16:creationId xmlns:a16="http://schemas.microsoft.com/office/drawing/2014/main" id="{3E5D2824-EA93-4275-B84C-CC269BCA151B}"/>
               </a:ext>
             </a:extLst>
           </p:cNvPr>
@@ -10202,7 +10202,7 @@
           <p:cNvPr id="7" name="f50">
             <a:extLst xmlns:a="http://schemas.openxmlformats.org/drawingml/2006/main">
               <a:ext uri="{FF2B5EF4-FFF2-40B4-BE49-F238E27FC236}">
-                <a16:creationId xmlns:a16="http://schemas.microsoft.com/office/drawing/2014/main" id="{02CA44F8-D079-4607-8E06-21353D929D67}"/>
+                <a16:creationId xmlns:a16="http://schemas.microsoft.com/office/drawing/2014/main" id="{B116F515-C303-4C8D-BC0E-F8080B1FF835}"/>
               </a:ext>
             </a:extLst>
           </p:cNvPr>
@@ -10361,7 +10361,7 @@
           <p:cNvPr id="8" name="f51">
             <a:extLst xmlns:a="http://schemas.openxmlformats.org/drawingml/2006/main">
               <a:ext uri="{FF2B5EF4-FFF2-40B4-BE49-F238E27FC236}">
-                <a16:creationId xmlns:a16="http://schemas.microsoft.com/office/drawing/2014/main" id="{0586F632-03AD-4CFB-A3A4-AA9E350F0A75}"/>
+                <a16:creationId xmlns:a16="http://schemas.microsoft.com/office/drawing/2014/main" id="{72245C53-B8EF-4F7E-B91D-4B04461C4D2A}"/>
               </a:ext>
             </a:extLst>
           </p:cNvPr>
@@ -10520,7 +10520,7 @@
           <p:cNvPr id="9" name="f52">
             <a:extLst xmlns:a="http://schemas.openxmlformats.org/drawingml/2006/main">
               <a:ext uri="{FF2B5EF4-FFF2-40B4-BE49-F238E27FC236}">
-                <a16:creationId xmlns:a16="http://schemas.microsoft.com/office/drawing/2014/main" id="{CF98F909-6189-4F9D-9295-8D82B6CFE8E9}"/>
+                <a16:creationId xmlns:a16="http://schemas.microsoft.com/office/drawing/2014/main" id="{D447A4CD-1085-4628-8EE1-FB081DE0F030}"/>
               </a:ext>
             </a:extLst>
           </p:cNvPr>
@@ -10679,7 +10679,7 @@
           <p:cNvPr id="10" name="f53">
             <a:extLst xmlns:a="http://schemas.openxmlformats.org/drawingml/2006/main">
               <a:ext uri="{FF2B5EF4-FFF2-40B4-BE49-F238E27FC236}">
-                <a16:creationId xmlns:a16="http://schemas.microsoft.com/office/drawing/2014/main" id="{4892DF77-C826-4D21-AA87-2817BA442855}"/>
+                <a16:creationId xmlns:a16="http://schemas.microsoft.com/office/drawing/2014/main" id="{76C777F7-B23C-4C96-98B7-07E51B9C2698}"/>
               </a:ext>
             </a:extLst>
           </p:cNvPr>
@@ -10838,7 +10838,7 @@
           <p:cNvPr id="11" name="f54">
             <a:extLst xmlns:a="http://schemas.openxmlformats.org/drawingml/2006/main">
               <a:ext uri="{FF2B5EF4-FFF2-40B4-BE49-F238E27FC236}">
-                <a16:creationId xmlns:a16="http://schemas.microsoft.com/office/drawing/2014/main" id="{C016C60D-BDB2-4445-BAF2-94B970010086}"/>
+                <a16:creationId xmlns:a16="http://schemas.microsoft.com/office/drawing/2014/main" id="{1D384CA9-A6BB-43A1-9904-A3B38CE4F9D7}"/>
               </a:ext>
             </a:extLst>
           </p:cNvPr>
@@ -10997,7 +10997,7 @@
           <p:cNvPr id="12" name="f55">
             <a:extLst xmlns:a="http://schemas.openxmlformats.org/drawingml/2006/main">
               <a:ext uri="{FF2B5EF4-FFF2-40B4-BE49-F238E27FC236}">
-                <a16:creationId xmlns:a16="http://schemas.microsoft.com/office/drawing/2014/main" id="{879A09D1-27B2-402D-9994-5536F78C75E8}"/>
+                <a16:creationId xmlns:a16="http://schemas.microsoft.com/office/drawing/2014/main" id="{0601A362-D066-4952-959D-5460316D6E84}"/>
               </a:ext>
             </a:extLst>
           </p:cNvPr>
@@ -11156,7 +11156,7 @@
           <p:cNvPr id="13" name="f56">
             <a:extLst xmlns:a="http://schemas.openxmlformats.org/drawingml/2006/main">
               <a:ext uri="{FF2B5EF4-FFF2-40B4-BE49-F238E27FC236}">
-                <a16:creationId xmlns:a16="http://schemas.microsoft.com/office/drawing/2014/main" id="{6E25D707-6C7E-41D0-8ACF-31B3AD1E79BD}"/>
+                <a16:creationId xmlns:a16="http://schemas.microsoft.com/office/drawing/2014/main" id="{D05303F4-62BB-408A-8333-A31BD2B55E1E}"/>
               </a:ext>
             </a:extLst>
           </p:cNvPr>
@@ -11315,7 +11315,7 @@
           <p:cNvPr id="14" name="f57">
             <a:extLst xmlns:a="http://schemas.openxmlformats.org/drawingml/2006/main">
               <a:ext uri="{FF2B5EF4-FFF2-40B4-BE49-F238E27FC236}">
-                <a16:creationId xmlns:a16="http://schemas.microsoft.com/office/drawing/2014/main" id="{259483BB-6B59-4603-A9CD-94BEBC4172D1}"/>
+                <a16:creationId xmlns:a16="http://schemas.microsoft.com/office/drawing/2014/main" id="{D89F1ECC-2672-4C69-9058-95CD1CDB5CA4}"/>
               </a:ext>
             </a:extLst>
           </p:cNvPr>
@@ -11474,7 +11474,7 @@
           <p:cNvPr id="15" name="f58">
             <a:extLst xmlns:a="http://schemas.openxmlformats.org/drawingml/2006/main">
               <a:ext uri="{FF2B5EF4-FFF2-40B4-BE49-F238E27FC236}">
-                <a16:creationId xmlns:a16="http://schemas.microsoft.com/office/drawing/2014/main" id="{D06155AE-592D-4F38-80DB-E3E19510A1B5}"/>
+                <a16:creationId xmlns:a16="http://schemas.microsoft.com/office/drawing/2014/main" id="{E901E0E3-BBE6-4936-A25E-4FAA783311FB}"/>
               </a:ext>
             </a:extLst>
           </p:cNvPr>
@@ -11633,7 +11633,7 @@
           <p:cNvPr id="16" name="f59">
             <a:extLst xmlns:a="http://schemas.openxmlformats.org/drawingml/2006/main">
               <a:ext uri="{FF2B5EF4-FFF2-40B4-BE49-F238E27FC236}">
-                <a16:creationId xmlns:a16="http://schemas.microsoft.com/office/drawing/2014/main" id="{20A8554B-D348-46FD-B454-1252DB8668F7}"/>
+                <a16:creationId xmlns:a16="http://schemas.microsoft.com/office/drawing/2014/main" id="{943322A7-8FC4-4AA5-8DA7-4AD98C2EC374}"/>
               </a:ext>
             </a:extLst>
           </p:cNvPr>
@@ -11792,7 +11792,7 @@
           <p:cNvPr id="17" name="f60">
             <a:extLst xmlns:a="http://schemas.openxmlformats.org/drawingml/2006/main">
               <a:ext uri="{FF2B5EF4-FFF2-40B4-BE49-F238E27FC236}">
-                <a16:creationId xmlns:a16="http://schemas.microsoft.com/office/drawing/2014/main" id="{6E19C25A-A163-4FF7-BE2D-F3E4AD841095}"/>
+                <a16:creationId xmlns:a16="http://schemas.microsoft.com/office/drawing/2014/main" id="{8D17A2E2-EE52-4C98-AF75-AB3ACE148491}"/>
               </a:ext>
             </a:extLst>
           </p:cNvPr>
@@ -11951,7 +11951,7 @@
           <p:cNvPr id="18" name="f61">
             <a:extLst xmlns:a="http://schemas.openxmlformats.org/drawingml/2006/main">
               <a:ext uri="{FF2B5EF4-FFF2-40B4-BE49-F238E27FC236}">
-                <a16:creationId xmlns:a16="http://schemas.microsoft.com/office/drawing/2014/main" id="{A56855E0-25F1-4A89-AA2F-8ABE68290503}"/>
+                <a16:creationId xmlns:a16="http://schemas.microsoft.com/office/drawing/2014/main" id="{9ED698B5-1C3E-4943-8D72-EE626A3AD3BB}"/>
               </a:ext>
             </a:extLst>
           </p:cNvPr>
@@ -12110,7 +12110,7 @@
           <p:cNvPr id="19" name="f62">
             <a:extLst xmlns:a="http://schemas.openxmlformats.org/drawingml/2006/main">
               <a:ext uri="{FF2B5EF4-FFF2-40B4-BE49-F238E27FC236}">
-                <a16:creationId xmlns:a16="http://schemas.microsoft.com/office/drawing/2014/main" id="{D27D2D76-AAFF-4753-ACE1-B7FFA650A56F}"/>
+                <a16:creationId xmlns:a16="http://schemas.microsoft.com/office/drawing/2014/main" id="{ECD46024-5D4A-4182-80FA-39913F96F251}"/>
               </a:ext>
             </a:extLst>
           </p:cNvPr>
@@ -12269,7 +12269,7 @@
           <p:cNvPr id="20" name="f63">
             <a:extLst xmlns:a="http://schemas.openxmlformats.org/drawingml/2006/main">
               <a:ext uri="{FF2B5EF4-FFF2-40B4-BE49-F238E27FC236}">
-                <a16:creationId xmlns:a16="http://schemas.microsoft.com/office/drawing/2014/main" id="{0FE440B5-6BFD-4028-8FE1-6DBA3F946DE4}"/>
+                <a16:creationId xmlns:a16="http://schemas.microsoft.com/office/drawing/2014/main" id="{F5865B97-6B12-4EED-81AB-E47F70040FAE}"/>
               </a:ext>
             </a:extLst>
           </p:cNvPr>
@@ -12428,7 +12428,7 @@
           <p:cNvPr id="21" name="f64">
             <a:extLst xmlns:a="http://schemas.openxmlformats.org/drawingml/2006/main">
               <a:ext uri="{FF2B5EF4-FFF2-40B4-BE49-F238E27FC236}">
-                <a16:creationId xmlns:a16="http://schemas.microsoft.com/office/drawing/2014/main" id="{A4CAF0AB-FBB0-44ED-A0D9-1273A5BE74F3}"/>
+                <a16:creationId xmlns:a16="http://schemas.microsoft.com/office/drawing/2014/main" id="{FE99074B-BACB-4F21-8652-FE5EEDC24A3F}"/>
               </a:ext>
             </a:extLst>
           </p:cNvPr>
@@ -12587,7 +12587,7 @@
           <p:cNvPr id="22" name="f65">
             <a:extLst xmlns:a="http://schemas.openxmlformats.org/drawingml/2006/main">
               <a:ext uri="{FF2B5EF4-FFF2-40B4-BE49-F238E27FC236}">
-                <a16:creationId xmlns:a16="http://schemas.microsoft.com/office/drawing/2014/main" id="{0239262C-C23F-4070-81DD-D9A7F73F4AA4}"/>
+                <a16:creationId xmlns:a16="http://schemas.microsoft.com/office/drawing/2014/main" id="{65737B06-13A5-49B0-A33D-75C3896591F1}"/>
               </a:ext>
             </a:extLst>
           </p:cNvPr>
@@ -12746,7 +12746,7 @@
           <p:cNvPr id="23" name="f66">
             <a:extLst xmlns:a="http://schemas.openxmlformats.org/drawingml/2006/main">
               <a:ext uri="{FF2B5EF4-FFF2-40B4-BE49-F238E27FC236}">
-                <a16:creationId xmlns:a16="http://schemas.microsoft.com/office/drawing/2014/main" id="{32F853DE-614D-4123-AD78-719572E6561C}"/>
+                <a16:creationId xmlns:a16="http://schemas.microsoft.com/office/drawing/2014/main" id="{A22FBB40-649E-4414-B499-2F589D7D0A8B}"/>
               </a:ext>
             </a:extLst>
           </p:cNvPr>
@@ -12903,7 +12903,7 @@
     </p:spTree>
     <p:extLst>
       <p:ext uri="{BB962C8B-B14F-4D97-AF65-F5344CB8AC3E}">
-        <p14:creationId xmlns:p14="http://schemas.microsoft.com/office/powerpoint/2010/main" val="2000603175"/>
+        <p14:creationId xmlns:p14="http://schemas.microsoft.com/office/powerpoint/2010/main" val="1497803154"/>
       </p:ext>
     </p:extLst>
   </p:cSld>
@@ -12934,7 +12934,7 @@
           <p:cNvPr id="18" name="f67">
             <a:extLst xmlns:a="http://schemas.openxmlformats.org/drawingml/2006/main">
               <a:ext uri="{FF2B5EF4-FFF2-40B4-BE49-F238E27FC236}">
-                <a16:creationId xmlns:a16="http://schemas.microsoft.com/office/drawing/2014/main" id="{255D08E1-0437-468D-BDE1-B5577E6AE26E}"/>
+                <a16:creationId xmlns:a16="http://schemas.microsoft.com/office/drawing/2014/main" id="{545CF73C-0BEC-43B1-A979-8EC0BB60E1F1}"/>
               </a:ext>
             </a:extLst>
           </p:cNvPr>
@@ -13093,7 +13093,7 @@
           <p:cNvPr id="2" name="f68">
             <a:extLst xmlns:a="http://schemas.openxmlformats.org/drawingml/2006/main">
               <a:ext uri="{FF2B5EF4-FFF2-40B4-BE49-F238E27FC236}">
-                <a16:creationId xmlns:a16="http://schemas.microsoft.com/office/drawing/2014/main" id="{FF8CA1FF-1188-48F6-8875-44408809276C}"/>
+                <a16:creationId xmlns:a16="http://schemas.microsoft.com/office/drawing/2014/main" id="{9560B7C4-1830-429D-8ADC-25A32503D72A}"/>
               </a:ext>
             </a:extLst>
           </p:cNvPr>
@@ -13252,7 +13252,7 @@
           <p:cNvPr id="3" name="f69">
             <a:extLst xmlns:a="http://schemas.openxmlformats.org/drawingml/2006/main">
               <a:ext uri="{FF2B5EF4-FFF2-40B4-BE49-F238E27FC236}">
-                <a16:creationId xmlns:a16="http://schemas.microsoft.com/office/drawing/2014/main" id="{7B94911F-0594-4BF3-A932-DBD890DF4F26}"/>
+                <a16:creationId xmlns:a16="http://schemas.microsoft.com/office/drawing/2014/main" id="{3175A81D-A993-4EF3-84CA-BE44A5CFAA5C}"/>
               </a:ext>
             </a:extLst>
           </p:cNvPr>
@@ -13411,7 +13411,7 @@
           <p:cNvPr id="4" name="f70">
             <a:extLst xmlns:a="http://schemas.openxmlformats.org/drawingml/2006/main">
               <a:ext uri="{FF2B5EF4-FFF2-40B4-BE49-F238E27FC236}">
-                <a16:creationId xmlns:a16="http://schemas.microsoft.com/office/drawing/2014/main" id="{1EBBDF93-CF3A-49AC-9D02-B8B0080C9350}"/>
+                <a16:creationId xmlns:a16="http://schemas.microsoft.com/office/drawing/2014/main" id="{A2BE4953-CBEA-4FCF-A94E-41B054860346}"/>
               </a:ext>
             </a:extLst>
           </p:cNvPr>
@@ -13570,7 +13570,7 @@
           <p:cNvPr id="5" name="f103">
             <a:extLst xmlns:a="http://schemas.openxmlformats.org/drawingml/2006/main">
               <a:ext uri="{FF2B5EF4-FFF2-40B4-BE49-F238E27FC236}">
-                <a16:creationId xmlns:a16="http://schemas.microsoft.com/office/drawing/2014/main" id="{A481E2E3-E1E4-4B84-A0AE-1314B472122A}"/>
+                <a16:creationId xmlns:a16="http://schemas.microsoft.com/office/drawing/2014/main" id="{F67A86E4-0AF6-4B59-AB6A-923CB8F0428F}"/>
               </a:ext>
             </a:extLst>
           </p:cNvPr>
@@ -13729,7 +13729,7 @@
           <p:cNvPr id="6" name="f104">
             <a:extLst xmlns:a="http://schemas.openxmlformats.org/drawingml/2006/main">
               <a:ext uri="{FF2B5EF4-FFF2-40B4-BE49-F238E27FC236}">
-                <a16:creationId xmlns:a16="http://schemas.microsoft.com/office/drawing/2014/main" id="{2AB634C6-0866-4C2E-AEDC-C8B6CCFBF517}"/>
+                <a16:creationId xmlns:a16="http://schemas.microsoft.com/office/drawing/2014/main" id="{3C1F1927-3AF0-4815-98F2-5B4BAF168144}"/>
               </a:ext>
             </a:extLst>
           </p:cNvPr>
@@ -13764,7 +13764,7 @@
           <p:cNvPr id="7" name="f105">
             <a:extLst xmlns:a="http://schemas.openxmlformats.org/drawingml/2006/main">
               <a:ext uri="{FF2B5EF4-FFF2-40B4-BE49-F238E27FC236}">
-                <a16:creationId xmlns:a16="http://schemas.microsoft.com/office/drawing/2014/main" id="{431E96A3-3829-474C-BA17-125B2539F19F}"/>
+                <a16:creationId xmlns:a16="http://schemas.microsoft.com/office/drawing/2014/main" id="{D7C70755-7A6A-4A13-8EA5-C8BC0578D292}"/>
               </a:ext>
             </a:extLst>
           </p:cNvPr>
@@ -13923,7 +13923,7 @@
           <p:cNvPr id="8" name="f106">
             <a:extLst xmlns:a="http://schemas.openxmlformats.org/drawingml/2006/main">
               <a:ext uri="{FF2B5EF4-FFF2-40B4-BE49-F238E27FC236}">
-                <a16:creationId xmlns:a16="http://schemas.microsoft.com/office/drawing/2014/main" id="{D2DCB783-F272-4219-8ADE-E6890FED9051}"/>
+                <a16:creationId xmlns:a16="http://schemas.microsoft.com/office/drawing/2014/main" id="{AAE31310-9EE4-4FC6-8279-F927FB794B51}"/>
               </a:ext>
             </a:extLst>
           </p:cNvPr>
@@ -14105,7 +14105,7 @@
           <p:cNvPr id="9" name="f107">
             <a:extLst xmlns:a="http://schemas.openxmlformats.org/drawingml/2006/main">
               <a:ext uri="{FF2B5EF4-FFF2-40B4-BE49-F238E27FC236}">
-                <a16:creationId xmlns:a16="http://schemas.microsoft.com/office/drawing/2014/main" id="{7FEC5BE1-BE85-4909-9936-0AA62A21D609}"/>
+                <a16:creationId xmlns:a16="http://schemas.microsoft.com/office/drawing/2014/main" id="{AB484214-CFD6-41F5-B2B3-237ACDFCCD51}"/>
               </a:ext>
             </a:extLst>
           </p:cNvPr>
@@ -14264,7 +14264,7 @@
           <p:cNvPr id="10" name="f108">
             <a:extLst xmlns:a="http://schemas.openxmlformats.org/drawingml/2006/main">
               <a:ext uri="{FF2B5EF4-FFF2-40B4-BE49-F238E27FC236}">
-                <a16:creationId xmlns:a16="http://schemas.microsoft.com/office/drawing/2014/main" id="{1CF935D2-B439-4E75-9779-CA510D863DC8}"/>
+                <a16:creationId xmlns:a16="http://schemas.microsoft.com/office/drawing/2014/main" id="{537769B9-C798-452B-910C-91D714FAC3B4}"/>
               </a:ext>
             </a:extLst>
           </p:cNvPr>
@@ -14423,7 +14423,7 @@
           <p:cNvPr id="11" name="f109">
             <a:extLst xmlns:a="http://schemas.openxmlformats.org/drawingml/2006/main">
               <a:ext uri="{FF2B5EF4-FFF2-40B4-BE49-F238E27FC236}">
-                <a16:creationId xmlns:a16="http://schemas.microsoft.com/office/drawing/2014/main" id="{29815676-10ED-4AB7-A411-730A307FF56B}"/>
+                <a16:creationId xmlns:a16="http://schemas.microsoft.com/office/drawing/2014/main" id="{75C4B58E-F0E4-4B18-8C19-74149DB76DA5}"/>
               </a:ext>
             </a:extLst>
           </p:cNvPr>
@@ -14454,7 +14454,7 @@
           <p:cNvPr id="12" name="f110">
             <a:extLst xmlns:a="http://schemas.openxmlformats.org/drawingml/2006/main">
               <a:ext uri="{FF2B5EF4-FFF2-40B4-BE49-F238E27FC236}">
-                <a16:creationId xmlns:a16="http://schemas.microsoft.com/office/drawing/2014/main" id="{FCCCB5EE-B953-44F0-B727-376EDA83DBE1}"/>
+                <a16:creationId xmlns:a16="http://schemas.microsoft.com/office/drawing/2014/main" id="{7BE5E7DD-1480-487E-BA3E-B3B20EE8BB8F}"/>
               </a:ext>
             </a:extLst>
           </p:cNvPr>
@@ -14485,7 +14485,7 @@
           <p:cNvPr id="13" name="f111">
             <a:extLst xmlns:a="http://schemas.openxmlformats.org/drawingml/2006/main">
               <a:ext uri="{FF2B5EF4-FFF2-40B4-BE49-F238E27FC236}">
-                <a16:creationId xmlns:a16="http://schemas.microsoft.com/office/drawing/2014/main" id="{B5063897-5494-4189-8EC5-D760DA8123E2}"/>
+                <a16:creationId xmlns:a16="http://schemas.microsoft.com/office/drawing/2014/main" id="{03928440-6A9C-4EBF-BE2D-754908763346}"/>
               </a:ext>
             </a:extLst>
           </p:cNvPr>
@@ -14644,7 +14644,7 @@
           <p:cNvPr id="14" name="f112">
             <a:extLst xmlns:a="http://schemas.openxmlformats.org/drawingml/2006/main">
               <a:ext uri="{FF2B5EF4-FFF2-40B4-BE49-F238E27FC236}">
-                <a16:creationId xmlns:a16="http://schemas.microsoft.com/office/drawing/2014/main" id="{2908E1D0-E6AB-4FD8-950A-52461C9029AA}"/>
+                <a16:creationId xmlns:a16="http://schemas.microsoft.com/office/drawing/2014/main" id="{3324DF9B-6138-47DB-BF9A-6ABD5E93A602}"/>
               </a:ext>
             </a:extLst>
           </p:cNvPr>
@@ -14679,7 +14679,7 @@
           <p:cNvPr id="15" name="f113">
             <a:extLst xmlns:a="http://schemas.openxmlformats.org/drawingml/2006/main">
               <a:ext uri="{FF2B5EF4-FFF2-40B4-BE49-F238E27FC236}">
-                <a16:creationId xmlns:a16="http://schemas.microsoft.com/office/drawing/2014/main" id="{43E88327-7B0D-4327-B0E6-0DB9093961BC}"/>
+                <a16:creationId xmlns:a16="http://schemas.microsoft.com/office/drawing/2014/main" id="{EA03B86F-C636-49D2-B5DC-6318634BE198}"/>
               </a:ext>
             </a:extLst>
           </p:cNvPr>
@@ -14861,7 +14861,7 @@
           <p:cNvPr id="16" name="f114">
             <a:extLst xmlns:a="http://schemas.openxmlformats.org/drawingml/2006/main">
               <a:ext uri="{FF2B5EF4-FFF2-40B4-BE49-F238E27FC236}">
-                <a16:creationId xmlns:a16="http://schemas.microsoft.com/office/drawing/2014/main" id="{8AE1C2BE-3090-45BE-A1BA-200B5CADACEA}"/>
+                <a16:creationId xmlns:a16="http://schemas.microsoft.com/office/drawing/2014/main" id="{DF22FF0B-BDE1-4314-9B00-F5752143AF8E}"/>
               </a:ext>
             </a:extLst>
           </p:cNvPr>
@@ -14896,7 +14896,7 @@
           <p:cNvPr id="17" name="f115">
             <a:extLst xmlns:a="http://schemas.openxmlformats.org/drawingml/2006/main">
               <a:ext uri="{FF2B5EF4-FFF2-40B4-BE49-F238E27FC236}">
-                <a16:creationId xmlns:a16="http://schemas.microsoft.com/office/drawing/2014/main" id="{E39D5E44-A0AD-4E88-B586-0051B325E2F6}"/>
+                <a16:creationId xmlns:a16="http://schemas.microsoft.com/office/drawing/2014/main" id="{BC15316E-65C7-4CCE-B587-55892079EE9A}"/>
               </a:ext>
             </a:extLst>
           </p:cNvPr>
@@ -15076,7 +15076,7 @@
     </p:spTree>
     <p:extLst>
       <p:ext uri="{BB962C8B-B14F-4D97-AF65-F5344CB8AC3E}">
-        <p14:creationId xmlns:p14="http://schemas.microsoft.com/office/powerpoint/2010/main" val="1310737145"/>
+        <p14:creationId xmlns:p14="http://schemas.microsoft.com/office/powerpoint/2010/main" val="1956201557"/>
       </p:ext>
     </p:extLst>
   </p:cSld>
@@ -15107,7 +15107,7 @@
           <p:cNvPr id="15" name="">
             <a:extLst xmlns:a="http://schemas.openxmlformats.org/drawingml/2006/main">
               <a:ext uri="{FF2B5EF4-FFF2-40B4-BE49-F238E27FC236}">
-                <a16:creationId xmlns:a16="http://schemas.microsoft.com/office/drawing/2014/main" id="{C5E6AD9F-7D13-4195-B00D-988FFADB4A3A}"/>
+                <a16:creationId xmlns:a16="http://schemas.microsoft.com/office/drawing/2014/main" id="{C8F9D777-E1A4-43F8-B551-80357B7EF124}"/>
               </a:ext>
             </a:extLst>
           </p:cNvPr>
@@ -15117,7 +15117,7 @@
           <p:nvPr/>
         </p:nvPicPr>
         <p:blipFill>
-          <a:blip xmlns:r="http://schemas.openxmlformats.org/officeDocument/2006/relationships" xmlns:a="http://schemas.openxmlformats.org/drawingml/2006/main" r:embed="R29336291263940c2"/>
+          <a:blip xmlns:r="http://schemas.openxmlformats.org/officeDocument/2006/relationships" xmlns:a="http://schemas.openxmlformats.org/drawingml/2006/main" r:embed="R83fda5a7cce14a8a"/>
           <a:stretch xmlns:a="http://schemas.openxmlformats.org/drawingml/2006/main"/>
         </p:blipFill>
         <p:spPr>
@@ -15135,7 +15135,7 @@
           <p:cNvPr id="2" name="f117">
             <a:extLst xmlns:a="http://schemas.openxmlformats.org/drawingml/2006/main">
               <a:ext uri="{FF2B5EF4-FFF2-40B4-BE49-F238E27FC236}">
-                <a16:creationId xmlns:a16="http://schemas.microsoft.com/office/drawing/2014/main" id="{295DAF06-CDE0-4013-B2A5-12689AB69C1A}"/>
+                <a16:creationId xmlns:a16="http://schemas.microsoft.com/office/drawing/2014/main" id="{F93A2280-4AF7-49CE-8DCC-44A045620A9F}"/>
               </a:ext>
             </a:extLst>
           </p:cNvPr>
@@ -15294,7 +15294,7 @@
           <p:cNvPr id="3" name="f118">
             <a:extLst xmlns:a="http://schemas.openxmlformats.org/drawingml/2006/main">
               <a:ext uri="{FF2B5EF4-FFF2-40B4-BE49-F238E27FC236}">
-                <a16:creationId xmlns:a16="http://schemas.microsoft.com/office/drawing/2014/main" id="{B1623AB8-3F1D-4CEB-845E-CBAFB80D2E87}"/>
+                <a16:creationId xmlns:a16="http://schemas.microsoft.com/office/drawing/2014/main" id="{BD2C68B3-0532-496C-9C9B-696CED4429DB}"/>
               </a:ext>
             </a:extLst>
           </p:cNvPr>
@@ -15453,7 +15453,7 @@
           <p:cNvPr id="4" name="f119">
             <a:extLst xmlns:a="http://schemas.openxmlformats.org/drawingml/2006/main">
               <a:ext uri="{FF2B5EF4-FFF2-40B4-BE49-F238E27FC236}">
-                <a16:creationId xmlns:a16="http://schemas.microsoft.com/office/drawing/2014/main" id="{07294506-1286-405D-A7F9-1771A4DF11A3}"/>
+                <a16:creationId xmlns:a16="http://schemas.microsoft.com/office/drawing/2014/main" id="{DB243A82-CC6C-4797-B26D-1E59A017A2F0}"/>
               </a:ext>
             </a:extLst>
           </p:cNvPr>
@@ -15612,7 +15612,7 @@
           <p:cNvPr id="5" name="f120">
             <a:extLst xmlns:a="http://schemas.openxmlformats.org/drawingml/2006/main">
               <a:ext uri="{FF2B5EF4-FFF2-40B4-BE49-F238E27FC236}">
-                <a16:creationId xmlns:a16="http://schemas.microsoft.com/office/drawing/2014/main" id="{0E4F47FF-E296-463E-B5B5-8CF8C1A99887}"/>
+                <a16:creationId xmlns:a16="http://schemas.microsoft.com/office/drawing/2014/main" id="{E406D2AC-B4FC-4CCF-83D0-E95D95E4CFDF}"/>
               </a:ext>
             </a:extLst>
           </p:cNvPr>
@@ -15771,7 +15771,7 @@
           <p:cNvPr id="6" name="f121">
             <a:extLst xmlns:a="http://schemas.openxmlformats.org/drawingml/2006/main">
               <a:ext uri="{FF2B5EF4-FFF2-40B4-BE49-F238E27FC236}">
-                <a16:creationId xmlns:a16="http://schemas.microsoft.com/office/drawing/2014/main" id="{091B4C7F-BB90-49BF-81FB-E965F4773186}"/>
+                <a16:creationId xmlns:a16="http://schemas.microsoft.com/office/drawing/2014/main" id="{AB0C41A7-D4BF-4514-AFD8-478F40512A5A}"/>
               </a:ext>
             </a:extLst>
           </p:cNvPr>
@@ -15930,7 +15930,7 @@
           <p:cNvPr id="7" name="f122">
             <a:extLst xmlns:a="http://schemas.openxmlformats.org/drawingml/2006/main">
               <a:ext uri="{FF2B5EF4-FFF2-40B4-BE49-F238E27FC236}">
-                <a16:creationId xmlns:a16="http://schemas.microsoft.com/office/drawing/2014/main" id="{869B6067-0E57-4F04-9B79-E68D1B55ADA3}"/>
+                <a16:creationId xmlns:a16="http://schemas.microsoft.com/office/drawing/2014/main" id="{DD72C646-9259-4451-B76B-11720593C5F3}"/>
               </a:ext>
             </a:extLst>
           </p:cNvPr>
@@ -16089,7 +16089,7 @@
           <p:cNvPr id="8" name="f123">
             <a:extLst xmlns:a="http://schemas.openxmlformats.org/drawingml/2006/main">
               <a:ext uri="{FF2B5EF4-FFF2-40B4-BE49-F238E27FC236}">
-                <a16:creationId xmlns:a16="http://schemas.microsoft.com/office/drawing/2014/main" id="{00B80771-D2F1-46D7-9FB2-D296888742A3}"/>
+                <a16:creationId xmlns:a16="http://schemas.microsoft.com/office/drawing/2014/main" id="{895B7727-BDFC-46EE-BC0F-E28635CFB331}"/>
               </a:ext>
             </a:extLst>
           </p:cNvPr>
@@ -16248,7 +16248,7 @@
           <p:cNvPr id="9" name="f124">
             <a:extLst xmlns:a="http://schemas.openxmlformats.org/drawingml/2006/main">
               <a:ext uri="{FF2B5EF4-FFF2-40B4-BE49-F238E27FC236}">
-                <a16:creationId xmlns:a16="http://schemas.microsoft.com/office/drawing/2014/main" id="{31F6612A-AB6A-4E71-BE3F-21BD55D26464}"/>
+                <a16:creationId xmlns:a16="http://schemas.microsoft.com/office/drawing/2014/main" id="{208DEFF9-1E47-441E-AB3B-AF1AE78B5243}"/>
               </a:ext>
             </a:extLst>
           </p:cNvPr>
@@ -16407,7 +16407,7 @@
           <p:cNvPr id="10" name="f125">
             <a:extLst xmlns:a="http://schemas.openxmlformats.org/drawingml/2006/main">
               <a:ext uri="{FF2B5EF4-FFF2-40B4-BE49-F238E27FC236}">
-                <a16:creationId xmlns:a16="http://schemas.microsoft.com/office/drawing/2014/main" id="{FC953AEB-AFA5-4657-B41E-67682C157F67}"/>
+                <a16:creationId xmlns:a16="http://schemas.microsoft.com/office/drawing/2014/main" id="{26CD5067-81EE-409B-98FF-9BF3949749F2}"/>
               </a:ext>
             </a:extLst>
           </p:cNvPr>
@@ -16566,7 +16566,7 @@
           <p:cNvPr id="11" name="f126">
             <a:extLst xmlns:a="http://schemas.openxmlformats.org/drawingml/2006/main">
               <a:ext uri="{FF2B5EF4-FFF2-40B4-BE49-F238E27FC236}">
-                <a16:creationId xmlns:a16="http://schemas.microsoft.com/office/drawing/2014/main" id="{A09E4266-9833-4D9A-914A-FB514FA0D5CD}"/>
+                <a16:creationId xmlns:a16="http://schemas.microsoft.com/office/drawing/2014/main" id="{465CF1E0-1A5A-42DB-A850-E84516741D38}"/>
               </a:ext>
             </a:extLst>
           </p:cNvPr>
@@ -16725,7 +16725,7 @@
           <p:cNvPr id="12" name="f127">
             <a:extLst xmlns:a="http://schemas.openxmlformats.org/drawingml/2006/main">
               <a:ext uri="{FF2B5EF4-FFF2-40B4-BE49-F238E27FC236}">
-                <a16:creationId xmlns:a16="http://schemas.microsoft.com/office/drawing/2014/main" id="{953778B1-2F3F-4072-AE82-1AC7D7E1E07B}"/>
+                <a16:creationId xmlns:a16="http://schemas.microsoft.com/office/drawing/2014/main" id="{55350AAD-EF17-42D3-BB34-1D5C4DC5927D}"/>
               </a:ext>
             </a:extLst>
           </p:cNvPr>
@@ -16884,7 +16884,7 @@
           <p:cNvPr id="13" name="f128">
             <a:extLst xmlns:a="http://schemas.openxmlformats.org/drawingml/2006/main">
               <a:ext uri="{FF2B5EF4-FFF2-40B4-BE49-F238E27FC236}">
-                <a16:creationId xmlns:a16="http://schemas.microsoft.com/office/drawing/2014/main" id="{9D7738C4-20A3-4854-AD95-3703EACA77E0}"/>
+                <a16:creationId xmlns:a16="http://schemas.microsoft.com/office/drawing/2014/main" id="{EE90AC2C-62E1-4571-9089-8045E79F5162}"/>
               </a:ext>
             </a:extLst>
           </p:cNvPr>
@@ -17043,7 +17043,7 @@
           <p:cNvPr id="14" name="f129">
             <a:extLst xmlns:a="http://schemas.openxmlformats.org/drawingml/2006/main">
               <a:ext uri="{FF2B5EF4-FFF2-40B4-BE49-F238E27FC236}">
-                <a16:creationId xmlns:a16="http://schemas.microsoft.com/office/drawing/2014/main" id="{8FB89AEE-E822-4EBC-A85A-CDD54F363A5B}"/>
+                <a16:creationId xmlns:a16="http://schemas.microsoft.com/office/drawing/2014/main" id="{766F869A-E726-4593-9DBD-CE8FB5DE151F}"/>
               </a:ext>
             </a:extLst>
           </p:cNvPr>
@@ -17200,7 +17200,7 @@
     </p:spTree>
     <p:extLst>
       <p:ext uri="{BB962C8B-B14F-4D97-AF65-F5344CB8AC3E}">
-        <p14:creationId xmlns:p14="http://schemas.microsoft.com/office/powerpoint/2010/main" val="1014993930"/>
+        <p14:creationId xmlns:p14="http://schemas.microsoft.com/office/powerpoint/2010/main" val="1709248655"/>
       </p:ext>
     </p:extLst>
   </p:cSld>
@@ -17231,7 +17231,7 @@
           <p:cNvPr id="13" name="f130">
             <a:extLst xmlns:a="http://schemas.openxmlformats.org/drawingml/2006/main">
               <a:ext uri="{FF2B5EF4-FFF2-40B4-BE49-F238E27FC236}">
-                <a16:creationId xmlns:a16="http://schemas.microsoft.com/office/drawing/2014/main" id="{A7A95DF2-2918-41A1-BA68-7835142227B0}"/>
+                <a16:creationId xmlns:a16="http://schemas.microsoft.com/office/drawing/2014/main" id="{B9F134A7-2553-443B-BAAF-88BB7082857F}"/>
               </a:ext>
             </a:extLst>
           </p:cNvPr>
@@ -17390,7 +17390,7 @@
           <p:cNvPr id="2" name="f131">
             <a:extLst xmlns:a="http://schemas.openxmlformats.org/drawingml/2006/main">
               <a:ext uri="{FF2B5EF4-FFF2-40B4-BE49-F238E27FC236}">
-                <a16:creationId xmlns:a16="http://schemas.microsoft.com/office/drawing/2014/main" id="{91EC9E79-1DC0-41E5-91AF-CF779DA75CB1}"/>
+                <a16:creationId xmlns:a16="http://schemas.microsoft.com/office/drawing/2014/main" id="{1577DC9F-7E60-496B-A4B9-96DEDDB0074E}"/>
               </a:ext>
             </a:extLst>
           </p:cNvPr>
@@ -17549,7 +17549,7 @@
           <p:cNvPr id="3" name="f132">
             <a:extLst xmlns:a="http://schemas.openxmlformats.org/drawingml/2006/main">
               <a:ext uri="{FF2B5EF4-FFF2-40B4-BE49-F238E27FC236}">
-                <a16:creationId xmlns:a16="http://schemas.microsoft.com/office/drawing/2014/main" id="{24350F58-6637-441C-964F-54AB304E9001}"/>
+                <a16:creationId xmlns:a16="http://schemas.microsoft.com/office/drawing/2014/main" id="{EA975D8F-053D-4C23-8214-B7A781811DDC}"/>
               </a:ext>
             </a:extLst>
           </p:cNvPr>
@@ -17708,7 +17708,7 @@
           <p:cNvPr id="4" name="f133">
             <a:extLst xmlns:a="http://schemas.openxmlformats.org/drawingml/2006/main">
               <a:ext uri="{FF2B5EF4-FFF2-40B4-BE49-F238E27FC236}">
-                <a16:creationId xmlns:a16="http://schemas.microsoft.com/office/drawing/2014/main" id="{09282848-AFBA-47CC-BEA0-50361F52A927}"/>
+                <a16:creationId xmlns:a16="http://schemas.microsoft.com/office/drawing/2014/main" id="{86E9D298-5B4B-4903-B2DF-9DD2E9FFC289}"/>
               </a:ext>
             </a:extLst>
           </p:cNvPr>
@@ -17867,7 +17867,7 @@
           <p:cNvPr id="5" name="">
             <a:extLst xmlns:a="http://schemas.openxmlformats.org/drawingml/2006/main">
               <a:ext uri="{FF2B5EF4-FFF2-40B4-BE49-F238E27FC236}">
-                <a16:creationId xmlns:a16="http://schemas.microsoft.com/office/drawing/2014/main" id="{9015D807-AD40-47EA-A838-BE588142CD4C}"/>
+                <a16:creationId xmlns:a16="http://schemas.microsoft.com/office/drawing/2014/main" id="{F8DA9346-2B98-4D15-9131-231B17AC9B4B}"/>
               </a:ext>
             </a:extLst>
           </p:cNvPr>
@@ -18703,7 +18703,7 @@
           <p:cNvPr id="6" name="f135">
             <a:extLst xmlns:a="http://schemas.openxmlformats.org/drawingml/2006/main">
               <a:ext uri="{FF2B5EF4-FFF2-40B4-BE49-F238E27FC236}">
-                <a16:creationId xmlns:a16="http://schemas.microsoft.com/office/drawing/2014/main" id="{486D6312-8D01-4644-A694-264A3068E37B}"/>
+                <a16:creationId xmlns:a16="http://schemas.microsoft.com/office/drawing/2014/main" id="{12D38032-58C5-449D-A7ED-AE51621B547D}"/>
               </a:ext>
             </a:extLst>
           </p:cNvPr>
@@ -18738,7 +18738,7 @@
           <p:cNvPr id="7" name="f136">
             <a:extLst xmlns:a="http://schemas.openxmlformats.org/drawingml/2006/main">
               <a:ext uri="{FF2B5EF4-FFF2-40B4-BE49-F238E27FC236}">
-                <a16:creationId xmlns:a16="http://schemas.microsoft.com/office/drawing/2014/main" id="{AFCF6CF6-1D69-4136-A704-E490750D7594}"/>
+                <a16:creationId xmlns:a16="http://schemas.microsoft.com/office/drawing/2014/main" id="{67039B0F-FDDD-43D5-9D8C-81F083184126}"/>
               </a:ext>
             </a:extLst>
           </p:cNvPr>
@@ -18897,7 +18897,7 @@
           <p:cNvPr id="8" name="f137">
             <a:extLst xmlns:a="http://schemas.openxmlformats.org/drawingml/2006/main">
               <a:ext uri="{FF2B5EF4-FFF2-40B4-BE49-F238E27FC236}">
-                <a16:creationId xmlns:a16="http://schemas.microsoft.com/office/drawing/2014/main" id="{07D1AA39-6FDE-4E42-8F79-BB75243D3945}"/>
+                <a16:creationId xmlns:a16="http://schemas.microsoft.com/office/drawing/2014/main" id="{D6DD3E92-7CC1-48F7-8EB4-63F0771253B2}"/>
               </a:ext>
             </a:extLst>
           </p:cNvPr>
@@ -19056,7 +19056,7 @@
           <p:cNvPr id="9" name="f138">
             <a:extLst xmlns:a="http://schemas.openxmlformats.org/drawingml/2006/main">
               <a:ext uri="{FF2B5EF4-FFF2-40B4-BE49-F238E27FC236}">
-                <a16:creationId xmlns:a16="http://schemas.microsoft.com/office/drawing/2014/main" id="{CAC0245E-D0BA-4A77-92E8-829E218D8F0C}"/>
+                <a16:creationId xmlns:a16="http://schemas.microsoft.com/office/drawing/2014/main" id="{09C16576-BEF8-468E-90C6-6A1D40FF337A}"/>
               </a:ext>
             </a:extLst>
           </p:cNvPr>
@@ -19215,7 +19215,7 @@
           <p:cNvPr id="10" name="f139">
             <a:extLst xmlns:a="http://schemas.openxmlformats.org/drawingml/2006/main">
               <a:ext uri="{FF2B5EF4-FFF2-40B4-BE49-F238E27FC236}">
-                <a16:creationId xmlns:a16="http://schemas.microsoft.com/office/drawing/2014/main" id="{79A590FB-C80F-4005-B159-91E1D65976CD}"/>
+                <a16:creationId xmlns:a16="http://schemas.microsoft.com/office/drawing/2014/main" id="{83180A38-5E26-474E-9109-C3C4FAB3F3DC}"/>
               </a:ext>
             </a:extLst>
           </p:cNvPr>
@@ -19374,7 +19374,7 @@
           <p:cNvPr id="11" name="f140">
             <a:extLst xmlns:a="http://schemas.openxmlformats.org/drawingml/2006/main">
               <a:ext uri="{FF2B5EF4-FFF2-40B4-BE49-F238E27FC236}">
-                <a16:creationId xmlns:a16="http://schemas.microsoft.com/office/drawing/2014/main" id="{FE02C749-3470-4E87-B5DA-AAF190483A7C}"/>
+                <a16:creationId xmlns:a16="http://schemas.microsoft.com/office/drawing/2014/main" id="{B8D92E61-4F87-4443-A7F3-78FBBBCAD62C}"/>
               </a:ext>
             </a:extLst>
           </p:cNvPr>
@@ -19533,7 +19533,7 @@
           <p:cNvPr id="12" name="f141">
             <a:extLst xmlns:a="http://schemas.openxmlformats.org/drawingml/2006/main">
               <a:ext uri="{FF2B5EF4-FFF2-40B4-BE49-F238E27FC236}">
-                <a16:creationId xmlns:a16="http://schemas.microsoft.com/office/drawing/2014/main" id="{403708EC-3106-47B0-A556-C413DA3E7C3D}"/>
+                <a16:creationId xmlns:a16="http://schemas.microsoft.com/office/drawing/2014/main" id="{5B4F2F00-5964-4DCA-9A66-CCB3735406BB}"/>
               </a:ext>
             </a:extLst>
           </p:cNvPr>
@@ -19690,7 +19690,7 @@
     </p:spTree>
     <p:extLst>
       <p:ext uri="{BB962C8B-B14F-4D97-AF65-F5344CB8AC3E}">
-        <p14:creationId xmlns:p14="http://schemas.microsoft.com/office/powerpoint/2010/main" val="1493251670"/>
+        <p14:creationId xmlns:p14="http://schemas.microsoft.com/office/powerpoint/2010/main" val="1615713505"/>
       </p:ext>
     </p:extLst>
   </p:cSld>
@@ -19721,7 +19721,7 @@
           <p:cNvPr id="49" name="f142">
             <a:extLst xmlns:a="http://schemas.openxmlformats.org/drawingml/2006/main">
               <a:ext uri="{FF2B5EF4-FFF2-40B4-BE49-F238E27FC236}">
-                <a16:creationId xmlns:a16="http://schemas.microsoft.com/office/drawing/2014/main" id="{60121B99-A88B-4D19-8406-0857731F4A50}"/>
+                <a16:creationId xmlns:a16="http://schemas.microsoft.com/office/drawing/2014/main" id="{A7843F50-B1DF-427B-9879-F6C88943F79C}"/>
               </a:ext>
             </a:extLst>
           </p:cNvPr>
@@ -19880,7 +19880,7 @@
           <p:cNvPr id="2" name="f143">
             <a:extLst xmlns:a="http://schemas.openxmlformats.org/drawingml/2006/main">
               <a:ext uri="{FF2B5EF4-FFF2-40B4-BE49-F238E27FC236}">
-                <a16:creationId xmlns:a16="http://schemas.microsoft.com/office/drawing/2014/main" id="{217195AB-E189-4BD9-9DD0-E3CB172E7B8E}"/>
+                <a16:creationId xmlns:a16="http://schemas.microsoft.com/office/drawing/2014/main" id="{9012041B-1DC9-43BB-AA60-B3DFCF986FEA}"/>
               </a:ext>
             </a:extLst>
           </p:cNvPr>
@@ -20039,7 +20039,7 @@
           <p:cNvPr id="3" name="f144">
             <a:extLst xmlns:a="http://schemas.openxmlformats.org/drawingml/2006/main">
               <a:ext uri="{FF2B5EF4-FFF2-40B4-BE49-F238E27FC236}">
-                <a16:creationId xmlns:a16="http://schemas.microsoft.com/office/drawing/2014/main" id="{A50EB6C3-405D-4465-B6C0-0F2D7FE5124C}"/>
+                <a16:creationId xmlns:a16="http://schemas.microsoft.com/office/drawing/2014/main" id="{C99CE9FE-9A76-469C-9DCB-8E89B54FF45F}"/>
               </a:ext>
             </a:extLst>
           </p:cNvPr>
@@ -20198,7 +20198,7 @@
           <p:cNvPr id="4" name="f145">
             <a:extLst xmlns:a="http://schemas.openxmlformats.org/drawingml/2006/main">
               <a:ext uri="{FF2B5EF4-FFF2-40B4-BE49-F238E27FC236}">
-                <a16:creationId xmlns:a16="http://schemas.microsoft.com/office/drawing/2014/main" id="{EE2ED967-E571-41BA-B636-AD7510DA500E}"/>
+                <a16:creationId xmlns:a16="http://schemas.microsoft.com/office/drawing/2014/main" id="{007DAF5B-C35B-41CE-991A-B17575155763}"/>
               </a:ext>
             </a:extLst>
           </p:cNvPr>
@@ -20357,7 +20357,7 @@
           <p:cNvPr id="5" name="f146">
             <a:extLst xmlns:a="http://schemas.openxmlformats.org/drawingml/2006/main">
               <a:ext uri="{FF2B5EF4-FFF2-40B4-BE49-F238E27FC236}">
-                <a16:creationId xmlns:a16="http://schemas.microsoft.com/office/drawing/2014/main" id="{850ECB51-B1BF-46AE-890F-8306C185E5B9}"/>
+                <a16:creationId xmlns:a16="http://schemas.microsoft.com/office/drawing/2014/main" id="{A80AB85E-A249-4D5B-84F1-71FC0A43BA9B}"/>
               </a:ext>
             </a:extLst>
           </p:cNvPr>
@@ -20368,7 +20368,201 @@
         </p:nvSpPr>
         <p:spPr>
           <a:xfrm xmlns:a="http://schemas.openxmlformats.org/drawingml/2006/main">
-            <a:off x="3048000" y="3048000"/>
+            <a:off x="571500" y="3048000"/>
+            <a:ext cx="1428750" cy="590550"/>
+          </a:xfrm>
+          <a:prstGeom xmlns:a="http://schemas.openxmlformats.org/drawingml/2006/main" prst="roundRect">
+            <a:avLst>
+              <a:gd name="adj" fmla="val 19355"/>
+            </a:avLst>
+          </a:prstGeom>
+          <a:solidFill xmlns:a="http://schemas.openxmlformats.org/drawingml/2006/main">
+            <a:srgbClr val="F0F4FF"/>
+          </a:solidFill>
+          <a:ln xmlns:a="http://schemas.openxmlformats.org/drawingml/2006/main" w="17145">
+            <a:solidFill>
+              <a:srgbClr val="D9E3EF"/>
+            </a:solidFill>
+            <a:prstDash val="solid"/>
+          </a:ln>
+        </p:spPr>
+      </p:sp>
+      <p:sp>
+        <p:nvSpPr>
+          <p:cNvPr id="6" name="f147">
+            <a:extLst xmlns:a="http://schemas.openxmlformats.org/drawingml/2006/main">
+              <a:ext uri="{FF2B5EF4-FFF2-40B4-BE49-F238E27FC236}">
+                <a16:creationId xmlns:a16="http://schemas.microsoft.com/office/drawing/2014/main" id="{CA3704B9-BA61-49BC-A89E-1922C4271C65}"/>
+              </a:ext>
+            </a:extLst>
+          </p:cNvPr>
+          <p:cNvSpPr>
+            <a:spLocks xmlns:a="http://schemas.openxmlformats.org/drawingml/2006/main" noGrp="1"/>
+          </p:cNvSpPr>
+          <p:nvPr/>
+        </p:nvSpPr>
+        <p:spPr>
+          <a:xfrm xmlns:a="http://schemas.openxmlformats.org/drawingml/2006/main">
+            <a:off x="666750" y="3200400"/>
+            <a:ext cx="1238250" cy="361950"/>
+          </a:xfrm>
+          <a:prstGeom xmlns:a="http://schemas.openxmlformats.org/drawingml/2006/main" prst="rect">
+            <a:avLst/>
+          </a:prstGeom>
+          <a:noFill xmlns:a="http://schemas.openxmlformats.org/drawingml/2006/main"/>
+          <a:ln xmlns:a="http://schemas.openxmlformats.org/drawingml/2006/main" w="0">
+            <a:noFill/>
+            <a:prstDash val="solid"/>
+          </a:ln>
+        </p:spPr>
+        <p:txBody>
+          <a:bodyPr xmlns:a="http://schemas.openxmlformats.org/drawingml/2006/main" wrap="none" lIns="0" tIns="0" rIns="0" bIns="0" anchor="t">
+            <a:noAutofit/>
+          </a:bodyPr>
+          <a:lstStyle xmlns:a="http://schemas.openxmlformats.org/drawingml/2006/main">
+            <a:defPPr algn="ctr">
+              <a:defRPr sz="2250" b="1">
+                <a:solidFill>
+                  <a:srgbClr val="4264D0"/>
+                </a:solidFill>
+                <a:latin typeface="Nimbus Sans"/>
+                <a:ea typeface="Nimbus Sans"/>
+                <a:cs typeface="Nimbus Sans"/>
+              </a:defRPr>
+            </a:defPPr>
+            <a:lvl1pPr algn="ctr">
+              <a:defRPr sz="2250" b="1">
+                <a:solidFill>
+                  <a:srgbClr val="4264D0"/>
+                </a:solidFill>
+                <a:latin typeface="Nimbus Sans"/>
+                <a:ea typeface="Nimbus Sans"/>
+                <a:cs typeface="Nimbus Sans"/>
+              </a:defRPr>
+            </a:lvl1pPr>
+            <a:lvl2pPr algn="ctr">
+              <a:defRPr sz="2250" b="1">
+                <a:solidFill>
+                  <a:srgbClr val="4264D0"/>
+                </a:solidFill>
+                <a:latin typeface="Nimbus Sans"/>
+                <a:ea typeface="Nimbus Sans"/>
+                <a:cs typeface="Nimbus Sans"/>
+              </a:defRPr>
+            </a:lvl2pPr>
+            <a:lvl3pPr algn="ctr">
+              <a:defRPr sz="2250" b="1">
+                <a:solidFill>
+                  <a:srgbClr val="4264D0"/>
+                </a:solidFill>
+                <a:latin typeface="Nimbus Sans"/>
+                <a:ea typeface="Nimbus Sans"/>
+                <a:cs typeface="Nimbus Sans"/>
+              </a:defRPr>
+            </a:lvl3pPr>
+            <a:lvl4pPr algn="ctr">
+              <a:defRPr sz="2250" b="1">
+                <a:solidFill>
+                  <a:srgbClr val="4264D0"/>
+                </a:solidFill>
+                <a:latin typeface="Nimbus Sans"/>
+                <a:ea typeface="Nimbus Sans"/>
+                <a:cs typeface="Nimbus Sans"/>
+              </a:defRPr>
+            </a:lvl4pPr>
+            <a:lvl5pPr algn="ctr">
+              <a:defRPr sz="2250" b="1">
+                <a:solidFill>
+                  <a:srgbClr val="4264D0"/>
+                </a:solidFill>
+                <a:latin typeface="Nimbus Sans"/>
+                <a:ea typeface="Nimbus Sans"/>
+                <a:cs typeface="Nimbus Sans"/>
+              </a:defRPr>
+            </a:lvl5pPr>
+            <a:lvl6pPr algn="ctr">
+              <a:defRPr sz="2250" b="1">
+                <a:solidFill>
+                  <a:srgbClr val="4264D0"/>
+                </a:solidFill>
+                <a:latin typeface="Nimbus Sans"/>
+                <a:ea typeface="Nimbus Sans"/>
+                <a:cs typeface="Nimbus Sans"/>
+              </a:defRPr>
+            </a:lvl6pPr>
+            <a:lvl7pPr algn="ctr">
+              <a:defRPr sz="2250" b="1">
+                <a:solidFill>
+                  <a:srgbClr val="4264D0"/>
+                </a:solidFill>
+                <a:latin typeface="Nimbus Sans"/>
+                <a:ea typeface="Nimbus Sans"/>
+                <a:cs typeface="Nimbus Sans"/>
+              </a:defRPr>
+            </a:lvl7pPr>
+            <a:lvl8pPr algn="ctr">
+              <a:defRPr sz="2250" b="1">
+                <a:solidFill>
+                  <a:srgbClr val="4264D0"/>
+                </a:solidFill>
+                <a:latin typeface="Nimbus Sans"/>
+                <a:ea typeface="Nimbus Sans"/>
+                <a:cs typeface="Nimbus Sans"/>
+              </a:defRPr>
+            </a:lvl8pPr>
+            <a:lvl9pPr algn="ctr">
+              <a:defRPr sz="2250" b="1">
+                <a:solidFill>
+                  <a:srgbClr val="4264D0"/>
+                </a:solidFill>
+                <a:latin typeface="Nimbus Sans"/>
+                <a:ea typeface="Nimbus Sans"/>
+                <a:cs typeface="Nimbus Sans"/>
+              </a:defRPr>
+            </a:lvl9pPr>
+          </a:lstStyle>
+          <a:p xmlns:a="http://schemas.openxmlformats.org/drawingml/2006/main">
+            <a:pPr algn="ctr">
+              <a:defRPr sz="2250" b="1">
+                <a:solidFill>
+                  <a:srgbClr val="4264D0"/>
+                </a:solidFill>
+                <a:latin typeface="Nimbus Sans"/>
+                <a:ea typeface="Nimbus Sans"/>
+                <a:cs typeface="Nimbus Sans"/>
+              </a:defRPr>
+            </a:pPr>
+            <a:r>
+              <a:rPr sz="2250" b="1">
+                <a:solidFill>
+                  <a:srgbClr val="4264D0"/>
+                </a:solidFill>
+                <a:latin typeface="Nimbus Sans"/>
+                <a:ea typeface="Nimbus Sans"/>
+                <a:cs typeface="Nimbus Sans"/>
+              </a:rPr>
+              <a:t>DSL</a:t>
+            </a:r>
+          </a:p>
+        </p:txBody>
+      </p:sp>
+      <p:sp>
+        <p:nvSpPr>
+          <p:cNvPr id="7" name="f148">
+            <a:extLst xmlns:a="http://schemas.openxmlformats.org/drawingml/2006/main">
+              <a:ext uri="{FF2B5EF4-FFF2-40B4-BE49-F238E27FC236}">
+                <a16:creationId xmlns:a16="http://schemas.microsoft.com/office/drawing/2014/main" id="{2ACE68C0-8C93-4ACF-9B9F-88E405DF6634}"/>
+              </a:ext>
+            </a:extLst>
+          </p:cNvPr>
+          <p:cNvSpPr>
+            <a:spLocks xmlns:a="http://schemas.openxmlformats.org/drawingml/2006/main" noGrp="1"/>
+          </p:cNvSpPr>
+          <p:nvPr/>
+        </p:nvSpPr>
+        <p:spPr>
+          <a:xfrm xmlns:a="http://schemas.openxmlformats.org/drawingml/2006/main">
+            <a:off x="2952750" y="3048000"/>
             <a:ext cx="2095500" cy="590550"/>
           </a:xfrm>
           <a:prstGeom xmlns:a="http://schemas.openxmlformats.org/drawingml/2006/main" prst="roundRect">
@@ -20389,10 +20583,10 @@
       </p:sp>
       <p:sp>
         <p:nvSpPr>
-          <p:cNvPr id="6" name="f147">
+          <p:cNvPr id="8" name="f149">
             <a:extLst xmlns:a="http://schemas.openxmlformats.org/drawingml/2006/main">
               <a:ext uri="{FF2B5EF4-FFF2-40B4-BE49-F238E27FC236}">
-                <a16:creationId xmlns:a16="http://schemas.microsoft.com/office/drawing/2014/main" id="{730BA463-A684-4437-AE06-10C5387E18A1}"/>
+                <a16:creationId xmlns:a16="http://schemas.microsoft.com/office/drawing/2014/main" id="{7870EA06-80E3-4731-89CE-C46626DB0A96}"/>
               </a:ext>
             </a:extLst>
           </p:cNvPr>
@@ -20403,7 +20597,7 @@
         </p:nvSpPr>
         <p:spPr>
           <a:xfrm xmlns:a="http://schemas.openxmlformats.org/drawingml/2006/main">
-            <a:off x="3143250" y="3238500"/>
+            <a:off x="3048000" y="3238500"/>
             <a:ext cx="1905000" cy="285750"/>
           </a:xfrm>
           <a:prstGeom xmlns:a="http://schemas.openxmlformats.org/drawingml/2006/main" prst="rect">
@@ -20548,10 +20742,10 @@
       </p:sp>
       <p:sp>
         <p:nvSpPr>
-          <p:cNvPr id="7" name="f148">
+          <p:cNvPr id="9" name="f150">
             <a:extLst xmlns:a="http://schemas.openxmlformats.org/drawingml/2006/main">
               <a:ext uri="{FF2B5EF4-FFF2-40B4-BE49-F238E27FC236}">
-                <a16:creationId xmlns:a16="http://schemas.microsoft.com/office/drawing/2014/main" id="{C2F9419A-22A1-4CD7-835C-120CC1E998D7}"/>
+                <a16:creationId xmlns:a16="http://schemas.microsoft.com/office/drawing/2014/main" id="{B1388504-07EA-486F-8C75-2BDAB16FC484}"/>
               </a:ext>
             </a:extLst>
           </p:cNvPr>
@@ -20562,12 +20756,12 @@
         </p:nvSpPr>
         <p:spPr>
           <a:xfrm xmlns:a="http://schemas.openxmlformats.org/drawingml/2006/main">
-            <a:off x="3143250" y="4524375"/>
-            <a:ext cx="1905000" cy="952500"/>
+            <a:off x="381000" y="4524375"/>
+            <a:ext cx="4667250" cy="819150"/>
           </a:xfrm>
           <a:prstGeom xmlns:a="http://schemas.openxmlformats.org/drawingml/2006/main" prst="roundRect">
             <a:avLst>
-              <a:gd name="adj" fmla="val 12000"/>
+              <a:gd name="adj" fmla="val 13953"/>
             </a:avLst>
           </a:prstGeom>
           <a:solidFill xmlns:a="http://schemas.openxmlformats.org/drawingml/2006/main">
@@ -20583,10 +20777,10 @@
       </p:sp>
       <p:sp>
         <p:nvSpPr>
-          <p:cNvPr id="8" name="f149">
+          <p:cNvPr id="10" name="f151">
             <a:extLst xmlns:a="http://schemas.openxmlformats.org/drawingml/2006/main">
               <a:ext uri="{FF2B5EF4-FFF2-40B4-BE49-F238E27FC236}">
-                <a16:creationId xmlns:a16="http://schemas.microsoft.com/office/drawing/2014/main" id="{35972998-BBE8-42A1-9D80-102949C689F7}"/>
+                <a16:creationId xmlns:a16="http://schemas.microsoft.com/office/drawing/2014/main" id="{B2C247FA-9A2E-4F95-A246-F8C1140F316D}"/>
               </a:ext>
             </a:extLst>
           </p:cNvPr>
@@ -20597,225 +20791,8 @@
         </p:nvSpPr>
         <p:spPr>
           <a:xfrm xmlns:a="http://schemas.openxmlformats.org/drawingml/2006/main">
-            <a:off x="3238500" y="4707446"/>
-            <a:ext cx="1714500" cy="662559"/>
-          </a:xfrm>
-          <a:prstGeom xmlns:a="http://schemas.openxmlformats.org/drawingml/2006/main" prst="rect">
-            <a:avLst/>
-          </a:prstGeom>
-          <a:noFill xmlns:a="http://schemas.openxmlformats.org/drawingml/2006/main"/>
-          <a:ln xmlns:a="http://schemas.openxmlformats.org/drawingml/2006/main" w="0">
-            <a:noFill/>
-            <a:prstDash val="solid"/>
-          </a:ln>
-        </p:spPr>
-        <p:txBody>
-          <a:bodyPr xmlns:a="http://schemas.openxmlformats.org/drawingml/2006/main" wrap="none" lIns="0" tIns="0" rIns="0" bIns="0" anchor="t">
-            <a:noAutofit/>
-          </a:bodyPr>
-          <a:lstStyle xmlns:a="http://schemas.openxmlformats.org/drawingml/2006/main">
-            <a:defPPr algn="ctr">
-              <a:defRPr sz="2025" b="1">
-                <a:solidFill>
-                  <a:srgbClr val="278766"/>
-                </a:solidFill>
-                <a:latin typeface="Nimbus Sans"/>
-                <a:ea typeface="Nimbus Sans"/>
-                <a:cs typeface="Nimbus Sans"/>
-              </a:defRPr>
-            </a:defPPr>
-            <a:lvl1pPr algn="ctr">
-              <a:defRPr sz="2025" b="1">
-                <a:solidFill>
-                  <a:srgbClr val="278766"/>
-                </a:solidFill>
-                <a:latin typeface="Nimbus Sans"/>
-                <a:ea typeface="Nimbus Sans"/>
-                <a:cs typeface="Nimbus Sans"/>
-              </a:defRPr>
-            </a:lvl1pPr>
-            <a:lvl2pPr algn="ctr">
-              <a:defRPr sz="2025" b="1">
-                <a:solidFill>
-                  <a:srgbClr val="278766"/>
-                </a:solidFill>
-                <a:latin typeface="Nimbus Sans"/>
-                <a:ea typeface="Nimbus Sans"/>
-                <a:cs typeface="Nimbus Sans"/>
-              </a:defRPr>
-            </a:lvl2pPr>
-            <a:lvl3pPr algn="ctr">
-              <a:defRPr sz="2025" b="1">
-                <a:solidFill>
-                  <a:srgbClr val="278766"/>
-                </a:solidFill>
-                <a:latin typeface="Nimbus Sans"/>
-                <a:ea typeface="Nimbus Sans"/>
-                <a:cs typeface="Nimbus Sans"/>
-              </a:defRPr>
-            </a:lvl3pPr>
-            <a:lvl4pPr algn="ctr">
-              <a:defRPr sz="2025" b="1">
-                <a:solidFill>
-                  <a:srgbClr val="278766"/>
-                </a:solidFill>
-                <a:latin typeface="Nimbus Sans"/>
-                <a:ea typeface="Nimbus Sans"/>
-                <a:cs typeface="Nimbus Sans"/>
-              </a:defRPr>
-            </a:lvl4pPr>
-            <a:lvl5pPr algn="ctr">
-              <a:defRPr sz="2025" b="1">
-                <a:solidFill>
-                  <a:srgbClr val="278766"/>
-                </a:solidFill>
-                <a:latin typeface="Nimbus Sans"/>
-                <a:ea typeface="Nimbus Sans"/>
-                <a:cs typeface="Nimbus Sans"/>
-              </a:defRPr>
-            </a:lvl5pPr>
-            <a:lvl6pPr algn="ctr">
-              <a:defRPr sz="2025" b="1">
-                <a:solidFill>
-                  <a:srgbClr val="278766"/>
-                </a:solidFill>
-                <a:latin typeface="Nimbus Sans"/>
-                <a:ea typeface="Nimbus Sans"/>
-                <a:cs typeface="Nimbus Sans"/>
-              </a:defRPr>
-            </a:lvl6pPr>
-            <a:lvl7pPr algn="ctr">
-              <a:defRPr sz="2025" b="1">
-                <a:solidFill>
-                  <a:srgbClr val="278766"/>
-                </a:solidFill>
-                <a:latin typeface="Nimbus Sans"/>
-                <a:ea typeface="Nimbus Sans"/>
-                <a:cs typeface="Nimbus Sans"/>
-              </a:defRPr>
-            </a:lvl7pPr>
-            <a:lvl8pPr algn="ctr">
-              <a:defRPr sz="2025" b="1">
-                <a:solidFill>
-                  <a:srgbClr val="278766"/>
-                </a:solidFill>
-                <a:latin typeface="Nimbus Sans"/>
-                <a:ea typeface="Nimbus Sans"/>
-                <a:cs typeface="Nimbus Sans"/>
-              </a:defRPr>
-            </a:lvl8pPr>
-            <a:lvl9pPr algn="ctr">
-              <a:defRPr sz="2025" b="1">
-                <a:solidFill>
-                  <a:srgbClr val="278766"/>
-                </a:solidFill>
-                <a:latin typeface="Nimbus Sans"/>
-                <a:ea typeface="Nimbus Sans"/>
-                <a:cs typeface="Nimbus Sans"/>
-              </a:defRPr>
-            </a:lvl9pPr>
-          </a:lstStyle>
-          <a:p xmlns:a="http://schemas.openxmlformats.org/drawingml/2006/main">
-            <a:pPr algn="ctr">
-              <a:defRPr sz="2025" b="1">
-                <a:solidFill>
-                  <a:srgbClr val="278766"/>
-                </a:solidFill>
-                <a:latin typeface="Nimbus Sans"/>
-                <a:ea typeface="Nimbus Sans"/>
-                <a:cs typeface="Nimbus Sans"/>
-              </a:defRPr>
-            </a:pPr>
-            <a:r>
-              <a:rPr sz="2025" b="1">
-                <a:solidFill>
-                  <a:srgbClr val="278766"/>
-                </a:solidFill>
-                <a:latin typeface="Nimbus Sans"/>
-                <a:ea typeface="Nimbus Sans"/>
-                <a:cs typeface="Nimbus Sans"/>
-              </a:rPr>
-              <a:t>Pipeline di</a:t>
-            </a:r>
-          </a:p>
-          <a:p xmlns:a="http://schemas.openxmlformats.org/drawingml/2006/main">
-            <a:pPr algn="ctr">
-              <a:defRPr sz="2025" b="1">
-                <a:solidFill>
-                  <a:srgbClr val="278766"/>
-                </a:solidFill>
-                <a:latin typeface="Nimbus Sans"/>
-                <a:ea typeface="Nimbus Sans"/>
-                <a:cs typeface="Nimbus Sans"/>
-              </a:defRPr>
-            </a:pPr>
-            <a:r>
-              <a:rPr sz="2025" b="1">
-                <a:solidFill>
-                  <a:srgbClr val="278766"/>
-                </a:solidFill>
-                <a:latin typeface="Nimbus Sans"/>
-                <a:ea typeface="Nimbus Sans"/>
-                <a:cs typeface="Nimbus Sans"/>
-              </a:rPr>
-              <a:t>verifica</a:t>
-            </a:r>
-          </a:p>
-        </p:txBody>
-      </p:sp>
-      <p:sp>
-        <p:nvSpPr>
-          <p:cNvPr id="9" name="f150">
-            <a:extLst xmlns:a="http://schemas.openxmlformats.org/drawingml/2006/main">
-              <a:ext uri="{FF2B5EF4-FFF2-40B4-BE49-F238E27FC236}">
-                <a16:creationId xmlns:a16="http://schemas.microsoft.com/office/drawing/2014/main" id="{968A44FA-4B2E-4451-8233-211C378B004B}"/>
-              </a:ext>
-            </a:extLst>
-          </p:cNvPr>
-          <p:cNvSpPr>
-            <a:spLocks xmlns:a="http://schemas.openxmlformats.org/drawingml/2006/main" noGrp="1"/>
-          </p:cNvSpPr>
-          <p:nvPr/>
-        </p:nvSpPr>
-        <p:spPr>
-          <a:xfrm xmlns:a="http://schemas.openxmlformats.org/drawingml/2006/main">
-            <a:off x="762000" y="4714875"/>
-            <a:ext cx="1428750" cy="571500"/>
-          </a:xfrm>
-          <a:prstGeom xmlns:a="http://schemas.openxmlformats.org/drawingml/2006/main" prst="roundRect">
-            <a:avLst>
-              <a:gd name="adj" fmla="val 20000"/>
-            </a:avLst>
-          </a:prstGeom>
-          <a:solidFill xmlns:a="http://schemas.openxmlformats.org/drawingml/2006/main">
-            <a:srgbClr val="F0F4FF"/>
-          </a:solidFill>
-          <a:ln xmlns:a="http://schemas.openxmlformats.org/drawingml/2006/main" w="17145">
-            <a:solidFill>
-              <a:srgbClr val="D9E3EF"/>
-            </a:solidFill>
-            <a:prstDash val="solid"/>
-          </a:ln>
-        </p:spPr>
-      </p:sp>
-      <p:sp>
-        <p:nvSpPr>
-          <p:cNvPr id="10" name="f151">
-            <a:extLst xmlns:a="http://schemas.openxmlformats.org/drawingml/2006/main">
-              <a:ext uri="{FF2B5EF4-FFF2-40B4-BE49-F238E27FC236}">
-                <a16:creationId xmlns:a16="http://schemas.microsoft.com/office/drawing/2014/main" id="{61A9912F-C7C9-49EB-A268-1940E18AFF95}"/>
-              </a:ext>
-            </a:extLst>
-          </p:cNvPr>
-          <p:cNvSpPr>
-            <a:spLocks xmlns:a="http://schemas.openxmlformats.org/drawingml/2006/main" noGrp="1"/>
-          </p:cNvSpPr>
-          <p:nvPr/>
-        </p:nvSpPr>
-        <p:spPr>
-          <a:xfrm xmlns:a="http://schemas.openxmlformats.org/drawingml/2006/main">
-            <a:off x="857250" y="4857750"/>
-            <a:ext cx="1238250" cy="361950"/>
+            <a:off x="476250" y="4791075"/>
+            <a:ext cx="4476750" cy="361950"/>
           </a:xfrm>
           <a:prstGeom xmlns:a="http://schemas.openxmlformats.org/drawingml/2006/main" prst="rect">
             <a:avLst/>
@@ -20834,7 +20811,7 @@
             <a:defPPr algn="ctr">
               <a:defRPr sz="2250" b="1">
                 <a:solidFill>
-                  <a:srgbClr val="4264D0"/>
+                  <a:srgbClr val="278766"/>
                 </a:solidFill>
                 <a:latin typeface="Nimbus Sans"/>
                 <a:ea typeface="Nimbus Sans"/>
@@ -20844,7 +20821,7 @@
             <a:lvl1pPr algn="ctr">
               <a:defRPr sz="2250" b="1">
                 <a:solidFill>
-                  <a:srgbClr val="4264D0"/>
+                  <a:srgbClr val="278766"/>
                 </a:solidFill>
                 <a:latin typeface="Nimbus Sans"/>
                 <a:ea typeface="Nimbus Sans"/>
@@ -20854,7 +20831,7 @@
             <a:lvl2pPr algn="ctr">
               <a:defRPr sz="2250" b="1">
                 <a:solidFill>
-                  <a:srgbClr val="4264D0"/>
+                  <a:srgbClr val="278766"/>
                 </a:solidFill>
                 <a:latin typeface="Nimbus Sans"/>
                 <a:ea typeface="Nimbus Sans"/>
@@ -20864,7 +20841,7 @@
             <a:lvl3pPr algn="ctr">
               <a:defRPr sz="2250" b="1">
                 <a:solidFill>
-                  <a:srgbClr val="4264D0"/>
+                  <a:srgbClr val="278766"/>
                 </a:solidFill>
                 <a:latin typeface="Nimbus Sans"/>
                 <a:ea typeface="Nimbus Sans"/>
@@ -20874,7 +20851,7 @@
             <a:lvl4pPr algn="ctr">
               <a:defRPr sz="2250" b="1">
                 <a:solidFill>
-                  <a:srgbClr val="4264D0"/>
+                  <a:srgbClr val="278766"/>
                 </a:solidFill>
                 <a:latin typeface="Nimbus Sans"/>
                 <a:ea typeface="Nimbus Sans"/>
@@ -20884,7 +20861,7 @@
             <a:lvl5pPr algn="ctr">
               <a:defRPr sz="2250" b="1">
                 <a:solidFill>
-                  <a:srgbClr val="4264D0"/>
+                  <a:srgbClr val="278766"/>
                 </a:solidFill>
                 <a:latin typeface="Nimbus Sans"/>
                 <a:ea typeface="Nimbus Sans"/>
@@ -20894,7 +20871,7 @@
             <a:lvl6pPr algn="ctr">
               <a:defRPr sz="2250" b="1">
                 <a:solidFill>
-                  <a:srgbClr val="4264D0"/>
+                  <a:srgbClr val="278766"/>
                 </a:solidFill>
                 <a:latin typeface="Nimbus Sans"/>
                 <a:ea typeface="Nimbus Sans"/>
@@ -20904,7 +20881,7 @@
             <a:lvl7pPr algn="ctr">
               <a:defRPr sz="2250" b="1">
                 <a:solidFill>
-                  <a:srgbClr val="4264D0"/>
+                  <a:srgbClr val="278766"/>
                 </a:solidFill>
                 <a:latin typeface="Nimbus Sans"/>
                 <a:ea typeface="Nimbus Sans"/>
@@ -20914,7 +20891,7 @@
             <a:lvl8pPr algn="ctr">
               <a:defRPr sz="2250" b="1">
                 <a:solidFill>
-                  <a:srgbClr val="4264D0"/>
+                  <a:srgbClr val="278766"/>
                 </a:solidFill>
                 <a:latin typeface="Nimbus Sans"/>
                 <a:ea typeface="Nimbus Sans"/>
@@ -20924,7 +20901,7 @@
             <a:lvl9pPr algn="ctr">
               <a:defRPr sz="2250" b="1">
                 <a:solidFill>
-                  <a:srgbClr val="4264D0"/>
+                  <a:srgbClr val="278766"/>
                 </a:solidFill>
                 <a:latin typeface="Nimbus Sans"/>
                 <a:ea typeface="Nimbus Sans"/>
@@ -20936,7 +20913,7 @@
             <a:pPr algn="ctr">
               <a:defRPr sz="2250" b="1">
                 <a:solidFill>
-                  <a:srgbClr val="4264D0"/>
+                  <a:srgbClr val="278766"/>
                 </a:solidFill>
                 <a:latin typeface="Nimbus Sans"/>
                 <a:ea typeface="Nimbus Sans"/>
@@ -20946,13 +20923,13 @@
             <a:r>
               <a:rPr sz="2250" b="1">
                 <a:solidFill>
-                  <a:srgbClr val="4264D0"/>
+                  <a:srgbClr val="278766"/>
                 </a:solidFill>
                 <a:latin typeface="Nimbus Sans"/>
                 <a:ea typeface="Nimbus Sans"/>
                 <a:cs typeface="Nimbus Sans"/>
               </a:rPr>
-              <a:t>DSL</a:t>
+              <a:t>Pipeline di verifica</a:t>
             </a:r>
           </a:p>
         </p:txBody>
@@ -20962,7 +20939,7 @@
           <p:cNvPr id="11" name="f152">
             <a:extLst xmlns:a="http://schemas.openxmlformats.org/drawingml/2006/main">
               <a:ext uri="{FF2B5EF4-FFF2-40B4-BE49-F238E27FC236}">
-                <a16:creationId xmlns:a16="http://schemas.microsoft.com/office/drawing/2014/main" id="{0BF11A5F-6603-4E81-AB94-998C06D2752B}"/>
+                <a16:creationId xmlns:a16="http://schemas.microsoft.com/office/drawing/2014/main" id="{3FD1E973-0055-4B1E-885D-4613877C3482}"/>
               </a:ext>
             </a:extLst>
           </p:cNvPr>
@@ -20973,8 +20950,8 @@
         </p:nvSpPr>
         <p:spPr>
           <a:xfrm xmlns:a="http://schemas.openxmlformats.org/drawingml/2006/main">
-            <a:off x="2047875" y="6524625"/>
-            <a:ext cx="2000250" cy="590550"/>
+            <a:off x="381000" y="6286500"/>
+            <a:ext cx="2095500" cy="590550"/>
           </a:xfrm>
           <a:prstGeom xmlns:a="http://schemas.openxmlformats.org/drawingml/2006/main" prst="roundRect">
             <a:avLst>
@@ -20997,7 +20974,7 @@
           <p:cNvPr id="12" name="f153">
             <a:extLst xmlns:a="http://schemas.openxmlformats.org/drawingml/2006/main">
               <a:ext uri="{FF2B5EF4-FFF2-40B4-BE49-F238E27FC236}">
-                <a16:creationId xmlns:a16="http://schemas.microsoft.com/office/drawing/2014/main" id="{C11206A3-ED06-4254-96A7-13628B53088C}"/>
+                <a16:creationId xmlns:a16="http://schemas.microsoft.com/office/drawing/2014/main" id="{84FBCC2A-2871-4DEF-8596-C9E16E214144}"/>
               </a:ext>
             </a:extLst>
           </p:cNvPr>
@@ -21008,8 +20985,8 @@
         </p:nvSpPr>
         <p:spPr>
           <a:xfrm xmlns:a="http://schemas.openxmlformats.org/drawingml/2006/main">
-            <a:off x="2143125" y="6705600"/>
-            <a:ext cx="1809750" cy="304800"/>
+            <a:off x="476250" y="6467475"/>
+            <a:ext cx="1905000" cy="304800"/>
           </a:xfrm>
           <a:prstGeom xmlns:a="http://schemas.openxmlformats.org/drawingml/2006/main" prst="rect">
             <a:avLst/>
@@ -21156,7 +21133,7 @@
           <p:cNvPr id="13" name="f154">
             <a:extLst xmlns:a="http://schemas.openxmlformats.org/drawingml/2006/main">
               <a:ext uri="{FF2B5EF4-FFF2-40B4-BE49-F238E27FC236}">
-                <a16:creationId xmlns:a16="http://schemas.microsoft.com/office/drawing/2014/main" id="{84A0466F-74FF-45A4-ABEE-8CCB97362435}"/>
+                <a16:creationId xmlns:a16="http://schemas.microsoft.com/office/drawing/2014/main" id="{9CD06E7E-435F-4E5A-9EDB-321DB6AF586F}"/>
               </a:ext>
             </a:extLst>
           </p:cNvPr>
@@ -21167,8 +21144,8 @@
         </p:nvSpPr>
         <p:spPr>
           <a:xfrm xmlns:a="http://schemas.openxmlformats.org/drawingml/2006/main">
-            <a:off x="4381500" y="6524625"/>
-            <a:ext cx="2000250" cy="590550"/>
+            <a:off x="2952750" y="6286500"/>
+            <a:ext cx="2095500" cy="590550"/>
           </a:xfrm>
           <a:prstGeom xmlns:a="http://schemas.openxmlformats.org/drawingml/2006/main" prst="roundRect">
             <a:avLst>
@@ -21191,7 +21168,7 @@
           <p:cNvPr id="14" name="f155">
             <a:extLst xmlns:a="http://schemas.openxmlformats.org/drawingml/2006/main">
               <a:ext uri="{FF2B5EF4-FFF2-40B4-BE49-F238E27FC236}">
-                <a16:creationId xmlns:a16="http://schemas.microsoft.com/office/drawing/2014/main" id="{12640F2A-2561-419E-99CB-60357E7809C4}"/>
+                <a16:creationId xmlns:a16="http://schemas.microsoft.com/office/drawing/2014/main" id="{C2A3300B-9998-49E2-8A83-685A5A0E52DE}"/>
               </a:ext>
             </a:extLst>
           </p:cNvPr>
@@ -21202,8 +21179,8 @@
         </p:nvSpPr>
         <p:spPr>
           <a:xfrm xmlns:a="http://schemas.openxmlformats.org/drawingml/2006/main">
-            <a:off x="4476750" y="6705600"/>
-            <a:ext cx="1809750" cy="304800"/>
+            <a:off x="3048000" y="6467475"/>
+            <a:ext cx="1905000" cy="304800"/>
           </a:xfrm>
           <a:prstGeom xmlns:a="http://schemas.openxmlformats.org/drawingml/2006/main" prst="rect">
             <a:avLst/>
@@ -21350,7 +21327,7 @@
           <p:cNvPr id="15" name="f156">
             <a:extLst xmlns:a="http://schemas.openxmlformats.org/drawingml/2006/main">
               <a:ext uri="{FF2B5EF4-FFF2-40B4-BE49-F238E27FC236}">
-                <a16:creationId xmlns:a16="http://schemas.microsoft.com/office/drawing/2014/main" id="{70139070-BEB8-472C-BB65-A383A8500825}"/>
+                <a16:creationId xmlns:a16="http://schemas.microsoft.com/office/drawing/2014/main" id="{8667917F-82F1-43D8-960B-6647E2E692BC}"/>
               </a:ext>
             </a:extLst>
           </p:cNvPr>
@@ -21361,8 +21338,8 @@
         </p:nvSpPr>
         <p:spPr>
           <a:xfrm xmlns:a="http://schemas.openxmlformats.org/drawingml/2006/main">
-            <a:off x="6572250" y="4619625"/>
-            <a:ext cx="1524000" cy="857250"/>
+            <a:off x="5953125" y="5143500"/>
+            <a:ext cx="1714500" cy="857250"/>
           </a:xfrm>
           <a:prstGeom xmlns:a="http://schemas.openxmlformats.org/drawingml/2006/main" prst="roundRect">
             <a:avLst>
@@ -21385,7 +21362,7 @@
           <p:cNvPr id="16" name="f157">
             <a:extLst xmlns:a="http://schemas.openxmlformats.org/drawingml/2006/main">
               <a:ext uri="{FF2B5EF4-FFF2-40B4-BE49-F238E27FC236}">
-                <a16:creationId xmlns:a16="http://schemas.microsoft.com/office/drawing/2014/main" id="{1D59284F-3797-470C-AE04-2E0CA811CE79}"/>
+                <a16:creationId xmlns:a16="http://schemas.microsoft.com/office/drawing/2014/main" id="{6F08C1D0-46EB-4081-9A6E-CB77761FEC02}"/>
               </a:ext>
             </a:extLst>
           </p:cNvPr>
@@ -21396,8 +21373,8 @@
         </p:nvSpPr>
         <p:spPr>
           <a:xfrm xmlns:a="http://schemas.openxmlformats.org/drawingml/2006/main">
-            <a:off x="6667500" y="4798505"/>
-            <a:ext cx="1333500" cy="575691"/>
+            <a:off x="6048375" y="5300663"/>
+            <a:ext cx="1524000" cy="619125"/>
           </a:xfrm>
           <a:prstGeom xmlns:a="http://schemas.openxmlformats.org/drawingml/2006/main" prst="rect">
             <a:avLst/>
@@ -21414,7 +21391,7 @@
           </a:bodyPr>
           <a:lstStyle xmlns:a="http://schemas.openxmlformats.org/drawingml/2006/main">
             <a:defPPr algn="ctr">
-              <a:defRPr sz="1725" b="1">
+              <a:defRPr sz="1875" b="1">
                 <a:solidFill>
                   <a:srgbClr val="9D7139"/>
                 </a:solidFill>
@@ -21424,7 +21401,7 @@
               </a:defRPr>
             </a:defPPr>
             <a:lvl1pPr algn="ctr">
-              <a:defRPr sz="1725" b="1">
+              <a:defRPr sz="1875" b="1">
                 <a:solidFill>
                   <a:srgbClr val="9D7139"/>
                 </a:solidFill>
@@ -21434,7 +21411,7 @@
               </a:defRPr>
             </a:lvl1pPr>
             <a:lvl2pPr algn="ctr">
-              <a:defRPr sz="1725" b="1">
+              <a:defRPr sz="1875" b="1">
                 <a:solidFill>
                   <a:srgbClr val="9D7139"/>
                 </a:solidFill>
@@ -21444,7 +21421,7 @@
               </a:defRPr>
             </a:lvl2pPr>
             <a:lvl3pPr algn="ctr">
-              <a:defRPr sz="1725" b="1">
+              <a:defRPr sz="1875" b="1">
                 <a:solidFill>
                   <a:srgbClr val="9D7139"/>
                 </a:solidFill>
@@ -21454,7 +21431,7 @@
               </a:defRPr>
             </a:lvl3pPr>
             <a:lvl4pPr algn="ctr">
-              <a:defRPr sz="1725" b="1">
+              <a:defRPr sz="1875" b="1">
                 <a:solidFill>
                   <a:srgbClr val="9D7139"/>
                 </a:solidFill>
@@ -21464,7 +21441,7 @@
               </a:defRPr>
             </a:lvl4pPr>
             <a:lvl5pPr algn="ctr">
-              <a:defRPr sz="1725" b="1">
+              <a:defRPr sz="1875" b="1">
                 <a:solidFill>
                   <a:srgbClr val="9D7139"/>
                 </a:solidFill>
@@ -21474,7 +21451,7 @@
               </a:defRPr>
             </a:lvl5pPr>
             <a:lvl6pPr algn="ctr">
-              <a:defRPr sz="1725" b="1">
+              <a:defRPr sz="1875" b="1">
                 <a:solidFill>
                   <a:srgbClr val="9D7139"/>
                 </a:solidFill>
@@ -21484,7 +21461,7 @@
               </a:defRPr>
             </a:lvl6pPr>
             <a:lvl7pPr algn="ctr">
-              <a:defRPr sz="1725" b="1">
+              <a:defRPr sz="1875" b="1">
                 <a:solidFill>
                   <a:srgbClr val="9D7139"/>
                 </a:solidFill>
@@ -21494,7 +21471,7 @@
               </a:defRPr>
             </a:lvl7pPr>
             <a:lvl8pPr algn="ctr">
-              <a:defRPr sz="1725" b="1">
+              <a:defRPr sz="1875" b="1">
                 <a:solidFill>
                   <a:srgbClr val="9D7139"/>
                 </a:solidFill>
@@ -21504,7 +21481,7 @@
               </a:defRPr>
             </a:lvl8pPr>
             <a:lvl9pPr algn="ctr">
-              <a:defRPr sz="1725" b="1">
+              <a:defRPr sz="1875" b="1">
                 <a:solidFill>
                   <a:srgbClr val="9D7139"/>
                 </a:solidFill>
@@ -21516,7 +21493,7 @@
           </a:lstStyle>
           <a:p xmlns:a="http://schemas.openxmlformats.org/drawingml/2006/main">
             <a:pPr algn="ctr">
-              <a:defRPr sz="1725" b="1">
+              <a:defRPr sz="1875" b="1">
                 <a:solidFill>
                   <a:srgbClr val="9D7139"/>
                 </a:solidFill>
@@ -21526,7 +21503,7 @@
               </a:defRPr>
             </a:pPr>
             <a:r>
-              <a:rPr sz="1725" b="1">
+              <a:rPr sz="1875" b="1">
                 <a:solidFill>
                   <a:srgbClr val="9D7139"/>
                 </a:solidFill>
@@ -21539,7 +21516,7 @@
           </a:p>
           <a:p xmlns:a="http://schemas.openxmlformats.org/drawingml/2006/main">
             <a:pPr algn="ctr">
-              <a:defRPr sz="1725" b="1">
+              <a:defRPr sz="1875" b="1">
                 <a:solidFill>
                   <a:srgbClr val="9D7139"/>
                 </a:solidFill>
@@ -21549,7 +21526,7 @@
               </a:defRPr>
             </a:pPr>
             <a:r>
-              <a:rPr sz="1725" b="1">
+              <a:rPr sz="1875" b="1">
                 <a:solidFill>
                   <a:srgbClr val="9D7139"/>
                 </a:solidFill>
@@ -21567,7 +21544,7 @@
           <p:cNvPr id="17" name="f158">
             <a:extLst xmlns:a="http://schemas.openxmlformats.org/drawingml/2006/main">
               <a:ext uri="{FF2B5EF4-FFF2-40B4-BE49-F238E27FC236}">
-                <a16:creationId xmlns:a16="http://schemas.microsoft.com/office/drawing/2014/main" id="{59C10BED-C272-4530-A25F-7B427293E8DD}"/>
+                <a16:creationId xmlns:a16="http://schemas.microsoft.com/office/drawing/2014/main" id="{9A28D102-7E14-4189-92FE-1BA647AFE566}"/>
               </a:ext>
             </a:extLst>
           </p:cNvPr>
@@ -21578,8 +21555,8 @@
         </p:nvSpPr>
         <p:spPr>
           <a:xfrm xmlns:a="http://schemas.openxmlformats.org/drawingml/2006/main">
-            <a:off x="6572250" y="3571875"/>
-            <a:ext cx="1524000" cy="590550"/>
+            <a:off x="5953125" y="3714750"/>
+            <a:ext cx="1714500" cy="590550"/>
           </a:xfrm>
           <a:prstGeom xmlns:a="http://schemas.openxmlformats.org/drawingml/2006/main" prst="roundRect">
             <a:avLst>
@@ -21602,7 +21579,7 @@
           <p:cNvPr id="18" name="f159">
             <a:extLst xmlns:a="http://schemas.openxmlformats.org/drawingml/2006/main">
               <a:ext uri="{FF2B5EF4-FFF2-40B4-BE49-F238E27FC236}">
-                <a16:creationId xmlns:a16="http://schemas.microsoft.com/office/drawing/2014/main" id="{FB902540-5C24-4EC3-BAB7-BF179AB14B97}"/>
+                <a16:creationId xmlns:a16="http://schemas.microsoft.com/office/drawing/2014/main" id="{1A712BE1-2D18-492A-B875-4CEDDC4FE8EE}"/>
               </a:ext>
             </a:extLst>
           </p:cNvPr>
@@ -21613,8 +21590,8 @@
         </p:nvSpPr>
         <p:spPr>
           <a:xfrm xmlns:a="http://schemas.openxmlformats.org/drawingml/2006/main">
-            <a:off x="6667500" y="3771900"/>
-            <a:ext cx="1333500" cy="266700"/>
+            <a:off x="6048375" y="3905250"/>
+            <a:ext cx="1524000" cy="285750"/>
           </a:xfrm>
           <a:prstGeom xmlns:a="http://schemas.openxmlformats.org/drawingml/2006/main" prst="rect">
             <a:avLst/>
@@ -21631,7 +21608,7 @@
           </a:bodyPr>
           <a:lstStyle xmlns:a="http://schemas.openxmlformats.org/drawingml/2006/main">
             <a:defPPr algn="ctr">
-              <a:defRPr sz="1500" b="1">
+              <a:defRPr sz="1650" b="1">
                 <a:solidFill>
                   <a:srgbClr val="182536"/>
                 </a:solidFill>
@@ -21641,7 +21618,7 @@
               </a:defRPr>
             </a:defPPr>
             <a:lvl1pPr algn="ctr">
-              <a:defRPr sz="1500" b="1">
+              <a:defRPr sz="1650" b="1">
                 <a:solidFill>
                   <a:srgbClr val="182536"/>
                 </a:solidFill>
@@ -21651,7 +21628,7 @@
               </a:defRPr>
             </a:lvl1pPr>
             <a:lvl2pPr algn="ctr">
-              <a:defRPr sz="1500" b="1">
+              <a:defRPr sz="1650" b="1">
                 <a:solidFill>
                   <a:srgbClr val="182536"/>
                 </a:solidFill>
@@ -21661,7 +21638,7 @@
               </a:defRPr>
             </a:lvl2pPr>
             <a:lvl3pPr algn="ctr">
-              <a:defRPr sz="1500" b="1">
+              <a:defRPr sz="1650" b="1">
                 <a:solidFill>
                   <a:srgbClr val="182536"/>
                 </a:solidFill>
@@ -21671,7 +21648,7 @@
               </a:defRPr>
             </a:lvl3pPr>
             <a:lvl4pPr algn="ctr">
-              <a:defRPr sz="1500" b="1">
+              <a:defRPr sz="1650" b="1">
                 <a:solidFill>
                   <a:srgbClr val="182536"/>
                 </a:solidFill>
@@ -21681,7 +21658,7 @@
               </a:defRPr>
             </a:lvl4pPr>
             <a:lvl5pPr algn="ctr">
-              <a:defRPr sz="1500" b="1">
+              <a:defRPr sz="1650" b="1">
                 <a:solidFill>
                   <a:srgbClr val="182536"/>
                 </a:solidFill>
@@ -21691,7 +21668,7 @@
               </a:defRPr>
             </a:lvl5pPr>
             <a:lvl6pPr algn="ctr">
-              <a:defRPr sz="1500" b="1">
+              <a:defRPr sz="1650" b="1">
                 <a:solidFill>
                   <a:srgbClr val="182536"/>
                 </a:solidFill>
@@ -21701,7 +21678,7 @@
               </a:defRPr>
             </a:lvl6pPr>
             <a:lvl7pPr algn="ctr">
-              <a:defRPr sz="1500" b="1">
+              <a:defRPr sz="1650" b="1">
                 <a:solidFill>
                   <a:srgbClr val="182536"/>
                 </a:solidFill>
@@ -21711,7 +21688,7 @@
               </a:defRPr>
             </a:lvl7pPr>
             <a:lvl8pPr algn="ctr">
-              <a:defRPr sz="1500" b="1">
+              <a:defRPr sz="1650" b="1">
                 <a:solidFill>
                   <a:srgbClr val="182536"/>
                 </a:solidFill>
@@ -21721,7 +21698,7 @@
               </a:defRPr>
             </a:lvl8pPr>
             <a:lvl9pPr algn="ctr">
-              <a:defRPr sz="1500" b="1">
+              <a:defRPr sz="1650" b="1">
                 <a:solidFill>
                   <a:srgbClr val="182536"/>
                 </a:solidFill>
@@ -21733,7 +21710,7 @@
           </a:lstStyle>
           <a:p xmlns:a="http://schemas.openxmlformats.org/drawingml/2006/main">
             <a:pPr algn="ctr">
-              <a:defRPr sz="1500" b="1">
+              <a:defRPr sz="1650" b="1">
                 <a:solidFill>
                   <a:srgbClr val="182536"/>
                 </a:solidFill>
@@ -21743,7 +21720,7 @@
               </a:defRPr>
             </a:pPr>
             <a:r>
-              <a:rPr sz="1500" b="1">
+              <a:rPr sz="1650" b="1">
                 <a:solidFill>
                   <a:srgbClr val="182536"/>
                 </a:solidFill>
@@ -21761,7 +21738,7 @@
           <p:cNvPr id="19" name="f160">
             <a:extLst xmlns:a="http://schemas.openxmlformats.org/drawingml/2006/main">
               <a:ext uri="{FF2B5EF4-FFF2-40B4-BE49-F238E27FC236}">
-                <a16:creationId xmlns:a16="http://schemas.microsoft.com/office/drawing/2014/main" id="{8002FCD6-1E5B-41F2-915A-F2348E179E5A}"/>
+                <a16:creationId xmlns:a16="http://schemas.microsoft.com/office/drawing/2014/main" id="{4D4E389A-A45F-498A-94EF-ECBD54131269}"/>
               </a:ext>
             </a:extLst>
           </p:cNvPr>
@@ -21772,7 +21749,7 @@
         </p:nvSpPr>
         <p:spPr>
           <a:xfrm xmlns:a="http://schemas.openxmlformats.org/drawingml/2006/main">
-            <a:off x="4095750" y="3752850"/>
+            <a:off x="1285875" y="3752850"/>
             <a:ext cx="95" cy="619125"/>
           </a:xfrm>
           <a:prstGeom xmlns:a="http://schemas.openxmlformats.org/drawingml/2006/main" prst="line">
@@ -21792,7 +21769,7 @@
           <p:cNvPr id="20" name="f161">
             <a:extLst xmlns:a="http://schemas.openxmlformats.org/drawingml/2006/main">
               <a:ext uri="{FF2B5EF4-FFF2-40B4-BE49-F238E27FC236}">
-                <a16:creationId xmlns:a16="http://schemas.microsoft.com/office/drawing/2014/main" id="{0EBDF750-5B02-423A-9EE1-09E1136A281D}"/>
+                <a16:creationId xmlns:a16="http://schemas.microsoft.com/office/drawing/2014/main" id="{184C0334-C959-460B-AA7E-AA520DAA4159}"/>
               </a:ext>
             </a:extLst>
           </p:cNvPr>
@@ -21803,7 +21780,7 @@
         </p:nvSpPr>
         <p:spPr>
           <a:xfrm xmlns:a="http://schemas.openxmlformats.org/drawingml/2006/main">
-            <a:off x="4038600" y="4371975"/>
+            <a:off x="1228725" y="4371975"/>
             <a:ext cx="114300" cy="114300"/>
           </a:xfrm>
           <a:prstGeom xmlns:a="http://schemas.openxmlformats.org/drawingml/2006/main" prst="downArrow">
@@ -21823,7 +21800,7 @@
           <p:cNvPr id="21" name="f162">
             <a:extLst xmlns:a="http://schemas.openxmlformats.org/drawingml/2006/main">
               <a:ext uri="{FF2B5EF4-FFF2-40B4-BE49-F238E27FC236}">
-                <a16:creationId xmlns:a16="http://schemas.microsoft.com/office/drawing/2014/main" id="{BAF3EE89-30C9-42DD-814A-C1128D645E0D}"/>
+                <a16:creationId xmlns:a16="http://schemas.microsoft.com/office/drawing/2014/main" id="{B692232C-A06E-4E12-A937-62EE2F2FEB29}"/>
               </a:ext>
             </a:extLst>
           </p:cNvPr>
@@ -21834,39 +21811,8 @@
         </p:nvSpPr>
         <p:spPr>
           <a:xfrm xmlns:a="http://schemas.openxmlformats.org/drawingml/2006/main">
-            <a:off x="2305050" y="4914900"/>
-            <a:ext cx="704850" cy="171450"/>
-          </a:xfrm>
-          <a:prstGeom xmlns:a="http://schemas.openxmlformats.org/drawingml/2006/main" prst="rightArrow">
-            <a:avLst/>
-          </a:prstGeom>
-          <a:solidFill xmlns:a="http://schemas.openxmlformats.org/drawingml/2006/main">
-            <a:srgbClr val="4264D0"/>
-          </a:solidFill>
-          <a:ln xmlns:a="http://schemas.openxmlformats.org/drawingml/2006/main" w="0">
-            <a:noFill/>
-            <a:prstDash val="solid"/>
-          </a:ln>
-        </p:spPr>
-      </p:sp>
-      <p:sp>
-        <p:nvSpPr>
-          <p:cNvPr id="22" name="f163">
-            <a:extLst xmlns:a="http://schemas.openxmlformats.org/drawingml/2006/main">
-              <a:ext uri="{FF2B5EF4-FFF2-40B4-BE49-F238E27FC236}">
-                <a16:creationId xmlns:a16="http://schemas.microsoft.com/office/drawing/2014/main" id="{87EF51E2-CC27-47B8-8ACF-6A43D145A2D3}"/>
-              </a:ext>
-            </a:extLst>
-          </p:cNvPr>
-          <p:cNvSpPr>
-            <a:spLocks xmlns:a="http://schemas.openxmlformats.org/drawingml/2006/main" noGrp="1"/>
-          </p:cNvSpPr>
-          <p:nvPr/>
-        </p:nvSpPr>
-        <p:spPr>
-          <a:xfrm xmlns:a="http://schemas.openxmlformats.org/drawingml/2006/main">
-            <a:off x="4095750" y="5591175"/>
-            <a:ext cx="95" cy="409575"/>
+            <a:off x="4000500" y="3752850"/>
+            <a:ext cx="95" cy="619125"/>
           </a:xfrm>
           <a:prstGeom xmlns:a="http://schemas.openxmlformats.org/drawingml/2006/main" prst="line">
             <a:avLst/>
@@ -21882,10 +21828,10 @@
       </p:sp>
       <p:sp>
         <p:nvSpPr>
-          <p:cNvPr id="23" name="f164">
+          <p:cNvPr id="22" name="f163">
             <a:extLst xmlns:a="http://schemas.openxmlformats.org/drawingml/2006/main">
               <a:ext uri="{FF2B5EF4-FFF2-40B4-BE49-F238E27FC236}">
-                <a16:creationId xmlns:a16="http://schemas.microsoft.com/office/drawing/2014/main" id="{885D87CD-A484-4DB8-B987-5BFF265D765B}"/>
+                <a16:creationId xmlns:a16="http://schemas.microsoft.com/office/drawing/2014/main" id="{5FE2C42A-DF07-440A-9A44-9738065D98E8}"/>
               </a:ext>
             </a:extLst>
           </p:cNvPr>
@@ -21896,8 +21842,39 @@
         </p:nvSpPr>
         <p:spPr>
           <a:xfrm xmlns:a="http://schemas.openxmlformats.org/drawingml/2006/main">
-            <a:off x="3048000" y="6000750"/>
-            <a:ext cx="1047750" cy="95"/>
+            <a:off x="3943350" y="4371975"/>
+            <a:ext cx="114300" cy="114300"/>
+          </a:xfrm>
+          <a:prstGeom xmlns:a="http://schemas.openxmlformats.org/drawingml/2006/main" prst="downArrow">
+            <a:avLst/>
+          </a:prstGeom>
+          <a:solidFill xmlns:a="http://schemas.openxmlformats.org/drawingml/2006/main">
+            <a:srgbClr val="4264D0"/>
+          </a:solidFill>
+          <a:ln xmlns:a="http://schemas.openxmlformats.org/drawingml/2006/main" w="0">
+            <a:noFill/>
+            <a:prstDash val="solid"/>
+          </a:ln>
+        </p:spPr>
+      </p:sp>
+      <p:sp>
+        <p:nvSpPr>
+          <p:cNvPr id="23" name="f164">
+            <a:extLst xmlns:a="http://schemas.openxmlformats.org/drawingml/2006/main">
+              <a:ext uri="{FF2B5EF4-FFF2-40B4-BE49-F238E27FC236}">
+                <a16:creationId xmlns:a16="http://schemas.microsoft.com/office/drawing/2014/main" id="{207E0F13-CDB1-4EB4-A3E6-397C3C35B033}"/>
+              </a:ext>
+            </a:extLst>
+          </p:cNvPr>
+          <p:cNvSpPr>
+            <a:spLocks xmlns:a="http://schemas.openxmlformats.org/drawingml/2006/main" noGrp="1"/>
+          </p:cNvSpPr>
+          <p:nvPr/>
+        </p:nvSpPr>
+        <p:spPr>
+          <a:xfrm xmlns:a="http://schemas.openxmlformats.org/drawingml/2006/main">
+            <a:off x="2714625" y="5457825"/>
+            <a:ext cx="95" cy="314325"/>
           </a:xfrm>
           <a:prstGeom xmlns:a="http://schemas.openxmlformats.org/drawingml/2006/main" prst="line">
             <a:avLst/>
@@ -21916,7 +21893,7 @@
           <p:cNvPr id="24" name="f165">
             <a:extLst xmlns:a="http://schemas.openxmlformats.org/drawingml/2006/main">
               <a:ext uri="{FF2B5EF4-FFF2-40B4-BE49-F238E27FC236}">
-                <a16:creationId xmlns:a16="http://schemas.microsoft.com/office/drawing/2014/main" id="{C758D815-D981-469F-AA0F-86654947A7C2}"/>
+                <a16:creationId xmlns:a16="http://schemas.microsoft.com/office/drawing/2014/main" id="{69981450-9D9F-40D4-93EE-7CCC0693FAAC}"/>
               </a:ext>
             </a:extLst>
           </p:cNvPr>
@@ -21927,8 +21904,8 @@
         </p:nvSpPr>
         <p:spPr>
           <a:xfrm xmlns:a="http://schemas.openxmlformats.org/drawingml/2006/main">
-            <a:off x="3048000" y="6000750"/>
-            <a:ext cx="95" cy="352425"/>
+            <a:off x="1428750" y="5772150"/>
+            <a:ext cx="1285875" cy="95"/>
           </a:xfrm>
           <a:prstGeom xmlns:a="http://schemas.openxmlformats.org/drawingml/2006/main" prst="line">
             <a:avLst/>
@@ -21947,7 +21924,7 @@
           <p:cNvPr id="25" name="f166">
             <a:extLst xmlns:a="http://schemas.openxmlformats.org/drawingml/2006/main">
               <a:ext uri="{FF2B5EF4-FFF2-40B4-BE49-F238E27FC236}">
-                <a16:creationId xmlns:a16="http://schemas.microsoft.com/office/drawing/2014/main" id="{EF75FB5A-8701-4F38-BDF9-8E357EB88B66}"/>
+                <a16:creationId xmlns:a16="http://schemas.microsoft.com/office/drawing/2014/main" id="{D411A154-D018-4707-AF04-8E0BF77EDEC2}"/>
               </a:ext>
             </a:extLst>
           </p:cNvPr>
@@ -21958,7 +21935,38 @@
         </p:nvSpPr>
         <p:spPr>
           <a:xfrm xmlns:a="http://schemas.openxmlformats.org/drawingml/2006/main">
-            <a:off x="2990850" y="6353175"/>
+            <a:off x="1428750" y="5772150"/>
+            <a:ext cx="95" cy="352425"/>
+          </a:xfrm>
+          <a:prstGeom xmlns:a="http://schemas.openxmlformats.org/drawingml/2006/main" prst="line">
+            <a:avLst/>
+          </a:prstGeom>
+          <a:noFill xmlns:a="http://schemas.openxmlformats.org/drawingml/2006/main"/>
+          <a:ln xmlns:a="http://schemas.openxmlformats.org/drawingml/2006/main" w="28575">
+            <a:solidFill>
+              <a:srgbClr val="4264D0"/>
+            </a:solidFill>
+            <a:prstDash val="solid"/>
+          </a:ln>
+        </p:spPr>
+      </p:sp>
+      <p:sp>
+        <p:nvSpPr>
+          <p:cNvPr id="26" name="f167">
+            <a:extLst xmlns:a="http://schemas.openxmlformats.org/drawingml/2006/main">
+              <a:ext uri="{FF2B5EF4-FFF2-40B4-BE49-F238E27FC236}">
+                <a16:creationId xmlns:a16="http://schemas.microsoft.com/office/drawing/2014/main" id="{79CEB5C9-CEA1-4F4D-995C-8484F72275C9}"/>
+              </a:ext>
+            </a:extLst>
+          </p:cNvPr>
+          <p:cNvSpPr>
+            <a:spLocks xmlns:a="http://schemas.openxmlformats.org/drawingml/2006/main" noGrp="1"/>
+          </p:cNvSpPr>
+          <p:nvPr/>
+        </p:nvSpPr>
+        <p:spPr>
+          <a:xfrm xmlns:a="http://schemas.openxmlformats.org/drawingml/2006/main">
+            <a:off x="1371600" y="6124575"/>
             <a:ext cx="114300" cy="114300"/>
           </a:xfrm>
           <a:prstGeom xmlns:a="http://schemas.openxmlformats.org/drawingml/2006/main" prst="downArrow">
@@ -21975,10 +21983,10 @@
       </p:sp>
       <p:sp>
         <p:nvSpPr>
-          <p:cNvPr id="26" name="f167">
+          <p:cNvPr id="27" name="f168">
             <a:extLst xmlns:a="http://schemas.openxmlformats.org/drawingml/2006/main">
               <a:ext uri="{FF2B5EF4-FFF2-40B4-BE49-F238E27FC236}">
-                <a16:creationId xmlns:a16="http://schemas.microsoft.com/office/drawing/2014/main" id="{AD8273C1-2906-43B1-8F68-98E07E8E1D04}"/>
+                <a16:creationId xmlns:a16="http://schemas.microsoft.com/office/drawing/2014/main" id="{05F91E44-CE5F-463A-BF8D-39C8FA38B491}"/>
               </a:ext>
             </a:extLst>
           </p:cNvPr>
@@ -21989,39 +21997,8 @@
         </p:nvSpPr>
         <p:spPr>
           <a:xfrm xmlns:a="http://schemas.openxmlformats.org/drawingml/2006/main">
-            <a:off x="4095750" y="6000750"/>
+            <a:off x="2714625" y="5772150"/>
             <a:ext cx="1285875" cy="95"/>
-          </a:xfrm>
-          <a:prstGeom xmlns:a="http://schemas.openxmlformats.org/drawingml/2006/main" prst="line">
-            <a:avLst/>
-          </a:prstGeom>
-          <a:noFill xmlns:a="http://schemas.openxmlformats.org/drawingml/2006/main"/>
-          <a:ln xmlns:a="http://schemas.openxmlformats.org/drawingml/2006/main" w="28575">
-            <a:solidFill>
-              <a:srgbClr val="4264D0"/>
-            </a:solidFill>
-            <a:prstDash val="solid"/>
-          </a:ln>
-        </p:spPr>
-      </p:sp>
-      <p:sp>
-        <p:nvSpPr>
-          <p:cNvPr id="27" name="f168">
-            <a:extLst xmlns:a="http://schemas.openxmlformats.org/drawingml/2006/main">
-              <a:ext uri="{FF2B5EF4-FFF2-40B4-BE49-F238E27FC236}">
-                <a16:creationId xmlns:a16="http://schemas.microsoft.com/office/drawing/2014/main" id="{9FB7ABC3-EC62-4820-B860-61E64EB79674}"/>
-              </a:ext>
-            </a:extLst>
-          </p:cNvPr>
-          <p:cNvSpPr>
-            <a:spLocks xmlns:a="http://schemas.openxmlformats.org/drawingml/2006/main" noGrp="1"/>
-          </p:cNvSpPr>
-          <p:nvPr/>
-        </p:nvSpPr>
-        <p:spPr>
-          <a:xfrm xmlns:a="http://schemas.openxmlformats.org/drawingml/2006/main">
-            <a:off x="5381625" y="6000750"/>
-            <a:ext cx="95" cy="352425"/>
           </a:xfrm>
           <a:prstGeom xmlns:a="http://schemas.openxmlformats.org/drawingml/2006/main" prst="line">
             <a:avLst/>
@@ -22040,7 +22017,7 @@
           <p:cNvPr id="28" name="f169">
             <a:extLst xmlns:a="http://schemas.openxmlformats.org/drawingml/2006/main">
               <a:ext uri="{FF2B5EF4-FFF2-40B4-BE49-F238E27FC236}">
-                <a16:creationId xmlns:a16="http://schemas.microsoft.com/office/drawing/2014/main" id="{11CBE083-C017-4CE5-8071-E9685E969261}"/>
+                <a16:creationId xmlns:a16="http://schemas.microsoft.com/office/drawing/2014/main" id="{80C780C2-EE40-4F7E-9A2A-1FF7508546F4}"/>
               </a:ext>
             </a:extLst>
           </p:cNvPr>
@@ -22051,7 +22028,38 @@
         </p:nvSpPr>
         <p:spPr>
           <a:xfrm xmlns:a="http://schemas.openxmlformats.org/drawingml/2006/main">
-            <a:off x="5324475" y="6353175"/>
+            <a:off x="4000500" y="5772150"/>
+            <a:ext cx="95" cy="352425"/>
+          </a:xfrm>
+          <a:prstGeom xmlns:a="http://schemas.openxmlformats.org/drawingml/2006/main" prst="line">
+            <a:avLst/>
+          </a:prstGeom>
+          <a:noFill xmlns:a="http://schemas.openxmlformats.org/drawingml/2006/main"/>
+          <a:ln xmlns:a="http://schemas.openxmlformats.org/drawingml/2006/main" w="28575">
+            <a:solidFill>
+              <a:srgbClr val="4264D0"/>
+            </a:solidFill>
+            <a:prstDash val="solid"/>
+          </a:ln>
+        </p:spPr>
+      </p:sp>
+      <p:sp>
+        <p:nvSpPr>
+          <p:cNvPr id="29" name="f170">
+            <a:extLst xmlns:a="http://schemas.openxmlformats.org/drawingml/2006/main">
+              <a:ext uri="{FF2B5EF4-FFF2-40B4-BE49-F238E27FC236}">
+                <a16:creationId xmlns:a16="http://schemas.microsoft.com/office/drawing/2014/main" id="{CB5562BC-CCDC-4BF0-9EC0-81DB21B6E55F}"/>
+              </a:ext>
+            </a:extLst>
+          </p:cNvPr>
+          <p:cNvSpPr>
+            <a:spLocks xmlns:a="http://schemas.openxmlformats.org/drawingml/2006/main" noGrp="1"/>
+          </p:cNvSpPr>
+          <p:nvPr/>
+        </p:nvSpPr>
+        <p:spPr>
+          <a:xfrm xmlns:a="http://schemas.openxmlformats.org/drawingml/2006/main">
+            <a:off x="3943350" y="6124575"/>
             <a:ext cx="114300" cy="114300"/>
           </a:xfrm>
           <a:prstGeom xmlns:a="http://schemas.openxmlformats.org/drawingml/2006/main" prst="downArrow">
@@ -22068,10 +22076,10 @@
       </p:sp>
       <p:sp>
         <p:nvSpPr>
-          <p:cNvPr id="29" name="f170">
+          <p:cNvPr id="30" name="f171">
             <a:extLst xmlns:a="http://schemas.openxmlformats.org/drawingml/2006/main">
               <a:ext uri="{FF2B5EF4-FFF2-40B4-BE49-F238E27FC236}">
-                <a16:creationId xmlns:a16="http://schemas.microsoft.com/office/drawing/2014/main" id="{E2ECBDE3-1CFA-4FF1-9E59-2D8373420C95}"/>
+                <a16:creationId xmlns:a16="http://schemas.microsoft.com/office/drawing/2014/main" id="{04730B43-515A-4377-8DF6-7BEBA1031776}"/>
               </a:ext>
             </a:extLst>
           </p:cNvPr>
@@ -22082,39 +22090,8 @@
         </p:nvSpPr>
         <p:spPr>
           <a:xfrm xmlns:a="http://schemas.openxmlformats.org/drawingml/2006/main">
-            <a:off x="4162425" y="6819900"/>
-            <a:ext cx="47625" cy="95"/>
-          </a:xfrm>
-          <a:prstGeom xmlns:a="http://schemas.openxmlformats.org/drawingml/2006/main" prst="line">
-            <a:avLst/>
-          </a:prstGeom>
-          <a:noFill xmlns:a="http://schemas.openxmlformats.org/drawingml/2006/main"/>
-          <a:ln xmlns:a="http://schemas.openxmlformats.org/drawingml/2006/main" w="28575">
-            <a:solidFill>
-              <a:srgbClr val="4264D0"/>
-            </a:solidFill>
-            <a:prstDash val="solid"/>
-          </a:ln>
-        </p:spPr>
-      </p:sp>
-      <p:sp>
-        <p:nvSpPr>
-          <p:cNvPr id="30" name="f171">
-            <a:extLst xmlns:a="http://schemas.openxmlformats.org/drawingml/2006/main">
-              <a:ext uri="{FF2B5EF4-FFF2-40B4-BE49-F238E27FC236}">
-                <a16:creationId xmlns:a16="http://schemas.microsoft.com/office/drawing/2014/main" id="{C02A19F2-EEF8-47EE-A920-950FFAAB4CF3}"/>
-              </a:ext>
-            </a:extLst>
-          </p:cNvPr>
-          <p:cNvSpPr>
-            <a:spLocks xmlns:a="http://schemas.openxmlformats.org/drawingml/2006/main" noGrp="1"/>
-          </p:cNvSpPr>
-          <p:nvPr/>
-        </p:nvSpPr>
-        <p:spPr>
-          <a:xfrm xmlns:a="http://schemas.openxmlformats.org/drawingml/2006/main">
-            <a:off x="4210050" y="6819900"/>
-            <a:ext cx="95" cy="609600"/>
+            <a:off x="1428750" y="6877050"/>
+            <a:ext cx="95" cy="647700"/>
           </a:xfrm>
           <a:prstGeom xmlns:a="http://schemas.openxmlformats.org/drawingml/2006/main" prst="line">
             <a:avLst/>
@@ -22133,7 +22110,7 @@
           <p:cNvPr id="31" name="f172">
             <a:extLst xmlns:a="http://schemas.openxmlformats.org/drawingml/2006/main">
               <a:ext uri="{FF2B5EF4-FFF2-40B4-BE49-F238E27FC236}">
-                <a16:creationId xmlns:a16="http://schemas.microsoft.com/office/drawing/2014/main" id="{7BCC3675-CACB-4CAB-B2C8-98AB615B4D05}"/>
+                <a16:creationId xmlns:a16="http://schemas.microsoft.com/office/drawing/2014/main" id="{E2BFDDEB-FB2A-4C57-B0CA-1EC5BD914799}"/>
               </a:ext>
             </a:extLst>
           </p:cNvPr>
@@ -22144,8 +22121,8 @@
         </p:nvSpPr>
         <p:spPr>
           <a:xfrm xmlns:a="http://schemas.openxmlformats.org/drawingml/2006/main">
-            <a:off x="4210050" y="7429500"/>
-            <a:ext cx="2266950" cy="95"/>
+            <a:off x="1428750" y="7524750"/>
+            <a:ext cx="5381625" cy="95"/>
           </a:xfrm>
           <a:prstGeom xmlns:a="http://schemas.openxmlformats.org/drawingml/2006/main" prst="line">
             <a:avLst/>
@@ -22164,7 +22141,7 @@
           <p:cNvPr id="32" name="f173">
             <a:extLst xmlns:a="http://schemas.openxmlformats.org/drawingml/2006/main">
               <a:ext uri="{FF2B5EF4-FFF2-40B4-BE49-F238E27FC236}">
-                <a16:creationId xmlns:a16="http://schemas.microsoft.com/office/drawing/2014/main" id="{BA9B7307-F36B-4281-A49E-6CA45FE9682A}"/>
+                <a16:creationId xmlns:a16="http://schemas.microsoft.com/office/drawing/2014/main" id="{655A1775-8755-42B7-A7D2-1C465B4D3C0D}"/>
               </a:ext>
             </a:extLst>
           </p:cNvPr>
@@ -22175,8 +22152,8 @@
         </p:nvSpPr>
         <p:spPr>
           <a:xfrm xmlns:a="http://schemas.openxmlformats.org/drawingml/2006/main">
-            <a:off x="6477000" y="5048250"/>
-            <a:ext cx="95" cy="2381250"/>
+            <a:off x="6810375" y="6172200"/>
+            <a:ext cx="95" cy="1352550"/>
           </a:xfrm>
           <a:prstGeom xmlns:a="http://schemas.openxmlformats.org/drawingml/2006/main" prst="line">
             <a:avLst/>
@@ -22195,7 +22172,7 @@
           <p:cNvPr id="33" name="f174">
             <a:extLst xmlns:a="http://schemas.openxmlformats.org/drawingml/2006/main">
               <a:ext uri="{FF2B5EF4-FFF2-40B4-BE49-F238E27FC236}">
-                <a16:creationId xmlns:a16="http://schemas.microsoft.com/office/drawing/2014/main" id="{194B7C26-7314-435B-AFA2-0C8B1F91465F}"/>
+                <a16:creationId xmlns:a16="http://schemas.microsoft.com/office/drawing/2014/main" id="{D7231857-AC6C-48E9-BCD0-A37E53936DFF}"/>
               </a:ext>
             </a:extLst>
           </p:cNvPr>
@@ -22206,10 +22183,10 @@
         </p:nvSpPr>
         <p:spPr>
           <a:xfrm xmlns:a="http://schemas.openxmlformats.org/drawingml/2006/main">
-            <a:off x="6419850" y="4962525"/>
-            <a:ext cx="114300" cy="171450"/>
+            <a:off x="6753225" y="6057900"/>
+            <a:ext cx="114300" cy="114300"/>
           </a:xfrm>
-          <a:prstGeom xmlns:a="http://schemas.openxmlformats.org/drawingml/2006/main" prst="rightArrow">
+          <a:prstGeom xmlns:a="http://schemas.openxmlformats.org/drawingml/2006/main" prst="upArrow">
             <a:avLst/>
           </a:prstGeom>
           <a:solidFill xmlns:a="http://schemas.openxmlformats.org/drawingml/2006/main">
@@ -22226,7 +22203,7 @@
           <p:cNvPr id="34" name="f175">
             <a:extLst xmlns:a="http://schemas.openxmlformats.org/drawingml/2006/main">
               <a:ext uri="{FF2B5EF4-FFF2-40B4-BE49-F238E27FC236}">
-                <a16:creationId xmlns:a16="http://schemas.microsoft.com/office/drawing/2014/main" id="{5B498833-7F22-4CC1-8CA6-B0437FD05358}"/>
+                <a16:creationId xmlns:a16="http://schemas.microsoft.com/office/drawing/2014/main" id="{609274E2-0D68-413C-9BCC-64C9435822C0}"/>
               </a:ext>
             </a:extLst>
           </p:cNvPr>
@@ -22237,27 +22214,155 @@
         </p:nvSpPr>
         <p:spPr>
           <a:xfrm xmlns:a="http://schemas.openxmlformats.org/drawingml/2006/main">
-            <a:off x="5295900" y="3343275"/>
-            <a:ext cx="2971800" cy="95"/>
+            <a:off x="1905000" y="7162800"/>
+            <a:ext cx="4476750" cy="304800"/>
           </a:xfrm>
-          <a:prstGeom xmlns:a="http://schemas.openxmlformats.org/drawingml/2006/main" prst="line">
+          <a:prstGeom xmlns:a="http://schemas.openxmlformats.org/drawingml/2006/main" prst="rect">
             <a:avLst/>
           </a:prstGeom>
           <a:noFill xmlns:a="http://schemas.openxmlformats.org/drawingml/2006/main"/>
-          <a:ln xmlns:a="http://schemas.openxmlformats.org/drawingml/2006/main" w="28575">
-            <a:solidFill>
-              <a:srgbClr val="4264D0"/>
-            </a:solidFill>
+          <a:ln xmlns:a="http://schemas.openxmlformats.org/drawingml/2006/main" w="0">
+            <a:noFill/>
             <a:prstDash val="solid"/>
           </a:ln>
         </p:spPr>
+        <p:txBody>
+          <a:bodyPr xmlns:a="http://schemas.openxmlformats.org/drawingml/2006/main" wrap="none" lIns="0" tIns="0" rIns="0" bIns="0" anchor="t">
+            <a:noAutofit/>
+          </a:bodyPr>
+          <a:lstStyle xmlns:a="http://schemas.openxmlformats.org/drawingml/2006/main">
+            <a:defPPr algn="ctr">
+              <a:defRPr sz="1575" b="0">
+                <a:solidFill>
+                  <a:srgbClr val="52627B"/>
+                </a:solidFill>
+                <a:latin typeface="Nimbus Sans"/>
+                <a:ea typeface="Nimbus Sans"/>
+                <a:cs typeface="Nimbus Sans"/>
+              </a:defRPr>
+            </a:defPPr>
+            <a:lvl1pPr algn="ctr">
+              <a:defRPr sz="1575" b="0">
+                <a:solidFill>
+                  <a:srgbClr val="52627B"/>
+                </a:solidFill>
+                <a:latin typeface="Nimbus Sans"/>
+                <a:ea typeface="Nimbus Sans"/>
+                <a:cs typeface="Nimbus Sans"/>
+              </a:defRPr>
+            </a:lvl1pPr>
+            <a:lvl2pPr algn="ctr">
+              <a:defRPr sz="1575" b="0">
+                <a:solidFill>
+                  <a:srgbClr val="52627B"/>
+                </a:solidFill>
+                <a:latin typeface="Nimbus Sans"/>
+                <a:ea typeface="Nimbus Sans"/>
+                <a:cs typeface="Nimbus Sans"/>
+              </a:defRPr>
+            </a:lvl2pPr>
+            <a:lvl3pPr algn="ctr">
+              <a:defRPr sz="1575" b="0">
+                <a:solidFill>
+                  <a:srgbClr val="52627B"/>
+                </a:solidFill>
+                <a:latin typeface="Nimbus Sans"/>
+                <a:ea typeface="Nimbus Sans"/>
+                <a:cs typeface="Nimbus Sans"/>
+              </a:defRPr>
+            </a:lvl3pPr>
+            <a:lvl4pPr algn="ctr">
+              <a:defRPr sz="1575" b="0">
+                <a:solidFill>
+                  <a:srgbClr val="52627B"/>
+                </a:solidFill>
+                <a:latin typeface="Nimbus Sans"/>
+                <a:ea typeface="Nimbus Sans"/>
+                <a:cs typeface="Nimbus Sans"/>
+              </a:defRPr>
+            </a:lvl4pPr>
+            <a:lvl5pPr algn="ctr">
+              <a:defRPr sz="1575" b="0">
+                <a:solidFill>
+                  <a:srgbClr val="52627B"/>
+                </a:solidFill>
+                <a:latin typeface="Nimbus Sans"/>
+                <a:ea typeface="Nimbus Sans"/>
+                <a:cs typeface="Nimbus Sans"/>
+              </a:defRPr>
+            </a:lvl5pPr>
+            <a:lvl6pPr algn="ctr">
+              <a:defRPr sz="1575" b="0">
+                <a:solidFill>
+                  <a:srgbClr val="52627B"/>
+                </a:solidFill>
+                <a:latin typeface="Nimbus Sans"/>
+                <a:ea typeface="Nimbus Sans"/>
+                <a:cs typeface="Nimbus Sans"/>
+              </a:defRPr>
+            </a:lvl6pPr>
+            <a:lvl7pPr algn="ctr">
+              <a:defRPr sz="1575" b="0">
+                <a:solidFill>
+                  <a:srgbClr val="52627B"/>
+                </a:solidFill>
+                <a:latin typeface="Nimbus Sans"/>
+                <a:ea typeface="Nimbus Sans"/>
+                <a:cs typeface="Nimbus Sans"/>
+              </a:defRPr>
+            </a:lvl7pPr>
+            <a:lvl8pPr algn="ctr">
+              <a:defRPr sz="1575" b="0">
+                <a:solidFill>
+                  <a:srgbClr val="52627B"/>
+                </a:solidFill>
+                <a:latin typeface="Nimbus Sans"/>
+                <a:ea typeface="Nimbus Sans"/>
+                <a:cs typeface="Nimbus Sans"/>
+              </a:defRPr>
+            </a:lvl8pPr>
+            <a:lvl9pPr algn="ctr">
+              <a:defRPr sz="1575" b="0">
+                <a:solidFill>
+                  <a:srgbClr val="52627B"/>
+                </a:solidFill>
+                <a:latin typeface="Nimbus Sans"/>
+                <a:ea typeface="Nimbus Sans"/>
+                <a:cs typeface="Nimbus Sans"/>
+              </a:defRPr>
+            </a:lvl9pPr>
+          </a:lstStyle>
+          <a:p xmlns:a="http://schemas.openxmlformats.org/drawingml/2006/main">
+            <a:pPr algn="ctr">
+              <a:defRPr sz="1575" b="0">
+                <a:solidFill>
+                  <a:srgbClr val="52627B"/>
+                </a:solidFill>
+                <a:latin typeface="Nimbus Sans"/>
+                <a:ea typeface="Nimbus Sans"/>
+                <a:cs typeface="Nimbus Sans"/>
+              </a:defRPr>
+            </a:pPr>
+            <a:r>
+              <a:rPr sz="1575" b="0">
+                <a:solidFill>
+                  <a:srgbClr val="52627B"/>
+                </a:solidFill>
+                <a:latin typeface="Nimbus Sans"/>
+                <a:ea typeface="Nimbus Sans"/>
+                <a:cs typeface="Nimbus Sans"/>
+              </a:rPr>
+              <a:t>Selezione dei frame rilevanti da modificare</a:t>
+            </a:r>
+          </a:p>
+        </p:txBody>
       </p:sp>
       <p:sp>
         <p:nvSpPr>
           <p:cNvPr id="35" name="f176">
             <a:extLst xmlns:a="http://schemas.openxmlformats.org/drawingml/2006/main">
               <a:ext uri="{FF2B5EF4-FFF2-40B4-BE49-F238E27FC236}">
-                <a16:creationId xmlns:a16="http://schemas.microsoft.com/office/drawing/2014/main" id="{D520BFD9-A676-4345-93B9-A6E5E1746531}"/>
+                <a16:creationId xmlns:a16="http://schemas.microsoft.com/office/drawing/2014/main" id="{CDBA6A27-C716-4A72-B435-7A94DD45EADA}"/>
               </a:ext>
             </a:extLst>
           </p:cNvPr>
@@ -22268,8 +22373,8 @@
         </p:nvSpPr>
         <p:spPr>
           <a:xfrm xmlns:a="http://schemas.openxmlformats.org/drawingml/2006/main">
-            <a:off x="8267700" y="3343275"/>
-            <a:ext cx="95" cy="1704975"/>
+            <a:off x="5200650" y="3343275"/>
+            <a:ext cx="2895600" cy="95"/>
           </a:xfrm>
           <a:prstGeom xmlns:a="http://schemas.openxmlformats.org/drawingml/2006/main" prst="line">
             <a:avLst/>
@@ -22288,7 +22393,7 @@
           <p:cNvPr id="36" name="f177">
             <a:extLst xmlns:a="http://schemas.openxmlformats.org/drawingml/2006/main">
               <a:ext uri="{FF2B5EF4-FFF2-40B4-BE49-F238E27FC236}">
-                <a16:creationId xmlns:a16="http://schemas.microsoft.com/office/drawing/2014/main" id="{61B2D15E-0465-4C6B-B64A-77EE4CDE368F}"/>
+                <a16:creationId xmlns:a16="http://schemas.microsoft.com/office/drawing/2014/main" id="{BACF0201-6783-4329-9854-832BBE14010E}"/>
               </a:ext>
             </a:extLst>
           </p:cNvPr>
@@ -22299,17 +22404,17 @@
         </p:nvSpPr>
         <p:spPr>
           <a:xfrm xmlns:a="http://schemas.openxmlformats.org/drawingml/2006/main">
-            <a:off x="8153400" y="4962525"/>
-            <a:ext cx="114300" cy="171450"/>
+            <a:off x="8096250" y="3343275"/>
+            <a:ext cx="95" cy="2228850"/>
           </a:xfrm>
-          <a:prstGeom xmlns:a="http://schemas.openxmlformats.org/drawingml/2006/main" prst="leftArrow">
+          <a:prstGeom xmlns:a="http://schemas.openxmlformats.org/drawingml/2006/main" prst="line">
             <a:avLst/>
           </a:prstGeom>
-          <a:solidFill xmlns:a="http://schemas.openxmlformats.org/drawingml/2006/main">
-            <a:srgbClr val="4264D0"/>
-          </a:solidFill>
-          <a:ln xmlns:a="http://schemas.openxmlformats.org/drawingml/2006/main" w="0">
-            <a:noFill/>
+          <a:noFill xmlns:a="http://schemas.openxmlformats.org/drawingml/2006/main"/>
+          <a:ln xmlns:a="http://schemas.openxmlformats.org/drawingml/2006/main" w="28575">
+            <a:solidFill>
+              <a:srgbClr val="4264D0"/>
+            </a:solidFill>
             <a:prstDash val="solid"/>
           </a:ln>
         </p:spPr>
@@ -22319,7 +22424,7 @@
           <p:cNvPr id="37" name="f178">
             <a:extLst xmlns:a="http://schemas.openxmlformats.org/drawingml/2006/main">
               <a:ext uri="{FF2B5EF4-FFF2-40B4-BE49-F238E27FC236}">
-                <a16:creationId xmlns:a16="http://schemas.microsoft.com/office/drawing/2014/main" id="{255EF17D-F356-411C-8334-57943EA25507}"/>
+                <a16:creationId xmlns:a16="http://schemas.microsoft.com/office/drawing/2014/main" id="{6C6ABB35-48CE-4F91-BB2B-3EBF29FD5875}"/>
               </a:ext>
             </a:extLst>
           </p:cNvPr>
@@ -22330,8 +22435,8 @@
         </p:nvSpPr>
         <p:spPr>
           <a:xfrm xmlns:a="http://schemas.openxmlformats.org/drawingml/2006/main">
-            <a:off x="7334250" y="4333875"/>
-            <a:ext cx="95" cy="171450"/>
+            <a:off x="7896225" y="5572125"/>
+            <a:ext cx="200025" cy="95"/>
           </a:xfrm>
           <a:prstGeom xmlns:a="http://schemas.openxmlformats.org/drawingml/2006/main" prst="line">
             <a:avLst/>
@@ -22350,7 +22455,7 @@
           <p:cNvPr id="38" name="f179">
             <a:extLst xmlns:a="http://schemas.openxmlformats.org/drawingml/2006/main">
               <a:ext uri="{FF2B5EF4-FFF2-40B4-BE49-F238E27FC236}">
-                <a16:creationId xmlns:a16="http://schemas.microsoft.com/office/drawing/2014/main" id="{CB9467BA-58A1-4206-8AF3-F074B33278D9}"/>
+                <a16:creationId xmlns:a16="http://schemas.microsoft.com/office/drawing/2014/main" id="{266397D4-5B19-4E6A-A19C-882DB926190F}"/>
               </a:ext>
             </a:extLst>
           </p:cNvPr>
@@ -22361,10 +22466,10 @@
         </p:nvSpPr>
         <p:spPr>
           <a:xfrm xmlns:a="http://schemas.openxmlformats.org/drawingml/2006/main">
-            <a:off x="7277100" y="4219575"/>
-            <a:ext cx="114300" cy="114300"/>
+            <a:off x="7724775" y="5486400"/>
+            <a:ext cx="171450" cy="171450"/>
           </a:xfrm>
-          <a:prstGeom xmlns:a="http://schemas.openxmlformats.org/drawingml/2006/main" prst="upArrow">
+          <a:prstGeom xmlns:a="http://schemas.openxmlformats.org/drawingml/2006/main" prst="leftArrow">
             <a:avLst/>
           </a:prstGeom>
           <a:solidFill xmlns:a="http://schemas.openxmlformats.org/drawingml/2006/main">
@@ -22381,7 +22486,7 @@
           <p:cNvPr id="39" name="f180">
             <a:extLst xmlns:a="http://schemas.openxmlformats.org/drawingml/2006/main">
               <a:ext uri="{FF2B5EF4-FFF2-40B4-BE49-F238E27FC236}">
-                <a16:creationId xmlns:a16="http://schemas.microsoft.com/office/drawing/2014/main" id="{0BCB81F1-44EB-49F9-A5DC-FCEA62004EF4}"/>
+                <a16:creationId xmlns:a16="http://schemas.microsoft.com/office/drawing/2014/main" id="{B632F246-A5D8-4C4F-A1C0-FC7956EC3A56}"/>
               </a:ext>
             </a:extLst>
           </p:cNvPr>
@@ -22392,8 +22497,8 @@
         </p:nvSpPr>
         <p:spPr>
           <a:xfrm xmlns:a="http://schemas.openxmlformats.org/drawingml/2006/main">
-            <a:off x="6096000" y="3867150"/>
-            <a:ext cx="361950" cy="95"/>
+            <a:off x="6810375" y="4476750"/>
+            <a:ext cx="95" cy="552450"/>
           </a:xfrm>
           <a:prstGeom xmlns:a="http://schemas.openxmlformats.org/drawingml/2006/main" prst="line">
             <a:avLst/>
@@ -22412,7 +22517,7 @@
           <p:cNvPr id="40" name="f181">
             <a:extLst xmlns:a="http://schemas.openxmlformats.org/drawingml/2006/main">
               <a:ext uri="{FF2B5EF4-FFF2-40B4-BE49-F238E27FC236}">
-                <a16:creationId xmlns:a16="http://schemas.microsoft.com/office/drawing/2014/main" id="{4F61F02D-F774-4F54-BA7F-9B0C7377F873}"/>
+                <a16:creationId xmlns:a16="http://schemas.microsoft.com/office/drawing/2014/main" id="{B995046F-087E-41E5-A804-57236E12A255}"/>
               </a:ext>
             </a:extLst>
           </p:cNvPr>
@@ -22423,17 +22528,17 @@
         </p:nvSpPr>
         <p:spPr>
           <a:xfrm xmlns:a="http://schemas.openxmlformats.org/drawingml/2006/main">
-            <a:off x="6096000" y="3867150"/>
-            <a:ext cx="95" cy="942975"/>
+            <a:off x="6753225" y="4362450"/>
+            <a:ext cx="114300" cy="114300"/>
           </a:xfrm>
-          <a:prstGeom xmlns:a="http://schemas.openxmlformats.org/drawingml/2006/main" prst="line">
+          <a:prstGeom xmlns:a="http://schemas.openxmlformats.org/drawingml/2006/main" prst="upArrow">
             <a:avLst/>
           </a:prstGeom>
-          <a:noFill xmlns:a="http://schemas.openxmlformats.org/drawingml/2006/main"/>
-          <a:ln xmlns:a="http://schemas.openxmlformats.org/drawingml/2006/main" w="28575">
-            <a:solidFill>
-              <a:srgbClr val="4264D0"/>
-            </a:solidFill>
+          <a:solidFill xmlns:a="http://schemas.openxmlformats.org/drawingml/2006/main">
+            <a:srgbClr val="4264D0"/>
+          </a:solidFill>
+          <a:ln xmlns:a="http://schemas.openxmlformats.org/drawingml/2006/main" w="0">
+            <a:noFill/>
             <a:prstDash val="solid"/>
           </a:ln>
         </p:spPr>
@@ -22443,7 +22548,7 @@
           <p:cNvPr id="41" name="f182">
             <a:extLst xmlns:a="http://schemas.openxmlformats.org/drawingml/2006/main">
               <a:ext uri="{FF2B5EF4-FFF2-40B4-BE49-F238E27FC236}">
-                <a16:creationId xmlns:a16="http://schemas.microsoft.com/office/drawing/2014/main" id="{049B7E75-3146-43DC-BE8A-008FB2F77598}"/>
+                <a16:creationId xmlns:a16="http://schemas.microsoft.com/office/drawing/2014/main" id="{63048B75-8F96-4336-B239-D1AF0CFCD1B8}"/>
               </a:ext>
             </a:extLst>
           </p:cNvPr>
@@ -22454,8 +22559,8 @@
         </p:nvSpPr>
         <p:spPr>
           <a:xfrm xmlns:a="http://schemas.openxmlformats.org/drawingml/2006/main">
-            <a:off x="5219700" y="4810125"/>
-            <a:ext cx="876300" cy="95"/>
+            <a:off x="5572125" y="4010025"/>
+            <a:ext cx="266700" cy="95"/>
           </a:xfrm>
           <a:prstGeom xmlns:a="http://schemas.openxmlformats.org/drawingml/2006/main" prst="line">
             <a:avLst/>
@@ -22474,7 +22579,69 @@
           <p:cNvPr id="42" name="f183">
             <a:extLst xmlns:a="http://schemas.openxmlformats.org/drawingml/2006/main">
               <a:ext uri="{FF2B5EF4-FFF2-40B4-BE49-F238E27FC236}">
-                <a16:creationId xmlns:a16="http://schemas.microsoft.com/office/drawing/2014/main" id="{FDD272E0-46F8-40BE-A2CB-18A5F5B73913}"/>
+                <a16:creationId xmlns:a16="http://schemas.microsoft.com/office/drawing/2014/main" id="{605AC6FA-AE8F-446D-A013-4B925D7282D7}"/>
+              </a:ext>
+            </a:extLst>
+          </p:cNvPr>
+          <p:cNvSpPr>
+            <a:spLocks xmlns:a="http://schemas.openxmlformats.org/drawingml/2006/main" noGrp="1"/>
+          </p:cNvSpPr>
+          <p:nvPr/>
+        </p:nvSpPr>
+        <p:spPr>
+          <a:xfrm xmlns:a="http://schemas.openxmlformats.org/drawingml/2006/main">
+            <a:off x="5572125" y="4010025"/>
+            <a:ext cx="95" cy="800100"/>
+          </a:xfrm>
+          <a:prstGeom xmlns:a="http://schemas.openxmlformats.org/drawingml/2006/main" prst="line">
+            <a:avLst/>
+          </a:prstGeom>
+          <a:noFill xmlns:a="http://schemas.openxmlformats.org/drawingml/2006/main"/>
+          <a:ln xmlns:a="http://schemas.openxmlformats.org/drawingml/2006/main" w="28575">
+            <a:solidFill>
+              <a:srgbClr val="4264D0"/>
+            </a:solidFill>
+            <a:prstDash val="solid"/>
+          </a:ln>
+        </p:spPr>
+      </p:sp>
+      <p:sp>
+        <p:nvSpPr>
+          <p:cNvPr id="43" name="f184">
+            <a:extLst xmlns:a="http://schemas.openxmlformats.org/drawingml/2006/main">
+              <a:ext uri="{FF2B5EF4-FFF2-40B4-BE49-F238E27FC236}">
+                <a16:creationId xmlns:a16="http://schemas.microsoft.com/office/drawing/2014/main" id="{532AEBC0-46CC-44CE-A198-4043102EB64E}"/>
+              </a:ext>
+            </a:extLst>
+          </p:cNvPr>
+          <p:cNvSpPr>
+            <a:spLocks xmlns:a="http://schemas.openxmlformats.org/drawingml/2006/main" noGrp="1"/>
+          </p:cNvSpPr>
+          <p:nvPr/>
+        </p:nvSpPr>
+        <p:spPr>
+          <a:xfrm xmlns:a="http://schemas.openxmlformats.org/drawingml/2006/main">
+            <a:off x="5219700" y="4810125"/>
+            <a:ext cx="352425" cy="95"/>
+          </a:xfrm>
+          <a:prstGeom xmlns:a="http://schemas.openxmlformats.org/drawingml/2006/main" prst="line">
+            <a:avLst/>
+          </a:prstGeom>
+          <a:noFill xmlns:a="http://schemas.openxmlformats.org/drawingml/2006/main"/>
+          <a:ln xmlns:a="http://schemas.openxmlformats.org/drawingml/2006/main" w="28575">
+            <a:solidFill>
+              <a:srgbClr val="4264D0"/>
+            </a:solidFill>
+            <a:prstDash val="solid"/>
+          </a:ln>
+        </p:spPr>
+      </p:sp>
+      <p:sp>
+        <p:nvSpPr>
+          <p:cNvPr id="44" name="f185">
+            <a:extLst xmlns:a="http://schemas.openxmlformats.org/drawingml/2006/main">
+              <a:ext uri="{FF2B5EF4-FFF2-40B4-BE49-F238E27FC236}">
+                <a16:creationId xmlns:a16="http://schemas.microsoft.com/office/drawing/2014/main" id="{8241F6DC-6CBB-47C0-8303-534DADABFA52}"/>
               </a:ext>
             </a:extLst>
           </p:cNvPr>
@@ -22502,351 +22669,10 @@
       </p:sp>
       <p:sp>
         <p:nvSpPr>
-          <p:cNvPr id="43" name="f184">
-            <a:extLst xmlns:a="http://schemas.openxmlformats.org/drawingml/2006/main">
-              <a:ext uri="{FF2B5EF4-FFF2-40B4-BE49-F238E27FC236}">
-                <a16:creationId xmlns:a16="http://schemas.microsoft.com/office/drawing/2014/main" id="{A4537D89-1191-4C08-BB37-61541B4FABFD}"/>
-              </a:ext>
-            </a:extLst>
-          </p:cNvPr>
-          <p:cNvSpPr>
-            <a:spLocks xmlns:a="http://schemas.openxmlformats.org/drawingml/2006/main" noGrp="1"/>
-          </p:cNvSpPr>
-          <p:nvPr/>
-        </p:nvSpPr>
-        <p:spPr>
-          <a:xfrm xmlns:a="http://schemas.openxmlformats.org/drawingml/2006/main">
-            <a:off x="6477000" y="5715000"/>
-            <a:ext cx="1714500" cy="285750"/>
-          </a:xfrm>
-          <a:prstGeom xmlns:a="http://schemas.openxmlformats.org/drawingml/2006/main" prst="rect">
-            <a:avLst/>
-          </a:prstGeom>
-          <a:noFill xmlns:a="http://schemas.openxmlformats.org/drawingml/2006/main"/>
-          <a:ln xmlns:a="http://schemas.openxmlformats.org/drawingml/2006/main" w="0">
-            <a:noFill/>
-            <a:prstDash val="solid"/>
-          </a:ln>
-        </p:spPr>
-        <p:txBody>
-          <a:bodyPr xmlns:a="http://schemas.openxmlformats.org/drawingml/2006/main" wrap="none" lIns="0" tIns="0" rIns="0" bIns="0" anchor="t">
-            <a:noAutofit/>
-          </a:bodyPr>
-          <a:lstStyle xmlns:a="http://schemas.openxmlformats.org/drawingml/2006/main">
-            <a:defPPr algn="ctr">
-              <a:defRPr sz="1425" b="0">
-                <a:solidFill>
-                  <a:srgbClr val="9D7139"/>
-                </a:solidFill>
-                <a:latin typeface="Nimbus Sans"/>
-                <a:ea typeface="Nimbus Sans"/>
-                <a:cs typeface="Nimbus Sans"/>
-              </a:defRPr>
-            </a:defPPr>
-            <a:lvl1pPr algn="ctr">
-              <a:defRPr sz="1425" b="0">
-                <a:solidFill>
-                  <a:srgbClr val="9D7139"/>
-                </a:solidFill>
-                <a:latin typeface="Nimbus Sans"/>
-                <a:ea typeface="Nimbus Sans"/>
-                <a:cs typeface="Nimbus Sans"/>
-              </a:defRPr>
-            </a:lvl1pPr>
-            <a:lvl2pPr algn="ctr">
-              <a:defRPr sz="1425" b="0">
-                <a:solidFill>
-                  <a:srgbClr val="9D7139"/>
-                </a:solidFill>
-                <a:latin typeface="Nimbus Sans"/>
-                <a:ea typeface="Nimbus Sans"/>
-                <a:cs typeface="Nimbus Sans"/>
-              </a:defRPr>
-            </a:lvl2pPr>
-            <a:lvl3pPr algn="ctr">
-              <a:defRPr sz="1425" b="0">
-                <a:solidFill>
-                  <a:srgbClr val="9D7139"/>
-                </a:solidFill>
-                <a:latin typeface="Nimbus Sans"/>
-                <a:ea typeface="Nimbus Sans"/>
-                <a:cs typeface="Nimbus Sans"/>
-              </a:defRPr>
-            </a:lvl3pPr>
-            <a:lvl4pPr algn="ctr">
-              <a:defRPr sz="1425" b="0">
-                <a:solidFill>
-                  <a:srgbClr val="9D7139"/>
-                </a:solidFill>
-                <a:latin typeface="Nimbus Sans"/>
-                <a:ea typeface="Nimbus Sans"/>
-                <a:cs typeface="Nimbus Sans"/>
-              </a:defRPr>
-            </a:lvl4pPr>
-            <a:lvl5pPr algn="ctr">
-              <a:defRPr sz="1425" b="0">
-                <a:solidFill>
-                  <a:srgbClr val="9D7139"/>
-                </a:solidFill>
-                <a:latin typeface="Nimbus Sans"/>
-                <a:ea typeface="Nimbus Sans"/>
-                <a:cs typeface="Nimbus Sans"/>
-              </a:defRPr>
-            </a:lvl5pPr>
-            <a:lvl6pPr algn="ctr">
-              <a:defRPr sz="1425" b="0">
-                <a:solidFill>
-                  <a:srgbClr val="9D7139"/>
-                </a:solidFill>
-                <a:latin typeface="Nimbus Sans"/>
-                <a:ea typeface="Nimbus Sans"/>
-                <a:cs typeface="Nimbus Sans"/>
-              </a:defRPr>
-            </a:lvl6pPr>
-            <a:lvl7pPr algn="ctr">
-              <a:defRPr sz="1425" b="0">
-                <a:solidFill>
-                  <a:srgbClr val="9D7139"/>
-                </a:solidFill>
-                <a:latin typeface="Nimbus Sans"/>
-                <a:ea typeface="Nimbus Sans"/>
-                <a:cs typeface="Nimbus Sans"/>
-              </a:defRPr>
-            </a:lvl7pPr>
-            <a:lvl8pPr algn="ctr">
-              <a:defRPr sz="1425" b="0">
-                <a:solidFill>
-                  <a:srgbClr val="9D7139"/>
-                </a:solidFill>
-                <a:latin typeface="Nimbus Sans"/>
-                <a:ea typeface="Nimbus Sans"/>
-                <a:cs typeface="Nimbus Sans"/>
-              </a:defRPr>
-            </a:lvl8pPr>
-            <a:lvl9pPr algn="ctr">
-              <a:defRPr sz="1425" b="0">
-                <a:solidFill>
-                  <a:srgbClr val="9D7139"/>
-                </a:solidFill>
-                <a:latin typeface="Nimbus Sans"/>
-                <a:ea typeface="Nimbus Sans"/>
-                <a:cs typeface="Nimbus Sans"/>
-              </a:defRPr>
-            </a:lvl9pPr>
-          </a:lstStyle>
-          <a:p xmlns:a="http://schemas.openxmlformats.org/drawingml/2006/main">
-            <a:pPr algn="ctr">
-              <a:defRPr sz="1425" b="0">
-                <a:solidFill>
-                  <a:srgbClr val="9D7139"/>
-                </a:solidFill>
-                <a:latin typeface="Nimbus Sans"/>
-                <a:ea typeface="Nimbus Sans"/>
-                <a:cs typeface="Nimbus Sans"/>
-              </a:defRPr>
-            </a:pPr>
-            <a:r>
-              <a:rPr sz="1425" b="0">
-                <a:solidFill>
-                  <a:srgbClr val="9D7139"/>
-                </a:solidFill>
-                <a:latin typeface="Nimbus Sans"/>
-                <a:ea typeface="Nimbus Sans"/>
-                <a:cs typeface="Nimbus Sans"/>
-              </a:rPr>
-              <a:t>Esterno · offline</a:t>
-            </a:r>
-          </a:p>
-        </p:txBody>
-      </p:sp>
-      <p:sp>
-        <p:nvSpPr>
-          <p:cNvPr id="44" name="f185">
-            <a:extLst xmlns:a="http://schemas.openxmlformats.org/drawingml/2006/main">
-              <a:ext uri="{FF2B5EF4-FFF2-40B4-BE49-F238E27FC236}">
-                <a16:creationId xmlns:a16="http://schemas.microsoft.com/office/drawing/2014/main" id="{189B9964-ABBC-43C8-92F2-931D2688AD01}"/>
-              </a:ext>
-            </a:extLst>
-          </p:cNvPr>
-          <p:cNvSpPr>
-            <a:spLocks xmlns:a="http://schemas.openxmlformats.org/drawingml/2006/main" noGrp="1"/>
-          </p:cNvSpPr>
-          <p:nvPr/>
-        </p:nvSpPr>
-        <p:spPr>
-          <a:xfrm xmlns:a="http://schemas.openxmlformats.org/drawingml/2006/main">
-            <a:off x="6429375" y="6057900"/>
-            <a:ext cx="1809750" cy="561975"/>
-          </a:xfrm>
-          <a:prstGeom xmlns:a="http://schemas.openxmlformats.org/drawingml/2006/main" prst="rect">
-            <a:avLst/>
-          </a:prstGeom>
-          <a:noFill xmlns:a="http://schemas.openxmlformats.org/drawingml/2006/main"/>
-          <a:ln xmlns:a="http://schemas.openxmlformats.org/drawingml/2006/main" w="0">
-            <a:noFill/>
-            <a:prstDash val="solid"/>
-          </a:ln>
-        </p:spPr>
-        <p:txBody>
-          <a:bodyPr xmlns:a="http://schemas.openxmlformats.org/drawingml/2006/main" wrap="none" lIns="0" tIns="0" rIns="0" bIns="0" anchor="t">
-            <a:noAutofit/>
-          </a:bodyPr>
-          <a:lstStyle xmlns:a="http://schemas.openxmlformats.org/drawingml/2006/main">
-            <a:defPPr algn="ctr">
-              <a:defRPr sz="1425" b="0">
-                <a:solidFill>
-                  <a:srgbClr val="52627B"/>
-                </a:solidFill>
-                <a:latin typeface="Nimbus Sans"/>
-                <a:ea typeface="Nimbus Sans"/>
-                <a:cs typeface="Nimbus Sans"/>
-              </a:defRPr>
-            </a:defPPr>
-            <a:lvl1pPr algn="ctr">
-              <a:defRPr sz="1425" b="0">
-                <a:solidFill>
-                  <a:srgbClr val="52627B"/>
-                </a:solidFill>
-                <a:latin typeface="Nimbus Sans"/>
-                <a:ea typeface="Nimbus Sans"/>
-                <a:cs typeface="Nimbus Sans"/>
-              </a:defRPr>
-            </a:lvl1pPr>
-            <a:lvl2pPr algn="ctr">
-              <a:defRPr sz="1425" b="0">
-                <a:solidFill>
-                  <a:srgbClr val="52627B"/>
-                </a:solidFill>
-                <a:latin typeface="Nimbus Sans"/>
-                <a:ea typeface="Nimbus Sans"/>
-                <a:cs typeface="Nimbus Sans"/>
-              </a:defRPr>
-            </a:lvl2pPr>
-            <a:lvl3pPr algn="ctr">
-              <a:defRPr sz="1425" b="0">
-                <a:solidFill>
-                  <a:srgbClr val="52627B"/>
-                </a:solidFill>
-                <a:latin typeface="Nimbus Sans"/>
-                <a:ea typeface="Nimbus Sans"/>
-                <a:cs typeface="Nimbus Sans"/>
-              </a:defRPr>
-            </a:lvl3pPr>
-            <a:lvl4pPr algn="ctr">
-              <a:defRPr sz="1425" b="0">
-                <a:solidFill>
-                  <a:srgbClr val="52627B"/>
-                </a:solidFill>
-                <a:latin typeface="Nimbus Sans"/>
-                <a:ea typeface="Nimbus Sans"/>
-                <a:cs typeface="Nimbus Sans"/>
-              </a:defRPr>
-            </a:lvl4pPr>
-            <a:lvl5pPr algn="ctr">
-              <a:defRPr sz="1425" b="0">
-                <a:solidFill>
-                  <a:srgbClr val="52627B"/>
-                </a:solidFill>
-                <a:latin typeface="Nimbus Sans"/>
-                <a:ea typeface="Nimbus Sans"/>
-                <a:cs typeface="Nimbus Sans"/>
-              </a:defRPr>
-            </a:lvl5pPr>
-            <a:lvl6pPr algn="ctr">
-              <a:defRPr sz="1425" b="0">
-                <a:solidFill>
-                  <a:srgbClr val="52627B"/>
-                </a:solidFill>
-                <a:latin typeface="Nimbus Sans"/>
-                <a:ea typeface="Nimbus Sans"/>
-                <a:cs typeface="Nimbus Sans"/>
-              </a:defRPr>
-            </a:lvl6pPr>
-            <a:lvl7pPr algn="ctr">
-              <a:defRPr sz="1425" b="0">
-                <a:solidFill>
-                  <a:srgbClr val="52627B"/>
-                </a:solidFill>
-                <a:latin typeface="Nimbus Sans"/>
-                <a:ea typeface="Nimbus Sans"/>
-                <a:cs typeface="Nimbus Sans"/>
-              </a:defRPr>
-            </a:lvl7pPr>
-            <a:lvl8pPr algn="ctr">
-              <a:defRPr sz="1425" b="0">
-                <a:solidFill>
-                  <a:srgbClr val="52627B"/>
-                </a:solidFill>
-                <a:latin typeface="Nimbus Sans"/>
-                <a:ea typeface="Nimbus Sans"/>
-                <a:cs typeface="Nimbus Sans"/>
-              </a:defRPr>
-            </a:lvl8pPr>
-            <a:lvl9pPr algn="ctr">
-              <a:defRPr sz="1425" b="0">
-                <a:solidFill>
-                  <a:srgbClr val="52627B"/>
-                </a:solidFill>
-                <a:latin typeface="Nimbus Sans"/>
-                <a:ea typeface="Nimbus Sans"/>
-                <a:cs typeface="Nimbus Sans"/>
-              </a:defRPr>
-            </a:lvl9pPr>
-          </a:lstStyle>
-          <a:p xmlns:a="http://schemas.openxmlformats.org/drawingml/2006/main">
-            <a:pPr algn="ctr">
-              <a:defRPr sz="1425" b="0">
-                <a:solidFill>
-                  <a:srgbClr val="52627B"/>
-                </a:solidFill>
-                <a:latin typeface="Nimbus Sans"/>
-                <a:ea typeface="Nimbus Sans"/>
-                <a:cs typeface="Nimbus Sans"/>
-              </a:defRPr>
-            </a:pPr>
-            <a:r>
-              <a:rPr sz="1425" b="0">
-                <a:solidFill>
-                  <a:srgbClr val="52627B"/>
-                </a:solidFill>
-                <a:latin typeface="Nimbus Sans"/>
-                <a:ea typeface="Nimbus Sans"/>
-                <a:cs typeface="Nimbus Sans"/>
-              </a:rPr>
-              <a:t>Selezione dei frame</a:t>
-            </a:r>
-          </a:p>
-          <a:p xmlns:a="http://schemas.openxmlformats.org/drawingml/2006/main">
-            <a:pPr algn="ctr">
-              <a:defRPr sz="1425" b="0">
-                <a:solidFill>
-                  <a:srgbClr val="52627B"/>
-                </a:solidFill>
-                <a:latin typeface="Nimbus Sans"/>
-                <a:ea typeface="Nimbus Sans"/>
-                <a:cs typeface="Nimbus Sans"/>
-              </a:defRPr>
-            </a:pPr>
-            <a:r>
-              <a:rPr sz="1425" b="0">
-                <a:solidFill>
-                  <a:srgbClr val="52627B"/>
-                </a:solidFill>
-                <a:latin typeface="Nimbus Sans"/>
-                <a:ea typeface="Nimbus Sans"/>
-                <a:cs typeface="Nimbus Sans"/>
-              </a:rPr>
-              <a:t>rilevanti da modificare</a:t>
-            </a:r>
-          </a:p>
-        </p:txBody>
-      </p:sp>
-      <p:sp>
-        <p:nvSpPr>
           <p:cNvPr id="45" name="f186">
             <a:extLst xmlns:a="http://schemas.openxmlformats.org/drawingml/2006/main">
               <a:ext uri="{FF2B5EF4-FFF2-40B4-BE49-F238E27FC236}">
-                <a16:creationId xmlns:a16="http://schemas.microsoft.com/office/drawing/2014/main" id="{702899C9-A636-4B4C-B548-EF949F1C3293}"/>
+                <a16:creationId xmlns:a16="http://schemas.microsoft.com/office/drawing/2014/main" id="{D2BB4608-34DE-46A6-AD6C-86E0BB32E8EB}"/>
               </a:ext>
             </a:extLst>
           </p:cNvPr>
@@ -23005,7 +22831,7 @@
           <p:cNvPr id="46" name="">
             <a:extLst xmlns:a="http://schemas.openxmlformats.org/drawingml/2006/main">
               <a:ext uri="{FF2B5EF4-FFF2-40B4-BE49-F238E27FC236}">
-                <a16:creationId xmlns:a16="http://schemas.microsoft.com/office/drawing/2014/main" id="{2641AB07-2FBC-4B2A-AB65-93E48583ADB8}"/>
+                <a16:creationId xmlns:a16="http://schemas.microsoft.com/office/drawing/2014/main" id="{C5EE1700-CF70-4441-BD73-A4A3C35BDC3A}"/>
               </a:ext>
             </a:extLst>
           </p:cNvPr>
@@ -23608,7 +23434,7 @@
           <p:cNvPr id="47" name="f188">
             <a:extLst xmlns:a="http://schemas.openxmlformats.org/drawingml/2006/main">
               <a:ext uri="{FF2B5EF4-FFF2-40B4-BE49-F238E27FC236}">
-                <a16:creationId xmlns:a16="http://schemas.microsoft.com/office/drawing/2014/main" id="{2DAE94E1-8B4A-49AF-AECB-23BA4C6E6D07}"/>
+                <a16:creationId xmlns:a16="http://schemas.microsoft.com/office/drawing/2014/main" id="{E36E5F54-D02F-42C1-A0A7-34E5AF369261}"/>
               </a:ext>
             </a:extLst>
           </p:cNvPr>
@@ -23767,7 +23593,7 @@
           <p:cNvPr id="48" name="f189">
             <a:extLst xmlns:a="http://schemas.openxmlformats.org/drawingml/2006/main">
               <a:ext uri="{FF2B5EF4-FFF2-40B4-BE49-F238E27FC236}">
-                <a16:creationId xmlns:a16="http://schemas.microsoft.com/office/drawing/2014/main" id="{4017E7A4-DE1C-4C7D-9920-524BC9D4D254}"/>
+                <a16:creationId xmlns:a16="http://schemas.microsoft.com/office/drawing/2014/main" id="{0243ED90-1A24-4D92-AD9E-4267784AA64E}"/>
               </a:ext>
             </a:extLst>
           </p:cNvPr>
@@ -23947,7 +23773,7 @@
     </p:spTree>
     <p:extLst>
       <p:ext uri="{BB962C8B-B14F-4D97-AF65-F5344CB8AC3E}">
-        <p14:creationId xmlns:p14="http://schemas.microsoft.com/office/powerpoint/2010/main" val="854085806"/>
+        <p14:creationId xmlns:p14="http://schemas.microsoft.com/office/powerpoint/2010/main" val="171307039"/>
       </p:ext>
     </p:extLst>
   </p:cSld>

--- a/5g-thesis-presentation-5min/tesi-5min.pptx
+++ b/5g-thesis-presentation-5min/tesi-5min.pptx
@@ -2,19 +2,19 @@
 <file path=ppt/presentation.xml><?xml version="1.0" encoding="utf-8"?>
 <p:presentation xmlns:p="http://schemas.openxmlformats.org/presentationml/2006/main">
   <p:sldMasterIdLst>
-    <p:sldMasterId xmlns:r="http://schemas.openxmlformats.org/officeDocument/2006/relationships" id="2147483648" r:id="R45c7171876144a49"/>
+    <p:sldMasterId xmlns:r="http://schemas.openxmlformats.org/officeDocument/2006/relationships" id="2147483648" r:id="R2ca2d8a7bc7d4b38"/>
   </p:sldMasterIdLst>
   <p:notesMasterIdLst>
-    <p:notesMasterId xmlns:r="http://schemas.openxmlformats.org/officeDocument/2006/relationships" r:id="R43868e43004a44aa"/>
+    <p:notesMasterId xmlns:r="http://schemas.openxmlformats.org/officeDocument/2006/relationships" r:id="R55425d0d98b84033"/>
   </p:notesMasterIdLst>
   <p:sldIdLst>
-    <p:sldId xmlns:r="http://schemas.openxmlformats.org/officeDocument/2006/relationships" id="256" r:id="R89a8cb36b901428c"/>
-    <p:sldId xmlns:r="http://schemas.openxmlformats.org/officeDocument/2006/relationships" id="257" r:id="Rc44d972dae8c4bd5"/>
-    <p:sldId xmlns:r="http://schemas.openxmlformats.org/officeDocument/2006/relationships" id="258" r:id="R8a69348e4f814a36"/>
-    <p:sldId xmlns:r="http://schemas.openxmlformats.org/officeDocument/2006/relationships" id="259" r:id="Rfe29da69dbc14462"/>
-    <p:sldId xmlns:r="http://schemas.openxmlformats.org/officeDocument/2006/relationships" id="260" r:id="R0115ff00dc104204"/>
-    <p:sldId xmlns:r="http://schemas.openxmlformats.org/officeDocument/2006/relationships" id="261" r:id="Rad1e9efb7cd7483d"/>
-    <p:sldId xmlns:r="http://schemas.openxmlformats.org/officeDocument/2006/relationships" id="262" r:id="Rccfa56830d424394"/>
+    <p:sldId xmlns:r="http://schemas.openxmlformats.org/officeDocument/2006/relationships" id="256" r:id="R90090369c0de4471"/>
+    <p:sldId xmlns:r="http://schemas.openxmlformats.org/officeDocument/2006/relationships" id="257" r:id="R229d8e9c322247ad"/>
+    <p:sldId xmlns:r="http://schemas.openxmlformats.org/officeDocument/2006/relationships" id="258" r:id="R59ae73be39254184"/>
+    <p:sldId xmlns:r="http://schemas.openxmlformats.org/officeDocument/2006/relationships" id="259" r:id="R77fe9015c59a4d1b"/>
+    <p:sldId xmlns:r="http://schemas.openxmlformats.org/officeDocument/2006/relationships" id="260" r:id="R768286205e0141cf"/>
+    <p:sldId xmlns:r="http://schemas.openxmlformats.org/officeDocument/2006/relationships" id="261" r:id="R2cd8f3f5fa064c5d"/>
+    <p:sldId xmlns:r="http://schemas.openxmlformats.org/officeDocument/2006/relationships" id="262" r:id="R4dd26d0b3eaa4406"/>
   </p:sldIdLst>
   <p:sldSz cx="15240000" cy="8572500"/>
   <p:notesSz cx="6858000" cy="9144000"/>
@@ -1053,7 +1053,7 @@
           <a:lstStyle xmlns:a="http://schemas.openxmlformats.org/drawingml/2006/main"/>
           <a:p xmlns:a="http://schemas.openxmlformats.org/drawingml/2006/main">
             <a:r>
-              <a:t>Per valutare la sensibilità del sistema ho introdotto modifiche controllate nelle catture. Il mutatore è separato dalla pipeline: riceve la PCAP originale e le evidenze del report baseline, individua i dati da modificare e produce la PCAP mutata. Questa torna nello stesso sistema di verifica, con la stessa DSL. Il confronto dei risultati deve corrispondere alla modifica introdotta. Nei 13 scenari completati ho ottenuto tutti i verdetti attesi. Gli esempi mostrano il cambio di stato NRF da HTTP 200 a 403, la violazione dell’intervallo temporale nel caso AMF A e la rimozione degli F-TEID disponibili per la verifica UPF. In quest’ultimo esperimento sono state rimosse le risposte PFCP rilevanti, producendo INCONCLUSIVE.</a:t>
+              <a:t>[Prima fase: baseline in evidenza. Un clic passa alla seconda fase: mutazione in evidenza. DSL e pipeline restano sempre attivi.] Per valutare la sensibilità del sistema ho introdotto modifiche controllate nelle catture. Il mutatore è separato dalla pipeline: riceve la PCAP originale e le evidenze del report baseline, individua i dati da modificare e produce la PCAP mutata. Questa torna nello stesso sistema di verifica, con la stessa DSL. Il confronto dei risultati deve corrispondere alla modifica introdotta. Nei 13 scenari completati ho ottenuto tutti i verdetti attesi. Gli esempi mostrano il cambio di stato NRF da HTTP 200 a 403, la violazione dell’intervallo temporale nel caso AMF A e la rimozione degli F-TEID disponibili per la verifica UPF. In quest’ultimo esperimento sono state rimosse le risposte PFCP rilevanti, producendo INCONCLUSIVE.</a:t>
             </a:r>
           </a:p>
           <a:p xmlns:a="http://schemas.openxmlformats.org/drawingml/2006/main">
@@ -1135,7 +1135,7 @@
           <p:cNvPr id="3" name="Title">
             <a:extLst xmlns:a="http://schemas.openxmlformats.org/drawingml/2006/main">
               <a:ext uri="{FF2B5EF4-FFF2-40B4-BE49-F238E27FC236}">
-                <a16:creationId xmlns:a16="http://schemas.microsoft.com/office/drawing/2014/main" id="{8FE6C73A-BBCE-4D70-AE6B-BA1B16477AA2}"/>
+                <a16:creationId xmlns:a16="http://schemas.microsoft.com/office/drawing/2014/main" id="{E4349258-73DC-4F40-B220-529F8B7A1DAA}"/>
               </a:ext>
             </a:extLst>
           </p:cNvPr>
@@ -1364,7 +1364,7 @@
           <p:cNvPr id="2" name="Subtitle">
             <a:extLst xmlns:a="http://schemas.openxmlformats.org/drawingml/2006/main">
               <a:ext uri="{FF2B5EF4-FFF2-40B4-BE49-F238E27FC236}">
-                <a16:creationId xmlns:a16="http://schemas.microsoft.com/office/drawing/2014/main" id="{2547F167-2F2A-4616-829C-DC0D8D41C126}"/>
+                <a16:creationId xmlns:a16="http://schemas.microsoft.com/office/drawing/2014/main" id="{4AFFB083-48F1-4F74-9DB1-5945E00F92C4}"/>
               </a:ext>
             </a:extLst>
           </p:cNvPr>
@@ -1610,7 +1610,7 @@
           <p:cNvPr id="2" name="Section title">
             <a:extLst xmlns:a="http://schemas.openxmlformats.org/drawingml/2006/main">
               <a:ext uri="{FF2B5EF4-FFF2-40B4-BE49-F238E27FC236}">
-                <a16:creationId xmlns:a16="http://schemas.microsoft.com/office/drawing/2014/main" id="{D6DA0569-94FF-450A-8C2B-6BBB0DDAEDBE}"/>
+                <a16:creationId xmlns:a16="http://schemas.microsoft.com/office/drawing/2014/main" id="{6637C521-8648-4AE8-9BF5-539F81868292}"/>
               </a:ext>
             </a:extLst>
           </p:cNvPr>
@@ -1856,7 +1856,7 @@
           <p:cNvPr id="3" name="Title">
             <a:extLst xmlns:a="http://schemas.openxmlformats.org/drawingml/2006/main">
               <a:ext uri="{FF2B5EF4-FFF2-40B4-BE49-F238E27FC236}">
-                <a16:creationId xmlns:a16="http://schemas.microsoft.com/office/drawing/2014/main" id="{5BCA3811-F8F4-45DF-9C54-7CDCFE32B0A1}"/>
+                <a16:creationId xmlns:a16="http://schemas.microsoft.com/office/drawing/2014/main" id="{18AB4CD2-BB9C-4196-BBF3-55B57CF98469}"/>
               </a:ext>
             </a:extLst>
           </p:cNvPr>
@@ -2085,7 +2085,7 @@
           <p:cNvPr id="2" name="Body">
             <a:extLst xmlns:a="http://schemas.openxmlformats.org/drawingml/2006/main">
               <a:ext uri="{FF2B5EF4-FFF2-40B4-BE49-F238E27FC236}">
-                <a16:creationId xmlns:a16="http://schemas.microsoft.com/office/drawing/2014/main" id="{5CDB676D-ADA2-47A7-AB6B-D1C296F3C177}"/>
+                <a16:creationId xmlns:a16="http://schemas.microsoft.com/office/drawing/2014/main" id="{6BC370F6-02E9-4127-B6F5-484C89BD306C}"/>
               </a:ext>
             </a:extLst>
           </p:cNvPr>
@@ -2331,7 +2331,7 @@
           <p:cNvPr id="4" name="Title">
             <a:extLst xmlns:a="http://schemas.openxmlformats.org/drawingml/2006/main">
               <a:ext uri="{FF2B5EF4-FFF2-40B4-BE49-F238E27FC236}">
-                <a16:creationId xmlns:a16="http://schemas.microsoft.com/office/drawing/2014/main" id="{BECB4981-7089-44E9-92D1-AF95D89960D0}"/>
+                <a16:creationId xmlns:a16="http://schemas.microsoft.com/office/drawing/2014/main" id="{6E944ABF-EA58-4685-BDBD-3B261410DBC5}"/>
               </a:ext>
             </a:extLst>
           </p:cNvPr>
@@ -2560,7 +2560,7 @@
           <p:cNvPr id="2" name="Left column">
             <a:extLst xmlns:a="http://schemas.openxmlformats.org/drawingml/2006/main">
               <a:ext uri="{FF2B5EF4-FFF2-40B4-BE49-F238E27FC236}">
-                <a16:creationId xmlns:a16="http://schemas.microsoft.com/office/drawing/2014/main" id="{5803174A-9FCF-4E3D-B7D0-FEA43AECEE19}"/>
+                <a16:creationId xmlns:a16="http://schemas.microsoft.com/office/drawing/2014/main" id="{1E33F2F6-9079-49F1-A97D-750E1CF3F8E3}"/>
               </a:ext>
             </a:extLst>
           </p:cNvPr>
@@ -2789,7 +2789,7 @@
           <p:cNvPr id="3" name="Right column">
             <a:extLst xmlns:a="http://schemas.openxmlformats.org/drawingml/2006/main">
               <a:ext uri="{FF2B5EF4-FFF2-40B4-BE49-F238E27FC236}">
-                <a16:creationId xmlns:a16="http://schemas.microsoft.com/office/drawing/2014/main" id="{9DC75260-157F-4AE6-B53A-313EEE665B98}"/>
+                <a16:creationId xmlns:a16="http://schemas.microsoft.com/office/drawing/2014/main" id="{5C67A6F7-2C98-49DE-ADF0-9D44CD69232B}"/>
               </a:ext>
             </a:extLst>
           </p:cNvPr>
@@ -3035,7 +3035,7 @@
           <p:cNvPr id="3" name="Title">
             <a:extLst xmlns:a="http://schemas.openxmlformats.org/drawingml/2006/main">
               <a:ext uri="{FF2B5EF4-FFF2-40B4-BE49-F238E27FC236}">
-                <a16:creationId xmlns:a16="http://schemas.microsoft.com/office/drawing/2014/main" id="{843AF58A-BC44-4CBD-81E4-1EC4D2FCB0BB}"/>
+                <a16:creationId xmlns:a16="http://schemas.microsoft.com/office/drawing/2014/main" id="{7F752A6E-A98C-414D-A9B0-174B861CEE35}"/>
               </a:ext>
             </a:extLst>
           </p:cNvPr>
@@ -3264,7 +3264,7 @@
           <p:cNvPr id="2" name="Left column">
             <a:extLst xmlns:a="http://schemas.openxmlformats.org/drawingml/2006/main">
               <a:ext uri="{FF2B5EF4-FFF2-40B4-BE49-F238E27FC236}">
-                <a16:creationId xmlns:a16="http://schemas.microsoft.com/office/drawing/2014/main" id="{1E0C145F-82F3-41EE-B8E8-1024FC5C0BB2}"/>
+                <a16:creationId xmlns:a16="http://schemas.microsoft.com/office/drawing/2014/main" id="{61D78A9D-5ED4-4693-BBB0-3D1C5BA5C400}"/>
               </a:ext>
             </a:extLst>
           </p:cNvPr>
@@ -3531,12 +3531,12 @@
   </p:cSld>
   <p:clrMap bg1="lt1" tx1="dk1" bg2="lt2" tx2="dk2" accent1="accent1" accent2="accent2" accent3="accent3" accent4="accent4" accent5="accent5" accent6="accent6" hlink="hlink" folHlink="folHlink"/>
   <p:sldLayoutIdLst>
-    <p:sldLayoutId xmlns:r="http://schemas.openxmlformats.org/officeDocument/2006/relationships" id="2147483649" r:id="R4fb492e712c24ce5"/>
-    <p:sldLayoutId xmlns:r="http://schemas.openxmlformats.org/officeDocument/2006/relationships" id="2147483650" r:id="Ra550e679a33a4b6d"/>
-    <p:sldLayoutId xmlns:r="http://schemas.openxmlformats.org/officeDocument/2006/relationships" id="2147483651" r:id="R49a02fae15634e7d"/>
-    <p:sldLayoutId xmlns:r="http://schemas.openxmlformats.org/officeDocument/2006/relationships" id="2147483652" r:id="Rcc5c6d6bc0b84d08"/>
-    <p:sldLayoutId xmlns:r="http://schemas.openxmlformats.org/officeDocument/2006/relationships" id="2147483653" r:id="Rc6d1285052004112"/>
-    <p:sldLayoutId xmlns:r="http://schemas.openxmlformats.org/officeDocument/2006/relationships" id="2147483654" r:id="R1b2f2946f3f64cdb"/>
+    <p:sldLayoutId xmlns:r="http://schemas.openxmlformats.org/officeDocument/2006/relationships" id="2147483649" r:id="R634f08903e844444"/>
+    <p:sldLayoutId xmlns:r="http://schemas.openxmlformats.org/officeDocument/2006/relationships" id="2147483650" r:id="Rb62e7b7debfb49f4"/>
+    <p:sldLayoutId xmlns:r="http://schemas.openxmlformats.org/officeDocument/2006/relationships" id="2147483651" r:id="Rea4189e311e04d98"/>
+    <p:sldLayoutId xmlns:r="http://schemas.openxmlformats.org/officeDocument/2006/relationships" id="2147483652" r:id="R9295788890c94e80"/>
+    <p:sldLayoutId xmlns:r="http://schemas.openxmlformats.org/officeDocument/2006/relationships" id="2147483653" r:id="Rfa2ad073730c4a86"/>
+    <p:sldLayoutId xmlns:r="http://schemas.openxmlformats.org/officeDocument/2006/relationships" id="2147483654" r:id="R78b1918674934552"/>
   </p:sldLayoutIdLst>
   <p:txStyles>
     <p:titleStyle>
@@ -4087,7 +4087,7 @@
           <p:cNvPr id="21" name="">
             <a:extLst xmlns:a="http://schemas.openxmlformats.org/drawingml/2006/main">
               <a:ext uri="{FF2B5EF4-FFF2-40B4-BE49-F238E27FC236}">
-                <a16:creationId xmlns:a16="http://schemas.microsoft.com/office/drawing/2014/main" id="{EF03AD46-624E-454B-9DB3-0287F41BD9FC}"/>
+                <a16:creationId xmlns:a16="http://schemas.microsoft.com/office/drawing/2014/main" id="{7D45A3AF-40C0-4454-B573-6AD74A981AED}"/>
               </a:ext>
             </a:extLst>
           </p:cNvPr>
@@ -4097,7 +4097,7 @@
           <p:nvPr/>
         </p:nvPicPr>
         <p:blipFill>
-          <a:blip xmlns:r="http://schemas.openxmlformats.org/officeDocument/2006/relationships" xmlns:a="http://schemas.openxmlformats.org/drawingml/2006/main" r:embed="R460e947876964cd3"/>
+          <a:blip xmlns:r="http://schemas.openxmlformats.org/officeDocument/2006/relationships" xmlns:a="http://schemas.openxmlformats.org/drawingml/2006/main" r:embed="Re5ce24a44eeb4502"/>
           <a:stretch xmlns:a="http://schemas.openxmlformats.org/drawingml/2006/main"/>
         </p:blipFill>
         <p:spPr>
@@ -4115,7 +4115,7 @@
           <p:cNvPr id="2" name="f2">
             <a:extLst xmlns:a="http://schemas.openxmlformats.org/drawingml/2006/main">
               <a:ext uri="{FF2B5EF4-FFF2-40B4-BE49-F238E27FC236}">
-                <a16:creationId xmlns:a16="http://schemas.microsoft.com/office/drawing/2014/main" id="{3E2BB6A3-9DE3-444D-A320-2F09A9D4B8DD}"/>
+                <a16:creationId xmlns:a16="http://schemas.microsoft.com/office/drawing/2014/main" id="{3C21C327-AC37-4AA7-87BE-8387918D8263}"/>
               </a:ext>
             </a:extLst>
           </p:cNvPr>
@@ -4274,7 +4274,7 @@
           <p:cNvPr id="3" name="f3">
             <a:extLst xmlns:a="http://schemas.openxmlformats.org/drawingml/2006/main">
               <a:ext uri="{FF2B5EF4-FFF2-40B4-BE49-F238E27FC236}">
-                <a16:creationId xmlns:a16="http://schemas.microsoft.com/office/drawing/2014/main" id="{0651A0D3-6833-4FF7-AC1F-CD575C718273}"/>
+                <a16:creationId xmlns:a16="http://schemas.microsoft.com/office/drawing/2014/main" id="{A3FF57A9-0712-4887-A63B-65B75B65D456}"/>
               </a:ext>
             </a:extLst>
           </p:cNvPr>
@@ -4433,7 +4433,7 @@
           <p:cNvPr id="4" name="f4">
             <a:extLst xmlns:a="http://schemas.openxmlformats.org/drawingml/2006/main">
               <a:ext uri="{FF2B5EF4-FFF2-40B4-BE49-F238E27FC236}">
-                <a16:creationId xmlns:a16="http://schemas.microsoft.com/office/drawing/2014/main" id="{EA3A99D5-D31D-4828-90BF-A56537AD49AD}"/>
+                <a16:creationId xmlns:a16="http://schemas.microsoft.com/office/drawing/2014/main" id="{61FE4749-C415-451E-8887-952FB2A98589}"/>
               </a:ext>
             </a:extLst>
           </p:cNvPr>
@@ -4592,7 +4592,7 @@
           <p:cNvPr id="5" name="f5">
             <a:extLst xmlns:a="http://schemas.openxmlformats.org/drawingml/2006/main">
               <a:ext uri="{FF2B5EF4-FFF2-40B4-BE49-F238E27FC236}">
-                <a16:creationId xmlns:a16="http://schemas.microsoft.com/office/drawing/2014/main" id="{0D0D9FB3-8DEE-440C-B1CB-A592D9545CBA}"/>
+                <a16:creationId xmlns:a16="http://schemas.microsoft.com/office/drawing/2014/main" id="{2A7D6AC7-C334-4EA3-AA9B-C4BE7B617E23}"/>
               </a:ext>
             </a:extLst>
           </p:cNvPr>
@@ -4751,7 +4751,7 @@
           <p:cNvPr id="6" name="f6">
             <a:extLst xmlns:a="http://schemas.openxmlformats.org/drawingml/2006/main">
               <a:ext uri="{FF2B5EF4-FFF2-40B4-BE49-F238E27FC236}">
-                <a16:creationId xmlns:a16="http://schemas.microsoft.com/office/drawing/2014/main" id="{DD227CE4-EAAE-432A-AE9D-1427C96A1EA7}"/>
+                <a16:creationId xmlns:a16="http://schemas.microsoft.com/office/drawing/2014/main" id="{85F59F09-2A2C-4607-90F1-561A78635122}"/>
               </a:ext>
             </a:extLst>
           </p:cNvPr>
@@ -4910,7 +4910,7 @@
           <p:cNvPr id="7" name="f7">
             <a:extLst xmlns:a="http://schemas.openxmlformats.org/drawingml/2006/main">
               <a:ext uri="{FF2B5EF4-FFF2-40B4-BE49-F238E27FC236}">
-                <a16:creationId xmlns:a16="http://schemas.microsoft.com/office/drawing/2014/main" id="{036C3A9A-EAD4-4892-B2D9-2E4B3819F8C9}"/>
+                <a16:creationId xmlns:a16="http://schemas.microsoft.com/office/drawing/2014/main" id="{650F8B68-F6FA-4A44-B5D0-95967B072EA4}"/>
               </a:ext>
             </a:extLst>
           </p:cNvPr>
@@ -5069,7 +5069,7 @@
           <p:cNvPr id="8" name="f8">
             <a:extLst xmlns:a="http://schemas.openxmlformats.org/drawingml/2006/main">
               <a:ext uri="{FF2B5EF4-FFF2-40B4-BE49-F238E27FC236}">
-                <a16:creationId xmlns:a16="http://schemas.microsoft.com/office/drawing/2014/main" id="{C58305C9-7703-4D80-8525-2C6430F6422E}"/>
+                <a16:creationId xmlns:a16="http://schemas.microsoft.com/office/drawing/2014/main" id="{1D360B00-98C3-44FB-959F-7408B4EB5C58}"/>
               </a:ext>
             </a:extLst>
           </p:cNvPr>
@@ -5228,7 +5228,7 @@
           <p:cNvPr id="9" name="f9">
             <a:extLst xmlns:a="http://schemas.openxmlformats.org/drawingml/2006/main">
               <a:ext uri="{FF2B5EF4-FFF2-40B4-BE49-F238E27FC236}">
-                <a16:creationId xmlns:a16="http://schemas.microsoft.com/office/drawing/2014/main" id="{6D50A069-25F4-4D93-9BA6-82711785BCB0}"/>
+                <a16:creationId xmlns:a16="http://schemas.microsoft.com/office/drawing/2014/main" id="{C100A410-579B-44D3-9214-B8DFA4D6B24F}"/>
               </a:ext>
             </a:extLst>
           </p:cNvPr>
@@ -5387,7 +5387,7 @@
           <p:cNvPr id="10" name="f10">
             <a:extLst xmlns:a="http://schemas.openxmlformats.org/drawingml/2006/main">
               <a:ext uri="{FF2B5EF4-FFF2-40B4-BE49-F238E27FC236}">
-                <a16:creationId xmlns:a16="http://schemas.microsoft.com/office/drawing/2014/main" id="{769A7FB0-63C1-40DF-96EF-A30420ACF19E}"/>
+                <a16:creationId xmlns:a16="http://schemas.microsoft.com/office/drawing/2014/main" id="{9D99E828-72A1-4005-9947-57F07FBBC673}"/>
               </a:ext>
             </a:extLst>
           </p:cNvPr>
@@ -5546,7 +5546,7 @@
           <p:cNvPr id="11" name="f11">
             <a:extLst xmlns:a="http://schemas.openxmlformats.org/drawingml/2006/main">
               <a:ext uri="{FF2B5EF4-FFF2-40B4-BE49-F238E27FC236}">
-                <a16:creationId xmlns:a16="http://schemas.microsoft.com/office/drawing/2014/main" id="{6CC3875E-1D87-4AE2-B0B6-040556F6F0F4}"/>
+                <a16:creationId xmlns:a16="http://schemas.microsoft.com/office/drawing/2014/main" id="{8F11941A-4A46-4BB3-9999-8961A746BCEE}"/>
               </a:ext>
             </a:extLst>
           </p:cNvPr>
@@ -5705,7 +5705,7 @@
           <p:cNvPr id="12" name="f12">
             <a:extLst xmlns:a="http://schemas.openxmlformats.org/drawingml/2006/main">
               <a:ext uri="{FF2B5EF4-FFF2-40B4-BE49-F238E27FC236}">
-                <a16:creationId xmlns:a16="http://schemas.microsoft.com/office/drawing/2014/main" id="{7471D0FC-9208-4A04-88C4-3CFB51517729}"/>
+                <a16:creationId xmlns:a16="http://schemas.microsoft.com/office/drawing/2014/main" id="{81714A75-F66A-468C-950F-0EAE0FB0FB80}"/>
               </a:ext>
             </a:extLst>
           </p:cNvPr>
@@ -5864,7 +5864,7 @@
           <p:cNvPr id="13" name="f13">
             <a:extLst xmlns:a="http://schemas.openxmlformats.org/drawingml/2006/main">
               <a:ext uri="{FF2B5EF4-FFF2-40B4-BE49-F238E27FC236}">
-                <a16:creationId xmlns:a16="http://schemas.microsoft.com/office/drawing/2014/main" id="{39BEF633-0628-43B6-8CD3-73B4B5092F7F}"/>
+                <a16:creationId xmlns:a16="http://schemas.microsoft.com/office/drawing/2014/main" id="{B1935F4A-CED3-4D27-8AD0-B8B6EA1114B2}"/>
               </a:ext>
             </a:extLst>
           </p:cNvPr>
@@ -6023,7 +6023,7 @@
           <p:cNvPr id="14" name="f14">
             <a:extLst xmlns:a="http://schemas.openxmlformats.org/drawingml/2006/main">
               <a:ext uri="{FF2B5EF4-FFF2-40B4-BE49-F238E27FC236}">
-                <a16:creationId xmlns:a16="http://schemas.microsoft.com/office/drawing/2014/main" id="{60E3524A-5D0B-413F-B95F-9E42DD530ABE}"/>
+                <a16:creationId xmlns:a16="http://schemas.microsoft.com/office/drawing/2014/main" id="{2DBFC8DC-F048-4E00-9400-D8E05766C151}"/>
               </a:ext>
             </a:extLst>
           </p:cNvPr>
@@ -6182,7 +6182,7 @@
           <p:cNvPr id="15" name="f15">
             <a:extLst xmlns:a="http://schemas.openxmlformats.org/drawingml/2006/main">
               <a:ext uri="{FF2B5EF4-FFF2-40B4-BE49-F238E27FC236}">
-                <a16:creationId xmlns:a16="http://schemas.microsoft.com/office/drawing/2014/main" id="{131A3327-3FC5-44D2-AC97-08E3088E98D1}"/>
+                <a16:creationId xmlns:a16="http://schemas.microsoft.com/office/drawing/2014/main" id="{348EC166-6C28-4227-9F5F-22EEC7382FDF}"/>
               </a:ext>
             </a:extLst>
           </p:cNvPr>
@@ -6341,7 +6341,7 @@
           <p:cNvPr id="16" name="f16">
             <a:extLst xmlns:a="http://schemas.openxmlformats.org/drawingml/2006/main">
               <a:ext uri="{FF2B5EF4-FFF2-40B4-BE49-F238E27FC236}">
-                <a16:creationId xmlns:a16="http://schemas.microsoft.com/office/drawing/2014/main" id="{988B0B97-4DB2-461F-934D-C8F76F0EF7F0}"/>
+                <a16:creationId xmlns:a16="http://schemas.microsoft.com/office/drawing/2014/main" id="{AB9F7DB8-6929-484A-A675-F9DBA27CA41A}"/>
               </a:ext>
             </a:extLst>
           </p:cNvPr>
@@ -6500,7 +6500,7 @@
           <p:cNvPr id="17" name="f17">
             <a:extLst xmlns:a="http://schemas.openxmlformats.org/drawingml/2006/main">
               <a:ext uri="{FF2B5EF4-FFF2-40B4-BE49-F238E27FC236}">
-                <a16:creationId xmlns:a16="http://schemas.microsoft.com/office/drawing/2014/main" id="{43AFB416-4970-4A6C-8BE4-D701AFAFC65C}"/>
+                <a16:creationId xmlns:a16="http://schemas.microsoft.com/office/drawing/2014/main" id="{4ADE4287-797E-4CC1-8119-EAF1D9F554DA}"/>
               </a:ext>
             </a:extLst>
           </p:cNvPr>
@@ -6659,7 +6659,7 @@
           <p:cNvPr id="18" name="f18">
             <a:extLst xmlns:a="http://schemas.openxmlformats.org/drawingml/2006/main">
               <a:ext uri="{FF2B5EF4-FFF2-40B4-BE49-F238E27FC236}">
-                <a16:creationId xmlns:a16="http://schemas.microsoft.com/office/drawing/2014/main" id="{0F50D955-4B09-4C80-A27F-BABD7D2E5FC2}"/>
+                <a16:creationId xmlns:a16="http://schemas.microsoft.com/office/drawing/2014/main" id="{358D8C0E-DBE4-4CA9-A583-9B0B90112B57}"/>
               </a:ext>
             </a:extLst>
           </p:cNvPr>
@@ -6818,7 +6818,7 @@
           <p:cNvPr id="19" name="f19">
             <a:extLst xmlns:a="http://schemas.openxmlformats.org/drawingml/2006/main">
               <a:ext uri="{FF2B5EF4-FFF2-40B4-BE49-F238E27FC236}">
-                <a16:creationId xmlns:a16="http://schemas.microsoft.com/office/drawing/2014/main" id="{91C9588D-6CD4-43F5-B66E-ACF163ED31E6}"/>
+                <a16:creationId xmlns:a16="http://schemas.microsoft.com/office/drawing/2014/main" id="{D1B4F772-B7C7-4566-BAA5-CF08892C991D}"/>
               </a:ext>
             </a:extLst>
           </p:cNvPr>
@@ -6977,7 +6977,7 @@
           <p:cNvPr id="20" name="f20">
             <a:extLst xmlns:a="http://schemas.openxmlformats.org/drawingml/2006/main">
               <a:ext uri="{FF2B5EF4-FFF2-40B4-BE49-F238E27FC236}">
-                <a16:creationId xmlns:a16="http://schemas.microsoft.com/office/drawing/2014/main" id="{8EB0730B-2DB8-49E4-9AAF-108A0BE7AE7A}"/>
+                <a16:creationId xmlns:a16="http://schemas.microsoft.com/office/drawing/2014/main" id="{8FF84202-338C-481C-B1ED-7612A9C2C6A5}"/>
               </a:ext>
             </a:extLst>
           </p:cNvPr>
@@ -7134,7 +7134,7 @@
     </p:spTree>
     <p:extLst>
       <p:ext uri="{BB962C8B-B14F-4D97-AF65-F5344CB8AC3E}">
-        <p14:creationId xmlns:p14="http://schemas.microsoft.com/office/powerpoint/2010/main" val="372116789"/>
+        <p14:creationId xmlns:p14="http://schemas.microsoft.com/office/powerpoint/2010/main" val="1191677107"/>
       </p:ext>
     </p:extLst>
   </p:cSld>
@@ -7165,7 +7165,7 @@
           <p:cNvPr id="24" name="f21">
             <a:extLst xmlns:a="http://schemas.openxmlformats.org/drawingml/2006/main">
               <a:ext uri="{FF2B5EF4-FFF2-40B4-BE49-F238E27FC236}">
-                <a16:creationId xmlns:a16="http://schemas.microsoft.com/office/drawing/2014/main" id="{ED6CB717-ABBE-4557-A8BC-523E97D66540}"/>
+                <a16:creationId xmlns:a16="http://schemas.microsoft.com/office/drawing/2014/main" id="{1AB6216C-28FA-4E7A-984A-CFF73174CE14}"/>
               </a:ext>
             </a:extLst>
           </p:cNvPr>
@@ -7324,7 +7324,7 @@
           <p:cNvPr id="2" name="f22">
             <a:extLst xmlns:a="http://schemas.openxmlformats.org/drawingml/2006/main">
               <a:ext uri="{FF2B5EF4-FFF2-40B4-BE49-F238E27FC236}">
-                <a16:creationId xmlns:a16="http://schemas.microsoft.com/office/drawing/2014/main" id="{733A0C94-0968-47B8-90D5-E212BC8A5D07}"/>
+                <a16:creationId xmlns:a16="http://schemas.microsoft.com/office/drawing/2014/main" id="{9AFA3FF2-BD9E-4AF9-ACF8-8256FF4B92FD}"/>
               </a:ext>
             </a:extLst>
           </p:cNvPr>
@@ -7483,7 +7483,7 @@
           <p:cNvPr id="3" name="f23">
             <a:extLst xmlns:a="http://schemas.openxmlformats.org/drawingml/2006/main">
               <a:ext uri="{FF2B5EF4-FFF2-40B4-BE49-F238E27FC236}">
-                <a16:creationId xmlns:a16="http://schemas.microsoft.com/office/drawing/2014/main" id="{E682C433-4127-4492-821B-EEC89F79AFF3}"/>
+                <a16:creationId xmlns:a16="http://schemas.microsoft.com/office/drawing/2014/main" id="{62C36A55-CA70-484D-97B7-55050D74E469}"/>
               </a:ext>
             </a:extLst>
           </p:cNvPr>
@@ -7642,7 +7642,7 @@
           <p:cNvPr id="4" name="f24">
             <a:extLst xmlns:a="http://schemas.openxmlformats.org/drawingml/2006/main">
               <a:ext uri="{FF2B5EF4-FFF2-40B4-BE49-F238E27FC236}">
-                <a16:creationId xmlns:a16="http://schemas.microsoft.com/office/drawing/2014/main" id="{62CF49C3-5C95-4E12-9E3A-EBFE4BF614F7}"/>
+                <a16:creationId xmlns:a16="http://schemas.microsoft.com/office/drawing/2014/main" id="{474D705C-002E-459A-A278-E84C214AD689}"/>
               </a:ext>
             </a:extLst>
           </p:cNvPr>
@@ -7801,7 +7801,7 @@
           <p:cNvPr id="5" name="f25">
             <a:extLst xmlns:a="http://schemas.openxmlformats.org/drawingml/2006/main">
               <a:ext uri="{FF2B5EF4-FFF2-40B4-BE49-F238E27FC236}">
-                <a16:creationId xmlns:a16="http://schemas.microsoft.com/office/drawing/2014/main" id="{71890CED-2DBF-4894-B458-64E0E1493FE0}"/>
+                <a16:creationId xmlns:a16="http://schemas.microsoft.com/office/drawing/2014/main" id="{F089B7C9-86E6-42B3-A922-68DDE2B6BF56}"/>
               </a:ext>
             </a:extLst>
           </p:cNvPr>
@@ -7960,7 +7960,7 @@
           <p:cNvPr id="6" name="f26">
             <a:extLst xmlns:a="http://schemas.openxmlformats.org/drawingml/2006/main">
               <a:ext uri="{FF2B5EF4-FFF2-40B4-BE49-F238E27FC236}">
-                <a16:creationId xmlns:a16="http://schemas.microsoft.com/office/drawing/2014/main" id="{3319DDFE-1CE5-412F-938B-989D4603E202}"/>
+                <a16:creationId xmlns:a16="http://schemas.microsoft.com/office/drawing/2014/main" id="{E158022F-004A-4F7C-A8C0-0AB554ACE41A}"/>
               </a:ext>
             </a:extLst>
           </p:cNvPr>
@@ -8119,7 +8119,7 @@
           <p:cNvPr id="7" name="f27">
             <a:extLst xmlns:a="http://schemas.openxmlformats.org/drawingml/2006/main">
               <a:ext uri="{FF2B5EF4-FFF2-40B4-BE49-F238E27FC236}">
-                <a16:creationId xmlns:a16="http://schemas.microsoft.com/office/drawing/2014/main" id="{84236307-E0A5-40E9-A6B1-66FA846E9724}"/>
+                <a16:creationId xmlns:a16="http://schemas.microsoft.com/office/drawing/2014/main" id="{17C7A4AC-9C82-4017-8C31-9BB8714675CC}"/>
               </a:ext>
             </a:extLst>
           </p:cNvPr>
@@ -8154,7 +8154,7 @@
           <p:cNvPr id="8" name="f28">
             <a:extLst xmlns:a="http://schemas.openxmlformats.org/drawingml/2006/main">
               <a:ext uri="{FF2B5EF4-FFF2-40B4-BE49-F238E27FC236}">
-                <a16:creationId xmlns:a16="http://schemas.microsoft.com/office/drawing/2014/main" id="{9A9F7338-B46D-47F3-808C-EFB257C39D5C}"/>
+                <a16:creationId xmlns:a16="http://schemas.microsoft.com/office/drawing/2014/main" id="{41857395-0270-440D-B6F0-37EEB9824680}"/>
               </a:ext>
             </a:extLst>
           </p:cNvPr>
@@ -8185,7 +8185,7 @@
           <p:cNvPr id="9" name="f29">
             <a:extLst xmlns:a="http://schemas.openxmlformats.org/drawingml/2006/main">
               <a:ext uri="{FF2B5EF4-FFF2-40B4-BE49-F238E27FC236}">
-                <a16:creationId xmlns:a16="http://schemas.microsoft.com/office/drawing/2014/main" id="{F9A6E795-0714-4694-A117-75264AD1BD9F}"/>
+                <a16:creationId xmlns:a16="http://schemas.microsoft.com/office/drawing/2014/main" id="{FC0A7FD7-32DE-4E18-8019-C46D74013154}"/>
               </a:ext>
             </a:extLst>
           </p:cNvPr>
@@ -8216,7 +8216,7 @@
           <p:cNvPr id="10" name="f30">
             <a:extLst xmlns:a="http://schemas.openxmlformats.org/drawingml/2006/main">
               <a:ext uri="{FF2B5EF4-FFF2-40B4-BE49-F238E27FC236}">
-                <a16:creationId xmlns:a16="http://schemas.microsoft.com/office/drawing/2014/main" id="{65AFC1C3-286B-4E10-B0E8-BCCCE6EE6659}"/>
+                <a16:creationId xmlns:a16="http://schemas.microsoft.com/office/drawing/2014/main" id="{D884B14E-59B4-4A80-ABF6-79D38571572E}"/>
               </a:ext>
             </a:extLst>
           </p:cNvPr>
@@ -8247,7 +8247,7 @@
           <p:cNvPr id="11" name="f31">
             <a:extLst xmlns:a="http://schemas.openxmlformats.org/drawingml/2006/main">
               <a:ext uri="{FF2B5EF4-FFF2-40B4-BE49-F238E27FC236}">
-                <a16:creationId xmlns:a16="http://schemas.microsoft.com/office/drawing/2014/main" id="{83831625-D1C1-4BCA-AD07-5408A5954A5D}"/>
+                <a16:creationId xmlns:a16="http://schemas.microsoft.com/office/drawing/2014/main" id="{B1B120A2-D9E1-42BA-B7C5-5890FEBBE31D}"/>
               </a:ext>
             </a:extLst>
           </p:cNvPr>
@@ -8282,7 +8282,7 @@
           <p:cNvPr id="12" name="f32">
             <a:extLst xmlns:a="http://schemas.openxmlformats.org/drawingml/2006/main">
               <a:ext uri="{FF2B5EF4-FFF2-40B4-BE49-F238E27FC236}">
-                <a16:creationId xmlns:a16="http://schemas.microsoft.com/office/drawing/2014/main" id="{61968A65-63BE-4233-9C04-F239C6FBDD1F}"/>
+                <a16:creationId xmlns:a16="http://schemas.microsoft.com/office/drawing/2014/main" id="{BFB1AF1F-8CB7-4D7F-9850-69DF8F113AAA}"/>
               </a:ext>
             </a:extLst>
           </p:cNvPr>
@@ -8313,7 +8313,7 @@
           <p:cNvPr id="13" name="f33">
             <a:extLst xmlns:a="http://schemas.openxmlformats.org/drawingml/2006/main">
               <a:ext uri="{FF2B5EF4-FFF2-40B4-BE49-F238E27FC236}">
-                <a16:creationId xmlns:a16="http://schemas.microsoft.com/office/drawing/2014/main" id="{C9D37ED6-AB6B-4EE4-9716-F72A1A5865E2}"/>
+                <a16:creationId xmlns:a16="http://schemas.microsoft.com/office/drawing/2014/main" id="{DCD07A90-FB44-47E6-BC80-D9F7FDC9705B}"/>
               </a:ext>
             </a:extLst>
           </p:cNvPr>
@@ -8346,7 +8346,7 @@
           <p:cNvPr id="14" name="f34">
             <a:extLst xmlns:a="http://schemas.openxmlformats.org/drawingml/2006/main">
               <a:ext uri="{FF2B5EF4-FFF2-40B4-BE49-F238E27FC236}">
-                <a16:creationId xmlns:a16="http://schemas.microsoft.com/office/drawing/2014/main" id="{40C41A39-82B6-4C8E-9572-BEA6200E9A64}"/>
+                <a16:creationId xmlns:a16="http://schemas.microsoft.com/office/drawing/2014/main" id="{7ACF7EF1-C3C0-4849-8A07-6F5F178DF8BA}"/>
               </a:ext>
             </a:extLst>
           </p:cNvPr>
@@ -8379,7 +8379,7 @@
           <p:cNvPr id="15" name="f35">
             <a:extLst xmlns:a="http://schemas.openxmlformats.org/drawingml/2006/main">
               <a:ext uri="{FF2B5EF4-FFF2-40B4-BE49-F238E27FC236}">
-                <a16:creationId xmlns:a16="http://schemas.microsoft.com/office/drawing/2014/main" id="{0A876F6D-9433-4247-91B2-82B8A31C2C72}"/>
+                <a16:creationId xmlns:a16="http://schemas.microsoft.com/office/drawing/2014/main" id="{90BDD31A-A9D3-4850-8EA7-D847FAB689A2}"/>
               </a:ext>
             </a:extLst>
           </p:cNvPr>
@@ -8412,7 +8412,7 @@
           <p:cNvPr id="16" name="f36">
             <a:extLst xmlns:a="http://schemas.openxmlformats.org/drawingml/2006/main">
               <a:ext uri="{FF2B5EF4-FFF2-40B4-BE49-F238E27FC236}">
-                <a16:creationId xmlns:a16="http://schemas.microsoft.com/office/drawing/2014/main" id="{A9477BDD-1EC2-4B68-BA33-49CE2EFCC03B}"/>
+                <a16:creationId xmlns:a16="http://schemas.microsoft.com/office/drawing/2014/main" id="{DF170553-71FB-4851-85A4-CD3F6CA46ED2}"/>
               </a:ext>
             </a:extLst>
           </p:cNvPr>
@@ -8571,7 +8571,7 @@
           <p:cNvPr id="17" name="f37">
             <a:extLst xmlns:a="http://schemas.openxmlformats.org/drawingml/2006/main">
               <a:ext uri="{FF2B5EF4-FFF2-40B4-BE49-F238E27FC236}">
-                <a16:creationId xmlns:a16="http://schemas.microsoft.com/office/drawing/2014/main" id="{AA00C338-104F-44AD-8EF0-05D4C2BC342E}"/>
+                <a16:creationId xmlns:a16="http://schemas.microsoft.com/office/drawing/2014/main" id="{1DA986C4-EAD9-4306-B39F-B442206B2E0C}"/>
               </a:ext>
             </a:extLst>
           </p:cNvPr>
@@ -8602,7 +8602,7 @@
           <p:cNvPr id="18" name="f38">
             <a:extLst xmlns:a="http://schemas.openxmlformats.org/drawingml/2006/main">
               <a:ext uri="{FF2B5EF4-FFF2-40B4-BE49-F238E27FC236}">
-                <a16:creationId xmlns:a16="http://schemas.microsoft.com/office/drawing/2014/main" id="{63966254-0311-41AA-8142-B9592A0EB54B}"/>
+                <a16:creationId xmlns:a16="http://schemas.microsoft.com/office/drawing/2014/main" id="{701DA3C4-0EDC-4258-9931-FF1FEA14595A}"/>
               </a:ext>
             </a:extLst>
           </p:cNvPr>
@@ -8633,7 +8633,7 @@
           <p:cNvPr id="19" name="f39">
             <a:extLst xmlns:a="http://schemas.openxmlformats.org/drawingml/2006/main">
               <a:ext uri="{FF2B5EF4-FFF2-40B4-BE49-F238E27FC236}">
-                <a16:creationId xmlns:a16="http://schemas.microsoft.com/office/drawing/2014/main" id="{F0256E74-B2CF-429F-A9A6-A824A4AB8E5F}"/>
+                <a16:creationId xmlns:a16="http://schemas.microsoft.com/office/drawing/2014/main" id="{C015EDBB-1620-4BE2-94CA-218D0FF4C2E8}"/>
               </a:ext>
             </a:extLst>
           </p:cNvPr>
@@ -8668,7 +8668,7 @@
           <p:cNvPr id="20" name="f40">
             <a:extLst xmlns:a="http://schemas.openxmlformats.org/drawingml/2006/main">
               <a:ext uri="{FF2B5EF4-FFF2-40B4-BE49-F238E27FC236}">
-                <a16:creationId xmlns:a16="http://schemas.microsoft.com/office/drawing/2014/main" id="{ADD07E89-C783-432A-86EA-1E8A2EB35696}"/>
+                <a16:creationId xmlns:a16="http://schemas.microsoft.com/office/drawing/2014/main" id="{A1ECAC0C-2C51-4601-8A04-AA21F194E628}"/>
               </a:ext>
             </a:extLst>
           </p:cNvPr>
@@ -8850,7 +8850,7 @@
           <p:cNvPr id="21" name="f41">
             <a:extLst xmlns:a="http://schemas.openxmlformats.org/drawingml/2006/main">
               <a:ext uri="{FF2B5EF4-FFF2-40B4-BE49-F238E27FC236}">
-                <a16:creationId xmlns:a16="http://schemas.microsoft.com/office/drawing/2014/main" id="{466285EF-0541-4BB1-87A5-B0F01E766C1D}"/>
+                <a16:creationId xmlns:a16="http://schemas.microsoft.com/office/drawing/2014/main" id="{3BB70FEF-3608-4CA8-ADB9-99D4850976C4}"/>
               </a:ext>
             </a:extLst>
           </p:cNvPr>
@@ -9032,7 +9032,7 @@
           <p:cNvPr id="22" name="f42">
             <a:extLst xmlns:a="http://schemas.openxmlformats.org/drawingml/2006/main">
               <a:ext uri="{FF2B5EF4-FFF2-40B4-BE49-F238E27FC236}">
-                <a16:creationId xmlns:a16="http://schemas.microsoft.com/office/drawing/2014/main" id="{207A288C-FFB1-49A1-814B-1EE2623A8F95}"/>
+                <a16:creationId xmlns:a16="http://schemas.microsoft.com/office/drawing/2014/main" id="{FDE7C723-C294-443E-B145-16DD8BF0AD9B}"/>
               </a:ext>
             </a:extLst>
           </p:cNvPr>
@@ -9191,7 +9191,7 @@
           <p:cNvPr id="23" name="f43">
             <a:extLst xmlns:a="http://schemas.openxmlformats.org/drawingml/2006/main">
               <a:ext uri="{FF2B5EF4-FFF2-40B4-BE49-F238E27FC236}">
-                <a16:creationId xmlns:a16="http://schemas.microsoft.com/office/drawing/2014/main" id="{FA7E283C-BFE6-4D57-9860-EF206CF95E36}"/>
+                <a16:creationId xmlns:a16="http://schemas.microsoft.com/office/drawing/2014/main" id="{EA947CB2-E3D1-4556-8D17-1C3ED6FC9BA2}"/>
               </a:ext>
             </a:extLst>
           </p:cNvPr>
@@ -9348,7 +9348,7 @@
     </p:spTree>
     <p:extLst>
       <p:ext uri="{BB962C8B-B14F-4D97-AF65-F5344CB8AC3E}">
-        <p14:creationId xmlns:p14="http://schemas.microsoft.com/office/powerpoint/2010/main" val="113949665"/>
+        <p14:creationId xmlns:p14="http://schemas.microsoft.com/office/powerpoint/2010/main" val="2009226885"/>
       </p:ext>
     </p:extLst>
   </p:cSld>
@@ -9379,7 +9379,7 @@
           <p:cNvPr id="24" name="">
             <a:extLst xmlns:a="http://schemas.openxmlformats.org/drawingml/2006/main">
               <a:ext uri="{FF2B5EF4-FFF2-40B4-BE49-F238E27FC236}">
-                <a16:creationId xmlns:a16="http://schemas.microsoft.com/office/drawing/2014/main" id="{0F7A68C0-D7A3-4550-9A16-6A4D4D1C8BE7}"/>
+                <a16:creationId xmlns:a16="http://schemas.microsoft.com/office/drawing/2014/main" id="{6575E8C3-F827-42BD-9AF3-4EFCCF4C638B}"/>
               </a:ext>
             </a:extLst>
           </p:cNvPr>
@@ -9389,7 +9389,7 @@
           <p:nvPr/>
         </p:nvPicPr>
         <p:blipFill>
-          <a:blip xmlns:r="http://schemas.openxmlformats.org/officeDocument/2006/relationships" xmlns:a="http://schemas.openxmlformats.org/drawingml/2006/main" r:embed="R9d0302bf288f4e89"/>
+          <a:blip xmlns:r="http://schemas.openxmlformats.org/officeDocument/2006/relationships" xmlns:a="http://schemas.openxmlformats.org/drawingml/2006/main" r:embed="R1c5b56750ab84a99"/>
           <a:stretch xmlns:a="http://schemas.openxmlformats.org/drawingml/2006/main"/>
         </p:blipFill>
         <p:spPr>
@@ -9407,7 +9407,7 @@
           <p:cNvPr id="2" name="f45">
             <a:extLst xmlns:a="http://schemas.openxmlformats.org/drawingml/2006/main">
               <a:ext uri="{FF2B5EF4-FFF2-40B4-BE49-F238E27FC236}">
-                <a16:creationId xmlns:a16="http://schemas.microsoft.com/office/drawing/2014/main" id="{5992C5EF-6603-449B-A18F-86CF7EF05CAF}"/>
+                <a16:creationId xmlns:a16="http://schemas.microsoft.com/office/drawing/2014/main" id="{5BF5DF33-B77E-4362-86BA-6FA2A809B878}"/>
               </a:ext>
             </a:extLst>
           </p:cNvPr>
@@ -9566,7 +9566,7 @@
           <p:cNvPr id="3" name="f46">
             <a:extLst xmlns:a="http://schemas.openxmlformats.org/drawingml/2006/main">
               <a:ext uri="{FF2B5EF4-FFF2-40B4-BE49-F238E27FC236}">
-                <a16:creationId xmlns:a16="http://schemas.microsoft.com/office/drawing/2014/main" id="{315C530E-DDA1-4ADD-8D13-951385E7B1F5}"/>
+                <a16:creationId xmlns:a16="http://schemas.microsoft.com/office/drawing/2014/main" id="{042CC9DE-D276-4B9B-A813-5B876025D808}"/>
               </a:ext>
             </a:extLst>
           </p:cNvPr>
@@ -9725,7 +9725,7 @@
           <p:cNvPr id="4" name="f47">
             <a:extLst xmlns:a="http://schemas.openxmlformats.org/drawingml/2006/main">
               <a:ext uri="{FF2B5EF4-FFF2-40B4-BE49-F238E27FC236}">
-                <a16:creationId xmlns:a16="http://schemas.microsoft.com/office/drawing/2014/main" id="{BED93621-8B2A-4BC1-A870-DEA6A5DCC928}"/>
+                <a16:creationId xmlns:a16="http://schemas.microsoft.com/office/drawing/2014/main" id="{E302F1CC-9EE0-49BC-8740-530EBF635279}"/>
               </a:ext>
             </a:extLst>
           </p:cNvPr>
@@ -9884,7 +9884,7 @@
           <p:cNvPr id="5" name="f48">
             <a:extLst xmlns:a="http://schemas.openxmlformats.org/drawingml/2006/main">
               <a:ext uri="{FF2B5EF4-FFF2-40B4-BE49-F238E27FC236}">
-                <a16:creationId xmlns:a16="http://schemas.microsoft.com/office/drawing/2014/main" id="{FBAACD3F-1183-4DB2-9B53-3D9E3DB82D0A}"/>
+                <a16:creationId xmlns:a16="http://schemas.microsoft.com/office/drawing/2014/main" id="{8EE7EBDA-FDF5-4271-BCB0-FA7E57C3ACA7}"/>
               </a:ext>
             </a:extLst>
           </p:cNvPr>
@@ -10043,7 +10043,7 @@
           <p:cNvPr id="6" name="f49">
             <a:extLst xmlns:a="http://schemas.openxmlformats.org/drawingml/2006/main">
               <a:ext uri="{FF2B5EF4-FFF2-40B4-BE49-F238E27FC236}">
-                <a16:creationId xmlns:a16="http://schemas.microsoft.com/office/drawing/2014/main" id="{3E5D2824-EA93-4275-B84C-CC269BCA151B}"/>
+                <a16:creationId xmlns:a16="http://schemas.microsoft.com/office/drawing/2014/main" id="{B54ED89F-0A29-44C2-A544-66E282AD59CA}"/>
               </a:ext>
             </a:extLst>
           </p:cNvPr>
@@ -10202,7 +10202,7 @@
           <p:cNvPr id="7" name="f50">
             <a:extLst xmlns:a="http://schemas.openxmlformats.org/drawingml/2006/main">
               <a:ext uri="{FF2B5EF4-FFF2-40B4-BE49-F238E27FC236}">
-                <a16:creationId xmlns:a16="http://schemas.microsoft.com/office/drawing/2014/main" id="{B116F515-C303-4C8D-BC0E-F8080B1FF835}"/>
+                <a16:creationId xmlns:a16="http://schemas.microsoft.com/office/drawing/2014/main" id="{BDBDD52A-1A19-4054-A46E-740C2364662B}"/>
               </a:ext>
             </a:extLst>
           </p:cNvPr>
@@ -10361,7 +10361,7 @@
           <p:cNvPr id="8" name="f51">
             <a:extLst xmlns:a="http://schemas.openxmlformats.org/drawingml/2006/main">
               <a:ext uri="{FF2B5EF4-FFF2-40B4-BE49-F238E27FC236}">
-                <a16:creationId xmlns:a16="http://schemas.microsoft.com/office/drawing/2014/main" id="{72245C53-B8EF-4F7E-B91D-4B04461C4D2A}"/>
+                <a16:creationId xmlns:a16="http://schemas.microsoft.com/office/drawing/2014/main" id="{D0DF10A9-C446-4446-A9D8-3ABDC204CD09}"/>
               </a:ext>
             </a:extLst>
           </p:cNvPr>
@@ -10520,7 +10520,7 @@
           <p:cNvPr id="9" name="f52">
             <a:extLst xmlns:a="http://schemas.openxmlformats.org/drawingml/2006/main">
               <a:ext uri="{FF2B5EF4-FFF2-40B4-BE49-F238E27FC236}">
-                <a16:creationId xmlns:a16="http://schemas.microsoft.com/office/drawing/2014/main" id="{D447A4CD-1085-4628-8EE1-FB081DE0F030}"/>
+                <a16:creationId xmlns:a16="http://schemas.microsoft.com/office/drawing/2014/main" id="{5FE5354D-67B3-4AF9-B3A4-8EE2D2A9806E}"/>
               </a:ext>
             </a:extLst>
           </p:cNvPr>
@@ -10679,7 +10679,7 @@
           <p:cNvPr id="10" name="f53">
             <a:extLst xmlns:a="http://schemas.openxmlformats.org/drawingml/2006/main">
               <a:ext uri="{FF2B5EF4-FFF2-40B4-BE49-F238E27FC236}">
-                <a16:creationId xmlns:a16="http://schemas.microsoft.com/office/drawing/2014/main" id="{76C777F7-B23C-4C96-98B7-07E51B9C2698}"/>
+                <a16:creationId xmlns:a16="http://schemas.microsoft.com/office/drawing/2014/main" id="{F76867B3-619B-441F-B843-6DB037905D96}"/>
               </a:ext>
             </a:extLst>
           </p:cNvPr>
@@ -10838,7 +10838,7 @@
           <p:cNvPr id="11" name="f54">
             <a:extLst xmlns:a="http://schemas.openxmlformats.org/drawingml/2006/main">
               <a:ext uri="{FF2B5EF4-FFF2-40B4-BE49-F238E27FC236}">
-                <a16:creationId xmlns:a16="http://schemas.microsoft.com/office/drawing/2014/main" id="{1D384CA9-A6BB-43A1-9904-A3B38CE4F9D7}"/>
+                <a16:creationId xmlns:a16="http://schemas.microsoft.com/office/drawing/2014/main" id="{E1D5F7EF-E10C-4785-993F-38DE3974BFF6}"/>
               </a:ext>
             </a:extLst>
           </p:cNvPr>
@@ -10997,7 +10997,7 @@
           <p:cNvPr id="12" name="f55">
             <a:extLst xmlns:a="http://schemas.openxmlformats.org/drawingml/2006/main">
               <a:ext uri="{FF2B5EF4-FFF2-40B4-BE49-F238E27FC236}">
-                <a16:creationId xmlns:a16="http://schemas.microsoft.com/office/drawing/2014/main" id="{0601A362-D066-4952-959D-5460316D6E84}"/>
+                <a16:creationId xmlns:a16="http://schemas.microsoft.com/office/drawing/2014/main" id="{B70BBEA1-3F11-483D-BC43-E6D8A9CF9535}"/>
               </a:ext>
             </a:extLst>
           </p:cNvPr>
@@ -11156,7 +11156,7 @@
           <p:cNvPr id="13" name="f56">
             <a:extLst xmlns:a="http://schemas.openxmlformats.org/drawingml/2006/main">
               <a:ext uri="{FF2B5EF4-FFF2-40B4-BE49-F238E27FC236}">
-                <a16:creationId xmlns:a16="http://schemas.microsoft.com/office/drawing/2014/main" id="{D05303F4-62BB-408A-8333-A31BD2B55E1E}"/>
+                <a16:creationId xmlns:a16="http://schemas.microsoft.com/office/drawing/2014/main" id="{88A31A96-D4A5-4949-AEA8-7A1019DD4884}"/>
               </a:ext>
             </a:extLst>
           </p:cNvPr>
@@ -11315,7 +11315,7 @@
           <p:cNvPr id="14" name="f57">
             <a:extLst xmlns:a="http://schemas.openxmlformats.org/drawingml/2006/main">
               <a:ext uri="{FF2B5EF4-FFF2-40B4-BE49-F238E27FC236}">
-                <a16:creationId xmlns:a16="http://schemas.microsoft.com/office/drawing/2014/main" id="{D89F1ECC-2672-4C69-9058-95CD1CDB5CA4}"/>
+                <a16:creationId xmlns:a16="http://schemas.microsoft.com/office/drawing/2014/main" id="{D90071E9-6D1A-4EFF-BA69-6619C3D3435C}"/>
               </a:ext>
             </a:extLst>
           </p:cNvPr>
@@ -11474,7 +11474,7 @@
           <p:cNvPr id="15" name="f58">
             <a:extLst xmlns:a="http://schemas.openxmlformats.org/drawingml/2006/main">
               <a:ext uri="{FF2B5EF4-FFF2-40B4-BE49-F238E27FC236}">
-                <a16:creationId xmlns:a16="http://schemas.microsoft.com/office/drawing/2014/main" id="{E901E0E3-BBE6-4936-A25E-4FAA783311FB}"/>
+                <a16:creationId xmlns:a16="http://schemas.microsoft.com/office/drawing/2014/main" id="{38229594-7FE9-4491-88CB-8EE8D6560FBF}"/>
               </a:ext>
             </a:extLst>
           </p:cNvPr>
@@ -11633,7 +11633,7 @@
           <p:cNvPr id="16" name="f59">
             <a:extLst xmlns:a="http://schemas.openxmlformats.org/drawingml/2006/main">
               <a:ext uri="{FF2B5EF4-FFF2-40B4-BE49-F238E27FC236}">
-                <a16:creationId xmlns:a16="http://schemas.microsoft.com/office/drawing/2014/main" id="{943322A7-8FC4-4AA5-8DA7-4AD98C2EC374}"/>
+                <a16:creationId xmlns:a16="http://schemas.microsoft.com/office/drawing/2014/main" id="{8939E8B2-195F-4238-9FA9-0D33D2DC9591}"/>
               </a:ext>
             </a:extLst>
           </p:cNvPr>
@@ -11792,7 +11792,7 @@
           <p:cNvPr id="17" name="f60">
             <a:extLst xmlns:a="http://schemas.openxmlformats.org/drawingml/2006/main">
               <a:ext uri="{FF2B5EF4-FFF2-40B4-BE49-F238E27FC236}">
-                <a16:creationId xmlns:a16="http://schemas.microsoft.com/office/drawing/2014/main" id="{8D17A2E2-EE52-4C98-AF75-AB3ACE148491}"/>
+                <a16:creationId xmlns:a16="http://schemas.microsoft.com/office/drawing/2014/main" id="{2E2B0D6F-D77C-4834-9213-4AF0E5D29B70}"/>
               </a:ext>
             </a:extLst>
           </p:cNvPr>
@@ -11951,7 +11951,7 @@
           <p:cNvPr id="18" name="f61">
             <a:extLst xmlns:a="http://schemas.openxmlformats.org/drawingml/2006/main">
               <a:ext uri="{FF2B5EF4-FFF2-40B4-BE49-F238E27FC236}">
-                <a16:creationId xmlns:a16="http://schemas.microsoft.com/office/drawing/2014/main" id="{9ED698B5-1C3E-4943-8D72-EE626A3AD3BB}"/>
+                <a16:creationId xmlns:a16="http://schemas.microsoft.com/office/drawing/2014/main" id="{CDFE7841-EFD6-4D5F-AAF7-A8755A3F31B8}"/>
               </a:ext>
             </a:extLst>
           </p:cNvPr>
@@ -12110,7 +12110,7 @@
           <p:cNvPr id="19" name="f62">
             <a:extLst xmlns:a="http://schemas.openxmlformats.org/drawingml/2006/main">
               <a:ext uri="{FF2B5EF4-FFF2-40B4-BE49-F238E27FC236}">
-                <a16:creationId xmlns:a16="http://schemas.microsoft.com/office/drawing/2014/main" id="{ECD46024-5D4A-4182-80FA-39913F96F251}"/>
+                <a16:creationId xmlns:a16="http://schemas.microsoft.com/office/drawing/2014/main" id="{28B9F215-C209-48FF-8A93-5430A96F3044}"/>
               </a:ext>
             </a:extLst>
           </p:cNvPr>
@@ -12269,7 +12269,7 @@
           <p:cNvPr id="20" name="f63">
             <a:extLst xmlns:a="http://schemas.openxmlformats.org/drawingml/2006/main">
               <a:ext uri="{FF2B5EF4-FFF2-40B4-BE49-F238E27FC236}">
-                <a16:creationId xmlns:a16="http://schemas.microsoft.com/office/drawing/2014/main" id="{F5865B97-6B12-4EED-81AB-E47F70040FAE}"/>
+                <a16:creationId xmlns:a16="http://schemas.microsoft.com/office/drawing/2014/main" id="{68975CAD-D220-468A-A662-EEF0FFB639EB}"/>
               </a:ext>
             </a:extLst>
           </p:cNvPr>
@@ -12428,7 +12428,7 @@
           <p:cNvPr id="21" name="f64">
             <a:extLst xmlns:a="http://schemas.openxmlformats.org/drawingml/2006/main">
               <a:ext uri="{FF2B5EF4-FFF2-40B4-BE49-F238E27FC236}">
-                <a16:creationId xmlns:a16="http://schemas.microsoft.com/office/drawing/2014/main" id="{FE99074B-BACB-4F21-8652-FE5EEDC24A3F}"/>
+                <a16:creationId xmlns:a16="http://schemas.microsoft.com/office/drawing/2014/main" id="{CFE67A19-1C49-446D-BE30-B7F73043B38D}"/>
               </a:ext>
             </a:extLst>
           </p:cNvPr>
@@ -12587,7 +12587,7 @@
           <p:cNvPr id="22" name="f65">
             <a:extLst xmlns:a="http://schemas.openxmlformats.org/drawingml/2006/main">
               <a:ext uri="{FF2B5EF4-FFF2-40B4-BE49-F238E27FC236}">
-                <a16:creationId xmlns:a16="http://schemas.microsoft.com/office/drawing/2014/main" id="{65737B06-13A5-49B0-A33D-75C3896591F1}"/>
+                <a16:creationId xmlns:a16="http://schemas.microsoft.com/office/drawing/2014/main" id="{07C14415-BFD7-4AD4-8259-5E18D99108DE}"/>
               </a:ext>
             </a:extLst>
           </p:cNvPr>
@@ -12746,7 +12746,7 @@
           <p:cNvPr id="23" name="f66">
             <a:extLst xmlns:a="http://schemas.openxmlformats.org/drawingml/2006/main">
               <a:ext uri="{FF2B5EF4-FFF2-40B4-BE49-F238E27FC236}">
-                <a16:creationId xmlns:a16="http://schemas.microsoft.com/office/drawing/2014/main" id="{A22FBB40-649E-4414-B499-2F589D7D0A8B}"/>
+                <a16:creationId xmlns:a16="http://schemas.microsoft.com/office/drawing/2014/main" id="{52A53392-95B8-4AD9-9EBA-D913798077AA}"/>
               </a:ext>
             </a:extLst>
           </p:cNvPr>
@@ -12903,7 +12903,7 @@
     </p:spTree>
     <p:extLst>
       <p:ext uri="{BB962C8B-B14F-4D97-AF65-F5344CB8AC3E}">
-        <p14:creationId xmlns:p14="http://schemas.microsoft.com/office/powerpoint/2010/main" val="1497803154"/>
+        <p14:creationId xmlns:p14="http://schemas.microsoft.com/office/powerpoint/2010/main" val="961672210"/>
       </p:ext>
     </p:extLst>
   </p:cSld>
@@ -12934,7 +12934,7 @@
           <p:cNvPr id="18" name="f67">
             <a:extLst xmlns:a="http://schemas.openxmlformats.org/drawingml/2006/main">
               <a:ext uri="{FF2B5EF4-FFF2-40B4-BE49-F238E27FC236}">
-                <a16:creationId xmlns:a16="http://schemas.microsoft.com/office/drawing/2014/main" id="{545CF73C-0BEC-43B1-A979-8EC0BB60E1F1}"/>
+                <a16:creationId xmlns:a16="http://schemas.microsoft.com/office/drawing/2014/main" id="{CD8ADEA6-C6DC-466D-9C9A-0DD64672CC7E}"/>
               </a:ext>
             </a:extLst>
           </p:cNvPr>
@@ -13093,7 +13093,7 @@
           <p:cNvPr id="2" name="f68">
             <a:extLst xmlns:a="http://schemas.openxmlformats.org/drawingml/2006/main">
               <a:ext uri="{FF2B5EF4-FFF2-40B4-BE49-F238E27FC236}">
-                <a16:creationId xmlns:a16="http://schemas.microsoft.com/office/drawing/2014/main" id="{9560B7C4-1830-429D-8ADC-25A32503D72A}"/>
+                <a16:creationId xmlns:a16="http://schemas.microsoft.com/office/drawing/2014/main" id="{88292557-59F0-4876-8DED-7ECF9E588D75}"/>
               </a:ext>
             </a:extLst>
           </p:cNvPr>
@@ -13252,7 +13252,7 @@
           <p:cNvPr id="3" name="f69">
             <a:extLst xmlns:a="http://schemas.openxmlformats.org/drawingml/2006/main">
               <a:ext uri="{FF2B5EF4-FFF2-40B4-BE49-F238E27FC236}">
-                <a16:creationId xmlns:a16="http://schemas.microsoft.com/office/drawing/2014/main" id="{3175A81D-A993-4EF3-84CA-BE44A5CFAA5C}"/>
+                <a16:creationId xmlns:a16="http://schemas.microsoft.com/office/drawing/2014/main" id="{C1F23252-DF3C-41AB-BADE-50722D233A12}"/>
               </a:ext>
             </a:extLst>
           </p:cNvPr>
@@ -13411,7 +13411,7 @@
           <p:cNvPr id="4" name="f70">
             <a:extLst xmlns:a="http://schemas.openxmlformats.org/drawingml/2006/main">
               <a:ext uri="{FF2B5EF4-FFF2-40B4-BE49-F238E27FC236}">
-                <a16:creationId xmlns:a16="http://schemas.microsoft.com/office/drawing/2014/main" id="{A2BE4953-CBEA-4FCF-A94E-41B054860346}"/>
+                <a16:creationId xmlns:a16="http://schemas.microsoft.com/office/drawing/2014/main" id="{95371814-766C-4314-8AEA-0591DC90299B}"/>
               </a:ext>
             </a:extLst>
           </p:cNvPr>
@@ -13570,7 +13570,7 @@
           <p:cNvPr id="5" name="f103">
             <a:extLst xmlns:a="http://schemas.openxmlformats.org/drawingml/2006/main">
               <a:ext uri="{FF2B5EF4-FFF2-40B4-BE49-F238E27FC236}">
-                <a16:creationId xmlns:a16="http://schemas.microsoft.com/office/drawing/2014/main" id="{F67A86E4-0AF6-4B59-AB6A-923CB8F0428F}"/>
+                <a16:creationId xmlns:a16="http://schemas.microsoft.com/office/drawing/2014/main" id="{5C61F781-8D08-4696-84CA-D1F3CB326F94}"/>
               </a:ext>
             </a:extLst>
           </p:cNvPr>
@@ -13729,7 +13729,7 @@
           <p:cNvPr id="6" name="f104">
             <a:extLst xmlns:a="http://schemas.openxmlformats.org/drawingml/2006/main">
               <a:ext uri="{FF2B5EF4-FFF2-40B4-BE49-F238E27FC236}">
-                <a16:creationId xmlns:a16="http://schemas.microsoft.com/office/drawing/2014/main" id="{3C1F1927-3AF0-4815-98F2-5B4BAF168144}"/>
+                <a16:creationId xmlns:a16="http://schemas.microsoft.com/office/drawing/2014/main" id="{E154A881-E84E-4DED-9B09-945E1446E442}"/>
               </a:ext>
             </a:extLst>
           </p:cNvPr>
@@ -13764,7 +13764,7 @@
           <p:cNvPr id="7" name="f105">
             <a:extLst xmlns:a="http://schemas.openxmlformats.org/drawingml/2006/main">
               <a:ext uri="{FF2B5EF4-FFF2-40B4-BE49-F238E27FC236}">
-                <a16:creationId xmlns:a16="http://schemas.microsoft.com/office/drawing/2014/main" id="{D7C70755-7A6A-4A13-8EA5-C8BC0578D292}"/>
+                <a16:creationId xmlns:a16="http://schemas.microsoft.com/office/drawing/2014/main" id="{B05EBB37-7116-4CCD-A24B-FEB69F0E6703}"/>
               </a:ext>
             </a:extLst>
           </p:cNvPr>
@@ -13923,7 +13923,7 @@
           <p:cNvPr id="8" name="f106">
             <a:extLst xmlns:a="http://schemas.openxmlformats.org/drawingml/2006/main">
               <a:ext uri="{FF2B5EF4-FFF2-40B4-BE49-F238E27FC236}">
-                <a16:creationId xmlns:a16="http://schemas.microsoft.com/office/drawing/2014/main" id="{AAE31310-9EE4-4FC6-8279-F927FB794B51}"/>
+                <a16:creationId xmlns:a16="http://schemas.microsoft.com/office/drawing/2014/main" id="{B57B014C-07C6-4417-AC08-F68FC531D123}"/>
               </a:ext>
             </a:extLst>
           </p:cNvPr>
@@ -14105,7 +14105,7 @@
           <p:cNvPr id="9" name="f107">
             <a:extLst xmlns:a="http://schemas.openxmlformats.org/drawingml/2006/main">
               <a:ext uri="{FF2B5EF4-FFF2-40B4-BE49-F238E27FC236}">
-                <a16:creationId xmlns:a16="http://schemas.microsoft.com/office/drawing/2014/main" id="{AB484214-CFD6-41F5-B2B3-237ACDFCCD51}"/>
+                <a16:creationId xmlns:a16="http://schemas.microsoft.com/office/drawing/2014/main" id="{215DAC90-BC51-4255-88C3-97286224611E}"/>
               </a:ext>
             </a:extLst>
           </p:cNvPr>
@@ -14264,7 +14264,7 @@
           <p:cNvPr id="10" name="f108">
             <a:extLst xmlns:a="http://schemas.openxmlformats.org/drawingml/2006/main">
               <a:ext uri="{FF2B5EF4-FFF2-40B4-BE49-F238E27FC236}">
-                <a16:creationId xmlns:a16="http://schemas.microsoft.com/office/drawing/2014/main" id="{537769B9-C798-452B-910C-91D714FAC3B4}"/>
+                <a16:creationId xmlns:a16="http://schemas.microsoft.com/office/drawing/2014/main" id="{153E6737-0912-4B75-88B8-6187EFC3EB89}"/>
               </a:ext>
             </a:extLst>
           </p:cNvPr>
@@ -14423,7 +14423,7 @@
           <p:cNvPr id="11" name="f109">
             <a:extLst xmlns:a="http://schemas.openxmlformats.org/drawingml/2006/main">
               <a:ext uri="{FF2B5EF4-FFF2-40B4-BE49-F238E27FC236}">
-                <a16:creationId xmlns:a16="http://schemas.microsoft.com/office/drawing/2014/main" id="{75C4B58E-F0E4-4B18-8C19-74149DB76DA5}"/>
+                <a16:creationId xmlns:a16="http://schemas.microsoft.com/office/drawing/2014/main" id="{4AB10B04-205C-4A24-B3E8-DC4C9E260D93}"/>
               </a:ext>
             </a:extLst>
           </p:cNvPr>
@@ -14454,7 +14454,7 @@
           <p:cNvPr id="12" name="f110">
             <a:extLst xmlns:a="http://schemas.openxmlformats.org/drawingml/2006/main">
               <a:ext uri="{FF2B5EF4-FFF2-40B4-BE49-F238E27FC236}">
-                <a16:creationId xmlns:a16="http://schemas.microsoft.com/office/drawing/2014/main" id="{7BE5E7DD-1480-487E-BA3E-B3B20EE8BB8F}"/>
+                <a16:creationId xmlns:a16="http://schemas.microsoft.com/office/drawing/2014/main" id="{C5698F18-91E2-4D59-9A90-98F12203C621}"/>
               </a:ext>
             </a:extLst>
           </p:cNvPr>
@@ -14485,7 +14485,7 @@
           <p:cNvPr id="13" name="f111">
             <a:extLst xmlns:a="http://schemas.openxmlformats.org/drawingml/2006/main">
               <a:ext uri="{FF2B5EF4-FFF2-40B4-BE49-F238E27FC236}">
-                <a16:creationId xmlns:a16="http://schemas.microsoft.com/office/drawing/2014/main" id="{03928440-6A9C-4EBF-BE2D-754908763346}"/>
+                <a16:creationId xmlns:a16="http://schemas.microsoft.com/office/drawing/2014/main" id="{E8AA5743-2E61-49BB-A0E1-98ECFF8D1FE1}"/>
               </a:ext>
             </a:extLst>
           </p:cNvPr>
@@ -14644,7 +14644,7 @@
           <p:cNvPr id="14" name="f112">
             <a:extLst xmlns:a="http://schemas.openxmlformats.org/drawingml/2006/main">
               <a:ext uri="{FF2B5EF4-FFF2-40B4-BE49-F238E27FC236}">
-                <a16:creationId xmlns:a16="http://schemas.microsoft.com/office/drawing/2014/main" id="{3324DF9B-6138-47DB-BF9A-6ABD5E93A602}"/>
+                <a16:creationId xmlns:a16="http://schemas.microsoft.com/office/drawing/2014/main" id="{2918FDFF-6650-4641-A8EA-61A04A62CC5A}"/>
               </a:ext>
             </a:extLst>
           </p:cNvPr>
@@ -14679,7 +14679,7 @@
           <p:cNvPr id="15" name="f113">
             <a:extLst xmlns:a="http://schemas.openxmlformats.org/drawingml/2006/main">
               <a:ext uri="{FF2B5EF4-FFF2-40B4-BE49-F238E27FC236}">
-                <a16:creationId xmlns:a16="http://schemas.microsoft.com/office/drawing/2014/main" id="{EA03B86F-C636-49D2-B5DC-6318634BE198}"/>
+                <a16:creationId xmlns:a16="http://schemas.microsoft.com/office/drawing/2014/main" id="{5CD2BB03-96B7-48EB-B57F-3DFBD94D41F1}"/>
               </a:ext>
             </a:extLst>
           </p:cNvPr>
@@ -14861,7 +14861,7 @@
           <p:cNvPr id="16" name="f114">
             <a:extLst xmlns:a="http://schemas.openxmlformats.org/drawingml/2006/main">
               <a:ext uri="{FF2B5EF4-FFF2-40B4-BE49-F238E27FC236}">
-                <a16:creationId xmlns:a16="http://schemas.microsoft.com/office/drawing/2014/main" id="{DF22FF0B-BDE1-4314-9B00-F5752143AF8E}"/>
+                <a16:creationId xmlns:a16="http://schemas.microsoft.com/office/drawing/2014/main" id="{5BD35901-A35E-4AEC-A56F-5D31D4867CAE}"/>
               </a:ext>
             </a:extLst>
           </p:cNvPr>
@@ -14896,7 +14896,7 @@
           <p:cNvPr id="17" name="f115">
             <a:extLst xmlns:a="http://schemas.openxmlformats.org/drawingml/2006/main">
               <a:ext uri="{FF2B5EF4-FFF2-40B4-BE49-F238E27FC236}">
-                <a16:creationId xmlns:a16="http://schemas.microsoft.com/office/drawing/2014/main" id="{BC15316E-65C7-4CCE-B587-55892079EE9A}"/>
+                <a16:creationId xmlns:a16="http://schemas.microsoft.com/office/drawing/2014/main" id="{3B9EC7DB-E21A-4C23-9646-9962933F9E11}"/>
               </a:ext>
             </a:extLst>
           </p:cNvPr>
@@ -15076,7 +15076,7 @@
     </p:spTree>
     <p:extLst>
       <p:ext uri="{BB962C8B-B14F-4D97-AF65-F5344CB8AC3E}">
-        <p14:creationId xmlns:p14="http://schemas.microsoft.com/office/powerpoint/2010/main" val="1956201557"/>
+        <p14:creationId xmlns:p14="http://schemas.microsoft.com/office/powerpoint/2010/main" val="819393276"/>
       </p:ext>
     </p:extLst>
   </p:cSld>
@@ -15107,7 +15107,7 @@
           <p:cNvPr id="15" name="">
             <a:extLst xmlns:a="http://schemas.openxmlformats.org/drawingml/2006/main">
               <a:ext uri="{FF2B5EF4-FFF2-40B4-BE49-F238E27FC236}">
-                <a16:creationId xmlns:a16="http://schemas.microsoft.com/office/drawing/2014/main" id="{C8F9D777-E1A4-43F8-B551-80357B7EF124}"/>
+                <a16:creationId xmlns:a16="http://schemas.microsoft.com/office/drawing/2014/main" id="{5AC308F9-9651-423C-B6A7-9059CA387304}"/>
               </a:ext>
             </a:extLst>
           </p:cNvPr>
@@ -15117,7 +15117,7 @@
           <p:nvPr/>
         </p:nvPicPr>
         <p:blipFill>
-          <a:blip xmlns:r="http://schemas.openxmlformats.org/officeDocument/2006/relationships" xmlns:a="http://schemas.openxmlformats.org/drawingml/2006/main" r:embed="R83fda5a7cce14a8a"/>
+          <a:blip xmlns:r="http://schemas.openxmlformats.org/officeDocument/2006/relationships" xmlns:a="http://schemas.openxmlformats.org/drawingml/2006/main" r:embed="R9f379bef18414eb7"/>
           <a:stretch xmlns:a="http://schemas.openxmlformats.org/drawingml/2006/main"/>
         </p:blipFill>
         <p:spPr>
@@ -15135,7 +15135,7 @@
           <p:cNvPr id="2" name="f117">
             <a:extLst xmlns:a="http://schemas.openxmlformats.org/drawingml/2006/main">
               <a:ext uri="{FF2B5EF4-FFF2-40B4-BE49-F238E27FC236}">
-                <a16:creationId xmlns:a16="http://schemas.microsoft.com/office/drawing/2014/main" id="{F93A2280-4AF7-49CE-8DCC-44A045620A9F}"/>
+                <a16:creationId xmlns:a16="http://schemas.microsoft.com/office/drawing/2014/main" id="{A12B0194-23E4-4393-8513-BBFC6CBA124A}"/>
               </a:ext>
             </a:extLst>
           </p:cNvPr>
@@ -15294,7 +15294,7 @@
           <p:cNvPr id="3" name="f118">
             <a:extLst xmlns:a="http://schemas.openxmlformats.org/drawingml/2006/main">
               <a:ext uri="{FF2B5EF4-FFF2-40B4-BE49-F238E27FC236}">
-                <a16:creationId xmlns:a16="http://schemas.microsoft.com/office/drawing/2014/main" id="{BD2C68B3-0532-496C-9C9B-696CED4429DB}"/>
+                <a16:creationId xmlns:a16="http://schemas.microsoft.com/office/drawing/2014/main" id="{E9CD10F7-10C9-4B00-82B2-536AC9DD16B7}"/>
               </a:ext>
             </a:extLst>
           </p:cNvPr>
@@ -15453,7 +15453,7 @@
           <p:cNvPr id="4" name="f119">
             <a:extLst xmlns:a="http://schemas.openxmlformats.org/drawingml/2006/main">
               <a:ext uri="{FF2B5EF4-FFF2-40B4-BE49-F238E27FC236}">
-                <a16:creationId xmlns:a16="http://schemas.microsoft.com/office/drawing/2014/main" id="{DB243A82-CC6C-4797-B26D-1E59A017A2F0}"/>
+                <a16:creationId xmlns:a16="http://schemas.microsoft.com/office/drawing/2014/main" id="{D32923E3-09FA-406E-AC67-2E228AD441BD}"/>
               </a:ext>
             </a:extLst>
           </p:cNvPr>
@@ -15612,7 +15612,7 @@
           <p:cNvPr id="5" name="f120">
             <a:extLst xmlns:a="http://schemas.openxmlformats.org/drawingml/2006/main">
               <a:ext uri="{FF2B5EF4-FFF2-40B4-BE49-F238E27FC236}">
-                <a16:creationId xmlns:a16="http://schemas.microsoft.com/office/drawing/2014/main" id="{E406D2AC-B4FC-4CCF-83D0-E95D95E4CFDF}"/>
+                <a16:creationId xmlns:a16="http://schemas.microsoft.com/office/drawing/2014/main" id="{7A84DB75-677F-4847-B64C-D107179CE07C}"/>
               </a:ext>
             </a:extLst>
           </p:cNvPr>
@@ -15771,7 +15771,7 @@
           <p:cNvPr id="6" name="f121">
             <a:extLst xmlns:a="http://schemas.openxmlformats.org/drawingml/2006/main">
               <a:ext uri="{FF2B5EF4-FFF2-40B4-BE49-F238E27FC236}">
-                <a16:creationId xmlns:a16="http://schemas.microsoft.com/office/drawing/2014/main" id="{AB0C41A7-D4BF-4514-AFD8-478F40512A5A}"/>
+                <a16:creationId xmlns:a16="http://schemas.microsoft.com/office/drawing/2014/main" id="{1C66E1F1-DBB9-4C76-8D70-D8751CC4BC7C}"/>
               </a:ext>
             </a:extLst>
           </p:cNvPr>
@@ -15930,7 +15930,7 @@
           <p:cNvPr id="7" name="f122">
             <a:extLst xmlns:a="http://schemas.openxmlformats.org/drawingml/2006/main">
               <a:ext uri="{FF2B5EF4-FFF2-40B4-BE49-F238E27FC236}">
-                <a16:creationId xmlns:a16="http://schemas.microsoft.com/office/drawing/2014/main" id="{DD72C646-9259-4451-B76B-11720593C5F3}"/>
+                <a16:creationId xmlns:a16="http://schemas.microsoft.com/office/drawing/2014/main" id="{4BFAE904-14B6-45EC-87A8-1F4934754875}"/>
               </a:ext>
             </a:extLst>
           </p:cNvPr>
@@ -16089,7 +16089,7 @@
           <p:cNvPr id="8" name="f123">
             <a:extLst xmlns:a="http://schemas.openxmlformats.org/drawingml/2006/main">
               <a:ext uri="{FF2B5EF4-FFF2-40B4-BE49-F238E27FC236}">
-                <a16:creationId xmlns:a16="http://schemas.microsoft.com/office/drawing/2014/main" id="{895B7727-BDFC-46EE-BC0F-E28635CFB331}"/>
+                <a16:creationId xmlns:a16="http://schemas.microsoft.com/office/drawing/2014/main" id="{BF2F70CB-54B8-41B0-BBFD-BD0AAABEAE2A}"/>
               </a:ext>
             </a:extLst>
           </p:cNvPr>
@@ -16248,7 +16248,7 @@
           <p:cNvPr id="9" name="f124">
             <a:extLst xmlns:a="http://schemas.openxmlformats.org/drawingml/2006/main">
               <a:ext uri="{FF2B5EF4-FFF2-40B4-BE49-F238E27FC236}">
-                <a16:creationId xmlns:a16="http://schemas.microsoft.com/office/drawing/2014/main" id="{208DEFF9-1E47-441E-AB3B-AF1AE78B5243}"/>
+                <a16:creationId xmlns:a16="http://schemas.microsoft.com/office/drawing/2014/main" id="{97CEE9C7-D83D-452B-B53A-A4DA22A8307E}"/>
               </a:ext>
             </a:extLst>
           </p:cNvPr>
@@ -16407,7 +16407,7 @@
           <p:cNvPr id="10" name="f125">
             <a:extLst xmlns:a="http://schemas.openxmlformats.org/drawingml/2006/main">
               <a:ext uri="{FF2B5EF4-FFF2-40B4-BE49-F238E27FC236}">
-                <a16:creationId xmlns:a16="http://schemas.microsoft.com/office/drawing/2014/main" id="{26CD5067-81EE-409B-98FF-9BF3949749F2}"/>
+                <a16:creationId xmlns:a16="http://schemas.microsoft.com/office/drawing/2014/main" id="{65D6918B-3351-4CAC-BEE3-F970550FFB53}"/>
               </a:ext>
             </a:extLst>
           </p:cNvPr>
@@ -16566,7 +16566,7 @@
           <p:cNvPr id="11" name="f126">
             <a:extLst xmlns:a="http://schemas.openxmlformats.org/drawingml/2006/main">
               <a:ext uri="{FF2B5EF4-FFF2-40B4-BE49-F238E27FC236}">
-                <a16:creationId xmlns:a16="http://schemas.microsoft.com/office/drawing/2014/main" id="{465CF1E0-1A5A-42DB-A850-E84516741D38}"/>
+                <a16:creationId xmlns:a16="http://schemas.microsoft.com/office/drawing/2014/main" id="{C8D633BD-AD88-44B8-9B59-F7B2F9BA4846}"/>
               </a:ext>
             </a:extLst>
           </p:cNvPr>
@@ -16725,7 +16725,7 @@
           <p:cNvPr id="12" name="f127">
             <a:extLst xmlns:a="http://schemas.openxmlformats.org/drawingml/2006/main">
               <a:ext uri="{FF2B5EF4-FFF2-40B4-BE49-F238E27FC236}">
-                <a16:creationId xmlns:a16="http://schemas.microsoft.com/office/drawing/2014/main" id="{55350AAD-EF17-42D3-BB34-1D5C4DC5927D}"/>
+                <a16:creationId xmlns:a16="http://schemas.microsoft.com/office/drawing/2014/main" id="{B35C6E25-8A4C-454D-8CA5-61DF981400CF}"/>
               </a:ext>
             </a:extLst>
           </p:cNvPr>
@@ -16884,7 +16884,7 @@
           <p:cNvPr id="13" name="f128">
             <a:extLst xmlns:a="http://schemas.openxmlformats.org/drawingml/2006/main">
               <a:ext uri="{FF2B5EF4-FFF2-40B4-BE49-F238E27FC236}">
-                <a16:creationId xmlns:a16="http://schemas.microsoft.com/office/drawing/2014/main" id="{EE90AC2C-62E1-4571-9089-8045E79F5162}"/>
+                <a16:creationId xmlns:a16="http://schemas.microsoft.com/office/drawing/2014/main" id="{50C20EE8-574F-42AF-B07D-6C87750C3041}"/>
               </a:ext>
             </a:extLst>
           </p:cNvPr>
@@ -17043,7 +17043,7 @@
           <p:cNvPr id="14" name="f129">
             <a:extLst xmlns:a="http://schemas.openxmlformats.org/drawingml/2006/main">
               <a:ext uri="{FF2B5EF4-FFF2-40B4-BE49-F238E27FC236}">
-                <a16:creationId xmlns:a16="http://schemas.microsoft.com/office/drawing/2014/main" id="{766F869A-E726-4593-9DBD-CE8FB5DE151F}"/>
+                <a16:creationId xmlns:a16="http://schemas.microsoft.com/office/drawing/2014/main" id="{BB81E9DC-DFBA-4E0C-8454-7FF95214CC2D}"/>
               </a:ext>
             </a:extLst>
           </p:cNvPr>
@@ -17200,7 +17200,7 @@
     </p:spTree>
     <p:extLst>
       <p:ext uri="{BB962C8B-B14F-4D97-AF65-F5344CB8AC3E}">
-        <p14:creationId xmlns:p14="http://schemas.microsoft.com/office/powerpoint/2010/main" val="1709248655"/>
+        <p14:creationId xmlns:p14="http://schemas.microsoft.com/office/powerpoint/2010/main" val="257938701"/>
       </p:ext>
     </p:extLst>
   </p:cSld>
@@ -17231,7 +17231,7 @@
           <p:cNvPr id="13" name="f130">
             <a:extLst xmlns:a="http://schemas.openxmlformats.org/drawingml/2006/main">
               <a:ext uri="{FF2B5EF4-FFF2-40B4-BE49-F238E27FC236}">
-                <a16:creationId xmlns:a16="http://schemas.microsoft.com/office/drawing/2014/main" id="{B9F134A7-2553-443B-BAAF-88BB7082857F}"/>
+                <a16:creationId xmlns:a16="http://schemas.microsoft.com/office/drawing/2014/main" id="{02B68802-F137-4325-9222-63765BF1660D}"/>
               </a:ext>
             </a:extLst>
           </p:cNvPr>
@@ -17390,7 +17390,7 @@
           <p:cNvPr id="2" name="f131">
             <a:extLst xmlns:a="http://schemas.openxmlformats.org/drawingml/2006/main">
               <a:ext uri="{FF2B5EF4-FFF2-40B4-BE49-F238E27FC236}">
-                <a16:creationId xmlns:a16="http://schemas.microsoft.com/office/drawing/2014/main" id="{1577DC9F-7E60-496B-A4B9-96DEDDB0074E}"/>
+                <a16:creationId xmlns:a16="http://schemas.microsoft.com/office/drawing/2014/main" id="{B38F6671-5870-43F7-A32E-1A29F2AB0C4E}"/>
               </a:ext>
             </a:extLst>
           </p:cNvPr>
@@ -17549,7 +17549,7 @@
           <p:cNvPr id="3" name="f132">
             <a:extLst xmlns:a="http://schemas.openxmlformats.org/drawingml/2006/main">
               <a:ext uri="{FF2B5EF4-FFF2-40B4-BE49-F238E27FC236}">
-                <a16:creationId xmlns:a16="http://schemas.microsoft.com/office/drawing/2014/main" id="{EA975D8F-053D-4C23-8214-B7A781811DDC}"/>
+                <a16:creationId xmlns:a16="http://schemas.microsoft.com/office/drawing/2014/main" id="{3DB040BD-5D8B-4C59-813A-D1B837B443D7}"/>
               </a:ext>
             </a:extLst>
           </p:cNvPr>
@@ -17708,7 +17708,7 @@
           <p:cNvPr id="4" name="f133">
             <a:extLst xmlns:a="http://schemas.openxmlformats.org/drawingml/2006/main">
               <a:ext uri="{FF2B5EF4-FFF2-40B4-BE49-F238E27FC236}">
-                <a16:creationId xmlns:a16="http://schemas.microsoft.com/office/drawing/2014/main" id="{86E9D298-5B4B-4903-B2DF-9DD2E9FFC289}"/>
+                <a16:creationId xmlns:a16="http://schemas.microsoft.com/office/drawing/2014/main" id="{9E98D249-7FFC-4DE6-B0AD-2A2CA8D663A2}"/>
               </a:ext>
             </a:extLst>
           </p:cNvPr>
@@ -17867,7 +17867,7 @@
           <p:cNvPr id="5" name="">
             <a:extLst xmlns:a="http://schemas.openxmlformats.org/drawingml/2006/main">
               <a:ext uri="{FF2B5EF4-FFF2-40B4-BE49-F238E27FC236}">
-                <a16:creationId xmlns:a16="http://schemas.microsoft.com/office/drawing/2014/main" id="{F8DA9346-2B98-4D15-9131-231B17AC9B4B}"/>
+                <a16:creationId xmlns:a16="http://schemas.microsoft.com/office/drawing/2014/main" id="{7262E0EC-BD76-47A5-A25E-08603C6EE300}"/>
               </a:ext>
             </a:extLst>
           </p:cNvPr>
@@ -18703,7 +18703,7 @@
           <p:cNvPr id="6" name="f135">
             <a:extLst xmlns:a="http://schemas.openxmlformats.org/drawingml/2006/main">
               <a:ext uri="{FF2B5EF4-FFF2-40B4-BE49-F238E27FC236}">
-                <a16:creationId xmlns:a16="http://schemas.microsoft.com/office/drawing/2014/main" id="{12D38032-58C5-449D-A7ED-AE51621B547D}"/>
+                <a16:creationId xmlns:a16="http://schemas.microsoft.com/office/drawing/2014/main" id="{A46B5714-0F67-4EE2-9271-68836177BDFF}"/>
               </a:ext>
             </a:extLst>
           </p:cNvPr>
@@ -18738,7 +18738,7 @@
           <p:cNvPr id="7" name="f136">
             <a:extLst xmlns:a="http://schemas.openxmlformats.org/drawingml/2006/main">
               <a:ext uri="{FF2B5EF4-FFF2-40B4-BE49-F238E27FC236}">
-                <a16:creationId xmlns:a16="http://schemas.microsoft.com/office/drawing/2014/main" id="{67039B0F-FDDD-43D5-9D8C-81F083184126}"/>
+                <a16:creationId xmlns:a16="http://schemas.microsoft.com/office/drawing/2014/main" id="{AFAE871E-B529-4BB3-894A-03935CEE3234}"/>
               </a:ext>
             </a:extLst>
           </p:cNvPr>
@@ -18897,7 +18897,7 @@
           <p:cNvPr id="8" name="f137">
             <a:extLst xmlns:a="http://schemas.openxmlformats.org/drawingml/2006/main">
               <a:ext uri="{FF2B5EF4-FFF2-40B4-BE49-F238E27FC236}">
-                <a16:creationId xmlns:a16="http://schemas.microsoft.com/office/drawing/2014/main" id="{D6DD3E92-7CC1-48F7-8EB4-63F0771253B2}"/>
+                <a16:creationId xmlns:a16="http://schemas.microsoft.com/office/drawing/2014/main" id="{F3ADFDA7-5160-47C2-B3AD-9B8F76797A8F}"/>
               </a:ext>
             </a:extLst>
           </p:cNvPr>
@@ -19056,7 +19056,7 @@
           <p:cNvPr id="9" name="f138">
             <a:extLst xmlns:a="http://schemas.openxmlformats.org/drawingml/2006/main">
               <a:ext uri="{FF2B5EF4-FFF2-40B4-BE49-F238E27FC236}">
-                <a16:creationId xmlns:a16="http://schemas.microsoft.com/office/drawing/2014/main" id="{09C16576-BEF8-468E-90C6-6A1D40FF337A}"/>
+                <a16:creationId xmlns:a16="http://schemas.microsoft.com/office/drawing/2014/main" id="{1903A85A-7D15-4314-A84B-3A8B2128754A}"/>
               </a:ext>
             </a:extLst>
           </p:cNvPr>
@@ -19215,7 +19215,7 @@
           <p:cNvPr id="10" name="f139">
             <a:extLst xmlns:a="http://schemas.openxmlformats.org/drawingml/2006/main">
               <a:ext uri="{FF2B5EF4-FFF2-40B4-BE49-F238E27FC236}">
-                <a16:creationId xmlns:a16="http://schemas.microsoft.com/office/drawing/2014/main" id="{83180A38-5E26-474E-9109-C3C4FAB3F3DC}"/>
+                <a16:creationId xmlns:a16="http://schemas.microsoft.com/office/drawing/2014/main" id="{4A2D6B34-2F31-4C28-93AF-E7F5F81DB039}"/>
               </a:ext>
             </a:extLst>
           </p:cNvPr>
@@ -19374,7 +19374,7 @@
           <p:cNvPr id="11" name="f140">
             <a:extLst xmlns:a="http://schemas.openxmlformats.org/drawingml/2006/main">
               <a:ext uri="{FF2B5EF4-FFF2-40B4-BE49-F238E27FC236}">
-                <a16:creationId xmlns:a16="http://schemas.microsoft.com/office/drawing/2014/main" id="{B8D92E61-4F87-4443-A7F3-78FBBBCAD62C}"/>
+                <a16:creationId xmlns:a16="http://schemas.microsoft.com/office/drawing/2014/main" id="{6D343CD1-9A22-4754-9EA5-27C5E871B26A}"/>
               </a:ext>
             </a:extLst>
           </p:cNvPr>
@@ -19533,7 +19533,7 @@
           <p:cNvPr id="12" name="f141">
             <a:extLst xmlns:a="http://schemas.openxmlformats.org/drawingml/2006/main">
               <a:ext uri="{FF2B5EF4-FFF2-40B4-BE49-F238E27FC236}">
-                <a16:creationId xmlns:a16="http://schemas.microsoft.com/office/drawing/2014/main" id="{5B4F2F00-5964-4DCA-9A66-CCB3735406BB}"/>
+                <a16:creationId xmlns:a16="http://schemas.microsoft.com/office/drawing/2014/main" id="{F3889260-17FB-4AE4-B33B-3E6972FA3A89}"/>
               </a:ext>
             </a:extLst>
           </p:cNvPr>
@@ -19690,7 +19690,7 @@
     </p:spTree>
     <p:extLst>
       <p:ext uri="{BB962C8B-B14F-4D97-AF65-F5344CB8AC3E}">
-        <p14:creationId xmlns:p14="http://schemas.microsoft.com/office/powerpoint/2010/main" val="1615713505"/>
+        <p14:creationId xmlns:p14="http://schemas.microsoft.com/office/powerpoint/2010/main" val="1004324616"/>
       </p:ext>
     </p:extLst>
   </p:cSld>
@@ -19721,7 +19721,7 @@
           <p:cNvPr id="49" name="f142">
             <a:extLst xmlns:a="http://schemas.openxmlformats.org/drawingml/2006/main">
               <a:ext uri="{FF2B5EF4-FFF2-40B4-BE49-F238E27FC236}">
-                <a16:creationId xmlns:a16="http://schemas.microsoft.com/office/drawing/2014/main" id="{A7843F50-B1DF-427B-9879-F6C88943F79C}"/>
+                <a16:creationId xmlns:a16="http://schemas.microsoft.com/office/drawing/2014/main" id="{FAE84D9B-4533-457A-ACB1-4CFFBCB6F928}"/>
               </a:ext>
             </a:extLst>
           </p:cNvPr>
@@ -19880,7 +19880,7 @@
           <p:cNvPr id="2" name="f143">
             <a:extLst xmlns:a="http://schemas.openxmlformats.org/drawingml/2006/main">
               <a:ext uri="{FF2B5EF4-FFF2-40B4-BE49-F238E27FC236}">
-                <a16:creationId xmlns:a16="http://schemas.microsoft.com/office/drawing/2014/main" id="{9012041B-1DC9-43BB-AA60-B3DFCF986FEA}"/>
+                <a16:creationId xmlns:a16="http://schemas.microsoft.com/office/drawing/2014/main" id="{E940BB28-2915-4B3F-87D5-2664F44CB464}"/>
               </a:ext>
             </a:extLst>
           </p:cNvPr>
@@ -20039,7 +20039,7 @@
           <p:cNvPr id="3" name="f144">
             <a:extLst xmlns:a="http://schemas.openxmlformats.org/drawingml/2006/main">
               <a:ext uri="{FF2B5EF4-FFF2-40B4-BE49-F238E27FC236}">
-                <a16:creationId xmlns:a16="http://schemas.microsoft.com/office/drawing/2014/main" id="{C99CE9FE-9A76-469C-9DCB-8E89B54FF45F}"/>
+                <a16:creationId xmlns:a16="http://schemas.microsoft.com/office/drawing/2014/main" id="{517110F0-F8BF-4118-BFFE-7E3778B30CA5}"/>
               </a:ext>
             </a:extLst>
           </p:cNvPr>
@@ -20198,7 +20198,7 @@
           <p:cNvPr id="4" name="f145">
             <a:extLst xmlns:a="http://schemas.openxmlformats.org/drawingml/2006/main">
               <a:ext uri="{FF2B5EF4-FFF2-40B4-BE49-F238E27FC236}">
-                <a16:creationId xmlns:a16="http://schemas.microsoft.com/office/drawing/2014/main" id="{007DAF5B-C35B-41CE-991A-B17575155763}"/>
+                <a16:creationId xmlns:a16="http://schemas.microsoft.com/office/drawing/2014/main" id="{C6D95EBD-E461-4B54-BC2B-FC82E1E33EE6}"/>
               </a:ext>
             </a:extLst>
           </p:cNvPr>
@@ -20357,7 +20357,7 @@
           <p:cNvPr id="5" name="f146">
             <a:extLst xmlns:a="http://schemas.openxmlformats.org/drawingml/2006/main">
               <a:ext uri="{FF2B5EF4-FFF2-40B4-BE49-F238E27FC236}">
-                <a16:creationId xmlns:a16="http://schemas.microsoft.com/office/drawing/2014/main" id="{A80AB85E-A249-4D5B-84F1-71FC0A43BA9B}"/>
+                <a16:creationId xmlns:a16="http://schemas.microsoft.com/office/drawing/2014/main" id="{542E68A1-A13E-4A6E-B1FC-DE278B495DBD}"/>
               </a:ext>
             </a:extLst>
           </p:cNvPr>
@@ -20392,7 +20392,7 @@
           <p:cNvPr id="6" name="f147">
             <a:extLst xmlns:a="http://schemas.openxmlformats.org/drawingml/2006/main">
               <a:ext uri="{FF2B5EF4-FFF2-40B4-BE49-F238E27FC236}">
-                <a16:creationId xmlns:a16="http://schemas.microsoft.com/office/drawing/2014/main" id="{CA3704B9-BA61-49BC-A89E-1922C4271C65}"/>
+                <a16:creationId xmlns:a16="http://schemas.microsoft.com/office/drawing/2014/main" id="{79DAFEEE-837D-4316-A1D9-9849888D73FD}"/>
               </a:ext>
             </a:extLst>
           </p:cNvPr>
@@ -20548,10 +20548,45 @@
       </p:sp>
       <p:sp>
         <p:nvSpPr>
+          <p:cNvPr id="50" name="dim_f148">
+            <a:extLst xmlns:a="http://schemas.openxmlformats.org/drawingml/2006/main">
+              <a:ext uri="{FF2B5EF4-FFF2-40B4-BE49-F238E27FC236}">
+                <a16:creationId xmlns:a16="http://schemas.microsoft.com/office/drawing/2014/main" id="{23B54C86-3E35-4D23-A2F5-0B43F53F3C00}"/>
+              </a:ext>
+            </a:extLst>
+          </p:cNvPr>
+          <p:cNvSpPr>
+            <a:spLocks xmlns:a="http://schemas.openxmlformats.org/drawingml/2006/main" noGrp="1"/>
+          </p:cNvSpPr>
+          <p:nvPr/>
+        </p:nvSpPr>
+        <p:spPr>
+          <a:xfrm xmlns:a="http://schemas.openxmlformats.org/drawingml/2006/main">
+            <a:off x="2952750" y="3048000"/>
+            <a:ext cx="2095500" cy="590550"/>
+          </a:xfrm>
+          <a:prstGeom xmlns:a="http://schemas.openxmlformats.org/drawingml/2006/main" prst="roundRect">
+            <a:avLst>
+              <a:gd name="adj" fmla="val 19355"/>
+            </a:avLst>
+          </a:prstGeom>
+          <a:solidFill xmlns:a="http://schemas.openxmlformats.org/drawingml/2006/main">
+            <a:srgbClr val="F6F8FA"/>
+          </a:solidFill>
+          <a:ln xmlns:a="http://schemas.openxmlformats.org/drawingml/2006/main" w="17145">
+            <a:solidFill>
+              <a:srgbClr val="ECF1F6"/>
+            </a:solidFill>
+            <a:prstDash val="solid"/>
+          </a:ln>
+        </p:spPr>
+      </p:sp>
+      <p:sp>
+        <p:nvSpPr>
           <p:cNvPr id="7" name="f148">
             <a:extLst xmlns:a="http://schemas.openxmlformats.org/drawingml/2006/main">
               <a:ext uri="{FF2B5EF4-FFF2-40B4-BE49-F238E27FC236}">
-                <a16:creationId xmlns:a16="http://schemas.microsoft.com/office/drawing/2014/main" id="{2ACE68C0-8C93-4ACF-9B9F-88E405DF6634}"/>
+                <a16:creationId xmlns:a16="http://schemas.microsoft.com/office/drawing/2014/main" id="{23B54C86-3E35-4D23-A2F5-0B43F53F3C00}"/>
               </a:ext>
             </a:extLst>
           </p:cNvPr>
@@ -20583,10 +20618,10 @@
       </p:sp>
       <p:sp>
         <p:nvSpPr>
-          <p:cNvPr id="8" name="f149">
+          <p:cNvPr id="51" name="dim_f149">
             <a:extLst xmlns:a="http://schemas.openxmlformats.org/drawingml/2006/main">
               <a:ext uri="{FF2B5EF4-FFF2-40B4-BE49-F238E27FC236}">
-                <a16:creationId xmlns:a16="http://schemas.microsoft.com/office/drawing/2014/main" id="{7870EA06-80E3-4731-89CE-C46626DB0A96}"/>
+                <a16:creationId xmlns:a16="http://schemas.microsoft.com/office/drawing/2014/main" id="{28A1F048-6BAE-47F7-9D90-77FF3DE18793}"/>
               </a:ext>
             </a:extLst>
           </p:cNvPr>
@@ -20617,6 +20652,165 @@
             <a:defPPr algn="ctr">
               <a:defRPr sz="1650" b="1">
                 <a:solidFill>
+                  <a:srgbClr val="BCC2C8"/>
+                </a:solidFill>
+                <a:latin typeface="Nimbus Sans"/>
+                <a:ea typeface="Nimbus Sans"/>
+                <a:cs typeface="Nimbus Sans"/>
+              </a:defRPr>
+            </a:defPPr>
+            <a:lvl1pPr algn="ctr">
+              <a:defRPr sz="1650" b="1">
+                <a:solidFill>
+                  <a:srgbClr val="BCC2C8"/>
+                </a:solidFill>
+                <a:latin typeface="Nimbus Sans"/>
+                <a:ea typeface="Nimbus Sans"/>
+                <a:cs typeface="Nimbus Sans"/>
+              </a:defRPr>
+            </a:lvl1pPr>
+            <a:lvl2pPr algn="ctr">
+              <a:defRPr sz="1650" b="1">
+                <a:solidFill>
+                  <a:srgbClr val="BCC2C8"/>
+                </a:solidFill>
+                <a:latin typeface="Nimbus Sans"/>
+                <a:ea typeface="Nimbus Sans"/>
+                <a:cs typeface="Nimbus Sans"/>
+              </a:defRPr>
+            </a:lvl2pPr>
+            <a:lvl3pPr algn="ctr">
+              <a:defRPr sz="1650" b="1">
+                <a:solidFill>
+                  <a:srgbClr val="BCC2C8"/>
+                </a:solidFill>
+                <a:latin typeface="Nimbus Sans"/>
+                <a:ea typeface="Nimbus Sans"/>
+                <a:cs typeface="Nimbus Sans"/>
+              </a:defRPr>
+            </a:lvl3pPr>
+            <a:lvl4pPr algn="ctr">
+              <a:defRPr sz="1650" b="1">
+                <a:solidFill>
+                  <a:srgbClr val="BCC2C8"/>
+                </a:solidFill>
+                <a:latin typeface="Nimbus Sans"/>
+                <a:ea typeface="Nimbus Sans"/>
+                <a:cs typeface="Nimbus Sans"/>
+              </a:defRPr>
+            </a:lvl4pPr>
+            <a:lvl5pPr algn="ctr">
+              <a:defRPr sz="1650" b="1">
+                <a:solidFill>
+                  <a:srgbClr val="BCC2C8"/>
+                </a:solidFill>
+                <a:latin typeface="Nimbus Sans"/>
+                <a:ea typeface="Nimbus Sans"/>
+                <a:cs typeface="Nimbus Sans"/>
+              </a:defRPr>
+            </a:lvl5pPr>
+            <a:lvl6pPr algn="ctr">
+              <a:defRPr sz="1650" b="1">
+                <a:solidFill>
+                  <a:srgbClr val="BCC2C8"/>
+                </a:solidFill>
+                <a:latin typeface="Nimbus Sans"/>
+                <a:ea typeface="Nimbus Sans"/>
+                <a:cs typeface="Nimbus Sans"/>
+              </a:defRPr>
+            </a:lvl6pPr>
+            <a:lvl7pPr algn="ctr">
+              <a:defRPr sz="1650" b="1">
+                <a:solidFill>
+                  <a:srgbClr val="BCC2C8"/>
+                </a:solidFill>
+                <a:latin typeface="Nimbus Sans"/>
+                <a:ea typeface="Nimbus Sans"/>
+                <a:cs typeface="Nimbus Sans"/>
+              </a:defRPr>
+            </a:lvl7pPr>
+            <a:lvl8pPr algn="ctr">
+              <a:defRPr sz="1650" b="1">
+                <a:solidFill>
+                  <a:srgbClr val="BCC2C8"/>
+                </a:solidFill>
+                <a:latin typeface="Nimbus Sans"/>
+                <a:ea typeface="Nimbus Sans"/>
+                <a:cs typeface="Nimbus Sans"/>
+              </a:defRPr>
+            </a:lvl8pPr>
+            <a:lvl9pPr algn="ctr">
+              <a:defRPr sz="1650" b="1">
+                <a:solidFill>
+                  <a:srgbClr val="BCC2C8"/>
+                </a:solidFill>
+                <a:latin typeface="Nimbus Sans"/>
+                <a:ea typeface="Nimbus Sans"/>
+                <a:cs typeface="Nimbus Sans"/>
+              </a:defRPr>
+            </a:lvl9pPr>
+          </a:lstStyle>
+          <a:p xmlns:a="http://schemas.openxmlformats.org/drawingml/2006/main">
+            <a:pPr algn="ctr">
+              <a:defRPr sz="1650" b="1">
+                <a:solidFill>
+                  <a:srgbClr val="BCC2C8"/>
+                </a:solidFill>
+                <a:latin typeface="Nimbus Sans"/>
+                <a:ea typeface="Nimbus Sans"/>
+                <a:cs typeface="Nimbus Sans"/>
+              </a:defRPr>
+            </a:pPr>
+            <a:r>
+              <a:rPr sz="1650" b="1">
+                <a:solidFill>
+                  <a:srgbClr val="BCC2C8"/>
+                </a:solidFill>
+                <a:latin typeface="Nimbus Sans"/>
+                <a:ea typeface="Nimbus Sans"/>
+                <a:cs typeface="Nimbus Sans"/>
+              </a:rPr>
+              <a:t>PCAP ORIGINALE</a:t>
+            </a:r>
+          </a:p>
+        </p:txBody>
+      </p:sp>
+      <p:sp>
+        <p:nvSpPr>
+          <p:cNvPr id="8" name="f149">
+            <a:extLst xmlns:a="http://schemas.openxmlformats.org/drawingml/2006/main">
+              <a:ext uri="{FF2B5EF4-FFF2-40B4-BE49-F238E27FC236}">
+                <a16:creationId xmlns:a16="http://schemas.microsoft.com/office/drawing/2014/main" id="{28A1F048-6BAE-47F7-9D90-77FF3DE18793}"/>
+              </a:ext>
+            </a:extLst>
+          </p:cNvPr>
+          <p:cNvSpPr>
+            <a:spLocks xmlns:a="http://schemas.openxmlformats.org/drawingml/2006/main" noGrp="1"/>
+          </p:cNvSpPr>
+          <p:nvPr/>
+        </p:nvSpPr>
+        <p:spPr>
+          <a:xfrm xmlns:a="http://schemas.openxmlformats.org/drawingml/2006/main">
+            <a:off x="3048000" y="3238500"/>
+            <a:ext cx="1905000" cy="285750"/>
+          </a:xfrm>
+          <a:prstGeom xmlns:a="http://schemas.openxmlformats.org/drawingml/2006/main" prst="rect">
+            <a:avLst/>
+          </a:prstGeom>
+          <a:noFill xmlns:a="http://schemas.openxmlformats.org/drawingml/2006/main"/>
+          <a:ln xmlns:a="http://schemas.openxmlformats.org/drawingml/2006/main" w="0">
+            <a:noFill/>
+            <a:prstDash val="solid"/>
+          </a:ln>
+        </p:spPr>
+        <p:txBody>
+          <a:bodyPr xmlns:a="http://schemas.openxmlformats.org/drawingml/2006/main" wrap="none" lIns="0" tIns="0" rIns="0" bIns="0" anchor="t">
+            <a:noAutofit/>
+          </a:bodyPr>
+          <a:lstStyle xmlns:a="http://schemas.openxmlformats.org/drawingml/2006/main">
+            <a:defPPr algn="ctr">
+              <a:defRPr sz="1650" b="1">
+                <a:solidFill>
                   <a:srgbClr val="182536"/>
                 </a:solidFill>
                 <a:latin typeface="Nimbus Sans"/>
@@ -20745,7 +20939,7 @@
           <p:cNvPr id="9" name="f150">
             <a:extLst xmlns:a="http://schemas.openxmlformats.org/drawingml/2006/main">
               <a:ext uri="{FF2B5EF4-FFF2-40B4-BE49-F238E27FC236}">
-                <a16:creationId xmlns:a16="http://schemas.microsoft.com/office/drawing/2014/main" id="{B1388504-07EA-486F-8C75-2BDAB16FC484}"/>
+                <a16:creationId xmlns:a16="http://schemas.microsoft.com/office/drawing/2014/main" id="{E56F0C01-7B21-49BB-A9A8-7C0225FC2232}"/>
               </a:ext>
             </a:extLst>
           </p:cNvPr>
@@ -20780,7 +20974,7 @@
           <p:cNvPr id="10" name="f151">
             <a:extLst xmlns:a="http://schemas.openxmlformats.org/drawingml/2006/main">
               <a:ext uri="{FF2B5EF4-FFF2-40B4-BE49-F238E27FC236}">
-                <a16:creationId xmlns:a16="http://schemas.microsoft.com/office/drawing/2014/main" id="{B2C247FA-9A2E-4F95-A246-F8C1140F316D}"/>
+                <a16:creationId xmlns:a16="http://schemas.microsoft.com/office/drawing/2014/main" id="{7EA61ED8-5D5A-4847-BA1C-D281298946D0}"/>
               </a:ext>
             </a:extLst>
           </p:cNvPr>
@@ -20936,10 +21130,45 @@
       </p:sp>
       <p:sp>
         <p:nvSpPr>
+          <p:cNvPr id="52" name="dim_f152">
+            <a:extLst xmlns:a="http://schemas.openxmlformats.org/drawingml/2006/main">
+              <a:ext uri="{FF2B5EF4-FFF2-40B4-BE49-F238E27FC236}">
+                <a16:creationId xmlns:a16="http://schemas.microsoft.com/office/drawing/2014/main" id="{D11748A5-9A5B-4F65-96CB-1B1A6BF320C2}"/>
+              </a:ext>
+            </a:extLst>
+          </p:cNvPr>
+          <p:cNvSpPr>
+            <a:spLocks xmlns:a="http://schemas.openxmlformats.org/drawingml/2006/main" noGrp="1"/>
+          </p:cNvSpPr>
+          <p:nvPr/>
+        </p:nvSpPr>
+        <p:spPr>
+          <a:xfrm xmlns:a="http://schemas.openxmlformats.org/drawingml/2006/main">
+            <a:off x="381000" y="6286500"/>
+            <a:ext cx="2095500" cy="590550"/>
+          </a:xfrm>
+          <a:prstGeom xmlns:a="http://schemas.openxmlformats.org/drawingml/2006/main" prst="roundRect">
+            <a:avLst>
+              <a:gd name="adj" fmla="val 19355"/>
+            </a:avLst>
+          </a:prstGeom>
+          <a:solidFill xmlns:a="http://schemas.openxmlformats.org/drawingml/2006/main">
+            <a:srgbClr val="F2F6FA"/>
+          </a:solidFill>
+          <a:ln xmlns:a="http://schemas.openxmlformats.org/drawingml/2006/main" w="17145">
+            <a:solidFill>
+              <a:srgbClr val="ECF1F6"/>
+            </a:solidFill>
+            <a:prstDash val="solid"/>
+          </a:ln>
+        </p:spPr>
+      </p:sp>
+      <p:sp>
+        <p:nvSpPr>
           <p:cNvPr id="11" name="f152">
             <a:extLst xmlns:a="http://schemas.openxmlformats.org/drawingml/2006/main">
               <a:ext uri="{FF2B5EF4-FFF2-40B4-BE49-F238E27FC236}">
-                <a16:creationId xmlns:a16="http://schemas.microsoft.com/office/drawing/2014/main" id="{3FD1E973-0055-4B1E-885D-4613877C3482}"/>
+                <a16:creationId xmlns:a16="http://schemas.microsoft.com/office/drawing/2014/main" id="{D11748A5-9A5B-4F65-96CB-1B1A6BF320C2}"/>
               </a:ext>
             </a:extLst>
           </p:cNvPr>
@@ -20971,10 +21200,10 @@
       </p:sp>
       <p:sp>
         <p:nvSpPr>
-          <p:cNvPr id="12" name="f153">
+          <p:cNvPr id="53" name="dim_f153">
             <a:extLst xmlns:a="http://schemas.openxmlformats.org/drawingml/2006/main">
               <a:ext uri="{FF2B5EF4-FFF2-40B4-BE49-F238E27FC236}">
-                <a16:creationId xmlns:a16="http://schemas.microsoft.com/office/drawing/2014/main" id="{84FBCC2A-2871-4DEF-8596-C9E16E214144}"/>
+                <a16:creationId xmlns:a16="http://schemas.microsoft.com/office/drawing/2014/main" id="{974D1534-78C1-4654-B544-9CFA33E1AAC5}"/>
               </a:ext>
             </a:extLst>
           </p:cNvPr>
@@ -21005,7 +21234,7 @@
             <a:defPPr algn="ctr">
               <a:defRPr sz="1800" b="1">
                 <a:solidFill>
-                  <a:srgbClr val="4264D0"/>
+                  <a:srgbClr val="C7D2EF"/>
                 </a:solidFill>
                 <a:latin typeface="Nimbus Sans"/>
                 <a:ea typeface="Nimbus Sans"/>
@@ -21015,7 +21244,7 @@
             <a:lvl1pPr algn="ctr">
               <a:defRPr sz="1800" b="1">
                 <a:solidFill>
-                  <a:srgbClr val="4264D0"/>
+                  <a:srgbClr val="C7D2EF"/>
                 </a:solidFill>
                 <a:latin typeface="Nimbus Sans"/>
                 <a:ea typeface="Nimbus Sans"/>
@@ -21025,7 +21254,7 @@
             <a:lvl2pPr algn="ctr">
               <a:defRPr sz="1800" b="1">
                 <a:solidFill>
-                  <a:srgbClr val="4264D0"/>
+                  <a:srgbClr val="C7D2EF"/>
                 </a:solidFill>
                 <a:latin typeface="Nimbus Sans"/>
                 <a:ea typeface="Nimbus Sans"/>
@@ -21035,7 +21264,7 @@
             <a:lvl3pPr algn="ctr">
               <a:defRPr sz="1800" b="1">
                 <a:solidFill>
-                  <a:srgbClr val="4264D0"/>
+                  <a:srgbClr val="C7D2EF"/>
                 </a:solidFill>
                 <a:latin typeface="Nimbus Sans"/>
                 <a:ea typeface="Nimbus Sans"/>
@@ -21045,7 +21274,7 @@
             <a:lvl4pPr algn="ctr">
               <a:defRPr sz="1800" b="1">
                 <a:solidFill>
-                  <a:srgbClr val="4264D0"/>
+                  <a:srgbClr val="C7D2EF"/>
                 </a:solidFill>
                 <a:latin typeface="Nimbus Sans"/>
                 <a:ea typeface="Nimbus Sans"/>
@@ -21055,7 +21284,7 @@
             <a:lvl5pPr algn="ctr">
               <a:defRPr sz="1800" b="1">
                 <a:solidFill>
-                  <a:srgbClr val="4264D0"/>
+                  <a:srgbClr val="C7D2EF"/>
                 </a:solidFill>
                 <a:latin typeface="Nimbus Sans"/>
                 <a:ea typeface="Nimbus Sans"/>
@@ -21065,7 +21294,7 @@
             <a:lvl6pPr algn="ctr">
               <a:defRPr sz="1800" b="1">
                 <a:solidFill>
-                  <a:srgbClr val="4264D0"/>
+                  <a:srgbClr val="C7D2EF"/>
                 </a:solidFill>
                 <a:latin typeface="Nimbus Sans"/>
                 <a:ea typeface="Nimbus Sans"/>
@@ -21075,7 +21304,7 @@
             <a:lvl7pPr algn="ctr">
               <a:defRPr sz="1800" b="1">
                 <a:solidFill>
-                  <a:srgbClr val="4264D0"/>
+                  <a:srgbClr val="C7D2EF"/>
                 </a:solidFill>
                 <a:latin typeface="Nimbus Sans"/>
                 <a:ea typeface="Nimbus Sans"/>
@@ -21085,7 +21314,7 @@
             <a:lvl8pPr algn="ctr">
               <a:defRPr sz="1800" b="1">
                 <a:solidFill>
-                  <a:srgbClr val="4264D0"/>
+                  <a:srgbClr val="C7D2EF"/>
                 </a:solidFill>
                 <a:latin typeface="Nimbus Sans"/>
                 <a:ea typeface="Nimbus Sans"/>
@@ -21095,7 +21324,7 @@
             <a:lvl9pPr algn="ctr">
               <a:defRPr sz="1800" b="1">
                 <a:solidFill>
-                  <a:srgbClr val="4264D0"/>
+                  <a:srgbClr val="C7D2EF"/>
                 </a:solidFill>
                 <a:latin typeface="Nimbus Sans"/>
                 <a:ea typeface="Nimbus Sans"/>
@@ -21107,7 +21336,7 @@
             <a:pPr algn="ctr">
               <a:defRPr sz="1800" b="1">
                 <a:solidFill>
-                  <a:srgbClr val="4264D0"/>
+                  <a:srgbClr val="C7D2EF"/>
                 </a:solidFill>
                 <a:latin typeface="Nimbus Sans"/>
                 <a:ea typeface="Nimbus Sans"/>
@@ -21117,7 +21346,7 @@
             <a:r>
               <a:rPr sz="1800" b="1">
                 <a:solidFill>
-                  <a:srgbClr val="4264D0"/>
+                  <a:srgbClr val="C7D2EF"/>
                 </a:solidFill>
                 <a:latin typeface="Nimbus Sans"/>
                 <a:ea typeface="Nimbus Sans"/>
@@ -21130,10 +21359,204 @@
       </p:sp>
       <p:sp>
         <p:nvSpPr>
+          <p:cNvPr id="12" name="f153">
+            <a:extLst xmlns:a="http://schemas.openxmlformats.org/drawingml/2006/main">
+              <a:ext uri="{FF2B5EF4-FFF2-40B4-BE49-F238E27FC236}">
+                <a16:creationId xmlns:a16="http://schemas.microsoft.com/office/drawing/2014/main" id="{974D1534-78C1-4654-B544-9CFA33E1AAC5}"/>
+              </a:ext>
+            </a:extLst>
+          </p:cNvPr>
+          <p:cNvSpPr>
+            <a:spLocks xmlns:a="http://schemas.openxmlformats.org/drawingml/2006/main" noGrp="1"/>
+          </p:cNvSpPr>
+          <p:nvPr/>
+        </p:nvSpPr>
+        <p:spPr>
+          <a:xfrm xmlns:a="http://schemas.openxmlformats.org/drawingml/2006/main">
+            <a:off x="476250" y="6467475"/>
+            <a:ext cx="1905000" cy="304800"/>
+          </a:xfrm>
+          <a:prstGeom xmlns:a="http://schemas.openxmlformats.org/drawingml/2006/main" prst="rect">
+            <a:avLst/>
+          </a:prstGeom>
+          <a:noFill xmlns:a="http://schemas.openxmlformats.org/drawingml/2006/main"/>
+          <a:ln xmlns:a="http://schemas.openxmlformats.org/drawingml/2006/main" w="0">
+            <a:noFill/>
+            <a:prstDash val="solid"/>
+          </a:ln>
+        </p:spPr>
+        <p:txBody>
+          <a:bodyPr xmlns:a="http://schemas.openxmlformats.org/drawingml/2006/main" wrap="none" lIns="0" tIns="0" rIns="0" bIns="0" anchor="t">
+            <a:noAutofit/>
+          </a:bodyPr>
+          <a:lstStyle xmlns:a="http://schemas.openxmlformats.org/drawingml/2006/main">
+            <a:defPPr algn="ctr">
+              <a:defRPr sz="1800" b="1">
+                <a:solidFill>
+                  <a:srgbClr val="4264D0"/>
+                </a:solidFill>
+                <a:latin typeface="Nimbus Sans"/>
+                <a:ea typeface="Nimbus Sans"/>
+                <a:cs typeface="Nimbus Sans"/>
+              </a:defRPr>
+            </a:defPPr>
+            <a:lvl1pPr algn="ctr">
+              <a:defRPr sz="1800" b="1">
+                <a:solidFill>
+                  <a:srgbClr val="4264D0"/>
+                </a:solidFill>
+                <a:latin typeface="Nimbus Sans"/>
+                <a:ea typeface="Nimbus Sans"/>
+                <a:cs typeface="Nimbus Sans"/>
+              </a:defRPr>
+            </a:lvl1pPr>
+            <a:lvl2pPr algn="ctr">
+              <a:defRPr sz="1800" b="1">
+                <a:solidFill>
+                  <a:srgbClr val="4264D0"/>
+                </a:solidFill>
+                <a:latin typeface="Nimbus Sans"/>
+                <a:ea typeface="Nimbus Sans"/>
+                <a:cs typeface="Nimbus Sans"/>
+              </a:defRPr>
+            </a:lvl2pPr>
+            <a:lvl3pPr algn="ctr">
+              <a:defRPr sz="1800" b="1">
+                <a:solidFill>
+                  <a:srgbClr val="4264D0"/>
+                </a:solidFill>
+                <a:latin typeface="Nimbus Sans"/>
+                <a:ea typeface="Nimbus Sans"/>
+                <a:cs typeface="Nimbus Sans"/>
+              </a:defRPr>
+            </a:lvl3pPr>
+            <a:lvl4pPr algn="ctr">
+              <a:defRPr sz="1800" b="1">
+                <a:solidFill>
+                  <a:srgbClr val="4264D0"/>
+                </a:solidFill>
+                <a:latin typeface="Nimbus Sans"/>
+                <a:ea typeface="Nimbus Sans"/>
+                <a:cs typeface="Nimbus Sans"/>
+              </a:defRPr>
+            </a:lvl4pPr>
+            <a:lvl5pPr algn="ctr">
+              <a:defRPr sz="1800" b="1">
+                <a:solidFill>
+                  <a:srgbClr val="4264D0"/>
+                </a:solidFill>
+                <a:latin typeface="Nimbus Sans"/>
+                <a:ea typeface="Nimbus Sans"/>
+                <a:cs typeface="Nimbus Sans"/>
+              </a:defRPr>
+            </a:lvl5pPr>
+            <a:lvl6pPr algn="ctr">
+              <a:defRPr sz="1800" b="1">
+                <a:solidFill>
+                  <a:srgbClr val="4264D0"/>
+                </a:solidFill>
+                <a:latin typeface="Nimbus Sans"/>
+                <a:ea typeface="Nimbus Sans"/>
+                <a:cs typeface="Nimbus Sans"/>
+              </a:defRPr>
+            </a:lvl6pPr>
+            <a:lvl7pPr algn="ctr">
+              <a:defRPr sz="1800" b="1">
+                <a:solidFill>
+                  <a:srgbClr val="4264D0"/>
+                </a:solidFill>
+                <a:latin typeface="Nimbus Sans"/>
+                <a:ea typeface="Nimbus Sans"/>
+                <a:cs typeface="Nimbus Sans"/>
+              </a:defRPr>
+            </a:lvl7pPr>
+            <a:lvl8pPr algn="ctr">
+              <a:defRPr sz="1800" b="1">
+                <a:solidFill>
+                  <a:srgbClr val="4264D0"/>
+                </a:solidFill>
+                <a:latin typeface="Nimbus Sans"/>
+                <a:ea typeface="Nimbus Sans"/>
+                <a:cs typeface="Nimbus Sans"/>
+              </a:defRPr>
+            </a:lvl8pPr>
+            <a:lvl9pPr algn="ctr">
+              <a:defRPr sz="1800" b="1">
+                <a:solidFill>
+                  <a:srgbClr val="4264D0"/>
+                </a:solidFill>
+                <a:latin typeface="Nimbus Sans"/>
+                <a:ea typeface="Nimbus Sans"/>
+                <a:cs typeface="Nimbus Sans"/>
+              </a:defRPr>
+            </a:lvl9pPr>
+          </a:lstStyle>
+          <a:p xmlns:a="http://schemas.openxmlformats.org/drawingml/2006/main">
+            <a:pPr algn="ctr">
+              <a:defRPr sz="1800" b="1">
+                <a:solidFill>
+                  <a:srgbClr val="4264D0"/>
+                </a:solidFill>
+                <a:latin typeface="Nimbus Sans"/>
+                <a:ea typeface="Nimbus Sans"/>
+                <a:cs typeface="Nimbus Sans"/>
+              </a:defRPr>
+            </a:pPr>
+            <a:r>
+              <a:rPr sz="1800" b="1">
+                <a:solidFill>
+                  <a:srgbClr val="4264D0"/>
+                </a:solidFill>
+                <a:latin typeface="Nimbus Sans"/>
+                <a:ea typeface="Nimbus Sans"/>
+                <a:cs typeface="Nimbus Sans"/>
+              </a:rPr>
+              <a:t>Report baseline</a:t>
+            </a:r>
+          </a:p>
+        </p:txBody>
+      </p:sp>
+      <p:sp>
+        <p:nvSpPr>
+          <p:cNvPr id="54" name="dim_f154">
+            <a:extLst xmlns:a="http://schemas.openxmlformats.org/drawingml/2006/main">
+              <a:ext uri="{FF2B5EF4-FFF2-40B4-BE49-F238E27FC236}">
+                <a16:creationId xmlns:a16="http://schemas.microsoft.com/office/drawing/2014/main" id="{30FB1C78-4BF9-4C99-BC3E-D3D59336F81A}"/>
+              </a:ext>
+            </a:extLst>
+          </p:cNvPr>
+          <p:cNvSpPr>
+            <a:spLocks xmlns:a="http://schemas.openxmlformats.org/drawingml/2006/main" noGrp="1"/>
+          </p:cNvSpPr>
+          <p:nvPr/>
+        </p:nvSpPr>
+        <p:spPr>
+          <a:xfrm xmlns:a="http://schemas.openxmlformats.org/drawingml/2006/main">
+            <a:off x="2952750" y="6286500"/>
+            <a:ext cx="2095500" cy="590550"/>
+          </a:xfrm>
+          <a:prstGeom xmlns:a="http://schemas.openxmlformats.org/drawingml/2006/main" prst="roundRect">
+            <a:avLst>
+              <a:gd name="adj" fmla="val 19355"/>
+            </a:avLst>
+          </a:prstGeom>
+          <a:solidFill xmlns:a="http://schemas.openxmlformats.org/drawingml/2006/main">
+            <a:srgbClr val="F2F6FA"/>
+          </a:solidFill>
+          <a:ln xmlns:a="http://schemas.openxmlformats.org/drawingml/2006/main" w="17145">
+            <a:solidFill>
+              <a:srgbClr val="ECF1F6"/>
+            </a:solidFill>
+            <a:prstDash val="solid"/>
+          </a:ln>
+        </p:spPr>
+      </p:sp>
+      <p:sp>
+        <p:nvSpPr>
           <p:cNvPr id="13" name="f154">
             <a:extLst xmlns:a="http://schemas.openxmlformats.org/drawingml/2006/main">
               <a:ext uri="{FF2B5EF4-FFF2-40B4-BE49-F238E27FC236}">
-                <a16:creationId xmlns:a16="http://schemas.microsoft.com/office/drawing/2014/main" id="{9CD06E7E-435F-4E5A-9EDB-321DB6AF586F}"/>
+                <a16:creationId xmlns:a16="http://schemas.microsoft.com/office/drawing/2014/main" id="{30FB1C78-4BF9-4C99-BC3E-D3D59336F81A}"/>
               </a:ext>
             </a:extLst>
           </p:cNvPr>
@@ -21165,10 +21588,10 @@
       </p:sp>
       <p:sp>
         <p:nvSpPr>
-          <p:cNvPr id="14" name="f155">
+          <p:cNvPr id="55" name="dim_f155">
             <a:extLst xmlns:a="http://schemas.openxmlformats.org/drawingml/2006/main">
               <a:ext uri="{FF2B5EF4-FFF2-40B4-BE49-F238E27FC236}">
-                <a16:creationId xmlns:a16="http://schemas.microsoft.com/office/drawing/2014/main" id="{C2A3300B-9998-49E2-8A83-685A5A0E52DE}"/>
+                <a16:creationId xmlns:a16="http://schemas.microsoft.com/office/drawing/2014/main" id="{2B8A4262-44E6-4D7E-AE6D-4E5A0ED2FCC7}"/>
               </a:ext>
             </a:extLst>
           </p:cNvPr>
@@ -21199,7 +21622,7 @@
             <a:defPPr algn="ctr">
               <a:defRPr sz="1800" b="1">
                 <a:solidFill>
-                  <a:srgbClr val="4264D0"/>
+                  <a:srgbClr val="C7D2EF"/>
                 </a:solidFill>
                 <a:latin typeface="Nimbus Sans"/>
                 <a:ea typeface="Nimbus Sans"/>
@@ -21209,7 +21632,7 @@
             <a:lvl1pPr algn="ctr">
               <a:defRPr sz="1800" b="1">
                 <a:solidFill>
-                  <a:srgbClr val="4264D0"/>
+                  <a:srgbClr val="C7D2EF"/>
                 </a:solidFill>
                 <a:latin typeface="Nimbus Sans"/>
                 <a:ea typeface="Nimbus Sans"/>
@@ -21219,7 +21642,7 @@
             <a:lvl2pPr algn="ctr">
               <a:defRPr sz="1800" b="1">
                 <a:solidFill>
-                  <a:srgbClr val="4264D0"/>
+                  <a:srgbClr val="C7D2EF"/>
                 </a:solidFill>
                 <a:latin typeface="Nimbus Sans"/>
                 <a:ea typeface="Nimbus Sans"/>
@@ -21229,7 +21652,7 @@
             <a:lvl3pPr algn="ctr">
               <a:defRPr sz="1800" b="1">
                 <a:solidFill>
-                  <a:srgbClr val="4264D0"/>
+                  <a:srgbClr val="C7D2EF"/>
                 </a:solidFill>
                 <a:latin typeface="Nimbus Sans"/>
                 <a:ea typeface="Nimbus Sans"/>
@@ -21239,7 +21662,7 @@
             <a:lvl4pPr algn="ctr">
               <a:defRPr sz="1800" b="1">
                 <a:solidFill>
-                  <a:srgbClr val="4264D0"/>
+                  <a:srgbClr val="C7D2EF"/>
                 </a:solidFill>
                 <a:latin typeface="Nimbus Sans"/>
                 <a:ea typeface="Nimbus Sans"/>
@@ -21249,7 +21672,7 @@
             <a:lvl5pPr algn="ctr">
               <a:defRPr sz="1800" b="1">
                 <a:solidFill>
-                  <a:srgbClr val="4264D0"/>
+                  <a:srgbClr val="C7D2EF"/>
                 </a:solidFill>
                 <a:latin typeface="Nimbus Sans"/>
                 <a:ea typeface="Nimbus Sans"/>
@@ -21259,7 +21682,7 @@
             <a:lvl6pPr algn="ctr">
               <a:defRPr sz="1800" b="1">
                 <a:solidFill>
-                  <a:srgbClr val="4264D0"/>
+                  <a:srgbClr val="C7D2EF"/>
                 </a:solidFill>
                 <a:latin typeface="Nimbus Sans"/>
                 <a:ea typeface="Nimbus Sans"/>
@@ -21269,7 +21692,7 @@
             <a:lvl7pPr algn="ctr">
               <a:defRPr sz="1800" b="1">
                 <a:solidFill>
-                  <a:srgbClr val="4264D0"/>
+                  <a:srgbClr val="C7D2EF"/>
                 </a:solidFill>
                 <a:latin typeface="Nimbus Sans"/>
                 <a:ea typeface="Nimbus Sans"/>
@@ -21279,7 +21702,7 @@
             <a:lvl8pPr algn="ctr">
               <a:defRPr sz="1800" b="1">
                 <a:solidFill>
-                  <a:srgbClr val="4264D0"/>
+                  <a:srgbClr val="C7D2EF"/>
                 </a:solidFill>
                 <a:latin typeface="Nimbus Sans"/>
                 <a:ea typeface="Nimbus Sans"/>
@@ -21289,7 +21712,7 @@
             <a:lvl9pPr algn="ctr">
               <a:defRPr sz="1800" b="1">
                 <a:solidFill>
-                  <a:srgbClr val="4264D0"/>
+                  <a:srgbClr val="C7D2EF"/>
                 </a:solidFill>
                 <a:latin typeface="Nimbus Sans"/>
                 <a:ea typeface="Nimbus Sans"/>
@@ -21301,7 +21724,7 @@
             <a:pPr algn="ctr">
               <a:defRPr sz="1800" b="1">
                 <a:solidFill>
-                  <a:srgbClr val="4264D0"/>
+                  <a:srgbClr val="C7D2EF"/>
                 </a:solidFill>
                 <a:latin typeface="Nimbus Sans"/>
                 <a:ea typeface="Nimbus Sans"/>
@@ -21311,7 +21734,7 @@
             <a:r>
               <a:rPr sz="1800" b="1">
                 <a:solidFill>
-                  <a:srgbClr val="4264D0"/>
+                  <a:srgbClr val="C7D2EF"/>
                 </a:solidFill>
                 <a:latin typeface="Nimbus Sans"/>
                 <a:ea typeface="Nimbus Sans"/>
@@ -21324,10 +21747,204 @@
       </p:sp>
       <p:sp>
         <p:nvSpPr>
+          <p:cNvPr id="14" name="f155">
+            <a:extLst xmlns:a="http://schemas.openxmlformats.org/drawingml/2006/main">
+              <a:ext uri="{FF2B5EF4-FFF2-40B4-BE49-F238E27FC236}">
+                <a16:creationId xmlns:a16="http://schemas.microsoft.com/office/drawing/2014/main" id="{2B8A4262-44E6-4D7E-AE6D-4E5A0ED2FCC7}"/>
+              </a:ext>
+            </a:extLst>
+          </p:cNvPr>
+          <p:cNvSpPr>
+            <a:spLocks xmlns:a="http://schemas.openxmlformats.org/drawingml/2006/main" noGrp="1"/>
+          </p:cNvSpPr>
+          <p:nvPr/>
+        </p:nvSpPr>
+        <p:spPr>
+          <a:xfrm xmlns:a="http://schemas.openxmlformats.org/drawingml/2006/main">
+            <a:off x="3048000" y="6467475"/>
+            <a:ext cx="1905000" cy="304800"/>
+          </a:xfrm>
+          <a:prstGeom xmlns:a="http://schemas.openxmlformats.org/drawingml/2006/main" prst="rect">
+            <a:avLst/>
+          </a:prstGeom>
+          <a:noFill xmlns:a="http://schemas.openxmlformats.org/drawingml/2006/main"/>
+          <a:ln xmlns:a="http://schemas.openxmlformats.org/drawingml/2006/main" w="0">
+            <a:noFill/>
+            <a:prstDash val="solid"/>
+          </a:ln>
+        </p:spPr>
+        <p:txBody>
+          <a:bodyPr xmlns:a="http://schemas.openxmlformats.org/drawingml/2006/main" wrap="none" lIns="0" tIns="0" rIns="0" bIns="0" anchor="t">
+            <a:noAutofit/>
+          </a:bodyPr>
+          <a:lstStyle xmlns:a="http://schemas.openxmlformats.org/drawingml/2006/main">
+            <a:defPPr algn="ctr">
+              <a:defRPr sz="1800" b="1">
+                <a:solidFill>
+                  <a:srgbClr val="4264D0"/>
+                </a:solidFill>
+                <a:latin typeface="Nimbus Sans"/>
+                <a:ea typeface="Nimbus Sans"/>
+                <a:cs typeface="Nimbus Sans"/>
+              </a:defRPr>
+            </a:defPPr>
+            <a:lvl1pPr algn="ctr">
+              <a:defRPr sz="1800" b="1">
+                <a:solidFill>
+                  <a:srgbClr val="4264D0"/>
+                </a:solidFill>
+                <a:latin typeface="Nimbus Sans"/>
+                <a:ea typeface="Nimbus Sans"/>
+                <a:cs typeface="Nimbus Sans"/>
+              </a:defRPr>
+            </a:lvl1pPr>
+            <a:lvl2pPr algn="ctr">
+              <a:defRPr sz="1800" b="1">
+                <a:solidFill>
+                  <a:srgbClr val="4264D0"/>
+                </a:solidFill>
+                <a:latin typeface="Nimbus Sans"/>
+                <a:ea typeface="Nimbus Sans"/>
+                <a:cs typeface="Nimbus Sans"/>
+              </a:defRPr>
+            </a:lvl2pPr>
+            <a:lvl3pPr algn="ctr">
+              <a:defRPr sz="1800" b="1">
+                <a:solidFill>
+                  <a:srgbClr val="4264D0"/>
+                </a:solidFill>
+                <a:latin typeface="Nimbus Sans"/>
+                <a:ea typeface="Nimbus Sans"/>
+                <a:cs typeface="Nimbus Sans"/>
+              </a:defRPr>
+            </a:lvl3pPr>
+            <a:lvl4pPr algn="ctr">
+              <a:defRPr sz="1800" b="1">
+                <a:solidFill>
+                  <a:srgbClr val="4264D0"/>
+                </a:solidFill>
+                <a:latin typeface="Nimbus Sans"/>
+                <a:ea typeface="Nimbus Sans"/>
+                <a:cs typeface="Nimbus Sans"/>
+              </a:defRPr>
+            </a:lvl4pPr>
+            <a:lvl5pPr algn="ctr">
+              <a:defRPr sz="1800" b="1">
+                <a:solidFill>
+                  <a:srgbClr val="4264D0"/>
+                </a:solidFill>
+                <a:latin typeface="Nimbus Sans"/>
+                <a:ea typeface="Nimbus Sans"/>
+                <a:cs typeface="Nimbus Sans"/>
+              </a:defRPr>
+            </a:lvl5pPr>
+            <a:lvl6pPr algn="ctr">
+              <a:defRPr sz="1800" b="1">
+                <a:solidFill>
+                  <a:srgbClr val="4264D0"/>
+                </a:solidFill>
+                <a:latin typeface="Nimbus Sans"/>
+                <a:ea typeface="Nimbus Sans"/>
+                <a:cs typeface="Nimbus Sans"/>
+              </a:defRPr>
+            </a:lvl6pPr>
+            <a:lvl7pPr algn="ctr">
+              <a:defRPr sz="1800" b="1">
+                <a:solidFill>
+                  <a:srgbClr val="4264D0"/>
+                </a:solidFill>
+                <a:latin typeface="Nimbus Sans"/>
+                <a:ea typeface="Nimbus Sans"/>
+                <a:cs typeface="Nimbus Sans"/>
+              </a:defRPr>
+            </a:lvl7pPr>
+            <a:lvl8pPr algn="ctr">
+              <a:defRPr sz="1800" b="1">
+                <a:solidFill>
+                  <a:srgbClr val="4264D0"/>
+                </a:solidFill>
+                <a:latin typeface="Nimbus Sans"/>
+                <a:ea typeface="Nimbus Sans"/>
+                <a:cs typeface="Nimbus Sans"/>
+              </a:defRPr>
+            </a:lvl8pPr>
+            <a:lvl9pPr algn="ctr">
+              <a:defRPr sz="1800" b="1">
+                <a:solidFill>
+                  <a:srgbClr val="4264D0"/>
+                </a:solidFill>
+                <a:latin typeface="Nimbus Sans"/>
+                <a:ea typeface="Nimbus Sans"/>
+                <a:cs typeface="Nimbus Sans"/>
+              </a:defRPr>
+            </a:lvl9pPr>
+          </a:lstStyle>
+          <a:p xmlns:a="http://schemas.openxmlformats.org/drawingml/2006/main">
+            <a:pPr algn="ctr">
+              <a:defRPr sz="1800" b="1">
+                <a:solidFill>
+                  <a:srgbClr val="4264D0"/>
+                </a:solidFill>
+                <a:latin typeface="Nimbus Sans"/>
+                <a:ea typeface="Nimbus Sans"/>
+                <a:cs typeface="Nimbus Sans"/>
+              </a:defRPr>
+            </a:pPr>
+            <a:r>
+              <a:rPr sz="1800" b="1">
+                <a:solidFill>
+                  <a:srgbClr val="4264D0"/>
+                </a:solidFill>
+                <a:latin typeface="Nimbus Sans"/>
+                <a:ea typeface="Nimbus Sans"/>
+                <a:cs typeface="Nimbus Sans"/>
+              </a:rPr>
+              <a:t>Report mutation</a:t>
+            </a:r>
+          </a:p>
+        </p:txBody>
+      </p:sp>
+      <p:sp>
+        <p:nvSpPr>
+          <p:cNvPr id="56" name="dim_f156">
+            <a:extLst xmlns:a="http://schemas.openxmlformats.org/drawingml/2006/main">
+              <a:ext uri="{FF2B5EF4-FFF2-40B4-BE49-F238E27FC236}">
+                <a16:creationId xmlns:a16="http://schemas.microsoft.com/office/drawing/2014/main" id="{0EE0B4C8-6E54-4025-A295-6B6155B3D2E8}"/>
+              </a:ext>
+            </a:extLst>
+          </p:cNvPr>
+          <p:cNvSpPr>
+            <a:spLocks xmlns:a="http://schemas.openxmlformats.org/drawingml/2006/main" noGrp="1"/>
+          </p:cNvSpPr>
+          <p:nvPr/>
+        </p:nvSpPr>
+        <p:spPr>
+          <a:xfrm xmlns:a="http://schemas.openxmlformats.org/drawingml/2006/main">
+            <a:off x="5953125" y="5143500"/>
+            <a:ext cx="1714500" cy="857250"/>
+          </a:xfrm>
+          <a:prstGeom xmlns:a="http://schemas.openxmlformats.org/drawingml/2006/main" prst="roundRect">
+            <a:avLst>
+              <a:gd name="adj" fmla="val 13333"/>
+            </a:avLst>
+          </a:prstGeom>
+          <a:solidFill xmlns:a="http://schemas.openxmlformats.org/drawingml/2006/main">
+            <a:srgbClr val="F6F6F5"/>
+          </a:solidFill>
+          <a:ln xmlns:a="http://schemas.openxmlformats.org/drawingml/2006/main" w="17145">
+            <a:solidFill>
+              <a:srgbClr val="F1EEE6"/>
+            </a:solidFill>
+            <a:prstDash val="solid"/>
+          </a:ln>
+        </p:spPr>
+      </p:sp>
+      <p:sp>
+        <p:nvSpPr>
           <p:cNvPr id="15" name="f156">
             <a:extLst xmlns:a="http://schemas.openxmlformats.org/drawingml/2006/main">
               <a:ext uri="{FF2B5EF4-FFF2-40B4-BE49-F238E27FC236}">
-                <a16:creationId xmlns:a16="http://schemas.microsoft.com/office/drawing/2014/main" id="{8667917F-82F1-43D8-960B-6647E2E692BC}"/>
+                <a16:creationId xmlns:a16="http://schemas.microsoft.com/office/drawing/2014/main" id="{0EE0B4C8-6E54-4025-A295-6B6155B3D2E8}"/>
               </a:ext>
             </a:extLst>
           </p:cNvPr>
@@ -21359,10 +21976,10 @@
       </p:sp>
       <p:sp>
         <p:nvSpPr>
-          <p:cNvPr id="16" name="f157">
+          <p:cNvPr id="57" name="dim_f157">
             <a:extLst xmlns:a="http://schemas.openxmlformats.org/drawingml/2006/main">
               <a:ext uri="{FF2B5EF4-FFF2-40B4-BE49-F238E27FC236}">
-                <a16:creationId xmlns:a16="http://schemas.microsoft.com/office/drawing/2014/main" id="{6F08C1D0-46EB-4081-9A6E-CB77761FEC02}"/>
+                <a16:creationId xmlns:a16="http://schemas.microsoft.com/office/drawing/2014/main" id="{817729EF-6BC3-4ED4-8E9B-913D13211103}"/>
               </a:ext>
             </a:extLst>
           </p:cNvPr>
@@ -21393,7 +22010,7 @@
             <a:defPPr algn="ctr">
               <a:defRPr sz="1875" b="1">
                 <a:solidFill>
-                  <a:srgbClr val="9D7139"/>
+                  <a:srgbClr val="DED5C9"/>
                 </a:solidFill>
                 <a:latin typeface="Nimbus Sans"/>
                 <a:ea typeface="Nimbus Sans"/>
@@ -21403,7 +22020,7 @@
             <a:lvl1pPr algn="ctr">
               <a:defRPr sz="1875" b="1">
                 <a:solidFill>
-                  <a:srgbClr val="9D7139"/>
+                  <a:srgbClr val="DED5C9"/>
                 </a:solidFill>
                 <a:latin typeface="Nimbus Sans"/>
                 <a:ea typeface="Nimbus Sans"/>
@@ -21413,7 +22030,7 @@
             <a:lvl2pPr algn="ctr">
               <a:defRPr sz="1875" b="1">
                 <a:solidFill>
-                  <a:srgbClr val="9D7139"/>
+                  <a:srgbClr val="DED5C9"/>
                 </a:solidFill>
                 <a:latin typeface="Nimbus Sans"/>
                 <a:ea typeface="Nimbus Sans"/>
@@ -21423,7 +22040,7 @@
             <a:lvl3pPr algn="ctr">
               <a:defRPr sz="1875" b="1">
                 <a:solidFill>
-                  <a:srgbClr val="9D7139"/>
+                  <a:srgbClr val="DED5C9"/>
                 </a:solidFill>
                 <a:latin typeface="Nimbus Sans"/>
                 <a:ea typeface="Nimbus Sans"/>
@@ -21433,7 +22050,7 @@
             <a:lvl4pPr algn="ctr">
               <a:defRPr sz="1875" b="1">
                 <a:solidFill>
-                  <a:srgbClr val="9D7139"/>
+                  <a:srgbClr val="DED5C9"/>
                 </a:solidFill>
                 <a:latin typeface="Nimbus Sans"/>
                 <a:ea typeface="Nimbus Sans"/>
@@ -21443,7 +22060,7 @@
             <a:lvl5pPr algn="ctr">
               <a:defRPr sz="1875" b="1">
                 <a:solidFill>
-                  <a:srgbClr val="9D7139"/>
+                  <a:srgbClr val="DED5C9"/>
                 </a:solidFill>
                 <a:latin typeface="Nimbus Sans"/>
                 <a:ea typeface="Nimbus Sans"/>
@@ -21453,7 +22070,7 @@
             <a:lvl6pPr algn="ctr">
               <a:defRPr sz="1875" b="1">
                 <a:solidFill>
-                  <a:srgbClr val="9D7139"/>
+                  <a:srgbClr val="DED5C9"/>
                 </a:solidFill>
                 <a:latin typeface="Nimbus Sans"/>
                 <a:ea typeface="Nimbus Sans"/>
@@ -21463,7 +22080,7 @@
             <a:lvl7pPr algn="ctr">
               <a:defRPr sz="1875" b="1">
                 <a:solidFill>
-                  <a:srgbClr val="9D7139"/>
+                  <a:srgbClr val="DED5C9"/>
                 </a:solidFill>
                 <a:latin typeface="Nimbus Sans"/>
                 <a:ea typeface="Nimbus Sans"/>
@@ -21473,7 +22090,7 @@
             <a:lvl8pPr algn="ctr">
               <a:defRPr sz="1875" b="1">
                 <a:solidFill>
-                  <a:srgbClr val="9D7139"/>
+                  <a:srgbClr val="DED5C9"/>
                 </a:solidFill>
                 <a:latin typeface="Nimbus Sans"/>
                 <a:ea typeface="Nimbus Sans"/>
@@ -21483,7 +22100,7 @@
             <a:lvl9pPr algn="ctr">
               <a:defRPr sz="1875" b="1">
                 <a:solidFill>
-                  <a:srgbClr val="9D7139"/>
+                  <a:srgbClr val="DED5C9"/>
                 </a:solidFill>
                 <a:latin typeface="Nimbus Sans"/>
                 <a:ea typeface="Nimbus Sans"/>
@@ -21495,7 +22112,7 @@
             <a:pPr algn="ctr">
               <a:defRPr sz="1875" b="1">
                 <a:solidFill>
-                  <a:srgbClr val="9D7139"/>
+                  <a:srgbClr val="DED5C9"/>
                 </a:solidFill>
                 <a:latin typeface="Nimbus Sans"/>
                 <a:ea typeface="Nimbus Sans"/>
@@ -21505,7 +22122,7 @@
             <a:r>
               <a:rPr sz="1875" b="1">
                 <a:solidFill>
-                  <a:srgbClr val="9D7139"/>
+                  <a:srgbClr val="DED5C9"/>
                 </a:solidFill>
                 <a:latin typeface="Nimbus Sans"/>
                 <a:ea typeface="Nimbus Sans"/>
@@ -21518,7 +22135,7 @@
             <a:pPr algn="ctr">
               <a:defRPr sz="1875" b="1">
                 <a:solidFill>
-                  <a:srgbClr val="9D7139"/>
+                  <a:srgbClr val="DED5C9"/>
                 </a:solidFill>
                 <a:latin typeface="Nimbus Sans"/>
                 <a:ea typeface="Nimbus Sans"/>
@@ -21528,7 +22145,7 @@
             <a:r>
               <a:rPr sz="1875" b="1">
                 <a:solidFill>
-                  <a:srgbClr val="9D7139"/>
+                  <a:srgbClr val="DED5C9"/>
                 </a:solidFill>
                 <a:latin typeface="Nimbus Sans"/>
                 <a:ea typeface="Nimbus Sans"/>
@@ -21541,10 +22158,227 @@
       </p:sp>
       <p:sp>
         <p:nvSpPr>
+          <p:cNvPr id="16" name="f157">
+            <a:extLst xmlns:a="http://schemas.openxmlformats.org/drawingml/2006/main">
+              <a:ext uri="{FF2B5EF4-FFF2-40B4-BE49-F238E27FC236}">
+                <a16:creationId xmlns:a16="http://schemas.microsoft.com/office/drawing/2014/main" id="{817729EF-6BC3-4ED4-8E9B-913D13211103}"/>
+              </a:ext>
+            </a:extLst>
+          </p:cNvPr>
+          <p:cNvSpPr>
+            <a:spLocks xmlns:a="http://schemas.openxmlformats.org/drawingml/2006/main" noGrp="1"/>
+          </p:cNvSpPr>
+          <p:nvPr/>
+        </p:nvSpPr>
+        <p:spPr>
+          <a:xfrm xmlns:a="http://schemas.openxmlformats.org/drawingml/2006/main">
+            <a:off x="6048375" y="5300663"/>
+            <a:ext cx="1524000" cy="619125"/>
+          </a:xfrm>
+          <a:prstGeom xmlns:a="http://schemas.openxmlformats.org/drawingml/2006/main" prst="rect">
+            <a:avLst/>
+          </a:prstGeom>
+          <a:noFill xmlns:a="http://schemas.openxmlformats.org/drawingml/2006/main"/>
+          <a:ln xmlns:a="http://schemas.openxmlformats.org/drawingml/2006/main" w="0">
+            <a:noFill/>
+            <a:prstDash val="solid"/>
+          </a:ln>
+        </p:spPr>
+        <p:txBody>
+          <a:bodyPr xmlns:a="http://schemas.openxmlformats.org/drawingml/2006/main" wrap="none" lIns="0" tIns="0" rIns="0" bIns="0" anchor="t">
+            <a:noAutofit/>
+          </a:bodyPr>
+          <a:lstStyle xmlns:a="http://schemas.openxmlformats.org/drawingml/2006/main">
+            <a:defPPr algn="ctr">
+              <a:defRPr sz="1875" b="1">
+                <a:solidFill>
+                  <a:srgbClr val="9D7139"/>
+                </a:solidFill>
+                <a:latin typeface="Nimbus Sans"/>
+                <a:ea typeface="Nimbus Sans"/>
+                <a:cs typeface="Nimbus Sans"/>
+              </a:defRPr>
+            </a:defPPr>
+            <a:lvl1pPr algn="ctr">
+              <a:defRPr sz="1875" b="1">
+                <a:solidFill>
+                  <a:srgbClr val="9D7139"/>
+                </a:solidFill>
+                <a:latin typeface="Nimbus Sans"/>
+                <a:ea typeface="Nimbus Sans"/>
+                <a:cs typeface="Nimbus Sans"/>
+              </a:defRPr>
+            </a:lvl1pPr>
+            <a:lvl2pPr algn="ctr">
+              <a:defRPr sz="1875" b="1">
+                <a:solidFill>
+                  <a:srgbClr val="9D7139"/>
+                </a:solidFill>
+                <a:latin typeface="Nimbus Sans"/>
+                <a:ea typeface="Nimbus Sans"/>
+                <a:cs typeface="Nimbus Sans"/>
+              </a:defRPr>
+            </a:lvl2pPr>
+            <a:lvl3pPr algn="ctr">
+              <a:defRPr sz="1875" b="1">
+                <a:solidFill>
+                  <a:srgbClr val="9D7139"/>
+                </a:solidFill>
+                <a:latin typeface="Nimbus Sans"/>
+                <a:ea typeface="Nimbus Sans"/>
+                <a:cs typeface="Nimbus Sans"/>
+              </a:defRPr>
+            </a:lvl3pPr>
+            <a:lvl4pPr algn="ctr">
+              <a:defRPr sz="1875" b="1">
+                <a:solidFill>
+                  <a:srgbClr val="9D7139"/>
+                </a:solidFill>
+                <a:latin typeface="Nimbus Sans"/>
+                <a:ea typeface="Nimbus Sans"/>
+                <a:cs typeface="Nimbus Sans"/>
+              </a:defRPr>
+            </a:lvl4pPr>
+            <a:lvl5pPr algn="ctr">
+              <a:defRPr sz="1875" b="1">
+                <a:solidFill>
+                  <a:srgbClr val="9D7139"/>
+                </a:solidFill>
+                <a:latin typeface="Nimbus Sans"/>
+                <a:ea typeface="Nimbus Sans"/>
+                <a:cs typeface="Nimbus Sans"/>
+              </a:defRPr>
+            </a:lvl5pPr>
+            <a:lvl6pPr algn="ctr">
+              <a:defRPr sz="1875" b="1">
+                <a:solidFill>
+                  <a:srgbClr val="9D7139"/>
+                </a:solidFill>
+                <a:latin typeface="Nimbus Sans"/>
+                <a:ea typeface="Nimbus Sans"/>
+                <a:cs typeface="Nimbus Sans"/>
+              </a:defRPr>
+            </a:lvl6pPr>
+            <a:lvl7pPr algn="ctr">
+              <a:defRPr sz="1875" b="1">
+                <a:solidFill>
+                  <a:srgbClr val="9D7139"/>
+                </a:solidFill>
+                <a:latin typeface="Nimbus Sans"/>
+                <a:ea typeface="Nimbus Sans"/>
+                <a:cs typeface="Nimbus Sans"/>
+              </a:defRPr>
+            </a:lvl7pPr>
+            <a:lvl8pPr algn="ctr">
+              <a:defRPr sz="1875" b="1">
+                <a:solidFill>
+                  <a:srgbClr val="9D7139"/>
+                </a:solidFill>
+                <a:latin typeface="Nimbus Sans"/>
+                <a:ea typeface="Nimbus Sans"/>
+                <a:cs typeface="Nimbus Sans"/>
+              </a:defRPr>
+            </a:lvl8pPr>
+            <a:lvl9pPr algn="ctr">
+              <a:defRPr sz="1875" b="1">
+                <a:solidFill>
+                  <a:srgbClr val="9D7139"/>
+                </a:solidFill>
+                <a:latin typeface="Nimbus Sans"/>
+                <a:ea typeface="Nimbus Sans"/>
+                <a:cs typeface="Nimbus Sans"/>
+              </a:defRPr>
+            </a:lvl9pPr>
+          </a:lstStyle>
+          <a:p xmlns:a="http://schemas.openxmlformats.org/drawingml/2006/main">
+            <a:pPr algn="ctr">
+              <a:defRPr sz="1875" b="1">
+                <a:solidFill>
+                  <a:srgbClr val="9D7139"/>
+                </a:solidFill>
+                <a:latin typeface="Nimbus Sans"/>
+                <a:ea typeface="Nimbus Sans"/>
+                <a:cs typeface="Nimbus Sans"/>
+              </a:defRPr>
+            </a:pPr>
+            <a:r>
+              <a:rPr sz="1875" b="1">
+                <a:solidFill>
+                  <a:srgbClr val="9D7139"/>
+                </a:solidFill>
+                <a:latin typeface="Nimbus Sans"/>
+                <a:ea typeface="Nimbus Sans"/>
+                <a:cs typeface="Nimbus Sans"/>
+              </a:rPr>
+              <a:t>MOTORE</a:t>
+            </a:r>
+          </a:p>
+          <a:p xmlns:a="http://schemas.openxmlformats.org/drawingml/2006/main">
+            <a:pPr algn="ctr">
+              <a:defRPr sz="1875" b="1">
+                <a:solidFill>
+                  <a:srgbClr val="9D7139"/>
+                </a:solidFill>
+                <a:latin typeface="Nimbus Sans"/>
+                <a:ea typeface="Nimbus Sans"/>
+                <a:cs typeface="Nimbus Sans"/>
+              </a:defRPr>
+            </a:pPr>
+            <a:r>
+              <a:rPr sz="1875" b="1">
+                <a:solidFill>
+                  <a:srgbClr val="9D7139"/>
+                </a:solidFill>
+                <a:latin typeface="Nimbus Sans"/>
+                <a:ea typeface="Nimbus Sans"/>
+                <a:cs typeface="Nimbus Sans"/>
+              </a:rPr>
+              <a:t>di mutazione</a:t>
+            </a:r>
+          </a:p>
+        </p:txBody>
+      </p:sp>
+      <p:sp>
+        <p:nvSpPr>
+          <p:cNvPr id="58" name="dim_f158">
+            <a:extLst xmlns:a="http://schemas.openxmlformats.org/drawingml/2006/main">
+              <a:ext uri="{FF2B5EF4-FFF2-40B4-BE49-F238E27FC236}">
+                <a16:creationId xmlns:a16="http://schemas.microsoft.com/office/drawing/2014/main" id="{4CF83769-7222-44AB-8AFA-1D0D21F464B2}"/>
+              </a:ext>
+            </a:extLst>
+          </p:cNvPr>
+          <p:cNvSpPr>
+            <a:spLocks xmlns:a="http://schemas.openxmlformats.org/drawingml/2006/main" noGrp="1"/>
+          </p:cNvSpPr>
+          <p:nvPr/>
+        </p:nvSpPr>
+        <p:spPr>
+          <a:xfrm xmlns:a="http://schemas.openxmlformats.org/drawingml/2006/main">
+            <a:off x="5953125" y="3714750"/>
+            <a:ext cx="1714500" cy="590550"/>
+          </a:xfrm>
+          <a:prstGeom xmlns:a="http://schemas.openxmlformats.org/drawingml/2006/main" prst="roundRect">
+            <a:avLst>
+              <a:gd name="adj" fmla="val 19355"/>
+            </a:avLst>
+          </a:prstGeom>
+          <a:solidFill xmlns:a="http://schemas.openxmlformats.org/drawingml/2006/main">
+            <a:srgbClr val="F6F8FA"/>
+          </a:solidFill>
+          <a:ln xmlns:a="http://schemas.openxmlformats.org/drawingml/2006/main" w="17145">
+            <a:solidFill>
+              <a:srgbClr val="ECF1F6"/>
+            </a:solidFill>
+            <a:prstDash val="solid"/>
+          </a:ln>
+        </p:spPr>
+      </p:sp>
+      <p:sp>
+        <p:nvSpPr>
           <p:cNvPr id="17" name="f158">
             <a:extLst xmlns:a="http://schemas.openxmlformats.org/drawingml/2006/main">
               <a:ext uri="{FF2B5EF4-FFF2-40B4-BE49-F238E27FC236}">
-                <a16:creationId xmlns:a16="http://schemas.microsoft.com/office/drawing/2014/main" id="{9A28D102-7E14-4189-92FE-1BA647AFE566}"/>
+                <a16:creationId xmlns:a16="http://schemas.microsoft.com/office/drawing/2014/main" id="{4CF83769-7222-44AB-8AFA-1D0D21F464B2}"/>
               </a:ext>
             </a:extLst>
           </p:cNvPr>
@@ -21576,10 +22410,10 @@
       </p:sp>
       <p:sp>
         <p:nvSpPr>
-          <p:cNvPr id="18" name="f159">
+          <p:cNvPr id="59" name="dim_f159">
             <a:extLst xmlns:a="http://schemas.openxmlformats.org/drawingml/2006/main">
               <a:ext uri="{FF2B5EF4-FFF2-40B4-BE49-F238E27FC236}">
-                <a16:creationId xmlns:a16="http://schemas.microsoft.com/office/drawing/2014/main" id="{1A712BE1-2D18-492A-B875-4CEDDC4FE8EE}"/>
+                <a16:creationId xmlns:a16="http://schemas.microsoft.com/office/drawing/2014/main" id="{881383A0-BC12-42DC-A792-E717B34FD9B2}"/>
               </a:ext>
             </a:extLst>
           </p:cNvPr>
@@ -21610,6 +22444,165 @@
             <a:defPPr algn="ctr">
               <a:defRPr sz="1650" b="1">
                 <a:solidFill>
+                  <a:srgbClr val="BCC2C8"/>
+                </a:solidFill>
+                <a:latin typeface="Nimbus Sans"/>
+                <a:ea typeface="Nimbus Sans"/>
+                <a:cs typeface="Nimbus Sans"/>
+              </a:defRPr>
+            </a:defPPr>
+            <a:lvl1pPr algn="ctr">
+              <a:defRPr sz="1650" b="1">
+                <a:solidFill>
+                  <a:srgbClr val="BCC2C8"/>
+                </a:solidFill>
+                <a:latin typeface="Nimbus Sans"/>
+                <a:ea typeface="Nimbus Sans"/>
+                <a:cs typeface="Nimbus Sans"/>
+              </a:defRPr>
+            </a:lvl1pPr>
+            <a:lvl2pPr algn="ctr">
+              <a:defRPr sz="1650" b="1">
+                <a:solidFill>
+                  <a:srgbClr val="BCC2C8"/>
+                </a:solidFill>
+                <a:latin typeface="Nimbus Sans"/>
+                <a:ea typeface="Nimbus Sans"/>
+                <a:cs typeface="Nimbus Sans"/>
+              </a:defRPr>
+            </a:lvl2pPr>
+            <a:lvl3pPr algn="ctr">
+              <a:defRPr sz="1650" b="1">
+                <a:solidFill>
+                  <a:srgbClr val="BCC2C8"/>
+                </a:solidFill>
+                <a:latin typeface="Nimbus Sans"/>
+                <a:ea typeface="Nimbus Sans"/>
+                <a:cs typeface="Nimbus Sans"/>
+              </a:defRPr>
+            </a:lvl3pPr>
+            <a:lvl4pPr algn="ctr">
+              <a:defRPr sz="1650" b="1">
+                <a:solidFill>
+                  <a:srgbClr val="BCC2C8"/>
+                </a:solidFill>
+                <a:latin typeface="Nimbus Sans"/>
+                <a:ea typeface="Nimbus Sans"/>
+                <a:cs typeface="Nimbus Sans"/>
+              </a:defRPr>
+            </a:lvl4pPr>
+            <a:lvl5pPr algn="ctr">
+              <a:defRPr sz="1650" b="1">
+                <a:solidFill>
+                  <a:srgbClr val="BCC2C8"/>
+                </a:solidFill>
+                <a:latin typeface="Nimbus Sans"/>
+                <a:ea typeface="Nimbus Sans"/>
+                <a:cs typeface="Nimbus Sans"/>
+              </a:defRPr>
+            </a:lvl5pPr>
+            <a:lvl6pPr algn="ctr">
+              <a:defRPr sz="1650" b="1">
+                <a:solidFill>
+                  <a:srgbClr val="BCC2C8"/>
+                </a:solidFill>
+                <a:latin typeface="Nimbus Sans"/>
+                <a:ea typeface="Nimbus Sans"/>
+                <a:cs typeface="Nimbus Sans"/>
+              </a:defRPr>
+            </a:lvl6pPr>
+            <a:lvl7pPr algn="ctr">
+              <a:defRPr sz="1650" b="1">
+                <a:solidFill>
+                  <a:srgbClr val="BCC2C8"/>
+                </a:solidFill>
+                <a:latin typeface="Nimbus Sans"/>
+                <a:ea typeface="Nimbus Sans"/>
+                <a:cs typeface="Nimbus Sans"/>
+              </a:defRPr>
+            </a:lvl7pPr>
+            <a:lvl8pPr algn="ctr">
+              <a:defRPr sz="1650" b="1">
+                <a:solidFill>
+                  <a:srgbClr val="BCC2C8"/>
+                </a:solidFill>
+                <a:latin typeface="Nimbus Sans"/>
+                <a:ea typeface="Nimbus Sans"/>
+                <a:cs typeface="Nimbus Sans"/>
+              </a:defRPr>
+            </a:lvl8pPr>
+            <a:lvl9pPr algn="ctr">
+              <a:defRPr sz="1650" b="1">
+                <a:solidFill>
+                  <a:srgbClr val="BCC2C8"/>
+                </a:solidFill>
+                <a:latin typeface="Nimbus Sans"/>
+                <a:ea typeface="Nimbus Sans"/>
+                <a:cs typeface="Nimbus Sans"/>
+              </a:defRPr>
+            </a:lvl9pPr>
+          </a:lstStyle>
+          <a:p xmlns:a="http://schemas.openxmlformats.org/drawingml/2006/main">
+            <a:pPr algn="ctr">
+              <a:defRPr sz="1650" b="1">
+                <a:solidFill>
+                  <a:srgbClr val="BCC2C8"/>
+                </a:solidFill>
+                <a:latin typeface="Nimbus Sans"/>
+                <a:ea typeface="Nimbus Sans"/>
+                <a:cs typeface="Nimbus Sans"/>
+              </a:defRPr>
+            </a:pPr>
+            <a:r>
+              <a:rPr sz="1650" b="1">
+                <a:solidFill>
+                  <a:srgbClr val="BCC2C8"/>
+                </a:solidFill>
+                <a:latin typeface="Nimbus Sans"/>
+                <a:ea typeface="Nimbus Sans"/>
+                <a:cs typeface="Nimbus Sans"/>
+              </a:rPr>
+              <a:t>PCAP MUTATA</a:t>
+            </a:r>
+          </a:p>
+        </p:txBody>
+      </p:sp>
+      <p:sp>
+        <p:nvSpPr>
+          <p:cNvPr id="18" name="f159">
+            <a:extLst xmlns:a="http://schemas.openxmlformats.org/drawingml/2006/main">
+              <a:ext uri="{FF2B5EF4-FFF2-40B4-BE49-F238E27FC236}">
+                <a16:creationId xmlns:a16="http://schemas.microsoft.com/office/drawing/2014/main" id="{881383A0-BC12-42DC-A792-E717B34FD9B2}"/>
+              </a:ext>
+            </a:extLst>
+          </p:cNvPr>
+          <p:cNvSpPr>
+            <a:spLocks xmlns:a="http://schemas.openxmlformats.org/drawingml/2006/main" noGrp="1"/>
+          </p:cNvSpPr>
+          <p:nvPr/>
+        </p:nvSpPr>
+        <p:spPr>
+          <a:xfrm xmlns:a="http://schemas.openxmlformats.org/drawingml/2006/main">
+            <a:off x="6048375" y="3905250"/>
+            <a:ext cx="1524000" cy="285750"/>
+          </a:xfrm>
+          <a:prstGeom xmlns:a="http://schemas.openxmlformats.org/drawingml/2006/main" prst="rect">
+            <a:avLst/>
+          </a:prstGeom>
+          <a:noFill xmlns:a="http://schemas.openxmlformats.org/drawingml/2006/main"/>
+          <a:ln xmlns:a="http://schemas.openxmlformats.org/drawingml/2006/main" w="0">
+            <a:noFill/>
+            <a:prstDash val="solid"/>
+          </a:ln>
+        </p:spPr>
+        <p:txBody>
+          <a:bodyPr xmlns:a="http://schemas.openxmlformats.org/drawingml/2006/main" wrap="none" lIns="0" tIns="0" rIns="0" bIns="0" anchor="t">
+            <a:noAutofit/>
+          </a:bodyPr>
+          <a:lstStyle xmlns:a="http://schemas.openxmlformats.org/drawingml/2006/main">
+            <a:defPPr algn="ctr">
+              <a:defRPr sz="1650" b="1">
+                <a:solidFill>
                   <a:srgbClr val="182536"/>
                 </a:solidFill>
                 <a:latin typeface="Nimbus Sans"/>
@@ -21738,7 +22731,7 @@
           <p:cNvPr id="19" name="f160">
             <a:extLst xmlns:a="http://schemas.openxmlformats.org/drawingml/2006/main">
               <a:ext uri="{FF2B5EF4-FFF2-40B4-BE49-F238E27FC236}">
-                <a16:creationId xmlns:a16="http://schemas.microsoft.com/office/drawing/2014/main" id="{4D4E389A-A45F-498A-94EF-ECBD54131269}"/>
+                <a16:creationId xmlns:a16="http://schemas.microsoft.com/office/drawing/2014/main" id="{A5762339-2D90-4801-B941-9EA12D960F27}"/>
               </a:ext>
             </a:extLst>
           </p:cNvPr>
@@ -21769,7 +22762,7 @@
           <p:cNvPr id="20" name="f161">
             <a:extLst xmlns:a="http://schemas.openxmlformats.org/drawingml/2006/main">
               <a:ext uri="{FF2B5EF4-FFF2-40B4-BE49-F238E27FC236}">
-                <a16:creationId xmlns:a16="http://schemas.microsoft.com/office/drawing/2014/main" id="{184C0334-C959-460B-AA7E-AA520DAA4159}"/>
+                <a16:creationId xmlns:a16="http://schemas.microsoft.com/office/drawing/2014/main" id="{7AA446F9-328E-439A-A447-847AB0C2A61D}"/>
               </a:ext>
             </a:extLst>
           </p:cNvPr>
@@ -21797,10 +22790,41 @@
       </p:sp>
       <p:sp>
         <p:nvSpPr>
+          <p:cNvPr id="60" name="dim_f162">
+            <a:extLst xmlns:a="http://schemas.openxmlformats.org/drawingml/2006/main">
+              <a:ext uri="{FF2B5EF4-FFF2-40B4-BE49-F238E27FC236}">
+                <a16:creationId xmlns:a16="http://schemas.microsoft.com/office/drawing/2014/main" id="{86D6AB1B-06A9-48FB-B1C3-A2104935D95C}"/>
+              </a:ext>
+            </a:extLst>
+          </p:cNvPr>
+          <p:cNvSpPr>
+            <a:spLocks xmlns:a="http://schemas.openxmlformats.org/drawingml/2006/main" noGrp="1"/>
+          </p:cNvSpPr>
+          <p:nvPr/>
+        </p:nvSpPr>
+        <p:spPr>
+          <a:xfrm xmlns:a="http://schemas.openxmlformats.org/drawingml/2006/main">
+            <a:off x="4000500" y="3752850"/>
+            <a:ext cx="95" cy="619125"/>
+          </a:xfrm>
+          <a:prstGeom xmlns:a="http://schemas.openxmlformats.org/drawingml/2006/main" prst="line">
+            <a:avLst/>
+          </a:prstGeom>
+          <a:noFill xmlns:a="http://schemas.openxmlformats.org/drawingml/2006/main"/>
+          <a:ln xmlns:a="http://schemas.openxmlformats.org/drawingml/2006/main" w="28575">
+            <a:solidFill>
+              <a:srgbClr val="C7D2EF"/>
+            </a:solidFill>
+            <a:prstDash val="solid"/>
+          </a:ln>
+        </p:spPr>
+      </p:sp>
+      <p:sp>
+        <p:nvSpPr>
           <p:cNvPr id="21" name="f162">
             <a:extLst xmlns:a="http://schemas.openxmlformats.org/drawingml/2006/main">
               <a:ext uri="{FF2B5EF4-FFF2-40B4-BE49-F238E27FC236}">
-                <a16:creationId xmlns:a16="http://schemas.microsoft.com/office/drawing/2014/main" id="{B692232C-A06E-4E12-A937-62EE2F2FEB29}"/>
+                <a16:creationId xmlns:a16="http://schemas.microsoft.com/office/drawing/2014/main" id="{86D6AB1B-06A9-48FB-B1C3-A2104935D95C}"/>
               </a:ext>
             </a:extLst>
           </p:cNvPr>
@@ -21828,10 +22852,41 @@
       </p:sp>
       <p:sp>
         <p:nvSpPr>
+          <p:cNvPr id="61" name="dim_f163">
+            <a:extLst xmlns:a="http://schemas.openxmlformats.org/drawingml/2006/main">
+              <a:ext uri="{FF2B5EF4-FFF2-40B4-BE49-F238E27FC236}">
+                <a16:creationId xmlns:a16="http://schemas.microsoft.com/office/drawing/2014/main" id="{48DD45E2-9557-48FD-AECF-6DBB15E5EC2A}"/>
+              </a:ext>
+            </a:extLst>
+          </p:cNvPr>
+          <p:cNvSpPr>
+            <a:spLocks xmlns:a="http://schemas.openxmlformats.org/drawingml/2006/main" noGrp="1"/>
+          </p:cNvSpPr>
+          <p:nvPr/>
+        </p:nvSpPr>
+        <p:spPr>
+          <a:xfrm xmlns:a="http://schemas.openxmlformats.org/drawingml/2006/main">
+            <a:off x="3943350" y="4371975"/>
+            <a:ext cx="114300" cy="114300"/>
+          </a:xfrm>
+          <a:prstGeom xmlns:a="http://schemas.openxmlformats.org/drawingml/2006/main" prst="downArrow">
+            <a:avLst/>
+          </a:prstGeom>
+          <a:solidFill xmlns:a="http://schemas.openxmlformats.org/drawingml/2006/main">
+            <a:srgbClr val="C7D2EF"/>
+          </a:solidFill>
+          <a:ln xmlns:a="http://schemas.openxmlformats.org/drawingml/2006/main" w="0">
+            <a:noFill/>
+            <a:prstDash val="solid"/>
+          </a:ln>
+        </p:spPr>
+      </p:sp>
+      <p:sp>
+        <p:nvSpPr>
           <p:cNvPr id="22" name="f163">
             <a:extLst xmlns:a="http://schemas.openxmlformats.org/drawingml/2006/main">
               <a:ext uri="{FF2B5EF4-FFF2-40B4-BE49-F238E27FC236}">
-                <a16:creationId xmlns:a16="http://schemas.microsoft.com/office/drawing/2014/main" id="{5FE2C42A-DF07-440A-9A44-9738065D98E8}"/>
+                <a16:creationId xmlns:a16="http://schemas.microsoft.com/office/drawing/2014/main" id="{48DD45E2-9557-48FD-AECF-6DBB15E5EC2A}"/>
               </a:ext>
             </a:extLst>
           </p:cNvPr>
@@ -21862,7 +22917,7 @@
           <p:cNvPr id="23" name="f164">
             <a:extLst xmlns:a="http://schemas.openxmlformats.org/drawingml/2006/main">
               <a:ext uri="{FF2B5EF4-FFF2-40B4-BE49-F238E27FC236}">
-                <a16:creationId xmlns:a16="http://schemas.microsoft.com/office/drawing/2014/main" id="{207E0F13-CDB1-4EB4-A3E6-397C3C35B033}"/>
+                <a16:creationId xmlns:a16="http://schemas.microsoft.com/office/drawing/2014/main" id="{A7D05815-7409-4546-8235-3CBFE0E8E759}"/>
               </a:ext>
             </a:extLst>
           </p:cNvPr>
@@ -21890,10 +22945,41 @@
       </p:sp>
       <p:sp>
         <p:nvSpPr>
+          <p:cNvPr id="62" name="dim_f165">
+            <a:extLst xmlns:a="http://schemas.openxmlformats.org/drawingml/2006/main">
+              <a:ext uri="{FF2B5EF4-FFF2-40B4-BE49-F238E27FC236}">
+                <a16:creationId xmlns:a16="http://schemas.microsoft.com/office/drawing/2014/main" id="{E0D433A7-D4FD-4681-A236-78B88BDC9649}"/>
+              </a:ext>
+            </a:extLst>
+          </p:cNvPr>
+          <p:cNvSpPr>
+            <a:spLocks xmlns:a="http://schemas.openxmlformats.org/drawingml/2006/main" noGrp="1"/>
+          </p:cNvSpPr>
+          <p:nvPr/>
+        </p:nvSpPr>
+        <p:spPr>
+          <a:xfrm xmlns:a="http://schemas.openxmlformats.org/drawingml/2006/main">
+            <a:off x="1428750" y="5772150"/>
+            <a:ext cx="1285875" cy="95"/>
+          </a:xfrm>
+          <a:prstGeom xmlns:a="http://schemas.openxmlformats.org/drawingml/2006/main" prst="line">
+            <a:avLst/>
+          </a:prstGeom>
+          <a:noFill xmlns:a="http://schemas.openxmlformats.org/drawingml/2006/main"/>
+          <a:ln xmlns:a="http://schemas.openxmlformats.org/drawingml/2006/main" w="28575">
+            <a:solidFill>
+              <a:srgbClr val="C7D2EF"/>
+            </a:solidFill>
+            <a:prstDash val="solid"/>
+          </a:ln>
+        </p:spPr>
+      </p:sp>
+      <p:sp>
+        <p:nvSpPr>
           <p:cNvPr id="24" name="f165">
             <a:extLst xmlns:a="http://schemas.openxmlformats.org/drawingml/2006/main">
               <a:ext uri="{FF2B5EF4-FFF2-40B4-BE49-F238E27FC236}">
-                <a16:creationId xmlns:a16="http://schemas.microsoft.com/office/drawing/2014/main" id="{69981450-9D9F-40D4-93EE-7CCC0693FAAC}"/>
+                <a16:creationId xmlns:a16="http://schemas.microsoft.com/office/drawing/2014/main" id="{E0D433A7-D4FD-4681-A236-78B88BDC9649}"/>
               </a:ext>
             </a:extLst>
           </p:cNvPr>
@@ -21921,10 +23007,41 @@
       </p:sp>
       <p:sp>
         <p:nvSpPr>
+          <p:cNvPr id="63" name="dim_f166">
+            <a:extLst xmlns:a="http://schemas.openxmlformats.org/drawingml/2006/main">
+              <a:ext uri="{FF2B5EF4-FFF2-40B4-BE49-F238E27FC236}">
+                <a16:creationId xmlns:a16="http://schemas.microsoft.com/office/drawing/2014/main" id="{199DFA5F-F6D2-4D93-A100-2EF3CA379762}"/>
+              </a:ext>
+            </a:extLst>
+          </p:cNvPr>
+          <p:cNvSpPr>
+            <a:spLocks xmlns:a="http://schemas.openxmlformats.org/drawingml/2006/main" noGrp="1"/>
+          </p:cNvSpPr>
+          <p:nvPr/>
+        </p:nvSpPr>
+        <p:spPr>
+          <a:xfrm xmlns:a="http://schemas.openxmlformats.org/drawingml/2006/main">
+            <a:off x="1428750" y="5772150"/>
+            <a:ext cx="95" cy="352425"/>
+          </a:xfrm>
+          <a:prstGeom xmlns:a="http://schemas.openxmlformats.org/drawingml/2006/main" prst="line">
+            <a:avLst/>
+          </a:prstGeom>
+          <a:noFill xmlns:a="http://schemas.openxmlformats.org/drawingml/2006/main"/>
+          <a:ln xmlns:a="http://schemas.openxmlformats.org/drawingml/2006/main" w="28575">
+            <a:solidFill>
+              <a:srgbClr val="C7D2EF"/>
+            </a:solidFill>
+            <a:prstDash val="solid"/>
+          </a:ln>
+        </p:spPr>
+      </p:sp>
+      <p:sp>
+        <p:nvSpPr>
           <p:cNvPr id="25" name="f166">
             <a:extLst xmlns:a="http://schemas.openxmlformats.org/drawingml/2006/main">
               <a:ext uri="{FF2B5EF4-FFF2-40B4-BE49-F238E27FC236}">
-                <a16:creationId xmlns:a16="http://schemas.microsoft.com/office/drawing/2014/main" id="{D411A154-D018-4707-AF04-8E0BF77EDEC2}"/>
+                <a16:creationId xmlns:a16="http://schemas.microsoft.com/office/drawing/2014/main" id="{199DFA5F-F6D2-4D93-A100-2EF3CA379762}"/>
               </a:ext>
             </a:extLst>
           </p:cNvPr>
@@ -21952,10 +23069,41 @@
       </p:sp>
       <p:sp>
         <p:nvSpPr>
+          <p:cNvPr id="64" name="dim_f167">
+            <a:extLst xmlns:a="http://schemas.openxmlformats.org/drawingml/2006/main">
+              <a:ext uri="{FF2B5EF4-FFF2-40B4-BE49-F238E27FC236}">
+                <a16:creationId xmlns:a16="http://schemas.microsoft.com/office/drawing/2014/main" id="{508FFB0E-93F6-4CB6-A160-AF7258B1EAAE}"/>
+              </a:ext>
+            </a:extLst>
+          </p:cNvPr>
+          <p:cNvSpPr>
+            <a:spLocks xmlns:a="http://schemas.openxmlformats.org/drawingml/2006/main" noGrp="1"/>
+          </p:cNvSpPr>
+          <p:nvPr/>
+        </p:nvSpPr>
+        <p:spPr>
+          <a:xfrm xmlns:a="http://schemas.openxmlformats.org/drawingml/2006/main">
+            <a:off x="1371600" y="6124575"/>
+            <a:ext cx="114300" cy="114300"/>
+          </a:xfrm>
+          <a:prstGeom xmlns:a="http://schemas.openxmlformats.org/drawingml/2006/main" prst="downArrow">
+            <a:avLst/>
+          </a:prstGeom>
+          <a:solidFill xmlns:a="http://schemas.openxmlformats.org/drawingml/2006/main">
+            <a:srgbClr val="C7D2EF"/>
+          </a:solidFill>
+          <a:ln xmlns:a="http://schemas.openxmlformats.org/drawingml/2006/main" w="0">
+            <a:noFill/>
+            <a:prstDash val="solid"/>
+          </a:ln>
+        </p:spPr>
+      </p:sp>
+      <p:sp>
+        <p:nvSpPr>
           <p:cNvPr id="26" name="f167">
             <a:extLst xmlns:a="http://schemas.openxmlformats.org/drawingml/2006/main">
               <a:ext uri="{FF2B5EF4-FFF2-40B4-BE49-F238E27FC236}">
-                <a16:creationId xmlns:a16="http://schemas.microsoft.com/office/drawing/2014/main" id="{79CEB5C9-CEA1-4F4D-995C-8484F72275C9}"/>
+                <a16:creationId xmlns:a16="http://schemas.microsoft.com/office/drawing/2014/main" id="{508FFB0E-93F6-4CB6-A160-AF7258B1EAAE}"/>
               </a:ext>
             </a:extLst>
           </p:cNvPr>
@@ -21983,10 +23131,41 @@
       </p:sp>
       <p:sp>
         <p:nvSpPr>
+          <p:cNvPr id="65" name="dim_f168">
+            <a:extLst xmlns:a="http://schemas.openxmlformats.org/drawingml/2006/main">
+              <a:ext uri="{FF2B5EF4-FFF2-40B4-BE49-F238E27FC236}">
+                <a16:creationId xmlns:a16="http://schemas.microsoft.com/office/drawing/2014/main" id="{FEDDC2AC-677B-485B-B016-C50C18AC83C9}"/>
+              </a:ext>
+            </a:extLst>
+          </p:cNvPr>
+          <p:cNvSpPr>
+            <a:spLocks xmlns:a="http://schemas.openxmlformats.org/drawingml/2006/main" noGrp="1"/>
+          </p:cNvSpPr>
+          <p:nvPr/>
+        </p:nvSpPr>
+        <p:spPr>
+          <a:xfrm xmlns:a="http://schemas.openxmlformats.org/drawingml/2006/main">
+            <a:off x="2714625" y="5772150"/>
+            <a:ext cx="1285875" cy="95"/>
+          </a:xfrm>
+          <a:prstGeom xmlns:a="http://schemas.openxmlformats.org/drawingml/2006/main" prst="line">
+            <a:avLst/>
+          </a:prstGeom>
+          <a:noFill xmlns:a="http://schemas.openxmlformats.org/drawingml/2006/main"/>
+          <a:ln xmlns:a="http://schemas.openxmlformats.org/drawingml/2006/main" w="28575">
+            <a:solidFill>
+              <a:srgbClr val="C7D2EF"/>
+            </a:solidFill>
+            <a:prstDash val="solid"/>
+          </a:ln>
+        </p:spPr>
+      </p:sp>
+      <p:sp>
+        <p:nvSpPr>
           <p:cNvPr id="27" name="f168">
             <a:extLst xmlns:a="http://schemas.openxmlformats.org/drawingml/2006/main">
               <a:ext uri="{FF2B5EF4-FFF2-40B4-BE49-F238E27FC236}">
-                <a16:creationId xmlns:a16="http://schemas.microsoft.com/office/drawing/2014/main" id="{05F91E44-CE5F-463A-BF8D-39C8FA38B491}"/>
+                <a16:creationId xmlns:a16="http://schemas.microsoft.com/office/drawing/2014/main" id="{FEDDC2AC-677B-485B-B016-C50C18AC83C9}"/>
               </a:ext>
             </a:extLst>
           </p:cNvPr>
@@ -22014,10 +23193,41 @@
       </p:sp>
       <p:sp>
         <p:nvSpPr>
+          <p:cNvPr id="66" name="dim_f169">
+            <a:extLst xmlns:a="http://schemas.openxmlformats.org/drawingml/2006/main">
+              <a:ext uri="{FF2B5EF4-FFF2-40B4-BE49-F238E27FC236}">
+                <a16:creationId xmlns:a16="http://schemas.microsoft.com/office/drawing/2014/main" id="{A25FCD55-EE3F-44A4-8769-4D5487F38499}"/>
+              </a:ext>
+            </a:extLst>
+          </p:cNvPr>
+          <p:cNvSpPr>
+            <a:spLocks xmlns:a="http://schemas.openxmlformats.org/drawingml/2006/main" noGrp="1"/>
+          </p:cNvSpPr>
+          <p:nvPr/>
+        </p:nvSpPr>
+        <p:spPr>
+          <a:xfrm xmlns:a="http://schemas.openxmlformats.org/drawingml/2006/main">
+            <a:off x="4000500" y="5772150"/>
+            <a:ext cx="95" cy="352425"/>
+          </a:xfrm>
+          <a:prstGeom xmlns:a="http://schemas.openxmlformats.org/drawingml/2006/main" prst="line">
+            <a:avLst/>
+          </a:prstGeom>
+          <a:noFill xmlns:a="http://schemas.openxmlformats.org/drawingml/2006/main"/>
+          <a:ln xmlns:a="http://schemas.openxmlformats.org/drawingml/2006/main" w="28575">
+            <a:solidFill>
+              <a:srgbClr val="C7D2EF"/>
+            </a:solidFill>
+            <a:prstDash val="solid"/>
+          </a:ln>
+        </p:spPr>
+      </p:sp>
+      <p:sp>
+        <p:nvSpPr>
           <p:cNvPr id="28" name="f169">
             <a:extLst xmlns:a="http://schemas.openxmlformats.org/drawingml/2006/main">
               <a:ext uri="{FF2B5EF4-FFF2-40B4-BE49-F238E27FC236}">
-                <a16:creationId xmlns:a16="http://schemas.microsoft.com/office/drawing/2014/main" id="{80C780C2-EE40-4F7E-9A2A-1FF7508546F4}"/>
+                <a16:creationId xmlns:a16="http://schemas.microsoft.com/office/drawing/2014/main" id="{A25FCD55-EE3F-44A4-8769-4D5487F38499}"/>
               </a:ext>
             </a:extLst>
           </p:cNvPr>
@@ -22045,10 +23255,41 @@
       </p:sp>
       <p:sp>
         <p:nvSpPr>
+          <p:cNvPr id="67" name="dim_f170">
+            <a:extLst xmlns:a="http://schemas.openxmlformats.org/drawingml/2006/main">
+              <a:ext uri="{FF2B5EF4-FFF2-40B4-BE49-F238E27FC236}">
+                <a16:creationId xmlns:a16="http://schemas.microsoft.com/office/drawing/2014/main" id="{94A53E58-03AC-44AC-B207-1D2B5001901D}"/>
+              </a:ext>
+            </a:extLst>
+          </p:cNvPr>
+          <p:cNvSpPr>
+            <a:spLocks xmlns:a="http://schemas.openxmlformats.org/drawingml/2006/main" noGrp="1"/>
+          </p:cNvSpPr>
+          <p:nvPr/>
+        </p:nvSpPr>
+        <p:spPr>
+          <a:xfrm xmlns:a="http://schemas.openxmlformats.org/drawingml/2006/main">
+            <a:off x="3943350" y="6124575"/>
+            <a:ext cx="114300" cy="114300"/>
+          </a:xfrm>
+          <a:prstGeom xmlns:a="http://schemas.openxmlformats.org/drawingml/2006/main" prst="downArrow">
+            <a:avLst/>
+          </a:prstGeom>
+          <a:solidFill xmlns:a="http://schemas.openxmlformats.org/drawingml/2006/main">
+            <a:srgbClr val="C7D2EF"/>
+          </a:solidFill>
+          <a:ln xmlns:a="http://schemas.openxmlformats.org/drawingml/2006/main" w="0">
+            <a:noFill/>
+            <a:prstDash val="solid"/>
+          </a:ln>
+        </p:spPr>
+      </p:sp>
+      <p:sp>
+        <p:nvSpPr>
           <p:cNvPr id="29" name="f170">
             <a:extLst xmlns:a="http://schemas.openxmlformats.org/drawingml/2006/main">
               <a:ext uri="{FF2B5EF4-FFF2-40B4-BE49-F238E27FC236}">
-                <a16:creationId xmlns:a16="http://schemas.microsoft.com/office/drawing/2014/main" id="{CB5562BC-CCDC-4BF0-9EC0-81DB21B6E55F}"/>
+                <a16:creationId xmlns:a16="http://schemas.microsoft.com/office/drawing/2014/main" id="{94A53E58-03AC-44AC-B207-1D2B5001901D}"/>
               </a:ext>
             </a:extLst>
           </p:cNvPr>
@@ -22079,7 +23320,7 @@
           <p:cNvPr id="30" name="f171">
             <a:extLst xmlns:a="http://schemas.openxmlformats.org/drawingml/2006/main">
               <a:ext uri="{FF2B5EF4-FFF2-40B4-BE49-F238E27FC236}">
-                <a16:creationId xmlns:a16="http://schemas.microsoft.com/office/drawing/2014/main" id="{04730B43-515A-4377-8DF6-7BEBA1031776}"/>
+                <a16:creationId xmlns:a16="http://schemas.microsoft.com/office/drawing/2014/main" id="{39CE3B35-A428-4BA5-B1F8-5FA761A449DD}"/>
               </a:ext>
             </a:extLst>
           </p:cNvPr>
@@ -22099,7 +23340,7 @@
           <a:noFill xmlns:a="http://schemas.openxmlformats.org/drawingml/2006/main"/>
           <a:ln xmlns:a="http://schemas.openxmlformats.org/drawingml/2006/main" w="28575">
             <a:solidFill>
-              <a:srgbClr val="4264D0"/>
+              <a:srgbClr val="C7D2EF"/>
             </a:solidFill>
             <a:prstDash val="solid"/>
           </a:ln>
@@ -22110,7 +23351,7 @@
           <p:cNvPr id="31" name="f172">
             <a:extLst xmlns:a="http://schemas.openxmlformats.org/drawingml/2006/main">
               <a:ext uri="{FF2B5EF4-FFF2-40B4-BE49-F238E27FC236}">
-                <a16:creationId xmlns:a16="http://schemas.microsoft.com/office/drawing/2014/main" id="{E2BFDDEB-FB2A-4C57-B0CA-1EC5BD914799}"/>
+                <a16:creationId xmlns:a16="http://schemas.microsoft.com/office/drawing/2014/main" id="{9C81D7A3-1C7E-4862-9985-D89C2A8D5C52}"/>
               </a:ext>
             </a:extLst>
           </p:cNvPr>
@@ -22130,7 +23371,7 @@
           <a:noFill xmlns:a="http://schemas.openxmlformats.org/drawingml/2006/main"/>
           <a:ln xmlns:a="http://schemas.openxmlformats.org/drawingml/2006/main" w="28575">
             <a:solidFill>
-              <a:srgbClr val="4264D0"/>
+              <a:srgbClr val="C7D2EF"/>
             </a:solidFill>
             <a:prstDash val="solid"/>
           </a:ln>
@@ -22141,7 +23382,7 @@
           <p:cNvPr id="32" name="f173">
             <a:extLst xmlns:a="http://schemas.openxmlformats.org/drawingml/2006/main">
               <a:ext uri="{FF2B5EF4-FFF2-40B4-BE49-F238E27FC236}">
-                <a16:creationId xmlns:a16="http://schemas.microsoft.com/office/drawing/2014/main" id="{655A1775-8755-42B7-A7D2-1C465B4D3C0D}"/>
+                <a16:creationId xmlns:a16="http://schemas.microsoft.com/office/drawing/2014/main" id="{2CEB84E7-C0E3-46B0-B122-0E932897A762}"/>
               </a:ext>
             </a:extLst>
           </p:cNvPr>
@@ -22161,7 +23402,7 @@
           <a:noFill xmlns:a="http://schemas.openxmlformats.org/drawingml/2006/main"/>
           <a:ln xmlns:a="http://schemas.openxmlformats.org/drawingml/2006/main" w="28575">
             <a:solidFill>
-              <a:srgbClr val="4264D0"/>
+              <a:srgbClr val="C7D2EF"/>
             </a:solidFill>
             <a:prstDash val="solid"/>
           </a:ln>
@@ -22172,7 +23413,7 @@
           <p:cNvPr id="33" name="f174">
             <a:extLst xmlns:a="http://schemas.openxmlformats.org/drawingml/2006/main">
               <a:ext uri="{FF2B5EF4-FFF2-40B4-BE49-F238E27FC236}">
-                <a16:creationId xmlns:a16="http://schemas.microsoft.com/office/drawing/2014/main" id="{D7231857-AC6C-48E9-BCD0-A37E53936DFF}"/>
+                <a16:creationId xmlns:a16="http://schemas.microsoft.com/office/drawing/2014/main" id="{F0A97875-7CDE-4149-B3D1-58285CBB00BB}"/>
               </a:ext>
             </a:extLst>
           </p:cNvPr>
@@ -22190,7 +23431,7 @@
             <a:avLst/>
           </a:prstGeom>
           <a:solidFill xmlns:a="http://schemas.openxmlformats.org/drawingml/2006/main">
-            <a:srgbClr val="4264D0"/>
+            <a:srgbClr val="C7D2EF"/>
           </a:solidFill>
           <a:ln xmlns:a="http://schemas.openxmlformats.org/drawingml/2006/main" w="0">
             <a:noFill/>
@@ -22203,7 +23444,7 @@
           <p:cNvPr id="34" name="f175">
             <a:extLst xmlns:a="http://schemas.openxmlformats.org/drawingml/2006/main">
               <a:ext uri="{FF2B5EF4-FFF2-40B4-BE49-F238E27FC236}">
-                <a16:creationId xmlns:a16="http://schemas.microsoft.com/office/drawing/2014/main" id="{609274E2-0D68-413C-9BCC-64C9435822C0}"/>
+                <a16:creationId xmlns:a16="http://schemas.microsoft.com/office/drawing/2014/main" id="{D3D4F963-4FB8-4ADE-A558-FCD72E73495B}"/>
               </a:ext>
             </a:extLst>
           </p:cNvPr>
@@ -22234,7 +23475,7 @@
             <a:defPPr algn="ctr">
               <a:defRPr sz="1575" b="0">
                 <a:solidFill>
-                  <a:srgbClr val="52627B"/>
+                  <a:srgbClr val="CBD1DA"/>
                 </a:solidFill>
                 <a:latin typeface="Nimbus Sans"/>
                 <a:ea typeface="Nimbus Sans"/>
@@ -22244,7 +23485,7 @@
             <a:lvl1pPr algn="ctr">
               <a:defRPr sz="1575" b="0">
                 <a:solidFill>
-                  <a:srgbClr val="52627B"/>
+                  <a:srgbClr val="CBD1DA"/>
                 </a:solidFill>
                 <a:latin typeface="Nimbus Sans"/>
                 <a:ea typeface="Nimbus Sans"/>
@@ -22254,7 +23495,7 @@
             <a:lvl2pPr algn="ctr">
               <a:defRPr sz="1575" b="0">
                 <a:solidFill>
-                  <a:srgbClr val="52627B"/>
+                  <a:srgbClr val="CBD1DA"/>
                 </a:solidFill>
                 <a:latin typeface="Nimbus Sans"/>
                 <a:ea typeface="Nimbus Sans"/>
@@ -22264,7 +23505,7 @@
             <a:lvl3pPr algn="ctr">
               <a:defRPr sz="1575" b="0">
                 <a:solidFill>
-                  <a:srgbClr val="52627B"/>
+                  <a:srgbClr val="CBD1DA"/>
                 </a:solidFill>
                 <a:latin typeface="Nimbus Sans"/>
                 <a:ea typeface="Nimbus Sans"/>
@@ -22274,7 +23515,7 @@
             <a:lvl4pPr algn="ctr">
               <a:defRPr sz="1575" b="0">
                 <a:solidFill>
-                  <a:srgbClr val="52627B"/>
+                  <a:srgbClr val="CBD1DA"/>
                 </a:solidFill>
                 <a:latin typeface="Nimbus Sans"/>
                 <a:ea typeface="Nimbus Sans"/>
@@ -22284,7 +23525,7 @@
             <a:lvl5pPr algn="ctr">
               <a:defRPr sz="1575" b="0">
                 <a:solidFill>
-                  <a:srgbClr val="52627B"/>
+                  <a:srgbClr val="CBD1DA"/>
                 </a:solidFill>
                 <a:latin typeface="Nimbus Sans"/>
                 <a:ea typeface="Nimbus Sans"/>
@@ -22294,7 +23535,7 @@
             <a:lvl6pPr algn="ctr">
               <a:defRPr sz="1575" b="0">
                 <a:solidFill>
-                  <a:srgbClr val="52627B"/>
+                  <a:srgbClr val="CBD1DA"/>
                 </a:solidFill>
                 <a:latin typeface="Nimbus Sans"/>
                 <a:ea typeface="Nimbus Sans"/>
@@ -22304,7 +23545,7 @@
             <a:lvl7pPr algn="ctr">
               <a:defRPr sz="1575" b="0">
                 <a:solidFill>
-                  <a:srgbClr val="52627B"/>
+                  <a:srgbClr val="CBD1DA"/>
                 </a:solidFill>
                 <a:latin typeface="Nimbus Sans"/>
                 <a:ea typeface="Nimbus Sans"/>
@@ -22314,7 +23555,7 @@
             <a:lvl8pPr algn="ctr">
               <a:defRPr sz="1575" b="0">
                 <a:solidFill>
-                  <a:srgbClr val="52627B"/>
+                  <a:srgbClr val="CBD1DA"/>
                 </a:solidFill>
                 <a:latin typeface="Nimbus Sans"/>
                 <a:ea typeface="Nimbus Sans"/>
@@ -22324,7 +23565,7 @@
             <a:lvl9pPr algn="ctr">
               <a:defRPr sz="1575" b="0">
                 <a:solidFill>
-                  <a:srgbClr val="52627B"/>
+                  <a:srgbClr val="CBD1DA"/>
                 </a:solidFill>
                 <a:latin typeface="Nimbus Sans"/>
                 <a:ea typeface="Nimbus Sans"/>
@@ -22336,7 +23577,7 @@
             <a:pPr algn="ctr">
               <a:defRPr sz="1575" b="0">
                 <a:solidFill>
-                  <a:srgbClr val="52627B"/>
+                  <a:srgbClr val="CBD1DA"/>
                 </a:solidFill>
                 <a:latin typeface="Nimbus Sans"/>
                 <a:ea typeface="Nimbus Sans"/>
@@ -22346,7 +23587,7 @@
             <a:r>
               <a:rPr sz="1575" b="0">
                 <a:solidFill>
-                  <a:srgbClr val="52627B"/>
+                  <a:srgbClr val="CBD1DA"/>
                 </a:solidFill>
                 <a:latin typeface="Nimbus Sans"/>
                 <a:ea typeface="Nimbus Sans"/>
@@ -22362,7 +23603,7 @@
           <p:cNvPr id="35" name="f176">
             <a:extLst xmlns:a="http://schemas.openxmlformats.org/drawingml/2006/main">
               <a:ext uri="{FF2B5EF4-FFF2-40B4-BE49-F238E27FC236}">
-                <a16:creationId xmlns:a16="http://schemas.microsoft.com/office/drawing/2014/main" id="{CDBA6A27-C716-4A72-B435-7A94DD45EADA}"/>
+                <a16:creationId xmlns:a16="http://schemas.microsoft.com/office/drawing/2014/main" id="{4BEF5EDE-5426-49BF-B692-9553EFDA265A}"/>
               </a:ext>
             </a:extLst>
           </p:cNvPr>
@@ -22382,7 +23623,7 @@
           <a:noFill xmlns:a="http://schemas.openxmlformats.org/drawingml/2006/main"/>
           <a:ln xmlns:a="http://schemas.openxmlformats.org/drawingml/2006/main" w="28575">
             <a:solidFill>
-              <a:srgbClr val="4264D0"/>
+              <a:srgbClr val="C7D2EF"/>
             </a:solidFill>
             <a:prstDash val="solid"/>
           </a:ln>
@@ -22393,7 +23634,7 @@
           <p:cNvPr id="36" name="f177">
             <a:extLst xmlns:a="http://schemas.openxmlformats.org/drawingml/2006/main">
               <a:ext uri="{FF2B5EF4-FFF2-40B4-BE49-F238E27FC236}">
-                <a16:creationId xmlns:a16="http://schemas.microsoft.com/office/drawing/2014/main" id="{BACF0201-6783-4329-9854-832BBE14010E}"/>
+                <a16:creationId xmlns:a16="http://schemas.microsoft.com/office/drawing/2014/main" id="{A15C9C21-33AF-415C-BB6E-D8E851F25BA1}"/>
               </a:ext>
             </a:extLst>
           </p:cNvPr>
@@ -22413,7 +23654,7 @@
           <a:noFill xmlns:a="http://schemas.openxmlformats.org/drawingml/2006/main"/>
           <a:ln xmlns:a="http://schemas.openxmlformats.org/drawingml/2006/main" w="28575">
             <a:solidFill>
-              <a:srgbClr val="4264D0"/>
+              <a:srgbClr val="C7D2EF"/>
             </a:solidFill>
             <a:prstDash val="solid"/>
           </a:ln>
@@ -22424,7 +23665,7 @@
           <p:cNvPr id="37" name="f178">
             <a:extLst xmlns:a="http://schemas.openxmlformats.org/drawingml/2006/main">
               <a:ext uri="{FF2B5EF4-FFF2-40B4-BE49-F238E27FC236}">
-                <a16:creationId xmlns:a16="http://schemas.microsoft.com/office/drawing/2014/main" id="{6C6ABB35-48CE-4F91-BB2B-3EBF29FD5875}"/>
+                <a16:creationId xmlns:a16="http://schemas.microsoft.com/office/drawing/2014/main" id="{C6427012-EBA2-4CE0-B0B5-F39A63F12AB9}"/>
               </a:ext>
             </a:extLst>
           </p:cNvPr>
@@ -22444,7 +23685,7 @@
           <a:noFill xmlns:a="http://schemas.openxmlformats.org/drawingml/2006/main"/>
           <a:ln xmlns:a="http://schemas.openxmlformats.org/drawingml/2006/main" w="28575">
             <a:solidFill>
-              <a:srgbClr val="4264D0"/>
+              <a:srgbClr val="C7D2EF"/>
             </a:solidFill>
             <a:prstDash val="solid"/>
           </a:ln>
@@ -22455,7 +23696,7 @@
           <p:cNvPr id="38" name="f179">
             <a:extLst xmlns:a="http://schemas.openxmlformats.org/drawingml/2006/main">
               <a:ext uri="{FF2B5EF4-FFF2-40B4-BE49-F238E27FC236}">
-                <a16:creationId xmlns:a16="http://schemas.microsoft.com/office/drawing/2014/main" id="{266397D4-5B19-4E6A-A19C-882DB926190F}"/>
+                <a16:creationId xmlns:a16="http://schemas.microsoft.com/office/drawing/2014/main" id="{AC12F035-4BCB-4BCA-963B-8D7444D7DF68}"/>
               </a:ext>
             </a:extLst>
           </p:cNvPr>
@@ -22473,7 +23714,7 @@
             <a:avLst/>
           </a:prstGeom>
           <a:solidFill xmlns:a="http://schemas.openxmlformats.org/drawingml/2006/main">
-            <a:srgbClr val="4264D0"/>
+            <a:srgbClr val="C7D2EF"/>
           </a:solidFill>
           <a:ln xmlns:a="http://schemas.openxmlformats.org/drawingml/2006/main" w="0">
             <a:noFill/>
@@ -22483,10 +23724,41 @@
       </p:sp>
       <p:sp>
         <p:nvSpPr>
+          <p:cNvPr id="68" name="dim_f180">
+            <a:extLst xmlns:a="http://schemas.openxmlformats.org/drawingml/2006/main">
+              <a:ext uri="{FF2B5EF4-FFF2-40B4-BE49-F238E27FC236}">
+                <a16:creationId xmlns:a16="http://schemas.microsoft.com/office/drawing/2014/main" id="{C0F6AF8A-6577-410A-AE59-79AC42662667}"/>
+              </a:ext>
+            </a:extLst>
+          </p:cNvPr>
+          <p:cNvSpPr>
+            <a:spLocks xmlns:a="http://schemas.openxmlformats.org/drawingml/2006/main" noGrp="1"/>
+          </p:cNvSpPr>
+          <p:nvPr/>
+        </p:nvSpPr>
+        <p:spPr>
+          <a:xfrm xmlns:a="http://schemas.openxmlformats.org/drawingml/2006/main">
+            <a:off x="6810375" y="4476750"/>
+            <a:ext cx="95" cy="552450"/>
+          </a:xfrm>
+          <a:prstGeom xmlns:a="http://schemas.openxmlformats.org/drawingml/2006/main" prst="line">
+            <a:avLst/>
+          </a:prstGeom>
+          <a:noFill xmlns:a="http://schemas.openxmlformats.org/drawingml/2006/main"/>
+          <a:ln xmlns:a="http://schemas.openxmlformats.org/drawingml/2006/main" w="28575">
+            <a:solidFill>
+              <a:srgbClr val="C7D2EF"/>
+            </a:solidFill>
+            <a:prstDash val="solid"/>
+          </a:ln>
+        </p:spPr>
+      </p:sp>
+      <p:sp>
+        <p:nvSpPr>
           <p:cNvPr id="39" name="f180">
             <a:extLst xmlns:a="http://schemas.openxmlformats.org/drawingml/2006/main">
               <a:ext uri="{FF2B5EF4-FFF2-40B4-BE49-F238E27FC236}">
-                <a16:creationId xmlns:a16="http://schemas.microsoft.com/office/drawing/2014/main" id="{B632F246-A5D8-4C4F-A1C0-FC7956EC3A56}"/>
+                <a16:creationId xmlns:a16="http://schemas.microsoft.com/office/drawing/2014/main" id="{C0F6AF8A-6577-410A-AE59-79AC42662667}"/>
               </a:ext>
             </a:extLst>
           </p:cNvPr>
@@ -22514,10 +23786,41 @@
       </p:sp>
       <p:sp>
         <p:nvSpPr>
+          <p:cNvPr id="69" name="dim_f181">
+            <a:extLst xmlns:a="http://schemas.openxmlformats.org/drawingml/2006/main">
+              <a:ext uri="{FF2B5EF4-FFF2-40B4-BE49-F238E27FC236}">
+                <a16:creationId xmlns:a16="http://schemas.microsoft.com/office/drawing/2014/main" id="{5322EFDC-0981-48CE-A939-9BB258970E3A}"/>
+              </a:ext>
+            </a:extLst>
+          </p:cNvPr>
+          <p:cNvSpPr>
+            <a:spLocks xmlns:a="http://schemas.openxmlformats.org/drawingml/2006/main" noGrp="1"/>
+          </p:cNvSpPr>
+          <p:nvPr/>
+        </p:nvSpPr>
+        <p:spPr>
+          <a:xfrm xmlns:a="http://schemas.openxmlformats.org/drawingml/2006/main">
+            <a:off x="6753225" y="4362450"/>
+            <a:ext cx="114300" cy="114300"/>
+          </a:xfrm>
+          <a:prstGeom xmlns:a="http://schemas.openxmlformats.org/drawingml/2006/main" prst="upArrow">
+            <a:avLst/>
+          </a:prstGeom>
+          <a:solidFill xmlns:a="http://schemas.openxmlformats.org/drawingml/2006/main">
+            <a:srgbClr val="C7D2EF"/>
+          </a:solidFill>
+          <a:ln xmlns:a="http://schemas.openxmlformats.org/drawingml/2006/main" w="0">
+            <a:noFill/>
+            <a:prstDash val="solid"/>
+          </a:ln>
+        </p:spPr>
+      </p:sp>
+      <p:sp>
+        <p:nvSpPr>
           <p:cNvPr id="40" name="f181">
             <a:extLst xmlns:a="http://schemas.openxmlformats.org/drawingml/2006/main">
               <a:ext uri="{FF2B5EF4-FFF2-40B4-BE49-F238E27FC236}">
-                <a16:creationId xmlns:a16="http://schemas.microsoft.com/office/drawing/2014/main" id="{B995046F-087E-41E5-A804-57236E12A255}"/>
+                <a16:creationId xmlns:a16="http://schemas.microsoft.com/office/drawing/2014/main" id="{5322EFDC-0981-48CE-A939-9BB258970E3A}"/>
               </a:ext>
             </a:extLst>
           </p:cNvPr>
@@ -22545,10 +23848,41 @@
       </p:sp>
       <p:sp>
         <p:nvSpPr>
+          <p:cNvPr id="70" name="dim_f182">
+            <a:extLst xmlns:a="http://schemas.openxmlformats.org/drawingml/2006/main">
+              <a:ext uri="{FF2B5EF4-FFF2-40B4-BE49-F238E27FC236}">
+                <a16:creationId xmlns:a16="http://schemas.microsoft.com/office/drawing/2014/main" id="{53F69048-7F86-465E-BE72-19AF885B8E52}"/>
+              </a:ext>
+            </a:extLst>
+          </p:cNvPr>
+          <p:cNvSpPr>
+            <a:spLocks xmlns:a="http://schemas.openxmlformats.org/drawingml/2006/main" noGrp="1"/>
+          </p:cNvSpPr>
+          <p:nvPr/>
+        </p:nvSpPr>
+        <p:spPr>
+          <a:xfrm xmlns:a="http://schemas.openxmlformats.org/drawingml/2006/main">
+            <a:off x="5572125" y="4010025"/>
+            <a:ext cx="266700" cy="95"/>
+          </a:xfrm>
+          <a:prstGeom xmlns:a="http://schemas.openxmlformats.org/drawingml/2006/main" prst="line">
+            <a:avLst/>
+          </a:prstGeom>
+          <a:noFill xmlns:a="http://schemas.openxmlformats.org/drawingml/2006/main"/>
+          <a:ln xmlns:a="http://schemas.openxmlformats.org/drawingml/2006/main" w="28575">
+            <a:solidFill>
+              <a:srgbClr val="C7D2EF"/>
+            </a:solidFill>
+            <a:prstDash val="solid"/>
+          </a:ln>
+        </p:spPr>
+      </p:sp>
+      <p:sp>
+        <p:nvSpPr>
           <p:cNvPr id="41" name="f182">
             <a:extLst xmlns:a="http://schemas.openxmlformats.org/drawingml/2006/main">
               <a:ext uri="{FF2B5EF4-FFF2-40B4-BE49-F238E27FC236}">
-                <a16:creationId xmlns:a16="http://schemas.microsoft.com/office/drawing/2014/main" id="{63048B75-8F96-4336-B239-D1AF0CFCD1B8}"/>
+                <a16:creationId xmlns:a16="http://schemas.microsoft.com/office/drawing/2014/main" id="{53F69048-7F86-465E-BE72-19AF885B8E52}"/>
               </a:ext>
             </a:extLst>
           </p:cNvPr>
@@ -22576,10 +23910,41 @@
       </p:sp>
       <p:sp>
         <p:nvSpPr>
+          <p:cNvPr id="71" name="dim_f183">
+            <a:extLst xmlns:a="http://schemas.openxmlformats.org/drawingml/2006/main">
+              <a:ext uri="{FF2B5EF4-FFF2-40B4-BE49-F238E27FC236}">
+                <a16:creationId xmlns:a16="http://schemas.microsoft.com/office/drawing/2014/main" id="{25537E6E-6D56-4625-969A-6249D127D949}"/>
+              </a:ext>
+            </a:extLst>
+          </p:cNvPr>
+          <p:cNvSpPr>
+            <a:spLocks xmlns:a="http://schemas.openxmlformats.org/drawingml/2006/main" noGrp="1"/>
+          </p:cNvSpPr>
+          <p:nvPr/>
+        </p:nvSpPr>
+        <p:spPr>
+          <a:xfrm xmlns:a="http://schemas.openxmlformats.org/drawingml/2006/main">
+            <a:off x="5572125" y="4010025"/>
+            <a:ext cx="95" cy="800100"/>
+          </a:xfrm>
+          <a:prstGeom xmlns:a="http://schemas.openxmlformats.org/drawingml/2006/main" prst="line">
+            <a:avLst/>
+          </a:prstGeom>
+          <a:noFill xmlns:a="http://schemas.openxmlformats.org/drawingml/2006/main"/>
+          <a:ln xmlns:a="http://schemas.openxmlformats.org/drawingml/2006/main" w="28575">
+            <a:solidFill>
+              <a:srgbClr val="C7D2EF"/>
+            </a:solidFill>
+            <a:prstDash val="solid"/>
+          </a:ln>
+        </p:spPr>
+      </p:sp>
+      <p:sp>
+        <p:nvSpPr>
           <p:cNvPr id="42" name="f183">
             <a:extLst xmlns:a="http://schemas.openxmlformats.org/drawingml/2006/main">
               <a:ext uri="{FF2B5EF4-FFF2-40B4-BE49-F238E27FC236}">
-                <a16:creationId xmlns:a16="http://schemas.microsoft.com/office/drawing/2014/main" id="{605AC6FA-AE8F-446D-A013-4B925D7282D7}"/>
+                <a16:creationId xmlns:a16="http://schemas.microsoft.com/office/drawing/2014/main" id="{25537E6E-6D56-4625-969A-6249D127D949}"/>
               </a:ext>
             </a:extLst>
           </p:cNvPr>
@@ -22607,10 +23972,41 @@
       </p:sp>
       <p:sp>
         <p:nvSpPr>
+          <p:cNvPr id="72" name="dim_f184">
+            <a:extLst xmlns:a="http://schemas.openxmlformats.org/drawingml/2006/main">
+              <a:ext uri="{FF2B5EF4-FFF2-40B4-BE49-F238E27FC236}">
+                <a16:creationId xmlns:a16="http://schemas.microsoft.com/office/drawing/2014/main" id="{0C955191-543C-4881-BD76-790AB1E38FD1}"/>
+              </a:ext>
+            </a:extLst>
+          </p:cNvPr>
+          <p:cNvSpPr>
+            <a:spLocks xmlns:a="http://schemas.openxmlformats.org/drawingml/2006/main" noGrp="1"/>
+          </p:cNvSpPr>
+          <p:nvPr/>
+        </p:nvSpPr>
+        <p:spPr>
+          <a:xfrm xmlns:a="http://schemas.openxmlformats.org/drawingml/2006/main">
+            <a:off x="5219700" y="4810125"/>
+            <a:ext cx="352425" cy="95"/>
+          </a:xfrm>
+          <a:prstGeom xmlns:a="http://schemas.openxmlformats.org/drawingml/2006/main" prst="line">
+            <a:avLst/>
+          </a:prstGeom>
+          <a:noFill xmlns:a="http://schemas.openxmlformats.org/drawingml/2006/main"/>
+          <a:ln xmlns:a="http://schemas.openxmlformats.org/drawingml/2006/main" w="28575">
+            <a:solidFill>
+              <a:srgbClr val="C7D2EF"/>
+            </a:solidFill>
+            <a:prstDash val="solid"/>
+          </a:ln>
+        </p:spPr>
+      </p:sp>
+      <p:sp>
+        <p:nvSpPr>
           <p:cNvPr id="43" name="f184">
             <a:extLst xmlns:a="http://schemas.openxmlformats.org/drawingml/2006/main">
               <a:ext uri="{FF2B5EF4-FFF2-40B4-BE49-F238E27FC236}">
-                <a16:creationId xmlns:a16="http://schemas.microsoft.com/office/drawing/2014/main" id="{532AEBC0-46CC-44CE-A198-4043102EB64E}"/>
+                <a16:creationId xmlns:a16="http://schemas.microsoft.com/office/drawing/2014/main" id="{0C955191-543C-4881-BD76-790AB1E38FD1}"/>
               </a:ext>
             </a:extLst>
           </p:cNvPr>
@@ -22638,10 +24034,41 @@
       </p:sp>
       <p:sp>
         <p:nvSpPr>
+          <p:cNvPr id="73" name="dim_f185">
+            <a:extLst xmlns:a="http://schemas.openxmlformats.org/drawingml/2006/main">
+              <a:ext uri="{FF2B5EF4-FFF2-40B4-BE49-F238E27FC236}">
+                <a16:creationId xmlns:a16="http://schemas.microsoft.com/office/drawing/2014/main" id="{148D418F-E4BB-492A-B8F5-A55BF01573BD}"/>
+              </a:ext>
+            </a:extLst>
+          </p:cNvPr>
+          <p:cNvSpPr>
+            <a:spLocks xmlns:a="http://schemas.openxmlformats.org/drawingml/2006/main" noGrp="1"/>
+          </p:cNvSpPr>
+          <p:nvPr/>
+        </p:nvSpPr>
+        <p:spPr>
+          <a:xfrm xmlns:a="http://schemas.openxmlformats.org/drawingml/2006/main">
+            <a:off x="5105400" y="4724400"/>
+            <a:ext cx="114300" cy="171450"/>
+          </a:xfrm>
+          <a:prstGeom xmlns:a="http://schemas.openxmlformats.org/drawingml/2006/main" prst="leftArrow">
+            <a:avLst/>
+          </a:prstGeom>
+          <a:solidFill xmlns:a="http://schemas.openxmlformats.org/drawingml/2006/main">
+            <a:srgbClr val="C7D2EF"/>
+          </a:solidFill>
+          <a:ln xmlns:a="http://schemas.openxmlformats.org/drawingml/2006/main" w="0">
+            <a:noFill/>
+            <a:prstDash val="solid"/>
+          </a:ln>
+        </p:spPr>
+      </p:sp>
+      <p:sp>
+        <p:nvSpPr>
           <p:cNvPr id="44" name="f185">
             <a:extLst xmlns:a="http://schemas.openxmlformats.org/drawingml/2006/main">
               <a:ext uri="{FF2B5EF4-FFF2-40B4-BE49-F238E27FC236}">
-                <a16:creationId xmlns:a16="http://schemas.microsoft.com/office/drawing/2014/main" id="{8241F6DC-6CBB-47C0-8303-534DADABFA52}"/>
+                <a16:creationId xmlns:a16="http://schemas.microsoft.com/office/drawing/2014/main" id="{148D418F-E4BB-492A-B8F5-A55BF01573BD}"/>
               </a:ext>
             </a:extLst>
           </p:cNvPr>
@@ -22669,10 +24096,10 @@
       </p:sp>
       <p:sp>
         <p:nvSpPr>
-          <p:cNvPr id="45" name="f186">
+          <p:cNvPr id="74" name="dim_f186">
             <a:extLst xmlns:a="http://schemas.openxmlformats.org/drawingml/2006/main">
               <a:ext uri="{FF2B5EF4-FFF2-40B4-BE49-F238E27FC236}">
-                <a16:creationId xmlns:a16="http://schemas.microsoft.com/office/drawing/2014/main" id="{D2BB4608-34DE-46A6-AD6C-86E0BB32E8EB}"/>
+                <a16:creationId xmlns:a16="http://schemas.microsoft.com/office/drawing/2014/main" id="{2041356C-CEC8-4538-B207-67477330066F}"/>
               </a:ext>
             </a:extLst>
           </p:cNvPr>
@@ -22703,6 +24130,165 @@
             <a:defPPr algn="l">
               <a:defRPr sz="2175" b="1">
                 <a:solidFill>
+                  <a:srgbClr val="BCC2C8"/>
+                </a:solidFill>
+                <a:latin typeface="Nimbus Sans"/>
+                <a:ea typeface="Nimbus Sans"/>
+                <a:cs typeface="Nimbus Sans"/>
+              </a:defRPr>
+            </a:defPPr>
+            <a:lvl1pPr algn="l">
+              <a:defRPr sz="2175" b="1">
+                <a:solidFill>
+                  <a:srgbClr val="BCC2C8"/>
+                </a:solidFill>
+                <a:latin typeface="Nimbus Sans"/>
+                <a:ea typeface="Nimbus Sans"/>
+                <a:cs typeface="Nimbus Sans"/>
+              </a:defRPr>
+            </a:lvl1pPr>
+            <a:lvl2pPr algn="l">
+              <a:defRPr sz="2175" b="1">
+                <a:solidFill>
+                  <a:srgbClr val="BCC2C8"/>
+                </a:solidFill>
+                <a:latin typeface="Nimbus Sans"/>
+                <a:ea typeface="Nimbus Sans"/>
+                <a:cs typeface="Nimbus Sans"/>
+              </a:defRPr>
+            </a:lvl2pPr>
+            <a:lvl3pPr algn="l">
+              <a:defRPr sz="2175" b="1">
+                <a:solidFill>
+                  <a:srgbClr val="BCC2C8"/>
+                </a:solidFill>
+                <a:latin typeface="Nimbus Sans"/>
+                <a:ea typeface="Nimbus Sans"/>
+                <a:cs typeface="Nimbus Sans"/>
+              </a:defRPr>
+            </a:lvl3pPr>
+            <a:lvl4pPr algn="l">
+              <a:defRPr sz="2175" b="1">
+                <a:solidFill>
+                  <a:srgbClr val="BCC2C8"/>
+                </a:solidFill>
+                <a:latin typeface="Nimbus Sans"/>
+                <a:ea typeface="Nimbus Sans"/>
+                <a:cs typeface="Nimbus Sans"/>
+              </a:defRPr>
+            </a:lvl4pPr>
+            <a:lvl5pPr algn="l">
+              <a:defRPr sz="2175" b="1">
+                <a:solidFill>
+                  <a:srgbClr val="BCC2C8"/>
+                </a:solidFill>
+                <a:latin typeface="Nimbus Sans"/>
+                <a:ea typeface="Nimbus Sans"/>
+                <a:cs typeface="Nimbus Sans"/>
+              </a:defRPr>
+            </a:lvl5pPr>
+            <a:lvl6pPr algn="l">
+              <a:defRPr sz="2175" b="1">
+                <a:solidFill>
+                  <a:srgbClr val="BCC2C8"/>
+                </a:solidFill>
+                <a:latin typeface="Nimbus Sans"/>
+                <a:ea typeface="Nimbus Sans"/>
+                <a:cs typeface="Nimbus Sans"/>
+              </a:defRPr>
+            </a:lvl6pPr>
+            <a:lvl7pPr algn="l">
+              <a:defRPr sz="2175" b="1">
+                <a:solidFill>
+                  <a:srgbClr val="BCC2C8"/>
+                </a:solidFill>
+                <a:latin typeface="Nimbus Sans"/>
+                <a:ea typeface="Nimbus Sans"/>
+                <a:cs typeface="Nimbus Sans"/>
+              </a:defRPr>
+            </a:lvl7pPr>
+            <a:lvl8pPr algn="l">
+              <a:defRPr sz="2175" b="1">
+                <a:solidFill>
+                  <a:srgbClr val="BCC2C8"/>
+                </a:solidFill>
+                <a:latin typeface="Nimbus Sans"/>
+                <a:ea typeface="Nimbus Sans"/>
+                <a:cs typeface="Nimbus Sans"/>
+              </a:defRPr>
+            </a:lvl8pPr>
+            <a:lvl9pPr algn="l">
+              <a:defRPr sz="2175" b="1">
+                <a:solidFill>
+                  <a:srgbClr val="BCC2C8"/>
+                </a:solidFill>
+                <a:latin typeface="Nimbus Sans"/>
+                <a:ea typeface="Nimbus Sans"/>
+                <a:cs typeface="Nimbus Sans"/>
+              </a:defRPr>
+            </a:lvl9pPr>
+          </a:lstStyle>
+          <a:p xmlns:a="http://schemas.openxmlformats.org/drawingml/2006/main">
+            <a:pPr algn="l">
+              <a:defRPr sz="2175" b="1">
+                <a:solidFill>
+                  <a:srgbClr val="BCC2C8"/>
+                </a:solidFill>
+                <a:latin typeface="Nimbus Sans"/>
+                <a:ea typeface="Nimbus Sans"/>
+                <a:cs typeface="Nimbus Sans"/>
+              </a:defRPr>
+            </a:pPr>
+            <a:r>
+              <a:rPr sz="2175" b="1">
+                <a:solidFill>
+                  <a:srgbClr val="BCC2C8"/>
+                </a:solidFill>
+                <a:latin typeface="Nimbus Sans"/>
+                <a:ea typeface="Nimbus Sans"/>
+                <a:cs typeface="Nimbus Sans"/>
+              </a:rPr>
+              <a:t>Esempi di tre mutazioni</a:t>
+            </a:r>
+          </a:p>
+        </p:txBody>
+      </p:sp>
+      <p:sp>
+        <p:nvSpPr>
+          <p:cNvPr id="45" name="f186">
+            <a:extLst xmlns:a="http://schemas.openxmlformats.org/drawingml/2006/main">
+              <a:ext uri="{FF2B5EF4-FFF2-40B4-BE49-F238E27FC236}">
+                <a16:creationId xmlns:a16="http://schemas.microsoft.com/office/drawing/2014/main" id="{2041356C-CEC8-4538-B207-67477330066F}"/>
+              </a:ext>
+            </a:extLst>
+          </p:cNvPr>
+          <p:cNvSpPr>
+            <a:spLocks xmlns:a="http://schemas.openxmlformats.org/drawingml/2006/main" noGrp="1"/>
+          </p:cNvSpPr>
+          <p:nvPr/>
+        </p:nvSpPr>
+        <p:spPr>
+          <a:xfrm xmlns:a="http://schemas.openxmlformats.org/drawingml/2006/main">
+            <a:off x="8420100" y="2686050"/>
+            <a:ext cx="5753100" cy="428625"/>
+          </a:xfrm>
+          <a:prstGeom xmlns:a="http://schemas.openxmlformats.org/drawingml/2006/main" prst="rect">
+            <a:avLst/>
+          </a:prstGeom>
+          <a:noFill xmlns:a="http://schemas.openxmlformats.org/drawingml/2006/main"/>
+          <a:ln xmlns:a="http://schemas.openxmlformats.org/drawingml/2006/main" w="0">
+            <a:noFill/>
+            <a:prstDash val="solid"/>
+          </a:ln>
+        </p:spPr>
+        <p:txBody>
+          <a:bodyPr xmlns:a="http://schemas.openxmlformats.org/drawingml/2006/main" wrap="none" lIns="0" tIns="0" rIns="0" bIns="0" anchor="t">
+            <a:noAutofit/>
+          </a:bodyPr>
+          <a:lstStyle xmlns:a="http://schemas.openxmlformats.org/drawingml/2006/main">
+            <a:defPPr algn="l">
+              <a:defRPr sz="2175" b="1">
+                <a:solidFill>
                   <a:srgbClr val="182536"/>
                 </a:solidFill>
                 <a:latin typeface="Nimbus Sans"/>
@@ -22828,10 +24414,613 @@
       </p:sp>
       <p:graphicFrame>
         <p:nvGraphicFramePr>
+          <p:cNvPr id="75" name="dim_">
+            <a:extLst xmlns:a="http://schemas.openxmlformats.org/drawingml/2006/main">
+              <a:ext uri="{FF2B5EF4-FFF2-40B4-BE49-F238E27FC236}">
+                <a16:creationId xmlns:a16="http://schemas.microsoft.com/office/drawing/2014/main" id="{2574253D-69D1-46E1-BFDA-1B35A9B08D0C}"/>
+              </a:ext>
+            </a:extLst>
+          </p:cNvPr>
+          <p:cNvGraphicFramePr/>
+          <p:nvPr/>
+        </p:nvGraphicFramePr>
+        <p:xfrm>
+          <a:off xmlns:a="http://schemas.openxmlformats.org/drawingml/2006/main" x="8420100" y="3238500"/>
+          <a:ext xmlns:a="http://schemas.openxmlformats.org/drawingml/2006/main" cx="5753100" cy="3371850"/>
+        </p:xfrm>
+        <a:graphic xmlns:a="http://schemas.openxmlformats.org/drawingml/2006/main">
+          <a:graphicData uri="http://schemas.openxmlformats.org/drawingml/2006/table">
+            <a:tbl>
+              <a:tblPr firstRow="0" bandRow="0"/>
+              <a:tblGrid>
+                <a:gridCol w="2476500"/>
+                <a:gridCol w="1352550"/>
+                <a:gridCol w="1924050"/>
+              </a:tblGrid>
+              <a:tr h="514350">
+                <a:tc>
+                  <a:txBody>
+                    <a:bodyPr wrap="none">
+                      <a:noAutofit/>
+                    </a:bodyPr>
+                    <a:lstStyle/>
+                    <a:p>
+                      <a:pPr algn="l"/>
+                      <a:r>
+                        <a:rPr sz="1725" b="1">
+                          <a:solidFill>
+                            <a:srgbClr val="BCC2C8"/>
+                          </a:solidFill>
+                          <a:latin typeface="Nimbus Sans"/>
+                          <a:ea typeface="Nimbus Sans"/>
+                          <a:cs typeface="Nimbus Sans"/>
+                        </a:rPr>
+                        <a:t>Mutazione</a:t>
+                      </a:r>
+                    </a:p>
+                  </a:txBody>
+                  <a:tcPr marL="171450" marR="171450" marT="76200" marB="76200" anchor="ctr">
+                    <a:lnL w="14288">
+                      <a:solidFill>
+                        <a:srgbClr val="ECF1F6"/>
+                      </a:solidFill>
+                      <a:prstDash val="solid"/>
+                    </a:lnL>
+                    <a:lnR w="14288">
+                      <a:solidFill>
+                        <a:srgbClr val="ECF1F6"/>
+                      </a:solidFill>
+                      <a:prstDash val="solid"/>
+                    </a:lnR>
+                    <a:lnT w="14288">
+                      <a:solidFill>
+                        <a:srgbClr val="ECF1F6"/>
+                      </a:solidFill>
+                      <a:prstDash val="solid"/>
+                    </a:lnT>
+                    <a:lnB w="14288">
+                      <a:solidFill>
+                        <a:srgbClr val="ECF1F6"/>
+                      </a:solidFill>
+                      <a:prstDash val="solid"/>
+                    </a:lnB>
+                    <a:solidFill>
+                      <a:srgbClr val="F2F6FA"/>
+                    </a:solidFill>
+                  </a:tcPr>
+                </a:tc>
+                <a:tc>
+                  <a:txBody>
+                    <a:bodyPr wrap="none">
+                      <a:noAutofit/>
+                    </a:bodyPr>
+                    <a:lstStyle/>
+                    <a:p>
+                      <a:pPr algn="ctr"/>
+                      <a:r>
+                        <a:rPr sz="1725" b="1">
+                          <a:solidFill>
+                            <a:srgbClr val="BCC2C8"/>
+                          </a:solidFill>
+                          <a:latin typeface="Nimbus Sans"/>
+                          <a:ea typeface="Nimbus Sans"/>
+                          <a:cs typeface="Nimbus Sans"/>
+                        </a:rPr>
+                        <a:t>Originale</a:t>
+                      </a:r>
+                    </a:p>
+                  </a:txBody>
+                  <a:tcPr marL="171450" marR="171450" marT="76200" marB="76200" anchor="ctr">
+                    <a:lnR w="14288">
+                      <a:solidFill>
+                        <a:srgbClr val="ECF1F6"/>
+                      </a:solidFill>
+                      <a:prstDash val="solid"/>
+                    </a:lnR>
+                    <a:lnT w="14288">
+                      <a:solidFill>
+                        <a:srgbClr val="ECF1F6"/>
+                      </a:solidFill>
+                      <a:prstDash val="solid"/>
+                    </a:lnT>
+                    <a:lnB w="14288">
+                      <a:solidFill>
+                        <a:srgbClr val="ECF1F6"/>
+                      </a:solidFill>
+                      <a:prstDash val="solid"/>
+                    </a:lnB>
+                    <a:solidFill>
+                      <a:srgbClr val="F2F6FA"/>
+                    </a:solidFill>
+                  </a:tcPr>
+                </a:tc>
+                <a:tc>
+                  <a:txBody>
+                    <a:bodyPr wrap="none">
+                      <a:noAutofit/>
+                    </a:bodyPr>
+                    <a:lstStyle/>
+                    <a:p>
+                      <a:pPr algn="ctr"/>
+                      <a:r>
+                        <a:rPr sz="1725" b="1">
+                          <a:solidFill>
+                            <a:srgbClr val="BCC2C8"/>
+                          </a:solidFill>
+                          <a:latin typeface="Nimbus Sans"/>
+                          <a:ea typeface="Nimbus Sans"/>
+                          <a:cs typeface="Nimbus Sans"/>
+                        </a:rPr>
+                        <a:t>Mutato</a:t>
+                      </a:r>
+                    </a:p>
+                  </a:txBody>
+                  <a:tcPr marL="171450" marR="171450" marT="76200" marB="76200" anchor="ctr">
+                    <a:lnR w="14288">
+                      <a:solidFill>
+                        <a:srgbClr val="ECF1F6"/>
+                      </a:solidFill>
+                      <a:prstDash val="solid"/>
+                    </a:lnR>
+                    <a:lnT w="14288">
+                      <a:solidFill>
+                        <a:srgbClr val="ECF1F6"/>
+                      </a:solidFill>
+                      <a:prstDash val="solid"/>
+                    </a:lnT>
+                    <a:lnB w="14288">
+                      <a:solidFill>
+                        <a:srgbClr val="ECF1F6"/>
+                      </a:solidFill>
+                      <a:prstDash val="solid"/>
+                    </a:lnB>
+                    <a:solidFill>
+                      <a:srgbClr val="F2F6FA"/>
+                    </a:solidFill>
+                  </a:tcPr>
+                </a:tc>
+              </a:tr>
+              <a:tr h="876300">
+                <a:tc>
+                  <a:txBody>
+                    <a:bodyPr wrap="none">
+                      <a:noAutofit/>
+                    </a:bodyPr>
+                    <a:lstStyle/>
+                    <a:p>
+                      <a:pPr algn="l"/>
+                      <a:r>
+                        <a:rPr sz="1725" b="0">
+                          <a:solidFill>
+                            <a:srgbClr val="BCC2C8"/>
+                          </a:solidFill>
+                          <a:latin typeface="Nimbus Sans"/>
+                          <a:ea typeface="Nimbus Sans"/>
+                          <a:cs typeface="Nimbus Sans"/>
+                        </a:rPr>
+                        <a:t>NRF: HTTP</a:t>
+                      </a:r>
+                    </a:p>
+                    <a:p>
+                      <a:pPr algn="l"/>
+                      <a:r>
+                        <a:rPr sz="1725" b="0">
+                          <a:solidFill>
+                            <a:srgbClr val="BCC2C8"/>
+                          </a:solidFill>
+                          <a:latin typeface="Nimbus Sans"/>
+                          <a:ea typeface="Nimbus Sans"/>
+                          <a:cs typeface="Nimbus Sans"/>
+                        </a:rPr>
+                        <a:t>200 → 403</a:t>
+                      </a:r>
+                    </a:p>
+                  </a:txBody>
+                  <a:tcPr marL="171450" marR="171450" marT="76200" marB="76200" anchor="ctr">
+                    <a:lnL w="14288">
+                      <a:solidFill>
+                        <a:srgbClr val="ECF1F6"/>
+                      </a:solidFill>
+                      <a:prstDash val="solid"/>
+                    </a:lnL>
+                    <a:lnR w="14288">
+                      <a:solidFill>
+                        <a:srgbClr val="ECF1F6"/>
+                      </a:solidFill>
+                      <a:prstDash val="solid"/>
+                    </a:lnR>
+                    <a:lnB w="14288">
+                      <a:solidFill>
+                        <a:srgbClr val="ECF1F6"/>
+                      </a:solidFill>
+                      <a:prstDash val="solid"/>
+                    </a:lnB>
+                    <a:solidFill>
+                      <a:srgbClr val="F6F8FA"/>
+                    </a:solidFill>
+                  </a:tcPr>
+                </a:tc>
+                <a:tc>
+                  <a:txBody>
+                    <a:bodyPr wrap="none">
+                      <a:noAutofit/>
+                    </a:bodyPr>
+                    <a:lstStyle/>
+                    <a:p>
+                      <a:pPr algn="ctr"/>
+                      <a:r>
+                        <a:rPr sz="1725" b="1">
+                          <a:solidFill>
+                            <a:srgbClr val="E4CBD0"/>
+                          </a:solidFill>
+                          <a:latin typeface="Nimbus Sans"/>
+                          <a:ea typeface="Nimbus Sans"/>
+                          <a:cs typeface="Nimbus Sans"/>
+                        </a:rPr>
+                        <a:t>FAIL</a:t>
+                      </a:r>
+                    </a:p>
+                  </a:txBody>
+                  <a:tcPr marL="171450" marR="171450" marT="76200" marB="76200" anchor="ctr">
+                    <a:lnR w="14288">
+                      <a:solidFill>
+                        <a:srgbClr val="ECF1F6"/>
+                      </a:solidFill>
+                      <a:prstDash val="solid"/>
+                    </a:lnR>
+                    <a:lnB w="14288">
+                      <a:solidFill>
+                        <a:srgbClr val="ECF1F6"/>
+                      </a:solidFill>
+                      <a:prstDash val="solid"/>
+                    </a:lnB>
+                    <a:solidFill>
+                      <a:srgbClr val="F6F8FA"/>
+                    </a:solidFill>
+                  </a:tcPr>
+                </a:tc>
+                <a:tc>
+                  <a:txBody>
+                    <a:bodyPr wrap="none">
+                      <a:noAutofit/>
+                    </a:bodyPr>
+                    <a:lstStyle/>
+                    <a:p>
+                      <a:pPr algn="ctr"/>
+                      <a:r>
+                        <a:rPr sz="1725" b="1">
+                          <a:solidFill>
+                            <a:srgbClr val="C0DAD4"/>
+                          </a:solidFill>
+                          <a:latin typeface="Nimbus Sans"/>
+                          <a:ea typeface="Nimbus Sans"/>
+                          <a:cs typeface="Nimbus Sans"/>
+                        </a:rPr>
+                        <a:t>PASS</a:t>
+                      </a:r>
+                    </a:p>
+                  </a:txBody>
+                  <a:tcPr marL="171450" marR="171450" marT="76200" marB="76200" anchor="ctr">
+                    <a:lnR w="14288">
+                      <a:solidFill>
+                        <a:srgbClr val="ECF1F6"/>
+                      </a:solidFill>
+                      <a:prstDash val="solid"/>
+                    </a:lnR>
+                    <a:lnB w="14288">
+                      <a:solidFill>
+                        <a:srgbClr val="ECF1F6"/>
+                      </a:solidFill>
+                      <a:prstDash val="solid"/>
+                    </a:lnB>
+                    <a:solidFill>
+                      <a:srgbClr val="F6F8FA"/>
+                    </a:solidFill>
+                  </a:tcPr>
+                </a:tc>
+              </a:tr>
+              <a:tr h="1104900">
+                <a:tc>
+                  <a:txBody>
+                    <a:bodyPr wrap="none">
+                      <a:noAutofit/>
+                    </a:bodyPr>
+                    <a:lstStyle/>
+                    <a:p>
+                      <a:pPr algn="l"/>
+                      <a:r>
+                        <a:rPr sz="1725" b="0">
+                          <a:solidFill>
+                            <a:srgbClr val="BCC2C8"/>
+                          </a:solidFill>
+                          <a:latin typeface="Nimbus Sans"/>
+                          <a:ea typeface="Nimbus Sans"/>
+                          <a:cs typeface="Nimbus Sans"/>
+                        </a:rPr>
+                        <a:t>AMF A: Intervallo</a:t>
+                      </a:r>
+                    </a:p>
+                    <a:p>
+                      <a:pPr algn="l"/>
+                      <a:r>
+                        <a:rPr sz="1725" b="0">
+                          <a:solidFill>
+                            <a:srgbClr val="BCC2C8"/>
+                          </a:solidFill>
+                          <a:latin typeface="Nimbus Sans"/>
+                          <a:ea typeface="Nimbus Sans"/>
+                          <a:cs typeface="Nimbus Sans"/>
+                        </a:rPr>
+                        <a:t>temporale non</a:t>
+                      </a:r>
+                    </a:p>
+                    <a:p>
+                      <a:pPr algn="l"/>
+                      <a:r>
+                        <a:rPr sz="1725" b="0">
+                          <a:solidFill>
+                            <a:srgbClr val="BCC2C8"/>
+                          </a:solidFill>
+                          <a:latin typeface="Nimbus Sans"/>
+                          <a:ea typeface="Nimbus Sans"/>
+                          <a:cs typeface="Nimbus Sans"/>
+                        </a:rPr>
+                        <a:t>rispettato</a:t>
+                      </a:r>
+                    </a:p>
+                  </a:txBody>
+                  <a:tcPr marL="171450" marR="171450" marT="76200" marB="76200" anchor="ctr">
+                    <a:lnL w="14288">
+                      <a:solidFill>
+                        <a:srgbClr val="ECF1F6"/>
+                      </a:solidFill>
+                      <a:prstDash val="solid"/>
+                    </a:lnL>
+                    <a:lnR w="14288">
+                      <a:solidFill>
+                        <a:srgbClr val="ECF1F6"/>
+                      </a:solidFill>
+                      <a:prstDash val="solid"/>
+                    </a:lnR>
+                    <a:lnB w="14288">
+                      <a:solidFill>
+                        <a:srgbClr val="ECF1F6"/>
+                      </a:solidFill>
+                      <a:prstDash val="solid"/>
+                    </a:lnB>
+                    <a:solidFill>
+                      <a:srgbClr val="F6F8FA"/>
+                    </a:solidFill>
+                  </a:tcPr>
+                </a:tc>
+                <a:tc>
+                  <a:txBody>
+                    <a:bodyPr wrap="none">
+                      <a:noAutofit/>
+                    </a:bodyPr>
+                    <a:lstStyle/>
+                    <a:p>
+                      <a:pPr algn="ctr"/>
+                      <a:r>
+                        <a:rPr sz="1725" b="1">
+                          <a:solidFill>
+                            <a:srgbClr val="C0DAD4"/>
+                          </a:solidFill>
+                          <a:latin typeface="Nimbus Sans"/>
+                          <a:ea typeface="Nimbus Sans"/>
+                          <a:cs typeface="Nimbus Sans"/>
+                        </a:rPr>
+                        <a:t>PASS</a:t>
+                      </a:r>
+                    </a:p>
+                  </a:txBody>
+                  <a:tcPr marL="171450" marR="171450" marT="76200" marB="76200" anchor="ctr">
+                    <a:lnR w="14288">
+                      <a:solidFill>
+                        <a:srgbClr val="ECF1F6"/>
+                      </a:solidFill>
+                      <a:prstDash val="solid"/>
+                    </a:lnR>
+                    <a:lnB w="14288">
+                      <a:solidFill>
+                        <a:srgbClr val="ECF1F6"/>
+                      </a:solidFill>
+                      <a:prstDash val="solid"/>
+                    </a:lnB>
+                    <a:solidFill>
+                      <a:srgbClr val="F6F8FA"/>
+                    </a:solidFill>
+                  </a:tcPr>
+                </a:tc>
+                <a:tc>
+                  <a:txBody>
+                    <a:bodyPr wrap="none">
+                      <a:noAutofit/>
+                    </a:bodyPr>
+                    <a:lstStyle/>
+                    <a:p>
+                      <a:pPr algn="ctr"/>
+                      <a:r>
+                        <a:rPr sz="1725" b="1">
+                          <a:solidFill>
+                            <a:srgbClr val="E4CBD0"/>
+                          </a:solidFill>
+                          <a:latin typeface="Nimbus Sans"/>
+                          <a:ea typeface="Nimbus Sans"/>
+                          <a:cs typeface="Nimbus Sans"/>
+                        </a:rPr>
+                        <a:t>FAIL</a:t>
+                      </a:r>
+                    </a:p>
+                  </a:txBody>
+                  <a:tcPr marL="171450" marR="171450" marT="76200" marB="76200" anchor="ctr">
+                    <a:lnR w="14288">
+                      <a:solidFill>
+                        <a:srgbClr val="ECF1F6"/>
+                      </a:solidFill>
+                      <a:prstDash val="solid"/>
+                    </a:lnR>
+                    <a:lnB w="14288">
+                      <a:solidFill>
+                        <a:srgbClr val="ECF1F6"/>
+                      </a:solidFill>
+                      <a:prstDash val="solid"/>
+                    </a:lnB>
+                    <a:solidFill>
+                      <a:srgbClr val="F6F8FA"/>
+                    </a:solidFill>
+                  </a:tcPr>
+                </a:tc>
+              </a:tr>
+              <a:tr h="876300">
+                <a:tc>
+                  <a:txBody>
+                    <a:bodyPr wrap="none">
+                      <a:noAutofit/>
+                    </a:bodyPr>
+                    <a:lstStyle/>
+                    <a:p>
+                      <a:pPr algn="l"/>
+                      <a:r>
+                        <a:rPr sz="1725" b="0">
+                          <a:solidFill>
+                            <a:srgbClr val="BCC2C8"/>
+                          </a:solidFill>
+                          <a:latin typeface="Nimbus Sans"/>
+                          <a:ea typeface="Nimbus Sans"/>
+                          <a:cs typeface="Nimbus Sans"/>
+                        </a:rPr>
+                        <a:t>UPF: F-TEID</a:t>
+                      </a:r>
+                    </a:p>
+                    <a:p>
+                      <a:pPr algn="l"/>
+                      <a:r>
+                        <a:rPr sz="1725" b="0">
+                          <a:solidFill>
+                            <a:srgbClr val="BCC2C8"/>
+                          </a:solidFill>
+                          <a:latin typeface="Nimbus Sans"/>
+                          <a:ea typeface="Nimbus Sans"/>
+                          <a:cs typeface="Nimbus Sans"/>
+                        </a:rPr>
+                        <a:t>rimossi</a:t>
+                      </a:r>
+                    </a:p>
+                  </a:txBody>
+                  <a:tcPr marL="171450" marR="171450" marT="76200" marB="76200" anchor="ctr">
+                    <a:lnL w="14288">
+                      <a:solidFill>
+                        <a:srgbClr val="ECF1F6"/>
+                      </a:solidFill>
+                      <a:prstDash val="solid"/>
+                    </a:lnL>
+                    <a:lnR w="14288">
+                      <a:solidFill>
+                        <a:srgbClr val="ECF1F6"/>
+                      </a:solidFill>
+                      <a:prstDash val="solid"/>
+                    </a:lnR>
+                    <a:lnB w="14288">
+                      <a:solidFill>
+                        <a:srgbClr val="ECF1F6"/>
+                      </a:solidFill>
+                      <a:prstDash val="solid"/>
+                    </a:lnB>
+                    <a:solidFill>
+                      <a:srgbClr val="F6F8FA"/>
+                    </a:solidFill>
+                  </a:tcPr>
+                </a:tc>
+                <a:tc>
+                  <a:txBody>
+                    <a:bodyPr wrap="none">
+                      <a:noAutofit/>
+                    </a:bodyPr>
+                    <a:lstStyle/>
+                    <a:p>
+                      <a:pPr algn="ctr"/>
+                      <a:r>
+                        <a:rPr sz="1725" b="1">
+                          <a:solidFill>
+                            <a:srgbClr val="C0DAD4"/>
+                          </a:solidFill>
+                          <a:latin typeface="Nimbus Sans"/>
+                          <a:ea typeface="Nimbus Sans"/>
+                          <a:cs typeface="Nimbus Sans"/>
+                        </a:rPr>
+                        <a:t>PASS</a:t>
+                      </a:r>
+                    </a:p>
+                  </a:txBody>
+                  <a:tcPr marL="171450" marR="171450" marT="76200" marB="76200" anchor="ctr">
+                    <a:lnR w="14288">
+                      <a:solidFill>
+                        <a:srgbClr val="ECF1F6"/>
+                      </a:solidFill>
+                      <a:prstDash val="solid"/>
+                    </a:lnR>
+                    <a:lnB w="14288">
+                      <a:solidFill>
+                        <a:srgbClr val="ECF1F6"/>
+                      </a:solidFill>
+                      <a:prstDash val="solid"/>
+                    </a:lnB>
+                    <a:solidFill>
+                      <a:srgbClr val="F6F8FA"/>
+                    </a:solidFill>
+                  </a:tcPr>
+                </a:tc>
+                <a:tc>
+                  <a:txBody>
+                    <a:bodyPr wrap="none">
+                      <a:noAutofit/>
+                    </a:bodyPr>
+                    <a:lstStyle/>
+                    <a:p>
+                      <a:pPr algn="ctr"/>
+                      <a:r>
+                        <a:rPr sz="1575" b="1">
+                          <a:solidFill>
+                            <a:srgbClr val="DED5C9"/>
+                          </a:solidFill>
+                          <a:latin typeface="Nimbus Sans"/>
+                          <a:ea typeface="Nimbus Sans"/>
+                          <a:cs typeface="Nimbus Sans"/>
+                        </a:rPr>
+                        <a:t>INCONCLUSIVE</a:t>
+                      </a:r>
+                    </a:p>
+                  </a:txBody>
+                  <a:tcPr marL="171450" marR="171450" marT="76200" marB="76200" anchor="ctr">
+                    <a:lnR w="14288">
+                      <a:solidFill>
+                        <a:srgbClr val="ECF1F6"/>
+                      </a:solidFill>
+                      <a:prstDash val="solid"/>
+                    </a:lnR>
+                    <a:lnB w="14288">
+                      <a:solidFill>
+                        <a:srgbClr val="ECF1F6"/>
+                      </a:solidFill>
+                      <a:prstDash val="solid"/>
+                    </a:lnB>
+                    <a:solidFill>
+                      <a:srgbClr val="F6F8FA"/>
+                    </a:solidFill>
+                  </a:tcPr>
+                </a:tc>
+              </a:tr>
+            </a:tbl>
+          </a:graphicData>
+        </a:graphic>
+      </p:graphicFrame>
+      <p:graphicFrame>
+        <p:nvGraphicFramePr>
           <p:cNvPr id="46" name="">
             <a:extLst xmlns:a="http://schemas.openxmlformats.org/drawingml/2006/main">
               <a:ext uri="{FF2B5EF4-FFF2-40B4-BE49-F238E27FC236}">
-                <a16:creationId xmlns:a16="http://schemas.microsoft.com/office/drawing/2014/main" id="{C5EE1700-CF70-4441-BD73-A4A3C35BDC3A}"/>
+                <a16:creationId xmlns:a16="http://schemas.microsoft.com/office/drawing/2014/main" id="{2574253D-69D1-46E1-BFDA-1B35A9B08D0C}"/>
               </a:ext>
             </a:extLst>
           </p:cNvPr>
@@ -23431,10 +25620,10 @@
       </p:graphicFrame>
       <p:sp>
         <p:nvSpPr>
-          <p:cNvPr id="47" name="f188">
+          <p:cNvPr id="76" name="dim_f188">
             <a:extLst xmlns:a="http://schemas.openxmlformats.org/drawingml/2006/main">
               <a:ext uri="{FF2B5EF4-FFF2-40B4-BE49-F238E27FC236}">
-                <a16:creationId xmlns:a16="http://schemas.microsoft.com/office/drawing/2014/main" id="{E36E5F54-D02F-42C1-A0A7-34E5AF369261}"/>
+                <a16:creationId xmlns:a16="http://schemas.microsoft.com/office/drawing/2014/main" id="{C5A25857-740E-432B-A15C-63403E46EB36}"/>
               </a:ext>
             </a:extLst>
           </p:cNvPr>
@@ -23465,7 +25654,7 @@
             <a:defPPr algn="ctr">
               <a:defRPr sz="5250" b="1">
                 <a:solidFill>
-                  <a:srgbClr val="4264D0"/>
+                  <a:srgbClr val="C7D2EF"/>
                 </a:solidFill>
                 <a:latin typeface="Nimbus Sans"/>
                 <a:ea typeface="Nimbus Sans"/>
@@ -23475,7 +25664,7 @@
             <a:lvl1pPr algn="ctr">
               <a:defRPr sz="5250" b="1">
                 <a:solidFill>
-                  <a:srgbClr val="4264D0"/>
+                  <a:srgbClr val="C7D2EF"/>
                 </a:solidFill>
                 <a:latin typeface="Nimbus Sans"/>
                 <a:ea typeface="Nimbus Sans"/>
@@ -23485,7 +25674,7 @@
             <a:lvl2pPr algn="ctr">
               <a:defRPr sz="5250" b="1">
                 <a:solidFill>
-                  <a:srgbClr val="4264D0"/>
+                  <a:srgbClr val="C7D2EF"/>
                 </a:solidFill>
                 <a:latin typeface="Nimbus Sans"/>
                 <a:ea typeface="Nimbus Sans"/>
@@ -23495,7 +25684,7 @@
             <a:lvl3pPr algn="ctr">
               <a:defRPr sz="5250" b="1">
                 <a:solidFill>
-                  <a:srgbClr val="4264D0"/>
+                  <a:srgbClr val="C7D2EF"/>
                 </a:solidFill>
                 <a:latin typeface="Nimbus Sans"/>
                 <a:ea typeface="Nimbus Sans"/>
@@ -23505,7 +25694,7 @@
             <a:lvl4pPr algn="ctr">
               <a:defRPr sz="5250" b="1">
                 <a:solidFill>
-                  <a:srgbClr val="4264D0"/>
+                  <a:srgbClr val="C7D2EF"/>
                 </a:solidFill>
                 <a:latin typeface="Nimbus Sans"/>
                 <a:ea typeface="Nimbus Sans"/>
@@ -23515,7 +25704,7 @@
             <a:lvl5pPr algn="ctr">
               <a:defRPr sz="5250" b="1">
                 <a:solidFill>
-                  <a:srgbClr val="4264D0"/>
+                  <a:srgbClr val="C7D2EF"/>
                 </a:solidFill>
                 <a:latin typeface="Nimbus Sans"/>
                 <a:ea typeface="Nimbus Sans"/>
@@ -23525,7 +25714,7 @@
             <a:lvl6pPr algn="ctr">
               <a:defRPr sz="5250" b="1">
                 <a:solidFill>
-                  <a:srgbClr val="4264D0"/>
+                  <a:srgbClr val="C7D2EF"/>
                 </a:solidFill>
                 <a:latin typeface="Nimbus Sans"/>
                 <a:ea typeface="Nimbus Sans"/>
@@ -23535,7 +25724,7 @@
             <a:lvl7pPr algn="ctr">
               <a:defRPr sz="5250" b="1">
                 <a:solidFill>
-                  <a:srgbClr val="4264D0"/>
+                  <a:srgbClr val="C7D2EF"/>
                 </a:solidFill>
                 <a:latin typeface="Nimbus Sans"/>
                 <a:ea typeface="Nimbus Sans"/>
@@ -23545,7 +25734,7 @@
             <a:lvl8pPr algn="ctr">
               <a:defRPr sz="5250" b="1">
                 <a:solidFill>
-                  <a:srgbClr val="4264D0"/>
+                  <a:srgbClr val="C7D2EF"/>
                 </a:solidFill>
                 <a:latin typeface="Nimbus Sans"/>
                 <a:ea typeface="Nimbus Sans"/>
@@ -23555,7 +25744,7 @@
             <a:lvl9pPr algn="ctr">
               <a:defRPr sz="5250" b="1">
                 <a:solidFill>
-                  <a:srgbClr val="4264D0"/>
+                  <a:srgbClr val="C7D2EF"/>
                 </a:solidFill>
                 <a:latin typeface="Nimbus Sans"/>
                 <a:ea typeface="Nimbus Sans"/>
@@ -23567,7 +25756,7 @@
             <a:pPr algn="ctr">
               <a:defRPr sz="5250" b="1">
                 <a:solidFill>
-                  <a:srgbClr val="4264D0"/>
+                  <a:srgbClr val="C7D2EF"/>
                 </a:solidFill>
                 <a:latin typeface="Nimbus Sans"/>
                 <a:ea typeface="Nimbus Sans"/>
@@ -23577,7 +25766,7 @@
             <a:r>
               <a:rPr sz="5250" b="1">
                 <a:solidFill>
-                  <a:srgbClr val="4264D0"/>
+                  <a:srgbClr val="C7D2EF"/>
                 </a:solidFill>
                 <a:latin typeface="Nimbus Sans"/>
                 <a:ea typeface="Nimbus Sans"/>
@@ -23590,10 +25779,169 @@
       </p:sp>
       <p:sp>
         <p:nvSpPr>
-          <p:cNvPr id="48" name="f189">
+          <p:cNvPr id="47" name="f188">
             <a:extLst xmlns:a="http://schemas.openxmlformats.org/drawingml/2006/main">
               <a:ext uri="{FF2B5EF4-FFF2-40B4-BE49-F238E27FC236}">
-                <a16:creationId xmlns:a16="http://schemas.microsoft.com/office/drawing/2014/main" id="{0243ED90-1A24-4D92-AD9E-4267784AA64E}"/>
+                <a16:creationId xmlns:a16="http://schemas.microsoft.com/office/drawing/2014/main" id="{C5A25857-740E-432B-A15C-63403E46EB36}"/>
+              </a:ext>
+            </a:extLst>
+          </p:cNvPr>
+          <p:cNvSpPr>
+            <a:spLocks xmlns:a="http://schemas.openxmlformats.org/drawingml/2006/main" noGrp="1"/>
+          </p:cNvSpPr>
+          <p:nvPr/>
+        </p:nvSpPr>
+        <p:spPr>
+          <a:xfrm xmlns:a="http://schemas.openxmlformats.org/drawingml/2006/main">
+            <a:off x="8420100" y="7038975"/>
+            <a:ext cx="2000250" cy="857250"/>
+          </a:xfrm>
+          <a:prstGeom xmlns:a="http://schemas.openxmlformats.org/drawingml/2006/main" prst="rect">
+            <a:avLst/>
+          </a:prstGeom>
+          <a:noFill xmlns:a="http://schemas.openxmlformats.org/drawingml/2006/main"/>
+          <a:ln xmlns:a="http://schemas.openxmlformats.org/drawingml/2006/main" w="0">
+            <a:noFill/>
+            <a:prstDash val="solid"/>
+          </a:ln>
+        </p:spPr>
+        <p:txBody>
+          <a:bodyPr xmlns:a="http://schemas.openxmlformats.org/drawingml/2006/main" wrap="none" lIns="0" tIns="0" rIns="0" bIns="0" anchor="t">
+            <a:noAutofit/>
+          </a:bodyPr>
+          <a:lstStyle xmlns:a="http://schemas.openxmlformats.org/drawingml/2006/main">
+            <a:defPPr algn="ctr">
+              <a:defRPr sz="5250" b="1">
+                <a:solidFill>
+                  <a:srgbClr val="4264D0"/>
+                </a:solidFill>
+                <a:latin typeface="Nimbus Sans"/>
+                <a:ea typeface="Nimbus Sans"/>
+                <a:cs typeface="Nimbus Sans"/>
+              </a:defRPr>
+            </a:defPPr>
+            <a:lvl1pPr algn="ctr">
+              <a:defRPr sz="5250" b="1">
+                <a:solidFill>
+                  <a:srgbClr val="4264D0"/>
+                </a:solidFill>
+                <a:latin typeface="Nimbus Sans"/>
+                <a:ea typeface="Nimbus Sans"/>
+                <a:cs typeface="Nimbus Sans"/>
+              </a:defRPr>
+            </a:lvl1pPr>
+            <a:lvl2pPr algn="ctr">
+              <a:defRPr sz="5250" b="1">
+                <a:solidFill>
+                  <a:srgbClr val="4264D0"/>
+                </a:solidFill>
+                <a:latin typeface="Nimbus Sans"/>
+                <a:ea typeface="Nimbus Sans"/>
+                <a:cs typeface="Nimbus Sans"/>
+              </a:defRPr>
+            </a:lvl2pPr>
+            <a:lvl3pPr algn="ctr">
+              <a:defRPr sz="5250" b="1">
+                <a:solidFill>
+                  <a:srgbClr val="4264D0"/>
+                </a:solidFill>
+                <a:latin typeface="Nimbus Sans"/>
+                <a:ea typeface="Nimbus Sans"/>
+                <a:cs typeface="Nimbus Sans"/>
+              </a:defRPr>
+            </a:lvl3pPr>
+            <a:lvl4pPr algn="ctr">
+              <a:defRPr sz="5250" b="1">
+                <a:solidFill>
+                  <a:srgbClr val="4264D0"/>
+                </a:solidFill>
+                <a:latin typeface="Nimbus Sans"/>
+                <a:ea typeface="Nimbus Sans"/>
+                <a:cs typeface="Nimbus Sans"/>
+              </a:defRPr>
+            </a:lvl4pPr>
+            <a:lvl5pPr algn="ctr">
+              <a:defRPr sz="5250" b="1">
+                <a:solidFill>
+                  <a:srgbClr val="4264D0"/>
+                </a:solidFill>
+                <a:latin typeface="Nimbus Sans"/>
+                <a:ea typeface="Nimbus Sans"/>
+                <a:cs typeface="Nimbus Sans"/>
+              </a:defRPr>
+            </a:lvl5pPr>
+            <a:lvl6pPr algn="ctr">
+              <a:defRPr sz="5250" b="1">
+                <a:solidFill>
+                  <a:srgbClr val="4264D0"/>
+                </a:solidFill>
+                <a:latin typeface="Nimbus Sans"/>
+                <a:ea typeface="Nimbus Sans"/>
+                <a:cs typeface="Nimbus Sans"/>
+              </a:defRPr>
+            </a:lvl6pPr>
+            <a:lvl7pPr algn="ctr">
+              <a:defRPr sz="5250" b="1">
+                <a:solidFill>
+                  <a:srgbClr val="4264D0"/>
+                </a:solidFill>
+                <a:latin typeface="Nimbus Sans"/>
+                <a:ea typeface="Nimbus Sans"/>
+                <a:cs typeface="Nimbus Sans"/>
+              </a:defRPr>
+            </a:lvl7pPr>
+            <a:lvl8pPr algn="ctr">
+              <a:defRPr sz="5250" b="1">
+                <a:solidFill>
+                  <a:srgbClr val="4264D0"/>
+                </a:solidFill>
+                <a:latin typeface="Nimbus Sans"/>
+                <a:ea typeface="Nimbus Sans"/>
+                <a:cs typeface="Nimbus Sans"/>
+              </a:defRPr>
+            </a:lvl8pPr>
+            <a:lvl9pPr algn="ctr">
+              <a:defRPr sz="5250" b="1">
+                <a:solidFill>
+                  <a:srgbClr val="4264D0"/>
+                </a:solidFill>
+                <a:latin typeface="Nimbus Sans"/>
+                <a:ea typeface="Nimbus Sans"/>
+                <a:cs typeface="Nimbus Sans"/>
+              </a:defRPr>
+            </a:lvl9pPr>
+          </a:lstStyle>
+          <a:p xmlns:a="http://schemas.openxmlformats.org/drawingml/2006/main">
+            <a:pPr algn="ctr">
+              <a:defRPr sz="5250" b="1">
+                <a:solidFill>
+                  <a:srgbClr val="4264D0"/>
+                </a:solidFill>
+                <a:latin typeface="Nimbus Sans"/>
+                <a:ea typeface="Nimbus Sans"/>
+                <a:cs typeface="Nimbus Sans"/>
+              </a:defRPr>
+            </a:pPr>
+            <a:r>
+              <a:rPr sz="5250" b="1">
+                <a:solidFill>
+                  <a:srgbClr val="4264D0"/>
+                </a:solidFill>
+                <a:latin typeface="Nimbus Sans"/>
+                <a:ea typeface="Nimbus Sans"/>
+                <a:cs typeface="Nimbus Sans"/>
+              </a:rPr>
+              <a:t>13/13</a:t>
+            </a:r>
+          </a:p>
+        </p:txBody>
+      </p:sp>
+      <p:sp>
+        <p:nvSpPr>
+          <p:cNvPr id="77" name="dim_f189">
+            <a:extLst xmlns:a="http://schemas.openxmlformats.org/drawingml/2006/main">
+              <a:ext uri="{FF2B5EF4-FFF2-40B4-BE49-F238E27FC236}">
+                <a16:creationId xmlns:a16="http://schemas.microsoft.com/office/drawing/2014/main" id="{51C27A74-1F2D-4863-866B-AB870A97AC79}"/>
               </a:ext>
             </a:extLst>
           </p:cNvPr>
@@ -23624,6 +25972,188 @@
             <a:defPPr algn="ctr">
               <a:defRPr sz="2100" b="1">
                 <a:solidFill>
+                  <a:srgbClr val="BCC2C8"/>
+                </a:solidFill>
+                <a:latin typeface="Nimbus Sans"/>
+                <a:ea typeface="Nimbus Sans"/>
+                <a:cs typeface="Nimbus Sans"/>
+              </a:defRPr>
+            </a:defPPr>
+            <a:lvl1pPr algn="ctr">
+              <a:defRPr sz="2100" b="1">
+                <a:solidFill>
+                  <a:srgbClr val="BCC2C8"/>
+                </a:solidFill>
+                <a:latin typeface="Nimbus Sans"/>
+                <a:ea typeface="Nimbus Sans"/>
+                <a:cs typeface="Nimbus Sans"/>
+              </a:defRPr>
+            </a:lvl1pPr>
+            <a:lvl2pPr algn="ctr">
+              <a:defRPr sz="2100" b="1">
+                <a:solidFill>
+                  <a:srgbClr val="BCC2C8"/>
+                </a:solidFill>
+                <a:latin typeface="Nimbus Sans"/>
+                <a:ea typeface="Nimbus Sans"/>
+                <a:cs typeface="Nimbus Sans"/>
+              </a:defRPr>
+            </a:lvl2pPr>
+            <a:lvl3pPr algn="ctr">
+              <a:defRPr sz="2100" b="1">
+                <a:solidFill>
+                  <a:srgbClr val="BCC2C8"/>
+                </a:solidFill>
+                <a:latin typeface="Nimbus Sans"/>
+                <a:ea typeface="Nimbus Sans"/>
+                <a:cs typeface="Nimbus Sans"/>
+              </a:defRPr>
+            </a:lvl3pPr>
+            <a:lvl4pPr algn="ctr">
+              <a:defRPr sz="2100" b="1">
+                <a:solidFill>
+                  <a:srgbClr val="BCC2C8"/>
+                </a:solidFill>
+                <a:latin typeface="Nimbus Sans"/>
+                <a:ea typeface="Nimbus Sans"/>
+                <a:cs typeface="Nimbus Sans"/>
+              </a:defRPr>
+            </a:lvl4pPr>
+            <a:lvl5pPr algn="ctr">
+              <a:defRPr sz="2100" b="1">
+                <a:solidFill>
+                  <a:srgbClr val="BCC2C8"/>
+                </a:solidFill>
+                <a:latin typeface="Nimbus Sans"/>
+                <a:ea typeface="Nimbus Sans"/>
+                <a:cs typeface="Nimbus Sans"/>
+              </a:defRPr>
+            </a:lvl5pPr>
+            <a:lvl6pPr algn="ctr">
+              <a:defRPr sz="2100" b="1">
+                <a:solidFill>
+                  <a:srgbClr val="BCC2C8"/>
+                </a:solidFill>
+                <a:latin typeface="Nimbus Sans"/>
+                <a:ea typeface="Nimbus Sans"/>
+                <a:cs typeface="Nimbus Sans"/>
+              </a:defRPr>
+            </a:lvl6pPr>
+            <a:lvl7pPr algn="ctr">
+              <a:defRPr sz="2100" b="1">
+                <a:solidFill>
+                  <a:srgbClr val="BCC2C8"/>
+                </a:solidFill>
+                <a:latin typeface="Nimbus Sans"/>
+                <a:ea typeface="Nimbus Sans"/>
+                <a:cs typeface="Nimbus Sans"/>
+              </a:defRPr>
+            </a:lvl7pPr>
+            <a:lvl8pPr algn="ctr">
+              <a:defRPr sz="2100" b="1">
+                <a:solidFill>
+                  <a:srgbClr val="BCC2C8"/>
+                </a:solidFill>
+                <a:latin typeface="Nimbus Sans"/>
+                <a:ea typeface="Nimbus Sans"/>
+                <a:cs typeface="Nimbus Sans"/>
+              </a:defRPr>
+            </a:lvl8pPr>
+            <a:lvl9pPr algn="ctr">
+              <a:defRPr sz="2100" b="1">
+                <a:solidFill>
+                  <a:srgbClr val="BCC2C8"/>
+                </a:solidFill>
+                <a:latin typeface="Nimbus Sans"/>
+                <a:ea typeface="Nimbus Sans"/>
+                <a:cs typeface="Nimbus Sans"/>
+              </a:defRPr>
+            </a:lvl9pPr>
+          </a:lstStyle>
+          <a:p xmlns:a="http://schemas.openxmlformats.org/drawingml/2006/main">
+            <a:pPr algn="ctr">
+              <a:defRPr sz="2100" b="1">
+                <a:solidFill>
+                  <a:srgbClr val="BCC2C8"/>
+                </a:solidFill>
+                <a:latin typeface="Nimbus Sans"/>
+                <a:ea typeface="Nimbus Sans"/>
+                <a:cs typeface="Nimbus Sans"/>
+              </a:defRPr>
+            </a:pPr>
+            <a:r>
+              <a:rPr sz="2100" b="1">
+                <a:solidFill>
+                  <a:srgbClr val="BCC2C8"/>
+                </a:solidFill>
+                <a:latin typeface="Nimbus Sans"/>
+                <a:ea typeface="Nimbus Sans"/>
+                <a:cs typeface="Nimbus Sans"/>
+              </a:rPr>
+              <a:t>scenari completati</a:t>
+            </a:r>
+          </a:p>
+          <a:p xmlns:a="http://schemas.openxmlformats.org/drawingml/2006/main">
+            <a:pPr algn="ctr">
+              <a:defRPr sz="2100" b="1">
+                <a:solidFill>
+                  <a:srgbClr val="BCC2C8"/>
+                </a:solidFill>
+                <a:latin typeface="Nimbus Sans"/>
+                <a:ea typeface="Nimbus Sans"/>
+                <a:cs typeface="Nimbus Sans"/>
+              </a:defRPr>
+            </a:pPr>
+            <a:r>
+              <a:rPr sz="2100" b="1">
+                <a:solidFill>
+                  <a:srgbClr val="BCC2C8"/>
+                </a:solidFill>
+                <a:latin typeface="Nimbus Sans"/>
+                <a:ea typeface="Nimbus Sans"/>
+                <a:cs typeface="Nimbus Sans"/>
+              </a:rPr>
+              <a:t>con verdetto atteso</a:t>
+            </a:r>
+          </a:p>
+        </p:txBody>
+      </p:sp>
+      <p:sp>
+        <p:nvSpPr>
+          <p:cNvPr id="48" name="f189">
+            <a:extLst xmlns:a="http://schemas.openxmlformats.org/drawingml/2006/main">
+              <a:ext uri="{FF2B5EF4-FFF2-40B4-BE49-F238E27FC236}">
+                <a16:creationId xmlns:a16="http://schemas.microsoft.com/office/drawing/2014/main" id="{51C27A74-1F2D-4863-866B-AB870A97AC79}"/>
+              </a:ext>
+            </a:extLst>
+          </p:cNvPr>
+          <p:cNvSpPr>
+            <a:spLocks xmlns:a="http://schemas.openxmlformats.org/drawingml/2006/main" noGrp="1"/>
+          </p:cNvSpPr>
+          <p:nvPr/>
+        </p:nvSpPr>
+        <p:spPr>
+          <a:xfrm xmlns:a="http://schemas.openxmlformats.org/drawingml/2006/main">
+            <a:off x="10572750" y="7105650"/>
+            <a:ext cx="3600450" cy="742950"/>
+          </a:xfrm>
+          <a:prstGeom xmlns:a="http://schemas.openxmlformats.org/drawingml/2006/main" prst="rect">
+            <a:avLst/>
+          </a:prstGeom>
+          <a:noFill xmlns:a="http://schemas.openxmlformats.org/drawingml/2006/main"/>
+          <a:ln xmlns:a="http://schemas.openxmlformats.org/drawingml/2006/main" w="0">
+            <a:noFill/>
+            <a:prstDash val="solid"/>
+          </a:ln>
+        </p:spPr>
+        <p:txBody>
+          <a:bodyPr xmlns:a="http://schemas.openxmlformats.org/drawingml/2006/main" wrap="none" lIns="0" tIns="0" rIns="0" bIns="0" anchor="t">
+            <a:noAutofit/>
+          </a:bodyPr>
+          <a:lstStyle xmlns:a="http://schemas.openxmlformats.org/drawingml/2006/main">
+            <a:defPPr algn="ctr">
+              <a:defRPr sz="2100" b="1">
+                <a:solidFill>
                   <a:srgbClr val="182536"/>
                 </a:solidFill>
                 <a:latin typeface="Nimbus Sans"/>
@@ -23773,10 +26303,1038 @@
     </p:spTree>
     <p:extLst>
       <p:ext uri="{BB962C8B-B14F-4D97-AF65-F5344CB8AC3E}">
-        <p14:creationId xmlns:p14="http://schemas.microsoft.com/office/powerpoint/2010/main" val="171307039"/>
+        <p14:creationId xmlns:p14="http://schemas.microsoft.com/office/powerpoint/2010/main" val="632023586"/>
       </p:ext>
     </p:extLst>
   </p:cSld>
+  <p:timing>
+    <p:tnLst>
+      <p:par>
+        <p:cTn id="1" dur="indefinite" restart="never" nodeType="tmRoot">
+          <p:childTnLst>
+            <p:seq concurrent="1" nextAc="seek">
+              <p:cTn id="2" dur="indefinite" nodeType="mainSeq">
+                <p:childTnLst>
+                  <p:par>
+                    <p:cTn id="3" fill="hold">
+                      <p:stCondLst>
+                        <p:cond delay="indefinite"/>
+                      </p:stCondLst>
+                      <p:childTnLst>
+                        <p:par>
+                          <p:cTn id="4" fill="hold">
+                            <p:stCondLst>
+                              <p:cond delay="0"/>
+                            </p:stCondLst>
+                            <p:childTnLst>
+                              <p:par>
+                                <p:cTn id="5" presetID="10" presetClass="exit" presetSubtype="0" fill="hold" grpId="0" nodeType="clickEffect">
+                                  <p:stCondLst>
+                                    <p:cond delay="0"/>
+                                  </p:stCondLst>
+                                  <p:childTnLst>
+                                    <p:animEffect transition="out" filter="fade">
+                                      <p:cBhvr>
+                                        <p:cTn id="6" dur="350" fill="hold"/>
+                                        <p:tgtEl>
+                                          <p:spTgt spid="7"/>
+                                        </p:tgtEl>
+                                      </p:cBhvr>
+                                    </p:animEffect>
+                                    <p:set>
+                                      <p:cBhvr>
+                                        <p:cTn id="7" dur="1" fill="hold">
+                                          <p:stCondLst>
+                                            <p:cond delay="350"/>
+                                          </p:stCondLst>
+                                        </p:cTn>
+                                        <p:tgtEl>
+                                          <p:spTgt spid="7"/>
+                                        </p:tgtEl>
+                                        <p:attrNameLst>
+                                          <p:attrName>style.visibility</p:attrName>
+                                        </p:attrNameLst>
+                                      </p:cBhvr>
+                                      <p:to>
+                                        <p:strVal val="hidden"/>
+                                      </p:to>
+                                    </p:set>
+                                  </p:childTnLst>
+                                </p:cTn>
+                              </p:par>
+                              <p:par>
+                                <p:cTn id="8" presetID="10" presetClass="exit" presetSubtype="0" fill="hold" grpId="0" nodeType="withEffect">
+                                  <p:stCondLst>
+                                    <p:cond delay="0"/>
+                                  </p:stCondLst>
+                                  <p:childTnLst>
+                                    <p:animEffect transition="out" filter="fade">
+                                      <p:cBhvr>
+                                        <p:cTn id="9" dur="350" fill="hold"/>
+                                        <p:tgtEl>
+                                          <p:spTgt spid="8"/>
+                                        </p:tgtEl>
+                                      </p:cBhvr>
+                                    </p:animEffect>
+                                    <p:set>
+                                      <p:cBhvr>
+                                        <p:cTn id="10" dur="1" fill="hold">
+                                          <p:stCondLst>
+                                            <p:cond delay="350"/>
+                                          </p:stCondLst>
+                                        </p:cTn>
+                                        <p:tgtEl>
+                                          <p:spTgt spid="8"/>
+                                        </p:tgtEl>
+                                        <p:attrNameLst>
+                                          <p:attrName>style.visibility</p:attrName>
+                                        </p:attrNameLst>
+                                      </p:cBhvr>
+                                      <p:to>
+                                        <p:strVal val="hidden"/>
+                                      </p:to>
+                                    </p:set>
+                                  </p:childTnLst>
+                                </p:cTn>
+                              </p:par>
+                              <p:par>
+                                <p:cTn id="11" presetID="10" presetClass="exit" presetSubtype="0" fill="hold" grpId="0" nodeType="withEffect">
+                                  <p:stCondLst>
+                                    <p:cond delay="0"/>
+                                  </p:stCondLst>
+                                  <p:childTnLst>
+                                    <p:animEffect transition="out" filter="fade">
+                                      <p:cBhvr>
+                                        <p:cTn id="12" dur="350" fill="hold"/>
+                                        <p:tgtEl>
+                                          <p:spTgt spid="11"/>
+                                        </p:tgtEl>
+                                      </p:cBhvr>
+                                    </p:animEffect>
+                                    <p:set>
+                                      <p:cBhvr>
+                                        <p:cTn id="13" dur="1" fill="hold">
+                                          <p:stCondLst>
+                                            <p:cond delay="350"/>
+                                          </p:stCondLst>
+                                        </p:cTn>
+                                        <p:tgtEl>
+                                          <p:spTgt spid="11"/>
+                                        </p:tgtEl>
+                                        <p:attrNameLst>
+                                          <p:attrName>style.visibility</p:attrName>
+                                        </p:attrNameLst>
+                                      </p:cBhvr>
+                                      <p:to>
+                                        <p:strVal val="hidden"/>
+                                      </p:to>
+                                    </p:set>
+                                  </p:childTnLst>
+                                </p:cTn>
+                              </p:par>
+                              <p:par>
+                                <p:cTn id="14" presetID="10" presetClass="exit" presetSubtype="0" fill="hold" grpId="0" nodeType="withEffect">
+                                  <p:stCondLst>
+                                    <p:cond delay="0"/>
+                                  </p:stCondLst>
+                                  <p:childTnLst>
+                                    <p:animEffect transition="out" filter="fade">
+                                      <p:cBhvr>
+                                        <p:cTn id="15" dur="350" fill="hold"/>
+                                        <p:tgtEl>
+                                          <p:spTgt spid="12"/>
+                                        </p:tgtEl>
+                                      </p:cBhvr>
+                                    </p:animEffect>
+                                    <p:set>
+                                      <p:cBhvr>
+                                        <p:cTn id="16" dur="1" fill="hold">
+                                          <p:stCondLst>
+                                            <p:cond delay="350"/>
+                                          </p:stCondLst>
+                                        </p:cTn>
+                                        <p:tgtEl>
+                                          <p:spTgt spid="12"/>
+                                        </p:tgtEl>
+                                        <p:attrNameLst>
+                                          <p:attrName>style.visibility</p:attrName>
+                                        </p:attrNameLst>
+                                      </p:cBhvr>
+                                      <p:to>
+                                        <p:strVal val="hidden"/>
+                                      </p:to>
+                                    </p:set>
+                                  </p:childTnLst>
+                                </p:cTn>
+                              </p:par>
+                              <p:par>
+                                <p:cTn id="17" presetID="10" presetClass="entr" presetSubtype="0" fill="hold" grpId="0" nodeType="withEffect">
+                                  <p:stCondLst>
+                                    <p:cond delay="0"/>
+                                  </p:stCondLst>
+                                  <p:childTnLst>
+                                    <p:animEffect transition="in" filter="fade">
+                                      <p:cBhvr>
+                                        <p:cTn id="18" dur="350" fill="hold"/>
+                                        <p:tgtEl>
+                                          <p:spTgt spid="13"/>
+                                        </p:tgtEl>
+                                      </p:cBhvr>
+                                    </p:animEffect>
+                                    <p:set>
+                                      <p:cBhvr>
+                                        <p:cTn id="19" dur="1" fill="hold">
+                                          <p:stCondLst>
+                                            <p:cond delay="0"/>
+                                          </p:stCondLst>
+                                        </p:cTn>
+                                        <p:tgtEl>
+                                          <p:spTgt spid="13"/>
+                                        </p:tgtEl>
+                                        <p:attrNameLst>
+                                          <p:attrName>style.visibility</p:attrName>
+                                        </p:attrNameLst>
+                                      </p:cBhvr>
+                                      <p:to>
+                                        <p:strVal val="visible"/>
+                                      </p:to>
+                                    </p:set>
+                                  </p:childTnLst>
+                                </p:cTn>
+                              </p:par>
+                              <p:par>
+                                <p:cTn id="20" presetID="10" presetClass="entr" presetSubtype="0" fill="hold" grpId="0" nodeType="withEffect">
+                                  <p:stCondLst>
+                                    <p:cond delay="0"/>
+                                  </p:stCondLst>
+                                  <p:childTnLst>
+                                    <p:animEffect transition="in" filter="fade">
+                                      <p:cBhvr>
+                                        <p:cTn id="21" dur="350" fill="hold"/>
+                                        <p:tgtEl>
+                                          <p:spTgt spid="14"/>
+                                        </p:tgtEl>
+                                      </p:cBhvr>
+                                    </p:animEffect>
+                                    <p:set>
+                                      <p:cBhvr>
+                                        <p:cTn id="22" dur="1" fill="hold">
+                                          <p:stCondLst>
+                                            <p:cond delay="0"/>
+                                          </p:stCondLst>
+                                        </p:cTn>
+                                        <p:tgtEl>
+                                          <p:spTgt spid="14"/>
+                                        </p:tgtEl>
+                                        <p:attrNameLst>
+                                          <p:attrName>style.visibility</p:attrName>
+                                        </p:attrNameLst>
+                                      </p:cBhvr>
+                                      <p:to>
+                                        <p:strVal val="visible"/>
+                                      </p:to>
+                                    </p:set>
+                                  </p:childTnLst>
+                                </p:cTn>
+                              </p:par>
+                              <p:par>
+                                <p:cTn id="23" presetID="10" presetClass="entr" presetSubtype="0" fill="hold" grpId="0" nodeType="withEffect">
+                                  <p:stCondLst>
+                                    <p:cond delay="0"/>
+                                  </p:stCondLst>
+                                  <p:childTnLst>
+                                    <p:animEffect transition="in" filter="fade">
+                                      <p:cBhvr>
+                                        <p:cTn id="24" dur="350" fill="hold"/>
+                                        <p:tgtEl>
+                                          <p:spTgt spid="15"/>
+                                        </p:tgtEl>
+                                      </p:cBhvr>
+                                    </p:animEffect>
+                                    <p:set>
+                                      <p:cBhvr>
+                                        <p:cTn id="25" dur="1" fill="hold">
+                                          <p:stCondLst>
+                                            <p:cond delay="0"/>
+                                          </p:stCondLst>
+                                        </p:cTn>
+                                        <p:tgtEl>
+                                          <p:spTgt spid="15"/>
+                                        </p:tgtEl>
+                                        <p:attrNameLst>
+                                          <p:attrName>style.visibility</p:attrName>
+                                        </p:attrNameLst>
+                                      </p:cBhvr>
+                                      <p:to>
+                                        <p:strVal val="visible"/>
+                                      </p:to>
+                                    </p:set>
+                                  </p:childTnLst>
+                                </p:cTn>
+                              </p:par>
+                              <p:par>
+                                <p:cTn id="26" presetID="10" presetClass="entr" presetSubtype="0" fill="hold" grpId="0" nodeType="withEffect">
+                                  <p:stCondLst>
+                                    <p:cond delay="0"/>
+                                  </p:stCondLst>
+                                  <p:childTnLst>
+                                    <p:animEffect transition="in" filter="fade">
+                                      <p:cBhvr>
+                                        <p:cTn id="27" dur="350" fill="hold"/>
+                                        <p:tgtEl>
+                                          <p:spTgt spid="16"/>
+                                        </p:tgtEl>
+                                      </p:cBhvr>
+                                    </p:animEffect>
+                                    <p:set>
+                                      <p:cBhvr>
+                                        <p:cTn id="28" dur="1" fill="hold">
+                                          <p:stCondLst>
+                                            <p:cond delay="0"/>
+                                          </p:stCondLst>
+                                        </p:cTn>
+                                        <p:tgtEl>
+                                          <p:spTgt spid="16"/>
+                                        </p:tgtEl>
+                                        <p:attrNameLst>
+                                          <p:attrName>style.visibility</p:attrName>
+                                        </p:attrNameLst>
+                                      </p:cBhvr>
+                                      <p:to>
+                                        <p:strVal val="visible"/>
+                                      </p:to>
+                                    </p:set>
+                                  </p:childTnLst>
+                                </p:cTn>
+                              </p:par>
+                              <p:par>
+                                <p:cTn id="29" presetID="10" presetClass="entr" presetSubtype="0" fill="hold" grpId="0" nodeType="withEffect">
+                                  <p:stCondLst>
+                                    <p:cond delay="0"/>
+                                  </p:stCondLst>
+                                  <p:childTnLst>
+                                    <p:animEffect transition="in" filter="fade">
+                                      <p:cBhvr>
+                                        <p:cTn id="30" dur="350" fill="hold"/>
+                                        <p:tgtEl>
+                                          <p:spTgt spid="17"/>
+                                        </p:tgtEl>
+                                      </p:cBhvr>
+                                    </p:animEffect>
+                                    <p:set>
+                                      <p:cBhvr>
+                                        <p:cTn id="31" dur="1" fill="hold">
+                                          <p:stCondLst>
+                                            <p:cond delay="0"/>
+                                          </p:stCondLst>
+                                        </p:cTn>
+                                        <p:tgtEl>
+                                          <p:spTgt spid="17"/>
+                                        </p:tgtEl>
+                                        <p:attrNameLst>
+                                          <p:attrName>style.visibility</p:attrName>
+                                        </p:attrNameLst>
+                                      </p:cBhvr>
+                                      <p:to>
+                                        <p:strVal val="visible"/>
+                                      </p:to>
+                                    </p:set>
+                                  </p:childTnLst>
+                                </p:cTn>
+                              </p:par>
+                              <p:par>
+                                <p:cTn id="32" presetID="10" presetClass="entr" presetSubtype="0" fill="hold" grpId="0" nodeType="withEffect">
+                                  <p:stCondLst>
+                                    <p:cond delay="0"/>
+                                  </p:stCondLst>
+                                  <p:childTnLst>
+                                    <p:animEffect transition="in" filter="fade">
+                                      <p:cBhvr>
+                                        <p:cTn id="33" dur="350" fill="hold"/>
+                                        <p:tgtEl>
+                                          <p:spTgt spid="18"/>
+                                        </p:tgtEl>
+                                      </p:cBhvr>
+                                    </p:animEffect>
+                                    <p:set>
+                                      <p:cBhvr>
+                                        <p:cTn id="34" dur="1" fill="hold">
+                                          <p:stCondLst>
+                                            <p:cond delay="0"/>
+                                          </p:stCondLst>
+                                        </p:cTn>
+                                        <p:tgtEl>
+                                          <p:spTgt spid="18"/>
+                                        </p:tgtEl>
+                                        <p:attrNameLst>
+                                          <p:attrName>style.visibility</p:attrName>
+                                        </p:attrNameLst>
+                                      </p:cBhvr>
+                                      <p:to>
+                                        <p:strVal val="visible"/>
+                                      </p:to>
+                                    </p:set>
+                                  </p:childTnLst>
+                                </p:cTn>
+                              </p:par>
+                              <p:par>
+                                <p:cTn id="35" presetID="10" presetClass="exit" presetSubtype="0" fill="hold" grpId="0" nodeType="withEffect">
+                                  <p:stCondLst>
+                                    <p:cond delay="0"/>
+                                  </p:stCondLst>
+                                  <p:childTnLst>
+                                    <p:animEffect transition="out" filter="fade">
+                                      <p:cBhvr>
+                                        <p:cTn id="36" dur="350" fill="hold"/>
+                                        <p:tgtEl>
+                                          <p:spTgt spid="21"/>
+                                        </p:tgtEl>
+                                      </p:cBhvr>
+                                    </p:animEffect>
+                                    <p:set>
+                                      <p:cBhvr>
+                                        <p:cTn id="37" dur="1" fill="hold">
+                                          <p:stCondLst>
+                                            <p:cond delay="350"/>
+                                          </p:stCondLst>
+                                        </p:cTn>
+                                        <p:tgtEl>
+                                          <p:spTgt spid="21"/>
+                                        </p:tgtEl>
+                                        <p:attrNameLst>
+                                          <p:attrName>style.visibility</p:attrName>
+                                        </p:attrNameLst>
+                                      </p:cBhvr>
+                                      <p:to>
+                                        <p:strVal val="hidden"/>
+                                      </p:to>
+                                    </p:set>
+                                  </p:childTnLst>
+                                </p:cTn>
+                              </p:par>
+                              <p:par>
+                                <p:cTn id="38" presetID="10" presetClass="exit" presetSubtype="0" fill="hold" grpId="0" nodeType="withEffect">
+                                  <p:stCondLst>
+                                    <p:cond delay="0"/>
+                                  </p:stCondLst>
+                                  <p:childTnLst>
+                                    <p:animEffect transition="out" filter="fade">
+                                      <p:cBhvr>
+                                        <p:cTn id="39" dur="350" fill="hold"/>
+                                        <p:tgtEl>
+                                          <p:spTgt spid="22"/>
+                                        </p:tgtEl>
+                                      </p:cBhvr>
+                                    </p:animEffect>
+                                    <p:set>
+                                      <p:cBhvr>
+                                        <p:cTn id="40" dur="1" fill="hold">
+                                          <p:stCondLst>
+                                            <p:cond delay="350"/>
+                                          </p:stCondLst>
+                                        </p:cTn>
+                                        <p:tgtEl>
+                                          <p:spTgt spid="22"/>
+                                        </p:tgtEl>
+                                        <p:attrNameLst>
+                                          <p:attrName>style.visibility</p:attrName>
+                                        </p:attrNameLst>
+                                      </p:cBhvr>
+                                      <p:to>
+                                        <p:strVal val="hidden"/>
+                                      </p:to>
+                                    </p:set>
+                                  </p:childTnLst>
+                                </p:cTn>
+                              </p:par>
+                              <p:par>
+                                <p:cTn id="41" presetID="10" presetClass="exit" presetSubtype="0" fill="hold" grpId="0" nodeType="withEffect">
+                                  <p:stCondLst>
+                                    <p:cond delay="0"/>
+                                  </p:stCondLst>
+                                  <p:childTnLst>
+                                    <p:animEffect transition="out" filter="fade">
+                                      <p:cBhvr>
+                                        <p:cTn id="42" dur="350" fill="hold"/>
+                                        <p:tgtEl>
+                                          <p:spTgt spid="24"/>
+                                        </p:tgtEl>
+                                      </p:cBhvr>
+                                    </p:animEffect>
+                                    <p:set>
+                                      <p:cBhvr>
+                                        <p:cTn id="43" dur="1" fill="hold">
+                                          <p:stCondLst>
+                                            <p:cond delay="350"/>
+                                          </p:stCondLst>
+                                        </p:cTn>
+                                        <p:tgtEl>
+                                          <p:spTgt spid="24"/>
+                                        </p:tgtEl>
+                                        <p:attrNameLst>
+                                          <p:attrName>style.visibility</p:attrName>
+                                        </p:attrNameLst>
+                                      </p:cBhvr>
+                                      <p:to>
+                                        <p:strVal val="hidden"/>
+                                      </p:to>
+                                    </p:set>
+                                  </p:childTnLst>
+                                </p:cTn>
+                              </p:par>
+                              <p:par>
+                                <p:cTn id="44" presetID="10" presetClass="exit" presetSubtype="0" fill="hold" grpId="0" nodeType="withEffect">
+                                  <p:stCondLst>
+                                    <p:cond delay="0"/>
+                                  </p:stCondLst>
+                                  <p:childTnLst>
+                                    <p:animEffect transition="out" filter="fade">
+                                      <p:cBhvr>
+                                        <p:cTn id="45" dur="350" fill="hold"/>
+                                        <p:tgtEl>
+                                          <p:spTgt spid="25"/>
+                                        </p:tgtEl>
+                                      </p:cBhvr>
+                                    </p:animEffect>
+                                    <p:set>
+                                      <p:cBhvr>
+                                        <p:cTn id="46" dur="1" fill="hold">
+                                          <p:stCondLst>
+                                            <p:cond delay="350"/>
+                                          </p:stCondLst>
+                                        </p:cTn>
+                                        <p:tgtEl>
+                                          <p:spTgt spid="25"/>
+                                        </p:tgtEl>
+                                        <p:attrNameLst>
+                                          <p:attrName>style.visibility</p:attrName>
+                                        </p:attrNameLst>
+                                      </p:cBhvr>
+                                      <p:to>
+                                        <p:strVal val="hidden"/>
+                                      </p:to>
+                                    </p:set>
+                                  </p:childTnLst>
+                                </p:cTn>
+                              </p:par>
+                              <p:par>
+                                <p:cTn id="47" presetID="10" presetClass="exit" presetSubtype="0" fill="hold" grpId="0" nodeType="withEffect">
+                                  <p:stCondLst>
+                                    <p:cond delay="0"/>
+                                  </p:stCondLst>
+                                  <p:childTnLst>
+                                    <p:animEffect transition="out" filter="fade">
+                                      <p:cBhvr>
+                                        <p:cTn id="48" dur="350" fill="hold"/>
+                                        <p:tgtEl>
+                                          <p:spTgt spid="26"/>
+                                        </p:tgtEl>
+                                      </p:cBhvr>
+                                    </p:animEffect>
+                                    <p:set>
+                                      <p:cBhvr>
+                                        <p:cTn id="49" dur="1" fill="hold">
+                                          <p:stCondLst>
+                                            <p:cond delay="350"/>
+                                          </p:stCondLst>
+                                        </p:cTn>
+                                        <p:tgtEl>
+                                          <p:spTgt spid="26"/>
+                                        </p:tgtEl>
+                                        <p:attrNameLst>
+                                          <p:attrName>style.visibility</p:attrName>
+                                        </p:attrNameLst>
+                                      </p:cBhvr>
+                                      <p:to>
+                                        <p:strVal val="hidden"/>
+                                      </p:to>
+                                    </p:set>
+                                  </p:childTnLst>
+                                </p:cTn>
+                              </p:par>
+                              <p:par>
+                                <p:cTn id="50" presetID="10" presetClass="entr" presetSubtype="0" fill="hold" grpId="0" nodeType="withEffect">
+                                  <p:stCondLst>
+                                    <p:cond delay="0"/>
+                                  </p:stCondLst>
+                                  <p:childTnLst>
+                                    <p:animEffect transition="in" filter="fade">
+                                      <p:cBhvr>
+                                        <p:cTn id="51" dur="350" fill="hold"/>
+                                        <p:tgtEl>
+                                          <p:spTgt spid="27"/>
+                                        </p:tgtEl>
+                                      </p:cBhvr>
+                                    </p:animEffect>
+                                    <p:set>
+                                      <p:cBhvr>
+                                        <p:cTn id="52" dur="1" fill="hold">
+                                          <p:stCondLst>
+                                            <p:cond delay="0"/>
+                                          </p:stCondLst>
+                                        </p:cTn>
+                                        <p:tgtEl>
+                                          <p:spTgt spid="27"/>
+                                        </p:tgtEl>
+                                        <p:attrNameLst>
+                                          <p:attrName>style.visibility</p:attrName>
+                                        </p:attrNameLst>
+                                      </p:cBhvr>
+                                      <p:to>
+                                        <p:strVal val="visible"/>
+                                      </p:to>
+                                    </p:set>
+                                  </p:childTnLst>
+                                </p:cTn>
+                              </p:par>
+                              <p:par>
+                                <p:cTn id="53" presetID="10" presetClass="entr" presetSubtype="0" fill="hold" grpId="0" nodeType="withEffect">
+                                  <p:stCondLst>
+                                    <p:cond delay="0"/>
+                                  </p:stCondLst>
+                                  <p:childTnLst>
+                                    <p:animEffect transition="in" filter="fade">
+                                      <p:cBhvr>
+                                        <p:cTn id="54" dur="350" fill="hold"/>
+                                        <p:tgtEl>
+                                          <p:spTgt spid="28"/>
+                                        </p:tgtEl>
+                                      </p:cBhvr>
+                                    </p:animEffect>
+                                    <p:set>
+                                      <p:cBhvr>
+                                        <p:cTn id="55" dur="1" fill="hold">
+                                          <p:stCondLst>
+                                            <p:cond delay="0"/>
+                                          </p:stCondLst>
+                                        </p:cTn>
+                                        <p:tgtEl>
+                                          <p:spTgt spid="28"/>
+                                        </p:tgtEl>
+                                        <p:attrNameLst>
+                                          <p:attrName>style.visibility</p:attrName>
+                                        </p:attrNameLst>
+                                      </p:cBhvr>
+                                      <p:to>
+                                        <p:strVal val="visible"/>
+                                      </p:to>
+                                    </p:set>
+                                  </p:childTnLst>
+                                </p:cTn>
+                              </p:par>
+                              <p:par>
+                                <p:cTn id="56" presetID="10" presetClass="entr" presetSubtype="0" fill="hold" grpId="0" nodeType="withEffect">
+                                  <p:stCondLst>
+                                    <p:cond delay="0"/>
+                                  </p:stCondLst>
+                                  <p:childTnLst>
+                                    <p:animEffect transition="in" filter="fade">
+                                      <p:cBhvr>
+                                        <p:cTn id="57" dur="350" fill="hold"/>
+                                        <p:tgtEl>
+                                          <p:spTgt spid="29"/>
+                                        </p:tgtEl>
+                                      </p:cBhvr>
+                                    </p:animEffect>
+                                    <p:set>
+                                      <p:cBhvr>
+                                        <p:cTn id="58" dur="1" fill="hold">
+                                          <p:stCondLst>
+                                            <p:cond delay="0"/>
+                                          </p:stCondLst>
+                                        </p:cTn>
+                                        <p:tgtEl>
+                                          <p:spTgt spid="29"/>
+                                        </p:tgtEl>
+                                        <p:attrNameLst>
+                                          <p:attrName>style.visibility</p:attrName>
+                                        </p:attrNameLst>
+                                      </p:cBhvr>
+                                      <p:to>
+                                        <p:strVal val="visible"/>
+                                      </p:to>
+                                    </p:set>
+                                  </p:childTnLst>
+                                </p:cTn>
+                              </p:par>
+                              <p:par>
+                                <p:cTn id="59" presetID="10" presetClass="entr" presetSubtype="0" fill="hold" grpId="0" nodeType="withEffect">
+                                  <p:stCondLst>
+                                    <p:cond delay="0"/>
+                                  </p:stCondLst>
+                                  <p:childTnLst>
+                                    <p:animEffect transition="in" filter="fade">
+                                      <p:cBhvr>
+                                        <p:cTn id="60" dur="350" fill="hold"/>
+                                        <p:tgtEl>
+                                          <p:spTgt spid="39"/>
+                                        </p:tgtEl>
+                                      </p:cBhvr>
+                                    </p:animEffect>
+                                    <p:set>
+                                      <p:cBhvr>
+                                        <p:cTn id="61" dur="1" fill="hold">
+                                          <p:stCondLst>
+                                            <p:cond delay="0"/>
+                                          </p:stCondLst>
+                                        </p:cTn>
+                                        <p:tgtEl>
+                                          <p:spTgt spid="39"/>
+                                        </p:tgtEl>
+                                        <p:attrNameLst>
+                                          <p:attrName>style.visibility</p:attrName>
+                                        </p:attrNameLst>
+                                      </p:cBhvr>
+                                      <p:to>
+                                        <p:strVal val="visible"/>
+                                      </p:to>
+                                    </p:set>
+                                  </p:childTnLst>
+                                </p:cTn>
+                              </p:par>
+                              <p:par>
+                                <p:cTn id="62" presetID="10" presetClass="entr" presetSubtype="0" fill="hold" grpId="0" nodeType="withEffect">
+                                  <p:stCondLst>
+                                    <p:cond delay="0"/>
+                                  </p:stCondLst>
+                                  <p:childTnLst>
+                                    <p:animEffect transition="in" filter="fade">
+                                      <p:cBhvr>
+                                        <p:cTn id="63" dur="350" fill="hold"/>
+                                        <p:tgtEl>
+                                          <p:spTgt spid="40"/>
+                                        </p:tgtEl>
+                                      </p:cBhvr>
+                                    </p:animEffect>
+                                    <p:set>
+                                      <p:cBhvr>
+                                        <p:cTn id="64" dur="1" fill="hold">
+                                          <p:stCondLst>
+                                            <p:cond delay="0"/>
+                                          </p:stCondLst>
+                                        </p:cTn>
+                                        <p:tgtEl>
+                                          <p:spTgt spid="40"/>
+                                        </p:tgtEl>
+                                        <p:attrNameLst>
+                                          <p:attrName>style.visibility</p:attrName>
+                                        </p:attrNameLst>
+                                      </p:cBhvr>
+                                      <p:to>
+                                        <p:strVal val="visible"/>
+                                      </p:to>
+                                    </p:set>
+                                  </p:childTnLst>
+                                </p:cTn>
+                              </p:par>
+                              <p:par>
+                                <p:cTn id="65" presetID="10" presetClass="entr" presetSubtype="0" fill="hold" grpId="0" nodeType="withEffect">
+                                  <p:stCondLst>
+                                    <p:cond delay="0"/>
+                                  </p:stCondLst>
+                                  <p:childTnLst>
+                                    <p:animEffect transition="in" filter="fade">
+                                      <p:cBhvr>
+                                        <p:cTn id="66" dur="350" fill="hold"/>
+                                        <p:tgtEl>
+                                          <p:spTgt spid="41"/>
+                                        </p:tgtEl>
+                                      </p:cBhvr>
+                                    </p:animEffect>
+                                    <p:set>
+                                      <p:cBhvr>
+                                        <p:cTn id="67" dur="1" fill="hold">
+                                          <p:stCondLst>
+                                            <p:cond delay="0"/>
+                                          </p:stCondLst>
+                                        </p:cTn>
+                                        <p:tgtEl>
+                                          <p:spTgt spid="41"/>
+                                        </p:tgtEl>
+                                        <p:attrNameLst>
+                                          <p:attrName>style.visibility</p:attrName>
+                                        </p:attrNameLst>
+                                      </p:cBhvr>
+                                      <p:to>
+                                        <p:strVal val="visible"/>
+                                      </p:to>
+                                    </p:set>
+                                  </p:childTnLst>
+                                </p:cTn>
+                              </p:par>
+                              <p:par>
+                                <p:cTn id="68" presetID="10" presetClass="entr" presetSubtype="0" fill="hold" grpId="0" nodeType="withEffect">
+                                  <p:stCondLst>
+                                    <p:cond delay="0"/>
+                                  </p:stCondLst>
+                                  <p:childTnLst>
+                                    <p:animEffect transition="in" filter="fade">
+                                      <p:cBhvr>
+                                        <p:cTn id="69" dur="350" fill="hold"/>
+                                        <p:tgtEl>
+                                          <p:spTgt spid="42"/>
+                                        </p:tgtEl>
+                                      </p:cBhvr>
+                                    </p:animEffect>
+                                    <p:set>
+                                      <p:cBhvr>
+                                        <p:cTn id="70" dur="1" fill="hold">
+                                          <p:stCondLst>
+                                            <p:cond delay="0"/>
+                                          </p:stCondLst>
+                                        </p:cTn>
+                                        <p:tgtEl>
+                                          <p:spTgt spid="42"/>
+                                        </p:tgtEl>
+                                        <p:attrNameLst>
+                                          <p:attrName>style.visibility</p:attrName>
+                                        </p:attrNameLst>
+                                      </p:cBhvr>
+                                      <p:to>
+                                        <p:strVal val="visible"/>
+                                      </p:to>
+                                    </p:set>
+                                  </p:childTnLst>
+                                </p:cTn>
+                              </p:par>
+                              <p:par>
+                                <p:cTn id="71" presetID="10" presetClass="entr" presetSubtype="0" fill="hold" grpId="0" nodeType="withEffect">
+                                  <p:stCondLst>
+                                    <p:cond delay="0"/>
+                                  </p:stCondLst>
+                                  <p:childTnLst>
+                                    <p:animEffect transition="in" filter="fade">
+                                      <p:cBhvr>
+                                        <p:cTn id="72" dur="350" fill="hold"/>
+                                        <p:tgtEl>
+                                          <p:spTgt spid="43"/>
+                                        </p:tgtEl>
+                                      </p:cBhvr>
+                                    </p:animEffect>
+                                    <p:set>
+                                      <p:cBhvr>
+                                        <p:cTn id="73" dur="1" fill="hold">
+                                          <p:stCondLst>
+                                            <p:cond delay="0"/>
+                                          </p:stCondLst>
+                                        </p:cTn>
+                                        <p:tgtEl>
+                                          <p:spTgt spid="43"/>
+                                        </p:tgtEl>
+                                        <p:attrNameLst>
+                                          <p:attrName>style.visibility</p:attrName>
+                                        </p:attrNameLst>
+                                      </p:cBhvr>
+                                      <p:to>
+                                        <p:strVal val="visible"/>
+                                      </p:to>
+                                    </p:set>
+                                  </p:childTnLst>
+                                </p:cTn>
+                              </p:par>
+                              <p:par>
+                                <p:cTn id="74" presetID="10" presetClass="entr" presetSubtype="0" fill="hold" grpId="0" nodeType="withEffect">
+                                  <p:stCondLst>
+                                    <p:cond delay="0"/>
+                                  </p:stCondLst>
+                                  <p:childTnLst>
+                                    <p:animEffect transition="in" filter="fade">
+                                      <p:cBhvr>
+                                        <p:cTn id="75" dur="350" fill="hold"/>
+                                        <p:tgtEl>
+                                          <p:spTgt spid="44"/>
+                                        </p:tgtEl>
+                                      </p:cBhvr>
+                                    </p:animEffect>
+                                    <p:set>
+                                      <p:cBhvr>
+                                        <p:cTn id="76" dur="1" fill="hold">
+                                          <p:stCondLst>
+                                            <p:cond delay="0"/>
+                                          </p:stCondLst>
+                                        </p:cTn>
+                                        <p:tgtEl>
+                                          <p:spTgt spid="44"/>
+                                        </p:tgtEl>
+                                        <p:attrNameLst>
+                                          <p:attrName>style.visibility</p:attrName>
+                                        </p:attrNameLst>
+                                      </p:cBhvr>
+                                      <p:to>
+                                        <p:strVal val="visible"/>
+                                      </p:to>
+                                    </p:set>
+                                  </p:childTnLst>
+                                </p:cTn>
+                              </p:par>
+                              <p:par>
+                                <p:cTn id="77" presetID="10" presetClass="entr" presetSubtype="0" fill="hold" grpId="0" nodeType="withEffect">
+                                  <p:stCondLst>
+                                    <p:cond delay="0"/>
+                                  </p:stCondLst>
+                                  <p:childTnLst>
+                                    <p:animEffect transition="in" filter="fade">
+                                      <p:cBhvr>
+                                        <p:cTn id="78" dur="350" fill="hold"/>
+                                        <p:tgtEl>
+                                          <p:spTgt spid="45"/>
+                                        </p:tgtEl>
+                                      </p:cBhvr>
+                                    </p:animEffect>
+                                    <p:set>
+                                      <p:cBhvr>
+                                        <p:cTn id="79" dur="1" fill="hold">
+                                          <p:stCondLst>
+                                            <p:cond delay="0"/>
+                                          </p:stCondLst>
+                                        </p:cTn>
+                                        <p:tgtEl>
+                                          <p:spTgt spid="45"/>
+                                        </p:tgtEl>
+                                        <p:attrNameLst>
+                                          <p:attrName>style.visibility</p:attrName>
+                                        </p:attrNameLst>
+                                      </p:cBhvr>
+                                      <p:to>
+                                        <p:strVal val="visible"/>
+                                      </p:to>
+                                    </p:set>
+                                  </p:childTnLst>
+                                </p:cTn>
+                              </p:par>
+                              <p:par>
+                                <p:cTn id="80" presetID="10" presetClass="entr" presetSubtype="0" fill="hold" grpId="0" nodeType="withEffect">
+                                  <p:stCondLst>
+                                    <p:cond delay="0"/>
+                                  </p:stCondLst>
+                                  <p:childTnLst>
+                                    <p:animEffect transition="in" filter="fade">
+                                      <p:cBhvr>
+                                        <p:cTn id="81" dur="350" fill="hold"/>
+                                        <p:tgtEl>
+                                          <p:spTgt spid="46"/>
+                                        </p:tgtEl>
+                                      </p:cBhvr>
+                                    </p:animEffect>
+                                    <p:set>
+                                      <p:cBhvr>
+                                        <p:cTn id="82" dur="1" fill="hold">
+                                          <p:stCondLst>
+                                            <p:cond delay="0"/>
+                                          </p:stCondLst>
+                                        </p:cTn>
+                                        <p:tgtEl>
+                                          <p:spTgt spid="46"/>
+                                        </p:tgtEl>
+                                        <p:attrNameLst>
+                                          <p:attrName>style.visibility</p:attrName>
+                                        </p:attrNameLst>
+                                      </p:cBhvr>
+                                      <p:to>
+                                        <p:strVal val="visible"/>
+                                      </p:to>
+                                    </p:set>
+                                  </p:childTnLst>
+                                </p:cTn>
+                              </p:par>
+                              <p:par>
+                                <p:cTn id="83" presetID="10" presetClass="entr" presetSubtype="0" fill="hold" grpId="0" nodeType="withEffect">
+                                  <p:stCondLst>
+                                    <p:cond delay="0"/>
+                                  </p:stCondLst>
+                                  <p:childTnLst>
+                                    <p:animEffect transition="in" filter="fade">
+                                      <p:cBhvr>
+                                        <p:cTn id="84" dur="350" fill="hold"/>
+                                        <p:tgtEl>
+                                          <p:spTgt spid="47"/>
+                                        </p:tgtEl>
+                                      </p:cBhvr>
+                                    </p:animEffect>
+                                    <p:set>
+                                      <p:cBhvr>
+                                        <p:cTn id="85" dur="1" fill="hold">
+                                          <p:stCondLst>
+                                            <p:cond delay="0"/>
+                                          </p:stCondLst>
+                                        </p:cTn>
+                                        <p:tgtEl>
+                                          <p:spTgt spid="47"/>
+                                        </p:tgtEl>
+                                        <p:attrNameLst>
+                                          <p:attrName>style.visibility</p:attrName>
+                                        </p:attrNameLst>
+                                      </p:cBhvr>
+                                      <p:to>
+                                        <p:strVal val="visible"/>
+                                      </p:to>
+                                    </p:set>
+                                  </p:childTnLst>
+                                </p:cTn>
+                              </p:par>
+                              <p:par>
+                                <p:cTn id="86" presetID="10" presetClass="entr" presetSubtype="0" fill="hold" grpId="0" nodeType="withEffect">
+                                  <p:stCondLst>
+                                    <p:cond delay="0"/>
+                                  </p:stCondLst>
+                                  <p:childTnLst>
+                                    <p:animEffect transition="in" filter="fade">
+                                      <p:cBhvr>
+                                        <p:cTn id="87" dur="350" fill="hold"/>
+                                        <p:tgtEl>
+                                          <p:spTgt spid="48"/>
+                                        </p:tgtEl>
+                                      </p:cBhvr>
+                                    </p:animEffect>
+                                    <p:set>
+                                      <p:cBhvr>
+                                        <p:cTn id="88" dur="1" fill="hold">
+                                          <p:stCondLst>
+                                            <p:cond delay="0"/>
+                                          </p:stCondLst>
+                                        </p:cTn>
+                                        <p:tgtEl>
+                                          <p:spTgt spid="48"/>
+                                        </p:tgtEl>
+                                        <p:attrNameLst>
+                                          <p:attrName>style.visibility</p:attrName>
+                                        </p:attrNameLst>
+                                      </p:cBhvr>
+                                      <p:to>
+                                        <p:strVal val="visible"/>
+                                      </p:to>
+                                    </p:set>
+                                  </p:childTnLst>
+                                </p:cTn>
+                              </p:par>
+                            </p:childTnLst>
+                          </p:cTn>
+                        </p:par>
+                      </p:childTnLst>
+                    </p:cTn>
+                  </p:par>
+                </p:childTnLst>
+              </p:cTn>
+              <p:prevCondLst>
+                <p:cond evt="onPrev" delay="0">
+                  <p:tgtEl>
+                    <p:sldTgt/>
+                  </p:tgtEl>
+                </p:cond>
+              </p:prevCondLst>
+              <p:nextCondLst>
+                <p:cond evt="onNext" delay="0">
+                  <p:tgtEl>
+                    <p:sldTgt/>
+                  </p:tgtEl>
+                </p:cond>
+              </p:nextCondLst>
+            </p:seq>
+          </p:childTnLst>
+        </p:cTn>
+      </p:par>
+    </p:tnLst>
+  </p:timing>
 </p:sld>
 </file>
 

--- a/5g-thesis-presentation-5min/tesi-5min.pptx
+++ b/5g-thesis-presentation-5min/tesi-5min.pptx
@@ -2,19 +2,19 @@
 <file path=ppt/presentation.xml><?xml version="1.0" encoding="utf-8"?>
 <p:presentation xmlns:p="http://schemas.openxmlformats.org/presentationml/2006/main">
   <p:sldMasterIdLst>
-    <p:sldMasterId xmlns:r="http://schemas.openxmlformats.org/officeDocument/2006/relationships" id="2147483648" r:id="R2ca2d8a7bc7d4b38"/>
+    <p:sldMasterId xmlns:r="http://schemas.openxmlformats.org/officeDocument/2006/relationships" id="2147483648" r:id="Rc9a03ea16857466e"/>
   </p:sldMasterIdLst>
   <p:notesMasterIdLst>
-    <p:notesMasterId xmlns:r="http://schemas.openxmlformats.org/officeDocument/2006/relationships" r:id="R55425d0d98b84033"/>
+    <p:notesMasterId xmlns:r="http://schemas.openxmlformats.org/officeDocument/2006/relationships" r:id="R335d0ebf525a4447"/>
   </p:notesMasterIdLst>
   <p:sldIdLst>
-    <p:sldId xmlns:r="http://schemas.openxmlformats.org/officeDocument/2006/relationships" id="256" r:id="R90090369c0de4471"/>
-    <p:sldId xmlns:r="http://schemas.openxmlformats.org/officeDocument/2006/relationships" id="257" r:id="R229d8e9c322247ad"/>
-    <p:sldId xmlns:r="http://schemas.openxmlformats.org/officeDocument/2006/relationships" id="258" r:id="R59ae73be39254184"/>
-    <p:sldId xmlns:r="http://schemas.openxmlformats.org/officeDocument/2006/relationships" id="259" r:id="R77fe9015c59a4d1b"/>
-    <p:sldId xmlns:r="http://schemas.openxmlformats.org/officeDocument/2006/relationships" id="260" r:id="R768286205e0141cf"/>
-    <p:sldId xmlns:r="http://schemas.openxmlformats.org/officeDocument/2006/relationships" id="261" r:id="R2cd8f3f5fa064c5d"/>
-    <p:sldId xmlns:r="http://schemas.openxmlformats.org/officeDocument/2006/relationships" id="262" r:id="R4dd26d0b3eaa4406"/>
+    <p:sldId xmlns:r="http://schemas.openxmlformats.org/officeDocument/2006/relationships" id="256" r:id="R07fce34d24e54e88"/>
+    <p:sldId xmlns:r="http://schemas.openxmlformats.org/officeDocument/2006/relationships" id="257" r:id="Rf943c923a7774e50"/>
+    <p:sldId xmlns:r="http://schemas.openxmlformats.org/officeDocument/2006/relationships" id="258" r:id="Re7a983aa8876476e"/>
+    <p:sldId xmlns:r="http://schemas.openxmlformats.org/officeDocument/2006/relationships" id="259" r:id="Rdd822fe2b47d4d43"/>
+    <p:sldId xmlns:r="http://schemas.openxmlformats.org/officeDocument/2006/relationships" id="260" r:id="Ref38538bd830463a"/>
+    <p:sldId xmlns:r="http://schemas.openxmlformats.org/officeDocument/2006/relationships" id="261" r:id="R2954225013c747d4"/>
+    <p:sldId xmlns:r="http://schemas.openxmlformats.org/officeDocument/2006/relationships" id="262" r:id="R8f5c574976534372"/>
   </p:sldIdLst>
   <p:sldSz cx="15240000" cy="8572500"/>
   <p:notesSz cx="6858000" cy="9144000"/>
@@ -1053,7 +1053,7 @@
           <a:lstStyle xmlns:a="http://schemas.openxmlformats.org/drawingml/2006/main"/>
           <a:p xmlns:a="http://schemas.openxmlformats.org/drawingml/2006/main">
             <a:r>
-              <a:t>[Prima fase: baseline in evidenza. Un clic passa alla seconda fase: mutazione in evidenza. DSL e pipeline restano sempre attivi.] Per valutare la sensibilità del sistema ho introdotto modifiche controllate nelle catture. Il mutatore è separato dalla pipeline: riceve la PCAP originale e le evidenze del report baseline, individua i dati da modificare e produce la PCAP mutata. Questa torna nello stesso sistema di verifica, con la stessa DSL. Il confronto dei risultati deve corrispondere alla modifica introdotta. Nei 13 scenari completati ho ottenuto tutti i verdetti attesi. Gli esempi mostrano il cambio di stato NRF da HTTP 200 a 403, la violazione dell’intervallo temporale nel caso AMF A e la rimozione degli F-TEID disponibili per la verifica UPF. In quest’ultimo esperimento sono state rimosse le risposte PFCP rilevanti, producendo INCONCLUSIVE.</a:t>
+              <a:t>[Tre fasi con due clic: A baseline, B generazione della PCAP mutata dal motore, C verifica della mutazione. Gli esempi a destra restano sempre visibili. DSL e pipeline sono in evidenza nelle fasi A e C.] Per valutare la sensibilità del sistema ho introdotto modifiche controllate nelle catture. Il mutatore è separato dalla pipeline: riceve la PCAP originale e le evidenze del report baseline, individua i dati da modificare e produce la PCAP mutata. Questa torna nello stesso sistema di verifica, con la stessa DSL. Il confronto dei risultati deve corrispondere alla modifica introdotta. Nei 13 scenari completati ho ottenuto tutti i verdetti attesi. Gli esempi mostrano il cambio di stato NRF da HTTP 200 a 403, la violazione dell’intervallo temporale nel caso AMF A e la rimozione degli F-TEID disponibili per la verifica UPF. In quest’ultimo esperimento sono state rimosse le risposte PFCP rilevanti, producendo INCONCLUSIVE.</a:t>
             </a:r>
           </a:p>
           <a:p xmlns:a="http://schemas.openxmlformats.org/drawingml/2006/main">
@@ -1135,7 +1135,7 @@
           <p:cNvPr id="3" name="Title">
             <a:extLst xmlns:a="http://schemas.openxmlformats.org/drawingml/2006/main">
               <a:ext uri="{FF2B5EF4-FFF2-40B4-BE49-F238E27FC236}">
-                <a16:creationId xmlns:a16="http://schemas.microsoft.com/office/drawing/2014/main" id="{E4349258-73DC-4F40-B220-529F8B7A1DAA}"/>
+                <a16:creationId xmlns:a16="http://schemas.microsoft.com/office/drawing/2014/main" id="{EBEC20B4-2969-41EE-8B37-77440FF5B476}"/>
               </a:ext>
             </a:extLst>
           </p:cNvPr>
@@ -1364,7 +1364,7 @@
           <p:cNvPr id="2" name="Subtitle">
             <a:extLst xmlns:a="http://schemas.openxmlformats.org/drawingml/2006/main">
               <a:ext uri="{FF2B5EF4-FFF2-40B4-BE49-F238E27FC236}">
-                <a16:creationId xmlns:a16="http://schemas.microsoft.com/office/drawing/2014/main" id="{4AFFB083-48F1-4F74-9DB1-5945E00F92C4}"/>
+                <a16:creationId xmlns:a16="http://schemas.microsoft.com/office/drawing/2014/main" id="{255CE1B1-00FB-41A7-8F7F-1FA0754EA09B}"/>
               </a:ext>
             </a:extLst>
           </p:cNvPr>
@@ -1610,7 +1610,7 @@
           <p:cNvPr id="2" name="Section title">
             <a:extLst xmlns:a="http://schemas.openxmlformats.org/drawingml/2006/main">
               <a:ext uri="{FF2B5EF4-FFF2-40B4-BE49-F238E27FC236}">
-                <a16:creationId xmlns:a16="http://schemas.microsoft.com/office/drawing/2014/main" id="{6637C521-8648-4AE8-9BF5-539F81868292}"/>
+                <a16:creationId xmlns:a16="http://schemas.microsoft.com/office/drawing/2014/main" id="{90B0E8C9-A108-4C2C-8DD8-A810526B51DF}"/>
               </a:ext>
             </a:extLst>
           </p:cNvPr>
@@ -1856,7 +1856,7 @@
           <p:cNvPr id="3" name="Title">
             <a:extLst xmlns:a="http://schemas.openxmlformats.org/drawingml/2006/main">
               <a:ext uri="{FF2B5EF4-FFF2-40B4-BE49-F238E27FC236}">
-                <a16:creationId xmlns:a16="http://schemas.microsoft.com/office/drawing/2014/main" id="{18AB4CD2-BB9C-4196-BBF3-55B57CF98469}"/>
+                <a16:creationId xmlns:a16="http://schemas.microsoft.com/office/drawing/2014/main" id="{B0E0CCA4-E384-44FA-9F0B-BD20C13C09C4}"/>
               </a:ext>
             </a:extLst>
           </p:cNvPr>
@@ -2085,7 +2085,7 @@
           <p:cNvPr id="2" name="Body">
             <a:extLst xmlns:a="http://schemas.openxmlformats.org/drawingml/2006/main">
               <a:ext uri="{FF2B5EF4-FFF2-40B4-BE49-F238E27FC236}">
-                <a16:creationId xmlns:a16="http://schemas.microsoft.com/office/drawing/2014/main" id="{6BC370F6-02E9-4127-B6F5-484C89BD306C}"/>
+                <a16:creationId xmlns:a16="http://schemas.microsoft.com/office/drawing/2014/main" id="{E22AC889-5AFB-47D7-BB20-F656999EA961}"/>
               </a:ext>
             </a:extLst>
           </p:cNvPr>
@@ -2331,7 +2331,7 @@
           <p:cNvPr id="4" name="Title">
             <a:extLst xmlns:a="http://schemas.openxmlformats.org/drawingml/2006/main">
               <a:ext uri="{FF2B5EF4-FFF2-40B4-BE49-F238E27FC236}">
-                <a16:creationId xmlns:a16="http://schemas.microsoft.com/office/drawing/2014/main" id="{6E944ABF-EA58-4685-BDBD-3B261410DBC5}"/>
+                <a16:creationId xmlns:a16="http://schemas.microsoft.com/office/drawing/2014/main" id="{234E3200-0AD4-438B-9E1F-979702ECF0B3}"/>
               </a:ext>
             </a:extLst>
           </p:cNvPr>
@@ -2560,7 +2560,7 @@
           <p:cNvPr id="2" name="Left column">
             <a:extLst xmlns:a="http://schemas.openxmlformats.org/drawingml/2006/main">
               <a:ext uri="{FF2B5EF4-FFF2-40B4-BE49-F238E27FC236}">
-                <a16:creationId xmlns:a16="http://schemas.microsoft.com/office/drawing/2014/main" id="{1E33F2F6-9079-49F1-A97D-750E1CF3F8E3}"/>
+                <a16:creationId xmlns:a16="http://schemas.microsoft.com/office/drawing/2014/main" id="{B5C7A0EA-5A1D-49CC-9CB6-42CCD904251D}"/>
               </a:ext>
             </a:extLst>
           </p:cNvPr>
@@ -2789,7 +2789,7 @@
           <p:cNvPr id="3" name="Right column">
             <a:extLst xmlns:a="http://schemas.openxmlformats.org/drawingml/2006/main">
               <a:ext uri="{FF2B5EF4-FFF2-40B4-BE49-F238E27FC236}">
-                <a16:creationId xmlns:a16="http://schemas.microsoft.com/office/drawing/2014/main" id="{5C67A6F7-2C98-49DE-ADF0-9D44CD69232B}"/>
+                <a16:creationId xmlns:a16="http://schemas.microsoft.com/office/drawing/2014/main" id="{3254CABD-AE09-400E-85BE-050611654385}"/>
               </a:ext>
             </a:extLst>
           </p:cNvPr>
@@ -3035,7 +3035,7 @@
           <p:cNvPr id="3" name="Title">
             <a:extLst xmlns:a="http://schemas.openxmlformats.org/drawingml/2006/main">
               <a:ext uri="{FF2B5EF4-FFF2-40B4-BE49-F238E27FC236}">
-                <a16:creationId xmlns:a16="http://schemas.microsoft.com/office/drawing/2014/main" id="{7F752A6E-A98C-414D-A9B0-174B861CEE35}"/>
+                <a16:creationId xmlns:a16="http://schemas.microsoft.com/office/drawing/2014/main" id="{3A55BAF0-1DCC-433C-BA1F-612092D5F4F8}"/>
               </a:ext>
             </a:extLst>
           </p:cNvPr>
@@ -3264,7 +3264,7 @@
           <p:cNvPr id="2" name="Left column">
             <a:extLst xmlns:a="http://schemas.openxmlformats.org/drawingml/2006/main">
               <a:ext uri="{FF2B5EF4-FFF2-40B4-BE49-F238E27FC236}">
-                <a16:creationId xmlns:a16="http://schemas.microsoft.com/office/drawing/2014/main" id="{61D78A9D-5ED4-4693-BBB0-3D1C5BA5C400}"/>
+                <a16:creationId xmlns:a16="http://schemas.microsoft.com/office/drawing/2014/main" id="{91116FE8-A480-4F6C-97E8-8AF76DBED865}"/>
               </a:ext>
             </a:extLst>
           </p:cNvPr>
@@ -3531,12 +3531,12 @@
   </p:cSld>
   <p:clrMap bg1="lt1" tx1="dk1" bg2="lt2" tx2="dk2" accent1="accent1" accent2="accent2" accent3="accent3" accent4="accent4" accent5="accent5" accent6="accent6" hlink="hlink" folHlink="folHlink"/>
   <p:sldLayoutIdLst>
-    <p:sldLayoutId xmlns:r="http://schemas.openxmlformats.org/officeDocument/2006/relationships" id="2147483649" r:id="R634f08903e844444"/>
-    <p:sldLayoutId xmlns:r="http://schemas.openxmlformats.org/officeDocument/2006/relationships" id="2147483650" r:id="Rb62e7b7debfb49f4"/>
-    <p:sldLayoutId xmlns:r="http://schemas.openxmlformats.org/officeDocument/2006/relationships" id="2147483651" r:id="Rea4189e311e04d98"/>
-    <p:sldLayoutId xmlns:r="http://schemas.openxmlformats.org/officeDocument/2006/relationships" id="2147483652" r:id="R9295788890c94e80"/>
-    <p:sldLayoutId xmlns:r="http://schemas.openxmlformats.org/officeDocument/2006/relationships" id="2147483653" r:id="Rfa2ad073730c4a86"/>
-    <p:sldLayoutId xmlns:r="http://schemas.openxmlformats.org/officeDocument/2006/relationships" id="2147483654" r:id="R78b1918674934552"/>
+    <p:sldLayoutId xmlns:r="http://schemas.openxmlformats.org/officeDocument/2006/relationships" id="2147483649" r:id="R858fa8fe78a540cc"/>
+    <p:sldLayoutId xmlns:r="http://schemas.openxmlformats.org/officeDocument/2006/relationships" id="2147483650" r:id="R659360ab6eb1440a"/>
+    <p:sldLayoutId xmlns:r="http://schemas.openxmlformats.org/officeDocument/2006/relationships" id="2147483651" r:id="R69184f7349424297"/>
+    <p:sldLayoutId xmlns:r="http://schemas.openxmlformats.org/officeDocument/2006/relationships" id="2147483652" r:id="R8230d9cf907643da"/>
+    <p:sldLayoutId xmlns:r="http://schemas.openxmlformats.org/officeDocument/2006/relationships" id="2147483653" r:id="Rffcae840cf9742df"/>
+    <p:sldLayoutId xmlns:r="http://schemas.openxmlformats.org/officeDocument/2006/relationships" id="2147483654" r:id="R81a1a620cdbe4517"/>
   </p:sldLayoutIdLst>
   <p:txStyles>
     <p:titleStyle>
@@ -4087,7 +4087,7 @@
           <p:cNvPr id="21" name="">
             <a:extLst xmlns:a="http://schemas.openxmlformats.org/drawingml/2006/main">
               <a:ext uri="{FF2B5EF4-FFF2-40B4-BE49-F238E27FC236}">
-                <a16:creationId xmlns:a16="http://schemas.microsoft.com/office/drawing/2014/main" id="{7D45A3AF-40C0-4454-B573-6AD74A981AED}"/>
+                <a16:creationId xmlns:a16="http://schemas.microsoft.com/office/drawing/2014/main" id="{350D251C-EE3D-4522-9ABA-6DBB6F89AAF1}"/>
               </a:ext>
             </a:extLst>
           </p:cNvPr>
@@ -4097,7 +4097,7 @@
           <p:nvPr/>
         </p:nvPicPr>
         <p:blipFill>
-          <a:blip xmlns:r="http://schemas.openxmlformats.org/officeDocument/2006/relationships" xmlns:a="http://schemas.openxmlformats.org/drawingml/2006/main" r:embed="Re5ce24a44eeb4502"/>
+          <a:blip xmlns:r="http://schemas.openxmlformats.org/officeDocument/2006/relationships" xmlns:a="http://schemas.openxmlformats.org/drawingml/2006/main" r:embed="R2d63f5637ce44d3e"/>
           <a:stretch xmlns:a="http://schemas.openxmlformats.org/drawingml/2006/main"/>
         </p:blipFill>
         <p:spPr>
@@ -4115,7 +4115,7 @@
           <p:cNvPr id="2" name="f2">
             <a:extLst xmlns:a="http://schemas.openxmlformats.org/drawingml/2006/main">
               <a:ext uri="{FF2B5EF4-FFF2-40B4-BE49-F238E27FC236}">
-                <a16:creationId xmlns:a16="http://schemas.microsoft.com/office/drawing/2014/main" id="{3C21C327-AC37-4AA7-87BE-8387918D8263}"/>
+                <a16:creationId xmlns:a16="http://schemas.microsoft.com/office/drawing/2014/main" id="{837CA3D0-3017-4BF3-9C41-2DF22EFE7E0F}"/>
               </a:ext>
             </a:extLst>
           </p:cNvPr>
@@ -4274,7 +4274,7 @@
           <p:cNvPr id="3" name="f3">
             <a:extLst xmlns:a="http://schemas.openxmlformats.org/drawingml/2006/main">
               <a:ext uri="{FF2B5EF4-FFF2-40B4-BE49-F238E27FC236}">
-                <a16:creationId xmlns:a16="http://schemas.microsoft.com/office/drawing/2014/main" id="{A3FF57A9-0712-4887-A63B-65B75B65D456}"/>
+                <a16:creationId xmlns:a16="http://schemas.microsoft.com/office/drawing/2014/main" id="{FE0D32E0-812C-4A53-B7FF-8FE000520777}"/>
               </a:ext>
             </a:extLst>
           </p:cNvPr>
@@ -4433,7 +4433,7 @@
           <p:cNvPr id="4" name="f4">
             <a:extLst xmlns:a="http://schemas.openxmlformats.org/drawingml/2006/main">
               <a:ext uri="{FF2B5EF4-FFF2-40B4-BE49-F238E27FC236}">
-                <a16:creationId xmlns:a16="http://schemas.microsoft.com/office/drawing/2014/main" id="{61FE4749-C415-451E-8887-952FB2A98589}"/>
+                <a16:creationId xmlns:a16="http://schemas.microsoft.com/office/drawing/2014/main" id="{375DDE56-A61C-445D-8409-2C37E37EE7D1}"/>
               </a:ext>
             </a:extLst>
           </p:cNvPr>
@@ -4592,7 +4592,7 @@
           <p:cNvPr id="5" name="f5">
             <a:extLst xmlns:a="http://schemas.openxmlformats.org/drawingml/2006/main">
               <a:ext uri="{FF2B5EF4-FFF2-40B4-BE49-F238E27FC236}">
-                <a16:creationId xmlns:a16="http://schemas.microsoft.com/office/drawing/2014/main" id="{2A7D6AC7-C334-4EA3-AA9B-C4BE7B617E23}"/>
+                <a16:creationId xmlns:a16="http://schemas.microsoft.com/office/drawing/2014/main" id="{70C5113F-1649-4C08-8775-269B8A40F09D}"/>
               </a:ext>
             </a:extLst>
           </p:cNvPr>
@@ -4751,7 +4751,7 @@
           <p:cNvPr id="6" name="f6">
             <a:extLst xmlns:a="http://schemas.openxmlformats.org/drawingml/2006/main">
               <a:ext uri="{FF2B5EF4-FFF2-40B4-BE49-F238E27FC236}">
-                <a16:creationId xmlns:a16="http://schemas.microsoft.com/office/drawing/2014/main" id="{85F59F09-2A2C-4607-90F1-561A78635122}"/>
+                <a16:creationId xmlns:a16="http://schemas.microsoft.com/office/drawing/2014/main" id="{517676F4-2F86-4D68-BCCD-F60153802C91}"/>
               </a:ext>
             </a:extLst>
           </p:cNvPr>
@@ -4910,7 +4910,7 @@
           <p:cNvPr id="7" name="f7">
             <a:extLst xmlns:a="http://schemas.openxmlformats.org/drawingml/2006/main">
               <a:ext uri="{FF2B5EF4-FFF2-40B4-BE49-F238E27FC236}">
-                <a16:creationId xmlns:a16="http://schemas.microsoft.com/office/drawing/2014/main" id="{650F8B68-F6FA-4A44-B5D0-95967B072EA4}"/>
+                <a16:creationId xmlns:a16="http://schemas.microsoft.com/office/drawing/2014/main" id="{544FB8D3-0E9F-4D83-8AC7-2B36676BF299}"/>
               </a:ext>
             </a:extLst>
           </p:cNvPr>
@@ -5069,7 +5069,7 @@
           <p:cNvPr id="8" name="f8">
             <a:extLst xmlns:a="http://schemas.openxmlformats.org/drawingml/2006/main">
               <a:ext uri="{FF2B5EF4-FFF2-40B4-BE49-F238E27FC236}">
-                <a16:creationId xmlns:a16="http://schemas.microsoft.com/office/drawing/2014/main" id="{1D360B00-98C3-44FB-959F-7408B4EB5C58}"/>
+                <a16:creationId xmlns:a16="http://schemas.microsoft.com/office/drawing/2014/main" id="{2F9A7DBC-690E-4812-B0FE-8B587A3F0F05}"/>
               </a:ext>
             </a:extLst>
           </p:cNvPr>
@@ -5228,7 +5228,7 @@
           <p:cNvPr id="9" name="f9">
             <a:extLst xmlns:a="http://schemas.openxmlformats.org/drawingml/2006/main">
               <a:ext uri="{FF2B5EF4-FFF2-40B4-BE49-F238E27FC236}">
-                <a16:creationId xmlns:a16="http://schemas.microsoft.com/office/drawing/2014/main" id="{C100A410-579B-44D3-9214-B8DFA4D6B24F}"/>
+                <a16:creationId xmlns:a16="http://schemas.microsoft.com/office/drawing/2014/main" id="{8C4BFF19-E256-4503-838F-E628649EDBF4}"/>
               </a:ext>
             </a:extLst>
           </p:cNvPr>
@@ -5387,7 +5387,7 @@
           <p:cNvPr id="10" name="f10">
             <a:extLst xmlns:a="http://schemas.openxmlformats.org/drawingml/2006/main">
               <a:ext uri="{FF2B5EF4-FFF2-40B4-BE49-F238E27FC236}">
-                <a16:creationId xmlns:a16="http://schemas.microsoft.com/office/drawing/2014/main" id="{9D99E828-72A1-4005-9947-57F07FBBC673}"/>
+                <a16:creationId xmlns:a16="http://schemas.microsoft.com/office/drawing/2014/main" id="{E6E01563-97D9-4F65-8AE6-7A46BB74DB85}"/>
               </a:ext>
             </a:extLst>
           </p:cNvPr>
@@ -5546,7 +5546,7 @@
           <p:cNvPr id="11" name="f11">
             <a:extLst xmlns:a="http://schemas.openxmlformats.org/drawingml/2006/main">
               <a:ext uri="{FF2B5EF4-FFF2-40B4-BE49-F238E27FC236}">
-                <a16:creationId xmlns:a16="http://schemas.microsoft.com/office/drawing/2014/main" id="{8F11941A-4A46-4BB3-9999-8961A746BCEE}"/>
+                <a16:creationId xmlns:a16="http://schemas.microsoft.com/office/drawing/2014/main" id="{5162F518-FDEE-4463-BA2C-F6A46C45927A}"/>
               </a:ext>
             </a:extLst>
           </p:cNvPr>
@@ -5705,7 +5705,7 @@
           <p:cNvPr id="12" name="f12">
             <a:extLst xmlns:a="http://schemas.openxmlformats.org/drawingml/2006/main">
               <a:ext uri="{FF2B5EF4-FFF2-40B4-BE49-F238E27FC236}">
-                <a16:creationId xmlns:a16="http://schemas.microsoft.com/office/drawing/2014/main" id="{81714A75-F66A-468C-950F-0EAE0FB0FB80}"/>
+                <a16:creationId xmlns:a16="http://schemas.microsoft.com/office/drawing/2014/main" id="{77323399-B60F-46C9-AE92-6845D6D418C8}"/>
               </a:ext>
             </a:extLst>
           </p:cNvPr>
@@ -5864,7 +5864,7 @@
           <p:cNvPr id="13" name="f13">
             <a:extLst xmlns:a="http://schemas.openxmlformats.org/drawingml/2006/main">
               <a:ext uri="{FF2B5EF4-FFF2-40B4-BE49-F238E27FC236}">
-                <a16:creationId xmlns:a16="http://schemas.microsoft.com/office/drawing/2014/main" id="{B1935F4A-CED3-4D27-8AD0-B8B6EA1114B2}"/>
+                <a16:creationId xmlns:a16="http://schemas.microsoft.com/office/drawing/2014/main" id="{93D23B5F-170B-40B9-A7A0-89D22951BEF2}"/>
               </a:ext>
             </a:extLst>
           </p:cNvPr>
@@ -6023,7 +6023,7 @@
           <p:cNvPr id="14" name="f14">
             <a:extLst xmlns:a="http://schemas.openxmlformats.org/drawingml/2006/main">
               <a:ext uri="{FF2B5EF4-FFF2-40B4-BE49-F238E27FC236}">
-                <a16:creationId xmlns:a16="http://schemas.microsoft.com/office/drawing/2014/main" id="{2DBFC8DC-F048-4E00-9400-D8E05766C151}"/>
+                <a16:creationId xmlns:a16="http://schemas.microsoft.com/office/drawing/2014/main" id="{2583CB11-DB60-4261-98F5-8DB2D9C58398}"/>
               </a:ext>
             </a:extLst>
           </p:cNvPr>
@@ -6182,7 +6182,7 @@
           <p:cNvPr id="15" name="f15">
             <a:extLst xmlns:a="http://schemas.openxmlformats.org/drawingml/2006/main">
               <a:ext uri="{FF2B5EF4-FFF2-40B4-BE49-F238E27FC236}">
-                <a16:creationId xmlns:a16="http://schemas.microsoft.com/office/drawing/2014/main" id="{348EC166-6C28-4227-9F5F-22EEC7382FDF}"/>
+                <a16:creationId xmlns:a16="http://schemas.microsoft.com/office/drawing/2014/main" id="{AA11CFFD-2458-4E61-979B-8143CD17EE2E}"/>
               </a:ext>
             </a:extLst>
           </p:cNvPr>
@@ -6341,7 +6341,7 @@
           <p:cNvPr id="16" name="f16">
             <a:extLst xmlns:a="http://schemas.openxmlformats.org/drawingml/2006/main">
               <a:ext uri="{FF2B5EF4-FFF2-40B4-BE49-F238E27FC236}">
-                <a16:creationId xmlns:a16="http://schemas.microsoft.com/office/drawing/2014/main" id="{AB9F7DB8-6929-484A-A675-F9DBA27CA41A}"/>
+                <a16:creationId xmlns:a16="http://schemas.microsoft.com/office/drawing/2014/main" id="{A9AE0CBD-5431-4863-A4DC-3A901BF96AE1}"/>
               </a:ext>
             </a:extLst>
           </p:cNvPr>
@@ -6500,7 +6500,7 @@
           <p:cNvPr id="17" name="f17">
             <a:extLst xmlns:a="http://schemas.openxmlformats.org/drawingml/2006/main">
               <a:ext uri="{FF2B5EF4-FFF2-40B4-BE49-F238E27FC236}">
-                <a16:creationId xmlns:a16="http://schemas.microsoft.com/office/drawing/2014/main" id="{4ADE4287-797E-4CC1-8119-EAF1D9F554DA}"/>
+                <a16:creationId xmlns:a16="http://schemas.microsoft.com/office/drawing/2014/main" id="{B2D70A4A-FC99-493E-A11E-FAD49B056407}"/>
               </a:ext>
             </a:extLst>
           </p:cNvPr>
@@ -6659,7 +6659,7 @@
           <p:cNvPr id="18" name="f18">
             <a:extLst xmlns:a="http://schemas.openxmlformats.org/drawingml/2006/main">
               <a:ext uri="{FF2B5EF4-FFF2-40B4-BE49-F238E27FC236}">
-                <a16:creationId xmlns:a16="http://schemas.microsoft.com/office/drawing/2014/main" id="{358D8C0E-DBE4-4CA9-A583-9B0B90112B57}"/>
+                <a16:creationId xmlns:a16="http://schemas.microsoft.com/office/drawing/2014/main" id="{126EB52B-C181-4ACE-8C44-51718BA0DAA7}"/>
               </a:ext>
             </a:extLst>
           </p:cNvPr>
@@ -6818,7 +6818,7 @@
           <p:cNvPr id="19" name="f19">
             <a:extLst xmlns:a="http://schemas.openxmlformats.org/drawingml/2006/main">
               <a:ext uri="{FF2B5EF4-FFF2-40B4-BE49-F238E27FC236}">
-                <a16:creationId xmlns:a16="http://schemas.microsoft.com/office/drawing/2014/main" id="{D1B4F772-B7C7-4566-BAA5-CF08892C991D}"/>
+                <a16:creationId xmlns:a16="http://schemas.microsoft.com/office/drawing/2014/main" id="{168C3727-6796-4423-AC61-04FF336037CB}"/>
               </a:ext>
             </a:extLst>
           </p:cNvPr>
@@ -6977,7 +6977,7 @@
           <p:cNvPr id="20" name="f20">
             <a:extLst xmlns:a="http://schemas.openxmlformats.org/drawingml/2006/main">
               <a:ext uri="{FF2B5EF4-FFF2-40B4-BE49-F238E27FC236}">
-                <a16:creationId xmlns:a16="http://schemas.microsoft.com/office/drawing/2014/main" id="{8FF84202-338C-481C-B1ED-7612A9C2C6A5}"/>
+                <a16:creationId xmlns:a16="http://schemas.microsoft.com/office/drawing/2014/main" id="{8D08D468-6E5A-4D96-AE0A-8BA89B98F8A0}"/>
               </a:ext>
             </a:extLst>
           </p:cNvPr>
@@ -7134,7 +7134,7 @@
     </p:spTree>
     <p:extLst>
       <p:ext uri="{BB962C8B-B14F-4D97-AF65-F5344CB8AC3E}">
-        <p14:creationId xmlns:p14="http://schemas.microsoft.com/office/powerpoint/2010/main" val="1191677107"/>
+        <p14:creationId xmlns:p14="http://schemas.microsoft.com/office/powerpoint/2010/main" val="1744321142"/>
       </p:ext>
     </p:extLst>
   </p:cSld>
@@ -7165,7 +7165,7 @@
           <p:cNvPr id="24" name="f21">
             <a:extLst xmlns:a="http://schemas.openxmlformats.org/drawingml/2006/main">
               <a:ext uri="{FF2B5EF4-FFF2-40B4-BE49-F238E27FC236}">
-                <a16:creationId xmlns:a16="http://schemas.microsoft.com/office/drawing/2014/main" id="{1AB6216C-28FA-4E7A-984A-CFF73174CE14}"/>
+                <a16:creationId xmlns:a16="http://schemas.microsoft.com/office/drawing/2014/main" id="{62570958-586B-49CE-AC66-D9FE9DA67AE3}"/>
               </a:ext>
             </a:extLst>
           </p:cNvPr>
@@ -7324,7 +7324,7 @@
           <p:cNvPr id="2" name="f22">
             <a:extLst xmlns:a="http://schemas.openxmlformats.org/drawingml/2006/main">
               <a:ext uri="{FF2B5EF4-FFF2-40B4-BE49-F238E27FC236}">
-                <a16:creationId xmlns:a16="http://schemas.microsoft.com/office/drawing/2014/main" id="{9AFA3FF2-BD9E-4AF9-ACF8-8256FF4B92FD}"/>
+                <a16:creationId xmlns:a16="http://schemas.microsoft.com/office/drawing/2014/main" id="{2A7D9506-8F4C-41F4-BC01-22FDC6491284}"/>
               </a:ext>
             </a:extLst>
           </p:cNvPr>
@@ -7483,7 +7483,7 @@
           <p:cNvPr id="3" name="f23">
             <a:extLst xmlns:a="http://schemas.openxmlformats.org/drawingml/2006/main">
               <a:ext uri="{FF2B5EF4-FFF2-40B4-BE49-F238E27FC236}">
-                <a16:creationId xmlns:a16="http://schemas.microsoft.com/office/drawing/2014/main" id="{62C36A55-CA70-484D-97B7-55050D74E469}"/>
+                <a16:creationId xmlns:a16="http://schemas.microsoft.com/office/drawing/2014/main" id="{60AB98BD-4B1D-4427-A612-9BECFB6E65D3}"/>
               </a:ext>
             </a:extLst>
           </p:cNvPr>
@@ -7642,7 +7642,7 @@
           <p:cNvPr id="4" name="f24">
             <a:extLst xmlns:a="http://schemas.openxmlformats.org/drawingml/2006/main">
               <a:ext uri="{FF2B5EF4-FFF2-40B4-BE49-F238E27FC236}">
-                <a16:creationId xmlns:a16="http://schemas.microsoft.com/office/drawing/2014/main" id="{474D705C-002E-459A-A278-E84C214AD689}"/>
+                <a16:creationId xmlns:a16="http://schemas.microsoft.com/office/drawing/2014/main" id="{94A914AD-9E9F-4305-9EFD-89A4CD54F67E}"/>
               </a:ext>
             </a:extLst>
           </p:cNvPr>
@@ -7801,7 +7801,7 @@
           <p:cNvPr id="5" name="f25">
             <a:extLst xmlns:a="http://schemas.openxmlformats.org/drawingml/2006/main">
               <a:ext uri="{FF2B5EF4-FFF2-40B4-BE49-F238E27FC236}">
-                <a16:creationId xmlns:a16="http://schemas.microsoft.com/office/drawing/2014/main" id="{F089B7C9-86E6-42B3-A922-68DDE2B6BF56}"/>
+                <a16:creationId xmlns:a16="http://schemas.microsoft.com/office/drawing/2014/main" id="{62EACF9A-C57B-4FDA-B1FE-2EA240401595}"/>
               </a:ext>
             </a:extLst>
           </p:cNvPr>
@@ -7960,7 +7960,7 @@
           <p:cNvPr id="6" name="f26">
             <a:extLst xmlns:a="http://schemas.openxmlformats.org/drawingml/2006/main">
               <a:ext uri="{FF2B5EF4-FFF2-40B4-BE49-F238E27FC236}">
-                <a16:creationId xmlns:a16="http://schemas.microsoft.com/office/drawing/2014/main" id="{E158022F-004A-4F7C-A8C0-0AB554ACE41A}"/>
+                <a16:creationId xmlns:a16="http://schemas.microsoft.com/office/drawing/2014/main" id="{489BFE3A-6297-49CC-9E8B-3CC7D08E4527}"/>
               </a:ext>
             </a:extLst>
           </p:cNvPr>
@@ -8119,7 +8119,7 @@
           <p:cNvPr id="7" name="f27">
             <a:extLst xmlns:a="http://schemas.openxmlformats.org/drawingml/2006/main">
               <a:ext uri="{FF2B5EF4-FFF2-40B4-BE49-F238E27FC236}">
-                <a16:creationId xmlns:a16="http://schemas.microsoft.com/office/drawing/2014/main" id="{17C7A4AC-9C82-4017-8C31-9BB8714675CC}"/>
+                <a16:creationId xmlns:a16="http://schemas.microsoft.com/office/drawing/2014/main" id="{4574B24D-E1BC-4077-99C0-0CA5F409F155}"/>
               </a:ext>
             </a:extLst>
           </p:cNvPr>
@@ -8154,7 +8154,7 @@
           <p:cNvPr id="8" name="f28">
             <a:extLst xmlns:a="http://schemas.openxmlformats.org/drawingml/2006/main">
               <a:ext uri="{FF2B5EF4-FFF2-40B4-BE49-F238E27FC236}">
-                <a16:creationId xmlns:a16="http://schemas.microsoft.com/office/drawing/2014/main" id="{41857395-0270-440D-B6F0-37EEB9824680}"/>
+                <a16:creationId xmlns:a16="http://schemas.microsoft.com/office/drawing/2014/main" id="{F7F46016-5E75-49CB-B3FE-6BC6B8C491DC}"/>
               </a:ext>
             </a:extLst>
           </p:cNvPr>
@@ -8185,7 +8185,7 @@
           <p:cNvPr id="9" name="f29">
             <a:extLst xmlns:a="http://schemas.openxmlformats.org/drawingml/2006/main">
               <a:ext uri="{FF2B5EF4-FFF2-40B4-BE49-F238E27FC236}">
-                <a16:creationId xmlns:a16="http://schemas.microsoft.com/office/drawing/2014/main" id="{FC0A7FD7-32DE-4E18-8019-C46D74013154}"/>
+                <a16:creationId xmlns:a16="http://schemas.microsoft.com/office/drawing/2014/main" id="{8B4F4516-2375-42FB-8045-089EB4CE7899}"/>
               </a:ext>
             </a:extLst>
           </p:cNvPr>
@@ -8216,7 +8216,7 @@
           <p:cNvPr id="10" name="f30">
             <a:extLst xmlns:a="http://schemas.openxmlformats.org/drawingml/2006/main">
               <a:ext uri="{FF2B5EF4-FFF2-40B4-BE49-F238E27FC236}">
-                <a16:creationId xmlns:a16="http://schemas.microsoft.com/office/drawing/2014/main" id="{D884B14E-59B4-4A80-ABF6-79D38571572E}"/>
+                <a16:creationId xmlns:a16="http://schemas.microsoft.com/office/drawing/2014/main" id="{08A53876-B2CA-42AB-A77D-8B4FDDB37115}"/>
               </a:ext>
             </a:extLst>
           </p:cNvPr>
@@ -8247,7 +8247,7 @@
           <p:cNvPr id="11" name="f31">
             <a:extLst xmlns:a="http://schemas.openxmlformats.org/drawingml/2006/main">
               <a:ext uri="{FF2B5EF4-FFF2-40B4-BE49-F238E27FC236}">
-                <a16:creationId xmlns:a16="http://schemas.microsoft.com/office/drawing/2014/main" id="{B1B120A2-D9E1-42BA-B7C5-5890FEBBE31D}"/>
+                <a16:creationId xmlns:a16="http://schemas.microsoft.com/office/drawing/2014/main" id="{D68EFDFF-8C6C-4230-BFCF-73F0D42E1345}"/>
               </a:ext>
             </a:extLst>
           </p:cNvPr>
@@ -8282,7 +8282,7 @@
           <p:cNvPr id="12" name="f32">
             <a:extLst xmlns:a="http://schemas.openxmlformats.org/drawingml/2006/main">
               <a:ext uri="{FF2B5EF4-FFF2-40B4-BE49-F238E27FC236}">
-                <a16:creationId xmlns:a16="http://schemas.microsoft.com/office/drawing/2014/main" id="{BFB1AF1F-8CB7-4D7F-9850-69DF8F113AAA}"/>
+                <a16:creationId xmlns:a16="http://schemas.microsoft.com/office/drawing/2014/main" id="{391A96F9-D2DD-400F-8F23-75AD2B92F673}"/>
               </a:ext>
             </a:extLst>
           </p:cNvPr>
@@ -8313,7 +8313,7 @@
           <p:cNvPr id="13" name="f33">
             <a:extLst xmlns:a="http://schemas.openxmlformats.org/drawingml/2006/main">
               <a:ext uri="{FF2B5EF4-FFF2-40B4-BE49-F238E27FC236}">
-                <a16:creationId xmlns:a16="http://schemas.microsoft.com/office/drawing/2014/main" id="{DCD07A90-FB44-47E6-BC80-D9F7FDC9705B}"/>
+                <a16:creationId xmlns:a16="http://schemas.microsoft.com/office/drawing/2014/main" id="{EDE5CA66-8256-424F-8DAC-05E8460DFE61}"/>
               </a:ext>
             </a:extLst>
           </p:cNvPr>
@@ -8346,7 +8346,7 @@
           <p:cNvPr id="14" name="f34">
             <a:extLst xmlns:a="http://schemas.openxmlformats.org/drawingml/2006/main">
               <a:ext uri="{FF2B5EF4-FFF2-40B4-BE49-F238E27FC236}">
-                <a16:creationId xmlns:a16="http://schemas.microsoft.com/office/drawing/2014/main" id="{7ACF7EF1-C3C0-4849-8A07-6F5F178DF8BA}"/>
+                <a16:creationId xmlns:a16="http://schemas.microsoft.com/office/drawing/2014/main" id="{52632440-2C33-44D7-B92E-5942F7A10A17}"/>
               </a:ext>
             </a:extLst>
           </p:cNvPr>
@@ -8379,7 +8379,7 @@
           <p:cNvPr id="15" name="f35">
             <a:extLst xmlns:a="http://schemas.openxmlformats.org/drawingml/2006/main">
               <a:ext uri="{FF2B5EF4-FFF2-40B4-BE49-F238E27FC236}">
-                <a16:creationId xmlns:a16="http://schemas.microsoft.com/office/drawing/2014/main" id="{90BDD31A-A9D3-4850-8EA7-D847FAB689A2}"/>
+                <a16:creationId xmlns:a16="http://schemas.microsoft.com/office/drawing/2014/main" id="{6C7DB64C-35A5-4704-AD66-E540BDC4675D}"/>
               </a:ext>
             </a:extLst>
           </p:cNvPr>
@@ -8412,7 +8412,7 @@
           <p:cNvPr id="16" name="f36">
             <a:extLst xmlns:a="http://schemas.openxmlformats.org/drawingml/2006/main">
               <a:ext uri="{FF2B5EF4-FFF2-40B4-BE49-F238E27FC236}">
-                <a16:creationId xmlns:a16="http://schemas.microsoft.com/office/drawing/2014/main" id="{DF170553-71FB-4851-85A4-CD3F6CA46ED2}"/>
+                <a16:creationId xmlns:a16="http://schemas.microsoft.com/office/drawing/2014/main" id="{9F414B2A-5A93-45E2-AE5A-45B2F94E4B6F}"/>
               </a:ext>
             </a:extLst>
           </p:cNvPr>
@@ -8571,7 +8571,7 @@
           <p:cNvPr id="17" name="f37">
             <a:extLst xmlns:a="http://schemas.openxmlformats.org/drawingml/2006/main">
               <a:ext uri="{FF2B5EF4-FFF2-40B4-BE49-F238E27FC236}">
-                <a16:creationId xmlns:a16="http://schemas.microsoft.com/office/drawing/2014/main" id="{1DA986C4-EAD9-4306-B39F-B442206B2E0C}"/>
+                <a16:creationId xmlns:a16="http://schemas.microsoft.com/office/drawing/2014/main" id="{1C52070E-AF6A-4F18-907C-CA4C7B98AE99}"/>
               </a:ext>
             </a:extLst>
           </p:cNvPr>
@@ -8602,7 +8602,7 @@
           <p:cNvPr id="18" name="f38">
             <a:extLst xmlns:a="http://schemas.openxmlformats.org/drawingml/2006/main">
               <a:ext uri="{FF2B5EF4-FFF2-40B4-BE49-F238E27FC236}">
-                <a16:creationId xmlns:a16="http://schemas.microsoft.com/office/drawing/2014/main" id="{701DA3C4-0EDC-4258-9931-FF1FEA14595A}"/>
+                <a16:creationId xmlns:a16="http://schemas.microsoft.com/office/drawing/2014/main" id="{FDC89246-E971-4A38-9609-50FF2DFA7C89}"/>
               </a:ext>
             </a:extLst>
           </p:cNvPr>
@@ -8633,7 +8633,7 @@
           <p:cNvPr id="19" name="f39">
             <a:extLst xmlns:a="http://schemas.openxmlformats.org/drawingml/2006/main">
               <a:ext uri="{FF2B5EF4-FFF2-40B4-BE49-F238E27FC236}">
-                <a16:creationId xmlns:a16="http://schemas.microsoft.com/office/drawing/2014/main" id="{C015EDBB-1620-4BE2-94CA-218D0FF4C2E8}"/>
+                <a16:creationId xmlns:a16="http://schemas.microsoft.com/office/drawing/2014/main" id="{9270F574-5A2B-4DA2-8830-50A61AC612AB}"/>
               </a:ext>
             </a:extLst>
           </p:cNvPr>
@@ -8668,7 +8668,7 @@
           <p:cNvPr id="20" name="f40">
             <a:extLst xmlns:a="http://schemas.openxmlformats.org/drawingml/2006/main">
               <a:ext uri="{FF2B5EF4-FFF2-40B4-BE49-F238E27FC236}">
-                <a16:creationId xmlns:a16="http://schemas.microsoft.com/office/drawing/2014/main" id="{A1ECAC0C-2C51-4601-8A04-AA21F194E628}"/>
+                <a16:creationId xmlns:a16="http://schemas.microsoft.com/office/drawing/2014/main" id="{C56D62E3-6A8C-402F-A76A-73AC4B05F679}"/>
               </a:ext>
             </a:extLst>
           </p:cNvPr>
@@ -8850,7 +8850,7 @@
           <p:cNvPr id="21" name="f41">
             <a:extLst xmlns:a="http://schemas.openxmlformats.org/drawingml/2006/main">
               <a:ext uri="{FF2B5EF4-FFF2-40B4-BE49-F238E27FC236}">
-                <a16:creationId xmlns:a16="http://schemas.microsoft.com/office/drawing/2014/main" id="{3BB70FEF-3608-4CA8-ADB9-99D4850976C4}"/>
+                <a16:creationId xmlns:a16="http://schemas.microsoft.com/office/drawing/2014/main" id="{8F8801BB-EC7E-4E4E-954E-CF96CD0AACF7}"/>
               </a:ext>
             </a:extLst>
           </p:cNvPr>
@@ -9032,7 +9032,7 @@
           <p:cNvPr id="22" name="f42">
             <a:extLst xmlns:a="http://schemas.openxmlformats.org/drawingml/2006/main">
               <a:ext uri="{FF2B5EF4-FFF2-40B4-BE49-F238E27FC236}">
-                <a16:creationId xmlns:a16="http://schemas.microsoft.com/office/drawing/2014/main" id="{FDE7C723-C294-443E-B145-16DD8BF0AD9B}"/>
+                <a16:creationId xmlns:a16="http://schemas.microsoft.com/office/drawing/2014/main" id="{C93B46A9-9CFB-497B-A138-15387DF619E2}"/>
               </a:ext>
             </a:extLst>
           </p:cNvPr>
@@ -9191,7 +9191,7 @@
           <p:cNvPr id="23" name="f43">
             <a:extLst xmlns:a="http://schemas.openxmlformats.org/drawingml/2006/main">
               <a:ext uri="{FF2B5EF4-FFF2-40B4-BE49-F238E27FC236}">
-                <a16:creationId xmlns:a16="http://schemas.microsoft.com/office/drawing/2014/main" id="{EA947CB2-E3D1-4556-8D17-1C3ED6FC9BA2}"/>
+                <a16:creationId xmlns:a16="http://schemas.microsoft.com/office/drawing/2014/main" id="{32A52FA9-65B0-425E-A8BF-C5EB7A81A32B}"/>
               </a:ext>
             </a:extLst>
           </p:cNvPr>
@@ -9348,7 +9348,7 @@
     </p:spTree>
     <p:extLst>
       <p:ext uri="{BB962C8B-B14F-4D97-AF65-F5344CB8AC3E}">
-        <p14:creationId xmlns:p14="http://schemas.microsoft.com/office/powerpoint/2010/main" val="2009226885"/>
+        <p14:creationId xmlns:p14="http://schemas.microsoft.com/office/powerpoint/2010/main" val="2063352064"/>
       </p:ext>
     </p:extLst>
   </p:cSld>
@@ -9379,7 +9379,7 @@
           <p:cNvPr id="24" name="">
             <a:extLst xmlns:a="http://schemas.openxmlformats.org/drawingml/2006/main">
               <a:ext uri="{FF2B5EF4-FFF2-40B4-BE49-F238E27FC236}">
-                <a16:creationId xmlns:a16="http://schemas.microsoft.com/office/drawing/2014/main" id="{6575E8C3-F827-42BD-9AF3-4EFCCF4C638B}"/>
+                <a16:creationId xmlns:a16="http://schemas.microsoft.com/office/drawing/2014/main" id="{2C4DB6D7-DE71-4861-92DB-CF6A79693E7E}"/>
               </a:ext>
             </a:extLst>
           </p:cNvPr>
@@ -9389,7 +9389,7 @@
           <p:nvPr/>
         </p:nvPicPr>
         <p:blipFill>
-          <a:blip xmlns:r="http://schemas.openxmlformats.org/officeDocument/2006/relationships" xmlns:a="http://schemas.openxmlformats.org/drawingml/2006/main" r:embed="R1c5b56750ab84a99"/>
+          <a:blip xmlns:r="http://schemas.openxmlformats.org/officeDocument/2006/relationships" xmlns:a="http://schemas.openxmlformats.org/drawingml/2006/main" r:embed="Ra8e0551fe56e43f0"/>
           <a:stretch xmlns:a="http://schemas.openxmlformats.org/drawingml/2006/main"/>
         </p:blipFill>
         <p:spPr>
@@ -9407,7 +9407,7 @@
           <p:cNvPr id="2" name="f45">
             <a:extLst xmlns:a="http://schemas.openxmlformats.org/drawingml/2006/main">
               <a:ext uri="{FF2B5EF4-FFF2-40B4-BE49-F238E27FC236}">
-                <a16:creationId xmlns:a16="http://schemas.microsoft.com/office/drawing/2014/main" id="{5BF5DF33-B77E-4362-86BA-6FA2A809B878}"/>
+                <a16:creationId xmlns:a16="http://schemas.microsoft.com/office/drawing/2014/main" id="{7DEE054C-D21A-4FD2-A63B-0D1339E0F1C7}"/>
               </a:ext>
             </a:extLst>
           </p:cNvPr>
@@ -9566,7 +9566,7 @@
           <p:cNvPr id="3" name="f46">
             <a:extLst xmlns:a="http://schemas.openxmlformats.org/drawingml/2006/main">
               <a:ext uri="{FF2B5EF4-FFF2-40B4-BE49-F238E27FC236}">
-                <a16:creationId xmlns:a16="http://schemas.microsoft.com/office/drawing/2014/main" id="{042CC9DE-D276-4B9B-A813-5B876025D808}"/>
+                <a16:creationId xmlns:a16="http://schemas.microsoft.com/office/drawing/2014/main" id="{9EA49102-D1D6-46A5-A87E-20637AACB8AA}"/>
               </a:ext>
             </a:extLst>
           </p:cNvPr>
@@ -9725,7 +9725,7 @@
           <p:cNvPr id="4" name="f47">
             <a:extLst xmlns:a="http://schemas.openxmlformats.org/drawingml/2006/main">
               <a:ext uri="{FF2B5EF4-FFF2-40B4-BE49-F238E27FC236}">
-                <a16:creationId xmlns:a16="http://schemas.microsoft.com/office/drawing/2014/main" id="{E302F1CC-9EE0-49BC-8740-530EBF635279}"/>
+                <a16:creationId xmlns:a16="http://schemas.microsoft.com/office/drawing/2014/main" id="{7B484570-69BD-4257-A7CD-0C4C05B66B93}"/>
               </a:ext>
             </a:extLst>
           </p:cNvPr>
@@ -9884,7 +9884,7 @@
           <p:cNvPr id="5" name="f48">
             <a:extLst xmlns:a="http://schemas.openxmlformats.org/drawingml/2006/main">
               <a:ext uri="{FF2B5EF4-FFF2-40B4-BE49-F238E27FC236}">
-                <a16:creationId xmlns:a16="http://schemas.microsoft.com/office/drawing/2014/main" id="{8EE7EBDA-FDF5-4271-BCB0-FA7E57C3ACA7}"/>
+                <a16:creationId xmlns:a16="http://schemas.microsoft.com/office/drawing/2014/main" id="{D322E0FB-73B9-4A7D-9EA4-3029204AE5A8}"/>
               </a:ext>
             </a:extLst>
           </p:cNvPr>
@@ -10043,7 +10043,7 @@
           <p:cNvPr id="6" name="f49">
             <a:extLst xmlns:a="http://schemas.openxmlformats.org/drawingml/2006/main">
               <a:ext uri="{FF2B5EF4-FFF2-40B4-BE49-F238E27FC236}">
-                <a16:creationId xmlns:a16="http://schemas.microsoft.com/office/drawing/2014/main" id="{B54ED89F-0A29-44C2-A544-66E282AD59CA}"/>
+                <a16:creationId xmlns:a16="http://schemas.microsoft.com/office/drawing/2014/main" id="{F03F0AC6-51F3-4BE9-8C8D-839816C438CE}"/>
               </a:ext>
             </a:extLst>
           </p:cNvPr>
@@ -10202,7 +10202,7 @@
           <p:cNvPr id="7" name="f50">
             <a:extLst xmlns:a="http://schemas.openxmlformats.org/drawingml/2006/main">
               <a:ext uri="{FF2B5EF4-FFF2-40B4-BE49-F238E27FC236}">
-                <a16:creationId xmlns:a16="http://schemas.microsoft.com/office/drawing/2014/main" id="{BDBDD52A-1A19-4054-A46E-740C2364662B}"/>
+                <a16:creationId xmlns:a16="http://schemas.microsoft.com/office/drawing/2014/main" id="{948C47F3-A0D7-44B2-B7AD-C25786BC16F1}"/>
               </a:ext>
             </a:extLst>
           </p:cNvPr>
@@ -10361,7 +10361,7 @@
           <p:cNvPr id="8" name="f51">
             <a:extLst xmlns:a="http://schemas.openxmlformats.org/drawingml/2006/main">
               <a:ext uri="{FF2B5EF4-FFF2-40B4-BE49-F238E27FC236}">
-                <a16:creationId xmlns:a16="http://schemas.microsoft.com/office/drawing/2014/main" id="{D0DF10A9-C446-4446-A9D8-3ABDC204CD09}"/>
+                <a16:creationId xmlns:a16="http://schemas.microsoft.com/office/drawing/2014/main" id="{283AA079-1097-4BB9-8B45-C5A6F637E035}"/>
               </a:ext>
             </a:extLst>
           </p:cNvPr>
@@ -10520,7 +10520,7 @@
           <p:cNvPr id="9" name="f52">
             <a:extLst xmlns:a="http://schemas.openxmlformats.org/drawingml/2006/main">
               <a:ext uri="{FF2B5EF4-FFF2-40B4-BE49-F238E27FC236}">
-                <a16:creationId xmlns:a16="http://schemas.microsoft.com/office/drawing/2014/main" id="{5FE5354D-67B3-4AF9-B3A4-8EE2D2A9806E}"/>
+                <a16:creationId xmlns:a16="http://schemas.microsoft.com/office/drawing/2014/main" id="{351A331E-C140-4EBA-8C0E-360F1B571F9A}"/>
               </a:ext>
             </a:extLst>
           </p:cNvPr>
@@ -10679,7 +10679,7 @@
           <p:cNvPr id="10" name="f53">
             <a:extLst xmlns:a="http://schemas.openxmlformats.org/drawingml/2006/main">
               <a:ext uri="{FF2B5EF4-FFF2-40B4-BE49-F238E27FC236}">
-                <a16:creationId xmlns:a16="http://schemas.microsoft.com/office/drawing/2014/main" id="{F76867B3-619B-441F-B843-6DB037905D96}"/>
+                <a16:creationId xmlns:a16="http://schemas.microsoft.com/office/drawing/2014/main" id="{F6D09079-909B-456D-8814-5EF2F8F1E1F3}"/>
               </a:ext>
             </a:extLst>
           </p:cNvPr>
@@ -10838,7 +10838,7 @@
           <p:cNvPr id="11" name="f54">
             <a:extLst xmlns:a="http://schemas.openxmlformats.org/drawingml/2006/main">
               <a:ext uri="{FF2B5EF4-FFF2-40B4-BE49-F238E27FC236}">
-                <a16:creationId xmlns:a16="http://schemas.microsoft.com/office/drawing/2014/main" id="{E1D5F7EF-E10C-4785-993F-38DE3974BFF6}"/>
+                <a16:creationId xmlns:a16="http://schemas.microsoft.com/office/drawing/2014/main" id="{92D3FCBE-06F2-4C5D-A530-A42E0504F0A5}"/>
               </a:ext>
             </a:extLst>
           </p:cNvPr>
@@ -10997,7 +10997,7 @@
           <p:cNvPr id="12" name="f55">
             <a:extLst xmlns:a="http://schemas.openxmlformats.org/drawingml/2006/main">
               <a:ext uri="{FF2B5EF4-FFF2-40B4-BE49-F238E27FC236}">
-                <a16:creationId xmlns:a16="http://schemas.microsoft.com/office/drawing/2014/main" id="{B70BBEA1-3F11-483D-BC43-E6D8A9CF9535}"/>
+                <a16:creationId xmlns:a16="http://schemas.microsoft.com/office/drawing/2014/main" id="{AA86459E-F1A0-427E-916C-A3B4298A018A}"/>
               </a:ext>
             </a:extLst>
           </p:cNvPr>
@@ -11156,7 +11156,7 @@
           <p:cNvPr id="13" name="f56">
             <a:extLst xmlns:a="http://schemas.openxmlformats.org/drawingml/2006/main">
               <a:ext uri="{FF2B5EF4-FFF2-40B4-BE49-F238E27FC236}">
-                <a16:creationId xmlns:a16="http://schemas.microsoft.com/office/drawing/2014/main" id="{88A31A96-D4A5-4949-AEA8-7A1019DD4884}"/>
+                <a16:creationId xmlns:a16="http://schemas.microsoft.com/office/drawing/2014/main" id="{C5FCB904-A75F-485A-B59C-5BAD3A850B85}"/>
               </a:ext>
             </a:extLst>
           </p:cNvPr>
@@ -11315,7 +11315,7 @@
           <p:cNvPr id="14" name="f57">
             <a:extLst xmlns:a="http://schemas.openxmlformats.org/drawingml/2006/main">
               <a:ext uri="{FF2B5EF4-FFF2-40B4-BE49-F238E27FC236}">
-                <a16:creationId xmlns:a16="http://schemas.microsoft.com/office/drawing/2014/main" id="{D90071E9-6D1A-4EFF-BA69-6619C3D3435C}"/>
+                <a16:creationId xmlns:a16="http://schemas.microsoft.com/office/drawing/2014/main" id="{BE5AF7C9-3C5D-42D0-86C7-4E0BF2098B43}"/>
               </a:ext>
             </a:extLst>
           </p:cNvPr>
@@ -11474,7 +11474,7 @@
           <p:cNvPr id="15" name="f58">
             <a:extLst xmlns:a="http://schemas.openxmlformats.org/drawingml/2006/main">
               <a:ext uri="{FF2B5EF4-FFF2-40B4-BE49-F238E27FC236}">
-                <a16:creationId xmlns:a16="http://schemas.microsoft.com/office/drawing/2014/main" id="{38229594-7FE9-4491-88CB-8EE8D6560FBF}"/>
+                <a16:creationId xmlns:a16="http://schemas.microsoft.com/office/drawing/2014/main" id="{ED5CB014-FFAF-47A6-BAA4-FB9689BEAF34}"/>
               </a:ext>
             </a:extLst>
           </p:cNvPr>
@@ -11633,7 +11633,7 @@
           <p:cNvPr id="16" name="f59">
             <a:extLst xmlns:a="http://schemas.openxmlformats.org/drawingml/2006/main">
               <a:ext uri="{FF2B5EF4-FFF2-40B4-BE49-F238E27FC236}">
-                <a16:creationId xmlns:a16="http://schemas.microsoft.com/office/drawing/2014/main" id="{8939E8B2-195F-4238-9FA9-0D33D2DC9591}"/>
+                <a16:creationId xmlns:a16="http://schemas.microsoft.com/office/drawing/2014/main" id="{CFE5807F-3820-40EE-BFFE-700390D954C2}"/>
               </a:ext>
             </a:extLst>
           </p:cNvPr>
@@ -11792,7 +11792,7 @@
           <p:cNvPr id="17" name="f60">
             <a:extLst xmlns:a="http://schemas.openxmlformats.org/drawingml/2006/main">
               <a:ext uri="{FF2B5EF4-FFF2-40B4-BE49-F238E27FC236}">
-                <a16:creationId xmlns:a16="http://schemas.microsoft.com/office/drawing/2014/main" id="{2E2B0D6F-D77C-4834-9213-4AF0E5D29B70}"/>
+                <a16:creationId xmlns:a16="http://schemas.microsoft.com/office/drawing/2014/main" id="{4E8953DA-2692-4957-AD4D-DD2C7195109E}"/>
               </a:ext>
             </a:extLst>
           </p:cNvPr>
@@ -11951,7 +11951,7 @@
           <p:cNvPr id="18" name="f61">
             <a:extLst xmlns:a="http://schemas.openxmlformats.org/drawingml/2006/main">
               <a:ext uri="{FF2B5EF4-FFF2-40B4-BE49-F238E27FC236}">
-                <a16:creationId xmlns:a16="http://schemas.microsoft.com/office/drawing/2014/main" id="{CDFE7841-EFD6-4D5F-AAF7-A8755A3F31B8}"/>
+                <a16:creationId xmlns:a16="http://schemas.microsoft.com/office/drawing/2014/main" id="{34C61DA7-FDE8-4D55-885F-065894E3E90D}"/>
               </a:ext>
             </a:extLst>
           </p:cNvPr>
@@ -12110,7 +12110,7 @@
           <p:cNvPr id="19" name="f62">
             <a:extLst xmlns:a="http://schemas.openxmlformats.org/drawingml/2006/main">
               <a:ext uri="{FF2B5EF4-FFF2-40B4-BE49-F238E27FC236}">
-                <a16:creationId xmlns:a16="http://schemas.microsoft.com/office/drawing/2014/main" id="{28B9F215-C209-48FF-8A93-5430A96F3044}"/>
+                <a16:creationId xmlns:a16="http://schemas.microsoft.com/office/drawing/2014/main" id="{B010F025-ACC8-4FAD-8D19-A9D246E61B38}"/>
               </a:ext>
             </a:extLst>
           </p:cNvPr>
@@ -12269,7 +12269,7 @@
           <p:cNvPr id="20" name="f63">
             <a:extLst xmlns:a="http://schemas.openxmlformats.org/drawingml/2006/main">
               <a:ext uri="{FF2B5EF4-FFF2-40B4-BE49-F238E27FC236}">
-                <a16:creationId xmlns:a16="http://schemas.microsoft.com/office/drawing/2014/main" id="{68975CAD-D220-468A-A662-EEF0FFB639EB}"/>
+                <a16:creationId xmlns:a16="http://schemas.microsoft.com/office/drawing/2014/main" id="{1501B4AD-D129-4162-A247-1D34F7DD4B78}"/>
               </a:ext>
             </a:extLst>
           </p:cNvPr>
@@ -12428,7 +12428,7 @@
           <p:cNvPr id="21" name="f64">
             <a:extLst xmlns:a="http://schemas.openxmlformats.org/drawingml/2006/main">
               <a:ext uri="{FF2B5EF4-FFF2-40B4-BE49-F238E27FC236}">
-                <a16:creationId xmlns:a16="http://schemas.microsoft.com/office/drawing/2014/main" id="{CFE67A19-1C49-446D-BE30-B7F73043B38D}"/>
+                <a16:creationId xmlns:a16="http://schemas.microsoft.com/office/drawing/2014/main" id="{CE87DE8C-57A5-4563-BF5F-636730F66967}"/>
               </a:ext>
             </a:extLst>
           </p:cNvPr>
@@ -12587,7 +12587,7 @@
           <p:cNvPr id="22" name="f65">
             <a:extLst xmlns:a="http://schemas.openxmlformats.org/drawingml/2006/main">
               <a:ext uri="{FF2B5EF4-FFF2-40B4-BE49-F238E27FC236}">
-                <a16:creationId xmlns:a16="http://schemas.microsoft.com/office/drawing/2014/main" id="{07C14415-BFD7-4AD4-8259-5E18D99108DE}"/>
+                <a16:creationId xmlns:a16="http://schemas.microsoft.com/office/drawing/2014/main" id="{0964302F-17F8-4C62-ACC5-DE6AE8AA15C2}"/>
               </a:ext>
             </a:extLst>
           </p:cNvPr>
@@ -12746,7 +12746,7 @@
           <p:cNvPr id="23" name="f66">
             <a:extLst xmlns:a="http://schemas.openxmlformats.org/drawingml/2006/main">
               <a:ext uri="{FF2B5EF4-FFF2-40B4-BE49-F238E27FC236}">
-                <a16:creationId xmlns:a16="http://schemas.microsoft.com/office/drawing/2014/main" id="{52A53392-95B8-4AD9-9EBA-D913798077AA}"/>
+                <a16:creationId xmlns:a16="http://schemas.microsoft.com/office/drawing/2014/main" id="{ED4880FF-DE58-4CB4-810D-39534E790385}"/>
               </a:ext>
             </a:extLst>
           </p:cNvPr>
@@ -12903,7 +12903,7 @@
     </p:spTree>
     <p:extLst>
       <p:ext uri="{BB962C8B-B14F-4D97-AF65-F5344CB8AC3E}">
-        <p14:creationId xmlns:p14="http://schemas.microsoft.com/office/powerpoint/2010/main" val="961672210"/>
+        <p14:creationId xmlns:p14="http://schemas.microsoft.com/office/powerpoint/2010/main" val="113186871"/>
       </p:ext>
     </p:extLst>
   </p:cSld>
@@ -12934,7 +12934,7 @@
           <p:cNvPr id="18" name="f67">
             <a:extLst xmlns:a="http://schemas.openxmlformats.org/drawingml/2006/main">
               <a:ext uri="{FF2B5EF4-FFF2-40B4-BE49-F238E27FC236}">
-                <a16:creationId xmlns:a16="http://schemas.microsoft.com/office/drawing/2014/main" id="{CD8ADEA6-C6DC-466D-9C9A-0DD64672CC7E}"/>
+                <a16:creationId xmlns:a16="http://schemas.microsoft.com/office/drawing/2014/main" id="{F682ED86-53DF-462C-A6F2-B840415A254C}"/>
               </a:ext>
             </a:extLst>
           </p:cNvPr>
@@ -13093,7 +13093,7 @@
           <p:cNvPr id="2" name="f68">
             <a:extLst xmlns:a="http://schemas.openxmlformats.org/drawingml/2006/main">
               <a:ext uri="{FF2B5EF4-FFF2-40B4-BE49-F238E27FC236}">
-                <a16:creationId xmlns:a16="http://schemas.microsoft.com/office/drawing/2014/main" id="{88292557-59F0-4876-8DED-7ECF9E588D75}"/>
+                <a16:creationId xmlns:a16="http://schemas.microsoft.com/office/drawing/2014/main" id="{5ACD5B2C-2D32-46A0-87F5-B9A539BE66F5}"/>
               </a:ext>
             </a:extLst>
           </p:cNvPr>
@@ -13252,7 +13252,7 @@
           <p:cNvPr id="3" name="f69">
             <a:extLst xmlns:a="http://schemas.openxmlformats.org/drawingml/2006/main">
               <a:ext uri="{FF2B5EF4-FFF2-40B4-BE49-F238E27FC236}">
-                <a16:creationId xmlns:a16="http://schemas.microsoft.com/office/drawing/2014/main" id="{C1F23252-DF3C-41AB-BADE-50722D233A12}"/>
+                <a16:creationId xmlns:a16="http://schemas.microsoft.com/office/drawing/2014/main" id="{5B3B3CD2-8E00-4162-8223-0A55D9B84BB6}"/>
               </a:ext>
             </a:extLst>
           </p:cNvPr>
@@ -13411,7 +13411,7 @@
           <p:cNvPr id="4" name="f70">
             <a:extLst xmlns:a="http://schemas.openxmlformats.org/drawingml/2006/main">
               <a:ext uri="{FF2B5EF4-FFF2-40B4-BE49-F238E27FC236}">
-                <a16:creationId xmlns:a16="http://schemas.microsoft.com/office/drawing/2014/main" id="{95371814-766C-4314-8AEA-0591DC90299B}"/>
+                <a16:creationId xmlns:a16="http://schemas.microsoft.com/office/drawing/2014/main" id="{ABD488C5-CC21-4672-BC43-74A52DCBFE5D}"/>
               </a:ext>
             </a:extLst>
           </p:cNvPr>
@@ -13570,7 +13570,7 @@
           <p:cNvPr id="5" name="f103">
             <a:extLst xmlns:a="http://schemas.openxmlformats.org/drawingml/2006/main">
               <a:ext uri="{FF2B5EF4-FFF2-40B4-BE49-F238E27FC236}">
-                <a16:creationId xmlns:a16="http://schemas.microsoft.com/office/drawing/2014/main" id="{5C61F781-8D08-4696-84CA-D1F3CB326F94}"/>
+                <a16:creationId xmlns:a16="http://schemas.microsoft.com/office/drawing/2014/main" id="{45A07D68-1995-4512-B38F-CAF620DF0480}"/>
               </a:ext>
             </a:extLst>
           </p:cNvPr>
@@ -13729,7 +13729,7 @@
           <p:cNvPr id="6" name="f104">
             <a:extLst xmlns:a="http://schemas.openxmlformats.org/drawingml/2006/main">
               <a:ext uri="{FF2B5EF4-FFF2-40B4-BE49-F238E27FC236}">
-                <a16:creationId xmlns:a16="http://schemas.microsoft.com/office/drawing/2014/main" id="{E154A881-E84E-4DED-9B09-945E1446E442}"/>
+                <a16:creationId xmlns:a16="http://schemas.microsoft.com/office/drawing/2014/main" id="{EF3C2E2F-E596-4E59-8CEB-72162625B8D2}"/>
               </a:ext>
             </a:extLst>
           </p:cNvPr>
@@ -13764,7 +13764,7 @@
           <p:cNvPr id="7" name="f105">
             <a:extLst xmlns:a="http://schemas.openxmlformats.org/drawingml/2006/main">
               <a:ext uri="{FF2B5EF4-FFF2-40B4-BE49-F238E27FC236}">
-                <a16:creationId xmlns:a16="http://schemas.microsoft.com/office/drawing/2014/main" id="{B05EBB37-7116-4CCD-A24B-FEB69F0E6703}"/>
+                <a16:creationId xmlns:a16="http://schemas.microsoft.com/office/drawing/2014/main" id="{5D46CAC1-2FBA-4C4A-9666-E773AB73F963}"/>
               </a:ext>
             </a:extLst>
           </p:cNvPr>
@@ -13923,7 +13923,7 @@
           <p:cNvPr id="8" name="f106">
             <a:extLst xmlns:a="http://schemas.openxmlformats.org/drawingml/2006/main">
               <a:ext uri="{FF2B5EF4-FFF2-40B4-BE49-F238E27FC236}">
-                <a16:creationId xmlns:a16="http://schemas.microsoft.com/office/drawing/2014/main" id="{B57B014C-07C6-4417-AC08-F68FC531D123}"/>
+                <a16:creationId xmlns:a16="http://schemas.microsoft.com/office/drawing/2014/main" id="{FDE863F6-60E0-42C9-B156-ED29985B84DA}"/>
               </a:ext>
             </a:extLst>
           </p:cNvPr>
@@ -14105,7 +14105,7 @@
           <p:cNvPr id="9" name="f107">
             <a:extLst xmlns:a="http://schemas.openxmlformats.org/drawingml/2006/main">
               <a:ext uri="{FF2B5EF4-FFF2-40B4-BE49-F238E27FC236}">
-                <a16:creationId xmlns:a16="http://schemas.microsoft.com/office/drawing/2014/main" id="{215DAC90-BC51-4255-88C3-97286224611E}"/>
+                <a16:creationId xmlns:a16="http://schemas.microsoft.com/office/drawing/2014/main" id="{B368EC5F-B691-410F-A05D-F85D1D98075D}"/>
               </a:ext>
             </a:extLst>
           </p:cNvPr>
@@ -14264,7 +14264,7 @@
           <p:cNvPr id="10" name="f108">
             <a:extLst xmlns:a="http://schemas.openxmlformats.org/drawingml/2006/main">
               <a:ext uri="{FF2B5EF4-FFF2-40B4-BE49-F238E27FC236}">
-                <a16:creationId xmlns:a16="http://schemas.microsoft.com/office/drawing/2014/main" id="{153E6737-0912-4B75-88B8-6187EFC3EB89}"/>
+                <a16:creationId xmlns:a16="http://schemas.microsoft.com/office/drawing/2014/main" id="{2E65BE27-F92F-4F67-B7D4-B4A7DC7749F4}"/>
               </a:ext>
             </a:extLst>
           </p:cNvPr>
@@ -14423,7 +14423,7 @@
           <p:cNvPr id="11" name="f109">
             <a:extLst xmlns:a="http://schemas.openxmlformats.org/drawingml/2006/main">
               <a:ext uri="{FF2B5EF4-FFF2-40B4-BE49-F238E27FC236}">
-                <a16:creationId xmlns:a16="http://schemas.microsoft.com/office/drawing/2014/main" id="{4AB10B04-205C-4A24-B3E8-DC4C9E260D93}"/>
+                <a16:creationId xmlns:a16="http://schemas.microsoft.com/office/drawing/2014/main" id="{AE367173-51D4-4DCC-94C7-7C016E8AF642}"/>
               </a:ext>
             </a:extLst>
           </p:cNvPr>
@@ -14454,7 +14454,7 @@
           <p:cNvPr id="12" name="f110">
             <a:extLst xmlns:a="http://schemas.openxmlformats.org/drawingml/2006/main">
               <a:ext uri="{FF2B5EF4-FFF2-40B4-BE49-F238E27FC236}">
-                <a16:creationId xmlns:a16="http://schemas.microsoft.com/office/drawing/2014/main" id="{C5698F18-91E2-4D59-9A90-98F12203C621}"/>
+                <a16:creationId xmlns:a16="http://schemas.microsoft.com/office/drawing/2014/main" id="{699CD188-704D-49D4-BDE4-58F917B3D825}"/>
               </a:ext>
             </a:extLst>
           </p:cNvPr>
@@ -14485,7 +14485,7 @@
           <p:cNvPr id="13" name="f111">
             <a:extLst xmlns:a="http://schemas.openxmlformats.org/drawingml/2006/main">
               <a:ext uri="{FF2B5EF4-FFF2-40B4-BE49-F238E27FC236}">
-                <a16:creationId xmlns:a16="http://schemas.microsoft.com/office/drawing/2014/main" id="{E8AA5743-2E61-49BB-A0E1-98ECFF8D1FE1}"/>
+                <a16:creationId xmlns:a16="http://schemas.microsoft.com/office/drawing/2014/main" id="{8A9A31D8-216E-45F9-9E26-72F107FC0507}"/>
               </a:ext>
             </a:extLst>
           </p:cNvPr>
@@ -14644,7 +14644,7 @@
           <p:cNvPr id="14" name="f112">
             <a:extLst xmlns:a="http://schemas.openxmlformats.org/drawingml/2006/main">
               <a:ext uri="{FF2B5EF4-FFF2-40B4-BE49-F238E27FC236}">
-                <a16:creationId xmlns:a16="http://schemas.microsoft.com/office/drawing/2014/main" id="{2918FDFF-6650-4641-A8EA-61A04A62CC5A}"/>
+                <a16:creationId xmlns:a16="http://schemas.microsoft.com/office/drawing/2014/main" id="{C30B618D-6C27-4A48-9E38-01AE8C65BC2F}"/>
               </a:ext>
             </a:extLst>
           </p:cNvPr>
@@ -14679,7 +14679,7 @@
           <p:cNvPr id="15" name="f113">
             <a:extLst xmlns:a="http://schemas.openxmlformats.org/drawingml/2006/main">
               <a:ext uri="{FF2B5EF4-FFF2-40B4-BE49-F238E27FC236}">
-                <a16:creationId xmlns:a16="http://schemas.microsoft.com/office/drawing/2014/main" id="{5CD2BB03-96B7-48EB-B57F-3DFBD94D41F1}"/>
+                <a16:creationId xmlns:a16="http://schemas.microsoft.com/office/drawing/2014/main" id="{1A2D487D-0EFD-48F8-BCC7-250674341B92}"/>
               </a:ext>
             </a:extLst>
           </p:cNvPr>
@@ -14861,7 +14861,7 @@
           <p:cNvPr id="16" name="f114">
             <a:extLst xmlns:a="http://schemas.openxmlformats.org/drawingml/2006/main">
               <a:ext uri="{FF2B5EF4-FFF2-40B4-BE49-F238E27FC236}">
-                <a16:creationId xmlns:a16="http://schemas.microsoft.com/office/drawing/2014/main" id="{5BD35901-A35E-4AEC-A56F-5D31D4867CAE}"/>
+                <a16:creationId xmlns:a16="http://schemas.microsoft.com/office/drawing/2014/main" id="{8BBB4C04-98D3-4E57-AB01-B825422B8BEB}"/>
               </a:ext>
             </a:extLst>
           </p:cNvPr>
@@ -14896,7 +14896,7 @@
           <p:cNvPr id="17" name="f115">
             <a:extLst xmlns:a="http://schemas.openxmlformats.org/drawingml/2006/main">
               <a:ext uri="{FF2B5EF4-FFF2-40B4-BE49-F238E27FC236}">
-                <a16:creationId xmlns:a16="http://schemas.microsoft.com/office/drawing/2014/main" id="{3B9EC7DB-E21A-4C23-9646-9962933F9E11}"/>
+                <a16:creationId xmlns:a16="http://schemas.microsoft.com/office/drawing/2014/main" id="{0295BD96-CE92-40B5-B5AE-A44D904AF6DA}"/>
               </a:ext>
             </a:extLst>
           </p:cNvPr>
@@ -15076,7 +15076,7 @@
     </p:spTree>
     <p:extLst>
       <p:ext uri="{BB962C8B-B14F-4D97-AF65-F5344CB8AC3E}">
-        <p14:creationId xmlns:p14="http://schemas.microsoft.com/office/powerpoint/2010/main" val="819393276"/>
+        <p14:creationId xmlns:p14="http://schemas.microsoft.com/office/powerpoint/2010/main" val="691460266"/>
       </p:ext>
     </p:extLst>
   </p:cSld>
@@ -15107,7 +15107,7 @@
           <p:cNvPr id="15" name="">
             <a:extLst xmlns:a="http://schemas.openxmlformats.org/drawingml/2006/main">
               <a:ext uri="{FF2B5EF4-FFF2-40B4-BE49-F238E27FC236}">
-                <a16:creationId xmlns:a16="http://schemas.microsoft.com/office/drawing/2014/main" id="{5AC308F9-9651-423C-B6A7-9059CA387304}"/>
+                <a16:creationId xmlns:a16="http://schemas.microsoft.com/office/drawing/2014/main" id="{D4FD475B-A86A-432B-9BEB-0A1BE2641D01}"/>
               </a:ext>
             </a:extLst>
           </p:cNvPr>
@@ -15117,7 +15117,7 @@
           <p:nvPr/>
         </p:nvPicPr>
         <p:blipFill>
-          <a:blip xmlns:r="http://schemas.openxmlformats.org/officeDocument/2006/relationships" xmlns:a="http://schemas.openxmlformats.org/drawingml/2006/main" r:embed="R9f379bef18414eb7"/>
+          <a:blip xmlns:r="http://schemas.openxmlformats.org/officeDocument/2006/relationships" xmlns:a="http://schemas.openxmlformats.org/drawingml/2006/main" r:embed="Rf4b37f7578494f9b"/>
           <a:stretch xmlns:a="http://schemas.openxmlformats.org/drawingml/2006/main"/>
         </p:blipFill>
         <p:spPr>
@@ -15135,7 +15135,7 @@
           <p:cNvPr id="2" name="f117">
             <a:extLst xmlns:a="http://schemas.openxmlformats.org/drawingml/2006/main">
               <a:ext uri="{FF2B5EF4-FFF2-40B4-BE49-F238E27FC236}">
-                <a16:creationId xmlns:a16="http://schemas.microsoft.com/office/drawing/2014/main" id="{A12B0194-23E4-4393-8513-BBFC6CBA124A}"/>
+                <a16:creationId xmlns:a16="http://schemas.microsoft.com/office/drawing/2014/main" id="{29DE5338-FC68-4CB0-9D22-A2388A7F367F}"/>
               </a:ext>
             </a:extLst>
           </p:cNvPr>
@@ -15294,7 +15294,7 @@
           <p:cNvPr id="3" name="f118">
             <a:extLst xmlns:a="http://schemas.openxmlformats.org/drawingml/2006/main">
               <a:ext uri="{FF2B5EF4-FFF2-40B4-BE49-F238E27FC236}">
-                <a16:creationId xmlns:a16="http://schemas.microsoft.com/office/drawing/2014/main" id="{E9CD10F7-10C9-4B00-82B2-536AC9DD16B7}"/>
+                <a16:creationId xmlns:a16="http://schemas.microsoft.com/office/drawing/2014/main" id="{7975B12F-C1C0-4634-87FD-062B57E0C00B}"/>
               </a:ext>
             </a:extLst>
           </p:cNvPr>
@@ -15453,7 +15453,7 @@
           <p:cNvPr id="4" name="f119">
             <a:extLst xmlns:a="http://schemas.openxmlformats.org/drawingml/2006/main">
               <a:ext uri="{FF2B5EF4-FFF2-40B4-BE49-F238E27FC236}">
-                <a16:creationId xmlns:a16="http://schemas.microsoft.com/office/drawing/2014/main" id="{D32923E3-09FA-406E-AC67-2E228AD441BD}"/>
+                <a16:creationId xmlns:a16="http://schemas.microsoft.com/office/drawing/2014/main" id="{036D022E-245C-40D1-A8F1-37315D31B5B1}"/>
               </a:ext>
             </a:extLst>
           </p:cNvPr>
@@ -15612,7 +15612,7 @@
           <p:cNvPr id="5" name="f120">
             <a:extLst xmlns:a="http://schemas.openxmlformats.org/drawingml/2006/main">
               <a:ext uri="{FF2B5EF4-FFF2-40B4-BE49-F238E27FC236}">
-                <a16:creationId xmlns:a16="http://schemas.microsoft.com/office/drawing/2014/main" id="{7A84DB75-677F-4847-B64C-D107179CE07C}"/>
+                <a16:creationId xmlns:a16="http://schemas.microsoft.com/office/drawing/2014/main" id="{96F52C9A-E7E3-4654-A5BD-31394727A6FD}"/>
               </a:ext>
             </a:extLst>
           </p:cNvPr>
@@ -15771,7 +15771,7 @@
           <p:cNvPr id="6" name="f121">
             <a:extLst xmlns:a="http://schemas.openxmlformats.org/drawingml/2006/main">
               <a:ext uri="{FF2B5EF4-FFF2-40B4-BE49-F238E27FC236}">
-                <a16:creationId xmlns:a16="http://schemas.microsoft.com/office/drawing/2014/main" id="{1C66E1F1-DBB9-4C76-8D70-D8751CC4BC7C}"/>
+                <a16:creationId xmlns:a16="http://schemas.microsoft.com/office/drawing/2014/main" id="{C2D3866C-9DFF-4A45-B6B3-6AF2F6762890}"/>
               </a:ext>
             </a:extLst>
           </p:cNvPr>
@@ -15930,7 +15930,7 @@
           <p:cNvPr id="7" name="f122">
             <a:extLst xmlns:a="http://schemas.openxmlformats.org/drawingml/2006/main">
               <a:ext uri="{FF2B5EF4-FFF2-40B4-BE49-F238E27FC236}">
-                <a16:creationId xmlns:a16="http://schemas.microsoft.com/office/drawing/2014/main" id="{4BFAE904-14B6-45EC-87A8-1F4934754875}"/>
+                <a16:creationId xmlns:a16="http://schemas.microsoft.com/office/drawing/2014/main" id="{79C76C10-DB88-4AF7-9917-340CC3FFA2FD}"/>
               </a:ext>
             </a:extLst>
           </p:cNvPr>
@@ -16089,7 +16089,7 @@
           <p:cNvPr id="8" name="f123">
             <a:extLst xmlns:a="http://schemas.openxmlformats.org/drawingml/2006/main">
               <a:ext uri="{FF2B5EF4-FFF2-40B4-BE49-F238E27FC236}">
-                <a16:creationId xmlns:a16="http://schemas.microsoft.com/office/drawing/2014/main" id="{BF2F70CB-54B8-41B0-BBFD-BD0AAABEAE2A}"/>
+                <a16:creationId xmlns:a16="http://schemas.microsoft.com/office/drawing/2014/main" id="{0BD4A42B-3083-4F55-8CCE-32A18F537BBC}"/>
               </a:ext>
             </a:extLst>
           </p:cNvPr>
@@ -16248,7 +16248,7 @@
           <p:cNvPr id="9" name="f124">
             <a:extLst xmlns:a="http://schemas.openxmlformats.org/drawingml/2006/main">
               <a:ext uri="{FF2B5EF4-FFF2-40B4-BE49-F238E27FC236}">
-                <a16:creationId xmlns:a16="http://schemas.microsoft.com/office/drawing/2014/main" id="{97CEE9C7-D83D-452B-B53A-A4DA22A8307E}"/>
+                <a16:creationId xmlns:a16="http://schemas.microsoft.com/office/drawing/2014/main" id="{C3CEF9D9-851E-4BA9-AD44-741F1E365008}"/>
               </a:ext>
             </a:extLst>
           </p:cNvPr>
@@ -16407,7 +16407,7 @@
           <p:cNvPr id="10" name="f125">
             <a:extLst xmlns:a="http://schemas.openxmlformats.org/drawingml/2006/main">
               <a:ext uri="{FF2B5EF4-FFF2-40B4-BE49-F238E27FC236}">
-                <a16:creationId xmlns:a16="http://schemas.microsoft.com/office/drawing/2014/main" id="{65D6918B-3351-4CAC-BEE3-F970550FFB53}"/>
+                <a16:creationId xmlns:a16="http://schemas.microsoft.com/office/drawing/2014/main" id="{43EC270E-BA95-4D19-8CF3-2CF143D711ED}"/>
               </a:ext>
             </a:extLst>
           </p:cNvPr>
@@ -16566,7 +16566,7 @@
           <p:cNvPr id="11" name="f126">
             <a:extLst xmlns:a="http://schemas.openxmlformats.org/drawingml/2006/main">
               <a:ext uri="{FF2B5EF4-FFF2-40B4-BE49-F238E27FC236}">
-                <a16:creationId xmlns:a16="http://schemas.microsoft.com/office/drawing/2014/main" id="{C8D633BD-AD88-44B8-9B59-F7B2F9BA4846}"/>
+                <a16:creationId xmlns:a16="http://schemas.microsoft.com/office/drawing/2014/main" id="{E06DAF17-599D-47BD-8DC9-150FC5EC3A58}"/>
               </a:ext>
             </a:extLst>
           </p:cNvPr>
@@ -16725,7 +16725,7 @@
           <p:cNvPr id="12" name="f127">
             <a:extLst xmlns:a="http://schemas.openxmlformats.org/drawingml/2006/main">
               <a:ext uri="{FF2B5EF4-FFF2-40B4-BE49-F238E27FC236}">
-                <a16:creationId xmlns:a16="http://schemas.microsoft.com/office/drawing/2014/main" id="{B35C6E25-8A4C-454D-8CA5-61DF981400CF}"/>
+                <a16:creationId xmlns:a16="http://schemas.microsoft.com/office/drawing/2014/main" id="{39B2D913-6CE8-45A8-92A8-1E5B8289014E}"/>
               </a:ext>
             </a:extLst>
           </p:cNvPr>
@@ -16884,7 +16884,7 @@
           <p:cNvPr id="13" name="f128">
             <a:extLst xmlns:a="http://schemas.openxmlformats.org/drawingml/2006/main">
               <a:ext uri="{FF2B5EF4-FFF2-40B4-BE49-F238E27FC236}">
-                <a16:creationId xmlns:a16="http://schemas.microsoft.com/office/drawing/2014/main" id="{50C20EE8-574F-42AF-B07D-6C87750C3041}"/>
+                <a16:creationId xmlns:a16="http://schemas.microsoft.com/office/drawing/2014/main" id="{6DC9DDC7-1F64-473A-B35A-FFFBA3627555}"/>
               </a:ext>
             </a:extLst>
           </p:cNvPr>
@@ -17043,7 +17043,7 @@
           <p:cNvPr id="14" name="f129">
             <a:extLst xmlns:a="http://schemas.openxmlformats.org/drawingml/2006/main">
               <a:ext uri="{FF2B5EF4-FFF2-40B4-BE49-F238E27FC236}">
-                <a16:creationId xmlns:a16="http://schemas.microsoft.com/office/drawing/2014/main" id="{BB81E9DC-DFBA-4E0C-8454-7FF95214CC2D}"/>
+                <a16:creationId xmlns:a16="http://schemas.microsoft.com/office/drawing/2014/main" id="{87DB7606-52BB-4047-9E66-61D846159192}"/>
               </a:ext>
             </a:extLst>
           </p:cNvPr>
@@ -17200,7 +17200,7 @@
     </p:spTree>
     <p:extLst>
       <p:ext uri="{BB962C8B-B14F-4D97-AF65-F5344CB8AC3E}">
-        <p14:creationId xmlns:p14="http://schemas.microsoft.com/office/powerpoint/2010/main" val="257938701"/>
+        <p14:creationId xmlns:p14="http://schemas.microsoft.com/office/powerpoint/2010/main" val="1534536425"/>
       </p:ext>
     </p:extLst>
   </p:cSld>
@@ -17231,7 +17231,7 @@
           <p:cNvPr id="13" name="f130">
             <a:extLst xmlns:a="http://schemas.openxmlformats.org/drawingml/2006/main">
               <a:ext uri="{FF2B5EF4-FFF2-40B4-BE49-F238E27FC236}">
-                <a16:creationId xmlns:a16="http://schemas.microsoft.com/office/drawing/2014/main" id="{02B68802-F137-4325-9222-63765BF1660D}"/>
+                <a16:creationId xmlns:a16="http://schemas.microsoft.com/office/drawing/2014/main" id="{67CE21E1-A8E7-4C78-BCE5-A685B29EA681}"/>
               </a:ext>
             </a:extLst>
           </p:cNvPr>
@@ -17390,7 +17390,7 @@
           <p:cNvPr id="2" name="f131">
             <a:extLst xmlns:a="http://schemas.openxmlformats.org/drawingml/2006/main">
               <a:ext uri="{FF2B5EF4-FFF2-40B4-BE49-F238E27FC236}">
-                <a16:creationId xmlns:a16="http://schemas.microsoft.com/office/drawing/2014/main" id="{B38F6671-5870-43F7-A32E-1A29F2AB0C4E}"/>
+                <a16:creationId xmlns:a16="http://schemas.microsoft.com/office/drawing/2014/main" id="{EDDC4C45-00F2-485D-8B36-14542002E599}"/>
               </a:ext>
             </a:extLst>
           </p:cNvPr>
@@ -17549,7 +17549,7 @@
           <p:cNvPr id="3" name="f132">
             <a:extLst xmlns:a="http://schemas.openxmlformats.org/drawingml/2006/main">
               <a:ext uri="{FF2B5EF4-FFF2-40B4-BE49-F238E27FC236}">
-                <a16:creationId xmlns:a16="http://schemas.microsoft.com/office/drawing/2014/main" id="{3DB040BD-5D8B-4C59-813A-D1B837B443D7}"/>
+                <a16:creationId xmlns:a16="http://schemas.microsoft.com/office/drawing/2014/main" id="{6661C654-1EE6-49F6-8541-ECB3B2931C46}"/>
               </a:ext>
             </a:extLst>
           </p:cNvPr>
@@ -17708,7 +17708,7 @@
           <p:cNvPr id="4" name="f133">
             <a:extLst xmlns:a="http://schemas.openxmlformats.org/drawingml/2006/main">
               <a:ext uri="{FF2B5EF4-FFF2-40B4-BE49-F238E27FC236}">
-                <a16:creationId xmlns:a16="http://schemas.microsoft.com/office/drawing/2014/main" id="{9E98D249-7FFC-4DE6-B0AD-2A2CA8D663A2}"/>
+                <a16:creationId xmlns:a16="http://schemas.microsoft.com/office/drawing/2014/main" id="{47F87975-511E-4A46-9AA3-8246BB6FB2A6}"/>
               </a:ext>
             </a:extLst>
           </p:cNvPr>
@@ -17867,7 +17867,7 @@
           <p:cNvPr id="5" name="">
             <a:extLst xmlns:a="http://schemas.openxmlformats.org/drawingml/2006/main">
               <a:ext uri="{FF2B5EF4-FFF2-40B4-BE49-F238E27FC236}">
-                <a16:creationId xmlns:a16="http://schemas.microsoft.com/office/drawing/2014/main" id="{7262E0EC-BD76-47A5-A25E-08603C6EE300}"/>
+                <a16:creationId xmlns:a16="http://schemas.microsoft.com/office/drawing/2014/main" id="{E3715459-DC23-46FD-A16B-C0E397885419}"/>
               </a:ext>
             </a:extLst>
           </p:cNvPr>
@@ -18703,7 +18703,7 @@
           <p:cNvPr id="6" name="f135">
             <a:extLst xmlns:a="http://schemas.openxmlformats.org/drawingml/2006/main">
               <a:ext uri="{FF2B5EF4-FFF2-40B4-BE49-F238E27FC236}">
-                <a16:creationId xmlns:a16="http://schemas.microsoft.com/office/drawing/2014/main" id="{A46B5714-0F67-4EE2-9271-68836177BDFF}"/>
+                <a16:creationId xmlns:a16="http://schemas.microsoft.com/office/drawing/2014/main" id="{146646E8-1534-4451-9A3C-C7C739A82D12}"/>
               </a:ext>
             </a:extLst>
           </p:cNvPr>
@@ -18738,7 +18738,7 @@
           <p:cNvPr id="7" name="f136">
             <a:extLst xmlns:a="http://schemas.openxmlformats.org/drawingml/2006/main">
               <a:ext uri="{FF2B5EF4-FFF2-40B4-BE49-F238E27FC236}">
-                <a16:creationId xmlns:a16="http://schemas.microsoft.com/office/drawing/2014/main" id="{AFAE871E-B529-4BB3-894A-03935CEE3234}"/>
+                <a16:creationId xmlns:a16="http://schemas.microsoft.com/office/drawing/2014/main" id="{5B8B7961-463B-48AA-8B50-0E019ADF82AE}"/>
               </a:ext>
             </a:extLst>
           </p:cNvPr>
@@ -18897,7 +18897,7 @@
           <p:cNvPr id="8" name="f137">
             <a:extLst xmlns:a="http://schemas.openxmlformats.org/drawingml/2006/main">
               <a:ext uri="{FF2B5EF4-FFF2-40B4-BE49-F238E27FC236}">
-                <a16:creationId xmlns:a16="http://schemas.microsoft.com/office/drawing/2014/main" id="{F3ADFDA7-5160-47C2-B3AD-9B8F76797A8F}"/>
+                <a16:creationId xmlns:a16="http://schemas.microsoft.com/office/drawing/2014/main" id="{CE7289F5-74D7-4D79-9804-D0A82A202753}"/>
               </a:ext>
             </a:extLst>
           </p:cNvPr>
@@ -19056,7 +19056,7 @@
           <p:cNvPr id="9" name="f138">
             <a:extLst xmlns:a="http://schemas.openxmlformats.org/drawingml/2006/main">
               <a:ext uri="{FF2B5EF4-FFF2-40B4-BE49-F238E27FC236}">
-                <a16:creationId xmlns:a16="http://schemas.microsoft.com/office/drawing/2014/main" id="{1903A85A-7D15-4314-A84B-3A8B2128754A}"/>
+                <a16:creationId xmlns:a16="http://schemas.microsoft.com/office/drawing/2014/main" id="{B6F7E517-C236-481F-9FF5-C71BB6EA0D57}"/>
               </a:ext>
             </a:extLst>
           </p:cNvPr>
@@ -19215,7 +19215,7 @@
           <p:cNvPr id="10" name="f139">
             <a:extLst xmlns:a="http://schemas.openxmlformats.org/drawingml/2006/main">
               <a:ext uri="{FF2B5EF4-FFF2-40B4-BE49-F238E27FC236}">
-                <a16:creationId xmlns:a16="http://schemas.microsoft.com/office/drawing/2014/main" id="{4A2D6B34-2F31-4C28-93AF-E7F5F81DB039}"/>
+                <a16:creationId xmlns:a16="http://schemas.microsoft.com/office/drawing/2014/main" id="{CA126CDA-1B29-4729-9606-82D8B88A8EB6}"/>
               </a:ext>
             </a:extLst>
           </p:cNvPr>
@@ -19374,7 +19374,7 @@
           <p:cNvPr id="11" name="f140">
             <a:extLst xmlns:a="http://schemas.openxmlformats.org/drawingml/2006/main">
               <a:ext uri="{FF2B5EF4-FFF2-40B4-BE49-F238E27FC236}">
-                <a16:creationId xmlns:a16="http://schemas.microsoft.com/office/drawing/2014/main" id="{6D343CD1-9A22-4754-9EA5-27C5E871B26A}"/>
+                <a16:creationId xmlns:a16="http://schemas.microsoft.com/office/drawing/2014/main" id="{BFCD0EC4-76E4-4AC1-AABD-EF41CB31C8C5}"/>
               </a:ext>
             </a:extLst>
           </p:cNvPr>
@@ -19533,7 +19533,7 @@
           <p:cNvPr id="12" name="f141">
             <a:extLst xmlns:a="http://schemas.openxmlformats.org/drawingml/2006/main">
               <a:ext uri="{FF2B5EF4-FFF2-40B4-BE49-F238E27FC236}">
-                <a16:creationId xmlns:a16="http://schemas.microsoft.com/office/drawing/2014/main" id="{F3889260-17FB-4AE4-B33B-3E6972FA3A89}"/>
+                <a16:creationId xmlns:a16="http://schemas.microsoft.com/office/drawing/2014/main" id="{8DD42DFA-D720-454E-A6D0-3BD61650A07B}"/>
               </a:ext>
             </a:extLst>
           </p:cNvPr>
@@ -19690,7 +19690,7 @@
     </p:spTree>
     <p:extLst>
       <p:ext uri="{BB962C8B-B14F-4D97-AF65-F5344CB8AC3E}">
-        <p14:creationId xmlns:p14="http://schemas.microsoft.com/office/powerpoint/2010/main" val="1004324616"/>
+        <p14:creationId xmlns:p14="http://schemas.microsoft.com/office/powerpoint/2010/main" val="1082741093"/>
       </p:ext>
     </p:extLst>
   </p:cSld>
@@ -19718,10 +19718,10 @@
       </p:grpSpPr>
       <p:sp>
         <p:nvSpPr>
-          <p:cNvPr id="49" name="f142">
+          <p:cNvPr id="50" name="f142">
             <a:extLst xmlns:a="http://schemas.openxmlformats.org/drawingml/2006/main">
               <a:ext uri="{FF2B5EF4-FFF2-40B4-BE49-F238E27FC236}">
-                <a16:creationId xmlns:a16="http://schemas.microsoft.com/office/drawing/2014/main" id="{FAE84D9B-4533-457A-ACB1-4CFFBCB6F928}"/>
+                <a16:creationId xmlns:a16="http://schemas.microsoft.com/office/drawing/2014/main" id="{C9D4E24B-E91A-4A52-B9E7-0E9D28CCD085}"/>
               </a:ext>
             </a:extLst>
           </p:cNvPr>
@@ -19880,7 +19880,7 @@
           <p:cNvPr id="2" name="f143">
             <a:extLst xmlns:a="http://schemas.openxmlformats.org/drawingml/2006/main">
               <a:ext uri="{FF2B5EF4-FFF2-40B4-BE49-F238E27FC236}">
-                <a16:creationId xmlns:a16="http://schemas.microsoft.com/office/drawing/2014/main" id="{E940BB28-2915-4B3F-87D5-2664F44CB464}"/>
+                <a16:creationId xmlns:a16="http://schemas.microsoft.com/office/drawing/2014/main" id="{8548F51F-218D-47B1-897D-E8F7FE572C9F}"/>
               </a:ext>
             </a:extLst>
           </p:cNvPr>
@@ -20039,7 +20039,7 @@
           <p:cNvPr id="3" name="f144">
             <a:extLst xmlns:a="http://schemas.openxmlformats.org/drawingml/2006/main">
               <a:ext uri="{FF2B5EF4-FFF2-40B4-BE49-F238E27FC236}">
-                <a16:creationId xmlns:a16="http://schemas.microsoft.com/office/drawing/2014/main" id="{517110F0-F8BF-4118-BFFE-7E3778B30CA5}"/>
+                <a16:creationId xmlns:a16="http://schemas.microsoft.com/office/drawing/2014/main" id="{BF2D923E-2B53-4BFA-A0B0-785FAD821505}"/>
               </a:ext>
             </a:extLst>
           </p:cNvPr>
@@ -20198,7 +20198,7 @@
           <p:cNvPr id="4" name="f145">
             <a:extLst xmlns:a="http://schemas.openxmlformats.org/drawingml/2006/main">
               <a:ext uri="{FF2B5EF4-FFF2-40B4-BE49-F238E27FC236}">
-                <a16:creationId xmlns:a16="http://schemas.microsoft.com/office/drawing/2014/main" id="{C6D95EBD-E461-4B54-BC2B-FC82E1E33EE6}"/>
+                <a16:creationId xmlns:a16="http://schemas.microsoft.com/office/drawing/2014/main" id="{CA648F6F-9E4F-4F02-8EB7-A4CD5E41D2D8}"/>
               </a:ext>
             </a:extLst>
           </p:cNvPr>
@@ -20354,10 +20354,45 @@
       </p:sp>
       <p:sp>
         <p:nvSpPr>
+          <p:cNvPr id="51" name="dim_f146">
+            <a:extLst xmlns:a="http://schemas.openxmlformats.org/drawingml/2006/main">
+              <a:ext uri="{FF2B5EF4-FFF2-40B4-BE49-F238E27FC236}">
+                <a16:creationId xmlns:a16="http://schemas.microsoft.com/office/drawing/2014/main" id="{C2E20DF5-6D16-4149-B71B-1EEDBC9A1CED}"/>
+              </a:ext>
+            </a:extLst>
+          </p:cNvPr>
+          <p:cNvSpPr>
+            <a:spLocks xmlns:a="http://schemas.openxmlformats.org/drawingml/2006/main" noGrp="1"/>
+          </p:cNvSpPr>
+          <p:nvPr/>
+        </p:nvSpPr>
+        <p:spPr>
+          <a:xfrm xmlns:a="http://schemas.openxmlformats.org/drawingml/2006/main">
+            <a:off x="571500" y="3048000"/>
+            <a:ext cx="1428750" cy="590550"/>
+          </a:xfrm>
+          <a:prstGeom xmlns:a="http://schemas.openxmlformats.org/drawingml/2006/main" prst="roundRect">
+            <a:avLst>
+              <a:gd name="adj" fmla="val 19355"/>
+            </a:avLst>
+          </a:prstGeom>
+          <a:solidFill xmlns:a="http://schemas.openxmlformats.org/drawingml/2006/main">
+            <a:srgbClr val="F2F6FA"/>
+          </a:solidFill>
+          <a:ln xmlns:a="http://schemas.openxmlformats.org/drawingml/2006/main" w="17145">
+            <a:solidFill>
+              <a:srgbClr val="ECF1F6"/>
+            </a:solidFill>
+            <a:prstDash val="solid"/>
+          </a:ln>
+        </p:spPr>
+      </p:sp>
+      <p:sp>
+        <p:nvSpPr>
           <p:cNvPr id="5" name="f146">
             <a:extLst xmlns:a="http://schemas.openxmlformats.org/drawingml/2006/main">
               <a:ext uri="{FF2B5EF4-FFF2-40B4-BE49-F238E27FC236}">
-                <a16:creationId xmlns:a16="http://schemas.microsoft.com/office/drawing/2014/main" id="{542E68A1-A13E-4A6E-B1FC-DE278B495DBD}"/>
+                <a16:creationId xmlns:a16="http://schemas.microsoft.com/office/drawing/2014/main" id="{C2E20DF5-6D16-4149-B71B-1EEDBC9A1CED}"/>
               </a:ext>
             </a:extLst>
           </p:cNvPr>
@@ -20389,10 +20424,45 @@
       </p:sp>
       <p:sp>
         <p:nvSpPr>
-          <p:cNvPr id="6" name="f147">
+          <p:cNvPr id="52" name="phaseC_f146">
             <a:extLst xmlns:a="http://schemas.openxmlformats.org/drawingml/2006/main">
               <a:ext uri="{FF2B5EF4-FFF2-40B4-BE49-F238E27FC236}">
-                <a16:creationId xmlns:a16="http://schemas.microsoft.com/office/drawing/2014/main" id="{79DAFEEE-837D-4316-A1D9-9849888D73FD}"/>
+                <a16:creationId xmlns:a16="http://schemas.microsoft.com/office/drawing/2014/main" id="{C2E20DF5-6D16-4149-B71B-1EEDBC9A1CED}"/>
+              </a:ext>
+            </a:extLst>
+          </p:cNvPr>
+          <p:cNvSpPr>
+            <a:spLocks xmlns:a="http://schemas.openxmlformats.org/drawingml/2006/main" noGrp="1"/>
+          </p:cNvSpPr>
+          <p:nvPr/>
+        </p:nvSpPr>
+        <p:spPr>
+          <a:xfrm xmlns:a="http://schemas.openxmlformats.org/drawingml/2006/main">
+            <a:off x="571500" y="3048000"/>
+            <a:ext cx="1428750" cy="590550"/>
+          </a:xfrm>
+          <a:prstGeom xmlns:a="http://schemas.openxmlformats.org/drawingml/2006/main" prst="roundRect">
+            <a:avLst>
+              <a:gd name="adj" fmla="val 19355"/>
+            </a:avLst>
+          </a:prstGeom>
+          <a:solidFill xmlns:a="http://schemas.openxmlformats.org/drawingml/2006/main">
+            <a:srgbClr val="F0F4FF"/>
+          </a:solidFill>
+          <a:ln xmlns:a="http://schemas.openxmlformats.org/drawingml/2006/main" w="17145">
+            <a:solidFill>
+              <a:srgbClr val="D9E3EF"/>
+            </a:solidFill>
+            <a:prstDash val="solid"/>
+          </a:ln>
+        </p:spPr>
+      </p:sp>
+      <p:sp>
+        <p:nvSpPr>
+          <p:cNvPr id="53" name="dim_f147">
+            <a:extLst xmlns:a="http://schemas.openxmlformats.org/drawingml/2006/main">
+              <a:ext uri="{FF2B5EF4-FFF2-40B4-BE49-F238E27FC236}">
+                <a16:creationId xmlns:a16="http://schemas.microsoft.com/office/drawing/2014/main" id="{AF24B891-D213-453F-8A16-C0DC7EB8C2B9}"/>
               </a:ext>
             </a:extLst>
           </p:cNvPr>
@@ -20423,7 +20493,7 @@
             <a:defPPr algn="ctr">
               <a:defRPr sz="2250" b="1">
                 <a:solidFill>
-                  <a:srgbClr val="4264D0"/>
+                  <a:srgbClr val="C7D2EF"/>
                 </a:solidFill>
                 <a:latin typeface="Nimbus Sans"/>
                 <a:ea typeface="Nimbus Sans"/>
@@ -20433,7 +20503,7 @@
             <a:lvl1pPr algn="ctr">
               <a:defRPr sz="2250" b="1">
                 <a:solidFill>
-                  <a:srgbClr val="4264D0"/>
+                  <a:srgbClr val="C7D2EF"/>
                 </a:solidFill>
                 <a:latin typeface="Nimbus Sans"/>
                 <a:ea typeface="Nimbus Sans"/>
@@ -20443,7 +20513,7 @@
             <a:lvl2pPr algn="ctr">
               <a:defRPr sz="2250" b="1">
                 <a:solidFill>
-                  <a:srgbClr val="4264D0"/>
+                  <a:srgbClr val="C7D2EF"/>
                 </a:solidFill>
                 <a:latin typeface="Nimbus Sans"/>
                 <a:ea typeface="Nimbus Sans"/>
@@ -20453,7 +20523,7 @@
             <a:lvl3pPr algn="ctr">
               <a:defRPr sz="2250" b="1">
                 <a:solidFill>
-                  <a:srgbClr val="4264D0"/>
+                  <a:srgbClr val="C7D2EF"/>
                 </a:solidFill>
                 <a:latin typeface="Nimbus Sans"/>
                 <a:ea typeface="Nimbus Sans"/>
@@ -20463,7 +20533,7 @@
             <a:lvl4pPr algn="ctr">
               <a:defRPr sz="2250" b="1">
                 <a:solidFill>
-                  <a:srgbClr val="4264D0"/>
+                  <a:srgbClr val="C7D2EF"/>
                 </a:solidFill>
                 <a:latin typeface="Nimbus Sans"/>
                 <a:ea typeface="Nimbus Sans"/>
@@ -20473,7 +20543,7 @@
             <a:lvl5pPr algn="ctr">
               <a:defRPr sz="2250" b="1">
                 <a:solidFill>
-                  <a:srgbClr val="4264D0"/>
+                  <a:srgbClr val="C7D2EF"/>
                 </a:solidFill>
                 <a:latin typeface="Nimbus Sans"/>
                 <a:ea typeface="Nimbus Sans"/>
@@ -20483,7 +20553,7 @@
             <a:lvl6pPr algn="ctr">
               <a:defRPr sz="2250" b="1">
                 <a:solidFill>
-                  <a:srgbClr val="4264D0"/>
+                  <a:srgbClr val="C7D2EF"/>
                 </a:solidFill>
                 <a:latin typeface="Nimbus Sans"/>
                 <a:ea typeface="Nimbus Sans"/>
@@ -20493,7 +20563,7 @@
             <a:lvl7pPr algn="ctr">
               <a:defRPr sz="2250" b="1">
                 <a:solidFill>
-                  <a:srgbClr val="4264D0"/>
+                  <a:srgbClr val="C7D2EF"/>
                 </a:solidFill>
                 <a:latin typeface="Nimbus Sans"/>
                 <a:ea typeface="Nimbus Sans"/>
@@ -20503,7 +20573,7 @@
             <a:lvl8pPr algn="ctr">
               <a:defRPr sz="2250" b="1">
                 <a:solidFill>
-                  <a:srgbClr val="4264D0"/>
+                  <a:srgbClr val="C7D2EF"/>
                 </a:solidFill>
                 <a:latin typeface="Nimbus Sans"/>
                 <a:ea typeface="Nimbus Sans"/>
@@ -20513,7 +20583,7 @@
             <a:lvl9pPr algn="ctr">
               <a:defRPr sz="2250" b="1">
                 <a:solidFill>
-                  <a:srgbClr val="4264D0"/>
+                  <a:srgbClr val="C7D2EF"/>
                 </a:solidFill>
                 <a:latin typeface="Nimbus Sans"/>
                 <a:ea typeface="Nimbus Sans"/>
@@ -20525,7 +20595,7 @@
             <a:pPr algn="ctr">
               <a:defRPr sz="2250" b="1">
                 <a:solidFill>
-                  <a:srgbClr val="4264D0"/>
+                  <a:srgbClr val="C7D2EF"/>
                 </a:solidFill>
                 <a:latin typeface="Nimbus Sans"/>
                 <a:ea typeface="Nimbus Sans"/>
@@ -20535,7 +20605,7 @@
             <a:r>
               <a:rPr sz="2250" b="1">
                 <a:solidFill>
-                  <a:srgbClr val="4264D0"/>
+                  <a:srgbClr val="C7D2EF"/>
                 </a:solidFill>
                 <a:latin typeface="Nimbus Sans"/>
                 <a:ea typeface="Nimbus Sans"/>
@@ -20548,10 +20618,328 @@
       </p:sp>
       <p:sp>
         <p:nvSpPr>
-          <p:cNvPr id="50" name="dim_f148">
+          <p:cNvPr id="6" name="f147">
             <a:extLst xmlns:a="http://schemas.openxmlformats.org/drawingml/2006/main">
               <a:ext uri="{FF2B5EF4-FFF2-40B4-BE49-F238E27FC236}">
-                <a16:creationId xmlns:a16="http://schemas.microsoft.com/office/drawing/2014/main" id="{23B54C86-3E35-4D23-A2F5-0B43F53F3C00}"/>
+                <a16:creationId xmlns:a16="http://schemas.microsoft.com/office/drawing/2014/main" id="{AF24B891-D213-453F-8A16-C0DC7EB8C2B9}"/>
+              </a:ext>
+            </a:extLst>
+          </p:cNvPr>
+          <p:cNvSpPr>
+            <a:spLocks xmlns:a="http://schemas.openxmlformats.org/drawingml/2006/main" noGrp="1"/>
+          </p:cNvSpPr>
+          <p:nvPr/>
+        </p:nvSpPr>
+        <p:spPr>
+          <a:xfrm xmlns:a="http://schemas.openxmlformats.org/drawingml/2006/main">
+            <a:off x="666750" y="3200400"/>
+            <a:ext cx="1238250" cy="361950"/>
+          </a:xfrm>
+          <a:prstGeom xmlns:a="http://schemas.openxmlformats.org/drawingml/2006/main" prst="rect">
+            <a:avLst/>
+          </a:prstGeom>
+          <a:noFill xmlns:a="http://schemas.openxmlformats.org/drawingml/2006/main"/>
+          <a:ln xmlns:a="http://schemas.openxmlformats.org/drawingml/2006/main" w="0">
+            <a:noFill/>
+            <a:prstDash val="solid"/>
+          </a:ln>
+        </p:spPr>
+        <p:txBody>
+          <a:bodyPr xmlns:a="http://schemas.openxmlformats.org/drawingml/2006/main" wrap="none" lIns="0" tIns="0" rIns="0" bIns="0" anchor="t">
+            <a:noAutofit/>
+          </a:bodyPr>
+          <a:lstStyle xmlns:a="http://schemas.openxmlformats.org/drawingml/2006/main">
+            <a:defPPr algn="ctr">
+              <a:defRPr sz="2250" b="1">
+                <a:solidFill>
+                  <a:srgbClr val="4264D0"/>
+                </a:solidFill>
+                <a:latin typeface="Nimbus Sans"/>
+                <a:ea typeface="Nimbus Sans"/>
+                <a:cs typeface="Nimbus Sans"/>
+              </a:defRPr>
+            </a:defPPr>
+            <a:lvl1pPr algn="ctr">
+              <a:defRPr sz="2250" b="1">
+                <a:solidFill>
+                  <a:srgbClr val="4264D0"/>
+                </a:solidFill>
+                <a:latin typeface="Nimbus Sans"/>
+                <a:ea typeface="Nimbus Sans"/>
+                <a:cs typeface="Nimbus Sans"/>
+              </a:defRPr>
+            </a:lvl1pPr>
+            <a:lvl2pPr algn="ctr">
+              <a:defRPr sz="2250" b="1">
+                <a:solidFill>
+                  <a:srgbClr val="4264D0"/>
+                </a:solidFill>
+                <a:latin typeface="Nimbus Sans"/>
+                <a:ea typeface="Nimbus Sans"/>
+                <a:cs typeface="Nimbus Sans"/>
+              </a:defRPr>
+            </a:lvl2pPr>
+            <a:lvl3pPr algn="ctr">
+              <a:defRPr sz="2250" b="1">
+                <a:solidFill>
+                  <a:srgbClr val="4264D0"/>
+                </a:solidFill>
+                <a:latin typeface="Nimbus Sans"/>
+                <a:ea typeface="Nimbus Sans"/>
+                <a:cs typeface="Nimbus Sans"/>
+              </a:defRPr>
+            </a:lvl3pPr>
+            <a:lvl4pPr algn="ctr">
+              <a:defRPr sz="2250" b="1">
+                <a:solidFill>
+                  <a:srgbClr val="4264D0"/>
+                </a:solidFill>
+                <a:latin typeface="Nimbus Sans"/>
+                <a:ea typeface="Nimbus Sans"/>
+                <a:cs typeface="Nimbus Sans"/>
+              </a:defRPr>
+            </a:lvl4pPr>
+            <a:lvl5pPr algn="ctr">
+              <a:defRPr sz="2250" b="1">
+                <a:solidFill>
+                  <a:srgbClr val="4264D0"/>
+                </a:solidFill>
+                <a:latin typeface="Nimbus Sans"/>
+                <a:ea typeface="Nimbus Sans"/>
+                <a:cs typeface="Nimbus Sans"/>
+              </a:defRPr>
+            </a:lvl5pPr>
+            <a:lvl6pPr algn="ctr">
+              <a:defRPr sz="2250" b="1">
+                <a:solidFill>
+                  <a:srgbClr val="4264D0"/>
+                </a:solidFill>
+                <a:latin typeface="Nimbus Sans"/>
+                <a:ea typeface="Nimbus Sans"/>
+                <a:cs typeface="Nimbus Sans"/>
+              </a:defRPr>
+            </a:lvl6pPr>
+            <a:lvl7pPr algn="ctr">
+              <a:defRPr sz="2250" b="1">
+                <a:solidFill>
+                  <a:srgbClr val="4264D0"/>
+                </a:solidFill>
+                <a:latin typeface="Nimbus Sans"/>
+                <a:ea typeface="Nimbus Sans"/>
+                <a:cs typeface="Nimbus Sans"/>
+              </a:defRPr>
+            </a:lvl7pPr>
+            <a:lvl8pPr algn="ctr">
+              <a:defRPr sz="2250" b="1">
+                <a:solidFill>
+                  <a:srgbClr val="4264D0"/>
+                </a:solidFill>
+                <a:latin typeface="Nimbus Sans"/>
+                <a:ea typeface="Nimbus Sans"/>
+                <a:cs typeface="Nimbus Sans"/>
+              </a:defRPr>
+            </a:lvl8pPr>
+            <a:lvl9pPr algn="ctr">
+              <a:defRPr sz="2250" b="1">
+                <a:solidFill>
+                  <a:srgbClr val="4264D0"/>
+                </a:solidFill>
+                <a:latin typeface="Nimbus Sans"/>
+                <a:ea typeface="Nimbus Sans"/>
+                <a:cs typeface="Nimbus Sans"/>
+              </a:defRPr>
+            </a:lvl9pPr>
+          </a:lstStyle>
+          <a:p xmlns:a="http://schemas.openxmlformats.org/drawingml/2006/main">
+            <a:pPr algn="ctr">
+              <a:defRPr sz="2250" b="1">
+                <a:solidFill>
+                  <a:srgbClr val="4264D0"/>
+                </a:solidFill>
+                <a:latin typeface="Nimbus Sans"/>
+                <a:ea typeface="Nimbus Sans"/>
+                <a:cs typeface="Nimbus Sans"/>
+              </a:defRPr>
+            </a:pPr>
+            <a:r>
+              <a:rPr sz="2250" b="1">
+                <a:solidFill>
+                  <a:srgbClr val="4264D0"/>
+                </a:solidFill>
+                <a:latin typeface="Nimbus Sans"/>
+                <a:ea typeface="Nimbus Sans"/>
+                <a:cs typeface="Nimbus Sans"/>
+              </a:rPr>
+              <a:t>DSL</a:t>
+            </a:r>
+          </a:p>
+        </p:txBody>
+      </p:sp>
+      <p:sp>
+        <p:nvSpPr>
+          <p:cNvPr id="54" name="phaseC_f147">
+            <a:extLst xmlns:a="http://schemas.openxmlformats.org/drawingml/2006/main">
+              <a:ext uri="{FF2B5EF4-FFF2-40B4-BE49-F238E27FC236}">
+                <a16:creationId xmlns:a16="http://schemas.microsoft.com/office/drawing/2014/main" id="{AF24B891-D213-453F-8A16-C0DC7EB8C2B9}"/>
+              </a:ext>
+            </a:extLst>
+          </p:cNvPr>
+          <p:cNvSpPr>
+            <a:spLocks xmlns:a="http://schemas.openxmlformats.org/drawingml/2006/main" noGrp="1"/>
+          </p:cNvSpPr>
+          <p:nvPr/>
+        </p:nvSpPr>
+        <p:spPr>
+          <a:xfrm xmlns:a="http://schemas.openxmlformats.org/drawingml/2006/main">
+            <a:off x="666750" y="3200400"/>
+            <a:ext cx="1238250" cy="361950"/>
+          </a:xfrm>
+          <a:prstGeom xmlns:a="http://schemas.openxmlformats.org/drawingml/2006/main" prst="rect">
+            <a:avLst/>
+          </a:prstGeom>
+          <a:noFill xmlns:a="http://schemas.openxmlformats.org/drawingml/2006/main"/>
+          <a:ln xmlns:a="http://schemas.openxmlformats.org/drawingml/2006/main" w="0">
+            <a:noFill/>
+            <a:prstDash val="solid"/>
+          </a:ln>
+        </p:spPr>
+        <p:txBody>
+          <a:bodyPr xmlns:a="http://schemas.openxmlformats.org/drawingml/2006/main" wrap="none" lIns="0" tIns="0" rIns="0" bIns="0" anchor="t">
+            <a:noAutofit/>
+          </a:bodyPr>
+          <a:lstStyle xmlns:a="http://schemas.openxmlformats.org/drawingml/2006/main">
+            <a:defPPr algn="ctr">
+              <a:defRPr sz="2250" b="1">
+                <a:solidFill>
+                  <a:srgbClr val="4264D0"/>
+                </a:solidFill>
+                <a:latin typeface="Nimbus Sans"/>
+                <a:ea typeface="Nimbus Sans"/>
+                <a:cs typeface="Nimbus Sans"/>
+              </a:defRPr>
+            </a:defPPr>
+            <a:lvl1pPr algn="ctr">
+              <a:defRPr sz="2250" b="1">
+                <a:solidFill>
+                  <a:srgbClr val="4264D0"/>
+                </a:solidFill>
+                <a:latin typeface="Nimbus Sans"/>
+                <a:ea typeface="Nimbus Sans"/>
+                <a:cs typeface="Nimbus Sans"/>
+              </a:defRPr>
+            </a:lvl1pPr>
+            <a:lvl2pPr algn="ctr">
+              <a:defRPr sz="2250" b="1">
+                <a:solidFill>
+                  <a:srgbClr val="4264D0"/>
+                </a:solidFill>
+                <a:latin typeface="Nimbus Sans"/>
+                <a:ea typeface="Nimbus Sans"/>
+                <a:cs typeface="Nimbus Sans"/>
+              </a:defRPr>
+            </a:lvl2pPr>
+            <a:lvl3pPr algn="ctr">
+              <a:defRPr sz="2250" b="1">
+                <a:solidFill>
+                  <a:srgbClr val="4264D0"/>
+                </a:solidFill>
+                <a:latin typeface="Nimbus Sans"/>
+                <a:ea typeface="Nimbus Sans"/>
+                <a:cs typeface="Nimbus Sans"/>
+              </a:defRPr>
+            </a:lvl3pPr>
+            <a:lvl4pPr algn="ctr">
+              <a:defRPr sz="2250" b="1">
+                <a:solidFill>
+                  <a:srgbClr val="4264D0"/>
+                </a:solidFill>
+                <a:latin typeface="Nimbus Sans"/>
+                <a:ea typeface="Nimbus Sans"/>
+                <a:cs typeface="Nimbus Sans"/>
+              </a:defRPr>
+            </a:lvl4pPr>
+            <a:lvl5pPr algn="ctr">
+              <a:defRPr sz="2250" b="1">
+                <a:solidFill>
+                  <a:srgbClr val="4264D0"/>
+                </a:solidFill>
+                <a:latin typeface="Nimbus Sans"/>
+                <a:ea typeface="Nimbus Sans"/>
+                <a:cs typeface="Nimbus Sans"/>
+              </a:defRPr>
+            </a:lvl5pPr>
+            <a:lvl6pPr algn="ctr">
+              <a:defRPr sz="2250" b="1">
+                <a:solidFill>
+                  <a:srgbClr val="4264D0"/>
+                </a:solidFill>
+                <a:latin typeface="Nimbus Sans"/>
+                <a:ea typeface="Nimbus Sans"/>
+                <a:cs typeface="Nimbus Sans"/>
+              </a:defRPr>
+            </a:lvl6pPr>
+            <a:lvl7pPr algn="ctr">
+              <a:defRPr sz="2250" b="1">
+                <a:solidFill>
+                  <a:srgbClr val="4264D0"/>
+                </a:solidFill>
+                <a:latin typeface="Nimbus Sans"/>
+                <a:ea typeface="Nimbus Sans"/>
+                <a:cs typeface="Nimbus Sans"/>
+              </a:defRPr>
+            </a:lvl7pPr>
+            <a:lvl8pPr algn="ctr">
+              <a:defRPr sz="2250" b="1">
+                <a:solidFill>
+                  <a:srgbClr val="4264D0"/>
+                </a:solidFill>
+                <a:latin typeface="Nimbus Sans"/>
+                <a:ea typeface="Nimbus Sans"/>
+                <a:cs typeface="Nimbus Sans"/>
+              </a:defRPr>
+            </a:lvl8pPr>
+            <a:lvl9pPr algn="ctr">
+              <a:defRPr sz="2250" b="1">
+                <a:solidFill>
+                  <a:srgbClr val="4264D0"/>
+                </a:solidFill>
+                <a:latin typeface="Nimbus Sans"/>
+                <a:ea typeface="Nimbus Sans"/>
+                <a:cs typeface="Nimbus Sans"/>
+              </a:defRPr>
+            </a:lvl9pPr>
+          </a:lstStyle>
+          <a:p xmlns:a="http://schemas.openxmlformats.org/drawingml/2006/main">
+            <a:pPr algn="ctr">
+              <a:defRPr sz="2250" b="1">
+                <a:solidFill>
+                  <a:srgbClr val="4264D0"/>
+                </a:solidFill>
+                <a:latin typeface="Nimbus Sans"/>
+                <a:ea typeface="Nimbus Sans"/>
+                <a:cs typeface="Nimbus Sans"/>
+              </a:defRPr>
+            </a:pPr>
+            <a:r>
+              <a:rPr sz="2250" b="1">
+                <a:solidFill>
+                  <a:srgbClr val="4264D0"/>
+                </a:solidFill>
+                <a:latin typeface="Nimbus Sans"/>
+                <a:ea typeface="Nimbus Sans"/>
+                <a:cs typeface="Nimbus Sans"/>
+              </a:rPr>
+              <a:t>DSL</a:t>
+            </a:r>
+          </a:p>
+        </p:txBody>
+      </p:sp>
+      <p:sp>
+        <p:nvSpPr>
+          <p:cNvPr id="55" name="dim_f148">
+            <a:extLst xmlns:a="http://schemas.openxmlformats.org/drawingml/2006/main">
+              <a:ext uri="{FF2B5EF4-FFF2-40B4-BE49-F238E27FC236}">
+                <a16:creationId xmlns:a16="http://schemas.microsoft.com/office/drawing/2014/main" id="{2C4C7E62-1C59-48D3-899B-8D7F97CC3D92}"/>
               </a:ext>
             </a:extLst>
           </p:cNvPr>
@@ -20586,7 +20974,7 @@
           <p:cNvPr id="7" name="f148">
             <a:extLst xmlns:a="http://schemas.openxmlformats.org/drawingml/2006/main">
               <a:ext uri="{FF2B5EF4-FFF2-40B4-BE49-F238E27FC236}">
-                <a16:creationId xmlns:a16="http://schemas.microsoft.com/office/drawing/2014/main" id="{23B54C86-3E35-4D23-A2F5-0B43F53F3C00}"/>
+                <a16:creationId xmlns:a16="http://schemas.microsoft.com/office/drawing/2014/main" id="{2C4C7E62-1C59-48D3-899B-8D7F97CC3D92}"/>
               </a:ext>
             </a:extLst>
           </p:cNvPr>
@@ -20618,10 +21006,10 @@
       </p:sp>
       <p:sp>
         <p:nvSpPr>
-          <p:cNvPr id="51" name="dim_f149">
+          <p:cNvPr id="56" name="dim_f149">
             <a:extLst xmlns:a="http://schemas.openxmlformats.org/drawingml/2006/main">
               <a:ext uri="{FF2B5EF4-FFF2-40B4-BE49-F238E27FC236}">
-                <a16:creationId xmlns:a16="http://schemas.microsoft.com/office/drawing/2014/main" id="{28A1F048-6BAE-47F7-9D90-77FF3DE18793}"/>
+                <a16:creationId xmlns:a16="http://schemas.microsoft.com/office/drawing/2014/main" id="{0576CCF8-D6A0-4109-90BF-DC468C483402}"/>
               </a:ext>
             </a:extLst>
           </p:cNvPr>
@@ -20780,7 +21168,7 @@
           <p:cNvPr id="8" name="f149">
             <a:extLst xmlns:a="http://schemas.openxmlformats.org/drawingml/2006/main">
               <a:ext uri="{FF2B5EF4-FFF2-40B4-BE49-F238E27FC236}">
-                <a16:creationId xmlns:a16="http://schemas.microsoft.com/office/drawing/2014/main" id="{28A1F048-6BAE-47F7-9D90-77FF3DE18793}"/>
+                <a16:creationId xmlns:a16="http://schemas.microsoft.com/office/drawing/2014/main" id="{0576CCF8-D6A0-4109-90BF-DC468C483402}"/>
               </a:ext>
             </a:extLst>
           </p:cNvPr>
@@ -20936,10 +21324,45 @@
       </p:sp>
       <p:sp>
         <p:nvSpPr>
+          <p:cNvPr id="57" name="dim_f150">
+            <a:extLst xmlns:a="http://schemas.openxmlformats.org/drawingml/2006/main">
+              <a:ext uri="{FF2B5EF4-FFF2-40B4-BE49-F238E27FC236}">
+                <a16:creationId xmlns:a16="http://schemas.microsoft.com/office/drawing/2014/main" id="{FC75EB8A-5481-4BB7-BECB-029912F4BB0D}"/>
+              </a:ext>
+            </a:extLst>
+          </p:cNvPr>
+          <p:cNvSpPr>
+            <a:spLocks xmlns:a="http://schemas.openxmlformats.org/drawingml/2006/main" noGrp="1"/>
+          </p:cNvSpPr>
+          <p:nvPr/>
+        </p:nvSpPr>
+        <p:spPr>
+          <a:xfrm xmlns:a="http://schemas.openxmlformats.org/drawingml/2006/main">
+            <a:off x="381000" y="4524375"/>
+            <a:ext cx="4667250" cy="819150"/>
+          </a:xfrm>
+          <a:prstGeom xmlns:a="http://schemas.openxmlformats.org/drawingml/2006/main" prst="roundRect">
+            <a:avLst>
+              <a:gd name="adj" fmla="val 13953"/>
+            </a:avLst>
+          </a:prstGeom>
+          <a:solidFill xmlns:a="http://schemas.openxmlformats.org/drawingml/2006/main">
+            <a:srgbClr val="F2F6F8"/>
+          </a:solidFill>
+          <a:ln xmlns:a="http://schemas.openxmlformats.org/drawingml/2006/main" w="17145">
+            <a:solidFill>
+              <a:srgbClr val="E7F0F0"/>
+            </a:solidFill>
+            <a:prstDash val="solid"/>
+          </a:ln>
+        </p:spPr>
+      </p:sp>
+      <p:sp>
+        <p:nvSpPr>
           <p:cNvPr id="9" name="f150">
             <a:extLst xmlns:a="http://schemas.openxmlformats.org/drawingml/2006/main">
               <a:ext uri="{FF2B5EF4-FFF2-40B4-BE49-F238E27FC236}">
-                <a16:creationId xmlns:a16="http://schemas.microsoft.com/office/drawing/2014/main" id="{E56F0C01-7B21-49BB-A9A8-7C0225FC2232}"/>
+                <a16:creationId xmlns:a16="http://schemas.microsoft.com/office/drawing/2014/main" id="{FC75EB8A-5481-4BB7-BECB-029912F4BB0D}"/>
               </a:ext>
             </a:extLst>
           </p:cNvPr>
@@ -20971,10 +21394,45 @@
       </p:sp>
       <p:sp>
         <p:nvSpPr>
-          <p:cNvPr id="10" name="f151">
+          <p:cNvPr id="58" name="phaseC_f150">
             <a:extLst xmlns:a="http://schemas.openxmlformats.org/drawingml/2006/main">
               <a:ext uri="{FF2B5EF4-FFF2-40B4-BE49-F238E27FC236}">
-                <a16:creationId xmlns:a16="http://schemas.microsoft.com/office/drawing/2014/main" id="{7EA61ED8-5D5A-4847-BA1C-D281298946D0}"/>
+                <a16:creationId xmlns:a16="http://schemas.microsoft.com/office/drawing/2014/main" id="{FC75EB8A-5481-4BB7-BECB-029912F4BB0D}"/>
+              </a:ext>
+            </a:extLst>
+          </p:cNvPr>
+          <p:cNvSpPr>
+            <a:spLocks xmlns:a="http://schemas.openxmlformats.org/drawingml/2006/main" noGrp="1"/>
+          </p:cNvSpPr>
+          <p:nvPr/>
+        </p:nvSpPr>
+        <p:spPr>
+          <a:xfrm xmlns:a="http://schemas.openxmlformats.org/drawingml/2006/main">
+            <a:off x="381000" y="4524375"/>
+            <a:ext cx="4667250" cy="819150"/>
+          </a:xfrm>
+          <a:prstGeom xmlns:a="http://schemas.openxmlformats.org/drawingml/2006/main" prst="roundRect">
+            <a:avLst>
+              <a:gd name="adj" fmla="val 13953"/>
+            </a:avLst>
+          </a:prstGeom>
+          <a:solidFill xmlns:a="http://schemas.openxmlformats.org/drawingml/2006/main">
+            <a:srgbClr val="EEF8F3"/>
+          </a:solidFill>
+          <a:ln xmlns:a="http://schemas.openxmlformats.org/drawingml/2006/main" w="17145">
+            <a:solidFill>
+              <a:srgbClr val="C4DFD3"/>
+            </a:solidFill>
+            <a:prstDash val="solid"/>
+          </a:ln>
+        </p:spPr>
+      </p:sp>
+      <p:sp>
+        <p:nvSpPr>
+          <p:cNvPr id="59" name="dim_f151">
+            <a:extLst xmlns:a="http://schemas.openxmlformats.org/drawingml/2006/main">
+              <a:ext uri="{FF2B5EF4-FFF2-40B4-BE49-F238E27FC236}">
+                <a16:creationId xmlns:a16="http://schemas.microsoft.com/office/drawing/2014/main" id="{F87DFBBA-C3EF-46F1-896D-FC3F7EEDFE28}"/>
               </a:ext>
             </a:extLst>
           </p:cNvPr>
@@ -21005,7 +21463,7 @@
             <a:defPPr algn="ctr">
               <a:defRPr sz="2250" b="1">
                 <a:solidFill>
-                  <a:srgbClr val="278766"/>
+                  <a:srgbClr val="C0DAD4"/>
                 </a:solidFill>
                 <a:latin typeface="Nimbus Sans"/>
                 <a:ea typeface="Nimbus Sans"/>
@@ -21015,7 +21473,7 @@
             <a:lvl1pPr algn="ctr">
               <a:defRPr sz="2250" b="1">
                 <a:solidFill>
-                  <a:srgbClr val="278766"/>
+                  <a:srgbClr val="C0DAD4"/>
                 </a:solidFill>
                 <a:latin typeface="Nimbus Sans"/>
                 <a:ea typeface="Nimbus Sans"/>
@@ -21025,7 +21483,7 @@
             <a:lvl2pPr algn="ctr">
               <a:defRPr sz="2250" b="1">
                 <a:solidFill>
-                  <a:srgbClr val="278766"/>
+                  <a:srgbClr val="C0DAD4"/>
                 </a:solidFill>
                 <a:latin typeface="Nimbus Sans"/>
                 <a:ea typeface="Nimbus Sans"/>
@@ -21035,7 +21493,7 @@
             <a:lvl3pPr algn="ctr">
               <a:defRPr sz="2250" b="1">
                 <a:solidFill>
-                  <a:srgbClr val="278766"/>
+                  <a:srgbClr val="C0DAD4"/>
                 </a:solidFill>
                 <a:latin typeface="Nimbus Sans"/>
                 <a:ea typeface="Nimbus Sans"/>
@@ -21045,7 +21503,7 @@
             <a:lvl4pPr algn="ctr">
               <a:defRPr sz="2250" b="1">
                 <a:solidFill>
-                  <a:srgbClr val="278766"/>
+                  <a:srgbClr val="C0DAD4"/>
                 </a:solidFill>
                 <a:latin typeface="Nimbus Sans"/>
                 <a:ea typeface="Nimbus Sans"/>
@@ -21055,7 +21513,7 @@
             <a:lvl5pPr algn="ctr">
               <a:defRPr sz="2250" b="1">
                 <a:solidFill>
-                  <a:srgbClr val="278766"/>
+                  <a:srgbClr val="C0DAD4"/>
                 </a:solidFill>
                 <a:latin typeface="Nimbus Sans"/>
                 <a:ea typeface="Nimbus Sans"/>
@@ -21065,7 +21523,7 @@
             <a:lvl6pPr algn="ctr">
               <a:defRPr sz="2250" b="1">
                 <a:solidFill>
-                  <a:srgbClr val="278766"/>
+                  <a:srgbClr val="C0DAD4"/>
                 </a:solidFill>
                 <a:latin typeface="Nimbus Sans"/>
                 <a:ea typeface="Nimbus Sans"/>
@@ -21075,7 +21533,7 @@
             <a:lvl7pPr algn="ctr">
               <a:defRPr sz="2250" b="1">
                 <a:solidFill>
-                  <a:srgbClr val="278766"/>
+                  <a:srgbClr val="C0DAD4"/>
                 </a:solidFill>
                 <a:latin typeface="Nimbus Sans"/>
                 <a:ea typeface="Nimbus Sans"/>
@@ -21085,7 +21543,7 @@
             <a:lvl8pPr algn="ctr">
               <a:defRPr sz="2250" b="1">
                 <a:solidFill>
-                  <a:srgbClr val="278766"/>
+                  <a:srgbClr val="C0DAD4"/>
                 </a:solidFill>
                 <a:latin typeface="Nimbus Sans"/>
                 <a:ea typeface="Nimbus Sans"/>
@@ -21095,7 +21553,7 @@
             <a:lvl9pPr algn="ctr">
               <a:defRPr sz="2250" b="1">
                 <a:solidFill>
-                  <a:srgbClr val="278766"/>
+                  <a:srgbClr val="C0DAD4"/>
                 </a:solidFill>
                 <a:latin typeface="Nimbus Sans"/>
                 <a:ea typeface="Nimbus Sans"/>
@@ -21107,7 +21565,7 @@
             <a:pPr algn="ctr">
               <a:defRPr sz="2250" b="1">
                 <a:solidFill>
-                  <a:srgbClr val="278766"/>
+                  <a:srgbClr val="C0DAD4"/>
                 </a:solidFill>
                 <a:latin typeface="Nimbus Sans"/>
                 <a:ea typeface="Nimbus Sans"/>
@@ -21117,7 +21575,7 @@
             <a:r>
               <a:rPr sz="2250" b="1">
                 <a:solidFill>
-                  <a:srgbClr val="278766"/>
+                  <a:srgbClr val="C0DAD4"/>
                 </a:solidFill>
                 <a:latin typeface="Nimbus Sans"/>
                 <a:ea typeface="Nimbus Sans"/>
@@ -21130,10 +21588,328 @@
       </p:sp>
       <p:sp>
         <p:nvSpPr>
-          <p:cNvPr id="52" name="dim_f152">
+          <p:cNvPr id="10" name="f151">
             <a:extLst xmlns:a="http://schemas.openxmlformats.org/drawingml/2006/main">
               <a:ext uri="{FF2B5EF4-FFF2-40B4-BE49-F238E27FC236}">
-                <a16:creationId xmlns:a16="http://schemas.microsoft.com/office/drawing/2014/main" id="{D11748A5-9A5B-4F65-96CB-1B1A6BF320C2}"/>
+                <a16:creationId xmlns:a16="http://schemas.microsoft.com/office/drawing/2014/main" id="{F87DFBBA-C3EF-46F1-896D-FC3F7EEDFE28}"/>
+              </a:ext>
+            </a:extLst>
+          </p:cNvPr>
+          <p:cNvSpPr>
+            <a:spLocks xmlns:a="http://schemas.openxmlformats.org/drawingml/2006/main" noGrp="1"/>
+          </p:cNvSpPr>
+          <p:nvPr/>
+        </p:nvSpPr>
+        <p:spPr>
+          <a:xfrm xmlns:a="http://schemas.openxmlformats.org/drawingml/2006/main">
+            <a:off x="476250" y="4791075"/>
+            <a:ext cx="4476750" cy="361950"/>
+          </a:xfrm>
+          <a:prstGeom xmlns:a="http://schemas.openxmlformats.org/drawingml/2006/main" prst="rect">
+            <a:avLst/>
+          </a:prstGeom>
+          <a:noFill xmlns:a="http://schemas.openxmlformats.org/drawingml/2006/main"/>
+          <a:ln xmlns:a="http://schemas.openxmlformats.org/drawingml/2006/main" w="0">
+            <a:noFill/>
+            <a:prstDash val="solid"/>
+          </a:ln>
+        </p:spPr>
+        <p:txBody>
+          <a:bodyPr xmlns:a="http://schemas.openxmlformats.org/drawingml/2006/main" wrap="none" lIns="0" tIns="0" rIns="0" bIns="0" anchor="t">
+            <a:noAutofit/>
+          </a:bodyPr>
+          <a:lstStyle xmlns:a="http://schemas.openxmlformats.org/drawingml/2006/main">
+            <a:defPPr algn="ctr">
+              <a:defRPr sz="2250" b="1">
+                <a:solidFill>
+                  <a:srgbClr val="278766"/>
+                </a:solidFill>
+                <a:latin typeface="Nimbus Sans"/>
+                <a:ea typeface="Nimbus Sans"/>
+                <a:cs typeface="Nimbus Sans"/>
+              </a:defRPr>
+            </a:defPPr>
+            <a:lvl1pPr algn="ctr">
+              <a:defRPr sz="2250" b="1">
+                <a:solidFill>
+                  <a:srgbClr val="278766"/>
+                </a:solidFill>
+                <a:latin typeface="Nimbus Sans"/>
+                <a:ea typeface="Nimbus Sans"/>
+                <a:cs typeface="Nimbus Sans"/>
+              </a:defRPr>
+            </a:lvl1pPr>
+            <a:lvl2pPr algn="ctr">
+              <a:defRPr sz="2250" b="1">
+                <a:solidFill>
+                  <a:srgbClr val="278766"/>
+                </a:solidFill>
+                <a:latin typeface="Nimbus Sans"/>
+                <a:ea typeface="Nimbus Sans"/>
+                <a:cs typeface="Nimbus Sans"/>
+              </a:defRPr>
+            </a:lvl2pPr>
+            <a:lvl3pPr algn="ctr">
+              <a:defRPr sz="2250" b="1">
+                <a:solidFill>
+                  <a:srgbClr val="278766"/>
+                </a:solidFill>
+                <a:latin typeface="Nimbus Sans"/>
+                <a:ea typeface="Nimbus Sans"/>
+                <a:cs typeface="Nimbus Sans"/>
+              </a:defRPr>
+            </a:lvl3pPr>
+            <a:lvl4pPr algn="ctr">
+              <a:defRPr sz="2250" b="1">
+                <a:solidFill>
+                  <a:srgbClr val="278766"/>
+                </a:solidFill>
+                <a:latin typeface="Nimbus Sans"/>
+                <a:ea typeface="Nimbus Sans"/>
+                <a:cs typeface="Nimbus Sans"/>
+              </a:defRPr>
+            </a:lvl4pPr>
+            <a:lvl5pPr algn="ctr">
+              <a:defRPr sz="2250" b="1">
+                <a:solidFill>
+                  <a:srgbClr val="278766"/>
+                </a:solidFill>
+                <a:latin typeface="Nimbus Sans"/>
+                <a:ea typeface="Nimbus Sans"/>
+                <a:cs typeface="Nimbus Sans"/>
+              </a:defRPr>
+            </a:lvl5pPr>
+            <a:lvl6pPr algn="ctr">
+              <a:defRPr sz="2250" b="1">
+                <a:solidFill>
+                  <a:srgbClr val="278766"/>
+                </a:solidFill>
+                <a:latin typeface="Nimbus Sans"/>
+                <a:ea typeface="Nimbus Sans"/>
+                <a:cs typeface="Nimbus Sans"/>
+              </a:defRPr>
+            </a:lvl6pPr>
+            <a:lvl7pPr algn="ctr">
+              <a:defRPr sz="2250" b="1">
+                <a:solidFill>
+                  <a:srgbClr val="278766"/>
+                </a:solidFill>
+                <a:latin typeface="Nimbus Sans"/>
+                <a:ea typeface="Nimbus Sans"/>
+                <a:cs typeface="Nimbus Sans"/>
+              </a:defRPr>
+            </a:lvl7pPr>
+            <a:lvl8pPr algn="ctr">
+              <a:defRPr sz="2250" b="1">
+                <a:solidFill>
+                  <a:srgbClr val="278766"/>
+                </a:solidFill>
+                <a:latin typeface="Nimbus Sans"/>
+                <a:ea typeface="Nimbus Sans"/>
+                <a:cs typeface="Nimbus Sans"/>
+              </a:defRPr>
+            </a:lvl8pPr>
+            <a:lvl9pPr algn="ctr">
+              <a:defRPr sz="2250" b="1">
+                <a:solidFill>
+                  <a:srgbClr val="278766"/>
+                </a:solidFill>
+                <a:latin typeface="Nimbus Sans"/>
+                <a:ea typeface="Nimbus Sans"/>
+                <a:cs typeface="Nimbus Sans"/>
+              </a:defRPr>
+            </a:lvl9pPr>
+          </a:lstStyle>
+          <a:p xmlns:a="http://schemas.openxmlformats.org/drawingml/2006/main">
+            <a:pPr algn="ctr">
+              <a:defRPr sz="2250" b="1">
+                <a:solidFill>
+                  <a:srgbClr val="278766"/>
+                </a:solidFill>
+                <a:latin typeface="Nimbus Sans"/>
+                <a:ea typeface="Nimbus Sans"/>
+                <a:cs typeface="Nimbus Sans"/>
+              </a:defRPr>
+            </a:pPr>
+            <a:r>
+              <a:rPr sz="2250" b="1">
+                <a:solidFill>
+                  <a:srgbClr val="278766"/>
+                </a:solidFill>
+                <a:latin typeface="Nimbus Sans"/>
+                <a:ea typeface="Nimbus Sans"/>
+                <a:cs typeface="Nimbus Sans"/>
+              </a:rPr>
+              <a:t>Pipeline di verifica</a:t>
+            </a:r>
+          </a:p>
+        </p:txBody>
+      </p:sp>
+      <p:sp>
+        <p:nvSpPr>
+          <p:cNvPr id="60" name="phaseC_f151">
+            <a:extLst xmlns:a="http://schemas.openxmlformats.org/drawingml/2006/main">
+              <a:ext uri="{FF2B5EF4-FFF2-40B4-BE49-F238E27FC236}">
+                <a16:creationId xmlns:a16="http://schemas.microsoft.com/office/drawing/2014/main" id="{F87DFBBA-C3EF-46F1-896D-FC3F7EEDFE28}"/>
+              </a:ext>
+            </a:extLst>
+          </p:cNvPr>
+          <p:cNvSpPr>
+            <a:spLocks xmlns:a="http://schemas.openxmlformats.org/drawingml/2006/main" noGrp="1"/>
+          </p:cNvSpPr>
+          <p:nvPr/>
+        </p:nvSpPr>
+        <p:spPr>
+          <a:xfrm xmlns:a="http://schemas.openxmlformats.org/drawingml/2006/main">
+            <a:off x="476250" y="4791075"/>
+            <a:ext cx="4476750" cy="361950"/>
+          </a:xfrm>
+          <a:prstGeom xmlns:a="http://schemas.openxmlformats.org/drawingml/2006/main" prst="rect">
+            <a:avLst/>
+          </a:prstGeom>
+          <a:noFill xmlns:a="http://schemas.openxmlformats.org/drawingml/2006/main"/>
+          <a:ln xmlns:a="http://schemas.openxmlformats.org/drawingml/2006/main" w="0">
+            <a:noFill/>
+            <a:prstDash val="solid"/>
+          </a:ln>
+        </p:spPr>
+        <p:txBody>
+          <a:bodyPr xmlns:a="http://schemas.openxmlformats.org/drawingml/2006/main" wrap="none" lIns="0" tIns="0" rIns="0" bIns="0" anchor="t">
+            <a:noAutofit/>
+          </a:bodyPr>
+          <a:lstStyle xmlns:a="http://schemas.openxmlformats.org/drawingml/2006/main">
+            <a:defPPr algn="ctr">
+              <a:defRPr sz="2250" b="1">
+                <a:solidFill>
+                  <a:srgbClr val="278766"/>
+                </a:solidFill>
+                <a:latin typeface="Nimbus Sans"/>
+                <a:ea typeface="Nimbus Sans"/>
+                <a:cs typeface="Nimbus Sans"/>
+              </a:defRPr>
+            </a:defPPr>
+            <a:lvl1pPr algn="ctr">
+              <a:defRPr sz="2250" b="1">
+                <a:solidFill>
+                  <a:srgbClr val="278766"/>
+                </a:solidFill>
+                <a:latin typeface="Nimbus Sans"/>
+                <a:ea typeface="Nimbus Sans"/>
+                <a:cs typeface="Nimbus Sans"/>
+              </a:defRPr>
+            </a:lvl1pPr>
+            <a:lvl2pPr algn="ctr">
+              <a:defRPr sz="2250" b="1">
+                <a:solidFill>
+                  <a:srgbClr val="278766"/>
+                </a:solidFill>
+                <a:latin typeface="Nimbus Sans"/>
+                <a:ea typeface="Nimbus Sans"/>
+                <a:cs typeface="Nimbus Sans"/>
+              </a:defRPr>
+            </a:lvl2pPr>
+            <a:lvl3pPr algn="ctr">
+              <a:defRPr sz="2250" b="1">
+                <a:solidFill>
+                  <a:srgbClr val="278766"/>
+                </a:solidFill>
+                <a:latin typeface="Nimbus Sans"/>
+                <a:ea typeface="Nimbus Sans"/>
+                <a:cs typeface="Nimbus Sans"/>
+              </a:defRPr>
+            </a:lvl3pPr>
+            <a:lvl4pPr algn="ctr">
+              <a:defRPr sz="2250" b="1">
+                <a:solidFill>
+                  <a:srgbClr val="278766"/>
+                </a:solidFill>
+                <a:latin typeface="Nimbus Sans"/>
+                <a:ea typeface="Nimbus Sans"/>
+                <a:cs typeface="Nimbus Sans"/>
+              </a:defRPr>
+            </a:lvl4pPr>
+            <a:lvl5pPr algn="ctr">
+              <a:defRPr sz="2250" b="1">
+                <a:solidFill>
+                  <a:srgbClr val="278766"/>
+                </a:solidFill>
+                <a:latin typeface="Nimbus Sans"/>
+                <a:ea typeface="Nimbus Sans"/>
+                <a:cs typeface="Nimbus Sans"/>
+              </a:defRPr>
+            </a:lvl5pPr>
+            <a:lvl6pPr algn="ctr">
+              <a:defRPr sz="2250" b="1">
+                <a:solidFill>
+                  <a:srgbClr val="278766"/>
+                </a:solidFill>
+                <a:latin typeface="Nimbus Sans"/>
+                <a:ea typeface="Nimbus Sans"/>
+                <a:cs typeface="Nimbus Sans"/>
+              </a:defRPr>
+            </a:lvl6pPr>
+            <a:lvl7pPr algn="ctr">
+              <a:defRPr sz="2250" b="1">
+                <a:solidFill>
+                  <a:srgbClr val="278766"/>
+                </a:solidFill>
+                <a:latin typeface="Nimbus Sans"/>
+                <a:ea typeface="Nimbus Sans"/>
+                <a:cs typeface="Nimbus Sans"/>
+              </a:defRPr>
+            </a:lvl7pPr>
+            <a:lvl8pPr algn="ctr">
+              <a:defRPr sz="2250" b="1">
+                <a:solidFill>
+                  <a:srgbClr val="278766"/>
+                </a:solidFill>
+                <a:latin typeface="Nimbus Sans"/>
+                <a:ea typeface="Nimbus Sans"/>
+                <a:cs typeface="Nimbus Sans"/>
+              </a:defRPr>
+            </a:lvl8pPr>
+            <a:lvl9pPr algn="ctr">
+              <a:defRPr sz="2250" b="1">
+                <a:solidFill>
+                  <a:srgbClr val="278766"/>
+                </a:solidFill>
+                <a:latin typeface="Nimbus Sans"/>
+                <a:ea typeface="Nimbus Sans"/>
+                <a:cs typeface="Nimbus Sans"/>
+              </a:defRPr>
+            </a:lvl9pPr>
+          </a:lstStyle>
+          <a:p xmlns:a="http://schemas.openxmlformats.org/drawingml/2006/main">
+            <a:pPr algn="ctr">
+              <a:defRPr sz="2250" b="1">
+                <a:solidFill>
+                  <a:srgbClr val="278766"/>
+                </a:solidFill>
+                <a:latin typeface="Nimbus Sans"/>
+                <a:ea typeface="Nimbus Sans"/>
+                <a:cs typeface="Nimbus Sans"/>
+              </a:defRPr>
+            </a:pPr>
+            <a:r>
+              <a:rPr sz="2250" b="1">
+                <a:solidFill>
+                  <a:srgbClr val="278766"/>
+                </a:solidFill>
+                <a:latin typeface="Nimbus Sans"/>
+                <a:ea typeface="Nimbus Sans"/>
+                <a:cs typeface="Nimbus Sans"/>
+              </a:rPr>
+              <a:t>Pipeline di verifica</a:t>
+            </a:r>
+          </a:p>
+        </p:txBody>
+      </p:sp>
+      <p:sp>
+        <p:nvSpPr>
+          <p:cNvPr id="61" name="dim_f152">
+            <a:extLst xmlns:a="http://schemas.openxmlformats.org/drawingml/2006/main">
+              <a:ext uri="{FF2B5EF4-FFF2-40B4-BE49-F238E27FC236}">
+                <a16:creationId xmlns:a16="http://schemas.microsoft.com/office/drawing/2014/main" id="{DE633995-6DF4-422D-95BE-C96284226157}"/>
               </a:ext>
             </a:extLst>
           </p:cNvPr>
@@ -21168,7 +21944,7 @@
           <p:cNvPr id="11" name="f152">
             <a:extLst xmlns:a="http://schemas.openxmlformats.org/drawingml/2006/main">
               <a:ext uri="{FF2B5EF4-FFF2-40B4-BE49-F238E27FC236}">
-                <a16:creationId xmlns:a16="http://schemas.microsoft.com/office/drawing/2014/main" id="{D11748A5-9A5B-4F65-96CB-1B1A6BF320C2}"/>
+                <a16:creationId xmlns:a16="http://schemas.microsoft.com/office/drawing/2014/main" id="{DE633995-6DF4-422D-95BE-C96284226157}"/>
               </a:ext>
             </a:extLst>
           </p:cNvPr>
@@ -21200,10 +21976,10 @@
       </p:sp>
       <p:sp>
         <p:nvSpPr>
-          <p:cNvPr id="53" name="dim_f153">
+          <p:cNvPr id="62" name="dim_f153">
             <a:extLst xmlns:a="http://schemas.openxmlformats.org/drawingml/2006/main">
               <a:ext uri="{FF2B5EF4-FFF2-40B4-BE49-F238E27FC236}">
-                <a16:creationId xmlns:a16="http://schemas.microsoft.com/office/drawing/2014/main" id="{974D1534-78C1-4654-B544-9CFA33E1AAC5}"/>
+                <a16:creationId xmlns:a16="http://schemas.microsoft.com/office/drawing/2014/main" id="{B470C15F-7D98-49E7-AF00-3FAA7E005E52}"/>
               </a:ext>
             </a:extLst>
           </p:cNvPr>
@@ -21362,7 +22138,7 @@
           <p:cNvPr id="12" name="f153">
             <a:extLst xmlns:a="http://schemas.openxmlformats.org/drawingml/2006/main">
               <a:ext uri="{FF2B5EF4-FFF2-40B4-BE49-F238E27FC236}">
-                <a16:creationId xmlns:a16="http://schemas.microsoft.com/office/drawing/2014/main" id="{974D1534-78C1-4654-B544-9CFA33E1AAC5}"/>
+                <a16:creationId xmlns:a16="http://schemas.microsoft.com/office/drawing/2014/main" id="{B470C15F-7D98-49E7-AF00-3FAA7E005E52}"/>
               </a:ext>
             </a:extLst>
           </p:cNvPr>
@@ -21518,10 +22294,10 @@
       </p:sp>
       <p:sp>
         <p:nvSpPr>
-          <p:cNvPr id="54" name="dim_f154">
+          <p:cNvPr id="63" name="dim_f154">
             <a:extLst xmlns:a="http://schemas.openxmlformats.org/drawingml/2006/main">
               <a:ext uri="{FF2B5EF4-FFF2-40B4-BE49-F238E27FC236}">
-                <a16:creationId xmlns:a16="http://schemas.microsoft.com/office/drawing/2014/main" id="{30FB1C78-4BF9-4C99-BC3E-D3D59336F81A}"/>
+                <a16:creationId xmlns:a16="http://schemas.microsoft.com/office/drawing/2014/main" id="{899B8696-FC8D-4917-A388-56D2D6FDCDD6}"/>
               </a:ext>
             </a:extLst>
           </p:cNvPr>
@@ -21556,7 +22332,7 @@
           <p:cNvPr id="13" name="f154">
             <a:extLst xmlns:a="http://schemas.openxmlformats.org/drawingml/2006/main">
               <a:ext uri="{FF2B5EF4-FFF2-40B4-BE49-F238E27FC236}">
-                <a16:creationId xmlns:a16="http://schemas.microsoft.com/office/drawing/2014/main" id="{30FB1C78-4BF9-4C99-BC3E-D3D59336F81A}"/>
+                <a16:creationId xmlns:a16="http://schemas.microsoft.com/office/drawing/2014/main" id="{899B8696-FC8D-4917-A388-56D2D6FDCDD6}"/>
               </a:ext>
             </a:extLst>
           </p:cNvPr>
@@ -21588,10 +22364,10 @@
       </p:sp>
       <p:sp>
         <p:nvSpPr>
-          <p:cNvPr id="55" name="dim_f155">
+          <p:cNvPr id="64" name="dim_f155">
             <a:extLst xmlns:a="http://schemas.openxmlformats.org/drawingml/2006/main">
               <a:ext uri="{FF2B5EF4-FFF2-40B4-BE49-F238E27FC236}">
-                <a16:creationId xmlns:a16="http://schemas.microsoft.com/office/drawing/2014/main" id="{2B8A4262-44E6-4D7E-AE6D-4E5A0ED2FCC7}"/>
+                <a16:creationId xmlns:a16="http://schemas.microsoft.com/office/drawing/2014/main" id="{A1505EDF-56F6-455C-9B53-096EBA6C4A7D}"/>
               </a:ext>
             </a:extLst>
           </p:cNvPr>
@@ -21750,7 +22526,7 @@
           <p:cNvPr id="14" name="f155">
             <a:extLst xmlns:a="http://schemas.openxmlformats.org/drawingml/2006/main">
               <a:ext uri="{FF2B5EF4-FFF2-40B4-BE49-F238E27FC236}">
-                <a16:creationId xmlns:a16="http://schemas.microsoft.com/office/drawing/2014/main" id="{2B8A4262-44E6-4D7E-AE6D-4E5A0ED2FCC7}"/>
+                <a16:creationId xmlns:a16="http://schemas.microsoft.com/office/drawing/2014/main" id="{A1505EDF-56F6-455C-9B53-096EBA6C4A7D}"/>
               </a:ext>
             </a:extLst>
           </p:cNvPr>
@@ -21906,10 +22682,10 @@
       </p:sp>
       <p:sp>
         <p:nvSpPr>
-          <p:cNvPr id="56" name="dim_f156">
+          <p:cNvPr id="65" name="dim_f156">
             <a:extLst xmlns:a="http://schemas.openxmlformats.org/drawingml/2006/main">
               <a:ext uri="{FF2B5EF4-FFF2-40B4-BE49-F238E27FC236}">
-                <a16:creationId xmlns:a16="http://schemas.microsoft.com/office/drawing/2014/main" id="{0EE0B4C8-6E54-4025-A295-6B6155B3D2E8}"/>
+                <a16:creationId xmlns:a16="http://schemas.microsoft.com/office/drawing/2014/main" id="{43A286DC-6333-4D5B-A997-49D563F210F2}"/>
               </a:ext>
             </a:extLst>
           </p:cNvPr>
@@ -21944,7 +22720,7 @@
           <p:cNvPr id="15" name="f156">
             <a:extLst xmlns:a="http://schemas.openxmlformats.org/drawingml/2006/main">
               <a:ext uri="{FF2B5EF4-FFF2-40B4-BE49-F238E27FC236}">
-                <a16:creationId xmlns:a16="http://schemas.microsoft.com/office/drawing/2014/main" id="{0EE0B4C8-6E54-4025-A295-6B6155B3D2E8}"/>
+                <a16:creationId xmlns:a16="http://schemas.microsoft.com/office/drawing/2014/main" id="{43A286DC-6333-4D5B-A997-49D563F210F2}"/>
               </a:ext>
             </a:extLst>
           </p:cNvPr>
@@ -21976,10 +22752,10 @@
       </p:sp>
       <p:sp>
         <p:nvSpPr>
-          <p:cNvPr id="57" name="dim_f157">
+          <p:cNvPr id="66" name="dim_f157">
             <a:extLst xmlns:a="http://schemas.openxmlformats.org/drawingml/2006/main">
               <a:ext uri="{FF2B5EF4-FFF2-40B4-BE49-F238E27FC236}">
-                <a16:creationId xmlns:a16="http://schemas.microsoft.com/office/drawing/2014/main" id="{817729EF-6BC3-4ED4-8E9B-913D13211103}"/>
+                <a16:creationId xmlns:a16="http://schemas.microsoft.com/office/drawing/2014/main" id="{7901AD54-D980-4EDA-B846-A4D8720B01B1}"/>
               </a:ext>
             </a:extLst>
           </p:cNvPr>
@@ -22161,7 +22937,7 @@
           <p:cNvPr id="16" name="f157">
             <a:extLst xmlns:a="http://schemas.openxmlformats.org/drawingml/2006/main">
               <a:ext uri="{FF2B5EF4-FFF2-40B4-BE49-F238E27FC236}">
-                <a16:creationId xmlns:a16="http://schemas.microsoft.com/office/drawing/2014/main" id="{817729EF-6BC3-4ED4-8E9B-913D13211103}"/>
+                <a16:creationId xmlns:a16="http://schemas.microsoft.com/office/drawing/2014/main" id="{7901AD54-D980-4EDA-B846-A4D8720B01B1}"/>
               </a:ext>
             </a:extLst>
           </p:cNvPr>
@@ -22340,10 +23116,10 @@
       </p:sp>
       <p:sp>
         <p:nvSpPr>
-          <p:cNvPr id="58" name="dim_f158">
+          <p:cNvPr id="67" name="dim_f158">
             <a:extLst xmlns:a="http://schemas.openxmlformats.org/drawingml/2006/main">
               <a:ext uri="{FF2B5EF4-FFF2-40B4-BE49-F238E27FC236}">
-                <a16:creationId xmlns:a16="http://schemas.microsoft.com/office/drawing/2014/main" id="{4CF83769-7222-44AB-8AFA-1D0D21F464B2}"/>
+                <a16:creationId xmlns:a16="http://schemas.microsoft.com/office/drawing/2014/main" id="{47863EEA-E4BB-429C-9DB5-3BA36CA2CFEB}"/>
               </a:ext>
             </a:extLst>
           </p:cNvPr>
@@ -22378,7 +23154,7 @@
           <p:cNvPr id="17" name="f158">
             <a:extLst xmlns:a="http://schemas.openxmlformats.org/drawingml/2006/main">
               <a:ext uri="{FF2B5EF4-FFF2-40B4-BE49-F238E27FC236}">
-                <a16:creationId xmlns:a16="http://schemas.microsoft.com/office/drawing/2014/main" id="{4CF83769-7222-44AB-8AFA-1D0D21F464B2}"/>
+                <a16:creationId xmlns:a16="http://schemas.microsoft.com/office/drawing/2014/main" id="{47863EEA-E4BB-429C-9DB5-3BA36CA2CFEB}"/>
               </a:ext>
             </a:extLst>
           </p:cNvPr>
@@ -22410,10 +23186,10 @@
       </p:sp>
       <p:sp>
         <p:nvSpPr>
-          <p:cNvPr id="59" name="dim_f159">
+          <p:cNvPr id="68" name="dim_f159">
             <a:extLst xmlns:a="http://schemas.openxmlformats.org/drawingml/2006/main">
               <a:ext uri="{FF2B5EF4-FFF2-40B4-BE49-F238E27FC236}">
-                <a16:creationId xmlns:a16="http://schemas.microsoft.com/office/drawing/2014/main" id="{881383A0-BC12-42DC-A792-E717B34FD9B2}"/>
+                <a16:creationId xmlns:a16="http://schemas.microsoft.com/office/drawing/2014/main" id="{6B18EC87-6F35-4173-A0DB-0244EC91C07E}"/>
               </a:ext>
             </a:extLst>
           </p:cNvPr>
@@ -22572,7 +23348,7 @@
           <p:cNvPr id="18" name="f159">
             <a:extLst xmlns:a="http://schemas.openxmlformats.org/drawingml/2006/main">
               <a:ext uri="{FF2B5EF4-FFF2-40B4-BE49-F238E27FC236}">
-                <a16:creationId xmlns:a16="http://schemas.microsoft.com/office/drawing/2014/main" id="{881383A0-BC12-42DC-A792-E717B34FD9B2}"/>
+                <a16:creationId xmlns:a16="http://schemas.microsoft.com/office/drawing/2014/main" id="{6B18EC87-6F35-4173-A0DB-0244EC91C07E}"/>
               </a:ext>
             </a:extLst>
           </p:cNvPr>
@@ -22728,10 +23504,41 @@
       </p:sp>
       <p:sp>
         <p:nvSpPr>
+          <p:cNvPr id="69" name="dim_f160">
+            <a:extLst xmlns:a="http://schemas.openxmlformats.org/drawingml/2006/main">
+              <a:ext uri="{FF2B5EF4-FFF2-40B4-BE49-F238E27FC236}">
+                <a16:creationId xmlns:a16="http://schemas.microsoft.com/office/drawing/2014/main" id="{D29BC21C-CC49-47D6-BA27-C4A2E69CF69C}"/>
+              </a:ext>
+            </a:extLst>
+          </p:cNvPr>
+          <p:cNvSpPr>
+            <a:spLocks xmlns:a="http://schemas.openxmlformats.org/drawingml/2006/main" noGrp="1"/>
+          </p:cNvSpPr>
+          <p:nvPr/>
+        </p:nvSpPr>
+        <p:spPr>
+          <a:xfrm xmlns:a="http://schemas.openxmlformats.org/drawingml/2006/main">
+            <a:off x="1285875" y="3752850"/>
+            <a:ext cx="95" cy="619125"/>
+          </a:xfrm>
+          <a:prstGeom xmlns:a="http://schemas.openxmlformats.org/drawingml/2006/main" prst="line">
+            <a:avLst/>
+          </a:prstGeom>
+          <a:noFill xmlns:a="http://schemas.openxmlformats.org/drawingml/2006/main"/>
+          <a:ln xmlns:a="http://schemas.openxmlformats.org/drawingml/2006/main" w="28575">
+            <a:solidFill>
+              <a:srgbClr val="C7D2EF"/>
+            </a:solidFill>
+            <a:prstDash val="solid"/>
+          </a:ln>
+        </p:spPr>
+      </p:sp>
+      <p:sp>
+        <p:nvSpPr>
           <p:cNvPr id="19" name="f160">
             <a:extLst xmlns:a="http://schemas.openxmlformats.org/drawingml/2006/main">
               <a:ext uri="{FF2B5EF4-FFF2-40B4-BE49-F238E27FC236}">
-                <a16:creationId xmlns:a16="http://schemas.microsoft.com/office/drawing/2014/main" id="{A5762339-2D90-4801-B941-9EA12D960F27}"/>
+                <a16:creationId xmlns:a16="http://schemas.microsoft.com/office/drawing/2014/main" id="{D29BC21C-CC49-47D6-BA27-C4A2E69CF69C}"/>
               </a:ext>
             </a:extLst>
           </p:cNvPr>
@@ -22759,10 +23566,72 @@
       </p:sp>
       <p:sp>
         <p:nvSpPr>
+          <p:cNvPr id="70" name="phaseC_f160">
+            <a:extLst xmlns:a="http://schemas.openxmlformats.org/drawingml/2006/main">
+              <a:ext uri="{FF2B5EF4-FFF2-40B4-BE49-F238E27FC236}">
+                <a16:creationId xmlns:a16="http://schemas.microsoft.com/office/drawing/2014/main" id="{D29BC21C-CC49-47D6-BA27-C4A2E69CF69C}"/>
+              </a:ext>
+            </a:extLst>
+          </p:cNvPr>
+          <p:cNvSpPr>
+            <a:spLocks xmlns:a="http://schemas.openxmlformats.org/drawingml/2006/main" noGrp="1"/>
+          </p:cNvSpPr>
+          <p:nvPr/>
+        </p:nvSpPr>
+        <p:spPr>
+          <a:xfrm xmlns:a="http://schemas.openxmlformats.org/drawingml/2006/main">
+            <a:off x="1285875" y="3752850"/>
+            <a:ext cx="95" cy="619125"/>
+          </a:xfrm>
+          <a:prstGeom xmlns:a="http://schemas.openxmlformats.org/drawingml/2006/main" prst="line">
+            <a:avLst/>
+          </a:prstGeom>
+          <a:noFill xmlns:a="http://schemas.openxmlformats.org/drawingml/2006/main"/>
+          <a:ln xmlns:a="http://schemas.openxmlformats.org/drawingml/2006/main" w="28575">
+            <a:solidFill>
+              <a:srgbClr val="4264D0"/>
+            </a:solidFill>
+            <a:prstDash val="solid"/>
+          </a:ln>
+        </p:spPr>
+      </p:sp>
+      <p:sp>
+        <p:nvSpPr>
+          <p:cNvPr id="71" name="dim_f161">
+            <a:extLst xmlns:a="http://schemas.openxmlformats.org/drawingml/2006/main">
+              <a:ext uri="{FF2B5EF4-FFF2-40B4-BE49-F238E27FC236}">
+                <a16:creationId xmlns:a16="http://schemas.microsoft.com/office/drawing/2014/main" id="{B9CC020C-7C72-462E-8065-7B1172EBBFA0}"/>
+              </a:ext>
+            </a:extLst>
+          </p:cNvPr>
+          <p:cNvSpPr>
+            <a:spLocks xmlns:a="http://schemas.openxmlformats.org/drawingml/2006/main" noGrp="1"/>
+          </p:cNvSpPr>
+          <p:nvPr/>
+        </p:nvSpPr>
+        <p:spPr>
+          <a:xfrm xmlns:a="http://schemas.openxmlformats.org/drawingml/2006/main">
+            <a:off x="1228725" y="4371975"/>
+            <a:ext cx="114300" cy="114300"/>
+          </a:xfrm>
+          <a:prstGeom xmlns:a="http://schemas.openxmlformats.org/drawingml/2006/main" prst="downArrow">
+            <a:avLst/>
+          </a:prstGeom>
+          <a:solidFill xmlns:a="http://schemas.openxmlformats.org/drawingml/2006/main">
+            <a:srgbClr val="C7D2EF"/>
+          </a:solidFill>
+          <a:ln xmlns:a="http://schemas.openxmlformats.org/drawingml/2006/main" w="0">
+            <a:noFill/>
+            <a:prstDash val="solid"/>
+          </a:ln>
+        </p:spPr>
+      </p:sp>
+      <p:sp>
+        <p:nvSpPr>
           <p:cNvPr id="20" name="f161">
             <a:extLst xmlns:a="http://schemas.openxmlformats.org/drawingml/2006/main">
               <a:ext uri="{FF2B5EF4-FFF2-40B4-BE49-F238E27FC236}">
-                <a16:creationId xmlns:a16="http://schemas.microsoft.com/office/drawing/2014/main" id="{7AA446F9-328E-439A-A447-847AB0C2A61D}"/>
+                <a16:creationId xmlns:a16="http://schemas.microsoft.com/office/drawing/2014/main" id="{B9CC020C-7C72-462E-8065-7B1172EBBFA0}"/>
               </a:ext>
             </a:extLst>
           </p:cNvPr>
@@ -22790,10 +23659,41 @@
       </p:sp>
       <p:sp>
         <p:nvSpPr>
-          <p:cNvPr id="60" name="dim_f162">
+          <p:cNvPr id="72" name="phaseC_f161">
             <a:extLst xmlns:a="http://schemas.openxmlformats.org/drawingml/2006/main">
               <a:ext uri="{FF2B5EF4-FFF2-40B4-BE49-F238E27FC236}">
-                <a16:creationId xmlns:a16="http://schemas.microsoft.com/office/drawing/2014/main" id="{86D6AB1B-06A9-48FB-B1C3-A2104935D95C}"/>
+                <a16:creationId xmlns:a16="http://schemas.microsoft.com/office/drawing/2014/main" id="{B9CC020C-7C72-462E-8065-7B1172EBBFA0}"/>
+              </a:ext>
+            </a:extLst>
+          </p:cNvPr>
+          <p:cNvSpPr>
+            <a:spLocks xmlns:a="http://schemas.openxmlformats.org/drawingml/2006/main" noGrp="1"/>
+          </p:cNvSpPr>
+          <p:nvPr/>
+        </p:nvSpPr>
+        <p:spPr>
+          <a:xfrm xmlns:a="http://schemas.openxmlformats.org/drawingml/2006/main">
+            <a:off x="1228725" y="4371975"/>
+            <a:ext cx="114300" cy="114300"/>
+          </a:xfrm>
+          <a:prstGeom xmlns:a="http://schemas.openxmlformats.org/drawingml/2006/main" prst="downArrow">
+            <a:avLst/>
+          </a:prstGeom>
+          <a:solidFill xmlns:a="http://schemas.openxmlformats.org/drawingml/2006/main">
+            <a:srgbClr val="4264D0"/>
+          </a:solidFill>
+          <a:ln xmlns:a="http://schemas.openxmlformats.org/drawingml/2006/main" w="0">
+            <a:noFill/>
+            <a:prstDash val="solid"/>
+          </a:ln>
+        </p:spPr>
+      </p:sp>
+      <p:sp>
+        <p:nvSpPr>
+          <p:cNvPr id="73" name="dim_f162">
+            <a:extLst xmlns:a="http://schemas.openxmlformats.org/drawingml/2006/main">
+              <a:ext uri="{FF2B5EF4-FFF2-40B4-BE49-F238E27FC236}">
+                <a16:creationId xmlns:a16="http://schemas.microsoft.com/office/drawing/2014/main" id="{F5A9F0BB-A62B-4F8A-A9EF-EF43439530E3}"/>
               </a:ext>
             </a:extLst>
           </p:cNvPr>
@@ -22824,7 +23724,7 @@
           <p:cNvPr id="21" name="f162">
             <a:extLst xmlns:a="http://schemas.openxmlformats.org/drawingml/2006/main">
               <a:ext uri="{FF2B5EF4-FFF2-40B4-BE49-F238E27FC236}">
-                <a16:creationId xmlns:a16="http://schemas.microsoft.com/office/drawing/2014/main" id="{86D6AB1B-06A9-48FB-B1C3-A2104935D95C}"/>
+                <a16:creationId xmlns:a16="http://schemas.microsoft.com/office/drawing/2014/main" id="{F5A9F0BB-A62B-4F8A-A9EF-EF43439530E3}"/>
               </a:ext>
             </a:extLst>
           </p:cNvPr>
@@ -22852,10 +23752,10 @@
       </p:sp>
       <p:sp>
         <p:nvSpPr>
-          <p:cNvPr id="61" name="dim_f163">
+          <p:cNvPr id="74" name="dim_f163">
             <a:extLst xmlns:a="http://schemas.openxmlformats.org/drawingml/2006/main">
               <a:ext uri="{FF2B5EF4-FFF2-40B4-BE49-F238E27FC236}">
-                <a16:creationId xmlns:a16="http://schemas.microsoft.com/office/drawing/2014/main" id="{48DD45E2-9557-48FD-AECF-6DBB15E5EC2A}"/>
+                <a16:creationId xmlns:a16="http://schemas.microsoft.com/office/drawing/2014/main" id="{AD73A73D-14D0-4C63-B2FF-615068537C21}"/>
               </a:ext>
             </a:extLst>
           </p:cNvPr>
@@ -22886,7 +23786,7 @@
           <p:cNvPr id="22" name="f163">
             <a:extLst xmlns:a="http://schemas.openxmlformats.org/drawingml/2006/main">
               <a:ext uri="{FF2B5EF4-FFF2-40B4-BE49-F238E27FC236}">
-                <a16:creationId xmlns:a16="http://schemas.microsoft.com/office/drawing/2014/main" id="{48DD45E2-9557-48FD-AECF-6DBB15E5EC2A}"/>
+                <a16:creationId xmlns:a16="http://schemas.microsoft.com/office/drawing/2014/main" id="{AD73A73D-14D0-4C63-B2FF-615068537C21}"/>
               </a:ext>
             </a:extLst>
           </p:cNvPr>
@@ -22914,10 +23814,41 @@
       </p:sp>
       <p:sp>
         <p:nvSpPr>
+          <p:cNvPr id="75" name="dim_f164">
+            <a:extLst xmlns:a="http://schemas.openxmlformats.org/drawingml/2006/main">
+              <a:ext uri="{FF2B5EF4-FFF2-40B4-BE49-F238E27FC236}">
+                <a16:creationId xmlns:a16="http://schemas.microsoft.com/office/drawing/2014/main" id="{E973E97C-F266-445B-B06D-E04EF5005954}"/>
+              </a:ext>
+            </a:extLst>
+          </p:cNvPr>
+          <p:cNvSpPr>
+            <a:spLocks xmlns:a="http://schemas.openxmlformats.org/drawingml/2006/main" noGrp="1"/>
+          </p:cNvSpPr>
+          <p:nvPr/>
+        </p:nvSpPr>
+        <p:spPr>
+          <a:xfrm xmlns:a="http://schemas.openxmlformats.org/drawingml/2006/main">
+            <a:off x="2714625" y="5457825"/>
+            <a:ext cx="95" cy="314325"/>
+          </a:xfrm>
+          <a:prstGeom xmlns:a="http://schemas.openxmlformats.org/drawingml/2006/main" prst="line">
+            <a:avLst/>
+          </a:prstGeom>
+          <a:noFill xmlns:a="http://schemas.openxmlformats.org/drawingml/2006/main"/>
+          <a:ln xmlns:a="http://schemas.openxmlformats.org/drawingml/2006/main" w="28575">
+            <a:solidFill>
+              <a:srgbClr val="C7D2EF"/>
+            </a:solidFill>
+            <a:prstDash val="solid"/>
+          </a:ln>
+        </p:spPr>
+      </p:sp>
+      <p:sp>
+        <p:nvSpPr>
           <p:cNvPr id="23" name="f164">
             <a:extLst xmlns:a="http://schemas.openxmlformats.org/drawingml/2006/main">
               <a:ext uri="{FF2B5EF4-FFF2-40B4-BE49-F238E27FC236}">
-                <a16:creationId xmlns:a16="http://schemas.microsoft.com/office/drawing/2014/main" id="{A7D05815-7409-4546-8235-3CBFE0E8E759}"/>
+                <a16:creationId xmlns:a16="http://schemas.microsoft.com/office/drawing/2014/main" id="{E973E97C-F266-445B-B06D-E04EF5005954}"/>
               </a:ext>
             </a:extLst>
           </p:cNvPr>
@@ -22945,10 +23876,41 @@
       </p:sp>
       <p:sp>
         <p:nvSpPr>
-          <p:cNvPr id="62" name="dim_f165">
+          <p:cNvPr id="76" name="phaseC_f164">
             <a:extLst xmlns:a="http://schemas.openxmlformats.org/drawingml/2006/main">
               <a:ext uri="{FF2B5EF4-FFF2-40B4-BE49-F238E27FC236}">
-                <a16:creationId xmlns:a16="http://schemas.microsoft.com/office/drawing/2014/main" id="{E0D433A7-D4FD-4681-A236-78B88BDC9649}"/>
+                <a16:creationId xmlns:a16="http://schemas.microsoft.com/office/drawing/2014/main" id="{E973E97C-F266-445B-B06D-E04EF5005954}"/>
+              </a:ext>
+            </a:extLst>
+          </p:cNvPr>
+          <p:cNvSpPr>
+            <a:spLocks xmlns:a="http://schemas.openxmlformats.org/drawingml/2006/main" noGrp="1"/>
+          </p:cNvSpPr>
+          <p:nvPr/>
+        </p:nvSpPr>
+        <p:spPr>
+          <a:xfrm xmlns:a="http://schemas.openxmlformats.org/drawingml/2006/main">
+            <a:off x="2714625" y="5457825"/>
+            <a:ext cx="95" cy="314325"/>
+          </a:xfrm>
+          <a:prstGeom xmlns:a="http://schemas.openxmlformats.org/drawingml/2006/main" prst="line">
+            <a:avLst/>
+          </a:prstGeom>
+          <a:noFill xmlns:a="http://schemas.openxmlformats.org/drawingml/2006/main"/>
+          <a:ln xmlns:a="http://schemas.openxmlformats.org/drawingml/2006/main" w="28575">
+            <a:solidFill>
+              <a:srgbClr val="4264D0"/>
+            </a:solidFill>
+            <a:prstDash val="solid"/>
+          </a:ln>
+        </p:spPr>
+      </p:sp>
+      <p:sp>
+        <p:nvSpPr>
+          <p:cNvPr id="77" name="dim_f165">
+            <a:extLst xmlns:a="http://schemas.openxmlformats.org/drawingml/2006/main">
+              <a:ext uri="{FF2B5EF4-FFF2-40B4-BE49-F238E27FC236}">
+                <a16:creationId xmlns:a16="http://schemas.microsoft.com/office/drawing/2014/main" id="{00CCF043-4D9F-4D5F-92B6-FD0011D12E84}"/>
               </a:ext>
             </a:extLst>
           </p:cNvPr>
@@ -22979,7 +23941,7 @@
           <p:cNvPr id="24" name="f165">
             <a:extLst xmlns:a="http://schemas.openxmlformats.org/drawingml/2006/main">
               <a:ext uri="{FF2B5EF4-FFF2-40B4-BE49-F238E27FC236}">
-                <a16:creationId xmlns:a16="http://schemas.microsoft.com/office/drawing/2014/main" id="{E0D433A7-D4FD-4681-A236-78B88BDC9649}"/>
+                <a16:creationId xmlns:a16="http://schemas.microsoft.com/office/drawing/2014/main" id="{00CCF043-4D9F-4D5F-92B6-FD0011D12E84}"/>
               </a:ext>
             </a:extLst>
           </p:cNvPr>
@@ -23007,10 +23969,10 @@
       </p:sp>
       <p:sp>
         <p:nvSpPr>
-          <p:cNvPr id="63" name="dim_f166">
+          <p:cNvPr id="78" name="dim_f166">
             <a:extLst xmlns:a="http://schemas.openxmlformats.org/drawingml/2006/main">
               <a:ext uri="{FF2B5EF4-FFF2-40B4-BE49-F238E27FC236}">
-                <a16:creationId xmlns:a16="http://schemas.microsoft.com/office/drawing/2014/main" id="{199DFA5F-F6D2-4D93-A100-2EF3CA379762}"/>
+                <a16:creationId xmlns:a16="http://schemas.microsoft.com/office/drawing/2014/main" id="{CBC0F3B7-B3B6-40DF-A17A-12231D0C3106}"/>
               </a:ext>
             </a:extLst>
           </p:cNvPr>
@@ -23041,7 +24003,7 @@
           <p:cNvPr id="25" name="f166">
             <a:extLst xmlns:a="http://schemas.openxmlformats.org/drawingml/2006/main">
               <a:ext uri="{FF2B5EF4-FFF2-40B4-BE49-F238E27FC236}">
-                <a16:creationId xmlns:a16="http://schemas.microsoft.com/office/drawing/2014/main" id="{199DFA5F-F6D2-4D93-A100-2EF3CA379762}"/>
+                <a16:creationId xmlns:a16="http://schemas.microsoft.com/office/drawing/2014/main" id="{CBC0F3B7-B3B6-40DF-A17A-12231D0C3106}"/>
               </a:ext>
             </a:extLst>
           </p:cNvPr>
@@ -23069,10 +24031,10 @@
       </p:sp>
       <p:sp>
         <p:nvSpPr>
-          <p:cNvPr id="64" name="dim_f167">
+          <p:cNvPr id="79" name="dim_f167">
             <a:extLst xmlns:a="http://schemas.openxmlformats.org/drawingml/2006/main">
               <a:ext uri="{FF2B5EF4-FFF2-40B4-BE49-F238E27FC236}">
-                <a16:creationId xmlns:a16="http://schemas.microsoft.com/office/drawing/2014/main" id="{508FFB0E-93F6-4CB6-A160-AF7258B1EAAE}"/>
+                <a16:creationId xmlns:a16="http://schemas.microsoft.com/office/drawing/2014/main" id="{3C9D6D09-E455-46DD-930E-B499568B4480}"/>
               </a:ext>
             </a:extLst>
           </p:cNvPr>
@@ -23103,7 +24065,7 @@
           <p:cNvPr id="26" name="f167">
             <a:extLst xmlns:a="http://schemas.openxmlformats.org/drawingml/2006/main">
               <a:ext uri="{FF2B5EF4-FFF2-40B4-BE49-F238E27FC236}">
-                <a16:creationId xmlns:a16="http://schemas.microsoft.com/office/drawing/2014/main" id="{508FFB0E-93F6-4CB6-A160-AF7258B1EAAE}"/>
+                <a16:creationId xmlns:a16="http://schemas.microsoft.com/office/drawing/2014/main" id="{3C9D6D09-E455-46DD-930E-B499568B4480}"/>
               </a:ext>
             </a:extLst>
           </p:cNvPr>
@@ -23131,10 +24093,10 @@
       </p:sp>
       <p:sp>
         <p:nvSpPr>
-          <p:cNvPr id="65" name="dim_f168">
+          <p:cNvPr id="80" name="dim_f168">
             <a:extLst xmlns:a="http://schemas.openxmlformats.org/drawingml/2006/main">
               <a:ext uri="{FF2B5EF4-FFF2-40B4-BE49-F238E27FC236}">
-                <a16:creationId xmlns:a16="http://schemas.microsoft.com/office/drawing/2014/main" id="{FEDDC2AC-677B-485B-B016-C50C18AC83C9}"/>
+                <a16:creationId xmlns:a16="http://schemas.microsoft.com/office/drawing/2014/main" id="{231E65D6-1AD0-498E-97A1-465682EE32BC}"/>
               </a:ext>
             </a:extLst>
           </p:cNvPr>
@@ -23165,7 +24127,7 @@
           <p:cNvPr id="27" name="f168">
             <a:extLst xmlns:a="http://schemas.openxmlformats.org/drawingml/2006/main">
               <a:ext uri="{FF2B5EF4-FFF2-40B4-BE49-F238E27FC236}">
-                <a16:creationId xmlns:a16="http://schemas.microsoft.com/office/drawing/2014/main" id="{FEDDC2AC-677B-485B-B016-C50C18AC83C9}"/>
+                <a16:creationId xmlns:a16="http://schemas.microsoft.com/office/drawing/2014/main" id="{231E65D6-1AD0-498E-97A1-465682EE32BC}"/>
               </a:ext>
             </a:extLst>
           </p:cNvPr>
@@ -23193,10 +24155,10 @@
       </p:sp>
       <p:sp>
         <p:nvSpPr>
-          <p:cNvPr id="66" name="dim_f169">
+          <p:cNvPr id="81" name="dim_f169">
             <a:extLst xmlns:a="http://schemas.openxmlformats.org/drawingml/2006/main">
               <a:ext uri="{FF2B5EF4-FFF2-40B4-BE49-F238E27FC236}">
-                <a16:creationId xmlns:a16="http://schemas.microsoft.com/office/drawing/2014/main" id="{A25FCD55-EE3F-44A4-8769-4D5487F38499}"/>
+                <a16:creationId xmlns:a16="http://schemas.microsoft.com/office/drawing/2014/main" id="{CB89FD41-E563-419F-BBFC-CB72EA7B78EB}"/>
               </a:ext>
             </a:extLst>
           </p:cNvPr>
@@ -23227,7 +24189,7 @@
           <p:cNvPr id="28" name="f169">
             <a:extLst xmlns:a="http://schemas.openxmlformats.org/drawingml/2006/main">
               <a:ext uri="{FF2B5EF4-FFF2-40B4-BE49-F238E27FC236}">
-                <a16:creationId xmlns:a16="http://schemas.microsoft.com/office/drawing/2014/main" id="{A25FCD55-EE3F-44A4-8769-4D5487F38499}"/>
+                <a16:creationId xmlns:a16="http://schemas.microsoft.com/office/drawing/2014/main" id="{CB89FD41-E563-419F-BBFC-CB72EA7B78EB}"/>
               </a:ext>
             </a:extLst>
           </p:cNvPr>
@@ -23255,10 +24217,10 @@
       </p:sp>
       <p:sp>
         <p:nvSpPr>
-          <p:cNvPr id="67" name="dim_f170">
+          <p:cNvPr id="82" name="dim_f170">
             <a:extLst xmlns:a="http://schemas.openxmlformats.org/drawingml/2006/main">
               <a:ext uri="{FF2B5EF4-FFF2-40B4-BE49-F238E27FC236}">
-                <a16:creationId xmlns:a16="http://schemas.microsoft.com/office/drawing/2014/main" id="{94A53E58-03AC-44AC-B207-1D2B5001901D}"/>
+                <a16:creationId xmlns:a16="http://schemas.microsoft.com/office/drawing/2014/main" id="{DDC6D984-48A0-435F-A3ED-817A86BE02F2}"/>
               </a:ext>
             </a:extLst>
           </p:cNvPr>
@@ -23289,7 +24251,7 @@
           <p:cNvPr id="29" name="f170">
             <a:extLst xmlns:a="http://schemas.openxmlformats.org/drawingml/2006/main">
               <a:ext uri="{FF2B5EF4-FFF2-40B4-BE49-F238E27FC236}">
-                <a16:creationId xmlns:a16="http://schemas.microsoft.com/office/drawing/2014/main" id="{94A53E58-03AC-44AC-B207-1D2B5001901D}"/>
+                <a16:creationId xmlns:a16="http://schemas.microsoft.com/office/drawing/2014/main" id="{DDC6D984-48A0-435F-A3ED-817A86BE02F2}"/>
               </a:ext>
             </a:extLst>
           </p:cNvPr>
@@ -23317,10 +24279,10 @@
       </p:sp>
       <p:sp>
         <p:nvSpPr>
-          <p:cNvPr id="30" name="f171">
+          <p:cNvPr id="83" name="dim_f171">
             <a:extLst xmlns:a="http://schemas.openxmlformats.org/drawingml/2006/main">
               <a:ext uri="{FF2B5EF4-FFF2-40B4-BE49-F238E27FC236}">
-                <a16:creationId xmlns:a16="http://schemas.microsoft.com/office/drawing/2014/main" id="{39CE3B35-A428-4BA5-B1F8-5FA761A449DD}"/>
+                <a16:creationId xmlns:a16="http://schemas.microsoft.com/office/drawing/2014/main" id="{ED898031-45BE-46E7-BB1B-7685521148BF}"/>
               </a:ext>
             </a:extLst>
           </p:cNvPr>
@@ -23348,10 +24310,41 @@
       </p:sp>
       <p:sp>
         <p:nvSpPr>
-          <p:cNvPr id="31" name="f172">
+          <p:cNvPr id="30" name="f171">
             <a:extLst xmlns:a="http://schemas.openxmlformats.org/drawingml/2006/main">
               <a:ext uri="{FF2B5EF4-FFF2-40B4-BE49-F238E27FC236}">
-                <a16:creationId xmlns:a16="http://schemas.microsoft.com/office/drawing/2014/main" id="{9C81D7A3-1C7E-4862-9985-D89C2A8D5C52}"/>
+                <a16:creationId xmlns:a16="http://schemas.microsoft.com/office/drawing/2014/main" id="{ED898031-45BE-46E7-BB1B-7685521148BF}"/>
+              </a:ext>
+            </a:extLst>
+          </p:cNvPr>
+          <p:cNvSpPr>
+            <a:spLocks xmlns:a="http://schemas.openxmlformats.org/drawingml/2006/main" noGrp="1"/>
+          </p:cNvSpPr>
+          <p:nvPr/>
+        </p:nvSpPr>
+        <p:spPr>
+          <a:xfrm xmlns:a="http://schemas.openxmlformats.org/drawingml/2006/main">
+            <a:off x="1428750" y="6877050"/>
+            <a:ext cx="95" cy="647700"/>
+          </a:xfrm>
+          <a:prstGeom xmlns:a="http://schemas.openxmlformats.org/drawingml/2006/main" prst="line">
+            <a:avLst/>
+          </a:prstGeom>
+          <a:noFill xmlns:a="http://schemas.openxmlformats.org/drawingml/2006/main"/>
+          <a:ln xmlns:a="http://schemas.openxmlformats.org/drawingml/2006/main" w="28575">
+            <a:solidFill>
+              <a:srgbClr val="4264D0"/>
+            </a:solidFill>
+            <a:prstDash val="solid"/>
+          </a:ln>
+        </p:spPr>
+      </p:sp>
+      <p:sp>
+        <p:nvSpPr>
+          <p:cNvPr id="84" name="dim_f172">
+            <a:extLst xmlns:a="http://schemas.openxmlformats.org/drawingml/2006/main">
+              <a:ext uri="{FF2B5EF4-FFF2-40B4-BE49-F238E27FC236}">
+                <a16:creationId xmlns:a16="http://schemas.microsoft.com/office/drawing/2014/main" id="{00DBDD0F-B1A2-482E-9682-EEB6D39FDA51}"/>
               </a:ext>
             </a:extLst>
           </p:cNvPr>
@@ -23379,10 +24372,41 @@
       </p:sp>
       <p:sp>
         <p:nvSpPr>
-          <p:cNvPr id="32" name="f173">
+          <p:cNvPr id="31" name="f172">
             <a:extLst xmlns:a="http://schemas.openxmlformats.org/drawingml/2006/main">
               <a:ext uri="{FF2B5EF4-FFF2-40B4-BE49-F238E27FC236}">
-                <a16:creationId xmlns:a16="http://schemas.microsoft.com/office/drawing/2014/main" id="{2CEB84E7-C0E3-46B0-B122-0E932897A762}"/>
+                <a16:creationId xmlns:a16="http://schemas.microsoft.com/office/drawing/2014/main" id="{00DBDD0F-B1A2-482E-9682-EEB6D39FDA51}"/>
+              </a:ext>
+            </a:extLst>
+          </p:cNvPr>
+          <p:cNvSpPr>
+            <a:spLocks xmlns:a="http://schemas.openxmlformats.org/drawingml/2006/main" noGrp="1"/>
+          </p:cNvSpPr>
+          <p:nvPr/>
+        </p:nvSpPr>
+        <p:spPr>
+          <a:xfrm xmlns:a="http://schemas.openxmlformats.org/drawingml/2006/main">
+            <a:off x="1428750" y="7524750"/>
+            <a:ext cx="5381625" cy="95"/>
+          </a:xfrm>
+          <a:prstGeom xmlns:a="http://schemas.openxmlformats.org/drawingml/2006/main" prst="line">
+            <a:avLst/>
+          </a:prstGeom>
+          <a:noFill xmlns:a="http://schemas.openxmlformats.org/drawingml/2006/main"/>
+          <a:ln xmlns:a="http://schemas.openxmlformats.org/drawingml/2006/main" w="28575">
+            <a:solidFill>
+              <a:srgbClr val="4264D0"/>
+            </a:solidFill>
+            <a:prstDash val="solid"/>
+          </a:ln>
+        </p:spPr>
+      </p:sp>
+      <p:sp>
+        <p:nvSpPr>
+          <p:cNvPr id="85" name="dim_f173">
+            <a:extLst xmlns:a="http://schemas.openxmlformats.org/drawingml/2006/main">
+              <a:ext uri="{FF2B5EF4-FFF2-40B4-BE49-F238E27FC236}">
+                <a16:creationId xmlns:a16="http://schemas.microsoft.com/office/drawing/2014/main" id="{39748CE6-00A5-47BE-B5D2-BC78C7A532FD}"/>
               </a:ext>
             </a:extLst>
           </p:cNvPr>
@@ -23410,10 +24434,41 @@
       </p:sp>
       <p:sp>
         <p:nvSpPr>
-          <p:cNvPr id="33" name="f174">
+          <p:cNvPr id="32" name="f173">
             <a:extLst xmlns:a="http://schemas.openxmlformats.org/drawingml/2006/main">
               <a:ext uri="{FF2B5EF4-FFF2-40B4-BE49-F238E27FC236}">
-                <a16:creationId xmlns:a16="http://schemas.microsoft.com/office/drawing/2014/main" id="{F0A97875-7CDE-4149-B3D1-58285CBB00BB}"/>
+                <a16:creationId xmlns:a16="http://schemas.microsoft.com/office/drawing/2014/main" id="{39748CE6-00A5-47BE-B5D2-BC78C7A532FD}"/>
+              </a:ext>
+            </a:extLst>
+          </p:cNvPr>
+          <p:cNvSpPr>
+            <a:spLocks xmlns:a="http://schemas.openxmlformats.org/drawingml/2006/main" noGrp="1"/>
+          </p:cNvSpPr>
+          <p:nvPr/>
+        </p:nvSpPr>
+        <p:spPr>
+          <a:xfrm xmlns:a="http://schemas.openxmlformats.org/drawingml/2006/main">
+            <a:off x="6810375" y="6172200"/>
+            <a:ext cx="95" cy="1352550"/>
+          </a:xfrm>
+          <a:prstGeom xmlns:a="http://schemas.openxmlformats.org/drawingml/2006/main" prst="line">
+            <a:avLst/>
+          </a:prstGeom>
+          <a:noFill xmlns:a="http://schemas.openxmlformats.org/drawingml/2006/main"/>
+          <a:ln xmlns:a="http://schemas.openxmlformats.org/drawingml/2006/main" w="28575">
+            <a:solidFill>
+              <a:srgbClr val="4264D0"/>
+            </a:solidFill>
+            <a:prstDash val="solid"/>
+          </a:ln>
+        </p:spPr>
+      </p:sp>
+      <p:sp>
+        <p:nvSpPr>
+          <p:cNvPr id="86" name="dim_f174">
+            <a:extLst xmlns:a="http://schemas.openxmlformats.org/drawingml/2006/main">
+              <a:ext uri="{FF2B5EF4-FFF2-40B4-BE49-F238E27FC236}">
+                <a16:creationId xmlns:a16="http://schemas.microsoft.com/office/drawing/2014/main" id="{01DE5B95-FBD4-4FEC-BE8D-4B963E027DCC}"/>
               </a:ext>
             </a:extLst>
           </p:cNvPr>
@@ -23441,10 +24496,41 @@
       </p:sp>
       <p:sp>
         <p:nvSpPr>
-          <p:cNvPr id="34" name="f175">
+          <p:cNvPr id="33" name="f174">
             <a:extLst xmlns:a="http://schemas.openxmlformats.org/drawingml/2006/main">
               <a:ext uri="{FF2B5EF4-FFF2-40B4-BE49-F238E27FC236}">
-                <a16:creationId xmlns:a16="http://schemas.microsoft.com/office/drawing/2014/main" id="{D3D4F963-4FB8-4ADE-A558-FCD72E73495B}"/>
+                <a16:creationId xmlns:a16="http://schemas.microsoft.com/office/drawing/2014/main" id="{01DE5B95-FBD4-4FEC-BE8D-4B963E027DCC}"/>
+              </a:ext>
+            </a:extLst>
+          </p:cNvPr>
+          <p:cNvSpPr>
+            <a:spLocks xmlns:a="http://schemas.openxmlformats.org/drawingml/2006/main" noGrp="1"/>
+          </p:cNvSpPr>
+          <p:nvPr/>
+        </p:nvSpPr>
+        <p:spPr>
+          <a:xfrm xmlns:a="http://schemas.openxmlformats.org/drawingml/2006/main">
+            <a:off x="6753225" y="6057900"/>
+            <a:ext cx="114300" cy="114300"/>
+          </a:xfrm>
+          <a:prstGeom xmlns:a="http://schemas.openxmlformats.org/drawingml/2006/main" prst="upArrow">
+            <a:avLst/>
+          </a:prstGeom>
+          <a:solidFill xmlns:a="http://schemas.openxmlformats.org/drawingml/2006/main">
+            <a:srgbClr val="4264D0"/>
+          </a:solidFill>
+          <a:ln xmlns:a="http://schemas.openxmlformats.org/drawingml/2006/main" w="0">
+            <a:noFill/>
+            <a:prstDash val="solid"/>
+          </a:ln>
+        </p:spPr>
+      </p:sp>
+      <p:sp>
+        <p:nvSpPr>
+          <p:cNvPr id="87" name="dim_f175">
+            <a:extLst xmlns:a="http://schemas.openxmlformats.org/drawingml/2006/main">
+              <a:ext uri="{FF2B5EF4-FFF2-40B4-BE49-F238E27FC236}">
+                <a16:creationId xmlns:a16="http://schemas.microsoft.com/office/drawing/2014/main" id="{4D11FD74-92A1-461C-A78D-1AF6EE81C431}"/>
               </a:ext>
             </a:extLst>
           </p:cNvPr>
@@ -23600,10 +24686,169 @@
       </p:sp>
       <p:sp>
         <p:nvSpPr>
-          <p:cNvPr id="35" name="f176">
+          <p:cNvPr id="34" name="f175">
             <a:extLst xmlns:a="http://schemas.openxmlformats.org/drawingml/2006/main">
               <a:ext uri="{FF2B5EF4-FFF2-40B4-BE49-F238E27FC236}">
-                <a16:creationId xmlns:a16="http://schemas.microsoft.com/office/drawing/2014/main" id="{4BEF5EDE-5426-49BF-B692-9553EFDA265A}"/>
+                <a16:creationId xmlns:a16="http://schemas.microsoft.com/office/drawing/2014/main" id="{4D11FD74-92A1-461C-A78D-1AF6EE81C431}"/>
+              </a:ext>
+            </a:extLst>
+          </p:cNvPr>
+          <p:cNvSpPr>
+            <a:spLocks xmlns:a="http://schemas.openxmlformats.org/drawingml/2006/main" noGrp="1"/>
+          </p:cNvSpPr>
+          <p:nvPr/>
+        </p:nvSpPr>
+        <p:spPr>
+          <a:xfrm xmlns:a="http://schemas.openxmlformats.org/drawingml/2006/main">
+            <a:off x="1905000" y="7162800"/>
+            <a:ext cx="4476750" cy="304800"/>
+          </a:xfrm>
+          <a:prstGeom xmlns:a="http://schemas.openxmlformats.org/drawingml/2006/main" prst="rect">
+            <a:avLst/>
+          </a:prstGeom>
+          <a:noFill xmlns:a="http://schemas.openxmlformats.org/drawingml/2006/main"/>
+          <a:ln xmlns:a="http://schemas.openxmlformats.org/drawingml/2006/main" w="0">
+            <a:noFill/>
+            <a:prstDash val="solid"/>
+          </a:ln>
+        </p:spPr>
+        <p:txBody>
+          <a:bodyPr xmlns:a="http://schemas.openxmlformats.org/drawingml/2006/main" wrap="none" lIns="0" tIns="0" rIns="0" bIns="0" anchor="t">
+            <a:noAutofit/>
+          </a:bodyPr>
+          <a:lstStyle xmlns:a="http://schemas.openxmlformats.org/drawingml/2006/main">
+            <a:defPPr algn="ctr">
+              <a:defRPr sz="1575" b="0">
+                <a:solidFill>
+                  <a:srgbClr val="52627B"/>
+                </a:solidFill>
+                <a:latin typeface="Nimbus Sans"/>
+                <a:ea typeface="Nimbus Sans"/>
+                <a:cs typeface="Nimbus Sans"/>
+              </a:defRPr>
+            </a:defPPr>
+            <a:lvl1pPr algn="ctr">
+              <a:defRPr sz="1575" b="0">
+                <a:solidFill>
+                  <a:srgbClr val="52627B"/>
+                </a:solidFill>
+                <a:latin typeface="Nimbus Sans"/>
+                <a:ea typeface="Nimbus Sans"/>
+                <a:cs typeface="Nimbus Sans"/>
+              </a:defRPr>
+            </a:lvl1pPr>
+            <a:lvl2pPr algn="ctr">
+              <a:defRPr sz="1575" b="0">
+                <a:solidFill>
+                  <a:srgbClr val="52627B"/>
+                </a:solidFill>
+                <a:latin typeface="Nimbus Sans"/>
+                <a:ea typeface="Nimbus Sans"/>
+                <a:cs typeface="Nimbus Sans"/>
+              </a:defRPr>
+            </a:lvl2pPr>
+            <a:lvl3pPr algn="ctr">
+              <a:defRPr sz="1575" b="0">
+                <a:solidFill>
+                  <a:srgbClr val="52627B"/>
+                </a:solidFill>
+                <a:latin typeface="Nimbus Sans"/>
+                <a:ea typeface="Nimbus Sans"/>
+                <a:cs typeface="Nimbus Sans"/>
+              </a:defRPr>
+            </a:lvl3pPr>
+            <a:lvl4pPr algn="ctr">
+              <a:defRPr sz="1575" b="0">
+                <a:solidFill>
+                  <a:srgbClr val="52627B"/>
+                </a:solidFill>
+                <a:latin typeface="Nimbus Sans"/>
+                <a:ea typeface="Nimbus Sans"/>
+                <a:cs typeface="Nimbus Sans"/>
+              </a:defRPr>
+            </a:lvl4pPr>
+            <a:lvl5pPr algn="ctr">
+              <a:defRPr sz="1575" b="0">
+                <a:solidFill>
+                  <a:srgbClr val="52627B"/>
+                </a:solidFill>
+                <a:latin typeface="Nimbus Sans"/>
+                <a:ea typeface="Nimbus Sans"/>
+                <a:cs typeface="Nimbus Sans"/>
+              </a:defRPr>
+            </a:lvl5pPr>
+            <a:lvl6pPr algn="ctr">
+              <a:defRPr sz="1575" b="0">
+                <a:solidFill>
+                  <a:srgbClr val="52627B"/>
+                </a:solidFill>
+                <a:latin typeface="Nimbus Sans"/>
+                <a:ea typeface="Nimbus Sans"/>
+                <a:cs typeface="Nimbus Sans"/>
+              </a:defRPr>
+            </a:lvl6pPr>
+            <a:lvl7pPr algn="ctr">
+              <a:defRPr sz="1575" b="0">
+                <a:solidFill>
+                  <a:srgbClr val="52627B"/>
+                </a:solidFill>
+                <a:latin typeface="Nimbus Sans"/>
+                <a:ea typeface="Nimbus Sans"/>
+                <a:cs typeface="Nimbus Sans"/>
+              </a:defRPr>
+            </a:lvl7pPr>
+            <a:lvl8pPr algn="ctr">
+              <a:defRPr sz="1575" b="0">
+                <a:solidFill>
+                  <a:srgbClr val="52627B"/>
+                </a:solidFill>
+                <a:latin typeface="Nimbus Sans"/>
+                <a:ea typeface="Nimbus Sans"/>
+                <a:cs typeface="Nimbus Sans"/>
+              </a:defRPr>
+            </a:lvl8pPr>
+            <a:lvl9pPr algn="ctr">
+              <a:defRPr sz="1575" b="0">
+                <a:solidFill>
+                  <a:srgbClr val="52627B"/>
+                </a:solidFill>
+                <a:latin typeface="Nimbus Sans"/>
+                <a:ea typeface="Nimbus Sans"/>
+                <a:cs typeface="Nimbus Sans"/>
+              </a:defRPr>
+            </a:lvl9pPr>
+          </a:lstStyle>
+          <a:p xmlns:a="http://schemas.openxmlformats.org/drawingml/2006/main">
+            <a:pPr algn="ctr">
+              <a:defRPr sz="1575" b="0">
+                <a:solidFill>
+                  <a:srgbClr val="52627B"/>
+                </a:solidFill>
+                <a:latin typeface="Nimbus Sans"/>
+                <a:ea typeface="Nimbus Sans"/>
+                <a:cs typeface="Nimbus Sans"/>
+              </a:defRPr>
+            </a:pPr>
+            <a:r>
+              <a:rPr sz="1575" b="0">
+                <a:solidFill>
+                  <a:srgbClr val="52627B"/>
+                </a:solidFill>
+                <a:latin typeface="Nimbus Sans"/>
+                <a:ea typeface="Nimbus Sans"/>
+                <a:cs typeface="Nimbus Sans"/>
+              </a:rPr>
+              <a:t>Selezione dei frame rilevanti da modificare</a:t>
+            </a:r>
+          </a:p>
+        </p:txBody>
+      </p:sp>
+      <p:sp>
+        <p:nvSpPr>
+          <p:cNvPr id="88" name="dim_f176">
+            <a:extLst xmlns:a="http://schemas.openxmlformats.org/drawingml/2006/main">
+              <a:ext uri="{FF2B5EF4-FFF2-40B4-BE49-F238E27FC236}">
+                <a16:creationId xmlns:a16="http://schemas.microsoft.com/office/drawing/2014/main" id="{2A5FDF67-81ED-4A94-B913-8C63D5E6C26D}"/>
               </a:ext>
             </a:extLst>
           </p:cNvPr>
@@ -23631,10 +24876,41 @@
       </p:sp>
       <p:sp>
         <p:nvSpPr>
-          <p:cNvPr id="36" name="f177">
+          <p:cNvPr id="35" name="f176">
             <a:extLst xmlns:a="http://schemas.openxmlformats.org/drawingml/2006/main">
               <a:ext uri="{FF2B5EF4-FFF2-40B4-BE49-F238E27FC236}">
-                <a16:creationId xmlns:a16="http://schemas.microsoft.com/office/drawing/2014/main" id="{A15C9C21-33AF-415C-BB6E-D8E851F25BA1}"/>
+                <a16:creationId xmlns:a16="http://schemas.microsoft.com/office/drawing/2014/main" id="{2A5FDF67-81ED-4A94-B913-8C63D5E6C26D}"/>
+              </a:ext>
+            </a:extLst>
+          </p:cNvPr>
+          <p:cNvSpPr>
+            <a:spLocks xmlns:a="http://schemas.openxmlformats.org/drawingml/2006/main" noGrp="1"/>
+          </p:cNvSpPr>
+          <p:nvPr/>
+        </p:nvSpPr>
+        <p:spPr>
+          <a:xfrm xmlns:a="http://schemas.openxmlformats.org/drawingml/2006/main">
+            <a:off x="5200650" y="3343275"/>
+            <a:ext cx="2895600" cy="95"/>
+          </a:xfrm>
+          <a:prstGeom xmlns:a="http://schemas.openxmlformats.org/drawingml/2006/main" prst="line">
+            <a:avLst/>
+          </a:prstGeom>
+          <a:noFill xmlns:a="http://schemas.openxmlformats.org/drawingml/2006/main"/>
+          <a:ln xmlns:a="http://schemas.openxmlformats.org/drawingml/2006/main" w="28575">
+            <a:solidFill>
+              <a:srgbClr val="4264D0"/>
+            </a:solidFill>
+            <a:prstDash val="solid"/>
+          </a:ln>
+        </p:spPr>
+      </p:sp>
+      <p:sp>
+        <p:nvSpPr>
+          <p:cNvPr id="89" name="dim_f177">
+            <a:extLst xmlns:a="http://schemas.openxmlformats.org/drawingml/2006/main">
+              <a:ext uri="{FF2B5EF4-FFF2-40B4-BE49-F238E27FC236}">
+                <a16:creationId xmlns:a16="http://schemas.microsoft.com/office/drawing/2014/main" id="{E9DA4510-7B4E-4528-B30E-3EB92CDBC884}"/>
               </a:ext>
             </a:extLst>
           </p:cNvPr>
@@ -23662,10 +24938,10 @@
       </p:sp>
       <p:sp>
         <p:nvSpPr>
-          <p:cNvPr id="37" name="f178">
+          <p:cNvPr id="36" name="f177">
             <a:extLst xmlns:a="http://schemas.openxmlformats.org/drawingml/2006/main">
               <a:ext uri="{FF2B5EF4-FFF2-40B4-BE49-F238E27FC236}">
-                <a16:creationId xmlns:a16="http://schemas.microsoft.com/office/drawing/2014/main" id="{C6427012-EBA2-4CE0-B0B5-F39A63F12AB9}"/>
+                <a16:creationId xmlns:a16="http://schemas.microsoft.com/office/drawing/2014/main" id="{E9DA4510-7B4E-4528-B30E-3EB92CDBC884}"/>
               </a:ext>
             </a:extLst>
           </p:cNvPr>
@@ -23676,8 +24952,101 @@
         </p:nvSpPr>
         <p:spPr>
           <a:xfrm xmlns:a="http://schemas.openxmlformats.org/drawingml/2006/main">
-            <a:off x="7896225" y="5572125"/>
-            <a:ext cx="200025" cy="95"/>
+            <a:off x="8096250" y="3343275"/>
+            <a:ext cx="95" cy="2228850"/>
+          </a:xfrm>
+          <a:prstGeom xmlns:a="http://schemas.openxmlformats.org/drawingml/2006/main" prst="line">
+            <a:avLst/>
+          </a:prstGeom>
+          <a:noFill xmlns:a="http://schemas.openxmlformats.org/drawingml/2006/main"/>
+          <a:ln xmlns:a="http://schemas.openxmlformats.org/drawingml/2006/main" w="28575">
+            <a:solidFill>
+              <a:srgbClr val="4264D0"/>
+            </a:solidFill>
+            <a:prstDash val="solid"/>
+          </a:ln>
+        </p:spPr>
+      </p:sp>
+      <p:sp>
+        <p:nvSpPr>
+          <p:cNvPr id="90" name="dim_f178">
+            <a:extLst xmlns:a="http://schemas.openxmlformats.org/drawingml/2006/main">
+              <a:ext uri="{FF2B5EF4-FFF2-40B4-BE49-F238E27FC236}">
+                <a16:creationId xmlns:a16="http://schemas.microsoft.com/office/drawing/2014/main" id="{4A0B5937-4876-4DB8-A937-78494DB77548}"/>
+              </a:ext>
+            </a:extLst>
+          </p:cNvPr>
+          <p:cNvSpPr>
+            <a:spLocks xmlns:a="http://schemas.openxmlformats.org/drawingml/2006/main" noGrp="1"/>
+          </p:cNvSpPr>
+          <p:nvPr/>
+        </p:nvSpPr>
+        <p:spPr>
+          <a:xfrm xmlns:a="http://schemas.openxmlformats.org/drawingml/2006/main">
+            <a:off x="7724775" y="5572125"/>
+            <a:ext cx="371475" cy="95"/>
+          </a:xfrm>
+          <a:prstGeom xmlns:a="http://schemas.openxmlformats.org/drawingml/2006/main" prst="line">
+            <a:avLst/>
+          </a:prstGeom>
+          <a:noFill xmlns:a="http://schemas.openxmlformats.org/drawingml/2006/main"/>
+          <a:ln xmlns:a="http://schemas.openxmlformats.org/drawingml/2006/main" w="28575">
+            <a:solidFill>
+              <a:srgbClr val="C7D2EF"/>
+            </a:solidFill>
+            <a:prstDash val="solid"/>
+          </a:ln>
+        </p:spPr>
+      </p:sp>
+      <p:sp>
+        <p:nvSpPr>
+          <p:cNvPr id="37" name="f178">
+            <a:extLst xmlns:a="http://schemas.openxmlformats.org/drawingml/2006/main">
+              <a:ext uri="{FF2B5EF4-FFF2-40B4-BE49-F238E27FC236}">
+                <a16:creationId xmlns:a16="http://schemas.microsoft.com/office/drawing/2014/main" id="{4A0B5937-4876-4DB8-A937-78494DB77548}"/>
+              </a:ext>
+            </a:extLst>
+          </p:cNvPr>
+          <p:cNvSpPr>
+            <a:spLocks xmlns:a="http://schemas.openxmlformats.org/drawingml/2006/main" noGrp="1"/>
+          </p:cNvSpPr>
+          <p:nvPr/>
+        </p:nvSpPr>
+        <p:spPr>
+          <a:xfrm xmlns:a="http://schemas.openxmlformats.org/drawingml/2006/main">
+            <a:off x="7724775" y="5572125"/>
+            <a:ext cx="371475" cy="95"/>
+          </a:xfrm>
+          <a:prstGeom xmlns:a="http://schemas.openxmlformats.org/drawingml/2006/main" prst="line">
+            <a:avLst/>
+          </a:prstGeom>
+          <a:noFill xmlns:a="http://schemas.openxmlformats.org/drawingml/2006/main"/>
+          <a:ln xmlns:a="http://schemas.openxmlformats.org/drawingml/2006/main" w="28575">
+            <a:solidFill>
+              <a:srgbClr val="4264D0"/>
+            </a:solidFill>
+            <a:prstDash val="solid"/>
+          </a:ln>
+        </p:spPr>
+      </p:sp>
+      <p:sp>
+        <p:nvSpPr>
+          <p:cNvPr id="91" name="dim_f179">
+            <a:extLst xmlns:a="http://schemas.openxmlformats.org/drawingml/2006/main">
+              <a:ext uri="{FF2B5EF4-FFF2-40B4-BE49-F238E27FC236}">
+                <a16:creationId xmlns:a16="http://schemas.microsoft.com/office/drawing/2014/main" id="{3E185338-3850-4240-B191-C8894DF6459C}"/>
+              </a:ext>
+            </a:extLst>
+          </p:cNvPr>
+          <p:cNvSpPr>
+            <a:spLocks xmlns:a="http://schemas.openxmlformats.org/drawingml/2006/main" noGrp="1"/>
+          </p:cNvSpPr>
+          <p:nvPr/>
+        </p:nvSpPr>
+        <p:spPr>
+          <a:xfrm xmlns:a="http://schemas.openxmlformats.org/drawingml/2006/main" flipH="1">
+            <a:off x="7724775" y="5514975"/>
+            <a:ext cx="95250" cy="57150"/>
           </a:xfrm>
           <a:prstGeom xmlns:a="http://schemas.openxmlformats.org/drawingml/2006/main" prst="line">
             <a:avLst/>
@@ -23696,7 +25065,38 @@
           <p:cNvPr id="38" name="f179">
             <a:extLst xmlns:a="http://schemas.openxmlformats.org/drawingml/2006/main">
               <a:ext uri="{FF2B5EF4-FFF2-40B4-BE49-F238E27FC236}">
-                <a16:creationId xmlns:a16="http://schemas.microsoft.com/office/drawing/2014/main" id="{AC12F035-4BCB-4BCA-963B-8D7444D7DF68}"/>
+                <a16:creationId xmlns:a16="http://schemas.microsoft.com/office/drawing/2014/main" id="{3E185338-3850-4240-B191-C8894DF6459C}"/>
+              </a:ext>
+            </a:extLst>
+          </p:cNvPr>
+          <p:cNvSpPr>
+            <a:spLocks xmlns:a="http://schemas.openxmlformats.org/drawingml/2006/main" noGrp="1"/>
+          </p:cNvSpPr>
+          <p:nvPr/>
+        </p:nvSpPr>
+        <p:spPr>
+          <a:xfrm xmlns:a="http://schemas.openxmlformats.org/drawingml/2006/main" flipH="1">
+            <a:off x="7724775" y="5514975"/>
+            <a:ext cx="95250" cy="57150"/>
+          </a:xfrm>
+          <a:prstGeom xmlns:a="http://schemas.openxmlformats.org/drawingml/2006/main" prst="line">
+            <a:avLst/>
+          </a:prstGeom>
+          <a:noFill xmlns:a="http://schemas.openxmlformats.org/drawingml/2006/main"/>
+          <a:ln xmlns:a="http://schemas.openxmlformats.org/drawingml/2006/main" w="28575">
+            <a:solidFill>
+              <a:srgbClr val="4264D0"/>
+            </a:solidFill>
+            <a:prstDash val="solid"/>
+          </a:ln>
+        </p:spPr>
+      </p:sp>
+      <p:sp>
+        <p:nvSpPr>
+          <p:cNvPr id="92" name="dim_f180">
+            <a:extLst xmlns:a="http://schemas.openxmlformats.org/drawingml/2006/main">
+              <a:ext uri="{FF2B5EF4-FFF2-40B4-BE49-F238E27FC236}">
+                <a16:creationId xmlns:a16="http://schemas.microsoft.com/office/drawing/2014/main" id="{EA74EEAE-46DA-4336-B889-C65D5C664AD2}"/>
               </a:ext>
             </a:extLst>
           </p:cNvPr>
@@ -23707,27 +25107,58 @@
         </p:nvSpPr>
         <p:spPr>
           <a:xfrm xmlns:a="http://schemas.openxmlformats.org/drawingml/2006/main">
-            <a:off x="7724775" y="5486400"/>
-            <a:ext cx="171450" cy="171450"/>
+            <a:off x="7724775" y="5572125"/>
+            <a:ext cx="95250" cy="57150"/>
           </a:xfrm>
-          <a:prstGeom xmlns:a="http://schemas.openxmlformats.org/drawingml/2006/main" prst="leftArrow">
+          <a:prstGeom xmlns:a="http://schemas.openxmlformats.org/drawingml/2006/main" prst="line">
             <a:avLst/>
           </a:prstGeom>
-          <a:solidFill xmlns:a="http://schemas.openxmlformats.org/drawingml/2006/main">
-            <a:srgbClr val="C7D2EF"/>
-          </a:solidFill>
-          <a:ln xmlns:a="http://schemas.openxmlformats.org/drawingml/2006/main" w="0">
-            <a:noFill/>
+          <a:noFill xmlns:a="http://schemas.openxmlformats.org/drawingml/2006/main"/>
+          <a:ln xmlns:a="http://schemas.openxmlformats.org/drawingml/2006/main" w="28575">
+            <a:solidFill>
+              <a:srgbClr val="C7D2EF"/>
+            </a:solidFill>
             <a:prstDash val="solid"/>
           </a:ln>
         </p:spPr>
       </p:sp>
       <p:sp>
         <p:nvSpPr>
-          <p:cNvPr id="68" name="dim_f180">
+          <p:cNvPr id="39" name="f180">
             <a:extLst xmlns:a="http://schemas.openxmlformats.org/drawingml/2006/main">
               <a:ext uri="{FF2B5EF4-FFF2-40B4-BE49-F238E27FC236}">
-                <a16:creationId xmlns:a16="http://schemas.microsoft.com/office/drawing/2014/main" id="{C0F6AF8A-6577-410A-AE59-79AC42662667}"/>
+                <a16:creationId xmlns:a16="http://schemas.microsoft.com/office/drawing/2014/main" id="{EA74EEAE-46DA-4336-B889-C65D5C664AD2}"/>
+              </a:ext>
+            </a:extLst>
+          </p:cNvPr>
+          <p:cNvSpPr>
+            <a:spLocks xmlns:a="http://schemas.openxmlformats.org/drawingml/2006/main" noGrp="1"/>
+          </p:cNvSpPr>
+          <p:nvPr/>
+        </p:nvSpPr>
+        <p:spPr>
+          <a:xfrm xmlns:a="http://schemas.openxmlformats.org/drawingml/2006/main">
+            <a:off x="7724775" y="5572125"/>
+            <a:ext cx="95250" cy="57150"/>
+          </a:xfrm>
+          <a:prstGeom xmlns:a="http://schemas.openxmlformats.org/drawingml/2006/main" prst="line">
+            <a:avLst/>
+          </a:prstGeom>
+          <a:noFill xmlns:a="http://schemas.openxmlformats.org/drawingml/2006/main"/>
+          <a:ln xmlns:a="http://schemas.openxmlformats.org/drawingml/2006/main" w="28575">
+            <a:solidFill>
+              <a:srgbClr val="4264D0"/>
+            </a:solidFill>
+            <a:prstDash val="solid"/>
+          </a:ln>
+        </p:spPr>
+      </p:sp>
+      <p:sp>
+        <p:nvSpPr>
+          <p:cNvPr id="93" name="dim_f181">
+            <a:extLst xmlns:a="http://schemas.openxmlformats.org/drawingml/2006/main">
+              <a:ext uri="{FF2B5EF4-FFF2-40B4-BE49-F238E27FC236}">
+                <a16:creationId xmlns:a16="http://schemas.microsoft.com/office/drawing/2014/main" id="{7E4BC1A8-9166-4751-91D6-593C7C813755}"/>
               </a:ext>
             </a:extLst>
           </p:cNvPr>
@@ -23755,10 +25186,10 @@
       </p:sp>
       <p:sp>
         <p:nvSpPr>
-          <p:cNvPr id="39" name="f180">
+          <p:cNvPr id="40" name="f181">
             <a:extLst xmlns:a="http://schemas.openxmlformats.org/drawingml/2006/main">
               <a:ext uri="{FF2B5EF4-FFF2-40B4-BE49-F238E27FC236}">
-                <a16:creationId xmlns:a16="http://schemas.microsoft.com/office/drawing/2014/main" id="{C0F6AF8A-6577-410A-AE59-79AC42662667}"/>
+                <a16:creationId xmlns:a16="http://schemas.microsoft.com/office/drawing/2014/main" id="{7E4BC1A8-9166-4751-91D6-593C7C813755}"/>
               </a:ext>
             </a:extLst>
           </p:cNvPr>
@@ -23786,10 +25217,10 @@
       </p:sp>
       <p:sp>
         <p:nvSpPr>
-          <p:cNvPr id="69" name="dim_f181">
+          <p:cNvPr id="94" name="dim_f182">
             <a:extLst xmlns:a="http://schemas.openxmlformats.org/drawingml/2006/main">
               <a:ext uri="{FF2B5EF4-FFF2-40B4-BE49-F238E27FC236}">
-                <a16:creationId xmlns:a16="http://schemas.microsoft.com/office/drawing/2014/main" id="{5322EFDC-0981-48CE-A939-9BB258970E3A}"/>
+                <a16:creationId xmlns:a16="http://schemas.microsoft.com/office/drawing/2014/main" id="{4D320560-3E8B-43FD-9FC4-1AAE0B44F238}"/>
               </a:ext>
             </a:extLst>
           </p:cNvPr>
@@ -23817,10 +25248,10 @@
       </p:sp>
       <p:sp>
         <p:nvSpPr>
-          <p:cNvPr id="40" name="f181">
+          <p:cNvPr id="41" name="f182">
             <a:extLst xmlns:a="http://schemas.openxmlformats.org/drawingml/2006/main">
               <a:ext uri="{FF2B5EF4-FFF2-40B4-BE49-F238E27FC236}">
-                <a16:creationId xmlns:a16="http://schemas.microsoft.com/office/drawing/2014/main" id="{5322EFDC-0981-48CE-A939-9BB258970E3A}"/>
+                <a16:creationId xmlns:a16="http://schemas.microsoft.com/office/drawing/2014/main" id="{4D320560-3E8B-43FD-9FC4-1AAE0B44F238}"/>
               </a:ext>
             </a:extLst>
           </p:cNvPr>
@@ -23848,10 +25279,10 @@
       </p:sp>
       <p:sp>
         <p:nvSpPr>
-          <p:cNvPr id="70" name="dim_f182">
+          <p:cNvPr id="95" name="dim_f183">
             <a:extLst xmlns:a="http://schemas.openxmlformats.org/drawingml/2006/main">
               <a:ext uri="{FF2B5EF4-FFF2-40B4-BE49-F238E27FC236}">
-                <a16:creationId xmlns:a16="http://schemas.microsoft.com/office/drawing/2014/main" id="{53F69048-7F86-465E-BE72-19AF885B8E52}"/>
+                <a16:creationId xmlns:a16="http://schemas.microsoft.com/office/drawing/2014/main" id="{715C90DB-C362-4EDD-A117-7ABE99E3DC59}"/>
               </a:ext>
             </a:extLst>
           </p:cNvPr>
@@ -23879,10 +25310,10 @@
       </p:sp>
       <p:sp>
         <p:nvSpPr>
-          <p:cNvPr id="41" name="f182">
+          <p:cNvPr id="42" name="f183">
             <a:extLst xmlns:a="http://schemas.openxmlformats.org/drawingml/2006/main">
               <a:ext uri="{FF2B5EF4-FFF2-40B4-BE49-F238E27FC236}">
-                <a16:creationId xmlns:a16="http://schemas.microsoft.com/office/drawing/2014/main" id="{53F69048-7F86-465E-BE72-19AF885B8E52}"/>
+                <a16:creationId xmlns:a16="http://schemas.microsoft.com/office/drawing/2014/main" id="{715C90DB-C362-4EDD-A117-7ABE99E3DC59}"/>
               </a:ext>
             </a:extLst>
           </p:cNvPr>
@@ -23910,10 +25341,10 @@
       </p:sp>
       <p:sp>
         <p:nvSpPr>
-          <p:cNvPr id="71" name="dim_f183">
+          <p:cNvPr id="96" name="dim_f184">
             <a:extLst xmlns:a="http://schemas.openxmlformats.org/drawingml/2006/main">
               <a:ext uri="{FF2B5EF4-FFF2-40B4-BE49-F238E27FC236}">
-                <a16:creationId xmlns:a16="http://schemas.microsoft.com/office/drawing/2014/main" id="{25537E6E-6D56-4625-969A-6249D127D949}"/>
+                <a16:creationId xmlns:a16="http://schemas.microsoft.com/office/drawing/2014/main" id="{2722BF4A-74AD-4CCA-983B-801BCCAC36D6}"/>
               </a:ext>
             </a:extLst>
           </p:cNvPr>
@@ -23941,10 +25372,10 @@
       </p:sp>
       <p:sp>
         <p:nvSpPr>
-          <p:cNvPr id="42" name="f183">
+          <p:cNvPr id="43" name="f184">
             <a:extLst xmlns:a="http://schemas.openxmlformats.org/drawingml/2006/main">
               <a:ext uri="{FF2B5EF4-FFF2-40B4-BE49-F238E27FC236}">
-                <a16:creationId xmlns:a16="http://schemas.microsoft.com/office/drawing/2014/main" id="{25537E6E-6D56-4625-969A-6249D127D949}"/>
+                <a16:creationId xmlns:a16="http://schemas.microsoft.com/office/drawing/2014/main" id="{2722BF4A-74AD-4CCA-983B-801BCCAC36D6}"/>
               </a:ext>
             </a:extLst>
           </p:cNvPr>
@@ -23972,10 +25403,10 @@
       </p:sp>
       <p:sp>
         <p:nvSpPr>
-          <p:cNvPr id="72" name="dim_f184">
+          <p:cNvPr id="97" name="dim_f185">
             <a:extLst xmlns:a="http://schemas.openxmlformats.org/drawingml/2006/main">
               <a:ext uri="{FF2B5EF4-FFF2-40B4-BE49-F238E27FC236}">
-                <a16:creationId xmlns:a16="http://schemas.microsoft.com/office/drawing/2014/main" id="{0C955191-543C-4881-BD76-790AB1E38FD1}"/>
+                <a16:creationId xmlns:a16="http://schemas.microsoft.com/office/drawing/2014/main" id="{32251178-C39A-42AF-B2D7-49CE1D147B59}"/>
               </a:ext>
             </a:extLst>
           </p:cNvPr>
@@ -24003,10 +25434,10 @@
       </p:sp>
       <p:sp>
         <p:nvSpPr>
-          <p:cNvPr id="43" name="f184">
+          <p:cNvPr id="44" name="f185">
             <a:extLst xmlns:a="http://schemas.openxmlformats.org/drawingml/2006/main">
               <a:ext uri="{FF2B5EF4-FFF2-40B4-BE49-F238E27FC236}">
-                <a16:creationId xmlns:a16="http://schemas.microsoft.com/office/drawing/2014/main" id="{0C955191-543C-4881-BD76-790AB1E38FD1}"/>
+                <a16:creationId xmlns:a16="http://schemas.microsoft.com/office/drawing/2014/main" id="{32251178-C39A-42AF-B2D7-49CE1D147B59}"/>
               </a:ext>
             </a:extLst>
           </p:cNvPr>
@@ -24034,10 +25465,10 @@
       </p:sp>
       <p:sp>
         <p:nvSpPr>
-          <p:cNvPr id="73" name="dim_f185">
+          <p:cNvPr id="98" name="dim_f186">
             <a:extLst xmlns:a="http://schemas.openxmlformats.org/drawingml/2006/main">
               <a:ext uri="{FF2B5EF4-FFF2-40B4-BE49-F238E27FC236}">
-                <a16:creationId xmlns:a16="http://schemas.microsoft.com/office/drawing/2014/main" id="{148D418F-E4BB-492A-B8F5-A55BF01573BD}"/>
+                <a16:creationId xmlns:a16="http://schemas.microsoft.com/office/drawing/2014/main" id="{42BA663B-775A-4CE1-97EF-784B11E43825}"/>
               </a:ext>
             </a:extLst>
           </p:cNvPr>
@@ -24065,10 +25496,10 @@
       </p:sp>
       <p:sp>
         <p:nvSpPr>
-          <p:cNvPr id="44" name="f185">
+          <p:cNvPr id="45" name="f186">
             <a:extLst xmlns:a="http://schemas.openxmlformats.org/drawingml/2006/main">
               <a:ext uri="{FF2B5EF4-FFF2-40B4-BE49-F238E27FC236}">
-                <a16:creationId xmlns:a16="http://schemas.microsoft.com/office/drawing/2014/main" id="{148D418F-E4BB-492A-B8F5-A55BF01573BD}"/>
+                <a16:creationId xmlns:a16="http://schemas.microsoft.com/office/drawing/2014/main" id="{42BA663B-775A-4CE1-97EF-784B11E43825}"/>
               </a:ext>
             </a:extLst>
           </p:cNvPr>
@@ -24096,10 +25527,10 @@
       </p:sp>
       <p:sp>
         <p:nvSpPr>
-          <p:cNvPr id="74" name="dim_f186">
+          <p:cNvPr id="46" name="f187">
             <a:extLst xmlns:a="http://schemas.openxmlformats.org/drawingml/2006/main">
               <a:ext uri="{FF2B5EF4-FFF2-40B4-BE49-F238E27FC236}">
-                <a16:creationId xmlns:a16="http://schemas.microsoft.com/office/drawing/2014/main" id="{2041356C-CEC8-4538-B207-67477330066F}"/>
+                <a16:creationId xmlns:a16="http://schemas.microsoft.com/office/drawing/2014/main" id="{F7C8AB7E-0D0D-4871-8146-C66989ED09B7}"/>
               </a:ext>
             </a:extLst>
           </p:cNvPr>
@@ -24130,165 +25561,6 @@
             <a:defPPr algn="l">
               <a:defRPr sz="2175" b="1">
                 <a:solidFill>
-                  <a:srgbClr val="BCC2C8"/>
-                </a:solidFill>
-                <a:latin typeface="Nimbus Sans"/>
-                <a:ea typeface="Nimbus Sans"/>
-                <a:cs typeface="Nimbus Sans"/>
-              </a:defRPr>
-            </a:defPPr>
-            <a:lvl1pPr algn="l">
-              <a:defRPr sz="2175" b="1">
-                <a:solidFill>
-                  <a:srgbClr val="BCC2C8"/>
-                </a:solidFill>
-                <a:latin typeface="Nimbus Sans"/>
-                <a:ea typeface="Nimbus Sans"/>
-                <a:cs typeface="Nimbus Sans"/>
-              </a:defRPr>
-            </a:lvl1pPr>
-            <a:lvl2pPr algn="l">
-              <a:defRPr sz="2175" b="1">
-                <a:solidFill>
-                  <a:srgbClr val="BCC2C8"/>
-                </a:solidFill>
-                <a:latin typeface="Nimbus Sans"/>
-                <a:ea typeface="Nimbus Sans"/>
-                <a:cs typeface="Nimbus Sans"/>
-              </a:defRPr>
-            </a:lvl2pPr>
-            <a:lvl3pPr algn="l">
-              <a:defRPr sz="2175" b="1">
-                <a:solidFill>
-                  <a:srgbClr val="BCC2C8"/>
-                </a:solidFill>
-                <a:latin typeface="Nimbus Sans"/>
-                <a:ea typeface="Nimbus Sans"/>
-                <a:cs typeface="Nimbus Sans"/>
-              </a:defRPr>
-            </a:lvl3pPr>
-            <a:lvl4pPr algn="l">
-              <a:defRPr sz="2175" b="1">
-                <a:solidFill>
-                  <a:srgbClr val="BCC2C8"/>
-                </a:solidFill>
-                <a:latin typeface="Nimbus Sans"/>
-                <a:ea typeface="Nimbus Sans"/>
-                <a:cs typeface="Nimbus Sans"/>
-              </a:defRPr>
-            </a:lvl4pPr>
-            <a:lvl5pPr algn="l">
-              <a:defRPr sz="2175" b="1">
-                <a:solidFill>
-                  <a:srgbClr val="BCC2C8"/>
-                </a:solidFill>
-                <a:latin typeface="Nimbus Sans"/>
-                <a:ea typeface="Nimbus Sans"/>
-                <a:cs typeface="Nimbus Sans"/>
-              </a:defRPr>
-            </a:lvl5pPr>
-            <a:lvl6pPr algn="l">
-              <a:defRPr sz="2175" b="1">
-                <a:solidFill>
-                  <a:srgbClr val="BCC2C8"/>
-                </a:solidFill>
-                <a:latin typeface="Nimbus Sans"/>
-                <a:ea typeface="Nimbus Sans"/>
-                <a:cs typeface="Nimbus Sans"/>
-              </a:defRPr>
-            </a:lvl6pPr>
-            <a:lvl7pPr algn="l">
-              <a:defRPr sz="2175" b="1">
-                <a:solidFill>
-                  <a:srgbClr val="BCC2C8"/>
-                </a:solidFill>
-                <a:latin typeface="Nimbus Sans"/>
-                <a:ea typeface="Nimbus Sans"/>
-                <a:cs typeface="Nimbus Sans"/>
-              </a:defRPr>
-            </a:lvl7pPr>
-            <a:lvl8pPr algn="l">
-              <a:defRPr sz="2175" b="1">
-                <a:solidFill>
-                  <a:srgbClr val="BCC2C8"/>
-                </a:solidFill>
-                <a:latin typeface="Nimbus Sans"/>
-                <a:ea typeface="Nimbus Sans"/>
-                <a:cs typeface="Nimbus Sans"/>
-              </a:defRPr>
-            </a:lvl8pPr>
-            <a:lvl9pPr algn="l">
-              <a:defRPr sz="2175" b="1">
-                <a:solidFill>
-                  <a:srgbClr val="BCC2C8"/>
-                </a:solidFill>
-                <a:latin typeface="Nimbus Sans"/>
-                <a:ea typeface="Nimbus Sans"/>
-                <a:cs typeface="Nimbus Sans"/>
-              </a:defRPr>
-            </a:lvl9pPr>
-          </a:lstStyle>
-          <a:p xmlns:a="http://schemas.openxmlformats.org/drawingml/2006/main">
-            <a:pPr algn="l">
-              <a:defRPr sz="2175" b="1">
-                <a:solidFill>
-                  <a:srgbClr val="BCC2C8"/>
-                </a:solidFill>
-                <a:latin typeface="Nimbus Sans"/>
-                <a:ea typeface="Nimbus Sans"/>
-                <a:cs typeface="Nimbus Sans"/>
-              </a:defRPr>
-            </a:pPr>
-            <a:r>
-              <a:rPr sz="2175" b="1">
-                <a:solidFill>
-                  <a:srgbClr val="BCC2C8"/>
-                </a:solidFill>
-                <a:latin typeface="Nimbus Sans"/>
-                <a:ea typeface="Nimbus Sans"/>
-                <a:cs typeface="Nimbus Sans"/>
-              </a:rPr>
-              <a:t>Esempi di tre mutazioni</a:t>
-            </a:r>
-          </a:p>
-        </p:txBody>
-      </p:sp>
-      <p:sp>
-        <p:nvSpPr>
-          <p:cNvPr id="45" name="f186">
-            <a:extLst xmlns:a="http://schemas.openxmlformats.org/drawingml/2006/main">
-              <a:ext uri="{FF2B5EF4-FFF2-40B4-BE49-F238E27FC236}">
-                <a16:creationId xmlns:a16="http://schemas.microsoft.com/office/drawing/2014/main" id="{2041356C-CEC8-4538-B207-67477330066F}"/>
-              </a:ext>
-            </a:extLst>
-          </p:cNvPr>
-          <p:cNvSpPr>
-            <a:spLocks xmlns:a="http://schemas.openxmlformats.org/drawingml/2006/main" noGrp="1"/>
-          </p:cNvSpPr>
-          <p:nvPr/>
-        </p:nvSpPr>
-        <p:spPr>
-          <a:xfrm xmlns:a="http://schemas.openxmlformats.org/drawingml/2006/main">
-            <a:off x="8420100" y="2686050"/>
-            <a:ext cx="5753100" cy="428625"/>
-          </a:xfrm>
-          <a:prstGeom xmlns:a="http://schemas.openxmlformats.org/drawingml/2006/main" prst="rect">
-            <a:avLst/>
-          </a:prstGeom>
-          <a:noFill xmlns:a="http://schemas.openxmlformats.org/drawingml/2006/main"/>
-          <a:ln xmlns:a="http://schemas.openxmlformats.org/drawingml/2006/main" w="0">
-            <a:noFill/>
-            <a:prstDash val="solid"/>
-          </a:ln>
-        </p:spPr>
-        <p:txBody>
-          <a:bodyPr xmlns:a="http://schemas.openxmlformats.org/drawingml/2006/main" wrap="none" lIns="0" tIns="0" rIns="0" bIns="0" anchor="t">
-            <a:noAutofit/>
-          </a:bodyPr>
-          <a:lstStyle xmlns:a="http://schemas.openxmlformats.org/drawingml/2006/main">
-            <a:defPPr algn="l">
-              <a:defRPr sz="2175" b="1">
-                <a:solidFill>
                   <a:srgbClr val="182536"/>
                 </a:solidFill>
                 <a:latin typeface="Nimbus Sans"/>
@@ -24414,613 +25686,10 @@
       </p:sp>
       <p:graphicFrame>
         <p:nvGraphicFramePr>
-          <p:cNvPr id="75" name="dim_">
+          <p:cNvPr id="47" name="">
             <a:extLst xmlns:a="http://schemas.openxmlformats.org/drawingml/2006/main">
               <a:ext uri="{FF2B5EF4-FFF2-40B4-BE49-F238E27FC236}">
-                <a16:creationId xmlns:a16="http://schemas.microsoft.com/office/drawing/2014/main" id="{2574253D-69D1-46E1-BFDA-1B35A9B08D0C}"/>
-              </a:ext>
-            </a:extLst>
-          </p:cNvPr>
-          <p:cNvGraphicFramePr/>
-          <p:nvPr/>
-        </p:nvGraphicFramePr>
-        <p:xfrm>
-          <a:off xmlns:a="http://schemas.openxmlformats.org/drawingml/2006/main" x="8420100" y="3238500"/>
-          <a:ext xmlns:a="http://schemas.openxmlformats.org/drawingml/2006/main" cx="5753100" cy="3371850"/>
-        </p:xfrm>
-        <a:graphic xmlns:a="http://schemas.openxmlformats.org/drawingml/2006/main">
-          <a:graphicData uri="http://schemas.openxmlformats.org/drawingml/2006/table">
-            <a:tbl>
-              <a:tblPr firstRow="0" bandRow="0"/>
-              <a:tblGrid>
-                <a:gridCol w="2476500"/>
-                <a:gridCol w="1352550"/>
-                <a:gridCol w="1924050"/>
-              </a:tblGrid>
-              <a:tr h="514350">
-                <a:tc>
-                  <a:txBody>
-                    <a:bodyPr wrap="none">
-                      <a:noAutofit/>
-                    </a:bodyPr>
-                    <a:lstStyle/>
-                    <a:p>
-                      <a:pPr algn="l"/>
-                      <a:r>
-                        <a:rPr sz="1725" b="1">
-                          <a:solidFill>
-                            <a:srgbClr val="BCC2C8"/>
-                          </a:solidFill>
-                          <a:latin typeface="Nimbus Sans"/>
-                          <a:ea typeface="Nimbus Sans"/>
-                          <a:cs typeface="Nimbus Sans"/>
-                        </a:rPr>
-                        <a:t>Mutazione</a:t>
-                      </a:r>
-                    </a:p>
-                  </a:txBody>
-                  <a:tcPr marL="171450" marR="171450" marT="76200" marB="76200" anchor="ctr">
-                    <a:lnL w="14288">
-                      <a:solidFill>
-                        <a:srgbClr val="ECF1F6"/>
-                      </a:solidFill>
-                      <a:prstDash val="solid"/>
-                    </a:lnL>
-                    <a:lnR w="14288">
-                      <a:solidFill>
-                        <a:srgbClr val="ECF1F6"/>
-                      </a:solidFill>
-                      <a:prstDash val="solid"/>
-                    </a:lnR>
-                    <a:lnT w="14288">
-                      <a:solidFill>
-                        <a:srgbClr val="ECF1F6"/>
-                      </a:solidFill>
-                      <a:prstDash val="solid"/>
-                    </a:lnT>
-                    <a:lnB w="14288">
-                      <a:solidFill>
-                        <a:srgbClr val="ECF1F6"/>
-                      </a:solidFill>
-                      <a:prstDash val="solid"/>
-                    </a:lnB>
-                    <a:solidFill>
-                      <a:srgbClr val="F2F6FA"/>
-                    </a:solidFill>
-                  </a:tcPr>
-                </a:tc>
-                <a:tc>
-                  <a:txBody>
-                    <a:bodyPr wrap="none">
-                      <a:noAutofit/>
-                    </a:bodyPr>
-                    <a:lstStyle/>
-                    <a:p>
-                      <a:pPr algn="ctr"/>
-                      <a:r>
-                        <a:rPr sz="1725" b="1">
-                          <a:solidFill>
-                            <a:srgbClr val="BCC2C8"/>
-                          </a:solidFill>
-                          <a:latin typeface="Nimbus Sans"/>
-                          <a:ea typeface="Nimbus Sans"/>
-                          <a:cs typeface="Nimbus Sans"/>
-                        </a:rPr>
-                        <a:t>Originale</a:t>
-                      </a:r>
-                    </a:p>
-                  </a:txBody>
-                  <a:tcPr marL="171450" marR="171450" marT="76200" marB="76200" anchor="ctr">
-                    <a:lnR w="14288">
-                      <a:solidFill>
-                        <a:srgbClr val="ECF1F6"/>
-                      </a:solidFill>
-                      <a:prstDash val="solid"/>
-                    </a:lnR>
-                    <a:lnT w="14288">
-                      <a:solidFill>
-                        <a:srgbClr val="ECF1F6"/>
-                      </a:solidFill>
-                      <a:prstDash val="solid"/>
-                    </a:lnT>
-                    <a:lnB w="14288">
-                      <a:solidFill>
-                        <a:srgbClr val="ECF1F6"/>
-                      </a:solidFill>
-                      <a:prstDash val="solid"/>
-                    </a:lnB>
-                    <a:solidFill>
-                      <a:srgbClr val="F2F6FA"/>
-                    </a:solidFill>
-                  </a:tcPr>
-                </a:tc>
-                <a:tc>
-                  <a:txBody>
-                    <a:bodyPr wrap="none">
-                      <a:noAutofit/>
-                    </a:bodyPr>
-                    <a:lstStyle/>
-                    <a:p>
-                      <a:pPr algn="ctr"/>
-                      <a:r>
-                        <a:rPr sz="1725" b="1">
-                          <a:solidFill>
-                            <a:srgbClr val="BCC2C8"/>
-                          </a:solidFill>
-                          <a:latin typeface="Nimbus Sans"/>
-                          <a:ea typeface="Nimbus Sans"/>
-                          <a:cs typeface="Nimbus Sans"/>
-                        </a:rPr>
-                        <a:t>Mutato</a:t>
-                      </a:r>
-                    </a:p>
-                  </a:txBody>
-                  <a:tcPr marL="171450" marR="171450" marT="76200" marB="76200" anchor="ctr">
-                    <a:lnR w="14288">
-                      <a:solidFill>
-                        <a:srgbClr val="ECF1F6"/>
-                      </a:solidFill>
-                      <a:prstDash val="solid"/>
-                    </a:lnR>
-                    <a:lnT w="14288">
-                      <a:solidFill>
-                        <a:srgbClr val="ECF1F6"/>
-                      </a:solidFill>
-                      <a:prstDash val="solid"/>
-                    </a:lnT>
-                    <a:lnB w="14288">
-                      <a:solidFill>
-                        <a:srgbClr val="ECF1F6"/>
-                      </a:solidFill>
-                      <a:prstDash val="solid"/>
-                    </a:lnB>
-                    <a:solidFill>
-                      <a:srgbClr val="F2F6FA"/>
-                    </a:solidFill>
-                  </a:tcPr>
-                </a:tc>
-              </a:tr>
-              <a:tr h="876300">
-                <a:tc>
-                  <a:txBody>
-                    <a:bodyPr wrap="none">
-                      <a:noAutofit/>
-                    </a:bodyPr>
-                    <a:lstStyle/>
-                    <a:p>
-                      <a:pPr algn="l"/>
-                      <a:r>
-                        <a:rPr sz="1725" b="0">
-                          <a:solidFill>
-                            <a:srgbClr val="BCC2C8"/>
-                          </a:solidFill>
-                          <a:latin typeface="Nimbus Sans"/>
-                          <a:ea typeface="Nimbus Sans"/>
-                          <a:cs typeface="Nimbus Sans"/>
-                        </a:rPr>
-                        <a:t>NRF: HTTP</a:t>
-                      </a:r>
-                    </a:p>
-                    <a:p>
-                      <a:pPr algn="l"/>
-                      <a:r>
-                        <a:rPr sz="1725" b="0">
-                          <a:solidFill>
-                            <a:srgbClr val="BCC2C8"/>
-                          </a:solidFill>
-                          <a:latin typeface="Nimbus Sans"/>
-                          <a:ea typeface="Nimbus Sans"/>
-                          <a:cs typeface="Nimbus Sans"/>
-                        </a:rPr>
-                        <a:t>200 → 403</a:t>
-                      </a:r>
-                    </a:p>
-                  </a:txBody>
-                  <a:tcPr marL="171450" marR="171450" marT="76200" marB="76200" anchor="ctr">
-                    <a:lnL w="14288">
-                      <a:solidFill>
-                        <a:srgbClr val="ECF1F6"/>
-                      </a:solidFill>
-                      <a:prstDash val="solid"/>
-                    </a:lnL>
-                    <a:lnR w="14288">
-                      <a:solidFill>
-                        <a:srgbClr val="ECF1F6"/>
-                      </a:solidFill>
-                      <a:prstDash val="solid"/>
-                    </a:lnR>
-                    <a:lnB w="14288">
-                      <a:solidFill>
-                        <a:srgbClr val="ECF1F6"/>
-                      </a:solidFill>
-                      <a:prstDash val="solid"/>
-                    </a:lnB>
-                    <a:solidFill>
-                      <a:srgbClr val="F6F8FA"/>
-                    </a:solidFill>
-                  </a:tcPr>
-                </a:tc>
-                <a:tc>
-                  <a:txBody>
-                    <a:bodyPr wrap="none">
-                      <a:noAutofit/>
-                    </a:bodyPr>
-                    <a:lstStyle/>
-                    <a:p>
-                      <a:pPr algn="ctr"/>
-                      <a:r>
-                        <a:rPr sz="1725" b="1">
-                          <a:solidFill>
-                            <a:srgbClr val="E4CBD0"/>
-                          </a:solidFill>
-                          <a:latin typeface="Nimbus Sans"/>
-                          <a:ea typeface="Nimbus Sans"/>
-                          <a:cs typeface="Nimbus Sans"/>
-                        </a:rPr>
-                        <a:t>FAIL</a:t>
-                      </a:r>
-                    </a:p>
-                  </a:txBody>
-                  <a:tcPr marL="171450" marR="171450" marT="76200" marB="76200" anchor="ctr">
-                    <a:lnR w="14288">
-                      <a:solidFill>
-                        <a:srgbClr val="ECF1F6"/>
-                      </a:solidFill>
-                      <a:prstDash val="solid"/>
-                    </a:lnR>
-                    <a:lnB w="14288">
-                      <a:solidFill>
-                        <a:srgbClr val="ECF1F6"/>
-                      </a:solidFill>
-                      <a:prstDash val="solid"/>
-                    </a:lnB>
-                    <a:solidFill>
-                      <a:srgbClr val="F6F8FA"/>
-                    </a:solidFill>
-                  </a:tcPr>
-                </a:tc>
-                <a:tc>
-                  <a:txBody>
-                    <a:bodyPr wrap="none">
-                      <a:noAutofit/>
-                    </a:bodyPr>
-                    <a:lstStyle/>
-                    <a:p>
-                      <a:pPr algn="ctr"/>
-                      <a:r>
-                        <a:rPr sz="1725" b="1">
-                          <a:solidFill>
-                            <a:srgbClr val="C0DAD4"/>
-                          </a:solidFill>
-                          <a:latin typeface="Nimbus Sans"/>
-                          <a:ea typeface="Nimbus Sans"/>
-                          <a:cs typeface="Nimbus Sans"/>
-                        </a:rPr>
-                        <a:t>PASS</a:t>
-                      </a:r>
-                    </a:p>
-                  </a:txBody>
-                  <a:tcPr marL="171450" marR="171450" marT="76200" marB="76200" anchor="ctr">
-                    <a:lnR w="14288">
-                      <a:solidFill>
-                        <a:srgbClr val="ECF1F6"/>
-                      </a:solidFill>
-                      <a:prstDash val="solid"/>
-                    </a:lnR>
-                    <a:lnB w="14288">
-                      <a:solidFill>
-                        <a:srgbClr val="ECF1F6"/>
-                      </a:solidFill>
-                      <a:prstDash val="solid"/>
-                    </a:lnB>
-                    <a:solidFill>
-                      <a:srgbClr val="F6F8FA"/>
-                    </a:solidFill>
-                  </a:tcPr>
-                </a:tc>
-              </a:tr>
-              <a:tr h="1104900">
-                <a:tc>
-                  <a:txBody>
-                    <a:bodyPr wrap="none">
-                      <a:noAutofit/>
-                    </a:bodyPr>
-                    <a:lstStyle/>
-                    <a:p>
-                      <a:pPr algn="l"/>
-                      <a:r>
-                        <a:rPr sz="1725" b="0">
-                          <a:solidFill>
-                            <a:srgbClr val="BCC2C8"/>
-                          </a:solidFill>
-                          <a:latin typeface="Nimbus Sans"/>
-                          <a:ea typeface="Nimbus Sans"/>
-                          <a:cs typeface="Nimbus Sans"/>
-                        </a:rPr>
-                        <a:t>AMF A: Intervallo</a:t>
-                      </a:r>
-                    </a:p>
-                    <a:p>
-                      <a:pPr algn="l"/>
-                      <a:r>
-                        <a:rPr sz="1725" b="0">
-                          <a:solidFill>
-                            <a:srgbClr val="BCC2C8"/>
-                          </a:solidFill>
-                          <a:latin typeface="Nimbus Sans"/>
-                          <a:ea typeface="Nimbus Sans"/>
-                          <a:cs typeface="Nimbus Sans"/>
-                        </a:rPr>
-                        <a:t>temporale non</a:t>
-                      </a:r>
-                    </a:p>
-                    <a:p>
-                      <a:pPr algn="l"/>
-                      <a:r>
-                        <a:rPr sz="1725" b="0">
-                          <a:solidFill>
-                            <a:srgbClr val="BCC2C8"/>
-                          </a:solidFill>
-                          <a:latin typeface="Nimbus Sans"/>
-                          <a:ea typeface="Nimbus Sans"/>
-                          <a:cs typeface="Nimbus Sans"/>
-                        </a:rPr>
-                        <a:t>rispettato</a:t>
-                      </a:r>
-                    </a:p>
-                  </a:txBody>
-                  <a:tcPr marL="171450" marR="171450" marT="76200" marB="76200" anchor="ctr">
-                    <a:lnL w="14288">
-                      <a:solidFill>
-                        <a:srgbClr val="ECF1F6"/>
-                      </a:solidFill>
-                      <a:prstDash val="solid"/>
-                    </a:lnL>
-                    <a:lnR w="14288">
-                      <a:solidFill>
-                        <a:srgbClr val="ECF1F6"/>
-                      </a:solidFill>
-                      <a:prstDash val="solid"/>
-                    </a:lnR>
-                    <a:lnB w="14288">
-                      <a:solidFill>
-                        <a:srgbClr val="ECF1F6"/>
-                      </a:solidFill>
-                      <a:prstDash val="solid"/>
-                    </a:lnB>
-                    <a:solidFill>
-                      <a:srgbClr val="F6F8FA"/>
-                    </a:solidFill>
-                  </a:tcPr>
-                </a:tc>
-                <a:tc>
-                  <a:txBody>
-                    <a:bodyPr wrap="none">
-                      <a:noAutofit/>
-                    </a:bodyPr>
-                    <a:lstStyle/>
-                    <a:p>
-                      <a:pPr algn="ctr"/>
-                      <a:r>
-                        <a:rPr sz="1725" b="1">
-                          <a:solidFill>
-                            <a:srgbClr val="C0DAD4"/>
-                          </a:solidFill>
-                          <a:latin typeface="Nimbus Sans"/>
-                          <a:ea typeface="Nimbus Sans"/>
-                          <a:cs typeface="Nimbus Sans"/>
-                        </a:rPr>
-                        <a:t>PASS</a:t>
-                      </a:r>
-                    </a:p>
-                  </a:txBody>
-                  <a:tcPr marL="171450" marR="171450" marT="76200" marB="76200" anchor="ctr">
-                    <a:lnR w="14288">
-                      <a:solidFill>
-                        <a:srgbClr val="ECF1F6"/>
-                      </a:solidFill>
-                      <a:prstDash val="solid"/>
-                    </a:lnR>
-                    <a:lnB w="14288">
-                      <a:solidFill>
-                        <a:srgbClr val="ECF1F6"/>
-                      </a:solidFill>
-                      <a:prstDash val="solid"/>
-                    </a:lnB>
-                    <a:solidFill>
-                      <a:srgbClr val="F6F8FA"/>
-                    </a:solidFill>
-                  </a:tcPr>
-                </a:tc>
-                <a:tc>
-                  <a:txBody>
-                    <a:bodyPr wrap="none">
-                      <a:noAutofit/>
-                    </a:bodyPr>
-                    <a:lstStyle/>
-                    <a:p>
-                      <a:pPr algn="ctr"/>
-                      <a:r>
-                        <a:rPr sz="1725" b="1">
-                          <a:solidFill>
-                            <a:srgbClr val="E4CBD0"/>
-                          </a:solidFill>
-                          <a:latin typeface="Nimbus Sans"/>
-                          <a:ea typeface="Nimbus Sans"/>
-                          <a:cs typeface="Nimbus Sans"/>
-                        </a:rPr>
-                        <a:t>FAIL</a:t>
-                      </a:r>
-                    </a:p>
-                  </a:txBody>
-                  <a:tcPr marL="171450" marR="171450" marT="76200" marB="76200" anchor="ctr">
-                    <a:lnR w="14288">
-                      <a:solidFill>
-                        <a:srgbClr val="ECF1F6"/>
-                      </a:solidFill>
-                      <a:prstDash val="solid"/>
-                    </a:lnR>
-                    <a:lnB w="14288">
-                      <a:solidFill>
-                        <a:srgbClr val="ECF1F6"/>
-                      </a:solidFill>
-                      <a:prstDash val="solid"/>
-                    </a:lnB>
-                    <a:solidFill>
-                      <a:srgbClr val="F6F8FA"/>
-                    </a:solidFill>
-                  </a:tcPr>
-                </a:tc>
-              </a:tr>
-              <a:tr h="876300">
-                <a:tc>
-                  <a:txBody>
-                    <a:bodyPr wrap="none">
-                      <a:noAutofit/>
-                    </a:bodyPr>
-                    <a:lstStyle/>
-                    <a:p>
-                      <a:pPr algn="l"/>
-                      <a:r>
-                        <a:rPr sz="1725" b="0">
-                          <a:solidFill>
-                            <a:srgbClr val="BCC2C8"/>
-                          </a:solidFill>
-                          <a:latin typeface="Nimbus Sans"/>
-                          <a:ea typeface="Nimbus Sans"/>
-                          <a:cs typeface="Nimbus Sans"/>
-                        </a:rPr>
-                        <a:t>UPF: F-TEID</a:t>
-                      </a:r>
-                    </a:p>
-                    <a:p>
-                      <a:pPr algn="l"/>
-                      <a:r>
-                        <a:rPr sz="1725" b="0">
-                          <a:solidFill>
-                            <a:srgbClr val="BCC2C8"/>
-                          </a:solidFill>
-                          <a:latin typeface="Nimbus Sans"/>
-                          <a:ea typeface="Nimbus Sans"/>
-                          <a:cs typeface="Nimbus Sans"/>
-                        </a:rPr>
-                        <a:t>rimossi</a:t>
-                      </a:r>
-                    </a:p>
-                  </a:txBody>
-                  <a:tcPr marL="171450" marR="171450" marT="76200" marB="76200" anchor="ctr">
-                    <a:lnL w="14288">
-                      <a:solidFill>
-                        <a:srgbClr val="ECF1F6"/>
-                      </a:solidFill>
-                      <a:prstDash val="solid"/>
-                    </a:lnL>
-                    <a:lnR w="14288">
-                      <a:solidFill>
-                        <a:srgbClr val="ECF1F6"/>
-                      </a:solidFill>
-                      <a:prstDash val="solid"/>
-                    </a:lnR>
-                    <a:lnB w="14288">
-                      <a:solidFill>
-                        <a:srgbClr val="ECF1F6"/>
-                      </a:solidFill>
-                      <a:prstDash val="solid"/>
-                    </a:lnB>
-                    <a:solidFill>
-                      <a:srgbClr val="F6F8FA"/>
-                    </a:solidFill>
-                  </a:tcPr>
-                </a:tc>
-                <a:tc>
-                  <a:txBody>
-                    <a:bodyPr wrap="none">
-                      <a:noAutofit/>
-                    </a:bodyPr>
-                    <a:lstStyle/>
-                    <a:p>
-                      <a:pPr algn="ctr"/>
-                      <a:r>
-                        <a:rPr sz="1725" b="1">
-                          <a:solidFill>
-                            <a:srgbClr val="C0DAD4"/>
-                          </a:solidFill>
-                          <a:latin typeface="Nimbus Sans"/>
-                          <a:ea typeface="Nimbus Sans"/>
-                          <a:cs typeface="Nimbus Sans"/>
-                        </a:rPr>
-                        <a:t>PASS</a:t>
-                      </a:r>
-                    </a:p>
-                  </a:txBody>
-                  <a:tcPr marL="171450" marR="171450" marT="76200" marB="76200" anchor="ctr">
-                    <a:lnR w="14288">
-                      <a:solidFill>
-                        <a:srgbClr val="ECF1F6"/>
-                      </a:solidFill>
-                      <a:prstDash val="solid"/>
-                    </a:lnR>
-                    <a:lnB w="14288">
-                      <a:solidFill>
-                        <a:srgbClr val="ECF1F6"/>
-                      </a:solidFill>
-                      <a:prstDash val="solid"/>
-                    </a:lnB>
-                    <a:solidFill>
-                      <a:srgbClr val="F6F8FA"/>
-                    </a:solidFill>
-                  </a:tcPr>
-                </a:tc>
-                <a:tc>
-                  <a:txBody>
-                    <a:bodyPr wrap="none">
-                      <a:noAutofit/>
-                    </a:bodyPr>
-                    <a:lstStyle/>
-                    <a:p>
-                      <a:pPr algn="ctr"/>
-                      <a:r>
-                        <a:rPr sz="1575" b="1">
-                          <a:solidFill>
-                            <a:srgbClr val="DED5C9"/>
-                          </a:solidFill>
-                          <a:latin typeface="Nimbus Sans"/>
-                          <a:ea typeface="Nimbus Sans"/>
-                          <a:cs typeface="Nimbus Sans"/>
-                        </a:rPr>
-                        <a:t>INCONCLUSIVE</a:t>
-                      </a:r>
-                    </a:p>
-                  </a:txBody>
-                  <a:tcPr marL="171450" marR="171450" marT="76200" marB="76200" anchor="ctr">
-                    <a:lnR w="14288">
-                      <a:solidFill>
-                        <a:srgbClr val="ECF1F6"/>
-                      </a:solidFill>
-                      <a:prstDash val="solid"/>
-                    </a:lnR>
-                    <a:lnB w="14288">
-                      <a:solidFill>
-                        <a:srgbClr val="ECF1F6"/>
-                      </a:solidFill>
-                      <a:prstDash val="solid"/>
-                    </a:lnB>
-                    <a:solidFill>
-                      <a:srgbClr val="F6F8FA"/>
-                    </a:solidFill>
-                  </a:tcPr>
-                </a:tc>
-              </a:tr>
-            </a:tbl>
-          </a:graphicData>
-        </a:graphic>
-      </p:graphicFrame>
-      <p:graphicFrame>
-        <p:nvGraphicFramePr>
-          <p:cNvPr id="46" name="">
-            <a:extLst xmlns:a="http://schemas.openxmlformats.org/drawingml/2006/main">
-              <a:ext uri="{FF2B5EF4-FFF2-40B4-BE49-F238E27FC236}">
-                <a16:creationId xmlns:a16="http://schemas.microsoft.com/office/drawing/2014/main" id="{2574253D-69D1-46E1-BFDA-1B35A9B08D0C}"/>
+                <a16:creationId xmlns:a16="http://schemas.microsoft.com/office/drawing/2014/main" id="{DD6DC111-4EFC-45AB-813A-B4A8FC5970FB}"/>
               </a:ext>
             </a:extLst>
           </p:cNvPr>
@@ -25620,10 +26289,10 @@
       </p:graphicFrame>
       <p:sp>
         <p:nvSpPr>
-          <p:cNvPr id="76" name="dim_f188">
+          <p:cNvPr id="48" name="f189">
             <a:extLst xmlns:a="http://schemas.openxmlformats.org/drawingml/2006/main">
               <a:ext uri="{FF2B5EF4-FFF2-40B4-BE49-F238E27FC236}">
-                <a16:creationId xmlns:a16="http://schemas.microsoft.com/office/drawing/2014/main" id="{C5A25857-740E-432B-A15C-63403E46EB36}"/>
+                <a16:creationId xmlns:a16="http://schemas.microsoft.com/office/drawing/2014/main" id="{1E58A7E9-4A67-4E54-86EE-69AAC2B2B253}"/>
               </a:ext>
             </a:extLst>
           </p:cNvPr>
@@ -25654,7 +26323,7 @@
             <a:defPPr algn="ctr">
               <a:defRPr sz="5250" b="1">
                 <a:solidFill>
-                  <a:srgbClr val="C7D2EF"/>
+                  <a:srgbClr val="4264D0"/>
                 </a:solidFill>
                 <a:latin typeface="Nimbus Sans"/>
                 <a:ea typeface="Nimbus Sans"/>
@@ -25664,7 +26333,7 @@
             <a:lvl1pPr algn="ctr">
               <a:defRPr sz="5250" b="1">
                 <a:solidFill>
-                  <a:srgbClr val="C7D2EF"/>
+                  <a:srgbClr val="4264D0"/>
                 </a:solidFill>
                 <a:latin typeface="Nimbus Sans"/>
                 <a:ea typeface="Nimbus Sans"/>
@@ -25674,7 +26343,7 @@
             <a:lvl2pPr algn="ctr">
               <a:defRPr sz="5250" b="1">
                 <a:solidFill>
-                  <a:srgbClr val="C7D2EF"/>
+                  <a:srgbClr val="4264D0"/>
                 </a:solidFill>
                 <a:latin typeface="Nimbus Sans"/>
                 <a:ea typeface="Nimbus Sans"/>
@@ -25684,7 +26353,7 @@
             <a:lvl3pPr algn="ctr">
               <a:defRPr sz="5250" b="1">
                 <a:solidFill>
-                  <a:srgbClr val="C7D2EF"/>
+                  <a:srgbClr val="4264D0"/>
                 </a:solidFill>
                 <a:latin typeface="Nimbus Sans"/>
                 <a:ea typeface="Nimbus Sans"/>
@@ -25694,7 +26363,7 @@
             <a:lvl4pPr algn="ctr">
               <a:defRPr sz="5250" b="1">
                 <a:solidFill>
-                  <a:srgbClr val="C7D2EF"/>
+                  <a:srgbClr val="4264D0"/>
                 </a:solidFill>
                 <a:latin typeface="Nimbus Sans"/>
                 <a:ea typeface="Nimbus Sans"/>
@@ -25704,7 +26373,7 @@
             <a:lvl5pPr algn="ctr">
               <a:defRPr sz="5250" b="1">
                 <a:solidFill>
-                  <a:srgbClr val="C7D2EF"/>
+                  <a:srgbClr val="4264D0"/>
                 </a:solidFill>
                 <a:latin typeface="Nimbus Sans"/>
                 <a:ea typeface="Nimbus Sans"/>
@@ -25714,7 +26383,7 @@
             <a:lvl6pPr algn="ctr">
               <a:defRPr sz="5250" b="1">
                 <a:solidFill>
-                  <a:srgbClr val="C7D2EF"/>
+                  <a:srgbClr val="4264D0"/>
                 </a:solidFill>
                 <a:latin typeface="Nimbus Sans"/>
                 <a:ea typeface="Nimbus Sans"/>
@@ -25724,7 +26393,7 @@
             <a:lvl7pPr algn="ctr">
               <a:defRPr sz="5250" b="1">
                 <a:solidFill>
-                  <a:srgbClr val="C7D2EF"/>
+                  <a:srgbClr val="4264D0"/>
                 </a:solidFill>
                 <a:latin typeface="Nimbus Sans"/>
                 <a:ea typeface="Nimbus Sans"/>
@@ -25734,7 +26403,7 @@
             <a:lvl8pPr algn="ctr">
               <a:defRPr sz="5250" b="1">
                 <a:solidFill>
-                  <a:srgbClr val="C7D2EF"/>
+                  <a:srgbClr val="4264D0"/>
                 </a:solidFill>
                 <a:latin typeface="Nimbus Sans"/>
                 <a:ea typeface="Nimbus Sans"/>
@@ -25744,7 +26413,7 @@
             <a:lvl9pPr algn="ctr">
               <a:defRPr sz="5250" b="1">
                 <a:solidFill>
-                  <a:srgbClr val="C7D2EF"/>
+                  <a:srgbClr val="4264D0"/>
                 </a:solidFill>
                 <a:latin typeface="Nimbus Sans"/>
                 <a:ea typeface="Nimbus Sans"/>
@@ -25756,7 +26425,7 @@
             <a:pPr algn="ctr">
               <a:defRPr sz="5250" b="1">
                 <a:solidFill>
-                  <a:srgbClr val="C7D2EF"/>
+                  <a:srgbClr val="4264D0"/>
                 </a:solidFill>
                 <a:latin typeface="Nimbus Sans"/>
                 <a:ea typeface="Nimbus Sans"/>
@@ -25766,7 +26435,7 @@
             <a:r>
               <a:rPr sz="5250" b="1">
                 <a:solidFill>
-                  <a:srgbClr val="C7D2EF"/>
+                  <a:srgbClr val="4264D0"/>
                 </a:solidFill>
                 <a:latin typeface="Nimbus Sans"/>
                 <a:ea typeface="Nimbus Sans"/>
@@ -25779,169 +26448,10 @@
       </p:sp>
       <p:sp>
         <p:nvSpPr>
-          <p:cNvPr id="47" name="f188">
+          <p:cNvPr id="49" name="f190">
             <a:extLst xmlns:a="http://schemas.openxmlformats.org/drawingml/2006/main">
               <a:ext uri="{FF2B5EF4-FFF2-40B4-BE49-F238E27FC236}">
-                <a16:creationId xmlns:a16="http://schemas.microsoft.com/office/drawing/2014/main" id="{C5A25857-740E-432B-A15C-63403E46EB36}"/>
-              </a:ext>
-            </a:extLst>
-          </p:cNvPr>
-          <p:cNvSpPr>
-            <a:spLocks xmlns:a="http://schemas.openxmlformats.org/drawingml/2006/main" noGrp="1"/>
-          </p:cNvSpPr>
-          <p:nvPr/>
-        </p:nvSpPr>
-        <p:spPr>
-          <a:xfrm xmlns:a="http://schemas.openxmlformats.org/drawingml/2006/main">
-            <a:off x="8420100" y="7038975"/>
-            <a:ext cx="2000250" cy="857250"/>
-          </a:xfrm>
-          <a:prstGeom xmlns:a="http://schemas.openxmlformats.org/drawingml/2006/main" prst="rect">
-            <a:avLst/>
-          </a:prstGeom>
-          <a:noFill xmlns:a="http://schemas.openxmlformats.org/drawingml/2006/main"/>
-          <a:ln xmlns:a="http://schemas.openxmlformats.org/drawingml/2006/main" w="0">
-            <a:noFill/>
-            <a:prstDash val="solid"/>
-          </a:ln>
-        </p:spPr>
-        <p:txBody>
-          <a:bodyPr xmlns:a="http://schemas.openxmlformats.org/drawingml/2006/main" wrap="none" lIns="0" tIns="0" rIns="0" bIns="0" anchor="t">
-            <a:noAutofit/>
-          </a:bodyPr>
-          <a:lstStyle xmlns:a="http://schemas.openxmlformats.org/drawingml/2006/main">
-            <a:defPPr algn="ctr">
-              <a:defRPr sz="5250" b="1">
-                <a:solidFill>
-                  <a:srgbClr val="4264D0"/>
-                </a:solidFill>
-                <a:latin typeface="Nimbus Sans"/>
-                <a:ea typeface="Nimbus Sans"/>
-                <a:cs typeface="Nimbus Sans"/>
-              </a:defRPr>
-            </a:defPPr>
-            <a:lvl1pPr algn="ctr">
-              <a:defRPr sz="5250" b="1">
-                <a:solidFill>
-                  <a:srgbClr val="4264D0"/>
-                </a:solidFill>
-                <a:latin typeface="Nimbus Sans"/>
-                <a:ea typeface="Nimbus Sans"/>
-                <a:cs typeface="Nimbus Sans"/>
-              </a:defRPr>
-            </a:lvl1pPr>
-            <a:lvl2pPr algn="ctr">
-              <a:defRPr sz="5250" b="1">
-                <a:solidFill>
-                  <a:srgbClr val="4264D0"/>
-                </a:solidFill>
-                <a:latin typeface="Nimbus Sans"/>
-                <a:ea typeface="Nimbus Sans"/>
-                <a:cs typeface="Nimbus Sans"/>
-              </a:defRPr>
-            </a:lvl2pPr>
-            <a:lvl3pPr algn="ctr">
-              <a:defRPr sz="5250" b="1">
-                <a:solidFill>
-                  <a:srgbClr val="4264D0"/>
-                </a:solidFill>
-                <a:latin typeface="Nimbus Sans"/>
-                <a:ea typeface="Nimbus Sans"/>
-                <a:cs typeface="Nimbus Sans"/>
-              </a:defRPr>
-            </a:lvl3pPr>
-            <a:lvl4pPr algn="ctr">
-              <a:defRPr sz="5250" b="1">
-                <a:solidFill>
-                  <a:srgbClr val="4264D0"/>
-                </a:solidFill>
-                <a:latin typeface="Nimbus Sans"/>
-                <a:ea typeface="Nimbus Sans"/>
-                <a:cs typeface="Nimbus Sans"/>
-              </a:defRPr>
-            </a:lvl4pPr>
-            <a:lvl5pPr algn="ctr">
-              <a:defRPr sz="5250" b="1">
-                <a:solidFill>
-                  <a:srgbClr val="4264D0"/>
-                </a:solidFill>
-                <a:latin typeface="Nimbus Sans"/>
-                <a:ea typeface="Nimbus Sans"/>
-                <a:cs typeface="Nimbus Sans"/>
-              </a:defRPr>
-            </a:lvl5pPr>
-            <a:lvl6pPr algn="ctr">
-              <a:defRPr sz="5250" b="1">
-                <a:solidFill>
-                  <a:srgbClr val="4264D0"/>
-                </a:solidFill>
-                <a:latin typeface="Nimbus Sans"/>
-                <a:ea typeface="Nimbus Sans"/>
-                <a:cs typeface="Nimbus Sans"/>
-              </a:defRPr>
-            </a:lvl6pPr>
-            <a:lvl7pPr algn="ctr">
-              <a:defRPr sz="5250" b="1">
-                <a:solidFill>
-                  <a:srgbClr val="4264D0"/>
-                </a:solidFill>
-                <a:latin typeface="Nimbus Sans"/>
-                <a:ea typeface="Nimbus Sans"/>
-                <a:cs typeface="Nimbus Sans"/>
-              </a:defRPr>
-            </a:lvl7pPr>
-            <a:lvl8pPr algn="ctr">
-              <a:defRPr sz="5250" b="1">
-                <a:solidFill>
-                  <a:srgbClr val="4264D0"/>
-                </a:solidFill>
-                <a:latin typeface="Nimbus Sans"/>
-                <a:ea typeface="Nimbus Sans"/>
-                <a:cs typeface="Nimbus Sans"/>
-              </a:defRPr>
-            </a:lvl8pPr>
-            <a:lvl9pPr algn="ctr">
-              <a:defRPr sz="5250" b="1">
-                <a:solidFill>
-                  <a:srgbClr val="4264D0"/>
-                </a:solidFill>
-                <a:latin typeface="Nimbus Sans"/>
-                <a:ea typeface="Nimbus Sans"/>
-                <a:cs typeface="Nimbus Sans"/>
-              </a:defRPr>
-            </a:lvl9pPr>
-          </a:lstStyle>
-          <a:p xmlns:a="http://schemas.openxmlformats.org/drawingml/2006/main">
-            <a:pPr algn="ctr">
-              <a:defRPr sz="5250" b="1">
-                <a:solidFill>
-                  <a:srgbClr val="4264D0"/>
-                </a:solidFill>
-                <a:latin typeface="Nimbus Sans"/>
-                <a:ea typeface="Nimbus Sans"/>
-                <a:cs typeface="Nimbus Sans"/>
-              </a:defRPr>
-            </a:pPr>
-            <a:r>
-              <a:rPr sz="5250" b="1">
-                <a:solidFill>
-                  <a:srgbClr val="4264D0"/>
-                </a:solidFill>
-                <a:latin typeface="Nimbus Sans"/>
-                <a:ea typeface="Nimbus Sans"/>
-                <a:cs typeface="Nimbus Sans"/>
-              </a:rPr>
-              <a:t>13/13</a:t>
-            </a:r>
-          </a:p>
-        </p:txBody>
-      </p:sp>
-      <p:sp>
-        <p:nvSpPr>
-          <p:cNvPr id="77" name="dim_f189">
-            <a:extLst xmlns:a="http://schemas.openxmlformats.org/drawingml/2006/main">
-              <a:ext uri="{FF2B5EF4-FFF2-40B4-BE49-F238E27FC236}">
-                <a16:creationId xmlns:a16="http://schemas.microsoft.com/office/drawing/2014/main" id="{51C27A74-1F2D-4863-866B-AB870A97AC79}"/>
+                <a16:creationId xmlns:a16="http://schemas.microsoft.com/office/drawing/2014/main" id="{FC77429B-DD8F-4C7E-891F-515592591B50}"/>
               </a:ext>
             </a:extLst>
           </p:cNvPr>
@@ -25972,188 +26482,6 @@
             <a:defPPr algn="ctr">
               <a:defRPr sz="2100" b="1">
                 <a:solidFill>
-                  <a:srgbClr val="BCC2C8"/>
-                </a:solidFill>
-                <a:latin typeface="Nimbus Sans"/>
-                <a:ea typeface="Nimbus Sans"/>
-                <a:cs typeface="Nimbus Sans"/>
-              </a:defRPr>
-            </a:defPPr>
-            <a:lvl1pPr algn="ctr">
-              <a:defRPr sz="2100" b="1">
-                <a:solidFill>
-                  <a:srgbClr val="BCC2C8"/>
-                </a:solidFill>
-                <a:latin typeface="Nimbus Sans"/>
-                <a:ea typeface="Nimbus Sans"/>
-                <a:cs typeface="Nimbus Sans"/>
-              </a:defRPr>
-            </a:lvl1pPr>
-            <a:lvl2pPr algn="ctr">
-              <a:defRPr sz="2100" b="1">
-                <a:solidFill>
-                  <a:srgbClr val="BCC2C8"/>
-                </a:solidFill>
-                <a:latin typeface="Nimbus Sans"/>
-                <a:ea typeface="Nimbus Sans"/>
-                <a:cs typeface="Nimbus Sans"/>
-              </a:defRPr>
-            </a:lvl2pPr>
-            <a:lvl3pPr algn="ctr">
-              <a:defRPr sz="2100" b="1">
-                <a:solidFill>
-                  <a:srgbClr val="BCC2C8"/>
-                </a:solidFill>
-                <a:latin typeface="Nimbus Sans"/>
-                <a:ea typeface="Nimbus Sans"/>
-                <a:cs typeface="Nimbus Sans"/>
-              </a:defRPr>
-            </a:lvl3pPr>
-            <a:lvl4pPr algn="ctr">
-              <a:defRPr sz="2100" b="1">
-                <a:solidFill>
-                  <a:srgbClr val="BCC2C8"/>
-                </a:solidFill>
-                <a:latin typeface="Nimbus Sans"/>
-                <a:ea typeface="Nimbus Sans"/>
-                <a:cs typeface="Nimbus Sans"/>
-              </a:defRPr>
-            </a:lvl4pPr>
-            <a:lvl5pPr algn="ctr">
-              <a:defRPr sz="2100" b="1">
-                <a:solidFill>
-                  <a:srgbClr val="BCC2C8"/>
-                </a:solidFill>
-                <a:latin typeface="Nimbus Sans"/>
-                <a:ea typeface="Nimbus Sans"/>
-                <a:cs typeface="Nimbus Sans"/>
-              </a:defRPr>
-            </a:lvl5pPr>
-            <a:lvl6pPr algn="ctr">
-              <a:defRPr sz="2100" b="1">
-                <a:solidFill>
-                  <a:srgbClr val="BCC2C8"/>
-                </a:solidFill>
-                <a:latin typeface="Nimbus Sans"/>
-                <a:ea typeface="Nimbus Sans"/>
-                <a:cs typeface="Nimbus Sans"/>
-              </a:defRPr>
-            </a:lvl6pPr>
-            <a:lvl7pPr algn="ctr">
-              <a:defRPr sz="2100" b="1">
-                <a:solidFill>
-                  <a:srgbClr val="BCC2C8"/>
-                </a:solidFill>
-                <a:latin typeface="Nimbus Sans"/>
-                <a:ea typeface="Nimbus Sans"/>
-                <a:cs typeface="Nimbus Sans"/>
-              </a:defRPr>
-            </a:lvl7pPr>
-            <a:lvl8pPr algn="ctr">
-              <a:defRPr sz="2100" b="1">
-                <a:solidFill>
-                  <a:srgbClr val="BCC2C8"/>
-                </a:solidFill>
-                <a:latin typeface="Nimbus Sans"/>
-                <a:ea typeface="Nimbus Sans"/>
-                <a:cs typeface="Nimbus Sans"/>
-              </a:defRPr>
-            </a:lvl8pPr>
-            <a:lvl9pPr algn="ctr">
-              <a:defRPr sz="2100" b="1">
-                <a:solidFill>
-                  <a:srgbClr val="BCC2C8"/>
-                </a:solidFill>
-                <a:latin typeface="Nimbus Sans"/>
-                <a:ea typeface="Nimbus Sans"/>
-                <a:cs typeface="Nimbus Sans"/>
-              </a:defRPr>
-            </a:lvl9pPr>
-          </a:lstStyle>
-          <a:p xmlns:a="http://schemas.openxmlformats.org/drawingml/2006/main">
-            <a:pPr algn="ctr">
-              <a:defRPr sz="2100" b="1">
-                <a:solidFill>
-                  <a:srgbClr val="BCC2C8"/>
-                </a:solidFill>
-                <a:latin typeface="Nimbus Sans"/>
-                <a:ea typeface="Nimbus Sans"/>
-                <a:cs typeface="Nimbus Sans"/>
-              </a:defRPr>
-            </a:pPr>
-            <a:r>
-              <a:rPr sz="2100" b="1">
-                <a:solidFill>
-                  <a:srgbClr val="BCC2C8"/>
-                </a:solidFill>
-                <a:latin typeface="Nimbus Sans"/>
-                <a:ea typeface="Nimbus Sans"/>
-                <a:cs typeface="Nimbus Sans"/>
-              </a:rPr>
-              <a:t>scenari completati</a:t>
-            </a:r>
-          </a:p>
-          <a:p xmlns:a="http://schemas.openxmlformats.org/drawingml/2006/main">
-            <a:pPr algn="ctr">
-              <a:defRPr sz="2100" b="1">
-                <a:solidFill>
-                  <a:srgbClr val="BCC2C8"/>
-                </a:solidFill>
-                <a:latin typeface="Nimbus Sans"/>
-                <a:ea typeface="Nimbus Sans"/>
-                <a:cs typeface="Nimbus Sans"/>
-              </a:defRPr>
-            </a:pPr>
-            <a:r>
-              <a:rPr sz="2100" b="1">
-                <a:solidFill>
-                  <a:srgbClr val="BCC2C8"/>
-                </a:solidFill>
-                <a:latin typeface="Nimbus Sans"/>
-                <a:ea typeface="Nimbus Sans"/>
-                <a:cs typeface="Nimbus Sans"/>
-              </a:rPr>
-              <a:t>con verdetto atteso</a:t>
-            </a:r>
-          </a:p>
-        </p:txBody>
-      </p:sp>
-      <p:sp>
-        <p:nvSpPr>
-          <p:cNvPr id="48" name="f189">
-            <a:extLst xmlns:a="http://schemas.openxmlformats.org/drawingml/2006/main">
-              <a:ext uri="{FF2B5EF4-FFF2-40B4-BE49-F238E27FC236}">
-                <a16:creationId xmlns:a16="http://schemas.microsoft.com/office/drawing/2014/main" id="{51C27A74-1F2D-4863-866B-AB870A97AC79}"/>
-              </a:ext>
-            </a:extLst>
-          </p:cNvPr>
-          <p:cNvSpPr>
-            <a:spLocks xmlns:a="http://schemas.openxmlformats.org/drawingml/2006/main" noGrp="1"/>
-          </p:cNvSpPr>
-          <p:nvPr/>
-        </p:nvSpPr>
-        <p:spPr>
-          <a:xfrm xmlns:a="http://schemas.openxmlformats.org/drawingml/2006/main">
-            <a:off x="10572750" y="7105650"/>
-            <a:ext cx="3600450" cy="742950"/>
-          </a:xfrm>
-          <a:prstGeom xmlns:a="http://schemas.openxmlformats.org/drawingml/2006/main" prst="rect">
-            <a:avLst/>
-          </a:prstGeom>
-          <a:noFill xmlns:a="http://schemas.openxmlformats.org/drawingml/2006/main"/>
-          <a:ln xmlns:a="http://schemas.openxmlformats.org/drawingml/2006/main" w="0">
-            <a:noFill/>
-            <a:prstDash val="solid"/>
-          </a:ln>
-        </p:spPr>
-        <p:txBody>
-          <a:bodyPr xmlns:a="http://schemas.openxmlformats.org/drawingml/2006/main" wrap="none" lIns="0" tIns="0" rIns="0" bIns="0" anchor="t">
-            <a:noAutofit/>
-          </a:bodyPr>
-          <a:lstStyle xmlns:a="http://schemas.openxmlformats.org/drawingml/2006/main">
-            <a:defPPr algn="ctr">
-              <a:defRPr sz="2100" b="1">
-                <a:solidFill>
                   <a:srgbClr val="182536"/>
                 </a:solidFill>
                 <a:latin typeface="Nimbus Sans"/>
@@ -26303,7 +26631,7 @@
     </p:spTree>
     <p:extLst>
       <p:ext uri="{BB962C8B-B14F-4D97-AF65-F5344CB8AC3E}">
-        <p14:creationId xmlns:p14="http://schemas.microsoft.com/office/powerpoint/2010/main" val="632023586"/>
+        <p14:creationId xmlns:p14="http://schemas.microsoft.com/office/powerpoint/2010/main" val="127148856"/>
       </p:ext>
     </p:extLst>
   </p:cSld>
@@ -26328,7 +26656,7 @@
                             </p:stCondLst>
                             <p:childTnLst>
                               <p:par>
-                                <p:cTn id="5" presetID="10" presetClass="exit" presetSubtype="0" fill="hold" grpId="0" nodeType="clickEffect">
+                                <p:cTn id="5" presetID="10" presetClass="exit" presetSubtype="0" fill="hold" grpId="1" nodeType="clickEffect">
                                   <p:stCondLst>
                                     <p:cond delay="0"/>
                                   </p:stCondLst>
@@ -26337,7 +26665,7 @@
                                       <p:cBhvr>
                                         <p:cTn id="6" dur="350" fill="hold"/>
                                         <p:tgtEl>
-                                          <p:spTgt spid="7"/>
+                                          <p:spTgt spid="5"/>
                                         </p:tgtEl>
                                       </p:cBhvr>
                                     </p:animEffect>
@@ -26349,7 +26677,7 @@
                                           </p:stCondLst>
                                         </p:cTn>
                                         <p:tgtEl>
-                                          <p:spTgt spid="7"/>
+                                          <p:spTgt spid="5"/>
                                         </p:tgtEl>
                                         <p:attrNameLst>
                                           <p:attrName>style.visibility</p:attrName>
@@ -26363,7 +26691,7 @@
                                 </p:cTn>
                               </p:par>
                               <p:par>
-                                <p:cTn id="8" presetID="10" presetClass="exit" presetSubtype="0" fill="hold" grpId="0" nodeType="withEffect">
+                                <p:cTn id="8" presetID="10" presetClass="exit" presetSubtype="0" fill="hold" grpId="1" nodeType="withEffect">
                                   <p:stCondLst>
                                     <p:cond delay="0"/>
                                   </p:stCondLst>
@@ -26372,7 +26700,7 @@
                                       <p:cBhvr>
                                         <p:cTn id="9" dur="350" fill="hold"/>
                                         <p:tgtEl>
-                                          <p:spTgt spid="8"/>
+                                          <p:spTgt spid="6"/>
                                         </p:tgtEl>
                                       </p:cBhvr>
                                     </p:animEffect>
@@ -26384,7 +26712,7 @@
                                           </p:stCondLst>
                                         </p:cTn>
                                         <p:tgtEl>
-                                          <p:spTgt spid="8"/>
+                                          <p:spTgt spid="6"/>
                                         </p:tgtEl>
                                         <p:attrNameLst>
                                           <p:attrName>style.visibility</p:attrName>
@@ -26398,7 +26726,7 @@
                                 </p:cTn>
                               </p:par>
                               <p:par>
-                                <p:cTn id="11" presetID="10" presetClass="exit" presetSubtype="0" fill="hold" grpId="0" nodeType="withEffect">
+                                <p:cTn id="11" presetID="10" presetClass="exit" presetSubtype="0" fill="hold" grpId="1" nodeType="withEffect">
                                   <p:stCondLst>
                                     <p:cond delay="0"/>
                                   </p:stCondLst>
@@ -26407,7 +26735,7 @@
                                       <p:cBhvr>
                                         <p:cTn id="12" dur="350" fill="hold"/>
                                         <p:tgtEl>
-                                          <p:spTgt spid="11"/>
+                                          <p:spTgt spid="9"/>
                                         </p:tgtEl>
                                       </p:cBhvr>
                                     </p:animEffect>
@@ -26419,7 +26747,7 @@
                                           </p:stCondLst>
                                         </p:cTn>
                                         <p:tgtEl>
-                                          <p:spTgt spid="11"/>
+                                          <p:spTgt spid="9"/>
                                         </p:tgtEl>
                                         <p:attrNameLst>
                                           <p:attrName>style.visibility</p:attrName>
@@ -26433,7 +26761,7 @@
                                 </p:cTn>
                               </p:par>
                               <p:par>
-                                <p:cTn id="14" presetID="10" presetClass="exit" presetSubtype="0" fill="hold" grpId="0" nodeType="withEffect">
+                                <p:cTn id="14" presetID="10" presetClass="exit" presetSubtype="0" fill="hold" grpId="1" nodeType="withEffect">
                                   <p:stCondLst>
                                     <p:cond delay="0"/>
                                   </p:stCondLst>
@@ -26442,7 +26770,7 @@
                                       <p:cBhvr>
                                         <p:cTn id="15" dur="350" fill="hold"/>
                                         <p:tgtEl>
-                                          <p:spTgt spid="12"/>
+                                          <p:spTgt spid="10"/>
                                         </p:tgtEl>
                                       </p:cBhvr>
                                     </p:animEffect>
@@ -26454,7 +26782,7 @@
                                           </p:stCondLst>
                                         </p:cTn>
                                         <p:tgtEl>
-                                          <p:spTgt spid="12"/>
+                                          <p:spTgt spid="10"/>
                                         </p:tgtEl>
                                         <p:attrNameLst>
                                           <p:attrName>style.visibility</p:attrName>
@@ -26468,7 +26796,7 @@
                                 </p:cTn>
                               </p:par>
                               <p:par>
-                                <p:cTn id="17" presetID="10" presetClass="entr" presetSubtype="0" fill="hold" grpId="0" nodeType="withEffect">
+                                <p:cTn id="17" presetID="10" presetClass="entr" presetSubtype="0" fill="hold" grpId="1" nodeType="withEffect">
                                   <p:stCondLst>
                                     <p:cond delay="0"/>
                                   </p:stCondLst>
@@ -26477,83 +26805,13 @@
                                       <p:cBhvr>
                                         <p:cTn id="18" dur="350" fill="hold"/>
                                         <p:tgtEl>
-                                          <p:spTgt spid="13"/>
+                                          <p:spTgt spid="15"/>
                                         </p:tgtEl>
                                       </p:cBhvr>
                                     </p:animEffect>
                                     <p:set>
                                       <p:cBhvr>
                                         <p:cTn id="19" dur="1" fill="hold">
-                                          <p:stCondLst>
-                                            <p:cond delay="0"/>
-                                          </p:stCondLst>
-                                        </p:cTn>
-                                        <p:tgtEl>
-                                          <p:spTgt spid="13"/>
-                                        </p:tgtEl>
-                                        <p:attrNameLst>
-                                          <p:attrName>style.visibility</p:attrName>
-                                        </p:attrNameLst>
-                                      </p:cBhvr>
-                                      <p:to>
-                                        <p:strVal val="visible"/>
-                                      </p:to>
-                                    </p:set>
-                                  </p:childTnLst>
-                                </p:cTn>
-                              </p:par>
-                              <p:par>
-                                <p:cTn id="20" presetID="10" presetClass="entr" presetSubtype="0" fill="hold" grpId="0" nodeType="withEffect">
-                                  <p:stCondLst>
-                                    <p:cond delay="0"/>
-                                  </p:stCondLst>
-                                  <p:childTnLst>
-                                    <p:animEffect transition="in" filter="fade">
-                                      <p:cBhvr>
-                                        <p:cTn id="21" dur="350" fill="hold"/>
-                                        <p:tgtEl>
-                                          <p:spTgt spid="14"/>
-                                        </p:tgtEl>
-                                      </p:cBhvr>
-                                    </p:animEffect>
-                                    <p:set>
-                                      <p:cBhvr>
-                                        <p:cTn id="22" dur="1" fill="hold">
-                                          <p:stCondLst>
-                                            <p:cond delay="0"/>
-                                          </p:stCondLst>
-                                        </p:cTn>
-                                        <p:tgtEl>
-                                          <p:spTgt spid="14"/>
-                                        </p:tgtEl>
-                                        <p:attrNameLst>
-                                          <p:attrName>style.visibility</p:attrName>
-                                        </p:attrNameLst>
-                                      </p:cBhvr>
-                                      <p:to>
-                                        <p:strVal val="visible"/>
-                                      </p:to>
-                                    </p:set>
-                                  </p:childTnLst>
-                                </p:cTn>
-                              </p:par>
-                              <p:par>
-                                <p:cTn id="23" presetID="10" presetClass="entr" presetSubtype="0" fill="hold" grpId="0" nodeType="withEffect">
-                                  <p:stCondLst>
-                                    <p:cond delay="0"/>
-                                  </p:stCondLst>
-                                  <p:childTnLst>
-                                    <p:animEffect transition="in" filter="fade">
-                                      <p:cBhvr>
-                                        <p:cTn id="24" dur="350" fill="hold"/>
-                                        <p:tgtEl>
-                                          <p:spTgt spid="15"/>
-                                        </p:tgtEl>
-                                      </p:cBhvr>
-                                    </p:animEffect>
-                                    <p:set>
-                                      <p:cBhvr>
-                                        <p:cTn id="25" dur="1" fill="hold">
                                           <p:stCondLst>
                                             <p:cond delay="0"/>
                                           </p:stCondLst>
@@ -26573,14 +26831,14 @@
                                 </p:cTn>
                               </p:par>
                               <p:par>
-                                <p:cTn id="26" presetID="10" presetClass="entr" presetSubtype="0" fill="hold" grpId="0" nodeType="withEffect">
+                                <p:cTn id="20" presetID="10" presetClass="entr" presetSubtype="0" fill="hold" grpId="1" nodeType="withEffect">
                                   <p:stCondLst>
                                     <p:cond delay="0"/>
                                   </p:stCondLst>
                                   <p:childTnLst>
                                     <p:animEffect transition="in" filter="fade">
                                       <p:cBhvr>
-                                        <p:cTn id="27" dur="350" fill="hold"/>
+                                        <p:cTn id="21" dur="350" fill="hold"/>
                                         <p:tgtEl>
                                           <p:spTgt spid="16"/>
                                         </p:tgtEl>
@@ -26588,7 +26846,7 @@
                                     </p:animEffect>
                                     <p:set>
                                       <p:cBhvr>
-                                        <p:cTn id="28" dur="1" fill="hold">
+                                        <p:cTn id="22" dur="1" fill="hold">
                                           <p:stCondLst>
                                             <p:cond delay="0"/>
                                           </p:stCondLst>
@@ -26608,14 +26866,14 @@
                                 </p:cTn>
                               </p:par>
                               <p:par>
-                                <p:cTn id="29" presetID="10" presetClass="entr" presetSubtype="0" fill="hold" grpId="0" nodeType="withEffect">
+                                <p:cTn id="23" presetID="10" presetClass="entr" presetSubtype="0" fill="hold" grpId="1" nodeType="withEffect">
                                   <p:stCondLst>
                                     <p:cond delay="0"/>
                                   </p:stCondLst>
                                   <p:childTnLst>
                                     <p:animEffect transition="in" filter="fade">
                                       <p:cBhvr>
-                                        <p:cTn id="30" dur="350" fill="hold"/>
+                                        <p:cTn id="24" dur="350" fill="hold"/>
                                         <p:tgtEl>
                                           <p:spTgt spid="17"/>
                                         </p:tgtEl>
@@ -26623,7 +26881,7 @@
                                     </p:animEffect>
                                     <p:set>
                                       <p:cBhvr>
-                                        <p:cTn id="31" dur="1" fill="hold">
+                                        <p:cTn id="25" dur="1" fill="hold">
                                           <p:stCondLst>
                                             <p:cond delay="0"/>
                                           </p:stCondLst>
@@ -26643,14 +26901,14 @@
                                 </p:cTn>
                               </p:par>
                               <p:par>
-                                <p:cTn id="32" presetID="10" presetClass="entr" presetSubtype="0" fill="hold" grpId="0" nodeType="withEffect">
+                                <p:cTn id="26" presetID="10" presetClass="entr" presetSubtype="0" fill="hold" grpId="1" nodeType="withEffect">
                                   <p:stCondLst>
                                     <p:cond delay="0"/>
                                   </p:stCondLst>
                                   <p:childTnLst>
                                     <p:animEffect transition="in" filter="fade">
                                       <p:cBhvr>
-                                        <p:cTn id="33" dur="350" fill="hold"/>
+                                        <p:cTn id="27" dur="350" fill="hold"/>
                                         <p:tgtEl>
                                           <p:spTgt spid="18"/>
                                         </p:tgtEl>
@@ -26658,7 +26916,7 @@
                                     </p:animEffect>
                                     <p:set>
                                       <p:cBhvr>
-                                        <p:cTn id="34" dur="1" fill="hold">
+                                        <p:cTn id="28" dur="1" fill="hold">
                                           <p:stCondLst>
                                             <p:cond delay="0"/>
                                           </p:stCondLst>
@@ -26678,7 +26936,77 @@
                                 </p:cTn>
                               </p:par>
                               <p:par>
-                                <p:cTn id="35" presetID="10" presetClass="exit" presetSubtype="0" fill="hold" grpId="0" nodeType="withEffect">
+                                <p:cTn id="29" presetID="10" presetClass="exit" presetSubtype="0" fill="hold" grpId="1" nodeType="withEffect">
+                                  <p:stCondLst>
+                                    <p:cond delay="0"/>
+                                  </p:stCondLst>
+                                  <p:childTnLst>
+                                    <p:animEffect transition="out" filter="fade">
+                                      <p:cBhvr>
+                                        <p:cTn id="30" dur="350" fill="hold"/>
+                                        <p:tgtEl>
+                                          <p:spTgt spid="19"/>
+                                        </p:tgtEl>
+                                      </p:cBhvr>
+                                    </p:animEffect>
+                                    <p:set>
+                                      <p:cBhvr>
+                                        <p:cTn id="31" dur="1" fill="hold">
+                                          <p:stCondLst>
+                                            <p:cond delay="350"/>
+                                          </p:stCondLst>
+                                        </p:cTn>
+                                        <p:tgtEl>
+                                          <p:spTgt spid="19"/>
+                                        </p:tgtEl>
+                                        <p:attrNameLst>
+                                          <p:attrName>style.visibility</p:attrName>
+                                        </p:attrNameLst>
+                                      </p:cBhvr>
+                                      <p:to>
+                                        <p:strVal val="hidden"/>
+                                      </p:to>
+                                    </p:set>
+                                  </p:childTnLst>
+                                </p:cTn>
+                              </p:par>
+                              <p:par>
+                                <p:cTn id="32" presetID="10" presetClass="exit" presetSubtype="0" fill="hold" grpId="1" nodeType="withEffect">
+                                  <p:stCondLst>
+                                    <p:cond delay="0"/>
+                                  </p:stCondLst>
+                                  <p:childTnLst>
+                                    <p:animEffect transition="out" filter="fade">
+                                      <p:cBhvr>
+                                        <p:cTn id="33" dur="350" fill="hold"/>
+                                        <p:tgtEl>
+                                          <p:spTgt spid="20"/>
+                                        </p:tgtEl>
+                                      </p:cBhvr>
+                                    </p:animEffect>
+                                    <p:set>
+                                      <p:cBhvr>
+                                        <p:cTn id="34" dur="1" fill="hold">
+                                          <p:stCondLst>
+                                            <p:cond delay="350"/>
+                                          </p:stCondLst>
+                                        </p:cTn>
+                                        <p:tgtEl>
+                                          <p:spTgt spid="20"/>
+                                        </p:tgtEl>
+                                        <p:attrNameLst>
+                                          <p:attrName>style.visibility</p:attrName>
+                                        </p:attrNameLst>
+                                      </p:cBhvr>
+                                      <p:to>
+                                        <p:strVal val="hidden"/>
+                                      </p:to>
+                                    </p:set>
+                                  </p:childTnLst>
+                                </p:cTn>
+                              </p:par>
+                              <p:par>
+                                <p:cTn id="35" presetID="10" presetClass="exit" presetSubtype="0" fill="hold" grpId="1" nodeType="withEffect">
                                   <p:stCondLst>
                                     <p:cond delay="0"/>
                                   </p:stCondLst>
@@ -26713,7 +27041,7 @@
                                 </p:cTn>
                               </p:par>
                               <p:par>
-                                <p:cTn id="38" presetID="10" presetClass="exit" presetSubtype="0" fill="hold" grpId="0" nodeType="withEffect">
+                                <p:cTn id="38" presetID="10" presetClass="exit" presetSubtype="0" fill="hold" grpId="1" nodeType="withEffect">
                                   <p:stCondLst>
                                     <p:cond delay="0"/>
                                   </p:stCondLst>
@@ -26748,7 +27076,7 @@
                                 </p:cTn>
                               </p:par>
                               <p:par>
-                                <p:cTn id="41" presetID="10" presetClass="exit" presetSubtype="0" fill="hold" grpId="0" nodeType="withEffect">
+                                <p:cTn id="41" presetID="10" presetClass="exit" presetSubtype="0" fill="hold" grpId="1" nodeType="withEffect">
                                   <p:stCondLst>
                                     <p:cond delay="0"/>
                                   </p:stCondLst>
@@ -26757,13 +27085,48 @@
                                       <p:cBhvr>
                                         <p:cTn id="42" dur="350" fill="hold"/>
                                         <p:tgtEl>
+                                          <p:spTgt spid="23"/>
+                                        </p:tgtEl>
+                                      </p:cBhvr>
+                                    </p:animEffect>
+                                    <p:set>
+                                      <p:cBhvr>
+                                        <p:cTn id="43" dur="1" fill="hold">
+                                          <p:stCondLst>
+                                            <p:cond delay="350"/>
+                                          </p:stCondLst>
+                                        </p:cTn>
+                                        <p:tgtEl>
+                                          <p:spTgt spid="23"/>
+                                        </p:tgtEl>
+                                        <p:attrNameLst>
+                                          <p:attrName>style.visibility</p:attrName>
+                                        </p:attrNameLst>
+                                      </p:cBhvr>
+                                      <p:to>
+                                        <p:strVal val="hidden"/>
+                                      </p:to>
+                                    </p:set>
+                                  </p:childTnLst>
+                                </p:cTn>
+                              </p:par>
+                              <p:par>
+                                <p:cTn id="44" presetID="10" presetClass="exit" presetSubtype="0" fill="hold" grpId="1" nodeType="withEffect">
+                                  <p:stCondLst>
+                                    <p:cond delay="0"/>
+                                  </p:stCondLst>
+                                  <p:childTnLst>
+                                    <p:animEffect transition="out" filter="fade">
+                                      <p:cBhvr>
+                                        <p:cTn id="45" dur="350" fill="hold"/>
+                                        <p:tgtEl>
                                           <p:spTgt spid="24"/>
                                         </p:tgtEl>
                                       </p:cBhvr>
                                     </p:animEffect>
                                     <p:set>
                                       <p:cBhvr>
-                                        <p:cTn id="43" dur="1" fill="hold">
+                                        <p:cTn id="46" dur="1" fill="hold">
                                           <p:stCondLst>
                                             <p:cond delay="350"/>
                                           </p:stCondLst>
@@ -26783,14 +27146,14 @@
                                 </p:cTn>
                               </p:par>
                               <p:par>
-                                <p:cTn id="44" presetID="10" presetClass="exit" presetSubtype="0" fill="hold" grpId="0" nodeType="withEffect">
+                                <p:cTn id="47" presetID="10" presetClass="exit" presetSubtype="0" fill="hold" grpId="1" nodeType="withEffect">
                                   <p:stCondLst>
                                     <p:cond delay="0"/>
                                   </p:stCondLst>
                                   <p:childTnLst>
                                     <p:animEffect transition="out" filter="fade">
                                       <p:cBhvr>
-                                        <p:cTn id="45" dur="350" fill="hold"/>
+                                        <p:cTn id="48" dur="350" fill="hold"/>
                                         <p:tgtEl>
                                           <p:spTgt spid="25"/>
                                         </p:tgtEl>
@@ -26798,7 +27161,7 @@
                                     </p:animEffect>
                                     <p:set>
                                       <p:cBhvr>
-                                        <p:cTn id="46" dur="1" fill="hold">
+                                        <p:cTn id="49" dur="1" fill="hold">
                                           <p:stCondLst>
                                             <p:cond delay="350"/>
                                           </p:stCondLst>
@@ -26818,14 +27181,14 @@
                                 </p:cTn>
                               </p:par>
                               <p:par>
-                                <p:cTn id="47" presetID="10" presetClass="exit" presetSubtype="0" fill="hold" grpId="0" nodeType="withEffect">
+                                <p:cTn id="50" presetID="10" presetClass="exit" presetSubtype="0" fill="hold" grpId="1" nodeType="withEffect">
                                   <p:stCondLst>
                                     <p:cond delay="0"/>
                                   </p:stCondLst>
                                   <p:childTnLst>
                                     <p:animEffect transition="out" filter="fade">
                                       <p:cBhvr>
-                                        <p:cTn id="48" dur="350" fill="hold"/>
+                                        <p:cTn id="51" dur="350" fill="hold"/>
                                         <p:tgtEl>
                                           <p:spTgt spid="26"/>
                                         </p:tgtEl>
@@ -26833,7 +27196,7 @@
                                     </p:animEffect>
                                     <p:set>
                                       <p:cBhvr>
-                                        <p:cTn id="49" dur="1" fill="hold">
+                                        <p:cTn id="52" dur="1" fill="hold">
                                           <p:stCondLst>
                                             <p:cond delay="350"/>
                                           </p:stCondLst>
@@ -26853,14 +27216,977 @@
                                 </p:cTn>
                               </p:par>
                               <p:par>
-                                <p:cTn id="50" presetID="10" presetClass="entr" presetSubtype="0" fill="hold" grpId="0" nodeType="withEffect">
+                                <p:cTn id="53" presetID="10" presetClass="entr" presetSubtype="0" fill="hold" grpId="1" nodeType="withEffect">
                                   <p:stCondLst>
                                     <p:cond delay="0"/>
                                   </p:stCondLst>
                                   <p:childTnLst>
                                     <p:animEffect transition="in" filter="fade">
                                       <p:cBhvr>
-                                        <p:cTn id="51" dur="350" fill="hold"/>
+                                        <p:cTn id="54" dur="350" fill="hold"/>
+                                        <p:tgtEl>
+                                          <p:spTgt spid="30"/>
+                                        </p:tgtEl>
+                                      </p:cBhvr>
+                                    </p:animEffect>
+                                    <p:set>
+                                      <p:cBhvr>
+                                        <p:cTn id="55" dur="1" fill="hold">
+                                          <p:stCondLst>
+                                            <p:cond delay="0"/>
+                                          </p:stCondLst>
+                                        </p:cTn>
+                                        <p:tgtEl>
+                                          <p:spTgt spid="30"/>
+                                        </p:tgtEl>
+                                        <p:attrNameLst>
+                                          <p:attrName>style.visibility</p:attrName>
+                                        </p:attrNameLst>
+                                      </p:cBhvr>
+                                      <p:to>
+                                        <p:strVal val="visible"/>
+                                      </p:to>
+                                    </p:set>
+                                  </p:childTnLst>
+                                </p:cTn>
+                              </p:par>
+                              <p:par>
+                                <p:cTn id="56" presetID="10" presetClass="entr" presetSubtype="0" fill="hold" grpId="1" nodeType="withEffect">
+                                  <p:stCondLst>
+                                    <p:cond delay="0"/>
+                                  </p:stCondLst>
+                                  <p:childTnLst>
+                                    <p:animEffect transition="in" filter="fade">
+                                      <p:cBhvr>
+                                        <p:cTn id="57" dur="350" fill="hold"/>
+                                        <p:tgtEl>
+                                          <p:spTgt spid="31"/>
+                                        </p:tgtEl>
+                                      </p:cBhvr>
+                                    </p:animEffect>
+                                    <p:set>
+                                      <p:cBhvr>
+                                        <p:cTn id="58" dur="1" fill="hold">
+                                          <p:stCondLst>
+                                            <p:cond delay="0"/>
+                                          </p:stCondLst>
+                                        </p:cTn>
+                                        <p:tgtEl>
+                                          <p:spTgt spid="31"/>
+                                        </p:tgtEl>
+                                        <p:attrNameLst>
+                                          <p:attrName>style.visibility</p:attrName>
+                                        </p:attrNameLst>
+                                      </p:cBhvr>
+                                      <p:to>
+                                        <p:strVal val="visible"/>
+                                      </p:to>
+                                    </p:set>
+                                  </p:childTnLst>
+                                </p:cTn>
+                              </p:par>
+                              <p:par>
+                                <p:cTn id="59" presetID="10" presetClass="entr" presetSubtype="0" fill="hold" grpId="1" nodeType="withEffect">
+                                  <p:stCondLst>
+                                    <p:cond delay="0"/>
+                                  </p:stCondLst>
+                                  <p:childTnLst>
+                                    <p:animEffect transition="in" filter="fade">
+                                      <p:cBhvr>
+                                        <p:cTn id="60" dur="350" fill="hold"/>
+                                        <p:tgtEl>
+                                          <p:spTgt spid="32"/>
+                                        </p:tgtEl>
+                                      </p:cBhvr>
+                                    </p:animEffect>
+                                    <p:set>
+                                      <p:cBhvr>
+                                        <p:cTn id="61" dur="1" fill="hold">
+                                          <p:stCondLst>
+                                            <p:cond delay="0"/>
+                                          </p:stCondLst>
+                                        </p:cTn>
+                                        <p:tgtEl>
+                                          <p:spTgt spid="32"/>
+                                        </p:tgtEl>
+                                        <p:attrNameLst>
+                                          <p:attrName>style.visibility</p:attrName>
+                                        </p:attrNameLst>
+                                      </p:cBhvr>
+                                      <p:to>
+                                        <p:strVal val="visible"/>
+                                      </p:to>
+                                    </p:set>
+                                  </p:childTnLst>
+                                </p:cTn>
+                              </p:par>
+                              <p:par>
+                                <p:cTn id="62" presetID="10" presetClass="entr" presetSubtype="0" fill="hold" grpId="1" nodeType="withEffect">
+                                  <p:stCondLst>
+                                    <p:cond delay="0"/>
+                                  </p:stCondLst>
+                                  <p:childTnLst>
+                                    <p:animEffect transition="in" filter="fade">
+                                      <p:cBhvr>
+                                        <p:cTn id="63" dur="350" fill="hold"/>
+                                        <p:tgtEl>
+                                          <p:spTgt spid="33"/>
+                                        </p:tgtEl>
+                                      </p:cBhvr>
+                                    </p:animEffect>
+                                    <p:set>
+                                      <p:cBhvr>
+                                        <p:cTn id="64" dur="1" fill="hold">
+                                          <p:stCondLst>
+                                            <p:cond delay="0"/>
+                                          </p:stCondLst>
+                                        </p:cTn>
+                                        <p:tgtEl>
+                                          <p:spTgt spid="33"/>
+                                        </p:tgtEl>
+                                        <p:attrNameLst>
+                                          <p:attrName>style.visibility</p:attrName>
+                                        </p:attrNameLst>
+                                      </p:cBhvr>
+                                      <p:to>
+                                        <p:strVal val="visible"/>
+                                      </p:to>
+                                    </p:set>
+                                  </p:childTnLst>
+                                </p:cTn>
+                              </p:par>
+                              <p:par>
+                                <p:cTn id="65" presetID="10" presetClass="entr" presetSubtype="0" fill="hold" grpId="1" nodeType="withEffect">
+                                  <p:stCondLst>
+                                    <p:cond delay="0"/>
+                                  </p:stCondLst>
+                                  <p:childTnLst>
+                                    <p:animEffect transition="in" filter="fade">
+                                      <p:cBhvr>
+                                        <p:cTn id="66" dur="350" fill="hold"/>
+                                        <p:tgtEl>
+                                          <p:spTgt spid="34"/>
+                                        </p:tgtEl>
+                                      </p:cBhvr>
+                                    </p:animEffect>
+                                    <p:set>
+                                      <p:cBhvr>
+                                        <p:cTn id="67" dur="1" fill="hold">
+                                          <p:stCondLst>
+                                            <p:cond delay="0"/>
+                                          </p:stCondLst>
+                                        </p:cTn>
+                                        <p:tgtEl>
+                                          <p:spTgt spid="34"/>
+                                        </p:tgtEl>
+                                        <p:attrNameLst>
+                                          <p:attrName>style.visibility</p:attrName>
+                                        </p:attrNameLst>
+                                      </p:cBhvr>
+                                      <p:to>
+                                        <p:strVal val="visible"/>
+                                      </p:to>
+                                    </p:set>
+                                  </p:childTnLst>
+                                </p:cTn>
+                              </p:par>
+                              <p:par>
+                                <p:cTn id="68" presetID="10" presetClass="entr" presetSubtype="0" fill="hold" grpId="1" nodeType="withEffect">
+                                  <p:stCondLst>
+                                    <p:cond delay="0"/>
+                                  </p:stCondLst>
+                                  <p:childTnLst>
+                                    <p:animEffect transition="in" filter="fade">
+                                      <p:cBhvr>
+                                        <p:cTn id="69" dur="350" fill="hold"/>
+                                        <p:tgtEl>
+                                          <p:spTgt spid="35"/>
+                                        </p:tgtEl>
+                                      </p:cBhvr>
+                                    </p:animEffect>
+                                    <p:set>
+                                      <p:cBhvr>
+                                        <p:cTn id="70" dur="1" fill="hold">
+                                          <p:stCondLst>
+                                            <p:cond delay="0"/>
+                                          </p:stCondLst>
+                                        </p:cTn>
+                                        <p:tgtEl>
+                                          <p:spTgt spid="35"/>
+                                        </p:tgtEl>
+                                        <p:attrNameLst>
+                                          <p:attrName>style.visibility</p:attrName>
+                                        </p:attrNameLst>
+                                      </p:cBhvr>
+                                      <p:to>
+                                        <p:strVal val="visible"/>
+                                      </p:to>
+                                    </p:set>
+                                  </p:childTnLst>
+                                </p:cTn>
+                              </p:par>
+                              <p:par>
+                                <p:cTn id="71" presetID="10" presetClass="entr" presetSubtype="0" fill="hold" grpId="1" nodeType="withEffect">
+                                  <p:stCondLst>
+                                    <p:cond delay="0"/>
+                                  </p:stCondLst>
+                                  <p:childTnLst>
+                                    <p:animEffect transition="in" filter="fade">
+                                      <p:cBhvr>
+                                        <p:cTn id="72" dur="350" fill="hold"/>
+                                        <p:tgtEl>
+                                          <p:spTgt spid="36"/>
+                                        </p:tgtEl>
+                                      </p:cBhvr>
+                                    </p:animEffect>
+                                    <p:set>
+                                      <p:cBhvr>
+                                        <p:cTn id="73" dur="1" fill="hold">
+                                          <p:stCondLst>
+                                            <p:cond delay="0"/>
+                                          </p:stCondLst>
+                                        </p:cTn>
+                                        <p:tgtEl>
+                                          <p:spTgt spid="36"/>
+                                        </p:tgtEl>
+                                        <p:attrNameLst>
+                                          <p:attrName>style.visibility</p:attrName>
+                                        </p:attrNameLst>
+                                      </p:cBhvr>
+                                      <p:to>
+                                        <p:strVal val="visible"/>
+                                      </p:to>
+                                    </p:set>
+                                  </p:childTnLst>
+                                </p:cTn>
+                              </p:par>
+                              <p:par>
+                                <p:cTn id="74" presetID="10" presetClass="entr" presetSubtype="0" fill="hold" grpId="1" nodeType="withEffect">
+                                  <p:stCondLst>
+                                    <p:cond delay="0"/>
+                                  </p:stCondLst>
+                                  <p:childTnLst>
+                                    <p:animEffect transition="in" filter="fade">
+                                      <p:cBhvr>
+                                        <p:cTn id="75" dur="350" fill="hold"/>
+                                        <p:tgtEl>
+                                          <p:spTgt spid="37"/>
+                                        </p:tgtEl>
+                                      </p:cBhvr>
+                                    </p:animEffect>
+                                    <p:set>
+                                      <p:cBhvr>
+                                        <p:cTn id="76" dur="1" fill="hold">
+                                          <p:stCondLst>
+                                            <p:cond delay="0"/>
+                                          </p:stCondLst>
+                                        </p:cTn>
+                                        <p:tgtEl>
+                                          <p:spTgt spid="37"/>
+                                        </p:tgtEl>
+                                        <p:attrNameLst>
+                                          <p:attrName>style.visibility</p:attrName>
+                                        </p:attrNameLst>
+                                      </p:cBhvr>
+                                      <p:to>
+                                        <p:strVal val="visible"/>
+                                      </p:to>
+                                    </p:set>
+                                  </p:childTnLst>
+                                </p:cTn>
+                              </p:par>
+                              <p:par>
+                                <p:cTn id="77" presetID="10" presetClass="entr" presetSubtype="0" fill="hold" grpId="1" nodeType="withEffect">
+                                  <p:stCondLst>
+                                    <p:cond delay="0"/>
+                                  </p:stCondLst>
+                                  <p:childTnLst>
+                                    <p:animEffect transition="in" filter="fade">
+                                      <p:cBhvr>
+                                        <p:cTn id="78" dur="350" fill="hold"/>
+                                        <p:tgtEl>
+                                          <p:spTgt spid="38"/>
+                                        </p:tgtEl>
+                                      </p:cBhvr>
+                                    </p:animEffect>
+                                    <p:set>
+                                      <p:cBhvr>
+                                        <p:cTn id="79" dur="1" fill="hold">
+                                          <p:stCondLst>
+                                            <p:cond delay="0"/>
+                                          </p:stCondLst>
+                                        </p:cTn>
+                                        <p:tgtEl>
+                                          <p:spTgt spid="38"/>
+                                        </p:tgtEl>
+                                        <p:attrNameLst>
+                                          <p:attrName>style.visibility</p:attrName>
+                                        </p:attrNameLst>
+                                      </p:cBhvr>
+                                      <p:to>
+                                        <p:strVal val="visible"/>
+                                      </p:to>
+                                    </p:set>
+                                  </p:childTnLst>
+                                </p:cTn>
+                              </p:par>
+                              <p:par>
+                                <p:cTn id="80" presetID="10" presetClass="entr" presetSubtype="0" fill="hold" grpId="1" nodeType="withEffect">
+                                  <p:stCondLst>
+                                    <p:cond delay="0"/>
+                                  </p:stCondLst>
+                                  <p:childTnLst>
+                                    <p:animEffect transition="in" filter="fade">
+                                      <p:cBhvr>
+                                        <p:cTn id="81" dur="350" fill="hold"/>
+                                        <p:tgtEl>
+                                          <p:spTgt spid="39"/>
+                                        </p:tgtEl>
+                                      </p:cBhvr>
+                                    </p:animEffect>
+                                    <p:set>
+                                      <p:cBhvr>
+                                        <p:cTn id="82" dur="1" fill="hold">
+                                          <p:stCondLst>
+                                            <p:cond delay="0"/>
+                                          </p:stCondLst>
+                                        </p:cTn>
+                                        <p:tgtEl>
+                                          <p:spTgt spid="39"/>
+                                        </p:tgtEl>
+                                        <p:attrNameLst>
+                                          <p:attrName>style.visibility</p:attrName>
+                                        </p:attrNameLst>
+                                      </p:cBhvr>
+                                      <p:to>
+                                        <p:strVal val="visible"/>
+                                      </p:to>
+                                    </p:set>
+                                  </p:childTnLst>
+                                </p:cTn>
+                              </p:par>
+                              <p:par>
+                                <p:cTn id="83" presetID="10" presetClass="entr" presetSubtype="0" fill="hold" grpId="1" nodeType="withEffect">
+                                  <p:stCondLst>
+                                    <p:cond delay="0"/>
+                                  </p:stCondLst>
+                                  <p:childTnLst>
+                                    <p:animEffect transition="in" filter="fade">
+                                      <p:cBhvr>
+                                        <p:cTn id="84" dur="350" fill="hold"/>
+                                        <p:tgtEl>
+                                          <p:spTgt spid="40"/>
+                                        </p:tgtEl>
+                                      </p:cBhvr>
+                                    </p:animEffect>
+                                    <p:set>
+                                      <p:cBhvr>
+                                        <p:cTn id="85" dur="1" fill="hold">
+                                          <p:stCondLst>
+                                            <p:cond delay="0"/>
+                                          </p:stCondLst>
+                                        </p:cTn>
+                                        <p:tgtEl>
+                                          <p:spTgt spid="40"/>
+                                        </p:tgtEl>
+                                        <p:attrNameLst>
+                                          <p:attrName>style.visibility</p:attrName>
+                                        </p:attrNameLst>
+                                      </p:cBhvr>
+                                      <p:to>
+                                        <p:strVal val="visible"/>
+                                      </p:to>
+                                    </p:set>
+                                  </p:childTnLst>
+                                </p:cTn>
+                              </p:par>
+                              <p:par>
+                                <p:cTn id="86" presetID="10" presetClass="entr" presetSubtype="0" fill="hold" grpId="1" nodeType="withEffect">
+                                  <p:stCondLst>
+                                    <p:cond delay="0"/>
+                                  </p:stCondLst>
+                                  <p:childTnLst>
+                                    <p:animEffect transition="in" filter="fade">
+                                      <p:cBhvr>
+                                        <p:cTn id="87" dur="350" fill="hold"/>
+                                        <p:tgtEl>
+                                          <p:spTgt spid="41"/>
+                                        </p:tgtEl>
+                                      </p:cBhvr>
+                                    </p:animEffect>
+                                    <p:set>
+                                      <p:cBhvr>
+                                        <p:cTn id="88" dur="1" fill="hold">
+                                          <p:stCondLst>
+                                            <p:cond delay="0"/>
+                                          </p:stCondLst>
+                                        </p:cTn>
+                                        <p:tgtEl>
+                                          <p:spTgt spid="41"/>
+                                        </p:tgtEl>
+                                        <p:attrNameLst>
+                                          <p:attrName>style.visibility</p:attrName>
+                                        </p:attrNameLst>
+                                      </p:cBhvr>
+                                      <p:to>
+                                        <p:strVal val="visible"/>
+                                      </p:to>
+                                    </p:set>
+                                  </p:childTnLst>
+                                </p:cTn>
+                              </p:par>
+                            </p:childTnLst>
+                          </p:cTn>
+                        </p:par>
+                      </p:childTnLst>
+                    </p:cTn>
+                  </p:par>
+                  <p:par>
+                    <p:cTn id="89" fill="hold">
+                      <p:stCondLst>
+                        <p:cond delay="indefinite"/>
+                      </p:stCondLst>
+                      <p:childTnLst>
+                        <p:par>
+                          <p:cTn id="90" fill="hold">
+                            <p:stCondLst>
+                              <p:cond delay="0"/>
+                            </p:stCondLst>
+                            <p:childTnLst>
+                              <p:par>
+                                <p:cTn id="91" presetID="10" presetClass="entr" presetSubtype="0" fill="hold" grpId="2" nodeType="clickEffect">
+                                  <p:stCondLst>
+                                    <p:cond delay="0"/>
+                                  </p:stCondLst>
+                                  <p:childTnLst>
+                                    <p:animEffect transition="in" filter="fade">
+                                      <p:cBhvr>
+                                        <p:cTn id="92" dur="350" fill="hold"/>
+                                        <p:tgtEl>
+                                          <p:spTgt spid="52"/>
+                                        </p:tgtEl>
+                                      </p:cBhvr>
+                                    </p:animEffect>
+                                    <p:set>
+                                      <p:cBhvr>
+                                        <p:cTn id="93" dur="1" fill="hold">
+                                          <p:stCondLst>
+                                            <p:cond delay="0"/>
+                                          </p:stCondLst>
+                                        </p:cTn>
+                                        <p:tgtEl>
+                                          <p:spTgt spid="52"/>
+                                        </p:tgtEl>
+                                        <p:attrNameLst>
+                                          <p:attrName>style.visibility</p:attrName>
+                                        </p:attrNameLst>
+                                      </p:cBhvr>
+                                      <p:to>
+                                        <p:strVal val="visible"/>
+                                      </p:to>
+                                    </p:set>
+                                  </p:childTnLst>
+                                </p:cTn>
+                              </p:par>
+                              <p:par>
+                                <p:cTn id="94" presetID="10" presetClass="entr" presetSubtype="0" fill="hold" grpId="2" nodeType="withEffect">
+                                  <p:stCondLst>
+                                    <p:cond delay="0"/>
+                                  </p:stCondLst>
+                                  <p:childTnLst>
+                                    <p:animEffect transition="in" filter="fade">
+                                      <p:cBhvr>
+                                        <p:cTn id="95" dur="350" fill="hold"/>
+                                        <p:tgtEl>
+                                          <p:spTgt spid="54"/>
+                                        </p:tgtEl>
+                                      </p:cBhvr>
+                                    </p:animEffect>
+                                    <p:set>
+                                      <p:cBhvr>
+                                        <p:cTn id="96" dur="1" fill="hold">
+                                          <p:stCondLst>
+                                            <p:cond delay="0"/>
+                                          </p:stCondLst>
+                                        </p:cTn>
+                                        <p:tgtEl>
+                                          <p:spTgt spid="54"/>
+                                        </p:tgtEl>
+                                        <p:attrNameLst>
+                                          <p:attrName>style.visibility</p:attrName>
+                                        </p:attrNameLst>
+                                      </p:cBhvr>
+                                      <p:to>
+                                        <p:strVal val="visible"/>
+                                      </p:to>
+                                    </p:set>
+                                  </p:childTnLst>
+                                </p:cTn>
+                              </p:par>
+                              <p:par>
+                                <p:cTn id="97" presetID="10" presetClass="exit" presetSubtype="0" fill="hold" grpId="2" nodeType="withEffect">
+                                  <p:stCondLst>
+                                    <p:cond delay="0"/>
+                                  </p:stCondLst>
+                                  <p:childTnLst>
+                                    <p:animEffect transition="out" filter="fade">
+                                      <p:cBhvr>
+                                        <p:cTn id="98" dur="350" fill="hold"/>
+                                        <p:tgtEl>
+                                          <p:spTgt spid="7"/>
+                                        </p:tgtEl>
+                                      </p:cBhvr>
+                                    </p:animEffect>
+                                    <p:set>
+                                      <p:cBhvr>
+                                        <p:cTn id="99" dur="1" fill="hold">
+                                          <p:stCondLst>
+                                            <p:cond delay="350"/>
+                                          </p:stCondLst>
+                                        </p:cTn>
+                                        <p:tgtEl>
+                                          <p:spTgt spid="7"/>
+                                        </p:tgtEl>
+                                        <p:attrNameLst>
+                                          <p:attrName>style.visibility</p:attrName>
+                                        </p:attrNameLst>
+                                      </p:cBhvr>
+                                      <p:to>
+                                        <p:strVal val="hidden"/>
+                                      </p:to>
+                                    </p:set>
+                                  </p:childTnLst>
+                                </p:cTn>
+                              </p:par>
+                              <p:par>
+                                <p:cTn id="100" presetID="10" presetClass="exit" presetSubtype="0" fill="hold" grpId="2" nodeType="withEffect">
+                                  <p:stCondLst>
+                                    <p:cond delay="0"/>
+                                  </p:stCondLst>
+                                  <p:childTnLst>
+                                    <p:animEffect transition="out" filter="fade">
+                                      <p:cBhvr>
+                                        <p:cTn id="101" dur="350" fill="hold"/>
+                                        <p:tgtEl>
+                                          <p:spTgt spid="8"/>
+                                        </p:tgtEl>
+                                      </p:cBhvr>
+                                    </p:animEffect>
+                                    <p:set>
+                                      <p:cBhvr>
+                                        <p:cTn id="102" dur="1" fill="hold">
+                                          <p:stCondLst>
+                                            <p:cond delay="350"/>
+                                          </p:stCondLst>
+                                        </p:cTn>
+                                        <p:tgtEl>
+                                          <p:spTgt spid="8"/>
+                                        </p:tgtEl>
+                                        <p:attrNameLst>
+                                          <p:attrName>style.visibility</p:attrName>
+                                        </p:attrNameLst>
+                                      </p:cBhvr>
+                                      <p:to>
+                                        <p:strVal val="hidden"/>
+                                      </p:to>
+                                    </p:set>
+                                  </p:childTnLst>
+                                </p:cTn>
+                              </p:par>
+                              <p:par>
+                                <p:cTn id="103" presetID="10" presetClass="entr" presetSubtype="0" fill="hold" grpId="2" nodeType="withEffect">
+                                  <p:stCondLst>
+                                    <p:cond delay="0"/>
+                                  </p:stCondLst>
+                                  <p:childTnLst>
+                                    <p:animEffect transition="in" filter="fade">
+                                      <p:cBhvr>
+                                        <p:cTn id="104" dur="350" fill="hold"/>
+                                        <p:tgtEl>
+                                          <p:spTgt spid="58"/>
+                                        </p:tgtEl>
+                                      </p:cBhvr>
+                                    </p:animEffect>
+                                    <p:set>
+                                      <p:cBhvr>
+                                        <p:cTn id="105" dur="1" fill="hold">
+                                          <p:stCondLst>
+                                            <p:cond delay="0"/>
+                                          </p:stCondLst>
+                                        </p:cTn>
+                                        <p:tgtEl>
+                                          <p:spTgt spid="58"/>
+                                        </p:tgtEl>
+                                        <p:attrNameLst>
+                                          <p:attrName>style.visibility</p:attrName>
+                                        </p:attrNameLst>
+                                      </p:cBhvr>
+                                      <p:to>
+                                        <p:strVal val="visible"/>
+                                      </p:to>
+                                    </p:set>
+                                  </p:childTnLst>
+                                </p:cTn>
+                              </p:par>
+                              <p:par>
+                                <p:cTn id="106" presetID="10" presetClass="entr" presetSubtype="0" fill="hold" grpId="2" nodeType="withEffect">
+                                  <p:stCondLst>
+                                    <p:cond delay="0"/>
+                                  </p:stCondLst>
+                                  <p:childTnLst>
+                                    <p:animEffect transition="in" filter="fade">
+                                      <p:cBhvr>
+                                        <p:cTn id="107" dur="350" fill="hold"/>
+                                        <p:tgtEl>
+                                          <p:spTgt spid="60"/>
+                                        </p:tgtEl>
+                                      </p:cBhvr>
+                                    </p:animEffect>
+                                    <p:set>
+                                      <p:cBhvr>
+                                        <p:cTn id="108" dur="1" fill="hold">
+                                          <p:stCondLst>
+                                            <p:cond delay="0"/>
+                                          </p:stCondLst>
+                                        </p:cTn>
+                                        <p:tgtEl>
+                                          <p:spTgt spid="60"/>
+                                        </p:tgtEl>
+                                        <p:attrNameLst>
+                                          <p:attrName>style.visibility</p:attrName>
+                                        </p:attrNameLst>
+                                      </p:cBhvr>
+                                      <p:to>
+                                        <p:strVal val="visible"/>
+                                      </p:to>
+                                    </p:set>
+                                  </p:childTnLst>
+                                </p:cTn>
+                              </p:par>
+                              <p:par>
+                                <p:cTn id="109" presetID="10" presetClass="exit" presetSubtype="0" fill="hold" grpId="2" nodeType="withEffect">
+                                  <p:stCondLst>
+                                    <p:cond delay="0"/>
+                                  </p:stCondLst>
+                                  <p:childTnLst>
+                                    <p:animEffect transition="out" filter="fade">
+                                      <p:cBhvr>
+                                        <p:cTn id="110" dur="350" fill="hold"/>
+                                        <p:tgtEl>
+                                          <p:spTgt spid="11"/>
+                                        </p:tgtEl>
+                                      </p:cBhvr>
+                                    </p:animEffect>
+                                    <p:set>
+                                      <p:cBhvr>
+                                        <p:cTn id="111" dur="1" fill="hold">
+                                          <p:stCondLst>
+                                            <p:cond delay="350"/>
+                                          </p:stCondLst>
+                                        </p:cTn>
+                                        <p:tgtEl>
+                                          <p:spTgt spid="11"/>
+                                        </p:tgtEl>
+                                        <p:attrNameLst>
+                                          <p:attrName>style.visibility</p:attrName>
+                                        </p:attrNameLst>
+                                      </p:cBhvr>
+                                      <p:to>
+                                        <p:strVal val="hidden"/>
+                                      </p:to>
+                                    </p:set>
+                                  </p:childTnLst>
+                                </p:cTn>
+                              </p:par>
+                              <p:par>
+                                <p:cTn id="112" presetID="10" presetClass="exit" presetSubtype="0" fill="hold" grpId="2" nodeType="withEffect">
+                                  <p:stCondLst>
+                                    <p:cond delay="0"/>
+                                  </p:stCondLst>
+                                  <p:childTnLst>
+                                    <p:animEffect transition="out" filter="fade">
+                                      <p:cBhvr>
+                                        <p:cTn id="113" dur="350" fill="hold"/>
+                                        <p:tgtEl>
+                                          <p:spTgt spid="12"/>
+                                        </p:tgtEl>
+                                      </p:cBhvr>
+                                    </p:animEffect>
+                                    <p:set>
+                                      <p:cBhvr>
+                                        <p:cTn id="114" dur="1" fill="hold">
+                                          <p:stCondLst>
+                                            <p:cond delay="350"/>
+                                          </p:stCondLst>
+                                        </p:cTn>
+                                        <p:tgtEl>
+                                          <p:spTgt spid="12"/>
+                                        </p:tgtEl>
+                                        <p:attrNameLst>
+                                          <p:attrName>style.visibility</p:attrName>
+                                        </p:attrNameLst>
+                                      </p:cBhvr>
+                                      <p:to>
+                                        <p:strVal val="hidden"/>
+                                      </p:to>
+                                    </p:set>
+                                  </p:childTnLst>
+                                </p:cTn>
+                              </p:par>
+                              <p:par>
+                                <p:cTn id="115" presetID="10" presetClass="entr" presetSubtype="0" fill="hold" grpId="2" nodeType="withEffect">
+                                  <p:stCondLst>
+                                    <p:cond delay="0"/>
+                                  </p:stCondLst>
+                                  <p:childTnLst>
+                                    <p:animEffect transition="in" filter="fade">
+                                      <p:cBhvr>
+                                        <p:cTn id="116" dur="350" fill="hold"/>
+                                        <p:tgtEl>
+                                          <p:spTgt spid="13"/>
+                                        </p:tgtEl>
+                                      </p:cBhvr>
+                                    </p:animEffect>
+                                    <p:set>
+                                      <p:cBhvr>
+                                        <p:cTn id="117" dur="1" fill="hold">
+                                          <p:stCondLst>
+                                            <p:cond delay="0"/>
+                                          </p:stCondLst>
+                                        </p:cTn>
+                                        <p:tgtEl>
+                                          <p:spTgt spid="13"/>
+                                        </p:tgtEl>
+                                        <p:attrNameLst>
+                                          <p:attrName>style.visibility</p:attrName>
+                                        </p:attrNameLst>
+                                      </p:cBhvr>
+                                      <p:to>
+                                        <p:strVal val="visible"/>
+                                      </p:to>
+                                    </p:set>
+                                  </p:childTnLst>
+                                </p:cTn>
+                              </p:par>
+                              <p:par>
+                                <p:cTn id="118" presetID="10" presetClass="entr" presetSubtype="0" fill="hold" grpId="2" nodeType="withEffect">
+                                  <p:stCondLst>
+                                    <p:cond delay="0"/>
+                                  </p:stCondLst>
+                                  <p:childTnLst>
+                                    <p:animEffect transition="in" filter="fade">
+                                      <p:cBhvr>
+                                        <p:cTn id="119" dur="350" fill="hold"/>
+                                        <p:tgtEl>
+                                          <p:spTgt spid="14"/>
+                                        </p:tgtEl>
+                                      </p:cBhvr>
+                                    </p:animEffect>
+                                    <p:set>
+                                      <p:cBhvr>
+                                        <p:cTn id="120" dur="1" fill="hold">
+                                          <p:stCondLst>
+                                            <p:cond delay="0"/>
+                                          </p:stCondLst>
+                                        </p:cTn>
+                                        <p:tgtEl>
+                                          <p:spTgt spid="14"/>
+                                        </p:tgtEl>
+                                        <p:attrNameLst>
+                                          <p:attrName>style.visibility</p:attrName>
+                                        </p:attrNameLst>
+                                      </p:cBhvr>
+                                      <p:to>
+                                        <p:strVal val="visible"/>
+                                      </p:to>
+                                    </p:set>
+                                  </p:childTnLst>
+                                </p:cTn>
+                              </p:par>
+                              <p:par>
+                                <p:cTn id="121" presetID="10" presetClass="exit" presetSubtype="0" fill="hold" grpId="2" nodeType="withEffect">
+                                  <p:stCondLst>
+                                    <p:cond delay="0"/>
+                                  </p:stCondLst>
+                                  <p:childTnLst>
+                                    <p:animEffect transition="out" filter="fade">
+                                      <p:cBhvr>
+                                        <p:cTn id="122" dur="350" fill="hold"/>
+                                        <p:tgtEl>
+                                          <p:spTgt spid="15"/>
+                                        </p:tgtEl>
+                                      </p:cBhvr>
+                                    </p:animEffect>
+                                    <p:set>
+                                      <p:cBhvr>
+                                        <p:cTn id="123" dur="1" fill="hold">
+                                          <p:stCondLst>
+                                            <p:cond delay="350"/>
+                                          </p:stCondLst>
+                                        </p:cTn>
+                                        <p:tgtEl>
+                                          <p:spTgt spid="15"/>
+                                        </p:tgtEl>
+                                        <p:attrNameLst>
+                                          <p:attrName>style.visibility</p:attrName>
+                                        </p:attrNameLst>
+                                      </p:cBhvr>
+                                      <p:to>
+                                        <p:strVal val="hidden"/>
+                                      </p:to>
+                                    </p:set>
+                                  </p:childTnLst>
+                                </p:cTn>
+                              </p:par>
+                              <p:par>
+                                <p:cTn id="124" presetID="10" presetClass="exit" presetSubtype="0" fill="hold" grpId="2" nodeType="withEffect">
+                                  <p:stCondLst>
+                                    <p:cond delay="0"/>
+                                  </p:stCondLst>
+                                  <p:childTnLst>
+                                    <p:animEffect transition="out" filter="fade">
+                                      <p:cBhvr>
+                                        <p:cTn id="125" dur="350" fill="hold"/>
+                                        <p:tgtEl>
+                                          <p:spTgt spid="16"/>
+                                        </p:tgtEl>
+                                      </p:cBhvr>
+                                    </p:animEffect>
+                                    <p:set>
+                                      <p:cBhvr>
+                                        <p:cTn id="126" dur="1" fill="hold">
+                                          <p:stCondLst>
+                                            <p:cond delay="350"/>
+                                          </p:stCondLst>
+                                        </p:cTn>
+                                        <p:tgtEl>
+                                          <p:spTgt spid="16"/>
+                                        </p:tgtEl>
+                                        <p:attrNameLst>
+                                          <p:attrName>style.visibility</p:attrName>
+                                        </p:attrNameLst>
+                                      </p:cBhvr>
+                                      <p:to>
+                                        <p:strVal val="hidden"/>
+                                      </p:to>
+                                    </p:set>
+                                  </p:childTnLst>
+                                </p:cTn>
+                              </p:par>
+                              <p:par>
+                                <p:cTn id="127" presetID="10" presetClass="entr" presetSubtype="0" fill="hold" grpId="2" nodeType="withEffect">
+                                  <p:stCondLst>
+                                    <p:cond delay="0"/>
+                                  </p:stCondLst>
+                                  <p:childTnLst>
+                                    <p:animEffect transition="in" filter="fade">
+                                      <p:cBhvr>
+                                        <p:cTn id="128" dur="350" fill="hold"/>
+                                        <p:tgtEl>
+                                          <p:spTgt spid="70"/>
+                                        </p:tgtEl>
+                                      </p:cBhvr>
+                                    </p:animEffect>
+                                    <p:set>
+                                      <p:cBhvr>
+                                        <p:cTn id="129" dur="1" fill="hold">
+                                          <p:stCondLst>
+                                            <p:cond delay="0"/>
+                                          </p:stCondLst>
+                                        </p:cTn>
+                                        <p:tgtEl>
+                                          <p:spTgt spid="70"/>
+                                        </p:tgtEl>
+                                        <p:attrNameLst>
+                                          <p:attrName>style.visibility</p:attrName>
+                                        </p:attrNameLst>
+                                      </p:cBhvr>
+                                      <p:to>
+                                        <p:strVal val="visible"/>
+                                      </p:to>
+                                    </p:set>
+                                  </p:childTnLst>
+                                </p:cTn>
+                              </p:par>
+                              <p:par>
+                                <p:cTn id="130" presetID="10" presetClass="entr" presetSubtype="0" fill="hold" grpId="2" nodeType="withEffect">
+                                  <p:stCondLst>
+                                    <p:cond delay="0"/>
+                                  </p:stCondLst>
+                                  <p:childTnLst>
+                                    <p:animEffect transition="in" filter="fade">
+                                      <p:cBhvr>
+                                        <p:cTn id="131" dur="350" fill="hold"/>
+                                        <p:tgtEl>
+                                          <p:spTgt spid="72"/>
+                                        </p:tgtEl>
+                                      </p:cBhvr>
+                                    </p:animEffect>
+                                    <p:set>
+                                      <p:cBhvr>
+                                        <p:cTn id="132" dur="1" fill="hold">
+                                          <p:stCondLst>
+                                            <p:cond delay="0"/>
+                                          </p:stCondLst>
+                                        </p:cTn>
+                                        <p:tgtEl>
+                                          <p:spTgt spid="72"/>
+                                        </p:tgtEl>
+                                        <p:attrNameLst>
+                                          <p:attrName>style.visibility</p:attrName>
+                                        </p:attrNameLst>
+                                      </p:cBhvr>
+                                      <p:to>
+                                        <p:strVal val="visible"/>
+                                      </p:to>
+                                    </p:set>
+                                  </p:childTnLst>
+                                </p:cTn>
+                              </p:par>
+                              <p:par>
+                                <p:cTn id="133" presetID="10" presetClass="entr" presetSubtype="0" fill="hold" grpId="2" nodeType="withEffect">
+                                  <p:stCondLst>
+                                    <p:cond delay="0"/>
+                                  </p:stCondLst>
+                                  <p:childTnLst>
+                                    <p:animEffect transition="in" filter="fade">
+                                      <p:cBhvr>
+                                        <p:cTn id="134" dur="350" fill="hold"/>
+                                        <p:tgtEl>
+                                          <p:spTgt spid="76"/>
+                                        </p:tgtEl>
+                                      </p:cBhvr>
+                                    </p:animEffect>
+                                    <p:set>
+                                      <p:cBhvr>
+                                        <p:cTn id="135" dur="1" fill="hold">
+                                          <p:stCondLst>
+                                            <p:cond delay="0"/>
+                                          </p:stCondLst>
+                                        </p:cTn>
+                                        <p:tgtEl>
+                                          <p:spTgt spid="76"/>
+                                        </p:tgtEl>
+                                        <p:attrNameLst>
+                                          <p:attrName>style.visibility</p:attrName>
+                                        </p:attrNameLst>
+                                      </p:cBhvr>
+                                      <p:to>
+                                        <p:strVal val="visible"/>
+                                      </p:to>
+                                    </p:set>
+                                  </p:childTnLst>
+                                </p:cTn>
+                              </p:par>
+                              <p:par>
+                                <p:cTn id="136" presetID="10" presetClass="entr" presetSubtype="0" fill="hold" grpId="2" nodeType="withEffect">
+                                  <p:stCondLst>
+                                    <p:cond delay="0"/>
+                                  </p:stCondLst>
+                                  <p:childTnLst>
+                                    <p:animEffect transition="in" filter="fade">
+                                      <p:cBhvr>
+                                        <p:cTn id="137" dur="350" fill="hold"/>
                                         <p:tgtEl>
                                           <p:spTgt spid="27"/>
                                         </p:tgtEl>
@@ -26868,7 +28194,7 @@
                                     </p:animEffect>
                                     <p:set>
                                       <p:cBhvr>
-                                        <p:cTn id="52" dur="1" fill="hold">
+                                        <p:cTn id="138" dur="1" fill="hold">
                                           <p:stCondLst>
                                             <p:cond delay="0"/>
                                           </p:stCondLst>
@@ -26888,14 +28214,14 @@
                                 </p:cTn>
                               </p:par>
                               <p:par>
-                                <p:cTn id="53" presetID="10" presetClass="entr" presetSubtype="0" fill="hold" grpId="0" nodeType="withEffect">
+                                <p:cTn id="139" presetID="10" presetClass="entr" presetSubtype="0" fill="hold" grpId="2" nodeType="withEffect">
                                   <p:stCondLst>
                                     <p:cond delay="0"/>
                                   </p:stCondLst>
                                   <p:childTnLst>
                                     <p:animEffect transition="in" filter="fade">
                                       <p:cBhvr>
-                                        <p:cTn id="54" dur="350" fill="hold"/>
+                                        <p:cTn id="140" dur="350" fill="hold"/>
                                         <p:tgtEl>
                                           <p:spTgt spid="28"/>
                                         </p:tgtEl>
@@ -26903,7 +28229,7 @@
                                     </p:animEffect>
                                     <p:set>
                                       <p:cBhvr>
-                                        <p:cTn id="55" dur="1" fill="hold">
+                                        <p:cTn id="141" dur="1" fill="hold">
                                           <p:stCondLst>
                                             <p:cond delay="0"/>
                                           </p:stCondLst>
@@ -26923,14 +28249,14 @@
                                 </p:cTn>
                               </p:par>
                               <p:par>
-                                <p:cTn id="56" presetID="10" presetClass="entr" presetSubtype="0" fill="hold" grpId="0" nodeType="withEffect">
+                                <p:cTn id="142" presetID="10" presetClass="entr" presetSubtype="0" fill="hold" grpId="2" nodeType="withEffect">
                                   <p:stCondLst>
                                     <p:cond delay="0"/>
                                   </p:stCondLst>
                                   <p:childTnLst>
                                     <p:animEffect transition="in" filter="fade">
                                       <p:cBhvr>
-                                        <p:cTn id="57" dur="350" fill="hold"/>
+                                        <p:cTn id="143" dur="350" fill="hold"/>
                                         <p:tgtEl>
                                           <p:spTgt spid="29"/>
                                         </p:tgtEl>
@@ -26938,7 +28264,7 @@
                                     </p:animEffect>
                                     <p:set>
                                       <p:cBhvr>
-                                        <p:cTn id="58" dur="1" fill="hold">
+                                        <p:cTn id="144" dur="1" fill="hold">
                                           <p:stCondLst>
                                             <p:cond delay="0"/>
                                           </p:stCondLst>
@@ -26958,14 +28284,329 @@
                                 </p:cTn>
                               </p:par>
                               <p:par>
-                                <p:cTn id="59" presetID="10" presetClass="entr" presetSubtype="0" fill="hold" grpId="0" nodeType="withEffect">
+                                <p:cTn id="145" presetID="10" presetClass="exit" presetSubtype="0" fill="hold" grpId="2" nodeType="withEffect">
                                   <p:stCondLst>
                                     <p:cond delay="0"/>
                                   </p:stCondLst>
                                   <p:childTnLst>
-                                    <p:animEffect transition="in" filter="fade">
+                                    <p:animEffect transition="out" filter="fade">
                                       <p:cBhvr>
-                                        <p:cTn id="60" dur="350" fill="hold"/>
+                                        <p:cTn id="146" dur="350" fill="hold"/>
+                                        <p:tgtEl>
+                                          <p:spTgt spid="30"/>
+                                        </p:tgtEl>
+                                      </p:cBhvr>
+                                    </p:animEffect>
+                                    <p:set>
+                                      <p:cBhvr>
+                                        <p:cTn id="147" dur="1" fill="hold">
+                                          <p:stCondLst>
+                                            <p:cond delay="350"/>
+                                          </p:stCondLst>
+                                        </p:cTn>
+                                        <p:tgtEl>
+                                          <p:spTgt spid="30"/>
+                                        </p:tgtEl>
+                                        <p:attrNameLst>
+                                          <p:attrName>style.visibility</p:attrName>
+                                        </p:attrNameLst>
+                                      </p:cBhvr>
+                                      <p:to>
+                                        <p:strVal val="hidden"/>
+                                      </p:to>
+                                    </p:set>
+                                  </p:childTnLst>
+                                </p:cTn>
+                              </p:par>
+                              <p:par>
+                                <p:cTn id="148" presetID="10" presetClass="exit" presetSubtype="0" fill="hold" grpId="2" nodeType="withEffect">
+                                  <p:stCondLst>
+                                    <p:cond delay="0"/>
+                                  </p:stCondLst>
+                                  <p:childTnLst>
+                                    <p:animEffect transition="out" filter="fade">
+                                      <p:cBhvr>
+                                        <p:cTn id="149" dur="350" fill="hold"/>
+                                        <p:tgtEl>
+                                          <p:spTgt spid="31"/>
+                                        </p:tgtEl>
+                                      </p:cBhvr>
+                                    </p:animEffect>
+                                    <p:set>
+                                      <p:cBhvr>
+                                        <p:cTn id="150" dur="1" fill="hold">
+                                          <p:stCondLst>
+                                            <p:cond delay="350"/>
+                                          </p:stCondLst>
+                                        </p:cTn>
+                                        <p:tgtEl>
+                                          <p:spTgt spid="31"/>
+                                        </p:tgtEl>
+                                        <p:attrNameLst>
+                                          <p:attrName>style.visibility</p:attrName>
+                                        </p:attrNameLst>
+                                      </p:cBhvr>
+                                      <p:to>
+                                        <p:strVal val="hidden"/>
+                                      </p:to>
+                                    </p:set>
+                                  </p:childTnLst>
+                                </p:cTn>
+                              </p:par>
+                              <p:par>
+                                <p:cTn id="151" presetID="10" presetClass="exit" presetSubtype="0" fill="hold" grpId="2" nodeType="withEffect">
+                                  <p:stCondLst>
+                                    <p:cond delay="0"/>
+                                  </p:stCondLst>
+                                  <p:childTnLst>
+                                    <p:animEffect transition="out" filter="fade">
+                                      <p:cBhvr>
+                                        <p:cTn id="152" dur="350" fill="hold"/>
+                                        <p:tgtEl>
+                                          <p:spTgt spid="32"/>
+                                        </p:tgtEl>
+                                      </p:cBhvr>
+                                    </p:animEffect>
+                                    <p:set>
+                                      <p:cBhvr>
+                                        <p:cTn id="153" dur="1" fill="hold">
+                                          <p:stCondLst>
+                                            <p:cond delay="350"/>
+                                          </p:stCondLst>
+                                        </p:cTn>
+                                        <p:tgtEl>
+                                          <p:spTgt spid="32"/>
+                                        </p:tgtEl>
+                                        <p:attrNameLst>
+                                          <p:attrName>style.visibility</p:attrName>
+                                        </p:attrNameLst>
+                                      </p:cBhvr>
+                                      <p:to>
+                                        <p:strVal val="hidden"/>
+                                      </p:to>
+                                    </p:set>
+                                  </p:childTnLst>
+                                </p:cTn>
+                              </p:par>
+                              <p:par>
+                                <p:cTn id="154" presetID="10" presetClass="exit" presetSubtype="0" fill="hold" grpId="2" nodeType="withEffect">
+                                  <p:stCondLst>
+                                    <p:cond delay="0"/>
+                                  </p:stCondLst>
+                                  <p:childTnLst>
+                                    <p:animEffect transition="out" filter="fade">
+                                      <p:cBhvr>
+                                        <p:cTn id="155" dur="350" fill="hold"/>
+                                        <p:tgtEl>
+                                          <p:spTgt spid="33"/>
+                                        </p:tgtEl>
+                                      </p:cBhvr>
+                                    </p:animEffect>
+                                    <p:set>
+                                      <p:cBhvr>
+                                        <p:cTn id="156" dur="1" fill="hold">
+                                          <p:stCondLst>
+                                            <p:cond delay="350"/>
+                                          </p:stCondLst>
+                                        </p:cTn>
+                                        <p:tgtEl>
+                                          <p:spTgt spid="33"/>
+                                        </p:tgtEl>
+                                        <p:attrNameLst>
+                                          <p:attrName>style.visibility</p:attrName>
+                                        </p:attrNameLst>
+                                      </p:cBhvr>
+                                      <p:to>
+                                        <p:strVal val="hidden"/>
+                                      </p:to>
+                                    </p:set>
+                                  </p:childTnLst>
+                                </p:cTn>
+                              </p:par>
+                              <p:par>
+                                <p:cTn id="157" presetID="10" presetClass="exit" presetSubtype="0" fill="hold" grpId="2" nodeType="withEffect">
+                                  <p:stCondLst>
+                                    <p:cond delay="0"/>
+                                  </p:stCondLst>
+                                  <p:childTnLst>
+                                    <p:animEffect transition="out" filter="fade">
+                                      <p:cBhvr>
+                                        <p:cTn id="158" dur="350" fill="hold"/>
+                                        <p:tgtEl>
+                                          <p:spTgt spid="34"/>
+                                        </p:tgtEl>
+                                      </p:cBhvr>
+                                    </p:animEffect>
+                                    <p:set>
+                                      <p:cBhvr>
+                                        <p:cTn id="159" dur="1" fill="hold">
+                                          <p:stCondLst>
+                                            <p:cond delay="350"/>
+                                          </p:stCondLst>
+                                        </p:cTn>
+                                        <p:tgtEl>
+                                          <p:spTgt spid="34"/>
+                                        </p:tgtEl>
+                                        <p:attrNameLst>
+                                          <p:attrName>style.visibility</p:attrName>
+                                        </p:attrNameLst>
+                                      </p:cBhvr>
+                                      <p:to>
+                                        <p:strVal val="hidden"/>
+                                      </p:to>
+                                    </p:set>
+                                  </p:childTnLst>
+                                </p:cTn>
+                              </p:par>
+                              <p:par>
+                                <p:cTn id="160" presetID="10" presetClass="exit" presetSubtype="0" fill="hold" grpId="2" nodeType="withEffect">
+                                  <p:stCondLst>
+                                    <p:cond delay="0"/>
+                                  </p:stCondLst>
+                                  <p:childTnLst>
+                                    <p:animEffect transition="out" filter="fade">
+                                      <p:cBhvr>
+                                        <p:cTn id="161" dur="350" fill="hold"/>
+                                        <p:tgtEl>
+                                          <p:spTgt spid="35"/>
+                                        </p:tgtEl>
+                                      </p:cBhvr>
+                                    </p:animEffect>
+                                    <p:set>
+                                      <p:cBhvr>
+                                        <p:cTn id="162" dur="1" fill="hold">
+                                          <p:stCondLst>
+                                            <p:cond delay="350"/>
+                                          </p:stCondLst>
+                                        </p:cTn>
+                                        <p:tgtEl>
+                                          <p:spTgt spid="35"/>
+                                        </p:tgtEl>
+                                        <p:attrNameLst>
+                                          <p:attrName>style.visibility</p:attrName>
+                                        </p:attrNameLst>
+                                      </p:cBhvr>
+                                      <p:to>
+                                        <p:strVal val="hidden"/>
+                                      </p:to>
+                                    </p:set>
+                                  </p:childTnLst>
+                                </p:cTn>
+                              </p:par>
+                              <p:par>
+                                <p:cTn id="163" presetID="10" presetClass="exit" presetSubtype="0" fill="hold" grpId="2" nodeType="withEffect">
+                                  <p:stCondLst>
+                                    <p:cond delay="0"/>
+                                  </p:stCondLst>
+                                  <p:childTnLst>
+                                    <p:animEffect transition="out" filter="fade">
+                                      <p:cBhvr>
+                                        <p:cTn id="164" dur="350" fill="hold"/>
+                                        <p:tgtEl>
+                                          <p:spTgt spid="36"/>
+                                        </p:tgtEl>
+                                      </p:cBhvr>
+                                    </p:animEffect>
+                                    <p:set>
+                                      <p:cBhvr>
+                                        <p:cTn id="165" dur="1" fill="hold">
+                                          <p:stCondLst>
+                                            <p:cond delay="350"/>
+                                          </p:stCondLst>
+                                        </p:cTn>
+                                        <p:tgtEl>
+                                          <p:spTgt spid="36"/>
+                                        </p:tgtEl>
+                                        <p:attrNameLst>
+                                          <p:attrName>style.visibility</p:attrName>
+                                        </p:attrNameLst>
+                                      </p:cBhvr>
+                                      <p:to>
+                                        <p:strVal val="hidden"/>
+                                      </p:to>
+                                    </p:set>
+                                  </p:childTnLst>
+                                </p:cTn>
+                              </p:par>
+                              <p:par>
+                                <p:cTn id="166" presetID="10" presetClass="exit" presetSubtype="0" fill="hold" grpId="2" nodeType="withEffect">
+                                  <p:stCondLst>
+                                    <p:cond delay="0"/>
+                                  </p:stCondLst>
+                                  <p:childTnLst>
+                                    <p:animEffect transition="out" filter="fade">
+                                      <p:cBhvr>
+                                        <p:cTn id="167" dur="350" fill="hold"/>
+                                        <p:tgtEl>
+                                          <p:spTgt spid="37"/>
+                                        </p:tgtEl>
+                                      </p:cBhvr>
+                                    </p:animEffect>
+                                    <p:set>
+                                      <p:cBhvr>
+                                        <p:cTn id="168" dur="1" fill="hold">
+                                          <p:stCondLst>
+                                            <p:cond delay="350"/>
+                                          </p:stCondLst>
+                                        </p:cTn>
+                                        <p:tgtEl>
+                                          <p:spTgt spid="37"/>
+                                        </p:tgtEl>
+                                        <p:attrNameLst>
+                                          <p:attrName>style.visibility</p:attrName>
+                                        </p:attrNameLst>
+                                      </p:cBhvr>
+                                      <p:to>
+                                        <p:strVal val="hidden"/>
+                                      </p:to>
+                                    </p:set>
+                                  </p:childTnLst>
+                                </p:cTn>
+                              </p:par>
+                              <p:par>
+                                <p:cTn id="169" presetID="10" presetClass="exit" presetSubtype="0" fill="hold" grpId="2" nodeType="withEffect">
+                                  <p:stCondLst>
+                                    <p:cond delay="0"/>
+                                  </p:stCondLst>
+                                  <p:childTnLst>
+                                    <p:animEffect transition="out" filter="fade">
+                                      <p:cBhvr>
+                                        <p:cTn id="170" dur="350" fill="hold"/>
+                                        <p:tgtEl>
+                                          <p:spTgt spid="38"/>
+                                        </p:tgtEl>
+                                      </p:cBhvr>
+                                    </p:animEffect>
+                                    <p:set>
+                                      <p:cBhvr>
+                                        <p:cTn id="171" dur="1" fill="hold">
+                                          <p:stCondLst>
+                                            <p:cond delay="350"/>
+                                          </p:stCondLst>
+                                        </p:cTn>
+                                        <p:tgtEl>
+                                          <p:spTgt spid="38"/>
+                                        </p:tgtEl>
+                                        <p:attrNameLst>
+                                          <p:attrName>style.visibility</p:attrName>
+                                        </p:attrNameLst>
+                                      </p:cBhvr>
+                                      <p:to>
+                                        <p:strVal val="hidden"/>
+                                      </p:to>
+                                    </p:set>
+                                  </p:childTnLst>
+                                </p:cTn>
+                              </p:par>
+                              <p:par>
+                                <p:cTn id="172" presetID="10" presetClass="exit" presetSubtype="0" fill="hold" grpId="2" nodeType="withEffect">
+                                  <p:stCondLst>
+                                    <p:cond delay="0"/>
+                                  </p:stCondLst>
+                                  <p:childTnLst>
+                                    <p:animEffect transition="out" filter="fade">
+                                      <p:cBhvr>
+                                        <p:cTn id="173" dur="350" fill="hold"/>
                                         <p:tgtEl>
                                           <p:spTgt spid="39"/>
                                         </p:tgtEl>
@@ -26973,9 +28614,9 @@
                                     </p:animEffect>
                                     <p:set>
                                       <p:cBhvr>
-                                        <p:cTn id="61" dur="1" fill="hold">
+                                        <p:cTn id="174" dur="1" fill="hold">
                                           <p:stCondLst>
-                                            <p:cond delay="0"/>
+                                            <p:cond delay="350"/>
                                           </p:stCondLst>
                                         </p:cTn>
                                         <p:tgtEl>
@@ -26986,21 +28627,21 @@
                                         </p:attrNameLst>
                                       </p:cBhvr>
                                       <p:to>
-                                        <p:strVal val="visible"/>
+                                        <p:strVal val="hidden"/>
                                       </p:to>
                                     </p:set>
                                   </p:childTnLst>
                                 </p:cTn>
                               </p:par>
                               <p:par>
-                                <p:cTn id="62" presetID="10" presetClass="entr" presetSubtype="0" fill="hold" grpId="0" nodeType="withEffect">
+                                <p:cTn id="175" presetID="10" presetClass="exit" presetSubtype="0" fill="hold" grpId="2" nodeType="withEffect">
                                   <p:stCondLst>
                                     <p:cond delay="0"/>
                                   </p:stCondLst>
                                   <p:childTnLst>
-                                    <p:animEffect transition="in" filter="fade">
+                                    <p:animEffect transition="out" filter="fade">
                                       <p:cBhvr>
-                                        <p:cTn id="63" dur="350" fill="hold"/>
+                                        <p:cTn id="176" dur="350" fill="hold"/>
                                         <p:tgtEl>
                                           <p:spTgt spid="40"/>
                                         </p:tgtEl>
@@ -27008,9 +28649,9 @@
                                     </p:animEffect>
                                     <p:set>
                                       <p:cBhvr>
-                                        <p:cTn id="64" dur="1" fill="hold">
+                                        <p:cTn id="177" dur="1" fill="hold">
                                           <p:stCondLst>
-                                            <p:cond delay="0"/>
+                                            <p:cond delay="350"/>
                                           </p:stCondLst>
                                         </p:cTn>
                                         <p:tgtEl>
@@ -27021,21 +28662,21 @@
                                         </p:attrNameLst>
                                       </p:cBhvr>
                                       <p:to>
-                                        <p:strVal val="visible"/>
+                                        <p:strVal val="hidden"/>
                                       </p:to>
                                     </p:set>
                                   </p:childTnLst>
                                 </p:cTn>
                               </p:par>
                               <p:par>
-                                <p:cTn id="65" presetID="10" presetClass="entr" presetSubtype="0" fill="hold" grpId="0" nodeType="withEffect">
+                                <p:cTn id="178" presetID="10" presetClass="exit" presetSubtype="0" fill="hold" grpId="2" nodeType="withEffect">
                                   <p:stCondLst>
                                     <p:cond delay="0"/>
                                   </p:stCondLst>
                                   <p:childTnLst>
-                                    <p:animEffect transition="in" filter="fade">
+                                    <p:animEffect transition="out" filter="fade">
                                       <p:cBhvr>
-                                        <p:cTn id="66" dur="350" fill="hold"/>
+                                        <p:cTn id="179" dur="350" fill="hold"/>
                                         <p:tgtEl>
                                           <p:spTgt spid="41"/>
                                         </p:tgtEl>
@@ -27043,9 +28684,9 @@
                                     </p:animEffect>
                                     <p:set>
                                       <p:cBhvr>
-                                        <p:cTn id="67" dur="1" fill="hold">
+                                        <p:cTn id="180" dur="1" fill="hold">
                                           <p:stCondLst>
-                                            <p:cond delay="0"/>
+                                            <p:cond delay="350"/>
                                           </p:stCondLst>
                                         </p:cTn>
                                         <p:tgtEl>
@@ -27056,21 +28697,21 @@
                                         </p:attrNameLst>
                                       </p:cBhvr>
                                       <p:to>
-                                        <p:strVal val="visible"/>
+                                        <p:strVal val="hidden"/>
                                       </p:to>
                                     </p:set>
                                   </p:childTnLst>
                                 </p:cTn>
                               </p:par>
                               <p:par>
-                                <p:cTn id="68" presetID="10" presetClass="entr" presetSubtype="0" fill="hold" grpId="0" nodeType="withEffect">
+                                <p:cTn id="181" presetID="10" presetClass="entr" presetSubtype="0" fill="hold" grpId="2" nodeType="withEffect">
                                   <p:stCondLst>
                                     <p:cond delay="0"/>
                                   </p:stCondLst>
                                   <p:childTnLst>
                                     <p:animEffect transition="in" filter="fade">
                                       <p:cBhvr>
-                                        <p:cTn id="69" dur="350" fill="hold"/>
+                                        <p:cTn id="182" dur="350" fill="hold"/>
                                         <p:tgtEl>
                                           <p:spTgt spid="42"/>
                                         </p:tgtEl>
@@ -27078,7 +28719,7 @@
                                     </p:animEffect>
                                     <p:set>
                                       <p:cBhvr>
-                                        <p:cTn id="70" dur="1" fill="hold">
+                                        <p:cTn id="183" dur="1" fill="hold">
                                           <p:stCondLst>
                                             <p:cond delay="0"/>
                                           </p:stCondLst>
@@ -27098,14 +28739,14 @@
                                 </p:cTn>
                               </p:par>
                               <p:par>
-                                <p:cTn id="71" presetID="10" presetClass="entr" presetSubtype="0" fill="hold" grpId="0" nodeType="withEffect">
+                                <p:cTn id="184" presetID="10" presetClass="entr" presetSubtype="0" fill="hold" grpId="2" nodeType="withEffect">
                                   <p:stCondLst>
                                     <p:cond delay="0"/>
                                   </p:stCondLst>
                                   <p:childTnLst>
                                     <p:animEffect transition="in" filter="fade">
                                       <p:cBhvr>
-                                        <p:cTn id="72" dur="350" fill="hold"/>
+                                        <p:cTn id="185" dur="350" fill="hold"/>
                                         <p:tgtEl>
                                           <p:spTgt spid="43"/>
                                         </p:tgtEl>
@@ -27113,7 +28754,7 @@
                                     </p:animEffect>
                                     <p:set>
                                       <p:cBhvr>
-                                        <p:cTn id="73" dur="1" fill="hold">
+                                        <p:cTn id="186" dur="1" fill="hold">
                                           <p:stCondLst>
                                             <p:cond delay="0"/>
                                           </p:stCondLst>
@@ -27133,14 +28774,14 @@
                                 </p:cTn>
                               </p:par>
                               <p:par>
-                                <p:cTn id="74" presetID="10" presetClass="entr" presetSubtype="0" fill="hold" grpId="0" nodeType="withEffect">
+                                <p:cTn id="187" presetID="10" presetClass="entr" presetSubtype="0" fill="hold" grpId="2" nodeType="withEffect">
                                   <p:stCondLst>
                                     <p:cond delay="0"/>
                                   </p:stCondLst>
                                   <p:childTnLst>
                                     <p:animEffect transition="in" filter="fade">
                                       <p:cBhvr>
-                                        <p:cTn id="75" dur="350" fill="hold"/>
+                                        <p:cTn id="188" dur="350" fill="hold"/>
                                         <p:tgtEl>
                                           <p:spTgt spid="44"/>
                                         </p:tgtEl>
@@ -27148,7 +28789,7 @@
                                     </p:animEffect>
                                     <p:set>
                                       <p:cBhvr>
-                                        <p:cTn id="76" dur="1" fill="hold">
+                                        <p:cTn id="189" dur="1" fill="hold">
                                           <p:stCondLst>
                                             <p:cond delay="0"/>
                                           </p:stCondLst>
@@ -27168,14 +28809,14 @@
                                 </p:cTn>
                               </p:par>
                               <p:par>
-                                <p:cTn id="77" presetID="10" presetClass="entr" presetSubtype="0" fill="hold" grpId="0" nodeType="withEffect">
+                                <p:cTn id="190" presetID="10" presetClass="entr" presetSubtype="0" fill="hold" grpId="2" nodeType="withEffect">
                                   <p:stCondLst>
                                     <p:cond delay="0"/>
                                   </p:stCondLst>
                                   <p:childTnLst>
                                     <p:animEffect transition="in" filter="fade">
                                       <p:cBhvr>
-                                        <p:cTn id="78" dur="350" fill="hold"/>
+                                        <p:cTn id="191" dur="350" fill="hold"/>
                                         <p:tgtEl>
                                           <p:spTgt spid="45"/>
                                         </p:tgtEl>
@@ -27183,118 +28824,13 @@
                                     </p:animEffect>
                                     <p:set>
                                       <p:cBhvr>
-                                        <p:cTn id="79" dur="1" fill="hold">
+                                        <p:cTn id="192" dur="1" fill="hold">
                                           <p:stCondLst>
                                             <p:cond delay="0"/>
                                           </p:stCondLst>
                                         </p:cTn>
                                         <p:tgtEl>
                                           <p:spTgt spid="45"/>
-                                        </p:tgtEl>
-                                        <p:attrNameLst>
-                                          <p:attrName>style.visibility</p:attrName>
-                                        </p:attrNameLst>
-                                      </p:cBhvr>
-                                      <p:to>
-                                        <p:strVal val="visible"/>
-                                      </p:to>
-                                    </p:set>
-                                  </p:childTnLst>
-                                </p:cTn>
-                              </p:par>
-                              <p:par>
-                                <p:cTn id="80" presetID="10" presetClass="entr" presetSubtype="0" fill="hold" grpId="0" nodeType="withEffect">
-                                  <p:stCondLst>
-                                    <p:cond delay="0"/>
-                                  </p:stCondLst>
-                                  <p:childTnLst>
-                                    <p:animEffect transition="in" filter="fade">
-                                      <p:cBhvr>
-                                        <p:cTn id="81" dur="350" fill="hold"/>
-                                        <p:tgtEl>
-                                          <p:spTgt spid="46"/>
-                                        </p:tgtEl>
-                                      </p:cBhvr>
-                                    </p:animEffect>
-                                    <p:set>
-                                      <p:cBhvr>
-                                        <p:cTn id="82" dur="1" fill="hold">
-                                          <p:stCondLst>
-                                            <p:cond delay="0"/>
-                                          </p:stCondLst>
-                                        </p:cTn>
-                                        <p:tgtEl>
-                                          <p:spTgt spid="46"/>
-                                        </p:tgtEl>
-                                        <p:attrNameLst>
-                                          <p:attrName>style.visibility</p:attrName>
-                                        </p:attrNameLst>
-                                      </p:cBhvr>
-                                      <p:to>
-                                        <p:strVal val="visible"/>
-                                      </p:to>
-                                    </p:set>
-                                  </p:childTnLst>
-                                </p:cTn>
-                              </p:par>
-                              <p:par>
-                                <p:cTn id="83" presetID="10" presetClass="entr" presetSubtype="0" fill="hold" grpId="0" nodeType="withEffect">
-                                  <p:stCondLst>
-                                    <p:cond delay="0"/>
-                                  </p:stCondLst>
-                                  <p:childTnLst>
-                                    <p:animEffect transition="in" filter="fade">
-                                      <p:cBhvr>
-                                        <p:cTn id="84" dur="350" fill="hold"/>
-                                        <p:tgtEl>
-                                          <p:spTgt spid="47"/>
-                                        </p:tgtEl>
-                                      </p:cBhvr>
-                                    </p:animEffect>
-                                    <p:set>
-                                      <p:cBhvr>
-                                        <p:cTn id="85" dur="1" fill="hold">
-                                          <p:stCondLst>
-                                            <p:cond delay="0"/>
-                                          </p:stCondLst>
-                                        </p:cTn>
-                                        <p:tgtEl>
-                                          <p:spTgt spid="47"/>
-                                        </p:tgtEl>
-                                        <p:attrNameLst>
-                                          <p:attrName>style.visibility</p:attrName>
-                                        </p:attrNameLst>
-                                      </p:cBhvr>
-                                      <p:to>
-                                        <p:strVal val="visible"/>
-                                      </p:to>
-                                    </p:set>
-                                  </p:childTnLst>
-                                </p:cTn>
-                              </p:par>
-                              <p:par>
-                                <p:cTn id="86" presetID="10" presetClass="entr" presetSubtype="0" fill="hold" grpId="0" nodeType="withEffect">
-                                  <p:stCondLst>
-                                    <p:cond delay="0"/>
-                                  </p:stCondLst>
-                                  <p:childTnLst>
-                                    <p:animEffect transition="in" filter="fade">
-                                      <p:cBhvr>
-                                        <p:cTn id="87" dur="350" fill="hold"/>
-                                        <p:tgtEl>
-                                          <p:spTgt spid="48"/>
-                                        </p:tgtEl>
-                                      </p:cBhvr>
-                                    </p:animEffect>
-                                    <p:set>
-                                      <p:cBhvr>
-                                        <p:cTn id="88" dur="1" fill="hold">
-                                          <p:stCondLst>
-                                            <p:cond delay="0"/>
-                                          </p:stCondLst>
-                                        </p:cTn>
-                                        <p:tgtEl>
-                                          <p:spTgt spid="48"/>
                                         </p:tgtEl>
                                         <p:attrNameLst>
                                           <p:attrName>style.visibility</p:attrName>

--- a/5g-thesis-presentation-5min/tesi-5min.pptx
+++ b/5g-thesis-presentation-5min/tesi-5min.pptx
@@ -2,19 +2,19 @@
 <file path=ppt/presentation.xml><?xml version="1.0" encoding="utf-8"?>
 <p:presentation xmlns:p="http://schemas.openxmlformats.org/presentationml/2006/main">
   <p:sldMasterIdLst>
-    <p:sldMasterId xmlns:r="http://schemas.openxmlformats.org/officeDocument/2006/relationships" id="2147483648" r:id="Rc9a03ea16857466e"/>
+    <p:sldMasterId xmlns:r="http://schemas.openxmlformats.org/officeDocument/2006/relationships" id="2147483648" r:id="R28d66bf4a12a46fb"/>
   </p:sldMasterIdLst>
   <p:notesMasterIdLst>
-    <p:notesMasterId xmlns:r="http://schemas.openxmlformats.org/officeDocument/2006/relationships" r:id="R335d0ebf525a4447"/>
+    <p:notesMasterId xmlns:r="http://schemas.openxmlformats.org/officeDocument/2006/relationships" r:id="R8d2113278ea34c4c"/>
   </p:notesMasterIdLst>
   <p:sldIdLst>
-    <p:sldId xmlns:r="http://schemas.openxmlformats.org/officeDocument/2006/relationships" id="256" r:id="R07fce34d24e54e88"/>
-    <p:sldId xmlns:r="http://schemas.openxmlformats.org/officeDocument/2006/relationships" id="257" r:id="Rf943c923a7774e50"/>
-    <p:sldId xmlns:r="http://schemas.openxmlformats.org/officeDocument/2006/relationships" id="258" r:id="Re7a983aa8876476e"/>
-    <p:sldId xmlns:r="http://schemas.openxmlformats.org/officeDocument/2006/relationships" id="259" r:id="Rdd822fe2b47d4d43"/>
-    <p:sldId xmlns:r="http://schemas.openxmlformats.org/officeDocument/2006/relationships" id="260" r:id="Ref38538bd830463a"/>
-    <p:sldId xmlns:r="http://schemas.openxmlformats.org/officeDocument/2006/relationships" id="261" r:id="R2954225013c747d4"/>
-    <p:sldId xmlns:r="http://schemas.openxmlformats.org/officeDocument/2006/relationships" id="262" r:id="R8f5c574976534372"/>
+    <p:sldId xmlns:r="http://schemas.openxmlformats.org/officeDocument/2006/relationships" id="256" r:id="Rb812ca990d2e4825"/>
+    <p:sldId xmlns:r="http://schemas.openxmlformats.org/officeDocument/2006/relationships" id="257" r:id="R577f91db0327409b"/>
+    <p:sldId xmlns:r="http://schemas.openxmlformats.org/officeDocument/2006/relationships" id="258" r:id="R89014dbec34948b5"/>
+    <p:sldId xmlns:r="http://schemas.openxmlformats.org/officeDocument/2006/relationships" id="259" r:id="R4f83e73cc2964929"/>
+    <p:sldId xmlns:r="http://schemas.openxmlformats.org/officeDocument/2006/relationships" id="260" r:id="Rc477bfc206ba442a"/>
+    <p:sldId xmlns:r="http://schemas.openxmlformats.org/officeDocument/2006/relationships" id="261" r:id="R23f0bfa541d840c0"/>
+    <p:sldId xmlns:r="http://schemas.openxmlformats.org/officeDocument/2006/relationships" id="262" r:id="R0686553aceb44965"/>
   </p:sldIdLst>
   <p:sldSz cx="15240000" cy="8572500"/>
   <p:notesSz cx="6858000" cy="9144000"/>
@@ -738,7 +738,7 @@
           <a:lstStyle xmlns:a="http://schemas.openxmlformats.org/drawingml/2006/main"/>
           <a:p xmlns:a="http://schemas.openxmlformats.org/drawingml/2006/main">
             <a:r>
-              <a:t>Le specifiche SCAS sono scritte in linguaggio naturale e non possono essere interpretate direttamente dal verificatore. La prima schermata mostra tre estratti reali e uno pseudocodice soltanto illustrativo. [Primo clic] Nel caso NRF, riportato in forma semplificata nella tesi, distinguiamo i messaggi da individuare e il criterio da verificare: la risposta HTTP 403 alla discovery non autorizzata. [Secondo clic] Ho progettato il DSL per rappresentare questi due aspetti con costrutti riutilizzabili. Al posto del testo SCAS compare la regola: SEQUENCE descrive i messaggi, REQUIRE il criterio. Le due domande rimangono le stesse. Le regole sono scritte usando i costrutti del DSL: non ho sviluppato una traduzione automatica NLP né un sistema che esegue i test SCAS.</a:t>
+              <a:t>Il primo contributo è il DSL progettato. Le specifiche SCAS sono scritte in linguaggio naturale e non possono essere interpretate direttamente dal verificatore. La prima schermata mostra tre estratti reali e uno pseudocodice soltanto illustrativo. [Primo clic] Nel caso NRF, riportato in forma semplificata nella tesi, distinguiamo i messaggi da individuare e il criterio da verificare: la risposta HTTP 403 alla discovery non autorizzata. [Secondo clic] Ho progettato il DSL per rappresentare questi due aspetti con costrutti riutilizzabili. Al posto del testo SCAS compare la regola: SEQUENCE descrive i messaggi, REQUIRE il criterio. Le due domande rimangono le stesse. Le regole sono scritte usando i costrutti del DSL: non ho sviluppato una traduzione automatica NLP né un sistema che esegue i test SCAS.</a:t>
             </a:r>
           </a:p>
           <a:p xmlns:a="http://schemas.openxmlformats.org/drawingml/2006/main">
@@ -1135,7 +1135,7 @@
           <p:cNvPr id="3" name="Title">
             <a:extLst xmlns:a="http://schemas.openxmlformats.org/drawingml/2006/main">
               <a:ext uri="{FF2B5EF4-FFF2-40B4-BE49-F238E27FC236}">
-                <a16:creationId xmlns:a16="http://schemas.microsoft.com/office/drawing/2014/main" id="{EBEC20B4-2969-41EE-8B37-77440FF5B476}"/>
+                <a16:creationId xmlns:a16="http://schemas.microsoft.com/office/drawing/2014/main" id="{0B39142B-6BF2-48E6-9301-C6FA8BA45450}"/>
               </a:ext>
             </a:extLst>
           </p:cNvPr>
@@ -1364,7 +1364,7 @@
           <p:cNvPr id="2" name="Subtitle">
             <a:extLst xmlns:a="http://schemas.openxmlformats.org/drawingml/2006/main">
               <a:ext uri="{FF2B5EF4-FFF2-40B4-BE49-F238E27FC236}">
-                <a16:creationId xmlns:a16="http://schemas.microsoft.com/office/drawing/2014/main" id="{255CE1B1-00FB-41A7-8F7F-1FA0754EA09B}"/>
+                <a16:creationId xmlns:a16="http://schemas.microsoft.com/office/drawing/2014/main" id="{8F8C5ACF-B12B-425B-9408-28ED62E1A33A}"/>
               </a:ext>
             </a:extLst>
           </p:cNvPr>
@@ -1610,7 +1610,7 @@
           <p:cNvPr id="2" name="Section title">
             <a:extLst xmlns:a="http://schemas.openxmlformats.org/drawingml/2006/main">
               <a:ext uri="{FF2B5EF4-FFF2-40B4-BE49-F238E27FC236}">
-                <a16:creationId xmlns:a16="http://schemas.microsoft.com/office/drawing/2014/main" id="{90B0E8C9-A108-4C2C-8DD8-A810526B51DF}"/>
+                <a16:creationId xmlns:a16="http://schemas.microsoft.com/office/drawing/2014/main" id="{35A73A22-8D4C-4F36-A5AD-E9D2FC043F06}"/>
               </a:ext>
             </a:extLst>
           </p:cNvPr>
@@ -1856,7 +1856,7 @@
           <p:cNvPr id="3" name="Title">
             <a:extLst xmlns:a="http://schemas.openxmlformats.org/drawingml/2006/main">
               <a:ext uri="{FF2B5EF4-FFF2-40B4-BE49-F238E27FC236}">
-                <a16:creationId xmlns:a16="http://schemas.microsoft.com/office/drawing/2014/main" id="{B0E0CCA4-E384-44FA-9F0B-BD20C13C09C4}"/>
+                <a16:creationId xmlns:a16="http://schemas.microsoft.com/office/drawing/2014/main" id="{8C747E11-99BC-4D9A-82E5-7C9AAE5D5086}"/>
               </a:ext>
             </a:extLst>
           </p:cNvPr>
@@ -2085,7 +2085,7 @@
           <p:cNvPr id="2" name="Body">
             <a:extLst xmlns:a="http://schemas.openxmlformats.org/drawingml/2006/main">
               <a:ext uri="{FF2B5EF4-FFF2-40B4-BE49-F238E27FC236}">
-                <a16:creationId xmlns:a16="http://schemas.microsoft.com/office/drawing/2014/main" id="{E22AC889-5AFB-47D7-BB20-F656999EA961}"/>
+                <a16:creationId xmlns:a16="http://schemas.microsoft.com/office/drawing/2014/main" id="{985D7692-E3FA-4CEE-BAFF-EA26ADCD631C}"/>
               </a:ext>
             </a:extLst>
           </p:cNvPr>
@@ -2331,7 +2331,7 @@
           <p:cNvPr id="4" name="Title">
             <a:extLst xmlns:a="http://schemas.openxmlformats.org/drawingml/2006/main">
               <a:ext uri="{FF2B5EF4-FFF2-40B4-BE49-F238E27FC236}">
-                <a16:creationId xmlns:a16="http://schemas.microsoft.com/office/drawing/2014/main" id="{234E3200-0AD4-438B-9E1F-979702ECF0B3}"/>
+                <a16:creationId xmlns:a16="http://schemas.microsoft.com/office/drawing/2014/main" id="{7B5600ED-1473-4042-B847-1D3747BCACD2}"/>
               </a:ext>
             </a:extLst>
           </p:cNvPr>
@@ -2560,7 +2560,7 @@
           <p:cNvPr id="2" name="Left column">
             <a:extLst xmlns:a="http://schemas.openxmlformats.org/drawingml/2006/main">
               <a:ext uri="{FF2B5EF4-FFF2-40B4-BE49-F238E27FC236}">
-                <a16:creationId xmlns:a16="http://schemas.microsoft.com/office/drawing/2014/main" id="{B5C7A0EA-5A1D-49CC-9CB6-42CCD904251D}"/>
+                <a16:creationId xmlns:a16="http://schemas.microsoft.com/office/drawing/2014/main" id="{EE70D698-F243-4884-B77B-C8122B4EEE53}"/>
               </a:ext>
             </a:extLst>
           </p:cNvPr>
@@ -2789,7 +2789,7 @@
           <p:cNvPr id="3" name="Right column">
             <a:extLst xmlns:a="http://schemas.openxmlformats.org/drawingml/2006/main">
               <a:ext uri="{FF2B5EF4-FFF2-40B4-BE49-F238E27FC236}">
-                <a16:creationId xmlns:a16="http://schemas.microsoft.com/office/drawing/2014/main" id="{3254CABD-AE09-400E-85BE-050611654385}"/>
+                <a16:creationId xmlns:a16="http://schemas.microsoft.com/office/drawing/2014/main" id="{6B5EECB9-86CD-4EEE-8B7A-4D1CF75C954E}"/>
               </a:ext>
             </a:extLst>
           </p:cNvPr>
@@ -3035,7 +3035,7 @@
           <p:cNvPr id="3" name="Title">
             <a:extLst xmlns:a="http://schemas.openxmlformats.org/drawingml/2006/main">
               <a:ext uri="{FF2B5EF4-FFF2-40B4-BE49-F238E27FC236}">
-                <a16:creationId xmlns:a16="http://schemas.microsoft.com/office/drawing/2014/main" id="{3A55BAF0-1DCC-433C-BA1F-612092D5F4F8}"/>
+                <a16:creationId xmlns:a16="http://schemas.microsoft.com/office/drawing/2014/main" id="{277005B0-DC8C-4195-8AD7-18D5BCDAE963}"/>
               </a:ext>
             </a:extLst>
           </p:cNvPr>
@@ -3264,7 +3264,7 @@
           <p:cNvPr id="2" name="Left column">
             <a:extLst xmlns:a="http://schemas.openxmlformats.org/drawingml/2006/main">
               <a:ext uri="{FF2B5EF4-FFF2-40B4-BE49-F238E27FC236}">
-                <a16:creationId xmlns:a16="http://schemas.microsoft.com/office/drawing/2014/main" id="{91116FE8-A480-4F6C-97E8-8AF76DBED865}"/>
+                <a16:creationId xmlns:a16="http://schemas.microsoft.com/office/drawing/2014/main" id="{8141C69F-945B-4267-ACE9-8552683CCE13}"/>
               </a:ext>
             </a:extLst>
           </p:cNvPr>
@@ -3531,12 +3531,12 @@
   </p:cSld>
   <p:clrMap bg1="lt1" tx1="dk1" bg2="lt2" tx2="dk2" accent1="accent1" accent2="accent2" accent3="accent3" accent4="accent4" accent5="accent5" accent6="accent6" hlink="hlink" folHlink="folHlink"/>
   <p:sldLayoutIdLst>
-    <p:sldLayoutId xmlns:r="http://schemas.openxmlformats.org/officeDocument/2006/relationships" id="2147483649" r:id="R858fa8fe78a540cc"/>
-    <p:sldLayoutId xmlns:r="http://schemas.openxmlformats.org/officeDocument/2006/relationships" id="2147483650" r:id="R659360ab6eb1440a"/>
-    <p:sldLayoutId xmlns:r="http://schemas.openxmlformats.org/officeDocument/2006/relationships" id="2147483651" r:id="R69184f7349424297"/>
-    <p:sldLayoutId xmlns:r="http://schemas.openxmlformats.org/officeDocument/2006/relationships" id="2147483652" r:id="R8230d9cf907643da"/>
-    <p:sldLayoutId xmlns:r="http://schemas.openxmlformats.org/officeDocument/2006/relationships" id="2147483653" r:id="Rffcae840cf9742df"/>
-    <p:sldLayoutId xmlns:r="http://schemas.openxmlformats.org/officeDocument/2006/relationships" id="2147483654" r:id="R81a1a620cdbe4517"/>
+    <p:sldLayoutId xmlns:r="http://schemas.openxmlformats.org/officeDocument/2006/relationships" id="2147483649" r:id="Rddd2d3a141514265"/>
+    <p:sldLayoutId xmlns:r="http://schemas.openxmlformats.org/officeDocument/2006/relationships" id="2147483650" r:id="Rdb2b53ff255a4a9d"/>
+    <p:sldLayoutId xmlns:r="http://schemas.openxmlformats.org/officeDocument/2006/relationships" id="2147483651" r:id="Rb788dfb663b04c55"/>
+    <p:sldLayoutId xmlns:r="http://schemas.openxmlformats.org/officeDocument/2006/relationships" id="2147483652" r:id="Rbd503872eeb14c10"/>
+    <p:sldLayoutId xmlns:r="http://schemas.openxmlformats.org/officeDocument/2006/relationships" id="2147483653" r:id="R6b000824c1684cd3"/>
+    <p:sldLayoutId xmlns:r="http://schemas.openxmlformats.org/officeDocument/2006/relationships" id="2147483654" r:id="Rf572b49db79c42b7"/>
   </p:sldLayoutIdLst>
   <p:txStyles>
     <p:titleStyle>
@@ -4087,7 +4087,7 @@
           <p:cNvPr id="21" name="">
             <a:extLst xmlns:a="http://schemas.openxmlformats.org/drawingml/2006/main">
               <a:ext uri="{FF2B5EF4-FFF2-40B4-BE49-F238E27FC236}">
-                <a16:creationId xmlns:a16="http://schemas.microsoft.com/office/drawing/2014/main" id="{350D251C-EE3D-4522-9ABA-6DBB6F89AAF1}"/>
+                <a16:creationId xmlns:a16="http://schemas.microsoft.com/office/drawing/2014/main" id="{6516710D-B0DD-42E8-A790-C37733949609}"/>
               </a:ext>
             </a:extLst>
           </p:cNvPr>
@@ -4097,7 +4097,7 @@
           <p:nvPr/>
         </p:nvPicPr>
         <p:blipFill>
-          <a:blip xmlns:r="http://schemas.openxmlformats.org/officeDocument/2006/relationships" xmlns:a="http://schemas.openxmlformats.org/drawingml/2006/main" r:embed="R2d63f5637ce44d3e"/>
+          <a:blip xmlns:r="http://schemas.openxmlformats.org/officeDocument/2006/relationships" xmlns:a="http://schemas.openxmlformats.org/drawingml/2006/main" r:embed="R32bce73d270248e3"/>
           <a:stretch xmlns:a="http://schemas.openxmlformats.org/drawingml/2006/main"/>
         </p:blipFill>
         <p:spPr>
@@ -4115,7 +4115,7 @@
           <p:cNvPr id="2" name="f2">
             <a:extLst xmlns:a="http://schemas.openxmlformats.org/drawingml/2006/main">
               <a:ext uri="{FF2B5EF4-FFF2-40B4-BE49-F238E27FC236}">
-                <a16:creationId xmlns:a16="http://schemas.microsoft.com/office/drawing/2014/main" id="{837CA3D0-3017-4BF3-9C41-2DF22EFE7E0F}"/>
+                <a16:creationId xmlns:a16="http://schemas.microsoft.com/office/drawing/2014/main" id="{957BFEB9-951F-4A66-A56C-2F6A3F935696}"/>
               </a:ext>
             </a:extLst>
           </p:cNvPr>
@@ -4274,7 +4274,7 @@
           <p:cNvPr id="3" name="f3">
             <a:extLst xmlns:a="http://schemas.openxmlformats.org/drawingml/2006/main">
               <a:ext uri="{FF2B5EF4-FFF2-40B4-BE49-F238E27FC236}">
-                <a16:creationId xmlns:a16="http://schemas.microsoft.com/office/drawing/2014/main" id="{FE0D32E0-812C-4A53-B7FF-8FE000520777}"/>
+                <a16:creationId xmlns:a16="http://schemas.microsoft.com/office/drawing/2014/main" id="{34E0D8C1-10C6-4689-888E-D4CF8CA8EBC8}"/>
               </a:ext>
             </a:extLst>
           </p:cNvPr>
@@ -4433,7 +4433,7 @@
           <p:cNvPr id="4" name="f4">
             <a:extLst xmlns:a="http://schemas.openxmlformats.org/drawingml/2006/main">
               <a:ext uri="{FF2B5EF4-FFF2-40B4-BE49-F238E27FC236}">
-                <a16:creationId xmlns:a16="http://schemas.microsoft.com/office/drawing/2014/main" id="{375DDE56-A61C-445D-8409-2C37E37EE7D1}"/>
+                <a16:creationId xmlns:a16="http://schemas.microsoft.com/office/drawing/2014/main" id="{5E2B78A3-D381-4454-BF3B-3F62F1A7DBB9}"/>
               </a:ext>
             </a:extLst>
           </p:cNvPr>
@@ -4592,7 +4592,7 @@
           <p:cNvPr id="5" name="f5">
             <a:extLst xmlns:a="http://schemas.openxmlformats.org/drawingml/2006/main">
               <a:ext uri="{FF2B5EF4-FFF2-40B4-BE49-F238E27FC236}">
-                <a16:creationId xmlns:a16="http://schemas.microsoft.com/office/drawing/2014/main" id="{70C5113F-1649-4C08-8775-269B8A40F09D}"/>
+                <a16:creationId xmlns:a16="http://schemas.microsoft.com/office/drawing/2014/main" id="{3150FE58-5A32-49AE-86AE-3D7D905BBE75}"/>
               </a:ext>
             </a:extLst>
           </p:cNvPr>
@@ -4751,7 +4751,7 @@
           <p:cNvPr id="6" name="f6">
             <a:extLst xmlns:a="http://schemas.openxmlformats.org/drawingml/2006/main">
               <a:ext uri="{FF2B5EF4-FFF2-40B4-BE49-F238E27FC236}">
-                <a16:creationId xmlns:a16="http://schemas.microsoft.com/office/drawing/2014/main" id="{517676F4-2F86-4D68-BCCD-F60153802C91}"/>
+                <a16:creationId xmlns:a16="http://schemas.microsoft.com/office/drawing/2014/main" id="{7DC8A13E-EE6A-4CEF-9AAD-50B1C6AAA20D}"/>
               </a:ext>
             </a:extLst>
           </p:cNvPr>
@@ -4910,7 +4910,7 @@
           <p:cNvPr id="7" name="f7">
             <a:extLst xmlns:a="http://schemas.openxmlformats.org/drawingml/2006/main">
               <a:ext uri="{FF2B5EF4-FFF2-40B4-BE49-F238E27FC236}">
-                <a16:creationId xmlns:a16="http://schemas.microsoft.com/office/drawing/2014/main" id="{544FB8D3-0E9F-4D83-8AC7-2B36676BF299}"/>
+                <a16:creationId xmlns:a16="http://schemas.microsoft.com/office/drawing/2014/main" id="{3E73BABC-EDA2-4830-AFA6-02DCB57D7286}"/>
               </a:ext>
             </a:extLst>
           </p:cNvPr>
@@ -5069,7 +5069,7 @@
           <p:cNvPr id="8" name="f8">
             <a:extLst xmlns:a="http://schemas.openxmlformats.org/drawingml/2006/main">
               <a:ext uri="{FF2B5EF4-FFF2-40B4-BE49-F238E27FC236}">
-                <a16:creationId xmlns:a16="http://schemas.microsoft.com/office/drawing/2014/main" id="{2F9A7DBC-690E-4812-B0FE-8B587A3F0F05}"/>
+                <a16:creationId xmlns:a16="http://schemas.microsoft.com/office/drawing/2014/main" id="{230346E9-89B4-4D49-B907-C8487E6EBD38}"/>
               </a:ext>
             </a:extLst>
           </p:cNvPr>
@@ -5228,7 +5228,7 @@
           <p:cNvPr id="9" name="f9">
             <a:extLst xmlns:a="http://schemas.openxmlformats.org/drawingml/2006/main">
               <a:ext uri="{FF2B5EF4-FFF2-40B4-BE49-F238E27FC236}">
-                <a16:creationId xmlns:a16="http://schemas.microsoft.com/office/drawing/2014/main" id="{8C4BFF19-E256-4503-838F-E628649EDBF4}"/>
+                <a16:creationId xmlns:a16="http://schemas.microsoft.com/office/drawing/2014/main" id="{B9DA4782-B4EE-40EB-92F3-D1C6E176AC0C}"/>
               </a:ext>
             </a:extLst>
           </p:cNvPr>
@@ -5387,7 +5387,7 @@
           <p:cNvPr id="10" name="f10">
             <a:extLst xmlns:a="http://schemas.openxmlformats.org/drawingml/2006/main">
               <a:ext uri="{FF2B5EF4-FFF2-40B4-BE49-F238E27FC236}">
-                <a16:creationId xmlns:a16="http://schemas.microsoft.com/office/drawing/2014/main" id="{E6E01563-97D9-4F65-8AE6-7A46BB74DB85}"/>
+                <a16:creationId xmlns:a16="http://schemas.microsoft.com/office/drawing/2014/main" id="{B454D1EA-CB46-456C-808F-5B3D8F4597B8}"/>
               </a:ext>
             </a:extLst>
           </p:cNvPr>
@@ -5546,7 +5546,7 @@
           <p:cNvPr id="11" name="f11">
             <a:extLst xmlns:a="http://schemas.openxmlformats.org/drawingml/2006/main">
               <a:ext uri="{FF2B5EF4-FFF2-40B4-BE49-F238E27FC236}">
-                <a16:creationId xmlns:a16="http://schemas.microsoft.com/office/drawing/2014/main" id="{5162F518-FDEE-4463-BA2C-F6A46C45927A}"/>
+                <a16:creationId xmlns:a16="http://schemas.microsoft.com/office/drawing/2014/main" id="{67718F60-B3E2-4FE4-8F1C-DA3DE84E3E67}"/>
               </a:ext>
             </a:extLst>
           </p:cNvPr>
@@ -5705,7 +5705,7 @@
           <p:cNvPr id="12" name="f12">
             <a:extLst xmlns:a="http://schemas.openxmlformats.org/drawingml/2006/main">
               <a:ext uri="{FF2B5EF4-FFF2-40B4-BE49-F238E27FC236}">
-                <a16:creationId xmlns:a16="http://schemas.microsoft.com/office/drawing/2014/main" id="{77323399-B60F-46C9-AE92-6845D6D418C8}"/>
+                <a16:creationId xmlns:a16="http://schemas.microsoft.com/office/drawing/2014/main" id="{71DFBB5A-16BA-4251-8596-EDE21B18FEA8}"/>
               </a:ext>
             </a:extLst>
           </p:cNvPr>
@@ -5864,7 +5864,7 @@
           <p:cNvPr id="13" name="f13">
             <a:extLst xmlns:a="http://schemas.openxmlformats.org/drawingml/2006/main">
               <a:ext uri="{FF2B5EF4-FFF2-40B4-BE49-F238E27FC236}">
-                <a16:creationId xmlns:a16="http://schemas.microsoft.com/office/drawing/2014/main" id="{93D23B5F-170B-40B9-A7A0-89D22951BEF2}"/>
+                <a16:creationId xmlns:a16="http://schemas.microsoft.com/office/drawing/2014/main" id="{514769DD-76B8-4298-B3A1-6F8DE16A8DCA}"/>
               </a:ext>
             </a:extLst>
           </p:cNvPr>
@@ -6023,7 +6023,7 @@
           <p:cNvPr id="14" name="f14">
             <a:extLst xmlns:a="http://schemas.openxmlformats.org/drawingml/2006/main">
               <a:ext uri="{FF2B5EF4-FFF2-40B4-BE49-F238E27FC236}">
-                <a16:creationId xmlns:a16="http://schemas.microsoft.com/office/drawing/2014/main" id="{2583CB11-DB60-4261-98F5-8DB2D9C58398}"/>
+                <a16:creationId xmlns:a16="http://schemas.microsoft.com/office/drawing/2014/main" id="{8E326E81-D27C-462A-8BF7-78A32AD19B6E}"/>
               </a:ext>
             </a:extLst>
           </p:cNvPr>
@@ -6182,7 +6182,7 @@
           <p:cNvPr id="15" name="f15">
             <a:extLst xmlns:a="http://schemas.openxmlformats.org/drawingml/2006/main">
               <a:ext uri="{FF2B5EF4-FFF2-40B4-BE49-F238E27FC236}">
-                <a16:creationId xmlns:a16="http://schemas.microsoft.com/office/drawing/2014/main" id="{AA11CFFD-2458-4E61-979B-8143CD17EE2E}"/>
+                <a16:creationId xmlns:a16="http://schemas.microsoft.com/office/drawing/2014/main" id="{E4D31AC5-7F1F-48CA-9947-25474E4A5CCE}"/>
               </a:ext>
             </a:extLst>
           </p:cNvPr>
@@ -6341,7 +6341,7 @@
           <p:cNvPr id="16" name="f16">
             <a:extLst xmlns:a="http://schemas.openxmlformats.org/drawingml/2006/main">
               <a:ext uri="{FF2B5EF4-FFF2-40B4-BE49-F238E27FC236}">
-                <a16:creationId xmlns:a16="http://schemas.microsoft.com/office/drawing/2014/main" id="{A9AE0CBD-5431-4863-A4DC-3A901BF96AE1}"/>
+                <a16:creationId xmlns:a16="http://schemas.microsoft.com/office/drawing/2014/main" id="{9BE88533-0DEB-4B47-8CE1-5FAB2AFA19C5}"/>
               </a:ext>
             </a:extLst>
           </p:cNvPr>
@@ -6500,7 +6500,7 @@
           <p:cNvPr id="17" name="f17">
             <a:extLst xmlns:a="http://schemas.openxmlformats.org/drawingml/2006/main">
               <a:ext uri="{FF2B5EF4-FFF2-40B4-BE49-F238E27FC236}">
-                <a16:creationId xmlns:a16="http://schemas.microsoft.com/office/drawing/2014/main" id="{B2D70A4A-FC99-493E-A11E-FAD49B056407}"/>
+                <a16:creationId xmlns:a16="http://schemas.microsoft.com/office/drawing/2014/main" id="{6C0DFD20-C3D4-4EBD-A214-F5E2D840E033}"/>
               </a:ext>
             </a:extLst>
           </p:cNvPr>
@@ -6659,7 +6659,7 @@
           <p:cNvPr id="18" name="f18">
             <a:extLst xmlns:a="http://schemas.openxmlformats.org/drawingml/2006/main">
               <a:ext uri="{FF2B5EF4-FFF2-40B4-BE49-F238E27FC236}">
-                <a16:creationId xmlns:a16="http://schemas.microsoft.com/office/drawing/2014/main" id="{126EB52B-C181-4ACE-8C44-51718BA0DAA7}"/>
+                <a16:creationId xmlns:a16="http://schemas.microsoft.com/office/drawing/2014/main" id="{6D722372-5245-4C38-B6D8-25C3891B95D2}"/>
               </a:ext>
             </a:extLst>
           </p:cNvPr>
@@ -6818,7 +6818,7 @@
           <p:cNvPr id="19" name="f19">
             <a:extLst xmlns:a="http://schemas.openxmlformats.org/drawingml/2006/main">
               <a:ext uri="{FF2B5EF4-FFF2-40B4-BE49-F238E27FC236}">
-                <a16:creationId xmlns:a16="http://schemas.microsoft.com/office/drawing/2014/main" id="{168C3727-6796-4423-AC61-04FF336037CB}"/>
+                <a16:creationId xmlns:a16="http://schemas.microsoft.com/office/drawing/2014/main" id="{B199EFDA-42D0-426C-8E8A-26EDE8CA59A8}"/>
               </a:ext>
             </a:extLst>
           </p:cNvPr>
@@ -6977,7 +6977,7 @@
           <p:cNvPr id="20" name="f20">
             <a:extLst xmlns:a="http://schemas.openxmlformats.org/drawingml/2006/main">
               <a:ext uri="{FF2B5EF4-FFF2-40B4-BE49-F238E27FC236}">
-                <a16:creationId xmlns:a16="http://schemas.microsoft.com/office/drawing/2014/main" id="{8D08D468-6E5A-4D96-AE0A-8BA89B98F8A0}"/>
+                <a16:creationId xmlns:a16="http://schemas.microsoft.com/office/drawing/2014/main" id="{D81B06AD-5025-45B0-9724-0F9A36D4704E}"/>
               </a:ext>
             </a:extLst>
           </p:cNvPr>
@@ -7134,7 +7134,7 @@
     </p:spTree>
     <p:extLst>
       <p:ext uri="{BB962C8B-B14F-4D97-AF65-F5344CB8AC3E}">
-        <p14:creationId xmlns:p14="http://schemas.microsoft.com/office/powerpoint/2010/main" val="1744321142"/>
+        <p14:creationId xmlns:p14="http://schemas.microsoft.com/office/powerpoint/2010/main" val="656116278"/>
       </p:ext>
     </p:extLst>
   </p:cSld>
@@ -7165,7 +7165,7 @@
           <p:cNvPr id="24" name="f21">
             <a:extLst xmlns:a="http://schemas.openxmlformats.org/drawingml/2006/main">
               <a:ext uri="{FF2B5EF4-FFF2-40B4-BE49-F238E27FC236}">
-                <a16:creationId xmlns:a16="http://schemas.microsoft.com/office/drawing/2014/main" id="{62570958-586B-49CE-AC66-D9FE9DA67AE3}"/>
+                <a16:creationId xmlns:a16="http://schemas.microsoft.com/office/drawing/2014/main" id="{EE4F07C7-2534-4DEC-84F7-332AB758DD07}"/>
               </a:ext>
             </a:extLst>
           </p:cNvPr>
@@ -7196,7 +7196,7 @@
             <a:defPPr algn="l">
               <a:defRPr sz="1500" b="0">
                 <a:solidFill>
-                  <a:srgbClr val="4264D0"/>
+                  <a:srgbClr val="52627B"/>
                 </a:solidFill>
                 <a:latin typeface="Nimbus Sans"/>
                 <a:ea typeface="Nimbus Sans"/>
@@ -7206,7 +7206,7 @@
             <a:lvl1pPr algn="l">
               <a:defRPr sz="1500" b="0">
                 <a:solidFill>
-                  <a:srgbClr val="4264D0"/>
+                  <a:srgbClr val="52627B"/>
                 </a:solidFill>
                 <a:latin typeface="Nimbus Sans"/>
                 <a:ea typeface="Nimbus Sans"/>
@@ -7216,7 +7216,7 @@
             <a:lvl2pPr algn="l">
               <a:defRPr sz="1500" b="0">
                 <a:solidFill>
-                  <a:srgbClr val="4264D0"/>
+                  <a:srgbClr val="52627B"/>
                 </a:solidFill>
                 <a:latin typeface="Nimbus Sans"/>
                 <a:ea typeface="Nimbus Sans"/>
@@ -7226,7 +7226,7 @@
             <a:lvl3pPr algn="l">
               <a:defRPr sz="1500" b="0">
                 <a:solidFill>
-                  <a:srgbClr val="4264D0"/>
+                  <a:srgbClr val="52627B"/>
                 </a:solidFill>
                 <a:latin typeface="Nimbus Sans"/>
                 <a:ea typeface="Nimbus Sans"/>
@@ -7236,7 +7236,7 @@
             <a:lvl4pPr algn="l">
               <a:defRPr sz="1500" b="0">
                 <a:solidFill>
-                  <a:srgbClr val="4264D0"/>
+                  <a:srgbClr val="52627B"/>
                 </a:solidFill>
                 <a:latin typeface="Nimbus Sans"/>
                 <a:ea typeface="Nimbus Sans"/>
@@ -7246,7 +7246,7 @@
             <a:lvl5pPr algn="l">
               <a:defRPr sz="1500" b="0">
                 <a:solidFill>
-                  <a:srgbClr val="4264D0"/>
+                  <a:srgbClr val="52627B"/>
                 </a:solidFill>
                 <a:latin typeface="Nimbus Sans"/>
                 <a:ea typeface="Nimbus Sans"/>
@@ -7256,7 +7256,7 @@
             <a:lvl6pPr algn="l">
               <a:defRPr sz="1500" b="0">
                 <a:solidFill>
-                  <a:srgbClr val="4264D0"/>
+                  <a:srgbClr val="52627B"/>
                 </a:solidFill>
                 <a:latin typeface="Nimbus Sans"/>
                 <a:ea typeface="Nimbus Sans"/>
@@ -7266,7 +7266,7 @@
             <a:lvl7pPr algn="l">
               <a:defRPr sz="1500" b="0">
                 <a:solidFill>
-                  <a:srgbClr val="4264D0"/>
+                  <a:srgbClr val="52627B"/>
                 </a:solidFill>
                 <a:latin typeface="Nimbus Sans"/>
                 <a:ea typeface="Nimbus Sans"/>
@@ -7276,7 +7276,7 @@
             <a:lvl8pPr algn="l">
               <a:defRPr sz="1500" b="0">
                 <a:solidFill>
-                  <a:srgbClr val="4264D0"/>
+                  <a:srgbClr val="52627B"/>
                 </a:solidFill>
                 <a:latin typeface="Nimbus Sans"/>
                 <a:ea typeface="Nimbus Sans"/>
@@ -7286,7 +7286,7 @@
             <a:lvl9pPr algn="l">
               <a:defRPr sz="1500" b="0">
                 <a:solidFill>
-                  <a:srgbClr val="4264D0"/>
+                  <a:srgbClr val="52627B"/>
                 </a:solidFill>
                 <a:latin typeface="Nimbus Sans"/>
                 <a:ea typeface="Nimbus Sans"/>
@@ -7298,7 +7298,7 @@
             <a:pPr algn="l">
               <a:defRPr sz="1500" b="0">
                 <a:solidFill>
-                  <a:srgbClr val="4264D0"/>
+                  <a:srgbClr val="52627B"/>
                 </a:solidFill>
                 <a:latin typeface="Nimbus Sans"/>
                 <a:ea typeface="Nimbus Sans"/>
@@ -7308,7 +7308,7 @@
             <a:r>
               <a:rPr sz="1500" b="0">
                 <a:solidFill>
-                  <a:srgbClr val="4264D0"/>
+                  <a:srgbClr val="52627B"/>
                 </a:solidFill>
                 <a:latin typeface="Nimbus Sans"/>
                 <a:ea typeface="Nimbus Sans"/>
@@ -7324,7 +7324,7 @@
           <p:cNvPr id="2" name="f22">
             <a:extLst xmlns:a="http://schemas.openxmlformats.org/drawingml/2006/main">
               <a:ext uri="{FF2B5EF4-FFF2-40B4-BE49-F238E27FC236}">
-                <a16:creationId xmlns:a16="http://schemas.microsoft.com/office/drawing/2014/main" id="{2A7D9506-8F4C-41F4-BC01-22FDC6491284}"/>
+                <a16:creationId xmlns:a16="http://schemas.microsoft.com/office/drawing/2014/main" id="{1B81CBB5-11A0-4A34-B33F-E9E38469EE57}"/>
               </a:ext>
             </a:extLst>
           </p:cNvPr>
@@ -7483,7 +7483,7 @@
           <p:cNvPr id="3" name="f23">
             <a:extLst xmlns:a="http://schemas.openxmlformats.org/drawingml/2006/main">
               <a:ext uri="{FF2B5EF4-FFF2-40B4-BE49-F238E27FC236}">
-                <a16:creationId xmlns:a16="http://schemas.microsoft.com/office/drawing/2014/main" id="{60AB98BD-4B1D-4427-A612-9BECFB6E65D3}"/>
+                <a16:creationId xmlns:a16="http://schemas.microsoft.com/office/drawing/2014/main" id="{C7F02DD1-CBD3-4CBE-89BE-143B21199990}"/>
               </a:ext>
             </a:extLst>
           </p:cNvPr>
@@ -7642,7 +7642,7 @@
           <p:cNvPr id="4" name="f24">
             <a:extLst xmlns:a="http://schemas.openxmlformats.org/drawingml/2006/main">
               <a:ext uri="{FF2B5EF4-FFF2-40B4-BE49-F238E27FC236}">
-                <a16:creationId xmlns:a16="http://schemas.microsoft.com/office/drawing/2014/main" id="{94A914AD-9E9F-4305-9EFD-89A4CD54F67E}"/>
+                <a16:creationId xmlns:a16="http://schemas.microsoft.com/office/drawing/2014/main" id="{1FABB5DB-BFA5-422A-978D-B80C3FBCC1B0}"/>
               </a:ext>
             </a:extLst>
           </p:cNvPr>
@@ -7654,7 +7654,7 @@
         <p:spPr>
           <a:xfrm xmlns:a="http://schemas.openxmlformats.org/drawingml/2006/main">
             <a:off x="1066800" y="2000250"/>
-            <a:ext cx="13106400" cy="438150"/>
+            <a:ext cx="13106400" cy="704850"/>
           </a:xfrm>
           <a:prstGeom xmlns:a="http://schemas.openxmlformats.org/drawingml/2006/main" prst="rect">
             <a:avLst/>
@@ -7791,7 +7791,30 @@
                 <a:ea typeface="Nimbus Sans"/>
                 <a:cs typeface="Nimbus Sans"/>
               </a:rPr>
-              <a:t>Definire un requisito non garantisce che il software lo rispetti.</a:t>
+              <a:t>Definire un requisito di sicurezza non garantisce</a:t>
+            </a:r>
+          </a:p>
+          <a:p xmlns:a="http://schemas.openxmlformats.org/drawingml/2006/main">
+            <a:pPr algn="l">
+              <a:defRPr sz="2025" b="0">
+                <a:solidFill>
+                  <a:srgbClr val="52627B"/>
+                </a:solidFill>
+                <a:latin typeface="Nimbus Sans"/>
+                <a:ea typeface="Nimbus Sans"/>
+                <a:cs typeface="Nimbus Sans"/>
+              </a:defRPr>
+            </a:pPr>
+            <a:r>
+              <a:rPr sz="2025" b="0">
+                <a:solidFill>
+                  <a:srgbClr val="52627B"/>
+                </a:solidFill>
+                <a:latin typeface="Nimbus Sans"/>
+                <a:ea typeface="Nimbus Sans"/>
+                <a:cs typeface="Nimbus Sans"/>
+              </a:rPr>
+              <a:t>che venga rispettato.</a:t>
             </a:r>
           </a:p>
         </p:txBody>
@@ -7801,7 +7824,7 @@
           <p:cNvPr id="5" name="f25">
             <a:extLst xmlns:a="http://schemas.openxmlformats.org/drawingml/2006/main">
               <a:ext uri="{FF2B5EF4-FFF2-40B4-BE49-F238E27FC236}">
-                <a16:creationId xmlns:a16="http://schemas.microsoft.com/office/drawing/2014/main" id="{62EACF9A-C57B-4FDA-B1FE-2EA240401595}"/>
+                <a16:creationId xmlns:a16="http://schemas.microsoft.com/office/drawing/2014/main" id="{ECB45CF5-FD6A-446E-80B7-F4DE4D345F38}"/>
               </a:ext>
             </a:extLst>
           </p:cNvPr>
@@ -7960,7 +7983,7 @@
           <p:cNvPr id="6" name="f26">
             <a:extLst xmlns:a="http://schemas.openxmlformats.org/drawingml/2006/main">
               <a:ext uri="{FF2B5EF4-FFF2-40B4-BE49-F238E27FC236}">
-                <a16:creationId xmlns:a16="http://schemas.microsoft.com/office/drawing/2014/main" id="{489BFE3A-6297-49CC-9E8B-3CC7D08E4527}"/>
+                <a16:creationId xmlns:a16="http://schemas.microsoft.com/office/drawing/2014/main" id="{8C047153-FC70-4E7C-8FD4-450175CCB875}"/>
               </a:ext>
             </a:extLst>
           </p:cNvPr>
@@ -8119,7 +8142,7 @@
           <p:cNvPr id="7" name="f27">
             <a:extLst xmlns:a="http://schemas.openxmlformats.org/drawingml/2006/main">
               <a:ext uri="{FF2B5EF4-FFF2-40B4-BE49-F238E27FC236}">
-                <a16:creationId xmlns:a16="http://schemas.microsoft.com/office/drawing/2014/main" id="{4574B24D-E1BC-4077-99C0-0CA5F409F155}"/>
+                <a16:creationId xmlns:a16="http://schemas.microsoft.com/office/drawing/2014/main" id="{3B30028B-CECE-41E3-AB3E-1D6767777716}"/>
               </a:ext>
             </a:extLst>
           </p:cNvPr>
@@ -8154,7 +8177,7 @@
           <p:cNvPr id="8" name="f28">
             <a:extLst xmlns:a="http://schemas.openxmlformats.org/drawingml/2006/main">
               <a:ext uri="{FF2B5EF4-FFF2-40B4-BE49-F238E27FC236}">
-                <a16:creationId xmlns:a16="http://schemas.microsoft.com/office/drawing/2014/main" id="{F7F46016-5E75-49CB-B3FE-6BC6B8C491DC}"/>
+                <a16:creationId xmlns:a16="http://schemas.microsoft.com/office/drawing/2014/main" id="{B651D717-EA02-4D25-9C10-184A823F19B4}"/>
               </a:ext>
             </a:extLst>
           </p:cNvPr>
@@ -8185,7 +8208,7 @@
           <p:cNvPr id="9" name="f29">
             <a:extLst xmlns:a="http://schemas.openxmlformats.org/drawingml/2006/main">
               <a:ext uri="{FF2B5EF4-FFF2-40B4-BE49-F238E27FC236}">
-                <a16:creationId xmlns:a16="http://schemas.microsoft.com/office/drawing/2014/main" id="{8B4F4516-2375-42FB-8045-089EB4CE7899}"/>
+                <a16:creationId xmlns:a16="http://schemas.microsoft.com/office/drawing/2014/main" id="{707171A7-CC45-40E2-B5C8-E061F0DFDA38}"/>
               </a:ext>
             </a:extLst>
           </p:cNvPr>
@@ -8216,7 +8239,7 @@
           <p:cNvPr id="10" name="f30">
             <a:extLst xmlns:a="http://schemas.openxmlformats.org/drawingml/2006/main">
               <a:ext uri="{FF2B5EF4-FFF2-40B4-BE49-F238E27FC236}">
-                <a16:creationId xmlns:a16="http://schemas.microsoft.com/office/drawing/2014/main" id="{08A53876-B2CA-42AB-A77D-8B4FDDB37115}"/>
+                <a16:creationId xmlns:a16="http://schemas.microsoft.com/office/drawing/2014/main" id="{6222371B-7084-4795-8174-548EEA63E3B3}"/>
               </a:ext>
             </a:extLst>
           </p:cNvPr>
@@ -8247,7 +8270,7 @@
           <p:cNvPr id="11" name="f31">
             <a:extLst xmlns:a="http://schemas.openxmlformats.org/drawingml/2006/main">
               <a:ext uri="{FF2B5EF4-FFF2-40B4-BE49-F238E27FC236}">
-                <a16:creationId xmlns:a16="http://schemas.microsoft.com/office/drawing/2014/main" id="{D68EFDFF-8C6C-4230-BFCF-73F0D42E1345}"/>
+                <a16:creationId xmlns:a16="http://schemas.microsoft.com/office/drawing/2014/main" id="{0AA83926-304D-4D87-96B8-C2AE8FB73C3D}"/>
               </a:ext>
             </a:extLst>
           </p:cNvPr>
@@ -8282,7 +8305,7 @@
           <p:cNvPr id="12" name="f32">
             <a:extLst xmlns:a="http://schemas.openxmlformats.org/drawingml/2006/main">
               <a:ext uri="{FF2B5EF4-FFF2-40B4-BE49-F238E27FC236}">
-                <a16:creationId xmlns:a16="http://schemas.microsoft.com/office/drawing/2014/main" id="{391A96F9-D2DD-400F-8F23-75AD2B92F673}"/>
+                <a16:creationId xmlns:a16="http://schemas.microsoft.com/office/drawing/2014/main" id="{C049790A-D613-41A6-BA80-02774A54BAE3}"/>
               </a:ext>
             </a:extLst>
           </p:cNvPr>
@@ -8313,7 +8336,7 @@
           <p:cNvPr id="13" name="f33">
             <a:extLst xmlns:a="http://schemas.openxmlformats.org/drawingml/2006/main">
               <a:ext uri="{FF2B5EF4-FFF2-40B4-BE49-F238E27FC236}">
-                <a16:creationId xmlns:a16="http://schemas.microsoft.com/office/drawing/2014/main" id="{EDE5CA66-8256-424F-8DAC-05E8460DFE61}"/>
+                <a16:creationId xmlns:a16="http://schemas.microsoft.com/office/drawing/2014/main" id="{A9247DF6-073F-475E-A694-09CEAB80B75A}"/>
               </a:ext>
             </a:extLst>
           </p:cNvPr>
@@ -8346,7 +8369,7 @@
           <p:cNvPr id="14" name="f34">
             <a:extLst xmlns:a="http://schemas.openxmlformats.org/drawingml/2006/main">
               <a:ext uri="{FF2B5EF4-FFF2-40B4-BE49-F238E27FC236}">
-                <a16:creationId xmlns:a16="http://schemas.microsoft.com/office/drawing/2014/main" id="{52632440-2C33-44D7-B92E-5942F7A10A17}"/>
+                <a16:creationId xmlns:a16="http://schemas.microsoft.com/office/drawing/2014/main" id="{86616814-FB75-4C92-960A-6F54597D67DF}"/>
               </a:ext>
             </a:extLst>
           </p:cNvPr>
@@ -8379,7 +8402,7 @@
           <p:cNvPr id="15" name="f35">
             <a:extLst xmlns:a="http://schemas.openxmlformats.org/drawingml/2006/main">
               <a:ext uri="{FF2B5EF4-FFF2-40B4-BE49-F238E27FC236}">
-                <a16:creationId xmlns:a16="http://schemas.microsoft.com/office/drawing/2014/main" id="{6C7DB64C-35A5-4704-AD66-E540BDC4675D}"/>
+                <a16:creationId xmlns:a16="http://schemas.microsoft.com/office/drawing/2014/main" id="{B8425C6B-BED0-41E8-9830-881F5C641680}"/>
               </a:ext>
             </a:extLst>
           </p:cNvPr>
@@ -8412,7 +8435,7 @@
           <p:cNvPr id="16" name="f36">
             <a:extLst xmlns:a="http://schemas.openxmlformats.org/drawingml/2006/main">
               <a:ext uri="{FF2B5EF4-FFF2-40B4-BE49-F238E27FC236}">
-                <a16:creationId xmlns:a16="http://schemas.microsoft.com/office/drawing/2014/main" id="{9F414B2A-5A93-45E2-AE5A-45B2F94E4B6F}"/>
+                <a16:creationId xmlns:a16="http://schemas.microsoft.com/office/drawing/2014/main" id="{86BACB30-64B9-4CB5-A554-E792E518D7B4}"/>
               </a:ext>
             </a:extLst>
           </p:cNvPr>
@@ -8571,7 +8594,7 @@
           <p:cNvPr id="17" name="f37">
             <a:extLst xmlns:a="http://schemas.openxmlformats.org/drawingml/2006/main">
               <a:ext uri="{FF2B5EF4-FFF2-40B4-BE49-F238E27FC236}">
-                <a16:creationId xmlns:a16="http://schemas.microsoft.com/office/drawing/2014/main" id="{1C52070E-AF6A-4F18-907C-CA4C7B98AE99}"/>
+                <a16:creationId xmlns:a16="http://schemas.microsoft.com/office/drawing/2014/main" id="{385596BE-6E4A-42CD-996B-2D030447A1FD}"/>
               </a:ext>
             </a:extLst>
           </p:cNvPr>
@@ -8602,7 +8625,7 @@
           <p:cNvPr id="18" name="f38">
             <a:extLst xmlns:a="http://schemas.openxmlformats.org/drawingml/2006/main">
               <a:ext uri="{FF2B5EF4-FFF2-40B4-BE49-F238E27FC236}">
-                <a16:creationId xmlns:a16="http://schemas.microsoft.com/office/drawing/2014/main" id="{FDC89246-E971-4A38-9609-50FF2DFA7C89}"/>
+                <a16:creationId xmlns:a16="http://schemas.microsoft.com/office/drawing/2014/main" id="{99EEB5F3-A0E4-4D05-885A-45B67A937DBA}"/>
               </a:ext>
             </a:extLst>
           </p:cNvPr>
@@ -8633,7 +8656,7 @@
           <p:cNvPr id="19" name="f39">
             <a:extLst xmlns:a="http://schemas.openxmlformats.org/drawingml/2006/main">
               <a:ext uri="{FF2B5EF4-FFF2-40B4-BE49-F238E27FC236}">
-                <a16:creationId xmlns:a16="http://schemas.microsoft.com/office/drawing/2014/main" id="{9270F574-5A2B-4DA2-8830-50A61AC612AB}"/>
+                <a16:creationId xmlns:a16="http://schemas.microsoft.com/office/drawing/2014/main" id="{93C89A8F-92E1-465C-80BE-229130C2BAEF}"/>
               </a:ext>
             </a:extLst>
           </p:cNvPr>
@@ -8668,7 +8691,7 @@
           <p:cNvPr id="20" name="f40">
             <a:extLst xmlns:a="http://schemas.openxmlformats.org/drawingml/2006/main">
               <a:ext uri="{FF2B5EF4-FFF2-40B4-BE49-F238E27FC236}">
-                <a16:creationId xmlns:a16="http://schemas.microsoft.com/office/drawing/2014/main" id="{C56D62E3-6A8C-402F-A76A-73AC4B05F679}"/>
+                <a16:creationId xmlns:a16="http://schemas.microsoft.com/office/drawing/2014/main" id="{2F19A0F2-0040-48F3-8084-3423B3BB6F43}"/>
               </a:ext>
             </a:extLst>
           </p:cNvPr>
@@ -8850,7 +8873,7 @@
           <p:cNvPr id="21" name="f41">
             <a:extLst xmlns:a="http://schemas.openxmlformats.org/drawingml/2006/main">
               <a:ext uri="{FF2B5EF4-FFF2-40B4-BE49-F238E27FC236}">
-                <a16:creationId xmlns:a16="http://schemas.microsoft.com/office/drawing/2014/main" id="{8F8801BB-EC7E-4E4E-954E-CF96CD0AACF7}"/>
+                <a16:creationId xmlns:a16="http://schemas.microsoft.com/office/drawing/2014/main" id="{4C6A8E9A-9FC0-454B-84BA-CD8EBF630B3E}"/>
               </a:ext>
             </a:extLst>
           </p:cNvPr>
@@ -9032,7 +9055,7 @@
           <p:cNvPr id="22" name="f42">
             <a:extLst xmlns:a="http://schemas.openxmlformats.org/drawingml/2006/main">
               <a:ext uri="{FF2B5EF4-FFF2-40B4-BE49-F238E27FC236}">
-                <a16:creationId xmlns:a16="http://schemas.microsoft.com/office/drawing/2014/main" id="{C93B46A9-9CFB-497B-A138-15387DF619E2}"/>
+                <a16:creationId xmlns:a16="http://schemas.microsoft.com/office/drawing/2014/main" id="{DB0779A4-76A9-4656-8CB7-C8C37EDA5E5F}"/>
               </a:ext>
             </a:extLst>
           </p:cNvPr>
@@ -9191,7 +9214,7 @@
           <p:cNvPr id="23" name="f43">
             <a:extLst xmlns:a="http://schemas.openxmlformats.org/drawingml/2006/main">
               <a:ext uri="{FF2B5EF4-FFF2-40B4-BE49-F238E27FC236}">
-                <a16:creationId xmlns:a16="http://schemas.microsoft.com/office/drawing/2014/main" id="{32A52FA9-65B0-425E-A8BF-C5EB7A81A32B}"/>
+                <a16:creationId xmlns:a16="http://schemas.microsoft.com/office/drawing/2014/main" id="{795C192E-8F8B-4ED6-B0BE-D09D06F269ED}"/>
               </a:ext>
             </a:extLst>
           </p:cNvPr>
@@ -9348,7 +9371,7 @@
     </p:spTree>
     <p:extLst>
       <p:ext uri="{BB962C8B-B14F-4D97-AF65-F5344CB8AC3E}">
-        <p14:creationId xmlns:p14="http://schemas.microsoft.com/office/powerpoint/2010/main" val="2063352064"/>
+        <p14:creationId xmlns:p14="http://schemas.microsoft.com/office/powerpoint/2010/main" val="984787665"/>
       </p:ext>
     </p:extLst>
   </p:cSld>
@@ -9379,7 +9402,7 @@
           <p:cNvPr id="24" name="">
             <a:extLst xmlns:a="http://schemas.openxmlformats.org/drawingml/2006/main">
               <a:ext uri="{FF2B5EF4-FFF2-40B4-BE49-F238E27FC236}">
-                <a16:creationId xmlns:a16="http://schemas.microsoft.com/office/drawing/2014/main" id="{2C4DB6D7-DE71-4861-92DB-CF6A79693E7E}"/>
+                <a16:creationId xmlns:a16="http://schemas.microsoft.com/office/drawing/2014/main" id="{AB0F512A-5E18-4BAC-BB50-34FAA2FCDEB6}"/>
               </a:ext>
             </a:extLst>
           </p:cNvPr>
@@ -9389,7 +9412,7 @@
           <p:nvPr/>
         </p:nvPicPr>
         <p:blipFill>
-          <a:blip xmlns:r="http://schemas.openxmlformats.org/officeDocument/2006/relationships" xmlns:a="http://schemas.openxmlformats.org/drawingml/2006/main" r:embed="Ra8e0551fe56e43f0"/>
+          <a:blip xmlns:r="http://schemas.openxmlformats.org/officeDocument/2006/relationships" xmlns:a="http://schemas.openxmlformats.org/drawingml/2006/main" r:embed="Rfa1b5a99505b4078"/>
           <a:stretch xmlns:a="http://schemas.openxmlformats.org/drawingml/2006/main"/>
         </p:blipFill>
         <p:spPr>
@@ -9407,7 +9430,7 @@
           <p:cNvPr id="2" name="f45">
             <a:extLst xmlns:a="http://schemas.openxmlformats.org/drawingml/2006/main">
               <a:ext uri="{FF2B5EF4-FFF2-40B4-BE49-F238E27FC236}">
-                <a16:creationId xmlns:a16="http://schemas.microsoft.com/office/drawing/2014/main" id="{7DEE054C-D21A-4FD2-A63B-0D1339E0F1C7}"/>
+                <a16:creationId xmlns:a16="http://schemas.microsoft.com/office/drawing/2014/main" id="{7BE0F338-B1A1-4A5A-AB1B-F84A73C5AE61}"/>
               </a:ext>
             </a:extLst>
           </p:cNvPr>
@@ -9566,7 +9589,7 @@
           <p:cNvPr id="3" name="f46">
             <a:extLst xmlns:a="http://schemas.openxmlformats.org/drawingml/2006/main">
               <a:ext uri="{FF2B5EF4-FFF2-40B4-BE49-F238E27FC236}">
-                <a16:creationId xmlns:a16="http://schemas.microsoft.com/office/drawing/2014/main" id="{9EA49102-D1D6-46A5-A87E-20637AACB8AA}"/>
+                <a16:creationId xmlns:a16="http://schemas.microsoft.com/office/drawing/2014/main" id="{148AA782-23A6-47FE-8D5F-1C6554B602C5}"/>
               </a:ext>
             </a:extLst>
           </p:cNvPr>
@@ -9725,7 +9748,7 @@
           <p:cNvPr id="4" name="f47">
             <a:extLst xmlns:a="http://schemas.openxmlformats.org/drawingml/2006/main">
               <a:ext uri="{FF2B5EF4-FFF2-40B4-BE49-F238E27FC236}">
-                <a16:creationId xmlns:a16="http://schemas.microsoft.com/office/drawing/2014/main" id="{7B484570-69BD-4257-A7CD-0C4C05B66B93}"/>
+                <a16:creationId xmlns:a16="http://schemas.microsoft.com/office/drawing/2014/main" id="{AE824E0E-864A-420E-B720-82FD1A629BDB}"/>
               </a:ext>
             </a:extLst>
           </p:cNvPr>
@@ -9737,7 +9760,7 @@
         <p:spPr>
           <a:xfrm xmlns:a="http://schemas.openxmlformats.org/drawingml/2006/main">
             <a:off x="1066800" y="1163765"/>
-            <a:ext cx="2631877" cy="694373"/>
+            <a:ext cx="7395418" cy="694373"/>
           </a:xfrm>
           <a:prstGeom xmlns:a="http://schemas.openxmlformats.org/drawingml/2006/main" prst="rect">
             <a:avLst/>
@@ -9874,7 +9897,7 @@
                 <a:ea typeface="Nimbus Sans"/>
                 <a:cs typeface="Nimbus Sans"/>
               </a:rPr>
-              <a:t>La rete 5G</a:t>
+              <a:t>La Security Assurance nel 5G</a:t>
             </a:r>
           </a:p>
         </p:txBody>
@@ -9884,7 +9907,7 @@
           <p:cNvPr id="5" name="f48">
             <a:extLst xmlns:a="http://schemas.openxmlformats.org/drawingml/2006/main">
               <a:ext uri="{FF2B5EF4-FFF2-40B4-BE49-F238E27FC236}">
-                <a16:creationId xmlns:a16="http://schemas.microsoft.com/office/drawing/2014/main" id="{D322E0FB-73B9-4A7D-9EA4-3029204AE5A8}"/>
+                <a16:creationId xmlns:a16="http://schemas.microsoft.com/office/drawing/2014/main" id="{7DB7494D-22A0-40DF-9016-BCEABD4111CC}"/>
               </a:ext>
             </a:extLst>
           </p:cNvPr>
@@ -9896,7 +9919,7 @@
         <p:spPr>
           <a:xfrm xmlns:a="http://schemas.openxmlformats.org/drawingml/2006/main">
             <a:off x="1066800" y="1901095"/>
-            <a:ext cx="7205811" cy="347186"/>
+            <a:ext cx="6726734" cy="347186"/>
           </a:xfrm>
           <a:prstGeom xmlns:a="http://schemas.openxmlformats.org/drawingml/2006/main" prst="rect">
             <a:avLst/>
@@ -10033,7 +10056,7 @@
                 <a:ea typeface="Nimbus Sans"/>
                 <a:cs typeface="Nimbus Sans"/>
               </a:rPr>
-              <a:t>Le NF cooperano tramite protocolli e procedure standardizzati.</a:t>
+              <a:t>Nel 5G, la sicurezza riguarda anche le Network Functions,</a:t>
             </a:r>
           </a:p>
         </p:txBody>
@@ -10043,7 +10066,7 @@
           <p:cNvPr id="6" name="f49">
             <a:extLst xmlns:a="http://schemas.openxmlformats.org/drawingml/2006/main">
               <a:ext uri="{FF2B5EF4-FFF2-40B4-BE49-F238E27FC236}">
-                <a16:creationId xmlns:a16="http://schemas.microsoft.com/office/drawing/2014/main" id="{F03F0AC6-51F3-4BE9-8C8D-839816C438CE}"/>
+                <a16:creationId xmlns:a16="http://schemas.microsoft.com/office/drawing/2014/main" id="{D29580B1-BCC9-4877-99D0-8EA176E17A3B}"/>
               </a:ext>
             </a:extLst>
           </p:cNvPr>
@@ -10055,7 +10078,7 @@
         <p:spPr>
           <a:xfrm xmlns:a="http://schemas.openxmlformats.org/drawingml/2006/main">
             <a:off x="1066800" y="2263045"/>
-            <a:ext cx="9847511" cy="347186"/>
+            <a:ext cx="5375225" cy="347186"/>
           </a:xfrm>
           <a:prstGeom xmlns:a="http://schemas.openxmlformats.org/drawingml/2006/main" prst="rect">
             <a:avLst/>
@@ -10192,7 +10215,7 @@
                 <a:ea typeface="Nimbus Sans"/>
                 <a:cs typeface="Nimbus Sans"/>
               </a:rPr>
-              <a:t>Per valutare i criteri di sicurezza occorre quindi valutare le funzioni e le loro interazioni</a:t>
+              <a:t>componenti software che comunicano tra loro.</a:t>
             </a:r>
           </a:p>
         </p:txBody>
@@ -10202,7 +10225,7 @@
           <p:cNvPr id="7" name="f50">
             <a:extLst xmlns:a="http://schemas.openxmlformats.org/drawingml/2006/main">
               <a:ext uri="{FF2B5EF4-FFF2-40B4-BE49-F238E27FC236}">
-                <a16:creationId xmlns:a16="http://schemas.microsoft.com/office/drawing/2014/main" id="{948C47F3-A0D7-44B2-B7AD-C25786BC16F1}"/>
+                <a16:creationId xmlns:a16="http://schemas.microsoft.com/office/drawing/2014/main" id="{E7444635-587D-409B-A44E-0096A36AE6C7}"/>
               </a:ext>
             </a:extLst>
           </p:cNvPr>
@@ -10361,7 +10384,7 @@
           <p:cNvPr id="8" name="f51">
             <a:extLst xmlns:a="http://schemas.openxmlformats.org/drawingml/2006/main">
               <a:ext uri="{FF2B5EF4-FFF2-40B4-BE49-F238E27FC236}">
-                <a16:creationId xmlns:a16="http://schemas.microsoft.com/office/drawing/2014/main" id="{283AA079-1097-4BB9-8B45-C5A6F637E035}"/>
+                <a16:creationId xmlns:a16="http://schemas.microsoft.com/office/drawing/2014/main" id="{2D4D9C5C-9AF0-43A9-8A52-095AECEE14DA}"/>
               </a:ext>
             </a:extLst>
           </p:cNvPr>
@@ -10520,7 +10543,7 @@
           <p:cNvPr id="9" name="f52">
             <a:extLst xmlns:a="http://schemas.openxmlformats.org/drawingml/2006/main">
               <a:ext uri="{FF2B5EF4-FFF2-40B4-BE49-F238E27FC236}">
-                <a16:creationId xmlns:a16="http://schemas.microsoft.com/office/drawing/2014/main" id="{351A331E-C140-4EBA-8C0E-360F1B571F9A}"/>
+                <a16:creationId xmlns:a16="http://schemas.microsoft.com/office/drawing/2014/main" id="{251892E8-9C2A-4B07-982E-DF25AE7E2561}"/>
               </a:ext>
             </a:extLst>
           </p:cNvPr>
@@ -10679,7 +10702,7 @@
           <p:cNvPr id="10" name="f53">
             <a:extLst xmlns:a="http://schemas.openxmlformats.org/drawingml/2006/main">
               <a:ext uri="{FF2B5EF4-FFF2-40B4-BE49-F238E27FC236}">
-                <a16:creationId xmlns:a16="http://schemas.microsoft.com/office/drawing/2014/main" id="{F6D09079-909B-456D-8814-5EF2F8F1E1F3}"/>
+                <a16:creationId xmlns:a16="http://schemas.microsoft.com/office/drawing/2014/main" id="{2A99C243-091A-46A0-B640-0F20D59F535B}"/>
               </a:ext>
             </a:extLst>
           </p:cNvPr>
@@ -10838,7 +10861,7 @@
           <p:cNvPr id="11" name="f54">
             <a:extLst xmlns:a="http://schemas.openxmlformats.org/drawingml/2006/main">
               <a:ext uri="{FF2B5EF4-FFF2-40B4-BE49-F238E27FC236}">
-                <a16:creationId xmlns:a16="http://schemas.microsoft.com/office/drawing/2014/main" id="{92D3FCBE-06F2-4C5D-A530-A42E0504F0A5}"/>
+                <a16:creationId xmlns:a16="http://schemas.microsoft.com/office/drawing/2014/main" id="{2C9E162A-EA22-4004-8636-4265920E1051}"/>
               </a:ext>
             </a:extLst>
           </p:cNvPr>
@@ -10997,7 +11020,7 @@
           <p:cNvPr id="12" name="f55">
             <a:extLst xmlns:a="http://schemas.openxmlformats.org/drawingml/2006/main">
               <a:ext uri="{FF2B5EF4-FFF2-40B4-BE49-F238E27FC236}">
-                <a16:creationId xmlns:a16="http://schemas.microsoft.com/office/drawing/2014/main" id="{AA86459E-F1A0-427E-916C-A3B4298A018A}"/>
+                <a16:creationId xmlns:a16="http://schemas.microsoft.com/office/drawing/2014/main" id="{B7FB1F67-134E-4B39-9035-7C11DA0B8228}"/>
               </a:ext>
             </a:extLst>
           </p:cNvPr>
@@ -11156,7 +11179,7 @@
           <p:cNvPr id="13" name="f56">
             <a:extLst xmlns:a="http://schemas.openxmlformats.org/drawingml/2006/main">
               <a:ext uri="{FF2B5EF4-FFF2-40B4-BE49-F238E27FC236}">
-                <a16:creationId xmlns:a16="http://schemas.microsoft.com/office/drawing/2014/main" id="{C5FCB904-A75F-485A-B59C-5BAD3A850B85}"/>
+                <a16:creationId xmlns:a16="http://schemas.microsoft.com/office/drawing/2014/main" id="{00A237A0-E777-4F86-87B9-301651356401}"/>
               </a:ext>
             </a:extLst>
           </p:cNvPr>
@@ -11315,7 +11338,7 @@
           <p:cNvPr id="14" name="f57">
             <a:extLst xmlns:a="http://schemas.openxmlformats.org/drawingml/2006/main">
               <a:ext uri="{FF2B5EF4-FFF2-40B4-BE49-F238E27FC236}">
-                <a16:creationId xmlns:a16="http://schemas.microsoft.com/office/drawing/2014/main" id="{BE5AF7C9-3C5D-42D0-86C7-4E0BF2098B43}"/>
+                <a16:creationId xmlns:a16="http://schemas.microsoft.com/office/drawing/2014/main" id="{51083CA8-F41C-4651-9C67-0843A90C04C1}"/>
               </a:ext>
             </a:extLst>
           </p:cNvPr>
@@ -11474,7 +11497,7 @@
           <p:cNvPr id="15" name="f58">
             <a:extLst xmlns:a="http://schemas.openxmlformats.org/drawingml/2006/main">
               <a:ext uri="{FF2B5EF4-FFF2-40B4-BE49-F238E27FC236}">
-                <a16:creationId xmlns:a16="http://schemas.microsoft.com/office/drawing/2014/main" id="{ED5CB014-FFAF-47A6-BAA4-FB9689BEAF34}"/>
+                <a16:creationId xmlns:a16="http://schemas.microsoft.com/office/drawing/2014/main" id="{213B8526-18FA-413A-8863-69B266763F28}"/>
               </a:ext>
             </a:extLst>
           </p:cNvPr>
@@ -11633,7 +11656,7 @@
           <p:cNvPr id="16" name="f59">
             <a:extLst xmlns:a="http://schemas.openxmlformats.org/drawingml/2006/main">
               <a:ext uri="{FF2B5EF4-FFF2-40B4-BE49-F238E27FC236}">
-                <a16:creationId xmlns:a16="http://schemas.microsoft.com/office/drawing/2014/main" id="{CFE5807F-3820-40EE-BFFE-700390D954C2}"/>
+                <a16:creationId xmlns:a16="http://schemas.microsoft.com/office/drawing/2014/main" id="{419C9AED-3A3B-45B2-A246-9A28EE2E01E5}"/>
               </a:ext>
             </a:extLst>
           </p:cNvPr>
@@ -11792,7 +11815,7 @@
           <p:cNvPr id="17" name="f60">
             <a:extLst xmlns:a="http://schemas.openxmlformats.org/drawingml/2006/main">
               <a:ext uri="{FF2B5EF4-FFF2-40B4-BE49-F238E27FC236}">
-                <a16:creationId xmlns:a16="http://schemas.microsoft.com/office/drawing/2014/main" id="{4E8953DA-2692-4957-AD4D-DD2C7195109E}"/>
+                <a16:creationId xmlns:a16="http://schemas.microsoft.com/office/drawing/2014/main" id="{E2761B7E-DB4E-43DA-BAA7-31D2E91ABA05}"/>
               </a:ext>
             </a:extLst>
           </p:cNvPr>
@@ -11951,7 +11974,7 @@
           <p:cNvPr id="18" name="f61">
             <a:extLst xmlns:a="http://schemas.openxmlformats.org/drawingml/2006/main">
               <a:ext uri="{FF2B5EF4-FFF2-40B4-BE49-F238E27FC236}">
-                <a16:creationId xmlns:a16="http://schemas.microsoft.com/office/drawing/2014/main" id="{34C61DA7-FDE8-4D55-885F-065894E3E90D}"/>
+                <a16:creationId xmlns:a16="http://schemas.microsoft.com/office/drawing/2014/main" id="{6A87CA0E-B6A5-497F-814D-83C8A92F1671}"/>
               </a:ext>
             </a:extLst>
           </p:cNvPr>
@@ -12110,7 +12133,7 @@
           <p:cNvPr id="19" name="f62">
             <a:extLst xmlns:a="http://schemas.openxmlformats.org/drawingml/2006/main">
               <a:ext uri="{FF2B5EF4-FFF2-40B4-BE49-F238E27FC236}">
-                <a16:creationId xmlns:a16="http://schemas.microsoft.com/office/drawing/2014/main" id="{B010F025-ACC8-4FAD-8D19-A9D246E61B38}"/>
+                <a16:creationId xmlns:a16="http://schemas.microsoft.com/office/drawing/2014/main" id="{90ACB01F-6B2B-4206-8B94-532802E3AEEA}"/>
               </a:ext>
             </a:extLst>
           </p:cNvPr>
@@ -12269,7 +12292,7 @@
           <p:cNvPr id="20" name="f63">
             <a:extLst xmlns:a="http://schemas.openxmlformats.org/drawingml/2006/main">
               <a:ext uri="{FF2B5EF4-FFF2-40B4-BE49-F238E27FC236}">
-                <a16:creationId xmlns:a16="http://schemas.microsoft.com/office/drawing/2014/main" id="{1501B4AD-D129-4162-A247-1D34F7DD4B78}"/>
+                <a16:creationId xmlns:a16="http://schemas.microsoft.com/office/drawing/2014/main" id="{ACD8190E-AAF9-4A81-952C-A56BD3EC8740}"/>
               </a:ext>
             </a:extLst>
           </p:cNvPr>
@@ -12428,7 +12451,7 @@
           <p:cNvPr id="21" name="f64">
             <a:extLst xmlns:a="http://schemas.openxmlformats.org/drawingml/2006/main">
               <a:ext uri="{FF2B5EF4-FFF2-40B4-BE49-F238E27FC236}">
-                <a16:creationId xmlns:a16="http://schemas.microsoft.com/office/drawing/2014/main" id="{CE87DE8C-57A5-4563-BF5F-636730F66967}"/>
+                <a16:creationId xmlns:a16="http://schemas.microsoft.com/office/drawing/2014/main" id="{16F835C2-9A98-48C0-A5DC-8EEF9BAB9ADB}"/>
               </a:ext>
             </a:extLst>
           </p:cNvPr>
@@ -12587,7 +12610,7 @@
           <p:cNvPr id="22" name="f65">
             <a:extLst xmlns:a="http://schemas.openxmlformats.org/drawingml/2006/main">
               <a:ext uri="{FF2B5EF4-FFF2-40B4-BE49-F238E27FC236}">
-                <a16:creationId xmlns:a16="http://schemas.microsoft.com/office/drawing/2014/main" id="{0964302F-17F8-4C62-ACC5-DE6AE8AA15C2}"/>
+                <a16:creationId xmlns:a16="http://schemas.microsoft.com/office/drawing/2014/main" id="{F733E88C-BB92-4110-97CE-06DD9AA5E501}"/>
               </a:ext>
             </a:extLst>
           </p:cNvPr>
@@ -12746,7 +12769,7 @@
           <p:cNvPr id="23" name="f66">
             <a:extLst xmlns:a="http://schemas.openxmlformats.org/drawingml/2006/main">
               <a:ext uri="{FF2B5EF4-FFF2-40B4-BE49-F238E27FC236}">
-                <a16:creationId xmlns:a16="http://schemas.microsoft.com/office/drawing/2014/main" id="{ED4880FF-DE58-4CB4-810D-39534E790385}"/>
+                <a16:creationId xmlns:a16="http://schemas.microsoft.com/office/drawing/2014/main" id="{CE558097-0493-4C58-8FE3-6A5408F7B34B}"/>
               </a:ext>
             </a:extLst>
           </p:cNvPr>
@@ -12903,7 +12926,7 @@
     </p:spTree>
     <p:extLst>
       <p:ext uri="{BB962C8B-B14F-4D97-AF65-F5344CB8AC3E}">
-        <p14:creationId xmlns:p14="http://schemas.microsoft.com/office/powerpoint/2010/main" val="113186871"/>
+        <p14:creationId xmlns:p14="http://schemas.microsoft.com/office/powerpoint/2010/main" val="1041079110"/>
       </p:ext>
     </p:extLst>
   </p:cSld>
@@ -12934,7 +12957,7 @@
           <p:cNvPr id="18" name="f67">
             <a:extLst xmlns:a="http://schemas.openxmlformats.org/drawingml/2006/main">
               <a:ext uri="{FF2B5EF4-FFF2-40B4-BE49-F238E27FC236}">
-                <a16:creationId xmlns:a16="http://schemas.microsoft.com/office/drawing/2014/main" id="{F682ED86-53DF-462C-A6F2-B840415A254C}"/>
+                <a16:creationId xmlns:a16="http://schemas.microsoft.com/office/drawing/2014/main" id="{882902BE-A316-467A-9FB0-13879BF73197}"/>
               </a:ext>
             </a:extLst>
           </p:cNvPr>
@@ -12965,7 +12988,7 @@
             <a:defPPr algn="l">
               <a:defRPr sz="1500" b="0">
                 <a:solidFill>
-                  <a:srgbClr val="4264D0"/>
+                  <a:srgbClr val="52627B"/>
                 </a:solidFill>
                 <a:latin typeface="Nimbus Sans"/>
                 <a:ea typeface="Nimbus Sans"/>
@@ -12975,7 +12998,7 @@
             <a:lvl1pPr algn="l">
               <a:defRPr sz="1500" b="0">
                 <a:solidFill>
-                  <a:srgbClr val="4264D0"/>
+                  <a:srgbClr val="52627B"/>
                 </a:solidFill>
                 <a:latin typeface="Nimbus Sans"/>
                 <a:ea typeface="Nimbus Sans"/>
@@ -12985,7 +13008,7 @@
             <a:lvl2pPr algn="l">
               <a:defRPr sz="1500" b="0">
                 <a:solidFill>
-                  <a:srgbClr val="4264D0"/>
+                  <a:srgbClr val="52627B"/>
                 </a:solidFill>
                 <a:latin typeface="Nimbus Sans"/>
                 <a:ea typeface="Nimbus Sans"/>
@@ -12995,7 +13018,7 @@
             <a:lvl3pPr algn="l">
               <a:defRPr sz="1500" b="0">
                 <a:solidFill>
-                  <a:srgbClr val="4264D0"/>
+                  <a:srgbClr val="52627B"/>
                 </a:solidFill>
                 <a:latin typeface="Nimbus Sans"/>
                 <a:ea typeface="Nimbus Sans"/>
@@ -13005,7 +13028,7 @@
             <a:lvl4pPr algn="l">
               <a:defRPr sz="1500" b="0">
                 <a:solidFill>
-                  <a:srgbClr val="4264D0"/>
+                  <a:srgbClr val="52627B"/>
                 </a:solidFill>
                 <a:latin typeface="Nimbus Sans"/>
                 <a:ea typeface="Nimbus Sans"/>
@@ -13015,7 +13038,7 @@
             <a:lvl5pPr algn="l">
               <a:defRPr sz="1500" b="0">
                 <a:solidFill>
-                  <a:srgbClr val="4264D0"/>
+                  <a:srgbClr val="52627B"/>
                 </a:solidFill>
                 <a:latin typeface="Nimbus Sans"/>
                 <a:ea typeface="Nimbus Sans"/>
@@ -13025,7 +13048,7 @@
             <a:lvl6pPr algn="l">
               <a:defRPr sz="1500" b="0">
                 <a:solidFill>
-                  <a:srgbClr val="4264D0"/>
+                  <a:srgbClr val="52627B"/>
                 </a:solidFill>
                 <a:latin typeface="Nimbus Sans"/>
                 <a:ea typeface="Nimbus Sans"/>
@@ -13035,7 +13058,7 @@
             <a:lvl7pPr algn="l">
               <a:defRPr sz="1500" b="0">
                 <a:solidFill>
-                  <a:srgbClr val="4264D0"/>
+                  <a:srgbClr val="52627B"/>
                 </a:solidFill>
                 <a:latin typeface="Nimbus Sans"/>
                 <a:ea typeface="Nimbus Sans"/>
@@ -13045,7 +13068,7 @@
             <a:lvl8pPr algn="l">
               <a:defRPr sz="1500" b="0">
                 <a:solidFill>
-                  <a:srgbClr val="4264D0"/>
+                  <a:srgbClr val="52627B"/>
                 </a:solidFill>
                 <a:latin typeface="Nimbus Sans"/>
                 <a:ea typeface="Nimbus Sans"/>
@@ -13055,7 +13078,7 @@
             <a:lvl9pPr algn="l">
               <a:defRPr sz="1500" b="0">
                 <a:solidFill>
-                  <a:srgbClr val="4264D0"/>
+                  <a:srgbClr val="52627B"/>
                 </a:solidFill>
                 <a:latin typeface="Nimbus Sans"/>
                 <a:ea typeface="Nimbus Sans"/>
@@ -13067,7 +13090,7 @@
             <a:pPr algn="l">
               <a:defRPr sz="1500" b="0">
                 <a:solidFill>
-                  <a:srgbClr val="4264D0"/>
+                  <a:srgbClr val="52627B"/>
                 </a:solidFill>
                 <a:latin typeface="Nimbus Sans"/>
                 <a:ea typeface="Nimbus Sans"/>
@@ -13077,13 +13100,13 @@
             <a:r>
               <a:rPr sz="1500" b="0">
                 <a:solidFill>
-                  <a:srgbClr val="4264D0"/>
+                  <a:srgbClr val="52627B"/>
                 </a:solidFill>
                 <a:latin typeface="Nimbus Sans"/>
                 <a:ea typeface="Nimbus Sans"/>
                 <a:cs typeface="Nimbus Sans"/>
               </a:rPr>
-              <a:t>1° CONTRIBUTO</a:t>
+              <a:t>CONTRIBUTI DELLA TESI</a:t>
             </a:r>
           </a:p>
         </p:txBody>
@@ -13093,7 +13116,7 @@
           <p:cNvPr id="2" name="f68">
             <a:extLst xmlns:a="http://schemas.openxmlformats.org/drawingml/2006/main">
               <a:ext uri="{FF2B5EF4-FFF2-40B4-BE49-F238E27FC236}">
-                <a16:creationId xmlns:a16="http://schemas.microsoft.com/office/drawing/2014/main" id="{5ACD5B2C-2D32-46A0-87F5-B9A539BE66F5}"/>
+                <a16:creationId xmlns:a16="http://schemas.microsoft.com/office/drawing/2014/main" id="{90C948FB-77FB-4F49-9B8B-A6A94DB350C8}"/>
               </a:ext>
             </a:extLst>
           </p:cNvPr>
@@ -13252,7 +13275,7 @@
           <p:cNvPr id="3" name="f69">
             <a:extLst xmlns:a="http://schemas.openxmlformats.org/drawingml/2006/main">
               <a:ext uri="{FF2B5EF4-FFF2-40B4-BE49-F238E27FC236}">
-                <a16:creationId xmlns:a16="http://schemas.microsoft.com/office/drawing/2014/main" id="{5B3B3CD2-8E00-4162-8223-0A55D9B84BB6}"/>
+                <a16:creationId xmlns:a16="http://schemas.microsoft.com/office/drawing/2014/main" id="{61A51454-21B0-4FE0-AD1F-EE46964CA83D}"/>
               </a:ext>
             </a:extLst>
           </p:cNvPr>
@@ -13408,10 +13431,10 @@
       </p:sp>
       <p:sp>
         <p:nvSpPr>
-          <p:cNvPr id="4" name="f70">
+          <p:cNvPr id="4" name="f72">
             <a:extLst xmlns:a="http://schemas.openxmlformats.org/drawingml/2006/main">
               <a:ext uri="{FF2B5EF4-FFF2-40B4-BE49-F238E27FC236}">
-                <a16:creationId xmlns:a16="http://schemas.microsoft.com/office/drawing/2014/main" id="{ABD488C5-CC21-4672-BC43-74A52DCBFE5D}"/>
+                <a16:creationId xmlns:a16="http://schemas.microsoft.com/office/drawing/2014/main" id="{BF5859FD-241F-4739-8380-1142F3FFE443}"/>
               </a:ext>
             </a:extLst>
           </p:cNvPr>
@@ -13423,7 +13446,7 @@
         <p:spPr>
           <a:xfrm xmlns:a="http://schemas.openxmlformats.org/drawingml/2006/main">
             <a:off x="1066800" y="2000250"/>
-            <a:ext cx="13106400" cy="438150"/>
+            <a:ext cx="13106400" cy="704850"/>
           </a:xfrm>
           <a:prstGeom xmlns:a="http://schemas.openxmlformats.org/drawingml/2006/main" prst="rect">
             <a:avLst/>
@@ -13560,17 +13583,40 @@
                 <a:ea typeface="Nimbus Sans"/>
                 <a:cs typeface="Nimbus Sans"/>
               </a:rPr>
-              <a:t>Un linguaggio per selezionare i messaggi e descrivere i criteri di verifica.</a:t>
+              <a:t>Il DSL permette di rappresentare queste operazioni</a:t>
+            </a:r>
+          </a:p>
+          <a:p xmlns:a="http://schemas.openxmlformats.org/drawingml/2006/main">
+            <a:pPr algn="l">
+              <a:defRPr sz="2025" b="0">
+                <a:solidFill>
+                  <a:srgbClr val="52627B"/>
+                </a:solidFill>
+                <a:latin typeface="Nimbus Sans"/>
+                <a:ea typeface="Nimbus Sans"/>
+                <a:cs typeface="Nimbus Sans"/>
+              </a:defRPr>
+            </a:pPr>
+            <a:r>
+              <a:rPr sz="2025" b="0">
+                <a:solidFill>
+                  <a:srgbClr val="52627B"/>
+                </a:solidFill>
+                <a:latin typeface="Nimbus Sans"/>
+                <a:ea typeface="Nimbus Sans"/>
+                <a:cs typeface="Nimbus Sans"/>
+              </a:rPr>
+              <a:t>attraverso regole riutilizzabili.</a:t>
             </a:r>
           </a:p>
         </p:txBody>
       </p:sp>
       <p:sp>
         <p:nvSpPr>
-          <p:cNvPr id="5" name="f103">
+          <p:cNvPr id="5" name="f105">
             <a:extLst xmlns:a="http://schemas.openxmlformats.org/drawingml/2006/main">
               <a:ext uri="{FF2B5EF4-FFF2-40B4-BE49-F238E27FC236}">
-                <a16:creationId xmlns:a16="http://schemas.microsoft.com/office/drawing/2014/main" id="{45A07D68-1995-4512-B38F-CAF620DF0480}"/>
+                <a16:creationId xmlns:a16="http://schemas.microsoft.com/office/drawing/2014/main" id="{6BE89582-A2F3-4ECA-9E67-8A3C2AD9246A}"/>
               </a:ext>
             </a:extLst>
           </p:cNvPr>
@@ -13726,10 +13772,10 @@
       </p:sp>
       <p:sp>
         <p:nvSpPr>
-          <p:cNvPr id="6" name="f104">
+          <p:cNvPr id="6" name="f106">
             <a:extLst xmlns:a="http://schemas.openxmlformats.org/drawingml/2006/main">
               <a:ext uri="{FF2B5EF4-FFF2-40B4-BE49-F238E27FC236}">
-                <a16:creationId xmlns:a16="http://schemas.microsoft.com/office/drawing/2014/main" id="{EF3C2E2F-E596-4E59-8CEB-72162625B8D2}"/>
+                <a16:creationId xmlns:a16="http://schemas.microsoft.com/office/drawing/2014/main" id="{F18789A4-E6B1-4B86-A42E-2F12A3D865FF}"/>
               </a:ext>
             </a:extLst>
           </p:cNvPr>
@@ -13740,12 +13786,12 @@
         </p:nvSpPr>
         <p:spPr>
           <a:xfrm xmlns:a="http://schemas.openxmlformats.org/drawingml/2006/main">
-            <a:off x="1066800" y="3381375"/>
-            <a:ext cx="7239000" cy="4276725"/>
+            <a:off x="1066800" y="4000500"/>
+            <a:ext cx="7239000" cy="3657600"/>
           </a:xfrm>
           <a:prstGeom xmlns:a="http://schemas.openxmlformats.org/drawingml/2006/main" prst="roundRect">
             <a:avLst>
-              <a:gd name="adj" fmla="val 3563"/>
+              <a:gd name="adj" fmla="val 4167"/>
             </a:avLst>
           </a:prstGeom>
           <a:solidFill xmlns:a="http://schemas.openxmlformats.org/drawingml/2006/main">
@@ -13761,10 +13807,10 @@
       </p:sp>
       <p:sp>
         <p:nvSpPr>
-          <p:cNvPr id="7" name="f105">
+          <p:cNvPr id="7" name="f107">
             <a:extLst xmlns:a="http://schemas.openxmlformats.org/drawingml/2006/main">
               <a:ext uri="{FF2B5EF4-FFF2-40B4-BE49-F238E27FC236}">
-                <a16:creationId xmlns:a16="http://schemas.microsoft.com/office/drawing/2014/main" id="{5D46CAC1-2FBA-4C4A-9666-E773AB73F963}"/>
+                <a16:creationId xmlns:a16="http://schemas.microsoft.com/office/drawing/2014/main" id="{09F1193A-D421-439F-A9F8-77481E968FBF}"/>
               </a:ext>
             </a:extLst>
           </p:cNvPr>
@@ -13920,10 +13966,10 @@
       </p:sp>
       <p:sp>
         <p:nvSpPr>
-          <p:cNvPr id="8" name="f106">
+          <p:cNvPr id="8" name="f108">
             <a:extLst xmlns:a="http://schemas.openxmlformats.org/drawingml/2006/main">
               <a:ext uri="{FF2B5EF4-FFF2-40B4-BE49-F238E27FC236}">
-                <a16:creationId xmlns:a16="http://schemas.microsoft.com/office/drawing/2014/main" id="{FDE863F6-60E0-42C9-B156-ED29985B84DA}"/>
+                <a16:creationId xmlns:a16="http://schemas.microsoft.com/office/drawing/2014/main" id="{5884D5A1-60EB-4766-B421-A7C590E87E4E}"/>
               </a:ext>
             </a:extLst>
           </p:cNvPr>
@@ -14102,10 +14148,10 @@
       </p:sp>
       <p:sp>
         <p:nvSpPr>
-          <p:cNvPr id="9" name="f107">
+          <p:cNvPr id="9" name="f109">
             <a:extLst xmlns:a="http://schemas.openxmlformats.org/drawingml/2006/main">
               <a:ext uri="{FF2B5EF4-FFF2-40B4-BE49-F238E27FC236}">
-                <a16:creationId xmlns:a16="http://schemas.microsoft.com/office/drawing/2014/main" id="{B368EC5F-B691-410F-A05D-F85D1D98075D}"/>
+                <a16:creationId xmlns:a16="http://schemas.microsoft.com/office/drawing/2014/main" id="{B8AD8DFE-551D-4918-A242-037C8E47AF72}"/>
               </a:ext>
             </a:extLst>
           </p:cNvPr>
@@ -14261,10 +14307,10 @@
       </p:sp>
       <p:sp>
         <p:nvSpPr>
-          <p:cNvPr id="10" name="f108">
+          <p:cNvPr id="10" name="f110">
             <a:extLst xmlns:a="http://schemas.openxmlformats.org/drawingml/2006/main">
               <a:ext uri="{FF2B5EF4-FFF2-40B4-BE49-F238E27FC236}">
-                <a16:creationId xmlns:a16="http://schemas.microsoft.com/office/drawing/2014/main" id="{2E65BE27-F92F-4F67-B7D4-B4A7DC7749F4}"/>
+                <a16:creationId xmlns:a16="http://schemas.microsoft.com/office/drawing/2014/main" id="{908B553A-1D33-4489-83D9-BD77FED71558}"/>
               </a:ext>
             </a:extLst>
           </p:cNvPr>
@@ -14420,10 +14466,10 @@
       </p:sp>
       <p:sp>
         <p:nvSpPr>
-          <p:cNvPr id="11" name="f109">
+          <p:cNvPr id="11" name="f111">
             <a:extLst xmlns:a="http://schemas.openxmlformats.org/drawingml/2006/main">
               <a:ext uri="{FF2B5EF4-FFF2-40B4-BE49-F238E27FC236}">
-                <a16:creationId xmlns:a16="http://schemas.microsoft.com/office/drawing/2014/main" id="{AE367173-51D4-4DCC-94C7-7C016E8AF642}"/>
+                <a16:creationId xmlns:a16="http://schemas.microsoft.com/office/drawing/2014/main" id="{88513D94-9A56-41A8-A97F-E3ECB8562AF5}"/>
               </a:ext>
             </a:extLst>
           </p:cNvPr>
@@ -14451,10 +14497,10 @@
       </p:sp>
       <p:sp>
         <p:nvSpPr>
-          <p:cNvPr id="12" name="f110">
+          <p:cNvPr id="12" name="f112">
             <a:extLst xmlns:a="http://schemas.openxmlformats.org/drawingml/2006/main">
               <a:ext uri="{FF2B5EF4-FFF2-40B4-BE49-F238E27FC236}">
-                <a16:creationId xmlns:a16="http://schemas.microsoft.com/office/drawing/2014/main" id="{699CD188-704D-49D4-BDE4-58F917B3D825}"/>
+                <a16:creationId xmlns:a16="http://schemas.microsoft.com/office/drawing/2014/main" id="{C065348A-C38F-4E6C-98B3-4D3194C62A5A}"/>
               </a:ext>
             </a:extLst>
           </p:cNvPr>
@@ -14482,10 +14528,10 @@
       </p:sp>
       <p:sp>
         <p:nvSpPr>
-          <p:cNvPr id="13" name="f111">
+          <p:cNvPr id="13" name="f113">
             <a:extLst xmlns:a="http://schemas.openxmlformats.org/drawingml/2006/main">
               <a:ext uri="{FF2B5EF4-FFF2-40B4-BE49-F238E27FC236}">
-                <a16:creationId xmlns:a16="http://schemas.microsoft.com/office/drawing/2014/main" id="{8A9A31D8-216E-45F9-9E26-72F107FC0507}"/>
+                <a16:creationId xmlns:a16="http://schemas.microsoft.com/office/drawing/2014/main" id="{8DBCFD10-35FE-4784-A351-4F8B3F391501}"/>
               </a:ext>
             </a:extLst>
           </p:cNvPr>
@@ -14641,10 +14687,10 @@
       </p:sp>
       <p:sp>
         <p:nvSpPr>
-          <p:cNvPr id="14" name="f112">
+          <p:cNvPr id="14" name="f114">
             <a:extLst xmlns:a="http://schemas.openxmlformats.org/drawingml/2006/main">
               <a:ext uri="{FF2B5EF4-FFF2-40B4-BE49-F238E27FC236}">
-                <a16:creationId xmlns:a16="http://schemas.microsoft.com/office/drawing/2014/main" id="{C30B618D-6C27-4A48-9E38-01AE8C65BC2F}"/>
+                <a16:creationId xmlns:a16="http://schemas.microsoft.com/office/drawing/2014/main" id="{800FCF7F-25FB-4155-8C55-D2951BF4EEB6}"/>
               </a:ext>
             </a:extLst>
           </p:cNvPr>
@@ -14676,10 +14722,10 @@
       </p:sp>
       <p:sp>
         <p:nvSpPr>
-          <p:cNvPr id="15" name="f113">
+          <p:cNvPr id="15" name="f115">
             <a:extLst xmlns:a="http://schemas.openxmlformats.org/drawingml/2006/main">
               <a:ext uri="{FF2B5EF4-FFF2-40B4-BE49-F238E27FC236}">
-                <a16:creationId xmlns:a16="http://schemas.microsoft.com/office/drawing/2014/main" id="{1A2D487D-0EFD-48F8-BCC7-250674341B92}"/>
+                <a16:creationId xmlns:a16="http://schemas.microsoft.com/office/drawing/2014/main" id="{756F99DC-8BD5-4847-86E7-4DE0D2D9DFF2}"/>
               </a:ext>
             </a:extLst>
           </p:cNvPr>
@@ -14858,10 +14904,10 @@
       </p:sp>
       <p:sp>
         <p:nvSpPr>
-          <p:cNvPr id="16" name="f114">
+          <p:cNvPr id="16" name="f116">
             <a:extLst xmlns:a="http://schemas.openxmlformats.org/drawingml/2006/main">
               <a:ext uri="{FF2B5EF4-FFF2-40B4-BE49-F238E27FC236}">
-                <a16:creationId xmlns:a16="http://schemas.microsoft.com/office/drawing/2014/main" id="{8BBB4C04-98D3-4E57-AB01-B825422B8BEB}"/>
+                <a16:creationId xmlns:a16="http://schemas.microsoft.com/office/drawing/2014/main" id="{8D2C59A9-5575-4C9F-8BA5-D0E3171210DE}"/>
               </a:ext>
             </a:extLst>
           </p:cNvPr>
@@ -14893,10 +14939,10 @@
       </p:sp>
       <p:sp>
         <p:nvSpPr>
-          <p:cNvPr id="17" name="f115">
+          <p:cNvPr id="17" name="f117">
             <a:extLst xmlns:a="http://schemas.openxmlformats.org/drawingml/2006/main">
               <a:ext uri="{FF2B5EF4-FFF2-40B4-BE49-F238E27FC236}">
-                <a16:creationId xmlns:a16="http://schemas.microsoft.com/office/drawing/2014/main" id="{0295BD96-CE92-40B5-B5AE-A44D904AF6DA}"/>
+                <a16:creationId xmlns:a16="http://schemas.microsoft.com/office/drawing/2014/main" id="{F6095C47-8CBE-4A13-AB88-3C5C4480DAF9}"/>
               </a:ext>
             </a:extLst>
           </p:cNvPr>
@@ -15076,7 +15122,7 @@
     </p:spTree>
     <p:extLst>
       <p:ext uri="{BB962C8B-B14F-4D97-AF65-F5344CB8AC3E}">
-        <p14:creationId xmlns:p14="http://schemas.microsoft.com/office/powerpoint/2010/main" val="691460266"/>
+        <p14:creationId xmlns:p14="http://schemas.microsoft.com/office/powerpoint/2010/main" val="296700713"/>
       </p:ext>
     </p:extLst>
   </p:cSld>
@@ -15107,7 +15153,7 @@
           <p:cNvPr id="15" name="">
             <a:extLst xmlns:a="http://schemas.openxmlformats.org/drawingml/2006/main">
               <a:ext uri="{FF2B5EF4-FFF2-40B4-BE49-F238E27FC236}">
-                <a16:creationId xmlns:a16="http://schemas.microsoft.com/office/drawing/2014/main" id="{D4FD475B-A86A-432B-9BEB-0A1BE2641D01}"/>
+                <a16:creationId xmlns:a16="http://schemas.microsoft.com/office/drawing/2014/main" id="{2AD534DC-4080-4EE4-B65B-8D7992C1FA74}"/>
               </a:ext>
             </a:extLst>
           </p:cNvPr>
@@ -15117,7 +15163,7 @@
           <p:nvPr/>
         </p:nvPicPr>
         <p:blipFill>
-          <a:blip xmlns:r="http://schemas.openxmlformats.org/officeDocument/2006/relationships" xmlns:a="http://schemas.openxmlformats.org/drawingml/2006/main" r:embed="Rf4b37f7578494f9b"/>
+          <a:blip xmlns:r="http://schemas.openxmlformats.org/officeDocument/2006/relationships" xmlns:a="http://schemas.openxmlformats.org/drawingml/2006/main" r:embed="R8c1d0e4330e54982"/>
           <a:stretch xmlns:a="http://schemas.openxmlformats.org/drawingml/2006/main"/>
         </p:blipFill>
         <p:spPr>
@@ -15132,10 +15178,10 @@
       </p:pic>
       <p:sp>
         <p:nvSpPr>
-          <p:cNvPr id="2" name="f117">
+          <p:cNvPr id="2" name="f119">
             <a:extLst xmlns:a="http://schemas.openxmlformats.org/drawingml/2006/main">
               <a:ext uri="{FF2B5EF4-FFF2-40B4-BE49-F238E27FC236}">
-                <a16:creationId xmlns:a16="http://schemas.microsoft.com/office/drawing/2014/main" id="{29DE5338-FC68-4CB0-9D22-A2388A7F367F}"/>
+                <a16:creationId xmlns:a16="http://schemas.microsoft.com/office/drawing/2014/main" id="{B5CF18BE-24AA-4662-A6F0-190DF52E184D}"/>
               </a:ext>
             </a:extLst>
           </p:cNvPr>
@@ -15146,8 +15192,8 @@
         </p:nvSpPr>
         <p:spPr>
           <a:xfrm xmlns:a="http://schemas.openxmlformats.org/drawingml/2006/main">
-            <a:off x="1066800" y="733997"/>
-            <a:ext cx="1440210" cy="231458"/>
+            <a:off x="1066800" y="718185"/>
+            <a:ext cx="2385417" cy="257175"/>
           </a:xfrm>
           <a:prstGeom xmlns:a="http://schemas.openxmlformats.org/drawingml/2006/main" prst="rect">
             <a:avLst/>
@@ -15164,7 +15210,7 @@
           </a:bodyPr>
           <a:lstStyle xmlns:a="http://schemas.openxmlformats.org/drawingml/2006/main">
             <a:defPPr algn="l">
-              <a:defRPr sz="1350" b="0">
+              <a:defRPr sz="1500" b="0">
                 <a:solidFill>
                   <a:srgbClr val="52627B"/>
                 </a:solidFill>
@@ -15174,7 +15220,7 @@
               </a:defRPr>
             </a:defPPr>
             <a:lvl1pPr algn="l">
-              <a:defRPr sz="1350" b="0">
+              <a:defRPr sz="1500" b="0">
                 <a:solidFill>
                   <a:srgbClr val="52627B"/>
                 </a:solidFill>
@@ -15184,7 +15230,7 @@
               </a:defRPr>
             </a:lvl1pPr>
             <a:lvl2pPr algn="l">
-              <a:defRPr sz="1350" b="0">
+              <a:defRPr sz="1500" b="0">
                 <a:solidFill>
                   <a:srgbClr val="52627B"/>
                 </a:solidFill>
@@ -15194,7 +15240,7 @@
               </a:defRPr>
             </a:lvl2pPr>
             <a:lvl3pPr algn="l">
-              <a:defRPr sz="1350" b="0">
+              <a:defRPr sz="1500" b="0">
                 <a:solidFill>
                   <a:srgbClr val="52627B"/>
                 </a:solidFill>
@@ -15204,7 +15250,7 @@
               </a:defRPr>
             </a:lvl3pPr>
             <a:lvl4pPr algn="l">
-              <a:defRPr sz="1350" b="0">
+              <a:defRPr sz="1500" b="0">
                 <a:solidFill>
                   <a:srgbClr val="52627B"/>
                 </a:solidFill>
@@ -15214,7 +15260,7 @@
               </a:defRPr>
             </a:lvl4pPr>
             <a:lvl5pPr algn="l">
-              <a:defRPr sz="1350" b="0">
+              <a:defRPr sz="1500" b="0">
                 <a:solidFill>
                   <a:srgbClr val="52627B"/>
                 </a:solidFill>
@@ -15224,7 +15270,7 @@
               </a:defRPr>
             </a:lvl5pPr>
             <a:lvl6pPr algn="l">
-              <a:defRPr sz="1350" b="0">
+              <a:defRPr sz="1500" b="0">
                 <a:solidFill>
                   <a:srgbClr val="52627B"/>
                 </a:solidFill>
@@ -15234,7 +15280,7 @@
               </a:defRPr>
             </a:lvl6pPr>
             <a:lvl7pPr algn="l">
-              <a:defRPr sz="1350" b="0">
+              <a:defRPr sz="1500" b="0">
                 <a:solidFill>
                   <a:srgbClr val="52627B"/>
                 </a:solidFill>
@@ -15244,7 +15290,7 @@
               </a:defRPr>
             </a:lvl7pPr>
             <a:lvl8pPr algn="l">
-              <a:defRPr sz="1350" b="0">
+              <a:defRPr sz="1500" b="0">
                 <a:solidFill>
                   <a:srgbClr val="52627B"/>
                 </a:solidFill>
@@ -15254,7 +15300,7 @@
               </a:defRPr>
             </a:lvl8pPr>
             <a:lvl9pPr algn="l">
-              <a:defRPr sz="1350" b="0">
+              <a:defRPr sz="1500" b="0">
                 <a:solidFill>
                   <a:srgbClr val="52627B"/>
                 </a:solidFill>
@@ -15266,7 +15312,7 @@
           </a:lstStyle>
           <a:p xmlns:a="http://schemas.openxmlformats.org/drawingml/2006/main">
             <a:pPr algn="l">
-              <a:defRPr sz="1350" b="0">
+              <a:defRPr sz="1500" b="0">
                 <a:solidFill>
                   <a:srgbClr val="52627B"/>
                 </a:solidFill>
@@ -15276,7 +15322,7 @@
               </a:defRPr>
             </a:pPr>
             <a:r>
-              <a:rPr sz="1350" b="0">
+              <a:rPr sz="1500" b="0">
                 <a:solidFill>
                   <a:srgbClr val="52627B"/>
                 </a:solidFill>
@@ -15284,17 +15330,17 @@
                 <a:ea typeface="Nimbus Sans"/>
                 <a:cs typeface="Nimbus Sans"/>
               </a:rPr>
-              <a:t>2° CONTRIBUTO</a:t>
+              <a:t>CONTRIBUTI DELLA TESI</a:t>
             </a:r>
           </a:p>
         </p:txBody>
       </p:sp>
       <p:sp>
         <p:nvSpPr>
-          <p:cNvPr id="3" name="f118">
+          <p:cNvPr id="3" name="f120">
             <a:extLst xmlns:a="http://schemas.openxmlformats.org/drawingml/2006/main">
               <a:ext uri="{FF2B5EF4-FFF2-40B4-BE49-F238E27FC236}">
-                <a16:creationId xmlns:a16="http://schemas.microsoft.com/office/drawing/2014/main" id="{7975B12F-C1C0-4634-87FD-062B57E0C00B}"/>
+                <a16:creationId xmlns:a16="http://schemas.microsoft.com/office/drawing/2014/main" id="{013FDCB5-4C5C-4E0C-86F2-23F2D8E177FA}"/>
               </a:ext>
             </a:extLst>
           </p:cNvPr>
@@ -15450,10 +15496,10 @@
       </p:sp>
       <p:sp>
         <p:nvSpPr>
-          <p:cNvPr id="4" name="f119">
+          <p:cNvPr id="4" name="f121">
             <a:extLst xmlns:a="http://schemas.openxmlformats.org/drawingml/2006/main">
               <a:ext uri="{FF2B5EF4-FFF2-40B4-BE49-F238E27FC236}">
-                <a16:creationId xmlns:a16="http://schemas.microsoft.com/office/drawing/2014/main" id="{036D022E-245C-40D1-A8F1-37315D31B5B1}"/>
+                <a16:creationId xmlns:a16="http://schemas.microsoft.com/office/drawing/2014/main" id="{9C2EB078-F21B-4BE9-8E83-423DE59E311B}"/>
               </a:ext>
             </a:extLst>
           </p:cNvPr>
@@ -15609,10 +15655,10 @@
       </p:sp>
       <p:sp>
         <p:nvSpPr>
-          <p:cNvPr id="5" name="f120">
+          <p:cNvPr id="5" name="f122">
             <a:extLst xmlns:a="http://schemas.openxmlformats.org/drawingml/2006/main">
               <a:ext uri="{FF2B5EF4-FFF2-40B4-BE49-F238E27FC236}">
-                <a16:creationId xmlns:a16="http://schemas.microsoft.com/office/drawing/2014/main" id="{96F52C9A-E7E3-4654-A5BD-31394727A6FD}"/>
+                <a16:creationId xmlns:a16="http://schemas.microsoft.com/office/drawing/2014/main" id="{3637A451-F6AD-46C8-A435-66CFCBCC0839}"/>
               </a:ext>
             </a:extLst>
           </p:cNvPr>
@@ -15768,10 +15814,10 @@
       </p:sp>
       <p:sp>
         <p:nvSpPr>
-          <p:cNvPr id="6" name="f121">
+          <p:cNvPr id="6" name="f123">
             <a:extLst xmlns:a="http://schemas.openxmlformats.org/drawingml/2006/main">
               <a:ext uri="{FF2B5EF4-FFF2-40B4-BE49-F238E27FC236}">
-                <a16:creationId xmlns:a16="http://schemas.microsoft.com/office/drawing/2014/main" id="{C2D3866C-9DFF-4A45-B6B3-6AF2F6762890}"/>
+                <a16:creationId xmlns:a16="http://schemas.microsoft.com/office/drawing/2014/main" id="{EC1A7182-5A61-43E6-A34B-D3B9956CCB6B}"/>
               </a:ext>
             </a:extLst>
           </p:cNvPr>
@@ -15927,10 +15973,10 @@
       </p:sp>
       <p:sp>
         <p:nvSpPr>
-          <p:cNvPr id="7" name="f122">
+          <p:cNvPr id="7" name="f124">
             <a:extLst xmlns:a="http://schemas.openxmlformats.org/drawingml/2006/main">
               <a:ext uri="{FF2B5EF4-FFF2-40B4-BE49-F238E27FC236}">
-                <a16:creationId xmlns:a16="http://schemas.microsoft.com/office/drawing/2014/main" id="{79C76C10-DB88-4AF7-9917-340CC3FFA2FD}"/>
+                <a16:creationId xmlns:a16="http://schemas.microsoft.com/office/drawing/2014/main" id="{576B5B23-61BC-416D-BF2E-79CBDB3292A6}"/>
               </a:ext>
             </a:extLst>
           </p:cNvPr>
@@ -16086,10 +16132,10 @@
       </p:sp>
       <p:sp>
         <p:nvSpPr>
-          <p:cNvPr id="8" name="f123">
+          <p:cNvPr id="8" name="f125">
             <a:extLst xmlns:a="http://schemas.openxmlformats.org/drawingml/2006/main">
               <a:ext uri="{FF2B5EF4-FFF2-40B4-BE49-F238E27FC236}">
-                <a16:creationId xmlns:a16="http://schemas.microsoft.com/office/drawing/2014/main" id="{0BD4A42B-3083-4F55-8CCE-32A18F537BBC}"/>
+                <a16:creationId xmlns:a16="http://schemas.microsoft.com/office/drawing/2014/main" id="{DD0AA4A9-A3C3-4D1D-A513-A44CC880C7B1}"/>
               </a:ext>
             </a:extLst>
           </p:cNvPr>
@@ -16245,10 +16291,10 @@
       </p:sp>
       <p:sp>
         <p:nvSpPr>
-          <p:cNvPr id="9" name="f124">
+          <p:cNvPr id="9" name="f126">
             <a:extLst xmlns:a="http://schemas.openxmlformats.org/drawingml/2006/main">
               <a:ext uri="{FF2B5EF4-FFF2-40B4-BE49-F238E27FC236}">
-                <a16:creationId xmlns:a16="http://schemas.microsoft.com/office/drawing/2014/main" id="{C3CEF9D9-851E-4BA9-AD44-741F1E365008}"/>
+                <a16:creationId xmlns:a16="http://schemas.microsoft.com/office/drawing/2014/main" id="{082726BC-A7FC-4D2A-BD6B-480FA420C16C}"/>
               </a:ext>
             </a:extLst>
           </p:cNvPr>
@@ -16404,10 +16450,10 @@
       </p:sp>
       <p:sp>
         <p:nvSpPr>
-          <p:cNvPr id="10" name="f125">
+          <p:cNvPr id="10" name="f127">
             <a:extLst xmlns:a="http://schemas.openxmlformats.org/drawingml/2006/main">
               <a:ext uri="{FF2B5EF4-FFF2-40B4-BE49-F238E27FC236}">
-                <a16:creationId xmlns:a16="http://schemas.microsoft.com/office/drawing/2014/main" id="{43EC270E-BA95-4D19-8CF3-2CF143D711ED}"/>
+                <a16:creationId xmlns:a16="http://schemas.microsoft.com/office/drawing/2014/main" id="{DFB7656D-1D0F-4655-A7AA-C81FD1ED4349}"/>
               </a:ext>
             </a:extLst>
           </p:cNvPr>
@@ -16563,10 +16609,10 @@
       </p:sp>
       <p:sp>
         <p:nvSpPr>
-          <p:cNvPr id="11" name="f126">
+          <p:cNvPr id="11" name="f128">
             <a:extLst xmlns:a="http://schemas.openxmlformats.org/drawingml/2006/main">
               <a:ext uri="{FF2B5EF4-FFF2-40B4-BE49-F238E27FC236}">
-                <a16:creationId xmlns:a16="http://schemas.microsoft.com/office/drawing/2014/main" id="{E06DAF17-599D-47BD-8DC9-150FC5EC3A58}"/>
+                <a16:creationId xmlns:a16="http://schemas.microsoft.com/office/drawing/2014/main" id="{4CF3EC47-A759-417A-87C4-2D91138F759A}"/>
               </a:ext>
             </a:extLst>
           </p:cNvPr>
@@ -16722,10 +16768,10 @@
       </p:sp>
       <p:sp>
         <p:nvSpPr>
-          <p:cNvPr id="12" name="f127">
+          <p:cNvPr id="12" name="f129">
             <a:extLst xmlns:a="http://schemas.openxmlformats.org/drawingml/2006/main">
               <a:ext uri="{FF2B5EF4-FFF2-40B4-BE49-F238E27FC236}">
-                <a16:creationId xmlns:a16="http://schemas.microsoft.com/office/drawing/2014/main" id="{39B2D913-6CE8-45A8-92A8-1E5B8289014E}"/>
+                <a16:creationId xmlns:a16="http://schemas.microsoft.com/office/drawing/2014/main" id="{D380B932-E18D-491E-BE13-0319E9382004}"/>
               </a:ext>
             </a:extLst>
           </p:cNvPr>
@@ -16881,10 +16927,10 @@
       </p:sp>
       <p:sp>
         <p:nvSpPr>
-          <p:cNvPr id="13" name="f128">
+          <p:cNvPr id="13" name="f130">
             <a:extLst xmlns:a="http://schemas.openxmlformats.org/drawingml/2006/main">
               <a:ext uri="{FF2B5EF4-FFF2-40B4-BE49-F238E27FC236}">
-                <a16:creationId xmlns:a16="http://schemas.microsoft.com/office/drawing/2014/main" id="{6DC9DDC7-1F64-473A-B35A-FFFBA3627555}"/>
+                <a16:creationId xmlns:a16="http://schemas.microsoft.com/office/drawing/2014/main" id="{9C31CD2B-E027-47B5-9759-50C98399ACEE}"/>
               </a:ext>
             </a:extLst>
           </p:cNvPr>
@@ -17040,10 +17086,10 @@
       </p:sp>
       <p:sp>
         <p:nvSpPr>
-          <p:cNvPr id="14" name="f129">
+          <p:cNvPr id="14" name="f131">
             <a:extLst xmlns:a="http://schemas.openxmlformats.org/drawingml/2006/main">
               <a:ext uri="{FF2B5EF4-FFF2-40B4-BE49-F238E27FC236}">
-                <a16:creationId xmlns:a16="http://schemas.microsoft.com/office/drawing/2014/main" id="{87DB7606-52BB-4047-9E66-61D846159192}"/>
+                <a16:creationId xmlns:a16="http://schemas.microsoft.com/office/drawing/2014/main" id="{8BAC995B-EBF7-4BFF-A56F-733A99528767}"/>
               </a:ext>
             </a:extLst>
           </p:cNvPr>
@@ -17200,7 +17246,7 @@
     </p:spTree>
     <p:extLst>
       <p:ext uri="{BB962C8B-B14F-4D97-AF65-F5344CB8AC3E}">
-        <p14:creationId xmlns:p14="http://schemas.microsoft.com/office/powerpoint/2010/main" val="1534536425"/>
+        <p14:creationId xmlns:p14="http://schemas.microsoft.com/office/powerpoint/2010/main" val="106827091"/>
       </p:ext>
     </p:extLst>
   </p:cSld>
@@ -17228,10 +17274,10 @@
       </p:grpSpPr>
       <p:sp>
         <p:nvSpPr>
-          <p:cNvPr id="13" name="f130">
+          <p:cNvPr id="13" name="f132">
             <a:extLst xmlns:a="http://schemas.openxmlformats.org/drawingml/2006/main">
               <a:ext uri="{FF2B5EF4-FFF2-40B4-BE49-F238E27FC236}">
-                <a16:creationId xmlns:a16="http://schemas.microsoft.com/office/drawing/2014/main" id="{67CE21E1-A8E7-4C78-BCE5-A685B29EA681}"/>
+                <a16:creationId xmlns:a16="http://schemas.microsoft.com/office/drawing/2014/main" id="{BB8EF939-DB91-43D5-9554-18DABA93056E}"/>
               </a:ext>
             </a:extLst>
           </p:cNvPr>
@@ -17262,7 +17308,7 @@
             <a:defPPr algn="l">
               <a:defRPr sz="1500" b="0">
                 <a:solidFill>
-                  <a:srgbClr val="4264D0"/>
+                  <a:srgbClr val="52627B"/>
                 </a:solidFill>
                 <a:latin typeface="Nimbus Sans"/>
                 <a:ea typeface="Nimbus Sans"/>
@@ -17272,7 +17318,7 @@
             <a:lvl1pPr algn="l">
               <a:defRPr sz="1500" b="0">
                 <a:solidFill>
-                  <a:srgbClr val="4264D0"/>
+                  <a:srgbClr val="52627B"/>
                 </a:solidFill>
                 <a:latin typeface="Nimbus Sans"/>
                 <a:ea typeface="Nimbus Sans"/>
@@ -17282,7 +17328,7 @@
             <a:lvl2pPr algn="l">
               <a:defRPr sz="1500" b="0">
                 <a:solidFill>
-                  <a:srgbClr val="4264D0"/>
+                  <a:srgbClr val="52627B"/>
                 </a:solidFill>
                 <a:latin typeface="Nimbus Sans"/>
                 <a:ea typeface="Nimbus Sans"/>
@@ -17292,7 +17338,7 @@
             <a:lvl3pPr algn="l">
               <a:defRPr sz="1500" b="0">
                 <a:solidFill>
-                  <a:srgbClr val="4264D0"/>
+                  <a:srgbClr val="52627B"/>
                 </a:solidFill>
                 <a:latin typeface="Nimbus Sans"/>
                 <a:ea typeface="Nimbus Sans"/>
@@ -17302,7 +17348,7 @@
             <a:lvl4pPr algn="l">
               <a:defRPr sz="1500" b="0">
                 <a:solidFill>
-                  <a:srgbClr val="4264D0"/>
+                  <a:srgbClr val="52627B"/>
                 </a:solidFill>
                 <a:latin typeface="Nimbus Sans"/>
                 <a:ea typeface="Nimbus Sans"/>
@@ -17312,7 +17358,7 @@
             <a:lvl5pPr algn="l">
               <a:defRPr sz="1500" b="0">
                 <a:solidFill>
-                  <a:srgbClr val="4264D0"/>
+                  <a:srgbClr val="52627B"/>
                 </a:solidFill>
                 <a:latin typeface="Nimbus Sans"/>
                 <a:ea typeface="Nimbus Sans"/>
@@ -17322,7 +17368,7 @@
             <a:lvl6pPr algn="l">
               <a:defRPr sz="1500" b="0">
                 <a:solidFill>
-                  <a:srgbClr val="4264D0"/>
+                  <a:srgbClr val="52627B"/>
                 </a:solidFill>
                 <a:latin typeface="Nimbus Sans"/>
                 <a:ea typeface="Nimbus Sans"/>
@@ -17332,7 +17378,7 @@
             <a:lvl7pPr algn="l">
               <a:defRPr sz="1500" b="0">
                 <a:solidFill>
-                  <a:srgbClr val="4264D0"/>
+                  <a:srgbClr val="52627B"/>
                 </a:solidFill>
                 <a:latin typeface="Nimbus Sans"/>
                 <a:ea typeface="Nimbus Sans"/>
@@ -17342,7 +17388,7 @@
             <a:lvl8pPr algn="l">
               <a:defRPr sz="1500" b="0">
                 <a:solidFill>
-                  <a:srgbClr val="4264D0"/>
+                  <a:srgbClr val="52627B"/>
                 </a:solidFill>
                 <a:latin typeface="Nimbus Sans"/>
                 <a:ea typeface="Nimbus Sans"/>
@@ -17352,7 +17398,7 @@
             <a:lvl9pPr algn="l">
               <a:defRPr sz="1500" b="0">
                 <a:solidFill>
-                  <a:srgbClr val="4264D0"/>
+                  <a:srgbClr val="52627B"/>
                 </a:solidFill>
                 <a:latin typeface="Nimbus Sans"/>
                 <a:ea typeface="Nimbus Sans"/>
@@ -17364,7 +17410,7 @@
             <a:pPr algn="l">
               <a:defRPr sz="1500" b="0">
                 <a:solidFill>
-                  <a:srgbClr val="4264D0"/>
+                  <a:srgbClr val="52627B"/>
                 </a:solidFill>
                 <a:latin typeface="Nimbus Sans"/>
                 <a:ea typeface="Nimbus Sans"/>
@@ -17374,7 +17420,7 @@
             <a:r>
               <a:rPr sz="1500" b="0">
                 <a:solidFill>
-                  <a:srgbClr val="4264D0"/>
+                  <a:srgbClr val="52627B"/>
                 </a:solidFill>
                 <a:latin typeface="Nimbus Sans"/>
                 <a:ea typeface="Nimbus Sans"/>
@@ -17387,10 +17433,10 @@
       </p:sp>
       <p:sp>
         <p:nvSpPr>
-          <p:cNvPr id="2" name="f131">
+          <p:cNvPr id="2" name="f133">
             <a:extLst xmlns:a="http://schemas.openxmlformats.org/drawingml/2006/main">
               <a:ext uri="{FF2B5EF4-FFF2-40B4-BE49-F238E27FC236}">
-                <a16:creationId xmlns:a16="http://schemas.microsoft.com/office/drawing/2014/main" id="{EDDC4C45-00F2-485D-8B36-14542002E599}"/>
+                <a16:creationId xmlns:a16="http://schemas.microsoft.com/office/drawing/2014/main" id="{7D5791D2-D10A-4FAD-8AF8-1403DB23F60F}"/>
               </a:ext>
             </a:extLst>
           </p:cNvPr>
@@ -17546,10 +17592,10 @@
       </p:sp>
       <p:sp>
         <p:nvSpPr>
-          <p:cNvPr id="3" name="f132">
+          <p:cNvPr id="3" name="f134">
             <a:extLst xmlns:a="http://schemas.openxmlformats.org/drawingml/2006/main">
               <a:ext uri="{FF2B5EF4-FFF2-40B4-BE49-F238E27FC236}">
-                <a16:creationId xmlns:a16="http://schemas.microsoft.com/office/drawing/2014/main" id="{6661C654-1EE6-49F6-8541-ECB3B2931C46}"/>
+                <a16:creationId xmlns:a16="http://schemas.microsoft.com/office/drawing/2014/main" id="{6DAD045B-10E2-41CB-B366-BE64A035CAD0}"/>
               </a:ext>
             </a:extLst>
           </p:cNvPr>
@@ -17705,10 +17751,10 @@
       </p:sp>
       <p:sp>
         <p:nvSpPr>
-          <p:cNvPr id="4" name="f133">
+          <p:cNvPr id="4" name="f135">
             <a:extLst xmlns:a="http://schemas.openxmlformats.org/drawingml/2006/main">
               <a:ext uri="{FF2B5EF4-FFF2-40B4-BE49-F238E27FC236}">
-                <a16:creationId xmlns:a16="http://schemas.microsoft.com/office/drawing/2014/main" id="{47F87975-511E-4A46-9AA3-8246BB6FB2A6}"/>
+                <a16:creationId xmlns:a16="http://schemas.microsoft.com/office/drawing/2014/main" id="{8041F0DD-0437-4934-A72A-0820A4B29A27}"/>
               </a:ext>
             </a:extLst>
           </p:cNvPr>
@@ -17857,7 +17903,7 @@
                 <a:ea typeface="Nimbus Sans"/>
                 <a:cs typeface="Nimbus Sans"/>
               </a:rPr>
-              <a:t>Verdetti sulle catture originali confrontati con gli esiti attesi.</a:t>
+              <a:t>16 catture di rete, con risultati ottenuti coerenti con quelli attesi.</a:t>
             </a:r>
           </a:p>
         </p:txBody>
@@ -17867,7 +17913,7 @@
           <p:cNvPr id="5" name="">
             <a:extLst xmlns:a="http://schemas.openxmlformats.org/drawingml/2006/main">
               <a:ext uri="{FF2B5EF4-FFF2-40B4-BE49-F238E27FC236}">
-                <a16:creationId xmlns:a16="http://schemas.microsoft.com/office/drawing/2014/main" id="{E3715459-DC23-46FD-A16B-C0E397885419}"/>
+                <a16:creationId xmlns:a16="http://schemas.microsoft.com/office/drawing/2014/main" id="{5836DC1D-6B45-414E-BAE6-CB63E4B0AC38}"/>
               </a:ext>
             </a:extLst>
           </p:cNvPr>
@@ -18700,10 +18746,10 @@
       </p:graphicFrame>
       <p:sp>
         <p:nvSpPr>
-          <p:cNvPr id="6" name="f135">
+          <p:cNvPr id="6" name="f137">
             <a:extLst xmlns:a="http://schemas.openxmlformats.org/drawingml/2006/main">
               <a:ext uri="{FF2B5EF4-FFF2-40B4-BE49-F238E27FC236}">
-                <a16:creationId xmlns:a16="http://schemas.microsoft.com/office/drawing/2014/main" id="{146646E8-1534-4451-9A3C-C7C739A82D12}"/>
+                <a16:creationId xmlns:a16="http://schemas.microsoft.com/office/drawing/2014/main" id="{C693AC93-1C99-4E8E-880E-875B32D22E1A}"/>
               </a:ext>
             </a:extLst>
           </p:cNvPr>
@@ -18735,10 +18781,10 @@
       </p:sp>
       <p:sp>
         <p:nvSpPr>
-          <p:cNvPr id="7" name="f136">
+          <p:cNvPr id="7" name="f138">
             <a:extLst xmlns:a="http://schemas.openxmlformats.org/drawingml/2006/main">
               <a:ext uri="{FF2B5EF4-FFF2-40B4-BE49-F238E27FC236}">
-                <a16:creationId xmlns:a16="http://schemas.microsoft.com/office/drawing/2014/main" id="{5B8B7961-463B-48AA-8B50-0E019ADF82AE}"/>
+                <a16:creationId xmlns:a16="http://schemas.microsoft.com/office/drawing/2014/main" id="{C2B91122-EADA-4294-A30C-B16034E69964}"/>
               </a:ext>
             </a:extLst>
           </p:cNvPr>
@@ -18894,10 +18940,10 @@
       </p:sp>
       <p:sp>
         <p:nvSpPr>
-          <p:cNvPr id="8" name="f137">
+          <p:cNvPr id="8" name="f139">
             <a:extLst xmlns:a="http://schemas.openxmlformats.org/drawingml/2006/main">
               <a:ext uri="{FF2B5EF4-FFF2-40B4-BE49-F238E27FC236}">
-                <a16:creationId xmlns:a16="http://schemas.microsoft.com/office/drawing/2014/main" id="{CE7289F5-74D7-4D79-9804-D0A82A202753}"/>
+                <a16:creationId xmlns:a16="http://schemas.microsoft.com/office/drawing/2014/main" id="{AC2C88D5-1730-4024-B4EA-DBA99A37A2C4}"/>
               </a:ext>
             </a:extLst>
           </p:cNvPr>
@@ -19053,10 +19099,10 @@
       </p:sp>
       <p:sp>
         <p:nvSpPr>
-          <p:cNvPr id="9" name="f138">
+          <p:cNvPr id="9" name="f140">
             <a:extLst xmlns:a="http://schemas.openxmlformats.org/drawingml/2006/main">
               <a:ext uri="{FF2B5EF4-FFF2-40B4-BE49-F238E27FC236}">
-                <a16:creationId xmlns:a16="http://schemas.microsoft.com/office/drawing/2014/main" id="{B6F7E517-C236-481F-9FF5-C71BB6EA0D57}"/>
+                <a16:creationId xmlns:a16="http://schemas.microsoft.com/office/drawing/2014/main" id="{07EFBC96-30D2-49A3-9ECB-24BF17A3E19C}"/>
               </a:ext>
             </a:extLst>
           </p:cNvPr>
@@ -19212,10 +19258,10 @@
       </p:sp>
       <p:sp>
         <p:nvSpPr>
-          <p:cNvPr id="10" name="f139">
+          <p:cNvPr id="10" name="f141">
             <a:extLst xmlns:a="http://schemas.openxmlformats.org/drawingml/2006/main">
               <a:ext uri="{FF2B5EF4-FFF2-40B4-BE49-F238E27FC236}">
-                <a16:creationId xmlns:a16="http://schemas.microsoft.com/office/drawing/2014/main" id="{CA126CDA-1B29-4729-9606-82D8B88A8EB6}"/>
+                <a16:creationId xmlns:a16="http://schemas.microsoft.com/office/drawing/2014/main" id="{E6CB828A-D891-443A-B9BD-1E9A73F51DEF}"/>
               </a:ext>
             </a:extLst>
           </p:cNvPr>
@@ -19371,10 +19417,10 @@
       </p:sp>
       <p:sp>
         <p:nvSpPr>
-          <p:cNvPr id="11" name="f140">
+          <p:cNvPr id="11" name="f142">
             <a:extLst xmlns:a="http://schemas.openxmlformats.org/drawingml/2006/main">
               <a:ext uri="{FF2B5EF4-FFF2-40B4-BE49-F238E27FC236}">
-                <a16:creationId xmlns:a16="http://schemas.microsoft.com/office/drawing/2014/main" id="{BFCD0EC4-76E4-4AC1-AABD-EF41CB31C8C5}"/>
+                <a16:creationId xmlns:a16="http://schemas.microsoft.com/office/drawing/2014/main" id="{4B58AB90-CEE2-4891-86D9-179B5CA5AFE3}"/>
               </a:ext>
             </a:extLst>
           </p:cNvPr>
@@ -19530,10 +19576,10 @@
       </p:sp>
       <p:sp>
         <p:nvSpPr>
-          <p:cNvPr id="12" name="f141">
+          <p:cNvPr id="12" name="f143">
             <a:extLst xmlns:a="http://schemas.openxmlformats.org/drawingml/2006/main">
               <a:ext uri="{FF2B5EF4-FFF2-40B4-BE49-F238E27FC236}">
-                <a16:creationId xmlns:a16="http://schemas.microsoft.com/office/drawing/2014/main" id="{8DD42DFA-D720-454E-A6D0-3BD61650A07B}"/>
+                <a16:creationId xmlns:a16="http://schemas.microsoft.com/office/drawing/2014/main" id="{66F2D0D6-B584-4E60-A3D4-D743E1677DD1}"/>
               </a:ext>
             </a:extLst>
           </p:cNvPr>
@@ -19544,8 +19590,8 @@
         </p:nvSpPr>
         <p:spPr>
           <a:xfrm xmlns:a="http://schemas.openxmlformats.org/drawingml/2006/main">
-            <a:off x="1066800" y="7981950"/>
-            <a:ext cx="13106400" cy="381000"/>
+            <a:off x="1066800" y="7534275"/>
+            <a:ext cx="9429750" cy="285750"/>
           </a:xfrm>
           <a:prstGeom xmlns:a="http://schemas.openxmlformats.org/drawingml/2006/main" prst="rect">
             <a:avLst/>
@@ -19561,8 +19607,8 @@
             <a:noAutofit/>
           </a:bodyPr>
           <a:lstStyle xmlns:a="http://schemas.openxmlformats.org/drawingml/2006/main">
-            <a:defPPr algn="l">
-              <a:defRPr sz="2025" b="0">
+            <a:defPPr algn="ctr">
+              <a:defRPr sz="1575" b="0">
                 <a:solidFill>
                   <a:srgbClr val="52627B"/>
                 </a:solidFill>
@@ -19571,8 +19617,8 @@
                 <a:cs typeface="Nimbus Sans"/>
               </a:defRPr>
             </a:defPPr>
-            <a:lvl1pPr algn="l">
-              <a:defRPr sz="2025" b="0">
+            <a:lvl1pPr algn="ctr">
+              <a:defRPr sz="1575" b="0">
                 <a:solidFill>
                   <a:srgbClr val="52627B"/>
                 </a:solidFill>
@@ -19581,8 +19627,8 @@
                 <a:cs typeface="Nimbus Sans"/>
               </a:defRPr>
             </a:lvl1pPr>
-            <a:lvl2pPr algn="l">
-              <a:defRPr sz="2025" b="0">
+            <a:lvl2pPr algn="ctr">
+              <a:defRPr sz="1575" b="0">
                 <a:solidFill>
                   <a:srgbClr val="52627B"/>
                 </a:solidFill>
@@ -19591,8 +19637,8 @@
                 <a:cs typeface="Nimbus Sans"/>
               </a:defRPr>
             </a:lvl2pPr>
-            <a:lvl3pPr algn="l">
-              <a:defRPr sz="2025" b="0">
+            <a:lvl3pPr algn="ctr">
+              <a:defRPr sz="1575" b="0">
                 <a:solidFill>
                   <a:srgbClr val="52627B"/>
                 </a:solidFill>
@@ -19601,8 +19647,8 @@
                 <a:cs typeface="Nimbus Sans"/>
               </a:defRPr>
             </a:lvl3pPr>
-            <a:lvl4pPr algn="l">
-              <a:defRPr sz="2025" b="0">
+            <a:lvl4pPr algn="ctr">
+              <a:defRPr sz="1575" b="0">
                 <a:solidFill>
                   <a:srgbClr val="52627B"/>
                 </a:solidFill>
@@ -19611,8 +19657,8 @@
                 <a:cs typeface="Nimbus Sans"/>
               </a:defRPr>
             </a:lvl4pPr>
-            <a:lvl5pPr algn="l">
-              <a:defRPr sz="2025" b="0">
+            <a:lvl5pPr algn="ctr">
+              <a:defRPr sz="1575" b="0">
                 <a:solidFill>
                   <a:srgbClr val="52627B"/>
                 </a:solidFill>
@@ -19621,8 +19667,8 @@
                 <a:cs typeface="Nimbus Sans"/>
               </a:defRPr>
             </a:lvl5pPr>
-            <a:lvl6pPr algn="l">
-              <a:defRPr sz="2025" b="0">
+            <a:lvl6pPr algn="ctr">
+              <a:defRPr sz="1575" b="0">
                 <a:solidFill>
                   <a:srgbClr val="52627B"/>
                 </a:solidFill>
@@ -19631,8 +19677,8 @@
                 <a:cs typeface="Nimbus Sans"/>
               </a:defRPr>
             </a:lvl6pPr>
-            <a:lvl7pPr algn="l">
-              <a:defRPr sz="2025" b="0">
+            <a:lvl7pPr algn="ctr">
+              <a:defRPr sz="1575" b="0">
                 <a:solidFill>
                   <a:srgbClr val="52627B"/>
                 </a:solidFill>
@@ -19641,8 +19687,8 @@
                 <a:cs typeface="Nimbus Sans"/>
               </a:defRPr>
             </a:lvl7pPr>
-            <a:lvl8pPr algn="l">
-              <a:defRPr sz="2025" b="0">
+            <a:lvl8pPr algn="ctr">
+              <a:defRPr sz="1575" b="0">
                 <a:solidFill>
                   <a:srgbClr val="52627B"/>
                 </a:solidFill>
@@ -19651,8 +19697,8 @@
                 <a:cs typeface="Nimbus Sans"/>
               </a:defRPr>
             </a:lvl8pPr>
-            <a:lvl9pPr algn="l">
-              <a:defRPr sz="2025" b="0">
+            <a:lvl9pPr algn="ctr">
+              <a:defRPr sz="1575" b="0">
                 <a:solidFill>
                   <a:srgbClr val="52627B"/>
                 </a:solidFill>
@@ -19663,8 +19709,8 @@
             </a:lvl9pPr>
           </a:lstStyle>
           <a:p xmlns:a="http://schemas.openxmlformats.org/drawingml/2006/main">
-            <a:pPr algn="l">
-              <a:defRPr sz="2025" b="0">
+            <a:pPr algn="ctr">
+              <a:defRPr sz="1575" b="0">
                 <a:solidFill>
                   <a:srgbClr val="52627B"/>
                 </a:solidFill>
@@ -19674,7 +19720,7 @@
               </a:defRPr>
             </a:pPr>
             <a:r>
-              <a:rPr sz="2025" b="0">
+              <a:rPr sz="1575" b="0">
                 <a:solidFill>
                   <a:srgbClr val="52627B"/>
                 </a:solidFill>
@@ -19690,7 +19736,7 @@
     </p:spTree>
     <p:extLst>
       <p:ext uri="{BB962C8B-B14F-4D97-AF65-F5344CB8AC3E}">
-        <p14:creationId xmlns:p14="http://schemas.microsoft.com/office/powerpoint/2010/main" val="1082741093"/>
+        <p14:creationId xmlns:p14="http://schemas.microsoft.com/office/powerpoint/2010/main" val="501538323"/>
       </p:ext>
     </p:extLst>
   </p:cSld>
@@ -19718,10 +19764,10 @@
       </p:grpSpPr>
       <p:sp>
         <p:nvSpPr>
-          <p:cNvPr id="50" name="f142">
+          <p:cNvPr id="49" name="f144">
             <a:extLst xmlns:a="http://schemas.openxmlformats.org/drawingml/2006/main">
               <a:ext uri="{FF2B5EF4-FFF2-40B4-BE49-F238E27FC236}">
-                <a16:creationId xmlns:a16="http://schemas.microsoft.com/office/drawing/2014/main" id="{C9D4E24B-E91A-4A52-B9E7-0E9D28CCD085}"/>
+                <a16:creationId xmlns:a16="http://schemas.microsoft.com/office/drawing/2014/main" id="{36C8E2FD-E395-4833-9439-C6CADDF0AD5B}"/>
               </a:ext>
             </a:extLst>
           </p:cNvPr>
@@ -19752,7 +19798,7 @@
             <a:defPPr algn="l">
               <a:defRPr sz="1500" b="0">
                 <a:solidFill>
-                  <a:srgbClr val="4264D0"/>
+                  <a:srgbClr val="52627B"/>
                 </a:solidFill>
                 <a:latin typeface="Nimbus Sans"/>
                 <a:ea typeface="Nimbus Sans"/>
@@ -19762,7 +19808,7 @@
             <a:lvl1pPr algn="l">
               <a:defRPr sz="1500" b="0">
                 <a:solidFill>
-                  <a:srgbClr val="4264D0"/>
+                  <a:srgbClr val="52627B"/>
                 </a:solidFill>
                 <a:latin typeface="Nimbus Sans"/>
                 <a:ea typeface="Nimbus Sans"/>
@@ -19772,7 +19818,7 @@
             <a:lvl2pPr algn="l">
               <a:defRPr sz="1500" b="0">
                 <a:solidFill>
-                  <a:srgbClr val="4264D0"/>
+                  <a:srgbClr val="52627B"/>
                 </a:solidFill>
                 <a:latin typeface="Nimbus Sans"/>
                 <a:ea typeface="Nimbus Sans"/>
@@ -19782,7 +19828,7 @@
             <a:lvl3pPr algn="l">
               <a:defRPr sz="1500" b="0">
                 <a:solidFill>
-                  <a:srgbClr val="4264D0"/>
+                  <a:srgbClr val="52627B"/>
                 </a:solidFill>
                 <a:latin typeface="Nimbus Sans"/>
                 <a:ea typeface="Nimbus Sans"/>
@@ -19792,7 +19838,7 @@
             <a:lvl4pPr algn="l">
               <a:defRPr sz="1500" b="0">
                 <a:solidFill>
-                  <a:srgbClr val="4264D0"/>
+                  <a:srgbClr val="52627B"/>
                 </a:solidFill>
                 <a:latin typeface="Nimbus Sans"/>
                 <a:ea typeface="Nimbus Sans"/>
@@ -19802,7 +19848,7 @@
             <a:lvl5pPr algn="l">
               <a:defRPr sz="1500" b="0">
                 <a:solidFill>
-                  <a:srgbClr val="4264D0"/>
+                  <a:srgbClr val="52627B"/>
                 </a:solidFill>
                 <a:latin typeface="Nimbus Sans"/>
                 <a:ea typeface="Nimbus Sans"/>
@@ -19812,7 +19858,7 @@
             <a:lvl6pPr algn="l">
               <a:defRPr sz="1500" b="0">
                 <a:solidFill>
-                  <a:srgbClr val="4264D0"/>
+                  <a:srgbClr val="52627B"/>
                 </a:solidFill>
                 <a:latin typeface="Nimbus Sans"/>
                 <a:ea typeface="Nimbus Sans"/>
@@ -19822,7 +19868,7 @@
             <a:lvl7pPr algn="l">
               <a:defRPr sz="1500" b="0">
                 <a:solidFill>
-                  <a:srgbClr val="4264D0"/>
+                  <a:srgbClr val="52627B"/>
                 </a:solidFill>
                 <a:latin typeface="Nimbus Sans"/>
                 <a:ea typeface="Nimbus Sans"/>
@@ -19832,7 +19878,7 @@
             <a:lvl8pPr algn="l">
               <a:defRPr sz="1500" b="0">
                 <a:solidFill>
-                  <a:srgbClr val="4264D0"/>
+                  <a:srgbClr val="52627B"/>
                 </a:solidFill>
                 <a:latin typeface="Nimbus Sans"/>
                 <a:ea typeface="Nimbus Sans"/>
@@ -19842,7 +19888,7 @@
             <a:lvl9pPr algn="l">
               <a:defRPr sz="1500" b="0">
                 <a:solidFill>
-                  <a:srgbClr val="4264D0"/>
+                  <a:srgbClr val="52627B"/>
                 </a:solidFill>
                 <a:latin typeface="Nimbus Sans"/>
                 <a:ea typeface="Nimbus Sans"/>
@@ -19854,7 +19900,7 @@
             <a:pPr algn="l">
               <a:defRPr sz="1500" b="0">
                 <a:solidFill>
-                  <a:srgbClr val="4264D0"/>
+                  <a:srgbClr val="52627B"/>
                 </a:solidFill>
                 <a:latin typeface="Nimbus Sans"/>
                 <a:ea typeface="Nimbus Sans"/>
@@ -19864,7 +19910,7 @@
             <a:r>
               <a:rPr sz="1500" b="0">
                 <a:solidFill>
-                  <a:srgbClr val="4264D0"/>
+                  <a:srgbClr val="52627B"/>
                 </a:solidFill>
                 <a:latin typeface="Nimbus Sans"/>
                 <a:ea typeface="Nimbus Sans"/>
@@ -19877,10 +19923,10 @@
       </p:sp>
       <p:sp>
         <p:nvSpPr>
-          <p:cNvPr id="2" name="f143">
+          <p:cNvPr id="2" name="f145">
             <a:extLst xmlns:a="http://schemas.openxmlformats.org/drawingml/2006/main">
               <a:ext uri="{FF2B5EF4-FFF2-40B4-BE49-F238E27FC236}">
-                <a16:creationId xmlns:a16="http://schemas.microsoft.com/office/drawing/2014/main" id="{8548F51F-218D-47B1-897D-E8F7FE572C9F}"/>
+                <a16:creationId xmlns:a16="http://schemas.microsoft.com/office/drawing/2014/main" id="{00511CC5-4585-4AE5-817A-FE7D28CE2A9B}"/>
               </a:ext>
             </a:extLst>
           </p:cNvPr>
@@ -20036,10 +20082,10 @@
       </p:sp>
       <p:sp>
         <p:nvSpPr>
-          <p:cNvPr id="3" name="f144">
+          <p:cNvPr id="3" name="f146">
             <a:extLst xmlns:a="http://schemas.openxmlformats.org/drawingml/2006/main">
               <a:ext uri="{FF2B5EF4-FFF2-40B4-BE49-F238E27FC236}">
-                <a16:creationId xmlns:a16="http://schemas.microsoft.com/office/drawing/2014/main" id="{BF2D923E-2B53-4BFA-A0B0-785FAD821505}"/>
+                <a16:creationId xmlns:a16="http://schemas.microsoft.com/office/drawing/2014/main" id="{35043BA8-DC6C-4B64-AB82-DD67FD19A666}"/>
               </a:ext>
             </a:extLst>
           </p:cNvPr>
@@ -20195,10 +20241,10 @@
       </p:sp>
       <p:sp>
         <p:nvSpPr>
-          <p:cNvPr id="4" name="f145">
+          <p:cNvPr id="4" name="f147">
             <a:extLst xmlns:a="http://schemas.openxmlformats.org/drawingml/2006/main">
               <a:ext uri="{FF2B5EF4-FFF2-40B4-BE49-F238E27FC236}">
-                <a16:creationId xmlns:a16="http://schemas.microsoft.com/office/drawing/2014/main" id="{CA648F6F-9E4F-4F02-8EB7-A4CD5E41D2D8}"/>
+                <a16:creationId xmlns:a16="http://schemas.microsoft.com/office/drawing/2014/main" id="{96A5EE3F-4006-47EE-82D6-85A5BFC35A43}"/>
               </a:ext>
             </a:extLst>
           </p:cNvPr>
@@ -20347,17 +20393,17 @@
                 <a:ea typeface="Nimbus Sans"/>
                 <a:cs typeface="Nimbus Sans"/>
               </a:rPr>
-              <a:t>Stesse regole e stesso sistema, su evidenze modificate in modo controllato.</a:t>
+              <a:t>Mutazioni controllate sul PCAP originale e verifica mediante la stessa pipeline e le stesse regole DSL.</a:t>
             </a:r>
           </a:p>
         </p:txBody>
       </p:sp>
       <p:sp>
         <p:nvSpPr>
-          <p:cNvPr id="51" name="dim_f146">
+          <p:cNvPr id="50" name="dim_f148">
             <a:extLst xmlns:a="http://schemas.openxmlformats.org/drawingml/2006/main">
               <a:ext uri="{FF2B5EF4-FFF2-40B4-BE49-F238E27FC236}">
-                <a16:creationId xmlns:a16="http://schemas.microsoft.com/office/drawing/2014/main" id="{C2E20DF5-6D16-4149-B71B-1EEDBC9A1CED}"/>
+                <a16:creationId xmlns:a16="http://schemas.microsoft.com/office/drawing/2014/main" id="{B44E52BE-03CE-4BD5-A83E-B3AE251C0CB0}"/>
               </a:ext>
             </a:extLst>
           </p:cNvPr>
@@ -20389,10 +20435,10 @@
       </p:sp>
       <p:sp>
         <p:nvSpPr>
-          <p:cNvPr id="5" name="f146">
+          <p:cNvPr id="5" name="f148">
             <a:extLst xmlns:a="http://schemas.openxmlformats.org/drawingml/2006/main">
               <a:ext uri="{FF2B5EF4-FFF2-40B4-BE49-F238E27FC236}">
-                <a16:creationId xmlns:a16="http://schemas.microsoft.com/office/drawing/2014/main" id="{C2E20DF5-6D16-4149-B71B-1EEDBC9A1CED}"/>
+                <a16:creationId xmlns:a16="http://schemas.microsoft.com/office/drawing/2014/main" id="{B44E52BE-03CE-4BD5-A83E-B3AE251C0CB0}"/>
               </a:ext>
             </a:extLst>
           </p:cNvPr>
@@ -20424,10 +20470,10 @@
       </p:sp>
       <p:sp>
         <p:nvSpPr>
-          <p:cNvPr id="52" name="phaseC_f146">
+          <p:cNvPr id="51" name="phaseC_f148">
             <a:extLst xmlns:a="http://schemas.openxmlformats.org/drawingml/2006/main">
               <a:ext uri="{FF2B5EF4-FFF2-40B4-BE49-F238E27FC236}">
-                <a16:creationId xmlns:a16="http://schemas.microsoft.com/office/drawing/2014/main" id="{C2E20DF5-6D16-4149-B71B-1EEDBC9A1CED}"/>
+                <a16:creationId xmlns:a16="http://schemas.microsoft.com/office/drawing/2014/main" id="{B44E52BE-03CE-4BD5-A83E-B3AE251C0CB0}"/>
               </a:ext>
             </a:extLst>
           </p:cNvPr>
@@ -20459,10 +20505,10 @@
       </p:sp>
       <p:sp>
         <p:nvSpPr>
-          <p:cNvPr id="53" name="dim_f147">
+          <p:cNvPr id="52" name="dim_f149">
             <a:extLst xmlns:a="http://schemas.openxmlformats.org/drawingml/2006/main">
               <a:ext uri="{FF2B5EF4-FFF2-40B4-BE49-F238E27FC236}">
-                <a16:creationId xmlns:a16="http://schemas.microsoft.com/office/drawing/2014/main" id="{AF24B891-D213-453F-8A16-C0DC7EB8C2B9}"/>
+                <a16:creationId xmlns:a16="http://schemas.microsoft.com/office/drawing/2014/main" id="{9B061945-26B3-4C5A-9BB9-97C5E0B14D2A}"/>
               </a:ext>
             </a:extLst>
           </p:cNvPr>
@@ -20618,10 +20664,10 @@
       </p:sp>
       <p:sp>
         <p:nvSpPr>
-          <p:cNvPr id="6" name="f147">
+          <p:cNvPr id="6" name="f149">
             <a:extLst xmlns:a="http://schemas.openxmlformats.org/drawingml/2006/main">
               <a:ext uri="{FF2B5EF4-FFF2-40B4-BE49-F238E27FC236}">
-                <a16:creationId xmlns:a16="http://schemas.microsoft.com/office/drawing/2014/main" id="{AF24B891-D213-453F-8A16-C0DC7EB8C2B9}"/>
+                <a16:creationId xmlns:a16="http://schemas.microsoft.com/office/drawing/2014/main" id="{9B061945-26B3-4C5A-9BB9-97C5E0B14D2A}"/>
               </a:ext>
             </a:extLst>
           </p:cNvPr>
@@ -20777,10 +20823,10 @@
       </p:sp>
       <p:sp>
         <p:nvSpPr>
-          <p:cNvPr id="54" name="phaseC_f147">
+          <p:cNvPr id="53" name="phaseC_f149">
             <a:extLst xmlns:a="http://schemas.openxmlformats.org/drawingml/2006/main">
               <a:ext uri="{FF2B5EF4-FFF2-40B4-BE49-F238E27FC236}">
-                <a16:creationId xmlns:a16="http://schemas.microsoft.com/office/drawing/2014/main" id="{AF24B891-D213-453F-8A16-C0DC7EB8C2B9}"/>
+                <a16:creationId xmlns:a16="http://schemas.microsoft.com/office/drawing/2014/main" id="{9B061945-26B3-4C5A-9BB9-97C5E0B14D2A}"/>
               </a:ext>
             </a:extLst>
           </p:cNvPr>
@@ -20936,10 +20982,10 @@
       </p:sp>
       <p:sp>
         <p:nvSpPr>
-          <p:cNvPr id="55" name="dim_f148">
+          <p:cNvPr id="54" name="dim_f150">
             <a:extLst xmlns:a="http://schemas.openxmlformats.org/drawingml/2006/main">
               <a:ext uri="{FF2B5EF4-FFF2-40B4-BE49-F238E27FC236}">
-                <a16:creationId xmlns:a16="http://schemas.microsoft.com/office/drawing/2014/main" id="{2C4C7E62-1C59-48D3-899B-8D7F97CC3D92}"/>
+                <a16:creationId xmlns:a16="http://schemas.microsoft.com/office/drawing/2014/main" id="{AF978F90-28D8-40CD-8151-3243465C6442}"/>
               </a:ext>
             </a:extLst>
           </p:cNvPr>
@@ -20971,10 +21017,10 @@
       </p:sp>
       <p:sp>
         <p:nvSpPr>
-          <p:cNvPr id="7" name="f148">
+          <p:cNvPr id="7" name="f150">
             <a:extLst xmlns:a="http://schemas.openxmlformats.org/drawingml/2006/main">
               <a:ext uri="{FF2B5EF4-FFF2-40B4-BE49-F238E27FC236}">
-                <a16:creationId xmlns:a16="http://schemas.microsoft.com/office/drawing/2014/main" id="{2C4C7E62-1C59-48D3-899B-8D7F97CC3D92}"/>
+                <a16:creationId xmlns:a16="http://schemas.microsoft.com/office/drawing/2014/main" id="{AF978F90-28D8-40CD-8151-3243465C6442}"/>
               </a:ext>
             </a:extLst>
           </p:cNvPr>
@@ -21006,10 +21052,10 @@
       </p:sp>
       <p:sp>
         <p:nvSpPr>
-          <p:cNvPr id="56" name="dim_f149">
+          <p:cNvPr id="55" name="dim_f151">
             <a:extLst xmlns:a="http://schemas.openxmlformats.org/drawingml/2006/main">
               <a:ext uri="{FF2B5EF4-FFF2-40B4-BE49-F238E27FC236}">
-                <a16:creationId xmlns:a16="http://schemas.microsoft.com/office/drawing/2014/main" id="{0576CCF8-D6A0-4109-90BF-DC468C483402}"/>
+                <a16:creationId xmlns:a16="http://schemas.microsoft.com/office/drawing/2014/main" id="{90F61FB3-0ED2-4646-AD90-6B3900AFAE80}"/>
               </a:ext>
             </a:extLst>
           </p:cNvPr>
@@ -21165,10 +21211,10 @@
       </p:sp>
       <p:sp>
         <p:nvSpPr>
-          <p:cNvPr id="8" name="f149">
+          <p:cNvPr id="8" name="f151">
             <a:extLst xmlns:a="http://schemas.openxmlformats.org/drawingml/2006/main">
               <a:ext uri="{FF2B5EF4-FFF2-40B4-BE49-F238E27FC236}">
-                <a16:creationId xmlns:a16="http://schemas.microsoft.com/office/drawing/2014/main" id="{0576CCF8-D6A0-4109-90BF-DC468C483402}"/>
+                <a16:creationId xmlns:a16="http://schemas.microsoft.com/office/drawing/2014/main" id="{90F61FB3-0ED2-4646-AD90-6B3900AFAE80}"/>
               </a:ext>
             </a:extLst>
           </p:cNvPr>
@@ -21324,10 +21370,10 @@
       </p:sp>
       <p:sp>
         <p:nvSpPr>
-          <p:cNvPr id="57" name="dim_f150">
+          <p:cNvPr id="56" name="dim_f152">
             <a:extLst xmlns:a="http://schemas.openxmlformats.org/drawingml/2006/main">
               <a:ext uri="{FF2B5EF4-FFF2-40B4-BE49-F238E27FC236}">
-                <a16:creationId xmlns:a16="http://schemas.microsoft.com/office/drawing/2014/main" id="{FC75EB8A-5481-4BB7-BECB-029912F4BB0D}"/>
+                <a16:creationId xmlns:a16="http://schemas.microsoft.com/office/drawing/2014/main" id="{0BCB4A6B-9F89-4062-A343-F593F9520A92}"/>
               </a:ext>
             </a:extLst>
           </p:cNvPr>
@@ -21359,10 +21405,10 @@
       </p:sp>
       <p:sp>
         <p:nvSpPr>
-          <p:cNvPr id="9" name="f150">
+          <p:cNvPr id="9" name="f152">
             <a:extLst xmlns:a="http://schemas.openxmlformats.org/drawingml/2006/main">
               <a:ext uri="{FF2B5EF4-FFF2-40B4-BE49-F238E27FC236}">
-                <a16:creationId xmlns:a16="http://schemas.microsoft.com/office/drawing/2014/main" id="{FC75EB8A-5481-4BB7-BECB-029912F4BB0D}"/>
+                <a16:creationId xmlns:a16="http://schemas.microsoft.com/office/drawing/2014/main" id="{0BCB4A6B-9F89-4062-A343-F593F9520A92}"/>
               </a:ext>
             </a:extLst>
           </p:cNvPr>
@@ -21394,10 +21440,10 @@
       </p:sp>
       <p:sp>
         <p:nvSpPr>
-          <p:cNvPr id="58" name="phaseC_f150">
+          <p:cNvPr id="57" name="phaseC_f152">
             <a:extLst xmlns:a="http://schemas.openxmlformats.org/drawingml/2006/main">
               <a:ext uri="{FF2B5EF4-FFF2-40B4-BE49-F238E27FC236}">
-                <a16:creationId xmlns:a16="http://schemas.microsoft.com/office/drawing/2014/main" id="{FC75EB8A-5481-4BB7-BECB-029912F4BB0D}"/>
+                <a16:creationId xmlns:a16="http://schemas.microsoft.com/office/drawing/2014/main" id="{0BCB4A6B-9F89-4062-A343-F593F9520A92}"/>
               </a:ext>
             </a:extLst>
           </p:cNvPr>
@@ -21429,10 +21475,10 @@
       </p:sp>
       <p:sp>
         <p:nvSpPr>
-          <p:cNvPr id="59" name="dim_f151">
+          <p:cNvPr id="58" name="dim_f153">
             <a:extLst xmlns:a="http://schemas.openxmlformats.org/drawingml/2006/main">
               <a:ext uri="{FF2B5EF4-FFF2-40B4-BE49-F238E27FC236}">
-                <a16:creationId xmlns:a16="http://schemas.microsoft.com/office/drawing/2014/main" id="{F87DFBBA-C3EF-46F1-896D-FC3F7EEDFE28}"/>
+                <a16:creationId xmlns:a16="http://schemas.microsoft.com/office/drawing/2014/main" id="{8F92213C-EBD3-41E4-A835-6F6DB0B24264}"/>
               </a:ext>
             </a:extLst>
           </p:cNvPr>
@@ -21588,10 +21634,10 @@
       </p:sp>
       <p:sp>
         <p:nvSpPr>
-          <p:cNvPr id="10" name="f151">
+          <p:cNvPr id="10" name="f153">
             <a:extLst xmlns:a="http://schemas.openxmlformats.org/drawingml/2006/main">
               <a:ext uri="{FF2B5EF4-FFF2-40B4-BE49-F238E27FC236}">
-                <a16:creationId xmlns:a16="http://schemas.microsoft.com/office/drawing/2014/main" id="{F87DFBBA-C3EF-46F1-896D-FC3F7EEDFE28}"/>
+                <a16:creationId xmlns:a16="http://schemas.microsoft.com/office/drawing/2014/main" id="{8F92213C-EBD3-41E4-A835-6F6DB0B24264}"/>
               </a:ext>
             </a:extLst>
           </p:cNvPr>
@@ -21747,10 +21793,10 @@
       </p:sp>
       <p:sp>
         <p:nvSpPr>
-          <p:cNvPr id="60" name="phaseC_f151">
+          <p:cNvPr id="59" name="phaseC_f153">
             <a:extLst xmlns:a="http://schemas.openxmlformats.org/drawingml/2006/main">
               <a:ext uri="{FF2B5EF4-FFF2-40B4-BE49-F238E27FC236}">
-                <a16:creationId xmlns:a16="http://schemas.microsoft.com/office/drawing/2014/main" id="{F87DFBBA-C3EF-46F1-896D-FC3F7EEDFE28}"/>
+                <a16:creationId xmlns:a16="http://schemas.microsoft.com/office/drawing/2014/main" id="{8F92213C-EBD3-41E4-A835-6F6DB0B24264}"/>
               </a:ext>
             </a:extLst>
           </p:cNvPr>
@@ -21906,10 +21952,10 @@
       </p:sp>
       <p:sp>
         <p:nvSpPr>
-          <p:cNvPr id="61" name="dim_f152">
+          <p:cNvPr id="60" name="dim_f154">
             <a:extLst xmlns:a="http://schemas.openxmlformats.org/drawingml/2006/main">
               <a:ext uri="{FF2B5EF4-FFF2-40B4-BE49-F238E27FC236}">
-                <a16:creationId xmlns:a16="http://schemas.microsoft.com/office/drawing/2014/main" id="{DE633995-6DF4-422D-95BE-C96284226157}"/>
+                <a16:creationId xmlns:a16="http://schemas.microsoft.com/office/drawing/2014/main" id="{5D05F89C-5664-472D-A05E-A7C22066DCE3}"/>
               </a:ext>
             </a:extLst>
           </p:cNvPr>
@@ -21941,10 +21987,10 @@
       </p:sp>
       <p:sp>
         <p:nvSpPr>
-          <p:cNvPr id="11" name="f152">
+          <p:cNvPr id="11" name="f154">
             <a:extLst xmlns:a="http://schemas.openxmlformats.org/drawingml/2006/main">
               <a:ext uri="{FF2B5EF4-FFF2-40B4-BE49-F238E27FC236}">
-                <a16:creationId xmlns:a16="http://schemas.microsoft.com/office/drawing/2014/main" id="{DE633995-6DF4-422D-95BE-C96284226157}"/>
+                <a16:creationId xmlns:a16="http://schemas.microsoft.com/office/drawing/2014/main" id="{5D05F89C-5664-472D-A05E-A7C22066DCE3}"/>
               </a:ext>
             </a:extLst>
           </p:cNvPr>
@@ -21976,10 +22022,10 @@
       </p:sp>
       <p:sp>
         <p:nvSpPr>
-          <p:cNvPr id="62" name="dim_f153">
+          <p:cNvPr id="61" name="dim_f155">
             <a:extLst xmlns:a="http://schemas.openxmlformats.org/drawingml/2006/main">
               <a:ext uri="{FF2B5EF4-FFF2-40B4-BE49-F238E27FC236}">
-                <a16:creationId xmlns:a16="http://schemas.microsoft.com/office/drawing/2014/main" id="{B470C15F-7D98-49E7-AF00-3FAA7E005E52}"/>
+                <a16:creationId xmlns:a16="http://schemas.microsoft.com/office/drawing/2014/main" id="{8D18ED16-76CE-4BF2-A8C1-CF4CD73E7610}"/>
               </a:ext>
             </a:extLst>
           </p:cNvPr>
@@ -22135,10 +22181,10 @@
       </p:sp>
       <p:sp>
         <p:nvSpPr>
-          <p:cNvPr id="12" name="f153">
+          <p:cNvPr id="12" name="f155">
             <a:extLst xmlns:a="http://schemas.openxmlformats.org/drawingml/2006/main">
               <a:ext uri="{FF2B5EF4-FFF2-40B4-BE49-F238E27FC236}">
-                <a16:creationId xmlns:a16="http://schemas.microsoft.com/office/drawing/2014/main" id="{B470C15F-7D98-49E7-AF00-3FAA7E005E52}"/>
+                <a16:creationId xmlns:a16="http://schemas.microsoft.com/office/drawing/2014/main" id="{8D18ED16-76CE-4BF2-A8C1-CF4CD73E7610}"/>
               </a:ext>
             </a:extLst>
           </p:cNvPr>
@@ -22294,10 +22340,10 @@
       </p:sp>
       <p:sp>
         <p:nvSpPr>
-          <p:cNvPr id="63" name="dim_f154">
+          <p:cNvPr id="62" name="dim_f156">
             <a:extLst xmlns:a="http://schemas.openxmlformats.org/drawingml/2006/main">
               <a:ext uri="{FF2B5EF4-FFF2-40B4-BE49-F238E27FC236}">
-                <a16:creationId xmlns:a16="http://schemas.microsoft.com/office/drawing/2014/main" id="{899B8696-FC8D-4917-A388-56D2D6FDCDD6}"/>
+                <a16:creationId xmlns:a16="http://schemas.microsoft.com/office/drawing/2014/main" id="{960FE1D7-4D75-4370-A829-DE9D0B3F1C2F}"/>
               </a:ext>
             </a:extLst>
           </p:cNvPr>
@@ -22329,10 +22375,10 @@
       </p:sp>
       <p:sp>
         <p:nvSpPr>
-          <p:cNvPr id="13" name="f154">
+          <p:cNvPr id="13" name="f156">
             <a:extLst xmlns:a="http://schemas.openxmlformats.org/drawingml/2006/main">
               <a:ext uri="{FF2B5EF4-FFF2-40B4-BE49-F238E27FC236}">
-                <a16:creationId xmlns:a16="http://schemas.microsoft.com/office/drawing/2014/main" id="{899B8696-FC8D-4917-A388-56D2D6FDCDD6}"/>
+                <a16:creationId xmlns:a16="http://schemas.microsoft.com/office/drawing/2014/main" id="{960FE1D7-4D75-4370-A829-DE9D0B3F1C2F}"/>
               </a:ext>
             </a:extLst>
           </p:cNvPr>
@@ -22364,10 +22410,10 @@
       </p:sp>
       <p:sp>
         <p:nvSpPr>
-          <p:cNvPr id="64" name="dim_f155">
+          <p:cNvPr id="63" name="dim_f157">
             <a:extLst xmlns:a="http://schemas.openxmlformats.org/drawingml/2006/main">
               <a:ext uri="{FF2B5EF4-FFF2-40B4-BE49-F238E27FC236}">
-                <a16:creationId xmlns:a16="http://schemas.microsoft.com/office/drawing/2014/main" id="{A1505EDF-56F6-455C-9B53-096EBA6C4A7D}"/>
+                <a16:creationId xmlns:a16="http://schemas.microsoft.com/office/drawing/2014/main" id="{4F7EE53B-1E04-45F6-BED5-E7FB30F3887A}"/>
               </a:ext>
             </a:extLst>
           </p:cNvPr>
@@ -22523,10 +22569,10 @@
       </p:sp>
       <p:sp>
         <p:nvSpPr>
-          <p:cNvPr id="14" name="f155">
+          <p:cNvPr id="14" name="f157">
             <a:extLst xmlns:a="http://schemas.openxmlformats.org/drawingml/2006/main">
               <a:ext uri="{FF2B5EF4-FFF2-40B4-BE49-F238E27FC236}">
-                <a16:creationId xmlns:a16="http://schemas.microsoft.com/office/drawing/2014/main" id="{A1505EDF-56F6-455C-9B53-096EBA6C4A7D}"/>
+                <a16:creationId xmlns:a16="http://schemas.microsoft.com/office/drawing/2014/main" id="{4F7EE53B-1E04-45F6-BED5-E7FB30F3887A}"/>
               </a:ext>
             </a:extLst>
           </p:cNvPr>
@@ -22682,10 +22728,10 @@
       </p:sp>
       <p:sp>
         <p:nvSpPr>
-          <p:cNvPr id="65" name="dim_f156">
+          <p:cNvPr id="64" name="dim_f158">
             <a:extLst xmlns:a="http://schemas.openxmlformats.org/drawingml/2006/main">
               <a:ext uri="{FF2B5EF4-FFF2-40B4-BE49-F238E27FC236}">
-                <a16:creationId xmlns:a16="http://schemas.microsoft.com/office/drawing/2014/main" id="{43A286DC-6333-4D5B-A997-49D563F210F2}"/>
+                <a16:creationId xmlns:a16="http://schemas.microsoft.com/office/drawing/2014/main" id="{504AC6BB-360E-431E-9579-F94F97522DE1}"/>
               </a:ext>
             </a:extLst>
           </p:cNvPr>
@@ -22717,10 +22763,10 @@
       </p:sp>
       <p:sp>
         <p:nvSpPr>
-          <p:cNvPr id="15" name="f156">
+          <p:cNvPr id="15" name="f158">
             <a:extLst xmlns:a="http://schemas.openxmlformats.org/drawingml/2006/main">
               <a:ext uri="{FF2B5EF4-FFF2-40B4-BE49-F238E27FC236}">
-                <a16:creationId xmlns:a16="http://schemas.microsoft.com/office/drawing/2014/main" id="{43A286DC-6333-4D5B-A997-49D563F210F2}"/>
+                <a16:creationId xmlns:a16="http://schemas.microsoft.com/office/drawing/2014/main" id="{504AC6BB-360E-431E-9579-F94F97522DE1}"/>
               </a:ext>
             </a:extLst>
           </p:cNvPr>
@@ -22752,10 +22798,10 @@
       </p:sp>
       <p:sp>
         <p:nvSpPr>
-          <p:cNvPr id="66" name="dim_f157">
+          <p:cNvPr id="65" name="dim_f159">
             <a:extLst xmlns:a="http://schemas.openxmlformats.org/drawingml/2006/main">
               <a:ext uri="{FF2B5EF4-FFF2-40B4-BE49-F238E27FC236}">
-                <a16:creationId xmlns:a16="http://schemas.microsoft.com/office/drawing/2014/main" id="{7901AD54-D980-4EDA-B846-A4D8720B01B1}"/>
+                <a16:creationId xmlns:a16="http://schemas.microsoft.com/office/drawing/2014/main" id="{6468F176-8897-46EF-BD73-4652FD7F5C39}"/>
               </a:ext>
             </a:extLst>
           </p:cNvPr>
@@ -22934,10 +22980,10 @@
       </p:sp>
       <p:sp>
         <p:nvSpPr>
-          <p:cNvPr id="16" name="f157">
+          <p:cNvPr id="16" name="f159">
             <a:extLst xmlns:a="http://schemas.openxmlformats.org/drawingml/2006/main">
               <a:ext uri="{FF2B5EF4-FFF2-40B4-BE49-F238E27FC236}">
-                <a16:creationId xmlns:a16="http://schemas.microsoft.com/office/drawing/2014/main" id="{7901AD54-D980-4EDA-B846-A4D8720B01B1}"/>
+                <a16:creationId xmlns:a16="http://schemas.microsoft.com/office/drawing/2014/main" id="{6468F176-8897-46EF-BD73-4652FD7F5C39}"/>
               </a:ext>
             </a:extLst>
           </p:cNvPr>
@@ -23116,10 +23162,10 @@
       </p:sp>
       <p:sp>
         <p:nvSpPr>
-          <p:cNvPr id="67" name="dim_f158">
+          <p:cNvPr id="66" name="dim_f160">
             <a:extLst xmlns:a="http://schemas.openxmlformats.org/drawingml/2006/main">
               <a:ext uri="{FF2B5EF4-FFF2-40B4-BE49-F238E27FC236}">
-                <a16:creationId xmlns:a16="http://schemas.microsoft.com/office/drawing/2014/main" id="{47863EEA-E4BB-429C-9DB5-3BA36CA2CFEB}"/>
+                <a16:creationId xmlns:a16="http://schemas.microsoft.com/office/drawing/2014/main" id="{2BD80425-EBEB-4548-9CF7-56A9786A4E46}"/>
               </a:ext>
             </a:extLst>
           </p:cNvPr>
@@ -23151,10 +23197,10 @@
       </p:sp>
       <p:sp>
         <p:nvSpPr>
-          <p:cNvPr id="17" name="f158">
+          <p:cNvPr id="17" name="f160">
             <a:extLst xmlns:a="http://schemas.openxmlformats.org/drawingml/2006/main">
               <a:ext uri="{FF2B5EF4-FFF2-40B4-BE49-F238E27FC236}">
-                <a16:creationId xmlns:a16="http://schemas.microsoft.com/office/drawing/2014/main" id="{47863EEA-E4BB-429C-9DB5-3BA36CA2CFEB}"/>
+                <a16:creationId xmlns:a16="http://schemas.microsoft.com/office/drawing/2014/main" id="{2BD80425-EBEB-4548-9CF7-56A9786A4E46}"/>
               </a:ext>
             </a:extLst>
           </p:cNvPr>
@@ -23186,10 +23232,10 @@
       </p:sp>
       <p:sp>
         <p:nvSpPr>
-          <p:cNvPr id="68" name="dim_f159">
+          <p:cNvPr id="67" name="dim_f161">
             <a:extLst xmlns:a="http://schemas.openxmlformats.org/drawingml/2006/main">
               <a:ext uri="{FF2B5EF4-FFF2-40B4-BE49-F238E27FC236}">
-                <a16:creationId xmlns:a16="http://schemas.microsoft.com/office/drawing/2014/main" id="{6B18EC87-6F35-4173-A0DB-0244EC91C07E}"/>
+                <a16:creationId xmlns:a16="http://schemas.microsoft.com/office/drawing/2014/main" id="{8FA727AD-D593-4355-AA5E-634E6BFE9FCC}"/>
               </a:ext>
             </a:extLst>
           </p:cNvPr>
@@ -23345,10 +23391,10 @@
       </p:sp>
       <p:sp>
         <p:nvSpPr>
-          <p:cNvPr id="18" name="f159">
+          <p:cNvPr id="18" name="f161">
             <a:extLst xmlns:a="http://schemas.openxmlformats.org/drawingml/2006/main">
               <a:ext uri="{FF2B5EF4-FFF2-40B4-BE49-F238E27FC236}">
-                <a16:creationId xmlns:a16="http://schemas.microsoft.com/office/drawing/2014/main" id="{6B18EC87-6F35-4173-A0DB-0244EC91C07E}"/>
+                <a16:creationId xmlns:a16="http://schemas.microsoft.com/office/drawing/2014/main" id="{8FA727AD-D593-4355-AA5E-634E6BFE9FCC}"/>
               </a:ext>
             </a:extLst>
           </p:cNvPr>
@@ -23504,10 +23550,10 @@
       </p:sp>
       <p:sp>
         <p:nvSpPr>
-          <p:cNvPr id="69" name="dim_f160">
+          <p:cNvPr id="68" name="dim_f162">
             <a:extLst xmlns:a="http://schemas.openxmlformats.org/drawingml/2006/main">
               <a:ext uri="{FF2B5EF4-FFF2-40B4-BE49-F238E27FC236}">
-                <a16:creationId xmlns:a16="http://schemas.microsoft.com/office/drawing/2014/main" id="{D29BC21C-CC49-47D6-BA27-C4A2E69CF69C}"/>
+                <a16:creationId xmlns:a16="http://schemas.microsoft.com/office/drawing/2014/main" id="{A7C121FD-4A6E-48DA-B177-AE62C8DACB8C}"/>
               </a:ext>
             </a:extLst>
           </p:cNvPr>
@@ -23535,10 +23581,10 @@
       </p:sp>
       <p:sp>
         <p:nvSpPr>
-          <p:cNvPr id="19" name="f160">
+          <p:cNvPr id="19" name="f162">
             <a:extLst xmlns:a="http://schemas.openxmlformats.org/drawingml/2006/main">
               <a:ext uri="{FF2B5EF4-FFF2-40B4-BE49-F238E27FC236}">
-                <a16:creationId xmlns:a16="http://schemas.microsoft.com/office/drawing/2014/main" id="{D29BC21C-CC49-47D6-BA27-C4A2E69CF69C}"/>
+                <a16:creationId xmlns:a16="http://schemas.microsoft.com/office/drawing/2014/main" id="{A7C121FD-4A6E-48DA-B177-AE62C8DACB8C}"/>
               </a:ext>
             </a:extLst>
           </p:cNvPr>
@@ -23566,10 +23612,10 @@
       </p:sp>
       <p:sp>
         <p:nvSpPr>
-          <p:cNvPr id="70" name="phaseC_f160">
+          <p:cNvPr id="69" name="phaseC_f162">
             <a:extLst xmlns:a="http://schemas.openxmlformats.org/drawingml/2006/main">
               <a:ext uri="{FF2B5EF4-FFF2-40B4-BE49-F238E27FC236}">
-                <a16:creationId xmlns:a16="http://schemas.microsoft.com/office/drawing/2014/main" id="{D29BC21C-CC49-47D6-BA27-C4A2E69CF69C}"/>
+                <a16:creationId xmlns:a16="http://schemas.microsoft.com/office/drawing/2014/main" id="{A7C121FD-4A6E-48DA-B177-AE62C8DACB8C}"/>
               </a:ext>
             </a:extLst>
           </p:cNvPr>
@@ -23597,10 +23643,10 @@
       </p:sp>
       <p:sp>
         <p:nvSpPr>
-          <p:cNvPr id="71" name="dim_f161">
+          <p:cNvPr id="70" name="dim_f163">
             <a:extLst xmlns:a="http://schemas.openxmlformats.org/drawingml/2006/main">
               <a:ext uri="{FF2B5EF4-FFF2-40B4-BE49-F238E27FC236}">
-                <a16:creationId xmlns:a16="http://schemas.microsoft.com/office/drawing/2014/main" id="{B9CC020C-7C72-462E-8065-7B1172EBBFA0}"/>
+                <a16:creationId xmlns:a16="http://schemas.microsoft.com/office/drawing/2014/main" id="{0CAAE774-6A55-4C91-A060-B270313A3BB0}"/>
               </a:ext>
             </a:extLst>
           </p:cNvPr>
@@ -23610,11 +23656,11 @@
           <p:nvPr/>
         </p:nvSpPr>
         <p:spPr>
-          <a:xfrm xmlns:a="http://schemas.openxmlformats.org/drawingml/2006/main">
+          <a:xfrm xmlns:a="http://schemas.openxmlformats.org/drawingml/2006/main" rot="10800000">
             <a:off x="1228725" y="4371975"/>
             <a:ext cx="114300" cy="114300"/>
           </a:xfrm>
-          <a:prstGeom xmlns:a="http://schemas.openxmlformats.org/drawingml/2006/main" prst="downArrow">
+          <a:prstGeom xmlns:a="http://schemas.openxmlformats.org/drawingml/2006/main" prst="triangle">
             <a:avLst/>
           </a:prstGeom>
           <a:solidFill xmlns:a="http://schemas.openxmlformats.org/drawingml/2006/main">
@@ -23628,10 +23674,10 @@
       </p:sp>
       <p:sp>
         <p:nvSpPr>
-          <p:cNvPr id="20" name="f161">
+          <p:cNvPr id="20" name="f163">
             <a:extLst xmlns:a="http://schemas.openxmlformats.org/drawingml/2006/main">
               <a:ext uri="{FF2B5EF4-FFF2-40B4-BE49-F238E27FC236}">
-                <a16:creationId xmlns:a16="http://schemas.microsoft.com/office/drawing/2014/main" id="{B9CC020C-7C72-462E-8065-7B1172EBBFA0}"/>
+                <a16:creationId xmlns:a16="http://schemas.microsoft.com/office/drawing/2014/main" id="{0CAAE774-6A55-4C91-A060-B270313A3BB0}"/>
               </a:ext>
             </a:extLst>
           </p:cNvPr>
@@ -23641,11 +23687,11 @@
           <p:nvPr/>
         </p:nvSpPr>
         <p:spPr>
-          <a:xfrm xmlns:a="http://schemas.openxmlformats.org/drawingml/2006/main">
+          <a:xfrm xmlns:a="http://schemas.openxmlformats.org/drawingml/2006/main" rot="10800000">
             <a:off x="1228725" y="4371975"/>
             <a:ext cx="114300" cy="114300"/>
           </a:xfrm>
-          <a:prstGeom xmlns:a="http://schemas.openxmlformats.org/drawingml/2006/main" prst="downArrow">
+          <a:prstGeom xmlns:a="http://schemas.openxmlformats.org/drawingml/2006/main" prst="triangle">
             <a:avLst/>
           </a:prstGeom>
           <a:solidFill xmlns:a="http://schemas.openxmlformats.org/drawingml/2006/main">
@@ -23659,10 +23705,10 @@
       </p:sp>
       <p:sp>
         <p:nvSpPr>
-          <p:cNvPr id="72" name="phaseC_f161">
+          <p:cNvPr id="71" name="phaseC_f163">
             <a:extLst xmlns:a="http://schemas.openxmlformats.org/drawingml/2006/main">
               <a:ext uri="{FF2B5EF4-FFF2-40B4-BE49-F238E27FC236}">
-                <a16:creationId xmlns:a16="http://schemas.microsoft.com/office/drawing/2014/main" id="{B9CC020C-7C72-462E-8065-7B1172EBBFA0}"/>
+                <a16:creationId xmlns:a16="http://schemas.microsoft.com/office/drawing/2014/main" id="{0CAAE774-6A55-4C91-A060-B270313A3BB0}"/>
               </a:ext>
             </a:extLst>
           </p:cNvPr>
@@ -23672,11 +23718,11 @@
           <p:nvPr/>
         </p:nvSpPr>
         <p:spPr>
-          <a:xfrm xmlns:a="http://schemas.openxmlformats.org/drawingml/2006/main">
+          <a:xfrm xmlns:a="http://schemas.openxmlformats.org/drawingml/2006/main" rot="10800000">
             <a:off x="1228725" y="4371975"/>
             <a:ext cx="114300" cy="114300"/>
           </a:xfrm>
-          <a:prstGeom xmlns:a="http://schemas.openxmlformats.org/drawingml/2006/main" prst="downArrow">
+          <a:prstGeom xmlns:a="http://schemas.openxmlformats.org/drawingml/2006/main" prst="triangle">
             <a:avLst/>
           </a:prstGeom>
           <a:solidFill xmlns:a="http://schemas.openxmlformats.org/drawingml/2006/main">
@@ -23690,10 +23736,10 @@
       </p:sp>
       <p:sp>
         <p:nvSpPr>
-          <p:cNvPr id="73" name="dim_f162">
+          <p:cNvPr id="72" name="dim_f164">
             <a:extLst xmlns:a="http://schemas.openxmlformats.org/drawingml/2006/main">
               <a:ext uri="{FF2B5EF4-FFF2-40B4-BE49-F238E27FC236}">
-                <a16:creationId xmlns:a16="http://schemas.microsoft.com/office/drawing/2014/main" id="{F5A9F0BB-A62B-4F8A-A9EF-EF43439530E3}"/>
+                <a16:creationId xmlns:a16="http://schemas.microsoft.com/office/drawing/2014/main" id="{041D1625-208D-4735-9C37-D7A6F89D5F8E}"/>
               </a:ext>
             </a:extLst>
           </p:cNvPr>
@@ -23721,10 +23767,10 @@
       </p:sp>
       <p:sp>
         <p:nvSpPr>
-          <p:cNvPr id="21" name="f162">
+          <p:cNvPr id="21" name="f164">
             <a:extLst xmlns:a="http://schemas.openxmlformats.org/drawingml/2006/main">
               <a:ext uri="{FF2B5EF4-FFF2-40B4-BE49-F238E27FC236}">
-                <a16:creationId xmlns:a16="http://schemas.microsoft.com/office/drawing/2014/main" id="{F5A9F0BB-A62B-4F8A-A9EF-EF43439530E3}"/>
+                <a16:creationId xmlns:a16="http://schemas.microsoft.com/office/drawing/2014/main" id="{041D1625-208D-4735-9C37-D7A6F89D5F8E}"/>
               </a:ext>
             </a:extLst>
           </p:cNvPr>
@@ -23752,10 +23798,10 @@
       </p:sp>
       <p:sp>
         <p:nvSpPr>
-          <p:cNvPr id="74" name="dim_f163">
+          <p:cNvPr id="73" name="dim_f165">
             <a:extLst xmlns:a="http://schemas.openxmlformats.org/drawingml/2006/main">
               <a:ext uri="{FF2B5EF4-FFF2-40B4-BE49-F238E27FC236}">
-                <a16:creationId xmlns:a16="http://schemas.microsoft.com/office/drawing/2014/main" id="{AD73A73D-14D0-4C63-B2FF-615068537C21}"/>
+                <a16:creationId xmlns:a16="http://schemas.microsoft.com/office/drawing/2014/main" id="{B90C2CBD-E2A6-4979-8D0C-D7BA57530A8E}"/>
               </a:ext>
             </a:extLst>
           </p:cNvPr>
@@ -23765,11 +23811,11 @@
           <p:nvPr/>
         </p:nvSpPr>
         <p:spPr>
-          <a:xfrm xmlns:a="http://schemas.openxmlformats.org/drawingml/2006/main">
+          <a:xfrm xmlns:a="http://schemas.openxmlformats.org/drawingml/2006/main" rot="10800000">
             <a:off x="3943350" y="4371975"/>
             <a:ext cx="114300" cy="114300"/>
           </a:xfrm>
-          <a:prstGeom xmlns:a="http://schemas.openxmlformats.org/drawingml/2006/main" prst="downArrow">
+          <a:prstGeom xmlns:a="http://schemas.openxmlformats.org/drawingml/2006/main" prst="triangle">
             <a:avLst/>
           </a:prstGeom>
           <a:solidFill xmlns:a="http://schemas.openxmlformats.org/drawingml/2006/main">
@@ -23783,10 +23829,10 @@
       </p:sp>
       <p:sp>
         <p:nvSpPr>
-          <p:cNvPr id="22" name="f163">
+          <p:cNvPr id="22" name="f165">
             <a:extLst xmlns:a="http://schemas.openxmlformats.org/drawingml/2006/main">
               <a:ext uri="{FF2B5EF4-FFF2-40B4-BE49-F238E27FC236}">
-                <a16:creationId xmlns:a16="http://schemas.microsoft.com/office/drawing/2014/main" id="{AD73A73D-14D0-4C63-B2FF-615068537C21}"/>
+                <a16:creationId xmlns:a16="http://schemas.microsoft.com/office/drawing/2014/main" id="{B90C2CBD-E2A6-4979-8D0C-D7BA57530A8E}"/>
               </a:ext>
             </a:extLst>
           </p:cNvPr>
@@ -23796,11 +23842,11 @@
           <p:nvPr/>
         </p:nvSpPr>
         <p:spPr>
-          <a:xfrm xmlns:a="http://schemas.openxmlformats.org/drawingml/2006/main">
+          <a:xfrm xmlns:a="http://schemas.openxmlformats.org/drawingml/2006/main" rot="10800000">
             <a:off x="3943350" y="4371975"/>
             <a:ext cx="114300" cy="114300"/>
           </a:xfrm>
-          <a:prstGeom xmlns:a="http://schemas.openxmlformats.org/drawingml/2006/main" prst="downArrow">
+          <a:prstGeom xmlns:a="http://schemas.openxmlformats.org/drawingml/2006/main" prst="triangle">
             <a:avLst/>
           </a:prstGeom>
           <a:solidFill xmlns:a="http://schemas.openxmlformats.org/drawingml/2006/main">
@@ -23814,10 +23860,10 @@
       </p:sp>
       <p:sp>
         <p:nvSpPr>
-          <p:cNvPr id="75" name="dim_f164">
+          <p:cNvPr id="74" name="dim_f166">
             <a:extLst xmlns:a="http://schemas.openxmlformats.org/drawingml/2006/main">
               <a:ext uri="{FF2B5EF4-FFF2-40B4-BE49-F238E27FC236}">
-                <a16:creationId xmlns:a16="http://schemas.microsoft.com/office/drawing/2014/main" id="{E973E97C-F266-445B-B06D-E04EF5005954}"/>
+                <a16:creationId xmlns:a16="http://schemas.microsoft.com/office/drawing/2014/main" id="{3D68551F-8EEA-470A-A10C-4201A1CF77DA}"/>
               </a:ext>
             </a:extLst>
           </p:cNvPr>
@@ -23845,10 +23891,10 @@
       </p:sp>
       <p:sp>
         <p:nvSpPr>
-          <p:cNvPr id="23" name="f164">
+          <p:cNvPr id="23" name="f166">
             <a:extLst xmlns:a="http://schemas.openxmlformats.org/drawingml/2006/main">
               <a:ext uri="{FF2B5EF4-FFF2-40B4-BE49-F238E27FC236}">
-                <a16:creationId xmlns:a16="http://schemas.microsoft.com/office/drawing/2014/main" id="{E973E97C-F266-445B-B06D-E04EF5005954}"/>
+                <a16:creationId xmlns:a16="http://schemas.microsoft.com/office/drawing/2014/main" id="{3D68551F-8EEA-470A-A10C-4201A1CF77DA}"/>
               </a:ext>
             </a:extLst>
           </p:cNvPr>
@@ -23876,10 +23922,10 @@
       </p:sp>
       <p:sp>
         <p:nvSpPr>
-          <p:cNvPr id="76" name="phaseC_f164">
+          <p:cNvPr id="75" name="phaseC_f166">
             <a:extLst xmlns:a="http://schemas.openxmlformats.org/drawingml/2006/main">
               <a:ext uri="{FF2B5EF4-FFF2-40B4-BE49-F238E27FC236}">
-                <a16:creationId xmlns:a16="http://schemas.microsoft.com/office/drawing/2014/main" id="{E973E97C-F266-445B-B06D-E04EF5005954}"/>
+                <a16:creationId xmlns:a16="http://schemas.microsoft.com/office/drawing/2014/main" id="{3D68551F-8EEA-470A-A10C-4201A1CF77DA}"/>
               </a:ext>
             </a:extLst>
           </p:cNvPr>
@@ -23907,10 +23953,10 @@
       </p:sp>
       <p:sp>
         <p:nvSpPr>
-          <p:cNvPr id="77" name="dim_f165">
+          <p:cNvPr id="76" name="dim_f167">
             <a:extLst xmlns:a="http://schemas.openxmlformats.org/drawingml/2006/main">
               <a:ext uri="{FF2B5EF4-FFF2-40B4-BE49-F238E27FC236}">
-                <a16:creationId xmlns:a16="http://schemas.microsoft.com/office/drawing/2014/main" id="{00CCF043-4D9F-4D5F-92B6-FD0011D12E84}"/>
+                <a16:creationId xmlns:a16="http://schemas.microsoft.com/office/drawing/2014/main" id="{5B16B8D8-F141-44C3-8BE2-1D422BD4ED3C}"/>
               </a:ext>
             </a:extLst>
           </p:cNvPr>
@@ -23938,10 +23984,10 @@
       </p:sp>
       <p:sp>
         <p:nvSpPr>
-          <p:cNvPr id="24" name="f165">
+          <p:cNvPr id="24" name="f167">
             <a:extLst xmlns:a="http://schemas.openxmlformats.org/drawingml/2006/main">
               <a:ext uri="{FF2B5EF4-FFF2-40B4-BE49-F238E27FC236}">
-                <a16:creationId xmlns:a16="http://schemas.microsoft.com/office/drawing/2014/main" id="{00CCF043-4D9F-4D5F-92B6-FD0011D12E84}"/>
+                <a16:creationId xmlns:a16="http://schemas.microsoft.com/office/drawing/2014/main" id="{5B16B8D8-F141-44C3-8BE2-1D422BD4ED3C}"/>
               </a:ext>
             </a:extLst>
           </p:cNvPr>
@@ -23969,10 +24015,10 @@
       </p:sp>
       <p:sp>
         <p:nvSpPr>
-          <p:cNvPr id="78" name="dim_f166">
+          <p:cNvPr id="77" name="dim_f168">
             <a:extLst xmlns:a="http://schemas.openxmlformats.org/drawingml/2006/main">
               <a:ext uri="{FF2B5EF4-FFF2-40B4-BE49-F238E27FC236}">
-                <a16:creationId xmlns:a16="http://schemas.microsoft.com/office/drawing/2014/main" id="{CBC0F3B7-B3B6-40DF-A17A-12231D0C3106}"/>
+                <a16:creationId xmlns:a16="http://schemas.microsoft.com/office/drawing/2014/main" id="{B38E4ACB-55C6-4827-9CF1-CDF68D1363F4}"/>
               </a:ext>
             </a:extLst>
           </p:cNvPr>
@@ -24000,10 +24046,10 @@
       </p:sp>
       <p:sp>
         <p:nvSpPr>
-          <p:cNvPr id="25" name="f166">
+          <p:cNvPr id="25" name="f168">
             <a:extLst xmlns:a="http://schemas.openxmlformats.org/drawingml/2006/main">
               <a:ext uri="{FF2B5EF4-FFF2-40B4-BE49-F238E27FC236}">
-                <a16:creationId xmlns:a16="http://schemas.microsoft.com/office/drawing/2014/main" id="{CBC0F3B7-B3B6-40DF-A17A-12231D0C3106}"/>
+                <a16:creationId xmlns:a16="http://schemas.microsoft.com/office/drawing/2014/main" id="{B38E4ACB-55C6-4827-9CF1-CDF68D1363F4}"/>
               </a:ext>
             </a:extLst>
           </p:cNvPr>
@@ -24031,10 +24077,10 @@
       </p:sp>
       <p:sp>
         <p:nvSpPr>
-          <p:cNvPr id="79" name="dim_f167">
+          <p:cNvPr id="78" name="dim_f169">
             <a:extLst xmlns:a="http://schemas.openxmlformats.org/drawingml/2006/main">
               <a:ext uri="{FF2B5EF4-FFF2-40B4-BE49-F238E27FC236}">
-                <a16:creationId xmlns:a16="http://schemas.microsoft.com/office/drawing/2014/main" id="{3C9D6D09-E455-46DD-930E-B499568B4480}"/>
+                <a16:creationId xmlns:a16="http://schemas.microsoft.com/office/drawing/2014/main" id="{1FE75A4F-942A-4A63-8FE6-6B0FA51D8B10}"/>
               </a:ext>
             </a:extLst>
           </p:cNvPr>
@@ -24044,11 +24090,11 @@
           <p:nvPr/>
         </p:nvSpPr>
         <p:spPr>
-          <a:xfrm xmlns:a="http://schemas.openxmlformats.org/drawingml/2006/main">
+          <a:xfrm xmlns:a="http://schemas.openxmlformats.org/drawingml/2006/main" rot="10800000">
             <a:off x="1371600" y="6124575"/>
             <a:ext cx="114300" cy="114300"/>
           </a:xfrm>
-          <a:prstGeom xmlns:a="http://schemas.openxmlformats.org/drawingml/2006/main" prst="downArrow">
+          <a:prstGeom xmlns:a="http://schemas.openxmlformats.org/drawingml/2006/main" prst="triangle">
             <a:avLst/>
           </a:prstGeom>
           <a:solidFill xmlns:a="http://schemas.openxmlformats.org/drawingml/2006/main">
@@ -24062,10 +24108,10 @@
       </p:sp>
       <p:sp>
         <p:nvSpPr>
-          <p:cNvPr id="26" name="f167">
+          <p:cNvPr id="26" name="f169">
             <a:extLst xmlns:a="http://schemas.openxmlformats.org/drawingml/2006/main">
               <a:ext uri="{FF2B5EF4-FFF2-40B4-BE49-F238E27FC236}">
-                <a16:creationId xmlns:a16="http://schemas.microsoft.com/office/drawing/2014/main" id="{3C9D6D09-E455-46DD-930E-B499568B4480}"/>
+                <a16:creationId xmlns:a16="http://schemas.microsoft.com/office/drawing/2014/main" id="{1FE75A4F-942A-4A63-8FE6-6B0FA51D8B10}"/>
               </a:ext>
             </a:extLst>
           </p:cNvPr>
@@ -24075,11 +24121,11 @@
           <p:nvPr/>
         </p:nvSpPr>
         <p:spPr>
-          <a:xfrm xmlns:a="http://schemas.openxmlformats.org/drawingml/2006/main">
+          <a:xfrm xmlns:a="http://schemas.openxmlformats.org/drawingml/2006/main" rot="10800000">
             <a:off x="1371600" y="6124575"/>
             <a:ext cx="114300" cy="114300"/>
           </a:xfrm>
-          <a:prstGeom xmlns:a="http://schemas.openxmlformats.org/drawingml/2006/main" prst="downArrow">
+          <a:prstGeom xmlns:a="http://schemas.openxmlformats.org/drawingml/2006/main" prst="triangle">
             <a:avLst/>
           </a:prstGeom>
           <a:solidFill xmlns:a="http://schemas.openxmlformats.org/drawingml/2006/main">
@@ -24093,10 +24139,10 @@
       </p:sp>
       <p:sp>
         <p:nvSpPr>
-          <p:cNvPr id="80" name="dim_f168">
+          <p:cNvPr id="79" name="dim_f170">
             <a:extLst xmlns:a="http://schemas.openxmlformats.org/drawingml/2006/main">
               <a:ext uri="{FF2B5EF4-FFF2-40B4-BE49-F238E27FC236}">
-                <a16:creationId xmlns:a16="http://schemas.microsoft.com/office/drawing/2014/main" id="{231E65D6-1AD0-498E-97A1-465682EE32BC}"/>
+                <a16:creationId xmlns:a16="http://schemas.microsoft.com/office/drawing/2014/main" id="{1D878B2E-6E34-4D1F-8B5C-1C9485B3E551}"/>
               </a:ext>
             </a:extLst>
           </p:cNvPr>
@@ -24124,10 +24170,10 @@
       </p:sp>
       <p:sp>
         <p:nvSpPr>
-          <p:cNvPr id="27" name="f168">
+          <p:cNvPr id="27" name="f170">
             <a:extLst xmlns:a="http://schemas.openxmlformats.org/drawingml/2006/main">
               <a:ext uri="{FF2B5EF4-FFF2-40B4-BE49-F238E27FC236}">
-                <a16:creationId xmlns:a16="http://schemas.microsoft.com/office/drawing/2014/main" id="{231E65D6-1AD0-498E-97A1-465682EE32BC}"/>
+                <a16:creationId xmlns:a16="http://schemas.microsoft.com/office/drawing/2014/main" id="{1D878B2E-6E34-4D1F-8B5C-1C9485B3E551}"/>
               </a:ext>
             </a:extLst>
           </p:cNvPr>
@@ -24155,10 +24201,10 @@
       </p:sp>
       <p:sp>
         <p:nvSpPr>
-          <p:cNvPr id="81" name="dim_f169">
+          <p:cNvPr id="80" name="dim_f171">
             <a:extLst xmlns:a="http://schemas.openxmlformats.org/drawingml/2006/main">
               <a:ext uri="{FF2B5EF4-FFF2-40B4-BE49-F238E27FC236}">
-                <a16:creationId xmlns:a16="http://schemas.microsoft.com/office/drawing/2014/main" id="{CB89FD41-E563-419F-BBFC-CB72EA7B78EB}"/>
+                <a16:creationId xmlns:a16="http://schemas.microsoft.com/office/drawing/2014/main" id="{2CD363E8-42C9-45A5-A394-44C541C99A0F}"/>
               </a:ext>
             </a:extLst>
           </p:cNvPr>
@@ -24186,10 +24232,10 @@
       </p:sp>
       <p:sp>
         <p:nvSpPr>
-          <p:cNvPr id="28" name="f169">
+          <p:cNvPr id="28" name="f171">
             <a:extLst xmlns:a="http://schemas.openxmlformats.org/drawingml/2006/main">
               <a:ext uri="{FF2B5EF4-FFF2-40B4-BE49-F238E27FC236}">
-                <a16:creationId xmlns:a16="http://schemas.microsoft.com/office/drawing/2014/main" id="{CB89FD41-E563-419F-BBFC-CB72EA7B78EB}"/>
+                <a16:creationId xmlns:a16="http://schemas.microsoft.com/office/drawing/2014/main" id="{2CD363E8-42C9-45A5-A394-44C541C99A0F}"/>
               </a:ext>
             </a:extLst>
           </p:cNvPr>
@@ -24217,10 +24263,10 @@
       </p:sp>
       <p:sp>
         <p:nvSpPr>
-          <p:cNvPr id="82" name="dim_f170">
+          <p:cNvPr id="81" name="dim_f172">
             <a:extLst xmlns:a="http://schemas.openxmlformats.org/drawingml/2006/main">
               <a:ext uri="{FF2B5EF4-FFF2-40B4-BE49-F238E27FC236}">
-                <a16:creationId xmlns:a16="http://schemas.microsoft.com/office/drawing/2014/main" id="{DDC6D984-48A0-435F-A3ED-817A86BE02F2}"/>
+                <a16:creationId xmlns:a16="http://schemas.microsoft.com/office/drawing/2014/main" id="{0DBB869A-7999-4A8F-8B12-8AFDFA80E5D6}"/>
               </a:ext>
             </a:extLst>
           </p:cNvPr>
@@ -24230,11 +24276,11 @@
           <p:nvPr/>
         </p:nvSpPr>
         <p:spPr>
-          <a:xfrm xmlns:a="http://schemas.openxmlformats.org/drawingml/2006/main">
+          <a:xfrm xmlns:a="http://schemas.openxmlformats.org/drawingml/2006/main" rot="10800000">
             <a:off x="3943350" y="6124575"/>
             <a:ext cx="114300" cy="114300"/>
           </a:xfrm>
-          <a:prstGeom xmlns:a="http://schemas.openxmlformats.org/drawingml/2006/main" prst="downArrow">
+          <a:prstGeom xmlns:a="http://schemas.openxmlformats.org/drawingml/2006/main" prst="triangle">
             <a:avLst/>
           </a:prstGeom>
           <a:solidFill xmlns:a="http://schemas.openxmlformats.org/drawingml/2006/main">
@@ -24248,10 +24294,10 @@
       </p:sp>
       <p:sp>
         <p:nvSpPr>
-          <p:cNvPr id="29" name="f170">
+          <p:cNvPr id="29" name="f172">
             <a:extLst xmlns:a="http://schemas.openxmlformats.org/drawingml/2006/main">
               <a:ext uri="{FF2B5EF4-FFF2-40B4-BE49-F238E27FC236}">
-                <a16:creationId xmlns:a16="http://schemas.microsoft.com/office/drawing/2014/main" id="{DDC6D984-48A0-435F-A3ED-817A86BE02F2}"/>
+                <a16:creationId xmlns:a16="http://schemas.microsoft.com/office/drawing/2014/main" id="{0DBB869A-7999-4A8F-8B12-8AFDFA80E5D6}"/>
               </a:ext>
             </a:extLst>
           </p:cNvPr>
@@ -24261,11 +24307,11 @@
           <p:nvPr/>
         </p:nvSpPr>
         <p:spPr>
-          <a:xfrm xmlns:a="http://schemas.openxmlformats.org/drawingml/2006/main">
+          <a:xfrm xmlns:a="http://schemas.openxmlformats.org/drawingml/2006/main" rot="10800000">
             <a:off x="3943350" y="6124575"/>
             <a:ext cx="114300" cy="114300"/>
           </a:xfrm>
-          <a:prstGeom xmlns:a="http://schemas.openxmlformats.org/drawingml/2006/main" prst="downArrow">
+          <a:prstGeom xmlns:a="http://schemas.openxmlformats.org/drawingml/2006/main" prst="triangle">
             <a:avLst/>
           </a:prstGeom>
           <a:solidFill xmlns:a="http://schemas.openxmlformats.org/drawingml/2006/main">
@@ -24279,10 +24325,10 @@
       </p:sp>
       <p:sp>
         <p:nvSpPr>
-          <p:cNvPr id="83" name="dim_f171">
+          <p:cNvPr id="82" name="dim_f173">
             <a:extLst xmlns:a="http://schemas.openxmlformats.org/drawingml/2006/main">
               <a:ext uri="{FF2B5EF4-FFF2-40B4-BE49-F238E27FC236}">
-                <a16:creationId xmlns:a16="http://schemas.microsoft.com/office/drawing/2014/main" id="{ED898031-45BE-46E7-BB1B-7685521148BF}"/>
+                <a16:creationId xmlns:a16="http://schemas.microsoft.com/office/drawing/2014/main" id="{2A719C4B-8F82-4F08-BD8E-0B313E9E2D29}"/>
               </a:ext>
             </a:extLst>
           </p:cNvPr>
@@ -24310,10 +24356,10 @@
       </p:sp>
       <p:sp>
         <p:nvSpPr>
-          <p:cNvPr id="30" name="f171">
+          <p:cNvPr id="30" name="f173">
             <a:extLst xmlns:a="http://schemas.openxmlformats.org/drawingml/2006/main">
               <a:ext uri="{FF2B5EF4-FFF2-40B4-BE49-F238E27FC236}">
-                <a16:creationId xmlns:a16="http://schemas.microsoft.com/office/drawing/2014/main" id="{ED898031-45BE-46E7-BB1B-7685521148BF}"/>
+                <a16:creationId xmlns:a16="http://schemas.microsoft.com/office/drawing/2014/main" id="{2A719C4B-8F82-4F08-BD8E-0B313E9E2D29}"/>
               </a:ext>
             </a:extLst>
           </p:cNvPr>
@@ -24341,10 +24387,10 @@
       </p:sp>
       <p:sp>
         <p:nvSpPr>
-          <p:cNvPr id="84" name="dim_f172">
+          <p:cNvPr id="83" name="dim_f174">
             <a:extLst xmlns:a="http://schemas.openxmlformats.org/drawingml/2006/main">
               <a:ext uri="{FF2B5EF4-FFF2-40B4-BE49-F238E27FC236}">
-                <a16:creationId xmlns:a16="http://schemas.microsoft.com/office/drawing/2014/main" id="{00DBDD0F-B1A2-482E-9682-EEB6D39FDA51}"/>
+                <a16:creationId xmlns:a16="http://schemas.microsoft.com/office/drawing/2014/main" id="{31B1CC4F-60E2-42D1-93F2-ED3B1EB22012}"/>
               </a:ext>
             </a:extLst>
           </p:cNvPr>
@@ -24372,10 +24418,10 @@
       </p:sp>
       <p:sp>
         <p:nvSpPr>
-          <p:cNvPr id="31" name="f172">
+          <p:cNvPr id="31" name="f174">
             <a:extLst xmlns:a="http://schemas.openxmlformats.org/drawingml/2006/main">
               <a:ext uri="{FF2B5EF4-FFF2-40B4-BE49-F238E27FC236}">
-                <a16:creationId xmlns:a16="http://schemas.microsoft.com/office/drawing/2014/main" id="{00DBDD0F-B1A2-482E-9682-EEB6D39FDA51}"/>
+                <a16:creationId xmlns:a16="http://schemas.microsoft.com/office/drawing/2014/main" id="{31B1CC4F-60E2-42D1-93F2-ED3B1EB22012}"/>
               </a:ext>
             </a:extLst>
           </p:cNvPr>
@@ -24403,10 +24449,10 @@
       </p:sp>
       <p:sp>
         <p:nvSpPr>
-          <p:cNvPr id="85" name="dim_f173">
+          <p:cNvPr id="84" name="dim_f175">
             <a:extLst xmlns:a="http://schemas.openxmlformats.org/drawingml/2006/main">
               <a:ext uri="{FF2B5EF4-FFF2-40B4-BE49-F238E27FC236}">
-                <a16:creationId xmlns:a16="http://schemas.microsoft.com/office/drawing/2014/main" id="{39748CE6-00A5-47BE-B5D2-BC78C7A532FD}"/>
+                <a16:creationId xmlns:a16="http://schemas.microsoft.com/office/drawing/2014/main" id="{B192F68E-1246-42BF-92B7-E258D893B672}"/>
               </a:ext>
             </a:extLst>
           </p:cNvPr>
@@ -24434,10 +24480,10 @@
       </p:sp>
       <p:sp>
         <p:nvSpPr>
-          <p:cNvPr id="32" name="f173">
+          <p:cNvPr id="32" name="f175">
             <a:extLst xmlns:a="http://schemas.openxmlformats.org/drawingml/2006/main">
               <a:ext uri="{FF2B5EF4-FFF2-40B4-BE49-F238E27FC236}">
-                <a16:creationId xmlns:a16="http://schemas.microsoft.com/office/drawing/2014/main" id="{39748CE6-00A5-47BE-B5D2-BC78C7A532FD}"/>
+                <a16:creationId xmlns:a16="http://schemas.microsoft.com/office/drawing/2014/main" id="{B192F68E-1246-42BF-92B7-E258D893B672}"/>
               </a:ext>
             </a:extLst>
           </p:cNvPr>
@@ -24465,10 +24511,10 @@
       </p:sp>
       <p:sp>
         <p:nvSpPr>
-          <p:cNvPr id="86" name="dim_f174">
+          <p:cNvPr id="85" name="dim_f176">
             <a:extLst xmlns:a="http://schemas.openxmlformats.org/drawingml/2006/main">
               <a:ext uri="{FF2B5EF4-FFF2-40B4-BE49-F238E27FC236}">
-                <a16:creationId xmlns:a16="http://schemas.microsoft.com/office/drawing/2014/main" id="{01DE5B95-FBD4-4FEC-BE8D-4B963E027DCC}"/>
+                <a16:creationId xmlns:a16="http://schemas.microsoft.com/office/drawing/2014/main" id="{9EF6BD25-F462-4669-A631-8CD87FF7D03D}"/>
               </a:ext>
             </a:extLst>
           </p:cNvPr>
@@ -24478,11 +24524,11 @@
           <p:nvPr/>
         </p:nvSpPr>
         <p:spPr>
-          <a:xfrm xmlns:a="http://schemas.openxmlformats.org/drawingml/2006/main">
+          <a:xfrm xmlns:a="http://schemas.openxmlformats.org/drawingml/2006/main" rot="0">
             <a:off x="6753225" y="6057900"/>
             <a:ext cx="114300" cy="114300"/>
           </a:xfrm>
-          <a:prstGeom xmlns:a="http://schemas.openxmlformats.org/drawingml/2006/main" prst="upArrow">
+          <a:prstGeom xmlns:a="http://schemas.openxmlformats.org/drawingml/2006/main" prst="triangle">
             <a:avLst/>
           </a:prstGeom>
           <a:solidFill xmlns:a="http://schemas.openxmlformats.org/drawingml/2006/main">
@@ -24496,10 +24542,10 @@
       </p:sp>
       <p:sp>
         <p:nvSpPr>
-          <p:cNvPr id="33" name="f174">
+          <p:cNvPr id="33" name="f176">
             <a:extLst xmlns:a="http://schemas.openxmlformats.org/drawingml/2006/main">
               <a:ext uri="{FF2B5EF4-FFF2-40B4-BE49-F238E27FC236}">
-                <a16:creationId xmlns:a16="http://schemas.microsoft.com/office/drawing/2014/main" id="{01DE5B95-FBD4-4FEC-BE8D-4B963E027DCC}"/>
+                <a16:creationId xmlns:a16="http://schemas.microsoft.com/office/drawing/2014/main" id="{9EF6BD25-F462-4669-A631-8CD87FF7D03D}"/>
               </a:ext>
             </a:extLst>
           </p:cNvPr>
@@ -24509,11 +24555,11 @@
           <p:nvPr/>
         </p:nvSpPr>
         <p:spPr>
-          <a:xfrm xmlns:a="http://schemas.openxmlformats.org/drawingml/2006/main">
+          <a:xfrm xmlns:a="http://schemas.openxmlformats.org/drawingml/2006/main" rot="0">
             <a:off x="6753225" y="6057900"/>
             <a:ext cx="114300" cy="114300"/>
           </a:xfrm>
-          <a:prstGeom xmlns:a="http://schemas.openxmlformats.org/drawingml/2006/main" prst="upArrow">
+          <a:prstGeom xmlns:a="http://schemas.openxmlformats.org/drawingml/2006/main" prst="triangle">
             <a:avLst/>
           </a:prstGeom>
           <a:solidFill xmlns:a="http://schemas.openxmlformats.org/drawingml/2006/main">
@@ -24527,10 +24573,10 @@
       </p:sp>
       <p:sp>
         <p:nvSpPr>
-          <p:cNvPr id="87" name="dim_f175">
+          <p:cNvPr id="86" name="dim_f177">
             <a:extLst xmlns:a="http://schemas.openxmlformats.org/drawingml/2006/main">
               <a:ext uri="{FF2B5EF4-FFF2-40B4-BE49-F238E27FC236}">
-                <a16:creationId xmlns:a16="http://schemas.microsoft.com/office/drawing/2014/main" id="{4D11FD74-92A1-461C-A78D-1AF6EE81C431}"/>
+                <a16:creationId xmlns:a16="http://schemas.microsoft.com/office/drawing/2014/main" id="{D89337D6-2A02-431A-BCF1-22DBAC12E387}"/>
               </a:ext>
             </a:extLst>
           </p:cNvPr>
@@ -24686,10 +24732,10 @@
       </p:sp>
       <p:sp>
         <p:nvSpPr>
-          <p:cNvPr id="34" name="f175">
+          <p:cNvPr id="34" name="f177">
             <a:extLst xmlns:a="http://schemas.openxmlformats.org/drawingml/2006/main">
               <a:ext uri="{FF2B5EF4-FFF2-40B4-BE49-F238E27FC236}">
-                <a16:creationId xmlns:a16="http://schemas.microsoft.com/office/drawing/2014/main" id="{4D11FD74-92A1-461C-A78D-1AF6EE81C431}"/>
+                <a16:creationId xmlns:a16="http://schemas.microsoft.com/office/drawing/2014/main" id="{D89337D6-2A02-431A-BCF1-22DBAC12E387}"/>
               </a:ext>
             </a:extLst>
           </p:cNvPr>
@@ -24845,10 +24891,10 @@
       </p:sp>
       <p:sp>
         <p:nvSpPr>
-          <p:cNvPr id="88" name="dim_f176">
+          <p:cNvPr id="87" name="dim_f178">
             <a:extLst xmlns:a="http://schemas.openxmlformats.org/drawingml/2006/main">
               <a:ext uri="{FF2B5EF4-FFF2-40B4-BE49-F238E27FC236}">
-                <a16:creationId xmlns:a16="http://schemas.microsoft.com/office/drawing/2014/main" id="{2A5FDF67-81ED-4A94-B913-8C63D5E6C26D}"/>
+                <a16:creationId xmlns:a16="http://schemas.microsoft.com/office/drawing/2014/main" id="{3B661E07-6C56-4A93-BBB7-6C4E8F381DB2}"/>
               </a:ext>
             </a:extLst>
           </p:cNvPr>
@@ -24876,10 +24922,10 @@
       </p:sp>
       <p:sp>
         <p:nvSpPr>
-          <p:cNvPr id="35" name="f176">
+          <p:cNvPr id="35" name="f178">
             <a:extLst xmlns:a="http://schemas.openxmlformats.org/drawingml/2006/main">
               <a:ext uri="{FF2B5EF4-FFF2-40B4-BE49-F238E27FC236}">
-                <a16:creationId xmlns:a16="http://schemas.microsoft.com/office/drawing/2014/main" id="{2A5FDF67-81ED-4A94-B913-8C63D5E6C26D}"/>
+                <a16:creationId xmlns:a16="http://schemas.microsoft.com/office/drawing/2014/main" id="{3B661E07-6C56-4A93-BBB7-6C4E8F381DB2}"/>
               </a:ext>
             </a:extLst>
           </p:cNvPr>
@@ -24907,10 +24953,10 @@
       </p:sp>
       <p:sp>
         <p:nvSpPr>
-          <p:cNvPr id="89" name="dim_f177">
+          <p:cNvPr id="88" name="dim_f179">
             <a:extLst xmlns:a="http://schemas.openxmlformats.org/drawingml/2006/main">
               <a:ext uri="{FF2B5EF4-FFF2-40B4-BE49-F238E27FC236}">
-                <a16:creationId xmlns:a16="http://schemas.microsoft.com/office/drawing/2014/main" id="{E9DA4510-7B4E-4528-B30E-3EB92CDBC884}"/>
+                <a16:creationId xmlns:a16="http://schemas.microsoft.com/office/drawing/2014/main" id="{82C8195E-7D88-4636-8CB6-2EFEF8F8F0D0}"/>
               </a:ext>
             </a:extLst>
           </p:cNvPr>
@@ -24938,10 +24984,10 @@
       </p:sp>
       <p:sp>
         <p:nvSpPr>
-          <p:cNvPr id="36" name="f177">
+          <p:cNvPr id="36" name="f179">
             <a:extLst xmlns:a="http://schemas.openxmlformats.org/drawingml/2006/main">
               <a:ext uri="{FF2B5EF4-FFF2-40B4-BE49-F238E27FC236}">
-                <a16:creationId xmlns:a16="http://schemas.microsoft.com/office/drawing/2014/main" id="{E9DA4510-7B4E-4528-B30E-3EB92CDBC884}"/>
+                <a16:creationId xmlns:a16="http://schemas.microsoft.com/office/drawing/2014/main" id="{82C8195E-7D88-4636-8CB6-2EFEF8F8F0D0}"/>
               </a:ext>
             </a:extLst>
           </p:cNvPr>
@@ -24969,10 +25015,10 @@
       </p:sp>
       <p:sp>
         <p:nvSpPr>
-          <p:cNvPr id="90" name="dim_f178">
+          <p:cNvPr id="89" name="dim_f180">
             <a:extLst xmlns:a="http://schemas.openxmlformats.org/drawingml/2006/main">
               <a:ext uri="{FF2B5EF4-FFF2-40B4-BE49-F238E27FC236}">
-                <a16:creationId xmlns:a16="http://schemas.microsoft.com/office/drawing/2014/main" id="{4A0B5937-4876-4DB8-A937-78494DB77548}"/>
+                <a16:creationId xmlns:a16="http://schemas.microsoft.com/office/drawing/2014/main" id="{47F88311-20D5-4C1C-B66C-1AE03AB83125}"/>
               </a:ext>
             </a:extLst>
           </p:cNvPr>
@@ -24983,8 +25029,8 @@
         </p:nvSpPr>
         <p:spPr>
           <a:xfrm xmlns:a="http://schemas.openxmlformats.org/drawingml/2006/main">
-            <a:off x="7724775" y="5572125"/>
-            <a:ext cx="371475" cy="95"/>
+            <a:off x="7839075" y="5572125"/>
+            <a:ext cx="257175" cy="95"/>
           </a:xfrm>
           <a:prstGeom xmlns:a="http://schemas.openxmlformats.org/drawingml/2006/main" prst="line">
             <a:avLst/>
@@ -25000,10 +25046,10 @@
       </p:sp>
       <p:sp>
         <p:nvSpPr>
-          <p:cNvPr id="37" name="f178">
+          <p:cNvPr id="37" name="f180">
             <a:extLst xmlns:a="http://schemas.openxmlformats.org/drawingml/2006/main">
               <a:ext uri="{FF2B5EF4-FFF2-40B4-BE49-F238E27FC236}">
-                <a16:creationId xmlns:a16="http://schemas.microsoft.com/office/drawing/2014/main" id="{4A0B5937-4876-4DB8-A937-78494DB77548}"/>
+                <a16:creationId xmlns:a16="http://schemas.microsoft.com/office/drawing/2014/main" id="{47F88311-20D5-4C1C-B66C-1AE03AB83125}"/>
               </a:ext>
             </a:extLst>
           </p:cNvPr>
@@ -25014,8 +25060,8 @@
         </p:nvSpPr>
         <p:spPr>
           <a:xfrm xmlns:a="http://schemas.openxmlformats.org/drawingml/2006/main">
-            <a:off x="7724775" y="5572125"/>
-            <a:ext cx="371475" cy="95"/>
+            <a:off x="7839075" y="5572125"/>
+            <a:ext cx="257175" cy="95"/>
           </a:xfrm>
           <a:prstGeom xmlns:a="http://schemas.openxmlformats.org/drawingml/2006/main" prst="line">
             <a:avLst/>
@@ -25031,10 +25077,10 @@
       </p:sp>
       <p:sp>
         <p:nvSpPr>
-          <p:cNvPr id="91" name="dim_f179">
+          <p:cNvPr id="90" name="dim_f181">
             <a:extLst xmlns:a="http://schemas.openxmlformats.org/drawingml/2006/main">
               <a:ext uri="{FF2B5EF4-FFF2-40B4-BE49-F238E27FC236}">
-                <a16:creationId xmlns:a16="http://schemas.microsoft.com/office/drawing/2014/main" id="{3E185338-3850-4240-B191-C8894DF6459C}"/>
+                <a16:creationId xmlns:a16="http://schemas.microsoft.com/office/drawing/2014/main" id="{CDA596BB-DB51-4BF4-A0D0-8C37D93BC502}"/>
               </a:ext>
             </a:extLst>
           </p:cNvPr>
@@ -25044,28 +25090,28 @@
           <p:nvPr/>
         </p:nvSpPr>
         <p:spPr>
-          <a:xfrm xmlns:a="http://schemas.openxmlformats.org/drawingml/2006/main" flipH="1">
+          <a:xfrm xmlns:a="http://schemas.openxmlformats.org/drawingml/2006/main" rot="16200000">
             <a:off x="7724775" y="5514975"/>
-            <a:ext cx="95250" cy="57150"/>
+            <a:ext cx="114300" cy="114300"/>
           </a:xfrm>
-          <a:prstGeom xmlns:a="http://schemas.openxmlformats.org/drawingml/2006/main" prst="line">
+          <a:prstGeom xmlns:a="http://schemas.openxmlformats.org/drawingml/2006/main" prst="triangle">
             <a:avLst/>
           </a:prstGeom>
-          <a:noFill xmlns:a="http://schemas.openxmlformats.org/drawingml/2006/main"/>
-          <a:ln xmlns:a="http://schemas.openxmlformats.org/drawingml/2006/main" w="28575">
-            <a:solidFill>
-              <a:srgbClr val="C7D2EF"/>
-            </a:solidFill>
+          <a:solidFill xmlns:a="http://schemas.openxmlformats.org/drawingml/2006/main">
+            <a:srgbClr val="C7D2EF"/>
+          </a:solidFill>
+          <a:ln xmlns:a="http://schemas.openxmlformats.org/drawingml/2006/main" w="0">
+            <a:noFill/>
             <a:prstDash val="solid"/>
           </a:ln>
         </p:spPr>
       </p:sp>
       <p:sp>
         <p:nvSpPr>
-          <p:cNvPr id="38" name="f179">
+          <p:cNvPr id="38" name="f181">
             <a:extLst xmlns:a="http://schemas.openxmlformats.org/drawingml/2006/main">
               <a:ext uri="{FF2B5EF4-FFF2-40B4-BE49-F238E27FC236}">
-                <a16:creationId xmlns:a16="http://schemas.microsoft.com/office/drawing/2014/main" id="{3E185338-3850-4240-B191-C8894DF6459C}"/>
+                <a16:creationId xmlns:a16="http://schemas.microsoft.com/office/drawing/2014/main" id="{CDA596BB-DB51-4BF4-A0D0-8C37D93BC502}"/>
               </a:ext>
             </a:extLst>
           </p:cNvPr>
@@ -25075,90 +25121,28 @@
           <p:nvPr/>
         </p:nvSpPr>
         <p:spPr>
-          <a:xfrm xmlns:a="http://schemas.openxmlformats.org/drawingml/2006/main" flipH="1">
+          <a:xfrm xmlns:a="http://schemas.openxmlformats.org/drawingml/2006/main" rot="16200000">
             <a:off x="7724775" y="5514975"/>
-            <a:ext cx="95250" cy="57150"/>
+            <a:ext cx="114300" cy="114300"/>
           </a:xfrm>
-          <a:prstGeom xmlns:a="http://schemas.openxmlformats.org/drawingml/2006/main" prst="line">
+          <a:prstGeom xmlns:a="http://schemas.openxmlformats.org/drawingml/2006/main" prst="triangle">
             <a:avLst/>
           </a:prstGeom>
-          <a:noFill xmlns:a="http://schemas.openxmlformats.org/drawingml/2006/main"/>
-          <a:ln xmlns:a="http://schemas.openxmlformats.org/drawingml/2006/main" w="28575">
-            <a:solidFill>
-              <a:srgbClr val="4264D0"/>
-            </a:solidFill>
+          <a:solidFill xmlns:a="http://schemas.openxmlformats.org/drawingml/2006/main">
+            <a:srgbClr val="4264D0"/>
+          </a:solidFill>
+          <a:ln xmlns:a="http://schemas.openxmlformats.org/drawingml/2006/main" w="0">
+            <a:noFill/>
             <a:prstDash val="solid"/>
           </a:ln>
         </p:spPr>
       </p:sp>
       <p:sp>
         <p:nvSpPr>
-          <p:cNvPr id="92" name="dim_f180">
+          <p:cNvPr id="91" name="dim_f182">
             <a:extLst xmlns:a="http://schemas.openxmlformats.org/drawingml/2006/main">
               <a:ext uri="{FF2B5EF4-FFF2-40B4-BE49-F238E27FC236}">
-                <a16:creationId xmlns:a16="http://schemas.microsoft.com/office/drawing/2014/main" id="{EA74EEAE-46DA-4336-B889-C65D5C664AD2}"/>
-              </a:ext>
-            </a:extLst>
-          </p:cNvPr>
-          <p:cNvSpPr>
-            <a:spLocks xmlns:a="http://schemas.openxmlformats.org/drawingml/2006/main" noGrp="1"/>
-          </p:cNvSpPr>
-          <p:nvPr/>
-        </p:nvSpPr>
-        <p:spPr>
-          <a:xfrm xmlns:a="http://schemas.openxmlformats.org/drawingml/2006/main">
-            <a:off x="7724775" y="5572125"/>
-            <a:ext cx="95250" cy="57150"/>
-          </a:xfrm>
-          <a:prstGeom xmlns:a="http://schemas.openxmlformats.org/drawingml/2006/main" prst="line">
-            <a:avLst/>
-          </a:prstGeom>
-          <a:noFill xmlns:a="http://schemas.openxmlformats.org/drawingml/2006/main"/>
-          <a:ln xmlns:a="http://schemas.openxmlformats.org/drawingml/2006/main" w="28575">
-            <a:solidFill>
-              <a:srgbClr val="C7D2EF"/>
-            </a:solidFill>
-            <a:prstDash val="solid"/>
-          </a:ln>
-        </p:spPr>
-      </p:sp>
-      <p:sp>
-        <p:nvSpPr>
-          <p:cNvPr id="39" name="f180">
-            <a:extLst xmlns:a="http://schemas.openxmlformats.org/drawingml/2006/main">
-              <a:ext uri="{FF2B5EF4-FFF2-40B4-BE49-F238E27FC236}">
-                <a16:creationId xmlns:a16="http://schemas.microsoft.com/office/drawing/2014/main" id="{EA74EEAE-46DA-4336-B889-C65D5C664AD2}"/>
-              </a:ext>
-            </a:extLst>
-          </p:cNvPr>
-          <p:cNvSpPr>
-            <a:spLocks xmlns:a="http://schemas.openxmlformats.org/drawingml/2006/main" noGrp="1"/>
-          </p:cNvSpPr>
-          <p:nvPr/>
-        </p:nvSpPr>
-        <p:spPr>
-          <a:xfrm xmlns:a="http://schemas.openxmlformats.org/drawingml/2006/main">
-            <a:off x="7724775" y="5572125"/>
-            <a:ext cx="95250" cy="57150"/>
-          </a:xfrm>
-          <a:prstGeom xmlns:a="http://schemas.openxmlformats.org/drawingml/2006/main" prst="line">
-            <a:avLst/>
-          </a:prstGeom>
-          <a:noFill xmlns:a="http://schemas.openxmlformats.org/drawingml/2006/main"/>
-          <a:ln xmlns:a="http://schemas.openxmlformats.org/drawingml/2006/main" w="28575">
-            <a:solidFill>
-              <a:srgbClr val="4264D0"/>
-            </a:solidFill>
-            <a:prstDash val="solid"/>
-          </a:ln>
-        </p:spPr>
-      </p:sp>
-      <p:sp>
-        <p:nvSpPr>
-          <p:cNvPr id="93" name="dim_f181">
-            <a:extLst xmlns:a="http://schemas.openxmlformats.org/drawingml/2006/main">
-              <a:ext uri="{FF2B5EF4-FFF2-40B4-BE49-F238E27FC236}">
-                <a16:creationId xmlns:a16="http://schemas.microsoft.com/office/drawing/2014/main" id="{7E4BC1A8-9166-4751-91D6-593C7C813755}"/>
+                <a16:creationId xmlns:a16="http://schemas.microsoft.com/office/drawing/2014/main" id="{A77D9290-0020-4231-9589-56554E540FC3}"/>
               </a:ext>
             </a:extLst>
           </p:cNvPr>
@@ -25186,10 +25170,10 @@
       </p:sp>
       <p:sp>
         <p:nvSpPr>
-          <p:cNvPr id="40" name="f181">
+          <p:cNvPr id="39" name="f182">
             <a:extLst xmlns:a="http://schemas.openxmlformats.org/drawingml/2006/main">
               <a:ext uri="{FF2B5EF4-FFF2-40B4-BE49-F238E27FC236}">
-                <a16:creationId xmlns:a16="http://schemas.microsoft.com/office/drawing/2014/main" id="{7E4BC1A8-9166-4751-91D6-593C7C813755}"/>
+                <a16:creationId xmlns:a16="http://schemas.microsoft.com/office/drawing/2014/main" id="{A77D9290-0020-4231-9589-56554E540FC3}"/>
               </a:ext>
             </a:extLst>
           </p:cNvPr>
@@ -25217,10 +25201,10 @@
       </p:sp>
       <p:sp>
         <p:nvSpPr>
-          <p:cNvPr id="94" name="dim_f182">
+          <p:cNvPr id="92" name="dim_f183">
             <a:extLst xmlns:a="http://schemas.openxmlformats.org/drawingml/2006/main">
               <a:ext uri="{FF2B5EF4-FFF2-40B4-BE49-F238E27FC236}">
-                <a16:creationId xmlns:a16="http://schemas.microsoft.com/office/drawing/2014/main" id="{4D320560-3E8B-43FD-9FC4-1AAE0B44F238}"/>
+                <a16:creationId xmlns:a16="http://schemas.microsoft.com/office/drawing/2014/main" id="{BA20F3D6-2581-4AD1-B548-AE1DC4368CF3}"/>
               </a:ext>
             </a:extLst>
           </p:cNvPr>
@@ -25230,11 +25214,11 @@
           <p:nvPr/>
         </p:nvSpPr>
         <p:spPr>
-          <a:xfrm xmlns:a="http://schemas.openxmlformats.org/drawingml/2006/main">
+          <a:xfrm xmlns:a="http://schemas.openxmlformats.org/drawingml/2006/main" rot="0">
             <a:off x="6753225" y="4362450"/>
             <a:ext cx="114300" cy="114300"/>
           </a:xfrm>
-          <a:prstGeom xmlns:a="http://schemas.openxmlformats.org/drawingml/2006/main" prst="upArrow">
+          <a:prstGeom xmlns:a="http://schemas.openxmlformats.org/drawingml/2006/main" prst="triangle">
             <a:avLst/>
           </a:prstGeom>
           <a:solidFill xmlns:a="http://schemas.openxmlformats.org/drawingml/2006/main">
@@ -25248,10 +25232,10 @@
       </p:sp>
       <p:sp>
         <p:nvSpPr>
-          <p:cNvPr id="41" name="f182">
+          <p:cNvPr id="40" name="f183">
             <a:extLst xmlns:a="http://schemas.openxmlformats.org/drawingml/2006/main">
               <a:ext uri="{FF2B5EF4-FFF2-40B4-BE49-F238E27FC236}">
-                <a16:creationId xmlns:a16="http://schemas.microsoft.com/office/drawing/2014/main" id="{4D320560-3E8B-43FD-9FC4-1AAE0B44F238}"/>
+                <a16:creationId xmlns:a16="http://schemas.microsoft.com/office/drawing/2014/main" id="{BA20F3D6-2581-4AD1-B548-AE1DC4368CF3}"/>
               </a:ext>
             </a:extLst>
           </p:cNvPr>
@@ -25261,11 +25245,11 @@
           <p:nvPr/>
         </p:nvSpPr>
         <p:spPr>
-          <a:xfrm xmlns:a="http://schemas.openxmlformats.org/drawingml/2006/main">
+          <a:xfrm xmlns:a="http://schemas.openxmlformats.org/drawingml/2006/main" rot="0">
             <a:off x="6753225" y="4362450"/>
             <a:ext cx="114300" cy="114300"/>
           </a:xfrm>
-          <a:prstGeom xmlns:a="http://schemas.openxmlformats.org/drawingml/2006/main" prst="upArrow">
+          <a:prstGeom xmlns:a="http://schemas.openxmlformats.org/drawingml/2006/main" prst="triangle">
             <a:avLst/>
           </a:prstGeom>
           <a:solidFill xmlns:a="http://schemas.openxmlformats.org/drawingml/2006/main">
@@ -25279,10 +25263,10 @@
       </p:sp>
       <p:sp>
         <p:nvSpPr>
-          <p:cNvPr id="95" name="dim_f183">
+          <p:cNvPr id="93" name="dim_f184">
             <a:extLst xmlns:a="http://schemas.openxmlformats.org/drawingml/2006/main">
               <a:ext uri="{FF2B5EF4-FFF2-40B4-BE49-F238E27FC236}">
-                <a16:creationId xmlns:a16="http://schemas.microsoft.com/office/drawing/2014/main" id="{715C90DB-C362-4EDD-A117-7ABE99E3DC59}"/>
+                <a16:creationId xmlns:a16="http://schemas.microsoft.com/office/drawing/2014/main" id="{D4985726-9C0B-467E-AB92-D8EA45206DE2}"/>
               </a:ext>
             </a:extLst>
           </p:cNvPr>
@@ -25310,10 +25294,10 @@
       </p:sp>
       <p:sp>
         <p:nvSpPr>
-          <p:cNvPr id="42" name="f183">
+          <p:cNvPr id="41" name="f184">
             <a:extLst xmlns:a="http://schemas.openxmlformats.org/drawingml/2006/main">
               <a:ext uri="{FF2B5EF4-FFF2-40B4-BE49-F238E27FC236}">
-                <a16:creationId xmlns:a16="http://schemas.microsoft.com/office/drawing/2014/main" id="{715C90DB-C362-4EDD-A117-7ABE99E3DC59}"/>
+                <a16:creationId xmlns:a16="http://schemas.microsoft.com/office/drawing/2014/main" id="{D4985726-9C0B-467E-AB92-D8EA45206DE2}"/>
               </a:ext>
             </a:extLst>
           </p:cNvPr>
@@ -25341,10 +25325,10 @@
       </p:sp>
       <p:sp>
         <p:nvSpPr>
-          <p:cNvPr id="96" name="dim_f184">
+          <p:cNvPr id="94" name="dim_f185">
             <a:extLst xmlns:a="http://schemas.openxmlformats.org/drawingml/2006/main">
               <a:ext uri="{FF2B5EF4-FFF2-40B4-BE49-F238E27FC236}">
-                <a16:creationId xmlns:a16="http://schemas.microsoft.com/office/drawing/2014/main" id="{2722BF4A-74AD-4CCA-983B-801BCCAC36D6}"/>
+                <a16:creationId xmlns:a16="http://schemas.microsoft.com/office/drawing/2014/main" id="{33C5751C-1092-4652-86EC-9172A5590746}"/>
               </a:ext>
             </a:extLst>
           </p:cNvPr>
@@ -25372,10 +25356,10 @@
       </p:sp>
       <p:sp>
         <p:nvSpPr>
-          <p:cNvPr id="43" name="f184">
+          <p:cNvPr id="42" name="f185">
             <a:extLst xmlns:a="http://schemas.openxmlformats.org/drawingml/2006/main">
               <a:ext uri="{FF2B5EF4-FFF2-40B4-BE49-F238E27FC236}">
-                <a16:creationId xmlns:a16="http://schemas.microsoft.com/office/drawing/2014/main" id="{2722BF4A-74AD-4CCA-983B-801BCCAC36D6}"/>
+                <a16:creationId xmlns:a16="http://schemas.microsoft.com/office/drawing/2014/main" id="{33C5751C-1092-4652-86EC-9172A5590746}"/>
               </a:ext>
             </a:extLst>
           </p:cNvPr>
@@ -25403,10 +25387,10 @@
       </p:sp>
       <p:sp>
         <p:nvSpPr>
-          <p:cNvPr id="97" name="dim_f185">
+          <p:cNvPr id="95" name="dim_f186">
             <a:extLst xmlns:a="http://schemas.openxmlformats.org/drawingml/2006/main">
               <a:ext uri="{FF2B5EF4-FFF2-40B4-BE49-F238E27FC236}">
-                <a16:creationId xmlns:a16="http://schemas.microsoft.com/office/drawing/2014/main" id="{32251178-C39A-42AF-B2D7-49CE1D147B59}"/>
+                <a16:creationId xmlns:a16="http://schemas.microsoft.com/office/drawing/2014/main" id="{339E2951-48DF-43D4-BD7B-43B9B3B04989}"/>
               </a:ext>
             </a:extLst>
           </p:cNvPr>
@@ -25434,10 +25418,10 @@
       </p:sp>
       <p:sp>
         <p:nvSpPr>
-          <p:cNvPr id="44" name="f185">
+          <p:cNvPr id="43" name="f186">
             <a:extLst xmlns:a="http://schemas.openxmlformats.org/drawingml/2006/main">
               <a:ext uri="{FF2B5EF4-FFF2-40B4-BE49-F238E27FC236}">
-                <a16:creationId xmlns:a16="http://schemas.microsoft.com/office/drawing/2014/main" id="{32251178-C39A-42AF-B2D7-49CE1D147B59}"/>
+                <a16:creationId xmlns:a16="http://schemas.microsoft.com/office/drawing/2014/main" id="{339E2951-48DF-43D4-BD7B-43B9B3B04989}"/>
               </a:ext>
             </a:extLst>
           </p:cNvPr>
@@ -25465,10 +25449,10 @@
       </p:sp>
       <p:sp>
         <p:nvSpPr>
-          <p:cNvPr id="98" name="dim_f186">
+          <p:cNvPr id="96" name="dim_f187">
             <a:extLst xmlns:a="http://schemas.openxmlformats.org/drawingml/2006/main">
               <a:ext uri="{FF2B5EF4-FFF2-40B4-BE49-F238E27FC236}">
-                <a16:creationId xmlns:a16="http://schemas.microsoft.com/office/drawing/2014/main" id="{42BA663B-775A-4CE1-97EF-784B11E43825}"/>
+                <a16:creationId xmlns:a16="http://schemas.microsoft.com/office/drawing/2014/main" id="{F637F04B-ED7D-43B3-B7E4-7E057609FC8A}"/>
               </a:ext>
             </a:extLst>
           </p:cNvPr>
@@ -25478,11 +25462,11 @@
           <p:nvPr/>
         </p:nvSpPr>
         <p:spPr>
-          <a:xfrm xmlns:a="http://schemas.openxmlformats.org/drawingml/2006/main">
-            <a:off x="5105400" y="4724400"/>
-            <a:ext cx="114300" cy="171450"/>
+          <a:xfrm xmlns:a="http://schemas.openxmlformats.org/drawingml/2006/main" rot="16200000">
+            <a:off x="5105400" y="4752975"/>
+            <a:ext cx="114300" cy="114300"/>
           </a:xfrm>
-          <a:prstGeom xmlns:a="http://schemas.openxmlformats.org/drawingml/2006/main" prst="leftArrow">
+          <a:prstGeom xmlns:a="http://schemas.openxmlformats.org/drawingml/2006/main" prst="triangle">
             <a:avLst/>
           </a:prstGeom>
           <a:solidFill xmlns:a="http://schemas.openxmlformats.org/drawingml/2006/main">
@@ -25496,10 +25480,10 @@
       </p:sp>
       <p:sp>
         <p:nvSpPr>
-          <p:cNvPr id="45" name="f186">
+          <p:cNvPr id="44" name="f187">
             <a:extLst xmlns:a="http://schemas.openxmlformats.org/drawingml/2006/main">
               <a:ext uri="{FF2B5EF4-FFF2-40B4-BE49-F238E27FC236}">
-                <a16:creationId xmlns:a16="http://schemas.microsoft.com/office/drawing/2014/main" id="{42BA663B-775A-4CE1-97EF-784B11E43825}"/>
+                <a16:creationId xmlns:a16="http://schemas.microsoft.com/office/drawing/2014/main" id="{F637F04B-ED7D-43B3-B7E4-7E057609FC8A}"/>
               </a:ext>
             </a:extLst>
           </p:cNvPr>
@@ -25509,11 +25493,11 @@
           <p:nvPr/>
         </p:nvSpPr>
         <p:spPr>
-          <a:xfrm xmlns:a="http://schemas.openxmlformats.org/drawingml/2006/main">
-            <a:off x="5105400" y="4724400"/>
-            <a:ext cx="114300" cy="171450"/>
+          <a:xfrm xmlns:a="http://schemas.openxmlformats.org/drawingml/2006/main" rot="16200000">
+            <a:off x="5105400" y="4752975"/>
+            <a:ext cx="114300" cy="114300"/>
           </a:xfrm>
-          <a:prstGeom xmlns:a="http://schemas.openxmlformats.org/drawingml/2006/main" prst="leftArrow">
+          <a:prstGeom xmlns:a="http://schemas.openxmlformats.org/drawingml/2006/main" prst="triangle">
             <a:avLst/>
           </a:prstGeom>
           <a:solidFill xmlns:a="http://schemas.openxmlformats.org/drawingml/2006/main">
@@ -25527,10 +25511,10 @@
       </p:sp>
       <p:sp>
         <p:nvSpPr>
-          <p:cNvPr id="46" name="f187">
+          <p:cNvPr id="45" name="f188">
             <a:extLst xmlns:a="http://schemas.openxmlformats.org/drawingml/2006/main">
               <a:ext uri="{FF2B5EF4-FFF2-40B4-BE49-F238E27FC236}">
-                <a16:creationId xmlns:a16="http://schemas.microsoft.com/office/drawing/2014/main" id="{F7C8AB7E-0D0D-4871-8146-C66989ED09B7}"/>
+                <a16:creationId xmlns:a16="http://schemas.microsoft.com/office/drawing/2014/main" id="{E92FACDB-EC1C-4CFF-B7F2-D7509A98A63D}"/>
               </a:ext>
             </a:extLst>
           </p:cNvPr>
@@ -25686,10 +25670,10 @@
       </p:sp>
       <p:graphicFrame>
         <p:nvGraphicFramePr>
-          <p:cNvPr id="47" name="">
+          <p:cNvPr id="46" name="">
             <a:extLst xmlns:a="http://schemas.openxmlformats.org/drawingml/2006/main">
               <a:ext uri="{FF2B5EF4-FFF2-40B4-BE49-F238E27FC236}">
-                <a16:creationId xmlns:a16="http://schemas.microsoft.com/office/drawing/2014/main" id="{DD6DC111-4EFC-45AB-813A-B4A8FC5970FB}"/>
+                <a16:creationId xmlns:a16="http://schemas.microsoft.com/office/drawing/2014/main" id="{CA704290-E133-4404-879E-70F4EEEA9CA1}"/>
               </a:ext>
             </a:extLst>
           </p:cNvPr>
@@ -26289,10 +26273,10 @@
       </p:graphicFrame>
       <p:sp>
         <p:nvSpPr>
-          <p:cNvPr id="48" name="f189">
+          <p:cNvPr id="47" name="f190">
             <a:extLst xmlns:a="http://schemas.openxmlformats.org/drawingml/2006/main">
               <a:ext uri="{FF2B5EF4-FFF2-40B4-BE49-F238E27FC236}">
-                <a16:creationId xmlns:a16="http://schemas.microsoft.com/office/drawing/2014/main" id="{1E58A7E9-4A67-4E54-86EE-69AAC2B2B253}"/>
+                <a16:creationId xmlns:a16="http://schemas.microsoft.com/office/drawing/2014/main" id="{8C58B910-33BF-4A9B-93DB-B86557928B71}"/>
               </a:ext>
             </a:extLst>
           </p:cNvPr>
@@ -26448,10 +26432,10 @@
       </p:sp>
       <p:sp>
         <p:nvSpPr>
-          <p:cNvPr id="49" name="f190">
+          <p:cNvPr id="48" name="f191">
             <a:extLst xmlns:a="http://schemas.openxmlformats.org/drawingml/2006/main">
               <a:ext uri="{FF2B5EF4-FFF2-40B4-BE49-F238E27FC236}">
-                <a16:creationId xmlns:a16="http://schemas.microsoft.com/office/drawing/2014/main" id="{FC77429B-DD8F-4C7E-891F-515592591B50}"/>
+                <a16:creationId xmlns:a16="http://schemas.microsoft.com/office/drawing/2014/main" id="{DBE2DE84-1132-47EB-9CFB-DDF419284B7D}"/>
               </a:ext>
             </a:extLst>
           </p:cNvPr>
@@ -26631,7 +26615,7 @@
     </p:spTree>
     <p:extLst>
       <p:ext uri="{BB962C8B-B14F-4D97-AF65-F5344CB8AC3E}">
-        <p14:creationId xmlns:p14="http://schemas.microsoft.com/office/powerpoint/2010/main" val="127148856"/>
+        <p14:creationId xmlns:p14="http://schemas.microsoft.com/office/powerpoint/2010/main" val="858717008"/>
       </p:ext>
     </p:extLst>
   </p:cSld>
@@ -27600,41 +27584,6 @@
                                   </p:childTnLst>
                                 </p:cTn>
                               </p:par>
-                              <p:par>
-                                <p:cTn id="86" presetID="10" presetClass="entr" presetSubtype="0" fill="hold" grpId="1" nodeType="withEffect">
-                                  <p:stCondLst>
-                                    <p:cond delay="0"/>
-                                  </p:stCondLst>
-                                  <p:childTnLst>
-                                    <p:animEffect transition="in" filter="fade">
-                                      <p:cBhvr>
-                                        <p:cTn id="87" dur="350" fill="hold"/>
-                                        <p:tgtEl>
-                                          <p:spTgt spid="41"/>
-                                        </p:tgtEl>
-                                      </p:cBhvr>
-                                    </p:animEffect>
-                                    <p:set>
-                                      <p:cBhvr>
-                                        <p:cTn id="88" dur="1" fill="hold">
-                                          <p:stCondLst>
-                                            <p:cond delay="0"/>
-                                          </p:stCondLst>
-                                        </p:cTn>
-                                        <p:tgtEl>
-                                          <p:spTgt spid="41"/>
-                                        </p:tgtEl>
-                                        <p:attrNameLst>
-                                          <p:attrName>style.visibility</p:attrName>
-                                        </p:attrNameLst>
-                                      </p:cBhvr>
-                                      <p:to>
-                                        <p:strVal val="visible"/>
-                                      </p:to>
-                                    </p:set>
-                                  </p:childTnLst>
-                                </p:cTn>
-                              </p:par>
                             </p:childTnLst>
                           </p:cTn>
                         </p:par>
@@ -27642,40 +27591,40 @@
                     </p:cTn>
                   </p:par>
                   <p:par>
-                    <p:cTn id="89" fill="hold">
+                    <p:cTn id="86" fill="hold">
                       <p:stCondLst>
                         <p:cond delay="indefinite"/>
                       </p:stCondLst>
                       <p:childTnLst>
                         <p:par>
-                          <p:cTn id="90" fill="hold">
+                          <p:cTn id="87" fill="hold">
                             <p:stCondLst>
                               <p:cond delay="0"/>
                             </p:stCondLst>
                             <p:childTnLst>
                               <p:par>
-                                <p:cTn id="91" presetID="10" presetClass="entr" presetSubtype="0" fill="hold" grpId="2" nodeType="clickEffect">
+                                <p:cTn id="88" presetID="10" presetClass="entr" presetSubtype="0" fill="hold" grpId="2" nodeType="clickEffect">
                                   <p:stCondLst>
                                     <p:cond delay="0"/>
                                   </p:stCondLst>
                                   <p:childTnLst>
                                     <p:animEffect transition="in" filter="fade">
                                       <p:cBhvr>
-                                        <p:cTn id="92" dur="350" fill="hold"/>
+                                        <p:cTn id="89" dur="350" fill="hold"/>
                                         <p:tgtEl>
-                                          <p:spTgt spid="52"/>
+                                          <p:spTgt spid="51"/>
                                         </p:tgtEl>
                                       </p:cBhvr>
                                     </p:animEffect>
                                     <p:set>
                                       <p:cBhvr>
-                                        <p:cTn id="93" dur="1" fill="hold">
+                                        <p:cTn id="90" dur="1" fill="hold">
                                           <p:stCondLst>
                                             <p:cond delay="0"/>
                                           </p:stCondLst>
                                         </p:cTn>
                                         <p:tgtEl>
-                                          <p:spTgt spid="52"/>
+                                          <p:spTgt spid="51"/>
                                         </p:tgtEl>
                                         <p:attrNameLst>
                                           <p:attrName>style.visibility</p:attrName>
@@ -27689,28 +27638,28 @@
                                 </p:cTn>
                               </p:par>
                               <p:par>
-                                <p:cTn id="94" presetID="10" presetClass="entr" presetSubtype="0" fill="hold" grpId="2" nodeType="withEffect">
+                                <p:cTn id="91" presetID="10" presetClass="entr" presetSubtype="0" fill="hold" grpId="2" nodeType="withEffect">
                                   <p:stCondLst>
                                     <p:cond delay="0"/>
                                   </p:stCondLst>
                                   <p:childTnLst>
                                     <p:animEffect transition="in" filter="fade">
                                       <p:cBhvr>
-                                        <p:cTn id="95" dur="350" fill="hold"/>
+                                        <p:cTn id="92" dur="350" fill="hold"/>
                                         <p:tgtEl>
-                                          <p:spTgt spid="54"/>
+                                          <p:spTgt spid="53"/>
                                         </p:tgtEl>
                                       </p:cBhvr>
                                     </p:animEffect>
                                     <p:set>
                                       <p:cBhvr>
-                                        <p:cTn id="96" dur="1" fill="hold">
+                                        <p:cTn id="93" dur="1" fill="hold">
                                           <p:stCondLst>
                                             <p:cond delay="0"/>
                                           </p:stCondLst>
                                         </p:cTn>
                                         <p:tgtEl>
-                                          <p:spTgt spid="54"/>
+                                          <p:spTgt spid="53"/>
                                         </p:tgtEl>
                                         <p:attrNameLst>
                                           <p:attrName>style.visibility</p:attrName>
@@ -27724,14 +27673,14 @@
                                 </p:cTn>
                               </p:par>
                               <p:par>
-                                <p:cTn id="97" presetID="10" presetClass="exit" presetSubtype="0" fill="hold" grpId="2" nodeType="withEffect">
+                                <p:cTn id="94" presetID="10" presetClass="exit" presetSubtype="0" fill="hold" grpId="2" nodeType="withEffect">
                                   <p:stCondLst>
                                     <p:cond delay="0"/>
                                   </p:stCondLst>
                                   <p:childTnLst>
                                     <p:animEffect transition="out" filter="fade">
                                       <p:cBhvr>
-                                        <p:cTn id="98" dur="350" fill="hold"/>
+                                        <p:cTn id="95" dur="350" fill="hold"/>
                                         <p:tgtEl>
                                           <p:spTgt spid="7"/>
                                         </p:tgtEl>
@@ -27739,7 +27688,7 @@
                                     </p:animEffect>
                                     <p:set>
                                       <p:cBhvr>
-                                        <p:cTn id="99" dur="1" fill="hold">
+                                        <p:cTn id="96" dur="1" fill="hold">
                                           <p:stCondLst>
                                             <p:cond delay="350"/>
                                           </p:stCondLst>
@@ -27759,14 +27708,14 @@
                                 </p:cTn>
                               </p:par>
                               <p:par>
-                                <p:cTn id="100" presetID="10" presetClass="exit" presetSubtype="0" fill="hold" grpId="2" nodeType="withEffect">
+                                <p:cTn id="97" presetID="10" presetClass="exit" presetSubtype="0" fill="hold" grpId="2" nodeType="withEffect">
                                   <p:stCondLst>
                                     <p:cond delay="0"/>
                                   </p:stCondLst>
                                   <p:childTnLst>
                                     <p:animEffect transition="out" filter="fade">
                                       <p:cBhvr>
-                                        <p:cTn id="101" dur="350" fill="hold"/>
+                                        <p:cTn id="98" dur="350" fill="hold"/>
                                         <p:tgtEl>
                                           <p:spTgt spid="8"/>
                                         </p:tgtEl>
@@ -27774,7 +27723,7 @@
                                     </p:animEffect>
                                     <p:set>
                                       <p:cBhvr>
-                                        <p:cTn id="102" dur="1" fill="hold">
+                                        <p:cTn id="99" dur="1" fill="hold">
                                           <p:stCondLst>
                                             <p:cond delay="350"/>
                                           </p:stCondLst>
@@ -27794,28 +27743,28 @@
                                 </p:cTn>
                               </p:par>
                               <p:par>
-                                <p:cTn id="103" presetID="10" presetClass="entr" presetSubtype="0" fill="hold" grpId="2" nodeType="withEffect">
+                                <p:cTn id="100" presetID="10" presetClass="entr" presetSubtype="0" fill="hold" grpId="2" nodeType="withEffect">
                                   <p:stCondLst>
                                     <p:cond delay="0"/>
                                   </p:stCondLst>
                                   <p:childTnLst>
                                     <p:animEffect transition="in" filter="fade">
                                       <p:cBhvr>
-                                        <p:cTn id="104" dur="350" fill="hold"/>
+                                        <p:cTn id="101" dur="350" fill="hold"/>
                                         <p:tgtEl>
-                                          <p:spTgt spid="58"/>
+                                          <p:spTgt spid="57"/>
                                         </p:tgtEl>
                                       </p:cBhvr>
                                     </p:animEffect>
                                     <p:set>
                                       <p:cBhvr>
-                                        <p:cTn id="105" dur="1" fill="hold">
+                                        <p:cTn id="102" dur="1" fill="hold">
                                           <p:stCondLst>
                                             <p:cond delay="0"/>
                                           </p:stCondLst>
                                         </p:cTn>
                                         <p:tgtEl>
-                                          <p:spTgt spid="58"/>
+                                          <p:spTgt spid="57"/>
                                         </p:tgtEl>
                                         <p:attrNameLst>
                                           <p:attrName>style.visibility</p:attrName>
@@ -27829,28 +27778,28 @@
                                 </p:cTn>
                               </p:par>
                               <p:par>
-                                <p:cTn id="106" presetID="10" presetClass="entr" presetSubtype="0" fill="hold" grpId="2" nodeType="withEffect">
+                                <p:cTn id="103" presetID="10" presetClass="entr" presetSubtype="0" fill="hold" grpId="2" nodeType="withEffect">
                                   <p:stCondLst>
                                     <p:cond delay="0"/>
                                   </p:stCondLst>
                                   <p:childTnLst>
                                     <p:animEffect transition="in" filter="fade">
                                       <p:cBhvr>
-                                        <p:cTn id="107" dur="350" fill="hold"/>
+                                        <p:cTn id="104" dur="350" fill="hold"/>
                                         <p:tgtEl>
-                                          <p:spTgt spid="60"/>
+                                          <p:spTgt spid="59"/>
                                         </p:tgtEl>
                                       </p:cBhvr>
                                     </p:animEffect>
                                     <p:set>
                                       <p:cBhvr>
-                                        <p:cTn id="108" dur="1" fill="hold">
+                                        <p:cTn id="105" dur="1" fill="hold">
                                           <p:stCondLst>
                                             <p:cond delay="0"/>
                                           </p:stCondLst>
                                         </p:cTn>
                                         <p:tgtEl>
-                                          <p:spTgt spid="60"/>
+                                          <p:spTgt spid="59"/>
                                         </p:tgtEl>
                                         <p:attrNameLst>
                                           <p:attrName>style.visibility</p:attrName>
@@ -27864,14 +27813,14 @@
                                 </p:cTn>
                               </p:par>
                               <p:par>
-                                <p:cTn id="109" presetID="10" presetClass="exit" presetSubtype="0" fill="hold" grpId="2" nodeType="withEffect">
+                                <p:cTn id="106" presetID="10" presetClass="exit" presetSubtype="0" fill="hold" grpId="2" nodeType="withEffect">
                                   <p:stCondLst>
                                     <p:cond delay="0"/>
                                   </p:stCondLst>
                                   <p:childTnLst>
                                     <p:animEffect transition="out" filter="fade">
                                       <p:cBhvr>
-                                        <p:cTn id="110" dur="350" fill="hold"/>
+                                        <p:cTn id="107" dur="350" fill="hold"/>
                                         <p:tgtEl>
                                           <p:spTgt spid="11"/>
                                         </p:tgtEl>
@@ -27879,7 +27828,7 @@
                                     </p:animEffect>
                                     <p:set>
                                       <p:cBhvr>
-                                        <p:cTn id="111" dur="1" fill="hold">
+                                        <p:cTn id="108" dur="1" fill="hold">
                                           <p:stCondLst>
                                             <p:cond delay="350"/>
                                           </p:stCondLst>
@@ -27899,14 +27848,14 @@
                                 </p:cTn>
                               </p:par>
                               <p:par>
-                                <p:cTn id="112" presetID="10" presetClass="exit" presetSubtype="0" fill="hold" grpId="2" nodeType="withEffect">
+                                <p:cTn id="109" presetID="10" presetClass="exit" presetSubtype="0" fill="hold" grpId="2" nodeType="withEffect">
                                   <p:stCondLst>
                                     <p:cond delay="0"/>
                                   </p:stCondLst>
                                   <p:childTnLst>
                                     <p:animEffect transition="out" filter="fade">
                                       <p:cBhvr>
-                                        <p:cTn id="113" dur="350" fill="hold"/>
+                                        <p:cTn id="110" dur="350" fill="hold"/>
                                         <p:tgtEl>
                                           <p:spTgt spid="12"/>
                                         </p:tgtEl>
@@ -27914,7 +27863,7 @@
                                     </p:animEffect>
                                     <p:set>
                                       <p:cBhvr>
-                                        <p:cTn id="114" dur="1" fill="hold">
+                                        <p:cTn id="111" dur="1" fill="hold">
                                           <p:stCondLst>
                                             <p:cond delay="350"/>
                                           </p:stCondLst>
@@ -27934,14 +27883,14 @@
                                 </p:cTn>
                               </p:par>
                               <p:par>
-                                <p:cTn id="115" presetID="10" presetClass="entr" presetSubtype="0" fill="hold" grpId="2" nodeType="withEffect">
+                                <p:cTn id="112" presetID="10" presetClass="entr" presetSubtype="0" fill="hold" grpId="2" nodeType="withEffect">
                                   <p:stCondLst>
                                     <p:cond delay="0"/>
                                   </p:stCondLst>
                                   <p:childTnLst>
                                     <p:animEffect transition="in" filter="fade">
                                       <p:cBhvr>
-                                        <p:cTn id="116" dur="350" fill="hold"/>
+                                        <p:cTn id="113" dur="350" fill="hold"/>
                                         <p:tgtEl>
                                           <p:spTgt spid="13"/>
                                         </p:tgtEl>
@@ -27949,7 +27898,7 @@
                                     </p:animEffect>
                                     <p:set>
                                       <p:cBhvr>
-                                        <p:cTn id="117" dur="1" fill="hold">
+                                        <p:cTn id="114" dur="1" fill="hold">
                                           <p:stCondLst>
                                             <p:cond delay="0"/>
                                           </p:stCondLst>
@@ -27969,14 +27918,14 @@
                                 </p:cTn>
                               </p:par>
                               <p:par>
-                                <p:cTn id="118" presetID="10" presetClass="entr" presetSubtype="0" fill="hold" grpId="2" nodeType="withEffect">
+                                <p:cTn id="115" presetID="10" presetClass="entr" presetSubtype="0" fill="hold" grpId="2" nodeType="withEffect">
                                   <p:stCondLst>
                                     <p:cond delay="0"/>
                                   </p:stCondLst>
                                   <p:childTnLst>
                                     <p:animEffect transition="in" filter="fade">
                                       <p:cBhvr>
-                                        <p:cTn id="119" dur="350" fill="hold"/>
+                                        <p:cTn id="116" dur="350" fill="hold"/>
                                         <p:tgtEl>
                                           <p:spTgt spid="14"/>
                                         </p:tgtEl>
@@ -27984,7 +27933,7 @@
                                     </p:animEffect>
                                     <p:set>
                                       <p:cBhvr>
-                                        <p:cTn id="120" dur="1" fill="hold">
+                                        <p:cTn id="117" dur="1" fill="hold">
                                           <p:stCondLst>
                                             <p:cond delay="0"/>
                                           </p:stCondLst>
@@ -28004,14 +27953,14 @@
                                 </p:cTn>
                               </p:par>
                               <p:par>
-                                <p:cTn id="121" presetID="10" presetClass="exit" presetSubtype="0" fill="hold" grpId="2" nodeType="withEffect">
+                                <p:cTn id="118" presetID="10" presetClass="exit" presetSubtype="0" fill="hold" grpId="2" nodeType="withEffect">
                                   <p:stCondLst>
                                     <p:cond delay="0"/>
                                   </p:stCondLst>
                                   <p:childTnLst>
                                     <p:animEffect transition="out" filter="fade">
                                       <p:cBhvr>
-                                        <p:cTn id="122" dur="350" fill="hold"/>
+                                        <p:cTn id="119" dur="350" fill="hold"/>
                                         <p:tgtEl>
                                           <p:spTgt spid="15"/>
                                         </p:tgtEl>
@@ -28019,7 +27968,7 @@
                                     </p:animEffect>
                                     <p:set>
                                       <p:cBhvr>
-                                        <p:cTn id="123" dur="1" fill="hold">
+                                        <p:cTn id="120" dur="1" fill="hold">
                                           <p:stCondLst>
                                             <p:cond delay="350"/>
                                           </p:stCondLst>
@@ -28039,14 +27988,14 @@
                                 </p:cTn>
                               </p:par>
                               <p:par>
-                                <p:cTn id="124" presetID="10" presetClass="exit" presetSubtype="0" fill="hold" grpId="2" nodeType="withEffect">
+                                <p:cTn id="121" presetID="10" presetClass="exit" presetSubtype="0" fill="hold" grpId="2" nodeType="withEffect">
                                   <p:stCondLst>
                                     <p:cond delay="0"/>
                                   </p:stCondLst>
                                   <p:childTnLst>
                                     <p:animEffect transition="out" filter="fade">
                                       <p:cBhvr>
-                                        <p:cTn id="125" dur="350" fill="hold"/>
+                                        <p:cTn id="122" dur="350" fill="hold"/>
                                         <p:tgtEl>
                                           <p:spTgt spid="16"/>
                                         </p:tgtEl>
@@ -28054,7 +28003,7 @@
                                     </p:animEffect>
                                     <p:set>
                                       <p:cBhvr>
-                                        <p:cTn id="126" dur="1" fill="hold">
+                                        <p:cTn id="123" dur="1" fill="hold">
                                           <p:stCondLst>
                                             <p:cond delay="350"/>
                                           </p:stCondLst>
@@ -28074,6 +28023,41 @@
                                 </p:cTn>
                               </p:par>
                               <p:par>
+                                <p:cTn id="124" presetID="10" presetClass="entr" presetSubtype="0" fill="hold" grpId="2" nodeType="withEffect">
+                                  <p:stCondLst>
+                                    <p:cond delay="0"/>
+                                  </p:stCondLst>
+                                  <p:childTnLst>
+                                    <p:animEffect transition="in" filter="fade">
+                                      <p:cBhvr>
+                                        <p:cTn id="125" dur="350" fill="hold"/>
+                                        <p:tgtEl>
+                                          <p:spTgt spid="69"/>
+                                        </p:tgtEl>
+                                      </p:cBhvr>
+                                    </p:animEffect>
+                                    <p:set>
+                                      <p:cBhvr>
+                                        <p:cTn id="126" dur="1" fill="hold">
+                                          <p:stCondLst>
+                                            <p:cond delay="0"/>
+                                          </p:stCondLst>
+                                        </p:cTn>
+                                        <p:tgtEl>
+                                          <p:spTgt spid="69"/>
+                                        </p:tgtEl>
+                                        <p:attrNameLst>
+                                          <p:attrName>style.visibility</p:attrName>
+                                        </p:attrNameLst>
+                                      </p:cBhvr>
+                                      <p:to>
+                                        <p:strVal val="visible"/>
+                                      </p:to>
+                                    </p:set>
+                                  </p:childTnLst>
+                                </p:cTn>
+                              </p:par>
+                              <p:par>
                                 <p:cTn id="127" presetID="10" presetClass="entr" presetSubtype="0" fill="hold" grpId="2" nodeType="withEffect">
                                   <p:stCondLst>
                                     <p:cond delay="0"/>
@@ -28083,7 +28067,7 @@
                                       <p:cBhvr>
                                         <p:cTn id="128" dur="350" fill="hold"/>
                                         <p:tgtEl>
-                                          <p:spTgt spid="70"/>
+                                          <p:spTgt spid="71"/>
                                         </p:tgtEl>
                                       </p:cBhvr>
                                     </p:animEffect>
@@ -28095,7 +28079,7 @@
                                           </p:stCondLst>
                                         </p:cTn>
                                         <p:tgtEl>
-                                          <p:spTgt spid="70"/>
+                                          <p:spTgt spid="71"/>
                                         </p:tgtEl>
                                         <p:attrNameLst>
                                           <p:attrName>style.visibility</p:attrName>
@@ -28118,7 +28102,7 @@
                                       <p:cBhvr>
                                         <p:cTn id="131" dur="350" fill="hold"/>
                                         <p:tgtEl>
-                                          <p:spTgt spid="72"/>
+                                          <p:spTgt spid="75"/>
                                         </p:tgtEl>
                                       </p:cBhvr>
                                     </p:animEffect>
@@ -28130,7 +28114,7 @@
                                           </p:stCondLst>
                                         </p:cTn>
                                         <p:tgtEl>
-                                          <p:spTgt spid="72"/>
+                                          <p:spTgt spid="75"/>
                                         </p:tgtEl>
                                         <p:attrNameLst>
                                           <p:attrName>style.visibility</p:attrName>
@@ -28153,7 +28137,7 @@
                                       <p:cBhvr>
                                         <p:cTn id="134" dur="350" fill="hold"/>
                                         <p:tgtEl>
-                                          <p:spTgt spid="76"/>
+                                          <p:spTgt spid="27"/>
                                         </p:tgtEl>
                                       </p:cBhvr>
                                     </p:animEffect>
@@ -28165,7 +28149,7 @@
                                           </p:stCondLst>
                                         </p:cTn>
                                         <p:tgtEl>
-                                          <p:spTgt spid="76"/>
+                                          <p:spTgt spid="27"/>
                                         </p:tgtEl>
                                         <p:attrNameLst>
                                           <p:attrName>style.visibility</p:attrName>
@@ -28188,7 +28172,7 @@
                                       <p:cBhvr>
                                         <p:cTn id="137" dur="350" fill="hold"/>
                                         <p:tgtEl>
-                                          <p:spTgt spid="27"/>
+                                          <p:spTgt spid="28"/>
                                         </p:tgtEl>
                                       </p:cBhvr>
                                     </p:animEffect>
@@ -28200,7 +28184,7 @@
                                           </p:stCondLst>
                                         </p:cTn>
                                         <p:tgtEl>
-                                          <p:spTgt spid="27"/>
+                                          <p:spTgt spid="28"/>
                                         </p:tgtEl>
                                         <p:attrNameLst>
                                           <p:attrName>style.visibility</p:attrName>
@@ -28223,48 +28207,13 @@
                                       <p:cBhvr>
                                         <p:cTn id="140" dur="350" fill="hold"/>
                                         <p:tgtEl>
-                                          <p:spTgt spid="28"/>
+                                          <p:spTgt spid="29"/>
                                         </p:tgtEl>
                                       </p:cBhvr>
                                     </p:animEffect>
                                     <p:set>
                                       <p:cBhvr>
                                         <p:cTn id="141" dur="1" fill="hold">
-                                          <p:stCondLst>
-                                            <p:cond delay="0"/>
-                                          </p:stCondLst>
-                                        </p:cTn>
-                                        <p:tgtEl>
-                                          <p:spTgt spid="28"/>
-                                        </p:tgtEl>
-                                        <p:attrNameLst>
-                                          <p:attrName>style.visibility</p:attrName>
-                                        </p:attrNameLst>
-                                      </p:cBhvr>
-                                      <p:to>
-                                        <p:strVal val="visible"/>
-                                      </p:to>
-                                    </p:set>
-                                  </p:childTnLst>
-                                </p:cTn>
-                              </p:par>
-                              <p:par>
-                                <p:cTn id="142" presetID="10" presetClass="entr" presetSubtype="0" fill="hold" grpId="2" nodeType="withEffect">
-                                  <p:stCondLst>
-                                    <p:cond delay="0"/>
-                                  </p:stCondLst>
-                                  <p:childTnLst>
-                                    <p:animEffect transition="in" filter="fade">
-                                      <p:cBhvr>
-                                        <p:cTn id="143" dur="350" fill="hold"/>
-                                        <p:tgtEl>
-                                          <p:spTgt spid="29"/>
-                                        </p:tgtEl>
-                                      </p:cBhvr>
-                                    </p:animEffect>
-                                    <p:set>
-                                      <p:cBhvr>
-                                        <p:cTn id="144" dur="1" fill="hold">
                                           <p:stCondLst>
                                             <p:cond delay="0"/>
                                           </p:stCondLst>
@@ -28284,6 +28233,41 @@
                                 </p:cTn>
                               </p:par>
                               <p:par>
+                                <p:cTn id="142" presetID="10" presetClass="exit" presetSubtype="0" fill="hold" grpId="2" nodeType="withEffect">
+                                  <p:stCondLst>
+                                    <p:cond delay="0"/>
+                                  </p:stCondLst>
+                                  <p:childTnLst>
+                                    <p:animEffect transition="out" filter="fade">
+                                      <p:cBhvr>
+                                        <p:cTn id="143" dur="350" fill="hold"/>
+                                        <p:tgtEl>
+                                          <p:spTgt spid="30"/>
+                                        </p:tgtEl>
+                                      </p:cBhvr>
+                                    </p:animEffect>
+                                    <p:set>
+                                      <p:cBhvr>
+                                        <p:cTn id="144" dur="1" fill="hold">
+                                          <p:stCondLst>
+                                            <p:cond delay="350"/>
+                                          </p:stCondLst>
+                                        </p:cTn>
+                                        <p:tgtEl>
+                                          <p:spTgt spid="30"/>
+                                        </p:tgtEl>
+                                        <p:attrNameLst>
+                                          <p:attrName>style.visibility</p:attrName>
+                                        </p:attrNameLst>
+                                      </p:cBhvr>
+                                      <p:to>
+                                        <p:strVal val="hidden"/>
+                                      </p:to>
+                                    </p:set>
+                                  </p:childTnLst>
+                                </p:cTn>
+                              </p:par>
+                              <p:par>
                                 <p:cTn id="145" presetID="10" presetClass="exit" presetSubtype="0" fill="hold" grpId="2" nodeType="withEffect">
                                   <p:stCondLst>
                                     <p:cond delay="0"/>
@@ -28293,7 +28277,7 @@
                                       <p:cBhvr>
                                         <p:cTn id="146" dur="350" fill="hold"/>
                                         <p:tgtEl>
-                                          <p:spTgt spid="30"/>
+                                          <p:spTgt spid="31"/>
                                         </p:tgtEl>
                                       </p:cBhvr>
                                     </p:animEffect>
@@ -28305,7 +28289,7 @@
                                           </p:stCondLst>
                                         </p:cTn>
                                         <p:tgtEl>
-                                          <p:spTgt spid="30"/>
+                                          <p:spTgt spid="31"/>
                                         </p:tgtEl>
                                         <p:attrNameLst>
                                           <p:attrName>style.visibility</p:attrName>
@@ -28328,7 +28312,7 @@
                                       <p:cBhvr>
                                         <p:cTn id="149" dur="350" fill="hold"/>
                                         <p:tgtEl>
-                                          <p:spTgt spid="31"/>
+                                          <p:spTgt spid="32"/>
                                         </p:tgtEl>
                                       </p:cBhvr>
                                     </p:animEffect>
@@ -28340,7 +28324,7 @@
                                           </p:stCondLst>
                                         </p:cTn>
                                         <p:tgtEl>
-                                          <p:spTgt spid="31"/>
+                                          <p:spTgt spid="32"/>
                                         </p:tgtEl>
                                         <p:attrNameLst>
                                           <p:attrName>style.visibility</p:attrName>
@@ -28363,7 +28347,7 @@
                                       <p:cBhvr>
                                         <p:cTn id="152" dur="350" fill="hold"/>
                                         <p:tgtEl>
-                                          <p:spTgt spid="32"/>
+                                          <p:spTgt spid="33"/>
                                         </p:tgtEl>
                                       </p:cBhvr>
                                     </p:animEffect>
@@ -28375,7 +28359,7 @@
                                           </p:stCondLst>
                                         </p:cTn>
                                         <p:tgtEl>
-                                          <p:spTgt spid="32"/>
+                                          <p:spTgt spid="33"/>
                                         </p:tgtEl>
                                         <p:attrNameLst>
                                           <p:attrName>style.visibility</p:attrName>
@@ -28398,7 +28382,7 @@
                                       <p:cBhvr>
                                         <p:cTn id="155" dur="350" fill="hold"/>
                                         <p:tgtEl>
-                                          <p:spTgt spid="33"/>
+                                          <p:spTgt spid="34"/>
                                         </p:tgtEl>
                                       </p:cBhvr>
                                     </p:animEffect>
@@ -28410,7 +28394,7 @@
                                           </p:stCondLst>
                                         </p:cTn>
                                         <p:tgtEl>
-                                          <p:spTgt spid="33"/>
+                                          <p:spTgt spid="34"/>
                                         </p:tgtEl>
                                         <p:attrNameLst>
                                           <p:attrName>style.visibility</p:attrName>
@@ -28433,7 +28417,7 @@
                                       <p:cBhvr>
                                         <p:cTn id="158" dur="350" fill="hold"/>
                                         <p:tgtEl>
-                                          <p:spTgt spid="34"/>
+                                          <p:spTgt spid="35"/>
                                         </p:tgtEl>
                                       </p:cBhvr>
                                     </p:animEffect>
@@ -28445,7 +28429,7 @@
                                           </p:stCondLst>
                                         </p:cTn>
                                         <p:tgtEl>
-                                          <p:spTgt spid="34"/>
+                                          <p:spTgt spid="35"/>
                                         </p:tgtEl>
                                         <p:attrNameLst>
                                           <p:attrName>style.visibility</p:attrName>
@@ -28468,7 +28452,7 @@
                                       <p:cBhvr>
                                         <p:cTn id="161" dur="350" fill="hold"/>
                                         <p:tgtEl>
-                                          <p:spTgt spid="35"/>
+                                          <p:spTgt spid="36"/>
                                         </p:tgtEl>
                                       </p:cBhvr>
                                     </p:animEffect>
@@ -28480,7 +28464,7 @@
                                           </p:stCondLst>
                                         </p:cTn>
                                         <p:tgtEl>
-                                          <p:spTgt spid="35"/>
+                                          <p:spTgt spid="36"/>
                                         </p:tgtEl>
                                         <p:attrNameLst>
                                           <p:attrName>style.visibility</p:attrName>
@@ -28503,7 +28487,7 @@
                                       <p:cBhvr>
                                         <p:cTn id="164" dur="350" fill="hold"/>
                                         <p:tgtEl>
-                                          <p:spTgt spid="36"/>
+                                          <p:spTgt spid="37"/>
                                         </p:tgtEl>
                                       </p:cBhvr>
                                     </p:animEffect>
@@ -28515,7 +28499,7 @@
                                           </p:stCondLst>
                                         </p:cTn>
                                         <p:tgtEl>
-                                          <p:spTgt spid="36"/>
+                                          <p:spTgt spid="37"/>
                                         </p:tgtEl>
                                         <p:attrNameLst>
                                           <p:attrName>style.visibility</p:attrName>
@@ -28538,7 +28522,7 @@
                                       <p:cBhvr>
                                         <p:cTn id="167" dur="350" fill="hold"/>
                                         <p:tgtEl>
-                                          <p:spTgt spid="37"/>
+                                          <p:spTgt spid="38"/>
                                         </p:tgtEl>
                                       </p:cBhvr>
                                     </p:animEffect>
@@ -28550,7 +28534,7 @@
                                           </p:stCondLst>
                                         </p:cTn>
                                         <p:tgtEl>
-                                          <p:spTgt spid="37"/>
+                                          <p:spTgt spid="38"/>
                                         </p:tgtEl>
                                         <p:attrNameLst>
                                           <p:attrName>style.visibility</p:attrName>
@@ -28573,7 +28557,7 @@
                                       <p:cBhvr>
                                         <p:cTn id="170" dur="350" fill="hold"/>
                                         <p:tgtEl>
-                                          <p:spTgt spid="38"/>
+                                          <p:spTgt spid="39"/>
                                         </p:tgtEl>
                                       </p:cBhvr>
                                     </p:animEffect>
@@ -28585,7 +28569,7 @@
                                           </p:stCondLst>
                                         </p:cTn>
                                         <p:tgtEl>
-                                          <p:spTgt spid="38"/>
+                                          <p:spTgt spid="39"/>
                                         </p:tgtEl>
                                         <p:attrNameLst>
                                           <p:attrName>style.visibility</p:attrName>
@@ -28608,48 +28592,13 @@
                                       <p:cBhvr>
                                         <p:cTn id="173" dur="350" fill="hold"/>
                                         <p:tgtEl>
-                                          <p:spTgt spid="39"/>
+                                          <p:spTgt spid="40"/>
                                         </p:tgtEl>
                                       </p:cBhvr>
                                     </p:animEffect>
                                     <p:set>
                                       <p:cBhvr>
                                         <p:cTn id="174" dur="1" fill="hold">
-                                          <p:stCondLst>
-                                            <p:cond delay="350"/>
-                                          </p:stCondLst>
-                                        </p:cTn>
-                                        <p:tgtEl>
-                                          <p:spTgt spid="39"/>
-                                        </p:tgtEl>
-                                        <p:attrNameLst>
-                                          <p:attrName>style.visibility</p:attrName>
-                                        </p:attrNameLst>
-                                      </p:cBhvr>
-                                      <p:to>
-                                        <p:strVal val="hidden"/>
-                                      </p:to>
-                                    </p:set>
-                                  </p:childTnLst>
-                                </p:cTn>
-                              </p:par>
-                              <p:par>
-                                <p:cTn id="175" presetID="10" presetClass="exit" presetSubtype="0" fill="hold" grpId="2" nodeType="withEffect">
-                                  <p:stCondLst>
-                                    <p:cond delay="0"/>
-                                  </p:stCondLst>
-                                  <p:childTnLst>
-                                    <p:animEffect transition="out" filter="fade">
-                                      <p:cBhvr>
-                                        <p:cTn id="176" dur="350" fill="hold"/>
-                                        <p:tgtEl>
-                                          <p:spTgt spid="40"/>
-                                        </p:tgtEl>
-                                      </p:cBhvr>
-                                    </p:animEffect>
-                                    <p:set>
-                                      <p:cBhvr>
-                                        <p:cTn id="177" dur="1" fill="hold">
                                           <p:stCondLst>
                                             <p:cond delay="350"/>
                                           </p:stCondLst>
@@ -28669,14 +28618,14 @@
                                 </p:cTn>
                               </p:par>
                               <p:par>
-                                <p:cTn id="178" presetID="10" presetClass="exit" presetSubtype="0" fill="hold" grpId="2" nodeType="withEffect">
+                                <p:cTn id="175" presetID="10" presetClass="entr" presetSubtype="0" fill="hold" grpId="2" nodeType="withEffect">
                                   <p:stCondLst>
                                     <p:cond delay="0"/>
                                   </p:stCondLst>
                                   <p:childTnLst>
-                                    <p:animEffect transition="out" filter="fade">
+                                    <p:animEffect transition="in" filter="fade">
                                       <p:cBhvr>
-                                        <p:cTn id="179" dur="350" fill="hold"/>
+                                        <p:cTn id="176" dur="350" fill="hold"/>
                                         <p:tgtEl>
                                           <p:spTgt spid="41"/>
                                         </p:tgtEl>
@@ -28684,9 +28633,9 @@
                                     </p:animEffect>
                                     <p:set>
                                       <p:cBhvr>
-                                        <p:cTn id="180" dur="1" fill="hold">
+                                        <p:cTn id="177" dur="1" fill="hold">
                                           <p:stCondLst>
-                                            <p:cond delay="350"/>
+                                            <p:cond delay="0"/>
                                           </p:stCondLst>
                                         </p:cTn>
                                         <p:tgtEl>
@@ -28697,7 +28646,42 @@
                                         </p:attrNameLst>
                                       </p:cBhvr>
                                       <p:to>
-                                        <p:strVal val="hidden"/>
+                                        <p:strVal val="visible"/>
+                                      </p:to>
+                                    </p:set>
+                                  </p:childTnLst>
+                                </p:cTn>
+                              </p:par>
+                              <p:par>
+                                <p:cTn id="178" presetID="10" presetClass="entr" presetSubtype="0" fill="hold" grpId="2" nodeType="withEffect">
+                                  <p:stCondLst>
+                                    <p:cond delay="0"/>
+                                  </p:stCondLst>
+                                  <p:childTnLst>
+                                    <p:animEffect transition="in" filter="fade">
+                                      <p:cBhvr>
+                                        <p:cTn id="179" dur="350" fill="hold"/>
+                                        <p:tgtEl>
+                                          <p:spTgt spid="42"/>
+                                        </p:tgtEl>
+                                      </p:cBhvr>
+                                    </p:animEffect>
+                                    <p:set>
+                                      <p:cBhvr>
+                                        <p:cTn id="180" dur="1" fill="hold">
+                                          <p:stCondLst>
+                                            <p:cond delay="0"/>
+                                          </p:stCondLst>
+                                        </p:cTn>
+                                        <p:tgtEl>
+                                          <p:spTgt spid="42"/>
+                                        </p:tgtEl>
+                                        <p:attrNameLst>
+                                          <p:attrName>style.visibility</p:attrName>
+                                        </p:attrNameLst>
+                                      </p:cBhvr>
+                                      <p:to>
+                                        <p:strVal val="visible"/>
                                       </p:to>
                                     </p:set>
                                   </p:childTnLst>
@@ -28713,7 +28697,7 @@
                                       <p:cBhvr>
                                         <p:cTn id="182" dur="350" fill="hold"/>
                                         <p:tgtEl>
-                                          <p:spTgt spid="42"/>
+                                          <p:spTgt spid="43"/>
                                         </p:tgtEl>
                                       </p:cBhvr>
                                     </p:animEffect>
@@ -28725,7 +28709,7 @@
                                           </p:stCondLst>
                                         </p:cTn>
                                         <p:tgtEl>
-                                          <p:spTgt spid="42"/>
+                                          <p:spTgt spid="43"/>
                                         </p:tgtEl>
                                         <p:attrNameLst>
                                           <p:attrName>style.visibility</p:attrName>
@@ -28748,7 +28732,7 @@
                                       <p:cBhvr>
                                         <p:cTn id="185" dur="350" fill="hold"/>
                                         <p:tgtEl>
-                                          <p:spTgt spid="43"/>
+                                          <p:spTgt spid="44"/>
                                         </p:tgtEl>
                                       </p:cBhvr>
                                     </p:animEffect>
@@ -28760,77 +28744,7 @@
                                           </p:stCondLst>
                                         </p:cTn>
                                         <p:tgtEl>
-                                          <p:spTgt spid="43"/>
-                                        </p:tgtEl>
-                                        <p:attrNameLst>
-                                          <p:attrName>style.visibility</p:attrName>
-                                        </p:attrNameLst>
-                                      </p:cBhvr>
-                                      <p:to>
-                                        <p:strVal val="visible"/>
-                                      </p:to>
-                                    </p:set>
-                                  </p:childTnLst>
-                                </p:cTn>
-                              </p:par>
-                              <p:par>
-                                <p:cTn id="187" presetID="10" presetClass="entr" presetSubtype="0" fill="hold" grpId="2" nodeType="withEffect">
-                                  <p:stCondLst>
-                                    <p:cond delay="0"/>
-                                  </p:stCondLst>
-                                  <p:childTnLst>
-                                    <p:animEffect transition="in" filter="fade">
-                                      <p:cBhvr>
-                                        <p:cTn id="188" dur="350" fill="hold"/>
-                                        <p:tgtEl>
                                           <p:spTgt spid="44"/>
-                                        </p:tgtEl>
-                                      </p:cBhvr>
-                                    </p:animEffect>
-                                    <p:set>
-                                      <p:cBhvr>
-                                        <p:cTn id="189" dur="1" fill="hold">
-                                          <p:stCondLst>
-                                            <p:cond delay="0"/>
-                                          </p:stCondLst>
-                                        </p:cTn>
-                                        <p:tgtEl>
-                                          <p:spTgt spid="44"/>
-                                        </p:tgtEl>
-                                        <p:attrNameLst>
-                                          <p:attrName>style.visibility</p:attrName>
-                                        </p:attrNameLst>
-                                      </p:cBhvr>
-                                      <p:to>
-                                        <p:strVal val="visible"/>
-                                      </p:to>
-                                    </p:set>
-                                  </p:childTnLst>
-                                </p:cTn>
-                              </p:par>
-                              <p:par>
-                                <p:cTn id="190" presetID="10" presetClass="entr" presetSubtype="0" fill="hold" grpId="2" nodeType="withEffect">
-                                  <p:stCondLst>
-                                    <p:cond delay="0"/>
-                                  </p:stCondLst>
-                                  <p:childTnLst>
-                                    <p:animEffect transition="in" filter="fade">
-                                      <p:cBhvr>
-                                        <p:cTn id="191" dur="350" fill="hold"/>
-                                        <p:tgtEl>
-                                          <p:spTgt spid="45"/>
-                                        </p:tgtEl>
-                                      </p:cBhvr>
-                                    </p:animEffect>
-                                    <p:set>
-                                      <p:cBhvr>
-                                        <p:cTn id="192" dur="1" fill="hold">
-                                          <p:stCondLst>
-                                            <p:cond delay="0"/>
-                                          </p:stCondLst>
-                                        </p:cTn>
-                                        <p:tgtEl>
-                                          <p:spTgt spid="45"/>
                                         </p:tgtEl>
                                         <p:attrNameLst>
                                           <p:attrName>style.visibility</p:attrName>

--- a/5g-thesis-presentation-5min/tesi-5min.pptx
+++ b/5g-thesis-presentation-5min/tesi-5min.pptx
@@ -2,19 +2,19 @@
 <file path=ppt/presentation.xml><?xml version="1.0" encoding="utf-8"?>
 <p:presentation xmlns:p="http://schemas.openxmlformats.org/presentationml/2006/main">
   <p:sldMasterIdLst>
-    <p:sldMasterId xmlns:r="http://schemas.openxmlformats.org/officeDocument/2006/relationships" id="2147483648" r:id="R28d66bf4a12a46fb"/>
+    <p:sldMasterId xmlns:r="http://schemas.openxmlformats.org/officeDocument/2006/relationships" id="2147483648" r:id="R080e829da4934443"/>
   </p:sldMasterIdLst>
   <p:notesMasterIdLst>
-    <p:notesMasterId xmlns:r="http://schemas.openxmlformats.org/officeDocument/2006/relationships" r:id="R8d2113278ea34c4c"/>
+    <p:notesMasterId xmlns:r="http://schemas.openxmlformats.org/officeDocument/2006/relationships" r:id="Rf2006a3f0b4742e3"/>
   </p:notesMasterIdLst>
   <p:sldIdLst>
-    <p:sldId xmlns:r="http://schemas.openxmlformats.org/officeDocument/2006/relationships" id="256" r:id="Rb812ca990d2e4825"/>
-    <p:sldId xmlns:r="http://schemas.openxmlformats.org/officeDocument/2006/relationships" id="257" r:id="R577f91db0327409b"/>
-    <p:sldId xmlns:r="http://schemas.openxmlformats.org/officeDocument/2006/relationships" id="258" r:id="R89014dbec34948b5"/>
-    <p:sldId xmlns:r="http://schemas.openxmlformats.org/officeDocument/2006/relationships" id="259" r:id="R4f83e73cc2964929"/>
-    <p:sldId xmlns:r="http://schemas.openxmlformats.org/officeDocument/2006/relationships" id="260" r:id="Rc477bfc206ba442a"/>
-    <p:sldId xmlns:r="http://schemas.openxmlformats.org/officeDocument/2006/relationships" id="261" r:id="R23f0bfa541d840c0"/>
-    <p:sldId xmlns:r="http://schemas.openxmlformats.org/officeDocument/2006/relationships" id="262" r:id="R0686553aceb44965"/>
+    <p:sldId xmlns:r="http://schemas.openxmlformats.org/officeDocument/2006/relationships" id="256" r:id="R7ebcd7383ebe4b0f"/>
+    <p:sldId xmlns:r="http://schemas.openxmlformats.org/officeDocument/2006/relationships" id="257" r:id="Rf8a1fc615f8c4bc4"/>
+    <p:sldId xmlns:r="http://schemas.openxmlformats.org/officeDocument/2006/relationships" id="258" r:id="Rbce2ee4c1c3a4fd4"/>
+    <p:sldId xmlns:r="http://schemas.openxmlformats.org/officeDocument/2006/relationships" id="259" r:id="Rb8d0b8ef55664195"/>
+    <p:sldId xmlns:r="http://schemas.openxmlformats.org/officeDocument/2006/relationships" id="260" r:id="Re670753c6e354911"/>
+    <p:sldId xmlns:r="http://schemas.openxmlformats.org/officeDocument/2006/relationships" id="261" r:id="R127d50fc892543ed"/>
+    <p:sldId xmlns:r="http://schemas.openxmlformats.org/officeDocument/2006/relationships" id="262" r:id="Ra176352badf542d1"/>
   </p:sldIdLst>
   <p:sldSz cx="15240000" cy="8572500"/>
   <p:notesSz cx="6858000" cy="9144000"/>
@@ -1135,7 +1135,7 @@
           <p:cNvPr id="3" name="Title">
             <a:extLst xmlns:a="http://schemas.openxmlformats.org/drawingml/2006/main">
               <a:ext uri="{FF2B5EF4-FFF2-40B4-BE49-F238E27FC236}">
-                <a16:creationId xmlns:a16="http://schemas.microsoft.com/office/drawing/2014/main" id="{0B39142B-6BF2-48E6-9301-C6FA8BA45450}"/>
+                <a16:creationId xmlns:a16="http://schemas.microsoft.com/office/drawing/2014/main" id="{719D4EF0-DAE2-4CBE-AFAA-364F5523ADA5}"/>
               </a:ext>
             </a:extLst>
           </p:cNvPr>
@@ -1364,7 +1364,7 @@
           <p:cNvPr id="2" name="Subtitle">
             <a:extLst xmlns:a="http://schemas.openxmlformats.org/drawingml/2006/main">
               <a:ext uri="{FF2B5EF4-FFF2-40B4-BE49-F238E27FC236}">
-                <a16:creationId xmlns:a16="http://schemas.microsoft.com/office/drawing/2014/main" id="{8F8C5ACF-B12B-425B-9408-28ED62E1A33A}"/>
+                <a16:creationId xmlns:a16="http://schemas.microsoft.com/office/drawing/2014/main" id="{52C4BBCF-E99E-49DE-82E5-CD19BC22D76D}"/>
               </a:ext>
             </a:extLst>
           </p:cNvPr>
@@ -1610,7 +1610,7 @@
           <p:cNvPr id="2" name="Section title">
             <a:extLst xmlns:a="http://schemas.openxmlformats.org/drawingml/2006/main">
               <a:ext uri="{FF2B5EF4-FFF2-40B4-BE49-F238E27FC236}">
-                <a16:creationId xmlns:a16="http://schemas.microsoft.com/office/drawing/2014/main" id="{35A73A22-8D4C-4F36-A5AD-E9D2FC043F06}"/>
+                <a16:creationId xmlns:a16="http://schemas.microsoft.com/office/drawing/2014/main" id="{F20B08C7-9900-468E-ACF3-E04D8BDBCC5B}"/>
               </a:ext>
             </a:extLst>
           </p:cNvPr>
@@ -1856,7 +1856,7 @@
           <p:cNvPr id="3" name="Title">
             <a:extLst xmlns:a="http://schemas.openxmlformats.org/drawingml/2006/main">
               <a:ext uri="{FF2B5EF4-FFF2-40B4-BE49-F238E27FC236}">
-                <a16:creationId xmlns:a16="http://schemas.microsoft.com/office/drawing/2014/main" id="{8C747E11-99BC-4D9A-82E5-7C9AAE5D5086}"/>
+                <a16:creationId xmlns:a16="http://schemas.microsoft.com/office/drawing/2014/main" id="{8BBD0890-E6FA-46C4-BF42-6374E589E42A}"/>
               </a:ext>
             </a:extLst>
           </p:cNvPr>
@@ -2085,7 +2085,7 @@
           <p:cNvPr id="2" name="Body">
             <a:extLst xmlns:a="http://schemas.openxmlformats.org/drawingml/2006/main">
               <a:ext uri="{FF2B5EF4-FFF2-40B4-BE49-F238E27FC236}">
-                <a16:creationId xmlns:a16="http://schemas.microsoft.com/office/drawing/2014/main" id="{985D7692-E3FA-4CEE-BAFF-EA26ADCD631C}"/>
+                <a16:creationId xmlns:a16="http://schemas.microsoft.com/office/drawing/2014/main" id="{4F78370C-E516-4283-A947-63C2D2A9971B}"/>
               </a:ext>
             </a:extLst>
           </p:cNvPr>
@@ -2331,7 +2331,7 @@
           <p:cNvPr id="4" name="Title">
             <a:extLst xmlns:a="http://schemas.openxmlformats.org/drawingml/2006/main">
               <a:ext uri="{FF2B5EF4-FFF2-40B4-BE49-F238E27FC236}">
-                <a16:creationId xmlns:a16="http://schemas.microsoft.com/office/drawing/2014/main" id="{7B5600ED-1473-4042-B847-1D3747BCACD2}"/>
+                <a16:creationId xmlns:a16="http://schemas.microsoft.com/office/drawing/2014/main" id="{3F868E99-1987-44EF-B031-D32A45660182}"/>
               </a:ext>
             </a:extLst>
           </p:cNvPr>
@@ -2560,7 +2560,7 @@
           <p:cNvPr id="2" name="Left column">
             <a:extLst xmlns:a="http://schemas.openxmlformats.org/drawingml/2006/main">
               <a:ext uri="{FF2B5EF4-FFF2-40B4-BE49-F238E27FC236}">
-                <a16:creationId xmlns:a16="http://schemas.microsoft.com/office/drawing/2014/main" id="{EE70D698-F243-4884-B77B-C8122B4EEE53}"/>
+                <a16:creationId xmlns:a16="http://schemas.microsoft.com/office/drawing/2014/main" id="{6A911FD3-3F68-477F-A529-8DCEC112553A}"/>
               </a:ext>
             </a:extLst>
           </p:cNvPr>
@@ -2789,7 +2789,7 @@
           <p:cNvPr id="3" name="Right column">
             <a:extLst xmlns:a="http://schemas.openxmlformats.org/drawingml/2006/main">
               <a:ext uri="{FF2B5EF4-FFF2-40B4-BE49-F238E27FC236}">
-                <a16:creationId xmlns:a16="http://schemas.microsoft.com/office/drawing/2014/main" id="{6B5EECB9-86CD-4EEE-8B7A-4D1CF75C954E}"/>
+                <a16:creationId xmlns:a16="http://schemas.microsoft.com/office/drawing/2014/main" id="{743E4415-0E2D-48B8-AB25-581E79558945}"/>
               </a:ext>
             </a:extLst>
           </p:cNvPr>
@@ -3035,7 +3035,7 @@
           <p:cNvPr id="3" name="Title">
             <a:extLst xmlns:a="http://schemas.openxmlformats.org/drawingml/2006/main">
               <a:ext uri="{FF2B5EF4-FFF2-40B4-BE49-F238E27FC236}">
-                <a16:creationId xmlns:a16="http://schemas.microsoft.com/office/drawing/2014/main" id="{277005B0-DC8C-4195-8AD7-18D5BCDAE963}"/>
+                <a16:creationId xmlns:a16="http://schemas.microsoft.com/office/drawing/2014/main" id="{E1780E46-88F6-4ED8-8E03-18D614C4EE0C}"/>
               </a:ext>
             </a:extLst>
           </p:cNvPr>
@@ -3264,7 +3264,7 @@
           <p:cNvPr id="2" name="Left column">
             <a:extLst xmlns:a="http://schemas.openxmlformats.org/drawingml/2006/main">
               <a:ext uri="{FF2B5EF4-FFF2-40B4-BE49-F238E27FC236}">
-                <a16:creationId xmlns:a16="http://schemas.microsoft.com/office/drawing/2014/main" id="{8141C69F-945B-4267-ACE9-8552683CCE13}"/>
+                <a16:creationId xmlns:a16="http://schemas.microsoft.com/office/drawing/2014/main" id="{D31D9725-9953-4C39-B25C-1FEAFC25E147}"/>
               </a:ext>
             </a:extLst>
           </p:cNvPr>
@@ -3531,12 +3531,12 @@
   </p:cSld>
   <p:clrMap bg1="lt1" tx1="dk1" bg2="lt2" tx2="dk2" accent1="accent1" accent2="accent2" accent3="accent3" accent4="accent4" accent5="accent5" accent6="accent6" hlink="hlink" folHlink="folHlink"/>
   <p:sldLayoutIdLst>
-    <p:sldLayoutId xmlns:r="http://schemas.openxmlformats.org/officeDocument/2006/relationships" id="2147483649" r:id="Rddd2d3a141514265"/>
-    <p:sldLayoutId xmlns:r="http://schemas.openxmlformats.org/officeDocument/2006/relationships" id="2147483650" r:id="Rdb2b53ff255a4a9d"/>
-    <p:sldLayoutId xmlns:r="http://schemas.openxmlformats.org/officeDocument/2006/relationships" id="2147483651" r:id="Rb788dfb663b04c55"/>
-    <p:sldLayoutId xmlns:r="http://schemas.openxmlformats.org/officeDocument/2006/relationships" id="2147483652" r:id="Rbd503872eeb14c10"/>
-    <p:sldLayoutId xmlns:r="http://schemas.openxmlformats.org/officeDocument/2006/relationships" id="2147483653" r:id="R6b000824c1684cd3"/>
-    <p:sldLayoutId xmlns:r="http://schemas.openxmlformats.org/officeDocument/2006/relationships" id="2147483654" r:id="Rf572b49db79c42b7"/>
+    <p:sldLayoutId xmlns:r="http://schemas.openxmlformats.org/officeDocument/2006/relationships" id="2147483649" r:id="R322b171288f247fd"/>
+    <p:sldLayoutId xmlns:r="http://schemas.openxmlformats.org/officeDocument/2006/relationships" id="2147483650" r:id="R7c7a73203a384888"/>
+    <p:sldLayoutId xmlns:r="http://schemas.openxmlformats.org/officeDocument/2006/relationships" id="2147483651" r:id="Rde42efc10431451e"/>
+    <p:sldLayoutId xmlns:r="http://schemas.openxmlformats.org/officeDocument/2006/relationships" id="2147483652" r:id="R9e8e37f8e5a142c9"/>
+    <p:sldLayoutId xmlns:r="http://schemas.openxmlformats.org/officeDocument/2006/relationships" id="2147483653" r:id="Reafdd39df2b043f4"/>
+    <p:sldLayoutId xmlns:r="http://schemas.openxmlformats.org/officeDocument/2006/relationships" id="2147483654" r:id="Rf548e6d54aba465f"/>
   </p:sldLayoutIdLst>
   <p:txStyles>
     <p:titleStyle>
@@ -4087,7 +4087,7 @@
           <p:cNvPr id="21" name="">
             <a:extLst xmlns:a="http://schemas.openxmlformats.org/drawingml/2006/main">
               <a:ext uri="{FF2B5EF4-FFF2-40B4-BE49-F238E27FC236}">
-                <a16:creationId xmlns:a16="http://schemas.microsoft.com/office/drawing/2014/main" id="{6516710D-B0DD-42E8-A790-C37733949609}"/>
+                <a16:creationId xmlns:a16="http://schemas.microsoft.com/office/drawing/2014/main" id="{657D2786-6C97-4B9A-AFEB-E2F14EA1590D}"/>
               </a:ext>
             </a:extLst>
           </p:cNvPr>
@@ -4097,7 +4097,7 @@
           <p:nvPr/>
         </p:nvPicPr>
         <p:blipFill>
-          <a:blip xmlns:r="http://schemas.openxmlformats.org/officeDocument/2006/relationships" xmlns:a="http://schemas.openxmlformats.org/drawingml/2006/main" r:embed="R32bce73d270248e3"/>
+          <a:blip xmlns:r="http://schemas.openxmlformats.org/officeDocument/2006/relationships" xmlns:a="http://schemas.openxmlformats.org/drawingml/2006/main" r:embed="R6b867c90f8524082"/>
           <a:stretch xmlns:a="http://schemas.openxmlformats.org/drawingml/2006/main"/>
         </p:blipFill>
         <p:spPr>
@@ -4115,7 +4115,7 @@
           <p:cNvPr id="2" name="f2">
             <a:extLst xmlns:a="http://schemas.openxmlformats.org/drawingml/2006/main">
               <a:ext uri="{FF2B5EF4-FFF2-40B4-BE49-F238E27FC236}">
-                <a16:creationId xmlns:a16="http://schemas.microsoft.com/office/drawing/2014/main" id="{957BFEB9-951F-4A66-A56C-2F6A3F935696}"/>
+                <a16:creationId xmlns:a16="http://schemas.microsoft.com/office/drawing/2014/main" id="{29ABFA5E-9420-4E41-8AA0-1B7F482EFE59}"/>
               </a:ext>
             </a:extLst>
           </p:cNvPr>
@@ -4274,7 +4274,7 @@
           <p:cNvPr id="3" name="f3">
             <a:extLst xmlns:a="http://schemas.openxmlformats.org/drawingml/2006/main">
               <a:ext uri="{FF2B5EF4-FFF2-40B4-BE49-F238E27FC236}">
-                <a16:creationId xmlns:a16="http://schemas.microsoft.com/office/drawing/2014/main" id="{34E0D8C1-10C6-4689-888E-D4CF8CA8EBC8}"/>
+                <a16:creationId xmlns:a16="http://schemas.microsoft.com/office/drawing/2014/main" id="{2367EF65-31D1-4485-AE5D-767CB5BE5DB9}"/>
               </a:ext>
             </a:extLst>
           </p:cNvPr>
@@ -4433,7 +4433,7 @@
           <p:cNvPr id="4" name="f4">
             <a:extLst xmlns:a="http://schemas.openxmlformats.org/drawingml/2006/main">
               <a:ext uri="{FF2B5EF4-FFF2-40B4-BE49-F238E27FC236}">
-                <a16:creationId xmlns:a16="http://schemas.microsoft.com/office/drawing/2014/main" id="{5E2B78A3-D381-4454-BF3B-3F62F1A7DBB9}"/>
+                <a16:creationId xmlns:a16="http://schemas.microsoft.com/office/drawing/2014/main" id="{0BAB1DC3-0D8F-484F-A212-522DB1E8157F}"/>
               </a:ext>
             </a:extLst>
           </p:cNvPr>
@@ -4592,7 +4592,7 @@
           <p:cNvPr id="5" name="f5">
             <a:extLst xmlns:a="http://schemas.openxmlformats.org/drawingml/2006/main">
               <a:ext uri="{FF2B5EF4-FFF2-40B4-BE49-F238E27FC236}">
-                <a16:creationId xmlns:a16="http://schemas.microsoft.com/office/drawing/2014/main" id="{3150FE58-5A32-49AE-86AE-3D7D905BBE75}"/>
+                <a16:creationId xmlns:a16="http://schemas.microsoft.com/office/drawing/2014/main" id="{D2E8966A-AF1F-4988-8441-B7365EC245C1}"/>
               </a:ext>
             </a:extLst>
           </p:cNvPr>
@@ -4751,7 +4751,7 @@
           <p:cNvPr id="6" name="f6">
             <a:extLst xmlns:a="http://schemas.openxmlformats.org/drawingml/2006/main">
               <a:ext uri="{FF2B5EF4-FFF2-40B4-BE49-F238E27FC236}">
-                <a16:creationId xmlns:a16="http://schemas.microsoft.com/office/drawing/2014/main" id="{7DC8A13E-EE6A-4CEF-9AAD-50B1C6AAA20D}"/>
+                <a16:creationId xmlns:a16="http://schemas.microsoft.com/office/drawing/2014/main" id="{C7BB09E2-E3CF-4865-8A8C-ED45A26F1C17}"/>
               </a:ext>
             </a:extLst>
           </p:cNvPr>
@@ -4910,7 +4910,7 @@
           <p:cNvPr id="7" name="f7">
             <a:extLst xmlns:a="http://schemas.openxmlformats.org/drawingml/2006/main">
               <a:ext uri="{FF2B5EF4-FFF2-40B4-BE49-F238E27FC236}">
-                <a16:creationId xmlns:a16="http://schemas.microsoft.com/office/drawing/2014/main" id="{3E73BABC-EDA2-4830-AFA6-02DCB57D7286}"/>
+                <a16:creationId xmlns:a16="http://schemas.microsoft.com/office/drawing/2014/main" id="{EDEEE779-3543-4F80-9435-7DA3CE51A1DD}"/>
               </a:ext>
             </a:extLst>
           </p:cNvPr>
@@ -5069,7 +5069,7 @@
           <p:cNvPr id="8" name="f8">
             <a:extLst xmlns:a="http://schemas.openxmlformats.org/drawingml/2006/main">
               <a:ext uri="{FF2B5EF4-FFF2-40B4-BE49-F238E27FC236}">
-                <a16:creationId xmlns:a16="http://schemas.microsoft.com/office/drawing/2014/main" id="{230346E9-89B4-4D49-B907-C8487E6EBD38}"/>
+                <a16:creationId xmlns:a16="http://schemas.microsoft.com/office/drawing/2014/main" id="{F4B5FC35-330C-4C1D-9076-5CB0AD513F91}"/>
               </a:ext>
             </a:extLst>
           </p:cNvPr>
@@ -5228,7 +5228,7 @@
           <p:cNvPr id="9" name="f9">
             <a:extLst xmlns:a="http://schemas.openxmlformats.org/drawingml/2006/main">
               <a:ext uri="{FF2B5EF4-FFF2-40B4-BE49-F238E27FC236}">
-                <a16:creationId xmlns:a16="http://schemas.microsoft.com/office/drawing/2014/main" id="{B9DA4782-B4EE-40EB-92F3-D1C6E176AC0C}"/>
+                <a16:creationId xmlns:a16="http://schemas.microsoft.com/office/drawing/2014/main" id="{62067359-B5A9-459E-A9B0-0A9E36DA902F}"/>
               </a:ext>
             </a:extLst>
           </p:cNvPr>
@@ -5387,7 +5387,7 @@
           <p:cNvPr id="10" name="f10">
             <a:extLst xmlns:a="http://schemas.openxmlformats.org/drawingml/2006/main">
               <a:ext uri="{FF2B5EF4-FFF2-40B4-BE49-F238E27FC236}">
-                <a16:creationId xmlns:a16="http://schemas.microsoft.com/office/drawing/2014/main" id="{B454D1EA-CB46-456C-808F-5B3D8F4597B8}"/>
+                <a16:creationId xmlns:a16="http://schemas.microsoft.com/office/drawing/2014/main" id="{5DA44565-0873-40D4-A4BF-1C0CF7ACEF44}"/>
               </a:ext>
             </a:extLst>
           </p:cNvPr>
@@ -5546,7 +5546,7 @@
           <p:cNvPr id="11" name="f11">
             <a:extLst xmlns:a="http://schemas.openxmlformats.org/drawingml/2006/main">
               <a:ext uri="{FF2B5EF4-FFF2-40B4-BE49-F238E27FC236}">
-                <a16:creationId xmlns:a16="http://schemas.microsoft.com/office/drawing/2014/main" id="{67718F60-B3E2-4FE4-8F1C-DA3DE84E3E67}"/>
+                <a16:creationId xmlns:a16="http://schemas.microsoft.com/office/drawing/2014/main" id="{1AEB2D7A-3B24-4DA1-BC84-18C4FAFE3A14}"/>
               </a:ext>
             </a:extLst>
           </p:cNvPr>
@@ -5705,7 +5705,7 @@
           <p:cNvPr id="12" name="f12">
             <a:extLst xmlns:a="http://schemas.openxmlformats.org/drawingml/2006/main">
               <a:ext uri="{FF2B5EF4-FFF2-40B4-BE49-F238E27FC236}">
-                <a16:creationId xmlns:a16="http://schemas.microsoft.com/office/drawing/2014/main" id="{71DFBB5A-16BA-4251-8596-EDE21B18FEA8}"/>
+                <a16:creationId xmlns:a16="http://schemas.microsoft.com/office/drawing/2014/main" id="{55780277-F541-45F6-8F2B-8D7C5A9B90CA}"/>
               </a:ext>
             </a:extLst>
           </p:cNvPr>
@@ -5864,7 +5864,7 @@
           <p:cNvPr id="13" name="f13">
             <a:extLst xmlns:a="http://schemas.openxmlformats.org/drawingml/2006/main">
               <a:ext uri="{FF2B5EF4-FFF2-40B4-BE49-F238E27FC236}">
-                <a16:creationId xmlns:a16="http://schemas.microsoft.com/office/drawing/2014/main" id="{514769DD-76B8-4298-B3A1-6F8DE16A8DCA}"/>
+                <a16:creationId xmlns:a16="http://schemas.microsoft.com/office/drawing/2014/main" id="{33838266-49BE-4337-ACE4-9AA4098C4358}"/>
               </a:ext>
             </a:extLst>
           </p:cNvPr>
@@ -6023,7 +6023,7 @@
           <p:cNvPr id="14" name="f14">
             <a:extLst xmlns:a="http://schemas.openxmlformats.org/drawingml/2006/main">
               <a:ext uri="{FF2B5EF4-FFF2-40B4-BE49-F238E27FC236}">
-                <a16:creationId xmlns:a16="http://schemas.microsoft.com/office/drawing/2014/main" id="{8E326E81-D27C-462A-8BF7-78A32AD19B6E}"/>
+                <a16:creationId xmlns:a16="http://schemas.microsoft.com/office/drawing/2014/main" id="{0DA2BD25-AC39-4ED2-9298-079C9D5C2D5A}"/>
               </a:ext>
             </a:extLst>
           </p:cNvPr>
@@ -6182,7 +6182,7 @@
           <p:cNvPr id="15" name="f15">
             <a:extLst xmlns:a="http://schemas.openxmlformats.org/drawingml/2006/main">
               <a:ext uri="{FF2B5EF4-FFF2-40B4-BE49-F238E27FC236}">
-                <a16:creationId xmlns:a16="http://schemas.microsoft.com/office/drawing/2014/main" id="{E4D31AC5-7F1F-48CA-9947-25474E4A5CCE}"/>
+                <a16:creationId xmlns:a16="http://schemas.microsoft.com/office/drawing/2014/main" id="{2CC299C9-667B-4EA2-B6E5-9652A6E71B53}"/>
               </a:ext>
             </a:extLst>
           </p:cNvPr>
@@ -6341,7 +6341,7 @@
           <p:cNvPr id="16" name="f16">
             <a:extLst xmlns:a="http://schemas.openxmlformats.org/drawingml/2006/main">
               <a:ext uri="{FF2B5EF4-FFF2-40B4-BE49-F238E27FC236}">
-                <a16:creationId xmlns:a16="http://schemas.microsoft.com/office/drawing/2014/main" id="{9BE88533-0DEB-4B47-8CE1-5FAB2AFA19C5}"/>
+                <a16:creationId xmlns:a16="http://schemas.microsoft.com/office/drawing/2014/main" id="{82ABDDB2-A76C-4D3F-B010-A5D301072B40}"/>
               </a:ext>
             </a:extLst>
           </p:cNvPr>
@@ -6500,7 +6500,7 @@
           <p:cNvPr id="17" name="f17">
             <a:extLst xmlns:a="http://schemas.openxmlformats.org/drawingml/2006/main">
               <a:ext uri="{FF2B5EF4-FFF2-40B4-BE49-F238E27FC236}">
-                <a16:creationId xmlns:a16="http://schemas.microsoft.com/office/drawing/2014/main" id="{6C0DFD20-C3D4-4EBD-A214-F5E2D840E033}"/>
+                <a16:creationId xmlns:a16="http://schemas.microsoft.com/office/drawing/2014/main" id="{28545612-A992-49BA-94B3-7D9C6471A642}"/>
               </a:ext>
             </a:extLst>
           </p:cNvPr>
@@ -6659,7 +6659,7 @@
           <p:cNvPr id="18" name="f18">
             <a:extLst xmlns:a="http://schemas.openxmlformats.org/drawingml/2006/main">
               <a:ext uri="{FF2B5EF4-FFF2-40B4-BE49-F238E27FC236}">
-                <a16:creationId xmlns:a16="http://schemas.microsoft.com/office/drawing/2014/main" id="{6D722372-5245-4C38-B6D8-25C3891B95D2}"/>
+                <a16:creationId xmlns:a16="http://schemas.microsoft.com/office/drawing/2014/main" id="{EC47CD08-80E2-4169-A38C-485B65FC5A4C}"/>
               </a:ext>
             </a:extLst>
           </p:cNvPr>
@@ -6818,7 +6818,7 @@
           <p:cNvPr id="19" name="f19">
             <a:extLst xmlns:a="http://schemas.openxmlformats.org/drawingml/2006/main">
               <a:ext uri="{FF2B5EF4-FFF2-40B4-BE49-F238E27FC236}">
-                <a16:creationId xmlns:a16="http://schemas.microsoft.com/office/drawing/2014/main" id="{B199EFDA-42D0-426C-8E8A-26EDE8CA59A8}"/>
+                <a16:creationId xmlns:a16="http://schemas.microsoft.com/office/drawing/2014/main" id="{15B098D0-5631-476D-95F1-19FB35A51686}"/>
               </a:ext>
             </a:extLst>
           </p:cNvPr>
@@ -6977,7 +6977,7 @@
           <p:cNvPr id="20" name="f20">
             <a:extLst xmlns:a="http://schemas.openxmlformats.org/drawingml/2006/main">
               <a:ext uri="{FF2B5EF4-FFF2-40B4-BE49-F238E27FC236}">
-                <a16:creationId xmlns:a16="http://schemas.microsoft.com/office/drawing/2014/main" id="{D81B06AD-5025-45B0-9724-0F9A36D4704E}"/>
+                <a16:creationId xmlns:a16="http://schemas.microsoft.com/office/drawing/2014/main" id="{87274623-171C-41BC-9A9D-593D5682D4FC}"/>
               </a:ext>
             </a:extLst>
           </p:cNvPr>
@@ -7134,7 +7134,7 @@
     </p:spTree>
     <p:extLst>
       <p:ext uri="{BB962C8B-B14F-4D97-AF65-F5344CB8AC3E}">
-        <p14:creationId xmlns:p14="http://schemas.microsoft.com/office/powerpoint/2010/main" val="656116278"/>
+        <p14:creationId xmlns:p14="http://schemas.microsoft.com/office/powerpoint/2010/main" val="1210442549"/>
       </p:ext>
     </p:extLst>
   </p:cSld>
@@ -7165,7 +7165,7 @@
           <p:cNvPr id="24" name="f21">
             <a:extLst xmlns:a="http://schemas.openxmlformats.org/drawingml/2006/main">
               <a:ext uri="{FF2B5EF4-FFF2-40B4-BE49-F238E27FC236}">
-                <a16:creationId xmlns:a16="http://schemas.microsoft.com/office/drawing/2014/main" id="{EE4F07C7-2534-4DEC-84F7-332AB758DD07}"/>
+                <a16:creationId xmlns:a16="http://schemas.microsoft.com/office/drawing/2014/main" id="{8CB3FFCF-38F0-4A0D-9BC6-7ACA96271C9D}"/>
               </a:ext>
             </a:extLst>
           </p:cNvPr>
@@ -7324,7 +7324,7 @@
           <p:cNvPr id="2" name="f22">
             <a:extLst xmlns:a="http://schemas.openxmlformats.org/drawingml/2006/main">
               <a:ext uri="{FF2B5EF4-FFF2-40B4-BE49-F238E27FC236}">
-                <a16:creationId xmlns:a16="http://schemas.microsoft.com/office/drawing/2014/main" id="{1B81CBB5-11A0-4A34-B33F-E9E38469EE57}"/>
+                <a16:creationId xmlns:a16="http://schemas.microsoft.com/office/drawing/2014/main" id="{9BF28147-A552-4E06-8E48-B6B06355886E}"/>
               </a:ext>
             </a:extLst>
           </p:cNvPr>
@@ -7483,7 +7483,7 @@
           <p:cNvPr id="3" name="f23">
             <a:extLst xmlns:a="http://schemas.openxmlformats.org/drawingml/2006/main">
               <a:ext uri="{FF2B5EF4-FFF2-40B4-BE49-F238E27FC236}">
-                <a16:creationId xmlns:a16="http://schemas.microsoft.com/office/drawing/2014/main" id="{C7F02DD1-CBD3-4CBE-89BE-143B21199990}"/>
+                <a16:creationId xmlns:a16="http://schemas.microsoft.com/office/drawing/2014/main" id="{E6A41F6A-025B-4855-B3F0-3CCB4B07BE94}"/>
               </a:ext>
             </a:extLst>
           </p:cNvPr>
@@ -7642,7 +7642,7 @@
           <p:cNvPr id="4" name="f24">
             <a:extLst xmlns:a="http://schemas.openxmlformats.org/drawingml/2006/main">
               <a:ext uri="{FF2B5EF4-FFF2-40B4-BE49-F238E27FC236}">
-                <a16:creationId xmlns:a16="http://schemas.microsoft.com/office/drawing/2014/main" id="{1FABB5DB-BFA5-422A-978D-B80C3FBCC1B0}"/>
+                <a16:creationId xmlns:a16="http://schemas.microsoft.com/office/drawing/2014/main" id="{5BE1E8F8-2CD6-44C7-A347-B065AAE66E52}"/>
               </a:ext>
             </a:extLst>
           </p:cNvPr>
@@ -7654,7 +7654,7 @@
         <p:spPr>
           <a:xfrm xmlns:a="http://schemas.openxmlformats.org/drawingml/2006/main">
             <a:off x="1066800" y="2000250"/>
-            <a:ext cx="13106400" cy="704850"/>
+            <a:ext cx="13106400" cy="438150"/>
           </a:xfrm>
           <a:prstGeom xmlns:a="http://schemas.openxmlformats.org/drawingml/2006/main" prst="rect">
             <a:avLst/>
@@ -7791,30 +7791,7 @@
                 <a:ea typeface="Nimbus Sans"/>
                 <a:cs typeface="Nimbus Sans"/>
               </a:rPr>
-              <a:t>Definire un requisito di sicurezza non garantisce</a:t>
-            </a:r>
-          </a:p>
-          <a:p xmlns:a="http://schemas.openxmlformats.org/drawingml/2006/main">
-            <a:pPr algn="l">
-              <a:defRPr sz="2025" b="0">
-                <a:solidFill>
-                  <a:srgbClr val="52627B"/>
-                </a:solidFill>
-                <a:latin typeface="Nimbus Sans"/>
-                <a:ea typeface="Nimbus Sans"/>
-                <a:cs typeface="Nimbus Sans"/>
-              </a:defRPr>
-            </a:pPr>
-            <a:r>
-              <a:rPr sz="2025" b="0">
-                <a:solidFill>
-                  <a:srgbClr val="52627B"/>
-                </a:solidFill>
-                <a:latin typeface="Nimbus Sans"/>
-                <a:ea typeface="Nimbus Sans"/>
-                <a:cs typeface="Nimbus Sans"/>
-              </a:rPr>
-              <a:t>che venga rispettato.</a:t>
+              <a:t>Definire un requisito di sicurezza non garantisce che venga rispettato.</a:t>
             </a:r>
           </a:p>
         </p:txBody>
@@ -7824,7 +7801,7 @@
           <p:cNvPr id="5" name="f25">
             <a:extLst xmlns:a="http://schemas.openxmlformats.org/drawingml/2006/main">
               <a:ext uri="{FF2B5EF4-FFF2-40B4-BE49-F238E27FC236}">
-                <a16:creationId xmlns:a16="http://schemas.microsoft.com/office/drawing/2014/main" id="{ECB45CF5-FD6A-446E-80B7-F4DE4D345F38}"/>
+                <a16:creationId xmlns:a16="http://schemas.microsoft.com/office/drawing/2014/main" id="{40676EF3-07AA-45BC-A0E8-B20A03D4ECD0}"/>
               </a:ext>
             </a:extLst>
           </p:cNvPr>
@@ -7983,7 +7960,7 @@
           <p:cNvPr id="6" name="f26">
             <a:extLst xmlns:a="http://schemas.openxmlformats.org/drawingml/2006/main">
               <a:ext uri="{FF2B5EF4-FFF2-40B4-BE49-F238E27FC236}">
-                <a16:creationId xmlns:a16="http://schemas.microsoft.com/office/drawing/2014/main" id="{8C047153-FC70-4E7C-8FD4-450175CCB875}"/>
+                <a16:creationId xmlns:a16="http://schemas.microsoft.com/office/drawing/2014/main" id="{6778F7EC-FFE9-4F6D-9484-8745E1DE4A35}"/>
               </a:ext>
             </a:extLst>
           </p:cNvPr>
@@ -8142,7 +8119,7 @@
           <p:cNvPr id="7" name="f27">
             <a:extLst xmlns:a="http://schemas.openxmlformats.org/drawingml/2006/main">
               <a:ext uri="{FF2B5EF4-FFF2-40B4-BE49-F238E27FC236}">
-                <a16:creationId xmlns:a16="http://schemas.microsoft.com/office/drawing/2014/main" id="{3B30028B-CECE-41E3-AB3E-1D6767777716}"/>
+                <a16:creationId xmlns:a16="http://schemas.microsoft.com/office/drawing/2014/main" id="{793D4F68-A06C-483B-A4C6-F8C3F58896E0}"/>
               </a:ext>
             </a:extLst>
           </p:cNvPr>
@@ -8177,7 +8154,7 @@
           <p:cNvPr id="8" name="f28">
             <a:extLst xmlns:a="http://schemas.openxmlformats.org/drawingml/2006/main">
               <a:ext uri="{FF2B5EF4-FFF2-40B4-BE49-F238E27FC236}">
-                <a16:creationId xmlns:a16="http://schemas.microsoft.com/office/drawing/2014/main" id="{B651D717-EA02-4D25-9C10-184A823F19B4}"/>
+                <a16:creationId xmlns:a16="http://schemas.microsoft.com/office/drawing/2014/main" id="{AA900B61-2A66-4077-AB66-0AADEDCA2642}"/>
               </a:ext>
             </a:extLst>
           </p:cNvPr>
@@ -8208,7 +8185,7 @@
           <p:cNvPr id="9" name="f29">
             <a:extLst xmlns:a="http://schemas.openxmlformats.org/drawingml/2006/main">
               <a:ext uri="{FF2B5EF4-FFF2-40B4-BE49-F238E27FC236}">
-                <a16:creationId xmlns:a16="http://schemas.microsoft.com/office/drawing/2014/main" id="{707171A7-CC45-40E2-B5C8-E061F0DFDA38}"/>
+                <a16:creationId xmlns:a16="http://schemas.microsoft.com/office/drawing/2014/main" id="{B787AB46-108B-4A72-A6C8-8A11AB36F264}"/>
               </a:ext>
             </a:extLst>
           </p:cNvPr>
@@ -8239,7 +8216,7 @@
           <p:cNvPr id="10" name="f30">
             <a:extLst xmlns:a="http://schemas.openxmlformats.org/drawingml/2006/main">
               <a:ext uri="{FF2B5EF4-FFF2-40B4-BE49-F238E27FC236}">
-                <a16:creationId xmlns:a16="http://schemas.microsoft.com/office/drawing/2014/main" id="{6222371B-7084-4795-8174-548EEA63E3B3}"/>
+                <a16:creationId xmlns:a16="http://schemas.microsoft.com/office/drawing/2014/main" id="{41FD3305-911E-4D68-9B3C-02EDEAD9F207}"/>
               </a:ext>
             </a:extLst>
           </p:cNvPr>
@@ -8270,7 +8247,7 @@
           <p:cNvPr id="11" name="f31">
             <a:extLst xmlns:a="http://schemas.openxmlformats.org/drawingml/2006/main">
               <a:ext uri="{FF2B5EF4-FFF2-40B4-BE49-F238E27FC236}">
-                <a16:creationId xmlns:a16="http://schemas.microsoft.com/office/drawing/2014/main" id="{0AA83926-304D-4D87-96B8-C2AE8FB73C3D}"/>
+                <a16:creationId xmlns:a16="http://schemas.microsoft.com/office/drawing/2014/main" id="{CBA52584-C9D4-475C-8B87-26B5DB5A1C96}"/>
               </a:ext>
             </a:extLst>
           </p:cNvPr>
@@ -8305,7 +8282,7 @@
           <p:cNvPr id="12" name="f32">
             <a:extLst xmlns:a="http://schemas.openxmlformats.org/drawingml/2006/main">
               <a:ext uri="{FF2B5EF4-FFF2-40B4-BE49-F238E27FC236}">
-                <a16:creationId xmlns:a16="http://schemas.microsoft.com/office/drawing/2014/main" id="{C049790A-D613-41A6-BA80-02774A54BAE3}"/>
+                <a16:creationId xmlns:a16="http://schemas.microsoft.com/office/drawing/2014/main" id="{4ECAB9D3-6A18-431C-BBA5-6F96DED3709D}"/>
               </a:ext>
             </a:extLst>
           </p:cNvPr>
@@ -8336,7 +8313,7 @@
           <p:cNvPr id="13" name="f33">
             <a:extLst xmlns:a="http://schemas.openxmlformats.org/drawingml/2006/main">
               <a:ext uri="{FF2B5EF4-FFF2-40B4-BE49-F238E27FC236}">
-                <a16:creationId xmlns:a16="http://schemas.microsoft.com/office/drawing/2014/main" id="{A9247DF6-073F-475E-A694-09CEAB80B75A}"/>
+                <a16:creationId xmlns:a16="http://schemas.microsoft.com/office/drawing/2014/main" id="{AB62E352-E176-4CE1-B3A7-2516D93FDF46}"/>
               </a:ext>
             </a:extLst>
           </p:cNvPr>
@@ -8369,7 +8346,7 @@
           <p:cNvPr id="14" name="f34">
             <a:extLst xmlns:a="http://schemas.openxmlformats.org/drawingml/2006/main">
               <a:ext uri="{FF2B5EF4-FFF2-40B4-BE49-F238E27FC236}">
-                <a16:creationId xmlns:a16="http://schemas.microsoft.com/office/drawing/2014/main" id="{86616814-FB75-4C92-960A-6F54597D67DF}"/>
+                <a16:creationId xmlns:a16="http://schemas.microsoft.com/office/drawing/2014/main" id="{C24AC88F-72A9-46B0-A70C-7D38A52B3FA6}"/>
               </a:ext>
             </a:extLst>
           </p:cNvPr>
@@ -8402,7 +8379,7 @@
           <p:cNvPr id="15" name="f35">
             <a:extLst xmlns:a="http://schemas.openxmlformats.org/drawingml/2006/main">
               <a:ext uri="{FF2B5EF4-FFF2-40B4-BE49-F238E27FC236}">
-                <a16:creationId xmlns:a16="http://schemas.microsoft.com/office/drawing/2014/main" id="{B8425C6B-BED0-41E8-9830-881F5C641680}"/>
+                <a16:creationId xmlns:a16="http://schemas.microsoft.com/office/drawing/2014/main" id="{C1AE2DB6-16BA-4F30-8099-EDFDB565430F}"/>
               </a:ext>
             </a:extLst>
           </p:cNvPr>
@@ -8435,7 +8412,7 @@
           <p:cNvPr id="16" name="f36">
             <a:extLst xmlns:a="http://schemas.openxmlformats.org/drawingml/2006/main">
               <a:ext uri="{FF2B5EF4-FFF2-40B4-BE49-F238E27FC236}">
-                <a16:creationId xmlns:a16="http://schemas.microsoft.com/office/drawing/2014/main" id="{86BACB30-64B9-4CB5-A554-E792E518D7B4}"/>
+                <a16:creationId xmlns:a16="http://schemas.microsoft.com/office/drawing/2014/main" id="{BA0D7D9B-F878-48E4-A931-310DA8F02B95}"/>
               </a:ext>
             </a:extLst>
           </p:cNvPr>
@@ -8594,7 +8571,7 @@
           <p:cNvPr id="17" name="f37">
             <a:extLst xmlns:a="http://schemas.openxmlformats.org/drawingml/2006/main">
               <a:ext uri="{FF2B5EF4-FFF2-40B4-BE49-F238E27FC236}">
-                <a16:creationId xmlns:a16="http://schemas.microsoft.com/office/drawing/2014/main" id="{385596BE-6E4A-42CD-996B-2D030447A1FD}"/>
+                <a16:creationId xmlns:a16="http://schemas.microsoft.com/office/drawing/2014/main" id="{490A2AB2-125A-4123-9405-01AE0CB592D8}"/>
               </a:ext>
             </a:extLst>
           </p:cNvPr>
@@ -8625,7 +8602,7 @@
           <p:cNvPr id="18" name="f38">
             <a:extLst xmlns:a="http://schemas.openxmlformats.org/drawingml/2006/main">
               <a:ext uri="{FF2B5EF4-FFF2-40B4-BE49-F238E27FC236}">
-                <a16:creationId xmlns:a16="http://schemas.microsoft.com/office/drawing/2014/main" id="{99EEB5F3-A0E4-4D05-885A-45B67A937DBA}"/>
+                <a16:creationId xmlns:a16="http://schemas.microsoft.com/office/drawing/2014/main" id="{1766EF5B-E7C1-46D8-BFBD-2470D35F805F}"/>
               </a:ext>
             </a:extLst>
           </p:cNvPr>
@@ -8656,7 +8633,7 @@
           <p:cNvPr id="19" name="f39">
             <a:extLst xmlns:a="http://schemas.openxmlformats.org/drawingml/2006/main">
               <a:ext uri="{FF2B5EF4-FFF2-40B4-BE49-F238E27FC236}">
-                <a16:creationId xmlns:a16="http://schemas.microsoft.com/office/drawing/2014/main" id="{93C89A8F-92E1-465C-80BE-229130C2BAEF}"/>
+                <a16:creationId xmlns:a16="http://schemas.microsoft.com/office/drawing/2014/main" id="{4A86ED31-F2DC-4C61-9074-2860F1524B40}"/>
               </a:ext>
             </a:extLst>
           </p:cNvPr>
@@ -8691,7 +8668,7 @@
           <p:cNvPr id="20" name="f40">
             <a:extLst xmlns:a="http://schemas.openxmlformats.org/drawingml/2006/main">
               <a:ext uri="{FF2B5EF4-FFF2-40B4-BE49-F238E27FC236}">
-                <a16:creationId xmlns:a16="http://schemas.microsoft.com/office/drawing/2014/main" id="{2F19A0F2-0040-48F3-8084-3423B3BB6F43}"/>
+                <a16:creationId xmlns:a16="http://schemas.microsoft.com/office/drawing/2014/main" id="{638DF816-4637-4025-8CF1-0C1A25616C92}"/>
               </a:ext>
             </a:extLst>
           </p:cNvPr>
@@ -8873,7 +8850,7 @@
           <p:cNvPr id="21" name="f41">
             <a:extLst xmlns:a="http://schemas.openxmlformats.org/drawingml/2006/main">
               <a:ext uri="{FF2B5EF4-FFF2-40B4-BE49-F238E27FC236}">
-                <a16:creationId xmlns:a16="http://schemas.microsoft.com/office/drawing/2014/main" id="{4C6A8E9A-9FC0-454B-84BA-CD8EBF630B3E}"/>
+                <a16:creationId xmlns:a16="http://schemas.microsoft.com/office/drawing/2014/main" id="{5FEF9C71-5273-41C2-B05D-3EB6EF8798F9}"/>
               </a:ext>
             </a:extLst>
           </p:cNvPr>
@@ -9055,7 +9032,7 @@
           <p:cNvPr id="22" name="f42">
             <a:extLst xmlns:a="http://schemas.openxmlformats.org/drawingml/2006/main">
               <a:ext uri="{FF2B5EF4-FFF2-40B4-BE49-F238E27FC236}">
-                <a16:creationId xmlns:a16="http://schemas.microsoft.com/office/drawing/2014/main" id="{DB0779A4-76A9-4656-8CB7-C8C37EDA5E5F}"/>
+                <a16:creationId xmlns:a16="http://schemas.microsoft.com/office/drawing/2014/main" id="{96A85D91-0AEF-4D2C-96A7-12936BA8B67A}"/>
               </a:ext>
             </a:extLst>
           </p:cNvPr>
@@ -9214,7 +9191,7 @@
           <p:cNvPr id="23" name="f43">
             <a:extLst xmlns:a="http://schemas.openxmlformats.org/drawingml/2006/main">
               <a:ext uri="{FF2B5EF4-FFF2-40B4-BE49-F238E27FC236}">
-                <a16:creationId xmlns:a16="http://schemas.microsoft.com/office/drawing/2014/main" id="{795C192E-8F8B-4ED6-B0BE-D09D06F269ED}"/>
+                <a16:creationId xmlns:a16="http://schemas.microsoft.com/office/drawing/2014/main" id="{BF5D71EB-2F6A-4D39-A10C-8183318DF725}"/>
               </a:ext>
             </a:extLst>
           </p:cNvPr>
@@ -9371,7 +9348,7 @@
     </p:spTree>
     <p:extLst>
       <p:ext uri="{BB962C8B-B14F-4D97-AF65-F5344CB8AC3E}">
-        <p14:creationId xmlns:p14="http://schemas.microsoft.com/office/powerpoint/2010/main" val="984787665"/>
+        <p14:creationId xmlns:p14="http://schemas.microsoft.com/office/powerpoint/2010/main" val="194224418"/>
       </p:ext>
     </p:extLst>
   </p:cSld>
@@ -9399,10 +9376,10 @@
       </p:grpSpPr>
       <p:pic>
         <p:nvPicPr>
-          <p:cNvPr id="24" name="">
+          <p:cNvPr id="23" name="">
             <a:extLst xmlns:a="http://schemas.openxmlformats.org/drawingml/2006/main">
               <a:ext uri="{FF2B5EF4-FFF2-40B4-BE49-F238E27FC236}">
-                <a16:creationId xmlns:a16="http://schemas.microsoft.com/office/drawing/2014/main" id="{AB0F512A-5E18-4BAC-BB50-34FAA2FCDEB6}"/>
+                <a16:creationId xmlns:a16="http://schemas.microsoft.com/office/drawing/2014/main" id="{423523A1-599C-442D-9E0F-8DA550A09024}"/>
               </a:ext>
             </a:extLst>
           </p:cNvPr>
@@ -9412,7 +9389,7 @@
           <p:nvPr/>
         </p:nvPicPr>
         <p:blipFill>
-          <a:blip xmlns:r="http://schemas.openxmlformats.org/officeDocument/2006/relationships" xmlns:a="http://schemas.openxmlformats.org/drawingml/2006/main" r:embed="Rfa1b5a99505b4078"/>
+          <a:blip xmlns:r="http://schemas.openxmlformats.org/officeDocument/2006/relationships" xmlns:a="http://schemas.openxmlformats.org/drawingml/2006/main" r:embed="Rb7fdc70e3687479b"/>
           <a:stretch xmlns:a="http://schemas.openxmlformats.org/drawingml/2006/main"/>
         </p:blipFill>
         <p:spPr>
@@ -9430,7 +9407,7 @@
           <p:cNvPr id="2" name="f45">
             <a:extLst xmlns:a="http://schemas.openxmlformats.org/drawingml/2006/main">
               <a:ext uri="{FF2B5EF4-FFF2-40B4-BE49-F238E27FC236}">
-                <a16:creationId xmlns:a16="http://schemas.microsoft.com/office/drawing/2014/main" id="{7BE0F338-B1A1-4A5A-AB1B-F84A73C5AE61}"/>
+                <a16:creationId xmlns:a16="http://schemas.microsoft.com/office/drawing/2014/main" id="{7D75330C-B570-469B-B8CB-1A3EE13E4488}"/>
               </a:ext>
             </a:extLst>
           </p:cNvPr>
@@ -9589,7 +9566,7 @@
           <p:cNvPr id="3" name="f46">
             <a:extLst xmlns:a="http://schemas.openxmlformats.org/drawingml/2006/main">
               <a:ext uri="{FF2B5EF4-FFF2-40B4-BE49-F238E27FC236}">
-                <a16:creationId xmlns:a16="http://schemas.microsoft.com/office/drawing/2014/main" id="{148AA782-23A6-47FE-8D5F-1C6554B602C5}"/>
+                <a16:creationId xmlns:a16="http://schemas.microsoft.com/office/drawing/2014/main" id="{DF1E634D-0682-47BF-90FE-9C3B4BA3B63C}"/>
               </a:ext>
             </a:extLst>
           </p:cNvPr>
@@ -9748,7 +9725,7 @@
           <p:cNvPr id="4" name="f47">
             <a:extLst xmlns:a="http://schemas.openxmlformats.org/drawingml/2006/main">
               <a:ext uri="{FF2B5EF4-FFF2-40B4-BE49-F238E27FC236}">
-                <a16:creationId xmlns:a16="http://schemas.microsoft.com/office/drawing/2014/main" id="{AE824E0E-864A-420E-B720-82FD1A629BDB}"/>
+                <a16:creationId xmlns:a16="http://schemas.microsoft.com/office/drawing/2014/main" id="{F28DA352-8762-4B32-BE95-AB03C2FA062B}"/>
               </a:ext>
             </a:extLst>
           </p:cNvPr>
@@ -9907,7 +9884,7 @@
           <p:cNvPr id="5" name="f48">
             <a:extLst xmlns:a="http://schemas.openxmlformats.org/drawingml/2006/main">
               <a:ext uri="{FF2B5EF4-FFF2-40B4-BE49-F238E27FC236}">
-                <a16:creationId xmlns:a16="http://schemas.microsoft.com/office/drawing/2014/main" id="{7DB7494D-22A0-40DF-9016-BCEABD4111CC}"/>
+                <a16:creationId xmlns:a16="http://schemas.microsoft.com/office/drawing/2014/main" id="{AA42897C-E606-4EA9-BCA1-7F4D12308DE5}"/>
               </a:ext>
             </a:extLst>
           </p:cNvPr>
@@ -9919,7 +9896,7 @@
         <p:spPr>
           <a:xfrm xmlns:a="http://schemas.openxmlformats.org/drawingml/2006/main">
             <a:off x="1066800" y="1901095"/>
-            <a:ext cx="6726734" cy="347186"/>
+            <a:ext cx="12059096" cy="347186"/>
           </a:xfrm>
           <a:prstGeom xmlns:a="http://schemas.openxmlformats.org/drawingml/2006/main" prst="rect">
             <a:avLst/>
@@ -10056,7 +10033,7 @@
                 <a:ea typeface="Nimbus Sans"/>
                 <a:cs typeface="Nimbus Sans"/>
               </a:rPr>
-              <a:t>Nel 5G, la sicurezza riguarda anche le Network Functions,</a:t>
+              <a:t>Nel 5G, la sicurezza riguarda anche le Network Functions, componenti software che comunicano tra loro.</a:t>
             </a:r>
           </a:p>
         </p:txBody>
@@ -10066,7 +10043,7 @@
           <p:cNvPr id="6" name="f49">
             <a:extLst xmlns:a="http://schemas.openxmlformats.org/drawingml/2006/main">
               <a:ext uri="{FF2B5EF4-FFF2-40B4-BE49-F238E27FC236}">
-                <a16:creationId xmlns:a16="http://schemas.microsoft.com/office/drawing/2014/main" id="{D29580B1-BCC9-4877-99D0-8EA176E17A3B}"/>
+                <a16:creationId xmlns:a16="http://schemas.microsoft.com/office/drawing/2014/main" id="{B8E933E6-6D41-49AC-AE1F-A78FCAF0AF58}"/>
               </a:ext>
             </a:extLst>
           </p:cNvPr>
@@ -10077,166 +10054,7 @@
         </p:nvSpPr>
         <p:spPr>
           <a:xfrm xmlns:a="http://schemas.openxmlformats.org/drawingml/2006/main">
-            <a:off x="1066800" y="2263045"/>
-            <a:ext cx="5375225" cy="347186"/>
-          </a:xfrm>
-          <a:prstGeom xmlns:a="http://schemas.openxmlformats.org/drawingml/2006/main" prst="rect">
-            <a:avLst/>
-          </a:prstGeom>
-          <a:noFill xmlns:a="http://schemas.openxmlformats.org/drawingml/2006/main"/>
-          <a:ln xmlns:a="http://schemas.openxmlformats.org/drawingml/2006/main" w="0">
-            <a:noFill/>
-            <a:prstDash val="solid"/>
-          </a:ln>
-        </p:spPr>
-        <p:txBody>
-          <a:bodyPr xmlns:a="http://schemas.openxmlformats.org/drawingml/2006/main" wrap="none" lIns="0" tIns="0" rIns="0" bIns="0" anchor="t">
-            <a:noAutofit/>
-          </a:bodyPr>
-          <a:lstStyle xmlns:a="http://schemas.openxmlformats.org/drawingml/2006/main">
-            <a:defPPr algn="l">
-              <a:defRPr sz="2025" b="0">
-                <a:solidFill>
-                  <a:srgbClr val="52627B"/>
-                </a:solidFill>
-                <a:latin typeface="Nimbus Sans"/>
-                <a:ea typeface="Nimbus Sans"/>
-                <a:cs typeface="Nimbus Sans"/>
-              </a:defRPr>
-            </a:defPPr>
-            <a:lvl1pPr algn="l">
-              <a:defRPr sz="2025" b="0">
-                <a:solidFill>
-                  <a:srgbClr val="52627B"/>
-                </a:solidFill>
-                <a:latin typeface="Nimbus Sans"/>
-                <a:ea typeface="Nimbus Sans"/>
-                <a:cs typeface="Nimbus Sans"/>
-              </a:defRPr>
-            </a:lvl1pPr>
-            <a:lvl2pPr algn="l">
-              <a:defRPr sz="2025" b="0">
-                <a:solidFill>
-                  <a:srgbClr val="52627B"/>
-                </a:solidFill>
-                <a:latin typeface="Nimbus Sans"/>
-                <a:ea typeface="Nimbus Sans"/>
-                <a:cs typeface="Nimbus Sans"/>
-              </a:defRPr>
-            </a:lvl2pPr>
-            <a:lvl3pPr algn="l">
-              <a:defRPr sz="2025" b="0">
-                <a:solidFill>
-                  <a:srgbClr val="52627B"/>
-                </a:solidFill>
-                <a:latin typeface="Nimbus Sans"/>
-                <a:ea typeface="Nimbus Sans"/>
-                <a:cs typeface="Nimbus Sans"/>
-              </a:defRPr>
-            </a:lvl3pPr>
-            <a:lvl4pPr algn="l">
-              <a:defRPr sz="2025" b="0">
-                <a:solidFill>
-                  <a:srgbClr val="52627B"/>
-                </a:solidFill>
-                <a:latin typeface="Nimbus Sans"/>
-                <a:ea typeface="Nimbus Sans"/>
-                <a:cs typeface="Nimbus Sans"/>
-              </a:defRPr>
-            </a:lvl4pPr>
-            <a:lvl5pPr algn="l">
-              <a:defRPr sz="2025" b="0">
-                <a:solidFill>
-                  <a:srgbClr val="52627B"/>
-                </a:solidFill>
-                <a:latin typeface="Nimbus Sans"/>
-                <a:ea typeface="Nimbus Sans"/>
-                <a:cs typeface="Nimbus Sans"/>
-              </a:defRPr>
-            </a:lvl5pPr>
-            <a:lvl6pPr algn="l">
-              <a:defRPr sz="2025" b="0">
-                <a:solidFill>
-                  <a:srgbClr val="52627B"/>
-                </a:solidFill>
-                <a:latin typeface="Nimbus Sans"/>
-                <a:ea typeface="Nimbus Sans"/>
-                <a:cs typeface="Nimbus Sans"/>
-              </a:defRPr>
-            </a:lvl6pPr>
-            <a:lvl7pPr algn="l">
-              <a:defRPr sz="2025" b="0">
-                <a:solidFill>
-                  <a:srgbClr val="52627B"/>
-                </a:solidFill>
-                <a:latin typeface="Nimbus Sans"/>
-                <a:ea typeface="Nimbus Sans"/>
-                <a:cs typeface="Nimbus Sans"/>
-              </a:defRPr>
-            </a:lvl7pPr>
-            <a:lvl8pPr algn="l">
-              <a:defRPr sz="2025" b="0">
-                <a:solidFill>
-                  <a:srgbClr val="52627B"/>
-                </a:solidFill>
-                <a:latin typeface="Nimbus Sans"/>
-                <a:ea typeface="Nimbus Sans"/>
-                <a:cs typeface="Nimbus Sans"/>
-              </a:defRPr>
-            </a:lvl8pPr>
-            <a:lvl9pPr algn="l">
-              <a:defRPr sz="2025" b="0">
-                <a:solidFill>
-                  <a:srgbClr val="52627B"/>
-                </a:solidFill>
-                <a:latin typeface="Nimbus Sans"/>
-                <a:ea typeface="Nimbus Sans"/>
-                <a:cs typeface="Nimbus Sans"/>
-              </a:defRPr>
-            </a:lvl9pPr>
-          </a:lstStyle>
-          <a:p xmlns:a="http://schemas.openxmlformats.org/drawingml/2006/main">
-            <a:pPr algn="l">
-              <a:defRPr sz="2025" b="0">
-                <a:solidFill>
-                  <a:srgbClr val="52627B"/>
-                </a:solidFill>
-                <a:latin typeface="Nimbus Sans"/>
-                <a:ea typeface="Nimbus Sans"/>
-                <a:cs typeface="Nimbus Sans"/>
-              </a:defRPr>
-            </a:pPr>
-            <a:r>
-              <a:rPr sz="2025" b="0">
-                <a:solidFill>
-                  <a:srgbClr val="52627B"/>
-                </a:solidFill>
-                <a:latin typeface="Nimbus Sans"/>
-                <a:ea typeface="Nimbus Sans"/>
-                <a:cs typeface="Nimbus Sans"/>
-              </a:rPr>
-              <a:t>componenti software che comunicano tra loro.</a:t>
-            </a:r>
-          </a:p>
-        </p:txBody>
-      </p:sp>
-      <p:sp>
-        <p:nvSpPr>
-          <p:cNvPr id="7" name="f50">
-            <a:extLst xmlns:a="http://schemas.openxmlformats.org/drawingml/2006/main">
-              <a:ext uri="{FF2B5EF4-FFF2-40B4-BE49-F238E27FC236}">
-                <a16:creationId xmlns:a16="http://schemas.microsoft.com/office/drawing/2014/main" id="{E7444635-587D-409B-A44E-0096A36AE6C7}"/>
-              </a:ext>
-            </a:extLst>
-          </p:cNvPr>
-          <p:cNvSpPr>
-            <a:spLocks xmlns:a="http://schemas.openxmlformats.org/drawingml/2006/main" noGrp="1"/>
-          </p:cNvSpPr>
-          <p:nvPr/>
-        </p:nvSpPr>
-        <p:spPr>
-          <a:xfrm xmlns:a="http://schemas.openxmlformats.org/drawingml/2006/main">
-            <a:off x="2801234" y="3112930"/>
+            <a:off x="2801234" y="2750980"/>
             <a:ext cx="1302395" cy="424853"/>
           </a:xfrm>
           <a:prstGeom xmlns:a="http://schemas.openxmlformats.org/drawingml/2006/main" prst="rect">
@@ -10381,10 +10199,10 @@
       </p:sp>
       <p:sp>
         <p:nvSpPr>
-          <p:cNvPr id="8" name="f51">
+          <p:cNvPr id="7" name="f50">
             <a:extLst xmlns:a="http://schemas.openxmlformats.org/drawingml/2006/main">
               <a:ext uri="{FF2B5EF4-FFF2-40B4-BE49-F238E27FC236}">
-                <a16:creationId xmlns:a16="http://schemas.microsoft.com/office/drawing/2014/main" id="{2D4D9C5C-9AF0-43A9-8A52-095AECEE14DA}"/>
+                <a16:creationId xmlns:a16="http://schemas.microsoft.com/office/drawing/2014/main" id="{3E836F38-DFB3-4858-8B25-B8E0057702AE}"/>
               </a:ext>
             </a:extLst>
           </p:cNvPr>
@@ -10395,7 +10213,7 @@
         </p:nvSpPr>
         <p:spPr>
           <a:xfrm xmlns:a="http://schemas.openxmlformats.org/drawingml/2006/main">
-            <a:off x="7994359" y="3112930"/>
+            <a:off x="7994359" y="2750980"/>
             <a:ext cx="1526232" cy="424853"/>
           </a:xfrm>
           <a:prstGeom xmlns:a="http://schemas.openxmlformats.org/drawingml/2006/main" prst="rect">
@@ -10540,10 +10358,10 @@
       </p:sp>
       <p:sp>
         <p:nvSpPr>
-          <p:cNvPr id="9" name="f52">
+          <p:cNvPr id="8" name="f51">
             <a:extLst xmlns:a="http://schemas.openxmlformats.org/drawingml/2006/main">
               <a:ext uri="{FF2B5EF4-FFF2-40B4-BE49-F238E27FC236}">
-                <a16:creationId xmlns:a16="http://schemas.microsoft.com/office/drawing/2014/main" id="{251892E8-9C2A-4B07-982E-DF25AE7E2561}"/>
+                <a16:creationId xmlns:a16="http://schemas.microsoft.com/office/drawing/2014/main" id="{9FF42805-3588-4CE4-A4B0-30411C3600F5}"/>
               </a:ext>
             </a:extLst>
           </p:cNvPr>
@@ -10554,7 +10372,7 @@
         </p:nvSpPr>
         <p:spPr>
           <a:xfrm xmlns:a="http://schemas.openxmlformats.org/drawingml/2006/main">
-            <a:off x="5868924" y="3773925"/>
+            <a:off x="5868924" y="3411975"/>
             <a:ext cx="2156371" cy="318640"/>
           </a:xfrm>
           <a:prstGeom xmlns:a="http://schemas.openxmlformats.org/drawingml/2006/main" prst="rect">
@@ -10699,10 +10517,10 @@
       </p:sp>
       <p:sp>
         <p:nvSpPr>
-          <p:cNvPr id="10" name="f53">
+          <p:cNvPr id="9" name="f52">
             <a:extLst xmlns:a="http://schemas.openxmlformats.org/drawingml/2006/main">
               <a:ext uri="{FF2B5EF4-FFF2-40B4-BE49-F238E27FC236}">
-                <a16:creationId xmlns:a16="http://schemas.microsoft.com/office/drawing/2014/main" id="{2A99C243-091A-46A0-B640-0F20D59F535B}"/>
+                <a16:creationId xmlns:a16="http://schemas.microsoft.com/office/drawing/2014/main" id="{411EAB08-B9F8-4130-80AF-34431FF645EE}"/>
               </a:ext>
             </a:extLst>
           </p:cNvPr>
@@ -10713,7 +10531,7 @@
         </p:nvSpPr>
         <p:spPr>
           <a:xfrm xmlns:a="http://schemas.openxmlformats.org/drawingml/2006/main">
-            <a:off x="5868924" y="7494200"/>
+            <a:off x="5868924" y="7132250"/>
             <a:ext cx="1646783" cy="318640"/>
           </a:xfrm>
           <a:prstGeom xmlns:a="http://schemas.openxmlformats.org/drawingml/2006/main" prst="rect">
@@ -10858,10 +10676,10 @@
       </p:sp>
       <p:sp>
         <p:nvSpPr>
-          <p:cNvPr id="11" name="f54">
+          <p:cNvPr id="10" name="f53">
             <a:extLst xmlns:a="http://schemas.openxmlformats.org/drawingml/2006/main">
               <a:ext uri="{FF2B5EF4-FFF2-40B4-BE49-F238E27FC236}">
-                <a16:creationId xmlns:a16="http://schemas.microsoft.com/office/drawing/2014/main" id="{2C9E162A-EA22-4004-8636-4265920E1051}"/>
+                <a16:creationId xmlns:a16="http://schemas.microsoft.com/office/drawing/2014/main" id="{6F08BCC0-9B1E-4604-9824-F38904BC953D}"/>
               </a:ext>
             </a:extLst>
           </p:cNvPr>
@@ -10872,7 +10690,7 @@
         </p:nvSpPr>
         <p:spPr>
           <a:xfrm xmlns:a="http://schemas.openxmlformats.org/drawingml/2006/main">
-            <a:off x="6026789" y="4467402"/>
+            <a:off x="6026789" y="4105452"/>
             <a:ext cx="774502" cy="409680"/>
           </a:xfrm>
           <a:prstGeom xmlns:a="http://schemas.openxmlformats.org/drawingml/2006/main" prst="rect">
@@ -11017,10 +10835,10 @@
       </p:sp>
       <p:sp>
         <p:nvSpPr>
-          <p:cNvPr id="12" name="f55">
+          <p:cNvPr id="11" name="f54">
             <a:extLst xmlns:a="http://schemas.openxmlformats.org/drawingml/2006/main">
               <a:ext uri="{FF2B5EF4-FFF2-40B4-BE49-F238E27FC236}">
-                <a16:creationId xmlns:a16="http://schemas.microsoft.com/office/drawing/2014/main" id="{B7FB1F67-134E-4B39-9035-7C11DA0B8228}"/>
+                <a16:creationId xmlns:a16="http://schemas.microsoft.com/office/drawing/2014/main" id="{1A934ECB-56AA-4C78-9D08-CF11D54FC036}"/>
               </a:ext>
             </a:extLst>
           </p:cNvPr>
@@ -11031,7 +10849,7 @@
         </p:nvSpPr>
         <p:spPr>
           <a:xfrm xmlns:a="http://schemas.openxmlformats.org/drawingml/2006/main">
-            <a:off x="7563770" y="4467402"/>
+            <a:off x="7563770" y="4105452"/>
             <a:ext cx="757684" cy="409680"/>
           </a:xfrm>
           <a:prstGeom xmlns:a="http://schemas.openxmlformats.org/drawingml/2006/main" prst="rect">
@@ -11176,10 +10994,10 @@
       </p:sp>
       <p:sp>
         <p:nvSpPr>
-          <p:cNvPr id="13" name="f56">
+          <p:cNvPr id="12" name="f55">
             <a:extLst xmlns:a="http://schemas.openxmlformats.org/drawingml/2006/main">
               <a:ext uri="{FF2B5EF4-FFF2-40B4-BE49-F238E27FC236}">
-                <a16:creationId xmlns:a16="http://schemas.microsoft.com/office/drawing/2014/main" id="{00A237A0-E777-4F86-87B9-301651356401}"/>
+                <a16:creationId xmlns:a16="http://schemas.microsoft.com/office/drawing/2014/main" id="{F5ACEB8D-E859-4CFB-8E81-FBF4AC0DF766}"/>
               </a:ext>
             </a:extLst>
           </p:cNvPr>
@@ -11190,7 +11008,7 @@
         </p:nvSpPr>
         <p:spPr>
           <a:xfrm xmlns:a="http://schemas.openxmlformats.org/drawingml/2006/main">
-            <a:off x="9004087" y="4467402"/>
+            <a:off x="9004087" y="4105452"/>
             <a:ext cx="934194" cy="409680"/>
           </a:xfrm>
           <a:prstGeom xmlns:a="http://schemas.openxmlformats.org/drawingml/2006/main" prst="rect">
@@ -11335,10 +11153,10 @@
       </p:sp>
       <p:sp>
         <p:nvSpPr>
-          <p:cNvPr id="14" name="f57">
+          <p:cNvPr id="13" name="f56">
             <a:extLst xmlns:a="http://schemas.openxmlformats.org/drawingml/2006/main">
               <a:ext uri="{FF2B5EF4-FFF2-40B4-BE49-F238E27FC236}">
-                <a16:creationId xmlns:a16="http://schemas.microsoft.com/office/drawing/2014/main" id="{51083CA8-F41C-4651-9C67-0843A90C04C1}"/>
+                <a16:creationId xmlns:a16="http://schemas.microsoft.com/office/drawing/2014/main" id="{E82CA93B-77ED-4A49-B4FB-94AF788357B8}"/>
               </a:ext>
             </a:extLst>
           </p:cNvPr>
@@ -11349,7 +11167,7 @@
         </p:nvSpPr>
         <p:spPr>
           <a:xfrm xmlns:a="http://schemas.openxmlformats.org/drawingml/2006/main">
-            <a:off x="10595539" y="4467402"/>
+            <a:off x="10595539" y="4105452"/>
             <a:ext cx="808434" cy="409680"/>
           </a:xfrm>
           <a:prstGeom xmlns:a="http://schemas.openxmlformats.org/drawingml/2006/main" prst="rect">
@@ -11494,10 +11312,10 @@
       </p:sp>
       <p:sp>
         <p:nvSpPr>
-          <p:cNvPr id="15" name="f58">
+          <p:cNvPr id="14" name="f57">
             <a:extLst xmlns:a="http://schemas.openxmlformats.org/drawingml/2006/main">
               <a:ext uri="{FF2B5EF4-FFF2-40B4-BE49-F238E27FC236}">
-                <a16:creationId xmlns:a16="http://schemas.microsoft.com/office/drawing/2014/main" id="{213B8526-18FA-413A-8863-69B266763F28}"/>
+                <a16:creationId xmlns:a16="http://schemas.microsoft.com/office/drawing/2014/main" id="{4EC9C149-2225-46A7-B7E5-F476545ED1CD}"/>
               </a:ext>
             </a:extLst>
           </p:cNvPr>
@@ -11508,7 +11326,7 @@
         </p:nvSpPr>
         <p:spPr>
           <a:xfrm xmlns:a="http://schemas.openxmlformats.org/drawingml/2006/main">
-            <a:off x="7573667" y="6597400"/>
+            <a:off x="7573667" y="6235450"/>
             <a:ext cx="737890" cy="424853"/>
           </a:xfrm>
           <a:prstGeom xmlns:a="http://schemas.openxmlformats.org/drawingml/2006/main" prst="rect">
@@ -11653,10 +11471,10 @@
       </p:sp>
       <p:sp>
         <p:nvSpPr>
-          <p:cNvPr id="16" name="f59">
+          <p:cNvPr id="15" name="f58">
             <a:extLst xmlns:a="http://schemas.openxmlformats.org/drawingml/2006/main">
               <a:ext uri="{FF2B5EF4-FFF2-40B4-BE49-F238E27FC236}">
-                <a16:creationId xmlns:a16="http://schemas.microsoft.com/office/drawing/2014/main" id="{419C9AED-3A3B-45B2-A246-9A28EE2E01E5}"/>
+                <a16:creationId xmlns:a16="http://schemas.microsoft.com/office/drawing/2014/main" id="{5E08B6D7-C735-4362-A95A-B1E3F4416F55}"/>
               </a:ext>
             </a:extLst>
           </p:cNvPr>
@@ -11667,7 +11485,7 @@
         </p:nvSpPr>
         <p:spPr>
           <a:xfrm xmlns:a="http://schemas.openxmlformats.org/drawingml/2006/main">
-            <a:off x="11398758" y="3779432"/>
+            <a:off x="11398758" y="3417482"/>
             <a:ext cx="436662" cy="273120"/>
           </a:xfrm>
           <a:prstGeom xmlns:a="http://schemas.openxmlformats.org/drawingml/2006/main" prst="rect">
@@ -11812,10 +11630,10 @@
       </p:sp>
       <p:sp>
         <p:nvSpPr>
-          <p:cNvPr id="17" name="f60">
+          <p:cNvPr id="16" name="f59">
             <a:extLst xmlns:a="http://schemas.openxmlformats.org/drawingml/2006/main">
               <a:ext uri="{FF2B5EF4-FFF2-40B4-BE49-F238E27FC236}">
-                <a16:creationId xmlns:a16="http://schemas.microsoft.com/office/drawing/2014/main" id="{E2761B7E-DB4E-43DA-BAA7-31D2E91ABA05}"/>
+                <a16:creationId xmlns:a16="http://schemas.microsoft.com/office/drawing/2014/main" id="{7D8E5A4C-0264-4254-8980-61DEF06E62F9}"/>
               </a:ext>
             </a:extLst>
           </p:cNvPr>
@@ -11826,7 +11644,7 @@
         </p:nvSpPr>
         <p:spPr>
           <a:xfrm xmlns:a="http://schemas.openxmlformats.org/drawingml/2006/main">
-            <a:off x="8139303" y="5605964"/>
+            <a:off x="8139303" y="5244014"/>
             <a:ext cx="418654" cy="318640"/>
           </a:xfrm>
           <a:prstGeom xmlns:a="http://schemas.openxmlformats.org/drawingml/2006/main" prst="rect">
@@ -11971,10 +11789,10 @@
       </p:sp>
       <p:sp>
         <p:nvSpPr>
-          <p:cNvPr id="18" name="f61">
+          <p:cNvPr id="17" name="f60">
             <a:extLst xmlns:a="http://schemas.openxmlformats.org/drawingml/2006/main">
               <a:ext uri="{FF2B5EF4-FFF2-40B4-BE49-F238E27FC236}">
-                <a16:creationId xmlns:a16="http://schemas.microsoft.com/office/drawing/2014/main" id="{6A87CA0E-B6A5-497F-814D-83C8A92F1671}"/>
+                <a16:creationId xmlns:a16="http://schemas.microsoft.com/office/drawing/2014/main" id="{B35975A0-0E73-4675-B695-D2C925C61EC3}"/>
               </a:ext>
             </a:extLst>
           </p:cNvPr>
@@ -11985,7 +11803,7 @@
         </p:nvSpPr>
         <p:spPr>
           <a:xfrm xmlns:a="http://schemas.openxmlformats.org/drawingml/2006/main">
-            <a:off x="2286420" y="7423166"/>
+            <a:off x="2286420" y="7061216"/>
             <a:ext cx="511225" cy="379333"/>
           </a:xfrm>
           <a:prstGeom xmlns:a="http://schemas.openxmlformats.org/drawingml/2006/main" prst="rect">
@@ -12130,10 +11948,10 @@
       </p:sp>
       <p:sp>
         <p:nvSpPr>
-          <p:cNvPr id="19" name="f62">
+          <p:cNvPr id="18" name="f61">
             <a:extLst xmlns:a="http://schemas.openxmlformats.org/drawingml/2006/main">
               <a:ext uri="{FF2B5EF4-FFF2-40B4-BE49-F238E27FC236}">
-                <a16:creationId xmlns:a16="http://schemas.microsoft.com/office/drawing/2014/main" id="{90ACB01F-6B2B-4206-8B94-532802E3AEEA}"/>
+                <a16:creationId xmlns:a16="http://schemas.microsoft.com/office/drawing/2014/main" id="{DE788D6F-A820-4E4D-8FD0-83735BE74DAF}"/>
               </a:ext>
             </a:extLst>
           </p:cNvPr>
@@ -12144,7 +11962,7 @@
         </p:nvSpPr>
         <p:spPr>
           <a:xfrm xmlns:a="http://schemas.openxmlformats.org/drawingml/2006/main">
-            <a:off x="3753609" y="7423166"/>
+            <a:off x="3753609" y="7061216"/>
             <a:ext cx="701427" cy="379333"/>
           </a:xfrm>
           <a:prstGeom xmlns:a="http://schemas.openxmlformats.org/drawingml/2006/main" prst="rect">
@@ -12289,10 +12107,10 @@
       </p:sp>
       <p:sp>
         <p:nvSpPr>
-          <p:cNvPr id="20" name="f63">
+          <p:cNvPr id="19" name="f62">
             <a:extLst xmlns:a="http://schemas.openxmlformats.org/drawingml/2006/main">
               <a:ext uri="{FF2B5EF4-FFF2-40B4-BE49-F238E27FC236}">
-                <a16:creationId xmlns:a16="http://schemas.microsoft.com/office/drawing/2014/main" id="{ACD8190E-AAF9-4A81-952C-A56BD3EC8740}"/>
+                <a16:creationId xmlns:a16="http://schemas.microsoft.com/office/drawing/2014/main" id="{0FCEE583-597D-4B0A-9369-2C47F50DE32E}"/>
               </a:ext>
             </a:extLst>
           </p:cNvPr>
@@ -12303,7 +12121,7 @@
         </p:nvSpPr>
         <p:spPr>
           <a:xfrm xmlns:a="http://schemas.openxmlformats.org/drawingml/2006/main">
-            <a:off x="5018946" y="5313737"/>
+            <a:off x="5018946" y="4951787"/>
             <a:ext cx="418654" cy="318640"/>
           </a:xfrm>
           <a:prstGeom xmlns:a="http://schemas.openxmlformats.org/drawingml/2006/main" prst="rect">
@@ -12448,10 +12266,10 @@
       </p:sp>
       <p:sp>
         <p:nvSpPr>
-          <p:cNvPr id="21" name="f64">
+          <p:cNvPr id="20" name="f63">
             <a:extLst xmlns:a="http://schemas.openxmlformats.org/drawingml/2006/main">
               <a:ext uri="{FF2B5EF4-FFF2-40B4-BE49-F238E27FC236}">
-                <a16:creationId xmlns:a16="http://schemas.microsoft.com/office/drawing/2014/main" id="{16F835C2-9A98-48C0-A5DC-8EEF9BAB9ADB}"/>
+                <a16:creationId xmlns:a16="http://schemas.microsoft.com/office/drawing/2014/main" id="{0E4CCAF4-73DD-47B9-9DFA-1892B67039E5}"/>
               </a:ext>
             </a:extLst>
           </p:cNvPr>
@@ -12462,7 +12280,7 @@
         </p:nvSpPr>
         <p:spPr>
           <a:xfrm xmlns:a="http://schemas.openxmlformats.org/drawingml/2006/main">
-            <a:off x="6206109" y="6403968"/>
+            <a:off x="6206109" y="6042018"/>
             <a:ext cx="418654" cy="318640"/>
           </a:xfrm>
           <a:prstGeom xmlns:a="http://schemas.openxmlformats.org/drawingml/2006/main" prst="rect">
@@ -12607,10 +12425,10 @@
       </p:sp>
       <p:sp>
         <p:nvSpPr>
-          <p:cNvPr id="22" name="f65">
+          <p:cNvPr id="21" name="f64">
             <a:extLst xmlns:a="http://schemas.openxmlformats.org/drawingml/2006/main">
               <a:ext uri="{FF2B5EF4-FFF2-40B4-BE49-F238E27FC236}">
-                <a16:creationId xmlns:a16="http://schemas.microsoft.com/office/drawing/2014/main" id="{F733E88C-BB92-4110-97CE-06DD9AA5E501}"/>
+                <a16:creationId xmlns:a16="http://schemas.microsoft.com/office/drawing/2014/main" id="{5AAFAFD0-D881-4457-ADA6-48DBC34D7FF1}"/>
               </a:ext>
             </a:extLst>
           </p:cNvPr>
@@ -12621,7 +12439,7 @@
         </p:nvSpPr>
         <p:spPr>
           <a:xfrm xmlns:a="http://schemas.openxmlformats.org/drawingml/2006/main">
-            <a:off x="10544556" y="6403968"/>
+            <a:off x="10544556" y="6042018"/>
             <a:ext cx="418654" cy="318640"/>
           </a:xfrm>
           <a:prstGeom xmlns:a="http://schemas.openxmlformats.org/drawingml/2006/main" prst="rect">
@@ -12766,10 +12584,10 @@
       </p:sp>
       <p:sp>
         <p:nvSpPr>
-          <p:cNvPr id="23" name="f66">
+          <p:cNvPr id="22" name="f65">
             <a:extLst xmlns:a="http://schemas.openxmlformats.org/drawingml/2006/main">
               <a:ext uri="{FF2B5EF4-FFF2-40B4-BE49-F238E27FC236}">
-                <a16:creationId xmlns:a16="http://schemas.microsoft.com/office/drawing/2014/main" id="{CE558097-0493-4C58-8FE3-6A5408F7B34B}"/>
+                <a16:creationId xmlns:a16="http://schemas.microsoft.com/office/drawing/2014/main" id="{C6D359DF-C806-4215-8B48-084A3595E8FC}"/>
               </a:ext>
             </a:extLst>
           </p:cNvPr>
@@ -12780,7 +12598,7 @@
         </p:nvSpPr>
         <p:spPr>
           <a:xfrm xmlns:a="http://schemas.openxmlformats.org/drawingml/2006/main">
-            <a:off x="12291670" y="7423166"/>
+            <a:off x="12291670" y="7061216"/>
             <a:ext cx="1158925" cy="379333"/>
           </a:xfrm>
           <a:prstGeom xmlns:a="http://schemas.openxmlformats.org/drawingml/2006/main" prst="rect">
@@ -12926,7 +12744,7 @@
     </p:spTree>
     <p:extLst>
       <p:ext uri="{BB962C8B-B14F-4D97-AF65-F5344CB8AC3E}">
-        <p14:creationId xmlns:p14="http://schemas.microsoft.com/office/powerpoint/2010/main" val="1041079110"/>
+        <p14:creationId xmlns:p14="http://schemas.microsoft.com/office/powerpoint/2010/main" val="382457258"/>
       </p:ext>
     </p:extLst>
   </p:cSld>
@@ -12954,10 +12772,10 @@
       </p:grpSpPr>
       <p:sp>
         <p:nvSpPr>
-          <p:cNvPr id="18" name="f67">
+          <p:cNvPr id="18" name="f66">
             <a:extLst xmlns:a="http://schemas.openxmlformats.org/drawingml/2006/main">
               <a:ext uri="{FF2B5EF4-FFF2-40B4-BE49-F238E27FC236}">
-                <a16:creationId xmlns:a16="http://schemas.microsoft.com/office/drawing/2014/main" id="{882902BE-A316-467A-9FB0-13879BF73197}"/>
+                <a16:creationId xmlns:a16="http://schemas.microsoft.com/office/drawing/2014/main" id="{EC49C9F4-67C3-4032-9379-CC0C0BCAC7EB}"/>
               </a:ext>
             </a:extLst>
           </p:cNvPr>
@@ -13113,10 +12931,10 @@
       </p:sp>
       <p:sp>
         <p:nvSpPr>
-          <p:cNvPr id="2" name="f68">
+          <p:cNvPr id="2" name="f67">
             <a:extLst xmlns:a="http://schemas.openxmlformats.org/drawingml/2006/main">
               <a:ext uri="{FF2B5EF4-FFF2-40B4-BE49-F238E27FC236}">
-                <a16:creationId xmlns:a16="http://schemas.microsoft.com/office/drawing/2014/main" id="{90C948FB-77FB-4F49-9B8B-A6A94DB350C8}"/>
+                <a16:creationId xmlns:a16="http://schemas.microsoft.com/office/drawing/2014/main" id="{CCF1BC29-9354-4D6D-A57E-46F761865737}"/>
               </a:ext>
             </a:extLst>
           </p:cNvPr>
@@ -13272,10 +13090,10 @@
       </p:sp>
       <p:sp>
         <p:nvSpPr>
-          <p:cNvPr id="3" name="f69">
+          <p:cNvPr id="3" name="f68">
             <a:extLst xmlns:a="http://schemas.openxmlformats.org/drawingml/2006/main">
               <a:ext uri="{FF2B5EF4-FFF2-40B4-BE49-F238E27FC236}">
-                <a16:creationId xmlns:a16="http://schemas.microsoft.com/office/drawing/2014/main" id="{61A51454-21B0-4FE0-AD1F-EE46964CA83D}"/>
+                <a16:creationId xmlns:a16="http://schemas.microsoft.com/office/drawing/2014/main" id="{AD92D764-A0CE-458C-933C-284EA0287B10}"/>
               </a:ext>
             </a:extLst>
           </p:cNvPr>
@@ -13431,10 +13249,10 @@
       </p:sp>
       <p:sp>
         <p:nvSpPr>
-          <p:cNvPr id="4" name="f72">
+          <p:cNvPr id="4" name="f71">
             <a:extLst xmlns:a="http://schemas.openxmlformats.org/drawingml/2006/main">
               <a:ext uri="{FF2B5EF4-FFF2-40B4-BE49-F238E27FC236}">
-                <a16:creationId xmlns:a16="http://schemas.microsoft.com/office/drawing/2014/main" id="{BF5859FD-241F-4739-8380-1142F3FFE443}"/>
+                <a16:creationId xmlns:a16="http://schemas.microsoft.com/office/drawing/2014/main" id="{9EF78936-2487-48AE-8296-538B85854201}"/>
               </a:ext>
             </a:extLst>
           </p:cNvPr>
@@ -13446,7 +13264,7 @@
         <p:spPr>
           <a:xfrm xmlns:a="http://schemas.openxmlformats.org/drawingml/2006/main">
             <a:off x="1066800" y="2000250"/>
-            <a:ext cx="13106400" cy="704850"/>
+            <a:ext cx="13106400" cy="438150"/>
           </a:xfrm>
           <a:prstGeom xmlns:a="http://schemas.openxmlformats.org/drawingml/2006/main" prst="rect">
             <a:avLst/>
@@ -13583,30 +13401,7 @@
                 <a:ea typeface="Nimbus Sans"/>
                 <a:cs typeface="Nimbus Sans"/>
               </a:rPr>
-              <a:t>Il DSL permette di rappresentare queste operazioni</a:t>
-            </a:r>
-          </a:p>
-          <a:p xmlns:a="http://schemas.openxmlformats.org/drawingml/2006/main">
-            <a:pPr algn="l">
-              <a:defRPr sz="2025" b="0">
-                <a:solidFill>
-                  <a:srgbClr val="52627B"/>
-                </a:solidFill>
-                <a:latin typeface="Nimbus Sans"/>
-                <a:ea typeface="Nimbus Sans"/>
-                <a:cs typeface="Nimbus Sans"/>
-              </a:defRPr>
-            </a:pPr>
-            <a:r>
-              <a:rPr sz="2025" b="0">
-                <a:solidFill>
-                  <a:srgbClr val="52627B"/>
-                </a:solidFill>
-                <a:latin typeface="Nimbus Sans"/>
-                <a:ea typeface="Nimbus Sans"/>
-                <a:cs typeface="Nimbus Sans"/>
-              </a:rPr>
-              <a:t>attraverso regole riutilizzabili.</a:t>
+              <a:t>Il DSL permette di rappresentare queste operazioni attraverso regole riutilizzabili.</a:t>
             </a:r>
           </a:p>
         </p:txBody>
@@ -13616,7 +13411,7 @@
           <p:cNvPr id="5" name="f105">
             <a:extLst xmlns:a="http://schemas.openxmlformats.org/drawingml/2006/main">
               <a:ext uri="{FF2B5EF4-FFF2-40B4-BE49-F238E27FC236}">
-                <a16:creationId xmlns:a16="http://schemas.microsoft.com/office/drawing/2014/main" id="{6BE89582-A2F3-4ECA-9E67-8A3C2AD9246A}"/>
+                <a16:creationId xmlns:a16="http://schemas.microsoft.com/office/drawing/2014/main" id="{203B02F9-9D7D-4D0F-A6C9-604591925041}"/>
               </a:ext>
             </a:extLst>
           </p:cNvPr>
@@ -13765,7 +13560,7 @@
                 <a:ea typeface="Nimbus Sans"/>
                 <a:cs typeface="Nimbus Sans"/>
               </a:rPr>
-              <a:t>NRF Discovery Authorization</a:t>
+              <a:t>Rappresentazione della regola</a:t>
             </a:r>
           </a:p>
         </p:txBody>
@@ -13775,7 +13570,7 @@
           <p:cNvPr id="6" name="f106">
             <a:extLst xmlns:a="http://schemas.openxmlformats.org/drawingml/2006/main">
               <a:ext uri="{FF2B5EF4-FFF2-40B4-BE49-F238E27FC236}">
-                <a16:creationId xmlns:a16="http://schemas.microsoft.com/office/drawing/2014/main" id="{F18789A4-E6B1-4B86-A42E-2F12A3D865FF}"/>
+                <a16:creationId xmlns:a16="http://schemas.microsoft.com/office/drawing/2014/main" id="{CE66D002-BA51-4EED-A3AE-63F2C8C45F99}"/>
               </a:ext>
             </a:extLst>
           </p:cNvPr>
@@ -13786,12 +13581,12 @@
         </p:nvSpPr>
         <p:spPr>
           <a:xfrm xmlns:a="http://schemas.openxmlformats.org/drawingml/2006/main">
-            <a:off x="1066800" y="4000500"/>
-            <a:ext cx="7239000" cy="3657600"/>
+            <a:off x="1066800" y="3381375"/>
+            <a:ext cx="7239000" cy="3581400"/>
           </a:xfrm>
           <a:prstGeom xmlns:a="http://schemas.openxmlformats.org/drawingml/2006/main" prst="roundRect">
             <a:avLst>
-              <a:gd name="adj" fmla="val 4167"/>
+              <a:gd name="adj" fmla="val 4255"/>
             </a:avLst>
           </a:prstGeom>
           <a:solidFill xmlns:a="http://schemas.openxmlformats.org/drawingml/2006/main">
@@ -13810,7 +13605,7 @@
           <p:cNvPr id="7" name="f107">
             <a:extLst xmlns:a="http://schemas.openxmlformats.org/drawingml/2006/main">
               <a:ext uri="{FF2B5EF4-FFF2-40B4-BE49-F238E27FC236}">
-                <a16:creationId xmlns:a16="http://schemas.microsoft.com/office/drawing/2014/main" id="{09F1193A-D421-439F-A9F8-77481E968FBF}"/>
+                <a16:creationId xmlns:a16="http://schemas.microsoft.com/office/drawing/2014/main" id="{5D011F89-3A57-4F76-8728-99CE9620ECAF}"/>
               </a:ext>
             </a:extLst>
           </p:cNvPr>
@@ -13821,7 +13616,7 @@
         </p:nvSpPr>
         <p:spPr>
           <a:xfrm xmlns:a="http://schemas.openxmlformats.org/drawingml/2006/main">
-            <a:off x="1295400" y="4324350"/>
+            <a:off x="1295400" y="3638550"/>
             <a:ext cx="6781800" cy="419100"/>
           </a:xfrm>
           <a:prstGeom xmlns:a="http://schemas.openxmlformats.org/drawingml/2006/main" prst="rect">
@@ -13969,7 +13764,7 @@
           <p:cNvPr id="8" name="f108">
             <a:extLst xmlns:a="http://schemas.openxmlformats.org/drawingml/2006/main">
               <a:ext uri="{FF2B5EF4-FFF2-40B4-BE49-F238E27FC236}">
-                <a16:creationId xmlns:a16="http://schemas.microsoft.com/office/drawing/2014/main" id="{5884D5A1-60EB-4766-B421-A7C590E87E4E}"/>
+                <a16:creationId xmlns:a16="http://schemas.microsoft.com/office/drawing/2014/main" id="{60937D08-3012-44AE-8B2F-BE3DB4B76D5B}"/>
               </a:ext>
             </a:extLst>
           </p:cNvPr>
@@ -13980,7 +13775,7 @@
         </p:nvSpPr>
         <p:spPr>
           <a:xfrm xmlns:a="http://schemas.openxmlformats.org/drawingml/2006/main">
-            <a:off x="1295400" y="4752975"/>
+            <a:off x="1295400" y="4067175"/>
             <a:ext cx="6781800" cy="800100"/>
           </a:xfrm>
           <a:prstGeom xmlns:a="http://schemas.openxmlformats.org/drawingml/2006/main" prst="rect">
@@ -14151,7 +13946,7 @@
           <p:cNvPr id="9" name="f109">
             <a:extLst xmlns:a="http://schemas.openxmlformats.org/drawingml/2006/main">
               <a:ext uri="{FF2B5EF4-FFF2-40B4-BE49-F238E27FC236}">
-                <a16:creationId xmlns:a16="http://schemas.microsoft.com/office/drawing/2014/main" id="{B8AD8DFE-551D-4918-A242-037C8E47AF72}"/>
+                <a16:creationId xmlns:a16="http://schemas.microsoft.com/office/drawing/2014/main" id="{7C23A772-FD19-4338-B9B6-07121DBFADC0}"/>
               </a:ext>
             </a:extLst>
           </p:cNvPr>
@@ -14162,7 +13957,7 @@
         </p:nvSpPr>
         <p:spPr>
           <a:xfrm xmlns:a="http://schemas.openxmlformats.org/drawingml/2006/main">
-            <a:off x="1295400" y="5467350"/>
+            <a:off x="1295400" y="4781550"/>
             <a:ext cx="6781800" cy="381000"/>
           </a:xfrm>
           <a:prstGeom xmlns:a="http://schemas.openxmlformats.org/drawingml/2006/main" prst="rect">
@@ -14310,7 +14105,7 @@
           <p:cNvPr id="10" name="f110">
             <a:extLst xmlns:a="http://schemas.openxmlformats.org/drawingml/2006/main">
               <a:ext uri="{FF2B5EF4-FFF2-40B4-BE49-F238E27FC236}">
-                <a16:creationId xmlns:a16="http://schemas.microsoft.com/office/drawing/2014/main" id="{908B553A-1D33-4489-83D9-BD77FED71558}"/>
+                <a16:creationId xmlns:a16="http://schemas.microsoft.com/office/drawing/2014/main" id="{871998AE-699C-41EC-BA10-855746DF1032}"/>
               </a:ext>
             </a:extLst>
           </p:cNvPr>
@@ -14321,7 +14116,7 @@
         </p:nvSpPr>
         <p:spPr>
           <a:xfrm xmlns:a="http://schemas.openxmlformats.org/drawingml/2006/main">
-            <a:off x="1295400" y="6924675"/>
+            <a:off x="1295400" y="6238875"/>
             <a:ext cx="6781800" cy="419100"/>
           </a:xfrm>
           <a:prstGeom xmlns:a="http://schemas.openxmlformats.org/drawingml/2006/main" prst="rect">
@@ -14469,7 +14264,7 @@
           <p:cNvPr id="11" name="f111">
             <a:extLst xmlns:a="http://schemas.openxmlformats.org/drawingml/2006/main">
               <a:ext uri="{FF2B5EF4-FFF2-40B4-BE49-F238E27FC236}">
-                <a16:creationId xmlns:a16="http://schemas.microsoft.com/office/drawing/2014/main" id="{88513D94-9A56-41A8-A97F-E3ECB8562AF5}"/>
+                <a16:creationId xmlns:a16="http://schemas.microsoft.com/office/drawing/2014/main" id="{293C0933-2A78-4B2C-B318-EF2918F2ED39}"/>
               </a:ext>
             </a:extLst>
           </p:cNvPr>
@@ -14480,7 +14275,7 @@
         </p:nvSpPr>
         <p:spPr>
           <a:xfrm xmlns:a="http://schemas.openxmlformats.org/drawingml/2006/main">
-            <a:off x="8382000" y="4953000"/>
+            <a:off x="8382000" y="4381500"/>
             <a:ext cx="1428750" cy="171450"/>
           </a:xfrm>
           <a:prstGeom xmlns:a="http://schemas.openxmlformats.org/drawingml/2006/main" prst="leftArrow">
@@ -14500,7 +14295,7 @@
           <p:cNvPr id="12" name="f112">
             <a:extLst xmlns:a="http://schemas.openxmlformats.org/drawingml/2006/main">
               <a:ext uri="{FF2B5EF4-FFF2-40B4-BE49-F238E27FC236}">
-                <a16:creationId xmlns:a16="http://schemas.microsoft.com/office/drawing/2014/main" id="{C065348A-C38F-4E6C-98B3-4D3194C62A5A}"/>
+                <a16:creationId xmlns:a16="http://schemas.microsoft.com/office/drawing/2014/main" id="{E916163A-1BD5-4C2C-BF71-EA31C717DC5B}"/>
               </a:ext>
             </a:extLst>
           </p:cNvPr>
@@ -14511,7 +14306,7 @@
         </p:nvSpPr>
         <p:spPr>
           <a:xfrm xmlns:a="http://schemas.openxmlformats.org/drawingml/2006/main">
-            <a:off x="8382000" y="7048500"/>
+            <a:off x="8382000" y="6362700"/>
             <a:ext cx="1428750" cy="171450"/>
           </a:xfrm>
           <a:prstGeom xmlns:a="http://schemas.openxmlformats.org/drawingml/2006/main" prst="leftArrow">
@@ -14531,7 +14326,7 @@
           <p:cNvPr id="13" name="f113">
             <a:extLst xmlns:a="http://schemas.openxmlformats.org/drawingml/2006/main">
               <a:ext uri="{FF2B5EF4-FFF2-40B4-BE49-F238E27FC236}">
-                <a16:creationId xmlns:a16="http://schemas.microsoft.com/office/drawing/2014/main" id="{8DBCFD10-35FE-4784-A351-4F8B3F391501}"/>
+                <a16:creationId xmlns:a16="http://schemas.microsoft.com/office/drawing/2014/main" id="{AF90BA0E-869D-4A72-A1BB-50C2CA5DE990}"/>
               </a:ext>
             </a:extLst>
           </p:cNvPr>
@@ -14542,7 +14337,7 @@
         </p:nvSpPr>
         <p:spPr>
           <a:xfrm xmlns:a="http://schemas.openxmlformats.org/drawingml/2006/main">
-            <a:off x="1066800" y="7934325"/>
+            <a:off x="1066800" y="7239000"/>
             <a:ext cx="7239000" cy="323850"/>
           </a:xfrm>
           <a:prstGeom xmlns:a="http://schemas.openxmlformats.org/drawingml/2006/main" prst="rect">
@@ -14690,7 +14485,7 @@
           <p:cNvPr id="14" name="f114">
             <a:extLst xmlns:a="http://schemas.openxmlformats.org/drawingml/2006/main">
               <a:ext uri="{FF2B5EF4-FFF2-40B4-BE49-F238E27FC236}">
-                <a16:creationId xmlns:a16="http://schemas.microsoft.com/office/drawing/2014/main" id="{800FCF7F-25FB-4155-8C55-D2951BF4EEB6}"/>
+                <a16:creationId xmlns:a16="http://schemas.microsoft.com/office/drawing/2014/main" id="{21EC9D3D-53C6-4A90-A4F6-E28C6E7C9823}"/>
               </a:ext>
             </a:extLst>
           </p:cNvPr>
@@ -14701,7 +14496,7 @@
         </p:nvSpPr>
         <p:spPr>
           <a:xfrm xmlns:a="http://schemas.openxmlformats.org/drawingml/2006/main">
-            <a:off x="10001250" y="4429125"/>
+            <a:off x="10001250" y="3857625"/>
             <a:ext cx="4171950" cy="1219200"/>
           </a:xfrm>
           <a:prstGeom xmlns:a="http://schemas.openxmlformats.org/drawingml/2006/main" prst="roundRect">
@@ -14725,7 +14520,7 @@
           <p:cNvPr id="15" name="f115">
             <a:extLst xmlns:a="http://schemas.openxmlformats.org/drawingml/2006/main">
               <a:ext uri="{FF2B5EF4-FFF2-40B4-BE49-F238E27FC236}">
-                <a16:creationId xmlns:a16="http://schemas.microsoft.com/office/drawing/2014/main" id="{756F99DC-8BD5-4847-86E7-4DE0D2D9DFF2}"/>
+                <a16:creationId xmlns:a16="http://schemas.microsoft.com/office/drawing/2014/main" id="{406C6930-A031-4393-80EC-7F59B6A086FB}"/>
               </a:ext>
             </a:extLst>
           </p:cNvPr>
@@ -14736,7 +14531,7 @@
         </p:nvSpPr>
         <p:spPr>
           <a:xfrm xmlns:a="http://schemas.openxmlformats.org/drawingml/2006/main">
-            <a:off x="10191750" y="4676775"/>
+            <a:off x="10191750" y="4105275"/>
             <a:ext cx="3790950" cy="885825"/>
           </a:xfrm>
           <a:prstGeom xmlns:a="http://schemas.openxmlformats.org/drawingml/2006/main" prst="rect">
@@ -14907,7 +14702,7 @@
           <p:cNvPr id="16" name="f116">
             <a:extLst xmlns:a="http://schemas.openxmlformats.org/drawingml/2006/main">
               <a:ext uri="{FF2B5EF4-FFF2-40B4-BE49-F238E27FC236}">
-                <a16:creationId xmlns:a16="http://schemas.microsoft.com/office/drawing/2014/main" id="{8D2C59A9-5575-4C9F-8BA5-D0E3171210DE}"/>
+                <a16:creationId xmlns:a16="http://schemas.microsoft.com/office/drawing/2014/main" id="{B5A1EBCF-24A4-4156-926B-2ED5F8759A97}"/>
               </a:ext>
             </a:extLst>
           </p:cNvPr>
@@ -14918,7 +14713,7 @@
         </p:nvSpPr>
         <p:spPr>
           <a:xfrm xmlns:a="http://schemas.openxmlformats.org/drawingml/2006/main">
-            <a:off x="10001250" y="6524625"/>
+            <a:off x="10001250" y="5838825"/>
             <a:ext cx="4171950" cy="1219200"/>
           </a:xfrm>
           <a:prstGeom xmlns:a="http://schemas.openxmlformats.org/drawingml/2006/main" prst="roundRect">
@@ -14942,7 +14737,7 @@
           <p:cNvPr id="17" name="f117">
             <a:extLst xmlns:a="http://schemas.openxmlformats.org/drawingml/2006/main">
               <a:ext uri="{FF2B5EF4-FFF2-40B4-BE49-F238E27FC236}">
-                <a16:creationId xmlns:a16="http://schemas.microsoft.com/office/drawing/2014/main" id="{F6095C47-8CBE-4A13-AB88-3C5C4480DAF9}"/>
+                <a16:creationId xmlns:a16="http://schemas.microsoft.com/office/drawing/2014/main" id="{45C04275-589D-4323-B052-440ACDA1585C}"/>
               </a:ext>
             </a:extLst>
           </p:cNvPr>
@@ -14953,7 +14748,7 @@
         </p:nvSpPr>
         <p:spPr>
           <a:xfrm xmlns:a="http://schemas.openxmlformats.org/drawingml/2006/main">
-            <a:off x="10191750" y="6762750"/>
+            <a:off x="10191750" y="6076950"/>
             <a:ext cx="3790950" cy="885825"/>
           </a:xfrm>
           <a:prstGeom xmlns:a="http://schemas.openxmlformats.org/drawingml/2006/main" prst="rect">
@@ -15122,7 +14917,7 @@
     </p:spTree>
     <p:extLst>
       <p:ext uri="{BB962C8B-B14F-4D97-AF65-F5344CB8AC3E}">
-        <p14:creationId xmlns:p14="http://schemas.microsoft.com/office/powerpoint/2010/main" val="296700713"/>
+        <p14:creationId xmlns:p14="http://schemas.microsoft.com/office/powerpoint/2010/main" val="1981823958"/>
       </p:ext>
     </p:extLst>
   </p:cSld>
@@ -15153,7 +14948,7 @@
           <p:cNvPr id="15" name="">
             <a:extLst xmlns:a="http://schemas.openxmlformats.org/drawingml/2006/main">
               <a:ext uri="{FF2B5EF4-FFF2-40B4-BE49-F238E27FC236}">
-                <a16:creationId xmlns:a16="http://schemas.microsoft.com/office/drawing/2014/main" id="{2AD534DC-4080-4EE4-B65B-8D7992C1FA74}"/>
+                <a16:creationId xmlns:a16="http://schemas.microsoft.com/office/drawing/2014/main" id="{17727C81-12DF-4032-8B63-80D7830D9C6A}"/>
               </a:ext>
             </a:extLst>
           </p:cNvPr>
@@ -15163,7 +14958,7 @@
           <p:nvPr/>
         </p:nvPicPr>
         <p:blipFill>
-          <a:blip xmlns:r="http://schemas.openxmlformats.org/officeDocument/2006/relationships" xmlns:a="http://schemas.openxmlformats.org/drawingml/2006/main" r:embed="R8c1d0e4330e54982"/>
+          <a:blip xmlns:r="http://schemas.openxmlformats.org/officeDocument/2006/relationships" xmlns:a="http://schemas.openxmlformats.org/drawingml/2006/main" r:embed="R155686fbcecd4b65"/>
           <a:stretch xmlns:a="http://schemas.openxmlformats.org/drawingml/2006/main"/>
         </p:blipFill>
         <p:spPr>
@@ -15181,7 +14976,7 @@
           <p:cNvPr id="2" name="f119">
             <a:extLst xmlns:a="http://schemas.openxmlformats.org/drawingml/2006/main">
               <a:ext uri="{FF2B5EF4-FFF2-40B4-BE49-F238E27FC236}">
-                <a16:creationId xmlns:a16="http://schemas.microsoft.com/office/drawing/2014/main" id="{B5CF18BE-24AA-4662-A6F0-190DF52E184D}"/>
+                <a16:creationId xmlns:a16="http://schemas.microsoft.com/office/drawing/2014/main" id="{ACDC2D8F-2150-4304-9A67-23115AE4A6FC}"/>
               </a:ext>
             </a:extLst>
           </p:cNvPr>
@@ -15340,7 +15135,7 @@
           <p:cNvPr id="3" name="f120">
             <a:extLst xmlns:a="http://schemas.openxmlformats.org/drawingml/2006/main">
               <a:ext uri="{FF2B5EF4-FFF2-40B4-BE49-F238E27FC236}">
-                <a16:creationId xmlns:a16="http://schemas.microsoft.com/office/drawing/2014/main" id="{013FDCB5-4C5C-4E0C-86F2-23F2D8E177FA}"/>
+                <a16:creationId xmlns:a16="http://schemas.microsoft.com/office/drawing/2014/main" id="{BD28AB83-CE7A-4FBE-BA3C-07F791CABBB4}"/>
               </a:ext>
             </a:extLst>
           </p:cNvPr>
@@ -15499,7 +15294,7 @@
           <p:cNvPr id="4" name="f121">
             <a:extLst xmlns:a="http://schemas.openxmlformats.org/drawingml/2006/main">
               <a:ext uri="{FF2B5EF4-FFF2-40B4-BE49-F238E27FC236}">
-                <a16:creationId xmlns:a16="http://schemas.microsoft.com/office/drawing/2014/main" id="{9C2EB078-F21B-4BE9-8E83-423DE59E311B}"/>
+                <a16:creationId xmlns:a16="http://schemas.microsoft.com/office/drawing/2014/main" id="{6BEBC79C-4519-4562-A743-B1A7C0130BAB}"/>
               </a:ext>
             </a:extLst>
           </p:cNvPr>
@@ -15658,7 +15453,7 @@
           <p:cNvPr id="5" name="f122">
             <a:extLst xmlns:a="http://schemas.openxmlformats.org/drawingml/2006/main">
               <a:ext uri="{FF2B5EF4-FFF2-40B4-BE49-F238E27FC236}">
-                <a16:creationId xmlns:a16="http://schemas.microsoft.com/office/drawing/2014/main" id="{3637A451-F6AD-46C8-A435-66CFCBCC0839}"/>
+                <a16:creationId xmlns:a16="http://schemas.microsoft.com/office/drawing/2014/main" id="{CBE175BE-9CD9-4520-A08A-47D382F43CCF}"/>
               </a:ext>
             </a:extLst>
           </p:cNvPr>
@@ -15817,7 +15612,7 @@
           <p:cNvPr id="6" name="f123">
             <a:extLst xmlns:a="http://schemas.openxmlformats.org/drawingml/2006/main">
               <a:ext uri="{FF2B5EF4-FFF2-40B4-BE49-F238E27FC236}">
-                <a16:creationId xmlns:a16="http://schemas.microsoft.com/office/drawing/2014/main" id="{EC1A7182-5A61-43E6-A34B-D3B9956CCB6B}"/>
+                <a16:creationId xmlns:a16="http://schemas.microsoft.com/office/drawing/2014/main" id="{7BE6DE5F-4F0C-4976-84C1-A8972E9D440C}"/>
               </a:ext>
             </a:extLst>
           </p:cNvPr>
@@ -15976,7 +15771,7 @@
           <p:cNvPr id="7" name="f124">
             <a:extLst xmlns:a="http://schemas.openxmlformats.org/drawingml/2006/main">
               <a:ext uri="{FF2B5EF4-FFF2-40B4-BE49-F238E27FC236}">
-                <a16:creationId xmlns:a16="http://schemas.microsoft.com/office/drawing/2014/main" id="{576B5B23-61BC-416D-BF2E-79CBDB3292A6}"/>
+                <a16:creationId xmlns:a16="http://schemas.microsoft.com/office/drawing/2014/main" id="{C7F57453-DBED-4E00-A34A-196265D05EC1}"/>
               </a:ext>
             </a:extLst>
           </p:cNvPr>
@@ -16135,7 +15930,7 @@
           <p:cNvPr id="8" name="f125">
             <a:extLst xmlns:a="http://schemas.openxmlformats.org/drawingml/2006/main">
               <a:ext uri="{FF2B5EF4-FFF2-40B4-BE49-F238E27FC236}">
-                <a16:creationId xmlns:a16="http://schemas.microsoft.com/office/drawing/2014/main" id="{DD0AA4A9-A3C3-4D1D-A513-A44CC880C7B1}"/>
+                <a16:creationId xmlns:a16="http://schemas.microsoft.com/office/drawing/2014/main" id="{2E617DDE-DB62-4C5C-AE52-46EE4BCF1726}"/>
               </a:ext>
             </a:extLst>
           </p:cNvPr>
@@ -16294,7 +16089,7 @@
           <p:cNvPr id="9" name="f126">
             <a:extLst xmlns:a="http://schemas.openxmlformats.org/drawingml/2006/main">
               <a:ext uri="{FF2B5EF4-FFF2-40B4-BE49-F238E27FC236}">
-                <a16:creationId xmlns:a16="http://schemas.microsoft.com/office/drawing/2014/main" id="{082726BC-A7FC-4D2A-BD6B-480FA420C16C}"/>
+                <a16:creationId xmlns:a16="http://schemas.microsoft.com/office/drawing/2014/main" id="{F81327E1-5183-4B5F-9AA7-2AF209747A75}"/>
               </a:ext>
             </a:extLst>
           </p:cNvPr>
@@ -16453,7 +16248,7 @@
           <p:cNvPr id="10" name="f127">
             <a:extLst xmlns:a="http://schemas.openxmlformats.org/drawingml/2006/main">
               <a:ext uri="{FF2B5EF4-FFF2-40B4-BE49-F238E27FC236}">
-                <a16:creationId xmlns:a16="http://schemas.microsoft.com/office/drawing/2014/main" id="{DFB7656D-1D0F-4655-A7AA-C81FD1ED4349}"/>
+                <a16:creationId xmlns:a16="http://schemas.microsoft.com/office/drawing/2014/main" id="{CF8F7D91-2524-49A4-A4DF-BA85DEF31634}"/>
               </a:ext>
             </a:extLst>
           </p:cNvPr>
@@ -16612,7 +16407,7 @@
           <p:cNvPr id="11" name="f128">
             <a:extLst xmlns:a="http://schemas.openxmlformats.org/drawingml/2006/main">
               <a:ext uri="{FF2B5EF4-FFF2-40B4-BE49-F238E27FC236}">
-                <a16:creationId xmlns:a16="http://schemas.microsoft.com/office/drawing/2014/main" id="{4CF3EC47-A759-417A-87C4-2D91138F759A}"/>
+                <a16:creationId xmlns:a16="http://schemas.microsoft.com/office/drawing/2014/main" id="{2E022BCF-567A-4914-9886-220D7179C021}"/>
               </a:ext>
             </a:extLst>
           </p:cNvPr>
@@ -16771,7 +16566,7 @@
           <p:cNvPr id="12" name="f129">
             <a:extLst xmlns:a="http://schemas.openxmlformats.org/drawingml/2006/main">
               <a:ext uri="{FF2B5EF4-FFF2-40B4-BE49-F238E27FC236}">
-                <a16:creationId xmlns:a16="http://schemas.microsoft.com/office/drawing/2014/main" id="{D380B932-E18D-491E-BE13-0319E9382004}"/>
+                <a16:creationId xmlns:a16="http://schemas.microsoft.com/office/drawing/2014/main" id="{CDF3392D-E213-4583-AF94-2B681E0B0742}"/>
               </a:ext>
             </a:extLst>
           </p:cNvPr>
@@ -16930,7 +16725,7 @@
           <p:cNvPr id="13" name="f130">
             <a:extLst xmlns:a="http://schemas.openxmlformats.org/drawingml/2006/main">
               <a:ext uri="{FF2B5EF4-FFF2-40B4-BE49-F238E27FC236}">
-                <a16:creationId xmlns:a16="http://schemas.microsoft.com/office/drawing/2014/main" id="{9C31CD2B-E027-47B5-9759-50C98399ACEE}"/>
+                <a16:creationId xmlns:a16="http://schemas.microsoft.com/office/drawing/2014/main" id="{14AD9C07-8E6D-4167-AEDC-067AC6D14928}"/>
               </a:ext>
             </a:extLst>
           </p:cNvPr>
@@ -17089,7 +16884,7 @@
           <p:cNvPr id="14" name="f131">
             <a:extLst xmlns:a="http://schemas.openxmlformats.org/drawingml/2006/main">
               <a:ext uri="{FF2B5EF4-FFF2-40B4-BE49-F238E27FC236}">
-                <a16:creationId xmlns:a16="http://schemas.microsoft.com/office/drawing/2014/main" id="{8BAC995B-EBF7-4BFF-A56F-733A99528767}"/>
+                <a16:creationId xmlns:a16="http://schemas.microsoft.com/office/drawing/2014/main" id="{7F4FB262-0538-45C1-80F4-1264D9ECB912}"/>
               </a:ext>
             </a:extLst>
           </p:cNvPr>
@@ -17246,7 +17041,7 @@
     </p:spTree>
     <p:extLst>
       <p:ext uri="{BB962C8B-B14F-4D97-AF65-F5344CB8AC3E}">
-        <p14:creationId xmlns:p14="http://schemas.microsoft.com/office/powerpoint/2010/main" val="106827091"/>
+        <p14:creationId xmlns:p14="http://schemas.microsoft.com/office/powerpoint/2010/main" val="308923364"/>
       </p:ext>
     </p:extLst>
   </p:cSld>
@@ -17277,7 +17072,7 @@
           <p:cNvPr id="13" name="f132">
             <a:extLst xmlns:a="http://schemas.openxmlformats.org/drawingml/2006/main">
               <a:ext uri="{FF2B5EF4-FFF2-40B4-BE49-F238E27FC236}">
-                <a16:creationId xmlns:a16="http://schemas.microsoft.com/office/drawing/2014/main" id="{BB8EF939-DB91-43D5-9554-18DABA93056E}"/>
+                <a16:creationId xmlns:a16="http://schemas.microsoft.com/office/drawing/2014/main" id="{3C327F76-1DF6-4B2C-BAE8-EC66702C6655}"/>
               </a:ext>
             </a:extLst>
           </p:cNvPr>
@@ -17436,7 +17231,7 @@
           <p:cNvPr id="2" name="f133">
             <a:extLst xmlns:a="http://schemas.openxmlformats.org/drawingml/2006/main">
               <a:ext uri="{FF2B5EF4-FFF2-40B4-BE49-F238E27FC236}">
-                <a16:creationId xmlns:a16="http://schemas.microsoft.com/office/drawing/2014/main" id="{7D5791D2-D10A-4FAD-8AF8-1403DB23F60F}"/>
+                <a16:creationId xmlns:a16="http://schemas.microsoft.com/office/drawing/2014/main" id="{04BDE209-10E7-4F56-A01E-F83C25C78287}"/>
               </a:ext>
             </a:extLst>
           </p:cNvPr>
@@ -17595,7 +17390,7 @@
           <p:cNvPr id="3" name="f134">
             <a:extLst xmlns:a="http://schemas.openxmlformats.org/drawingml/2006/main">
               <a:ext uri="{FF2B5EF4-FFF2-40B4-BE49-F238E27FC236}">
-                <a16:creationId xmlns:a16="http://schemas.microsoft.com/office/drawing/2014/main" id="{6DAD045B-10E2-41CB-B366-BE64A035CAD0}"/>
+                <a16:creationId xmlns:a16="http://schemas.microsoft.com/office/drawing/2014/main" id="{3BD40488-02A2-46BA-881A-ACD57C8B0AFE}"/>
               </a:ext>
             </a:extLst>
           </p:cNvPr>
@@ -17754,7 +17549,7 @@
           <p:cNvPr id="4" name="f135">
             <a:extLst xmlns:a="http://schemas.openxmlformats.org/drawingml/2006/main">
               <a:ext uri="{FF2B5EF4-FFF2-40B4-BE49-F238E27FC236}">
-                <a16:creationId xmlns:a16="http://schemas.microsoft.com/office/drawing/2014/main" id="{8041F0DD-0437-4934-A72A-0820A4B29A27}"/>
+                <a16:creationId xmlns:a16="http://schemas.microsoft.com/office/drawing/2014/main" id="{55E3868C-103D-4C86-A2BD-5C2BED6ACD2D}"/>
               </a:ext>
             </a:extLst>
           </p:cNvPr>
@@ -17913,7 +17708,7 @@
           <p:cNvPr id="5" name="">
             <a:extLst xmlns:a="http://schemas.openxmlformats.org/drawingml/2006/main">
               <a:ext uri="{FF2B5EF4-FFF2-40B4-BE49-F238E27FC236}">
-                <a16:creationId xmlns:a16="http://schemas.microsoft.com/office/drawing/2014/main" id="{5836DC1D-6B45-414E-BAE6-CB63E4B0AC38}"/>
+                <a16:creationId xmlns:a16="http://schemas.microsoft.com/office/drawing/2014/main" id="{599EDAC5-B0A4-4BCE-AD21-1FBFA61992D3}"/>
               </a:ext>
             </a:extLst>
           </p:cNvPr>
@@ -17921,7 +17716,7 @@
           <p:nvPr/>
         </p:nvGraphicFramePr>
         <p:xfrm>
-          <a:off xmlns:a="http://schemas.openxmlformats.org/drawingml/2006/main" x="1066800" y="3076575"/>
+          <a:off xmlns:a="http://schemas.openxmlformats.org/drawingml/2006/main" x="1066800" y="2619375"/>
           <a:ext xmlns:a="http://schemas.openxmlformats.org/drawingml/2006/main" cx="9429750" cy="4162425"/>
         </p:xfrm>
         <a:graphic xmlns:a="http://schemas.openxmlformats.org/drawingml/2006/main">
@@ -18749,7 +18544,7 @@
           <p:cNvPr id="6" name="f137">
             <a:extLst xmlns:a="http://schemas.openxmlformats.org/drawingml/2006/main">
               <a:ext uri="{FF2B5EF4-FFF2-40B4-BE49-F238E27FC236}">
-                <a16:creationId xmlns:a16="http://schemas.microsoft.com/office/drawing/2014/main" id="{C693AC93-1C99-4E8E-880E-875B32D22E1A}"/>
+                <a16:creationId xmlns:a16="http://schemas.microsoft.com/office/drawing/2014/main" id="{4E8ECAA4-92C0-4962-8748-C48070E17113}"/>
               </a:ext>
             </a:extLst>
           </p:cNvPr>
@@ -18760,7 +18555,7 @@
         </p:nvSpPr>
         <p:spPr>
           <a:xfrm xmlns:a="http://schemas.openxmlformats.org/drawingml/2006/main">
-            <a:off x="11049000" y="3352800"/>
+            <a:off x="11049000" y="2895600"/>
             <a:ext cx="3124200" cy="2190750"/>
           </a:xfrm>
           <a:prstGeom xmlns:a="http://schemas.openxmlformats.org/drawingml/2006/main" prst="roundRect">
@@ -18784,7 +18579,7 @@
           <p:cNvPr id="7" name="f138">
             <a:extLst xmlns:a="http://schemas.openxmlformats.org/drawingml/2006/main">
               <a:ext uri="{FF2B5EF4-FFF2-40B4-BE49-F238E27FC236}">
-                <a16:creationId xmlns:a16="http://schemas.microsoft.com/office/drawing/2014/main" id="{C2B91122-EADA-4294-A30C-B16034E69964}"/>
+                <a16:creationId xmlns:a16="http://schemas.microsoft.com/office/drawing/2014/main" id="{DD1DDF96-FA31-4B98-B403-AA0D051E2161}"/>
               </a:ext>
             </a:extLst>
           </p:cNvPr>
@@ -18795,7 +18590,7 @@
         </p:nvSpPr>
         <p:spPr>
           <a:xfrm xmlns:a="http://schemas.openxmlformats.org/drawingml/2006/main">
-            <a:off x="11220450" y="3867150"/>
+            <a:off x="11220450" y="3409950"/>
             <a:ext cx="2781300" cy="971550"/>
           </a:xfrm>
           <a:prstGeom xmlns:a="http://schemas.openxmlformats.org/drawingml/2006/main" prst="rect">
@@ -18943,7 +18738,7 @@
           <p:cNvPr id="8" name="f139">
             <a:extLst xmlns:a="http://schemas.openxmlformats.org/drawingml/2006/main">
               <a:ext uri="{FF2B5EF4-FFF2-40B4-BE49-F238E27FC236}">
-                <a16:creationId xmlns:a16="http://schemas.microsoft.com/office/drawing/2014/main" id="{AC2C88D5-1730-4024-B4EA-DBA99A37A2C4}"/>
+                <a16:creationId xmlns:a16="http://schemas.microsoft.com/office/drawing/2014/main" id="{8925AF10-A27D-4B4E-AAA4-84CEF3DD52C0}"/>
               </a:ext>
             </a:extLst>
           </p:cNvPr>
@@ -18954,7 +18749,7 @@
         </p:nvSpPr>
         <p:spPr>
           <a:xfrm xmlns:a="http://schemas.openxmlformats.org/drawingml/2006/main">
-            <a:off x="11220450" y="4876800"/>
+            <a:off x="11220450" y="4419600"/>
             <a:ext cx="2781300" cy="400050"/>
           </a:xfrm>
           <a:prstGeom xmlns:a="http://schemas.openxmlformats.org/drawingml/2006/main" prst="rect">
@@ -19102,7 +18897,7 @@
           <p:cNvPr id="9" name="f140">
             <a:extLst xmlns:a="http://schemas.openxmlformats.org/drawingml/2006/main">
               <a:ext uri="{FF2B5EF4-FFF2-40B4-BE49-F238E27FC236}">
-                <a16:creationId xmlns:a16="http://schemas.microsoft.com/office/drawing/2014/main" id="{07EFBC96-30D2-49A3-9ECB-24BF17A3E19C}"/>
+                <a16:creationId xmlns:a16="http://schemas.microsoft.com/office/drawing/2014/main" id="{CBA63465-F630-473C-8C37-340A993DB60D}"/>
               </a:ext>
             </a:extLst>
           </p:cNvPr>
@@ -19113,7 +18908,7 @@
         </p:nvSpPr>
         <p:spPr>
           <a:xfrm xmlns:a="http://schemas.openxmlformats.org/drawingml/2006/main">
-            <a:off x="11258550" y="5924550"/>
+            <a:off x="11258550" y="5467350"/>
             <a:ext cx="2705100" cy="400050"/>
           </a:xfrm>
           <a:prstGeom xmlns:a="http://schemas.openxmlformats.org/drawingml/2006/main" prst="rect">
@@ -19261,7 +19056,7 @@
           <p:cNvPr id="10" name="f141">
             <a:extLst xmlns:a="http://schemas.openxmlformats.org/drawingml/2006/main">
               <a:ext uri="{FF2B5EF4-FFF2-40B4-BE49-F238E27FC236}">
-                <a16:creationId xmlns:a16="http://schemas.microsoft.com/office/drawing/2014/main" id="{E6CB828A-D891-443A-B9BD-1E9A73F51DEF}"/>
+                <a16:creationId xmlns:a16="http://schemas.microsoft.com/office/drawing/2014/main" id="{AB11A6BA-6100-48A2-AFFA-FFBB27B026FC}"/>
               </a:ext>
             </a:extLst>
           </p:cNvPr>
@@ -19272,7 +19067,7 @@
         </p:nvSpPr>
         <p:spPr>
           <a:xfrm xmlns:a="http://schemas.openxmlformats.org/drawingml/2006/main">
-            <a:off x="11258550" y="6448425"/>
+            <a:off x="11258550" y="5991225"/>
             <a:ext cx="2705100" cy="400050"/>
           </a:xfrm>
           <a:prstGeom xmlns:a="http://schemas.openxmlformats.org/drawingml/2006/main" prst="rect">
@@ -19420,7 +19215,7 @@
           <p:cNvPr id="11" name="f142">
             <a:extLst xmlns:a="http://schemas.openxmlformats.org/drawingml/2006/main">
               <a:ext uri="{FF2B5EF4-FFF2-40B4-BE49-F238E27FC236}">
-                <a16:creationId xmlns:a16="http://schemas.microsoft.com/office/drawing/2014/main" id="{4B58AB90-CEE2-4891-86D9-179B5CA5AFE3}"/>
+                <a16:creationId xmlns:a16="http://schemas.microsoft.com/office/drawing/2014/main" id="{6E5DAECD-DCB7-4F25-A275-86AE11249E47}"/>
               </a:ext>
             </a:extLst>
           </p:cNvPr>
@@ -19431,7 +19226,7 @@
         </p:nvSpPr>
         <p:spPr>
           <a:xfrm xmlns:a="http://schemas.openxmlformats.org/drawingml/2006/main">
-            <a:off x="11258550" y="6972300"/>
+            <a:off x="11258550" y="6515100"/>
             <a:ext cx="2705100" cy="381000"/>
           </a:xfrm>
           <a:prstGeom xmlns:a="http://schemas.openxmlformats.org/drawingml/2006/main" prst="rect">
@@ -19579,7 +19374,7 @@
           <p:cNvPr id="12" name="f143">
             <a:extLst xmlns:a="http://schemas.openxmlformats.org/drawingml/2006/main">
               <a:ext uri="{FF2B5EF4-FFF2-40B4-BE49-F238E27FC236}">
-                <a16:creationId xmlns:a16="http://schemas.microsoft.com/office/drawing/2014/main" id="{66F2D0D6-B584-4E60-A3D4-D743E1677DD1}"/>
+                <a16:creationId xmlns:a16="http://schemas.microsoft.com/office/drawing/2014/main" id="{142387E4-37F5-4C50-80D8-13C4F58E3CF0}"/>
               </a:ext>
             </a:extLst>
           </p:cNvPr>
@@ -19590,7 +19385,7 @@
         </p:nvSpPr>
         <p:spPr>
           <a:xfrm xmlns:a="http://schemas.openxmlformats.org/drawingml/2006/main">
-            <a:off x="1066800" y="7534275"/>
+            <a:off x="1066800" y="7077075"/>
             <a:ext cx="9429750" cy="285750"/>
           </a:xfrm>
           <a:prstGeom xmlns:a="http://schemas.openxmlformats.org/drawingml/2006/main" prst="rect">
@@ -19736,7 +19531,7 @@
     </p:spTree>
     <p:extLst>
       <p:ext uri="{BB962C8B-B14F-4D97-AF65-F5344CB8AC3E}">
-        <p14:creationId xmlns:p14="http://schemas.microsoft.com/office/powerpoint/2010/main" val="501538323"/>
+        <p14:creationId xmlns:p14="http://schemas.microsoft.com/office/powerpoint/2010/main" val="557509514"/>
       </p:ext>
     </p:extLst>
   </p:cSld>
@@ -19767,7 +19562,7 @@
           <p:cNvPr id="49" name="f144">
             <a:extLst xmlns:a="http://schemas.openxmlformats.org/drawingml/2006/main">
               <a:ext uri="{FF2B5EF4-FFF2-40B4-BE49-F238E27FC236}">
-                <a16:creationId xmlns:a16="http://schemas.microsoft.com/office/drawing/2014/main" id="{36C8E2FD-E395-4833-9439-C6CADDF0AD5B}"/>
+                <a16:creationId xmlns:a16="http://schemas.microsoft.com/office/drawing/2014/main" id="{1DDDF487-2240-452D-B61B-A2775F0C8F31}"/>
               </a:ext>
             </a:extLst>
           </p:cNvPr>
@@ -19926,7 +19721,7 @@
           <p:cNvPr id="2" name="f145">
             <a:extLst xmlns:a="http://schemas.openxmlformats.org/drawingml/2006/main">
               <a:ext uri="{FF2B5EF4-FFF2-40B4-BE49-F238E27FC236}">
-                <a16:creationId xmlns:a16="http://schemas.microsoft.com/office/drawing/2014/main" id="{00511CC5-4585-4AE5-817A-FE7D28CE2A9B}"/>
+                <a16:creationId xmlns:a16="http://schemas.microsoft.com/office/drawing/2014/main" id="{AFA9F55E-E6E1-4D8D-BADA-103EC1F974F9}"/>
               </a:ext>
             </a:extLst>
           </p:cNvPr>
@@ -20085,7 +19880,7 @@
           <p:cNvPr id="3" name="f146">
             <a:extLst xmlns:a="http://schemas.openxmlformats.org/drawingml/2006/main">
               <a:ext uri="{FF2B5EF4-FFF2-40B4-BE49-F238E27FC236}">
-                <a16:creationId xmlns:a16="http://schemas.microsoft.com/office/drawing/2014/main" id="{35043BA8-DC6C-4B64-AB82-DD67FD19A666}"/>
+                <a16:creationId xmlns:a16="http://schemas.microsoft.com/office/drawing/2014/main" id="{89C89C12-B965-46E7-A9F2-3925BFF74009}"/>
               </a:ext>
             </a:extLst>
           </p:cNvPr>
@@ -20244,7 +20039,7 @@
           <p:cNvPr id="4" name="f147">
             <a:extLst xmlns:a="http://schemas.openxmlformats.org/drawingml/2006/main">
               <a:ext uri="{FF2B5EF4-FFF2-40B4-BE49-F238E27FC236}">
-                <a16:creationId xmlns:a16="http://schemas.microsoft.com/office/drawing/2014/main" id="{96A5EE3F-4006-47EE-82D6-85A5BFC35A43}"/>
+                <a16:creationId xmlns:a16="http://schemas.microsoft.com/office/drawing/2014/main" id="{8E96D920-3FC0-489C-9337-34D1D91D4B6B}"/>
               </a:ext>
             </a:extLst>
           </p:cNvPr>
@@ -20403,7 +20198,7 @@
           <p:cNvPr id="50" name="dim_f148">
             <a:extLst xmlns:a="http://schemas.openxmlformats.org/drawingml/2006/main">
               <a:ext uri="{FF2B5EF4-FFF2-40B4-BE49-F238E27FC236}">
-                <a16:creationId xmlns:a16="http://schemas.microsoft.com/office/drawing/2014/main" id="{B44E52BE-03CE-4BD5-A83E-B3AE251C0CB0}"/>
+                <a16:creationId xmlns:a16="http://schemas.microsoft.com/office/drawing/2014/main" id="{26586A5C-9C2C-4E52-AEDD-8F92C8E40361}"/>
               </a:ext>
             </a:extLst>
           </p:cNvPr>
@@ -20438,7 +20233,7 @@
           <p:cNvPr id="5" name="f148">
             <a:extLst xmlns:a="http://schemas.openxmlformats.org/drawingml/2006/main">
               <a:ext uri="{FF2B5EF4-FFF2-40B4-BE49-F238E27FC236}">
-                <a16:creationId xmlns:a16="http://schemas.microsoft.com/office/drawing/2014/main" id="{B44E52BE-03CE-4BD5-A83E-B3AE251C0CB0}"/>
+                <a16:creationId xmlns:a16="http://schemas.microsoft.com/office/drawing/2014/main" id="{26586A5C-9C2C-4E52-AEDD-8F92C8E40361}"/>
               </a:ext>
             </a:extLst>
           </p:cNvPr>
@@ -20460,12 +20255,19 @@
           <a:solidFill xmlns:a="http://schemas.openxmlformats.org/drawingml/2006/main">
             <a:srgbClr val="F0F4FF"/>
           </a:solidFill>
-          <a:ln xmlns:a="http://schemas.openxmlformats.org/drawingml/2006/main" w="17145">
+          <a:ln xmlns:a="http://schemas.openxmlformats.org/drawingml/2006/main" w="20955">
             <a:solidFill>
               <a:srgbClr val="D9E3EF"/>
             </a:solidFill>
             <a:prstDash val="solid"/>
           </a:ln>
+          <ns0:effectLst xmlns:ns0="http://schemas.openxmlformats.org/drawingml/2006/main">
+            <ns0:outerShdw blurRad="57150" dist="38100" dir="5400000" algn="ctr" rotWithShape="0">
+              <ns0:srgbClr val="182536">
+                <ns0:alpha val="10000"/>
+              </ns0:srgbClr>
+            </ns0:outerShdw>
+          </ns0:effectLst>
         </p:spPr>
       </p:sp>
       <p:sp>
@@ -20473,7 +20275,7 @@
           <p:cNvPr id="51" name="phaseC_f148">
             <a:extLst xmlns:a="http://schemas.openxmlformats.org/drawingml/2006/main">
               <a:ext uri="{FF2B5EF4-FFF2-40B4-BE49-F238E27FC236}">
-                <a16:creationId xmlns:a16="http://schemas.microsoft.com/office/drawing/2014/main" id="{B44E52BE-03CE-4BD5-A83E-B3AE251C0CB0}"/>
+                <a16:creationId xmlns:a16="http://schemas.microsoft.com/office/drawing/2014/main" id="{26586A5C-9C2C-4E52-AEDD-8F92C8E40361}"/>
               </a:ext>
             </a:extLst>
           </p:cNvPr>
@@ -20495,12 +20297,19 @@
           <a:solidFill xmlns:a="http://schemas.openxmlformats.org/drawingml/2006/main">
             <a:srgbClr val="F0F4FF"/>
           </a:solidFill>
-          <a:ln xmlns:a="http://schemas.openxmlformats.org/drawingml/2006/main" w="17145">
+          <a:ln xmlns:a="http://schemas.openxmlformats.org/drawingml/2006/main" w="20955">
             <a:solidFill>
               <a:srgbClr val="D9E3EF"/>
             </a:solidFill>
             <a:prstDash val="solid"/>
           </a:ln>
+          <ns0:effectLst xmlns:ns0="http://schemas.openxmlformats.org/drawingml/2006/main">
+            <ns0:outerShdw blurRad="57150" dist="38100" dir="5400000" algn="ctr" rotWithShape="0">
+              <ns0:srgbClr val="182536">
+                <ns0:alpha val="10000"/>
+              </ns0:srgbClr>
+            </ns0:outerShdw>
+          </ns0:effectLst>
         </p:spPr>
       </p:sp>
       <p:sp>
@@ -20508,7 +20317,7 @@
           <p:cNvPr id="52" name="dim_f149">
             <a:extLst xmlns:a="http://schemas.openxmlformats.org/drawingml/2006/main">
               <a:ext uri="{FF2B5EF4-FFF2-40B4-BE49-F238E27FC236}">
-                <a16:creationId xmlns:a16="http://schemas.microsoft.com/office/drawing/2014/main" id="{9B061945-26B3-4C5A-9BB9-97C5E0B14D2A}"/>
+                <a16:creationId xmlns:a16="http://schemas.microsoft.com/office/drawing/2014/main" id="{4553D562-E450-4CBF-AB0A-841DD2B1FDE8}"/>
               </a:ext>
             </a:extLst>
           </p:cNvPr>
@@ -20667,7 +20476,7 @@
           <p:cNvPr id="6" name="f149">
             <a:extLst xmlns:a="http://schemas.openxmlformats.org/drawingml/2006/main">
               <a:ext uri="{FF2B5EF4-FFF2-40B4-BE49-F238E27FC236}">
-                <a16:creationId xmlns:a16="http://schemas.microsoft.com/office/drawing/2014/main" id="{9B061945-26B3-4C5A-9BB9-97C5E0B14D2A}"/>
+                <a16:creationId xmlns:a16="http://schemas.microsoft.com/office/drawing/2014/main" id="{4553D562-E450-4CBF-AB0A-841DD2B1FDE8}"/>
               </a:ext>
             </a:extLst>
           </p:cNvPr>
@@ -20826,7 +20635,7 @@
           <p:cNvPr id="53" name="phaseC_f149">
             <a:extLst xmlns:a="http://schemas.openxmlformats.org/drawingml/2006/main">
               <a:ext uri="{FF2B5EF4-FFF2-40B4-BE49-F238E27FC236}">
-                <a16:creationId xmlns:a16="http://schemas.microsoft.com/office/drawing/2014/main" id="{9B061945-26B3-4C5A-9BB9-97C5E0B14D2A}"/>
+                <a16:creationId xmlns:a16="http://schemas.microsoft.com/office/drawing/2014/main" id="{4553D562-E450-4CBF-AB0A-841DD2B1FDE8}"/>
               </a:ext>
             </a:extLst>
           </p:cNvPr>
@@ -20985,7 +20794,7 @@
           <p:cNvPr id="54" name="dim_f150">
             <a:extLst xmlns:a="http://schemas.openxmlformats.org/drawingml/2006/main">
               <a:ext uri="{FF2B5EF4-FFF2-40B4-BE49-F238E27FC236}">
-                <a16:creationId xmlns:a16="http://schemas.microsoft.com/office/drawing/2014/main" id="{AF978F90-28D8-40CD-8151-3243465C6442}"/>
+                <a16:creationId xmlns:a16="http://schemas.microsoft.com/office/drawing/2014/main" id="{35FBC402-A4D0-4D86-8BC3-0A4AC2D62C01}"/>
               </a:ext>
             </a:extLst>
           </p:cNvPr>
@@ -21020,7 +20829,7 @@
           <p:cNvPr id="7" name="f150">
             <a:extLst xmlns:a="http://schemas.openxmlformats.org/drawingml/2006/main">
               <a:ext uri="{FF2B5EF4-FFF2-40B4-BE49-F238E27FC236}">
-                <a16:creationId xmlns:a16="http://schemas.microsoft.com/office/drawing/2014/main" id="{AF978F90-28D8-40CD-8151-3243465C6442}"/>
+                <a16:creationId xmlns:a16="http://schemas.microsoft.com/office/drawing/2014/main" id="{35FBC402-A4D0-4D86-8BC3-0A4AC2D62C01}"/>
               </a:ext>
             </a:extLst>
           </p:cNvPr>
@@ -21042,12 +20851,19 @@
           <a:solidFill xmlns:a="http://schemas.openxmlformats.org/drawingml/2006/main">
             <a:srgbClr val="FFFFFF"/>
           </a:solidFill>
-          <a:ln xmlns:a="http://schemas.openxmlformats.org/drawingml/2006/main" w="17145">
+          <a:ln xmlns:a="http://schemas.openxmlformats.org/drawingml/2006/main" w="20955">
             <a:solidFill>
               <a:srgbClr val="D9E3EF"/>
             </a:solidFill>
             <a:prstDash val="solid"/>
           </a:ln>
+          <ns1:effectLst xmlns:ns1="http://schemas.openxmlformats.org/drawingml/2006/main">
+            <ns1:outerShdw blurRad="57150" dist="38100" dir="5400000" algn="ctr" rotWithShape="0">
+              <ns1:srgbClr val="182536">
+                <ns1:alpha val="10000"/>
+              </ns1:srgbClr>
+            </ns1:outerShdw>
+          </ns1:effectLst>
         </p:spPr>
       </p:sp>
       <p:sp>
@@ -21055,7 +20871,7 @@
           <p:cNvPr id="55" name="dim_f151">
             <a:extLst xmlns:a="http://schemas.openxmlformats.org/drawingml/2006/main">
               <a:ext uri="{FF2B5EF4-FFF2-40B4-BE49-F238E27FC236}">
-                <a16:creationId xmlns:a16="http://schemas.microsoft.com/office/drawing/2014/main" id="{90F61FB3-0ED2-4646-AD90-6B3900AFAE80}"/>
+                <a16:creationId xmlns:a16="http://schemas.microsoft.com/office/drawing/2014/main" id="{09A7665F-1AA9-4034-B887-5A74DBD77070}"/>
               </a:ext>
             </a:extLst>
           </p:cNvPr>
@@ -21214,7 +21030,7 @@
           <p:cNvPr id="8" name="f151">
             <a:extLst xmlns:a="http://schemas.openxmlformats.org/drawingml/2006/main">
               <a:ext uri="{FF2B5EF4-FFF2-40B4-BE49-F238E27FC236}">
-                <a16:creationId xmlns:a16="http://schemas.microsoft.com/office/drawing/2014/main" id="{90F61FB3-0ED2-4646-AD90-6B3900AFAE80}"/>
+                <a16:creationId xmlns:a16="http://schemas.microsoft.com/office/drawing/2014/main" id="{09A7665F-1AA9-4034-B887-5A74DBD77070}"/>
               </a:ext>
             </a:extLst>
           </p:cNvPr>
@@ -21373,7 +21189,7 @@
           <p:cNvPr id="56" name="dim_f152">
             <a:extLst xmlns:a="http://schemas.openxmlformats.org/drawingml/2006/main">
               <a:ext uri="{FF2B5EF4-FFF2-40B4-BE49-F238E27FC236}">
-                <a16:creationId xmlns:a16="http://schemas.microsoft.com/office/drawing/2014/main" id="{0BCB4A6B-9F89-4062-A343-F593F9520A92}"/>
+                <a16:creationId xmlns:a16="http://schemas.microsoft.com/office/drawing/2014/main" id="{032A6CD8-C12E-49DF-9C45-991B4315A69A}"/>
               </a:ext>
             </a:extLst>
           </p:cNvPr>
@@ -21408,7 +21224,7 @@
           <p:cNvPr id="9" name="f152">
             <a:extLst xmlns:a="http://schemas.openxmlformats.org/drawingml/2006/main">
               <a:ext uri="{FF2B5EF4-FFF2-40B4-BE49-F238E27FC236}">
-                <a16:creationId xmlns:a16="http://schemas.microsoft.com/office/drawing/2014/main" id="{0BCB4A6B-9F89-4062-A343-F593F9520A92}"/>
+                <a16:creationId xmlns:a16="http://schemas.microsoft.com/office/drawing/2014/main" id="{032A6CD8-C12E-49DF-9C45-991B4315A69A}"/>
               </a:ext>
             </a:extLst>
           </p:cNvPr>
@@ -21430,12 +21246,19 @@
           <a:solidFill xmlns:a="http://schemas.openxmlformats.org/drawingml/2006/main">
             <a:srgbClr val="EEF8F3"/>
           </a:solidFill>
-          <a:ln xmlns:a="http://schemas.openxmlformats.org/drawingml/2006/main" w="17145">
+          <a:ln xmlns:a="http://schemas.openxmlformats.org/drawingml/2006/main" w="20955">
             <a:solidFill>
               <a:srgbClr val="C4DFD3"/>
             </a:solidFill>
             <a:prstDash val="solid"/>
           </a:ln>
+          <ns2:effectLst xmlns:ns2="http://schemas.openxmlformats.org/drawingml/2006/main">
+            <ns2:outerShdw blurRad="57150" dist="38100" dir="5400000" algn="ctr" rotWithShape="0">
+              <ns2:srgbClr val="182536">
+                <ns2:alpha val="10000"/>
+              </ns2:srgbClr>
+            </ns2:outerShdw>
+          </ns2:effectLst>
         </p:spPr>
       </p:sp>
       <p:sp>
@@ -21443,7 +21266,7 @@
           <p:cNvPr id="57" name="phaseC_f152">
             <a:extLst xmlns:a="http://schemas.openxmlformats.org/drawingml/2006/main">
               <a:ext uri="{FF2B5EF4-FFF2-40B4-BE49-F238E27FC236}">
-                <a16:creationId xmlns:a16="http://schemas.microsoft.com/office/drawing/2014/main" id="{0BCB4A6B-9F89-4062-A343-F593F9520A92}"/>
+                <a16:creationId xmlns:a16="http://schemas.microsoft.com/office/drawing/2014/main" id="{032A6CD8-C12E-49DF-9C45-991B4315A69A}"/>
               </a:ext>
             </a:extLst>
           </p:cNvPr>
@@ -21465,12 +21288,19 @@
           <a:solidFill xmlns:a="http://schemas.openxmlformats.org/drawingml/2006/main">
             <a:srgbClr val="EEF8F3"/>
           </a:solidFill>
-          <a:ln xmlns:a="http://schemas.openxmlformats.org/drawingml/2006/main" w="17145">
+          <a:ln xmlns:a="http://schemas.openxmlformats.org/drawingml/2006/main" w="20955">
             <a:solidFill>
               <a:srgbClr val="C4DFD3"/>
             </a:solidFill>
             <a:prstDash val="solid"/>
           </a:ln>
+          <ns2:effectLst xmlns:ns2="http://schemas.openxmlformats.org/drawingml/2006/main">
+            <ns2:outerShdw blurRad="57150" dist="38100" dir="5400000" algn="ctr" rotWithShape="0">
+              <ns2:srgbClr val="182536">
+                <ns2:alpha val="10000"/>
+              </ns2:srgbClr>
+            </ns2:outerShdw>
+          </ns2:effectLst>
         </p:spPr>
       </p:sp>
       <p:sp>
@@ -21478,7 +21308,7 @@
           <p:cNvPr id="58" name="dim_f153">
             <a:extLst xmlns:a="http://schemas.openxmlformats.org/drawingml/2006/main">
               <a:ext uri="{FF2B5EF4-FFF2-40B4-BE49-F238E27FC236}">
-                <a16:creationId xmlns:a16="http://schemas.microsoft.com/office/drawing/2014/main" id="{8F92213C-EBD3-41E4-A835-6F6DB0B24264}"/>
+                <a16:creationId xmlns:a16="http://schemas.microsoft.com/office/drawing/2014/main" id="{2B86DCDF-2D6F-49B8-B7F6-2BB3749C2CAC}"/>
               </a:ext>
             </a:extLst>
           </p:cNvPr>
@@ -21637,7 +21467,7 @@
           <p:cNvPr id="10" name="f153">
             <a:extLst xmlns:a="http://schemas.openxmlformats.org/drawingml/2006/main">
               <a:ext uri="{FF2B5EF4-FFF2-40B4-BE49-F238E27FC236}">
-                <a16:creationId xmlns:a16="http://schemas.microsoft.com/office/drawing/2014/main" id="{8F92213C-EBD3-41E4-A835-6F6DB0B24264}"/>
+                <a16:creationId xmlns:a16="http://schemas.microsoft.com/office/drawing/2014/main" id="{2B86DCDF-2D6F-49B8-B7F6-2BB3749C2CAC}"/>
               </a:ext>
             </a:extLst>
           </p:cNvPr>
@@ -21796,7 +21626,7 @@
           <p:cNvPr id="59" name="phaseC_f153">
             <a:extLst xmlns:a="http://schemas.openxmlformats.org/drawingml/2006/main">
               <a:ext uri="{FF2B5EF4-FFF2-40B4-BE49-F238E27FC236}">
-                <a16:creationId xmlns:a16="http://schemas.microsoft.com/office/drawing/2014/main" id="{8F92213C-EBD3-41E4-A835-6F6DB0B24264}"/>
+                <a16:creationId xmlns:a16="http://schemas.microsoft.com/office/drawing/2014/main" id="{2B86DCDF-2D6F-49B8-B7F6-2BB3749C2CAC}"/>
               </a:ext>
             </a:extLst>
           </p:cNvPr>
@@ -21955,7 +21785,7 @@
           <p:cNvPr id="60" name="dim_f154">
             <a:extLst xmlns:a="http://schemas.openxmlformats.org/drawingml/2006/main">
               <a:ext uri="{FF2B5EF4-FFF2-40B4-BE49-F238E27FC236}">
-                <a16:creationId xmlns:a16="http://schemas.microsoft.com/office/drawing/2014/main" id="{5D05F89C-5664-472D-A05E-A7C22066DCE3}"/>
+                <a16:creationId xmlns:a16="http://schemas.microsoft.com/office/drawing/2014/main" id="{7180FAF6-3DC8-40A1-A2F5-140B5F252CBB}"/>
               </a:ext>
             </a:extLst>
           </p:cNvPr>
@@ -21990,7 +21820,7 @@
           <p:cNvPr id="11" name="f154">
             <a:extLst xmlns:a="http://schemas.openxmlformats.org/drawingml/2006/main">
               <a:ext uri="{FF2B5EF4-FFF2-40B4-BE49-F238E27FC236}">
-                <a16:creationId xmlns:a16="http://schemas.microsoft.com/office/drawing/2014/main" id="{5D05F89C-5664-472D-A05E-A7C22066DCE3}"/>
+                <a16:creationId xmlns:a16="http://schemas.microsoft.com/office/drawing/2014/main" id="{7180FAF6-3DC8-40A1-A2F5-140B5F252CBB}"/>
               </a:ext>
             </a:extLst>
           </p:cNvPr>
@@ -22012,12 +21842,19 @@
           <a:solidFill xmlns:a="http://schemas.openxmlformats.org/drawingml/2006/main">
             <a:srgbClr val="F0F4FF"/>
           </a:solidFill>
-          <a:ln xmlns:a="http://schemas.openxmlformats.org/drawingml/2006/main" w="17145">
+          <a:ln xmlns:a="http://schemas.openxmlformats.org/drawingml/2006/main" w="20955">
             <a:solidFill>
               <a:srgbClr val="D9E3EF"/>
             </a:solidFill>
             <a:prstDash val="solid"/>
           </a:ln>
+          <ns3:effectLst xmlns:ns3="http://schemas.openxmlformats.org/drawingml/2006/main">
+            <ns3:outerShdw blurRad="57150" dist="38100" dir="5400000" algn="ctr" rotWithShape="0">
+              <ns3:srgbClr val="182536">
+                <ns3:alpha val="10000"/>
+              </ns3:srgbClr>
+            </ns3:outerShdw>
+          </ns3:effectLst>
         </p:spPr>
       </p:sp>
       <p:sp>
@@ -22025,7 +21862,7 @@
           <p:cNvPr id="61" name="dim_f155">
             <a:extLst xmlns:a="http://schemas.openxmlformats.org/drawingml/2006/main">
               <a:ext uri="{FF2B5EF4-FFF2-40B4-BE49-F238E27FC236}">
-                <a16:creationId xmlns:a16="http://schemas.microsoft.com/office/drawing/2014/main" id="{8D18ED16-76CE-4BF2-A8C1-CF4CD73E7610}"/>
+                <a16:creationId xmlns:a16="http://schemas.microsoft.com/office/drawing/2014/main" id="{76159C0C-0534-4820-8DC5-E4699B6F5162}"/>
               </a:ext>
             </a:extLst>
           </p:cNvPr>
@@ -22184,7 +22021,7 @@
           <p:cNvPr id="12" name="f155">
             <a:extLst xmlns:a="http://schemas.openxmlformats.org/drawingml/2006/main">
               <a:ext uri="{FF2B5EF4-FFF2-40B4-BE49-F238E27FC236}">
-                <a16:creationId xmlns:a16="http://schemas.microsoft.com/office/drawing/2014/main" id="{8D18ED16-76CE-4BF2-A8C1-CF4CD73E7610}"/>
+                <a16:creationId xmlns:a16="http://schemas.microsoft.com/office/drawing/2014/main" id="{76159C0C-0534-4820-8DC5-E4699B6F5162}"/>
               </a:ext>
             </a:extLst>
           </p:cNvPr>
@@ -22343,7 +22180,7 @@
           <p:cNvPr id="62" name="dim_f156">
             <a:extLst xmlns:a="http://schemas.openxmlformats.org/drawingml/2006/main">
               <a:ext uri="{FF2B5EF4-FFF2-40B4-BE49-F238E27FC236}">
-                <a16:creationId xmlns:a16="http://schemas.microsoft.com/office/drawing/2014/main" id="{960FE1D7-4D75-4370-A829-DE9D0B3F1C2F}"/>
+                <a16:creationId xmlns:a16="http://schemas.microsoft.com/office/drawing/2014/main" id="{483A3DF5-D15F-4FD7-A3ED-637359E09182}"/>
               </a:ext>
             </a:extLst>
           </p:cNvPr>
@@ -22378,7 +22215,7 @@
           <p:cNvPr id="13" name="f156">
             <a:extLst xmlns:a="http://schemas.openxmlformats.org/drawingml/2006/main">
               <a:ext uri="{FF2B5EF4-FFF2-40B4-BE49-F238E27FC236}">
-                <a16:creationId xmlns:a16="http://schemas.microsoft.com/office/drawing/2014/main" id="{960FE1D7-4D75-4370-A829-DE9D0B3F1C2F}"/>
+                <a16:creationId xmlns:a16="http://schemas.microsoft.com/office/drawing/2014/main" id="{483A3DF5-D15F-4FD7-A3ED-637359E09182}"/>
               </a:ext>
             </a:extLst>
           </p:cNvPr>
@@ -22400,12 +22237,19 @@
           <a:solidFill xmlns:a="http://schemas.openxmlformats.org/drawingml/2006/main">
             <a:srgbClr val="F0F4FF"/>
           </a:solidFill>
-          <a:ln xmlns:a="http://schemas.openxmlformats.org/drawingml/2006/main" w="17145">
+          <a:ln xmlns:a="http://schemas.openxmlformats.org/drawingml/2006/main" w="20955">
             <a:solidFill>
               <a:srgbClr val="D9E3EF"/>
             </a:solidFill>
             <a:prstDash val="solid"/>
           </a:ln>
+          <ns4:effectLst xmlns:ns4="http://schemas.openxmlformats.org/drawingml/2006/main">
+            <ns4:outerShdw blurRad="57150" dist="38100" dir="5400000" algn="ctr" rotWithShape="0">
+              <ns4:srgbClr val="182536">
+                <ns4:alpha val="10000"/>
+              </ns4:srgbClr>
+            </ns4:outerShdw>
+          </ns4:effectLst>
         </p:spPr>
       </p:sp>
       <p:sp>
@@ -22413,7 +22257,7 @@
           <p:cNvPr id="63" name="dim_f157">
             <a:extLst xmlns:a="http://schemas.openxmlformats.org/drawingml/2006/main">
               <a:ext uri="{FF2B5EF4-FFF2-40B4-BE49-F238E27FC236}">
-                <a16:creationId xmlns:a16="http://schemas.microsoft.com/office/drawing/2014/main" id="{4F7EE53B-1E04-45F6-BED5-E7FB30F3887A}"/>
+                <a16:creationId xmlns:a16="http://schemas.microsoft.com/office/drawing/2014/main" id="{0C68D93F-1CB2-4C4D-9004-76F2870941C7}"/>
               </a:ext>
             </a:extLst>
           </p:cNvPr>
@@ -22572,7 +22416,7 @@
           <p:cNvPr id="14" name="f157">
             <a:extLst xmlns:a="http://schemas.openxmlformats.org/drawingml/2006/main">
               <a:ext uri="{FF2B5EF4-FFF2-40B4-BE49-F238E27FC236}">
-                <a16:creationId xmlns:a16="http://schemas.microsoft.com/office/drawing/2014/main" id="{4F7EE53B-1E04-45F6-BED5-E7FB30F3887A}"/>
+                <a16:creationId xmlns:a16="http://schemas.microsoft.com/office/drawing/2014/main" id="{0C68D93F-1CB2-4C4D-9004-76F2870941C7}"/>
               </a:ext>
             </a:extLst>
           </p:cNvPr>
@@ -22731,7 +22575,7 @@
           <p:cNvPr id="64" name="dim_f158">
             <a:extLst xmlns:a="http://schemas.openxmlformats.org/drawingml/2006/main">
               <a:ext uri="{FF2B5EF4-FFF2-40B4-BE49-F238E27FC236}">
-                <a16:creationId xmlns:a16="http://schemas.microsoft.com/office/drawing/2014/main" id="{504AC6BB-360E-431E-9579-F94F97522DE1}"/>
+                <a16:creationId xmlns:a16="http://schemas.microsoft.com/office/drawing/2014/main" id="{3788064E-0621-47C8-A4F9-51417F3CDB47}"/>
               </a:ext>
             </a:extLst>
           </p:cNvPr>
@@ -22766,7 +22610,7 @@
           <p:cNvPr id="15" name="f158">
             <a:extLst xmlns:a="http://schemas.openxmlformats.org/drawingml/2006/main">
               <a:ext uri="{FF2B5EF4-FFF2-40B4-BE49-F238E27FC236}">
-                <a16:creationId xmlns:a16="http://schemas.microsoft.com/office/drawing/2014/main" id="{504AC6BB-360E-431E-9579-F94F97522DE1}"/>
+                <a16:creationId xmlns:a16="http://schemas.microsoft.com/office/drawing/2014/main" id="{3788064E-0621-47C8-A4F9-51417F3CDB47}"/>
               </a:ext>
             </a:extLst>
           </p:cNvPr>
@@ -22788,12 +22632,19 @@
           <a:solidFill xmlns:a="http://schemas.openxmlformats.org/drawingml/2006/main">
             <a:srgbClr val="FFF7E9"/>
           </a:solidFill>
-          <a:ln xmlns:a="http://schemas.openxmlformats.org/drawingml/2006/main" w="17145">
+          <a:ln xmlns:a="http://schemas.openxmlformats.org/drawingml/2006/main" w="20955">
             <a:solidFill>
               <a:srgbClr val="ECD5AD"/>
             </a:solidFill>
             <a:prstDash val="solid"/>
           </a:ln>
+          <ns5:effectLst xmlns:ns5="http://schemas.openxmlformats.org/drawingml/2006/main">
+            <ns5:outerShdw blurRad="57150" dist="38100" dir="5400000" algn="ctr" rotWithShape="0">
+              <ns5:srgbClr val="182536">
+                <ns5:alpha val="10000"/>
+              </ns5:srgbClr>
+            </ns5:outerShdw>
+          </ns5:effectLst>
         </p:spPr>
       </p:sp>
       <p:sp>
@@ -22801,7 +22652,7 @@
           <p:cNvPr id="65" name="dim_f159">
             <a:extLst xmlns:a="http://schemas.openxmlformats.org/drawingml/2006/main">
               <a:ext uri="{FF2B5EF4-FFF2-40B4-BE49-F238E27FC236}">
-                <a16:creationId xmlns:a16="http://schemas.microsoft.com/office/drawing/2014/main" id="{6468F176-8897-46EF-BD73-4652FD7F5C39}"/>
+                <a16:creationId xmlns:a16="http://schemas.microsoft.com/office/drawing/2014/main" id="{F338787D-A4D4-494A-AC05-6AF2D907E969}"/>
               </a:ext>
             </a:extLst>
           </p:cNvPr>
@@ -22983,7 +22834,7 @@
           <p:cNvPr id="16" name="f159">
             <a:extLst xmlns:a="http://schemas.openxmlformats.org/drawingml/2006/main">
               <a:ext uri="{FF2B5EF4-FFF2-40B4-BE49-F238E27FC236}">
-                <a16:creationId xmlns:a16="http://schemas.microsoft.com/office/drawing/2014/main" id="{6468F176-8897-46EF-BD73-4652FD7F5C39}"/>
+                <a16:creationId xmlns:a16="http://schemas.microsoft.com/office/drawing/2014/main" id="{F338787D-A4D4-494A-AC05-6AF2D907E969}"/>
               </a:ext>
             </a:extLst>
           </p:cNvPr>
@@ -23165,7 +23016,7 @@
           <p:cNvPr id="66" name="dim_f160">
             <a:extLst xmlns:a="http://schemas.openxmlformats.org/drawingml/2006/main">
               <a:ext uri="{FF2B5EF4-FFF2-40B4-BE49-F238E27FC236}">
-                <a16:creationId xmlns:a16="http://schemas.microsoft.com/office/drawing/2014/main" id="{2BD80425-EBEB-4548-9CF7-56A9786A4E46}"/>
+                <a16:creationId xmlns:a16="http://schemas.microsoft.com/office/drawing/2014/main" id="{18B439E4-F392-4E70-8F81-D07C0E7E418E}"/>
               </a:ext>
             </a:extLst>
           </p:cNvPr>
@@ -23200,7 +23051,7 @@
           <p:cNvPr id="17" name="f160">
             <a:extLst xmlns:a="http://schemas.openxmlformats.org/drawingml/2006/main">
               <a:ext uri="{FF2B5EF4-FFF2-40B4-BE49-F238E27FC236}">
-                <a16:creationId xmlns:a16="http://schemas.microsoft.com/office/drawing/2014/main" id="{2BD80425-EBEB-4548-9CF7-56A9786A4E46}"/>
+                <a16:creationId xmlns:a16="http://schemas.microsoft.com/office/drawing/2014/main" id="{18B439E4-F392-4E70-8F81-D07C0E7E418E}"/>
               </a:ext>
             </a:extLst>
           </p:cNvPr>
@@ -23222,12 +23073,19 @@
           <a:solidFill xmlns:a="http://schemas.openxmlformats.org/drawingml/2006/main">
             <a:srgbClr val="FFFFFF"/>
           </a:solidFill>
-          <a:ln xmlns:a="http://schemas.openxmlformats.org/drawingml/2006/main" w="17145">
+          <a:ln xmlns:a="http://schemas.openxmlformats.org/drawingml/2006/main" w="20955">
             <a:solidFill>
               <a:srgbClr val="D9E3EF"/>
             </a:solidFill>
             <a:prstDash val="solid"/>
           </a:ln>
+          <ns6:effectLst xmlns:ns6="http://schemas.openxmlformats.org/drawingml/2006/main">
+            <ns6:outerShdw blurRad="57150" dist="38100" dir="5400000" algn="ctr" rotWithShape="0">
+              <ns6:srgbClr val="182536">
+                <ns6:alpha val="10000"/>
+              </ns6:srgbClr>
+            </ns6:outerShdw>
+          </ns6:effectLst>
         </p:spPr>
       </p:sp>
       <p:sp>
@@ -23235,7 +23093,7 @@
           <p:cNvPr id="67" name="dim_f161">
             <a:extLst xmlns:a="http://schemas.openxmlformats.org/drawingml/2006/main">
               <a:ext uri="{FF2B5EF4-FFF2-40B4-BE49-F238E27FC236}">
-                <a16:creationId xmlns:a16="http://schemas.microsoft.com/office/drawing/2014/main" id="{8FA727AD-D593-4355-AA5E-634E6BFE9FCC}"/>
+                <a16:creationId xmlns:a16="http://schemas.microsoft.com/office/drawing/2014/main" id="{6C8915AE-5A18-439A-8AE5-C1F043E9FE0D}"/>
               </a:ext>
             </a:extLst>
           </p:cNvPr>
@@ -23394,7 +23252,7 @@
           <p:cNvPr id="18" name="f161">
             <a:extLst xmlns:a="http://schemas.openxmlformats.org/drawingml/2006/main">
               <a:ext uri="{FF2B5EF4-FFF2-40B4-BE49-F238E27FC236}">
-                <a16:creationId xmlns:a16="http://schemas.microsoft.com/office/drawing/2014/main" id="{8FA727AD-D593-4355-AA5E-634E6BFE9FCC}"/>
+                <a16:creationId xmlns:a16="http://schemas.microsoft.com/office/drawing/2014/main" id="{6C8915AE-5A18-439A-8AE5-C1F043E9FE0D}"/>
               </a:ext>
             </a:extLst>
           </p:cNvPr>
@@ -23553,7 +23411,7 @@
           <p:cNvPr id="68" name="dim_f162">
             <a:extLst xmlns:a="http://schemas.openxmlformats.org/drawingml/2006/main">
               <a:ext uri="{FF2B5EF4-FFF2-40B4-BE49-F238E27FC236}">
-                <a16:creationId xmlns:a16="http://schemas.microsoft.com/office/drawing/2014/main" id="{A7C121FD-4A6E-48DA-B177-AE62C8DACB8C}"/>
+                <a16:creationId xmlns:a16="http://schemas.microsoft.com/office/drawing/2014/main" id="{5A3CA7E9-6F29-4349-8EAE-963E63818A42}"/>
               </a:ext>
             </a:extLst>
           </p:cNvPr>
@@ -23584,7 +23442,7 @@
           <p:cNvPr id="19" name="f162">
             <a:extLst xmlns:a="http://schemas.openxmlformats.org/drawingml/2006/main">
               <a:ext uri="{FF2B5EF4-FFF2-40B4-BE49-F238E27FC236}">
-                <a16:creationId xmlns:a16="http://schemas.microsoft.com/office/drawing/2014/main" id="{A7C121FD-4A6E-48DA-B177-AE62C8DACB8C}"/>
+                <a16:creationId xmlns:a16="http://schemas.microsoft.com/office/drawing/2014/main" id="{5A3CA7E9-6F29-4349-8EAE-963E63818A42}"/>
               </a:ext>
             </a:extLst>
           </p:cNvPr>
@@ -23615,7 +23473,7 @@
           <p:cNvPr id="69" name="phaseC_f162">
             <a:extLst xmlns:a="http://schemas.openxmlformats.org/drawingml/2006/main">
               <a:ext uri="{FF2B5EF4-FFF2-40B4-BE49-F238E27FC236}">
-                <a16:creationId xmlns:a16="http://schemas.microsoft.com/office/drawing/2014/main" id="{A7C121FD-4A6E-48DA-B177-AE62C8DACB8C}"/>
+                <a16:creationId xmlns:a16="http://schemas.microsoft.com/office/drawing/2014/main" id="{5A3CA7E9-6F29-4349-8EAE-963E63818A42}"/>
               </a:ext>
             </a:extLst>
           </p:cNvPr>
@@ -23646,7 +23504,7 @@
           <p:cNvPr id="70" name="dim_f163">
             <a:extLst xmlns:a="http://schemas.openxmlformats.org/drawingml/2006/main">
               <a:ext uri="{FF2B5EF4-FFF2-40B4-BE49-F238E27FC236}">
-                <a16:creationId xmlns:a16="http://schemas.microsoft.com/office/drawing/2014/main" id="{0CAAE774-6A55-4C91-A060-B270313A3BB0}"/>
+                <a16:creationId xmlns:a16="http://schemas.microsoft.com/office/drawing/2014/main" id="{73153D25-025B-45FB-A577-0E8B888545E9}"/>
               </a:ext>
             </a:extLst>
           </p:cNvPr>
@@ -23677,7 +23535,7 @@
           <p:cNvPr id="20" name="f163">
             <a:extLst xmlns:a="http://schemas.openxmlformats.org/drawingml/2006/main">
               <a:ext uri="{FF2B5EF4-FFF2-40B4-BE49-F238E27FC236}">
-                <a16:creationId xmlns:a16="http://schemas.microsoft.com/office/drawing/2014/main" id="{0CAAE774-6A55-4C91-A060-B270313A3BB0}"/>
+                <a16:creationId xmlns:a16="http://schemas.microsoft.com/office/drawing/2014/main" id="{73153D25-025B-45FB-A577-0E8B888545E9}"/>
               </a:ext>
             </a:extLst>
           </p:cNvPr>
@@ -23708,7 +23566,7 @@
           <p:cNvPr id="71" name="phaseC_f163">
             <a:extLst xmlns:a="http://schemas.openxmlformats.org/drawingml/2006/main">
               <a:ext uri="{FF2B5EF4-FFF2-40B4-BE49-F238E27FC236}">
-                <a16:creationId xmlns:a16="http://schemas.microsoft.com/office/drawing/2014/main" id="{0CAAE774-6A55-4C91-A060-B270313A3BB0}"/>
+                <a16:creationId xmlns:a16="http://schemas.microsoft.com/office/drawing/2014/main" id="{73153D25-025B-45FB-A577-0E8B888545E9}"/>
               </a:ext>
             </a:extLst>
           </p:cNvPr>
@@ -23739,7 +23597,7 @@
           <p:cNvPr id="72" name="dim_f164">
             <a:extLst xmlns:a="http://schemas.openxmlformats.org/drawingml/2006/main">
               <a:ext uri="{FF2B5EF4-FFF2-40B4-BE49-F238E27FC236}">
-                <a16:creationId xmlns:a16="http://schemas.microsoft.com/office/drawing/2014/main" id="{041D1625-208D-4735-9C37-D7A6F89D5F8E}"/>
+                <a16:creationId xmlns:a16="http://schemas.microsoft.com/office/drawing/2014/main" id="{BC771DFA-E54B-4108-999C-0FE1C3A7C8E4}"/>
               </a:ext>
             </a:extLst>
           </p:cNvPr>
@@ -23770,7 +23628,7 @@
           <p:cNvPr id="21" name="f164">
             <a:extLst xmlns:a="http://schemas.openxmlformats.org/drawingml/2006/main">
               <a:ext uri="{FF2B5EF4-FFF2-40B4-BE49-F238E27FC236}">
-                <a16:creationId xmlns:a16="http://schemas.microsoft.com/office/drawing/2014/main" id="{041D1625-208D-4735-9C37-D7A6F89D5F8E}"/>
+                <a16:creationId xmlns:a16="http://schemas.microsoft.com/office/drawing/2014/main" id="{BC771DFA-E54B-4108-999C-0FE1C3A7C8E4}"/>
               </a:ext>
             </a:extLst>
           </p:cNvPr>
@@ -23801,7 +23659,7 @@
           <p:cNvPr id="73" name="dim_f165">
             <a:extLst xmlns:a="http://schemas.openxmlformats.org/drawingml/2006/main">
               <a:ext uri="{FF2B5EF4-FFF2-40B4-BE49-F238E27FC236}">
-                <a16:creationId xmlns:a16="http://schemas.microsoft.com/office/drawing/2014/main" id="{B90C2CBD-E2A6-4979-8D0C-D7BA57530A8E}"/>
+                <a16:creationId xmlns:a16="http://schemas.microsoft.com/office/drawing/2014/main" id="{28E57B43-2982-4C41-AFBD-FD12FA1C8757}"/>
               </a:ext>
             </a:extLst>
           </p:cNvPr>
@@ -23832,7 +23690,7 @@
           <p:cNvPr id="22" name="f165">
             <a:extLst xmlns:a="http://schemas.openxmlformats.org/drawingml/2006/main">
               <a:ext uri="{FF2B5EF4-FFF2-40B4-BE49-F238E27FC236}">
-                <a16:creationId xmlns:a16="http://schemas.microsoft.com/office/drawing/2014/main" id="{B90C2CBD-E2A6-4979-8D0C-D7BA57530A8E}"/>
+                <a16:creationId xmlns:a16="http://schemas.microsoft.com/office/drawing/2014/main" id="{28E57B43-2982-4C41-AFBD-FD12FA1C8757}"/>
               </a:ext>
             </a:extLst>
           </p:cNvPr>
@@ -23863,7 +23721,7 @@
           <p:cNvPr id="74" name="dim_f166">
             <a:extLst xmlns:a="http://schemas.openxmlformats.org/drawingml/2006/main">
               <a:ext uri="{FF2B5EF4-FFF2-40B4-BE49-F238E27FC236}">
-                <a16:creationId xmlns:a16="http://schemas.microsoft.com/office/drawing/2014/main" id="{3D68551F-8EEA-470A-A10C-4201A1CF77DA}"/>
+                <a16:creationId xmlns:a16="http://schemas.microsoft.com/office/drawing/2014/main" id="{085DC25B-1477-4F97-9E57-C2326CC3100D}"/>
               </a:ext>
             </a:extLst>
           </p:cNvPr>
@@ -23894,7 +23752,7 @@
           <p:cNvPr id="23" name="f166">
             <a:extLst xmlns:a="http://schemas.openxmlformats.org/drawingml/2006/main">
               <a:ext uri="{FF2B5EF4-FFF2-40B4-BE49-F238E27FC236}">
-                <a16:creationId xmlns:a16="http://schemas.microsoft.com/office/drawing/2014/main" id="{3D68551F-8EEA-470A-A10C-4201A1CF77DA}"/>
+                <a16:creationId xmlns:a16="http://schemas.microsoft.com/office/drawing/2014/main" id="{085DC25B-1477-4F97-9E57-C2326CC3100D}"/>
               </a:ext>
             </a:extLst>
           </p:cNvPr>
@@ -23925,7 +23783,7 @@
           <p:cNvPr id="75" name="phaseC_f166">
             <a:extLst xmlns:a="http://schemas.openxmlformats.org/drawingml/2006/main">
               <a:ext uri="{FF2B5EF4-FFF2-40B4-BE49-F238E27FC236}">
-                <a16:creationId xmlns:a16="http://schemas.microsoft.com/office/drawing/2014/main" id="{3D68551F-8EEA-470A-A10C-4201A1CF77DA}"/>
+                <a16:creationId xmlns:a16="http://schemas.microsoft.com/office/drawing/2014/main" id="{085DC25B-1477-4F97-9E57-C2326CC3100D}"/>
               </a:ext>
             </a:extLst>
           </p:cNvPr>
@@ -23956,7 +23814,7 @@
           <p:cNvPr id="76" name="dim_f167">
             <a:extLst xmlns:a="http://schemas.openxmlformats.org/drawingml/2006/main">
               <a:ext uri="{FF2B5EF4-FFF2-40B4-BE49-F238E27FC236}">
-                <a16:creationId xmlns:a16="http://schemas.microsoft.com/office/drawing/2014/main" id="{5B16B8D8-F141-44C3-8BE2-1D422BD4ED3C}"/>
+                <a16:creationId xmlns:a16="http://schemas.microsoft.com/office/drawing/2014/main" id="{5FF97A97-77E0-469B-9083-DA21F13C1586}"/>
               </a:ext>
             </a:extLst>
           </p:cNvPr>
@@ -23987,7 +23845,7 @@
           <p:cNvPr id="24" name="f167">
             <a:extLst xmlns:a="http://schemas.openxmlformats.org/drawingml/2006/main">
               <a:ext uri="{FF2B5EF4-FFF2-40B4-BE49-F238E27FC236}">
-                <a16:creationId xmlns:a16="http://schemas.microsoft.com/office/drawing/2014/main" id="{5B16B8D8-F141-44C3-8BE2-1D422BD4ED3C}"/>
+                <a16:creationId xmlns:a16="http://schemas.microsoft.com/office/drawing/2014/main" id="{5FF97A97-77E0-469B-9083-DA21F13C1586}"/>
               </a:ext>
             </a:extLst>
           </p:cNvPr>
@@ -24018,7 +23876,7 @@
           <p:cNvPr id="77" name="dim_f168">
             <a:extLst xmlns:a="http://schemas.openxmlformats.org/drawingml/2006/main">
               <a:ext uri="{FF2B5EF4-FFF2-40B4-BE49-F238E27FC236}">
-                <a16:creationId xmlns:a16="http://schemas.microsoft.com/office/drawing/2014/main" id="{B38E4ACB-55C6-4827-9CF1-CDF68D1363F4}"/>
+                <a16:creationId xmlns:a16="http://schemas.microsoft.com/office/drawing/2014/main" id="{689327B9-05D7-4FCB-BEA2-84FC4FABE238}"/>
               </a:ext>
             </a:extLst>
           </p:cNvPr>
@@ -24049,7 +23907,7 @@
           <p:cNvPr id="25" name="f168">
             <a:extLst xmlns:a="http://schemas.openxmlformats.org/drawingml/2006/main">
               <a:ext uri="{FF2B5EF4-FFF2-40B4-BE49-F238E27FC236}">
-                <a16:creationId xmlns:a16="http://schemas.microsoft.com/office/drawing/2014/main" id="{B38E4ACB-55C6-4827-9CF1-CDF68D1363F4}"/>
+                <a16:creationId xmlns:a16="http://schemas.microsoft.com/office/drawing/2014/main" id="{689327B9-05D7-4FCB-BEA2-84FC4FABE238}"/>
               </a:ext>
             </a:extLst>
           </p:cNvPr>
@@ -24080,7 +23938,7 @@
           <p:cNvPr id="78" name="dim_f169">
             <a:extLst xmlns:a="http://schemas.openxmlformats.org/drawingml/2006/main">
               <a:ext uri="{FF2B5EF4-FFF2-40B4-BE49-F238E27FC236}">
-                <a16:creationId xmlns:a16="http://schemas.microsoft.com/office/drawing/2014/main" id="{1FE75A4F-942A-4A63-8FE6-6B0FA51D8B10}"/>
+                <a16:creationId xmlns:a16="http://schemas.microsoft.com/office/drawing/2014/main" id="{13C6AB67-78A6-40A1-A828-1E83AFFECB11}"/>
               </a:ext>
             </a:extLst>
           </p:cNvPr>
@@ -24111,7 +23969,7 @@
           <p:cNvPr id="26" name="f169">
             <a:extLst xmlns:a="http://schemas.openxmlformats.org/drawingml/2006/main">
               <a:ext uri="{FF2B5EF4-FFF2-40B4-BE49-F238E27FC236}">
-                <a16:creationId xmlns:a16="http://schemas.microsoft.com/office/drawing/2014/main" id="{1FE75A4F-942A-4A63-8FE6-6B0FA51D8B10}"/>
+                <a16:creationId xmlns:a16="http://schemas.microsoft.com/office/drawing/2014/main" id="{13C6AB67-78A6-40A1-A828-1E83AFFECB11}"/>
               </a:ext>
             </a:extLst>
           </p:cNvPr>
@@ -24142,7 +24000,7 @@
           <p:cNvPr id="79" name="dim_f170">
             <a:extLst xmlns:a="http://schemas.openxmlformats.org/drawingml/2006/main">
               <a:ext uri="{FF2B5EF4-FFF2-40B4-BE49-F238E27FC236}">
-                <a16:creationId xmlns:a16="http://schemas.microsoft.com/office/drawing/2014/main" id="{1D878B2E-6E34-4D1F-8B5C-1C9485B3E551}"/>
+                <a16:creationId xmlns:a16="http://schemas.microsoft.com/office/drawing/2014/main" id="{71F98747-0474-47FA-8086-51D8F3CE3F32}"/>
               </a:ext>
             </a:extLst>
           </p:cNvPr>
@@ -24173,7 +24031,7 @@
           <p:cNvPr id="27" name="f170">
             <a:extLst xmlns:a="http://schemas.openxmlformats.org/drawingml/2006/main">
               <a:ext uri="{FF2B5EF4-FFF2-40B4-BE49-F238E27FC236}">
-                <a16:creationId xmlns:a16="http://schemas.microsoft.com/office/drawing/2014/main" id="{1D878B2E-6E34-4D1F-8B5C-1C9485B3E551}"/>
+                <a16:creationId xmlns:a16="http://schemas.microsoft.com/office/drawing/2014/main" id="{71F98747-0474-47FA-8086-51D8F3CE3F32}"/>
               </a:ext>
             </a:extLst>
           </p:cNvPr>
@@ -24204,7 +24062,7 @@
           <p:cNvPr id="80" name="dim_f171">
             <a:extLst xmlns:a="http://schemas.openxmlformats.org/drawingml/2006/main">
               <a:ext uri="{FF2B5EF4-FFF2-40B4-BE49-F238E27FC236}">
-                <a16:creationId xmlns:a16="http://schemas.microsoft.com/office/drawing/2014/main" id="{2CD363E8-42C9-45A5-A394-44C541C99A0F}"/>
+                <a16:creationId xmlns:a16="http://schemas.microsoft.com/office/drawing/2014/main" id="{DFC60DF5-892E-4C97-90BB-0DE2742B7925}"/>
               </a:ext>
             </a:extLst>
           </p:cNvPr>
@@ -24235,7 +24093,7 @@
           <p:cNvPr id="28" name="f171">
             <a:extLst xmlns:a="http://schemas.openxmlformats.org/drawingml/2006/main">
               <a:ext uri="{FF2B5EF4-FFF2-40B4-BE49-F238E27FC236}">
-                <a16:creationId xmlns:a16="http://schemas.microsoft.com/office/drawing/2014/main" id="{2CD363E8-42C9-45A5-A394-44C541C99A0F}"/>
+                <a16:creationId xmlns:a16="http://schemas.microsoft.com/office/drawing/2014/main" id="{DFC60DF5-892E-4C97-90BB-0DE2742B7925}"/>
               </a:ext>
             </a:extLst>
           </p:cNvPr>
@@ -24266,7 +24124,7 @@
           <p:cNvPr id="81" name="dim_f172">
             <a:extLst xmlns:a="http://schemas.openxmlformats.org/drawingml/2006/main">
               <a:ext uri="{FF2B5EF4-FFF2-40B4-BE49-F238E27FC236}">
-                <a16:creationId xmlns:a16="http://schemas.microsoft.com/office/drawing/2014/main" id="{0DBB869A-7999-4A8F-8B12-8AFDFA80E5D6}"/>
+                <a16:creationId xmlns:a16="http://schemas.microsoft.com/office/drawing/2014/main" id="{6CC3148C-7AF0-4649-BBAF-2F449C0E6141}"/>
               </a:ext>
             </a:extLst>
           </p:cNvPr>
@@ -24297,7 +24155,7 @@
           <p:cNvPr id="29" name="f172">
             <a:extLst xmlns:a="http://schemas.openxmlformats.org/drawingml/2006/main">
               <a:ext uri="{FF2B5EF4-FFF2-40B4-BE49-F238E27FC236}">
-                <a16:creationId xmlns:a16="http://schemas.microsoft.com/office/drawing/2014/main" id="{0DBB869A-7999-4A8F-8B12-8AFDFA80E5D6}"/>
+                <a16:creationId xmlns:a16="http://schemas.microsoft.com/office/drawing/2014/main" id="{6CC3148C-7AF0-4649-BBAF-2F449C0E6141}"/>
               </a:ext>
             </a:extLst>
           </p:cNvPr>
@@ -24328,7 +24186,7 @@
           <p:cNvPr id="82" name="dim_f173">
             <a:extLst xmlns:a="http://schemas.openxmlformats.org/drawingml/2006/main">
               <a:ext uri="{FF2B5EF4-FFF2-40B4-BE49-F238E27FC236}">
-                <a16:creationId xmlns:a16="http://schemas.microsoft.com/office/drawing/2014/main" id="{2A719C4B-8F82-4F08-BD8E-0B313E9E2D29}"/>
+                <a16:creationId xmlns:a16="http://schemas.microsoft.com/office/drawing/2014/main" id="{1F94A9E1-8ACD-4E1E-AB63-0B9073C65A02}"/>
               </a:ext>
             </a:extLst>
           </p:cNvPr>
@@ -24359,7 +24217,7 @@
           <p:cNvPr id="30" name="f173">
             <a:extLst xmlns:a="http://schemas.openxmlformats.org/drawingml/2006/main">
               <a:ext uri="{FF2B5EF4-FFF2-40B4-BE49-F238E27FC236}">
-                <a16:creationId xmlns:a16="http://schemas.microsoft.com/office/drawing/2014/main" id="{2A719C4B-8F82-4F08-BD8E-0B313E9E2D29}"/>
+                <a16:creationId xmlns:a16="http://schemas.microsoft.com/office/drawing/2014/main" id="{1F94A9E1-8ACD-4E1E-AB63-0B9073C65A02}"/>
               </a:ext>
             </a:extLst>
           </p:cNvPr>
@@ -24390,7 +24248,7 @@
           <p:cNvPr id="83" name="dim_f174">
             <a:extLst xmlns:a="http://schemas.openxmlformats.org/drawingml/2006/main">
               <a:ext uri="{FF2B5EF4-FFF2-40B4-BE49-F238E27FC236}">
-                <a16:creationId xmlns:a16="http://schemas.microsoft.com/office/drawing/2014/main" id="{31B1CC4F-60E2-42D1-93F2-ED3B1EB22012}"/>
+                <a16:creationId xmlns:a16="http://schemas.microsoft.com/office/drawing/2014/main" id="{F086FB46-476F-424C-865A-FEE3640BB69C}"/>
               </a:ext>
             </a:extLst>
           </p:cNvPr>
@@ -24421,7 +24279,7 @@
           <p:cNvPr id="31" name="f174">
             <a:extLst xmlns:a="http://schemas.openxmlformats.org/drawingml/2006/main">
               <a:ext uri="{FF2B5EF4-FFF2-40B4-BE49-F238E27FC236}">
-                <a16:creationId xmlns:a16="http://schemas.microsoft.com/office/drawing/2014/main" id="{31B1CC4F-60E2-42D1-93F2-ED3B1EB22012}"/>
+                <a16:creationId xmlns:a16="http://schemas.microsoft.com/office/drawing/2014/main" id="{F086FB46-476F-424C-865A-FEE3640BB69C}"/>
               </a:ext>
             </a:extLst>
           </p:cNvPr>
@@ -24452,7 +24310,7 @@
           <p:cNvPr id="84" name="dim_f175">
             <a:extLst xmlns:a="http://schemas.openxmlformats.org/drawingml/2006/main">
               <a:ext uri="{FF2B5EF4-FFF2-40B4-BE49-F238E27FC236}">
-                <a16:creationId xmlns:a16="http://schemas.microsoft.com/office/drawing/2014/main" id="{B192F68E-1246-42BF-92B7-E258D893B672}"/>
+                <a16:creationId xmlns:a16="http://schemas.microsoft.com/office/drawing/2014/main" id="{E657DBB7-0E07-4C82-B1BE-DA9895AEA06C}"/>
               </a:ext>
             </a:extLst>
           </p:cNvPr>
@@ -24483,7 +24341,7 @@
           <p:cNvPr id="32" name="f175">
             <a:extLst xmlns:a="http://schemas.openxmlformats.org/drawingml/2006/main">
               <a:ext uri="{FF2B5EF4-FFF2-40B4-BE49-F238E27FC236}">
-                <a16:creationId xmlns:a16="http://schemas.microsoft.com/office/drawing/2014/main" id="{B192F68E-1246-42BF-92B7-E258D893B672}"/>
+                <a16:creationId xmlns:a16="http://schemas.microsoft.com/office/drawing/2014/main" id="{E657DBB7-0E07-4C82-B1BE-DA9895AEA06C}"/>
               </a:ext>
             </a:extLst>
           </p:cNvPr>
@@ -24514,7 +24372,7 @@
           <p:cNvPr id="85" name="dim_f176">
             <a:extLst xmlns:a="http://schemas.openxmlformats.org/drawingml/2006/main">
               <a:ext uri="{FF2B5EF4-FFF2-40B4-BE49-F238E27FC236}">
-                <a16:creationId xmlns:a16="http://schemas.microsoft.com/office/drawing/2014/main" id="{9EF6BD25-F462-4669-A631-8CD87FF7D03D}"/>
+                <a16:creationId xmlns:a16="http://schemas.microsoft.com/office/drawing/2014/main" id="{1674C8AA-8714-4825-8D13-1BFD7D7AA969}"/>
               </a:ext>
             </a:extLst>
           </p:cNvPr>
@@ -24545,7 +24403,7 @@
           <p:cNvPr id="33" name="f176">
             <a:extLst xmlns:a="http://schemas.openxmlformats.org/drawingml/2006/main">
               <a:ext uri="{FF2B5EF4-FFF2-40B4-BE49-F238E27FC236}">
-                <a16:creationId xmlns:a16="http://schemas.microsoft.com/office/drawing/2014/main" id="{9EF6BD25-F462-4669-A631-8CD87FF7D03D}"/>
+                <a16:creationId xmlns:a16="http://schemas.microsoft.com/office/drawing/2014/main" id="{1674C8AA-8714-4825-8D13-1BFD7D7AA969}"/>
               </a:ext>
             </a:extLst>
           </p:cNvPr>
@@ -24576,7 +24434,7 @@
           <p:cNvPr id="86" name="dim_f177">
             <a:extLst xmlns:a="http://schemas.openxmlformats.org/drawingml/2006/main">
               <a:ext uri="{FF2B5EF4-FFF2-40B4-BE49-F238E27FC236}">
-                <a16:creationId xmlns:a16="http://schemas.microsoft.com/office/drawing/2014/main" id="{D89337D6-2A02-431A-BCF1-22DBAC12E387}"/>
+                <a16:creationId xmlns:a16="http://schemas.microsoft.com/office/drawing/2014/main" id="{E96B493D-1AB8-425B-9398-008013999E6E}"/>
               </a:ext>
             </a:extLst>
           </p:cNvPr>
@@ -24735,7 +24593,7 @@
           <p:cNvPr id="34" name="f177">
             <a:extLst xmlns:a="http://schemas.openxmlformats.org/drawingml/2006/main">
               <a:ext uri="{FF2B5EF4-FFF2-40B4-BE49-F238E27FC236}">
-                <a16:creationId xmlns:a16="http://schemas.microsoft.com/office/drawing/2014/main" id="{D89337D6-2A02-431A-BCF1-22DBAC12E387}"/>
+                <a16:creationId xmlns:a16="http://schemas.microsoft.com/office/drawing/2014/main" id="{E96B493D-1AB8-425B-9398-008013999E6E}"/>
               </a:ext>
             </a:extLst>
           </p:cNvPr>
@@ -24894,7 +24752,7 @@
           <p:cNvPr id="87" name="dim_f178">
             <a:extLst xmlns:a="http://schemas.openxmlformats.org/drawingml/2006/main">
               <a:ext uri="{FF2B5EF4-FFF2-40B4-BE49-F238E27FC236}">
-                <a16:creationId xmlns:a16="http://schemas.microsoft.com/office/drawing/2014/main" id="{3B661E07-6C56-4A93-BBB7-6C4E8F381DB2}"/>
+                <a16:creationId xmlns:a16="http://schemas.microsoft.com/office/drawing/2014/main" id="{D6AA45BA-A915-43F7-9278-1FF1F0091132}"/>
               </a:ext>
             </a:extLst>
           </p:cNvPr>
@@ -24925,7 +24783,7 @@
           <p:cNvPr id="35" name="f178">
             <a:extLst xmlns:a="http://schemas.openxmlformats.org/drawingml/2006/main">
               <a:ext uri="{FF2B5EF4-FFF2-40B4-BE49-F238E27FC236}">
-                <a16:creationId xmlns:a16="http://schemas.microsoft.com/office/drawing/2014/main" id="{3B661E07-6C56-4A93-BBB7-6C4E8F381DB2}"/>
+                <a16:creationId xmlns:a16="http://schemas.microsoft.com/office/drawing/2014/main" id="{D6AA45BA-A915-43F7-9278-1FF1F0091132}"/>
               </a:ext>
             </a:extLst>
           </p:cNvPr>
@@ -24956,7 +24814,7 @@
           <p:cNvPr id="88" name="dim_f179">
             <a:extLst xmlns:a="http://schemas.openxmlformats.org/drawingml/2006/main">
               <a:ext uri="{FF2B5EF4-FFF2-40B4-BE49-F238E27FC236}">
-                <a16:creationId xmlns:a16="http://schemas.microsoft.com/office/drawing/2014/main" id="{82C8195E-7D88-4636-8CB6-2EFEF8F8F0D0}"/>
+                <a16:creationId xmlns:a16="http://schemas.microsoft.com/office/drawing/2014/main" id="{187A2D89-B88C-45AB-99C0-24E13466B66F}"/>
               </a:ext>
             </a:extLst>
           </p:cNvPr>
@@ -24987,7 +24845,7 @@
           <p:cNvPr id="36" name="f179">
             <a:extLst xmlns:a="http://schemas.openxmlformats.org/drawingml/2006/main">
               <a:ext uri="{FF2B5EF4-FFF2-40B4-BE49-F238E27FC236}">
-                <a16:creationId xmlns:a16="http://schemas.microsoft.com/office/drawing/2014/main" id="{82C8195E-7D88-4636-8CB6-2EFEF8F8F0D0}"/>
+                <a16:creationId xmlns:a16="http://schemas.microsoft.com/office/drawing/2014/main" id="{187A2D89-B88C-45AB-99C0-24E13466B66F}"/>
               </a:ext>
             </a:extLst>
           </p:cNvPr>
@@ -25018,7 +24876,7 @@
           <p:cNvPr id="89" name="dim_f180">
             <a:extLst xmlns:a="http://schemas.openxmlformats.org/drawingml/2006/main">
               <a:ext uri="{FF2B5EF4-FFF2-40B4-BE49-F238E27FC236}">
-                <a16:creationId xmlns:a16="http://schemas.microsoft.com/office/drawing/2014/main" id="{47F88311-20D5-4C1C-B66C-1AE03AB83125}"/>
+                <a16:creationId xmlns:a16="http://schemas.microsoft.com/office/drawing/2014/main" id="{D8B15C1C-FFDB-49DE-A6AF-C8D95B720805}"/>
               </a:ext>
             </a:extLst>
           </p:cNvPr>
@@ -25049,7 +24907,7 @@
           <p:cNvPr id="37" name="f180">
             <a:extLst xmlns:a="http://schemas.openxmlformats.org/drawingml/2006/main">
               <a:ext uri="{FF2B5EF4-FFF2-40B4-BE49-F238E27FC236}">
-                <a16:creationId xmlns:a16="http://schemas.microsoft.com/office/drawing/2014/main" id="{47F88311-20D5-4C1C-B66C-1AE03AB83125}"/>
+                <a16:creationId xmlns:a16="http://schemas.microsoft.com/office/drawing/2014/main" id="{D8B15C1C-FFDB-49DE-A6AF-C8D95B720805}"/>
               </a:ext>
             </a:extLst>
           </p:cNvPr>
@@ -25080,7 +24938,7 @@
           <p:cNvPr id="90" name="dim_f181">
             <a:extLst xmlns:a="http://schemas.openxmlformats.org/drawingml/2006/main">
               <a:ext uri="{FF2B5EF4-FFF2-40B4-BE49-F238E27FC236}">
-                <a16:creationId xmlns:a16="http://schemas.microsoft.com/office/drawing/2014/main" id="{CDA596BB-DB51-4BF4-A0D0-8C37D93BC502}"/>
+                <a16:creationId xmlns:a16="http://schemas.microsoft.com/office/drawing/2014/main" id="{E67F4B52-FD79-4CB0-9681-CF61A545DA56}"/>
               </a:ext>
             </a:extLst>
           </p:cNvPr>
@@ -25111,7 +24969,7 @@
           <p:cNvPr id="38" name="f181">
             <a:extLst xmlns:a="http://schemas.openxmlformats.org/drawingml/2006/main">
               <a:ext uri="{FF2B5EF4-FFF2-40B4-BE49-F238E27FC236}">
-                <a16:creationId xmlns:a16="http://schemas.microsoft.com/office/drawing/2014/main" id="{CDA596BB-DB51-4BF4-A0D0-8C37D93BC502}"/>
+                <a16:creationId xmlns:a16="http://schemas.microsoft.com/office/drawing/2014/main" id="{E67F4B52-FD79-4CB0-9681-CF61A545DA56}"/>
               </a:ext>
             </a:extLst>
           </p:cNvPr>
@@ -25142,7 +25000,7 @@
           <p:cNvPr id="91" name="dim_f182">
             <a:extLst xmlns:a="http://schemas.openxmlformats.org/drawingml/2006/main">
               <a:ext uri="{FF2B5EF4-FFF2-40B4-BE49-F238E27FC236}">
-                <a16:creationId xmlns:a16="http://schemas.microsoft.com/office/drawing/2014/main" id="{A77D9290-0020-4231-9589-56554E540FC3}"/>
+                <a16:creationId xmlns:a16="http://schemas.microsoft.com/office/drawing/2014/main" id="{759989F0-EFD3-4463-9B2E-023F73D0057B}"/>
               </a:ext>
             </a:extLst>
           </p:cNvPr>
@@ -25173,7 +25031,7 @@
           <p:cNvPr id="39" name="f182">
             <a:extLst xmlns:a="http://schemas.openxmlformats.org/drawingml/2006/main">
               <a:ext uri="{FF2B5EF4-FFF2-40B4-BE49-F238E27FC236}">
-                <a16:creationId xmlns:a16="http://schemas.microsoft.com/office/drawing/2014/main" id="{A77D9290-0020-4231-9589-56554E540FC3}"/>
+                <a16:creationId xmlns:a16="http://schemas.microsoft.com/office/drawing/2014/main" id="{759989F0-EFD3-4463-9B2E-023F73D0057B}"/>
               </a:ext>
             </a:extLst>
           </p:cNvPr>
@@ -25204,7 +25062,7 @@
           <p:cNvPr id="92" name="dim_f183">
             <a:extLst xmlns:a="http://schemas.openxmlformats.org/drawingml/2006/main">
               <a:ext uri="{FF2B5EF4-FFF2-40B4-BE49-F238E27FC236}">
-                <a16:creationId xmlns:a16="http://schemas.microsoft.com/office/drawing/2014/main" id="{BA20F3D6-2581-4AD1-B548-AE1DC4368CF3}"/>
+                <a16:creationId xmlns:a16="http://schemas.microsoft.com/office/drawing/2014/main" id="{E63C763D-43EF-4733-882A-A627F84B1604}"/>
               </a:ext>
             </a:extLst>
           </p:cNvPr>
@@ -25235,7 +25093,7 @@
           <p:cNvPr id="40" name="f183">
             <a:extLst xmlns:a="http://schemas.openxmlformats.org/drawingml/2006/main">
               <a:ext uri="{FF2B5EF4-FFF2-40B4-BE49-F238E27FC236}">
-                <a16:creationId xmlns:a16="http://schemas.microsoft.com/office/drawing/2014/main" id="{BA20F3D6-2581-4AD1-B548-AE1DC4368CF3}"/>
+                <a16:creationId xmlns:a16="http://schemas.microsoft.com/office/drawing/2014/main" id="{E63C763D-43EF-4733-882A-A627F84B1604}"/>
               </a:ext>
             </a:extLst>
           </p:cNvPr>
@@ -25266,7 +25124,7 @@
           <p:cNvPr id="93" name="dim_f184">
             <a:extLst xmlns:a="http://schemas.openxmlformats.org/drawingml/2006/main">
               <a:ext uri="{FF2B5EF4-FFF2-40B4-BE49-F238E27FC236}">
-                <a16:creationId xmlns:a16="http://schemas.microsoft.com/office/drawing/2014/main" id="{D4985726-9C0B-467E-AB92-D8EA45206DE2}"/>
+                <a16:creationId xmlns:a16="http://schemas.microsoft.com/office/drawing/2014/main" id="{2418BC82-1F6F-43AC-8DA5-CA029F5D9B92}"/>
               </a:ext>
             </a:extLst>
           </p:cNvPr>
@@ -25297,7 +25155,7 @@
           <p:cNvPr id="41" name="f184">
             <a:extLst xmlns:a="http://schemas.openxmlformats.org/drawingml/2006/main">
               <a:ext uri="{FF2B5EF4-FFF2-40B4-BE49-F238E27FC236}">
-                <a16:creationId xmlns:a16="http://schemas.microsoft.com/office/drawing/2014/main" id="{D4985726-9C0B-467E-AB92-D8EA45206DE2}"/>
+                <a16:creationId xmlns:a16="http://schemas.microsoft.com/office/drawing/2014/main" id="{2418BC82-1F6F-43AC-8DA5-CA029F5D9B92}"/>
               </a:ext>
             </a:extLst>
           </p:cNvPr>
@@ -25328,7 +25186,7 @@
           <p:cNvPr id="94" name="dim_f185">
             <a:extLst xmlns:a="http://schemas.openxmlformats.org/drawingml/2006/main">
               <a:ext uri="{FF2B5EF4-FFF2-40B4-BE49-F238E27FC236}">
-                <a16:creationId xmlns:a16="http://schemas.microsoft.com/office/drawing/2014/main" id="{33C5751C-1092-4652-86EC-9172A5590746}"/>
+                <a16:creationId xmlns:a16="http://schemas.microsoft.com/office/drawing/2014/main" id="{4164A735-0E79-418B-BCC0-048ABFE025FA}"/>
               </a:ext>
             </a:extLst>
           </p:cNvPr>
@@ -25359,7 +25217,7 @@
           <p:cNvPr id="42" name="f185">
             <a:extLst xmlns:a="http://schemas.openxmlformats.org/drawingml/2006/main">
               <a:ext uri="{FF2B5EF4-FFF2-40B4-BE49-F238E27FC236}">
-                <a16:creationId xmlns:a16="http://schemas.microsoft.com/office/drawing/2014/main" id="{33C5751C-1092-4652-86EC-9172A5590746}"/>
+                <a16:creationId xmlns:a16="http://schemas.microsoft.com/office/drawing/2014/main" id="{4164A735-0E79-418B-BCC0-048ABFE025FA}"/>
               </a:ext>
             </a:extLst>
           </p:cNvPr>
@@ -25390,7 +25248,7 @@
           <p:cNvPr id="95" name="dim_f186">
             <a:extLst xmlns:a="http://schemas.openxmlformats.org/drawingml/2006/main">
               <a:ext uri="{FF2B5EF4-FFF2-40B4-BE49-F238E27FC236}">
-                <a16:creationId xmlns:a16="http://schemas.microsoft.com/office/drawing/2014/main" id="{339E2951-48DF-43D4-BD7B-43B9B3B04989}"/>
+                <a16:creationId xmlns:a16="http://schemas.microsoft.com/office/drawing/2014/main" id="{E621B0A4-E124-41F9-BF3F-BD26980DCE48}"/>
               </a:ext>
             </a:extLst>
           </p:cNvPr>
@@ -25421,7 +25279,7 @@
           <p:cNvPr id="43" name="f186">
             <a:extLst xmlns:a="http://schemas.openxmlformats.org/drawingml/2006/main">
               <a:ext uri="{FF2B5EF4-FFF2-40B4-BE49-F238E27FC236}">
-                <a16:creationId xmlns:a16="http://schemas.microsoft.com/office/drawing/2014/main" id="{339E2951-48DF-43D4-BD7B-43B9B3B04989}"/>
+                <a16:creationId xmlns:a16="http://schemas.microsoft.com/office/drawing/2014/main" id="{E621B0A4-E124-41F9-BF3F-BD26980DCE48}"/>
               </a:ext>
             </a:extLst>
           </p:cNvPr>
@@ -25452,7 +25310,7 @@
           <p:cNvPr id="96" name="dim_f187">
             <a:extLst xmlns:a="http://schemas.openxmlformats.org/drawingml/2006/main">
               <a:ext uri="{FF2B5EF4-FFF2-40B4-BE49-F238E27FC236}">
-                <a16:creationId xmlns:a16="http://schemas.microsoft.com/office/drawing/2014/main" id="{F637F04B-ED7D-43B3-B7E4-7E057609FC8A}"/>
+                <a16:creationId xmlns:a16="http://schemas.microsoft.com/office/drawing/2014/main" id="{7C24E027-ECAD-46F7-8DCB-9C8829F2BB4B}"/>
               </a:ext>
             </a:extLst>
           </p:cNvPr>
@@ -25483,7 +25341,7 @@
           <p:cNvPr id="44" name="f187">
             <a:extLst xmlns:a="http://schemas.openxmlformats.org/drawingml/2006/main">
               <a:ext uri="{FF2B5EF4-FFF2-40B4-BE49-F238E27FC236}">
-                <a16:creationId xmlns:a16="http://schemas.microsoft.com/office/drawing/2014/main" id="{F637F04B-ED7D-43B3-B7E4-7E057609FC8A}"/>
+                <a16:creationId xmlns:a16="http://schemas.microsoft.com/office/drawing/2014/main" id="{7C24E027-ECAD-46F7-8DCB-9C8829F2BB4B}"/>
               </a:ext>
             </a:extLst>
           </p:cNvPr>
@@ -25514,7 +25372,7 @@
           <p:cNvPr id="45" name="f188">
             <a:extLst xmlns:a="http://schemas.openxmlformats.org/drawingml/2006/main">
               <a:ext uri="{FF2B5EF4-FFF2-40B4-BE49-F238E27FC236}">
-                <a16:creationId xmlns:a16="http://schemas.microsoft.com/office/drawing/2014/main" id="{E92FACDB-EC1C-4CFF-B7F2-D7509A98A63D}"/>
+                <a16:creationId xmlns:a16="http://schemas.microsoft.com/office/drawing/2014/main" id="{F4B8E756-B76C-4B86-B251-C5461BB3DA31}"/>
               </a:ext>
             </a:extLst>
           </p:cNvPr>
@@ -25673,7 +25531,7 @@
           <p:cNvPr id="46" name="">
             <a:extLst xmlns:a="http://schemas.openxmlformats.org/drawingml/2006/main">
               <a:ext uri="{FF2B5EF4-FFF2-40B4-BE49-F238E27FC236}">
-                <a16:creationId xmlns:a16="http://schemas.microsoft.com/office/drawing/2014/main" id="{CA704290-E133-4404-879E-70F4EEEA9CA1}"/>
+                <a16:creationId xmlns:a16="http://schemas.microsoft.com/office/drawing/2014/main" id="{50F8AB88-FDD7-4FC1-AA5F-5E8306831C88}"/>
               </a:ext>
             </a:extLst>
           </p:cNvPr>
@@ -26276,7 +26134,7 @@
           <p:cNvPr id="47" name="f190">
             <a:extLst xmlns:a="http://schemas.openxmlformats.org/drawingml/2006/main">
               <a:ext uri="{FF2B5EF4-FFF2-40B4-BE49-F238E27FC236}">
-                <a16:creationId xmlns:a16="http://schemas.microsoft.com/office/drawing/2014/main" id="{8C58B910-33BF-4A9B-93DB-B86557928B71}"/>
+                <a16:creationId xmlns:a16="http://schemas.microsoft.com/office/drawing/2014/main" id="{DB013DA0-C5D0-4312-8ACB-D6EDC95AB21A}"/>
               </a:ext>
             </a:extLst>
           </p:cNvPr>
@@ -26435,7 +26293,7 @@
           <p:cNvPr id="48" name="f191">
             <a:extLst xmlns:a="http://schemas.openxmlformats.org/drawingml/2006/main">
               <a:ext uri="{FF2B5EF4-FFF2-40B4-BE49-F238E27FC236}">
-                <a16:creationId xmlns:a16="http://schemas.microsoft.com/office/drawing/2014/main" id="{DBE2DE84-1132-47EB-9CFB-DDF419284B7D}"/>
+                <a16:creationId xmlns:a16="http://schemas.microsoft.com/office/drawing/2014/main" id="{DACFD009-A1CE-4BDB-BC6C-FDFB9624D885}"/>
               </a:ext>
             </a:extLst>
           </p:cNvPr>
@@ -26615,7 +26473,7 @@
     </p:spTree>
     <p:extLst>
       <p:ext uri="{BB962C8B-B14F-4D97-AF65-F5344CB8AC3E}">
-        <p14:creationId xmlns:p14="http://schemas.microsoft.com/office/powerpoint/2010/main" val="858717008"/>
+        <p14:creationId xmlns:p14="http://schemas.microsoft.com/office/powerpoint/2010/main" val="518081371"/>
       </p:ext>
     </p:extLst>
   </p:cSld>

--- a/5g-thesis-presentation-5min/tesi-5min.pptx
+++ b/5g-thesis-presentation-5min/tesi-5min.pptx
@@ -7314,7 +7314,7 @@
                 <a:ea typeface="Arial"/>
                 <a:cs typeface="Arial"/>
               </a:rPr>
-              <a:t>IL PROBLEMA</a:t>
+              <a:t>PROBLEMA</a:t>
             </a:r>
           </a:p>
         </p:txBody>
@@ -7812,7 +7812,7 @@
         </p:nvSpPr>
         <p:spPr>
           <a:xfrm xmlns:a="http://schemas.openxmlformats.org/drawingml/2006/main">
-            <a:off x="1066800" y="2647950"/>
+            <a:off x="1066800" y="3105150"/>
             <a:ext cx="4476750" cy="476250"/>
           </a:xfrm>
           <a:prstGeom xmlns:a="http://schemas.openxmlformats.org/drawingml/2006/main" prst="rect">
@@ -7971,7 +7971,7 @@
         </p:nvSpPr>
         <p:spPr>
           <a:xfrm xmlns:a="http://schemas.openxmlformats.org/drawingml/2006/main">
-            <a:off x="9696450" y="2647950"/>
+            <a:off x="9696450" y="3105150"/>
             <a:ext cx="4476750" cy="476250"/>
           </a:xfrm>
           <a:prstGeom xmlns:a="http://schemas.openxmlformats.org/drawingml/2006/main" prst="rect">
@@ -8130,7 +8130,7 @@
         </p:nvSpPr>
         <p:spPr>
           <a:xfrm xmlns:a="http://schemas.openxmlformats.org/drawingml/2006/main">
-            <a:off x="2171700" y="3467100"/>
+            <a:off x="2171700" y="3924300"/>
             <a:ext cx="2190750" cy="2000250"/>
           </a:xfrm>
           <a:prstGeom xmlns:a="http://schemas.openxmlformats.org/drawingml/2006/main" prst="roundRect">
@@ -8165,7 +8165,7 @@
         </p:nvSpPr>
         <p:spPr>
           <a:xfrm xmlns:a="http://schemas.openxmlformats.org/drawingml/2006/main">
-            <a:off x="2609850" y="4067175"/>
+            <a:off x="2609850" y="4524375"/>
             <a:ext cx="1270635" cy="95"/>
           </a:xfrm>
           <a:prstGeom xmlns:a="http://schemas.openxmlformats.org/drawingml/2006/main" prst="line">
@@ -8196,7 +8196,7 @@
         </p:nvSpPr>
         <p:spPr>
           <a:xfrm xmlns:a="http://schemas.openxmlformats.org/drawingml/2006/main">
-            <a:off x="2609850" y="4427220"/>
+            <a:off x="2609850" y="4884420"/>
             <a:ext cx="1270635" cy="95"/>
           </a:xfrm>
           <a:prstGeom xmlns:a="http://schemas.openxmlformats.org/drawingml/2006/main" prst="line">
@@ -8227,7 +8227,7 @@
         </p:nvSpPr>
         <p:spPr>
           <a:xfrm xmlns:a="http://schemas.openxmlformats.org/drawingml/2006/main">
-            <a:off x="2609850" y="4787265"/>
+            <a:off x="2609850" y="5244465"/>
             <a:ext cx="1270635" cy="95"/>
           </a:xfrm>
           <a:prstGeom xmlns:a="http://schemas.openxmlformats.org/drawingml/2006/main" prst="line">
@@ -8258,7 +8258,7 @@
         </p:nvSpPr>
         <p:spPr>
           <a:xfrm xmlns:a="http://schemas.openxmlformats.org/drawingml/2006/main">
-            <a:off x="10629900" y="3609975"/>
+            <a:off x="10629900" y="4067175"/>
             <a:ext cx="2667000" cy="1714500"/>
           </a:xfrm>
           <a:prstGeom xmlns:a="http://schemas.openxmlformats.org/drawingml/2006/main" prst="roundRect">
@@ -8293,7 +8293,7 @@
         </p:nvSpPr>
         <p:spPr>
           <a:xfrm xmlns:a="http://schemas.openxmlformats.org/drawingml/2006/main">
-            <a:off x="10629900" y="3971925"/>
+            <a:off x="10629900" y="4429125"/>
             <a:ext cx="2667000" cy="95"/>
           </a:xfrm>
           <a:prstGeom xmlns:a="http://schemas.openxmlformats.org/drawingml/2006/main" prst="line">
@@ -8324,7 +8324,7 @@
         </p:nvSpPr>
         <p:spPr>
           <a:xfrm xmlns:a="http://schemas.openxmlformats.org/drawingml/2006/main">
-            <a:off x="10801350" y="3752850"/>
+            <a:off x="10801350" y="4210050"/>
             <a:ext cx="76200" cy="76200"/>
           </a:xfrm>
           <a:prstGeom xmlns:a="http://schemas.openxmlformats.org/drawingml/2006/main" prst="ellipse">
@@ -8357,7 +8357,7 @@
         </p:nvSpPr>
         <p:spPr>
           <a:xfrm xmlns:a="http://schemas.openxmlformats.org/drawingml/2006/main">
-            <a:off x="10991850" y="3752850"/>
+            <a:off x="10991850" y="4210050"/>
             <a:ext cx="76200" cy="76200"/>
           </a:xfrm>
           <a:prstGeom xmlns:a="http://schemas.openxmlformats.org/drawingml/2006/main" prst="ellipse">
@@ -8390,7 +8390,7 @@
         </p:nvSpPr>
         <p:spPr>
           <a:xfrm xmlns:a="http://schemas.openxmlformats.org/drawingml/2006/main">
-            <a:off x="11182350" y="3752850"/>
+            <a:off x="11182350" y="4210050"/>
             <a:ext cx="76200" cy="76200"/>
           </a:xfrm>
           <a:prstGeom xmlns:a="http://schemas.openxmlformats.org/drawingml/2006/main" prst="ellipse">
@@ -8423,7 +8423,7 @@
         </p:nvSpPr>
         <p:spPr>
           <a:xfrm xmlns:a="http://schemas.openxmlformats.org/drawingml/2006/main">
-            <a:off x="10915650" y="4238625"/>
+            <a:off x="10915650" y="4695825"/>
             <a:ext cx="2095500" cy="647700"/>
           </a:xfrm>
           <a:prstGeom xmlns:a="http://schemas.openxmlformats.org/drawingml/2006/main" prst="rect">
@@ -8582,7 +8582,7 @@
         </p:nvSpPr>
         <p:spPr>
           <a:xfrm xmlns:a="http://schemas.openxmlformats.org/drawingml/2006/main">
-            <a:off x="4657725" y="4257675"/>
+            <a:off x="4657725" y="4714875"/>
             <a:ext cx="1133475" cy="219075"/>
           </a:xfrm>
           <a:prstGeom xmlns:a="http://schemas.openxmlformats.org/drawingml/2006/main" prst="rightArrow">
@@ -8613,7 +8613,7 @@
         </p:nvSpPr>
         <p:spPr>
           <a:xfrm xmlns:a="http://schemas.openxmlformats.org/drawingml/2006/main">
-            <a:off x="9448800" y="4257675"/>
+            <a:off x="9448800" y="4714875"/>
             <a:ext cx="942975" cy="219075"/>
           </a:xfrm>
           <a:prstGeom xmlns:a="http://schemas.openxmlformats.org/drawingml/2006/main" prst="leftArrow">
@@ -8644,7 +8644,7 @@
         </p:nvSpPr>
         <p:spPr>
           <a:xfrm xmlns:a="http://schemas.openxmlformats.org/drawingml/2006/main">
-            <a:off x="5943600" y="3638550"/>
+            <a:off x="5943600" y="4095750"/>
             <a:ext cx="3352800" cy="1390650"/>
           </a:xfrm>
           <a:prstGeom xmlns:a="http://schemas.openxmlformats.org/drawingml/2006/main" prst="roundRect">
@@ -8679,7 +8679,7 @@
         </p:nvSpPr>
         <p:spPr>
           <a:xfrm xmlns:a="http://schemas.openxmlformats.org/drawingml/2006/main">
-            <a:off x="6048375" y="3867150"/>
+            <a:off x="6048375" y="4324350"/>
             <a:ext cx="3143250" cy="1047750"/>
           </a:xfrm>
           <a:prstGeom xmlns:a="http://schemas.openxmlformats.org/drawingml/2006/main" prst="rect">
@@ -8861,7 +8861,7 @@
         </p:nvSpPr>
         <p:spPr>
           <a:xfrm xmlns:a="http://schemas.openxmlformats.org/drawingml/2006/main">
-            <a:off x="5619750" y="5286375"/>
+            <a:off x="5619750" y="5743575"/>
             <a:ext cx="4000500" cy="723900"/>
           </a:xfrm>
           <a:prstGeom xmlns:a="http://schemas.openxmlformats.org/drawingml/2006/main" prst="rect">
@@ -9043,7 +9043,7 @@
         </p:nvSpPr>
         <p:spPr>
           <a:xfrm xmlns:a="http://schemas.openxmlformats.org/drawingml/2006/main">
-            <a:off x="1066800" y="5762625"/>
+            <a:off x="1066800" y="6219825"/>
             <a:ext cx="4476750" cy="381000"/>
           </a:xfrm>
           <a:prstGeom xmlns:a="http://schemas.openxmlformats.org/drawingml/2006/main" prst="rect">
@@ -9202,7 +9202,7 @@
         </p:nvSpPr>
         <p:spPr>
           <a:xfrm xmlns:a="http://schemas.openxmlformats.org/drawingml/2006/main">
-            <a:off x="9696450" y="5762625"/>
+            <a:off x="9696450" y="6219825"/>
             <a:ext cx="4476750" cy="381000"/>
           </a:xfrm>
           <a:prstGeom xmlns:a="http://schemas.openxmlformats.org/drawingml/2006/main" prst="rect">
@@ -9419,7 +9419,7 @@
         <p:spPr>
           <a:xfrm xmlns:a="http://schemas.openxmlformats.org/drawingml/2006/main">
             <a:off x="1066800" y="733997"/>
-            <a:ext cx="1401961" cy="231458"/>
+            <a:ext cx="1057573" cy="231458"/>
           </a:xfrm>
           <a:prstGeom xmlns:a="http://schemas.openxmlformats.org/drawingml/2006/main" prst="rect">
             <a:avLst/>
@@ -9438,7 +9438,7 @@
             <a:defPPr algn="l">
               <a:defRPr sz="1350" b="0">
                 <a:solidFill>
-                  <a:srgbClr val="52627B"/>
+                  <a:srgbClr val="52627b"/>
                 </a:solidFill>
                 <a:latin typeface="Arial"/>
                 <a:ea typeface="Arial"/>
@@ -9448,7 +9448,7 @@
             <a:lvl1pPr algn="l">
               <a:defRPr sz="1350" b="0">
                 <a:solidFill>
-                  <a:srgbClr val="52627B"/>
+                  <a:srgbClr val="52627b"/>
                 </a:solidFill>
                 <a:latin typeface="Arial"/>
                 <a:ea typeface="Arial"/>
@@ -9458,7 +9458,7 @@
             <a:lvl2pPr algn="l">
               <a:defRPr sz="1350" b="0">
                 <a:solidFill>
-                  <a:srgbClr val="52627B"/>
+                  <a:srgbClr val="52627b"/>
                 </a:solidFill>
                 <a:latin typeface="Arial"/>
                 <a:ea typeface="Arial"/>
@@ -9468,7 +9468,7 @@
             <a:lvl3pPr algn="l">
               <a:defRPr sz="1350" b="0">
                 <a:solidFill>
-                  <a:srgbClr val="52627B"/>
+                  <a:srgbClr val="52627b"/>
                 </a:solidFill>
                 <a:latin typeface="Arial"/>
                 <a:ea typeface="Arial"/>
@@ -9478,7 +9478,7 @@
             <a:lvl4pPr algn="l">
               <a:defRPr sz="1350" b="0">
                 <a:solidFill>
-                  <a:srgbClr val="52627B"/>
+                  <a:srgbClr val="52627b"/>
                 </a:solidFill>
                 <a:latin typeface="Arial"/>
                 <a:ea typeface="Arial"/>
@@ -9488,7 +9488,7 @@
             <a:lvl5pPr algn="l">
               <a:defRPr sz="1350" b="0">
                 <a:solidFill>
-                  <a:srgbClr val="52627B"/>
+                  <a:srgbClr val="52627b"/>
                 </a:solidFill>
                 <a:latin typeface="Arial"/>
                 <a:ea typeface="Arial"/>
@@ -9498,7 +9498,7 @@
             <a:lvl6pPr algn="l">
               <a:defRPr sz="1350" b="0">
                 <a:solidFill>
-                  <a:srgbClr val="52627B"/>
+                  <a:srgbClr val="52627b"/>
                 </a:solidFill>
                 <a:latin typeface="Arial"/>
                 <a:ea typeface="Arial"/>
@@ -9508,7 +9508,7 @@
             <a:lvl7pPr algn="l">
               <a:defRPr sz="1350" b="0">
                 <a:solidFill>
-                  <a:srgbClr val="52627B"/>
+                  <a:srgbClr val="52627b"/>
                 </a:solidFill>
                 <a:latin typeface="Arial"/>
                 <a:ea typeface="Arial"/>
@@ -9518,7 +9518,7 @@
             <a:lvl8pPr algn="l">
               <a:defRPr sz="1350" b="0">
                 <a:solidFill>
-                  <a:srgbClr val="52627B"/>
+                  <a:srgbClr val="52627b"/>
                 </a:solidFill>
                 <a:latin typeface="Arial"/>
                 <a:ea typeface="Arial"/>
@@ -9528,7 +9528,7 @@
             <a:lvl9pPr algn="l">
               <a:defRPr sz="1350" b="0">
                 <a:solidFill>
-                  <a:srgbClr val="52627B"/>
+                  <a:srgbClr val="52627b"/>
                 </a:solidFill>
                 <a:latin typeface="Arial"/>
                 <a:ea typeface="Arial"/>
@@ -9540,7 +9540,7 @@
             <a:pPr algn="l">
               <a:defRPr sz="1350" b="0">
                 <a:solidFill>
-                  <a:srgbClr val="52627B"/>
+                  <a:srgbClr val="52627b"/>
                 </a:solidFill>
                 <a:latin typeface="Arial"/>
                 <a:ea typeface="Arial"/>
@@ -9550,13 +9550,13 @@
             <a:r>
               <a:rPr sz="1350" b="0">
                 <a:solidFill>
-                  <a:srgbClr val="52627B"/>
+                  <a:srgbClr val="52627b"/>
                 </a:solidFill>
                 <a:latin typeface="Arial"/>
                 <a:ea typeface="Arial"/>
                 <a:cs typeface="Arial"/>
               </a:rPr>
-              <a:t>INTRODUZIONE</a:t>
+              <a:t>PROBLEMA</a:t>
             </a:r>
           </a:p>
         </p:txBody>
@@ -9597,7 +9597,7 @@
             <a:defPPr algn="l">
               <a:defRPr sz="1350" b="0">
                 <a:solidFill>
-                  <a:srgbClr val="52627B"/>
+                  <a:srgbClr val="52627b"/>
                 </a:solidFill>
                 <a:latin typeface="Arial"/>
                 <a:ea typeface="Arial"/>
@@ -9607,7 +9607,7 @@
             <a:lvl1pPr algn="l">
               <a:defRPr sz="1350" b="0">
                 <a:solidFill>
-                  <a:srgbClr val="52627B"/>
+                  <a:srgbClr val="52627b"/>
                 </a:solidFill>
                 <a:latin typeface="Arial"/>
                 <a:ea typeface="Arial"/>
@@ -9617,7 +9617,7 @@
             <a:lvl2pPr algn="l">
               <a:defRPr sz="1350" b="0">
                 <a:solidFill>
-                  <a:srgbClr val="52627B"/>
+                  <a:srgbClr val="52627b"/>
                 </a:solidFill>
                 <a:latin typeface="Arial"/>
                 <a:ea typeface="Arial"/>
@@ -9627,7 +9627,7 @@
             <a:lvl3pPr algn="l">
               <a:defRPr sz="1350" b="0">
                 <a:solidFill>
-                  <a:srgbClr val="52627B"/>
+                  <a:srgbClr val="52627b"/>
                 </a:solidFill>
                 <a:latin typeface="Arial"/>
                 <a:ea typeface="Arial"/>
@@ -9637,7 +9637,7 @@
             <a:lvl4pPr algn="l">
               <a:defRPr sz="1350" b="0">
                 <a:solidFill>
-                  <a:srgbClr val="52627B"/>
+                  <a:srgbClr val="52627b"/>
                 </a:solidFill>
                 <a:latin typeface="Arial"/>
                 <a:ea typeface="Arial"/>
@@ -9647,7 +9647,7 @@
             <a:lvl5pPr algn="l">
               <a:defRPr sz="1350" b="0">
                 <a:solidFill>
-                  <a:srgbClr val="52627B"/>
+                  <a:srgbClr val="52627b"/>
                 </a:solidFill>
                 <a:latin typeface="Arial"/>
                 <a:ea typeface="Arial"/>
@@ -9657,7 +9657,7 @@
             <a:lvl6pPr algn="l">
               <a:defRPr sz="1350" b="0">
                 <a:solidFill>
-                  <a:srgbClr val="52627B"/>
+                  <a:srgbClr val="52627b"/>
                 </a:solidFill>
                 <a:latin typeface="Arial"/>
                 <a:ea typeface="Arial"/>
@@ -9667,7 +9667,7 @@
             <a:lvl7pPr algn="l">
               <a:defRPr sz="1350" b="0">
                 <a:solidFill>
-                  <a:srgbClr val="52627B"/>
+                  <a:srgbClr val="52627b"/>
                 </a:solidFill>
                 <a:latin typeface="Arial"/>
                 <a:ea typeface="Arial"/>
@@ -9677,7 +9677,7 @@
             <a:lvl8pPr algn="l">
               <a:defRPr sz="1350" b="0">
                 <a:solidFill>
-                  <a:srgbClr val="52627B"/>
+                  <a:srgbClr val="52627b"/>
                 </a:solidFill>
                 <a:latin typeface="Arial"/>
                 <a:ea typeface="Arial"/>
@@ -9687,7 +9687,7 @@
             <a:lvl9pPr algn="l">
               <a:defRPr sz="1350" b="0">
                 <a:solidFill>
-                  <a:srgbClr val="52627B"/>
+                  <a:srgbClr val="52627b"/>
                 </a:solidFill>
                 <a:latin typeface="Arial"/>
                 <a:ea typeface="Arial"/>
@@ -9699,7 +9699,7 @@
             <a:pPr algn="l">
               <a:defRPr sz="1350" b="0">
                 <a:solidFill>
-                  <a:srgbClr val="52627B"/>
+                  <a:srgbClr val="52627b"/>
                 </a:solidFill>
                 <a:latin typeface="Arial"/>
                 <a:ea typeface="Arial"/>
@@ -9709,7 +9709,7 @@
             <a:r>
               <a:rPr sz="1350" b="0">
                 <a:solidFill>
-                  <a:srgbClr val="52627B"/>
+                  <a:srgbClr val="52627b"/>
                 </a:solidFill>
                 <a:latin typeface="Arial"/>
                 <a:ea typeface="Arial"/>
@@ -9896,7 +9896,7 @@
         <p:spPr>
           <a:xfrm xmlns:a="http://schemas.openxmlformats.org/drawingml/2006/main">
             <a:off x="1066800" y="1901095"/>
-            <a:ext cx="12059096" cy="347186"/>
+            <a:ext cx="10108406" cy="347186"/>
           </a:xfrm>
           <a:prstGeom xmlns:a="http://schemas.openxmlformats.org/drawingml/2006/main" prst="rect">
             <a:avLst/>
@@ -9915,7 +9915,7 @@
             <a:defPPr algn="l">
               <a:defRPr sz="2025" b="0">
                 <a:solidFill>
-                  <a:srgbClr val="52627B"/>
+                  <a:srgbClr val="52627b"/>
                 </a:solidFill>
                 <a:latin typeface="Arial"/>
                 <a:ea typeface="Arial"/>
@@ -9925,7 +9925,7 @@
             <a:lvl1pPr algn="l">
               <a:defRPr sz="2025" b="0">
                 <a:solidFill>
-                  <a:srgbClr val="52627B"/>
+                  <a:srgbClr val="52627b"/>
                 </a:solidFill>
                 <a:latin typeface="Arial"/>
                 <a:ea typeface="Arial"/>
@@ -9935,7 +9935,7 @@
             <a:lvl2pPr algn="l">
               <a:defRPr sz="2025" b="0">
                 <a:solidFill>
-                  <a:srgbClr val="52627B"/>
+                  <a:srgbClr val="52627b"/>
                 </a:solidFill>
                 <a:latin typeface="Arial"/>
                 <a:ea typeface="Arial"/>
@@ -9945,7 +9945,7 @@
             <a:lvl3pPr algn="l">
               <a:defRPr sz="2025" b="0">
                 <a:solidFill>
-                  <a:srgbClr val="52627B"/>
+                  <a:srgbClr val="52627b"/>
                 </a:solidFill>
                 <a:latin typeface="Arial"/>
                 <a:ea typeface="Arial"/>
@@ -9955,7 +9955,7 @@
             <a:lvl4pPr algn="l">
               <a:defRPr sz="2025" b="0">
                 <a:solidFill>
-                  <a:srgbClr val="52627B"/>
+                  <a:srgbClr val="52627b"/>
                 </a:solidFill>
                 <a:latin typeface="Arial"/>
                 <a:ea typeface="Arial"/>
@@ -9965,7 +9965,7 @@
             <a:lvl5pPr algn="l">
               <a:defRPr sz="2025" b="0">
                 <a:solidFill>
-                  <a:srgbClr val="52627B"/>
+                  <a:srgbClr val="52627b"/>
                 </a:solidFill>
                 <a:latin typeface="Arial"/>
                 <a:ea typeface="Arial"/>
@@ -9975,7 +9975,7 @@
             <a:lvl6pPr algn="l">
               <a:defRPr sz="2025" b="0">
                 <a:solidFill>
-                  <a:srgbClr val="52627B"/>
+                  <a:srgbClr val="52627b"/>
                 </a:solidFill>
                 <a:latin typeface="Arial"/>
                 <a:ea typeface="Arial"/>
@@ -9985,7 +9985,7 @@
             <a:lvl7pPr algn="l">
               <a:defRPr sz="2025" b="0">
                 <a:solidFill>
-                  <a:srgbClr val="52627B"/>
+                  <a:srgbClr val="52627b"/>
                 </a:solidFill>
                 <a:latin typeface="Arial"/>
                 <a:ea typeface="Arial"/>
@@ -9995,7 +9995,7 @@
             <a:lvl8pPr algn="l">
               <a:defRPr sz="2025" b="0">
                 <a:solidFill>
-                  <a:srgbClr val="52627B"/>
+                  <a:srgbClr val="52627b"/>
                 </a:solidFill>
                 <a:latin typeface="Arial"/>
                 <a:ea typeface="Arial"/>
@@ -10005,7 +10005,7 @@
             <a:lvl9pPr algn="l">
               <a:defRPr sz="2025" b="0">
                 <a:solidFill>
-                  <a:srgbClr val="52627B"/>
+                  <a:srgbClr val="52627b"/>
                 </a:solidFill>
                 <a:latin typeface="Arial"/>
                 <a:ea typeface="Arial"/>
@@ -10017,7 +10017,7 @@
             <a:pPr algn="l">
               <a:defRPr sz="2025" b="0">
                 <a:solidFill>
-                  <a:srgbClr val="52627B"/>
+                  <a:srgbClr val="52627b"/>
                 </a:solidFill>
                 <a:latin typeface="Arial"/>
                 <a:ea typeface="Arial"/>
@@ -10027,13 +10027,13 @@
             <a:r>
               <a:rPr sz="2025" b="0">
                 <a:solidFill>
-                  <a:srgbClr val="52627B"/>
+                  <a:srgbClr val="52627b"/>
                 </a:solidFill>
                 <a:latin typeface="Arial"/>
                 <a:ea typeface="Arial"/>
                 <a:cs typeface="Arial"/>
               </a:rPr>
-              <a:t>Nel 5G, la sicurezza riguarda anche le Network Functions, componenti software che comunicano tra loro.</a:t>
+              <a:t>Nel 5G, la sicurezza viene valutata tramite le Security Assurance Specification, o SCAS.</a:t>
             </a:r>
           </a:p>
         </p:txBody>
@@ -10074,7 +10074,7 @@
             <a:defPPr algn="l">
               <a:defRPr sz="2478" b="1">
                 <a:solidFill>
-                  <a:srgbClr val="4264D0"/>
+                  <a:srgbClr val="a0b1e6"/>
                 </a:solidFill>
                 <a:latin typeface="Arial"/>
                 <a:ea typeface="Arial"/>
@@ -10084,7 +10084,7 @@
             <a:lvl1pPr algn="l">
               <a:defRPr sz="2478" b="1">
                 <a:solidFill>
-                  <a:srgbClr val="4264D0"/>
+                  <a:srgbClr val="a0b1e6"/>
                 </a:solidFill>
                 <a:latin typeface="Arial"/>
                 <a:ea typeface="Arial"/>
@@ -10094,7 +10094,7 @@
             <a:lvl2pPr algn="l">
               <a:defRPr sz="2478" b="1">
                 <a:solidFill>
-                  <a:srgbClr val="4264D0"/>
+                  <a:srgbClr val="a0b1e6"/>
                 </a:solidFill>
                 <a:latin typeface="Arial"/>
                 <a:ea typeface="Arial"/>
@@ -10104,7 +10104,7 @@
             <a:lvl3pPr algn="l">
               <a:defRPr sz="2478" b="1">
                 <a:solidFill>
-                  <a:srgbClr val="4264D0"/>
+                  <a:srgbClr val="a0b1e6"/>
                 </a:solidFill>
                 <a:latin typeface="Arial"/>
                 <a:ea typeface="Arial"/>
@@ -10114,7 +10114,7 @@
             <a:lvl4pPr algn="l">
               <a:defRPr sz="2478" b="1">
                 <a:solidFill>
-                  <a:srgbClr val="4264D0"/>
+                  <a:srgbClr val="a0b1e6"/>
                 </a:solidFill>
                 <a:latin typeface="Arial"/>
                 <a:ea typeface="Arial"/>
@@ -10124,7 +10124,7 @@
             <a:lvl5pPr algn="l">
               <a:defRPr sz="2478" b="1">
                 <a:solidFill>
-                  <a:srgbClr val="4264D0"/>
+                  <a:srgbClr val="a0b1e6"/>
                 </a:solidFill>
                 <a:latin typeface="Arial"/>
                 <a:ea typeface="Arial"/>
@@ -10134,7 +10134,7 @@
             <a:lvl6pPr algn="l">
               <a:defRPr sz="2478" b="1">
                 <a:solidFill>
-                  <a:srgbClr val="4264D0"/>
+                  <a:srgbClr val="a0b1e6"/>
                 </a:solidFill>
                 <a:latin typeface="Arial"/>
                 <a:ea typeface="Arial"/>
@@ -10144,7 +10144,7 @@
             <a:lvl7pPr algn="l">
               <a:defRPr sz="2478" b="1">
                 <a:solidFill>
-                  <a:srgbClr val="4264D0"/>
+                  <a:srgbClr val="a0b1e6"/>
                 </a:solidFill>
                 <a:latin typeface="Arial"/>
                 <a:ea typeface="Arial"/>
@@ -10154,7 +10154,7 @@
             <a:lvl8pPr algn="l">
               <a:defRPr sz="2478" b="1">
                 <a:solidFill>
-                  <a:srgbClr val="4264D0"/>
+                  <a:srgbClr val="a0b1e6"/>
                 </a:solidFill>
                 <a:latin typeface="Arial"/>
                 <a:ea typeface="Arial"/>
@@ -10164,7 +10164,7 @@
             <a:lvl9pPr algn="l">
               <a:defRPr sz="2478" b="1">
                 <a:solidFill>
-                  <a:srgbClr val="4264D0"/>
+                  <a:srgbClr val="a0b1e6"/>
                 </a:solidFill>
                 <a:latin typeface="Arial"/>
                 <a:ea typeface="Arial"/>
@@ -10176,7 +10176,7 @@
             <a:pPr algn="l">
               <a:defRPr sz="2478" b="1">
                 <a:solidFill>
-                  <a:srgbClr val="4264D0"/>
+                  <a:srgbClr val="a0b1e6"/>
                 </a:solidFill>
                 <a:latin typeface="Arial"/>
                 <a:ea typeface="Arial"/>
@@ -10186,7 +10186,7 @@
             <a:r>
               <a:rPr sz="2478" b="1">
                 <a:solidFill>
-                  <a:srgbClr val="4264D0"/>
+                  <a:srgbClr val="a0b1e6"/>
                 </a:solidFill>
                 <a:latin typeface="Arial"/>
                 <a:ea typeface="Arial"/>
@@ -10551,7 +10551,7 @@
             <a:defPPr algn="l">
               <a:defRPr sz="1858" b="1">
                 <a:solidFill>
-                  <a:srgbClr val="7861AD"/>
+                  <a:srgbClr val="7861ad"/>
                 </a:solidFill>
                 <a:latin typeface="Arial"/>
                 <a:ea typeface="Arial"/>
@@ -10561,7 +10561,7 @@
             <a:lvl1pPr algn="l">
               <a:defRPr sz="1858" b="1">
                 <a:solidFill>
-                  <a:srgbClr val="7861AD"/>
+                  <a:srgbClr val="7861ad"/>
                 </a:solidFill>
                 <a:latin typeface="Arial"/>
                 <a:ea typeface="Arial"/>
@@ -10571,7 +10571,7 @@
             <a:lvl2pPr algn="l">
               <a:defRPr sz="1858" b="1">
                 <a:solidFill>
-                  <a:srgbClr val="7861AD"/>
+                  <a:srgbClr val="7861ad"/>
                 </a:solidFill>
                 <a:latin typeface="Arial"/>
                 <a:ea typeface="Arial"/>
@@ -10581,7 +10581,7 @@
             <a:lvl3pPr algn="l">
               <a:defRPr sz="1858" b="1">
                 <a:solidFill>
-                  <a:srgbClr val="7861AD"/>
+                  <a:srgbClr val="7861ad"/>
                 </a:solidFill>
                 <a:latin typeface="Arial"/>
                 <a:ea typeface="Arial"/>
@@ -10591,7 +10591,7 @@
             <a:lvl4pPr algn="l">
               <a:defRPr sz="1858" b="1">
                 <a:solidFill>
-                  <a:srgbClr val="7861AD"/>
+                  <a:srgbClr val="7861ad"/>
                 </a:solidFill>
                 <a:latin typeface="Arial"/>
                 <a:ea typeface="Arial"/>
@@ -10601,7 +10601,7 @@
             <a:lvl5pPr algn="l">
               <a:defRPr sz="1858" b="1">
                 <a:solidFill>
-                  <a:srgbClr val="7861AD"/>
+                  <a:srgbClr val="7861ad"/>
                 </a:solidFill>
                 <a:latin typeface="Arial"/>
                 <a:ea typeface="Arial"/>
@@ -10611,7 +10611,7 @@
             <a:lvl6pPr algn="l">
               <a:defRPr sz="1858" b="1">
                 <a:solidFill>
-                  <a:srgbClr val="7861AD"/>
+                  <a:srgbClr val="7861ad"/>
                 </a:solidFill>
                 <a:latin typeface="Arial"/>
                 <a:ea typeface="Arial"/>
@@ -10621,7 +10621,7 @@
             <a:lvl7pPr algn="l">
               <a:defRPr sz="1858" b="1">
                 <a:solidFill>
-                  <a:srgbClr val="7861AD"/>
+                  <a:srgbClr val="7861ad"/>
                 </a:solidFill>
                 <a:latin typeface="Arial"/>
                 <a:ea typeface="Arial"/>
@@ -10631,7 +10631,7 @@
             <a:lvl8pPr algn="l">
               <a:defRPr sz="1858" b="1">
                 <a:solidFill>
-                  <a:srgbClr val="7861AD"/>
+                  <a:srgbClr val="7861ad"/>
                 </a:solidFill>
                 <a:latin typeface="Arial"/>
                 <a:ea typeface="Arial"/>
@@ -10641,7 +10641,7 @@
             <a:lvl9pPr algn="l">
               <a:defRPr sz="1858" b="1">
                 <a:solidFill>
-                  <a:srgbClr val="7861AD"/>
+                  <a:srgbClr val="7861ad"/>
                 </a:solidFill>
                 <a:latin typeface="Arial"/>
                 <a:ea typeface="Arial"/>
@@ -10653,7 +10653,7 @@
             <a:pPr algn="l">
               <a:defRPr sz="1858" b="1">
                 <a:solidFill>
-                  <a:srgbClr val="7861AD"/>
+                  <a:srgbClr val="7861ad"/>
                 </a:solidFill>
                 <a:latin typeface="Arial"/>
                 <a:ea typeface="Arial"/>
@@ -10663,7 +10663,7 @@
             <a:r>
               <a:rPr sz="1858" b="1">
                 <a:solidFill>
-                  <a:srgbClr val="7861AD"/>
+                  <a:srgbClr val="7861ad"/>
                 </a:solidFill>
                 <a:latin typeface="Arial"/>
                 <a:ea typeface="Arial"/>
@@ -11346,7 +11346,7 @@
             <a:defPPr algn="l">
               <a:defRPr sz="2478" b="1">
                 <a:solidFill>
-                  <a:srgbClr val="7861AD"/>
+                  <a:srgbClr val="7861ad"/>
                 </a:solidFill>
                 <a:latin typeface="Arial"/>
                 <a:ea typeface="Arial"/>
@@ -11356,7 +11356,7 @@
             <a:lvl1pPr algn="l">
               <a:defRPr sz="2478" b="1">
                 <a:solidFill>
-                  <a:srgbClr val="7861AD"/>
+                  <a:srgbClr val="7861ad"/>
                 </a:solidFill>
                 <a:latin typeface="Arial"/>
                 <a:ea typeface="Arial"/>
@@ -11366,7 +11366,7 @@
             <a:lvl2pPr algn="l">
               <a:defRPr sz="2478" b="1">
                 <a:solidFill>
-                  <a:srgbClr val="7861AD"/>
+                  <a:srgbClr val="7861ad"/>
                 </a:solidFill>
                 <a:latin typeface="Arial"/>
                 <a:ea typeface="Arial"/>
@@ -11376,7 +11376,7 @@
             <a:lvl3pPr algn="l">
               <a:defRPr sz="2478" b="1">
                 <a:solidFill>
-                  <a:srgbClr val="7861AD"/>
+                  <a:srgbClr val="7861ad"/>
                 </a:solidFill>
                 <a:latin typeface="Arial"/>
                 <a:ea typeface="Arial"/>
@@ -11386,7 +11386,7 @@
             <a:lvl4pPr algn="l">
               <a:defRPr sz="2478" b="1">
                 <a:solidFill>
-                  <a:srgbClr val="7861AD"/>
+                  <a:srgbClr val="7861ad"/>
                 </a:solidFill>
                 <a:latin typeface="Arial"/>
                 <a:ea typeface="Arial"/>
@@ -11396,7 +11396,7 @@
             <a:lvl5pPr algn="l">
               <a:defRPr sz="2478" b="1">
                 <a:solidFill>
-                  <a:srgbClr val="7861AD"/>
+                  <a:srgbClr val="7861ad"/>
                 </a:solidFill>
                 <a:latin typeface="Arial"/>
                 <a:ea typeface="Arial"/>
@@ -11406,7 +11406,7 @@
             <a:lvl6pPr algn="l">
               <a:defRPr sz="2478" b="1">
                 <a:solidFill>
-                  <a:srgbClr val="7861AD"/>
+                  <a:srgbClr val="7861ad"/>
                 </a:solidFill>
                 <a:latin typeface="Arial"/>
                 <a:ea typeface="Arial"/>
@@ -11416,7 +11416,7 @@
             <a:lvl7pPr algn="l">
               <a:defRPr sz="2478" b="1">
                 <a:solidFill>
-                  <a:srgbClr val="7861AD"/>
+                  <a:srgbClr val="7861ad"/>
                 </a:solidFill>
                 <a:latin typeface="Arial"/>
                 <a:ea typeface="Arial"/>
@@ -11426,7 +11426,7 @@
             <a:lvl8pPr algn="l">
               <a:defRPr sz="2478" b="1">
                 <a:solidFill>
-                  <a:srgbClr val="7861AD"/>
+                  <a:srgbClr val="7861ad"/>
                 </a:solidFill>
                 <a:latin typeface="Arial"/>
                 <a:ea typeface="Arial"/>
@@ -11436,7 +11436,7 @@
             <a:lvl9pPr algn="l">
               <a:defRPr sz="2478" b="1">
                 <a:solidFill>
-                  <a:srgbClr val="7861AD"/>
+                  <a:srgbClr val="7861ad"/>
                 </a:solidFill>
                 <a:latin typeface="Arial"/>
                 <a:ea typeface="Arial"/>
@@ -11448,7 +11448,7 @@
             <a:pPr algn="l">
               <a:defRPr sz="2478" b="1">
                 <a:solidFill>
-                  <a:srgbClr val="7861AD"/>
+                  <a:srgbClr val="7861ad"/>
                 </a:solidFill>
                 <a:latin typeface="Arial"/>
                 <a:ea typeface="Arial"/>
@@ -11458,7 +11458,7 @@
             <a:r>
               <a:rPr sz="2478" b="1">
                 <a:solidFill>
-                  <a:srgbClr val="7861AD"/>
+                  <a:srgbClr val="7861ad"/>
                 </a:solidFill>
                 <a:latin typeface="Arial"/>
                 <a:ea typeface="Arial"/>
@@ -11823,7 +11823,7 @@
             <a:defPPr algn="l">
               <a:defRPr sz="2213" b="1">
                 <a:solidFill>
-                  <a:srgbClr val="1C2A40"/>
+                  <a:srgbClr val="8e96a2"/>
                 </a:solidFill>
                 <a:latin typeface="Arial"/>
                 <a:ea typeface="Arial"/>
@@ -11833,7 +11833,7 @@
             <a:lvl1pPr algn="l">
               <a:defRPr sz="2213" b="1">
                 <a:solidFill>
-                  <a:srgbClr val="1C2A40"/>
+                  <a:srgbClr val="8e96a2"/>
                 </a:solidFill>
                 <a:latin typeface="Arial"/>
                 <a:ea typeface="Arial"/>
@@ -11843,7 +11843,7 @@
             <a:lvl2pPr algn="l">
               <a:defRPr sz="2213" b="1">
                 <a:solidFill>
-                  <a:srgbClr val="1C2A40"/>
+                  <a:srgbClr val="8e96a2"/>
                 </a:solidFill>
                 <a:latin typeface="Arial"/>
                 <a:ea typeface="Arial"/>
@@ -11853,7 +11853,7 @@
             <a:lvl3pPr algn="l">
               <a:defRPr sz="2213" b="1">
                 <a:solidFill>
-                  <a:srgbClr val="1C2A40"/>
+                  <a:srgbClr val="8e96a2"/>
                 </a:solidFill>
                 <a:latin typeface="Arial"/>
                 <a:ea typeface="Arial"/>
@@ -11863,7 +11863,7 @@
             <a:lvl4pPr algn="l">
               <a:defRPr sz="2213" b="1">
                 <a:solidFill>
-                  <a:srgbClr val="1C2A40"/>
+                  <a:srgbClr val="8e96a2"/>
                 </a:solidFill>
                 <a:latin typeface="Arial"/>
                 <a:ea typeface="Arial"/>
@@ -11873,7 +11873,7 @@
             <a:lvl5pPr algn="l">
               <a:defRPr sz="2213" b="1">
                 <a:solidFill>
-                  <a:srgbClr val="1C2A40"/>
+                  <a:srgbClr val="8e96a2"/>
                 </a:solidFill>
                 <a:latin typeface="Arial"/>
                 <a:ea typeface="Arial"/>
@@ -11883,7 +11883,7 @@
             <a:lvl6pPr algn="l">
               <a:defRPr sz="2213" b="1">
                 <a:solidFill>
-                  <a:srgbClr val="1C2A40"/>
+                  <a:srgbClr val="8e96a2"/>
                 </a:solidFill>
                 <a:latin typeface="Arial"/>
                 <a:ea typeface="Arial"/>
@@ -11893,7 +11893,7 @@
             <a:lvl7pPr algn="l">
               <a:defRPr sz="2213" b="1">
                 <a:solidFill>
-                  <a:srgbClr val="1C2A40"/>
+                  <a:srgbClr val="8e96a2"/>
                 </a:solidFill>
                 <a:latin typeface="Arial"/>
                 <a:ea typeface="Arial"/>
@@ -11903,7 +11903,7 @@
             <a:lvl8pPr algn="l">
               <a:defRPr sz="2213" b="1">
                 <a:solidFill>
-                  <a:srgbClr val="1C2A40"/>
+                  <a:srgbClr val="8e96a2"/>
                 </a:solidFill>
                 <a:latin typeface="Arial"/>
                 <a:ea typeface="Arial"/>
@@ -11913,7 +11913,7 @@
             <a:lvl9pPr algn="l">
               <a:defRPr sz="2213" b="1">
                 <a:solidFill>
-                  <a:srgbClr val="1C2A40"/>
+                  <a:srgbClr val="8e96a2"/>
                 </a:solidFill>
                 <a:latin typeface="Arial"/>
                 <a:ea typeface="Arial"/>
@@ -11925,7 +11925,7 @@
             <a:pPr algn="l">
               <a:defRPr sz="2213" b="1">
                 <a:solidFill>
-                  <a:srgbClr val="1C2A40"/>
+                  <a:srgbClr val="8e96a2"/>
                 </a:solidFill>
                 <a:latin typeface="Arial"/>
                 <a:ea typeface="Arial"/>
@@ -11935,7 +11935,7 @@
             <a:r>
               <a:rPr sz="2213" b="1">
                 <a:solidFill>
-                  <a:srgbClr val="1C2A40"/>
+                  <a:srgbClr val="8e96a2"/>
                 </a:solidFill>
                 <a:latin typeface="Arial"/>
                 <a:ea typeface="Arial"/>
@@ -11982,7 +11982,7 @@
             <a:defPPr algn="l">
               <a:defRPr sz="2213" b="1">
                 <a:solidFill>
-                  <a:srgbClr val="1C2A40"/>
+                  <a:srgbClr val="8e96a2"/>
                 </a:solidFill>
                 <a:latin typeface="Arial"/>
                 <a:ea typeface="Arial"/>
@@ -11992,7 +11992,7 @@
             <a:lvl1pPr algn="l">
               <a:defRPr sz="2213" b="1">
                 <a:solidFill>
-                  <a:srgbClr val="1C2A40"/>
+                  <a:srgbClr val="8e96a2"/>
                 </a:solidFill>
                 <a:latin typeface="Arial"/>
                 <a:ea typeface="Arial"/>
@@ -12002,7 +12002,7 @@
             <a:lvl2pPr algn="l">
               <a:defRPr sz="2213" b="1">
                 <a:solidFill>
-                  <a:srgbClr val="1C2A40"/>
+                  <a:srgbClr val="8e96a2"/>
                 </a:solidFill>
                 <a:latin typeface="Arial"/>
                 <a:ea typeface="Arial"/>
@@ -12012,7 +12012,7 @@
             <a:lvl3pPr algn="l">
               <a:defRPr sz="2213" b="1">
                 <a:solidFill>
-                  <a:srgbClr val="1C2A40"/>
+                  <a:srgbClr val="8e96a2"/>
                 </a:solidFill>
                 <a:latin typeface="Arial"/>
                 <a:ea typeface="Arial"/>
@@ -12022,7 +12022,7 @@
             <a:lvl4pPr algn="l">
               <a:defRPr sz="2213" b="1">
                 <a:solidFill>
-                  <a:srgbClr val="1C2A40"/>
+                  <a:srgbClr val="8e96a2"/>
                 </a:solidFill>
                 <a:latin typeface="Arial"/>
                 <a:ea typeface="Arial"/>
@@ -12032,7 +12032,7 @@
             <a:lvl5pPr algn="l">
               <a:defRPr sz="2213" b="1">
                 <a:solidFill>
-                  <a:srgbClr val="1C2A40"/>
+                  <a:srgbClr val="8e96a2"/>
                 </a:solidFill>
                 <a:latin typeface="Arial"/>
                 <a:ea typeface="Arial"/>
@@ -12042,7 +12042,7 @@
             <a:lvl6pPr algn="l">
               <a:defRPr sz="2213" b="1">
                 <a:solidFill>
-                  <a:srgbClr val="1C2A40"/>
+                  <a:srgbClr val="8e96a2"/>
                 </a:solidFill>
                 <a:latin typeface="Arial"/>
                 <a:ea typeface="Arial"/>
@@ -12052,7 +12052,7 @@
             <a:lvl7pPr algn="l">
               <a:defRPr sz="2213" b="1">
                 <a:solidFill>
-                  <a:srgbClr val="1C2A40"/>
+                  <a:srgbClr val="8e96a2"/>
                 </a:solidFill>
                 <a:latin typeface="Arial"/>
                 <a:ea typeface="Arial"/>
@@ -12062,7 +12062,7 @@
             <a:lvl8pPr algn="l">
               <a:defRPr sz="2213" b="1">
                 <a:solidFill>
-                  <a:srgbClr val="1C2A40"/>
+                  <a:srgbClr val="8e96a2"/>
                 </a:solidFill>
                 <a:latin typeface="Arial"/>
                 <a:ea typeface="Arial"/>
@@ -12072,7 +12072,7 @@
             <a:lvl9pPr algn="l">
               <a:defRPr sz="2213" b="1">
                 <a:solidFill>
-                  <a:srgbClr val="1C2A40"/>
+                  <a:srgbClr val="8e96a2"/>
                 </a:solidFill>
                 <a:latin typeface="Arial"/>
                 <a:ea typeface="Arial"/>
@@ -12084,7 +12084,7 @@
             <a:pPr algn="l">
               <a:defRPr sz="2213" b="1">
                 <a:solidFill>
-                  <a:srgbClr val="1C2A40"/>
+                  <a:srgbClr val="8e96a2"/>
                 </a:solidFill>
                 <a:latin typeface="Arial"/>
                 <a:ea typeface="Arial"/>
@@ -12094,7 +12094,7 @@
             <a:r>
               <a:rPr sz="2213" b="1">
                 <a:solidFill>
-                  <a:srgbClr val="1C2A40"/>
+                  <a:srgbClr val="8e96a2"/>
                 </a:solidFill>
                 <a:latin typeface="Arial"/>
                 <a:ea typeface="Arial"/>
@@ -12141,7 +12141,7 @@
             <a:defPPr algn="l">
               <a:defRPr sz="1858" b="1">
                 <a:solidFill>
-                  <a:srgbClr val="278766"/>
+                  <a:srgbClr val="93c2b4"/>
                 </a:solidFill>
                 <a:latin typeface="Arial"/>
                 <a:ea typeface="Arial"/>
@@ -12151,7 +12151,7 @@
             <a:lvl1pPr algn="l">
               <a:defRPr sz="1858" b="1">
                 <a:solidFill>
-                  <a:srgbClr val="278766"/>
+                  <a:srgbClr val="93c2b4"/>
                 </a:solidFill>
                 <a:latin typeface="Arial"/>
                 <a:ea typeface="Arial"/>
@@ -12161,7 +12161,7 @@
             <a:lvl2pPr algn="l">
               <a:defRPr sz="1858" b="1">
                 <a:solidFill>
-                  <a:srgbClr val="278766"/>
+                  <a:srgbClr val="93c2b4"/>
                 </a:solidFill>
                 <a:latin typeface="Arial"/>
                 <a:ea typeface="Arial"/>
@@ -12171,7 +12171,7 @@
             <a:lvl3pPr algn="l">
               <a:defRPr sz="1858" b="1">
                 <a:solidFill>
-                  <a:srgbClr val="278766"/>
+                  <a:srgbClr val="93c2b4"/>
                 </a:solidFill>
                 <a:latin typeface="Arial"/>
                 <a:ea typeface="Arial"/>
@@ -12181,7 +12181,7 @@
             <a:lvl4pPr algn="l">
               <a:defRPr sz="1858" b="1">
                 <a:solidFill>
-                  <a:srgbClr val="278766"/>
+                  <a:srgbClr val="93c2b4"/>
                 </a:solidFill>
                 <a:latin typeface="Arial"/>
                 <a:ea typeface="Arial"/>
@@ -12191,7 +12191,7 @@
             <a:lvl5pPr algn="l">
               <a:defRPr sz="1858" b="1">
                 <a:solidFill>
-                  <a:srgbClr val="278766"/>
+                  <a:srgbClr val="93c2b4"/>
                 </a:solidFill>
                 <a:latin typeface="Arial"/>
                 <a:ea typeface="Arial"/>
@@ -12201,7 +12201,7 @@
             <a:lvl6pPr algn="l">
               <a:defRPr sz="1858" b="1">
                 <a:solidFill>
-                  <a:srgbClr val="278766"/>
+                  <a:srgbClr val="93c2b4"/>
                 </a:solidFill>
                 <a:latin typeface="Arial"/>
                 <a:ea typeface="Arial"/>
@@ -12211,7 +12211,7 @@
             <a:lvl7pPr algn="l">
               <a:defRPr sz="1858" b="1">
                 <a:solidFill>
-                  <a:srgbClr val="278766"/>
+                  <a:srgbClr val="93c2b4"/>
                 </a:solidFill>
                 <a:latin typeface="Arial"/>
                 <a:ea typeface="Arial"/>
@@ -12221,7 +12221,7 @@
             <a:lvl8pPr algn="l">
               <a:defRPr sz="1858" b="1">
                 <a:solidFill>
-                  <a:srgbClr val="278766"/>
+                  <a:srgbClr val="93c2b4"/>
                 </a:solidFill>
                 <a:latin typeface="Arial"/>
                 <a:ea typeface="Arial"/>
@@ -12231,7 +12231,7 @@
             <a:lvl9pPr algn="l">
               <a:defRPr sz="1858" b="1">
                 <a:solidFill>
-                  <a:srgbClr val="278766"/>
+                  <a:srgbClr val="93c2b4"/>
                 </a:solidFill>
                 <a:latin typeface="Arial"/>
                 <a:ea typeface="Arial"/>
@@ -12243,7 +12243,7 @@
             <a:pPr algn="l">
               <a:defRPr sz="1858" b="1">
                 <a:solidFill>
-                  <a:srgbClr val="278766"/>
+                  <a:srgbClr val="93c2b4"/>
                 </a:solidFill>
                 <a:latin typeface="Arial"/>
                 <a:ea typeface="Arial"/>
@@ -12253,7 +12253,7 @@
             <a:r>
               <a:rPr sz="1858" b="1">
                 <a:solidFill>
-                  <a:srgbClr val="278766"/>
+                  <a:srgbClr val="93c2b4"/>
                 </a:solidFill>
                 <a:latin typeface="Arial"/>
                 <a:ea typeface="Arial"/>
@@ -12300,7 +12300,7 @@
             <a:defPPr algn="l">
               <a:defRPr sz="1858" b="1">
                 <a:solidFill>
-                  <a:srgbClr val="7861AD"/>
+                  <a:srgbClr val="b9b0d5"/>
                 </a:solidFill>
                 <a:latin typeface="Arial"/>
                 <a:ea typeface="Arial"/>
@@ -12310,7 +12310,7 @@
             <a:lvl1pPr algn="l">
               <a:defRPr sz="1858" b="1">
                 <a:solidFill>
-                  <a:srgbClr val="7861AD"/>
+                  <a:srgbClr val="b9b0d5"/>
                 </a:solidFill>
                 <a:latin typeface="Arial"/>
                 <a:ea typeface="Arial"/>
@@ -12320,7 +12320,7 @@
             <a:lvl2pPr algn="l">
               <a:defRPr sz="1858" b="1">
                 <a:solidFill>
-                  <a:srgbClr val="7861AD"/>
+                  <a:srgbClr val="b9b0d5"/>
                 </a:solidFill>
                 <a:latin typeface="Arial"/>
                 <a:ea typeface="Arial"/>
@@ -12330,7 +12330,7 @@
             <a:lvl3pPr algn="l">
               <a:defRPr sz="1858" b="1">
                 <a:solidFill>
-                  <a:srgbClr val="7861AD"/>
+                  <a:srgbClr val="b9b0d5"/>
                 </a:solidFill>
                 <a:latin typeface="Arial"/>
                 <a:ea typeface="Arial"/>
@@ -12340,7 +12340,7 @@
             <a:lvl4pPr algn="l">
               <a:defRPr sz="1858" b="1">
                 <a:solidFill>
-                  <a:srgbClr val="7861AD"/>
+                  <a:srgbClr val="b9b0d5"/>
                 </a:solidFill>
                 <a:latin typeface="Arial"/>
                 <a:ea typeface="Arial"/>
@@ -12350,7 +12350,7 @@
             <a:lvl5pPr algn="l">
               <a:defRPr sz="1858" b="1">
                 <a:solidFill>
-                  <a:srgbClr val="7861AD"/>
+                  <a:srgbClr val="b9b0d5"/>
                 </a:solidFill>
                 <a:latin typeface="Arial"/>
                 <a:ea typeface="Arial"/>
@@ -12360,7 +12360,7 @@
             <a:lvl6pPr algn="l">
               <a:defRPr sz="1858" b="1">
                 <a:solidFill>
-                  <a:srgbClr val="7861AD"/>
+                  <a:srgbClr val="b9b0d5"/>
                 </a:solidFill>
                 <a:latin typeface="Arial"/>
                 <a:ea typeface="Arial"/>
@@ -12370,7 +12370,7 @@
             <a:lvl7pPr algn="l">
               <a:defRPr sz="1858" b="1">
                 <a:solidFill>
-                  <a:srgbClr val="7861AD"/>
+                  <a:srgbClr val="b9b0d5"/>
                 </a:solidFill>
                 <a:latin typeface="Arial"/>
                 <a:ea typeface="Arial"/>
@@ -12380,7 +12380,7 @@
             <a:lvl8pPr algn="l">
               <a:defRPr sz="1858" b="1">
                 <a:solidFill>
-                  <a:srgbClr val="7861AD"/>
+                  <a:srgbClr val="b9b0d5"/>
                 </a:solidFill>
                 <a:latin typeface="Arial"/>
                 <a:ea typeface="Arial"/>
@@ -12390,7 +12390,7 @@
             <a:lvl9pPr algn="l">
               <a:defRPr sz="1858" b="1">
                 <a:solidFill>
-                  <a:srgbClr val="7861AD"/>
+                  <a:srgbClr val="b9b0d5"/>
                 </a:solidFill>
                 <a:latin typeface="Arial"/>
                 <a:ea typeface="Arial"/>
@@ -12402,7 +12402,7 @@
             <a:pPr algn="l">
               <a:defRPr sz="1858" b="1">
                 <a:solidFill>
-                  <a:srgbClr val="7861AD"/>
+                  <a:srgbClr val="b9b0d5"/>
                 </a:solidFill>
                 <a:latin typeface="Arial"/>
                 <a:ea typeface="Arial"/>
@@ -12412,7 +12412,7 @@
             <a:r>
               <a:rPr sz="1858" b="1">
                 <a:solidFill>
-                  <a:srgbClr val="7861AD"/>
+                  <a:srgbClr val="b9b0d5"/>
                 </a:solidFill>
                 <a:latin typeface="Arial"/>
                 <a:ea typeface="Arial"/>
@@ -12459,7 +12459,7 @@
             <a:defPPr algn="l">
               <a:defRPr sz="1858" b="1">
                 <a:solidFill>
-                  <a:srgbClr val="7861AD"/>
+                  <a:srgbClr val="b9b0d5"/>
                 </a:solidFill>
                 <a:latin typeface="Arial"/>
                 <a:ea typeface="Arial"/>
@@ -12469,7 +12469,7 @@
             <a:lvl1pPr algn="l">
               <a:defRPr sz="1858" b="1">
                 <a:solidFill>
-                  <a:srgbClr val="7861AD"/>
+                  <a:srgbClr val="b9b0d5"/>
                 </a:solidFill>
                 <a:latin typeface="Arial"/>
                 <a:ea typeface="Arial"/>
@@ -12479,7 +12479,7 @@
             <a:lvl2pPr algn="l">
               <a:defRPr sz="1858" b="1">
                 <a:solidFill>
-                  <a:srgbClr val="7861AD"/>
+                  <a:srgbClr val="b9b0d5"/>
                 </a:solidFill>
                 <a:latin typeface="Arial"/>
                 <a:ea typeface="Arial"/>
@@ -12489,7 +12489,7 @@
             <a:lvl3pPr algn="l">
               <a:defRPr sz="1858" b="1">
                 <a:solidFill>
-                  <a:srgbClr val="7861AD"/>
+                  <a:srgbClr val="b9b0d5"/>
                 </a:solidFill>
                 <a:latin typeface="Arial"/>
                 <a:ea typeface="Arial"/>
@@ -12499,7 +12499,7 @@
             <a:lvl4pPr algn="l">
               <a:defRPr sz="1858" b="1">
                 <a:solidFill>
-                  <a:srgbClr val="7861AD"/>
+                  <a:srgbClr val="b9b0d5"/>
                 </a:solidFill>
                 <a:latin typeface="Arial"/>
                 <a:ea typeface="Arial"/>
@@ -12509,7 +12509,7 @@
             <a:lvl5pPr algn="l">
               <a:defRPr sz="1858" b="1">
                 <a:solidFill>
-                  <a:srgbClr val="7861AD"/>
+                  <a:srgbClr val="b9b0d5"/>
                 </a:solidFill>
                 <a:latin typeface="Arial"/>
                 <a:ea typeface="Arial"/>
@@ -12519,7 +12519,7 @@
             <a:lvl6pPr algn="l">
               <a:defRPr sz="1858" b="1">
                 <a:solidFill>
-                  <a:srgbClr val="7861AD"/>
+                  <a:srgbClr val="b9b0d5"/>
                 </a:solidFill>
                 <a:latin typeface="Arial"/>
                 <a:ea typeface="Arial"/>
@@ -12529,7 +12529,7 @@
             <a:lvl7pPr algn="l">
               <a:defRPr sz="1858" b="1">
                 <a:solidFill>
-                  <a:srgbClr val="7861AD"/>
+                  <a:srgbClr val="b9b0d5"/>
                 </a:solidFill>
                 <a:latin typeface="Arial"/>
                 <a:ea typeface="Arial"/>
@@ -12539,7 +12539,7 @@
             <a:lvl8pPr algn="l">
               <a:defRPr sz="1858" b="1">
                 <a:solidFill>
-                  <a:srgbClr val="7861AD"/>
+                  <a:srgbClr val="b9b0d5"/>
                 </a:solidFill>
                 <a:latin typeface="Arial"/>
                 <a:ea typeface="Arial"/>
@@ -12549,7 +12549,7 @@
             <a:lvl9pPr algn="l">
               <a:defRPr sz="1858" b="1">
                 <a:solidFill>
-                  <a:srgbClr val="7861AD"/>
+                  <a:srgbClr val="b9b0d5"/>
                 </a:solidFill>
                 <a:latin typeface="Arial"/>
                 <a:ea typeface="Arial"/>
@@ -12561,7 +12561,7 @@
             <a:pPr algn="l">
               <a:defRPr sz="1858" b="1">
                 <a:solidFill>
-                  <a:srgbClr val="7861AD"/>
+                  <a:srgbClr val="b9b0d5"/>
                 </a:solidFill>
                 <a:latin typeface="Arial"/>
                 <a:ea typeface="Arial"/>
@@ -12571,7 +12571,7 @@
             <a:r>
               <a:rPr sz="1858" b="1">
                 <a:solidFill>
-                  <a:srgbClr val="7861AD"/>
+                  <a:srgbClr val="b9b0d5"/>
                 </a:solidFill>
                 <a:latin typeface="Arial"/>
                 <a:ea typeface="Arial"/>
@@ -12618,7 +12618,7 @@
             <a:defPPr algn="l">
               <a:defRPr sz="2213" b="1">
                 <a:solidFill>
-                  <a:srgbClr val="1C2A40"/>
+                  <a:srgbClr val="8e96a2"/>
                 </a:solidFill>
                 <a:latin typeface="Arial"/>
                 <a:ea typeface="Arial"/>
@@ -12628,7 +12628,7 @@
             <a:lvl1pPr algn="l">
               <a:defRPr sz="2213" b="1">
                 <a:solidFill>
-                  <a:srgbClr val="1C2A40"/>
+                  <a:srgbClr val="8e96a2"/>
                 </a:solidFill>
                 <a:latin typeface="Arial"/>
                 <a:ea typeface="Arial"/>
@@ -12638,7 +12638,7 @@
             <a:lvl2pPr algn="l">
               <a:defRPr sz="2213" b="1">
                 <a:solidFill>
-                  <a:srgbClr val="1C2A40"/>
+                  <a:srgbClr val="8e96a2"/>
                 </a:solidFill>
                 <a:latin typeface="Arial"/>
                 <a:ea typeface="Arial"/>
@@ -12648,7 +12648,7 @@
             <a:lvl3pPr algn="l">
               <a:defRPr sz="2213" b="1">
                 <a:solidFill>
-                  <a:srgbClr val="1C2A40"/>
+                  <a:srgbClr val="8e96a2"/>
                 </a:solidFill>
                 <a:latin typeface="Arial"/>
                 <a:ea typeface="Arial"/>
@@ -12658,7 +12658,7 @@
             <a:lvl4pPr algn="l">
               <a:defRPr sz="2213" b="1">
                 <a:solidFill>
-                  <a:srgbClr val="1C2A40"/>
+                  <a:srgbClr val="8e96a2"/>
                 </a:solidFill>
                 <a:latin typeface="Arial"/>
                 <a:ea typeface="Arial"/>
@@ -12668,7 +12668,7 @@
             <a:lvl5pPr algn="l">
               <a:defRPr sz="2213" b="1">
                 <a:solidFill>
-                  <a:srgbClr val="1C2A40"/>
+                  <a:srgbClr val="8e96a2"/>
                 </a:solidFill>
                 <a:latin typeface="Arial"/>
                 <a:ea typeface="Arial"/>
@@ -12678,7 +12678,7 @@
             <a:lvl6pPr algn="l">
               <a:defRPr sz="2213" b="1">
                 <a:solidFill>
-                  <a:srgbClr val="1C2A40"/>
+                  <a:srgbClr val="8e96a2"/>
                 </a:solidFill>
                 <a:latin typeface="Arial"/>
                 <a:ea typeface="Arial"/>
@@ -12688,7 +12688,7 @@
             <a:lvl7pPr algn="l">
               <a:defRPr sz="2213" b="1">
                 <a:solidFill>
-                  <a:srgbClr val="1C2A40"/>
+                  <a:srgbClr val="8e96a2"/>
                 </a:solidFill>
                 <a:latin typeface="Arial"/>
                 <a:ea typeface="Arial"/>
@@ -12698,7 +12698,7 @@
             <a:lvl8pPr algn="l">
               <a:defRPr sz="2213" b="1">
                 <a:solidFill>
-                  <a:srgbClr val="1C2A40"/>
+                  <a:srgbClr val="8e96a2"/>
                 </a:solidFill>
                 <a:latin typeface="Arial"/>
                 <a:ea typeface="Arial"/>
@@ -12708,7 +12708,7 @@
             <a:lvl9pPr algn="l">
               <a:defRPr sz="2213" b="1">
                 <a:solidFill>
-                  <a:srgbClr val="1C2A40"/>
+                  <a:srgbClr val="8e96a2"/>
                 </a:solidFill>
                 <a:latin typeface="Arial"/>
                 <a:ea typeface="Arial"/>
@@ -12720,7 +12720,7 @@
             <a:pPr algn="l">
               <a:defRPr sz="2213" b="1">
                 <a:solidFill>
-                  <a:srgbClr val="1C2A40"/>
+                  <a:srgbClr val="8e96a2"/>
                 </a:solidFill>
                 <a:latin typeface="Arial"/>
                 <a:ea typeface="Arial"/>
@@ -12730,7 +12730,7 @@
             <a:r>
               <a:rPr sz="2213" b="1">
                 <a:solidFill>
-                  <a:srgbClr val="1C2A40"/>
+                  <a:srgbClr val="8e96a2"/>
                 </a:solidFill>
                 <a:latin typeface="Arial"/>
                 <a:ea typeface="Arial"/>
